--- a/production/ACT_2.pptx
+++ b/production/ACT_2.pptx
@@ -2,27 +2,27 @@
 <file path=ppt/presentation.xml><?xml version="1.0" encoding="utf-8"?>
 <p:presentation xmlns:p="http://schemas.openxmlformats.org/presentationml/2006/main">
   <p:sldMasterIdLst>
-    <p:sldMasterId xmlns:r="http://schemas.openxmlformats.org/officeDocument/2006/relationships" id="2147483648" r:id="R5113b78dc4d147b5"/>
+    <p:sldMasterId xmlns:r="http://schemas.openxmlformats.org/officeDocument/2006/relationships" id="2147483648" r:id="Rb15b982a934f4095"/>
   </p:sldMasterIdLst>
   <p:notesMasterIdLst>
-    <p:notesMasterId xmlns:r="http://schemas.openxmlformats.org/officeDocument/2006/relationships" r:id="R9f4b3b6fe65a40e2"/>
+    <p:notesMasterId xmlns:r="http://schemas.openxmlformats.org/officeDocument/2006/relationships" r:id="Rd5c6840128ae4088"/>
   </p:notesMasterIdLst>
   <p:sldIdLst>
-    <p:sldId xmlns:r="http://schemas.openxmlformats.org/officeDocument/2006/relationships" id="256" r:id="R717225c4fe1748e2"/>
-    <p:sldId xmlns:r="http://schemas.openxmlformats.org/officeDocument/2006/relationships" id="257" r:id="R97350861aeaf41e6"/>
-    <p:sldId xmlns:r="http://schemas.openxmlformats.org/officeDocument/2006/relationships" id="258" r:id="R4a54bd46b08748f3"/>
-    <p:sldId xmlns:r="http://schemas.openxmlformats.org/officeDocument/2006/relationships" id="259" r:id="Rfbd9c22129cb4696"/>
-    <p:sldId xmlns:r="http://schemas.openxmlformats.org/officeDocument/2006/relationships" id="260" r:id="Red50e3395b174e8b"/>
-    <p:sldId xmlns:r="http://schemas.openxmlformats.org/officeDocument/2006/relationships" id="261" r:id="R8a28ae5f96c54105"/>
-    <p:sldId xmlns:r="http://schemas.openxmlformats.org/officeDocument/2006/relationships" id="262" r:id="R0e932e95d23f4a9d"/>
-    <p:sldId xmlns:r="http://schemas.openxmlformats.org/officeDocument/2006/relationships" id="263" r:id="R85e059188e384cb5"/>
-    <p:sldId xmlns:r="http://schemas.openxmlformats.org/officeDocument/2006/relationships" id="264" r:id="Reac93204576342e9"/>
-    <p:sldId xmlns:r="http://schemas.openxmlformats.org/officeDocument/2006/relationships" id="265" r:id="Ra65ea4633ba047f5"/>
-    <p:sldId xmlns:r="http://schemas.openxmlformats.org/officeDocument/2006/relationships" id="266" r:id="R54ff1bfdc3774a9c"/>
-    <p:sldId xmlns:r="http://schemas.openxmlformats.org/officeDocument/2006/relationships" id="267" r:id="R513ec140eea94c2d"/>
-    <p:sldId xmlns:r="http://schemas.openxmlformats.org/officeDocument/2006/relationships" id="268" r:id="R6caf4d6ccd404371"/>
-    <p:sldId xmlns:r="http://schemas.openxmlformats.org/officeDocument/2006/relationships" id="269" r:id="Rac698121b357450a"/>
-    <p:sldId xmlns:r="http://schemas.openxmlformats.org/officeDocument/2006/relationships" id="270" r:id="R7da71e77c8b048f9"/>
+    <p:sldId xmlns:r="http://schemas.openxmlformats.org/officeDocument/2006/relationships" id="256" r:id="Rf9aa51abf9e64336"/>
+    <p:sldId xmlns:r="http://schemas.openxmlformats.org/officeDocument/2006/relationships" id="257" r:id="Re3842fe5fc174b83"/>
+    <p:sldId xmlns:r="http://schemas.openxmlformats.org/officeDocument/2006/relationships" id="258" r:id="R93135c02e94e4e1d"/>
+    <p:sldId xmlns:r="http://schemas.openxmlformats.org/officeDocument/2006/relationships" id="259" r:id="Ra107381e95824a91"/>
+    <p:sldId xmlns:r="http://schemas.openxmlformats.org/officeDocument/2006/relationships" id="260" r:id="R71f97b8b620343db"/>
+    <p:sldId xmlns:r="http://schemas.openxmlformats.org/officeDocument/2006/relationships" id="261" r:id="R77bedacb35834aab"/>
+    <p:sldId xmlns:r="http://schemas.openxmlformats.org/officeDocument/2006/relationships" id="262" r:id="Rf346991e28fb4917"/>
+    <p:sldId xmlns:r="http://schemas.openxmlformats.org/officeDocument/2006/relationships" id="263" r:id="R62b6b02fddb847ed"/>
+    <p:sldId xmlns:r="http://schemas.openxmlformats.org/officeDocument/2006/relationships" id="264" r:id="Ra60d46dc667a4ac1"/>
+    <p:sldId xmlns:r="http://schemas.openxmlformats.org/officeDocument/2006/relationships" id="265" r:id="R48a45b7516854c9b"/>
+    <p:sldId xmlns:r="http://schemas.openxmlformats.org/officeDocument/2006/relationships" id="266" r:id="R158325c94c3b4012"/>
+    <p:sldId xmlns:r="http://schemas.openxmlformats.org/officeDocument/2006/relationships" id="267" r:id="R2ebd43d471eb4f3e"/>
+    <p:sldId xmlns:r="http://schemas.openxmlformats.org/officeDocument/2006/relationships" id="268" r:id="R4e6516a9b764438c"/>
+    <p:sldId xmlns:r="http://schemas.openxmlformats.org/officeDocument/2006/relationships" id="269" r:id="R3293ac5b97f7429f"/>
+    <p:sldId xmlns:r="http://schemas.openxmlformats.org/officeDocument/2006/relationships" id="270" r:id="R6ea4cbd327444238"/>
   </p:sldIdLst>
   <p:sldSz cx="12192000" cy="6858000"/>
   <p:notesSz cx="6858000" cy="9144000"/>
@@ -806,7 +806,7 @@
           </a:p>
           <a:p xmlns:a="http://schemas.openxmlformats.org/drawingml/2006/main">
             <a:r>
-              <a:t>Opening Question: “무엇을 항상 읽고, 무엇을 필요할 때 찾게 할까?”</a:t>
+              <a:t>Opening Question: “그 경로의 출발점인 Core에는 무엇을 남길까?”</a:t>
             </a:r>
           </a:p>
           <a:p xmlns:a="http://schemas.openxmlformats.org/drawingml/2006/main">
@@ -826,7 +826,7 @@
           </a:p>
           <a:p xmlns:a="http://schemas.openxmlformats.org/drawingml/2006/main">
             <a:r>
-              <a:t>1. (0:00–1:00) 왼쪽 기본 안내의 목적, 상시 제약, 상세 정보 위치를 읽는 순서대로 가리킨다.</a:t>
+              <a:t>1. (0:00–1:00) 앞 장에서 본 탐색 경로의 출발점에 초점을 맞춘다. 왼쪽 기본 안내에 남길 목적, 상시 제약, 상세 정보 위치를 읽는 순서대로 가리킨다.</a:t>
             </a:r>
           </a:p>
           <a:p xmlns:a="http://schemas.openxmlformats.org/drawingml/2006/main">
@@ -1971,12 +1971,12 @@
           </a:p>
           <a:p xmlns:a="http://schemas.openxmlformats.org/drawingml/2006/main">
             <a:r>
-              <a:t>2. (1:00–3:00 / Demo) architecture는 둘 다 읽었고 testing은 A의 최종 실행에서만 읽었다고 확인한다. B는 설정·README·source도 확인했다. A의 더 넓은 읽기와 실행 간 변동도 남아 있다.</a:t>
-            </a:r>
-          </a:p>
-          <a:p xmlns:a="http://schemas.openxmlformats.org/drawingml/2006/main">
-            <a:r>
-              <a:t>3. (3:00–4:00 / Lecture) 완벽한 Routing 미입증, 토큰 절약·성능 개선 미측정을 분명히 말한다.</a:t>
+              <a:t>2. (1:00–3:00 / Case) architecture는 둘 다 읽었고 testing은 A의 최종 실행에서만 읽었다고 확인한다. B는 설정·README·source도 확인했다. A의 더 넓은 읽기와 실행 간 변동도 남아 있다.</a:t>
+            </a:r>
+          </a:p>
+          <a:p xmlns:a="http://schemas.openxmlformats.org/drawingml/2006/main">
+            <a:r>
+              <a:t>3. (3:00–4:00 / Case) 완벽한 Routing 미입증, 토큰 절약·성능 개선 미측정을 분명히 말한다.</a:t>
             </a:r>
           </a:p>
           <a:p xmlns:a="http://schemas.openxmlformats.org/drawingml/2006/main">
@@ -2266,7 +2266,7 @@
           </a:p>
           <a:p xmlns:a="http://schemas.openxmlformats.org/drawingml/2006/main">
             <a:r>
-              <a:t>3. (4:00–10:00 / Q&amp;A) ‘이 반복도 Context만의 문제일까?’로 질문을 받는다. 질문이 없으면 사실과 절차의 책임 차이를 짚고 ‘Agent가 Project를 알아도 왜 작업 방법은 달라질까?’를 던진다. 마지막 짧은 handoff도 이 6분 안에 포함한다.</a:t>
+              <a:t>3. (4:00–10:00 / Q&amp;A) ‘같은 작업 절차도 다시 써야 할까?’로 질문을 받는다. 질문이 없으면 사실과 절차의 책임 차이를 짚고 ‘Project 지식과 별개로 같은 조사·검증 절차도 매번 다시 적어야 할까?’를 던진다. 두 Task의 공통 절차를 다음 관찰 대상으로 삼는다. 마지막 짧은 handoff도 이 6분 안에 포함한다.</a:t>
             </a:r>
           </a:p>
           <a:p xmlns:a="http://schemas.openxmlformats.org/drawingml/2006/main">
@@ -2346,7 +2346,7 @@
           </a:p>
           <a:p xmlns:a="http://schemas.openxmlformats.org/drawingml/2006/main">
             <a:r>
-              <a:t>Transition: “Agent가 Project를 알아도 왜 작업 방법은 달라질까?”</a:t>
+              <a:t>Transition: “Project 지식과 별개로 같은 조사·검증 절차도 매번 다시 적어야 할까? 다음 두 성능 Task의 기록에서 반복된 부분을 보겠습니다.”</a:t>
             </a:r>
           </a:p>
           <a:p xmlns:a="http://schemas.openxmlformats.org/drawingml/2006/main">
@@ -3966,7 +3966,7 @@
           </a:p>
           <a:p xmlns:a="http://schemas.openxmlformats.org/drawingml/2006/main">
             <a:r>
-              <a:t>3. (3:00–4:00) 성능 조사 절차 예가 STATE-02에 저장돼 있었다는 뜻은 아니라고 한정한다. Context 양만으로 충분한지 연구 질문으로 넘어간다.</a:t>
+              <a:t>3. (3:00–4:00) 성능 조사 절차 예가 STATE-02에 저장돼 있었다는 뜻은 아니라고 한정한다. 방금은 정보의 범위와 제공 시점을 나눴고, 다음에는 ‘Context 양만 늘리면 충분할까?’를 연구의 제한된 범위 안에서 살펴본다고 예고한다.</a:t>
             </a:r>
           </a:p>
           <a:p xmlns:a="http://schemas.openxmlformats.org/drawingml/2006/main">
@@ -4046,7 +4046,7 @@
           </a:p>
           <a:p xmlns:a="http://schemas.openxmlformats.org/drawingml/2006/main">
             <a:r>
-              <a:t>Transition: “Context window가 크면 모든 정보가 똑같이 활용될까?”</a:t>
+              <a:t>Transition: “필요한 때 찾게 하는 대신 모두 넣어두면 충분할까? 이 질문을 Long Context 연구의 범위 안에서 보겠습니다.”</a:t>
             </a:r>
           </a:p>
           <a:p xmlns:a="http://schemas.openxmlformats.org/drawingml/2006/main">
@@ -4216,7 +4216,7 @@
           </a:p>
           <a:p xmlns:a="http://schemas.openxmlformats.org/drawingml/2006/main">
             <a:r>
-              <a:t>Opening Question: “Context window가 크면 모든 정보가 똑같이 활용될까?”</a:t>
+              <a:t>Opening Question: “정보의 범위와 시점을 나눠봤는데, Context 양만 늘리면 충분할까?”</a:t>
             </a:r>
           </a:p>
           <a:p xmlns:a="http://schemas.openxmlformats.org/drawingml/2006/main">
@@ -4236,7 +4236,7 @@
           </a:p>
           <a:p xmlns:a="http://schemas.openxmlformats.org/drawingml/2006/main">
             <a:r>
-              <a:t>1. (0:00–1:00) ‘더 많은 Context가 항상 더 좋은 것은 아니다’의 적용 범위를 특정 모델·과제에 한정한다.</a:t>
+              <a:t>1. (0:00–1:00) 앞 장의 정보 분류에서 잠시 물러나 ‘양만 늘리면 충분한가?’라는 질문을 보는 목적을 밝힌다. ‘더 많은 Context가 항상 더 좋은 것은 아니다’의 적용 범위를 특정 모델·과제에 한정한다.</a:t>
             </a:r>
           </a:p>
           <a:p xmlns:a="http://schemas.openxmlformats.org/drawingml/2006/main">
@@ -4246,7 +4246,7 @@
           </a:p>
           <a:p xmlns:a="http://schemas.openxmlformats.org/drawingml/2006/main">
             <a:r>
-              <a:t>3. (3:00–4:00) 화면 하단의 두 출처와 Notes의 원문 링크를 안내한다. 이 Demo의 현재 Codex Repository coding을 직접 시험한 연구가 아님을 명시한다.</a:t>
+              <a:t>3. (3:00–4:00) 화면 하단의 두 출처와 Notes의 원문 링크를 안내한다. 이 Demo의 현재 Codex Repository coding을 직접 시험한 연구가 아님을 명시한다. 연구 소개를 마치고, 이번 Task에 필요한 상세 정보와 그 위치를 설계하는 질문으로 돌아간다.</a:t>
             </a:r>
           </a:p>
           <a:p xmlns:a="http://schemas.openxmlformats.org/drawingml/2006/main">
@@ -4336,7 +4336,7 @@
           </a:p>
           <a:p xmlns:a="http://schemas.openxmlformats.org/drawingml/2006/main">
             <a:r>
-              <a:t>Transition: “필요한 정보를 Task에 맞춰 어떻게 찾게 할까?”</a:t>
+              <a:t>Transition: “이 연구가 Demo의 Routing을 검증한 것은 아닙니다. 이제 Task에 필요한 상세 정보를 어디서 찾게 할지 설계로 돌아가겠습니다.”</a:t>
             </a:r>
           </a:p>
           <a:p xmlns:a="http://schemas.openxmlformats.org/drawingml/2006/main">
@@ -4506,7 +4506,7 @@
           </a:p>
           <a:p xmlns:a="http://schemas.openxmlformats.org/drawingml/2006/main">
             <a:r>
-              <a:t>Opening Question: “모든 정보를 한 곳에 넣지 않고 필요한 정보에 도달할 수 있을까?”</a:t>
+              <a:t>Opening Question: “Task가 필요한 상세 정보에 도달하는 경로는 어떻게 설계할까?”</a:t>
             </a:r>
           </a:p>
           <a:p xmlns:a="http://schemas.openxmlformats.org/drawingml/2006/main">
@@ -4536,7 +4536,7 @@
           </a:p>
           <a:p xmlns:a="http://schemas.openxmlformats.org/drawingml/2006/main">
             <a:r>
-              <a:t>3. (2:00–3:00) Give one short C++ example and reserve STATE-03 for the next sequence.</a:t>
+              <a:t>3. (2:00–3:00) Give one short C++ example and reserve STATE-03 for the next sequence. 이 장에서는 찾아가는 경로를 보았고, 다음 장에서는 그 출발점인 Core에 무엇을 남길지 정한다고 마무리한다.</a:t>
             </a:r>
           </a:p>
           <a:p xmlns:a="http://schemas.openxmlformats.org/drawingml/2006/main">
@@ -4626,7 +4626,7 @@
           </a:p>
           <a:p xmlns:a="http://schemas.openxmlformats.org/drawingml/2006/main">
             <a:r>
-              <a:t>Transition: “무엇을 항상 읽고, 무엇을 필요할 때 찾게 할까?”</a:t>
+              <a:t>Transition: “경로를 봤으니, 이제 그 출발점인 Core에 무엇을 남길지 정해보겠습니다.”</a:t>
             </a:r>
           </a:p>
           <a:p xmlns:a="http://schemas.openxmlformats.org/drawingml/2006/main">
@@ -4703,7 +4703,7 @@
           <p:cNvPr id="3" name="Title">
             <a:extLst xmlns:a="http://schemas.openxmlformats.org/drawingml/2006/main">
               <a:ext uri="{FF2B5EF4-FFF2-40B4-BE49-F238E27FC236}">
-                <a16:creationId xmlns:a16="http://schemas.microsoft.com/office/drawing/2014/main" id="{5320AE9F-113E-406C-9B9A-82A9D1150991}"/>
+                <a16:creationId xmlns:a16="http://schemas.microsoft.com/office/drawing/2014/main" id="{FF44484A-8373-45D3-9197-2D22D04417DB}"/>
               </a:ext>
             </a:extLst>
           </p:cNvPr>
@@ -4932,7 +4932,7 @@
           <p:cNvPr id="2" name="Subtitle">
             <a:extLst xmlns:a="http://schemas.openxmlformats.org/drawingml/2006/main">
               <a:ext uri="{FF2B5EF4-FFF2-40B4-BE49-F238E27FC236}">
-                <a16:creationId xmlns:a16="http://schemas.microsoft.com/office/drawing/2014/main" id="{3DB16CD3-1718-4D14-B474-E59C5F21F826}"/>
+                <a16:creationId xmlns:a16="http://schemas.microsoft.com/office/drawing/2014/main" id="{31EB19BF-D588-455A-9FB9-37D4A7FB1013}"/>
               </a:ext>
             </a:extLst>
           </p:cNvPr>
@@ -5178,7 +5178,7 @@
           <p:cNvPr id="2" name="Section title">
             <a:extLst xmlns:a="http://schemas.openxmlformats.org/drawingml/2006/main">
               <a:ext uri="{FF2B5EF4-FFF2-40B4-BE49-F238E27FC236}">
-                <a16:creationId xmlns:a16="http://schemas.microsoft.com/office/drawing/2014/main" id="{D5E9E5C4-3E8E-44F9-A2C1-7231F9E43A7B}"/>
+                <a16:creationId xmlns:a16="http://schemas.microsoft.com/office/drawing/2014/main" id="{312692CD-16F9-46F4-BC45-AD4207BB30E3}"/>
               </a:ext>
             </a:extLst>
           </p:cNvPr>
@@ -5424,7 +5424,7 @@
           <p:cNvPr id="3" name="Title">
             <a:extLst xmlns:a="http://schemas.openxmlformats.org/drawingml/2006/main">
               <a:ext uri="{FF2B5EF4-FFF2-40B4-BE49-F238E27FC236}">
-                <a16:creationId xmlns:a16="http://schemas.microsoft.com/office/drawing/2014/main" id="{A8545C07-C091-4053-B809-B78CDCAA13CD}"/>
+                <a16:creationId xmlns:a16="http://schemas.microsoft.com/office/drawing/2014/main" id="{5424EA21-A17A-4257-866D-0C89406E528E}"/>
               </a:ext>
             </a:extLst>
           </p:cNvPr>
@@ -5653,7 +5653,7 @@
           <p:cNvPr id="2" name="Body">
             <a:extLst xmlns:a="http://schemas.openxmlformats.org/drawingml/2006/main">
               <a:ext uri="{FF2B5EF4-FFF2-40B4-BE49-F238E27FC236}">
-                <a16:creationId xmlns:a16="http://schemas.microsoft.com/office/drawing/2014/main" id="{4DBAAF28-810B-4A07-BC4E-FC30822CDE5F}"/>
+                <a16:creationId xmlns:a16="http://schemas.microsoft.com/office/drawing/2014/main" id="{422B6982-B14E-4E2E-B409-6C76988E3678}"/>
               </a:ext>
             </a:extLst>
           </p:cNvPr>
@@ -5899,7 +5899,7 @@
           <p:cNvPr id="4" name="Title">
             <a:extLst xmlns:a="http://schemas.openxmlformats.org/drawingml/2006/main">
               <a:ext uri="{FF2B5EF4-FFF2-40B4-BE49-F238E27FC236}">
-                <a16:creationId xmlns:a16="http://schemas.microsoft.com/office/drawing/2014/main" id="{8638FB4F-B5D6-425D-8CC3-6704459563D9}"/>
+                <a16:creationId xmlns:a16="http://schemas.microsoft.com/office/drawing/2014/main" id="{24D4037D-FCA9-4A9B-9A86-2553968A401F}"/>
               </a:ext>
             </a:extLst>
           </p:cNvPr>
@@ -6128,7 +6128,7 @@
           <p:cNvPr id="2" name="Left column">
             <a:extLst xmlns:a="http://schemas.openxmlformats.org/drawingml/2006/main">
               <a:ext uri="{FF2B5EF4-FFF2-40B4-BE49-F238E27FC236}">
-                <a16:creationId xmlns:a16="http://schemas.microsoft.com/office/drawing/2014/main" id="{CBA964C5-2C26-439B-A45E-94D44789B9DE}"/>
+                <a16:creationId xmlns:a16="http://schemas.microsoft.com/office/drawing/2014/main" id="{2A040CF5-CC79-420C-BC07-EB12A4F52E2E}"/>
               </a:ext>
             </a:extLst>
           </p:cNvPr>
@@ -6357,7 +6357,7 @@
           <p:cNvPr id="3" name="Right column">
             <a:extLst xmlns:a="http://schemas.openxmlformats.org/drawingml/2006/main">
               <a:ext uri="{FF2B5EF4-FFF2-40B4-BE49-F238E27FC236}">
-                <a16:creationId xmlns:a16="http://schemas.microsoft.com/office/drawing/2014/main" id="{37CCA017-2809-4A0F-9E50-83520ECE9162}"/>
+                <a16:creationId xmlns:a16="http://schemas.microsoft.com/office/drawing/2014/main" id="{DA8EA5B2-38EC-4B52-9E74-EAA6C615A8F7}"/>
               </a:ext>
             </a:extLst>
           </p:cNvPr>
@@ -6603,7 +6603,7 @@
           <p:cNvPr id="3" name="Title">
             <a:extLst xmlns:a="http://schemas.openxmlformats.org/drawingml/2006/main">
               <a:ext uri="{FF2B5EF4-FFF2-40B4-BE49-F238E27FC236}">
-                <a16:creationId xmlns:a16="http://schemas.microsoft.com/office/drawing/2014/main" id="{5C395921-D363-49F7-A7F9-71822BE3F0EC}"/>
+                <a16:creationId xmlns:a16="http://schemas.microsoft.com/office/drawing/2014/main" id="{D351FDA2-AF44-4691-94BF-A789F09E7C36}"/>
               </a:ext>
             </a:extLst>
           </p:cNvPr>
@@ -6832,7 +6832,7 @@
           <p:cNvPr id="2" name="Left column">
             <a:extLst xmlns:a="http://schemas.openxmlformats.org/drawingml/2006/main">
               <a:ext uri="{FF2B5EF4-FFF2-40B4-BE49-F238E27FC236}">
-                <a16:creationId xmlns:a16="http://schemas.microsoft.com/office/drawing/2014/main" id="{254C1927-D198-423D-BA9B-AF9872939173}"/>
+                <a16:creationId xmlns:a16="http://schemas.microsoft.com/office/drawing/2014/main" id="{F0056701-F41C-42DE-964F-4C6E823F5261}"/>
               </a:ext>
             </a:extLst>
           </p:cNvPr>
@@ -7099,12 +7099,12 @@
   </p:cSld>
   <p:clrMap bg1="lt1" tx1="dk1" bg2="lt2" tx2="dk2" accent1="accent1" accent2="accent2" accent3="accent3" accent4="accent4" accent5="accent5" accent6="accent6" hlink="hlink" folHlink="folHlink"/>
   <p:sldLayoutIdLst>
-    <p:sldLayoutId xmlns:r="http://schemas.openxmlformats.org/officeDocument/2006/relationships" id="2147483649" r:id="Rcd1a38ebbdf94f85"/>
-    <p:sldLayoutId xmlns:r="http://schemas.openxmlformats.org/officeDocument/2006/relationships" id="2147483650" r:id="Rfad1c6e1d26e4762"/>
-    <p:sldLayoutId xmlns:r="http://schemas.openxmlformats.org/officeDocument/2006/relationships" id="2147483651" r:id="R88e6ee4a1c944e93"/>
-    <p:sldLayoutId xmlns:r="http://schemas.openxmlformats.org/officeDocument/2006/relationships" id="2147483652" r:id="Re0e7c18d53314f0a"/>
-    <p:sldLayoutId xmlns:r="http://schemas.openxmlformats.org/officeDocument/2006/relationships" id="2147483653" r:id="R2033ff491ae14d52"/>
-    <p:sldLayoutId xmlns:r="http://schemas.openxmlformats.org/officeDocument/2006/relationships" id="2147483654" r:id="Ra6312023ce014678"/>
+    <p:sldLayoutId xmlns:r="http://schemas.openxmlformats.org/officeDocument/2006/relationships" id="2147483649" r:id="Re83592381816476c"/>
+    <p:sldLayoutId xmlns:r="http://schemas.openxmlformats.org/officeDocument/2006/relationships" id="2147483650" r:id="Rb8d9749d79fd4238"/>
+    <p:sldLayoutId xmlns:r="http://schemas.openxmlformats.org/officeDocument/2006/relationships" id="2147483651" r:id="R9793cd447ded4abd"/>
+    <p:sldLayoutId xmlns:r="http://schemas.openxmlformats.org/officeDocument/2006/relationships" id="2147483652" r:id="Ra9fce87c9bb14f19"/>
+    <p:sldLayoutId xmlns:r="http://schemas.openxmlformats.org/officeDocument/2006/relationships" id="2147483653" r:id="Rafabb61bd42f40e8"/>
+    <p:sldLayoutId xmlns:r="http://schemas.openxmlformats.org/officeDocument/2006/relationships" id="2147483654" r:id="Rc20c461b6eeb4b7d"/>
   </p:sldLayoutIdLst>
   <p:txStyles>
     <p:titleStyle>
@@ -7655,7 +7655,7 @@
           <p:cNvPr id="23" name="ACT 2 · 반복되는 프로젝트 설명">
             <a:extLst xmlns:a="http://schemas.openxmlformats.org/drawingml/2006/main">
               <a:ext uri="{FF2B5EF4-FFF2-40B4-BE49-F238E27FC236}">
-                <a16:creationId xmlns:a16="http://schemas.microsoft.com/office/drawing/2014/main" id="{CA0BDE4A-1F36-477E-A497-FF606761A6B0}"/>
+                <a16:creationId xmlns:a16="http://schemas.microsoft.com/office/drawing/2014/main" id="{77ED2A16-70BC-4D7C-AD79-837B40DA964D}"/>
               </a:ext>
             </a:extLst>
           </p:cNvPr>
@@ -7813,7 +7813,7 @@
           <p:cNvPr id="2" name="S22">
             <a:extLst xmlns:a="http://schemas.openxmlformats.org/drawingml/2006/main">
               <a:ext uri="{FF2B5EF4-FFF2-40B4-BE49-F238E27FC236}">
-                <a16:creationId xmlns:a16="http://schemas.microsoft.com/office/drawing/2014/main" id="{71D0F41A-64C0-4364-B57E-C27F8686962D}"/>
+                <a16:creationId xmlns:a16="http://schemas.microsoft.com/office/drawing/2014/main" id="{7CED4F98-9F52-473F-916D-0AC1D513B1FC}"/>
               </a:ext>
             </a:extLst>
           </p:cNvPr>
@@ -7971,7 +7971,7 @@
           <p:cNvPr id="3" name="다른 Task에 같은 설명이 반복된다">
             <a:extLst xmlns:a="http://schemas.openxmlformats.org/drawingml/2006/main">
               <a:ext uri="{FF2B5EF4-FFF2-40B4-BE49-F238E27FC236}">
-                <a16:creationId xmlns:a16="http://schemas.microsoft.com/office/drawing/2014/main" id="{02C7BC42-6B54-4886-9DA2-93E06CD0AB18}"/>
+                <a16:creationId xmlns:a16="http://schemas.microsoft.com/office/drawing/2014/main" id="{39030513-D34F-4EEB-AD4C-A387AEEFC978}"/>
               </a:ext>
             </a:extLst>
           </p:cNvPr>
@@ -8129,7 +8129,7 @@
           <p:cNvPr id="4" name="">
             <a:extLst xmlns:a="http://schemas.openxmlformats.org/drawingml/2006/main">
               <a:ext uri="{FF2B5EF4-FFF2-40B4-BE49-F238E27FC236}">
-                <a16:creationId xmlns:a16="http://schemas.microsoft.com/office/drawing/2014/main" id="{A378BB24-8223-423D-9535-E97DBB27D219}"/>
+                <a16:creationId xmlns:a16="http://schemas.microsoft.com/office/drawing/2014/main" id="{D668C533-7F56-4EC4-A546-3DCF702D38DF}"/>
               </a:ext>
             </a:extLst>
           </p:cNvPr>
@@ -8160,7 +8160,7 @@
           <p:cNvPr id="5" name="교육용 구성 사례 · Bug fix / Performance / README 작업">
             <a:extLst xmlns:a="http://schemas.openxmlformats.org/drawingml/2006/main">
               <a:ext uri="{FF2B5EF4-FFF2-40B4-BE49-F238E27FC236}">
-                <a16:creationId xmlns:a16="http://schemas.microsoft.com/office/drawing/2014/main" id="{1E9FD6D0-3CB5-4BBA-89F9-B912D85248EF}"/>
+                <a16:creationId xmlns:a16="http://schemas.microsoft.com/office/drawing/2014/main" id="{EE660958-6B32-45FF-8CCB-E970D0634ABF}"/>
               </a:ext>
             </a:extLst>
           </p:cNvPr>
@@ -8318,7 +8318,7 @@
           <p:cNvPr id="6" name="서로 다른 요청에 같은 프로젝트 정보가 반복되는 상황을 보여준다">
             <a:extLst xmlns:a="http://schemas.openxmlformats.org/drawingml/2006/main">
               <a:ext uri="{FF2B5EF4-FFF2-40B4-BE49-F238E27FC236}">
-                <a16:creationId xmlns:a16="http://schemas.microsoft.com/office/drawing/2014/main" id="{18243676-EBE0-4366-98A0-611CE81F8E75}"/>
+                <a16:creationId xmlns:a16="http://schemas.microsoft.com/office/drawing/2014/main" id="{87FACEA2-14C1-42E2-A6B2-A9B928AFEE90}"/>
               </a:ext>
             </a:extLst>
           </p:cNvPr>
@@ -8476,7 +8476,7 @@
           <p:cNvPr id="7" name="버그 수정">
             <a:extLst xmlns:a="http://schemas.openxmlformats.org/drawingml/2006/main">
               <a:ext uri="{FF2B5EF4-FFF2-40B4-BE49-F238E27FC236}">
-                <a16:creationId xmlns:a16="http://schemas.microsoft.com/office/drawing/2014/main" id="{EE1FDF1C-6541-4F08-92F4-BC4AE8CEBE5F}"/>
+                <a16:creationId xmlns:a16="http://schemas.microsoft.com/office/drawing/2014/main" id="{7B34FDE4-DB58-4651-B5CD-8F3227091F25}"/>
               </a:ext>
             </a:extLst>
           </p:cNvPr>
@@ -8634,7 +8634,7 @@
           <p:cNvPr id="8" name="crop 경계를 수정해줘">
             <a:extLst xmlns:a="http://schemas.openxmlformats.org/drawingml/2006/main">
               <a:ext uri="{FF2B5EF4-FFF2-40B4-BE49-F238E27FC236}">
-                <a16:creationId xmlns:a16="http://schemas.microsoft.com/office/drawing/2014/main" id="{1C802073-E400-4D18-9902-57213F706D8F}"/>
+                <a16:creationId xmlns:a16="http://schemas.microsoft.com/office/drawing/2014/main" id="{1DEB9CC5-E05A-41B9-827E-3B7C9BC1B42F}"/>
               </a:ext>
             </a:extLst>
           </p:cNvPr>
@@ -8792,7 +8792,7 @@
           <p:cNvPr id="9" name="">
             <a:extLst xmlns:a="http://schemas.openxmlformats.org/drawingml/2006/main">
               <a:ext uri="{FF2B5EF4-FFF2-40B4-BE49-F238E27FC236}">
-                <a16:creationId xmlns:a16="http://schemas.microsoft.com/office/drawing/2014/main" id="{9842737D-F52D-45D1-85C5-B0CE5971E29B}"/>
+                <a16:creationId xmlns:a16="http://schemas.microsoft.com/office/drawing/2014/main" id="{0B29B269-A97A-4816-AEA1-7372A672BEAD}"/>
               </a:ext>
             </a:extLst>
           </p:cNvPr>
@@ -8823,7 +8823,7 @@
           <p:cNvPr id="10" name="">
             <a:extLst xmlns:a="http://schemas.openxmlformats.org/drawingml/2006/main">
               <a:ext uri="{FF2B5EF4-FFF2-40B4-BE49-F238E27FC236}">
-                <a16:creationId xmlns:a16="http://schemas.microsoft.com/office/drawing/2014/main" id="{BD67DB3E-E489-448E-B875-C10BE1F91C0A}"/>
+                <a16:creationId xmlns:a16="http://schemas.microsoft.com/office/drawing/2014/main" id="{18375A6E-22BC-4C52-8F50-A257F0EC2E2A}"/>
               </a:ext>
             </a:extLst>
           </p:cNvPr>
@@ -8854,7 +8854,7 @@
           <p:cNvPr id="11" name="지정된 테스트 실행&#10;의존성 추가에는 근거 필요&#10;로컬 합성 데이터 사용&#10;기존 동작 보존">
             <a:extLst xmlns:a="http://schemas.openxmlformats.org/drawingml/2006/main">
               <a:ext uri="{FF2B5EF4-FFF2-40B4-BE49-F238E27FC236}">
-                <a16:creationId xmlns:a16="http://schemas.microsoft.com/office/drawing/2014/main" id="{51C003AC-673C-40F2-8575-1083CD5A398E}"/>
+                <a16:creationId xmlns:a16="http://schemas.microsoft.com/office/drawing/2014/main" id="{EA55D69D-AAC9-497F-A309-8DEDB45CC7D9}"/>
               </a:ext>
             </a:extLst>
           </p:cNvPr>
@@ -9081,7 +9081,7 @@
           <p:cNvPr id="12" name="성능 조사">
             <a:extLst xmlns:a="http://schemas.openxmlformats.org/drawingml/2006/main">
               <a:ext uri="{FF2B5EF4-FFF2-40B4-BE49-F238E27FC236}">
-                <a16:creationId xmlns:a16="http://schemas.microsoft.com/office/drawing/2014/main" id="{073308D5-EFC3-4EE2-ADA4-344208A10163}"/>
+                <a16:creationId xmlns:a16="http://schemas.microsoft.com/office/drawing/2014/main" id="{A273231A-77C9-40D6-8D37-CDC31F0B8547}"/>
               </a:ext>
             </a:extLst>
           </p:cNvPr>
@@ -9239,7 +9239,7 @@
           <p:cNvPr id="13" name="통계 계산을 조사해줘">
             <a:extLst xmlns:a="http://schemas.openxmlformats.org/drawingml/2006/main">
               <a:ext uri="{FF2B5EF4-FFF2-40B4-BE49-F238E27FC236}">
-                <a16:creationId xmlns:a16="http://schemas.microsoft.com/office/drawing/2014/main" id="{7ECF1EF7-9CB0-4D62-B785-9B3C5C5EBED6}"/>
+                <a16:creationId xmlns:a16="http://schemas.microsoft.com/office/drawing/2014/main" id="{EE255E33-E39E-43B5-94A3-6ED9AAEA72DF}"/>
               </a:ext>
             </a:extLst>
           </p:cNvPr>
@@ -9397,7 +9397,7 @@
           <p:cNvPr id="14" name="">
             <a:extLst xmlns:a="http://schemas.openxmlformats.org/drawingml/2006/main">
               <a:ext uri="{FF2B5EF4-FFF2-40B4-BE49-F238E27FC236}">
-                <a16:creationId xmlns:a16="http://schemas.microsoft.com/office/drawing/2014/main" id="{A4F81D12-1FAD-4BA5-9BC3-B2C66BADBFA4}"/>
+                <a16:creationId xmlns:a16="http://schemas.microsoft.com/office/drawing/2014/main" id="{60F738F9-B4CD-4A44-AA7C-DAAD5FE5FEF2}"/>
               </a:ext>
             </a:extLst>
           </p:cNvPr>
@@ -9428,7 +9428,7 @@
           <p:cNvPr id="15" name="">
             <a:extLst xmlns:a="http://schemas.openxmlformats.org/drawingml/2006/main">
               <a:ext uri="{FF2B5EF4-FFF2-40B4-BE49-F238E27FC236}">
-                <a16:creationId xmlns:a16="http://schemas.microsoft.com/office/drawing/2014/main" id="{8D4D2D83-851C-4836-95EF-09B6792FFC17}"/>
+                <a16:creationId xmlns:a16="http://schemas.microsoft.com/office/drawing/2014/main" id="{EC1E2F03-9E79-4F99-A127-273DD82AB05D}"/>
               </a:ext>
             </a:extLst>
           </p:cNvPr>
@@ -9459,7 +9459,7 @@
           <p:cNvPr id="16" name="지정된 테스트 실행&#10;의존성 추가에는 근거 필요&#10;로컬 합성 데이터 사용&#10;기존 동작 보존">
             <a:extLst xmlns:a="http://schemas.openxmlformats.org/drawingml/2006/main">
               <a:ext uri="{FF2B5EF4-FFF2-40B4-BE49-F238E27FC236}">
-                <a16:creationId xmlns:a16="http://schemas.microsoft.com/office/drawing/2014/main" id="{C681E4AA-910A-476D-8A57-9184DACE368B}"/>
+                <a16:creationId xmlns:a16="http://schemas.microsoft.com/office/drawing/2014/main" id="{2BA5B58A-6A0C-4335-87CF-CA3EB9B5214F}"/>
               </a:ext>
             </a:extLst>
           </p:cNvPr>
@@ -9686,7 +9686,7 @@
           <p:cNvPr id="17" name="README 수정">
             <a:extLst xmlns:a="http://schemas.openxmlformats.org/drawingml/2006/main">
               <a:ext uri="{FF2B5EF4-FFF2-40B4-BE49-F238E27FC236}">
-                <a16:creationId xmlns:a16="http://schemas.microsoft.com/office/drawing/2014/main" id="{B4BF49FD-06B8-484D-8E4C-B806454BBE55}"/>
+                <a16:creationId xmlns:a16="http://schemas.microsoft.com/office/drawing/2014/main" id="{BFAA674A-E8E1-4796-A9B3-11B25F6094B5}"/>
               </a:ext>
             </a:extLst>
           </p:cNvPr>
@@ -9844,7 +9844,7 @@
           <p:cNvPr id="18" name="빌드 안내를 명확히 해줘">
             <a:extLst xmlns:a="http://schemas.openxmlformats.org/drawingml/2006/main">
               <a:ext uri="{FF2B5EF4-FFF2-40B4-BE49-F238E27FC236}">
-                <a16:creationId xmlns:a16="http://schemas.microsoft.com/office/drawing/2014/main" id="{39675FFA-02EC-453E-9D00-4050FC717467}"/>
+                <a16:creationId xmlns:a16="http://schemas.microsoft.com/office/drawing/2014/main" id="{E67E2B38-12CE-4F4C-A003-1751B6368F9E}"/>
               </a:ext>
             </a:extLst>
           </p:cNvPr>
@@ -10002,7 +10002,7 @@
           <p:cNvPr id="19" name="">
             <a:extLst xmlns:a="http://schemas.openxmlformats.org/drawingml/2006/main">
               <a:ext uri="{FF2B5EF4-FFF2-40B4-BE49-F238E27FC236}">
-                <a16:creationId xmlns:a16="http://schemas.microsoft.com/office/drawing/2014/main" id="{4C016BA3-0BAC-490B-874D-3C3EAEA9C8C4}"/>
+                <a16:creationId xmlns:a16="http://schemas.microsoft.com/office/drawing/2014/main" id="{896EE306-E97D-47F4-BFE9-3B0688CE2E77}"/>
               </a:ext>
             </a:extLst>
           </p:cNvPr>
@@ -10033,7 +10033,7 @@
           <p:cNvPr id="20" name="">
             <a:extLst xmlns:a="http://schemas.openxmlformats.org/drawingml/2006/main">
               <a:ext uri="{FF2B5EF4-FFF2-40B4-BE49-F238E27FC236}">
-                <a16:creationId xmlns:a16="http://schemas.microsoft.com/office/drawing/2014/main" id="{2004996F-7460-4266-B7E1-FB2D7C797860}"/>
+                <a16:creationId xmlns:a16="http://schemas.microsoft.com/office/drawing/2014/main" id="{BB07823E-1831-4A4B-B89B-1176ECB2D5A9}"/>
               </a:ext>
             </a:extLst>
           </p:cNvPr>
@@ -10064,7 +10064,7 @@
           <p:cNvPr id="21" name="지정된 테스트 실행&#10;의존성 추가에는 근거 필요&#10;로컬 합성 데이터 사용&#10;기존 동작 보존">
             <a:extLst xmlns:a="http://schemas.openxmlformats.org/drawingml/2006/main">
               <a:ext uri="{FF2B5EF4-FFF2-40B4-BE49-F238E27FC236}">
-                <a16:creationId xmlns:a16="http://schemas.microsoft.com/office/drawing/2014/main" id="{7A704FBC-A234-44BB-9533-8189AE5B5E4C}"/>
+                <a16:creationId xmlns:a16="http://schemas.microsoft.com/office/drawing/2014/main" id="{B11AD1C9-EA19-4177-9F37-E7252B88CA4F}"/>
               </a:ext>
             </a:extLst>
           </p:cNvPr>
@@ -10291,7 +10291,7 @@
           <p:cNvPr id="22" name="요청은 다른데, 아래 설명은 왜 계속 같을까?">
             <a:extLst xmlns:a="http://schemas.openxmlformats.org/drawingml/2006/main">
               <a:ext uri="{FF2B5EF4-FFF2-40B4-BE49-F238E27FC236}">
-                <a16:creationId xmlns:a16="http://schemas.microsoft.com/office/drawing/2014/main" id="{B012B9D0-D98B-42D5-A1E4-A0CC4158E2AD}"/>
+                <a16:creationId xmlns:a16="http://schemas.microsoft.com/office/drawing/2014/main" id="{389EE18B-429B-49A0-BEE2-4A2D20C24FD6}"/>
               </a:ext>
             </a:extLst>
           </p:cNvPr>
@@ -10447,7 +10447,7 @@
     </p:spTree>
     <p:extLst>
       <p:ext uri="{BB962C8B-B14F-4D97-AF65-F5344CB8AC3E}">
-        <p14:creationId xmlns:p14="http://schemas.microsoft.com/office/powerpoint/2010/main" val="901699616"/>
+        <p14:creationId xmlns:p14="http://schemas.microsoft.com/office/powerpoint/2010/main" val="355561867"/>
       </p:ext>
     </p:extLst>
   </p:cSld>
@@ -10475,10 +10475,10 @@
       </p:grpSpPr>
       <p:sp>
         <p:nvSpPr>
-          <p:cNvPr id="23" name="ACT 2 · 기본 안내와 상세 정보">
+          <p:cNvPr id="23" name="ACT 2 · Core에 남길 기본 안내">
             <a:extLst xmlns:a="http://schemas.openxmlformats.org/drawingml/2006/main">
               <a:ext uri="{FF2B5EF4-FFF2-40B4-BE49-F238E27FC236}">
-                <a16:creationId xmlns:a16="http://schemas.microsoft.com/office/drawing/2014/main" id="{83E54A34-DD72-4BA1-BE3E-2C4773ACB6FB}"/>
+                <a16:creationId xmlns:a16="http://schemas.microsoft.com/office/drawing/2014/main" id="{ADCEBC69-D4F1-41EB-A0A4-9B47F4EA0C26}"/>
               </a:ext>
             </a:extLst>
           </p:cNvPr>
@@ -10626,7 +10626,7 @@
                 <a:ea typeface="Malgun Gothic"/>
                 <a:cs typeface="Malgun Gothic"/>
               </a:rPr>
-              <a:t>ACT 2 · 기본 안내와 상세 정보</a:t>
+              <a:t>ACT 2 · Core에 남길 기본 안내</a:t>
             </a:r>
           </a:p>
         </p:txBody>
@@ -10636,7 +10636,7 @@
           <p:cNvPr id="2" name="S31">
             <a:extLst xmlns:a="http://schemas.openxmlformats.org/drawingml/2006/main">
               <a:ext uri="{FF2B5EF4-FFF2-40B4-BE49-F238E27FC236}">
-                <a16:creationId xmlns:a16="http://schemas.microsoft.com/office/drawing/2014/main" id="{256E6937-0258-423C-8E7C-A88ACF91AB09}"/>
+                <a16:creationId xmlns:a16="http://schemas.microsoft.com/office/drawing/2014/main" id="{323C9C73-1648-46A3-997F-3319A863D8C2}"/>
               </a:ext>
             </a:extLst>
           </p:cNvPr>
@@ -10794,7 +10794,7 @@
           <p:cNvPr id="3" name="Core Context에서 상세 정보로 가는 길">
             <a:extLst xmlns:a="http://schemas.openxmlformats.org/drawingml/2006/main">
               <a:ext uri="{FF2B5EF4-FFF2-40B4-BE49-F238E27FC236}">
-                <a16:creationId xmlns:a16="http://schemas.microsoft.com/office/drawing/2014/main" id="{3FF64CD0-1843-453F-9BA9-E61FD5E1FF6D}"/>
+                <a16:creationId xmlns:a16="http://schemas.microsoft.com/office/drawing/2014/main" id="{84C51265-6182-4B9D-B973-0B87EDE1AE36}"/>
               </a:ext>
             </a:extLst>
           </p:cNvPr>
@@ -10952,7 +10952,7 @@
           <p:cNvPr id="4" name="">
             <a:extLst xmlns:a="http://schemas.openxmlformats.org/drawingml/2006/main">
               <a:ext uri="{FF2B5EF4-FFF2-40B4-BE49-F238E27FC236}">
-                <a16:creationId xmlns:a16="http://schemas.microsoft.com/office/drawing/2014/main" id="{337D01D7-F47B-4959-B910-77FE44C1794D}"/>
+                <a16:creationId xmlns:a16="http://schemas.microsoft.com/office/drawing/2014/main" id="{59DE9186-EE07-4C20-BD27-B6F338DE0CE0}"/>
               </a:ext>
             </a:extLst>
           </p:cNvPr>
@@ -10983,7 +10983,7 @@
           <p:cNvPr id="5" name="교육용 정보 설계 · Root/Core는 상세 정보의 출발점">
             <a:extLst xmlns:a="http://schemas.openxmlformats.org/drawingml/2006/main">
               <a:ext uri="{FF2B5EF4-FFF2-40B4-BE49-F238E27FC236}">
-                <a16:creationId xmlns:a16="http://schemas.microsoft.com/office/drawing/2014/main" id="{2DAC332F-B933-4E4C-8E7B-BA7B161D6014}"/>
+                <a16:creationId xmlns:a16="http://schemas.microsoft.com/office/drawing/2014/main" id="{558DCF9C-064D-4201-A9DD-6ECA5E17BB1D}"/>
               </a:ext>
             </a:extLst>
           </p:cNvPr>
@@ -11141,7 +11141,7 @@
           <p:cNvPr id="6" name="C++ 예: build/test 진입점과 기본 제약 → 알고리즘 계약·하드웨어 조건">
             <a:extLst xmlns:a="http://schemas.openxmlformats.org/drawingml/2006/main">
               <a:ext uri="{FF2B5EF4-FFF2-40B4-BE49-F238E27FC236}">
-                <a16:creationId xmlns:a16="http://schemas.microsoft.com/office/drawing/2014/main" id="{7955F6C5-B9F7-44BE-B1BD-B8BFD7F50293}"/>
+                <a16:creationId xmlns:a16="http://schemas.microsoft.com/office/drawing/2014/main" id="{7F2F62FC-B8ED-4F20-B4E7-71FE3E5E1380}"/>
               </a:ext>
             </a:extLst>
           </p:cNvPr>
@@ -11299,7 +11299,7 @@
           <p:cNvPr id="7" name="무엇을 항상 읽고, 무엇을 필요할 때 찾게 할까?">
             <a:extLst xmlns:a="http://schemas.openxmlformats.org/drawingml/2006/main">
               <a:ext uri="{FF2B5EF4-FFF2-40B4-BE49-F238E27FC236}">
-                <a16:creationId xmlns:a16="http://schemas.microsoft.com/office/drawing/2014/main" id="{2F6A613A-B476-4DAE-AEA9-042BCDACF18A}"/>
+                <a16:creationId xmlns:a16="http://schemas.microsoft.com/office/drawing/2014/main" id="{9C5A6E5C-7564-428A-8F0D-F725491CAA6E}"/>
               </a:ext>
             </a:extLst>
           </p:cNvPr>
@@ -11457,7 +11457,7 @@
           <p:cNvPr id="8" name="">
             <a:extLst xmlns:a="http://schemas.openxmlformats.org/drawingml/2006/main">
               <a:ext uri="{FF2B5EF4-FFF2-40B4-BE49-F238E27FC236}">
-                <a16:creationId xmlns:a16="http://schemas.microsoft.com/office/drawing/2014/main" id="{D4B06B4E-DEC5-48FA-A21E-8CC881725F65}"/>
+                <a16:creationId xmlns:a16="http://schemas.microsoft.com/office/drawing/2014/main" id="{4F1F4B93-6964-4F28-A6EE-2918F2E6EE4F}"/>
               </a:ext>
             </a:extLst>
           </p:cNvPr>
@@ -11488,7 +11488,7 @@
           <p:cNvPr id="9" name="CORE · 기본 안내">
             <a:extLst xmlns:a="http://schemas.openxmlformats.org/drawingml/2006/main">
               <a:ext uri="{FF2B5EF4-FFF2-40B4-BE49-F238E27FC236}">
-                <a16:creationId xmlns:a16="http://schemas.microsoft.com/office/drawing/2014/main" id="{66D4FE93-AE02-4A47-B0CE-290118583A5F}"/>
+                <a16:creationId xmlns:a16="http://schemas.microsoft.com/office/drawing/2014/main" id="{F49D0563-9CD6-46C5-A746-FAB9F29FD2C5}"/>
               </a:ext>
             </a:extLst>
           </p:cNvPr>
@@ -11646,7 +11646,7 @@
           <p:cNvPr id="10" name="프로젝트의 목적&#10;항상 지켜야 할 제약&#10;상세 정보를 찾을 위치">
             <a:extLst xmlns:a="http://schemas.openxmlformats.org/drawingml/2006/main">
               <a:ext uri="{FF2B5EF4-FFF2-40B4-BE49-F238E27FC236}">
-                <a16:creationId xmlns:a16="http://schemas.microsoft.com/office/drawing/2014/main" id="{F6690B70-6ED8-4C6B-BA74-E9AC8BC30674}"/>
+                <a16:creationId xmlns:a16="http://schemas.microsoft.com/office/drawing/2014/main" id="{C9E0E2D1-4B17-48C3-BF33-3985DB512478}"/>
               </a:ext>
             </a:extLst>
           </p:cNvPr>
@@ -11850,7 +11850,7 @@
           <p:cNvPr id="11" name="">
             <a:extLst xmlns:a="http://schemas.openxmlformats.org/drawingml/2006/main">
               <a:ext uri="{FF2B5EF4-FFF2-40B4-BE49-F238E27FC236}">
-                <a16:creationId xmlns:a16="http://schemas.microsoft.com/office/drawing/2014/main" id="{C322D4B3-AD64-4ABD-ACBC-199878EF60FE}"/>
+                <a16:creationId xmlns:a16="http://schemas.microsoft.com/office/drawing/2014/main" id="{013E1015-79AA-4D5C-8405-F812C0348F35}"/>
               </a:ext>
             </a:extLst>
           </p:cNvPr>
@@ -11880,7 +11880,7 @@
           <p:cNvPr id="12" name="DETAIL · 필요한 상세">
             <a:extLst xmlns:a="http://schemas.openxmlformats.org/drawingml/2006/main">
               <a:ext uri="{FF2B5EF4-FFF2-40B4-BE49-F238E27FC236}">
-                <a16:creationId xmlns:a16="http://schemas.microsoft.com/office/drawing/2014/main" id="{127B39FE-C0E9-467A-9C12-3845B66BB854}"/>
+                <a16:creationId xmlns:a16="http://schemas.microsoft.com/office/drawing/2014/main" id="{7B9676E9-18B7-4A4D-92B3-06A3F073BAFF}"/>
               </a:ext>
             </a:extLst>
           </p:cNvPr>
@@ -12038,7 +12038,7 @@
           <p:cNvPr id="13" name="">
             <a:extLst xmlns:a="http://schemas.openxmlformats.org/drawingml/2006/main">
               <a:ext uri="{FF2B5EF4-FFF2-40B4-BE49-F238E27FC236}">
-                <a16:creationId xmlns:a16="http://schemas.microsoft.com/office/drawing/2014/main" id="{4422AECD-A94D-4344-800C-AB4D2544E873}"/>
+                <a16:creationId xmlns:a16="http://schemas.microsoft.com/office/drawing/2014/main" id="{DD99B240-3333-4F78-8484-1EA6C242387C}"/>
               </a:ext>
             </a:extLst>
           </p:cNvPr>
@@ -12069,7 +12069,7 @@
           <p:cNvPr id="14" name="architecture">
             <a:extLst xmlns:a="http://schemas.openxmlformats.org/drawingml/2006/main">
               <a:ext uri="{FF2B5EF4-FFF2-40B4-BE49-F238E27FC236}">
-                <a16:creationId xmlns:a16="http://schemas.microsoft.com/office/drawing/2014/main" id="{1F4883E0-A5D2-4A4A-8593-676FB11C8D0D}"/>
+                <a16:creationId xmlns:a16="http://schemas.microsoft.com/office/drawing/2014/main" id="{843F0B8F-2E23-4F61-BFFA-FD656B2C05E4}"/>
               </a:ext>
             </a:extLst>
           </p:cNvPr>
@@ -12227,7 +12227,7 @@
           <p:cNvPr id="15" name="모듈과 처리 순서">
             <a:extLst xmlns:a="http://schemas.openxmlformats.org/drawingml/2006/main">
               <a:ext uri="{FF2B5EF4-FFF2-40B4-BE49-F238E27FC236}">
-                <a16:creationId xmlns:a16="http://schemas.microsoft.com/office/drawing/2014/main" id="{A6248866-14A7-47FD-8377-908A887304FC}"/>
+                <a16:creationId xmlns:a16="http://schemas.microsoft.com/office/drawing/2014/main" id="{9AB8323A-6BE7-44A1-8456-E7DC453C309C}"/>
               </a:ext>
             </a:extLst>
           </p:cNvPr>
@@ -12385,7 +12385,7 @@
           <p:cNvPr id="16" name="">
             <a:extLst xmlns:a="http://schemas.openxmlformats.org/drawingml/2006/main">
               <a:ext uri="{FF2B5EF4-FFF2-40B4-BE49-F238E27FC236}">
-                <a16:creationId xmlns:a16="http://schemas.microsoft.com/office/drawing/2014/main" id="{AF4F1DA2-3A0C-4288-94A5-5AD7877D6A85}"/>
+                <a16:creationId xmlns:a16="http://schemas.microsoft.com/office/drawing/2014/main" id="{55F70072-DC9C-4D5D-87BB-2CD2D3DAE2EE}"/>
               </a:ext>
             </a:extLst>
           </p:cNvPr>
@@ -12416,7 +12416,7 @@
           <p:cNvPr id="17" name="image contracts">
             <a:extLst xmlns:a="http://schemas.openxmlformats.org/drawingml/2006/main">
               <a:ext uri="{FF2B5EF4-FFF2-40B4-BE49-F238E27FC236}">
-                <a16:creationId xmlns:a16="http://schemas.microsoft.com/office/drawing/2014/main" id="{F82628F2-F1D1-4DAA-BB30-9422D137227A}"/>
+                <a16:creationId xmlns:a16="http://schemas.microsoft.com/office/drawing/2014/main" id="{CC76344E-C5BC-468D-9ACD-924B3D8C2398}"/>
               </a:ext>
             </a:extLst>
           </p:cNvPr>
@@ -12574,7 +12574,7 @@
           <p:cNvPr id="18" name="이미지 동작의 계약">
             <a:extLst xmlns:a="http://schemas.openxmlformats.org/drawingml/2006/main">
               <a:ext uri="{FF2B5EF4-FFF2-40B4-BE49-F238E27FC236}">
-                <a16:creationId xmlns:a16="http://schemas.microsoft.com/office/drawing/2014/main" id="{8F63AED7-DD5C-441E-94BB-9E45F56B78FA}"/>
+                <a16:creationId xmlns:a16="http://schemas.microsoft.com/office/drawing/2014/main" id="{75CA4429-B4F3-4EC0-8843-1A78323D56CA}"/>
               </a:ext>
             </a:extLst>
           </p:cNvPr>
@@ -12732,7 +12732,7 @@
           <p:cNvPr id="19" name="">
             <a:extLst xmlns:a="http://schemas.openxmlformats.org/drawingml/2006/main">
               <a:ext uri="{FF2B5EF4-FFF2-40B4-BE49-F238E27FC236}">
-                <a16:creationId xmlns:a16="http://schemas.microsoft.com/office/drawing/2014/main" id="{5CB554A3-C221-4CC1-BD33-2829CD40199C}"/>
+                <a16:creationId xmlns:a16="http://schemas.microsoft.com/office/drawing/2014/main" id="{A56BAF6D-2924-484B-9A37-DC52DC5588DF}"/>
               </a:ext>
             </a:extLst>
           </p:cNvPr>
@@ -12763,7 +12763,7 @@
           <p:cNvPr id="20" name="testing">
             <a:extLst xmlns:a="http://schemas.openxmlformats.org/drawingml/2006/main">
               <a:ext uri="{FF2B5EF4-FFF2-40B4-BE49-F238E27FC236}">
-                <a16:creationId xmlns:a16="http://schemas.microsoft.com/office/drawing/2014/main" id="{213C3650-8595-445E-80CD-3B285038EF8B}"/>
+                <a16:creationId xmlns:a16="http://schemas.microsoft.com/office/drawing/2014/main" id="{39F9C643-309F-469C-A4D0-C22F5F746345}"/>
               </a:ext>
             </a:extLst>
           </p:cNvPr>
@@ -12921,7 +12921,7 @@
           <p:cNvPr id="21" name="테스트 위치와 범위">
             <a:extLst xmlns:a="http://schemas.openxmlformats.org/drawingml/2006/main">
               <a:ext uri="{FF2B5EF4-FFF2-40B4-BE49-F238E27FC236}">
-                <a16:creationId xmlns:a16="http://schemas.microsoft.com/office/drawing/2014/main" id="{C82B00B6-6DB9-4B78-B6E6-62DA30236297}"/>
+                <a16:creationId xmlns:a16="http://schemas.microsoft.com/office/drawing/2014/main" id="{1D146159-B543-4475-9AB6-C7160C0AA5EC}"/>
               </a:ext>
             </a:extLst>
           </p:cNvPr>
@@ -13079,7 +13079,7 @@
           <p:cNvPr id="22" name="모든 지식을 넣기보다, 상세 정보까지 가는 길을 안내한다">
             <a:extLst xmlns:a="http://schemas.openxmlformats.org/drawingml/2006/main">
               <a:ext uri="{FF2B5EF4-FFF2-40B4-BE49-F238E27FC236}">
-                <a16:creationId xmlns:a16="http://schemas.microsoft.com/office/drawing/2014/main" id="{41C97F0C-8F0B-4C53-9B67-1B97BF62D981}"/>
+                <a16:creationId xmlns:a16="http://schemas.microsoft.com/office/drawing/2014/main" id="{9B41C65B-346A-41FE-B444-CB7F19EDC55A}"/>
               </a:ext>
             </a:extLst>
           </p:cNvPr>
@@ -13235,7 +13235,7 @@
     </p:spTree>
     <p:extLst>
       <p:ext uri="{BB962C8B-B14F-4D97-AF65-F5344CB8AC3E}">
-        <p14:creationId xmlns:p14="http://schemas.microsoft.com/office/powerpoint/2010/main" val="1656897646"/>
+        <p14:creationId xmlns:p14="http://schemas.microsoft.com/office/powerpoint/2010/main" val="548125742"/>
       </p:ext>
     </p:extLst>
   </p:cSld>
@@ -13266,7 +13266,7 @@
           <p:cNvPr id="22" name="ACT 2 · STATE-03의 문서 구조">
             <a:extLst xmlns:a="http://schemas.openxmlformats.org/drawingml/2006/main">
               <a:ext uri="{FF2B5EF4-FFF2-40B4-BE49-F238E27FC236}">
-                <a16:creationId xmlns:a16="http://schemas.microsoft.com/office/drawing/2014/main" id="{4F9DF9FC-19CA-4CE6-BC86-812D344BBDE9}"/>
+                <a16:creationId xmlns:a16="http://schemas.microsoft.com/office/drawing/2014/main" id="{67CB7BAC-0DAD-4A21-AF57-D904ACE8234D}"/>
               </a:ext>
             </a:extLst>
           </p:cNvPr>
@@ -13424,7 +13424,7 @@
           <p:cNvPr id="2" name="S32">
             <a:extLst xmlns:a="http://schemas.openxmlformats.org/drawingml/2006/main">
               <a:ext uri="{FF2B5EF4-FFF2-40B4-BE49-F238E27FC236}">
-                <a16:creationId xmlns:a16="http://schemas.microsoft.com/office/drawing/2014/main" id="{7069C5ED-B2E2-460A-B1F2-93798A8E6D85}"/>
+                <a16:creationId xmlns:a16="http://schemas.microsoft.com/office/drawing/2014/main" id="{2DD61501-0F9C-4D1E-B27A-DC24CE82BB08}"/>
               </a:ext>
             </a:extLst>
           </p:cNvPr>
@@ -13582,7 +13582,7 @@
           <p:cNvPr id="3" name="정보를 지우지 않고 위치를 나누기">
             <a:extLst xmlns:a="http://schemas.openxmlformats.org/drawingml/2006/main">
               <a:ext uri="{FF2B5EF4-FFF2-40B4-BE49-F238E27FC236}">
-                <a16:creationId xmlns:a16="http://schemas.microsoft.com/office/drawing/2014/main" id="{4B2ECA77-B639-48E9-9DDB-1C835D835C1D}"/>
+                <a16:creationId xmlns:a16="http://schemas.microsoft.com/office/drawing/2014/main" id="{FCB99A8C-BCC6-4739-A30F-B08E78349A6E}"/>
               </a:ext>
             </a:extLst>
           </p:cNvPr>
@@ -13740,7 +13740,7 @@
           <p:cNvPr id="4" name="">
             <a:extLst xmlns:a="http://schemas.openxmlformats.org/drawingml/2006/main">
               <a:ext uri="{FF2B5EF4-FFF2-40B4-BE49-F238E27FC236}">
-                <a16:creationId xmlns:a16="http://schemas.microsoft.com/office/drawing/2014/main" id="{5F636F09-3D1F-499C-96BB-AB5E137B5A03}"/>
+                <a16:creationId xmlns:a16="http://schemas.microsoft.com/office/drawing/2014/main" id="{4750E115-114D-4C6F-A7A9-26DB23E99D6B}"/>
               </a:ext>
             </a:extLst>
           </p:cNvPr>
@@ -13771,7 +13771,7 @@
           <p:cNvPr id="5" name="STATE-02 → STATE-03 · 실제 파일 구조와 Routing 문구 발췌">
             <a:extLst xmlns:a="http://schemas.openxmlformats.org/drawingml/2006/main">
               <a:ext uri="{FF2B5EF4-FFF2-40B4-BE49-F238E27FC236}">
-                <a16:creationId xmlns:a16="http://schemas.microsoft.com/office/drawing/2014/main" id="{7440533F-1E1B-40C7-96F1-2055F9322B86}"/>
+                <a16:creationId xmlns:a16="http://schemas.microsoft.com/office/drawing/2014/main" id="{95B88FD3-DF45-41FD-AE4D-8AE2EC16DA8C}"/>
               </a:ext>
             </a:extLst>
           </p:cNvPr>
@@ -13929,7 +13929,7 @@
           <p:cNvPr id="6" name="내용을 Scope에 맞춰 이동 · 구조 변화 자체가 완벽한 Routing이나 성능 향상 증거는 아님">
             <a:extLst xmlns:a="http://schemas.openxmlformats.org/drawingml/2006/main">
               <a:ext uri="{FF2B5EF4-FFF2-40B4-BE49-F238E27FC236}">
-                <a16:creationId xmlns:a16="http://schemas.microsoft.com/office/drawing/2014/main" id="{43AFEF15-D9FC-4D1A-8F70-1F59136D844C}"/>
+                <a16:creationId xmlns:a16="http://schemas.microsoft.com/office/drawing/2014/main" id="{E4A801F2-0276-4FCB-A649-62BEC99BBD31}"/>
               </a:ext>
             </a:extLst>
           </p:cNvPr>
@@ -14087,7 +14087,7 @@
           <p:cNvPr id="7" name="이전: AGENTS.md 안에 세부사항까지">
             <a:extLst xmlns:a="http://schemas.openxmlformats.org/drawingml/2006/main">
               <a:ext uri="{FF2B5EF4-FFF2-40B4-BE49-F238E27FC236}">
-                <a16:creationId xmlns:a16="http://schemas.microsoft.com/office/drawing/2014/main" id="{D30462FC-ECFF-454D-929B-71EC41F6F6D8}"/>
+                <a16:creationId xmlns:a16="http://schemas.microsoft.com/office/drawing/2014/main" id="{AD68C43A-10FC-4212-BF47-6B6FF3C88F34}"/>
               </a:ext>
             </a:extLst>
           </p:cNvPr>
@@ -14245,7 +14245,7 @@
           <p:cNvPr id="8" name="이후: 기본 안내 + 상세 문서로 가는 링크">
             <a:extLst xmlns:a="http://schemas.openxmlformats.org/drawingml/2006/main">
               <a:ext uri="{FF2B5EF4-FFF2-40B4-BE49-F238E27FC236}">
-                <a16:creationId xmlns:a16="http://schemas.microsoft.com/office/drawing/2014/main" id="{DBDE6605-DD0A-488B-8FE3-11E6BD5CA7D5}"/>
+                <a16:creationId xmlns:a16="http://schemas.microsoft.com/office/drawing/2014/main" id="{6147612F-2EC1-4043-9668-6E5A2CEDAF87}"/>
               </a:ext>
             </a:extLst>
           </p:cNvPr>
@@ -14403,7 +14403,7 @@
           <p:cNvPr id="9" name="">
             <a:extLst xmlns:a="http://schemas.openxmlformats.org/drawingml/2006/main">
               <a:ext uri="{FF2B5EF4-FFF2-40B4-BE49-F238E27FC236}">
-                <a16:creationId xmlns:a16="http://schemas.microsoft.com/office/drawing/2014/main" id="{BEA05377-2465-47B6-B88A-FA2BBEE10C36}"/>
+                <a16:creationId xmlns:a16="http://schemas.microsoft.com/office/drawing/2014/main" id="{99380AF4-603A-4E2F-9492-9E32E9412F55}"/>
               </a:ext>
             </a:extLst>
           </p:cNvPr>
@@ -14434,7 +14434,7 @@
           <p:cNvPr id="10" name="처리 순서 · 모듈 역할">
             <a:extLst xmlns:a="http://schemas.openxmlformats.org/drawingml/2006/main">
               <a:ext uri="{FF2B5EF4-FFF2-40B4-BE49-F238E27FC236}">
-                <a16:creationId xmlns:a16="http://schemas.microsoft.com/office/drawing/2014/main" id="{7D2AF798-1574-45A4-AE25-60FA1886AA92}"/>
+                <a16:creationId xmlns:a16="http://schemas.microsoft.com/office/drawing/2014/main" id="{F6E20261-1107-415F-83D1-C0E930F8FDDD}"/>
               </a:ext>
             </a:extLst>
           </p:cNvPr>
@@ -14592,7 +14592,7 @@
           <p:cNvPr id="11" name="">
             <a:extLst xmlns:a="http://schemas.openxmlformats.org/drawingml/2006/main">
               <a:ext uri="{FF2B5EF4-FFF2-40B4-BE49-F238E27FC236}">
-                <a16:creationId xmlns:a16="http://schemas.microsoft.com/office/drawing/2014/main" id="{DF2D0E86-52F7-4AA4-8744-B7145CCB0C29}"/>
+                <a16:creationId xmlns:a16="http://schemas.microsoft.com/office/drawing/2014/main" id="{13FC2801-5E47-4FF7-A7AF-561DF08E8AFB}"/>
               </a:ext>
             </a:extLst>
           </p:cNvPr>
@@ -14622,7 +14622,7 @@
           <p:cNvPr id="12" name="docs/architecture.md">
             <a:extLst xmlns:a="http://schemas.openxmlformats.org/drawingml/2006/main">
               <a:ext uri="{FF2B5EF4-FFF2-40B4-BE49-F238E27FC236}">
-                <a16:creationId xmlns:a16="http://schemas.microsoft.com/office/drawing/2014/main" id="{CDDECBB5-7425-4DBA-B238-2B827E513D0E}"/>
+                <a16:creationId xmlns:a16="http://schemas.microsoft.com/office/drawing/2014/main" id="{B19931F7-523F-4596-94EE-C1F3A31A4FEB}"/>
               </a:ext>
             </a:extLst>
           </p:cNvPr>
@@ -14780,7 +14780,7 @@
           <p:cNvPr id="13" name="">
             <a:extLst xmlns:a="http://schemas.openxmlformats.org/drawingml/2006/main">
               <a:ext uri="{FF2B5EF4-FFF2-40B4-BE49-F238E27FC236}">
-                <a16:creationId xmlns:a16="http://schemas.microsoft.com/office/drawing/2014/main" id="{DD2C94D3-9C35-40D6-A9DC-4A1F2F82A968}"/>
+                <a16:creationId xmlns:a16="http://schemas.microsoft.com/office/drawing/2014/main" id="{0A37C0A3-250C-4DD8-B050-13A0E12CDE53}"/>
               </a:ext>
             </a:extLst>
           </p:cNvPr>
@@ -14811,7 +14811,7 @@
           <p:cNvPr id="14" name="이미지 형식 · crop · resize">
             <a:extLst xmlns:a="http://schemas.openxmlformats.org/drawingml/2006/main">
               <a:ext uri="{FF2B5EF4-FFF2-40B4-BE49-F238E27FC236}">
-                <a16:creationId xmlns:a16="http://schemas.microsoft.com/office/drawing/2014/main" id="{EACDAA15-F42D-4C5D-AD6D-136E6257F49C}"/>
+                <a16:creationId xmlns:a16="http://schemas.microsoft.com/office/drawing/2014/main" id="{0A9C0F3A-88CD-47FE-96AD-48631937DA97}"/>
               </a:ext>
             </a:extLst>
           </p:cNvPr>
@@ -14969,7 +14969,7 @@
           <p:cNvPr id="15" name="">
             <a:extLst xmlns:a="http://schemas.openxmlformats.org/drawingml/2006/main">
               <a:ext uri="{FF2B5EF4-FFF2-40B4-BE49-F238E27FC236}">
-                <a16:creationId xmlns:a16="http://schemas.microsoft.com/office/drawing/2014/main" id="{43EA71EF-AC5F-4673-A282-C4F614887905}"/>
+                <a16:creationId xmlns:a16="http://schemas.microsoft.com/office/drawing/2014/main" id="{66573F31-CA15-4795-94FB-B26E3073367A}"/>
               </a:ext>
             </a:extLst>
           </p:cNvPr>
@@ -14999,7 +14999,7 @@
           <p:cNvPr id="16" name="docs/image-contracts.md">
             <a:extLst xmlns:a="http://schemas.openxmlformats.org/drawingml/2006/main">
               <a:ext uri="{FF2B5EF4-FFF2-40B4-BE49-F238E27FC236}">
-                <a16:creationId xmlns:a16="http://schemas.microsoft.com/office/drawing/2014/main" id="{B27F8197-AACE-4849-9E2D-0F23A901F55C}"/>
+                <a16:creationId xmlns:a16="http://schemas.microsoft.com/office/drawing/2014/main" id="{C00809C1-FD46-4DBA-BE3D-5EF5E4D8AA36}"/>
               </a:ext>
             </a:extLst>
           </p:cNvPr>
@@ -15157,7 +15157,7 @@
           <p:cNvPr id="17" name="">
             <a:extLst xmlns:a="http://schemas.openxmlformats.org/drawingml/2006/main">
               <a:ext uri="{FF2B5EF4-FFF2-40B4-BE49-F238E27FC236}">
-                <a16:creationId xmlns:a16="http://schemas.microsoft.com/office/drawing/2014/main" id="{F182DB75-74B0-4128-B809-A2382D2A798F}"/>
+                <a16:creationId xmlns:a16="http://schemas.microsoft.com/office/drawing/2014/main" id="{3A703EE3-0F50-4FDD-88D2-962E83A95151}"/>
               </a:ext>
             </a:extLst>
           </p:cNvPr>
@@ -15188,7 +15188,7 @@
           <p:cNvPr id="18" name="테스트 구조 · 관련 테스트">
             <a:extLst xmlns:a="http://schemas.openxmlformats.org/drawingml/2006/main">
               <a:ext uri="{FF2B5EF4-FFF2-40B4-BE49-F238E27FC236}">
-                <a16:creationId xmlns:a16="http://schemas.microsoft.com/office/drawing/2014/main" id="{31507543-C129-4919-A2F4-A2233F7EF552}"/>
+                <a16:creationId xmlns:a16="http://schemas.microsoft.com/office/drawing/2014/main" id="{ADC8F997-983D-4EEE-BD34-C18239B83FF9}"/>
               </a:ext>
             </a:extLst>
           </p:cNvPr>
@@ -15346,7 +15346,7 @@
           <p:cNvPr id="19" name="">
             <a:extLst xmlns:a="http://schemas.openxmlformats.org/drawingml/2006/main">
               <a:ext uri="{FF2B5EF4-FFF2-40B4-BE49-F238E27FC236}">
-                <a16:creationId xmlns:a16="http://schemas.microsoft.com/office/drawing/2014/main" id="{34F09D38-E527-4F4B-BF96-63AAFD0D7C19}"/>
+                <a16:creationId xmlns:a16="http://schemas.microsoft.com/office/drawing/2014/main" id="{2C3401E4-55F8-4FBE-84EE-D196972FBAE3}"/>
               </a:ext>
             </a:extLst>
           </p:cNvPr>
@@ -15376,7 +15376,7 @@
           <p:cNvPr id="20" name="docs/testing.md">
             <a:extLst xmlns:a="http://schemas.openxmlformats.org/drawingml/2006/main">
               <a:ext uri="{FF2B5EF4-FFF2-40B4-BE49-F238E27FC236}">
-                <a16:creationId xmlns:a16="http://schemas.microsoft.com/office/drawing/2014/main" id="{B1880C11-FF1D-4EB2-BEA5-38BAF7FD362E}"/>
+                <a16:creationId xmlns:a16="http://schemas.microsoft.com/office/drawing/2014/main" id="{982E1DB2-61DD-422B-86DB-60D7BDF464A8}"/>
               </a:ext>
             </a:extLst>
           </p:cNvPr>
@@ -15534,7 +15534,7 @@
           <p:cNvPr id="21" name="원문: Test organization or relevant tests → docs/testing.md">
             <a:extLst xmlns:a="http://schemas.openxmlformats.org/drawingml/2006/main">
               <a:ext uri="{FF2B5EF4-FFF2-40B4-BE49-F238E27FC236}">
-                <a16:creationId xmlns:a16="http://schemas.microsoft.com/office/drawing/2014/main" id="{A259D154-EB9C-46F9-8A1E-BCB4A4EFBDD7}"/>
+                <a16:creationId xmlns:a16="http://schemas.microsoft.com/office/drawing/2014/main" id="{DFC77901-FAF1-442E-A59A-05364D2BD340}"/>
               </a:ext>
             </a:extLst>
           </p:cNvPr>
@@ -15690,7 +15690,7 @@
     </p:spTree>
     <p:extLst>
       <p:ext uri="{BB962C8B-B14F-4D97-AF65-F5344CB8AC3E}">
-        <p14:creationId xmlns:p14="http://schemas.microsoft.com/office/powerpoint/2010/main" val="1415595824"/>
+        <p14:creationId xmlns:p14="http://schemas.microsoft.com/office/powerpoint/2010/main" val="36845366"/>
       </p:ext>
     </p:extLst>
   </p:cSld>
@@ -15721,7 +15721,7 @@
           <p:cNvPr id="14" name="ACT 2 · 관찰하기 전에 질문하기">
             <a:extLst xmlns:a="http://schemas.openxmlformats.org/drawingml/2006/main">
               <a:ext uri="{FF2B5EF4-FFF2-40B4-BE49-F238E27FC236}">
-                <a16:creationId xmlns:a16="http://schemas.microsoft.com/office/drawing/2014/main" id="{CC07FAFF-A403-4FD5-A502-14EB97E409A2}"/>
+                <a16:creationId xmlns:a16="http://schemas.microsoft.com/office/drawing/2014/main" id="{86385382-024B-4353-80B3-5EBCAEDF7D1F}"/>
               </a:ext>
             </a:extLst>
           </p:cNvPr>
@@ -15879,7 +15879,7 @@
           <p:cNvPr id="2" name="S33">
             <a:extLst xmlns:a="http://schemas.openxmlformats.org/drawingml/2006/main">
               <a:ext uri="{FF2B5EF4-FFF2-40B4-BE49-F238E27FC236}">
-                <a16:creationId xmlns:a16="http://schemas.microsoft.com/office/drawing/2014/main" id="{75597309-8FE2-4B08-923F-2DE786E5CFB4}"/>
+                <a16:creationId xmlns:a16="http://schemas.microsoft.com/office/drawing/2014/main" id="{0D057EF5-8F7F-4A2F-9D95-52ADBA531E87}"/>
               </a:ext>
             </a:extLst>
           </p:cNvPr>
@@ -16037,7 +16037,7 @@
           <p:cNvPr id="3" name="서로 다른 두 Task가 무엇을 읽을까?">
             <a:extLst xmlns:a="http://schemas.openxmlformats.org/drawingml/2006/main">
               <a:ext uri="{FF2B5EF4-FFF2-40B4-BE49-F238E27FC236}">
-                <a16:creationId xmlns:a16="http://schemas.microsoft.com/office/drawing/2014/main" id="{F95646A5-EC46-4DAC-8E0F-B84F5BE264DB}"/>
+                <a16:creationId xmlns:a16="http://schemas.microsoft.com/office/drawing/2014/main" id="{1607B26E-A9B8-4819-9F3A-EC8ADC1FE3B7}"/>
               </a:ext>
             </a:extLst>
           </p:cNvPr>
@@ -16195,7 +16195,7 @@
           <p:cNvPr id="4" name="">
             <a:extLst xmlns:a="http://schemas.openxmlformats.org/drawingml/2006/main">
               <a:ext uri="{FF2B5EF4-FFF2-40B4-BE49-F238E27FC236}">
-                <a16:creationId xmlns:a16="http://schemas.microsoft.com/office/drawing/2014/main" id="{1C6C2125-4A1B-4536-90E1-76E2E8F713AF}"/>
+                <a16:creationId xmlns:a16="http://schemas.microsoft.com/office/drawing/2014/main" id="{F63A77A8-7596-458F-8D79-69E79DF93B9E}"/>
               </a:ext>
             </a:extLst>
           </p:cNvPr>
@@ -16226,7 +16226,7 @@
           <p:cNvPr id="5" name="TRIAL-005A/B · 읽기 전용 Task의 질문을 재구성">
             <a:extLst xmlns:a="http://schemas.openxmlformats.org/drawingml/2006/main">
               <a:ext uri="{FF2B5EF4-FFF2-40B4-BE49-F238E27FC236}">
-                <a16:creationId xmlns:a16="http://schemas.microsoft.com/office/drawing/2014/main" id="{8D0E66E1-EB04-4BC4-9801-04034A6B4D6B}"/>
+                <a16:creationId xmlns:a16="http://schemas.microsoft.com/office/drawing/2014/main" id="{F70EEF7B-C4E9-4C03-AE4F-FAE0A937593A}"/>
               </a:ext>
             </a:extLst>
           </p:cNvPr>
@@ -16384,7 +16384,7 @@
           <p:cNvPr id="6" name="어떤 상세 문서를 읽을지는 실제 접근 기록으로 확인한다">
             <a:extLst xmlns:a="http://schemas.openxmlformats.org/drawingml/2006/main">
               <a:ext uri="{FF2B5EF4-FFF2-40B4-BE49-F238E27FC236}">
-                <a16:creationId xmlns:a16="http://schemas.microsoft.com/office/drawing/2014/main" id="{70B1A107-33F7-440C-ACDF-27018B27377A}"/>
+                <a16:creationId xmlns:a16="http://schemas.microsoft.com/office/drawing/2014/main" id="{EF683EBC-7F9E-4E1F-8F16-1AB003108630}"/>
               </a:ext>
             </a:extLst>
           </p:cNvPr>
@@ -16542,7 +16542,7 @@
           <p:cNvPr id="7" name="Task A">
             <a:extLst xmlns:a="http://schemas.openxmlformats.org/drawingml/2006/main">
               <a:ext uri="{FF2B5EF4-FFF2-40B4-BE49-F238E27FC236}">
-                <a16:creationId xmlns:a16="http://schemas.microsoft.com/office/drawing/2014/main" id="{B1E09DBA-05D5-4566-9817-83EAAA3B1169}"/>
+                <a16:creationId xmlns:a16="http://schemas.microsoft.com/office/drawing/2014/main" id="{3B15A2FD-3A2E-481E-827A-AF78AD04168A}"/>
               </a:ext>
             </a:extLst>
           </p:cNvPr>
@@ -16700,7 +16700,7 @@
           <p:cNvPr id="8" name="Task B">
             <a:extLst xmlns:a="http://schemas.openxmlformats.org/drawingml/2006/main">
               <a:ext uri="{FF2B5EF4-FFF2-40B4-BE49-F238E27FC236}">
-                <a16:creationId xmlns:a16="http://schemas.microsoft.com/office/drawing/2014/main" id="{F74D0D53-6493-4E57-A71B-FB58B5131ABE}"/>
+                <a16:creationId xmlns:a16="http://schemas.microsoft.com/office/drawing/2014/main" id="{89CDC520-0338-4693-97F2-81A6008AD666}"/>
               </a:ext>
             </a:extLst>
           </p:cNvPr>
@@ -16858,7 +16858,7 @@
           <p:cNvPr id="9" name="">
             <a:extLst xmlns:a="http://schemas.openxmlformats.org/drawingml/2006/main">
               <a:ext uri="{FF2B5EF4-FFF2-40B4-BE49-F238E27FC236}">
-                <a16:creationId xmlns:a16="http://schemas.microsoft.com/office/drawing/2014/main" id="{53EAD5FD-A691-45B5-A361-4E1E1F3B183A}"/>
+                <a16:creationId xmlns:a16="http://schemas.microsoft.com/office/drawing/2014/main" id="{FFEDD680-5553-4F3B-BE4D-906F9D1762ED}"/>
               </a:ext>
             </a:extLst>
           </p:cNvPr>
@@ -16889,7 +16889,7 @@
           <p:cNvPr id="10" name="">
             <a:extLst xmlns:a="http://schemas.openxmlformats.org/drawingml/2006/main">
               <a:ext uri="{FF2B5EF4-FFF2-40B4-BE49-F238E27FC236}">
-                <a16:creationId xmlns:a16="http://schemas.microsoft.com/office/drawing/2014/main" id="{C03A0B77-3147-488B-9796-2B10CAE6ECAE}"/>
+                <a16:creationId xmlns:a16="http://schemas.microsoft.com/office/drawing/2014/main" id="{2E113CC4-29D2-46CF-A54E-7C866E430B68}"/>
               </a:ext>
             </a:extLst>
           </p:cNvPr>
@@ -16920,7 +16920,7 @@
           <p:cNvPr id="11" name="crop 1 3은&#10;어떤 source column을&#10;포함하는가?">
             <a:extLst xmlns:a="http://schemas.openxmlformats.org/drawingml/2006/main">
               <a:ext uri="{FF2B5EF4-FFF2-40B4-BE49-F238E27FC236}">
-                <a16:creationId xmlns:a16="http://schemas.microsoft.com/office/drawing/2014/main" id="{30BE1E5E-7DBE-44F1-B54A-0EEFCAC49457}"/>
+                <a16:creationId xmlns:a16="http://schemas.microsoft.com/office/drawing/2014/main" id="{B9AD704B-6500-455C-A2F9-4A6966371E6F}"/>
               </a:ext>
             </a:extLst>
           </p:cNvPr>
@@ -17124,7 +17124,7 @@
           <p:cNvPr id="12" name="이 Project에&#10;runtime dependency가&#10;있는가?">
             <a:extLst xmlns:a="http://schemas.openxmlformats.org/drawingml/2006/main">
               <a:ext uri="{FF2B5EF4-FFF2-40B4-BE49-F238E27FC236}">
-                <a16:creationId xmlns:a16="http://schemas.microsoft.com/office/drawing/2014/main" id="{A574B55B-E7E4-48B6-BC0E-5CE29795CFDA}"/>
+                <a16:creationId xmlns:a16="http://schemas.microsoft.com/office/drawing/2014/main" id="{0717640E-7687-4BB0-AA9F-08E3A3E11E8D}"/>
               </a:ext>
             </a:extLst>
           </p:cNvPr>
@@ -17328,7 +17328,7 @@
           <p:cNvPr id="13" name="두 Task에서 같은 상세 문서를 읽을까?">
             <a:extLst xmlns:a="http://schemas.openxmlformats.org/drawingml/2006/main">
               <a:ext uri="{FF2B5EF4-FFF2-40B4-BE49-F238E27FC236}">
-                <a16:creationId xmlns:a16="http://schemas.microsoft.com/office/drawing/2014/main" id="{EE91834B-B5BA-4BF3-AD83-0240608B93E2}"/>
+                <a16:creationId xmlns:a16="http://schemas.microsoft.com/office/drawing/2014/main" id="{05746C10-3899-41CA-A439-C7A7EF38D90D}"/>
               </a:ext>
             </a:extLst>
           </p:cNvPr>
@@ -17484,7 +17484,7 @@
     </p:spTree>
     <p:extLst>
       <p:ext uri="{BB962C8B-B14F-4D97-AF65-F5344CB8AC3E}">
-        <p14:creationId xmlns:p14="http://schemas.microsoft.com/office/powerpoint/2010/main" val="726112827"/>
+        <p14:creationId xmlns:p14="http://schemas.microsoft.com/office/powerpoint/2010/main" val="341822573"/>
       </p:ext>
     </p:extLst>
   </p:cSld>
@@ -17515,7 +17515,7 @@
           <p:cNvPr id="24" name="ACT 2 · 질문과 근거를 연결하기">
             <a:extLst xmlns:a="http://schemas.openxmlformats.org/drawingml/2006/main">
               <a:ext uri="{FF2B5EF4-FFF2-40B4-BE49-F238E27FC236}">
-                <a16:creationId xmlns:a16="http://schemas.microsoft.com/office/drawing/2014/main" id="{3BCF1107-4089-4703-8E51-5482FF3B399B}"/>
+                <a16:creationId xmlns:a16="http://schemas.microsoft.com/office/drawing/2014/main" id="{05A9DD85-75FE-4C17-991A-F627AE3F13D0}"/>
               </a:ext>
             </a:extLst>
           </p:cNvPr>
@@ -17673,7 +17673,7 @@
           <p:cNvPr id="2" name="S34">
             <a:extLst xmlns:a="http://schemas.openxmlformats.org/drawingml/2006/main">
               <a:ext uri="{FF2B5EF4-FFF2-40B4-BE49-F238E27FC236}">
-                <a16:creationId xmlns:a16="http://schemas.microsoft.com/office/drawing/2014/main" id="{D65A3CC6-14C8-431D-8116-FE4CB3D72404}"/>
+                <a16:creationId xmlns:a16="http://schemas.microsoft.com/office/drawing/2014/main" id="{BDD19BDC-D011-4354-92D7-B1AD90709CB5}"/>
               </a:ext>
             </a:extLst>
           </p:cNvPr>
@@ -17831,7 +17831,7 @@
           <p:cNvPr id="3" name="Crop Task에서 관찰한 접근">
             <a:extLst xmlns:a="http://schemas.openxmlformats.org/drawingml/2006/main">
               <a:ext uri="{FF2B5EF4-FFF2-40B4-BE49-F238E27FC236}">
-                <a16:creationId xmlns:a16="http://schemas.microsoft.com/office/drawing/2014/main" id="{87A2DA9B-C8EA-4D25-883E-E05C3773728A}"/>
+                <a16:creationId xmlns:a16="http://schemas.microsoft.com/office/drawing/2014/main" id="{D51FB849-E20C-4F58-B3AE-4465D6F614D2}"/>
               </a:ext>
             </a:extLst>
           </p:cNvPr>
@@ -17989,7 +17989,7 @@
           <p:cNvPr id="4" name="">
             <a:extLst xmlns:a="http://schemas.openxmlformats.org/drawingml/2006/main">
               <a:ext uri="{FF2B5EF4-FFF2-40B4-BE49-F238E27FC236}">
-                <a16:creationId xmlns:a16="http://schemas.microsoft.com/office/drawing/2014/main" id="{8BF8E578-9519-40CF-BD72-58E377D82753}"/>
+                <a16:creationId xmlns:a16="http://schemas.microsoft.com/office/drawing/2014/main" id="{337A49F8-2808-42E4-95F1-04C6475B980B}"/>
               </a:ext>
             </a:extLst>
           </p:cNvPr>
@@ -18020,7 +18020,7 @@
           <p:cNvPr id="5" name="TRIAL-005A · 최종 실행의 접근과 답을 기록에서 재구성">
             <a:extLst xmlns:a="http://schemas.openxmlformats.org/drawingml/2006/main">
               <a:ext uri="{FF2B5EF4-FFF2-40B4-BE49-F238E27FC236}">
-                <a16:creationId xmlns:a16="http://schemas.microsoft.com/office/drawing/2014/main" id="{7DBE62E1-E5D4-4855-8D27-F896BF0F2486}"/>
+                <a16:creationId xmlns:a16="http://schemas.microsoft.com/office/drawing/2014/main" id="{24B7EED5-A0E0-43E5-83DF-1BD8261F9033}"/>
               </a:ext>
             </a:extLst>
           </p:cNvPr>
@@ -18178,7 +18178,7 @@
           <p:cNvPr id="6" name="architecture 등 넓은 Context도 접근 · testing.md는 최종 실행에서 관찰, 반복 간">
             <a:extLst xmlns:a="http://schemas.openxmlformats.org/drawingml/2006/main">
               <a:ext uri="{FF2B5EF4-FFF2-40B4-BE49-F238E27FC236}">
-                <a16:creationId xmlns:a16="http://schemas.microsoft.com/office/drawing/2014/main" id="{72D7729B-4341-40A6-87EF-42B52089D95E}"/>
+                <a16:creationId xmlns:a16="http://schemas.microsoft.com/office/drawing/2014/main" id="{2AC35616-4ECE-492D-9456-126E844B970A}"/>
               </a:ext>
             </a:extLst>
           </p:cNvPr>
@@ -18336,7 +18336,7 @@
           <p:cNvPr id="7" name="접근한 계약 문서">
             <a:extLst xmlns:a="http://schemas.openxmlformats.org/drawingml/2006/main">
               <a:ext uri="{FF2B5EF4-FFF2-40B4-BE49-F238E27FC236}">
-                <a16:creationId xmlns:a16="http://schemas.microsoft.com/office/drawing/2014/main" id="{3F36EC20-91A2-4925-AD43-441FA858928C}"/>
+                <a16:creationId xmlns:a16="http://schemas.microsoft.com/office/drawing/2014/main" id="{DE108C18-AF71-448A-9E4A-278D1CBEB4E1}"/>
               </a:ext>
             </a:extLst>
           </p:cNvPr>
@@ -18494,7 +18494,7 @@
           <p:cNvPr id="8" name="image-contracts.md">
             <a:extLst xmlns:a="http://schemas.openxmlformats.org/drawingml/2006/main">
               <a:ext uri="{FF2B5EF4-FFF2-40B4-BE49-F238E27FC236}">
-                <a16:creationId xmlns:a16="http://schemas.microsoft.com/office/drawing/2014/main" id="{FC7DBECA-9FF5-4940-810E-FD0A3A0B1221}"/>
+                <a16:creationId xmlns:a16="http://schemas.microsoft.com/office/drawing/2014/main" id="{05AE04E4-8830-4108-8C56-37607B8A52EA}"/>
               </a:ext>
             </a:extLst>
           </p:cNvPr>
@@ -18652,7 +18652,7 @@
           <p:cNvPr id="9" name="">
             <a:extLst xmlns:a="http://schemas.openxmlformats.org/drawingml/2006/main">
               <a:ext uri="{FF2B5EF4-FFF2-40B4-BE49-F238E27FC236}">
-                <a16:creationId xmlns:a16="http://schemas.microsoft.com/office/drawing/2014/main" id="{FB81BDCE-D8B4-4551-B394-BE1D5B3F5804}"/>
+                <a16:creationId xmlns:a16="http://schemas.microsoft.com/office/drawing/2014/main" id="{1423E27F-E6C3-40E2-AF0C-441C1B0F7B30}"/>
               </a:ext>
             </a:extLst>
           </p:cNvPr>
@@ -18683,7 +18683,7 @@
           <p:cNvPr id="10" name="[x_start, x_end)">
             <a:extLst xmlns:a="http://schemas.openxmlformats.org/drawingml/2006/main">
               <a:ext uri="{FF2B5EF4-FFF2-40B4-BE49-F238E27FC236}">
-                <a16:creationId xmlns:a16="http://schemas.microsoft.com/office/drawing/2014/main" id="{48011124-5BAE-404C-B364-ADAE4EC52464}"/>
+                <a16:creationId xmlns:a16="http://schemas.microsoft.com/office/drawing/2014/main" id="{A389F1C1-105E-42E8-8151-338F2E7E62DA}"/>
               </a:ext>
             </a:extLst>
           </p:cNvPr>
@@ -18841,7 +18841,7 @@
           <p:cNvPr id="11" name="시작 열 포함 · 끝 좌표 제외">
             <a:extLst xmlns:a="http://schemas.openxmlformats.org/drawingml/2006/main">
               <a:ext uri="{FF2B5EF4-FFF2-40B4-BE49-F238E27FC236}">
-                <a16:creationId xmlns:a16="http://schemas.microsoft.com/office/drawing/2014/main" id="{F9DA047A-D584-43B2-BAB9-EECB80B2BBA0}"/>
+                <a16:creationId xmlns:a16="http://schemas.microsoft.com/office/drawing/2014/main" id="{D09F8657-EDC2-41EA-B7F5-F8E82CF6F904}"/>
               </a:ext>
             </a:extLst>
           </p:cNvPr>
@@ -18999,7 +18999,7 @@
           <p:cNvPr id="12" name="기록된 답">
             <a:extLst xmlns:a="http://schemas.openxmlformats.org/drawingml/2006/main">
               <a:ext uri="{FF2B5EF4-FFF2-40B4-BE49-F238E27FC236}">
-                <a16:creationId xmlns:a16="http://schemas.microsoft.com/office/drawing/2014/main" id="{F68CAE2B-5C64-4B47-88D9-E3EB406682B3}"/>
+                <a16:creationId xmlns:a16="http://schemas.microsoft.com/office/drawing/2014/main" id="{C1C7385C-00E6-4A53-BA0C-B66678CDE75F}"/>
               </a:ext>
             </a:extLst>
           </p:cNvPr>
@@ -19157,7 +19157,7 @@
           <p:cNvPr id="13" name="crop 1 3">
             <a:extLst xmlns:a="http://schemas.openxmlformats.org/drawingml/2006/main">
               <a:ext uri="{FF2B5EF4-FFF2-40B4-BE49-F238E27FC236}">
-                <a16:creationId xmlns:a16="http://schemas.microsoft.com/office/drawing/2014/main" id="{472E39FA-97BB-4824-9629-1BD4F1C54481}"/>
+                <a16:creationId xmlns:a16="http://schemas.microsoft.com/office/drawing/2014/main" id="{A26775C9-AD4E-42B0-B9AF-AC08CE847633}"/>
               </a:ext>
             </a:extLst>
           </p:cNvPr>
@@ -19315,7 +19315,7 @@
           <p:cNvPr id="14" name="">
             <a:extLst xmlns:a="http://schemas.openxmlformats.org/drawingml/2006/main">
               <a:ext uri="{FF2B5EF4-FFF2-40B4-BE49-F238E27FC236}">
-                <a16:creationId xmlns:a16="http://schemas.microsoft.com/office/drawing/2014/main" id="{B96EF997-9D96-448B-A483-0B98534E7844}"/>
+                <a16:creationId xmlns:a16="http://schemas.microsoft.com/office/drawing/2014/main" id="{15F99B20-B66B-4F49-9971-FBA67EA64545}"/>
               </a:ext>
             </a:extLst>
           </p:cNvPr>
@@ -19348,7 +19348,7 @@
           <p:cNvPr id="15" name="0">
             <a:extLst xmlns:a="http://schemas.openxmlformats.org/drawingml/2006/main">
               <a:ext uri="{FF2B5EF4-FFF2-40B4-BE49-F238E27FC236}">
-                <a16:creationId xmlns:a16="http://schemas.microsoft.com/office/drawing/2014/main" id="{ACC4F035-2F88-4EE9-91A5-CF54BD8E2C4C}"/>
+                <a16:creationId xmlns:a16="http://schemas.microsoft.com/office/drawing/2014/main" id="{DB250FE9-8118-487B-BE0E-450FF0035766}"/>
               </a:ext>
             </a:extLst>
           </p:cNvPr>
@@ -19506,7 +19506,7 @@
           <p:cNvPr id="16" name="">
             <a:extLst xmlns:a="http://schemas.openxmlformats.org/drawingml/2006/main">
               <a:ext uri="{FF2B5EF4-FFF2-40B4-BE49-F238E27FC236}">
-                <a16:creationId xmlns:a16="http://schemas.microsoft.com/office/drawing/2014/main" id="{97DDA9E9-C0F2-44B8-8A37-A86A63698DFE}"/>
+                <a16:creationId xmlns:a16="http://schemas.microsoft.com/office/drawing/2014/main" id="{57028EFC-9406-47FA-A753-E47AA41A110B}"/>
               </a:ext>
             </a:extLst>
           </p:cNvPr>
@@ -19539,7 +19539,7 @@
           <p:cNvPr id="17" name="1">
             <a:extLst xmlns:a="http://schemas.openxmlformats.org/drawingml/2006/main">
               <a:ext uri="{FF2B5EF4-FFF2-40B4-BE49-F238E27FC236}">
-                <a16:creationId xmlns:a16="http://schemas.microsoft.com/office/drawing/2014/main" id="{7AA8B7B6-5FE3-4E00-8D9A-A71D94397E3E}"/>
+                <a16:creationId xmlns:a16="http://schemas.microsoft.com/office/drawing/2014/main" id="{D3138FC0-C6D9-4889-AEF7-9B92616B181C}"/>
               </a:ext>
             </a:extLst>
           </p:cNvPr>
@@ -19697,7 +19697,7 @@
           <p:cNvPr id="18" name="">
             <a:extLst xmlns:a="http://schemas.openxmlformats.org/drawingml/2006/main">
               <a:ext uri="{FF2B5EF4-FFF2-40B4-BE49-F238E27FC236}">
-                <a16:creationId xmlns:a16="http://schemas.microsoft.com/office/drawing/2014/main" id="{51A356A4-E530-4853-8FC4-E431AEE8B6F5}"/>
+                <a16:creationId xmlns:a16="http://schemas.microsoft.com/office/drawing/2014/main" id="{26D1925F-E70F-43C9-99E2-65F1F2AA2BF5}"/>
               </a:ext>
             </a:extLst>
           </p:cNvPr>
@@ -19730,7 +19730,7 @@
           <p:cNvPr id="19" name="2">
             <a:extLst xmlns:a="http://schemas.openxmlformats.org/drawingml/2006/main">
               <a:ext uri="{FF2B5EF4-FFF2-40B4-BE49-F238E27FC236}">
-                <a16:creationId xmlns:a16="http://schemas.microsoft.com/office/drawing/2014/main" id="{7F2BE06E-A886-40D2-8B52-C0C927CE0232}"/>
+                <a16:creationId xmlns:a16="http://schemas.microsoft.com/office/drawing/2014/main" id="{B30B977D-CDD5-4460-BB65-78457A3530A8}"/>
               </a:ext>
             </a:extLst>
           </p:cNvPr>
@@ -19888,7 +19888,7 @@
           <p:cNvPr id="20" name="">
             <a:extLst xmlns:a="http://schemas.openxmlformats.org/drawingml/2006/main">
               <a:ext uri="{FF2B5EF4-FFF2-40B4-BE49-F238E27FC236}">
-                <a16:creationId xmlns:a16="http://schemas.microsoft.com/office/drawing/2014/main" id="{02FCB467-2CC9-4685-B851-EB84357AD1EE}"/>
+                <a16:creationId xmlns:a16="http://schemas.microsoft.com/office/drawing/2014/main" id="{47684001-0553-46E0-8468-AE580518EE5A}"/>
               </a:ext>
             </a:extLst>
           </p:cNvPr>
@@ -19921,7 +19921,7 @@
           <p:cNvPr id="21" name="3">
             <a:extLst xmlns:a="http://schemas.openxmlformats.org/drawingml/2006/main">
               <a:ext uri="{FF2B5EF4-FFF2-40B4-BE49-F238E27FC236}">
-                <a16:creationId xmlns:a16="http://schemas.microsoft.com/office/drawing/2014/main" id="{D23EB483-AABC-4194-AF5D-0F0701608DF7}"/>
+                <a16:creationId xmlns:a16="http://schemas.microsoft.com/office/drawing/2014/main" id="{F3F8B0DE-AAFD-4231-A847-5B5FC89ABD3B}"/>
               </a:ext>
             </a:extLst>
           </p:cNvPr>
@@ -20079,7 +20079,7 @@
           <p:cNvPr id="22" name="포함 열: 1, 2&#10;출력 폭: 2">
             <a:extLst xmlns:a="http://schemas.openxmlformats.org/drawingml/2006/main">
               <a:ext uri="{FF2B5EF4-FFF2-40B4-BE49-F238E27FC236}">
-                <a16:creationId xmlns:a16="http://schemas.microsoft.com/office/drawing/2014/main" id="{90D06382-AC81-4C42-821D-C8A5F26A6A59}"/>
+                <a16:creationId xmlns:a16="http://schemas.microsoft.com/office/drawing/2014/main" id="{5FDB2A8C-0D3C-4BBD-92EF-569F1943D2E9}"/>
               </a:ext>
             </a:extLst>
           </p:cNvPr>
@@ -20260,7 +20260,7 @@
           <p:cNvPr id="23" name="답을 파일의 계약과 연결해 확인했다">
             <a:extLst xmlns:a="http://schemas.openxmlformats.org/drawingml/2006/main">
               <a:ext uri="{FF2B5EF4-FFF2-40B4-BE49-F238E27FC236}">
-                <a16:creationId xmlns:a16="http://schemas.microsoft.com/office/drawing/2014/main" id="{426E5C7C-A2FF-4E95-B41F-1CD9787F0A0A}"/>
+                <a16:creationId xmlns:a16="http://schemas.microsoft.com/office/drawing/2014/main" id="{71C1A8FA-AAC9-4DD3-BAD8-472F5894A1CB}"/>
               </a:ext>
             </a:extLst>
           </p:cNvPr>
@@ -20416,7 +20416,7 @@
     </p:spTree>
     <p:extLst>
       <p:ext uri="{BB962C8B-B14F-4D97-AF65-F5344CB8AC3E}">
-        <p14:creationId xmlns:p14="http://schemas.microsoft.com/office/powerpoint/2010/main" val="605017270"/>
+        <p14:creationId xmlns:p14="http://schemas.microsoft.com/office/powerpoint/2010/main" val="236469040"/>
       </p:ext>
     </p:extLst>
   </p:cSld>
@@ -20447,7 +20447,7 @@
           <p:cNvPr id="24" name="ACT 2 · 두 Task의 문서 접근 비교">
             <a:extLst xmlns:a="http://schemas.openxmlformats.org/drawingml/2006/main">
               <a:ext uri="{FF2B5EF4-FFF2-40B4-BE49-F238E27FC236}">
-                <a16:creationId xmlns:a16="http://schemas.microsoft.com/office/drawing/2014/main" id="{4A128044-3E43-47C2-974E-7764B8CD3836}"/>
+                <a16:creationId xmlns:a16="http://schemas.microsoft.com/office/drawing/2014/main" id="{04A5AB56-0D43-47F0-8073-88D17FE5FDDA}"/>
               </a:ext>
             </a:extLst>
           </p:cNvPr>
@@ -20605,7 +20605,7 @@
           <p:cNvPr id="2" name="S35">
             <a:extLst xmlns:a="http://schemas.openxmlformats.org/drawingml/2006/main">
               <a:ext uri="{FF2B5EF4-FFF2-40B4-BE49-F238E27FC236}">
-                <a16:creationId xmlns:a16="http://schemas.microsoft.com/office/drawing/2014/main" id="{8DFF26C7-2ECA-44F6-8959-DD29A04B668B}"/>
+                <a16:creationId xmlns:a16="http://schemas.microsoft.com/office/drawing/2014/main" id="{801FE131-DD97-42E7-84E4-0D784AC856E5}"/>
               </a:ext>
             </a:extLst>
           </p:cNvPr>
@@ -20763,7 +20763,7 @@
           <p:cNvPr id="3" name="Task별 접근은 달랐지만 완벽하지는 않다">
             <a:extLst xmlns:a="http://schemas.openxmlformats.org/drawingml/2006/main">
               <a:ext uri="{FF2B5EF4-FFF2-40B4-BE49-F238E27FC236}">
-                <a16:creationId xmlns:a16="http://schemas.microsoft.com/office/drawing/2014/main" id="{C156D1E6-467C-4BFD-93BC-81C34B84A912}"/>
+                <a16:creationId xmlns:a16="http://schemas.microsoft.com/office/drawing/2014/main" id="{AC40988B-181F-436A-8440-4956DFCC19DC}"/>
               </a:ext>
             </a:extLst>
           </p:cNvPr>
@@ -20921,7 +20921,7 @@
           <p:cNvPr id="4" name="">
             <a:extLst xmlns:a="http://schemas.openxmlformats.org/drawingml/2006/main">
               <a:ext uri="{FF2B5EF4-FFF2-40B4-BE49-F238E27FC236}">
-                <a16:creationId xmlns:a16="http://schemas.microsoft.com/office/drawing/2014/main" id="{A9E5AFC1-017A-4528-B272-9B36741BDBB7}"/>
+                <a16:creationId xmlns:a16="http://schemas.microsoft.com/office/drawing/2014/main" id="{7181700F-FE48-4158-AC7B-934B8E392987}"/>
               </a:ext>
             </a:extLst>
           </p:cNvPr>
@@ -20952,7 +20952,7 @@
           <p:cNvPr id="5" name="TRIAL-005A/B · 실제 접근 기록을 요약한 비교">
             <a:extLst xmlns:a="http://schemas.openxmlformats.org/drawingml/2006/main">
               <a:ext uri="{FF2B5EF4-FFF2-40B4-BE49-F238E27FC236}">
-                <a16:creationId xmlns:a16="http://schemas.microsoft.com/office/drawing/2014/main" id="{FD9F3F32-A30F-44DF-97BE-0769541ECE71}"/>
+                <a16:creationId xmlns:a16="http://schemas.microsoft.com/office/drawing/2014/main" id="{916F1839-F329-4250-89EE-CBE9696191AA}"/>
               </a:ext>
             </a:extLst>
           </p:cNvPr>
@@ -21110,7 +21110,7 @@
           <p:cNvPr id="6" name="완벽한 Routing 미입증 · 토큰 절약·성능 개선 미측정 · 실행 간 변동 존재">
             <a:extLst xmlns:a="http://schemas.openxmlformats.org/drawingml/2006/main">
               <a:ext uri="{FF2B5EF4-FFF2-40B4-BE49-F238E27FC236}">
-                <a16:creationId xmlns:a16="http://schemas.microsoft.com/office/drawing/2014/main" id="{77E63E57-29C0-4E99-92D1-43333F870F01}"/>
+                <a16:creationId xmlns:a16="http://schemas.microsoft.com/office/drawing/2014/main" id="{7F5DFF7A-C702-44FE-85DE-D7F9D37048C9}"/>
               </a:ext>
             </a:extLst>
           </p:cNvPr>
@@ -21268,7 +21268,7 @@
           <p:cNvPr id="7" name="같은 Repository에서 질문이 달랐다">
             <a:extLst xmlns:a="http://schemas.openxmlformats.org/drawingml/2006/main">
               <a:ext uri="{FF2B5EF4-FFF2-40B4-BE49-F238E27FC236}">
-                <a16:creationId xmlns:a16="http://schemas.microsoft.com/office/drawing/2014/main" id="{3DE70434-E7FC-4885-9137-9D22C7B8502C}"/>
+                <a16:creationId xmlns:a16="http://schemas.microsoft.com/office/drawing/2014/main" id="{490C8803-89C0-4781-922D-ED18B1BB6F31}"/>
               </a:ext>
             </a:extLst>
           </p:cNvPr>
@@ -21426,7 +21426,7 @@
           <p:cNvPr id="8" name="문서">
             <a:extLst xmlns:a="http://schemas.openxmlformats.org/drawingml/2006/main">
               <a:ext uri="{FF2B5EF4-FFF2-40B4-BE49-F238E27FC236}">
-                <a16:creationId xmlns:a16="http://schemas.microsoft.com/office/drawing/2014/main" id="{0CB7955D-49DF-4540-B485-12A69601044B}"/>
+                <a16:creationId xmlns:a16="http://schemas.microsoft.com/office/drawing/2014/main" id="{39F4EF3C-603A-48DF-AB47-879AB5951D70}"/>
               </a:ext>
             </a:extLst>
           </p:cNvPr>
@@ -21584,7 +21584,7 @@
           <p:cNvPr id="9" name="A · crop 계약">
             <a:extLst xmlns:a="http://schemas.openxmlformats.org/drawingml/2006/main">
               <a:ext uri="{FF2B5EF4-FFF2-40B4-BE49-F238E27FC236}">
-                <a16:creationId xmlns:a16="http://schemas.microsoft.com/office/drawing/2014/main" id="{F81006EF-180D-4EA1-A4D5-C26410B90996}"/>
+                <a16:creationId xmlns:a16="http://schemas.microsoft.com/office/drawing/2014/main" id="{C62D673F-D65B-416E-BDF5-8AD7E546270C}"/>
               </a:ext>
             </a:extLst>
           </p:cNvPr>
@@ -21742,7 +21742,7 @@
           <p:cNvPr id="10" name="B · 실행 의존성">
             <a:extLst xmlns:a="http://schemas.openxmlformats.org/drawingml/2006/main">
               <a:ext uri="{FF2B5EF4-FFF2-40B4-BE49-F238E27FC236}">
-                <a16:creationId xmlns:a16="http://schemas.microsoft.com/office/drawing/2014/main" id="{DC6B8383-9195-4502-BB8E-62C368DDB09A}"/>
+                <a16:creationId xmlns:a16="http://schemas.microsoft.com/office/drawing/2014/main" id="{8B2928E1-DB2D-4965-8D2B-7E39E33D954C}"/>
               </a:ext>
             </a:extLst>
           </p:cNvPr>
@@ -21900,7 +21900,7 @@
           <p:cNvPr id="11" name="">
             <a:extLst xmlns:a="http://schemas.openxmlformats.org/drawingml/2006/main">
               <a:ext uri="{FF2B5EF4-FFF2-40B4-BE49-F238E27FC236}">
-                <a16:creationId xmlns:a16="http://schemas.microsoft.com/office/drawing/2014/main" id="{FE7BDF5E-F3FB-4004-837A-EC8C366EA088}"/>
+                <a16:creationId xmlns:a16="http://schemas.microsoft.com/office/drawing/2014/main" id="{06B0877A-27D7-4598-A852-6BB06C593C99}"/>
               </a:ext>
             </a:extLst>
           </p:cNvPr>
@@ -21931,7 +21931,7 @@
           <p:cNvPr id="12" name="image-contracts.md">
             <a:extLst xmlns:a="http://schemas.openxmlformats.org/drawingml/2006/main">
               <a:ext uri="{FF2B5EF4-FFF2-40B4-BE49-F238E27FC236}">
-                <a16:creationId xmlns:a16="http://schemas.microsoft.com/office/drawing/2014/main" id="{0A18AD48-056E-43B6-B3D4-E63ECFE3986E}"/>
+                <a16:creationId xmlns:a16="http://schemas.microsoft.com/office/drawing/2014/main" id="{ADFDE182-5F9E-4564-8C69-809D4C9BC1A4}"/>
               </a:ext>
             </a:extLst>
           </p:cNvPr>
@@ -22089,7 +22089,7 @@
           <p:cNvPr id="13" name="읽음">
             <a:extLst xmlns:a="http://schemas.openxmlformats.org/drawingml/2006/main">
               <a:ext uri="{FF2B5EF4-FFF2-40B4-BE49-F238E27FC236}">
-                <a16:creationId xmlns:a16="http://schemas.microsoft.com/office/drawing/2014/main" id="{5BB22216-FAFA-427A-B872-340475163066}"/>
+                <a16:creationId xmlns:a16="http://schemas.microsoft.com/office/drawing/2014/main" id="{EBB8F1B8-1AF2-4784-9B4B-22F373E86452}"/>
               </a:ext>
             </a:extLst>
           </p:cNvPr>
@@ -22247,7 +22247,7 @@
           <p:cNvPr id="14" name="읽지 않음">
             <a:extLst xmlns:a="http://schemas.openxmlformats.org/drawingml/2006/main">
               <a:ext uri="{FF2B5EF4-FFF2-40B4-BE49-F238E27FC236}">
-                <a16:creationId xmlns:a16="http://schemas.microsoft.com/office/drawing/2014/main" id="{D97B6277-984A-49E3-8492-E7D091445205}"/>
+                <a16:creationId xmlns:a16="http://schemas.microsoft.com/office/drawing/2014/main" id="{C15FC24C-35BA-415E-8ABA-A59A38CDC6C7}"/>
               </a:ext>
             </a:extLst>
           </p:cNvPr>
@@ -22405,7 +22405,7 @@
           <p:cNvPr id="15" name="">
             <a:extLst xmlns:a="http://schemas.openxmlformats.org/drawingml/2006/main">
               <a:ext uri="{FF2B5EF4-FFF2-40B4-BE49-F238E27FC236}">
-                <a16:creationId xmlns:a16="http://schemas.microsoft.com/office/drawing/2014/main" id="{9CA725C1-A599-46D0-9E11-C70662110594}"/>
+                <a16:creationId xmlns:a16="http://schemas.microsoft.com/office/drawing/2014/main" id="{A71D3762-20AD-42C5-9828-2E270E01600C}"/>
               </a:ext>
             </a:extLst>
           </p:cNvPr>
@@ -22436,7 +22436,7 @@
           <p:cNvPr id="16" name="architecture.md">
             <a:extLst xmlns:a="http://schemas.openxmlformats.org/drawingml/2006/main">
               <a:ext uri="{FF2B5EF4-FFF2-40B4-BE49-F238E27FC236}">
-                <a16:creationId xmlns:a16="http://schemas.microsoft.com/office/drawing/2014/main" id="{BEC8ECA0-8D3A-4DE8-A3B7-2CA4C87122A3}"/>
+                <a16:creationId xmlns:a16="http://schemas.microsoft.com/office/drawing/2014/main" id="{057917D6-D34A-4287-AD59-C10C4EEEE03B}"/>
               </a:ext>
             </a:extLst>
           </p:cNvPr>
@@ -22594,7 +22594,7 @@
           <p:cNvPr id="17" name="읽음">
             <a:extLst xmlns:a="http://schemas.openxmlformats.org/drawingml/2006/main">
               <a:ext uri="{FF2B5EF4-FFF2-40B4-BE49-F238E27FC236}">
-                <a16:creationId xmlns:a16="http://schemas.microsoft.com/office/drawing/2014/main" id="{87B940B0-BF20-4313-ABED-ABE10A7666D9}"/>
+                <a16:creationId xmlns:a16="http://schemas.microsoft.com/office/drawing/2014/main" id="{1639EA5B-54F6-4F00-B9C3-CB6C62E9C8EE}"/>
               </a:ext>
             </a:extLst>
           </p:cNvPr>
@@ -22752,7 +22752,7 @@
           <p:cNvPr id="18" name="읽음">
             <a:extLst xmlns:a="http://schemas.openxmlformats.org/drawingml/2006/main">
               <a:ext uri="{FF2B5EF4-FFF2-40B4-BE49-F238E27FC236}">
-                <a16:creationId xmlns:a16="http://schemas.microsoft.com/office/drawing/2014/main" id="{E2B7F971-85D2-4710-92F3-4A1E6B0849FF}"/>
+                <a16:creationId xmlns:a16="http://schemas.microsoft.com/office/drawing/2014/main" id="{1A5CBA30-3AFB-47FC-A8EA-E15F6BDD1398}"/>
               </a:ext>
             </a:extLst>
           </p:cNvPr>
@@ -22910,7 +22910,7 @@
           <p:cNvPr id="19" name="">
             <a:extLst xmlns:a="http://schemas.openxmlformats.org/drawingml/2006/main">
               <a:ext uri="{FF2B5EF4-FFF2-40B4-BE49-F238E27FC236}">
-                <a16:creationId xmlns:a16="http://schemas.microsoft.com/office/drawing/2014/main" id="{192E954B-0DB1-444B-A133-EEB75B5E497D}"/>
+                <a16:creationId xmlns:a16="http://schemas.microsoft.com/office/drawing/2014/main" id="{967E3E3E-46B5-499E-8D41-B17CF83FCB8D}"/>
               </a:ext>
             </a:extLst>
           </p:cNvPr>
@@ -22941,7 +22941,7 @@
           <p:cNvPr id="20" name="testing.md">
             <a:extLst xmlns:a="http://schemas.openxmlformats.org/drawingml/2006/main">
               <a:ext uri="{FF2B5EF4-FFF2-40B4-BE49-F238E27FC236}">
-                <a16:creationId xmlns:a16="http://schemas.microsoft.com/office/drawing/2014/main" id="{9BA9220B-7702-4C08-995C-BF8E7BF0D3AE}"/>
+                <a16:creationId xmlns:a16="http://schemas.microsoft.com/office/drawing/2014/main" id="{84E51FC5-3451-4969-89E5-C58C4B6005D8}"/>
               </a:ext>
             </a:extLst>
           </p:cNvPr>
@@ -23099,7 +23099,7 @@
           <p:cNvPr id="21" name="최종 실행에서 읽음">
             <a:extLst xmlns:a="http://schemas.openxmlformats.org/drawingml/2006/main">
               <a:ext uri="{FF2B5EF4-FFF2-40B4-BE49-F238E27FC236}">
-                <a16:creationId xmlns:a16="http://schemas.microsoft.com/office/drawing/2014/main" id="{5135ED6F-F1AE-49A5-A00C-0663AEEDFFC1}"/>
+                <a16:creationId xmlns:a16="http://schemas.microsoft.com/office/drawing/2014/main" id="{2620FC38-BF72-4F91-8E58-609DA5E06A23}"/>
               </a:ext>
             </a:extLst>
           </p:cNvPr>
@@ -23257,7 +23257,7 @@
           <p:cNvPr id="22" name="읽지 않음">
             <a:extLst xmlns:a="http://schemas.openxmlformats.org/drawingml/2006/main">
               <a:ext uri="{FF2B5EF4-FFF2-40B4-BE49-F238E27FC236}">
-                <a16:creationId xmlns:a16="http://schemas.microsoft.com/office/drawing/2014/main" id="{2D8976E4-E122-47AB-A987-34DBA4D2D939}"/>
+                <a16:creationId xmlns:a16="http://schemas.microsoft.com/office/drawing/2014/main" id="{CE3E6039-1507-46D3-8A90-3C6978436514}"/>
               </a:ext>
             </a:extLst>
           </p:cNvPr>
@@ -23415,7 +23415,7 @@
           <p:cNvPr id="23" name="A에는 더 넓은 읽기도 존재 · B는 설정·README·source도 확인">
             <a:extLst xmlns:a="http://schemas.openxmlformats.org/drawingml/2006/main">
               <a:ext uri="{FF2B5EF4-FFF2-40B4-BE49-F238E27FC236}">
-                <a16:creationId xmlns:a16="http://schemas.microsoft.com/office/drawing/2014/main" id="{B06CCB3E-8567-43A1-9E41-0842338686C3}"/>
+                <a16:creationId xmlns:a16="http://schemas.microsoft.com/office/drawing/2014/main" id="{9E58C67B-A677-4670-83E2-65FB2AB8821A}"/>
               </a:ext>
             </a:extLst>
           </p:cNvPr>
@@ -23571,7 +23571,7 @@
     </p:spTree>
     <p:extLst>
       <p:ext uri="{BB962C8B-B14F-4D97-AF65-F5344CB8AC3E}">
-        <p14:creationId xmlns:p14="http://schemas.microsoft.com/office/powerpoint/2010/main" val="1104866204"/>
+        <p14:creationId xmlns:p14="http://schemas.microsoft.com/office/powerpoint/2010/main" val="78806845"/>
       </p:ext>
     </p:extLst>
   </p:cSld>
@@ -23602,7 +23602,7 @@
           <p:cNvPr id="14" name="ACT 2 · 다음 문제로 넘어가기">
             <a:extLst xmlns:a="http://schemas.openxmlformats.org/drawingml/2006/main">
               <a:ext uri="{FF2B5EF4-FFF2-40B4-BE49-F238E27FC236}">
-                <a16:creationId xmlns:a16="http://schemas.microsoft.com/office/drawing/2014/main" id="{05554AD0-56BA-4942-B514-E16FEC0E989D}"/>
+                <a16:creationId xmlns:a16="http://schemas.microsoft.com/office/drawing/2014/main" id="{CF83008D-C2FB-4EB8-8847-9B518167411E}"/>
               </a:ext>
             </a:extLst>
           </p:cNvPr>
@@ -23760,7 +23760,7 @@
           <p:cNvPr id="2" name="S36">
             <a:extLst xmlns:a="http://schemas.openxmlformats.org/drawingml/2006/main">
               <a:ext uri="{FF2B5EF4-FFF2-40B4-BE49-F238E27FC236}">
-                <a16:creationId xmlns:a16="http://schemas.microsoft.com/office/drawing/2014/main" id="{02264356-D3CE-42DB-BBD0-32908E6475E3}"/>
+                <a16:creationId xmlns:a16="http://schemas.microsoft.com/office/drawing/2014/main" id="{DBAB9CC3-15D6-4020-BEBF-913560696421}"/>
               </a:ext>
             </a:extLst>
           </p:cNvPr>
@@ -23918,7 +23918,7 @@
           <p:cNvPr id="3" name="지식은 정리됐지만 절차는 반복된다">
             <a:extLst xmlns:a="http://schemas.openxmlformats.org/drawingml/2006/main">
               <a:ext uri="{FF2B5EF4-FFF2-40B4-BE49-F238E27FC236}">
-                <a16:creationId xmlns:a16="http://schemas.microsoft.com/office/drawing/2014/main" id="{4E0DA137-E634-4F1D-AA90-F5EA4D319288}"/>
+                <a16:creationId xmlns:a16="http://schemas.microsoft.com/office/drawing/2014/main" id="{1355BD05-654B-4957-A41D-DD547DD3D69D}"/>
               </a:ext>
             </a:extLst>
           </p:cNvPr>
@@ -24076,7 +24076,7 @@
           <p:cNvPr id="4" name="">
             <a:extLst xmlns:a="http://schemas.openxmlformats.org/drawingml/2006/main">
               <a:ext uri="{FF2B5EF4-FFF2-40B4-BE49-F238E27FC236}">
-                <a16:creationId xmlns:a16="http://schemas.microsoft.com/office/drawing/2014/main" id="{384426DB-C49E-4C0B-B3C9-0D60303E9F01}"/>
+                <a16:creationId xmlns:a16="http://schemas.microsoft.com/office/drawing/2014/main" id="{A26D295F-1A23-46CF-BBDC-FD8515572282}"/>
               </a:ext>
             </a:extLst>
           </p:cNvPr>
@@ -24107,7 +24107,7 @@
           <p:cNvPr id="5" name="Project Context 정리 + TRIAL-006/007의 반복 절차 · 기록 요약과 교육용 해석">
             <a:extLst xmlns:a="http://schemas.openxmlformats.org/drawingml/2006/main">
               <a:ext uri="{FF2B5EF4-FFF2-40B4-BE49-F238E27FC236}">
-                <a16:creationId xmlns:a16="http://schemas.microsoft.com/office/drawing/2014/main" id="{9C9471B4-2909-4909-84B0-E90BBEBEAEE6}"/>
+                <a16:creationId xmlns:a16="http://schemas.microsoft.com/office/drawing/2014/main" id="{94C3CE02-5559-4B7A-A71D-B1B3CAB7962D}"/>
               </a:ext>
             </a:extLst>
           </p:cNvPr>
@@ -24265,7 +24265,7 @@
           <p:cNvPr id="6" name="절차가 반복된 원인을 Prompt만으로 분리하지 않음">
             <a:extLst xmlns:a="http://schemas.openxmlformats.org/drawingml/2006/main">
               <a:ext uri="{FF2B5EF4-FFF2-40B4-BE49-F238E27FC236}">
-                <a16:creationId xmlns:a16="http://schemas.microsoft.com/office/drawing/2014/main" id="{05E37B18-321B-4796-AAAB-7222B0D17342}"/>
+                <a16:creationId xmlns:a16="http://schemas.microsoft.com/office/drawing/2014/main" id="{0C4A462E-1294-417D-822A-983068C08880}"/>
               </a:ext>
             </a:extLst>
           </p:cNvPr>
@@ -24423,7 +24423,7 @@
           <p:cNvPr id="7" name="정리한 것">
             <a:extLst xmlns:a="http://schemas.openxmlformats.org/drawingml/2006/main">
               <a:ext uri="{FF2B5EF4-FFF2-40B4-BE49-F238E27FC236}">
-                <a16:creationId xmlns:a16="http://schemas.microsoft.com/office/drawing/2014/main" id="{82011BB9-7270-47A1-8A85-98AB6B24663E}"/>
+                <a16:creationId xmlns:a16="http://schemas.microsoft.com/office/drawing/2014/main" id="{6F6FBB32-15C6-4906-9A84-8D483F8BDB25}"/>
               </a:ext>
             </a:extLst>
           </p:cNvPr>
@@ -24581,7 +24581,7 @@
           <p:cNvPr id="8" name="아직 반복되는 것">
             <a:extLst xmlns:a="http://schemas.openxmlformats.org/drawingml/2006/main">
               <a:ext uri="{FF2B5EF4-FFF2-40B4-BE49-F238E27FC236}">
-                <a16:creationId xmlns:a16="http://schemas.microsoft.com/office/drawing/2014/main" id="{CFDBE0F6-EC59-4098-A0D2-53A163892CE5}"/>
+                <a16:creationId xmlns:a16="http://schemas.microsoft.com/office/drawing/2014/main" id="{1580596F-DCE4-4D33-BB00-B1B082543E5C}"/>
               </a:ext>
             </a:extLst>
           </p:cNvPr>
@@ -24739,7 +24739,7 @@
           <p:cNvPr id="9" name="">
             <a:extLst xmlns:a="http://schemas.openxmlformats.org/drawingml/2006/main">
               <a:ext uri="{FF2B5EF4-FFF2-40B4-BE49-F238E27FC236}">
-                <a16:creationId xmlns:a16="http://schemas.microsoft.com/office/drawing/2014/main" id="{7CA09B20-4C32-4594-BC44-5C293BB40511}"/>
+                <a16:creationId xmlns:a16="http://schemas.microsoft.com/office/drawing/2014/main" id="{F0928711-3B0C-4A81-9ACC-CB8E7F934713}"/>
               </a:ext>
             </a:extLst>
           </p:cNvPr>
@@ -24770,7 +24770,7 @@
           <p:cNvPr id="10" name="">
             <a:extLst xmlns:a="http://schemas.openxmlformats.org/drawingml/2006/main">
               <a:ext uri="{FF2B5EF4-FFF2-40B4-BE49-F238E27FC236}">
-                <a16:creationId xmlns:a16="http://schemas.microsoft.com/office/drawing/2014/main" id="{36C4E41C-916E-40E2-8E77-0DD6B306C908}"/>
+                <a16:creationId xmlns:a16="http://schemas.microsoft.com/office/drawing/2014/main" id="{598934CB-CE37-472C-89CB-F8C88F7EFBAC}"/>
               </a:ext>
             </a:extLst>
           </p:cNvPr>
@@ -24801,7 +24801,7 @@
           <p:cNvPr id="11" name="현재 목표는 Prompt에&#10;공통 사실은 Project Context에&#10;상세 정보는 Routing으로">
             <a:extLst xmlns:a="http://schemas.openxmlformats.org/drawingml/2006/main">
               <a:ext uri="{FF2B5EF4-FFF2-40B4-BE49-F238E27FC236}">
-                <a16:creationId xmlns:a16="http://schemas.microsoft.com/office/drawing/2014/main" id="{3C5C677C-80A4-4939-B307-D9F361A50549}"/>
+                <a16:creationId xmlns:a16="http://schemas.microsoft.com/office/drawing/2014/main" id="{377F3E50-F927-4433-972A-1A091EA69F01}"/>
               </a:ext>
             </a:extLst>
           </p:cNvPr>
@@ -25005,7 +25005,7 @@
           <p:cNvPr id="12" name="먼저 측정하고&#10;조사한 뒤 변경하고&#10;같은 조건으로 확인해줘">
             <a:extLst xmlns:a="http://schemas.openxmlformats.org/drawingml/2006/main">
               <a:ext uri="{FF2B5EF4-FFF2-40B4-BE49-F238E27FC236}">
-                <a16:creationId xmlns:a16="http://schemas.microsoft.com/office/drawing/2014/main" id="{26BF9BB4-EF02-4995-8053-AB4BD6E4BF16}"/>
+                <a16:creationId xmlns:a16="http://schemas.microsoft.com/office/drawing/2014/main" id="{5FFD8D00-99F5-418B-B04E-9E4C94C00B9C}"/>
               </a:ext>
             </a:extLst>
           </p:cNvPr>
@@ -25206,10 +25206,10 @@
       </p:sp>
       <p:sp>
         <p:nvSpPr>
-          <p:cNvPr id="13" name="이 반복도 Context만의 문제일까?">
+          <p:cNvPr id="13" name="같은 작업 절차도 다시 써야 할까?">
             <a:extLst xmlns:a="http://schemas.openxmlformats.org/drawingml/2006/main">
               <a:ext uri="{FF2B5EF4-FFF2-40B4-BE49-F238E27FC236}">
-                <a16:creationId xmlns:a16="http://schemas.microsoft.com/office/drawing/2014/main" id="{D0C3DC79-217F-472E-89CF-2451905392C0}"/>
+                <a16:creationId xmlns:a16="http://schemas.microsoft.com/office/drawing/2014/main" id="{CE685C2C-6E93-400F-A5D4-A4E9FF183E48}"/>
               </a:ext>
             </a:extLst>
           </p:cNvPr>
@@ -25357,7 +25357,7 @@
                 <a:ea typeface="Malgun Gothic"/>
                 <a:cs typeface="Malgun Gothic"/>
               </a:rPr>
-              <a:t>이 반복도 Context만의 문제일까?</a:t>
+              <a:t>같은 작업 절차도 다시 써야 할까?</a:t>
             </a:r>
           </a:p>
         </p:txBody>
@@ -25365,7 +25365,7 @@
     </p:spTree>
     <p:extLst>
       <p:ext uri="{BB962C8B-B14F-4D97-AF65-F5344CB8AC3E}">
-        <p14:creationId xmlns:p14="http://schemas.microsoft.com/office/powerpoint/2010/main" val="1215033434"/>
+        <p14:creationId xmlns:p14="http://schemas.microsoft.com/office/powerpoint/2010/main" val="2013353700"/>
       </p:ext>
     </p:extLst>
   </p:cSld>
@@ -25396,7 +25396,7 @@
           <p:cNvPr id="26" name="ACT 2  ·  Project Context">
             <a:extLst xmlns:a="http://schemas.openxmlformats.org/drawingml/2006/main">
               <a:ext uri="{FF2B5EF4-FFF2-40B4-BE49-F238E27FC236}">
-                <a16:creationId xmlns:a16="http://schemas.microsoft.com/office/drawing/2014/main" id="{9958B87C-6B80-481B-BCDC-73697B290C35}"/>
+                <a16:creationId xmlns:a16="http://schemas.microsoft.com/office/drawing/2014/main" id="{349057BC-7840-4F59-8A64-F419E1B2461C}"/>
               </a:ext>
             </a:extLst>
           </p:cNvPr>
@@ -25554,7 +25554,7 @@
           <p:cNvPr id="2" name="S23">
             <a:extLst xmlns:a="http://schemas.openxmlformats.org/drawingml/2006/main">
               <a:ext uri="{FF2B5EF4-FFF2-40B4-BE49-F238E27FC236}">
-                <a16:creationId xmlns:a16="http://schemas.microsoft.com/office/drawing/2014/main" id="{2234AEE0-0A3C-490E-800F-76B560491D4F}"/>
+                <a16:creationId xmlns:a16="http://schemas.microsoft.com/office/drawing/2014/main" id="{7CE63E44-9518-482E-9443-2BDEA8B90F47}"/>
               </a:ext>
             </a:extLst>
           </p:cNvPr>
@@ -25712,7 +25712,7 @@
           <p:cNvPr id="3" name="작은 Project Context의 첫 기록">
             <a:extLst xmlns:a="http://schemas.openxmlformats.org/drawingml/2006/main">
               <a:ext uri="{FF2B5EF4-FFF2-40B4-BE49-F238E27FC236}">
-                <a16:creationId xmlns:a16="http://schemas.microsoft.com/office/drawing/2014/main" id="{274EEDEE-D96B-43D3-8C06-3F70F9D5B32A}"/>
+                <a16:creationId xmlns:a16="http://schemas.microsoft.com/office/drawing/2014/main" id="{3BA7DC3A-FD82-4EA7-8F9F-0B5D7747FC61}"/>
               </a:ext>
             </a:extLst>
           </p:cNvPr>
@@ -25870,7 +25870,7 @@
           <p:cNvPr id="4" name="">
             <a:extLst xmlns:a="http://schemas.openxmlformats.org/drawingml/2006/main">
               <a:ext uri="{FF2B5EF4-FFF2-40B4-BE49-F238E27FC236}">
-                <a16:creationId xmlns:a16="http://schemas.microsoft.com/office/drawing/2014/main" id="{27C1BB95-7E70-437F-9CB6-CAD27318C8F9}"/>
+                <a16:creationId xmlns:a16="http://schemas.microsoft.com/office/drawing/2014/main" id="{01FD38E5-0A74-4131-8B22-0BDE9A0316D5}"/>
               </a:ext>
             </a:extLst>
           </p:cNvPr>
@@ -25901,7 +25901,7 @@
           <p:cNvPr id="5" name="OBSERVED PRODUCT  |  STATE-01 · AGENTS.md 실제 원문 발췌">
             <a:extLst xmlns:a="http://schemas.openxmlformats.org/drawingml/2006/main">
               <a:ext uri="{FF2B5EF4-FFF2-40B4-BE49-F238E27FC236}">
-                <a16:creationId xmlns:a16="http://schemas.microsoft.com/office/drawing/2014/main" id="{7D77AFA1-8680-409D-8890-5171C0694551}"/>
+                <a16:creationId xmlns:a16="http://schemas.microsoft.com/office/drawing/2014/main" id="{D1735B73-4D65-4DF6-8774-4FFD741E48E3}"/>
               </a:ext>
             </a:extLst>
           </p:cNvPr>
@@ -26059,7 +26059,7 @@
           <p:cNvPr id="6" name="파일의 내용과 기록 위치를 보여주는 장 · Agent의 활용 관찰은 다음 장에서 확인">
             <a:extLst xmlns:a="http://schemas.openxmlformats.org/drawingml/2006/main">
               <a:ext uri="{FF2B5EF4-FFF2-40B4-BE49-F238E27FC236}">
-                <a16:creationId xmlns:a16="http://schemas.microsoft.com/office/drawing/2014/main" id="{55A5457B-D776-4018-A3CF-E1A109CB7378}"/>
+                <a16:creationId xmlns:a16="http://schemas.microsoft.com/office/drawing/2014/main" id="{58731211-54B7-4563-A534-9751537FD8D4}"/>
               </a:ext>
             </a:extLst>
           </p:cNvPr>
@@ -26217,7 +26217,7 @@
           <p:cNvPr id="7" name="반복해서 설명하던 내용을 저장소에 남겼다">
             <a:extLst xmlns:a="http://schemas.openxmlformats.org/drawingml/2006/main">
               <a:ext uri="{FF2B5EF4-FFF2-40B4-BE49-F238E27FC236}">
-                <a16:creationId xmlns:a16="http://schemas.microsoft.com/office/drawing/2014/main" id="{07D14E0C-1522-4CC9-984A-F53ABB297626}"/>
+                <a16:creationId xmlns:a16="http://schemas.microsoft.com/office/drawing/2014/main" id="{E99C2490-4052-4209-8303-D26A69DE0B9D}"/>
               </a:ext>
             </a:extLst>
           </p:cNvPr>
@@ -26375,7 +26375,7 @@
           <p:cNvPr id="8" name="AGENTS.md">
             <a:extLst xmlns:a="http://schemas.openxmlformats.org/drawingml/2006/main">
               <a:ext uri="{FF2B5EF4-FFF2-40B4-BE49-F238E27FC236}">
-                <a16:creationId xmlns:a16="http://schemas.microsoft.com/office/drawing/2014/main" id="{9686C7ED-65D1-47BF-BC3D-ADCF5C32BC18}"/>
+                <a16:creationId xmlns:a16="http://schemas.microsoft.com/office/drawing/2014/main" id="{B3774276-4EB4-4180-AA3F-4390092DDFE9}"/>
               </a:ext>
             </a:extLst>
           </p:cNvPr>
@@ -26533,7 +26533,7 @@
           <p:cNvPr id="9" name="STATE-00-FIXED → STATE-01">
             <a:extLst xmlns:a="http://schemas.openxmlformats.org/drawingml/2006/main">
               <a:ext uri="{FF2B5EF4-FFF2-40B4-BE49-F238E27FC236}">
-                <a16:creationId xmlns:a16="http://schemas.microsoft.com/office/drawing/2014/main" id="{D6CC100E-5959-4CC0-BBD5-4795EE27AC84}"/>
+                <a16:creationId xmlns:a16="http://schemas.microsoft.com/office/drawing/2014/main" id="{B9C1F748-71EB-4FA8-9FBA-8FD0B672089B}"/>
               </a:ext>
             </a:extLst>
           </p:cNvPr>
@@ -26691,7 +26691,7 @@
           <p:cNvPr id="10" name="">
             <a:extLst xmlns:a="http://schemas.openxmlformats.org/drawingml/2006/main">
               <a:ext uri="{FF2B5EF4-FFF2-40B4-BE49-F238E27FC236}">
-                <a16:creationId xmlns:a16="http://schemas.microsoft.com/office/drawing/2014/main" id="{6DB6EB04-8CFB-412B-9E7A-3E71C8F0C424}"/>
+                <a16:creationId xmlns:a16="http://schemas.microsoft.com/office/drawing/2014/main" id="{A6BA5DE7-F4F8-4F1A-801B-06944455D861}"/>
               </a:ext>
             </a:extLst>
           </p:cNvPr>
@@ -26722,7 +26722,7 @@
           <p:cNvPr id="11" name="프로젝트 목적">
             <a:extLst xmlns:a="http://schemas.openxmlformats.org/drawingml/2006/main">
               <a:ext uri="{FF2B5EF4-FFF2-40B4-BE49-F238E27FC236}">
-                <a16:creationId xmlns:a16="http://schemas.microsoft.com/office/drawing/2014/main" id="{B14A6535-A3DD-43A1-9507-111E9A0EDA6F}"/>
+                <a16:creationId xmlns:a16="http://schemas.microsoft.com/office/drawing/2014/main" id="{7E3287D2-828E-434D-B6BF-2095AD45CB7F}"/>
               </a:ext>
             </a:extLst>
           </p:cNvPr>
@@ -26880,7 +26880,7 @@
           <p:cNvPr id="12" name="Local grayscale image-processing CLI using synthetic ASCII P">
             <a:extLst xmlns:a="http://schemas.openxmlformats.org/drawingml/2006/main">
               <a:ext uri="{FF2B5EF4-FFF2-40B4-BE49-F238E27FC236}">
-                <a16:creationId xmlns:a16="http://schemas.microsoft.com/office/drawing/2014/main" id="{7FD4485A-E3CA-48CC-AA34-0CF71D3BF598}"/>
+                <a16:creationId xmlns:a16="http://schemas.microsoft.com/office/drawing/2014/main" id="{8C25F2B5-3ED4-4C9B-9A3C-662DA293DB20}"/>
               </a:ext>
             </a:extLst>
           </p:cNvPr>
@@ -27060,7 +27060,7 @@
           <p:cNvPr id="13" name="로컬 합성 이미지로 동작하는 흑백 처리 CLI">
             <a:extLst xmlns:a="http://schemas.openxmlformats.org/drawingml/2006/main">
               <a:ext uri="{FF2B5EF4-FFF2-40B4-BE49-F238E27FC236}">
-                <a16:creationId xmlns:a16="http://schemas.microsoft.com/office/drawing/2014/main" id="{65DC89EE-5318-41B9-A652-FFE7F2209CC8}"/>
+                <a16:creationId xmlns:a16="http://schemas.microsoft.com/office/drawing/2014/main" id="{6E78A0DB-9CA4-4F28-A036-02DA4C74B7FC}"/>
               </a:ext>
             </a:extLst>
           </p:cNvPr>
@@ -27218,7 +27218,7 @@
           <p:cNvPr id="14" name="">
             <a:extLst xmlns:a="http://schemas.openxmlformats.org/drawingml/2006/main">
               <a:ext uri="{FF2B5EF4-FFF2-40B4-BE49-F238E27FC236}">
-                <a16:creationId xmlns:a16="http://schemas.microsoft.com/office/drawing/2014/main" id="{281A6950-B96C-4ACE-9C31-CF446B8C7C74}"/>
+                <a16:creationId xmlns:a16="http://schemas.microsoft.com/office/drawing/2014/main" id="{A7003973-50F5-484F-8441-830B2ADE1461}"/>
               </a:ext>
             </a:extLst>
           </p:cNvPr>
@@ -27249,7 +27249,7 @@
           <p:cNvPr id="15" name="실행 방법">
             <a:extLst xmlns:a="http://schemas.openxmlformats.org/drawingml/2006/main">
               <a:ext uri="{FF2B5EF4-FFF2-40B4-BE49-F238E27FC236}">
-                <a16:creationId xmlns:a16="http://schemas.microsoft.com/office/drawing/2014/main" id="{CAA449D3-A6DF-4980-8D66-0353EA576A58}"/>
+                <a16:creationId xmlns:a16="http://schemas.microsoft.com/office/drawing/2014/main" id="{258D42E0-2F31-42FF-8B73-D181AFB7222C}"/>
               </a:ext>
             </a:extLst>
           </p:cNvPr>
@@ -27407,7 +27407,7 @@
           <p:cNvPr id="16" name="Use the prepared build and CLI commands documented in `READM">
             <a:extLst xmlns:a="http://schemas.openxmlformats.org/drawingml/2006/main">
               <a:ext uri="{FF2B5EF4-FFF2-40B4-BE49-F238E27FC236}">
-                <a16:creationId xmlns:a16="http://schemas.microsoft.com/office/drawing/2014/main" id="{C626FBAE-81E9-4D79-8442-1E95E61E09D2}"/>
+                <a16:creationId xmlns:a16="http://schemas.microsoft.com/office/drawing/2014/main" id="{E2BAF48C-4267-4A6E-9165-6991287FED9F}"/>
               </a:ext>
             </a:extLst>
           </p:cNvPr>
@@ -27587,7 +27587,7 @@
           <p:cNvPr id="17" name="실행 방법은 README에서 확인">
             <a:extLst xmlns:a="http://schemas.openxmlformats.org/drawingml/2006/main">
               <a:ext uri="{FF2B5EF4-FFF2-40B4-BE49-F238E27FC236}">
-                <a16:creationId xmlns:a16="http://schemas.microsoft.com/office/drawing/2014/main" id="{467E8744-1D66-4DAD-B35E-39ADC5FC0C1F}"/>
+                <a16:creationId xmlns:a16="http://schemas.microsoft.com/office/drawing/2014/main" id="{AD968EAE-6C97-485B-9F17-439C7255CB3E}"/>
               </a:ext>
             </a:extLst>
           </p:cNvPr>
@@ -27745,7 +27745,7 @@
           <p:cNvPr id="18" name="">
             <a:extLst xmlns:a="http://schemas.openxmlformats.org/drawingml/2006/main">
               <a:ext uri="{FF2B5EF4-FFF2-40B4-BE49-F238E27FC236}">
-                <a16:creationId xmlns:a16="http://schemas.microsoft.com/office/drawing/2014/main" id="{E7DCB5F9-7985-47E1-84BF-78AA6F86AB20}"/>
+                <a16:creationId xmlns:a16="http://schemas.microsoft.com/office/drawing/2014/main" id="{6D8C04D3-A415-4827-89E0-7DECA6EB338F}"/>
               </a:ext>
             </a:extLst>
           </p:cNvPr>
@@ -27776,7 +27776,7 @@
           <p:cNvPr id="19" name="테스트 명령">
             <a:extLst xmlns:a="http://schemas.openxmlformats.org/drawingml/2006/main">
               <a:ext uri="{FF2B5EF4-FFF2-40B4-BE49-F238E27FC236}">
-                <a16:creationId xmlns:a16="http://schemas.microsoft.com/office/drawing/2014/main" id="{44293AE0-1138-4B6D-A4B1-6B26B40BB7DA}"/>
+                <a16:creationId xmlns:a16="http://schemas.microsoft.com/office/drawing/2014/main" id="{D26E96CA-E5BF-49DE-B466-8A02FE9E9FD5}"/>
               </a:ext>
             </a:extLst>
           </p:cNvPr>
@@ -27934,7 +27934,7 @@
           <p:cNvPr id="20" name="PYTHONPATH=src python3 -m unittest discover -s tests -v">
             <a:extLst xmlns:a="http://schemas.openxmlformats.org/drawingml/2006/main">
               <a:ext uri="{FF2B5EF4-FFF2-40B4-BE49-F238E27FC236}">
-                <a16:creationId xmlns:a16="http://schemas.microsoft.com/office/drawing/2014/main" id="{2494BE0A-4E70-4266-86CB-53CA59A4ED90}"/>
+                <a16:creationId xmlns:a16="http://schemas.microsoft.com/office/drawing/2014/main" id="{66BFE832-4080-4243-9360-CFE64AB66268}"/>
               </a:ext>
             </a:extLst>
           </p:cNvPr>
@@ -28092,7 +28092,7 @@
           <p:cNvPr id="21" name="반복해서 쓸 테스트 명령">
             <a:extLst xmlns:a="http://schemas.openxmlformats.org/drawingml/2006/main">
               <a:ext uri="{FF2B5EF4-FFF2-40B4-BE49-F238E27FC236}">
-                <a16:creationId xmlns:a16="http://schemas.microsoft.com/office/drawing/2014/main" id="{9D7FCA48-7E4D-4919-90A0-94439500D35F}"/>
+                <a16:creationId xmlns:a16="http://schemas.microsoft.com/office/drawing/2014/main" id="{7DA5375C-261F-490E-A3BE-D2A871E4A0D8}"/>
               </a:ext>
             </a:extLst>
           </p:cNvPr>
@@ -28250,7 +28250,7 @@
           <p:cNvPr id="22" name="">
             <a:extLst xmlns:a="http://schemas.openxmlformats.org/drawingml/2006/main">
               <a:ext uri="{FF2B5EF4-FFF2-40B4-BE49-F238E27FC236}">
-                <a16:creationId xmlns:a16="http://schemas.microsoft.com/office/drawing/2014/main" id="{A51FAEA0-477B-429E-B98D-5DE1881D6192}"/>
+                <a16:creationId xmlns:a16="http://schemas.microsoft.com/office/drawing/2014/main" id="{AEA8A73F-2250-42B9-96FE-0718CB3B1C1E}"/>
               </a:ext>
             </a:extLst>
           </p:cNvPr>
@@ -28281,7 +28281,7 @@
           <p:cNvPr id="23" name="기본 제약">
             <a:extLst xmlns:a="http://schemas.openxmlformats.org/drawingml/2006/main">
               <a:ext uri="{FF2B5EF4-FFF2-40B4-BE49-F238E27FC236}">
-                <a16:creationId xmlns:a16="http://schemas.microsoft.com/office/drawing/2014/main" id="{D858F414-874E-444D-8108-7CEB22AB1B09}"/>
+                <a16:creationId xmlns:a16="http://schemas.microsoft.com/office/drawing/2014/main" id="{DEEE32F9-7084-4087-9545-3621A2E9406C}"/>
               </a:ext>
             </a:extLst>
           </p:cNvPr>
@@ -28439,7 +28439,7 @@
           <p:cNvPr id="24" name="Keep changes scoped and verify relevant behavior.">
             <a:extLst xmlns:a="http://schemas.openxmlformats.org/drawingml/2006/main">
               <a:ext uri="{FF2B5EF4-FFF2-40B4-BE49-F238E27FC236}">
-                <a16:creationId xmlns:a16="http://schemas.microsoft.com/office/drawing/2014/main" id="{45C1DEAB-B734-475C-9860-9BE1429813E2}"/>
+                <a16:creationId xmlns:a16="http://schemas.microsoft.com/office/drawing/2014/main" id="{AF8CFBA1-C814-46B1-8963-4A6F5E4B6BFC}"/>
               </a:ext>
             </a:extLst>
           </p:cNvPr>
@@ -28619,7 +28619,7 @@
           <p:cNvPr id="25" name="범위를 지키고 관련 동작을 검증">
             <a:extLst xmlns:a="http://schemas.openxmlformats.org/drawingml/2006/main">
               <a:ext uri="{FF2B5EF4-FFF2-40B4-BE49-F238E27FC236}">
-                <a16:creationId xmlns:a16="http://schemas.microsoft.com/office/drawing/2014/main" id="{A9EBB667-6194-42B5-9D12-53C6AC3DD524}"/>
+                <a16:creationId xmlns:a16="http://schemas.microsoft.com/office/drawing/2014/main" id="{94187C73-0003-41E8-A209-D019140523D2}"/>
               </a:ext>
             </a:extLst>
           </p:cNvPr>
@@ -28775,7 +28775,7 @@
     </p:spTree>
     <p:extLst>
       <p:ext uri="{BB962C8B-B14F-4D97-AF65-F5344CB8AC3E}">
-        <p14:creationId xmlns:p14="http://schemas.microsoft.com/office/powerpoint/2010/main" val="650383630"/>
+        <p14:creationId xmlns:p14="http://schemas.microsoft.com/office/powerpoint/2010/main" val="1319496343"/>
       </p:ext>
     </p:extLst>
   </p:cSld>
@@ -28806,7 +28806,7 @@
           <p:cNvPr id="23" name="ACT 2 · 지침을 활용한 관찰">
             <a:extLst xmlns:a="http://schemas.openxmlformats.org/drawingml/2006/main">
               <a:ext uri="{FF2B5EF4-FFF2-40B4-BE49-F238E27FC236}">
-                <a16:creationId xmlns:a16="http://schemas.microsoft.com/office/drawing/2014/main" id="{0C9A5F2C-C369-4A18-977C-9DFD5761115C}"/>
+                <a16:creationId xmlns:a16="http://schemas.microsoft.com/office/drawing/2014/main" id="{A2D23296-6BC9-4F9A-BC76-A9B5A65CC654}"/>
               </a:ext>
             </a:extLst>
           </p:cNvPr>
@@ -28964,7 +28964,7 @@
           <p:cNvPr id="2" name="S24">
             <a:extLst xmlns:a="http://schemas.openxmlformats.org/drawingml/2006/main">
               <a:ext uri="{FF2B5EF4-FFF2-40B4-BE49-F238E27FC236}">
-                <a16:creationId xmlns:a16="http://schemas.microsoft.com/office/drawing/2014/main" id="{1347E4EA-C07A-4507-90EE-4788E41F70BB}"/>
+                <a16:creationId xmlns:a16="http://schemas.microsoft.com/office/drawing/2014/main" id="{4754E805-026F-499E-BE77-B49D55EBF944}"/>
               </a:ext>
             </a:extLst>
           </p:cNvPr>
@@ -29122,7 +29122,7 @@
           <p:cNvPr id="3" name="한 번의 사용에서 확인된 것">
             <a:extLst xmlns:a="http://schemas.openxmlformats.org/drawingml/2006/main">
               <a:ext uri="{FF2B5EF4-FFF2-40B4-BE49-F238E27FC236}">
-                <a16:creationId xmlns:a16="http://schemas.microsoft.com/office/drawing/2014/main" id="{16EC2C65-3157-479A-BB5E-989869890A23}"/>
+                <a16:creationId xmlns:a16="http://schemas.microsoft.com/office/drawing/2014/main" id="{519885CC-4C93-480E-AF28-44F36FFC3199}"/>
               </a:ext>
             </a:extLst>
           </p:cNvPr>
@@ -29280,7 +29280,7 @@
           <p:cNvPr id="4" name="">
             <a:extLst xmlns:a="http://schemas.openxmlformats.org/drawingml/2006/main">
               <a:ext uri="{FF2B5EF4-FFF2-40B4-BE49-F238E27FC236}">
-                <a16:creationId xmlns:a16="http://schemas.microsoft.com/office/drawing/2014/main" id="{024D5812-16C4-414E-9538-9853987CF632}"/>
+                <a16:creationId xmlns:a16="http://schemas.microsoft.com/office/drawing/2014/main" id="{30CDBD93-9ED8-43AA-A6D5-31F64EDC224D}"/>
               </a:ext>
             </a:extLst>
           </p:cNvPr>
@@ -29311,7 +29311,7 @@
           <p:cNvPr id="5" name="TRIAL-003 · Codex CLI 기록을 재구성 · 전체 테스트 11/11 PASS">
             <a:extLst xmlns:a="http://schemas.openxmlformats.org/drawingml/2006/main">
               <a:ext uri="{FF2B5EF4-FFF2-40B4-BE49-F238E27FC236}">
-                <a16:creationId xmlns:a16="http://schemas.microsoft.com/office/drawing/2014/main" id="{1822A672-41D4-4898-89D5-FE59B796E0F8}"/>
+                <a16:creationId xmlns:a16="http://schemas.microsoft.com/office/drawing/2014/main" id="{2B8CD001-3E4A-40EA-AC55-6A9299149B70}"/>
               </a:ext>
             </a:extLst>
           </p:cNvPr>
@@ -29469,7 +29469,7 @@
           <p:cNvPr id="6" name="Personal/global Skills도 실행됨 · AGENTS.md만의 독립적인 효과로 해석하지 않음">
             <a:extLst xmlns:a="http://schemas.openxmlformats.org/drawingml/2006/main">
               <a:ext uri="{FF2B5EF4-FFF2-40B4-BE49-F238E27FC236}">
-                <a16:creationId xmlns:a16="http://schemas.microsoft.com/office/drawing/2014/main" id="{82AC70B8-F49B-40C2-8736-B58F2ABC5DBF}"/>
+                <a16:creationId xmlns:a16="http://schemas.microsoft.com/office/drawing/2014/main" id="{A5225122-8A59-4A1D-A6D0-1740B9A1E38D}"/>
               </a:ext>
             </a:extLst>
           </p:cNvPr>
@@ -29627,7 +29627,7 @@
           <p:cNvPr id="7" name="요청">
             <a:extLst xmlns:a="http://schemas.openxmlformats.org/drawingml/2006/main">
               <a:ext uri="{FF2B5EF4-FFF2-40B4-BE49-F238E27FC236}">
-                <a16:creationId xmlns:a16="http://schemas.microsoft.com/office/drawing/2014/main" id="{89CAE0B1-902D-4D38-B013-72A8F4FCEC59}"/>
+                <a16:creationId xmlns:a16="http://schemas.microsoft.com/office/drawing/2014/main" id="{FC284514-D61C-49C9-B575-6568625A7097}"/>
               </a:ext>
             </a:extLst>
           </p:cNvPr>
@@ -29785,7 +29785,7 @@
           <p:cNvPr id="8" name="">
             <a:extLst xmlns:a="http://schemas.openxmlformats.org/drawingml/2006/main">
               <a:ext uri="{FF2B5EF4-FFF2-40B4-BE49-F238E27FC236}">
-                <a16:creationId xmlns:a16="http://schemas.microsoft.com/office/drawing/2014/main" id="{A3F48D44-4D82-4FEB-ADD7-D25A614B43BC}"/>
+                <a16:creationId xmlns:a16="http://schemas.microsoft.com/office/drawing/2014/main" id="{929BE0D8-B9CB-467B-AF75-293DAF100FC7}"/>
               </a:ext>
             </a:extLst>
           </p:cNvPr>
@@ -29816,7 +29816,7 @@
           <p:cNvPr id="9" name="읽은 파일">
             <a:extLst xmlns:a="http://schemas.openxmlformats.org/drawingml/2006/main">
               <a:ext uri="{FF2B5EF4-FFF2-40B4-BE49-F238E27FC236}">
-                <a16:creationId xmlns:a16="http://schemas.microsoft.com/office/drawing/2014/main" id="{3F65B181-3398-4EC6-BAE6-4455A34500CF}"/>
+                <a16:creationId xmlns:a16="http://schemas.microsoft.com/office/drawing/2014/main" id="{A98BF887-87BD-4B97-87D0-9D2362A9F147}"/>
               </a:ext>
             </a:extLst>
           </p:cNvPr>
@@ -29974,7 +29974,7 @@
           <p:cNvPr id="10" name="">
             <a:extLst xmlns:a="http://schemas.openxmlformats.org/drawingml/2006/main">
               <a:ext uri="{FF2B5EF4-FFF2-40B4-BE49-F238E27FC236}">
-                <a16:creationId xmlns:a16="http://schemas.microsoft.com/office/drawing/2014/main" id="{5D90169F-36CC-4704-84C2-0D3E63244BA4}"/>
+                <a16:creationId xmlns:a16="http://schemas.microsoft.com/office/drawing/2014/main" id="{985C2C1C-0E4E-4115-8F3E-8C30AC901A1B}"/>
               </a:ext>
             </a:extLst>
           </p:cNvPr>
@@ -30005,7 +30005,7 @@
           <p:cNvPr id="11" name="실행 기록">
             <a:extLst xmlns:a="http://schemas.openxmlformats.org/drawingml/2006/main">
               <a:ext uri="{FF2B5EF4-FFF2-40B4-BE49-F238E27FC236}">
-                <a16:creationId xmlns:a16="http://schemas.microsoft.com/office/drawing/2014/main" id="{83DEB800-689A-435F-A850-0DC92C8A9B91}"/>
+                <a16:creationId xmlns:a16="http://schemas.microsoft.com/office/drawing/2014/main" id="{D24FFCD0-78B8-4D77-B7BC-DD38903766C4}"/>
               </a:ext>
             </a:extLst>
           </p:cNvPr>
@@ -30163,7 +30163,7 @@
           <p:cNvPr id="12" name="">
             <a:extLst xmlns:a="http://schemas.openxmlformats.org/drawingml/2006/main">
               <a:ext uri="{FF2B5EF4-FFF2-40B4-BE49-F238E27FC236}">
-                <a16:creationId xmlns:a16="http://schemas.microsoft.com/office/drawing/2014/main" id="{5F01A898-2425-4398-A86A-FD2985EC6E35}"/>
+                <a16:creationId xmlns:a16="http://schemas.microsoft.com/office/drawing/2014/main" id="{D2CB4EEE-E647-4A39-BF25-469470EFDBB8}"/>
               </a:ext>
             </a:extLst>
           </p:cNvPr>
@@ -30194,7 +30194,7 @@
           <p:cNvPr id="13" name="README만 수정&#10;테스트 명령은 없음">
             <a:extLst xmlns:a="http://schemas.openxmlformats.org/drawingml/2006/main">
               <a:ext uri="{FF2B5EF4-FFF2-40B4-BE49-F238E27FC236}">
-                <a16:creationId xmlns:a16="http://schemas.microsoft.com/office/drawing/2014/main" id="{864C8771-7B09-4A7F-AAC9-E84F4E6C454C}"/>
+                <a16:creationId xmlns:a16="http://schemas.microsoft.com/office/drawing/2014/main" id="{22F58911-4EB3-47BD-B305-A5841FD1DFE5}"/>
               </a:ext>
             </a:extLst>
           </p:cNvPr>
@@ -30375,7 +30375,7 @@
           <p:cNvPr id="14" name="AGENTS.md">
             <a:extLst xmlns:a="http://schemas.openxmlformats.org/drawingml/2006/main">
               <a:ext uri="{FF2B5EF4-FFF2-40B4-BE49-F238E27FC236}">
-                <a16:creationId xmlns:a16="http://schemas.microsoft.com/office/drawing/2014/main" id="{B621C344-34B3-480D-B5FB-1E37B7E1ED5A}"/>
+                <a16:creationId xmlns:a16="http://schemas.microsoft.com/office/drawing/2014/main" id="{B3C6FD4D-5863-4E5A-91FF-B731F9BF19EF}"/>
               </a:ext>
             </a:extLst>
           </p:cNvPr>
@@ -30533,7 +30533,7 @@
           <p:cNvPr id="15" name="기록된 테스트&#10;명령을 사용">
             <a:extLst xmlns:a="http://schemas.openxmlformats.org/drawingml/2006/main">
               <a:ext uri="{FF2B5EF4-FFF2-40B4-BE49-F238E27FC236}">
-                <a16:creationId xmlns:a16="http://schemas.microsoft.com/office/drawing/2014/main" id="{6A463967-EA28-46EE-B7D2-54F86E79606C}"/>
+                <a16:creationId xmlns:a16="http://schemas.microsoft.com/office/drawing/2014/main" id="{3D199F7E-80F2-4ABB-A620-64A6C4BB2BF9}"/>
               </a:ext>
             </a:extLst>
           </p:cNvPr>
@@ -30714,7 +30714,7 @@
           <p:cNvPr id="16" name="전체 테스트">
             <a:extLst xmlns:a="http://schemas.openxmlformats.org/drawingml/2006/main">
               <a:ext uri="{FF2B5EF4-FFF2-40B4-BE49-F238E27FC236}">
-                <a16:creationId xmlns:a16="http://schemas.microsoft.com/office/drawing/2014/main" id="{DFFB7E5F-0E6B-46A4-8F2C-BEC9C6B0E343}"/>
+                <a16:creationId xmlns:a16="http://schemas.microsoft.com/office/drawing/2014/main" id="{672FC87D-AE67-48AA-B0BB-5EEA0EA8A670}"/>
               </a:ext>
             </a:extLst>
           </p:cNvPr>
@@ -30872,7 +30872,7 @@
           <p:cNvPr id="17" name="11 / 11">
             <a:extLst xmlns:a="http://schemas.openxmlformats.org/drawingml/2006/main">
               <a:ext uri="{FF2B5EF4-FFF2-40B4-BE49-F238E27FC236}">
-                <a16:creationId xmlns:a16="http://schemas.microsoft.com/office/drawing/2014/main" id="{1B78041B-5F71-47F4-B780-BFD6F3D96BF8}"/>
+                <a16:creationId xmlns:a16="http://schemas.microsoft.com/office/drawing/2014/main" id="{5D858D41-8D28-40E9-8CF3-FA8939AA18F6}"/>
               </a:ext>
             </a:extLst>
           </p:cNvPr>
@@ -31030,7 +31030,7 @@
           <p:cNvPr id="18" name="PASS">
             <a:extLst xmlns:a="http://schemas.openxmlformats.org/drawingml/2006/main">
               <a:ext uri="{FF2B5EF4-FFF2-40B4-BE49-F238E27FC236}">
-                <a16:creationId xmlns:a16="http://schemas.microsoft.com/office/drawing/2014/main" id="{9989F46A-02B6-4273-89CA-589871CEB26E}"/>
+                <a16:creationId xmlns:a16="http://schemas.microsoft.com/office/drawing/2014/main" id="{0BF5E292-B589-41F0-8237-37BAA36A3A07}"/>
               </a:ext>
             </a:extLst>
           </p:cNvPr>
@@ -31188,7 +31188,7 @@
           <p:cNvPr id="19" name="">
             <a:extLst xmlns:a="http://schemas.openxmlformats.org/drawingml/2006/main">
               <a:ext uri="{FF2B5EF4-FFF2-40B4-BE49-F238E27FC236}">
-                <a16:creationId xmlns:a16="http://schemas.microsoft.com/office/drawing/2014/main" id="{4B3A5E1B-E60E-44AC-8781-EE83D3B5C936}"/>
+                <a16:creationId xmlns:a16="http://schemas.microsoft.com/office/drawing/2014/main" id="{622B5471-6D19-4E91-8D51-8DA19B6ABE99}"/>
               </a:ext>
             </a:extLst>
           </p:cNvPr>
@@ -31218,7 +31218,7 @@
           <p:cNvPr id="20" name="">
             <a:extLst xmlns:a="http://schemas.openxmlformats.org/drawingml/2006/main">
               <a:ext uri="{FF2B5EF4-FFF2-40B4-BE49-F238E27FC236}">
-                <a16:creationId xmlns:a16="http://schemas.microsoft.com/office/drawing/2014/main" id="{4CB0FFB3-3900-406E-B56D-3EB4FB67CDC7}"/>
+                <a16:creationId xmlns:a16="http://schemas.microsoft.com/office/drawing/2014/main" id="{BB77346A-BFA9-4BBB-A7D7-3E7AB0C10843}"/>
               </a:ext>
             </a:extLst>
           </p:cNvPr>
@@ -31248,7 +31248,7 @@
           <p:cNvPr id="21" name="">
             <a:extLst xmlns:a="http://schemas.openxmlformats.org/drawingml/2006/main">
               <a:ext uri="{FF2B5EF4-FFF2-40B4-BE49-F238E27FC236}">
-                <a16:creationId xmlns:a16="http://schemas.microsoft.com/office/drawing/2014/main" id="{CCEB1658-5C0C-4874-BE36-A7BCA768666A}"/>
+                <a16:creationId xmlns:a16="http://schemas.microsoft.com/office/drawing/2014/main" id="{3A4E51AC-D991-4EA9-A0A2-B933DDE3AA43}"/>
               </a:ext>
             </a:extLst>
           </p:cNvPr>
@@ -31279,7 +31279,7 @@
           <p:cNvPr id="22" name="README-only 범위는 작업 요청에도 명시돼 있었다">
             <a:extLst xmlns:a="http://schemas.openxmlformats.org/drawingml/2006/main">
               <a:ext uri="{FF2B5EF4-FFF2-40B4-BE49-F238E27FC236}">
-                <a16:creationId xmlns:a16="http://schemas.microsoft.com/office/drawing/2014/main" id="{E605644B-4ABC-4189-8B2E-E5AFDE520F6A}"/>
+                <a16:creationId xmlns:a16="http://schemas.microsoft.com/office/drawing/2014/main" id="{D2155498-BE48-4E38-A759-6D1499EABB76}"/>
               </a:ext>
             </a:extLst>
           </p:cNvPr>
@@ -31435,7 +31435,7 @@
     </p:spTree>
     <p:extLst>
       <p:ext uri="{BB962C8B-B14F-4D97-AF65-F5344CB8AC3E}">
-        <p14:creationId xmlns:p14="http://schemas.microsoft.com/office/powerpoint/2010/main" val="785939066"/>
+        <p14:creationId xmlns:p14="http://schemas.microsoft.com/office/powerpoint/2010/main" val="944586695"/>
       </p:ext>
     </p:extLst>
   </p:cSld>
@@ -31466,7 +31466,7 @@
           <p:cNvPr id="20" name="ACT 2 · 정보의 범위와 수명">
             <a:extLst xmlns:a="http://schemas.openxmlformats.org/drawingml/2006/main">
               <a:ext uri="{FF2B5EF4-FFF2-40B4-BE49-F238E27FC236}">
-                <a16:creationId xmlns:a16="http://schemas.microsoft.com/office/drawing/2014/main" id="{E7E6C23F-AB88-4A81-889C-120F417378FD}"/>
+                <a16:creationId xmlns:a16="http://schemas.microsoft.com/office/drawing/2014/main" id="{7F56C700-16E1-40BF-A711-739CA5697449}"/>
               </a:ext>
             </a:extLst>
           </p:cNvPr>
@@ -31624,7 +31624,7 @@
           <p:cNvPr id="2" name="S25">
             <a:extLst xmlns:a="http://schemas.openxmlformats.org/drawingml/2006/main">
               <a:ext uri="{FF2B5EF4-FFF2-40B4-BE49-F238E27FC236}">
-                <a16:creationId xmlns:a16="http://schemas.microsoft.com/office/drawing/2014/main" id="{B2B9AD93-36B1-432B-887D-E81DB5D5EA82}"/>
+                <a16:creationId xmlns:a16="http://schemas.microsoft.com/office/drawing/2014/main" id="{1EA67E31-9043-4924-9B4F-E9502CE7C3EA}"/>
               </a:ext>
             </a:extLst>
           </p:cNvPr>
@@ -31782,7 +31782,7 @@
           <p:cNvPr id="3" name="Task Prompt와 Project Context">
             <a:extLst xmlns:a="http://schemas.openxmlformats.org/drawingml/2006/main">
               <a:ext uri="{FF2B5EF4-FFF2-40B4-BE49-F238E27FC236}">
-                <a16:creationId xmlns:a16="http://schemas.microsoft.com/office/drawing/2014/main" id="{4F78E699-79E9-4BD3-84CE-D7ECE36463A6}"/>
+                <a16:creationId xmlns:a16="http://schemas.microsoft.com/office/drawing/2014/main" id="{2844A6FB-A62F-46AD-86B9-29781F24A711}"/>
               </a:ext>
             </a:extLst>
           </p:cNvPr>
@@ -31940,7 +31940,7 @@
           <p:cNvPr id="4" name="">
             <a:extLst xmlns:a="http://schemas.openxmlformats.org/drawingml/2006/main">
               <a:ext uri="{FF2B5EF4-FFF2-40B4-BE49-F238E27FC236}">
-                <a16:creationId xmlns:a16="http://schemas.microsoft.com/office/drawing/2014/main" id="{3DA27EE1-C293-495B-9BED-B1B84562FC58}"/>
+                <a16:creationId xmlns:a16="http://schemas.microsoft.com/office/drawing/2014/main" id="{F30F2CC4-F964-4341-8B1A-10C8055F69BB}"/>
               </a:ext>
             </a:extLst>
           </p:cNvPr>
@@ -31971,7 +31971,7 @@
           <p:cNvPr id="5" name="교육용 구분 · 현재 목표와 지속되는 프로젝트 사실">
             <a:extLst xmlns:a="http://schemas.openxmlformats.org/drawingml/2006/main">
               <a:ext uri="{FF2B5EF4-FFF2-40B4-BE49-F238E27FC236}">
-                <a16:creationId xmlns:a16="http://schemas.microsoft.com/office/drawing/2014/main" id="{528D3C6D-BA85-4329-A025-EC53914FD35C}"/>
+                <a16:creationId xmlns:a16="http://schemas.microsoft.com/office/drawing/2014/main" id="{B4A929AA-87EC-480C-A3E2-0686221CF914}"/>
               </a:ext>
             </a:extLst>
           </p:cNvPr>
@@ -32129,7 +32129,7 @@
           <p:cNvPr id="6" name="C++에서도 프로젝트 공통 제약과 이번 알고리즘 변경 조건은 범위가 다를 수 있다">
             <a:extLst xmlns:a="http://schemas.openxmlformats.org/drawingml/2006/main">
               <a:ext uri="{FF2B5EF4-FFF2-40B4-BE49-F238E27FC236}">
-                <a16:creationId xmlns:a16="http://schemas.microsoft.com/office/drawing/2014/main" id="{BC10FCAE-5A27-4BEC-8911-649F0281A1D8}"/>
+                <a16:creationId xmlns:a16="http://schemas.microsoft.com/office/drawing/2014/main" id="{C85EDD66-0377-4A27-90A1-3D775C34AD9F}"/>
               </a:ext>
             </a:extLst>
           </p:cNvPr>
@@ -32287,7 +32287,7 @@
           <p:cNvPr id="7" name="방금 본 기록을 범위와 수명으로 읽어보면">
             <a:extLst xmlns:a="http://schemas.openxmlformats.org/drawingml/2006/main">
               <a:ext uri="{FF2B5EF4-FFF2-40B4-BE49-F238E27FC236}">
-                <a16:creationId xmlns:a16="http://schemas.microsoft.com/office/drawing/2014/main" id="{9D56D658-1DA0-42A5-820C-DE236E074E90}"/>
+                <a16:creationId xmlns:a16="http://schemas.microsoft.com/office/drawing/2014/main" id="{688D7E81-338B-4D77-ADE5-E8B6380A8819}"/>
               </a:ext>
             </a:extLst>
           </p:cNvPr>
@@ -32445,7 +32445,7 @@
           <p:cNvPr id="8" name="Task Prompt">
             <a:extLst xmlns:a="http://schemas.openxmlformats.org/drawingml/2006/main">
               <a:ext uri="{FF2B5EF4-FFF2-40B4-BE49-F238E27FC236}">
-                <a16:creationId xmlns:a16="http://schemas.microsoft.com/office/drawing/2014/main" id="{CCA66B17-8937-4E1B-BF07-55DDD54F94D6}"/>
+                <a16:creationId xmlns:a16="http://schemas.microsoft.com/office/drawing/2014/main" id="{445665D9-EAB0-451A-B495-BAB5C6B30956}"/>
               </a:ext>
             </a:extLst>
           </p:cNvPr>
@@ -32603,7 +32603,7 @@
           <p:cNvPr id="9" name="Project Context">
             <a:extLst xmlns:a="http://schemas.openxmlformats.org/drawingml/2006/main">
               <a:ext uri="{FF2B5EF4-FFF2-40B4-BE49-F238E27FC236}">
-                <a16:creationId xmlns:a16="http://schemas.microsoft.com/office/drawing/2014/main" id="{AF53BCDA-5650-4BDD-8D30-BDF414D67D9A}"/>
+                <a16:creationId xmlns:a16="http://schemas.microsoft.com/office/drawing/2014/main" id="{245A52E1-5C72-4F18-9873-8FF31E0049D1}"/>
               </a:ext>
             </a:extLst>
           </p:cNvPr>
@@ -32761,7 +32761,7 @@
           <p:cNvPr id="10" name="">
             <a:extLst xmlns:a="http://schemas.openxmlformats.org/drawingml/2006/main">
               <a:ext uri="{FF2B5EF4-FFF2-40B4-BE49-F238E27FC236}">
-                <a16:creationId xmlns:a16="http://schemas.microsoft.com/office/drawing/2014/main" id="{8B13A52E-4DDD-4FBD-8CE2-EA5E3D470D63}"/>
+                <a16:creationId xmlns:a16="http://schemas.microsoft.com/office/drawing/2014/main" id="{1C5D9690-A3A3-46C9-8BCB-B7B55C646F17}"/>
               </a:ext>
             </a:extLst>
           </p:cNvPr>
@@ -32792,7 +32792,7 @@
           <p:cNvPr id="11" name="">
             <a:extLst xmlns:a="http://schemas.openxmlformats.org/drawingml/2006/main">
               <a:ext uri="{FF2B5EF4-FFF2-40B4-BE49-F238E27FC236}">
-                <a16:creationId xmlns:a16="http://schemas.microsoft.com/office/drawing/2014/main" id="{93E46D59-E35D-4DFA-9E91-64E6DB227884}"/>
+                <a16:creationId xmlns:a16="http://schemas.microsoft.com/office/drawing/2014/main" id="{65546948-7A55-44C2-A067-89F364F8E998}"/>
               </a:ext>
             </a:extLst>
           </p:cNvPr>
@@ -32823,7 +32823,7 @@
           <p:cNvPr id="12" name="지금 원하는 결과">
             <a:extLst xmlns:a="http://schemas.openxmlformats.org/drawingml/2006/main">
               <a:ext uri="{FF2B5EF4-FFF2-40B4-BE49-F238E27FC236}">
-                <a16:creationId xmlns:a16="http://schemas.microsoft.com/office/drawing/2014/main" id="{4B36D5E2-6FC5-41E1-B6E4-C34FDC91FC96}"/>
+                <a16:creationId xmlns:a16="http://schemas.microsoft.com/office/drawing/2014/main" id="{B82A0FB1-34B3-42E2-A8FD-BB29EAD17AD8}"/>
               </a:ext>
             </a:extLst>
           </p:cNvPr>
@@ -32981,7 +32981,7 @@
           <p:cNvPr id="13" name="계속 참이어야 할 사실">
             <a:extLst xmlns:a="http://schemas.openxmlformats.org/drawingml/2006/main">
               <a:ext uri="{FF2B5EF4-FFF2-40B4-BE49-F238E27FC236}">
-                <a16:creationId xmlns:a16="http://schemas.microsoft.com/office/drawing/2014/main" id="{5CFF9341-9A0C-4AB0-A2C8-9356C2964BF3}"/>
+                <a16:creationId xmlns:a16="http://schemas.microsoft.com/office/drawing/2014/main" id="{9652BF72-50BD-4810-9EF5-828B758758DF}"/>
               </a:ext>
             </a:extLst>
           </p:cNvPr>
@@ -33139,7 +33139,7 @@
           <p:cNvPr id="14" name="crop 경계 버그 수정&#10;이번에는 README만 변경">
             <a:extLst xmlns:a="http://schemas.openxmlformats.org/drawingml/2006/main">
               <a:ext uri="{FF2B5EF4-FFF2-40B4-BE49-F238E27FC236}">
-                <a16:creationId xmlns:a16="http://schemas.microsoft.com/office/drawing/2014/main" id="{8C35C97C-B7F6-408A-B42A-615BBE437670}"/>
+                <a16:creationId xmlns:a16="http://schemas.microsoft.com/office/drawing/2014/main" id="{DC600B69-E53B-42AE-88FE-094D4B4BD92A}"/>
               </a:ext>
             </a:extLst>
           </p:cNvPr>
@@ -33320,7 +33320,7 @@
           <p:cNvPr id="15" name="프로젝트의 테스트 명령&#10;의존성 추가에는 작업상 근거 필요">
             <a:extLst xmlns:a="http://schemas.openxmlformats.org/drawingml/2006/main">
               <a:ext uri="{FF2B5EF4-FFF2-40B4-BE49-F238E27FC236}">
-                <a16:creationId xmlns:a16="http://schemas.microsoft.com/office/drawing/2014/main" id="{E284939D-1830-4659-B541-A99D100BEFB3}"/>
+                <a16:creationId xmlns:a16="http://schemas.microsoft.com/office/drawing/2014/main" id="{C674801E-BA19-479A-B34B-CF5BFF13BCCE}"/>
               </a:ext>
             </a:extLst>
           </p:cNvPr>
@@ -33501,7 +33501,7 @@
           <p:cNvPr id="16" name="">
             <a:extLst xmlns:a="http://schemas.openxmlformats.org/drawingml/2006/main">
               <a:ext uri="{FF2B5EF4-FFF2-40B4-BE49-F238E27FC236}">
-                <a16:creationId xmlns:a16="http://schemas.microsoft.com/office/drawing/2014/main" id="{0AC83BD8-BB62-41CC-8AFD-A2E8E4D9B722}"/>
+                <a16:creationId xmlns:a16="http://schemas.microsoft.com/office/drawing/2014/main" id="{70FA8E34-EE53-4A07-B831-B368A23599FF}"/>
               </a:ext>
             </a:extLst>
           </p:cNvPr>
@@ -33534,7 +33534,7 @@
           <p:cNvPr id="17" name="">
             <a:extLst xmlns:a="http://schemas.openxmlformats.org/drawingml/2006/main">
               <a:ext uri="{FF2B5EF4-FFF2-40B4-BE49-F238E27FC236}">
-                <a16:creationId xmlns:a16="http://schemas.microsoft.com/office/drawing/2014/main" id="{4688040C-692E-41FC-814D-60B7702226DC}"/>
+                <a16:creationId xmlns:a16="http://schemas.microsoft.com/office/drawing/2014/main" id="{F180724F-E3FB-4334-A5BB-CAA0B7F328A5}"/>
               </a:ext>
             </a:extLst>
           </p:cNvPr>
@@ -33565,7 +33565,7 @@
           <p:cNvPr id="18" name="다음 작업에서는 목표가 달라짐">
             <a:extLst xmlns:a="http://schemas.openxmlformats.org/drawingml/2006/main">
               <a:ext uri="{FF2B5EF4-FFF2-40B4-BE49-F238E27FC236}">
-                <a16:creationId xmlns:a16="http://schemas.microsoft.com/office/drawing/2014/main" id="{73218DCA-1089-46DC-B074-18E12AE5BCEA}"/>
+                <a16:creationId xmlns:a16="http://schemas.microsoft.com/office/drawing/2014/main" id="{72DF5D90-E641-4C53-ACE6-5F56C94AFA70}"/>
               </a:ext>
             </a:extLst>
           </p:cNvPr>
@@ -33723,7 +33723,7 @@
           <p:cNvPr id="19" name="여러 작업에서 다시 참고">
             <a:extLst xmlns:a="http://schemas.openxmlformats.org/drawingml/2006/main">
               <a:ext uri="{FF2B5EF4-FFF2-40B4-BE49-F238E27FC236}">
-                <a16:creationId xmlns:a16="http://schemas.microsoft.com/office/drawing/2014/main" id="{74FF9001-6459-4A86-9000-0C32C9B775A4}"/>
+                <a16:creationId xmlns:a16="http://schemas.microsoft.com/office/drawing/2014/main" id="{F3A4C6F1-6AF8-4D0F-A80C-2321ED734B36}"/>
               </a:ext>
             </a:extLst>
           </p:cNvPr>
@@ -33879,7 +33879,7 @@
     </p:spTree>
     <p:extLst>
       <p:ext uri="{BB962C8B-B14F-4D97-AF65-F5344CB8AC3E}">
-        <p14:creationId xmlns:p14="http://schemas.microsoft.com/office/powerpoint/2010/main" val="563631186"/>
+        <p14:creationId xmlns:p14="http://schemas.microsoft.com/office/powerpoint/2010/main" val="400882369"/>
       </p:ext>
     </p:extLst>
   </p:cSld>
@@ -33910,7 +33910,7 @@
           <p:cNvPr id="26" name="ACT 2 · Context가 쌓이는 과정">
             <a:extLst xmlns:a="http://schemas.openxmlformats.org/drawingml/2006/main">
               <a:ext uri="{FF2B5EF4-FFF2-40B4-BE49-F238E27FC236}">
-                <a16:creationId xmlns:a16="http://schemas.microsoft.com/office/drawing/2014/main" id="{3854A179-C0AE-4BAA-B3E7-589D7EF45D68}"/>
+                <a16:creationId xmlns:a16="http://schemas.microsoft.com/office/drawing/2014/main" id="{1B44C9A3-6989-4BFB-AA46-D3EC70743946}"/>
               </a:ext>
             </a:extLst>
           </p:cNvPr>
@@ -34068,7 +34068,7 @@
           <p:cNvPr id="2" name="S26">
             <a:extLst xmlns:a="http://schemas.openxmlformats.org/drawingml/2006/main">
               <a:ext uri="{FF2B5EF4-FFF2-40B4-BE49-F238E27FC236}">
-                <a16:creationId xmlns:a16="http://schemas.microsoft.com/office/drawing/2014/main" id="{226F7C90-9009-4A16-8760-D21FDE3D8385}"/>
+                <a16:creationId xmlns:a16="http://schemas.microsoft.com/office/drawing/2014/main" id="{1486B537-1460-44D0-8501-7DD17C2E0BF5}"/>
               </a:ext>
             </a:extLst>
           </p:cNvPr>
@@ -34226,7 +34226,7 @@
           <p:cNvPr id="3" name="정확한 정보도 계속 늘어난다">
             <a:extLst xmlns:a="http://schemas.openxmlformats.org/drawingml/2006/main">
               <a:ext uri="{FF2B5EF4-FFF2-40B4-BE49-F238E27FC236}">
-                <a16:creationId xmlns:a16="http://schemas.microsoft.com/office/drawing/2014/main" id="{596D0212-DCAF-4B08-8DA1-AE092B135767}"/>
+                <a16:creationId xmlns:a16="http://schemas.microsoft.com/office/drawing/2014/main" id="{BE927105-068D-4639-8B53-64A4458BDEF3}"/>
               </a:ext>
             </a:extLst>
           </p:cNvPr>
@@ -34384,7 +34384,7 @@
           <p:cNvPr id="4" name="">
             <a:extLst xmlns:a="http://schemas.openxmlformats.org/drawingml/2006/main">
               <a:ext uri="{FF2B5EF4-FFF2-40B4-BE49-F238E27FC236}">
-                <a16:creationId xmlns:a16="http://schemas.microsoft.com/office/drawing/2014/main" id="{A1035FBF-16FC-427B-9DF3-94B86CEE43B5}"/>
+                <a16:creationId xmlns:a16="http://schemas.microsoft.com/office/drawing/2014/main" id="{DE72C25F-BD56-4040-A684-DBFB94CBA0E2}"/>
               </a:ext>
             </a:extLst>
           </p:cNvPr>
@@ -34415,7 +34415,7 @@
           <p:cNvPr id="5" name="STATE-01 → STATE-02 · 실제 AGENTS.md 상태 비교">
             <a:extLst xmlns:a="http://schemas.openxmlformats.org/drawingml/2006/main">
               <a:ext uri="{FF2B5EF4-FFF2-40B4-BE49-F238E27FC236}">
-                <a16:creationId xmlns:a16="http://schemas.microsoft.com/office/drawing/2014/main" id="{9555D26E-71B8-4297-9258-5F1B386DCA66}"/>
+                <a16:creationId xmlns:a16="http://schemas.microsoft.com/office/drawing/2014/main" id="{22AFF68A-878F-4960-93B0-3F830C138791}"/>
               </a:ext>
             </a:extLst>
           </p:cNvPr>
@@ -34573,7 +34573,7 @@
           <p:cNvPr id="6" name="문서 크기는 상태 식별 정보 · Context 증가가 실패를 일으켰다는 근거는 아님">
             <a:extLst xmlns:a="http://schemas.openxmlformats.org/drawingml/2006/main">
               <a:ext uri="{FF2B5EF4-FFF2-40B4-BE49-F238E27FC236}">
-                <a16:creationId xmlns:a16="http://schemas.microsoft.com/office/drawing/2014/main" id="{6CC7A320-1F12-41DC-AE76-3941B33C43E4}"/>
+                <a16:creationId xmlns:a16="http://schemas.microsoft.com/office/drawing/2014/main" id="{41524FCC-0F3A-4BBB-AEEC-C3E2E740ADE9}"/>
               </a:ext>
             </a:extLst>
           </p:cNvPr>
@@ -34731,7 +34731,7 @@
           <p:cNvPr id="7" name="STATE-01">
             <a:extLst xmlns:a="http://schemas.openxmlformats.org/drawingml/2006/main">
               <a:ext uri="{FF2B5EF4-FFF2-40B4-BE49-F238E27FC236}">
-                <a16:creationId xmlns:a16="http://schemas.microsoft.com/office/drawing/2014/main" id="{BC4BB88E-ADF2-4958-83A3-CF737B5D0308}"/>
+                <a16:creationId xmlns:a16="http://schemas.microsoft.com/office/drawing/2014/main" id="{45141453-D735-4924-86EE-EFF25B4765F2}"/>
               </a:ext>
             </a:extLst>
           </p:cNvPr>
@@ -34889,7 +34889,7 @@
           <p:cNvPr id="8" name="목적 · 실행 · 테스트&#10;기본 제약">
             <a:extLst xmlns:a="http://schemas.openxmlformats.org/drawingml/2006/main">
               <a:ext uri="{FF2B5EF4-FFF2-40B4-BE49-F238E27FC236}">
-                <a16:creationId xmlns:a16="http://schemas.microsoft.com/office/drawing/2014/main" id="{8CD0EB31-4555-480B-8A37-862B7A57A11D}"/>
+                <a16:creationId xmlns:a16="http://schemas.microsoft.com/office/drawing/2014/main" id="{0A6D8A35-44AC-466E-B52F-E851D8225AD2}"/>
               </a:ext>
             </a:extLst>
           </p:cNvPr>
@@ -35070,7 +35070,7 @@
           <p:cNvPr id="9" name="15줄 · 567 bytes">
             <a:extLst xmlns:a="http://schemas.openxmlformats.org/drawingml/2006/main">
               <a:ext uri="{FF2B5EF4-FFF2-40B4-BE49-F238E27FC236}">
-                <a16:creationId xmlns:a16="http://schemas.microsoft.com/office/drawing/2014/main" id="{4792B5C7-95CD-4EDC-9F2C-398317A821C0}"/>
+                <a16:creationId xmlns:a16="http://schemas.microsoft.com/office/drawing/2014/main" id="{92805A75-DF76-4AA3-A10A-76DC8D3390E8}"/>
               </a:ext>
             </a:extLst>
           </p:cNvPr>
@@ -35228,7 +35228,7 @@
           <p:cNvPr id="10" name="">
             <a:extLst xmlns:a="http://schemas.openxmlformats.org/drawingml/2006/main">
               <a:ext uri="{FF2B5EF4-FFF2-40B4-BE49-F238E27FC236}">
-                <a16:creationId xmlns:a16="http://schemas.microsoft.com/office/drawing/2014/main" id="{E132AC67-F35A-44FE-A5D1-0A90B16FCF29}"/>
+                <a16:creationId xmlns:a16="http://schemas.microsoft.com/office/drawing/2014/main" id="{0C43CCF3-8CE0-408A-8535-F96BF30C4B8B}"/>
               </a:ext>
             </a:extLst>
           </p:cNvPr>
@@ -35258,7 +35258,7 @@
           <p:cNvPr id="11" name="STATE-02에 추가된 실제 정보">
             <a:extLst xmlns:a="http://schemas.openxmlformats.org/drawingml/2006/main">
               <a:ext uri="{FF2B5EF4-FFF2-40B4-BE49-F238E27FC236}">
-                <a16:creationId xmlns:a16="http://schemas.microsoft.com/office/drawing/2014/main" id="{D5553769-EE02-47E6-9410-0475636FE63B}"/>
+                <a16:creationId xmlns:a16="http://schemas.microsoft.com/office/drawing/2014/main" id="{836B223B-7A4F-495A-9A45-A0CB26F7572C}"/>
               </a:ext>
             </a:extLst>
           </p:cNvPr>
@@ -35416,7 +35416,7 @@
           <p:cNvPr id="12" name="">
             <a:extLst xmlns:a="http://schemas.openxmlformats.org/drawingml/2006/main">
               <a:ext uri="{FF2B5EF4-FFF2-40B4-BE49-F238E27FC236}">
-                <a16:creationId xmlns:a16="http://schemas.microsoft.com/office/drawing/2014/main" id="{23C0CA80-BA53-4100-B63D-678FFD0C6684}"/>
+                <a16:creationId xmlns:a16="http://schemas.microsoft.com/office/drawing/2014/main" id="{C4538EAC-CF86-4B26-9219-7353E5CCBC66}"/>
               </a:ext>
             </a:extLst>
           </p:cNvPr>
@@ -35447,7 +35447,7 @@
           <p:cNvPr id="13" name="처리 순서">
             <a:extLst xmlns:a="http://schemas.openxmlformats.org/drawingml/2006/main">
               <a:ext uri="{FF2B5EF4-FFF2-40B4-BE49-F238E27FC236}">
-                <a16:creationId xmlns:a16="http://schemas.microsoft.com/office/drawing/2014/main" id="{F705FD7B-06AD-495C-A002-8D9B808D36E2}"/>
+                <a16:creationId xmlns:a16="http://schemas.microsoft.com/office/drawing/2014/main" id="{3B681EA9-692C-47A7-AECB-D930A763DE0A}"/>
               </a:ext>
             </a:extLst>
           </p:cNvPr>
@@ -35605,7 +35605,7 @@
           <p:cNvPr id="14" name="load → normalize → … → write">
             <a:extLst xmlns:a="http://schemas.openxmlformats.org/drawingml/2006/main">
               <a:ext uri="{FF2B5EF4-FFF2-40B4-BE49-F238E27FC236}">
-                <a16:creationId xmlns:a16="http://schemas.microsoft.com/office/drawing/2014/main" id="{DEA4935F-991B-46DE-AAF7-0177A50BE59E}"/>
+                <a16:creationId xmlns:a16="http://schemas.microsoft.com/office/drawing/2014/main" id="{A2DA7FFD-A6A9-4081-92E4-DEE90E0ED90F}"/>
               </a:ext>
             </a:extLst>
           </p:cNvPr>
@@ -35763,7 +35763,7 @@
           <p:cNvPr id="15" name="">
             <a:extLst xmlns:a="http://schemas.openxmlformats.org/drawingml/2006/main">
               <a:ext uri="{FF2B5EF4-FFF2-40B4-BE49-F238E27FC236}">
-                <a16:creationId xmlns:a16="http://schemas.microsoft.com/office/drawing/2014/main" id="{5FB4A10D-298A-4498-975B-96A7A45317AE}"/>
+                <a16:creationId xmlns:a16="http://schemas.microsoft.com/office/drawing/2014/main" id="{F6259343-EE1A-40F6-A7F6-3BEFF31DF8A6}"/>
               </a:ext>
             </a:extLst>
           </p:cNvPr>
@@ -35794,7 +35794,7 @@
           <p:cNvPr id="16" name="이미지 계약">
             <a:extLst xmlns:a="http://schemas.openxmlformats.org/drawingml/2006/main">
               <a:ext uri="{FF2B5EF4-FFF2-40B4-BE49-F238E27FC236}">
-                <a16:creationId xmlns:a16="http://schemas.microsoft.com/office/drawing/2014/main" id="{CD505B12-C6C7-4356-8961-C89CDC530362}"/>
+                <a16:creationId xmlns:a16="http://schemas.microsoft.com/office/drawing/2014/main" id="{C98E3716-5E48-4467-9389-0A39961080F9}"/>
               </a:ext>
             </a:extLst>
           </p:cNvPr>
@@ -35952,7 +35952,7 @@
           <p:cNvPr id="17" name="crop: [x_start, x_end)">
             <a:extLst xmlns:a="http://schemas.openxmlformats.org/drawingml/2006/main">
               <a:ext uri="{FF2B5EF4-FFF2-40B4-BE49-F238E27FC236}">
-                <a16:creationId xmlns:a16="http://schemas.microsoft.com/office/drawing/2014/main" id="{5F2D75F2-D25F-49E9-8A8E-100011147205}"/>
+                <a16:creationId xmlns:a16="http://schemas.microsoft.com/office/drawing/2014/main" id="{7CC2117E-351D-4EB8-9C2D-1FECFA772C84}"/>
               </a:ext>
             </a:extLst>
           </p:cNvPr>
@@ -36110,7 +36110,7 @@
           <p:cNvPr id="18" name="">
             <a:extLst xmlns:a="http://schemas.openxmlformats.org/drawingml/2006/main">
               <a:ext uri="{FF2B5EF4-FFF2-40B4-BE49-F238E27FC236}">
-                <a16:creationId xmlns:a16="http://schemas.microsoft.com/office/drawing/2014/main" id="{F4B9618B-F836-449B-B4DA-35741C8660C5}"/>
+                <a16:creationId xmlns:a16="http://schemas.microsoft.com/office/drawing/2014/main" id="{7F7984AF-6A5F-4580-A841-6F3219804DE8}"/>
               </a:ext>
             </a:extLst>
           </p:cNvPr>
@@ -36141,7 +36141,7 @@
           <p:cNvPr id="19" name="테스트 구조">
             <a:extLst xmlns:a="http://schemas.openxmlformats.org/drawingml/2006/main">
               <a:ext uri="{FF2B5EF4-FFF2-40B4-BE49-F238E27FC236}">
-                <a16:creationId xmlns:a16="http://schemas.microsoft.com/office/drawing/2014/main" id="{87CC6F36-1D11-44EA-91B0-8DA3A2045BCD}"/>
+                <a16:creationId xmlns:a16="http://schemas.microsoft.com/office/drawing/2014/main" id="{67AFFF37-45CC-49F9-B859-73DD4FD66EDE}"/>
               </a:ext>
             </a:extLst>
           </p:cNvPr>
@@ -36299,7 +36299,7 @@
           <p:cNvPr id="20" name="tests/test_pipeline.py">
             <a:extLst xmlns:a="http://schemas.openxmlformats.org/drawingml/2006/main">
               <a:ext uri="{FF2B5EF4-FFF2-40B4-BE49-F238E27FC236}">
-                <a16:creationId xmlns:a16="http://schemas.microsoft.com/office/drawing/2014/main" id="{114717AD-CEDB-48C6-9A6B-4E958FA9A413}"/>
+                <a16:creationId xmlns:a16="http://schemas.microsoft.com/office/drawing/2014/main" id="{8F01B361-F862-4480-96B7-B2AF93784CE3}"/>
               </a:ext>
             </a:extLst>
           </p:cNvPr>
@@ -36457,7 +36457,7 @@
           <p:cNvPr id="21" name="">
             <a:extLst xmlns:a="http://schemas.openxmlformats.org/drawingml/2006/main">
               <a:ext uri="{FF2B5EF4-FFF2-40B4-BE49-F238E27FC236}">
-                <a16:creationId xmlns:a16="http://schemas.microsoft.com/office/drawing/2014/main" id="{556B705B-E797-4883-9C17-307BF573ACBE}"/>
+                <a16:creationId xmlns:a16="http://schemas.microsoft.com/office/drawing/2014/main" id="{F4F161B2-DD70-42CC-98BD-7781F3C60127}"/>
               </a:ext>
             </a:extLst>
           </p:cNvPr>
@@ -36488,7 +36488,7 @@
           <p:cNvPr id="22" name="CLI 출력">
             <a:extLst xmlns:a="http://schemas.openxmlformats.org/drawingml/2006/main">
               <a:ext uri="{FF2B5EF4-FFF2-40B4-BE49-F238E27FC236}">
-                <a16:creationId xmlns:a16="http://schemas.microsoft.com/office/drawing/2014/main" id="{A6777AC0-3146-4628-992C-58E5FE9866A1}"/>
+                <a16:creationId xmlns:a16="http://schemas.microsoft.com/office/drawing/2014/main" id="{69D107F1-2109-410D-AE1B-EBFF9E390B2E}"/>
               </a:ext>
             </a:extLst>
           </p:cNvPr>
@@ -36646,7 +36646,7 @@
           <p:cNvPr id="23" name="width · height · pixel_count …">
             <a:extLst xmlns:a="http://schemas.openxmlformats.org/drawingml/2006/main">
               <a:ext uri="{FF2B5EF4-FFF2-40B4-BE49-F238E27FC236}">
-                <a16:creationId xmlns:a16="http://schemas.microsoft.com/office/drawing/2014/main" id="{8FAF67DB-1C97-4108-8062-B16CC926A38D}"/>
+                <a16:creationId xmlns:a16="http://schemas.microsoft.com/office/drawing/2014/main" id="{ABDA8895-399F-488D-9BBF-B6CCD80F0A49}"/>
               </a:ext>
             </a:extLst>
           </p:cNvPr>
@@ -36804,7 +36804,7 @@
           <p:cNvPr id="24" name="32줄 · 1,303 bytes">
             <a:extLst xmlns:a="http://schemas.openxmlformats.org/drawingml/2006/main">
               <a:ext uri="{FF2B5EF4-FFF2-40B4-BE49-F238E27FC236}">
-                <a16:creationId xmlns:a16="http://schemas.microsoft.com/office/drawing/2014/main" id="{8F715417-6C4F-4598-8EDC-220CC5F6F364}"/>
+                <a16:creationId xmlns:a16="http://schemas.microsoft.com/office/drawing/2014/main" id="{A07831D8-4577-4477-B9C3-6A475B8D9B62}"/>
               </a:ext>
             </a:extLst>
           </p:cNvPr>
@@ -36962,7 +36962,7 @@
           <p:cNvPr id="25" name="이번 Task에도 필요할까?">
             <a:extLst xmlns:a="http://schemas.openxmlformats.org/drawingml/2006/main">
               <a:ext uri="{FF2B5EF4-FFF2-40B4-BE49-F238E27FC236}">
-                <a16:creationId xmlns:a16="http://schemas.microsoft.com/office/drawing/2014/main" id="{B42252D3-A534-499B-9260-1190EA388252}"/>
+                <a16:creationId xmlns:a16="http://schemas.microsoft.com/office/drawing/2014/main" id="{967DFC57-F058-4CC1-8A9B-03DF2DB3EA15}"/>
               </a:ext>
             </a:extLst>
           </p:cNvPr>
@@ -37118,7 +37118,7 @@
     </p:spTree>
     <p:extLst>
       <p:ext uri="{BB962C8B-B14F-4D97-AF65-F5344CB8AC3E}">
-        <p14:creationId xmlns:p14="http://schemas.microsoft.com/office/powerpoint/2010/main" val="1827742406"/>
+        <p14:creationId xmlns:p14="http://schemas.microsoft.com/office/powerpoint/2010/main" val="198370632"/>
       </p:ext>
     </p:extLst>
   </p:cSld>
@@ -37149,7 +37149,7 @@
           <p:cNvPr id="16" name="ACT 2 · 관련성을 확인하기">
             <a:extLst xmlns:a="http://schemas.openxmlformats.org/drawingml/2006/main">
               <a:ext uri="{FF2B5EF4-FFF2-40B4-BE49-F238E27FC236}">
-                <a16:creationId xmlns:a16="http://schemas.microsoft.com/office/drawing/2014/main" id="{A489AE81-20E4-4655-BE49-2225D24FF245}"/>
+                <a16:creationId xmlns:a16="http://schemas.microsoft.com/office/drawing/2014/main" id="{CC83437F-AA1E-47D9-A07C-B7375EE457CF}"/>
               </a:ext>
             </a:extLst>
           </p:cNvPr>
@@ -37307,7 +37307,7 @@
           <p:cNvPr id="2" name="S27">
             <a:extLst xmlns:a="http://schemas.openxmlformats.org/drawingml/2006/main">
               <a:ext uri="{FF2B5EF4-FFF2-40B4-BE49-F238E27FC236}">
-                <a16:creationId xmlns:a16="http://schemas.microsoft.com/office/drawing/2014/main" id="{D8727049-0B95-42A9-9E20-5649602A729B}"/>
+                <a16:creationId xmlns:a16="http://schemas.microsoft.com/office/drawing/2014/main" id="{1B77A33A-6EE6-403C-8155-219E65A7E0D3}"/>
               </a:ext>
             </a:extLst>
           </p:cNvPr>
@@ -37465,7 +37465,7 @@
           <p:cNvPr id="3" name="정확하지만 이번 Task에는 불필요한 정보">
             <a:extLst xmlns:a="http://schemas.openxmlformats.org/drawingml/2006/main">
               <a:ext uri="{FF2B5EF4-FFF2-40B4-BE49-F238E27FC236}">
-                <a16:creationId xmlns:a16="http://schemas.microsoft.com/office/drawing/2014/main" id="{AE5FE2C9-FBF0-4481-ACD9-079A4A112B17}"/>
+                <a16:creationId xmlns:a16="http://schemas.microsoft.com/office/drawing/2014/main" id="{1F4D6F6D-BE2E-4DDD-BDE6-9F09BADB5ABC}"/>
               </a:ext>
             </a:extLst>
           </p:cNvPr>
@@ -37623,7 +37623,7 @@
           <p:cNvPr id="4" name="">
             <a:extLst xmlns:a="http://schemas.openxmlformats.org/drawingml/2006/main">
               <a:ext uri="{FF2B5EF4-FFF2-40B4-BE49-F238E27FC236}">
-                <a16:creationId xmlns:a16="http://schemas.microsoft.com/office/drawing/2014/main" id="{1C85E40B-A55D-406C-AD19-27A0BE2EDE61}"/>
+                <a16:creationId xmlns:a16="http://schemas.microsoft.com/office/drawing/2014/main" id="{E995C9DA-78F2-4A82-8FEF-10310F390D3D}"/>
               </a:ext>
             </a:extLst>
           </p:cNvPr>
@@ -37654,7 +37654,7 @@
           <p:cNvPr id="5" name="TRIAL-004 · README의 build tools 안내를 명확히 하는 작업">
             <a:extLst xmlns:a="http://schemas.openxmlformats.org/drawingml/2006/main">
               <a:ext uri="{FF2B5EF4-FFF2-40B4-BE49-F238E27FC236}">
-                <a16:creationId xmlns:a16="http://schemas.microsoft.com/office/drawing/2014/main" id="{F8282655-73AF-4A66-B5C4-CFA76B135A42}"/>
+                <a16:creationId xmlns:a16="http://schemas.microsoft.com/office/drawing/2014/main" id="{F7D7757C-41D0-448A-8BD9-A11046830E01}"/>
               </a:ext>
             </a:extLst>
           </p:cNvPr>
@@ -37812,7 +37812,7 @@
           <p:cNvPr id="6" name="Agent 혼란과 Context 관련 실패는 관찰되지 않았다">
             <a:extLst xmlns:a="http://schemas.openxmlformats.org/drawingml/2006/main">
               <a:ext uri="{FF2B5EF4-FFF2-40B4-BE49-F238E27FC236}">
-                <a16:creationId xmlns:a16="http://schemas.microsoft.com/office/drawing/2014/main" id="{853DADFA-BBBC-4EF0-8CED-E58C70881562}"/>
+                <a16:creationId xmlns:a16="http://schemas.microsoft.com/office/drawing/2014/main" id="{E214E4E5-C297-4181-8FF8-CEA21E70E9C7}"/>
               </a:ext>
             </a:extLst>
           </p:cNvPr>
@@ -37970,7 +37970,7 @@
           <p:cNvPr id="7" name="작업: README의 빌드 도구 안내를 고친다">
             <a:extLst xmlns:a="http://schemas.openxmlformats.org/drawingml/2006/main">
               <a:ext uri="{FF2B5EF4-FFF2-40B4-BE49-F238E27FC236}">
-                <a16:creationId xmlns:a16="http://schemas.microsoft.com/office/drawing/2014/main" id="{9EF9122A-EF99-425F-850E-8517937410CB}"/>
+                <a16:creationId xmlns:a16="http://schemas.microsoft.com/office/drawing/2014/main" id="{A62055C8-089B-40A2-BEF6-99BBB84AEDB8}"/>
               </a:ext>
             </a:extLst>
           </p:cNvPr>
@@ -38128,7 +38128,7 @@
           <p:cNvPr id="8" name="이번 질문과 직접 관련">
             <a:extLst xmlns:a="http://schemas.openxmlformats.org/drawingml/2006/main">
               <a:ext uri="{FF2B5EF4-FFF2-40B4-BE49-F238E27FC236}">
-                <a16:creationId xmlns:a16="http://schemas.microsoft.com/office/drawing/2014/main" id="{BE5FEEED-0A98-4BEC-89D8-407191E03786}"/>
+                <a16:creationId xmlns:a16="http://schemas.microsoft.com/office/drawing/2014/main" id="{8CB7DA8B-FA4F-4D52-8A60-2451E2519559}"/>
               </a:ext>
             </a:extLst>
           </p:cNvPr>
@@ -38286,7 +38286,7 @@
           <p:cNvPr id="9" name="함께 있었지만 관련이 낮은 정보">
             <a:extLst xmlns:a="http://schemas.openxmlformats.org/drawingml/2006/main">
               <a:ext uri="{FF2B5EF4-FFF2-40B4-BE49-F238E27FC236}">
-                <a16:creationId xmlns:a16="http://schemas.microsoft.com/office/drawing/2014/main" id="{DDA7E24C-7E68-4BC9-95F4-0EDE317A14D5}"/>
+                <a16:creationId xmlns:a16="http://schemas.microsoft.com/office/drawing/2014/main" id="{1E209C04-75FE-48E6-B108-BDDC14FF2AD0}"/>
               </a:ext>
             </a:extLst>
           </p:cNvPr>
@@ -38444,7 +38444,7 @@
           <p:cNvPr id="10" name="">
             <a:extLst xmlns:a="http://schemas.openxmlformats.org/drawingml/2006/main">
               <a:ext uri="{FF2B5EF4-FFF2-40B4-BE49-F238E27FC236}">
-                <a16:creationId xmlns:a16="http://schemas.microsoft.com/office/drawing/2014/main" id="{D8D0ED7A-D12F-4BC2-9B4D-7AEF7CE5C9DB}"/>
+                <a16:creationId xmlns:a16="http://schemas.microsoft.com/office/drawing/2014/main" id="{82B5F688-097B-4473-8723-F87250AF9F93}"/>
               </a:ext>
             </a:extLst>
           </p:cNvPr>
@@ -38475,7 +38475,7 @@
           <p:cNvPr id="11" name="">
             <a:extLst xmlns:a="http://schemas.openxmlformats.org/drawingml/2006/main">
               <a:ext uri="{FF2B5EF4-FFF2-40B4-BE49-F238E27FC236}">
-                <a16:creationId xmlns:a16="http://schemas.microsoft.com/office/drawing/2014/main" id="{E7727E83-4C15-4A56-ABA8-7A08A91C1042}"/>
+                <a16:creationId xmlns:a16="http://schemas.microsoft.com/office/drawing/2014/main" id="{F96F622A-D334-46DB-8B2F-984CB77D583F}"/>
               </a:ext>
             </a:extLst>
           </p:cNvPr>
@@ -38506,7 +38506,7 @@
           <p:cNvPr id="12" name="">
             <a:extLst xmlns:a="http://schemas.openxmlformats.org/drawingml/2006/main">
               <a:ext uri="{FF2B5EF4-FFF2-40B4-BE49-F238E27FC236}">
-                <a16:creationId xmlns:a16="http://schemas.microsoft.com/office/drawing/2014/main" id="{F9B76FFA-60DD-42CA-8CC1-0CE0467403B3}"/>
+                <a16:creationId xmlns:a16="http://schemas.microsoft.com/office/drawing/2014/main" id="{943472E4-DD26-48A2-8F19-7E44FAC145ED}"/>
               </a:ext>
             </a:extLst>
           </p:cNvPr>
@@ -38537,7 +38537,7 @@
           <p:cNvPr id="13" name="README&#10;pyproject.toml의 빌드 설정">
             <a:extLst xmlns:a="http://schemas.openxmlformats.org/drawingml/2006/main">
               <a:ext uri="{FF2B5EF4-FFF2-40B4-BE49-F238E27FC236}">
-                <a16:creationId xmlns:a16="http://schemas.microsoft.com/office/drawing/2014/main" id="{878811C4-0654-4825-8ACC-41808AEEE429}"/>
+                <a16:creationId xmlns:a16="http://schemas.microsoft.com/office/drawing/2014/main" id="{B7297723-294E-4077-9021-A75042DFDD8B}"/>
               </a:ext>
             </a:extLst>
           </p:cNvPr>
@@ -38718,7 +38718,7 @@
           <p:cNvPr id="14" name="crop / resize 계약&#10;이미지 처리 pipeline 세부사항">
             <a:extLst xmlns:a="http://schemas.openxmlformats.org/drawingml/2006/main">
               <a:ext uri="{FF2B5EF4-FFF2-40B4-BE49-F238E27FC236}">
-                <a16:creationId xmlns:a16="http://schemas.microsoft.com/office/drawing/2014/main" id="{DF72FE77-D415-49E3-9EF8-3592FC280793}"/>
+                <a16:creationId xmlns:a16="http://schemas.microsoft.com/office/drawing/2014/main" id="{BEC81D87-3220-4B25-B152-55C29F4F1B66}"/>
               </a:ext>
             </a:extLst>
           </p:cNvPr>
@@ -38899,7 +38899,7 @@
           <p:cNvPr id="15" name="정확한 정보라도, 모든 질문에 필요한 것은 아니다">
             <a:extLst xmlns:a="http://schemas.openxmlformats.org/drawingml/2006/main">
               <a:ext uri="{FF2B5EF4-FFF2-40B4-BE49-F238E27FC236}">
-                <a16:creationId xmlns:a16="http://schemas.microsoft.com/office/drawing/2014/main" id="{3F9CFDAF-0E5B-47D8-BF45-9115F27C537C}"/>
+                <a16:creationId xmlns:a16="http://schemas.microsoft.com/office/drawing/2014/main" id="{A9BD39B4-1815-4F5F-B01D-7F3F3772B8BF}"/>
               </a:ext>
             </a:extLst>
           </p:cNvPr>
@@ -39055,7 +39055,7 @@
     </p:spTree>
     <p:extLst>
       <p:ext uri="{BB962C8B-B14F-4D97-AF65-F5344CB8AC3E}">
-        <p14:creationId xmlns:p14="http://schemas.microsoft.com/office/powerpoint/2010/main" val="824871672"/>
+        <p14:creationId xmlns:p14="http://schemas.microsoft.com/office/powerpoint/2010/main" val="1588996740"/>
       </p:ext>
     </p:extLst>
   </p:cSld>
@@ -39086,7 +39086,7 @@
           <p:cNvPr id="19" name="ACT 2 · 언제 필요한 정보인가">
             <a:extLst xmlns:a="http://schemas.openxmlformats.org/drawingml/2006/main">
               <a:ext uri="{FF2B5EF4-FFF2-40B4-BE49-F238E27FC236}">
-                <a16:creationId xmlns:a16="http://schemas.microsoft.com/office/drawing/2014/main" id="{885951F0-2E87-48B6-997A-22ECA9577E76}"/>
+                <a16:creationId xmlns:a16="http://schemas.microsoft.com/office/drawing/2014/main" id="{0D7D9789-6676-464A-A079-C5E20E76F52E}"/>
               </a:ext>
             </a:extLst>
           </p:cNvPr>
@@ -39244,7 +39244,7 @@
           <p:cNvPr id="2" name="S28">
             <a:extLst xmlns:a="http://schemas.openxmlformats.org/drawingml/2006/main">
               <a:ext uri="{FF2B5EF4-FFF2-40B4-BE49-F238E27FC236}">
-                <a16:creationId xmlns:a16="http://schemas.microsoft.com/office/drawing/2014/main" id="{A30FB022-A774-4145-AA25-C36426F97720}"/>
+                <a16:creationId xmlns:a16="http://schemas.microsoft.com/office/drawing/2014/main" id="{9BA4E2EB-7BCE-45CA-8DB3-B53317B8A0B0}"/>
               </a:ext>
             </a:extLst>
           </p:cNvPr>
@@ -39402,7 +39402,7 @@
           <p:cNvPr id="3" name="정보의 범위와 제공 시점">
             <a:extLst xmlns:a="http://schemas.openxmlformats.org/drawingml/2006/main">
               <a:ext uri="{FF2B5EF4-FFF2-40B4-BE49-F238E27FC236}">
-                <a16:creationId xmlns:a16="http://schemas.microsoft.com/office/drawing/2014/main" id="{87547AD8-5D49-426F-85AF-52542CE921F1}"/>
+                <a16:creationId xmlns:a16="http://schemas.microsoft.com/office/drawing/2014/main" id="{13F055EE-FA28-4731-8E79-4E40126EEAD7}"/>
               </a:ext>
             </a:extLst>
           </p:cNvPr>
@@ -39560,7 +39560,7 @@
           <p:cNvPr id="4" name="">
             <a:extLst xmlns:a="http://schemas.openxmlformats.org/drawingml/2006/main">
               <a:ext uri="{FF2B5EF4-FFF2-40B4-BE49-F238E27FC236}">
-                <a16:creationId xmlns:a16="http://schemas.microsoft.com/office/drawing/2014/main" id="{48831927-E966-4169-8D7F-A5D037B7645C}"/>
+                <a16:creationId xmlns:a16="http://schemas.microsoft.com/office/drawing/2014/main" id="{BBDF1AD9-6A4B-429F-9F25-5077AD53A7D3}"/>
               </a:ext>
             </a:extLst>
           </p:cNvPr>
@@ -39591,7 +39591,7 @@
           <p:cNvPr id="5" name="교육용 분류 모델 · OpenAI의 공식 기능 분류가 아님">
             <a:extLst xmlns:a="http://schemas.openxmlformats.org/drawingml/2006/main">
               <a:ext uri="{FF2B5EF4-FFF2-40B4-BE49-F238E27FC236}">
-                <a16:creationId xmlns:a16="http://schemas.microsoft.com/office/drawing/2014/main" id="{78821E1C-454E-4BAE-8E03-5B77440DA20B}"/>
+                <a16:creationId xmlns:a16="http://schemas.microsoft.com/office/drawing/2014/main" id="{5B562F9C-74C2-44FD-A0CF-7AC5208A13E3}"/>
               </a:ext>
             </a:extLst>
           </p:cNvPr>
@@ -39749,7 +39749,7 @@
           <p:cNvPr id="6" name="성능 조사 절차는 설명을 위한 예시이며 STATE-02에 저장돼 있었다는 뜻이 아님">
             <a:extLst xmlns:a="http://schemas.openxmlformats.org/drawingml/2006/main">
               <a:ext uri="{FF2B5EF4-FFF2-40B4-BE49-F238E27FC236}">
-                <a16:creationId xmlns:a16="http://schemas.microsoft.com/office/drawing/2014/main" id="{99337DFF-860F-43D9-B4D3-DD19D471958E}"/>
+                <a16:creationId xmlns:a16="http://schemas.microsoft.com/office/drawing/2014/main" id="{856DF5D0-BFB6-4616-855E-E0A4D4DA3F2D}"/>
               </a:ext>
             </a:extLst>
           </p:cNvPr>
@@ -39907,7 +39907,7 @@
           <p:cNvPr id="7" name="">
             <a:extLst xmlns:a="http://schemas.openxmlformats.org/drawingml/2006/main">
               <a:ext uri="{FF2B5EF4-FFF2-40B4-BE49-F238E27FC236}">
-                <a16:creationId xmlns:a16="http://schemas.microsoft.com/office/drawing/2014/main" id="{716D92A6-C090-433A-992D-48DC3B48BAE8}"/>
+                <a16:creationId xmlns:a16="http://schemas.microsoft.com/office/drawing/2014/main" id="{54E3FF26-C5B0-488B-8EF2-CA87591476CB}"/>
               </a:ext>
             </a:extLst>
           </p:cNvPr>
@@ -39938,7 +39938,7 @@
           <p:cNvPr id="8" name="항상 알아야 할 안내">
             <a:extLst xmlns:a="http://schemas.openxmlformats.org/drawingml/2006/main">
               <a:ext uri="{FF2B5EF4-FFF2-40B4-BE49-F238E27FC236}">
-                <a16:creationId xmlns:a16="http://schemas.microsoft.com/office/drawing/2014/main" id="{8C195765-57D2-4343-B699-013CB0B705C2}"/>
+                <a16:creationId xmlns:a16="http://schemas.microsoft.com/office/drawing/2014/main" id="{45EE05D6-98B4-4E48-B958-F36248168D14}"/>
               </a:ext>
             </a:extLst>
           </p:cNvPr>
@@ -40096,7 +40096,7 @@
           <p:cNvPr id="9" name="프로젝트 목적 · 기본 제약">
             <a:extLst xmlns:a="http://schemas.openxmlformats.org/drawingml/2006/main">
               <a:ext uri="{FF2B5EF4-FFF2-40B4-BE49-F238E27FC236}">
-                <a16:creationId xmlns:a16="http://schemas.microsoft.com/office/drawing/2014/main" id="{056FABF3-9A0B-47DC-AB85-48F821542EC0}"/>
+                <a16:creationId xmlns:a16="http://schemas.microsoft.com/office/drawing/2014/main" id="{EA93CA48-AA68-4EAA-A6C5-9F7065F91B3C}"/>
               </a:ext>
             </a:extLst>
           </p:cNvPr>
@@ -40254,7 +40254,7 @@
           <p:cNvPr id="10" name="ALWAYS-ON">
             <a:extLst xmlns:a="http://schemas.openxmlformats.org/drawingml/2006/main">
               <a:ext uri="{FF2B5EF4-FFF2-40B4-BE49-F238E27FC236}">
-                <a16:creationId xmlns:a16="http://schemas.microsoft.com/office/drawing/2014/main" id="{77F4B9D0-6743-473F-B260-8D740C48FADA}"/>
+                <a16:creationId xmlns:a16="http://schemas.microsoft.com/office/drawing/2014/main" id="{239ED942-FE56-49A1-B304-32F137C87914}"/>
               </a:ext>
             </a:extLst>
           </p:cNvPr>
@@ -40412,7 +40412,7 @@
           <p:cNvPr id="11" name="">
             <a:extLst xmlns:a="http://schemas.openxmlformats.org/drawingml/2006/main">
               <a:ext uri="{FF2B5EF4-FFF2-40B4-BE49-F238E27FC236}">
-                <a16:creationId xmlns:a16="http://schemas.microsoft.com/office/drawing/2014/main" id="{7759E8F4-B8F4-409D-A0CD-3258DDA4D6CD}"/>
+                <a16:creationId xmlns:a16="http://schemas.microsoft.com/office/drawing/2014/main" id="{6AB2441B-A99C-4D4C-BCC9-606DDF00DF03}"/>
               </a:ext>
             </a:extLst>
           </p:cNvPr>
@@ -40443,7 +40443,7 @@
           <p:cNvPr id="12" name="질문에 따라 찾아볼 상세">
             <a:extLst xmlns:a="http://schemas.openxmlformats.org/drawingml/2006/main">
               <a:ext uri="{FF2B5EF4-FFF2-40B4-BE49-F238E27FC236}">
-                <a16:creationId xmlns:a16="http://schemas.microsoft.com/office/drawing/2014/main" id="{8A5D9F0C-4B89-4C12-8D56-3EF1D4BBD25F}"/>
+                <a16:creationId xmlns:a16="http://schemas.microsoft.com/office/drawing/2014/main" id="{C60BBA22-717D-4789-ADCD-F0B7B7399AE4}"/>
               </a:ext>
             </a:extLst>
           </p:cNvPr>
@@ -40601,7 +40601,7 @@
           <p:cNvPr id="13" name="crop 계약 · 모듈 구조">
             <a:extLst xmlns:a="http://schemas.openxmlformats.org/drawingml/2006/main">
               <a:ext uri="{FF2B5EF4-FFF2-40B4-BE49-F238E27FC236}">
-                <a16:creationId xmlns:a16="http://schemas.microsoft.com/office/drawing/2014/main" id="{7FEDE585-D1AF-4F57-A66C-367E779B0D70}"/>
+                <a16:creationId xmlns:a16="http://schemas.microsoft.com/office/drawing/2014/main" id="{1661AAD4-24A3-49C1-AA92-43A6A733D6CB}"/>
               </a:ext>
             </a:extLst>
           </p:cNvPr>
@@ -40759,7 +40759,7 @@
           <p:cNvPr id="14" name="ON-DEMAND">
             <a:extLst xmlns:a="http://schemas.openxmlformats.org/drawingml/2006/main">
               <a:ext uri="{FF2B5EF4-FFF2-40B4-BE49-F238E27FC236}">
-                <a16:creationId xmlns:a16="http://schemas.microsoft.com/office/drawing/2014/main" id="{DC2CBD22-0E01-48F7-B197-B632352FDEB1}"/>
+                <a16:creationId xmlns:a16="http://schemas.microsoft.com/office/drawing/2014/main" id="{B9CB5E8F-3DAC-4360-80F5-144C1B0EB734}"/>
               </a:ext>
             </a:extLst>
           </p:cNvPr>
@@ -40917,7 +40917,7 @@
           <p:cNvPr id="15" name="">
             <a:extLst xmlns:a="http://schemas.openxmlformats.org/drawingml/2006/main">
               <a:ext uri="{FF2B5EF4-FFF2-40B4-BE49-F238E27FC236}">
-                <a16:creationId xmlns:a16="http://schemas.microsoft.com/office/drawing/2014/main" id="{F2DB3D00-4C65-4BBA-ADB3-F291CA0FCE93}"/>
+                <a16:creationId xmlns:a16="http://schemas.microsoft.com/office/drawing/2014/main" id="{29AFB86E-E1BB-4D03-B7A1-A77964CA44B3}"/>
               </a:ext>
             </a:extLst>
           </p:cNvPr>
@@ -40948,7 +40948,7 @@
           <p:cNvPr id="16" name="이런 일을 수행하는 방법">
             <a:extLst xmlns:a="http://schemas.openxmlformats.org/drawingml/2006/main">
               <a:ext uri="{FF2B5EF4-FFF2-40B4-BE49-F238E27FC236}">
-                <a16:creationId xmlns:a16="http://schemas.microsoft.com/office/drawing/2014/main" id="{663D999A-89A5-4F5F-B404-3DF31F669929}"/>
+                <a16:creationId xmlns:a16="http://schemas.microsoft.com/office/drawing/2014/main" id="{18563B42-DB60-4C7E-8FCD-F7313C1ED868}"/>
               </a:ext>
             </a:extLst>
           </p:cNvPr>
@@ -41106,7 +41106,7 @@
           <p:cNvPr id="17" name="변경 전 측정 → 조사 → 검증">
             <a:extLst xmlns:a="http://schemas.openxmlformats.org/drawingml/2006/main">
               <a:ext uri="{FF2B5EF4-FFF2-40B4-BE49-F238E27FC236}">
-                <a16:creationId xmlns:a16="http://schemas.microsoft.com/office/drawing/2014/main" id="{DA1249E8-8C02-4E39-A3E1-86AE3E2A6B00}"/>
+                <a16:creationId xmlns:a16="http://schemas.microsoft.com/office/drawing/2014/main" id="{40D7A104-7FB2-4671-AD1E-984AFBFBE7CC}"/>
               </a:ext>
             </a:extLst>
           </p:cNvPr>
@@ -41264,7 +41264,7 @@
           <p:cNvPr id="18" name="WORKFLOW">
             <a:extLst xmlns:a="http://schemas.openxmlformats.org/drawingml/2006/main">
               <a:ext uri="{FF2B5EF4-FFF2-40B4-BE49-F238E27FC236}">
-                <a16:creationId xmlns:a16="http://schemas.microsoft.com/office/drawing/2014/main" id="{D799657C-A016-4116-BED1-37608A7E00A1}"/>
+                <a16:creationId xmlns:a16="http://schemas.microsoft.com/office/drawing/2014/main" id="{C4B4CABC-2D33-44C0-AB78-50ADCD84DB03}"/>
               </a:ext>
             </a:extLst>
           </p:cNvPr>
@@ -41420,7 +41420,7 @@
     </p:spTree>
     <p:extLst>
       <p:ext uri="{BB962C8B-B14F-4D97-AF65-F5344CB8AC3E}">
-        <p14:creationId xmlns:p14="http://schemas.microsoft.com/office/powerpoint/2010/main" val="318386590"/>
+        <p14:creationId xmlns:p14="http://schemas.microsoft.com/office/powerpoint/2010/main" val="153827000"/>
       </p:ext>
     </p:extLst>
   </p:cSld>
@@ -41448,10 +41448,10 @@
       </p:grpSpPr>
       <p:sp>
         <p:nvSpPr>
-          <p:cNvPr id="37" name="ACT 2 · 연구가 답한 질문">
+          <p:cNvPr id="37" name="ACT 2 · 정보의 양을 다시 묻는 연구">
             <a:extLst xmlns:a="http://schemas.openxmlformats.org/drawingml/2006/main">
               <a:ext uri="{FF2B5EF4-FFF2-40B4-BE49-F238E27FC236}">
-                <a16:creationId xmlns:a16="http://schemas.microsoft.com/office/drawing/2014/main" id="{D8F598BF-08F2-461F-BC13-B70445E43D3D}"/>
+                <a16:creationId xmlns:a16="http://schemas.microsoft.com/office/drawing/2014/main" id="{24305BBC-B29B-49FD-B95B-95E3A42C9025}"/>
               </a:ext>
             </a:extLst>
           </p:cNvPr>
@@ -41599,7 +41599,7 @@
                 <a:ea typeface="Malgun Gothic"/>
                 <a:cs typeface="Malgun Gothic"/>
               </a:rPr>
-              <a:t>ACT 2 · 연구가 답한 질문</a:t>
+              <a:t>ACT 2 · 정보의 양을 다시 묻는 연구</a:t>
             </a:r>
           </a:p>
         </p:txBody>
@@ -41609,7 +41609,7 @@
           <p:cNvPr id="2" name="S29">
             <a:extLst xmlns:a="http://schemas.openxmlformats.org/drawingml/2006/main">
               <a:ext uri="{FF2B5EF4-FFF2-40B4-BE49-F238E27FC236}">
-                <a16:creationId xmlns:a16="http://schemas.microsoft.com/office/drawing/2014/main" id="{7C7DDE25-56B8-4838-98C4-611EC55A30E4}"/>
+                <a16:creationId xmlns:a16="http://schemas.microsoft.com/office/drawing/2014/main" id="{CD2B4116-8A4C-4E3B-B57C-C10CECD9C903}"/>
               </a:ext>
             </a:extLst>
           </p:cNvPr>
@@ -41767,7 +41767,7 @@
           <p:cNvPr id="3" name="Long Context 연구가 말해주는 범위">
             <a:extLst xmlns:a="http://schemas.openxmlformats.org/drawingml/2006/main">
               <a:ext uri="{FF2B5EF4-FFF2-40B4-BE49-F238E27FC236}">
-                <a16:creationId xmlns:a16="http://schemas.microsoft.com/office/drawing/2014/main" id="{CFEDE36B-F30F-42FA-9EF8-91FBE18DA80F}"/>
+                <a16:creationId xmlns:a16="http://schemas.microsoft.com/office/drawing/2014/main" id="{07AEAF4E-55FB-4B16-86C1-1F9EBB7FEC34}"/>
               </a:ext>
             </a:extLst>
           </p:cNvPr>
@@ -41925,7 +41925,7 @@
           <p:cNvPr id="4" name="">
             <a:extLst xmlns:a="http://schemas.openxmlformats.org/drawingml/2006/main">
               <a:ext uri="{FF2B5EF4-FFF2-40B4-BE49-F238E27FC236}">
-                <a16:creationId xmlns:a16="http://schemas.microsoft.com/office/drawing/2014/main" id="{D26AF685-2DD5-4251-8484-56C9E183CF52}"/>
+                <a16:creationId xmlns:a16="http://schemas.microsoft.com/office/drawing/2014/main" id="{82DCEC08-FC78-4224-BCB4-FA11EAD9C3D7}"/>
               </a:ext>
             </a:extLst>
           </p:cNvPr>
@@ -41956,7 +41956,7 @@
           <p:cNvPr id="5" name="Liu et al., Lost in the Middle, TACL 2024 · RepoQA, 2024">
             <a:extLst xmlns:a="http://schemas.openxmlformats.org/drawingml/2006/main">
               <a:ext uri="{FF2B5EF4-FFF2-40B4-BE49-F238E27FC236}">
-                <a16:creationId xmlns:a16="http://schemas.microsoft.com/office/drawing/2014/main" id="{E0AC1266-9B40-4CE0-8D28-7E1DDDB148A5}"/>
+                <a16:creationId xmlns:a16="http://schemas.microsoft.com/office/drawing/2014/main" id="{34E8D688-B135-4206-AA17-33A383E891A4}"/>
               </a:ext>
             </a:extLst>
           </p:cNvPr>
@@ -42114,7 +42114,7 @@
           <p:cNvPr id="6" name="특정 모델·과제의 결과 · 현재 Codex의 Repository coding 한계를 입증하지 않음">
             <a:extLst xmlns:a="http://schemas.openxmlformats.org/drawingml/2006/main">
               <a:ext uri="{FF2B5EF4-FFF2-40B4-BE49-F238E27FC236}">
-                <a16:creationId xmlns:a16="http://schemas.microsoft.com/office/drawing/2014/main" id="{575120F0-A3DC-4341-BD55-D245F7245CD1}"/>
+                <a16:creationId xmlns:a16="http://schemas.microsoft.com/office/drawing/2014/main" id="{D9FEABBA-E8ED-4CCD-9A48-39EF432CD893}"/>
               </a:ext>
             </a:extLst>
           </p:cNvPr>
@@ -42272,7 +42272,7 @@
           <p:cNvPr id="7" name="더 많은 Context가 항상 더 좋은 것은 아니다">
             <a:extLst xmlns:a="http://schemas.openxmlformats.org/drawingml/2006/main">
               <a:ext uri="{FF2B5EF4-FFF2-40B4-BE49-F238E27FC236}">
-                <a16:creationId xmlns:a16="http://schemas.microsoft.com/office/drawing/2014/main" id="{C255FFAD-5412-4BC5-8E64-A84AAE96463C}"/>
+                <a16:creationId xmlns:a16="http://schemas.microsoft.com/office/drawing/2014/main" id="{B82175DE-493A-40C8-AB01-B3D96DE20E31}"/>
               </a:ext>
             </a:extLst>
           </p:cNvPr>
@@ -42430,7 +42430,7 @@
           <p:cNvPr id="8" name="Lost in the Middle">
             <a:extLst xmlns:a="http://schemas.openxmlformats.org/drawingml/2006/main">
               <a:ext uri="{FF2B5EF4-FFF2-40B4-BE49-F238E27FC236}">
-                <a16:creationId xmlns:a16="http://schemas.microsoft.com/office/drawing/2014/main" id="{EDEFBA47-AD00-4A95-8451-312837C0403A}"/>
+                <a16:creationId xmlns:a16="http://schemas.microsoft.com/office/drawing/2014/main" id="{A351098D-832F-4A4F-ADE1-0E87EBE5AEED}"/>
               </a:ext>
             </a:extLst>
           </p:cNvPr>
@@ -42588,7 +42588,7 @@
           <p:cNvPr id="9" name="RepoQA">
             <a:extLst xmlns:a="http://schemas.openxmlformats.org/drawingml/2006/main">
               <a:ext uri="{FF2B5EF4-FFF2-40B4-BE49-F238E27FC236}">
-                <a16:creationId xmlns:a16="http://schemas.microsoft.com/office/drawing/2014/main" id="{109AC242-0592-4223-86D2-E585D0A53D01}"/>
+                <a16:creationId xmlns:a16="http://schemas.microsoft.com/office/drawing/2014/main" id="{D1C4064A-B940-465E-9D87-6B27A2ED0DB6}"/>
               </a:ext>
             </a:extLst>
           </p:cNvPr>
@@ -42746,7 +42746,7 @@
           <p:cNvPr id="10" name="여러 문서의 질문 답변 · key-value 검색">
             <a:extLst xmlns:a="http://schemas.openxmlformats.org/drawingml/2006/main">
               <a:ext uri="{FF2B5EF4-FFF2-40B4-BE49-F238E27FC236}">
-                <a16:creationId xmlns:a16="http://schemas.microsoft.com/office/drawing/2014/main" id="{F2DEBD02-52E5-4C60-A5E9-35D05AD24D70}"/>
+                <a16:creationId xmlns:a16="http://schemas.microsoft.com/office/drawing/2014/main" id="{D1C531B7-F545-4462-9287-A17F0BE0790B}"/>
               </a:ext>
             </a:extLst>
           </p:cNvPr>
@@ -42904,7 +42904,7 @@
           <p:cNvPr id="11" name="50개 Repository의 코드 검색 과제">
             <a:extLst xmlns:a="http://schemas.openxmlformats.org/drawingml/2006/main">
               <a:ext uri="{FF2B5EF4-FFF2-40B4-BE49-F238E27FC236}">
-                <a16:creationId xmlns:a16="http://schemas.microsoft.com/office/drawing/2014/main" id="{9C799D5F-87DB-4F78-AD9C-F0DCABBA5089}"/>
+                <a16:creationId xmlns:a16="http://schemas.microsoft.com/office/drawing/2014/main" id="{A0EAA96F-4AE9-42DF-8A94-1CFD98E206D4}"/>
               </a:ext>
             </a:extLst>
           </p:cNvPr>
@@ -43062,7 +43062,7 @@
           <p:cNvPr id="12" name="관련 정보의 위치를 달리하는 구성">
             <a:extLst xmlns:a="http://schemas.openxmlformats.org/drawingml/2006/main">
               <a:ext uri="{FF2B5EF4-FFF2-40B4-BE49-F238E27FC236}">
-                <a16:creationId xmlns:a16="http://schemas.microsoft.com/office/drawing/2014/main" id="{60A4A66C-22D7-4987-AE4B-5B6EDE5D93D5}"/>
+                <a16:creationId xmlns:a16="http://schemas.microsoft.com/office/drawing/2014/main" id="{B6D80274-125D-4F30-B51F-DA9D8867F82E}"/>
               </a:ext>
             </a:extLst>
           </p:cNvPr>
@@ -43220,7 +43220,7 @@
           <p:cNvPr id="13" name="">
             <a:extLst xmlns:a="http://schemas.openxmlformats.org/drawingml/2006/main">
               <a:ext uri="{FF2B5EF4-FFF2-40B4-BE49-F238E27FC236}">
-                <a16:creationId xmlns:a16="http://schemas.microsoft.com/office/drawing/2014/main" id="{A2B6EF48-3AAC-46F7-B284-DCFD5EE36521}"/>
+                <a16:creationId xmlns:a16="http://schemas.microsoft.com/office/drawing/2014/main" id="{F831AEC6-63D4-45B8-9CAB-4E8C45F523D3}"/>
               </a:ext>
             </a:extLst>
           </p:cNvPr>
@@ -43253,7 +43253,7 @@
           <p:cNvPr id="14" name="">
             <a:extLst xmlns:a="http://schemas.openxmlformats.org/drawingml/2006/main">
               <a:ext uri="{FF2B5EF4-FFF2-40B4-BE49-F238E27FC236}">
-                <a16:creationId xmlns:a16="http://schemas.microsoft.com/office/drawing/2014/main" id="{DCB5EA05-C21B-43C5-A80D-2F4BD0C67861}"/>
+                <a16:creationId xmlns:a16="http://schemas.microsoft.com/office/drawing/2014/main" id="{EEE89FBD-8BBA-4D43-925B-EC8964E27458}"/>
               </a:ext>
             </a:extLst>
           </p:cNvPr>
@@ -43286,7 +43286,7 @@
           <p:cNvPr id="15" name="">
             <a:extLst xmlns:a="http://schemas.openxmlformats.org/drawingml/2006/main">
               <a:ext uri="{FF2B5EF4-FFF2-40B4-BE49-F238E27FC236}">
-                <a16:creationId xmlns:a16="http://schemas.microsoft.com/office/drawing/2014/main" id="{442DC1DE-9C7F-435A-A0A3-1953BE776CFC}"/>
+                <a16:creationId xmlns:a16="http://schemas.microsoft.com/office/drawing/2014/main" id="{6171872D-5B07-4528-A9D4-8F557470F253}"/>
               </a:ext>
             </a:extLst>
           </p:cNvPr>
@@ -43319,7 +43319,7 @@
           <p:cNvPr id="16" name="">
             <a:extLst xmlns:a="http://schemas.openxmlformats.org/drawingml/2006/main">
               <a:ext uri="{FF2B5EF4-FFF2-40B4-BE49-F238E27FC236}">
-                <a16:creationId xmlns:a16="http://schemas.microsoft.com/office/drawing/2014/main" id="{D2B50FA5-84EE-44A8-9418-35479276B15F}"/>
+                <a16:creationId xmlns:a16="http://schemas.microsoft.com/office/drawing/2014/main" id="{D879D025-629D-479B-866B-F9E2B61548A3}"/>
               </a:ext>
             </a:extLst>
           </p:cNvPr>
@@ -43352,7 +43352,7 @@
           <p:cNvPr id="17" name="">
             <a:extLst xmlns:a="http://schemas.openxmlformats.org/drawingml/2006/main">
               <a:ext uri="{FF2B5EF4-FFF2-40B4-BE49-F238E27FC236}">
-                <a16:creationId xmlns:a16="http://schemas.microsoft.com/office/drawing/2014/main" id="{EB6AB8B7-ECBD-4258-B8AD-E7ACC1E1EC17}"/>
+                <a16:creationId xmlns:a16="http://schemas.microsoft.com/office/drawing/2014/main" id="{23AB9085-8184-45A5-9B31-334125F94D6E}"/>
               </a:ext>
             </a:extLst>
           </p:cNvPr>
@@ -43385,7 +43385,7 @@
           <p:cNvPr id="18" name="">
             <a:extLst xmlns:a="http://schemas.openxmlformats.org/drawingml/2006/main">
               <a:ext uri="{FF2B5EF4-FFF2-40B4-BE49-F238E27FC236}">
-                <a16:creationId xmlns:a16="http://schemas.microsoft.com/office/drawing/2014/main" id="{6B9320DB-6293-4249-8346-32C17B647CEF}"/>
+                <a16:creationId xmlns:a16="http://schemas.microsoft.com/office/drawing/2014/main" id="{44017979-543C-4FD5-B831-5F0A277E31B3}"/>
               </a:ext>
             </a:extLst>
           </p:cNvPr>
@@ -43418,7 +43418,7 @@
           <p:cNvPr id="19" name="">
             <a:extLst xmlns:a="http://schemas.openxmlformats.org/drawingml/2006/main">
               <a:ext uri="{FF2B5EF4-FFF2-40B4-BE49-F238E27FC236}">
-                <a16:creationId xmlns:a16="http://schemas.microsoft.com/office/drawing/2014/main" id="{97CBCD9E-C5A4-4C9A-BB84-B594E741CFFA}"/>
+                <a16:creationId xmlns:a16="http://schemas.microsoft.com/office/drawing/2014/main" id="{41AA09AB-7FA2-4E4D-BF02-CD490600EDCC}"/>
               </a:ext>
             </a:extLst>
           </p:cNvPr>
@@ -43451,7 +43451,7 @@
           <p:cNvPr id="20" name="">
             <a:extLst xmlns:a="http://schemas.openxmlformats.org/drawingml/2006/main">
               <a:ext uri="{FF2B5EF4-FFF2-40B4-BE49-F238E27FC236}">
-                <a16:creationId xmlns:a16="http://schemas.microsoft.com/office/drawing/2014/main" id="{E34E1B56-34C0-437A-98DD-216F90926CFC}"/>
+                <a16:creationId xmlns:a16="http://schemas.microsoft.com/office/drawing/2014/main" id="{2BCC02E5-52EA-4064-8284-9FF40ADC749C}"/>
               </a:ext>
             </a:extLst>
           </p:cNvPr>
@@ -43484,7 +43484,7 @@
           <p:cNvPr id="21" name="">
             <a:extLst xmlns:a="http://schemas.openxmlformats.org/drawingml/2006/main">
               <a:ext uri="{FF2B5EF4-FFF2-40B4-BE49-F238E27FC236}">
-                <a16:creationId xmlns:a16="http://schemas.microsoft.com/office/drawing/2014/main" id="{1D61111F-4F59-47D2-9F71-445CC47902D3}"/>
+                <a16:creationId xmlns:a16="http://schemas.microsoft.com/office/drawing/2014/main" id="{DAE41790-CDE7-444F-B43F-00746686D392}"/>
               </a:ext>
             </a:extLst>
           </p:cNvPr>
@@ -43517,7 +43517,7 @@
           <p:cNvPr id="22" name="">
             <a:extLst xmlns:a="http://schemas.openxmlformats.org/drawingml/2006/main">
               <a:ext uri="{FF2B5EF4-FFF2-40B4-BE49-F238E27FC236}">
-                <a16:creationId xmlns:a16="http://schemas.microsoft.com/office/drawing/2014/main" id="{867F4193-FA94-42F7-A924-46BC41CD4E17}"/>
+                <a16:creationId xmlns:a16="http://schemas.microsoft.com/office/drawing/2014/main" id="{012170D0-FEC8-44EF-AF46-B43564DD1000}"/>
               </a:ext>
             </a:extLst>
           </p:cNvPr>
@@ -43550,7 +43550,7 @@
           <p:cNvPr id="23" name="">
             <a:extLst xmlns:a="http://schemas.openxmlformats.org/drawingml/2006/main">
               <a:ext uri="{FF2B5EF4-FFF2-40B4-BE49-F238E27FC236}">
-                <a16:creationId xmlns:a16="http://schemas.microsoft.com/office/drawing/2014/main" id="{18EC884C-CC1C-4F02-9BED-3CA564922735}"/>
+                <a16:creationId xmlns:a16="http://schemas.microsoft.com/office/drawing/2014/main" id="{04174FEC-444C-4D06-8318-8015BF46B0E4}"/>
               </a:ext>
             </a:extLst>
           </p:cNvPr>
@@ -43583,7 +43583,7 @@
           <p:cNvPr id="24" name="">
             <a:extLst xmlns:a="http://schemas.openxmlformats.org/drawingml/2006/main">
               <a:ext uri="{FF2B5EF4-FFF2-40B4-BE49-F238E27FC236}">
-                <a16:creationId xmlns:a16="http://schemas.microsoft.com/office/drawing/2014/main" id="{D59A5D00-03ED-42FC-8EF0-CC8C75930CF0}"/>
+                <a16:creationId xmlns:a16="http://schemas.microsoft.com/office/drawing/2014/main" id="{451EDA81-386F-40FB-8442-D78291C6A355}"/>
               </a:ext>
             </a:extLst>
           </p:cNvPr>
@@ -43616,7 +43616,7 @@
           <p:cNvPr id="25" name="">
             <a:extLst xmlns:a="http://schemas.openxmlformats.org/drawingml/2006/main">
               <a:ext uri="{FF2B5EF4-FFF2-40B4-BE49-F238E27FC236}">
-                <a16:creationId xmlns:a16="http://schemas.microsoft.com/office/drawing/2014/main" id="{C41BD259-E287-41F7-B7F6-FA0B9A064456}"/>
+                <a16:creationId xmlns:a16="http://schemas.microsoft.com/office/drawing/2014/main" id="{B3E4C46E-06C8-44C3-89FC-D40950C787EB}"/>
               </a:ext>
             </a:extLst>
           </p:cNvPr>
@@ -43649,7 +43649,7 @@
           <p:cNvPr id="26" name="">
             <a:extLst xmlns:a="http://schemas.openxmlformats.org/drawingml/2006/main">
               <a:ext uri="{FF2B5EF4-FFF2-40B4-BE49-F238E27FC236}">
-                <a16:creationId xmlns:a16="http://schemas.microsoft.com/office/drawing/2014/main" id="{1FC70330-AFA2-45F6-A07B-B27382EA0793}"/>
+                <a16:creationId xmlns:a16="http://schemas.microsoft.com/office/drawing/2014/main" id="{07D84AAE-6ED7-41B3-B997-4D19DE78FA92}"/>
               </a:ext>
             </a:extLst>
           </p:cNvPr>
@@ -43682,7 +43682,7 @@
           <p:cNvPr id="27" name="">
             <a:extLst xmlns:a="http://schemas.openxmlformats.org/drawingml/2006/main">
               <a:ext uri="{FF2B5EF4-FFF2-40B4-BE49-F238E27FC236}">
-                <a16:creationId xmlns:a16="http://schemas.microsoft.com/office/drawing/2014/main" id="{05E63B72-EF51-438E-A08F-8CDE5EB6E41B}"/>
+                <a16:creationId xmlns:a16="http://schemas.microsoft.com/office/drawing/2014/main" id="{BEA67AF4-603A-4D39-ACE3-E231D2343D52}"/>
               </a:ext>
             </a:extLst>
           </p:cNvPr>
@@ -43715,7 +43715,7 @@
           <p:cNvPr id="28" name="질문">
             <a:extLst xmlns:a="http://schemas.openxmlformats.org/drawingml/2006/main">
               <a:ext uri="{FF2B5EF4-FFF2-40B4-BE49-F238E27FC236}">
-                <a16:creationId xmlns:a16="http://schemas.microsoft.com/office/drawing/2014/main" id="{9419959F-4A6A-4EDE-978B-D793AD0F38AF}"/>
+                <a16:creationId xmlns:a16="http://schemas.microsoft.com/office/drawing/2014/main" id="{76318589-54E9-423E-99BC-4EF800F4B0D5}"/>
               </a:ext>
             </a:extLst>
           </p:cNvPr>
@@ -43873,7 +43873,7 @@
           <p:cNvPr id="29" name="">
             <a:extLst xmlns:a="http://schemas.openxmlformats.org/drawingml/2006/main">
               <a:ext uri="{FF2B5EF4-FFF2-40B4-BE49-F238E27FC236}">
-                <a16:creationId xmlns:a16="http://schemas.microsoft.com/office/drawing/2014/main" id="{B6029475-FE3D-41A5-9DB9-9F443AFDB890}"/>
+                <a16:creationId xmlns:a16="http://schemas.microsoft.com/office/drawing/2014/main" id="{F6C3CAE5-0897-4B6E-91B4-E7D96C58D76C}"/>
               </a:ext>
             </a:extLst>
           </p:cNvPr>
@@ -43903,7 +43903,7 @@
           <p:cNvPr id="30" name="">
             <a:extLst xmlns:a="http://schemas.openxmlformats.org/drawingml/2006/main">
               <a:ext uri="{FF2B5EF4-FFF2-40B4-BE49-F238E27FC236}">
-                <a16:creationId xmlns:a16="http://schemas.microsoft.com/office/drawing/2014/main" id="{BCB5CB36-ED64-48F6-9C88-D51A4576B858}"/>
+                <a16:creationId xmlns:a16="http://schemas.microsoft.com/office/drawing/2014/main" id="{B342EED0-9280-423A-8792-E16300D5C668}"/>
               </a:ext>
             </a:extLst>
           </p:cNvPr>
@@ -43936,7 +43936,7 @@
           <p:cNvPr id="31" name="Repository의 코드">
             <a:extLst xmlns:a="http://schemas.openxmlformats.org/drawingml/2006/main">
               <a:ext uri="{FF2B5EF4-FFF2-40B4-BE49-F238E27FC236}">
-                <a16:creationId xmlns:a16="http://schemas.microsoft.com/office/drawing/2014/main" id="{E9308571-7864-45FA-8B3E-26B35164FE80}"/>
+                <a16:creationId xmlns:a16="http://schemas.microsoft.com/office/drawing/2014/main" id="{B699C1F9-9FDB-4CF2-9BDF-B8A16C644844}"/>
               </a:ext>
             </a:extLst>
           </p:cNvPr>
@@ -44094,7 +44094,7 @@
           <p:cNvPr id="32" name="관련 코드 찾기">
             <a:extLst xmlns:a="http://schemas.openxmlformats.org/drawingml/2006/main">
               <a:ext uri="{FF2B5EF4-FFF2-40B4-BE49-F238E27FC236}">
-                <a16:creationId xmlns:a16="http://schemas.microsoft.com/office/drawing/2014/main" id="{2B2FD8CB-223D-44A2-A3BE-0B63F69F47B5}"/>
+                <a16:creationId xmlns:a16="http://schemas.microsoft.com/office/drawing/2014/main" id="{0828C954-7654-4398-B71C-D9C469F3903A}"/>
               </a:ext>
             </a:extLst>
           </p:cNvPr>
@@ -44252,7 +44252,7 @@
           <p:cNvPr id="33" name="관련 정보의 위치가&#10;일부 조건에서 중요할 수 있다">
             <a:extLst xmlns:a="http://schemas.openxmlformats.org/drawingml/2006/main">
               <a:ext uri="{FF2B5EF4-FFF2-40B4-BE49-F238E27FC236}">
-                <a16:creationId xmlns:a16="http://schemas.microsoft.com/office/drawing/2014/main" id="{F11519F3-9100-46E3-9353-B0C316064AC2}"/>
+                <a16:creationId xmlns:a16="http://schemas.microsoft.com/office/drawing/2014/main" id="{B6A85BFC-CD5D-4864-8080-5F1B320AB6CB}"/>
               </a:ext>
             </a:extLst>
           </p:cNvPr>
@@ -44433,7 +44433,7 @@
           <p:cNvPr id="34" name="관련 코드 정보를&#10;선택하고 찾는 능력을 평가">
             <a:extLst xmlns:a="http://schemas.openxmlformats.org/drawingml/2006/main">
               <a:ext uri="{FF2B5EF4-FFF2-40B4-BE49-F238E27FC236}">
-                <a16:creationId xmlns:a16="http://schemas.microsoft.com/office/drawing/2014/main" id="{E39D85B5-7D32-4D62-8ADB-BD4FA679268A}"/>
+                <a16:creationId xmlns:a16="http://schemas.microsoft.com/office/drawing/2014/main" id="{08DCF009-13E7-49D6-B429-FB4E4B15ABD6}"/>
               </a:ext>
             </a:extLst>
           </p:cNvPr>
@@ -44614,7 +44614,7 @@
           <p:cNvPr id="35" name="aclanthology.org/2024.tacl-1.9/">
             <a:extLst xmlns:a="http://schemas.openxmlformats.org/drawingml/2006/main">
               <a:ext uri="{FF2B5EF4-FFF2-40B4-BE49-F238E27FC236}">
-                <a16:creationId xmlns:a16="http://schemas.microsoft.com/office/drawing/2014/main" id="{A1131E0C-009C-4F26-87C2-219643FDBC46}"/>
+                <a16:creationId xmlns:a16="http://schemas.microsoft.com/office/drawing/2014/main" id="{3E48014D-2DA2-4F12-A55C-B1095A04A081}"/>
               </a:ext>
             </a:extLst>
           </p:cNvPr>
@@ -44772,7 +44772,7 @@
           <p:cNvPr id="36" name="arxiv.org/abs/2406.06025">
             <a:extLst xmlns:a="http://schemas.openxmlformats.org/drawingml/2006/main">
               <a:ext uri="{FF2B5EF4-FFF2-40B4-BE49-F238E27FC236}">
-                <a16:creationId xmlns:a16="http://schemas.microsoft.com/office/drawing/2014/main" id="{CD693021-23C5-4EA7-873D-F66426C5948A}"/>
+                <a16:creationId xmlns:a16="http://schemas.microsoft.com/office/drawing/2014/main" id="{C55DD358-AC0F-469F-ADCE-D7ED51BFF4B2}"/>
               </a:ext>
             </a:extLst>
           </p:cNvPr>
@@ -44928,7 +44928,7 @@
     </p:spTree>
     <p:extLst>
       <p:ext uri="{BB962C8B-B14F-4D97-AF65-F5344CB8AC3E}">
-        <p14:creationId xmlns:p14="http://schemas.microsoft.com/office/powerpoint/2010/main" val="2070545328"/>
+        <p14:creationId xmlns:p14="http://schemas.microsoft.com/office/powerpoint/2010/main" val="238896563"/>
       </p:ext>
     </p:extLst>
   </p:cSld>
@@ -44956,10 +44956,10 @@
       </p:grpSpPr>
       <p:sp>
         <p:nvSpPr>
-          <p:cNvPr id="20" name="ACT 2 · Context를 찾게 하는 설계">
+          <p:cNvPr id="20" name="ACT 2 · 필요한 상세 정보의 탐색 경로">
             <a:extLst xmlns:a="http://schemas.openxmlformats.org/drawingml/2006/main">
               <a:ext uri="{FF2B5EF4-FFF2-40B4-BE49-F238E27FC236}">
-                <a16:creationId xmlns:a16="http://schemas.microsoft.com/office/drawing/2014/main" id="{E30D0B5A-A38B-450E-95C0-6141A5D90FC3}"/>
+                <a16:creationId xmlns:a16="http://schemas.microsoft.com/office/drawing/2014/main" id="{4660E4E5-DFAC-462B-BD9B-A5229E3DC1CE}"/>
               </a:ext>
             </a:extLst>
           </p:cNvPr>
@@ -45107,7 +45107,7 @@
                 <a:ea typeface="Malgun Gothic"/>
                 <a:cs typeface="Malgun Gothic"/>
               </a:rPr>
-              <a:t>ACT 2 · Context를 찾게 하는 설계</a:t>
+              <a:t>ACT 2 · 필요한 상세 정보의 탐색 경로</a:t>
             </a:r>
           </a:p>
         </p:txBody>
@@ -45117,7 +45117,7 @@
           <p:cNvPr id="2" name="S30">
             <a:extLst xmlns:a="http://schemas.openxmlformats.org/drawingml/2006/main">
               <a:ext uri="{FF2B5EF4-FFF2-40B4-BE49-F238E27FC236}">
-                <a16:creationId xmlns:a16="http://schemas.microsoft.com/office/drawing/2014/main" id="{27182EA4-A60E-48CA-ACE2-8868AACC3227}"/>
+                <a16:creationId xmlns:a16="http://schemas.microsoft.com/office/drawing/2014/main" id="{5FA279D2-1F39-4924-92D9-B751483352E0}"/>
               </a:ext>
             </a:extLst>
           </p:cNvPr>
@@ -45275,7 +45275,7 @@
           <p:cNvPr id="3" name="필요한 상세 정보로 가는 길">
             <a:extLst xmlns:a="http://schemas.openxmlformats.org/drawingml/2006/main">
               <a:ext uri="{FF2B5EF4-FFF2-40B4-BE49-F238E27FC236}">
-                <a16:creationId xmlns:a16="http://schemas.microsoft.com/office/drawing/2014/main" id="{362351E9-5144-432E-8AAD-2D9B58B271D4}"/>
+                <a16:creationId xmlns:a16="http://schemas.microsoft.com/office/drawing/2014/main" id="{11A7C445-158C-4B2F-9D4D-908B719EBDA3}"/>
               </a:ext>
             </a:extLst>
           </p:cNvPr>
@@ -45433,7 +45433,7 @@
           <p:cNvPr id="4" name="">
             <a:extLst xmlns:a="http://schemas.openxmlformats.org/drawingml/2006/main">
               <a:ext uri="{FF2B5EF4-FFF2-40B4-BE49-F238E27FC236}">
-                <a16:creationId xmlns:a16="http://schemas.microsoft.com/office/drawing/2014/main" id="{C407D347-BAB1-4685-9D3C-F237B9844DF7}"/>
+                <a16:creationId xmlns:a16="http://schemas.microsoft.com/office/drawing/2014/main" id="{65EAA62C-3E18-48B7-8A3B-F28C58AABA67}"/>
               </a:ext>
             </a:extLst>
           </p:cNvPr>
@@ -45464,7 +45464,7 @@
           <p:cNvPr id="5" name="교육용 Routing 모델 · 실제 문서 접근 결과는 다음 구간에서 확인">
             <a:extLst xmlns:a="http://schemas.openxmlformats.org/drawingml/2006/main">
               <a:ext uri="{FF2B5EF4-FFF2-40B4-BE49-F238E27FC236}">
-                <a16:creationId xmlns:a16="http://schemas.microsoft.com/office/drawing/2014/main" id="{A0479C29-398A-4154-9B30-7F8DB7E6FA91}"/>
+                <a16:creationId xmlns:a16="http://schemas.microsoft.com/office/drawing/2014/main" id="{3CC58BC5-310A-4AFE-B73E-AD67C4AAADAA}"/>
               </a:ext>
             </a:extLst>
           </p:cNvPr>
@@ -45622,7 +45622,7 @@
           <p:cNvPr id="6" name="검색 성능 향상이나 토큰 절약을 입증한 그림이 아님">
             <a:extLst xmlns:a="http://schemas.openxmlformats.org/drawingml/2006/main">
               <a:ext uri="{FF2B5EF4-FFF2-40B4-BE49-F238E27FC236}">
-                <a16:creationId xmlns:a16="http://schemas.microsoft.com/office/drawing/2014/main" id="{D294B2F2-D586-40B9-A222-EB58A6AB2EDD}"/>
+                <a16:creationId xmlns:a16="http://schemas.microsoft.com/office/drawing/2014/main" id="{D195A35F-F593-4A63-8B59-2DEA453D6C85}"/>
               </a:ext>
             </a:extLst>
           </p:cNvPr>
@@ -45780,7 +45780,7 @@
           <p:cNvPr id="7" name="어떤 질문에서 어떤 상세 정보가 필요할까?">
             <a:extLst xmlns:a="http://schemas.openxmlformats.org/drawingml/2006/main">
               <a:ext uri="{FF2B5EF4-FFF2-40B4-BE49-F238E27FC236}">
-                <a16:creationId xmlns:a16="http://schemas.microsoft.com/office/drawing/2014/main" id="{7A7414D8-4A06-4E4A-AD45-F261F1C0E767}"/>
+                <a16:creationId xmlns:a16="http://schemas.microsoft.com/office/drawing/2014/main" id="{1F33B4BA-F4C4-4C34-A798-9BEEEC27AA08}"/>
               </a:ext>
             </a:extLst>
           </p:cNvPr>
@@ -45938,7 +45938,7 @@
           <p:cNvPr id="8" name="">
             <a:extLst xmlns:a="http://schemas.openxmlformats.org/drawingml/2006/main">
               <a:ext uri="{FF2B5EF4-FFF2-40B4-BE49-F238E27FC236}">
-                <a16:creationId xmlns:a16="http://schemas.microsoft.com/office/drawing/2014/main" id="{83A13FDD-C286-44B3-A2AA-97AEEFA178AB}"/>
+                <a16:creationId xmlns:a16="http://schemas.microsoft.com/office/drawing/2014/main" id="{CD729D97-9C38-495D-81A4-9F41B980A63B}"/>
               </a:ext>
             </a:extLst>
           </p:cNvPr>
@@ -45969,7 +45969,7 @@
           <p:cNvPr id="9" name="Task">
             <a:extLst xmlns:a="http://schemas.openxmlformats.org/drawingml/2006/main">
               <a:ext uri="{FF2B5EF4-FFF2-40B4-BE49-F238E27FC236}">
-                <a16:creationId xmlns:a16="http://schemas.microsoft.com/office/drawing/2014/main" id="{16FC50AB-CD9D-4CBD-A310-3E54BA3E6617}"/>
+                <a16:creationId xmlns:a16="http://schemas.microsoft.com/office/drawing/2014/main" id="{B16E67B9-6FF4-4794-8F6E-991286EDA724}"/>
               </a:ext>
             </a:extLst>
           </p:cNvPr>
@@ -46127,7 +46127,7 @@
           <p:cNvPr id="10" name="지금 해결할 질문">
             <a:extLst xmlns:a="http://schemas.openxmlformats.org/drawingml/2006/main">
               <a:ext uri="{FF2B5EF4-FFF2-40B4-BE49-F238E27FC236}">
-                <a16:creationId xmlns:a16="http://schemas.microsoft.com/office/drawing/2014/main" id="{FA129893-E521-48BB-8EDB-AC4433EDB82B}"/>
+                <a16:creationId xmlns:a16="http://schemas.microsoft.com/office/drawing/2014/main" id="{757E536D-5058-4C38-B52F-4BB89D376C52}"/>
               </a:ext>
             </a:extLst>
           </p:cNvPr>
@@ -46285,7 +46285,7 @@
           <p:cNvPr id="11" name="">
             <a:extLst xmlns:a="http://schemas.openxmlformats.org/drawingml/2006/main">
               <a:ext uri="{FF2B5EF4-FFF2-40B4-BE49-F238E27FC236}">
-                <a16:creationId xmlns:a16="http://schemas.microsoft.com/office/drawing/2014/main" id="{46A66DA2-AE1F-42B3-9AFD-BA7A101BC48C}"/>
+                <a16:creationId xmlns:a16="http://schemas.microsoft.com/office/drawing/2014/main" id="{F173A335-5B59-4619-B738-AEC998BC41DC}"/>
               </a:ext>
             </a:extLst>
           </p:cNvPr>
@@ -46315,7 +46315,7 @@
           <p:cNvPr id="12" name="">
             <a:extLst xmlns:a="http://schemas.openxmlformats.org/drawingml/2006/main">
               <a:ext uri="{FF2B5EF4-FFF2-40B4-BE49-F238E27FC236}">
-                <a16:creationId xmlns:a16="http://schemas.microsoft.com/office/drawing/2014/main" id="{655AC229-C144-4E8D-8AA7-557017EB8174}"/>
+                <a16:creationId xmlns:a16="http://schemas.microsoft.com/office/drawing/2014/main" id="{3C4C112B-1668-4714-803A-C18F4AF4E105}"/>
               </a:ext>
             </a:extLst>
           </p:cNvPr>
@@ -46346,7 +46346,7 @@
           <p:cNvPr id="13" name="Core Context">
             <a:extLst xmlns:a="http://schemas.openxmlformats.org/drawingml/2006/main">
               <a:ext uri="{FF2B5EF4-FFF2-40B4-BE49-F238E27FC236}">
-                <a16:creationId xmlns:a16="http://schemas.microsoft.com/office/drawing/2014/main" id="{8434F0C4-9D64-4CFC-8B48-55230F9C59D9}"/>
+                <a16:creationId xmlns:a16="http://schemas.microsoft.com/office/drawing/2014/main" id="{A8B82F8E-097E-413F-86AA-0C7C2EDC664D}"/>
               </a:ext>
             </a:extLst>
           </p:cNvPr>
@@ -46504,7 +46504,7 @@
           <p:cNvPr id="14" name="프로젝트 안내와&#10;찾아갈 위치">
             <a:extLst xmlns:a="http://schemas.openxmlformats.org/drawingml/2006/main">
               <a:ext uri="{FF2B5EF4-FFF2-40B4-BE49-F238E27FC236}">
-                <a16:creationId xmlns:a16="http://schemas.microsoft.com/office/drawing/2014/main" id="{4B0A6109-BA73-4499-892E-F9058B0A521D}"/>
+                <a16:creationId xmlns:a16="http://schemas.microsoft.com/office/drawing/2014/main" id="{1B081A7B-4115-4CED-9EFF-7687E7366329}"/>
               </a:ext>
             </a:extLst>
           </p:cNvPr>
@@ -46685,7 +46685,7 @@
           <p:cNvPr id="15" name="">
             <a:extLst xmlns:a="http://schemas.openxmlformats.org/drawingml/2006/main">
               <a:ext uri="{FF2B5EF4-FFF2-40B4-BE49-F238E27FC236}">
-                <a16:creationId xmlns:a16="http://schemas.microsoft.com/office/drawing/2014/main" id="{B00F0568-788F-4528-8CCA-1CEB99244F4C}"/>
+                <a16:creationId xmlns:a16="http://schemas.microsoft.com/office/drawing/2014/main" id="{5E91A82D-E068-4CFA-A22A-2F4018EC920A}"/>
               </a:ext>
             </a:extLst>
           </p:cNvPr>
@@ -46715,7 +46715,7 @@
           <p:cNvPr id="16" name="">
             <a:extLst xmlns:a="http://schemas.openxmlformats.org/drawingml/2006/main">
               <a:ext uri="{FF2B5EF4-FFF2-40B4-BE49-F238E27FC236}">
-                <a16:creationId xmlns:a16="http://schemas.microsoft.com/office/drawing/2014/main" id="{CA415963-3519-4918-82DC-F4888734BC8E}"/>
+                <a16:creationId xmlns:a16="http://schemas.microsoft.com/office/drawing/2014/main" id="{F6612FD8-E5C4-4F53-8BC6-7B7B07E5CF28}"/>
               </a:ext>
             </a:extLst>
           </p:cNvPr>
@@ -46746,7 +46746,7 @@
           <p:cNvPr id="17" name="관련 상세 정보">
             <a:extLst xmlns:a="http://schemas.openxmlformats.org/drawingml/2006/main">
               <a:ext uri="{FF2B5EF4-FFF2-40B4-BE49-F238E27FC236}">
-                <a16:creationId xmlns:a16="http://schemas.microsoft.com/office/drawing/2014/main" id="{AE81B358-FB47-4429-B9C5-E21047F66B60}"/>
+                <a16:creationId xmlns:a16="http://schemas.microsoft.com/office/drawing/2014/main" id="{5D51DE27-8E73-495E-8991-38D5069D2109}"/>
               </a:ext>
             </a:extLst>
           </p:cNvPr>
@@ -46904,7 +46904,7 @@
           <p:cNvPr id="18" name="질문에 필요한&#10;계약 · 구조 · 테스트">
             <a:extLst xmlns:a="http://schemas.openxmlformats.org/drawingml/2006/main">
               <a:ext uri="{FF2B5EF4-FFF2-40B4-BE49-F238E27FC236}">
-                <a16:creationId xmlns:a16="http://schemas.microsoft.com/office/drawing/2014/main" id="{11B5D6C6-2E8E-49B8-9240-EECC9183F649}"/>
+                <a16:creationId xmlns:a16="http://schemas.microsoft.com/office/drawing/2014/main" id="{BE86A12F-BA35-4F7B-BF6A-C592277B485F}"/>
               </a:ext>
             </a:extLst>
           </p:cNvPr>
@@ -47085,7 +47085,7 @@
           <p:cNvPr id="19" name="C++ 예: 공통 제약을 확인한 뒤, 해당 알고리즘의 계약으로">
             <a:extLst xmlns:a="http://schemas.openxmlformats.org/drawingml/2006/main">
               <a:ext uri="{FF2B5EF4-FFF2-40B4-BE49-F238E27FC236}">
-                <a16:creationId xmlns:a16="http://schemas.microsoft.com/office/drawing/2014/main" id="{20B4060A-60F2-46F2-89BF-322D412C6582}"/>
+                <a16:creationId xmlns:a16="http://schemas.microsoft.com/office/drawing/2014/main" id="{FB39CE3D-2A88-4A1D-AB63-16929397BD0B}"/>
               </a:ext>
             </a:extLst>
           </p:cNvPr>
@@ -47241,7 +47241,7 @@
     </p:spTree>
     <p:extLst>
       <p:ext uri="{BB962C8B-B14F-4D97-AF65-F5344CB8AC3E}">
-        <p14:creationId xmlns:p14="http://schemas.microsoft.com/office/powerpoint/2010/main" val="775030414"/>
+        <p14:creationId xmlns:p14="http://schemas.microsoft.com/office/powerpoint/2010/main" val="968915325"/>
       </p:ext>
     </p:extLst>
   </p:cSld>

--- a/production/ACT_2.pptx
+++ b/production/ACT_2.pptx
@@ -2,27 +2,27 @@
 <file path=ppt/presentation.xml><?xml version="1.0" encoding="utf-8"?>
 <p:presentation xmlns:p="http://schemas.openxmlformats.org/presentationml/2006/main">
   <p:sldMasterIdLst>
-    <p:sldMasterId xmlns:r="http://schemas.openxmlformats.org/officeDocument/2006/relationships" id="2147483648" r:id="Rb15b982a934f4095"/>
+    <p:sldMasterId xmlns:r="http://schemas.openxmlformats.org/officeDocument/2006/relationships" id="2147483648" r:id="R8e608f6b925f495f"/>
   </p:sldMasterIdLst>
   <p:notesMasterIdLst>
-    <p:notesMasterId xmlns:r="http://schemas.openxmlformats.org/officeDocument/2006/relationships" r:id="Rd5c6840128ae4088"/>
+    <p:notesMasterId xmlns:r="http://schemas.openxmlformats.org/officeDocument/2006/relationships" r:id="Rd149eeb698d04bb4"/>
   </p:notesMasterIdLst>
   <p:sldIdLst>
-    <p:sldId xmlns:r="http://schemas.openxmlformats.org/officeDocument/2006/relationships" id="256" r:id="Rf9aa51abf9e64336"/>
-    <p:sldId xmlns:r="http://schemas.openxmlformats.org/officeDocument/2006/relationships" id="257" r:id="Re3842fe5fc174b83"/>
-    <p:sldId xmlns:r="http://schemas.openxmlformats.org/officeDocument/2006/relationships" id="258" r:id="R93135c02e94e4e1d"/>
-    <p:sldId xmlns:r="http://schemas.openxmlformats.org/officeDocument/2006/relationships" id="259" r:id="Ra107381e95824a91"/>
-    <p:sldId xmlns:r="http://schemas.openxmlformats.org/officeDocument/2006/relationships" id="260" r:id="R71f97b8b620343db"/>
-    <p:sldId xmlns:r="http://schemas.openxmlformats.org/officeDocument/2006/relationships" id="261" r:id="R77bedacb35834aab"/>
-    <p:sldId xmlns:r="http://schemas.openxmlformats.org/officeDocument/2006/relationships" id="262" r:id="Rf346991e28fb4917"/>
-    <p:sldId xmlns:r="http://schemas.openxmlformats.org/officeDocument/2006/relationships" id="263" r:id="R62b6b02fddb847ed"/>
-    <p:sldId xmlns:r="http://schemas.openxmlformats.org/officeDocument/2006/relationships" id="264" r:id="Ra60d46dc667a4ac1"/>
-    <p:sldId xmlns:r="http://schemas.openxmlformats.org/officeDocument/2006/relationships" id="265" r:id="R48a45b7516854c9b"/>
-    <p:sldId xmlns:r="http://schemas.openxmlformats.org/officeDocument/2006/relationships" id="266" r:id="R158325c94c3b4012"/>
-    <p:sldId xmlns:r="http://schemas.openxmlformats.org/officeDocument/2006/relationships" id="267" r:id="R2ebd43d471eb4f3e"/>
-    <p:sldId xmlns:r="http://schemas.openxmlformats.org/officeDocument/2006/relationships" id="268" r:id="R4e6516a9b764438c"/>
-    <p:sldId xmlns:r="http://schemas.openxmlformats.org/officeDocument/2006/relationships" id="269" r:id="R3293ac5b97f7429f"/>
-    <p:sldId xmlns:r="http://schemas.openxmlformats.org/officeDocument/2006/relationships" id="270" r:id="R6ea4cbd327444238"/>
+    <p:sldId xmlns:r="http://schemas.openxmlformats.org/officeDocument/2006/relationships" id="256" r:id="R0d21b2d36c6045ed"/>
+    <p:sldId xmlns:r="http://schemas.openxmlformats.org/officeDocument/2006/relationships" id="257" r:id="Radfd4d1f50664128"/>
+    <p:sldId xmlns:r="http://schemas.openxmlformats.org/officeDocument/2006/relationships" id="258" r:id="Rbb44b974f3884402"/>
+    <p:sldId xmlns:r="http://schemas.openxmlformats.org/officeDocument/2006/relationships" id="259" r:id="Rc43ca39e055f4cd6"/>
+    <p:sldId xmlns:r="http://schemas.openxmlformats.org/officeDocument/2006/relationships" id="260" r:id="R5274a4cf40d442a4"/>
+    <p:sldId xmlns:r="http://schemas.openxmlformats.org/officeDocument/2006/relationships" id="261" r:id="Rf7386489936c4040"/>
+    <p:sldId xmlns:r="http://schemas.openxmlformats.org/officeDocument/2006/relationships" id="262" r:id="R86c29ffb72f14ac3"/>
+    <p:sldId xmlns:r="http://schemas.openxmlformats.org/officeDocument/2006/relationships" id="263" r:id="R63ff6dda26654b9d"/>
+    <p:sldId xmlns:r="http://schemas.openxmlformats.org/officeDocument/2006/relationships" id="264" r:id="R557bc57a801c49fb"/>
+    <p:sldId xmlns:r="http://schemas.openxmlformats.org/officeDocument/2006/relationships" id="265" r:id="R5f32cdd1e4fe48cc"/>
+    <p:sldId xmlns:r="http://schemas.openxmlformats.org/officeDocument/2006/relationships" id="266" r:id="Rc2827b7dc0454d5c"/>
+    <p:sldId xmlns:r="http://schemas.openxmlformats.org/officeDocument/2006/relationships" id="267" r:id="Rb4a1a09ab5c14ae3"/>
+    <p:sldId xmlns:r="http://schemas.openxmlformats.org/officeDocument/2006/relationships" id="268" r:id="R99ae46b200dc4b20"/>
+    <p:sldId xmlns:r="http://schemas.openxmlformats.org/officeDocument/2006/relationships" id="269" r:id="Ree9cea8d17ae4fe9"/>
+    <p:sldId xmlns:r="http://schemas.openxmlformats.org/officeDocument/2006/relationships" id="270" r:id="R72c47c521cf843eb"/>
   </p:sldIdLst>
   <p:sldSz cx="12192000" cy="6858000"/>
   <p:notesSz cx="6858000" cy="9144000"/>
@@ -4703,7 +4703,7 @@
           <p:cNvPr id="3" name="Title">
             <a:extLst xmlns:a="http://schemas.openxmlformats.org/drawingml/2006/main">
               <a:ext uri="{FF2B5EF4-FFF2-40B4-BE49-F238E27FC236}">
-                <a16:creationId xmlns:a16="http://schemas.microsoft.com/office/drawing/2014/main" id="{FF44484A-8373-45D3-9197-2D22D04417DB}"/>
+                <a16:creationId xmlns:a16="http://schemas.microsoft.com/office/drawing/2014/main" id="{7713D891-BCA9-4E2C-B4D8-DD85BE59CD68}"/>
               </a:ext>
             </a:extLst>
           </p:cNvPr>
@@ -4932,7 +4932,7 @@
           <p:cNvPr id="2" name="Subtitle">
             <a:extLst xmlns:a="http://schemas.openxmlformats.org/drawingml/2006/main">
               <a:ext uri="{FF2B5EF4-FFF2-40B4-BE49-F238E27FC236}">
-                <a16:creationId xmlns:a16="http://schemas.microsoft.com/office/drawing/2014/main" id="{31EB19BF-D588-455A-9FB9-37D4A7FB1013}"/>
+                <a16:creationId xmlns:a16="http://schemas.microsoft.com/office/drawing/2014/main" id="{FFB417C0-3E8C-46C0-ACDC-B9DCEB83EBD9}"/>
               </a:ext>
             </a:extLst>
           </p:cNvPr>
@@ -5178,7 +5178,7 @@
           <p:cNvPr id="2" name="Section title">
             <a:extLst xmlns:a="http://schemas.openxmlformats.org/drawingml/2006/main">
               <a:ext uri="{FF2B5EF4-FFF2-40B4-BE49-F238E27FC236}">
-                <a16:creationId xmlns:a16="http://schemas.microsoft.com/office/drawing/2014/main" id="{312692CD-16F9-46F4-BC45-AD4207BB30E3}"/>
+                <a16:creationId xmlns:a16="http://schemas.microsoft.com/office/drawing/2014/main" id="{2C0E45E4-C5FF-4AD2-B96D-8FB031D9BB54}"/>
               </a:ext>
             </a:extLst>
           </p:cNvPr>
@@ -5424,7 +5424,7 @@
           <p:cNvPr id="3" name="Title">
             <a:extLst xmlns:a="http://schemas.openxmlformats.org/drawingml/2006/main">
               <a:ext uri="{FF2B5EF4-FFF2-40B4-BE49-F238E27FC236}">
-                <a16:creationId xmlns:a16="http://schemas.microsoft.com/office/drawing/2014/main" id="{5424EA21-A17A-4257-866D-0C89406E528E}"/>
+                <a16:creationId xmlns:a16="http://schemas.microsoft.com/office/drawing/2014/main" id="{72D335BE-A886-4C6C-8F54-A5077D1987CD}"/>
               </a:ext>
             </a:extLst>
           </p:cNvPr>
@@ -5653,7 +5653,7 @@
           <p:cNvPr id="2" name="Body">
             <a:extLst xmlns:a="http://schemas.openxmlformats.org/drawingml/2006/main">
               <a:ext uri="{FF2B5EF4-FFF2-40B4-BE49-F238E27FC236}">
-                <a16:creationId xmlns:a16="http://schemas.microsoft.com/office/drawing/2014/main" id="{422B6982-B14E-4E2E-B409-6C76988E3678}"/>
+                <a16:creationId xmlns:a16="http://schemas.microsoft.com/office/drawing/2014/main" id="{24082072-2DFE-4EAE-889B-51AB677993A7}"/>
               </a:ext>
             </a:extLst>
           </p:cNvPr>
@@ -5899,7 +5899,7 @@
           <p:cNvPr id="4" name="Title">
             <a:extLst xmlns:a="http://schemas.openxmlformats.org/drawingml/2006/main">
               <a:ext uri="{FF2B5EF4-FFF2-40B4-BE49-F238E27FC236}">
-                <a16:creationId xmlns:a16="http://schemas.microsoft.com/office/drawing/2014/main" id="{24D4037D-FCA9-4A9B-9A86-2553968A401F}"/>
+                <a16:creationId xmlns:a16="http://schemas.microsoft.com/office/drawing/2014/main" id="{2E56D10E-B34C-47E8-A95D-2B5D046E1E85}"/>
               </a:ext>
             </a:extLst>
           </p:cNvPr>
@@ -6128,7 +6128,7 @@
           <p:cNvPr id="2" name="Left column">
             <a:extLst xmlns:a="http://schemas.openxmlformats.org/drawingml/2006/main">
               <a:ext uri="{FF2B5EF4-FFF2-40B4-BE49-F238E27FC236}">
-                <a16:creationId xmlns:a16="http://schemas.microsoft.com/office/drawing/2014/main" id="{2A040CF5-CC79-420C-BC07-EB12A4F52E2E}"/>
+                <a16:creationId xmlns:a16="http://schemas.microsoft.com/office/drawing/2014/main" id="{93B170AD-4102-4B3A-9E90-A066EDA6C095}"/>
               </a:ext>
             </a:extLst>
           </p:cNvPr>
@@ -6357,7 +6357,7 @@
           <p:cNvPr id="3" name="Right column">
             <a:extLst xmlns:a="http://schemas.openxmlformats.org/drawingml/2006/main">
               <a:ext uri="{FF2B5EF4-FFF2-40B4-BE49-F238E27FC236}">
-                <a16:creationId xmlns:a16="http://schemas.microsoft.com/office/drawing/2014/main" id="{DA8EA5B2-38EC-4B52-9E74-EAA6C615A8F7}"/>
+                <a16:creationId xmlns:a16="http://schemas.microsoft.com/office/drawing/2014/main" id="{DE68F22C-FD65-439C-ACA3-3E240D3A006E}"/>
               </a:ext>
             </a:extLst>
           </p:cNvPr>
@@ -6603,7 +6603,7 @@
           <p:cNvPr id="3" name="Title">
             <a:extLst xmlns:a="http://schemas.openxmlformats.org/drawingml/2006/main">
               <a:ext uri="{FF2B5EF4-FFF2-40B4-BE49-F238E27FC236}">
-                <a16:creationId xmlns:a16="http://schemas.microsoft.com/office/drawing/2014/main" id="{D351FDA2-AF44-4691-94BF-A789F09E7C36}"/>
+                <a16:creationId xmlns:a16="http://schemas.microsoft.com/office/drawing/2014/main" id="{2C152618-673A-47A6-A9F6-CAC7A0C6CFE0}"/>
               </a:ext>
             </a:extLst>
           </p:cNvPr>
@@ -6832,7 +6832,7 @@
           <p:cNvPr id="2" name="Left column">
             <a:extLst xmlns:a="http://schemas.openxmlformats.org/drawingml/2006/main">
               <a:ext uri="{FF2B5EF4-FFF2-40B4-BE49-F238E27FC236}">
-                <a16:creationId xmlns:a16="http://schemas.microsoft.com/office/drawing/2014/main" id="{F0056701-F41C-42DE-964F-4C6E823F5261}"/>
+                <a16:creationId xmlns:a16="http://schemas.microsoft.com/office/drawing/2014/main" id="{F0565BEC-0A91-429D-8030-5AD688A63B51}"/>
               </a:ext>
             </a:extLst>
           </p:cNvPr>
@@ -7099,12 +7099,12 @@
   </p:cSld>
   <p:clrMap bg1="lt1" tx1="dk1" bg2="lt2" tx2="dk2" accent1="accent1" accent2="accent2" accent3="accent3" accent4="accent4" accent5="accent5" accent6="accent6" hlink="hlink" folHlink="folHlink"/>
   <p:sldLayoutIdLst>
-    <p:sldLayoutId xmlns:r="http://schemas.openxmlformats.org/officeDocument/2006/relationships" id="2147483649" r:id="Re83592381816476c"/>
-    <p:sldLayoutId xmlns:r="http://schemas.openxmlformats.org/officeDocument/2006/relationships" id="2147483650" r:id="Rb8d9749d79fd4238"/>
-    <p:sldLayoutId xmlns:r="http://schemas.openxmlformats.org/officeDocument/2006/relationships" id="2147483651" r:id="R9793cd447ded4abd"/>
-    <p:sldLayoutId xmlns:r="http://schemas.openxmlformats.org/officeDocument/2006/relationships" id="2147483652" r:id="Ra9fce87c9bb14f19"/>
-    <p:sldLayoutId xmlns:r="http://schemas.openxmlformats.org/officeDocument/2006/relationships" id="2147483653" r:id="Rafabb61bd42f40e8"/>
-    <p:sldLayoutId xmlns:r="http://schemas.openxmlformats.org/officeDocument/2006/relationships" id="2147483654" r:id="Rc20c461b6eeb4b7d"/>
+    <p:sldLayoutId xmlns:r="http://schemas.openxmlformats.org/officeDocument/2006/relationships" id="2147483649" r:id="R94159041c6c942d9"/>
+    <p:sldLayoutId xmlns:r="http://schemas.openxmlformats.org/officeDocument/2006/relationships" id="2147483650" r:id="Rfbc5a78a8e6f4efe"/>
+    <p:sldLayoutId xmlns:r="http://schemas.openxmlformats.org/officeDocument/2006/relationships" id="2147483651" r:id="R64a80f1e93b44ef5"/>
+    <p:sldLayoutId xmlns:r="http://schemas.openxmlformats.org/officeDocument/2006/relationships" id="2147483652" r:id="R84fa851239ba4889"/>
+    <p:sldLayoutId xmlns:r="http://schemas.openxmlformats.org/officeDocument/2006/relationships" id="2147483653" r:id="R0f0ba64e208b4b46"/>
+    <p:sldLayoutId xmlns:r="http://schemas.openxmlformats.org/officeDocument/2006/relationships" id="2147483654" r:id="R0b20351628864d66"/>
   </p:sldLayoutIdLst>
   <p:txStyles>
     <p:titleStyle>
@@ -7652,10 +7652,10 @@
       </p:grpSpPr>
       <p:sp>
         <p:nvSpPr>
-          <p:cNvPr id="23" name="ACT 2 · 반복되는 프로젝트 설명">
+          <p:cNvPr id="24" name="ACT 2 · 반복되는 프로젝트 설명">
             <a:extLst xmlns:a="http://schemas.openxmlformats.org/drawingml/2006/main">
               <a:ext uri="{FF2B5EF4-FFF2-40B4-BE49-F238E27FC236}">
-                <a16:creationId xmlns:a16="http://schemas.microsoft.com/office/drawing/2014/main" id="{77ED2A16-70BC-4D7C-AD79-837B40DA964D}"/>
+                <a16:creationId xmlns:a16="http://schemas.microsoft.com/office/drawing/2014/main" id="{128F6C12-D6A3-4677-98F5-906EBB1A4BEF}"/>
               </a:ext>
             </a:extLst>
           </p:cNvPr>
@@ -7813,7 +7813,7 @@
           <p:cNvPr id="2" name="S22">
             <a:extLst xmlns:a="http://schemas.openxmlformats.org/drawingml/2006/main">
               <a:ext uri="{FF2B5EF4-FFF2-40B4-BE49-F238E27FC236}">
-                <a16:creationId xmlns:a16="http://schemas.microsoft.com/office/drawing/2014/main" id="{7CED4F98-9F52-473F-916D-0AC1D513B1FC}"/>
+                <a16:creationId xmlns:a16="http://schemas.microsoft.com/office/drawing/2014/main" id="{E11200AB-3C0D-456B-8451-929ABD0BDB14}"/>
               </a:ext>
             </a:extLst>
           </p:cNvPr>
@@ -7971,7 +7971,7 @@
           <p:cNvPr id="3" name="다른 Task에 같은 설명이 반복된다">
             <a:extLst xmlns:a="http://schemas.openxmlformats.org/drawingml/2006/main">
               <a:ext uri="{FF2B5EF4-FFF2-40B4-BE49-F238E27FC236}">
-                <a16:creationId xmlns:a16="http://schemas.microsoft.com/office/drawing/2014/main" id="{39030513-D34F-4EEB-AD4C-A387AEEFC978}"/>
+                <a16:creationId xmlns:a16="http://schemas.microsoft.com/office/drawing/2014/main" id="{AC9755E9-2F73-4451-87C2-9A5E060D836D}"/>
               </a:ext>
             </a:extLst>
           </p:cNvPr>
@@ -8129,7 +8129,7 @@
           <p:cNvPr id="4" name="">
             <a:extLst xmlns:a="http://schemas.openxmlformats.org/drawingml/2006/main">
               <a:ext uri="{FF2B5EF4-FFF2-40B4-BE49-F238E27FC236}">
-                <a16:creationId xmlns:a16="http://schemas.microsoft.com/office/drawing/2014/main" id="{D668C533-7F56-4EC4-A546-3DCF702D38DF}"/>
+                <a16:creationId xmlns:a16="http://schemas.microsoft.com/office/drawing/2014/main" id="{F8A379ED-511C-4AC9-A05D-8C39FE1E0DB4}"/>
               </a:ext>
             </a:extLst>
           </p:cNvPr>
@@ -8140,7 +8140,7 @@
         </p:nvSpPr>
         <p:spPr>
           <a:xfrm xmlns:a="http://schemas.openxmlformats.org/drawingml/2006/main">
-            <a:off x="609600" y="5829300"/>
+            <a:off x="609600" y="5753100"/>
             <a:ext cx="10972800" cy="0"/>
           </a:xfrm>
           <a:prstGeom xmlns:a="http://schemas.openxmlformats.org/drawingml/2006/main" prst="line">
@@ -8160,7 +8160,7 @@
           <p:cNvPr id="5" name="교육용 구성 사례 · Bug fix / Performance / README 작업">
             <a:extLst xmlns:a="http://schemas.openxmlformats.org/drawingml/2006/main">
               <a:ext uri="{FF2B5EF4-FFF2-40B4-BE49-F238E27FC236}">
-                <a16:creationId xmlns:a16="http://schemas.microsoft.com/office/drawing/2014/main" id="{EE660958-6B32-45FF-8CCB-E970D0634ABF}"/>
+                <a16:creationId xmlns:a16="http://schemas.microsoft.com/office/drawing/2014/main" id="{5603F5FB-3CC7-4600-8240-DB88A71211FA}"/>
               </a:ext>
             </a:extLst>
           </p:cNvPr>
@@ -8171,8 +8171,8 @@
         </p:nvSpPr>
         <p:spPr>
           <a:xfrm xmlns:a="http://schemas.openxmlformats.org/drawingml/2006/main">
-            <a:off x="609600" y="5915025"/>
-            <a:ext cx="10972800" cy="247650"/>
+            <a:off x="609600" y="5791200"/>
+            <a:ext cx="10972800" cy="228600"/>
           </a:xfrm>
           <a:prstGeom xmlns:a="http://schemas.openxmlformats.org/drawingml/2006/main" prst="rect">
             <a:avLst/>
@@ -8318,7 +8318,7 @@
           <p:cNvPr id="6" name="서로 다른 요청에 같은 프로젝트 정보가 반복되는 상황을 보여준다">
             <a:extLst xmlns:a="http://schemas.openxmlformats.org/drawingml/2006/main">
               <a:ext uri="{FF2B5EF4-FFF2-40B4-BE49-F238E27FC236}">
-                <a16:creationId xmlns:a16="http://schemas.microsoft.com/office/drawing/2014/main" id="{87FACEA2-14C1-42E2-A6B2-A9B928AFEE90}"/>
+                <a16:creationId xmlns:a16="http://schemas.microsoft.com/office/drawing/2014/main" id="{36A68D7F-0195-41ED-A9F9-29D5D098D8FF}"/>
               </a:ext>
             </a:extLst>
           </p:cNvPr>
@@ -8329,7 +8329,7 @@
         </p:nvSpPr>
         <p:spPr>
           <a:xfrm xmlns:a="http://schemas.openxmlformats.org/drawingml/2006/main">
-            <a:off x="609600" y="6191250"/>
+            <a:off x="609600" y="6019800"/>
             <a:ext cx="10972800" cy="209550"/>
           </a:xfrm>
           <a:prstGeom xmlns:a="http://schemas.openxmlformats.org/drawingml/2006/main" prst="rect">
@@ -8476,7 +8476,7 @@
           <p:cNvPr id="7" name="버그 수정">
             <a:extLst xmlns:a="http://schemas.openxmlformats.org/drawingml/2006/main">
               <a:ext uri="{FF2B5EF4-FFF2-40B4-BE49-F238E27FC236}">
-                <a16:creationId xmlns:a16="http://schemas.microsoft.com/office/drawing/2014/main" id="{7B34FDE4-DB58-4651-B5CD-8F3227091F25}"/>
+                <a16:creationId xmlns:a16="http://schemas.microsoft.com/office/drawing/2014/main" id="{2F36A949-7CCE-444F-B9BA-9806846CC160}"/>
               </a:ext>
             </a:extLst>
           </p:cNvPr>
@@ -8634,7 +8634,7 @@
           <p:cNvPr id="8" name="crop 경계를 수정해줘">
             <a:extLst xmlns:a="http://schemas.openxmlformats.org/drawingml/2006/main">
               <a:ext uri="{FF2B5EF4-FFF2-40B4-BE49-F238E27FC236}">
-                <a16:creationId xmlns:a16="http://schemas.microsoft.com/office/drawing/2014/main" id="{1DEB9CC5-E05A-41B9-827E-3B7C9BC1B42F}"/>
+                <a16:creationId xmlns:a16="http://schemas.microsoft.com/office/drawing/2014/main" id="{053004F5-7EA5-4715-BF20-F2795DAC9243}"/>
               </a:ext>
             </a:extLst>
           </p:cNvPr>
@@ -8792,7 +8792,7 @@
           <p:cNvPr id="9" name="">
             <a:extLst xmlns:a="http://schemas.openxmlformats.org/drawingml/2006/main">
               <a:ext uri="{FF2B5EF4-FFF2-40B4-BE49-F238E27FC236}">
-                <a16:creationId xmlns:a16="http://schemas.microsoft.com/office/drawing/2014/main" id="{0B29B269-A97A-4816-AEA1-7372A672BEAD}"/>
+                <a16:creationId xmlns:a16="http://schemas.microsoft.com/office/drawing/2014/main" id="{DA91326D-C1E9-4AE2-BCE3-E84B8CBC6750}"/>
               </a:ext>
             </a:extLst>
           </p:cNvPr>
@@ -8823,7 +8823,7 @@
           <p:cNvPr id="10" name="">
             <a:extLst xmlns:a="http://schemas.openxmlformats.org/drawingml/2006/main">
               <a:ext uri="{FF2B5EF4-FFF2-40B4-BE49-F238E27FC236}">
-                <a16:creationId xmlns:a16="http://schemas.microsoft.com/office/drawing/2014/main" id="{18375A6E-22BC-4C52-8F50-A257F0EC2E2A}"/>
+                <a16:creationId xmlns:a16="http://schemas.microsoft.com/office/drawing/2014/main" id="{FA002002-DCCB-4ED9-936E-08E1E0A08F22}"/>
               </a:ext>
             </a:extLst>
           </p:cNvPr>
@@ -8854,7 +8854,7 @@
           <p:cNvPr id="11" name="지정된 테스트 실행&#10;의존성 추가에는 근거 필요&#10;로컬 합성 데이터 사용&#10;기존 동작 보존">
             <a:extLst xmlns:a="http://schemas.openxmlformats.org/drawingml/2006/main">
               <a:ext uri="{FF2B5EF4-FFF2-40B4-BE49-F238E27FC236}">
-                <a16:creationId xmlns:a16="http://schemas.microsoft.com/office/drawing/2014/main" id="{EA55D69D-AAC9-497F-A309-8DEDB45CC7D9}"/>
+                <a16:creationId xmlns:a16="http://schemas.microsoft.com/office/drawing/2014/main" id="{CD589A0A-F892-441E-A869-9A391FFEF004}"/>
               </a:ext>
             </a:extLst>
           </p:cNvPr>
@@ -9081,7 +9081,7 @@
           <p:cNvPr id="12" name="성능 조사">
             <a:extLst xmlns:a="http://schemas.openxmlformats.org/drawingml/2006/main">
               <a:ext uri="{FF2B5EF4-FFF2-40B4-BE49-F238E27FC236}">
-                <a16:creationId xmlns:a16="http://schemas.microsoft.com/office/drawing/2014/main" id="{A273231A-77C9-40D6-8D37-CDC31F0B8547}"/>
+                <a16:creationId xmlns:a16="http://schemas.microsoft.com/office/drawing/2014/main" id="{3DBB63DA-18FC-4251-8739-5B3CAFA1E9E0}"/>
               </a:ext>
             </a:extLst>
           </p:cNvPr>
@@ -9239,7 +9239,7 @@
           <p:cNvPr id="13" name="통계 계산을 조사해줘">
             <a:extLst xmlns:a="http://schemas.openxmlformats.org/drawingml/2006/main">
               <a:ext uri="{FF2B5EF4-FFF2-40B4-BE49-F238E27FC236}">
-                <a16:creationId xmlns:a16="http://schemas.microsoft.com/office/drawing/2014/main" id="{EE255E33-E39E-43B5-94A3-6ED9AAEA72DF}"/>
+                <a16:creationId xmlns:a16="http://schemas.microsoft.com/office/drawing/2014/main" id="{E72A5824-DE0B-411C-9E10-43CDBDD18F6E}"/>
               </a:ext>
             </a:extLst>
           </p:cNvPr>
@@ -9397,7 +9397,7 @@
           <p:cNvPr id="14" name="">
             <a:extLst xmlns:a="http://schemas.openxmlformats.org/drawingml/2006/main">
               <a:ext uri="{FF2B5EF4-FFF2-40B4-BE49-F238E27FC236}">
-                <a16:creationId xmlns:a16="http://schemas.microsoft.com/office/drawing/2014/main" id="{60F738F9-B4CD-4A44-AA7C-DAAD5FE5FEF2}"/>
+                <a16:creationId xmlns:a16="http://schemas.microsoft.com/office/drawing/2014/main" id="{B1BCEFA1-FD9C-43D4-A527-2C2147516C37}"/>
               </a:ext>
             </a:extLst>
           </p:cNvPr>
@@ -9428,7 +9428,7 @@
           <p:cNvPr id="15" name="">
             <a:extLst xmlns:a="http://schemas.openxmlformats.org/drawingml/2006/main">
               <a:ext uri="{FF2B5EF4-FFF2-40B4-BE49-F238E27FC236}">
-                <a16:creationId xmlns:a16="http://schemas.microsoft.com/office/drawing/2014/main" id="{EC1E2F03-9E79-4F99-A127-273DD82AB05D}"/>
+                <a16:creationId xmlns:a16="http://schemas.microsoft.com/office/drawing/2014/main" id="{46A7CF95-F7F4-4C03-A696-3C632AD56EBE}"/>
               </a:ext>
             </a:extLst>
           </p:cNvPr>
@@ -9459,7 +9459,7 @@
           <p:cNvPr id="16" name="지정된 테스트 실행&#10;의존성 추가에는 근거 필요&#10;로컬 합성 데이터 사용&#10;기존 동작 보존">
             <a:extLst xmlns:a="http://schemas.openxmlformats.org/drawingml/2006/main">
               <a:ext uri="{FF2B5EF4-FFF2-40B4-BE49-F238E27FC236}">
-                <a16:creationId xmlns:a16="http://schemas.microsoft.com/office/drawing/2014/main" id="{2BA5B58A-6A0C-4335-87CF-CA3EB9B5214F}"/>
+                <a16:creationId xmlns:a16="http://schemas.microsoft.com/office/drawing/2014/main" id="{A74B142B-D2E3-480C-B4AB-AC7BD1E35B8E}"/>
               </a:ext>
             </a:extLst>
           </p:cNvPr>
@@ -9686,7 +9686,7 @@
           <p:cNvPr id="17" name="README 수정">
             <a:extLst xmlns:a="http://schemas.openxmlformats.org/drawingml/2006/main">
               <a:ext uri="{FF2B5EF4-FFF2-40B4-BE49-F238E27FC236}">
-                <a16:creationId xmlns:a16="http://schemas.microsoft.com/office/drawing/2014/main" id="{BFAA674A-E8E1-4796-A9B3-11B25F6094B5}"/>
+                <a16:creationId xmlns:a16="http://schemas.microsoft.com/office/drawing/2014/main" id="{D71C05F2-21BC-42B1-AD34-D3A15723426D}"/>
               </a:ext>
             </a:extLst>
           </p:cNvPr>
@@ -9844,7 +9844,7 @@
           <p:cNvPr id="18" name="빌드 안내를 명확히 해줘">
             <a:extLst xmlns:a="http://schemas.openxmlformats.org/drawingml/2006/main">
               <a:ext uri="{FF2B5EF4-FFF2-40B4-BE49-F238E27FC236}">
-                <a16:creationId xmlns:a16="http://schemas.microsoft.com/office/drawing/2014/main" id="{E67E2B38-12CE-4F4C-A003-1751B6368F9E}"/>
+                <a16:creationId xmlns:a16="http://schemas.microsoft.com/office/drawing/2014/main" id="{29298788-F777-4AAC-B9C4-C4085E30136E}"/>
               </a:ext>
             </a:extLst>
           </p:cNvPr>
@@ -10002,7 +10002,7 @@
           <p:cNvPr id="19" name="">
             <a:extLst xmlns:a="http://schemas.openxmlformats.org/drawingml/2006/main">
               <a:ext uri="{FF2B5EF4-FFF2-40B4-BE49-F238E27FC236}">
-                <a16:creationId xmlns:a16="http://schemas.microsoft.com/office/drawing/2014/main" id="{896EE306-E97D-47F4-BFE9-3B0688CE2E77}"/>
+                <a16:creationId xmlns:a16="http://schemas.microsoft.com/office/drawing/2014/main" id="{7257FBD8-7947-44FF-BCB7-8EB4ADF69682}"/>
               </a:ext>
             </a:extLst>
           </p:cNvPr>
@@ -10033,7 +10033,7 @@
           <p:cNvPr id="20" name="">
             <a:extLst xmlns:a="http://schemas.openxmlformats.org/drawingml/2006/main">
               <a:ext uri="{FF2B5EF4-FFF2-40B4-BE49-F238E27FC236}">
-                <a16:creationId xmlns:a16="http://schemas.microsoft.com/office/drawing/2014/main" id="{BB07823E-1831-4A4B-B89B-1176ECB2D5A9}"/>
+                <a16:creationId xmlns:a16="http://schemas.microsoft.com/office/drawing/2014/main" id="{0ECAA8C1-FBCA-4D6A-A16C-15D8840DADEB}"/>
               </a:ext>
             </a:extLst>
           </p:cNvPr>
@@ -10064,7 +10064,7 @@
           <p:cNvPr id="21" name="지정된 테스트 실행&#10;의존성 추가에는 근거 필요&#10;로컬 합성 데이터 사용&#10;기존 동작 보존">
             <a:extLst xmlns:a="http://schemas.openxmlformats.org/drawingml/2006/main">
               <a:ext uri="{FF2B5EF4-FFF2-40B4-BE49-F238E27FC236}">
-                <a16:creationId xmlns:a16="http://schemas.microsoft.com/office/drawing/2014/main" id="{B11AD1C9-EA19-4177-9F37-E7252B88CA4F}"/>
+                <a16:creationId xmlns:a16="http://schemas.microsoft.com/office/drawing/2014/main" id="{13811FF9-5A08-4FB5-A720-08C85808C95C}"/>
               </a:ext>
             </a:extLst>
           </p:cNvPr>
@@ -10291,7 +10291,7 @@
           <p:cNvPr id="22" name="요청은 다른데, 아래 설명은 왜 계속 같을까?">
             <a:extLst xmlns:a="http://schemas.openxmlformats.org/drawingml/2006/main">
               <a:ext uri="{FF2B5EF4-FFF2-40B4-BE49-F238E27FC236}">
-                <a16:creationId xmlns:a16="http://schemas.microsoft.com/office/drawing/2014/main" id="{389EE18B-429B-49A0-BEE2-4A2D20C24FD6}"/>
+                <a16:creationId xmlns:a16="http://schemas.microsoft.com/office/drawing/2014/main" id="{7B31FB24-F767-432B-945F-C07BACE54058}"/>
               </a:ext>
             </a:extLst>
           </p:cNvPr>
@@ -10444,10 +10444,168 @@
           </a:p>
         </p:txBody>
       </p:sp>
+      <p:sp>
+        <p:nvSpPr>
+          <p:cNvPr id="23" name="Legacy module connection">
+            <a:extLst xmlns:a="http://schemas.openxmlformats.org/drawingml/2006/main">
+              <a:ext uri="{FF2B5EF4-FFF2-40B4-BE49-F238E27FC236}">
+                <a16:creationId xmlns:a16="http://schemas.microsoft.com/office/drawing/2014/main" id="{C0891BA0-B822-43B7-86AA-252163215B6D}"/>
+              </a:ext>
+            </a:extLst>
+          </p:cNvPr>
+          <p:cNvSpPr>
+            <a:spLocks xmlns:a="http://schemas.openxmlformats.org/drawingml/2006/main" noGrp="1"/>
+          </p:cNvSpPr>
+          <p:nvPr/>
+        </p:nvSpPr>
+        <p:spPr>
+          <a:xfrm xmlns:a="http://schemas.openxmlformats.org/drawingml/2006/main">
+            <a:off x="609600" y="6229350"/>
+            <a:ext cx="10972800" cy="171450"/>
+          </a:xfrm>
+          <a:prstGeom xmlns:a="http://schemas.openxmlformats.org/drawingml/2006/main" prst="rect">
+            <a:avLst/>
+          </a:prstGeom>
+          <a:noFill xmlns:a="http://schemas.openxmlformats.org/drawingml/2006/main"/>
+          <a:ln xmlns:a="http://schemas.openxmlformats.org/drawingml/2006/main" w="0">
+            <a:noFill/>
+          </a:ln>
+        </p:spPr>
+        <p:txBody>
+          <a:bodyPr xmlns:a="http://schemas.openxmlformats.org/drawingml/2006/main" wrap="none" lIns="0" tIns="0" rIns="0" bIns="0" anchor="ctr">
+            <a:noAutofit/>
+          </a:bodyPr>
+          <a:lstStyle xmlns:a="http://schemas.openxmlformats.org/drawingml/2006/main">
+            <a:defPPr algn="r">
+              <a:defRPr sz="1200" b="0">
+                <a:solidFill>
+                  <a:srgbClr val="4D5A68"/>
+                </a:solidFill>
+                <a:latin typeface="Malgun Gothic"/>
+                <a:ea typeface="Malgun Gothic"/>
+                <a:cs typeface="Malgun Gothic"/>
+              </a:defRPr>
+            </a:defPPr>
+            <a:lvl1pPr algn="r">
+              <a:defRPr sz="1200" b="0">
+                <a:solidFill>
+                  <a:srgbClr val="4D5A68"/>
+                </a:solidFill>
+                <a:latin typeface="Malgun Gothic"/>
+                <a:ea typeface="Malgun Gothic"/>
+                <a:cs typeface="Malgun Gothic"/>
+              </a:defRPr>
+            </a:lvl1pPr>
+            <a:lvl2pPr algn="r">
+              <a:defRPr sz="1200" b="0">
+                <a:solidFill>
+                  <a:srgbClr val="4D5A68"/>
+                </a:solidFill>
+                <a:latin typeface="Malgun Gothic"/>
+                <a:ea typeface="Malgun Gothic"/>
+                <a:cs typeface="Malgun Gothic"/>
+              </a:defRPr>
+            </a:lvl2pPr>
+            <a:lvl3pPr algn="r">
+              <a:defRPr sz="1200" b="0">
+                <a:solidFill>
+                  <a:srgbClr val="4D5A68"/>
+                </a:solidFill>
+                <a:latin typeface="Malgun Gothic"/>
+                <a:ea typeface="Malgun Gothic"/>
+                <a:cs typeface="Malgun Gothic"/>
+              </a:defRPr>
+            </a:lvl3pPr>
+            <a:lvl4pPr algn="r">
+              <a:defRPr sz="1200" b="0">
+                <a:solidFill>
+                  <a:srgbClr val="4D5A68"/>
+                </a:solidFill>
+                <a:latin typeface="Malgun Gothic"/>
+                <a:ea typeface="Malgun Gothic"/>
+                <a:cs typeface="Malgun Gothic"/>
+              </a:defRPr>
+            </a:lvl4pPr>
+            <a:lvl5pPr algn="r">
+              <a:defRPr sz="1200" b="0">
+                <a:solidFill>
+                  <a:srgbClr val="4D5A68"/>
+                </a:solidFill>
+                <a:latin typeface="Malgun Gothic"/>
+                <a:ea typeface="Malgun Gothic"/>
+                <a:cs typeface="Malgun Gothic"/>
+              </a:defRPr>
+            </a:lvl5pPr>
+            <a:lvl6pPr algn="r">
+              <a:defRPr sz="1200" b="0">
+                <a:solidFill>
+                  <a:srgbClr val="4D5A68"/>
+                </a:solidFill>
+                <a:latin typeface="Malgun Gothic"/>
+                <a:ea typeface="Malgun Gothic"/>
+                <a:cs typeface="Malgun Gothic"/>
+              </a:defRPr>
+            </a:lvl6pPr>
+            <a:lvl7pPr algn="r">
+              <a:defRPr sz="1200" b="0">
+                <a:solidFill>
+                  <a:srgbClr val="4D5A68"/>
+                </a:solidFill>
+                <a:latin typeface="Malgun Gothic"/>
+                <a:ea typeface="Malgun Gothic"/>
+                <a:cs typeface="Malgun Gothic"/>
+              </a:defRPr>
+            </a:lvl7pPr>
+            <a:lvl8pPr algn="r">
+              <a:defRPr sz="1200" b="0">
+                <a:solidFill>
+                  <a:srgbClr val="4D5A68"/>
+                </a:solidFill>
+                <a:latin typeface="Malgun Gothic"/>
+                <a:ea typeface="Malgun Gothic"/>
+                <a:cs typeface="Malgun Gothic"/>
+              </a:defRPr>
+            </a:lvl8pPr>
+            <a:lvl9pPr algn="r">
+              <a:defRPr sz="1200" b="0">
+                <a:solidFill>
+                  <a:srgbClr val="4D5A68"/>
+                </a:solidFill>
+                <a:latin typeface="Malgun Gothic"/>
+                <a:ea typeface="Malgun Gothic"/>
+                <a:cs typeface="Malgun Gothic"/>
+              </a:defRPr>
+            </a:lvl9pPr>
+          </a:lstStyle>
+          <a:p xmlns:a="http://schemas.openxmlformats.org/drawingml/2006/main">
+            <a:pPr algn="r">
+              <a:defRPr sz="1200" b="0">
+                <a:solidFill>
+                  <a:srgbClr val="4D5A68"/>
+                </a:solidFill>
+                <a:latin typeface="Malgun Gothic"/>
+                <a:ea typeface="Malgun Gothic"/>
+                <a:cs typeface="Malgun Gothic"/>
+              </a:defRPr>
+            </a:pPr>
+            <a:r>
+              <a:rPr sz="1200" b="0">
+                <a:solidFill>
+                  <a:srgbClr val="4D5A68"/>
+                </a:solidFill>
+                <a:latin typeface="Malgun Gothic"/>
+                <a:ea typeface="Malgun Gothic"/>
+                <a:cs typeface="Malgun Gothic"/>
+              </a:rPr>
+              <a:t>M 연계 · M2</a:t>
+            </a:r>
+          </a:p>
+        </p:txBody>
+      </p:sp>
     </p:spTree>
     <p:extLst>
       <p:ext uri="{BB962C8B-B14F-4D97-AF65-F5344CB8AC3E}">
-        <p14:creationId xmlns:p14="http://schemas.microsoft.com/office/powerpoint/2010/main" val="355561867"/>
+        <p14:creationId xmlns:p14="http://schemas.microsoft.com/office/powerpoint/2010/main" val="1859686861"/>
       </p:ext>
     </p:extLst>
   </p:cSld>
@@ -10475,10 +10633,10 @@
       </p:grpSpPr>
       <p:sp>
         <p:nvSpPr>
-          <p:cNvPr id="23" name="ACT 2 · Core에 남길 기본 안내">
+          <p:cNvPr id="24" name="ACT 2 · Core에 남길 기본 안내">
             <a:extLst xmlns:a="http://schemas.openxmlformats.org/drawingml/2006/main">
               <a:ext uri="{FF2B5EF4-FFF2-40B4-BE49-F238E27FC236}">
-                <a16:creationId xmlns:a16="http://schemas.microsoft.com/office/drawing/2014/main" id="{ADCEBC69-D4F1-41EB-A0A4-9B47F4EA0C26}"/>
+                <a16:creationId xmlns:a16="http://schemas.microsoft.com/office/drawing/2014/main" id="{47F8E357-8511-40B4-8A19-5BB9DC64E677}"/>
               </a:ext>
             </a:extLst>
           </p:cNvPr>
@@ -10636,7 +10794,7 @@
           <p:cNvPr id="2" name="S31">
             <a:extLst xmlns:a="http://schemas.openxmlformats.org/drawingml/2006/main">
               <a:ext uri="{FF2B5EF4-FFF2-40B4-BE49-F238E27FC236}">
-                <a16:creationId xmlns:a16="http://schemas.microsoft.com/office/drawing/2014/main" id="{323C9C73-1648-46A3-997F-3319A863D8C2}"/>
+                <a16:creationId xmlns:a16="http://schemas.microsoft.com/office/drawing/2014/main" id="{463FFC55-97BA-4B99-8185-43418C226410}"/>
               </a:ext>
             </a:extLst>
           </p:cNvPr>
@@ -10794,7 +10952,7 @@
           <p:cNvPr id="3" name="Core Context에서 상세 정보로 가는 길">
             <a:extLst xmlns:a="http://schemas.openxmlformats.org/drawingml/2006/main">
               <a:ext uri="{FF2B5EF4-FFF2-40B4-BE49-F238E27FC236}">
-                <a16:creationId xmlns:a16="http://schemas.microsoft.com/office/drawing/2014/main" id="{84C51265-6182-4B9D-B973-0B87EDE1AE36}"/>
+                <a16:creationId xmlns:a16="http://schemas.microsoft.com/office/drawing/2014/main" id="{CF0A2DB8-BDC5-42CE-8AC0-5E6EAA3D19CF}"/>
               </a:ext>
             </a:extLst>
           </p:cNvPr>
@@ -10952,7 +11110,7 @@
           <p:cNvPr id="4" name="">
             <a:extLst xmlns:a="http://schemas.openxmlformats.org/drawingml/2006/main">
               <a:ext uri="{FF2B5EF4-FFF2-40B4-BE49-F238E27FC236}">
-                <a16:creationId xmlns:a16="http://schemas.microsoft.com/office/drawing/2014/main" id="{59DE9186-EE07-4C20-BD27-B6F338DE0CE0}"/>
+                <a16:creationId xmlns:a16="http://schemas.microsoft.com/office/drawing/2014/main" id="{38CF6AD9-943D-41DC-B718-154DEC574B7E}"/>
               </a:ext>
             </a:extLst>
           </p:cNvPr>
@@ -10963,7 +11121,7 @@
         </p:nvSpPr>
         <p:spPr>
           <a:xfrm xmlns:a="http://schemas.openxmlformats.org/drawingml/2006/main">
-            <a:off x="609600" y="5829300"/>
+            <a:off x="609600" y="5753100"/>
             <a:ext cx="10972800" cy="0"/>
           </a:xfrm>
           <a:prstGeom xmlns:a="http://schemas.openxmlformats.org/drawingml/2006/main" prst="line">
@@ -10983,7 +11141,7 @@
           <p:cNvPr id="5" name="교육용 정보 설계 · Root/Core는 상세 정보의 출발점">
             <a:extLst xmlns:a="http://schemas.openxmlformats.org/drawingml/2006/main">
               <a:ext uri="{FF2B5EF4-FFF2-40B4-BE49-F238E27FC236}">
-                <a16:creationId xmlns:a16="http://schemas.microsoft.com/office/drawing/2014/main" id="{558DCF9C-064D-4201-A9DD-6ECA5E17BB1D}"/>
+                <a16:creationId xmlns:a16="http://schemas.microsoft.com/office/drawing/2014/main" id="{ED8C06D4-ADA5-49E0-98CD-2896CD965445}"/>
               </a:ext>
             </a:extLst>
           </p:cNvPr>
@@ -10994,8 +11152,8 @@
         </p:nvSpPr>
         <p:spPr>
           <a:xfrm xmlns:a="http://schemas.openxmlformats.org/drawingml/2006/main">
-            <a:off x="609600" y="5915025"/>
-            <a:ext cx="10972800" cy="247650"/>
+            <a:off x="609600" y="5791200"/>
+            <a:ext cx="10972800" cy="228600"/>
           </a:xfrm>
           <a:prstGeom xmlns:a="http://schemas.openxmlformats.org/drawingml/2006/main" prst="rect">
             <a:avLst/>
@@ -11141,7 +11299,7 @@
           <p:cNvPr id="6" name="C++ 예: build/test 진입점과 기본 제약 → 알고리즘 계약·하드웨어 조건">
             <a:extLst xmlns:a="http://schemas.openxmlformats.org/drawingml/2006/main">
               <a:ext uri="{FF2B5EF4-FFF2-40B4-BE49-F238E27FC236}">
-                <a16:creationId xmlns:a16="http://schemas.microsoft.com/office/drawing/2014/main" id="{7F2F62FC-B8ED-4F20-B4E7-71FE3E5E1380}"/>
+                <a16:creationId xmlns:a16="http://schemas.microsoft.com/office/drawing/2014/main" id="{DD19603D-33DF-40DD-9CF6-D33A83F2F76A}"/>
               </a:ext>
             </a:extLst>
           </p:cNvPr>
@@ -11152,7 +11310,7 @@
         </p:nvSpPr>
         <p:spPr>
           <a:xfrm xmlns:a="http://schemas.openxmlformats.org/drawingml/2006/main">
-            <a:off x="609600" y="6191250"/>
+            <a:off x="609600" y="6019800"/>
             <a:ext cx="10972800" cy="209550"/>
           </a:xfrm>
           <a:prstGeom xmlns:a="http://schemas.openxmlformats.org/drawingml/2006/main" prst="rect">
@@ -11299,7 +11457,7 @@
           <p:cNvPr id="7" name="무엇을 항상 읽고, 무엇을 필요할 때 찾게 할까?">
             <a:extLst xmlns:a="http://schemas.openxmlformats.org/drawingml/2006/main">
               <a:ext uri="{FF2B5EF4-FFF2-40B4-BE49-F238E27FC236}">
-                <a16:creationId xmlns:a16="http://schemas.microsoft.com/office/drawing/2014/main" id="{9C5A6E5C-7564-428A-8F0D-F725491CAA6E}"/>
+                <a16:creationId xmlns:a16="http://schemas.microsoft.com/office/drawing/2014/main" id="{FC94FBB6-45DD-4D89-9258-FB476DD86196}"/>
               </a:ext>
             </a:extLst>
           </p:cNvPr>
@@ -11457,7 +11615,7 @@
           <p:cNvPr id="8" name="">
             <a:extLst xmlns:a="http://schemas.openxmlformats.org/drawingml/2006/main">
               <a:ext uri="{FF2B5EF4-FFF2-40B4-BE49-F238E27FC236}">
-                <a16:creationId xmlns:a16="http://schemas.microsoft.com/office/drawing/2014/main" id="{4F1F4B93-6964-4F28-A6EE-2918F2E6EE4F}"/>
+                <a16:creationId xmlns:a16="http://schemas.microsoft.com/office/drawing/2014/main" id="{2CC66FD8-2C5C-4178-91F2-D76A1F81790B}"/>
               </a:ext>
             </a:extLst>
           </p:cNvPr>
@@ -11488,7 +11646,7 @@
           <p:cNvPr id="9" name="CORE · 기본 안내">
             <a:extLst xmlns:a="http://schemas.openxmlformats.org/drawingml/2006/main">
               <a:ext uri="{FF2B5EF4-FFF2-40B4-BE49-F238E27FC236}">
-                <a16:creationId xmlns:a16="http://schemas.microsoft.com/office/drawing/2014/main" id="{F49D0563-9CD6-46C5-A746-FAB9F29FD2C5}"/>
+                <a16:creationId xmlns:a16="http://schemas.microsoft.com/office/drawing/2014/main" id="{44305B62-CC2E-443F-A0F4-85BFFC7FB424}"/>
               </a:ext>
             </a:extLst>
           </p:cNvPr>
@@ -11646,7 +11804,7 @@
           <p:cNvPr id="10" name="프로젝트의 목적&#10;항상 지켜야 할 제약&#10;상세 정보를 찾을 위치">
             <a:extLst xmlns:a="http://schemas.openxmlformats.org/drawingml/2006/main">
               <a:ext uri="{FF2B5EF4-FFF2-40B4-BE49-F238E27FC236}">
-                <a16:creationId xmlns:a16="http://schemas.microsoft.com/office/drawing/2014/main" id="{C9E0E2D1-4B17-48C3-BF33-3985DB512478}"/>
+                <a16:creationId xmlns:a16="http://schemas.microsoft.com/office/drawing/2014/main" id="{6EAEDD43-FB54-4CEE-B78F-F1E30B72F1A9}"/>
               </a:ext>
             </a:extLst>
           </p:cNvPr>
@@ -11850,7 +12008,7 @@
           <p:cNvPr id="11" name="">
             <a:extLst xmlns:a="http://schemas.openxmlformats.org/drawingml/2006/main">
               <a:ext uri="{FF2B5EF4-FFF2-40B4-BE49-F238E27FC236}">
-                <a16:creationId xmlns:a16="http://schemas.microsoft.com/office/drawing/2014/main" id="{013E1015-79AA-4D5C-8405-F812C0348F35}"/>
+                <a16:creationId xmlns:a16="http://schemas.microsoft.com/office/drawing/2014/main" id="{DB557734-FB43-4D72-9454-6841B192C563}"/>
               </a:ext>
             </a:extLst>
           </p:cNvPr>
@@ -11880,7 +12038,7 @@
           <p:cNvPr id="12" name="DETAIL · 필요한 상세">
             <a:extLst xmlns:a="http://schemas.openxmlformats.org/drawingml/2006/main">
               <a:ext uri="{FF2B5EF4-FFF2-40B4-BE49-F238E27FC236}">
-                <a16:creationId xmlns:a16="http://schemas.microsoft.com/office/drawing/2014/main" id="{7B9676E9-18B7-4A4D-92B3-06A3F073BAFF}"/>
+                <a16:creationId xmlns:a16="http://schemas.microsoft.com/office/drawing/2014/main" id="{9B8A5759-A234-4E91-8098-654AC0638A65}"/>
               </a:ext>
             </a:extLst>
           </p:cNvPr>
@@ -12038,7 +12196,7 @@
           <p:cNvPr id="13" name="">
             <a:extLst xmlns:a="http://schemas.openxmlformats.org/drawingml/2006/main">
               <a:ext uri="{FF2B5EF4-FFF2-40B4-BE49-F238E27FC236}">
-                <a16:creationId xmlns:a16="http://schemas.microsoft.com/office/drawing/2014/main" id="{DD99B240-3333-4F78-8484-1EA6C242387C}"/>
+                <a16:creationId xmlns:a16="http://schemas.microsoft.com/office/drawing/2014/main" id="{C8BCA4FC-D44F-4CE5-A096-67E3CDBE962D}"/>
               </a:ext>
             </a:extLst>
           </p:cNvPr>
@@ -12069,7 +12227,7 @@
           <p:cNvPr id="14" name="architecture">
             <a:extLst xmlns:a="http://schemas.openxmlformats.org/drawingml/2006/main">
               <a:ext uri="{FF2B5EF4-FFF2-40B4-BE49-F238E27FC236}">
-                <a16:creationId xmlns:a16="http://schemas.microsoft.com/office/drawing/2014/main" id="{843F0B8F-2E23-4F61-BFFA-FD656B2C05E4}"/>
+                <a16:creationId xmlns:a16="http://schemas.microsoft.com/office/drawing/2014/main" id="{2696D8C3-6A60-446E-A354-9701B276E2D9}"/>
               </a:ext>
             </a:extLst>
           </p:cNvPr>
@@ -12227,7 +12385,7 @@
           <p:cNvPr id="15" name="모듈과 처리 순서">
             <a:extLst xmlns:a="http://schemas.openxmlformats.org/drawingml/2006/main">
               <a:ext uri="{FF2B5EF4-FFF2-40B4-BE49-F238E27FC236}">
-                <a16:creationId xmlns:a16="http://schemas.microsoft.com/office/drawing/2014/main" id="{9AB8323A-6BE7-44A1-8456-E7DC453C309C}"/>
+                <a16:creationId xmlns:a16="http://schemas.microsoft.com/office/drawing/2014/main" id="{18905EE9-B01C-4743-B903-9E9B68673B2D}"/>
               </a:ext>
             </a:extLst>
           </p:cNvPr>
@@ -12385,7 +12543,7 @@
           <p:cNvPr id="16" name="">
             <a:extLst xmlns:a="http://schemas.openxmlformats.org/drawingml/2006/main">
               <a:ext uri="{FF2B5EF4-FFF2-40B4-BE49-F238E27FC236}">
-                <a16:creationId xmlns:a16="http://schemas.microsoft.com/office/drawing/2014/main" id="{55F70072-DC9C-4D5D-87BB-2CD2D3DAE2EE}"/>
+                <a16:creationId xmlns:a16="http://schemas.microsoft.com/office/drawing/2014/main" id="{2A722490-8C7D-4B2B-A54E-F48CAF6A2443}"/>
               </a:ext>
             </a:extLst>
           </p:cNvPr>
@@ -12416,7 +12574,7 @@
           <p:cNvPr id="17" name="image contracts">
             <a:extLst xmlns:a="http://schemas.openxmlformats.org/drawingml/2006/main">
               <a:ext uri="{FF2B5EF4-FFF2-40B4-BE49-F238E27FC236}">
-                <a16:creationId xmlns:a16="http://schemas.microsoft.com/office/drawing/2014/main" id="{CC76344E-C5BC-468D-9ACD-924B3D8C2398}"/>
+                <a16:creationId xmlns:a16="http://schemas.microsoft.com/office/drawing/2014/main" id="{6BF02855-DD22-45A9-B11A-3A6846F38706}"/>
               </a:ext>
             </a:extLst>
           </p:cNvPr>
@@ -12574,7 +12732,7 @@
           <p:cNvPr id="18" name="이미지 동작의 계약">
             <a:extLst xmlns:a="http://schemas.openxmlformats.org/drawingml/2006/main">
               <a:ext uri="{FF2B5EF4-FFF2-40B4-BE49-F238E27FC236}">
-                <a16:creationId xmlns:a16="http://schemas.microsoft.com/office/drawing/2014/main" id="{75CA4429-B4F3-4EC0-8843-1A78323D56CA}"/>
+                <a16:creationId xmlns:a16="http://schemas.microsoft.com/office/drawing/2014/main" id="{5FD58823-BC0B-4460-BAE2-7D5D58528294}"/>
               </a:ext>
             </a:extLst>
           </p:cNvPr>
@@ -12732,7 +12890,7 @@
           <p:cNvPr id="19" name="">
             <a:extLst xmlns:a="http://schemas.openxmlformats.org/drawingml/2006/main">
               <a:ext uri="{FF2B5EF4-FFF2-40B4-BE49-F238E27FC236}">
-                <a16:creationId xmlns:a16="http://schemas.microsoft.com/office/drawing/2014/main" id="{A56BAF6D-2924-484B-9A37-DC52DC5588DF}"/>
+                <a16:creationId xmlns:a16="http://schemas.microsoft.com/office/drawing/2014/main" id="{D13F884E-ECD0-4C8C-BFAD-49976EFD021F}"/>
               </a:ext>
             </a:extLst>
           </p:cNvPr>
@@ -12763,7 +12921,7 @@
           <p:cNvPr id="20" name="testing">
             <a:extLst xmlns:a="http://schemas.openxmlformats.org/drawingml/2006/main">
               <a:ext uri="{FF2B5EF4-FFF2-40B4-BE49-F238E27FC236}">
-                <a16:creationId xmlns:a16="http://schemas.microsoft.com/office/drawing/2014/main" id="{39F9C643-309F-469C-A4D0-C22F5F746345}"/>
+                <a16:creationId xmlns:a16="http://schemas.microsoft.com/office/drawing/2014/main" id="{411AB0D6-4211-4049-A65E-FE92B3418BEE}"/>
               </a:ext>
             </a:extLst>
           </p:cNvPr>
@@ -12921,7 +13079,7 @@
           <p:cNvPr id="21" name="테스트 위치와 범위">
             <a:extLst xmlns:a="http://schemas.openxmlformats.org/drawingml/2006/main">
               <a:ext uri="{FF2B5EF4-FFF2-40B4-BE49-F238E27FC236}">
-                <a16:creationId xmlns:a16="http://schemas.microsoft.com/office/drawing/2014/main" id="{1D146159-B543-4475-9AB6-C7160C0AA5EC}"/>
+                <a16:creationId xmlns:a16="http://schemas.microsoft.com/office/drawing/2014/main" id="{E1BD78B9-6F3B-4B5A-B390-74AB499A51B3}"/>
               </a:ext>
             </a:extLst>
           </p:cNvPr>
@@ -13079,7 +13237,7 @@
           <p:cNvPr id="22" name="모든 지식을 넣기보다, 상세 정보까지 가는 길을 안내한다">
             <a:extLst xmlns:a="http://schemas.openxmlformats.org/drawingml/2006/main">
               <a:ext uri="{FF2B5EF4-FFF2-40B4-BE49-F238E27FC236}">
-                <a16:creationId xmlns:a16="http://schemas.microsoft.com/office/drawing/2014/main" id="{9B41C65B-346A-41FE-B444-CB7F19EDC55A}"/>
+                <a16:creationId xmlns:a16="http://schemas.microsoft.com/office/drawing/2014/main" id="{0BF5E8E3-E2A7-4FC5-A435-25BDFAF0A73D}"/>
               </a:ext>
             </a:extLst>
           </p:cNvPr>
@@ -13232,10 +13390,168 @@
           </a:p>
         </p:txBody>
       </p:sp>
+      <p:sp>
+        <p:nvSpPr>
+          <p:cNvPr id="23" name="Legacy module connection">
+            <a:extLst xmlns:a="http://schemas.openxmlformats.org/drawingml/2006/main">
+              <a:ext uri="{FF2B5EF4-FFF2-40B4-BE49-F238E27FC236}">
+                <a16:creationId xmlns:a16="http://schemas.microsoft.com/office/drawing/2014/main" id="{4A10E91D-2B78-4D75-A4CC-CE9502521738}"/>
+              </a:ext>
+            </a:extLst>
+          </p:cNvPr>
+          <p:cNvSpPr>
+            <a:spLocks xmlns:a="http://schemas.openxmlformats.org/drawingml/2006/main" noGrp="1"/>
+          </p:cNvSpPr>
+          <p:nvPr/>
+        </p:nvSpPr>
+        <p:spPr>
+          <a:xfrm xmlns:a="http://schemas.openxmlformats.org/drawingml/2006/main">
+            <a:off x="609600" y="6229350"/>
+            <a:ext cx="10972800" cy="171450"/>
+          </a:xfrm>
+          <a:prstGeom xmlns:a="http://schemas.openxmlformats.org/drawingml/2006/main" prst="rect">
+            <a:avLst/>
+          </a:prstGeom>
+          <a:noFill xmlns:a="http://schemas.openxmlformats.org/drawingml/2006/main"/>
+          <a:ln xmlns:a="http://schemas.openxmlformats.org/drawingml/2006/main" w="0">
+            <a:noFill/>
+          </a:ln>
+        </p:spPr>
+        <p:txBody>
+          <a:bodyPr xmlns:a="http://schemas.openxmlformats.org/drawingml/2006/main" wrap="none" lIns="0" tIns="0" rIns="0" bIns="0" anchor="ctr">
+            <a:noAutofit/>
+          </a:bodyPr>
+          <a:lstStyle xmlns:a="http://schemas.openxmlformats.org/drawingml/2006/main">
+            <a:defPPr algn="r">
+              <a:defRPr sz="1200" b="0">
+                <a:solidFill>
+                  <a:srgbClr val="4D5A68"/>
+                </a:solidFill>
+                <a:latin typeface="Malgun Gothic"/>
+                <a:ea typeface="Malgun Gothic"/>
+                <a:cs typeface="Malgun Gothic"/>
+              </a:defRPr>
+            </a:defPPr>
+            <a:lvl1pPr algn="r">
+              <a:defRPr sz="1200" b="0">
+                <a:solidFill>
+                  <a:srgbClr val="4D5A68"/>
+                </a:solidFill>
+                <a:latin typeface="Malgun Gothic"/>
+                <a:ea typeface="Malgun Gothic"/>
+                <a:cs typeface="Malgun Gothic"/>
+              </a:defRPr>
+            </a:lvl1pPr>
+            <a:lvl2pPr algn="r">
+              <a:defRPr sz="1200" b="0">
+                <a:solidFill>
+                  <a:srgbClr val="4D5A68"/>
+                </a:solidFill>
+                <a:latin typeface="Malgun Gothic"/>
+                <a:ea typeface="Malgun Gothic"/>
+                <a:cs typeface="Malgun Gothic"/>
+              </a:defRPr>
+            </a:lvl2pPr>
+            <a:lvl3pPr algn="r">
+              <a:defRPr sz="1200" b="0">
+                <a:solidFill>
+                  <a:srgbClr val="4D5A68"/>
+                </a:solidFill>
+                <a:latin typeface="Malgun Gothic"/>
+                <a:ea typeface="Malgun Gothic"/>
+                <a:cs typeface="Malgun Gothic"/>
+              </a:defRPr>
+            </a:lvl3pPr>
+            <a:lvl4pPr algn="r">
+              <a:defRPr sz="1200" b="0">
+                <a:solidFill>
+                  <a:srgbClr val="4D5A68"/>
+                </a:solidFill>
+                <a:latin typeface="Malgun Gothic"/>
+                <a:ea typeface="Malgun Gothic"/>
+                <a:cs typeface="Malgun Gothic"/>
+              </a:defRPr>
+            </a:lvl4pPr>
+            <a:lvl5pPr algn="r">
+              <a:defRPr sz="1200" b="0">
+                <a:solidFill>
+                  <a:srgbClr val="4D5A68"/>
+                </a:solidFill>
+                <a:latin typeface="Malgun Gothic"/>
+                <a:ea typeface="Malgun Gothic"/>
+                <a:cs typeface="Malgun Gothic"/>
+              </a:defRPr>
+            </a:lvl5pPr>
+            <a:lvl6pPr algn="r">
+              <a:defRPr sz="1200" b="0">
+                <a:solidFill>
+                  <a:srgbClr val="4D5A68"/>
+                </a:solidFill>
+                <a:latin typeface="Malgun Gothic"/>
+                <a:ea typeface="Malgun Gothic"/>
+                <a:cs typeface="Malgun Gothic"/>
+              </a:defRPr>
+            </a:lvl6pPr>
+            <a:lvl7pPr algn="r">
+              <a:defRPr sz="1200" b="0">
+                <a:solidFill>
+                  <a:srgbClr val="4D5A68"/>
+                </a:solidFill>
+                <a:latin typeface="Malgun Gothic"/>
+                <a:ea typeface="Malgun Gothic"/>
+                <a:cs typeface="Malgun Gothic"/>
+              </a:defRPr>
+            </a:lvl7pPr>
+            <a:lvl8pPr algn="r">
+              <a:defRPr sz="1200" b="0">
+                <a:solidFill>
+                  <a:srgbClr val="4D5A68"/>
+                </a:solidFill>
+                <a:latin typeface="Malgun Gothic"/>
+                <a:ea typeface="Malgun Gothic"/>
+                <a:cs typeface="Malgun Gothic"/>
+              </a:defRPr>
+            </a:lvl8pPr>
+            <a:lvl9pPr algn="r">
+              <a:defRPr sz="1200" b="0">
+                <a:solidFill>
+                  <a:srgbClr val="4D5A68"/>
+                </a:solidFill>
+                <a:latin typeface="Malgun Gothic"/>
+                <a:ea typeface="Malgun Gothic"/>
+                <a:cs typeface="Malgun Gothic"/>
+              </a:defRPr>
+            </a:lvl9pPr>
+          </a:lstStyle>
+          <a:p xmlns:a="http://schemas.openxmlformats.org/drawingml/2006/main">
+            <a:pPr algn="r">
+              <a:defRPr sz="1200" b="0">
+                <a:solidFill>
+                  <a:srgbClr val="4D5A68"/>
+                </a:solidFill>
+                <a:latin typeface="Malgun Gothic"/>
+                <a:ea typeface="Malgun Gothic"/>
+                <a:cs typeface="Malgun Gothic"/>
+              </a:defRPr>
+            </a:pPr>
+            <a:r>
+              <a:rPr sz="1200" b="0">
+                <a:solidFill>
+                  <a:srgbClr val="4D5A68"/>
+                </a:solidFill>
+                <a:latin typeface="Malgun Gothic"/>
+                <a:ea typeface="Malgun Gothic"/>
+                <a:cs typeface="Malgun Gothic"/>
+              </a:rPr>
+              <a:t>M 연계 · 신규 확장</a:t>
+            </a:r>
+          </a:p>
+        </p:txBody>
+      </p:sp>
     </p:spTree>
     <p:extLst>
       <p:ext uri="{BB962C8B-B14F-4D97-AF65-F5344CB8AC3E}">
-        <p14:creationId xmlns:p14="http://schemas.microsoft.com/office/powerpoint/2010/main" val="548125742"/>
+        <p14:creationId xmlns:p14="http://schemas.microsoft.com/office/powerpoint/2010/main" val="410692087"/>
       </p:ext>
     </p:extLst>
   </p:cSld>
@@ -13263,10 +13579,10 @@
       </p:grpSpPr>
       <p:sp>
         <p:nvSpPr>
-          <p:cNvPr id="22" name="ACT 2 · STATE-03의 문서 구조">
+          <p:cNvPr id="23" name="ACT 2 · STATE-03의 문서 구조">
             <a:extLst xmlns:a="http://schemas.openxmlformats.org/drawingml/2006/main">
               <a:ext uri="{FF2B5EF4-FFF2-40B4-BE49-F238E27FC236}">
-                <a16:creationId xmlns:a16="http://schemas.microsoft.com/office/drawing/2014/main" id="{67CB7BAC-0DAD-4A21-AF57-D904ACE8234D}"/>
+                <a16:creationId xmlns:a16="http://schemas.microsoft.com/office/drawing/2014/main" id="{D7919BBE-CD71-451D-AC90-E53094074FF8}"/>
               </a:ext>
             </a:extLst>
           </p:cNvPr>
@@ -13424,7 +13740,7 @@
           <p:cNvPr id="2" name="S32">
             <a:extLst xmlns:a="http://schemas.openxmlformats.org/drawingml/2006/main">
               <a:ext uri="{FF2B5EF4-FFF2-40B4-BE49-F238E27FC236}">
-                <a16:creationId xmlns:a16="http://schemas.microsoft.com/office/drawing/2014/main" id="{2DD61501-0F9C-4D1E-B27A-DC24CE82BB08}"/>
+                <a16:creationId xmlns:a16="http://schemas.microsoft.com/office/drawing/2014/main" id="{0146FE3F-053A-49F7-8D7D-CE462901E379}"/>
               </a:ext>
             </a:extLst>
           </p:cNvPr>
@@ -13582,7 +13898,7 @@
           <p:cNvPr id="3" name="정보를 지우지 않고 위치를 나누기">
             <a:extLst xmlns:a="http://schemas.openxmlformats.org/drawingml/2006/main">
               <a:ext uri="{FF2B5EF4-FFF2-40B4-BE49-F238E27FC236}">
-                <a16:creationId xmlns:a16="http://schemas.microsoft.com/office/drawing/2014/main" id="{FCB99A8C-BCC6-4739-A30F-B08E78349A6E}"/>
+                <a16:creationId xmlns:a16="http://schemas.microsoft.com/office/drawing/2014/main" id="{4931F818-CE20-44CE-A6A4-9CFF59C92F79}"/>
               </a:ext>
             </a:extLst>
           </p:cNvPr>
@@ -13740,7 +14056,7 @@
           <p:cNvPr id="4" name="">
             <a:extLst xmlns:a="http://schemas.openxmlformats.org/drawingml/2006/main">
               <a:ext uri="{FF2B5EF4-FFF2-40B4-BE49-F238E27FC236}">
-                <a16:creationId xmlns:a16="http://schemas.microsoft.com/office/drawing/2014/main" id="{4750E115-114D-4C6F-A7A9-26DB23E99D6B}"/>
+                <a16:creationId xmlns:a16="http://schemas.microsoft.com/office/drawing/2014/main" id="{751D9531-124C-4DE2-BA37-A7EC0A765074}"/>
               </a:ext>
             </a:extLst>
           </p:cNvPr>
@@ -13751,7 +14067,7 @@
         </p:nvSpPr>
         <p:spPr>
           <a:xfrm xmlns:a="http://schemas.openxmlformats.org/drawingml/2006/main">
-            <a:off x="609600" y="5829300"/>
+            <a:off x="609600" y="5753100"/>
             <a:ext cx="10972800" cy="0"/>
           </a:xfrm>
           <a:prstGeom xmlns:a="http://schemas.openxmlformats.org/drawingml/2006/main" prst="line">
@@ -13771,7 +14087,7 @@
           <p:cNvPr id="5" name="STATE-02 → STATE-03 · 실제 파일 구조와 Routing 문구 발췌">
             <a:extLst xmlns:a="http://schemas.openxmlformats.org/drawingml/2006/main">
               <a:ext uri="{FF2B5EF4-FFF2-40B4-BE49-F238E27FC236}">
-                <a16:creationId xmlns:a16="http://schemas.microsoft.com/office/drawing/2014/main" id="{95B88FD3-DF45-41FD-AE4D-8AE2EC16DA8C}"/>
+                <a16:creationId xmlns:a16="http://schemas.microsoft.com/office/drawing/2014/main" id="{AFC010C7-BEC1-4CBD-8B63-7516AD638BE9}"/>
               </a:ext>
             </a:extLst>
           </p:cNvPr>
@@ -13782,8 +14098,8 @@
         </p:nvSpPr>
         <p:spPr>
           <a:xfrm xmlns:a="http://schemas.openxmlformats.org/drawingml/2006/main">
-            <a:off x="609600" y="5915025"/>
-            <a:ext cx="10972800" cy="247650"/>
+            <a:off x="609600" y="5791200"/>
+            <a:ext cx="10972800" cy="228600"/>
           </a:xfrm>
           <a:prstGeom xmlns:a="http://schemas.openxmlformats.org/drawingml/2006/main" prst="rect">
             <a:avLst/>
@@ -13929,7 +14245,7 @@
           <p:cNvPr id="6" name="내용을 Scope에 맞춰 이동 · 구조 변화 자체가 완벽한 Routing이나 성능 향상 증거는 아님">
             <a:extLst xmlns:a="http://schemas.openxmlformats.org/drawingml/2006/main">
               <a:ext uri="{FF2B5EF4-FFF2-40B4-BE49-F238E27FC236}">
-                <a16:creationId xmlns:a16="http://schemas.microsoft.com/office/drawing/2014/main" id="{E4A801F2-0276-4FCB-A649-62BEC99BBD31}"/>
+                <a16:creationId xmlns:a16="http://schemas.microsoft.com/office/drawing/2014/main" id="{8F4AEA6C-93CC-40E2-BDB9-EB3F880FFCC7}"/>
               </a:ext>
             </a:extLst>
           </p:cNvPr>
@@ -13940,7 +14256,7 @@
         </p:nvSpPr>
         <p:spPr>
           <a:xfrm xmlns:a="http://schemas.openxmlformats.org/drawingml/2006/main">
-            <a:off x="609600" y="6191250"/>
+            <a:off x="609600" y="6019800"/>
             <a:ext cx="10972800" cy="209550"/>
           </a:xfrm>
           <a:prstGeom xmlns:a="http://schemas.openxmlformats.org/drawingml/2006/main" prst="rect">
@@ -14087,7 +14403,7 @@
           <p:cNvPr id="7" name="이전: AGENTS.md 안에 세부사항까지">
             <a:extLst xmlns:a="http://schemas.openxmlformats.org/drawingml/2006/main">
               <a:ext uri="{FF2B5EF4-FFF2-40B4-BE49-F238E27FC236}">
-                <a16:creationId xmlns:a16="http://schemas.microsoft.com/office/drawing/2014/main" id="{AD68C43A-10FC-4212-BF47-6B6FF3C88F34}"/>
+                <a16:creationId xmlns:a16="http://schemas.microsoft.com/office/drawing/2014/main" id="{2106702F-7FA2-4D82-B889-1621AE1FD177}"/>
               </a:ext>
             </a:extLst>
           </p:cNvPr>
@@ -14245,7 +14561,7 @@
           <p:cNvPr id="8" name="이후: 기본 안내 + 상세 문서로 가는 링크">
             <a:extLst xmlns:a="http://schemas.openxmlformats.org/drawingml/2006/main">
               <a:ext uri="{FF2B5EF4-FFF2-40B4-BE49-F238E27FC236}">
-                <a16:creationId xmlns:a16="http://schemas.microsoft.com/office/drawing/2014/main" id="{6147612F-2EC1-4043-9668-6E5A2CEDAF87}"/>
+                <a16:creationId xmlns:a16="http://schemas.microsoft.com/office/drawing/2014/main" id="{731C0D69-BCC9-4BC6-9757-731570721301}"/>
               </a:ext>
             </a:extLst>
           </p:cNvPr>
@@ -14403,7 +14719,7 @@
           <p:cNvPr id="9" name="">
             <a:extLst xmlns:a="http://schemas.openxmlformats.org/drawingml/2006/main">
               <a:ext uri="{FF2B5EF4-FFF2-40B4-BE49-F238E27FC236}">
-                <a16:creationId xmlns:a16="http://schemas.microsoft.com/office/drawing/2014/main" id="{99380AF4-603A-4E2F-9492-9E32E9412F55}"/>
+                <a16:creationId xmlns:a16="http://schemas.microsoft.com/office/drawing/2014/main" id="{DB0FB24B-0FEB-4A0F-B228-931E47672ED0}"/>
               </a:ext>
             </a:extLst>
           </p:cNvPr>
@@ -14434,7 +14750,7 @@
           <p:cNvPr id="10" name="처리 순서 · 모듈 역할">
             <a:extLst xmlns:a="http://schemas.openxmlformats.org/drawingml/2006/main">
               <a:ext uri="{FF2B5EF4-FFF2-40B4-BE49-F238E27FC236}">
-                <a16:creationId xmlns:a16="http://schemas.microsoft.com/office/drawing/2014/main" id="{F6E20261-1107-415F-83D1-C0E930F8FDDD}"/>
+                <a16:creationId xmlns:a16="http://schemas.microsoft.com/office/drawing/2014/main" id="{324CC99C-5BED-465E-A3C8-27A73F1AB5BE}"/>
               </a:ext>
             </a:extLst>
           </p:cNvPr>
@@ -14592,7 +14908,7 @@
           <p:cNvPr id="11" name="">
             <a:extLst xmlns:a="http://schemas.openxmlformats.org/drawingml/2006/main">
               <a:ext uri="{FF2B5EF4-FFF2-40B4-BE49-F238E27FC236}">
-                <a16:creationId xmlns:a16="http://schemas.microsoft.com/office/drawing/2014/main" id="{13FC2801-5E47-4FF7-A7AF-561DF08E8AFB}"/>
+                <a16:creationId xmlns:a16="http://schemas.microsoft.com/office/drawing/2014/main" id="{F0150678-29A3-4E6D-A72D-92F3F1513D2C}"/>
               </a:ext>
             </a:extLst>
           </p:cNvPr>
@@ -14622,7 +14938,7 @@
           <p:cNvPr id="12" name="docs/architecture.md">
             <a:extLst xmlns:a="http://schemas.openxmlformats.org/drawingml/2006/main">
               <a:ext uri="{FF2B5EF4-FFF2-40B4-BE49-F238E27FC236}">
-                <a16:creationId xmlns:a16="http://schemas.microsoft.com/office/drawing/2014/main" id="{B19931F7-523F-4596-94EE-C1F3A31A4FEB}"/>
+                <a16:creationId xmlns:a16="http://schemas.microsoft.com/office/drawing/2014/main" id="{D1F32168-1981-4BEF-A474-452C654683BE}"/>
               </a:ext>
             </a:extLst>
           </p:cNvPr>
@@ -14780,7 +15096,7 @@
           <p:cNvPr id="13" name="">
             <a:extLst xmlns:a="http://schemas.openxmlformats.org/drawingml/2006/main">
               <a:ext uri="{FF2B5EF4-FFF2-40B4-BE49-F238E27FC236}">
-                <a16:creationId xmlns:a16="http://schemas.microsoft.com/office/drawing/2014/main" id="{0A37C0A3-250C-4DD8-B050-13A0E12CDE53}"/>
+                <a16:creationId xmlns:a16="http://schemas.microsoft.com/office/drawing/2014/main" id="{AE7452DA-977F-48CB-8A8F-A2286C75636C}"/>
               </a:ext>
             </a:extLst>
           </p:cNvPr>
@@ -14811,7 +15127,7 @@
           <p:cNvPr id="14" name="이미지 형식 · crop · resize">
             <a:extLst xmlns:a="http://schemas.openxmlformats.org/drawingml/2006/main">
               <a:ext uri="{FF2B5EF4-FFF2-40B4-BE49-F238E27FC236}">
-                <a16:creationId xmlns:a16="http://schemas.microsoft.com/office/drawing/2014/main" id="{0A9C0F3A-88CD-47FE-96AD-48631937DA97}"/>
+                <a16:creationId xmlns:a16="http://schemas.microsoft.com/office/drawing/2014/main" id="{1E47464D-3DD7-4DCC-988E-A00363586995}"/>
               </a:ext>
             </a:extLst>
           </p:cNvPr>
@@ -14969,7 +15285,7 @@
           <p:cNvPr id="15" name="">
             <a:extLst xmlns:a="http://schemas.openxmlformats.org/drawingml/2006/main">
               <a:ext uri="{FF2B5EF4-FFF2-40B4-BE49-F238E27FC236}">
-                <a16:creationId xmlns:a16="http://schemas.microsoft.com/office/drawing/2014/main" id="{66573F31-CA15-4795-94FB-B26E3073367A}"/>
+                <a16:creationId xmlns:a16="http://schemas.microsoft.com/office/drawing/2014/main" id="{4275CB25-BC6D-4CF2-9ECA-71B72B6AAB0C}"/>
               </a:ext>
             </a:extLst>
           </p:cNvPr>
@@ -14999,7 +15315,7 @@
           <p:cNvPr id="16" name="docs/image-contracts.md">
             <a:extLst xmlns:a="http://schemas.openxmlformats.org/drawingml/2006/main">
               <a:ext uri="{FF2B5EF4-FFF2-40B4-BE49-F238E27FC236}">
-                <a16:creationId xmlns:a16="http://schemas.microsoft.com/office/drawing/2014/main" id="{C00809C1-FD46-4DBA-BE3D-5EF5E4D8AA36}"/>
+                <a16:creationId xmlns:a16="http://schemas.microsoft.com/office/drawing/2014/main" id="{66B60E54-0A02-42E8-9E1A-F2B943ABDCEB}"/>
               </a:ext>
             </a:extLst>
           </p:cNvPr>
@@ -15157,7 +15473,7 @@
           <p:cNvPr id="17" name="">
             <a:extLst xmlns:a="http://schemas.openxmlformats.org/drawingml/2006/main">
               <a:ext uri="{FF2B5EF4-FFF2-40B4-BE49-F238E27FC236}">
-                <a16:creationId xmlns:a16="http://schemas.microsoft.com/office/drawing/2014/main" id="{3A703EE3-0F50-4FDD-88D2-962E83A95151}"/>
+                <a16:creationId xmlns:a16="http://schemas.microsoft.com/office/drawing/2014/main" id="{7EB9AE7B-0C0E-440E-B5C5-83A883C3CE31}"/>
               </a:ext>
             </a:extLst>
           </p:cNvPr>
@@ -15188,7 +15504,7 @@
           <p:cNvPr id="18" name="테스트 구조 · 관련 테스트">
             <a:extLst xmlns:a="http://schemas.openxmlformats.org/drawingml/2006/main">
               <a:ext uri="{FF2B5EF4-FFF2-40B4-BE49-F238E27FC236}">
-                <a16:creationId xmlns:a16="http://schemas.microsoft.com/office/drawing/2014/main" id="{ADC8F997-983D-4EEE-BD34-C18239B83FF9}"/>
+                <a16:creationId xmlns:a16="http://schemas.microsoft.com/office/drawing/2014/main" id="{9B22F788-8B8F-460B-B508-9BA89F40CD5F}"/>
               </a:ext>
             </a:extLst>
           </p:cNvPr>
@@ -15346,7 +15662,7 @@
           <p:cNvPr id="19" name="">
             <a:extLst xmlns:a="http://schemas.openxmlformats.org/drawingml/2006/main">
               <a:ext uri="{FF2B5EF4-FFF2-40B4-BE49-F238E27FC236}">
-                <a16:creationId xmlns:a16="http://schemas.microsoft.com/office/drawing/2014/main" id="{2C3401E4-55F8-4FBE-84EE-D196972FBAE3}"/>
+                <a16:creationId xmlns:a16="http://schemas.microsoft.com/office/drawing/2014/main" id="{5D70F61E-2399-43D1-928A-1F4E229C7411}"/>
               </a:ext>
             </a:extLst>
           </p:cNvPr>
@@ -15376,7 +15692,7 @@
           <p:cNvPr id="20" name="docs/testing.md">
             <a:extLst xmlns:a="http://schemas.openxmlformats.org/drawingml/2006/main">
               <a:ext uri="{FF2B5EF4-FFF2-40B4-BE49-F238E27FC236}">
-                <a16:creationId xmlns:a16="http://schemas.microsoft.com/office/drawing/2014/main" id="{982E1DB2-61DD-422B-86DB-60D7BDF464A8}"/>
+                <a16:creationId xmlns:a16="http://schemas.microsoft.com/office/drawing/2014/main" id="{9304882F-C6CF-47BE-8CCB-0CBFA80FD109}"/>
               </a:ext>
             </a:extLst>
           </p:cNvPr>
@@ -15534,7 +15850,7 @@
           <p:cNvPr id="21" name="원문: Test organization or relevant tests → docs/testing.md">
             <a:extLst xmlns:a="http://schemas.openxmlformats.org/drawingml/2006/main">
               <a:ext uri="{FF2B5EF4-FFF2-40B4-BE49-F238E27FC236}">
-                <a16:creationId xmlns:a16="http://schemas.microsoft.com/office/drawing/2014/main" id="{DFC77901-FAF1-442E-A59A-05364D2BD340}"/>
+                <a16:creationId xmlns:a16="http://schemas.microsoft.com/office/drawing/2014/main" id="{A53D2086-E24A-41DB-9828-2DA335740462}"/>
               </a:ext>
             </a:extLst>
           </p:cNvPr>
@@ -15687,10 +16003,168 @@
           </a:p>
         </p:txBody>
       </p:sp>
+      <p:sp>
+        <p:nvSpPr>
+          <p:cNvPr id="22" name="Legacy module connection">
+            <a:extLst xmlns:a="http://schemas.openxmlformats.org/drawingml/2006/main">
+              <a:ext uri="{FF2B5EF4-FFF2-40B4-BE49-F238E27FC236}">
+                <a16:creationId xmlns:a16="http://schemas.microsoft.com/office/drawing/2014/main" id="{2CD4FAE6-9429-497B-96CE-D3EED97F6AFE}"/>
+              </a:ext>
+            </a:extLst>
+          </p:cNvPr>
+          <p:cNvSpPr>
+            <a:spLocks xmlns:a="http://schemas.openxmlformats.org/drawingml/2006/main" noGrp="1"/>
+          </p:cNvSpPr>
+          <p:nvPr/>
+        </p:nvSpPr>
+        <p:spPr>
+          <a:xfrm xmlns:a="http://schemas.openxmlformats.org/drawingml/2006/main">
+            <a:off x="609600" y="6229350"/>
+            <a:ext cx="10972800" cy="171450"/>
+          </a:xfrm>
+          <a:prstGeom xmlns:a="http://schemas.openxmlformats.org/drawingml/2006/main" prst="rect">
+            <a:avLst/>
+          </a:prstGeom>
+          <a:noFill xmlns:a="http://schemas.openxmlformats.org/drawingml/2006/main"/>
+          <a:ln xmlns:a="http://schemas.openxmlformats.org/drawingml/2006/main" w="0">
+            <a:noFill/>
+          </a:ln>
+        </p:spPr>
+        <p:txBody>
+          <a:bodyPr xmlns:a="http://schemas.openxmlformats.org/drawingml/2006/main" wrap="none" lIns="0" tIns="0" rIns="0" bIns="0" anchor="ctr">
+            <a:noAutofit/>
+          </a:bodyPr>
+          <a:lstStyle xmlns:a="http://schemas.openxmlformats.org/drawingml/2006/main">
+            <a:defPPr algn="r">
+              <a:defRPr sz="1200" b="0">
+                <a:solidFill>
+                  <a:srgbClr val="4D5A68"/>
+                </a:solidFill>
+                <a:latin typeface="Malgun Gothic"/>
+                <a:ea typeface="Malgun Gothic"/>
+                <a:cs typeface="Malgun Gothic"/>
+              </a:defRPr>
+            </a:defPPr>
+            <a:lvl1pPr algn="r">
+              <a:defRPr sz="1200" b="0">
+                <a:solidFill>
+                  <a:srgbClr val="4D5A68"/>
+                </a:solidFill>
+                <a:latin typeface="Malgun Gothic"/>
+                <a:ea typeface="Malgun Gothic"/>
+                <a:cs typeface="Malgun Gothic"/>
+              </a:defRPr>
+            </a:lvl1pPr>
+            <a:lvl2pPr algn="r">
+              <a:defRPr sz="1200" b="0">
+                <a:solidFill>
+                  <a:srgbClr val="4D5A68"/>
+                </a:solidFill>
+                <a:latin typeface="Malgun Gothic"/>
+                <a:ea typeface="Malgun Gothic"/>
+                <a:cs typeface="Malgun Gothic"/>
+              </a:defRPr>
+            </a:lvl2pPr>
+            <a:lvl3pPr algn="r">
+              <a:defRPr sz="1200" b="0">
+                <a:solidFill>
+                  <a:srgbClr val="4D5A68"/>
+                </a:solidFill>
+                <a:latin typeface="Malgun Gothic"/>
+                <a:ea typeface="Malgun Gothic"/>
+                <a:cs typeface="Malgun Gothic"/>
+              </a:defRPr>
+            </a:lvl3pPr>
+            <a:lvl4pPr algn="r">
+              <a:defRPr sz="1200" b="0">
+                <a:solidFill>
+                  <a:srgbClr val="4D5A68"/>
+                </a:solidFill>
+                <a:latin typeface="Malgun Gothic"/>
+                <a:ea typeface="Malgun Gothic"/>
+                <a:cs typeface="Malgun Gothic"/>
+              </a:defRPr>
+            </a:lvl4pPr>
+            <a:lvl5pPr algn="r">
+              <a:defRPr sz="1200" b="0">
+                <a:solidFill>
+                  <a:srgbClr val="4D5A68"/>
+                </a:solidFill>
+                <a:latin typeface="Malgun Gothic"/>
+                <a:ea typeface="Malgun Gothic"/>
+                <a:cs typeface="Malgun Gothic"/>
+              </a:defRPr>
+            </a:lvl5pPr>
+            <a:lvl6pPr algn="r">
+              <a:defRPr sz="1200" b="0">
+                <a:solidFill>
+                  <a:srgbClr val="4D5A68"/>
+                </a:solidFill>
+                <a:latin typeface="Malgun Gothic"/>
+                <a:ea typeface="Malgun Gothic"/>
+                <a:cs typeface="Malgun Gothic"/>
+              </a:defRPr>
+            </a:lvl6pPr>
+            <a:lvl7pPr algn="r">
+              <a:defRPr sz="1200" b="0">
+                <a:solidFill>
+                  <a:srgbClr val="4D5A68"/>
+                </a:solidFill>
+                <a:latin typeface="Malgun Gothic"/>
+                <a:ea typeface="Malgun Gothic"/>
+                <a:cs typeface="Malgun Gothic"/>
+              </a:defRPr>
+            </a:lvl7pPr>
+            <a:lvl8pPr algn="r">
+              <a:defRPr sz="1200" b="0">
+                <a:solidFill>
+                  <a:srgbClr val="4D5A68"/>
+                </a:solidFill>
+                <a:latin typeface="Malgun Gothic"/>
+                <a:ea typeface="Malgun Gothic"/>
+                <a:cs typeface="Malgun Gothic"/>
+              </a:defRPr>
+            </a:lvl8pPr>
+            <a:lvl9pPr algn="r">
+              <a:defRPr sz="1200" b="0">
+                <a:solidFill>
+                  <a:srgbClr val="4D5A68"/>
+                </a:solidFill>
+                <a:latin typeface="Malgun Gothic"/>
+                <a:ea typeface="Malgun Gothic"/>
+                <a:cs typeface="Malgun Gothic"/>
+              </a:defRPr>
+            </a:lvl9pPr>
+          </a:lstStyle>
+          <a:p xmlns:a="http://schemas.openxmlformats.org/drawingml/2006/main">
+            <a:pPr algn="r">
+              <a:defRPr sz="1200" b="0">
+                <a:solidFill>
+                  <a:srgbClr val="4D5A68"/>
+                </a:solidFill>
+                <a:latin typeface="Malgun Gothic"/>
+                <a:ea typeface="Malgun Gothic"/>
+                <a:cs typeface="Malgun Gothic"/>
+              </a:defRPr>
+            </a:pPr>
+            <a:r>
+              <a:rPr sz="1200" b="0">
+                <a:solidFill>
+                  <a:srgbClr val="4D5A68"/>
+                </a:solidFill>
+                <a:latin typeface="Malgun Gothic"/>
+                <a:ea typeface="Malgun Gothic"/>
+                <a:cs typeface="Malgun Gothic"/>
+              </a:rPr>
+              <a:t>M 연계 · 신규 확장</a:t>
+            </a:r>
+          </a:p>
+        </p:txBody>
+      </p:sp>
     </p:spTree>
     <p:extLst>
       <p:ext uri="{BB962C8B-B14F-4D97-AF65-F5344CB8AC3E}">
-        <p14:creationId xmlns:p14="http://schemas.microsoft.com/office/powerpoint/2010/main" val="36845366"/>
+        <p14:creationId xmlns:p14="http://schemas.microsoft.com/office/powerpoint/2010/main" val="1881540053"/>
       </p:ext>
     </p:extLst>
   </p:cSld>
@@ -15718,10 +16192,10 @@
       </p:grpSpPr>
       <p:sp>
         <p:nvSpPr>
-          <p:cNvPr id="14" name="ACT 2 · 관찰하기 전에 질문하기">
+          <p:cNvPr id="15" name="ACT 2 · 관찰하기 전에 질문하기">
             <a:extLst xmlns:a="http://schemas.openxmlformats.org/drawingml/2006/main">
               <a:ext uri="{FF2B5EF4-FFF2-40B4-BE49-F238E27FC236}">
-                <a16:creationId xmlns:a16="http://schemas.microsoft.com/office/drawing/2014/main" id="{86385382-024B-4353-80B3-5EBCAEDF7D1F}"/>
+                <a16:creationId xmlns:a16="http://schemas.microsoft.com/office/drawing/2014/main" id="{233957DF-7DC3-4CD4-82FB-4F45485C775B}"/>
               </a:ext>
             </a:extLst>
           </p:cNvPr>
@@ -15879,7 +16353,7 @@
           <p:cNvPr id="2" name="S33">
             <a:extLst xmlns:a="http://schemas.openxmlformats.org/drawingml/2006/main">
               <a:ext uri="{FF2B5EF4-FFF2-40B4-BE49-F238E27FC236}">
-                <a16:creationId xmlns:a16="http://schemas.microsoft.com/office/drawing/2014/main" id="{0D057EF5-8F7F-4A2F-9D95-52ADBA531E87}"/>
+                <a16:creationId xmlns:a16="http://schemas.microsoft.com/office/drawing/2014/main" id="{08B2C716-D585-4831-AFCE-8CF7F4DC6B74}"/>
               </a:ext>
             </a:extLst>
           </p:cNvPr>
@@ -16037,7 +16511,7 @@
           <p:cNvPr id="3" name="서로 다른 두 Task가 무엇을 읽을까?">
             <a:extLst xmlns:a="http://schemas.openxmlformats.org/drawingml/2006/main">
               <a:ext uri="{FF2B5EF4-FFF2-40B4-BE49-F238E27FC236}">
-                <a16:creationId xmlns:a16="http://schemas.microsoft.com/office/drawing/2014/main" id="{1607B26E-A9B8-4819-9F3A-EC8ADC1FE3B7}"/>
+                <a16:creationId xmlns:a16="http://schemas.microsoft.com/office/drawing/2014/main" id="{484CB6E7-0D77-4717-B638-5103E2B42971}"/>
               </a:ext>
             </a:extLst>
           </p:cNvPr>
@@ -16195,7 +16669,7 @@
           <p:cNvPr id="4" name="">
             <a:extLst xmlns:a="http://schemas.openxmlformats.org/drawingml/2006/main">
               <a:ext uri="{FF2B5EF4-FFF2-40B4-BE49-F238E27FC236}">
-                <a16:creationId xmlns:a16="http://schemas.microsoft.com/office/drawing/2014/main" id="{F63A77A8-7596-458F-8D79-69E79DF93B9E}"/>
+                <a16:creationId xmlns:a16="http://schemas.microsoft.com/office/drawing/2014/main" id="{45CCDDBD-9047-4B31-8C34-DB4E6CD6AA6B}"/>
               </a:ext>
             </a:extLst>
           </p:cNvPr>
@@ -16206,7 +16680,7 @@
         </p:nvSpPr>
         <p:spPr>
           <a:xfrm xmlns:a="http://schemas.openxmlformats.org/drawingml/2006/main">
-            <a:off x="609600" y="5829300"/>
+            <a:off x="609600" y="5753100"/>
             <a:ext cx="10972800" cy="0"/>
           </a:xfrm>
           <a:prstGeom xmlns:a="http://schemas.openxmlformats.org/drawingml/2006/main" prst="line">
@@ -16226,7 +16700,7 @@
           <p:cNvPr id="5" name="TRIAL-005A/B · 읽기 전용 Task의 질문을 재구성">
             <a:extLst xmlns:a="http://schemas.openxmlformats.org/drawingml/2006/main">
               <a:ext uri="{FF2B5EF4-FFF2-40B4-BE49-F238E27FC236}">
-                <a16:creationId xmlns:a16="http://schemas.microsoft.com/office/drawing/2014/main" id="{F70EEF7B-C4E9-4C03-AE4F-FAE0A937593A}"/>
+                <a16:creationId xmlns:a16="http://schemas.microsoft.com/office/drawing/2014/main" id="{E7456354-6166-49FD-9BCA-E543401D6EC9}"/>
               </a:ext>
             </a:extLst>
           </p:cNvPr>
@@ -16237,8 +16711,8 @@
         </p:nvSpPr>
         <p:spPr>
           <a:xfrm xmlns:a="http://schemas.openxmlformats.org/drawingml/2006/main">
-            <a:off x="609600" y="5915025"/>
-            <a:ext cx="10972800" cy="247650"/>
+            <a:off x="609600" y="5791200"/>
+            <a:ext cx="10972800" cy="228600"/>
           </a:xfrm>
           <a:prstGeom xmlns:a="http://schemas.openxmlformats.org/drawingml/2006/main" prst="rect">
             <a:avLst/>
@@ -16384,7 +16858,7 @@
           <p:cNvPr id="6" name="어떤 상세 문서를 읽을지는 실제 접근 기록으로 확인한다">
             <a:extLst xmlns:a="http://schemas.openxmlformats.org/drawingml/2006/main">
               <a:ext uri="{FF2B5EF4-FFF2-40B4-BE49-F238E27FC236}">
-                <a16:creationId xmlns:a16="http://schemas.microsoft.com/office/drawing/2014/main" id="{EF683EBC-7F9E-4E1F-8F16-1AB003108630}"/>
+                <a16:creationId xmlns:a16="http://schemas.microsoft.com/office/drawing/2014/main" id="{07A54C61-8A09-4C84-9AE0-821A5F29755D}"/>
               </a:ext>
             </a:extLst>
           </p:cNvPr>
@@ -16395,7 +16869,7 @@
         </p:nvSpPr>
         <p:spPr>
           <a:xfrm xmlns:a="http://schemas.openxmlformats.org/drawingml/2006/main">
-            <a:off x="609600" y="6191250"/>
+            <a:off x="609600" y="6019800"/>
             <a:ext cx="10972800" cy="209550"/>
           </a:xfrm>
           <a:prstGeom xmlns:a="http://schemas.openxmlformats.org/drawingml/2006/main" prst="rect">
@@ -16542,7 +17016,7 @@
           <p:cNvPr id="7" name="Task A">
             <a:extLst xmlns:a="http://schemas.openxmlformats.org/drawingml/2006/main">
               <a:ext uri="{FF2B5EF4-FFF2-40B4-BE49-F238E27FC236}">
-                <a16:creationId xmlns:a16="http://schemas.microsoft.com/office/drawing/2014/main" id="{3B15A2FD-3A2E-481E-827A-AF78AD04168A}"/>
+                <a16:creationId xmlns:a16="http://schemas.microsoft.com/office/drawing/2014/main" id="{8B703F54-74D7-4880-A1AB-45B9DEA9A68A}"/>
               </a:ext>
             </a:extLst>
           </p:cNvPr>
@@ -16700,7 +17174,7 @@
           <p:cNvPr id="8" name="Task B">
             <a:extLst xmlns:a="http://schemas.openxmlformats.org/drawingml/2006/main">
               <a:ext uri="{FF2B5EF4-FFF2-40B4-BE49-F238E27FC236}">
-                <a16:creationId xmlns:a16="http://schemas.microsoft.com/office/drawing/2014/main" id="{89CDC520-0338-4693-97F2-81A6008AD666}"/>
+                <a16:creationId xmlns:a16="http://schemas.microsoft.com/office/drawing/2014/main" id="{3548529A-8259-47EC-A129-5AF0426B4E78}"/>
               </a:ext>
             </a:extLst>
           </p:cNvPr>
@@ -16858,7 +17332,7 @@
           <p:cNvPr id="9" name="">
             <a:extLst xmlns:a="http://schemas.openxmlformats.org/drawingml/2006/main">
               <a:ext uri="{FF2B5EF4-FFF2-40B4-BE49-F238E27FC236}">
-                <a16:creationId xmlns:a16="http://schemas.microsoft.com/office/drawing/2014/main" id="{FFEDD680-5553-4F3B-BE4D-906F9D1762ED}"/>
+                <a16:creationId xmlns:a16="http://schemas.microsoft.com/office/drawing/2014/main" id="{F40BACCD-1E2E-4FEF-B210-21863EB32885}"/>
               </a:ext>
             </a:extLst>
           </p:cNvPr>
@@ -16889,7 +17363,7 @@
           <p:cNvPr id="10" name="">
             <a:extLst xmlns:a="http://schemas.openxmlformats.org/drawingml/2006/main">
               <a:ext uri="{FF2B5EF4-FFF2-40B4-BE49-F238E27FC236}">
-                <a16:creationId xmlns:a16="http://schemas.microsoft.com/office/drawing/2014/main" id="{2E113CC4-29D2-46CF-A54E-7C866E430B68}"/>
+                <a16:creationId xmlns:a16="http://schemas.microsoft.com/office/drawing/2014/main" id="{A00722C7-EC0E-404D-B2C8-D4E2921437AE}"/>
               </a:ext>
             </a:extLst>
           </p:cNvPr>
@@ -16920,7 +17394,7 @@
           <p:cNvPr id="11" name="crop 1 3은&#10;어떤 source column을&#10;포함하는가?">
             <a:extLst xmlns:a="http://schemas.openxmlformats.org/drawingml/2006/main">
               <a:ext uri="{FF2B5EF4-FFF2-40B4-BE49-F238E27FC236}">
-                <a16:creationId xmlns:a16="http://schemas.microsoft.com/office/drawing/2014/main" id="{B9AD704B-6500-455C-A2F9-4A6966371E6F}"/>
+                <a16:creationId xmlns:a16="http://schemas.microsoft.com/office/drawing/2014/main" id="{C3731B31-9564-4A64-8A10-C83B65594C93}"/>
               </a:ext>
             </a:extLst>
           </p:cNvPr>
@@ -17124,7 +17598,7 @@
           <p:cNvPr id="12" name="이 Project에&#10;runtime dependency가&#10;있는가?">
             <a:extLst xmlns:a="http://schemas.openxmlformats.org/drawingml/2006/main">
               <a:ext uri="{FF2B5EF4-FFF2-40B4-BE49-F238E27FC236}">
-                <a16:creationId xmlns:a16="http://schemas.microsoft.com/office/drawing/2014/main" id="{0717640E-7687-4BB0-AA9F-08E3A3E11E8D}"/>
+                <a16:creationId xmlns:a16="http://schemas.microsoft.com/office/drawing/2014/main" id="{28E0439B-20CA-4606-BBD5-7A6C8B443AFC}"/>
               </a:ext>
             </a:extLst>
           </p:cNvPr>
@@ -17328,7 +17802,7 @@
           <p:cNvPr id="13" name="두 Task에서 같은 상세 문서를 읽을까?">
             <a:extLst xmlns:a="http://schemas.openxmlformats.org/drawingml/2006/main">
               <a:ext uri="{FF2B5EF4-FFF2-40B4-BE49-F238E27FC236}">
-                <a16:creationId xmlns:a16="http://schemas.microsoft.com/office/drawing/2014/main" id="{05746C10-3899-41CA-A439-C7A7EF38D90D}"/>
+                <a16:creationId xmlns:a16="http://schemas.microsoft.com/office/drawing/2014/main" id="{93F0F5F5-743A-499B-9915-E637C18A2758}"/>
               </a:ext>
             </a:extLst>
           </p:cNvPr>
@@ -17481,10 +17955,168 @@
           </a:p>
         </p:txBody>
       </p:sp>
+      <p:sp>
+        <p:nvSpPr>
+          <p:cNvPr id="14" name="Legacy module connection">
+            <a:extLst xmlns:a="http://schemas.openxmlformats.org/drawingml/2006/main">
+              <a:ext uri="{FF2B5EF4-FFF2-40B4-BE49-F238E27FC236}">
+                <a16:creationId xmlns:a16="http://schemas.microsoft.com/office/drawing/2014/main" id="{124B802F-993F-4126-9460-DF2239DAD27C}"/>
+              </a:ext>
+            </a:extLst>
+          </p:cNvPr>
+          <p:cNvSpPr>
+            <a:spLocks xmlns:a="http://schemas.openxmlformats.org/drawingml/2006/main" noGrp="1"/>
+          </p:cNvSpPr>
+          <p:nvPr/>
+        </p:nvSpPr>
+        <p:spPr>
+          <a:xfrm xmlns:a="http://schemas.openxmlformats.org/drawingml/2006/main">
+            <a:off x="609600" y="6229350"/>
+            <a:ext cx="10972800" cy="171450"/>
+          </a:xfrm>
+          <a:prstGeom xmlns:a="http://schemas.openxmlformats.org/drawingml/2006/main" prst="rect">
+            <a:avLst/>
+          </a:prstGeom>
+          <a:noFill xmlns:a="http://schemas.openxmlformats.org/drawingml/2006/main"/>
+          <a:ln xmlns:a="http://schemas.openxmlformats.org/drawingml/2006/main" w="0">
+            <a:noFill/>
+          </a:ln>
+        </p:spPr>
+        <p:txBody>
+          <a:bodyPr xmlns:a="http://schemas.openxmlformats.org/drawingml/2006/main" wrap="none" lIns="0" tIns="0" rIns="0" bIns="0" anchor="ctr">
+            <a:noAutofit/>
+          </a:bodyPr>
+          <a:lstStyle xmlns:a="http://schemas.openxmlformats.org/drawingml/2006/main">
+            <a:defPPr algn="r">
+              <a:defRPr sz="1200" b="0">
+                <a:solidFill>
+                  <a:srgbClr val="4D5A68"/>
+                </a:solidFill>
+                <a:latin typeface="Malgun Gothic"/>
+                <a:ea typeface="Malgun Gothic"/>
+                <a:cs typeface="Malgun Gothic"/>
+              </a:defRPr>
+            </a:defPPr>
+            <a:lvl1pPr algn="r">
+              <a:defRPr sz="1200" b="0">
+                <a:solidFill>
+                  <a:srgbClr val="4D5A68"/>
+                </a:solidFill>
+                <a:latin typeface="Malgun Gothic"/>
+                <a:ea typeface="Malgun Gothic"/>
+                <a:cs typeface="Malgun Gothic"/>
+              </a:defRPr>
+            </a:lvl1pPr>
+            <a:lvl2pPr algn="r">
+              <a:defRPr sz="1200" b="0">
+                <a:solidFill>
+                  <a:srgbClr val="4D5A68"/>
+                </a:solidFill>
+                <a:latin typeface="Malgun Gothic"/>
+                <a:ea typeface="Malgun Gothic"/>
+                <a:cs typeface="Malgun Gothic"/>
+              </a:defRPr>
+            </a:lvl2pPr>
+            <a:lvl3pPr algn="r">
+              <a:defRPr sz="1200" b="0">
+                <a:solidFill>
+                  <a:srgbClr val="4D5A68"/>
+                </a:solidFill>
+                <a:latin typeface="Malgun Gothic"/>
+                <a:ea typeface="Malgun Gothic"/>
+                <a:cs typeface="Malgun Gothic"/>
+              </a:defRPr>
+            </a:lvl3pPr>
+            <a:lvl4pPr algn="r">
+              <a:defRPr sz="1200" b="0">
+                <a:solidFill>
+                  <a:srgbClr val="4D5A68"/>
+                </a:solidFill>
+                <a:latin typeface="Malgun Gothic"/>
+                <a:ea typeface="Malgun Gothic"/>
+                <a:cs typeface="Malgun Gothic"/>
+              </a:defRPr>
+            </a:lvl4pPr>
+            <a:lvl5pPr algn="r">
+              <a:defRPr sz="1200" b="0">
+                <a:solidFill>
+                  <a:srgbClr val="4D5A68"/>
+                </a:solidFill>
+                <a:latin typeface="Malgun Gothic"/>
+                <a:ea typeface="Malgun Gothic"/>
+                <a:cs typeface="Malgun Gothic"/>
+              </a:defRPr>
+            </a:lvl5pPr>
+            <a:lvl6pPr algn="r">
+              <a:defRPr sz="1200" b="0">
+                <a:solidFill>
+                  <a:srgbClr val="4D5A68"/>
+                </a:solidFill>
+                <a:latin typeface="Malgun Gothic"/>
+                <a:ea typeface="Malgun Gothic"/>
+                <a:cs typeface="Malgun Gothic"/>
+              </a:defRPr>
+            </a:lvl6pPr>
+            <a:lvl7pPr algn="r">
+              <a:defRPr sz="1200" b="0">
+                <a:solidFill>
+                  <a:srgbClr val="4D5A68"/>
+                </a:solidFill>
+                <a:latin typeface="Malgun Gothic"/>
+                <a:ea typeface="Malgun Gothic"/>
+                <a:cs typeface="Malgun Gothic"/>
+              </a:defRPr>
+            </a:lvl7pPr>
+            <a:lvl8pPr algn="r">
+              <a:defRPr sz="1200" b="0">
+                <a:solidFill>
+                  <a:srgbClr val="4D5A68"/>
+                </a:solidFill>
+                <a:latin typeface="Malgun Gothic"/>
+                <a:ea typeface="Malgun Gothic"/>
+                <a:cs typeface="Malgun Gothic"/>
+              </a:defRPr>
+            </a:lvl8pPr>
+            <a:lvl9pPr algn="r">
+              <a:defRPr sz="1200" b="0">
+                <a:solidFill>
+                  <a:srgbClr val="4D5A68"/>
+                </a:solidFill>
+                <a:latin typeface="Malgun Gothic"/>
+                <a:ea typeface="Malgun Gothic"/>
+                <a:cs typeface="Malgun Gothic"/>
+              </a:defRPr>
+            </a:lvl9pPr>
+          </a:lstStyle>
+          <a:p xmlns:a="http://schemas.openxmlformats.org/drawingml/2006/main">
+            <a:pPr algn="r">
+              <a:defRPr sz="1200" b="0">
+                <a:solidFill>
+                  <a:srgbClr val="4D5A68"/>
+                </a:solidFill>
+                <a:latin typeface="Malgun Gothic"/>
+                <a:ea typeface="Malgun Gothic"/>
+                <a:cs typeface="Malgun Gothic"/>
+              </a:defRPr>
+            </a:pPr>
+            <a:r>
+              <a:rPr sz="1200" b="0">
+                <a:solidFill>
+                  <a:srgbClr val="4D5A68"/>
+                </a:solidFill>
+                <a:latin typeface="Malgun Gothic"/>
+                <a:ea typeface="Malgun Gothic"/>
+                <a:cs typeface="Malgun Gothic"/>
+              </a:rPr>
+              <a:t>M 연계 · 신규 확장</a:t>
+            </a:r>
+          </a:p>
+        </p:txBody>
+      </p:sp>
     </p:spTree>
     <p:extLst>
       <p:ext uri="{BB962C8B-B14F-4D97-AF65-F5344CB8AC3E}">
-        <p14:creationId xmlns:p14="http://schemas.microsoft.com/office/powerpoint/2010/main" val="341822573"/>
+        <p14:creationId xmlns:p14="http://schemas.microsoft.com/office/powerpoint/2010/main" val="1444056187"/>
       </p:ext>
     </p:extLst>
   </p:cSld>
@@ -17512,10 +18144,10 @@
       </p:grpSpPr>
       <p:sp>
         <p:nvSpPr>
-          <p:cNvPr id="24" name="ACT 2 · 질문과 근거를 연결하기">
+          <p:cNvPr id="25" name="ACT 2 · 질문과 근거를 연결하기">
             <a:extLst xmlns:a="http://schemas.openxmlformats.org/drawingml/2006/main">
               <a:ext uri="{FF2B5EF4-FFF2-40B4-BE49-F238E27FC236}">
-                <a16:creationId xmlns:a16="http://schemas.microsoft.com/office/drawing/2014/main" id="{05A9DD85-75FE-4C17-991A-F627AE3F13D0}"/>
+                <a16:creationId xmlns:a16="http://schemas.microsoft.com/office/drawing/2014/main" id="{B675E7E3-0E1C-43C7-B531-E6E92EE71960}"/>
               </a:ext>
             </a:extLst>
           </p:cNvPr>
@@ -17673,7 +18305,7 @@
           <p:cNvPr id="2" name="S34">
             <a:extLst xmlns:a="http://schemas.openxmlformats.org/drawingml/2006/main">
               <a:ext uri="{FF2B5EF4-FFF2-40B4-BE49-F238E27FC236}">
-                <a16:creationId xmlns:a16="http://schemas.microsoft.com/office/drawing/2014/main" id="{BDD19BDC-D011-4354-92D7-B1AD90709CB5}"/>
+                <a16:creationId xmlns:a16="http://schemas.microsoft.com/office/drawing/2014/main" id="{E72380D3-0D1B-44C3-B984-1DAB850C9052}"/>
               </a:ext>
             </a:extLst>
           </p:cNvPr>
@@ -17831,7 +18463,7 @@
           <p:cNvPr id="3" name="Crop Task에서 관찰한 접근">
             <a:extLst xmlns:a="http://schemas.openxmlformats.org/drawingml/2006/main">
               <a:ext uri="{FF2B5EF4-FFF2-40B4-BE49-F238E27FC236}">
-                <a16:creationId xmlns:a16="http://schemas.microsoft.com/office/drawing/2014/main" id="{D51FB849-E20C-4F58-B3AE-4465D6F614D2}"/>
+                <a16:creationId xmlns:a16="http://schemas.microsoft.com/office/drawing/2014/main" id="{35013328-7EDE-48D3-9267-414B2053D9B4}"/>
               </a:ext>
             </a:extLst>
           </p:cNvPr>
@@ -17989,7 +18621,7 @@
           <p:cNvPr id="4" name="">
             <a:extLst xmlns:a="http://schemas.openxmlformats.org/drawingml/2006/main">
               <a:ext uri="{FF2B5EF4-FFF2-40B4-BE49-F238E27FC236}">
-                <a16:creationId xmlns:a16="http://schemas.microsoft.com/office/drawing/2014/main" id="{337A49F8-2808-42E4-95F1-04C6475B980B}"/>
+                <a16:creationId xmlns:a16="http://schemas.microsoft.com/office/drawing/2014/main" id="{2946BA88-908A-4A0E-B776-296B07C72290}"/>
               </a:ext>
             </a:extLst>
           </p:cNvPr>
@@ -18000,7 +18632,7 @@
         </p:nvSpPr>
         <p:spPr>
           <a:xfrm xmlns:a="http://schemas.openxmlformats.org/drawingml/2006/main">
-            <a:off x="609600" y="5829300"/>
+            <a:off x="609600" y="5753100"/>
             <a:ext cx="10972800" cy="0"/>
           </a:xfrm>
           <a:prstGeom xmlns:a="http://schemas.openxmlformats.org/drawingml/2006/main" prst="line">
@@ -18020,7 +18652,7 @@
           <p:cNvPr id="5" name="TRIAL-005A · 최종 실행의 접근과 답을 기록에서 재구성">
             <a:extLst xmlns:a="http://schemas.openxmlformats.org/drawingml/2006/main">
               <a:ext uri="{FF2B5EF4-FFF2-40B4-BE49-F238E27FC236}">
-                <a16:creationId xmlns:a16="http://schemas.microsoft.com/office/drawing/2014/main" id="{24B7EED5-A0E0-43E5-83DF-1BD8261F9033}"/>
+                <a16:creationId xmlns:a16="http://schemas.microsoft.com/office/drawing/2014/main" id="{57D86CF2-BDEC-4FA0-8FFA-9EE777C73666}"/>
               </a:ext>
             </a:extLst>
           </p:cNvPr>
@@ -18031,8 +18663,8 @@
         </p:nvSpPr>
         <p:spPr>
           <a:xfrm xmlns:a="http://schemas.openxmlformats.org/drawingml/2006/main">
-            <a:off x="609600" y="5915025"/>
-            <a:ext cx="10972800" cy="247650"/>
+            <a:off x="609600" y="5791200"/>
+            <a:ext cx="10972800" cy="228600"/>
           </a:xfrm>
           <a:prstGeom xmlns:a="http://schemas.openxmlformats.org/drawingml/2006/main" prst="rect">
             <a:avLst/>
@@ -18178,7 +18810,7 @@
           <p:cNvPr id="6" name="architecture 등 넓은 Context도 접근 · testing.md는 최종 실행에서 관찰, 반복 간">
             <a:extLst xmlns:a="http://schemas.openxmlformats.org/drawingml/2006/main">
               <a:ext uri="{FF2B5EF4-FFF2-40B4-BE49-F238E27FC236}">
-                <a16:creationId xmlns:a16="http://schemas.microsoft.com/office/drawing/2014/main" id="{2AC35616-4ECE-492D-9456-126E844B970A}"/>
+                <a16:creationId xmlns:a16="http://schemas.microsoft.com/office/drawing/2014/main" id="{3F6ABE2E-AEBA-43B3-AA7F-6B11AA8235EA}"/>
               </a:ext>
             </a:extLst>
           </p:cNvPr>
@@ -18189,7 +18821,7 @@
         </p:nvSpPr>
         <p:spPr>
           <a:xfrm xmlns:a="http://schemas.openxmlformats.org/drawingml/2006/main">
-            <a:off x="609600" y="6191250"/>
+            <a:off x="609600" y="6019800"/>
             <a:ext cx="10972800" cy="209550"/>
           </a:xfrm>
           <a:prstGeom xmlns:a="http://schemas.openxmlformats.org/drawingml/2006/main" prst="rect">
@@ -18336,7 +18968,7 @@
           <p:cNvPr id="7" name="접근한 계약 문서">
             <a:extLst xmlns:a="http://schemas.openxmlformats.org/drawingml/2006/main">
               <a:ext uri="{FF2B5EF4-FFF2-40B4-BE49-F238E27FC236}">
-                <a16:creationId xmlns:a16="http://schemas.microsoft.com/office/drawing/2014/main" id="{DE108C18-AF71-448A-9E4A-278D1CBEB4E1}"/>
+                <a16:creationId xmlns:a16="http://schemas.microsoft.com/office/drawing/2014/main" id="{11AC6206-61B1-4635-AAC5-FED0064875A6}"/>
               </a:ext>
             </a:extLst>
           </p:cNvPr>
@@ -18494,7 +19126,7 @@
           <p:cNvPr id="8" name="image-contracts.md">
             <a:extLst xmlns:a="http://schemas.openxmlformats.org/drawingml/2006/main">
               <a:ext uri="{FF2B5EF4-FFF2-40B4-BE49-F238E27FC236}">
-                <a16:creationId xmlns:a16="http://schemas.microsoft.com/office/drawing/2014/main" id="{05AE04E4-8830-4108-8C56-37607B8A52EA}"/>
+                <a16:creationId xmlns:a16="http://schemas.microsoft.com/office/drawing/2014/main" id="{13939EE6-6747-44B8-AA2D-BF0B3A71511C}"/>
               </a:ext>
             </a:extLst>
           </p:cNvPr>
@@ -18652,7 +19284,7 @@
           <p:cNvPr id="9" name="">
             <a:extLst xmlns:a="http://schemas.openxmlformats.org/drawingml/2006/main">
               <a:ext uri="{FF2B5EF4-FFF2-40B4-BE49-F238E27FC236}">
-                <a16:creationId xmlns:a16="http://schemas.microsoft.com/office/drawing/2014/main" id="{1423E27F-E6C3-40E2-AF0C-441C1B0F7B30}"/>
+                <a16:creationId xmlns:a16="http://schemas.microsoft.com/office/drawing/2014/main" id="{BD344917-98B6-4C3E-92A3-BB33545F7DAB}"/>
               </a:ext>
             </a:extLst>
           </p:cNvPr>
@@ -18683,7 +19315,7 @@
           <p:cNvPr id="10" name="[x_start, x_end)">
             <a:extLst xmlns:a="http://schemas.openxmlformats.org/drawingml/2006/main">
               <a:ext uri="{FF2B5EF4-FFF2-40B4-BE49-F238E27FC236}">
-                <a16:creationId xmlns:a16="http://schemas.microsoft.com/office/drawing/2014/main" id="{A389F1C1-105E-42E8-8151-338F2E7E62DA}"/>
+                <a16:creationId xmlns:a16="http://schemas.microsoft.com/office/drawing/2014/main" id="{EF34891F-0D7F-408C-8AD7-7730C0C94990}"/>
               </a:ext>
             </a:extLst>
           </p:cNvPr>
@@ -18841,7 +19473,7 @@
           <p:cNvPr id="11" name="시작 열 포함 · 끝 좌표 제외">
             <a:extLst xmlns:a="http://schemas.openxmlformats.org/drawingml/2006/main">
               <a:ext uri="{FF2B5EF4-FFF2-40B4-BE49-F238E27FC236}">
-                <a16:creationId xmlns:a16="http://schemas.microsoft.com/office/drawing/2014/main" id="{D09F8657-EDC2-41EA-B7F5-F8E82CF6F904}"/>
+                <a16:creationId xmlns:a16="http://schemas.microsoft.com/office/drawing/2014/main" id="{5CC2DC1F-06DC-4146-B3C4-4313701582A1}"/>
               </a:ext>
             </a:extLst>
           </p:cNvPr>
@@ -18999,7 +19631,7 @@
           <p:cNvPr id="12" name="기록된 답">
             <a:extLst xmlns:a="http://schemas.openxmlformats.org/drawingml/2006/main">
               <a:ext uri="{FF2B5EF4-FFF2-40B4-BE49-F238E27FC236}">
-                <a16:creationId xmlns:a16="http://schemas.microsoft.com/office/drawing/2014/main" id="{C1C7385C-00E6-4A53-BA0C-B66678CDE75F}"/>
+                <a16:creationId xmlns:a16="http://schemas.microsoft.com/office/drawing/2014/main" id="{52721800-3817-4B3F-9821-374B4C73A1BA}"/>
               </a:ext>
             </a:extLst>
           </p:cNvPr>
@@ -19157,7 +19789,7 @@
           <p:cNvPr id="13" name="crop 1 3">
             <a:extLst xmlns:a="http://schemas.openxmlformats.org/drawingml/2006/main">
               <a:ext uri="{FF2B5EF4-FFF2-40B4-BE49-F238E27FC236}">
-                <a16:creationId xmlns:a16="http://schemas.microsoft.com/office/drawing/2014/main" id="{A26775C9-AD4E-42B0-B9AF-AC08CE847633}"/>
+                <a16:creationId xmlns:a16="http://schemas.microsoft.com/office/drawing/2014/main" id="{4F17F605-6AA3-4961-B652-E9637BD21744}"/>
               </a:ext>
             </a:extLst>
           </p:cNvPr>
@@ -19315,7 +19947,7 @@
           <p:cNvPr id="14" name="">
             <a:extLst xmlns:a="http://schemas.openxmlformats.org/drawingml/2006/main">
               <a:ext uri="{FF2B5EF4-FFF2-40B4-BE49-F238E27FC236}">
-                <a16:creationId xmlns:a16="http://schemas.microsoft.com/office/drawing/2014/main" id="{15F99B20-B66B-4F49-9971-FBA67EA64545}"/>
+                <a16:creationId xmlns:a16="http://schemas.microsoft.com/office/drawing/2014/main" id="{86A4A6E4-CFB0-4009-8AF1-1571441B34C5}"/>
               </a:ext>
             </a:extLst>
           </p:cNvPr>
@@ -19348,7 +19980,7 @@
           <p:cNvPr id="15" name="0">
             <a:extLst xmlns:a="http://schemas.openxmlformats.org/drawingml/2006/main">
               <a:ext uri="{FF2B5EF4-FFF2-40B4-BE49-F238E27FC236}">
-                <a16:creationId xmlns:a16="http://schemas.microsoft.com/office/drawing/2014/main" id="{DB250FE9-8118-487B-BE0E-450FF0035766}"/>
+                <a16:creationId xmlns:a16="http://schemas.microsoft.com/office/drawing/2014/main" id="{C240611C-413D-4038-9664-6F2B961C134F}"/>
               </a:ext>
             </a:extLst>
           </p:cNvPr>
@@ -19506,7 +20138,7 @@
           <p:cNvPr id="16" name="">
             <a:extLst xmlns:a="http://schemas.openxmlformats.org/drawingml/2006/main">
               <a:ext uri="{FF2B5EF4-FFF2-40B4-BE49-F238E27FC236}">
-                <a16:creationId xmlns:a16="http://schemas.microsoft.com/office/drawing/2014/main" id="{57028EFC-9406-47FA-A753-E47AA41A110B}"/>
+                <a16:creationId xmlns:a16="http://schemas.microsoft.com/office/drawing/2014/main" id="{13DFBF94-207C-4959-85C9-5AE6CF8C92E5}"/>
               </a:ext>
             </a:extLst>
           </p:cNvPr>
@@ -19539,7 +20171,7 @@
           <p:cNvPr id="17" name="1">
             <a:extLst xmlns:a="http://schemas.openxmlformats.org/drawingml/2006/main">
               <a:ext uri="{FF2B5EF4-FFF2-40B4-BE49-F238E27FC236}">
-                <a16:creationId xmlns:a16="http://schemas.microsoft.com/office/drawing/2014/main" id="{D3138FC0-C6D9-4889-AEF7-9B92616B181C}"/>
+                <a16:creationId xmlns:a16="http://schemas.microsoft.com/office/drawing/2014/main" id="{69D34DF1-CF57-4E80-B5E1-109BD748DAC6}"/>
               </a:ext>
             </a:extLst>
           </p:cNvPr>
@@ -19697,7 +20329,7 @@
           <p:cNvPr id="18" name="">
             <a:extLst xmlns:a="http://schemas.openxmlformats.org/drawingml/2006/main">
               <a:ext uri="{FF2B5EF4-FFF2-40B4-BE49-F238E27FC236}">
-                <a16:creationId xmlns:a16="http://schemas.microsoft.com/office/drawing/2014/main" id="{26D1925F-E70F-43C9-99E2-65F1F2AA2BF5}"/>
+                <a16:creationId xmlns:a16="http://schemas.microsoft.com/office/drawing/2014/main" id="{F264F501-3DDD-4BD2-BF86-077B433D034B}"/>
               </a:ext>
             </a:extLst>
           </p:cNvPr>
@@ -19730,7 +20362,7 @@
           <p:cNvPr id="19" name="2">
             <a:extLst xmlns:a="http://schemas.openxmlformats.org/drawingml/2006/main">
               <a:ext uri="{FF2B5EF4-FFF2-40B4-BE49-F238E27FC236}">
-                <a16:creationId xmlns:a16="http://schemas.microsoft.com/office/drawing/2014/main" id="{B30B977D-CDD5-4460-BB65-78457A3530A8}"/>
+                <a16:creationId xmlns:a16="http://schemas.microsoft.com/office/drawing/2014/main" id="{C4777029-6C7D-4C6B-8E5A-254CAAC99941}"/>
               </a:ext>
             </a:extLst>
           </p:cNvPr>
@@ -19888,7 +20520,7 @@
           <p:cNvPr id="20" name="">
             <a:extLst xmlns:a="http://schemas.openxmlformats.org/drawingml/2006/main">
               <a:ext uri="{FF2B5EF4-FFF2-40B4-BE49-F238E27FC236}">
-                <a16:creationId xmlns:a16="http://schemas.microsoft.com/office/drawing/2014/main" id="{47684001-0553-46E0-8468-AE580518EE5A}"/>
+                <a16:creationId xmlns:a16="http://schemas.microsoft.com/office/drawing/2014/main" id="{3BE728D2-061D-41A8-97DA-EE5B47DB9A3D}"/>
               </a:ext>
             </a:extLst>
           </p:cNvPr>
@@ -19921,7 +20553,7 @@
           <p:cNvPr id="21" name="3">
             <a:extLst xmlns:a="http://schemas.openxmlformats.org/drawingml/2006/main">
               <a:ext uri="{FF2B5EF4-FFF2-40B4-BE49-F238E27FC236}">
-                <a16:creationId xmlns:a16="http://schemas.microsoft.com/office/drawing/2014/main" id="{F3F8B0DE-AAFD-4231-A847-5B5FC89ABD3B}"/>
+                <a16:creationId xmlns:a16="http://schemas.microsoft.com/office/drawing/2014/main" id="{BCCDBD00-A28F-4B64-992E-3FEA68C1577A}"/>
               </a:ext>
             </a:extLst>
           </p:cNvPr>
@@ -20079,7 +20711,7 @@
           <p:cNvPr id="22" name="포함 열: 1, 2&#10;출력 폭: 2">
             <a:extLst xmlns:a="http://schemas.openxmlformats.org/drawingml/2006/main">
               <a:ext uri="{FF2B5EF4-FFF2-40B4-BE49-F238E27FC236}">
-                <a16:creationId xmlns:a16="http://schemas.microsoft.com/office/drawing/2014/main" id="{5FDB2A8C-0D3C-4BBD-92EF-569F1943D2E9}"/>
+                <a16:creationId xmlns:a16="http://schemas.microsoft.com/office/drawing/2014/main" id="{F05B8DB3-0E3B-4A1D-A9E9-E010BAA5C926}"/>
               </a:ext>
             </a:extLst>
           </p:cNvPr>
@@ -20260,7 +20892,7 @@
           <p:cNvPr id="23" name="답을 파일의 계약과 연결해 확인했다">
             <a:extLst xmlns:a="http://schemas.openxmlformats.org/drawingml/2006/main">
               <a:ext uri="{FF2B5EF4-FFF2-40B4-BE49-F238E27FC236}">
-                <a16:creationId xmlns:a16="http://schemas.microsoft.com/office/drawing/2014/main" id="{71C1A8FA-AAC9-4DD3-BAD8-472F5894A1CB}"/>
+                <a16:creationId xmlns:a16="http://schemas.microsoft.com/office/drawing/2014/main" id="{F1716A33-1913-4251-BDDC-DBD0EE5C9B40}"/>
               </a:ext>
             </a:extLst>
           </p:cNvPr>
@@ -20413,10 +21045,168 @@
           </a:p>
         </p:txBody>
       </p:sp>
+      <p:sp>
+        <p:nvSpPr>
+          <p:cNvPr id="24" name="Legacy module connection">
+            <a:extLst xmlns:a="http://schemas.openxmlformats.org/drawingml/2006/main">
+              <a:ext uri="{FF2B5EF4-FFF2-40B4-BE49-F238E27FC236}">
+                <a16:creationId xmlns:a16="http://schemas.microsoft.com/office/drawing/2014/main" id="{F99E7CE1-E91E-4C26-B197-5FC0277B1F54}"/>
+              </a:ext>
+            </a:extLst>
+          </p:cNvPr>
+          <p:cNvSpPr>
+            <a:spLocks xmlns:a="http://schemas.openxmlformats.org/drawingml/2006/main" noGrp="1"/>
+          </p:cNvSpPr>
+          <p:nvPr/>
+        </p:nvSpPr>
+        <p:spPr>
+          <a:xfrm xmlns:a="http://schemas.openxmlformats.org/drawingml/2006/main">
+            <a:off x="609600" y="6229350"/>
+            <a:ext cx="10972800" cy="171450"/>
+          </a:xfrm>
+          <a:prstGeom xmlns:a="http://schemas.openxmlformats.org/drawingml/2006/main" prst="rect">
+            <a:avLst/>
+          </a:prstGeom>
+          <a:noFill xmlns:a="http://schemas.openxmlformats.org/drawingml/2006/main"/>
+          <a:ln xmlns:a="http://schemas.openxmlformats.org/drawingml/2006/main" w="0">
+            <a:noFill/>
+          </a:ln>
+        </p:spPr>
+        <p:txBody>
+          <a:bodyPr xmlns:a="http://schemas.openxmlformats.org/drawingml/2006/main" wrap="none" lIns="0" tIns="0" rIns="0" bIns="0" anchor="ctr">
+            <a:noAutofit/>
+          </a:bodyPr>
+          <a:lstStyle xmlns:a="http://schemas.openxmlformats.org/drawingml/2006/main">
+            <a:defPPr algn="r">
+              <a:defRPr sz="1200" b="0">
+                <a:solidFill>
+                  <a:srgbClr val="4D5A68"/>
+                </a:solidFill>
+                <a:latin typeface="Malgun Gothic"/>
+                <a:ea typeface="Malgun Gothic"/>
+                <a:cs typeface="Malgun Gothic"/>
+              </a:defRPr>
+            </a:defPPr>
+            <a:lvl1pPr algn="r">
+              <a:defRPr sz="1200" b="0">
+                <a:solidFill>
+                  <a:srgbClr val="4D5A68"/>
+                </a:solidFill>
+                <a:latin typeface="Malgun Gothic"/>
+                <a:ea typeface="Malgun Gothic"/>
+                <a:cs typeface="Malgun Gothic"/>
+              </a:defRPr>
+            </a:lvl1pPr>
+            <a:lvl2pPr algn="r">
+              <a:defRPr sz="1200" b="0">
+                <a:solidFill>
+                  <a:srgbClr val="4D5A68"/>
+                </a:solidFill>
+                <a:latin typeface="Malgun Gothic"/>
+                <a:ea typeface="Malgun Gothic"/>
+                <a:cs typeface="Malgun Gothic"/>
+              </a:defRPr>
+            </a:lvl2pPr>
+            <a:lvl3pPr algn="r">
+              <a:defRPr sz="1200" b="0">
+                <a:solidFill>
+                  <a:srgbClr val="4D5A68"/>
+                </a:solidFill>
+                <a:latin typeface="Malgun Gothic"/>
+                <a:ea typeface="Malgun Gothic"/>
+                <a:cs typeface="Malgun Gothic"/>
+              </a:defRPr>
+            </a:lvl3pPr>
+            <a:lvl4pPr algn="r">
+              <a:defRPr sz="1200" b="0">
+                <a:solidFill>
+                  <a:srgbClr val="4D5A68"/>
+                </a:solidFill>
+                <a:latin typeface="Malgun Gothic"/>
+                <a:ea typeface="Malgun Gothic"/>
+                <a:cs typeface="Malgun Gothic"/>
+              </a:defRPr>
+            </a:lvl4pPr>
+            <a:lvl5pPr algn="r">
+              <a:defRPr sz="1200" b="0">
+                <a:solidFill>
+                  <a:srgbClr val="4D5A68"/>
+                </a:solidFill>
+                <a:latin typeface="Malgun Gothic"/>
+                <a:ea typeface="Malgun Gothic"/>
+                <a:cs typeface="Malgun Gothic"/>
+              </a:defRPr>
+            </a:lvl5pPr>
+            <a:lvl6pPr algn="r">
+              <a:defRPr sz="1200" b="0">
+                <a:solidFill>
+                  <a:srgbClr val="4D5A68"/>
+                </a:solidFill>
+                <a:latin typeface="Malgun Gothic"/>
+                <a:ea typeface="Malgun Gothic"/>
+                <a:cs typeface="Malgun Gothic"/>
+              </a:defRPr>
+            </a:lvl6pPr>
+            <a:lvl7pPr algn="r">
+              <a:defRPr sz="1200" b="0">
+                <a:solidFill>
+                  <a:srgbClr val="4D5A68"/>
+                </a:solidFill>
+                <a:latin typeface="Malgun Gothic"/>
+                <a:ea typeface="Malgun Gothic"/>
+                <a:cs typeface="Malgun Gothic"/>
+              </a:defRPr>
+            </a:lvl7pPr>
+            <a:lvl8pPr algn="r">
+              <a:defRPr sz="1200" b="0">
+                <a:solidFill>
+                  <a:srgbClr val="4D5A68"/>
+                </a:solidFill>
+                <a:latin typeface="Malgun Gothic"/>
+                <a:ea typeface="Malgun Gothic"/>
+                <a:cs typeface="Malgun Gothic"/>
+              </a:defRPr>
+            </a:lvl8pPr>
+            <a:lvl9pPr algn="r">
+              <a:defRPr sz="1200" b="0">
+                <a:solidFill>
+                  <a:srgbClr val="4D5A68"/>
+                </a:solidFill>
+                <a:latin typeface="Malgun Gothic"/>
+                <a:ea typeface="Malgun Gothic"/>
+                <a:cs typeface="Malgun Gothic"/>
+              </a:defRPr>
+            </a:lvl9pPr>
+          </a:lstStyle>
+          <a:p xmlns:a="http://schemas.openxmlformats.org/drawingml/2006/main">
+            <a:pPr algn="r">
+              <a:defRPr sz="1200" b="0">
+                <a:solidFill>
+                  <a:srgbClr val="4D5A68"/>
+                </a:solidFill>
+                <a:latin typeface="Malgun Gothic"/>
+                <a:ea typeface="Malgun Gothic"/>
+                <a:cs typeface="Malgun Gothic"/>
+              </a:defRPr>
+            </a:pPr>
+            <a:r>
+              <a:rPr sz="1200" b="0">
+                <a:solidFill>
+                  <a:srgbClr val="4D5A68"/>
+                </a:solidFill>
+                <a:latin typeface="Malgun Gothic"/>
+                <a:ea typeface="Malgun Gothic"/>
+                <a:cs typeface="Malgun Gothic"/>
+              </a:rPr>
+              <a:t>M 연계 · M2 · M6</a:t>
+            </a:r>
+          </a:p>
+        </p:txBody>
+      </p:sp>
     </p:spTree>
     <p:extLst>
       <p:ext uri="{BB962C8B-B14F-4D97-AF65-F5344CB8AC3E}">
-        <p14:creationId xmlns:p14="http://schemas.microsoft.com/office/powerpoint/2010/main" val="236469040"/>
+        <p14:creationId xmlns:p14="http://schemas.microsoft.com/office/powerpoint/2010/main" val="35518024"/>
       </p:ext>
     </p:extLst>
   </p:cSld>
@@ -20444,10 +21234,10 @@
       </p:grpSpPr>
       <p:sp>
         <p:nvSpPr>
-          <p:cNvPr id="24" name="ACT 2 · 두 Task의 문서 접근 비교">
+          <p:cNvPr id="25" name="ACT 2 · 두 Task의 문서 접근 비교">
             <a:extLst xmlns:a="http://schemas.openxmlformats.org/drawingml/2006/main">
               <a:ext uri="{FF2B5EF4-FFF2-40B4-BE49-F238E27FC236}">
-                <a16:creationId xmlns:a16="http://schemas.microsoft.com/office/drawing/2014/main" id="{04A5AB56-0D43-47F0-8073-88D17FE5FDDA}"/>
+                <a16:creationId xmlns:a16="http://schemas.microsoft.com/office/drawing/2014/main" id="{B2B42509-D191-4089-8868-41059B7AB233}"/>
               </a:ext>
             </a:extLst>
           </p:cNvPr>
@@ -20605,7 +21395,7 @@
           <p:cNvPr id="2" name="S35">
             <a:extLst xmlns:a="http://schemas.openxmlformats.org/drawingml/2006/main">
               <a:ext uri="{FF2B5EF4-FFF2-40B4-BE49-F238E27FC236}">
-                <a16:creationId xmlns:a16="http://schemas.microsoft.com/office/drawing/2014/main" id="{801FE131-DD97-42E7-84E4-0D784AC856E5}"/>
+                <a16:creationId xmlns:a16="http://schemas.microsoft.com/office/drawing/2014/main" id="{1B29F362-E559-44B2-A0C2-989A36F280B9}"/>
               </a:ext>
             </a:extLst>
           </p:cNvPr>
@@ -20763,7 +21553,7 @@
           <p:cNvPr id="3" name="Task별 접근은 달랐지만 완벽하지는 않다">
             <a:extLst xmlns:a="http://schemas.openxmlformats.org/drawingml/2006/main">
               <a:ext uri="{FF2B5EF4-FFF2-40B4-BE49-F238E27FC236}">
-                <a16:creationId xmlns:a16="http://schemas.microsoft.com/office/drawing/2014/main" id="{AC40988B-181F-436A-8440-4956DFCC19DC}"/>
+                <a16:creationId xmlns:a16="http://schemas.microsoft.com/office/drawing/2014/main" id="{803D70F4-F6A5-42E0-8DC2-DC9C7A049516}"/>
               </a:ext>
             </a:extLst>
           </p:cNvPr>
@@ -20921,7 +21711,7 @@
           <p:cNvPr id="4" name="">
             <a:extLst xmlns:a="http://schemas.openxmlformats.org/drawingml/2006/main">
               <a:ext uri="{FF2B5EF4-FFF2-40B4-BE49-F238E27FC236}">
-                <a16:creationId xmlns:a16="http://schemas.microsoft.com/office/drawing/2014/main" id="{7181700F-FE48-4158-AC7B-934B8E392987}"/>
+                <a16:creationId xmlns:a16="http://schemas.microsoft.com/office/drawing/2014/main" id="{EA3E7B59-62AC-46E5-8DFF-FE8A607112B8}"/>
               </a:ext>
             </a:extLst>
           </p:cNvPr>
@@ -20932,7 +21722,7 @@
         </p:nvSpPr>
         <p:spPr>
           <a:xfrm xmlns:a="http://schemas.openxmlformats.org/drawingml/2006/main">
-            <a:off x="609600" y="5829300"/>
+            <a:off x="609600" y="5753100"/>
             <a:ext cx="10972800" cy="0"/>
           </a:xfrm>
           <a:prstGeom xmlns:a="http://schemas.openxmlformats.org/drawingml/2006/main" prst="line">
@@ -20952,7 +21742,7 @@
           <p:cNvPr id="5" name="TRIAL-005A/B · 실제 접근 기록을 요약한 비교">
             <a:extLst xmlns:a="http://schemas.openxmlformats.org/drawingml/2006/main">
               <a:ext uri="{FF2B5EF4-FFF2-40B4-BE49-F238E27FC236}">
-                <a16:creationId xmlns:a16="http://schemas.microsoft.com/office/drawing/2014/main" id="{916F1839-F329-4250-89EE-CBE9696191AA}"/>
+                <a16:creationId xmlns:a16="http://schemas.microsoft.com/office/drawing/2014/main" id="{677053A5-07BB-4680-AD68-968FD9CADCB9}"/>
               </a:ext>
             </a:extLst>
           </p:cNvPr>
@@ -20963,8 +21753,8 @@
         </p:nvSpPr>
         <p:spPr>
           <a:xfrm xmlns:a="http://schemas.openxmlformats.org/drawingml/2006/main">
-            <a:off x="609600" y="5915025"/>
-            <a:ext cx="10972800" cy="247650"/>
+            <a:off x="609600" y="5791200"/>
+            <a:ext cx="10972800" cy="228600"/>
           </a:xfrm>
           <a:prstGeom xmlns:a="http://schemas.openxmlformats.org/drawingml/2006/main" prst="rect">
             <a:avLst/>
@@ -21110,7 +21900,7 @@
           <p:cNvPr id="6" name="완벽한 Routing 미입증 · 토큰 절약·성능 개선 미측정 · 실행 간 변동 존재">
             <a:extLst xmlns:a="http://schemas.openxmlformats.org/drawingml/2006/main">
               <a:ext uri="{FF2B5EF4-FFF2-40B4-BE49-F238E27FC236}">
-                <a16:creationId xmlns:a16="http://schemas.microsoft.com/office/drawing/2014/main" id="{7F5DFF7A-C702-44FE-85DE-D7F9D37048C9}"/>
+                <a16:creationId xmlns:a16="http://schemas.microsoft.com/office/drawing/2014/main" id="{9180A9DD-BB73-4C48-83CC-2B3BED93B45A}"/>
               </a:ext>
             </a:extLst>
           </p:cNvPr>
@@ -21121,7 +21911,7 @@
         </p:nvSpPr>
         <p:spPr>
           <a:xfrm xmlns:a="http://schemas.openxmlformats.org/drawingml/2006/main">
-            <a:off x="609600" y="6191250"/>
+            <a:off x="609600" y="6019800"/>
             <a:ext cx="10972800" cy="209550"/>
           </a:xfrm>
           <a:prstGeom xmlns:a="http://schemas.openxmlformats.org/drawingml/2006/main" prst="rect">
@@ -21268,7 +22058,7 @@
           <p:cNvPr id="7" name="같은 Repository에서 질문이 달랐다">
             <a:extLst xmlns:a="http://schemas.openxmlformats.org/drawingml/2006/main">
               <a:ext uri="{FF2B5EF4-FFF2-40B4-BE49-F238E27FC236}">
-                <a16:creationId xmlns:a16="http://schemas.microsoft.com/office/drawing/2014/main" id="{490C8803-89C0-4781-922D-ED18B1BB6F31}"/>
+                <a16:creationId xmlns:a16="http://schemas.microsoft.com/office/drawing/2014/main" id="{C71105A4-2FD0-41C6-ADE4-83CEEC3A2FBD}"/>
               </a:ext>
             </a:extLst>
           </p:cNvPr>
@@ -21426,7 +22216,7 @@
           <p:cNvPr id="8" name="문서">
             <a:extLst xmlns:a="http://schemas.openxmlformats.org/drawingml/2006/main">
               <a:ext uri="{FF2B5EF4-FFF2-40B4-BE49-F238E27FC236}">
-                <a16:creationId xmlns:a16="http://schemas.microsoft.com/office/drawing/2014/main" id="{39F4EF3C-603A-48DF-AB47-879AB5951D70}"/>
+                <a16:creationId xmlns:a16="http://schemas.microsoft.com/office/drawing/2014/main" id="{7C74DA7F-C9DC-4733-AF32-8EBB5BCACD4F}"/>
               </a:ext>
             </a:extLst>
           </p:cNvPr>
@@ -21584,7 +22374,7 @@
           <p:cNvPr id="9" name="A · crop 계약">
             <a:extLst xmlns:a="http://schemas.openxmlformats.org/drawingml/2006/main">
               <a:ext uri="{FF2B5EF4-FFF2-40B4-BE49-F238E27FC236}">
-                <a16:creationId xmlns:a16="http://schemas.microsoft.com/office/drawing/2014/main" id="{C62D673F-D65B-416E-BDF5-8AD7E546270C}"/>
+                <a16:creationId xmlns:a16="http://schemas.microsoft.com/office/drawing/2014/main" id="{B2F4472B-EB4D-4BDB-96C3-11482D98EE1E}"/>
               </a:ext>
             </a:extLst>
           </p:cNvPr>
@@ -21742,7 +22532,7 @@
           <p:cNvPr id="10" name="B · 실행 의존성">
             <a:extLst xmlns:a="http://schemas.openxmlformats.org/drawingml/2006/main">
               <a:ext uri="{FF2B5EF4-FFF2-40B4-BE49-F238E27FC236}">
-                <a16:creationId xmlns:a16="http://schemas.microsoft.com/office/drawing/2014/main" id="{8B2928E1-DB2D-4965-8D2B-7E39E33D954C}"/>
+                <a16:creationId xmlns:a16="http://schemas.microsoft.com/office/drawing/2014/main" id="{6070F0E9-05BE-4BBF-9DBD-D6EA22C6FEBE}"/>
               </a:ext>
             </a:extLst>
           </p:cNvPr>
@@ -21900,7 +22690,7 @@
           <p:cNvPr id="11" name="">
             <a:extLst xmlns:a="http://schemas.openxmlformats.org/drawingml/2006/main">
               <a:ext uri="{FF2B5EF4-FFF2-40B4-BE49-F238E27FC236}">
-                <a16:creationId xmlns:a16="http://schemas.microsoft.com/office/drawing/2014/main" id="{06B0877A-27D7-4598-A852-6BB06C593C99}"/>
+                <a16:creationId xmlns:a16="http://schemas.microsoft.com/office/drawing/2014/main" id="{851ACC36-669E-4597-87DA-FFC62266C1F7}"/>
               </a:ext>
             </a:extLst>
           </p:cNvPr>
@@ -21931,7 +22721,7 @@
           <p:cNvPr id="12" name="image-contracts.md">
             <a:extLst xmlns:a="http://schemas.openxmlformats.org/drawingml/2006/main">
               <a:ext uri="{FF2B5EF4-FFF2-40B4-BE49-F238E27FC236}">
-                <a16:creationId xmlns:a16="http://schemas.microsoft.com/office/drawing/2014/main" id="{ADFDE182-5F9E-4564-8C69-809D4C9BC1A4}"/>
+                <a16:creationId xmlns:a16="http://schemas.microsoft.com/office/drawing/2014/main" id="{8DCDB674-77CD-4420-BF48-5D81EBACAA59}"/>
               </a:ext>
             </a:extLst>
           </p:cNvPr>
@@ -22089,7 +22879,7 @@
           <p:cNvPr id="13" name="읽음">
             <a:extLst xmlns:a="http://schemas.openxmlformats.org/drawingml/2006/main">
               <a:ext uri="{FF2B5EF4-FFF2-40B4-BE49-F238E27FC236}">
-                <a16:creationId xmlns:a16="http://schemas.microsoft.com/office/drawing/2014/main" id="{EBB8F1B8-1AF2-4784-9B4B-22F373E86452}"/>
+                <a16:creationId xmlns:a16="http://schemas.microsoft.com/office/drawing/2014/main" id="{745E904A-8715-4AAB-B771-EB369AB7EF17}"/>
               </a:ext>
             </a:extLst>
           </p:cNvPr>
@@ -22247,7 +23037,7 @@
           <p:cNvPr id="14" name="읽지 않음">
             <a:extLst xmlns:a="http://schemas.openxmlformats.org/drawingml/2006/main">
               <a:ext uri="{FF2B5EF4-FFF2-40B4-BE49-F238E27FC236}">
-                <a16:creationId xmlns:a16="http://schemas.microsoft.com/office/drawing/2014/main" id="{C15FC24C-35BA-415E-8ABA-A59A38CDC6C7}"/>
+                <a16:creationId xmlns:a16="http://schemas.microsoft.com/office/drawing/2014/main" id="{4D6899A2-3CE7-4D65-9534-A788AA050320}"/>
               </a:ext>
             </a:extLst>
           </p:cNvPr>
@@ -22405,7 +23195,7 @@
           <p:cNvPr id="15" name="">
             <a:extLst xmlns:a="http://schemas.openxmlformats.org/drawingml/2006/main">
               <a:ext uri="{FF2B5EF4-FFF2-40B4-BE49-F238E27FC236}">
-                <a16:creationId xmlns:a16="http://schemas.microsoft.com/office/drawing/2014/main" id="{A71D3762-20AD-42C5-9828-2E270E01600C}"/>
+                <a16:creationId xmlns:a16="http://schemas.microsoft.com/office/drawing/2014/main" id="{9D0F3327-245F-4FA6-B185-DCB3584AD2CE}"/>
               </a:ext>
             </a:extLst>
           </p:cNvPr>
@@ -22436,7 +23226,7 @@
           <p:cNvPr id="16" name="architecture.md">
             <a:extLst xmlns:a="http://schemas.openxmlformats.org/drawingml/2006/main">
               <a:ext uri="{FF2B5EF4-FFF2-40B4-BE49-F238E27FC236}">
-                <a16:creationId xmlns:a16="http://schemas.microsoft.com/office/drawing/2014/main" id="{057917D6-D34A-4287-AD59-C10C4EEEE03B}"/>
+                <a16:creationId xmlns:a16="http://schemas.microsoft.com/office/drawing/2014/main" id="{69C416F5-3F20-4717-A708-B4CD688DE240}"/>
               </a:ext>
             </a:extLst>
           </p:cNvPr>
@@ -22594,7 +23384,7 @@
           <p:cNvPr id="17" name="읽음">
             <a:extLst xmlns:a="http://schemas.openxmlformats.org/drawingml/2006/main">
               <a:ext uri="{FF2B5EF4-FFF2-40B4-BE49-F238E27FC236}">
-                <a16:creationId xmlns:a16="http://schemas.microsoft.com/office/drawing/2014/main" id="{1639EA5B-54F6-4F00-B9C3-CB6C62E9C8EE}"/>
+                <a16:creationId xmlns:a16="http://schemas.microsoft.com/office/drawing/2014/main" id="{C91A8F05-29BE-4513-9055-B49A26CB6A71}"/>
               </a:ext>
             </a:extLst>
           </p:cNvPr>
@@ -22752,7 +23542,7 @@
           <p:cNvPr id="18" name="읽음">
             <a:extLst xmlns:a="http://schemas.openxmlformats.org/drawingml/2006/main">
               <a:ext uri="{FF2B5EF4-FFF2-40B4-BE49-F238E27FC236}">
-                <a16:creationId xmlns:a16="http://schemas.microsoft.com/office/drawing/2014/main" id="{1A5CBA30-3AFB-47FC-A8EA-E15F6BDD1398}"/>
+                <a16:creationId xmlns:a16="http://schemas.microsoft.com/office/drawing/2014/main" id="{5682F7A6-615C-4808-9E2A-660759DC4AF6}"/>
               </a:ext>
             </a:extLst>
           </p:cNvPr>
@@ -22910,7 +23700,7 @@
           <p:cNvPr id="19" name="">
             <a:extLst xmlns:a="http://schemas.openxmlformats.org/drawingml/2006/main">
               <a:ext uri="{FF2B5EF4-FFF2-40B4-BE49-F238E27FC236}">
-                <a16:creationId xmlns:a16="http://schemas.microsoft.com/office/drawing/2014/main" id="{967E3E3E-46B5-499E-8D41-B17CF83FCB8D}"/>
+                <a16:creationId xmlns:a16="http://schemas.microsoft.com/office/drawing/2014/main" id="{3590DF77-55E2-4E5B-85D8-C07F3E9E9022}"/>
               </a:ext>
             </a:extLst>
           </p:cNvPr>
@@ -22941,7 +23731,7 @@
           <p:cNvPr id="20" name="testing.md">
             <a:extLst xmlns:a="http://schemas.openxmlformats.org/drawingml/2006/main">
               <a:ext uri="{FF2B5EF4-FFF2-40B4-BE49-F238E27FC236}">
-                <a16:creationId xmlns:a16="http://schemas.microsoft.com/office/drawing/2014/main" id="{84E51FC5-3451-4969-89E5-C58C4B6005D8}"/>
+                <a16:creationId xmlns:a16="http://schemas.microsoft.com/office/drawing/2014/main" id="{CBF868B8-836C-4172-A0B3-981F8D0195B7}"/>
               </a:ext>
             </a:extLst>
           </p:cNvPr>
@@ -23099,7 +23889,7 @@
           <p:cNvPr id="21" name="최종 실행에서 읽음">
             <a:extLst xmlns:a="http://schemas.openxmlformats.org/drawingml/2006/main">
               <a:ext uri="{FF2B5EF4-FFF2-40B4-BE49-F238E27FC236}">
-                <a16:creationId xmlns:a16="http://schemas.microsoft.com/office/drawing/2014/main" id="{2620FC38-BF72-4F91-8E58-609DA5E06A23}"/>
+                <a16:creationId xmlns:a16="http://schemas.microsoft.com/office/drawing/2014/main" id="{090379EA-E431-4759-8559-09CDB7241FFB}"/>
               </a:ext>
             </a:extLst>
           </p:cNvPr>
@@ -23257,7 +24047,7 @@
           <p:cNvPr id="22" name="읽지 않음">
             <a:extLst xmlns:a="http://schemas.openxmlformats.org/drawingml/2006/main">
               <a:ext uri="{FF2B5EF4-FFF2-40B4-BE49-F238E27FC236}">
-                <a16:creationId xmlns:a16="http://schemas.microsoft.com/office/drawing/2014/main" id="{CE3E6039-1507-46D3-8A90-3C6978436514}"/>
+                <a16:creationId xmlns:a16="http://schemas.microsoft.com/office/drawing/2014/main" id="{77F95BAB-E9E2-470B-950E-7CBAF06B2B25}"/>
               </a:ext>
             </a:extLst>
           </p:cNvPr>
@@ -23415,7 +24205,7 @@
           <p:cNvPr id="23" name="A에는 더 넓은 읽기도 존재 · B는 설정·README·source도 확인">
             <a:extLst xmlns:a="http://schemas.openxmlformats.org/drawingml/2006/main">
               <a:ext uri="{FF2B5EF4-FFF2-40B4-BE49-F238E27FC236}">
-                <a16:creationId xmlns:a16="http://schemas.microsoft.com/office/drawing/2014/main" id="{9E58C67B-A677-4670-83E2-65FB2AB8821A}"/>
+                <a16:creationId xmlns:a16="http://schemas.microsoft.com/office/drawing/2014/main" id="{A36BCA7A-2AC9-47D0-AE3C-A1D747AC628F}"/>
               </a:ext>
             </a:extLst>
           </p:cNvPr>
@@ -23568,10 +24358,168 @@
           </a:p>
         </p:txBody>
       </p:sp>
+      <p:sp>
+        <p:nvSpPr>
+          <p:cNvPr id="24" name="Legacy module connection">
+            <a:extLst xmlns:a="http://schemas.openxmlformats.org/drawingml/2006/main">
+              <a:ext uri="{FF2B5EF4-FFF2-40B4-BE49-F238E27FC236}">
+                <a16:creationId xmlns:a16="http://schemas.microsoft.com/office/drawing/2014/main" id="{BFB7E6CE-6529-400B-AC8F-6455959122A2}"/>
+              </a:ext>
+            </a:extLst>
+          </p:cNvPr>
+          <p:cNvSpPr>
+            <a:spLocks xmlns:a="http://schemas.openxmlformats.org/drawingml/2006/main" noGrp="1"/>
+          </p:cNvSpPr>
+          <p:nvPr/>
+        </p:nvSpPr>
+        <p:spPr>
+          <a:xfrm xmlns:a="http://schemas.openxmlformats.org/drawingml/2006/main">
+            <a:off x="609600" y="6229350"/>
+            <a:ext cx="10972800" cy="171450"/>
+          </a:xfrm>
+          <a:prstGeom xmlns:a="http://schemas.openxmlformats.org/drawingml/2006/main" prst="rect">
+            <a:avLst/>
+          </a:prstGeom>
+          <a:noFill xmlns:a="http://schemas.openxmlformats.org/drawingml/2006/main"/>
+          <a:ln xmlns:a="http://schemas.openxmlformats.org/drawingml/2006/main" w="0">
+            <a:noFill/>
+          </a:ln>
+        </p:spPr>
+        <p:txBody>
+          <a:bodyPr xmlns:a="http://schemas.openxmlformats.org/drawingml/2006/main" wrap="none" lIns="0" tIns="0" rIns="0" bIns="0" anchor="ctr">
+            <a:noAutofit/>
+          </a:bodyPr>
+          <a:lstStyle xmlns:a="http://schemas.openxmlformats.org/drawingml/2006/main">
+            <a:defPPr algn="r">
+              <a:defRPr sz="1200" b="0">
+                <a:solidFill>
+                  <a:srgbClr val="4D5A68"/>
+                </a:solidFill>
+                <a:latin typeface="Malgun Gothic"/>
+                <a:ea typeface="Malgun Gothic"/>
+                <a:cs typeface="Malgun Gothic"/>
+              </a:defRPr>
+            </a:defPPr>
+            <a:lvl1pPr algn="r">
+              <a:defRPr sz="1200" b="0">
+                <a:solidFill>
+                  <a:srgbClr val="4D5A68"/>
+                </a:solidFill>
+                <a:latin typeface="Malgun Gothic"/>
+                <a:ea typeface="Malgun Gothic"/>
+                <a:cs typeface="Malgun Gothic"/>
+              </a:defRPr>
+            </a:lvl1pPr>
+            <a:lvl2pPr algn="r">
+              <a:defRPr sz="1200" b="0">
+                <a:solidFill>
+                  <a:srgbClr val="4D5A68"/>
+                </a:solidFill>
+                <a:latin typeface="Malgun Gothic"/>
+                <a:ea typeface="Malgun Gothic"/>
+                <a:cs typeface="Malgun Gothic"/>
+              </a:defRPr>
+            </a:lvl2pPr>
+            <a:lvl3pPr algn="r">
+              <a:defRPr sz="1200" b="0">
+                <a:solidFill>
+                  <a:srgbClr val="4D5A68"/>
+                </a:solidFill>
+                <a:latin typeface="Malgun Gothic"/>
+                <a:ea typeface="Malgun Gothic"/>
+                <a:cs typeface="Malgun Gothic"/>
+              </a:defRPr>
+            </a:lvl3pPr>
+            <a:lvl4pPr algn="r">
+              <a:defRPr sz="1200" b="0">
+                <a:solidFill>
+                  <a:srgbClr val="4D5A68"/>
+                </a:solidFill>
+                <a:latin typeface="Malgun Gothic"/>
+                <a:ea typeface="Malgun Gothic"/>
+                <a:cs typeface="Malgun Gothic"/>
+              </a:defRPr>
+            </a:lvl4pPr>
+            <a:lvl5pPr algn="r">
+              <a:defRPr sz="1200" b="0">
+                <a:solidFill>
+                  <a:srgbClr val="4D5A68"/>
+                </a:solidFill>
+                <a:latin typeface="Malgun Gothic"/>
+                <a:ea typeface="Malgun Gothic"/>
+                <a:cs typeface="Malgun Gothic"/>
+              </a:defRPr>
+            </a:lvl5pPr>
+            <a:lvl6pPr algn="r">
+              <a:defRPr sz="1200" b="0">
+                <a:solidFill>
+                  <a:srgbClr val="4D5A68"/>
+                </a:solidFill>
+                <a:latin typeface="Malgun Gothic"/>
+                <a:ea typeface="Malgun Gothic"/>
+                <a:cs typeface="Malgun Gothic"/>
+              </a:defRPr>
+            </a:lvl6pPr>
+            <a:lvl7pPr algn="r">
+              <a:defRPr sz="1200" b="0">
+                <a:solidFill>
+                  <a:srgbClr val="4D5A68"/>
+                </a:solidFill>
+                <a:latin typeface="Malgun Gothic"/>
+                <a:ea typeface="Malgun Gothic"/>
+                <a:cs typeface="Malgun Gothic"/>
+              </a:defRPr>
+            </a:lvl7pPr>
+            <a:lvl8pPr algn="r">
+              <a:defRPr sz="1200" b="0">
+                <a:solidFill>
+                  <a:srgbClr val="4D5A68"/>
+                </a:solidFill>
+                <a:latin typeface="Malgun Gothic"/>
+                <a:ea typeface="Malgun Gothic"/>
+                <a:cs typeface="Malgun Gothic"/>
+              </a:defRPr>
+            </a:lvl8pPr>
+            <a:lvl9pPr algn="r">
+              <a:defRPr sz="1200" b="0">
+                <a:solidFill>
+                  <a:srgbClr val="4D5A68"/>
+                </a:solidFill>
+                <a:latin typeface="Malgun Gothic"/>
+                <a:ea typeface="Malgun Gothic"/>
+                <a:cs typeface="Malgun Gothic"/>
+              </a:defRPr>
+            </a:lvl9pPr>
+          </a:lstStyle>
+          <a:p xmlns:a="http://schemas.openxmlformats.org/drawingml/2006/main">
+            <a:pPr algn="r">
+              <a:defRPr sz="1200" b="0">
+                <a:solidFill>
+                  <a:srgbClr val="4D5A68"/>
+                </a:solidFill>
+                <a:latin typeface="Malgun Gothic"/>
+                <a:ea typeface="Malgun Gothic"/>
+                <a:cs typeface="Malgun Gothic"/>
+              </a:defRPr>
+            </a:pPr>
+            <a:r>
+              <a:rPr sz="1200" b="0">
+                <a:solidFill>
+                  <a:srgbClr val="4D5A68"/>
+                </a:solidFill>
+                <a:latin typeface="Malgun Gothic"/>
+                <a:ea typeface="Malgun Gothic"/>
+                <a:cs typeface="Malgun Gothic"/>
+              </a:rPr>
+              <a:t>M 연계 · 신규 확장</a:t>
+            </a:r>
+          </a:p>
+        </p:txBody>
+      </p:sp>
     </p:spTree>
     <p:extLst>
       <p:ext uri="{BB962C8B-B14F-4D97-AF65-F5344CB8AC3E}">
-        <p14:creationId xmlns:p14="http://schemas.microsoft.com/office/powerpoint/2010/main" val="78806845"/>
+        <p14:creationId xmlns:p14="http://schemas.microsoft.com/office/powerpoint/2010/main" val="343095936"/>
       </p:ext>
     </p:extLst>
   </p:cSld>
@@ -23599,10 +24547,10 @@
       </p:grpSpPr>
       <p:sp>
         <p:nvSpPr>
-          <p:cNvPr id="14" name="ACT 2 · 다음 문제로 넘어가기">
+          <p:cNvPr id="15" name="ACT 2 · 다음 문제로 넘어가기">
             <a:extLst xmlns:a="http://schemas.openxmlformats.org/drawingml/2006/main">
               <a:ext uri="{FF2B5EF4-FFF2-40B4-BE49-F238E27FC236}">
-                <a16:creationId xmlns:a16="http://schemas.microsoft.com/office/drawing/2014/main" id="{CF83008D-C2FB-4EB8-8847-9B518167411E}"/>
+                <a16:creationId xmlns:a16="http://schemas.microsoft.com/office/drawing/2014/main" id="{23F2E0D0-A0E5-46F2-8E6B-887943BDCABF}"/>
               </a:ext>
             </a:extLst>
           </p:cNvPr>
@@ -23760,7 +24708,7 @@
           <p:cNvPr id="2" name="S36">
             <a:extLst xmlns:a="http://schemas.openxmlformats.org/drawingml/2006/main">
               <a:ext uri="{FF2B5EF4-FFF2-40B4-BE49-F238E27FC236}">
-                <a16:creationId xmlns:a16="http://schemas.microsoft.com/office/drawing/2014/main" id="{DBAB9CC3-15D6-4020-BEBF-913560696421}"/>
+                <a16:creationId xmlns:a16="http://schemas.microsoft.com/office/drawing/2014/main" id="{77BFD1D5-32CB-48FF-B3C1-CD059CB16F6B}"/>
               </a:ext>
             </a:extLst>
           </p:cNvPr>
@@ -23918,7 +24866,7 @@
           <p:cNvPr id="3" name="지식은 정리됐지만 절차는 반복된다">
             <a:extLst xmlns:a="http://schemas.openxmlformats.org/drawingml/2006/main">
               <a:ext uri="{FF2B5EF4-FFF2-40B4-BE49-F238E27FC236}">
-                <a16:creationId xmlns:a16="http://schemas.microsoft.com/office/drawing/2014/main" id="{1355BD05-654B-4957-A41D-DD547DD3D69D}"/>
+                <a16:creationId xmlns:a16="http://schemas.microsoft.com/office/drawing/2014/main" id="{3D4CF1AF-FE02-47C6-965F-3850767E7230}"/>
               </a:ext>
             </a:extLst>
           </p:cNvPr>
@@ -24076,7 +25024,7 @@
           <p:cNvPr id="4" name="">
             <a:extLst xmlns:a="http://schemas.openxmlformats.org/drawingml/2006/main">
               <a:ext uri="{FF2B5EF4-FFF2-40B4-BE49-F238E27FC236}">
-                <a16:creationId xmlns:a16="http://schemas.microsoft.com/office/drawing/2014/main" id="{A26D295F-1A23-46CF-BBDC-FD8515572282}"/>
+                <a16:creationId xmlns:a16="http://schemas.microsoft.com/office/drawing/2014/main" id="{022AA1A0-F277-448B-A152-01BDD0743D30}"/>
               </a:ext>
             </a:extLst>
           </p:cNvPr>
@@ -24087,7 +25035,7 @@
         </p:nvSpPr>
         <p:spPr>
           <a:xfrm xmlns:a="http://schemas.openxmlformats.org/drawingml/2006/main">
-            <a:off x="609600" y="5829300"/>
+            <a:off x="609600" y="5753100"/>
             <a:ext cx="10972800" cy="0"/>
           </a:xfrm>
           <a:prstGeom xmlns:a="http://schemas.openxmlformats.org/drawingml/2006/main" prst="line">
@@ -24107,7 +25055,7 @@
           <p:cNvPr id="5" name="Project Context 정리 + TRIAL-006/007의 반복 절차 · 기록 요약과 교육용 해석">
             <a:extLst xmlns:a="http://schemas.openxmlformats.org/drawingml/2006/main">
               <a:ext uri="{FF2B5EF4-FFF2-40B4-BE49-F238E27FC236}">
-                <a16:creationId xmlns:a16="http://schemas.microsoft.com/office/drawing/2014/main" id="{94C3CE02-5559-4B7A-A71D-B1B3CAB7962D}"/>
+                <a16:creationId xmlns:a16="http://schemas.microsoft.com/office/drawing/2014/main" id="{C08ECE7D-ACCD-4F9C-977E-B27968CDACC3}"/>
               </a:ext>
             </a:extLst>
           </p:cNvPr>
@@ -24118,8 +25066,8 @@
         </p:nvSpPr>
         <p:spPr>
           <a:xfrm xmlns:a="http://schemas.openxmlformats.org/drawingml/2006/main">
-            <a:off x="609600" y="5915025"/>
-            <a:ext cx="10972800" cy="247650"/>
+            <a:off x="609600" y="5791200"/>
+            <a:ext cx="10972800" cy="228600"/>
           </a:xfrm>
           <a:prstGeom xmlns:a="http://schemas.openxmlformats.org/drawingml/2006/main" prst="rect">
             <a:avLst/>
@@ -24265,7 +25213,7 @@
           <p:cNvPr id="6" name="절차가 반복된 원인을 Prompt만으로 분리하지 않음">
             <a:extLst xmlns:a="http://schemas.openxmlformats.org/drawingml/2006/main">
               <a:ext uri="{FF2B5EF4-FFF2-40B4-BE49-F238E27FC236}">
-                <a16:creationId xmlns:a16="http://schemas.microsoft.com/office/drawing/2014/main" id="{0C4A462E-1294-417D-822A-983068C08880}"/>
+                <a16:creationId xmlns:a16="http://schemas.microsoft.com/office/drawing/2014/main" id="{7B02F2AD-6E2B-460E-9169-F7D70153BA6F}"/>
               </a:ext>
             </a:extLst>
           </p:cNvPr>
@@ -24276,7 +25224,7 @@
         </p:nvSpPr>
         <p:spPr>
           <a:xfrm xmlns:a="http://schemas.openxmlformats.org/drawingml/2006/main">
-            <a:off x="609600" y="6191250"/>
+            <a:off x="609600" y="6019800"/>
             <a:ext cx="10972800" cy="209550"/>
           </a:xfrm>
           <a:prstGeom xmlns:a="http://schemas.openxmlformats.org/drawingml/2006/main" prst="rect">
@@ -24423,7 +25371,7 @@
           <p:cNvPr id="7" name="정리한 것">
             <a:extLst xmlns:a="http://schemas.openxmlformats.org/drawingml/2006/main">
               <a:ext uri="{FF2B5EF4-FFF2-40B4-BE49-F238E27FC236}">
-                <a16:creationId xmlns:a16="http://schemas.microsoft.com/office/drawing/2014/main" id="{6F6FBB32-15C6-4906-9A84-8D483F8BDB25}"/>
+                <a16:creationId xmlns:a16="http://schemas.microsoft.com/office/drawing/2014/main" id="{696ECE32-5700-4423-8B08-2AE44CBB077D}"/>
               </a:ext>
             </a:extLst>
           </p:cNvPr>
@@ -24581,7 +25529,7 @@
           <p:cNvPr id="8" name="아직 반복되는 것">
             <a:extLst xmlns:a="http://schemas.openxmlformats.org/drawingml/2006/main">
               <a:ext uri="{FF2B5EF4-FFF2-40B4-BE49-F238E27FC236}">
-                <a16:creationId xmlns:a16="http://schemas.microsoft.com/office/drawing/2014/main" id="{1580596F-DCE4-4D33-BB00-B1B082543E5C}"/>
+                <a16:creationId xmlns:a16="http://schemas.microsoft.com/office/drawing/2014/main" id="{8244243C-A851-4960-93F9-68D7F8055B65}"/>
               </a:ext>
             </a:extLst>
           </p:cNvPr>
@@ -24739,7 +25687,7 @@
           <p:cNvPr id="9" name="">
             <a:extLst xmlns:a="http://schemas.openxmlformats.org/drawingml/2006/main">
               <a:ext uri="{FF2B5EF4-FFF2-40B4-BE49-F238E27FC236}">
-                <a16:creationId xmlns:a16="http://schemas.microsoft.com/office/drawing/2014/main" id="{F0928711-3B0C-4A81-9ACC-CB8E7F934713}"/>
+                <a16:creationId xmlns:a16="http://schemas.microsoft.com/office/drawing/2014/main" id="{A0C11EA7-FFF6-457C-A1F9-9FFB8EE09FBE}"/>
               </a:ext>
             </a:extLst>
           </p:cNvPr>
@@ -24770,7 +25718,7 @@
           <p:cNvPr id="10" name="">
             <a:extLst xmlns:a="http://schemas.openxmlformats.org/drawingml/2006/main">
               <a:ext uri="{FF2B5EF4-FFF2-40B4-BE49-F238E27FC236}">
-                <a16:creationId xmlns:a16="http://schemas.microsoft.com/office/drawing/2014/main" id="{598934CB-CE37-472C-89CB-F8C88F7EFBAC}"/>
+                <a16:creationId xmlns:a16="http://schemas.microsoft.com/office/drawing/2014/main" id="{E60AA313-0F0D-446D-A4A0-38F5A312A891}"/>
               </a:ext>
             </a:extLst>
           </p:cNvPr>
@@ -24801,7 +25749,7 @@
           <p:cNvPr id="11" name="현재 목표는 Prompt에&#10;공통 사실은 Project Context에&#10;상세 정보는 Routing으로">
             <a:extLst xmlns:a="http://schemas.openxmlformats.org/drawingml/2006/main">
               <a:ext uri="{FF2B5EF4-FFF2-40B4-BE49-F238E27FC236}">
-                <a16:creationId xmlns:a16="http://schemas.microsoft.com/office/drawing/2014/main" id="{377F3E50-F927-4433-972A-1A091EA69F01}"/>
+                <a16:creationId xmlns:a16="http://schemas.microsoft.com/office/drawing/2014/main" id="{137AA26C-AA07-4728-BA6D-12A7F18E288C}"/>
               </a:ext>
             </a:extLst>
           </p:cNvPr>
@@ -25005,7 +25953,7 @@
           <p:cNvPr id="12" name="먼저 측정하고&#10;조사한 뒤 변경하고&#10;같은 조건으로 확인해줘">
             <a:extLst xmlns:a="http://schemas.openxmlformats.org/drawingml/2006/main">
               <a:ext uri="{FF2B5EF4-FFF2-40B4-BE49-F238E27FC236}">
-                <a16:creationId xmlns:a16="http://schemas.microsoft.com/office/drawing/2014/main" id="{5FFD8D00-99F5-418B-B04E-9E4C94C00B9C}"/>
+                <a16:creationId xmlns:a16="http://schemas.microsoft.com/office/drawing/2014/main" id="{7ABAB425-7223-49DB-ABB7-8156BBC0E01E}"/>
               </a:ext>
             </a:extLst>
           </p:cNvPr>
@@ -25209,7 +26157,7 @@
           <p:cNvPr id="13" name="같은 작업 절차도 다시 써야 할까?">
             <a:extLst xmlns:a="http://schemas.openxmlformats.org/drawingml/2006/main">
               <a:ext uri="{FF2B5EF4-FFF2-40B4-BE49-F238E27FC236}">
-                <a16:creationId xmlns:a16="http://schemas.microsoft.com/office/drawing/2014/main" id="{CE685C2C-6E93-400F-A5D4-A4E9FF183E48}"/>
+                <a16:creationId xmlns:a16="http://schemas.microsoft.com/office/drawing/2014/main" id="{5EE16F4E-1183-444C-9B8E-6B2F0C4A7120}"/>
               </a:ext>
             </a:extLst>
           </p:cNvPr>
@@ -25362,10 +26310,168 @@
           </a:p>
         </p:txBody>
       </p:sp>
+      <p:sp>
+        <p:nvSpPr>
+          <p:cNvPr id="14" name="Legacy module connection">
+            <a:extLst xmlns:a="http://schemas.openxmlformats.org/drawingml/2006/main">
+              <a:ext uri="{FF2B5EF4-FFF2-40B4-BE49-F238E27FC236}">
+                <a16:creationId xmlns:a16="http://schemas.microsoft.com/office/drawing/2014/main" id="{6AA808C3-4846-4994-9FFC-A6AE5B0B9D71}"/>
+              </a:ext>
+            </a:extLst>
+          </p:cNvPr>
+          <p:cNvSpPr>
+            <a:spLocks xmlns:a="http://schemas.openxmlformats.org/drawingml/2006/main" noGrp="1"/>
+          </p:cNvSpPr>
+          <p:nvPr/>
+        </p:nvSpPr>
+        <p:spPr>
+          <a:xfrm xmlns:a="http://schemas.openxmlformats.org/drawingml/2006/main">
+            <a:off x="609600" y="6229350"/>
+            <a:ext cx="10972800" cy="171450"/>
+          </a:xfrm>
+          <a:prstGeom xmlns:a="http://schemas.openxmlformats.org/drawingml/2006/main" prst="rect">
+            <a:avLst/>
+          </a:prstGeom>
+          <a:noFill xmlns:a="http://schemas.openxmlformats.org/drawingml/2006/main"/>
+          <a:ln xmlns:a="http://schemas.openxmlformats.org/drawingml/2006/main" w="0">
+            <a:noFill/>
+          </a:ln>
+        </p:spPr>
+        <p:txBody>
+          <a:bodyPr xmlns:a="http://schemas.openxmlformats.org/drawingml/2006/main" wrap="none" lIns="0" tIns="0" rIns="0" bIns="0" anchor="ctr">
+            <a:noAutofit/>
+          </a:bodyPr>
+          <a:lstStyle xmlns:a="http://schemas.openxmlformats.org/drawingml/2006/main">
+            <a:defPPr algn="r">
+              <a:defRPr sz="1200" b="0">
+                <a:solidFill>
+                  <a:srgbClr val="4D5A68"/>
+                </a:solidFill>
+                <a:latin typeface="Malgun Gothic"/>
+                <a:ea typeface="Malgun Gothic"/>
+                <a:cs typeface="Malgun Gothic"/>
+              </a:defRPr>
+            </a:defPPr>
+            <a:lvl1pPr algn="r">
+              <a:defRPr sz="1200" b="0">
+                <a:solidFill>
+                  <a:srgbClr val="4D5A68"/>
+                </a:solidFill>
+                <a:latin typeface="Malgun Gothic"/>
+                <a:ea typeface="Malgun Gothic"/>
+                <a:cs typeface="Malgun Gothic"/>
+              </a:defRPr>
+            </a:lvl1pPr>
+            <a:lvl2pPr algn="r">
+              <a:defRPr sz="1200" b="0">
+                <a:solidFill>
+                  <a:srgbClr val="4D5A68"/>
+                </a:solidFill>
+                <a:latin typeface="Malgun Gothic"/>
+                <a:ea typeface="Malgun Gothic"/>
+                <a:cs typeface="Malgun Gothic"/>
+              </a:defRPr>
+            </a:lvl2pPr>
+            <a:lvl3pPr algn="r">
+              <a:defRPr sz="1200" b="0">
+                <a:solidFill>
+                  <a:srgbClr val="4D5A68"/>
+                </a:solidFill>
+                <a:latin typeface="Malgun Gothic"/>
+                <a:ea typeface="Malgun Gothic"/>
+                <a:cs typeface="Malgun Gothic"/>
+              </a:defRPr>
+            </a:lvl3pPr>
+            <a:lvl4pPr algn="r">
+              <a:defRPr sz="1200" b="0">
+                <a:solidFill>
+                  <a:srgbClr val="4D5A68"/>
+                </a:solidFill>
+                <a:latin typeface="Malgun Gothic"/>
+                <a:ea typeface="Malgun Gothic"/>
+                <a:cs typeface="Malgun Gothic"/>
+              </a:defRPr>
+            </a:lvl4pPr>
+            <a:lvl5pPr algn="r">
+              <a:defRPr sz="1200" b="0">
+                <a:solidFill>
+                  <a:srgbClr val="4D5A68"/>
+                </a:solidFill>
+                <a:latin typeface="Malgun Gothic"/>
+                <a:ea typeface="Malgun Gothic"/>
+                <a:cs typeface="Malgun Gothic"/>
+              </a:defRPr>
+            </a:lvl5pPr>
+            <a:lvl6pPr algn="r">
+              <a:defRPr sz="1200" b="0">
+                <a:solidFill>
+                  <a:srgbClr val="4D5A68"/>
+                </a:solidFill>
+                <a:latin typeface="Malgun Gothic"/>
+                <a:ea typeface="Malgun Gothic"/>
+                <a:cs typeface="Malgun Gothic"/>
+              </a:defRPr>
+            </a:lvl6pPr>
+            <a:lvl7pPr algn="r">
+              <a:defRPr sz="1200" b="0">
+                <a:solidFill>
+                  <a:srgbClr val="4D5A68"/>
+                </a:solidFill>
+                <a:latin typeface="Malgun Gothic"/>
+                <a:ea typeface="Malgun Gothic"/>
+                <a:cs typeface="Malgun Gothic"/>
+              </a:defRPr>
+            </a:lvl7pPr>
+            <a:lvl8pPr algn="r">
+              <a:defRPr sz="1200" b="0">
+                <a:solidFill>
+                  <a:srgbClr val="4D5A68"/>
+                </a:solidFill>
+                <a:latin typeface="Malgun Gothic"/>
+                <a:ea typeface="Malgun Gothic"/>
+                <a:cs typeface="Malgun Gothic"/>
+              </a:defRPr>
+            </a:lvl8pPr>
+            <a:lvl9pPr algn="r">
+              <a:defRPr sz="1200" b="0">
+                <a:solidFill>
+                  <a:srgbClr val="4D5A68"/>
+                </a:solidFill>
+                <a:latin typeface="Malgun Gothic"/>
+                <a:ea typeface="Malgun Gothic"/>
+                <a:cs typeface="Malgun Gothic"/>
+              </a:defRPr>
+            </a:lvl9pPr>
+          </a:lstStyle>
+          <a:p xmlns:a="http://schemas.openxmlformats.org/drawingml/2006/main">
+            <a:pPr algn="r">
+              <a:defRPr sz="1200" b="0">
+                <a:solidFill>
+                  <a:srgbClr val="4D5A68"/>
+                </a:solidFill>
+                <a:latin typeface="Malgun Gothic"/>
+                <a:ea typeface="Malgun Gothic"/>
+                <a:cs typeface="Malgun Gothic"/>
+              </a:defRPr>
+            </a:pPr>
+            <a:r>
+              <a:rPr sz="1200" b="0">
+                <a:solidFill>
+                  <a:srgbClr val="4D5A68"/>
+                </a:solidFill>
+                <a:latin typeface="Malgun Gothic"/>
+                <a:ea typeface="Malgun Gothic"/>
+                <a:cs typeface="Malgun Gothic"/>
+              </a:rPr>
+              <a:t>M 연계 · M2 · M8</a:t>
+            </a:r>
+          </a:p>
+        </p:txBody>
+      </p:sp>
     </p:spTree>
     <p:extLst>
       <p:ext uri="{BB962C8B-B14F-4D97-AF65-F5344CB8AC3E}">
-        <p14:creationId xmlns:p14="http://schemas.microsoft.com/office/powerpoint/2010/main" val="2013353700"/>
+        <p14:creationId xmlns:p14="http://schemas.microsoft.com/office/powerpoint/2010/main" val="916994113"/>
       </p:ext>
     </p:extLst>
   </p:cSld>
@@ -25393,10 +26499,10 @@
       </p:grpSpPr>
       <p:sp>
         <p:nvSpPr>
-          <p:cNvPr id="26" name="ACT 2  ·  Project Context">
+          <p:cNvPr id="27" name="ACT 2  ·  Project Context">
             <a:extLst xmlns:a="http://schemas.openxmlformats.org/drawingml/2006/main">
               <a:ext uri="{FF2B5EF4-FFF2-40B4-BE49-F238E27FC236}">
-                <a16:creationId xmlns:a16="http://schemas.microsoft.com/office/drawing/2014/main" id="{349057BC-7840-4F59-8A64-F419E1B2461C}"/>
+                <a16:creationId xmlns:a16="http://schemas.microsoft.com/office/drawing/2014/main" id="{F4EF799C-B8A9-4DFD-910C-B64C75AE0B9A}"/>
               </a:ext>
             </a:extLst>
           </p:cNvPr>
@@ -25554,7 +26660,7 @@
           <p:cNvPr id="2" name="S23">
             <a:extLst xmlns:a="http://schemas.openxmlformats.org/drawingml/2006/main">
               <a:ext uri="{FF2B5EF4-FFF2-40B4-BE49-F238E27FC236}">
-                <a16:creationId xmlns:a16="http://schemas.microsoft.com/office/drawing/2014/main" id="{7CE63E44-9518-482E-9443-2BDEA8B90F47}"/>
+                <a16:creationId xmlns:a16="http://schemas.microsoft.com/office/drawing/2014/main" id="{A0E9A247-1D86-434C-9807-BA8580C44A35}"/>
               </a:ext>
             </a:extLst>
           </p:cNvPr>
@@ -25712,7 +26818,7 @@
           <p:cNvPr id="3" name="작은 Project Context의 첫 기록">
             <a:extLst xmlns:a="http://schemas.openxmlformats.org/drawingml/2006/main">
               <a:ext uri="{FF2B5EF4-FFF2-40B4-BE49-F238E27FC236}">
-                <a16:creationId xmlns:a16="http://schemas.microsoft.com/office/drawing/2014/main" id="{3BA7DC3A-FD82-4EA7-8F9F-0B5D7747FC61}"/>
+                <a16:creationId xmlns:a16="http://schemas.microsoft.com/office/drawing/2014/main" id="{8B53D983-777C-4C62-9E2C-81A797C28013}"/>
               </a:ext>
             </a:extLst>
           </p:cNvPr>
@@ -25870,7 +26976,7 @@
           <p:cNvPr id="4" name="">
             <a:extLst xmlns:a="http://schemas.openxmlformats.org/drawingml/2006/main">
               <a:ext uri="{FF2B5EF4-FFF2-40B4-BE49-F238E27FC236}">
-                <a16:creationId xmlns:a16="http://schemas.microsoft.com/office/drawing/2014/main" id="{01FD38E5-0A74-4131-8B22-0BDE9A0316D5}"/>
+                <a16:creationId xmlns:a16="http://schemas.microsoft.com/office/drawing/2014/main" id="{7F7976E0-E5C0-447C-B6C3-C142DB696729}"/>
               </a:ext>
             </a:extLst>
           </p:cNvPr>
@@ -25881,7 +26987,7 @@
         </p:nvSpPr>
         <p:spPr>
           <a:xfrm xmlns:a="http://schemas.openxmlformats.org/drawingml/2006/main">
-            <a:off x="609600" y="5829300"/>
+            <a:off x="609600" y="5753100"/>
             <a:ext cx="10972800" cy="0"/>
           </a:xfrm>
           <a:prstGeom xmlns:a="http://schemas.openxmlformats.org/drawingml/2006/main" prst="line">
@@ -25901,7 +27007,7 @@
           <p:cNvPr id="5" name="OBSERVED PRODUCT  |  STATE-01 · AGENTS.md 실제 원문 발췌">
             <a:extLst xmlns:a="http://schemas.openxmlformats.org/drawingml/2006/main">
               <a:ext uri="{FF2B5EF4-FFF2-40B4-BE49-F238E27FC236}">
-                <a16:creationId xmlns:a16="http://schemas.microsoft.com/office/drawing/2014/main" id="{D1735B73-4D65-4DF6-8774-4FFD741E48E3}"/>
+                <a16:creationId xmlns:a16="http://schemas.microsoft.com/office/drawing/2014/main" id="{EB6BF10D-FBC8-455D-B21E-57D6D6D767D4}"/>
               </a:ext>
             </a:extLst>
           </p:cNvPr>
@@ -25912,8 +27018,8 @@
         </p:nvSpPr>
         <p:spPr>
           <a:xfrm xmlns:a="http://schemas.openxmlformats.org/drawingml/2006/main">
-            <a:off x="609600" y="5915025"/>
-            <a:ext cx="10972800" cy="247650"/>
+            <a:off x="609600" y="5791200"/>
+            <a:ext cx="10972800" cy="228600"/>
           </a:xfrm>
           <a:prstGeom xmlns:a="http://schemas.openxmlformats.org/drawingml/2006/main" prst="rect">
             <a:avLst/>
@@ -26059,7 +27165,7 @@
           <p:cNvPr id="6" name="파일의 내용과 기록 위치를 보여주는 장 · Agent의 활용 관찰은 다음 장에서 확인">
             <a:extLst xmlns:a="http://schemas.openxmlformats.org/drawingml/2006/main">
               <a:ext uri="{FF2B5EF4-FFF2-40B4-BE49-F238E27FC236}">
-                <a16:creationId xmlns:a16="http://schemas.microsoft.com/office/drawing/2014/main" id="{58731211-54B7-4563-A534-9751537FD8D4}"/>
+                <a16:creationId xmlns:a16="http://schemas.microsoft.com/office/drawing/2014/main" id="{DB24C6C8-C01C-4FFB-9C83-914FFA22E83F}"/>
               </a:ext>
             </a:extLst>
           </p:cNvPr>
@@ -26070,7 +27176,7 @@
         </p:nvSpPr>
         <p:spPr>
           <a:xfrm xmlns:a="http://schemas.openxmlformats.org/drawingml/2006/main">
-            <a:off x="609600" y="6191250"/>
+            <a:off x="609600" y="6019800"/>
             <a:ext cx="10972800" cy="209550"/>
           </a:xfrm>
           <a:prstGeom xmlns:a="http://schemas.openxmlformats.org/drawingml/2006/main" prst="rect">
@@ -26217,7 +27323,7 @@
           <p:cNvPr id="7" name="반복해서 설명하던 내용을 저장소에 남겼다">
             <a:extLst xmlns:a="http://schemas.openxmlformats.org/drawingml/2006/main">
               <a:ext uri="{FF2B5EF4-FFF2-40B4-BE49-F238E27FC236}">
-                <a16:creationId xmlns:a16="http://schemas.microsoft.com/office/drawing/2014/main" id="{E99C2490-4052-4209-8303-D26A69DE0B9D}"/>
+                <a16:creationId xmlns:a16="http://schemas.microsoft.com/office/drawing/2014/main" id="{CF72B2E8-6E63-4BA3-9A1F-938192CB57E5}"/>
               </a:ext>
             </a:extLst>
           </p:cNvPr>
@@ -26375,7 +27481,7 @@
           <p:cNvPr id="8" name="AGENTS.md">
             <a:extLst xmlns:a="http://schemas.openxmlformats.org/drawingml/2006/main">
               <a:ext uri="{FF2B5EF4-FFF2-40B4-BE49-F238E27FC236}">
-                <a16:creationId xmlns:a16="http://schemas.microsoft.com/office/drawing/2014/main" id="{B3774276-4EB4-4180-AA3F-4390092DDFE9}"/>
+                <a16:creationId xmlns:a16="http://schemas.microsoft.com/office/drawing/2014/main" id="{F79922D3-2C3C-495D-9E9F-F812A1AAED4C}"/>
               </a:ext>
             </a:extLst>
           </p:cNvPr>
@@ -26533,7 +27639,7 @@
           <p:cNvPr id="9" name="STATE-00-FIXED → STATE-01">
             <a:extLst xmlns:a="http://schemas.openxmlformats.org/drawingml/2006/main">
               <a:ext uri="{FF2B5EF4-FFF2-40B4-BE49-F238E27FC236}">
-                <a16:creationId xmlns:a16="http://schemas.microsoft.com/office/drawing/2014/main" id="{B9C1F748-71EB-4FA8-9FBA-8FD0B672089B}"/>
+                <a16:creationId xmlns:a16="http://schemas.microsoft.com/office/drawing/2014/main" id="{ED763512-782E-4B90-B625-9F7795FBEB0C}"/>
               </a:ext>
             </a:extLst>
           </p:cNvPr>
@@ -26691,7 +27797,7 @@
           <p:cNvPr id="10" name="">
             <a:extLst xmlns:a="http://schemas.openxmlformats.org/drawingml/2006/main">
               <a:ext uri="{FF2B5EF4-FFF2-40B4-BE49-F238E27FC236}">
-                <a16:creationId xmlns:a16="http://schemas.microsoft.com/office/drawing/2014/main" id="{A6BA5DE7-F4F8-4F1A-801B-06944455D861}"/>
+                <a16:creationId xmlns:a16="http://schemas.microsoft.com/office/drawing/2014/main" id="{F88532C4-9F78-493A-A7F9-B7B730C59762}"/>
               </a:ext>
             </a:extLst>
           </p:cNvPr>
@@ -26722,7 +27828,7 @@
           <p:cNvPr id="11" name="프로젝트 목적">
             <a:extLst xmlns:a="http://schemas.openxmlformats.org/drawingml/2006/main">
               <a:ext uri="{FF2B5EF4-FFF2-40B4-BE49-F238E27FC236}">
-                <a16:creationId xmlns:a16="http://schemas.microsoft.com/office/drawing/2014/main" id="{7E3287D2-828E-434D-B6BF-2095AD45CB7F}"/>
+                <a16:creationId xmlns:a16="http://schemas.microsoft.com/office/drawing/2014/main" id="{0772BD83-2104-40C8-A7D8-59ACF2D26BF9}"/>
               </a:ext>
             </a:extLst>
           </p:cNvPr>
@@ -26880,7 +27986,7 @@
           <p:cNvPr id="12" name="Local grayscale image-processing CLI using synthetic ASCII P">
             <a:extLst xmlns:a="http://schemas.openxmlformats.org/drawingml/2006/main">
               <a:ext uri="{FF2B5EF4-FFF2-40B4-BE49-F238E27FC236}">
-                <a16:creationId xmlns:a16="http://schemas.microsoft.com/office/drawing/2014/main" id="{8C25F2B5-3ED4-4C9B-9A3C-662DA293DB20}"/>
+                <a16:creationId xmlns:a16="http://schemas.microsoft.com/office/drawing/2014/main" id="{B1709D4C-C7DE-4EC2-907B-41BF428FF814}"/>
               </a:ext>
             </a:extLst>
           </p:cNvPr>
@@ -27060,7 +28166,7 @@
           <p:cNvPr id="13" name="로컬 합성 이미지로 동작하는 흑백 처리 CLI">
             <a:extLst xmlns:a="http://schemas.openxmlformats.org/drawingml/2006/main">
               <a:ext uri="{FF2B5EF4-FFF2-40B4-BE49-F238E27FC236}">
-                <a16:creationId xmlns:a16="http://schemas.microsoft.com/office/drawing/2014/main" id="{6E78A0DB-9CA4-4F28-A036-02DA4C74B7FC}"/>
+                <a16:creationId xmlns:a16="http://schemas.microsoft.com/office/drawing/2014/main" id="{6E11F8E9-3905-471A-A96A-F089DE73A9AF}"/>
               </a:ext>
             </a:extLst>
           </p:cNvPr>
@@ -27218,7 +28324,7 @@
           <p:cNvPr id="14" name="">
             <a:extLst xmlns:a="http://schemas.openxmlformats.org/drawingml/2006/main">
               <a:ext uri="{FF2B5EF4-FFF2-40B4-BE49-F238E27FC236}">
-                <a16:creationId xmlns:a16="http://schemas.microsoft.com/office/drawing/2014/main" id="{A7003973-50F5-484F-8441-830B2ADE1461}"/>
+                <a16:creationId xmlns:a16="http://schemas.microsoft.com/office/drawing/2014/main" id="{C51CC416-A90A-4D0E-A280-49881DAEF3D9}"/>
               </a:ext>
             </a:extLst>
           </p:cNvPr>
@@ -27249,7 +28355,7 @@
           <p:cNvPr id="15" name="실행 방법">
             <a:extLst xmlns:a="http://schemas.openxmlformats.org/drawingml/2006/main">
               <a:ext uri="{FF2B5EF4-FFF2-40B4-BE49-F238E27FC236}">
-                <a16:creationId xmlns:a16="http://schemas.microsoft.com/office/drawing/2014/main" id="{258D42E0-2F31-42FF-8B73-D181AFB7222C}"/>
+                <a16:creationId xmlns:a16="http://schemas.microsoft.com/office/drawing/2014/main" id="{E9A028CC-DF2B-45A3-BA9A-FB8CE6953E62}"/>
               </a:ext>
             </a:extLst>
           </p:cNvPr>
@@ -27407,7 +28513,7 @@
           <p:cNvPr id="16" name="Use the prepared build and CLI commands documented in `READM">
             <a:extLst xmlns:a="http://schemas.openxmlformats.org/drawingml/2006/main">
               <a:ext uri="{FF2B5EF4-FFF2-40B4-BE49-F238E27FC236}">
-                <a16:creationId xmlns:a16="http://schemas.microsoft.com/office/drawing/2014/main" id="{E2BAF48C-4267-4A6E-9165-6991287FED9F}"/>
+                <a16:creationId xmlns:a16="http://schemas.microsoft.com/office/drawing/2014/main" id="{317DB7F1-5E1D-4041-9F48-798B5EE1D023}"/>
               </a:ext>
             </a:extLst>
           </p:cNvPr>
@@ -27587,7 +28693,7 @@
           <p:cNvPr id="17" name="실행 방법은 README에서 확인">
             <a:extLst xmlns:a="http://schemas.openxmlformats.org/drawingml/2006/main">
               <a:ext uri="{FF2B5EF4-FFF2-40B4-BE49-F238E27FC236}">
-                <a16:creationId xmlns:a16="http://schemas.microsoft.com/office/drawing/2014/main" id="{AD968EAE-6C97-485B-9F17-439C7255CB3E}"/>
+                <a16:creationId xmlns:a16="http://schemas.microsoft.com/office/drawing/2014/main" id="{79ED1585-A05E-4455-A964-44EB31EC7D7C}"/>
               </a:ext>
             </a:extLst>
           </p:cNvPr>
@@ -27745,7 +28851,7 @@
           <p:cNvPr id="18" name="">
             <a:extLst xmlns:a="http://schemas.openxmlformats.org/drawingml/2006/main">
               <a:ext uri="{FF2B5EF4-FFF2-40B4-BE49-F238E27FC236}">
-                <a16:creationId xmlns:a16="http://schemas.microsoft.com/office/drawing/2014/main" id="{6D8C04D3-A415-4827-89E0-7DECA6EB338F}"/>
+                <a16:creationId xmlns:a16="http://schemas.microsoft.com/office/drawing/2014/main" id="{50369E1B-3C01-4893-AB03-24243FBE0AD3}"/>
               </a:ext>
             </a:extLst>
           </p:cNvPr>
@@ -27776,7 +28882,7 @@
           <p:cNvPr id="19" name="테스트 명령">
             <a:extLst xmlns:a="http://schemas.openxmlformats.org/drawingml/2006/main">
               <a:ext uri="{FF2B5EF4-FFF2-40B4-BE49-F238E27FC236}">
-                <a16:creationId xmlns:a16="http://schemas.microsoft.com/office/drawing/2014/main" id="{D26E96CA-E5BF-49DE-B466-8A02FE9E9FD5}"/>
+                <a16:creationId xmlns:a16="http://schemas.microsoft.com/office/drawing/2014/main" id="{669F54B9-8740-4DB3-9F09-94ABBD8F8A50}"/>
               </a:ext>
             </a:extLst>
           </p:cNvPr>
@@ -27934,7 +29040,7 @@
           <p:cNvPr id="20" name="PYTHONPATH=src python3 -m unittest discover -s tests -v">
             <a:extLst xmlns:a="http://schemas.openxmlformats.org/drawingml/2006/main">
               <a:ext uri="{FF2B5EF4-FFF2-40B4-BE49-F238E27FC236}">
-                <a16:creationId xmlns:a16="http://schemas.microsoft.com/office/drawing/2014/main" id="{66BFE832-4080-4243-9360-CFE64AB66268}"/>
+                <a16:creationId xmlns:a16="http://schemas.microsoft.com/office/drawing/2014/main" id="{EF3B5004-2DD4-4606-8C97-CB826FB4F6D2}"/>
               </a:ext>
             </a:extLst>
           </p:cNvPr>
@@ -28092,7 +29198,7 @@
           <p:cNvPr id="21" name="반복해서 쓸 테스트 명령">
             <a:extLst xmlns:a="http://schemas.openxmlformats.org/drawingml/2006/main">
               <a:ext uri="{FF2B5EF4-FFF2-40B4-BE49-F238E27FC236}">
-                <a16:creationId xmlns:a16="http://schemas.microsoft.com/office/drawing/2014/main" id="{7DA5375C-261F-490E-A3BE-D2A871E4A0D8}"/>
+                <a16:creationId xmlns:a16="http://schemas.microsoft.com/office/drawing/2014/main" id="{B1013EEA-5991-428B-82B8-B5553B5CA60A}"/>
               </a:ext>
             </a:extLst>
           </p:cNvPr>
@@ -28250,7 +29356,7 @@
           <p:cNvPr id="22" name="">
             <a:extLst xmlns:a="http://schemas.openxmlformats.org/drawingml/2006/main">
               <a:ext uri="{FF2B5EF4-FFF2-40B4-BE49-F238E27FC236}">
-                <a16:creationId xmlns:a16="http://schemas.microsoft.com/office/drawing/2014/main" id="{AEA8A73F-2250-42B9-96FE-0718CB3B1C1E}"/>
+                <a16:creationId xmlns:a16="http://schemas.microsoft.com/office/drawing/2014/main" id="{07212868-1F90-4CAA-8F21-16344E44112A}"/>
               </a:ext>
             </a:extLst>
           </p:cNvPr>
@@ -28281,7 +29387,7 @@
           <p:cNvPr id="23" name="기본 제약">
             <a:extLst xmlns:a="http://schemas.openxmlformats.org/drawingml/2006/main">
               <a:ext uri="{FF2B5EF4-FFF2-40B4-BE49-F238E27FC236}">
-                <a16:creationId xmlns:a16="http://schemas.microsoft.com/office/drawing/2014/main" id="{DEEE32F9-7084-4087-9545-3621A2E9406C}"/>
+                <a16:creationId xmlns:a16="http://schemas.microsoft.com/office/drawing/2014/main" id="{36A11B34-BEF9-4BA0-AB73-E6D871D050FB}"/>
               </a:ext>
             </a:extLst>
           </p:cNvPr>
@@ -28439,7 +29545,7 @@
           <p:cNvPr id="24" name="Keep changes scoped and verify relevant behavior.">
             <a:extLst xmlns:a="http://schemas.openxmlformats.org/drawingml/2006/main">
               <a:ext uri="{FF2B5EF4-FFF2-40B4-BE49-F238E27FC236}">
-                <a16:creationId xmlns:a16="http://schemas.microsoft.com/office/drawing/2014/main" id="{AF8CFBA1-C814-46B1-8963-4A6F5E4B6BFC}"/>
+                <a16:creationId xmlns:a16="http://schemas.microsoft.com/office/drawing/2014/main" id="{F56D968E-C237-456B-9C18-BBEFDC0F7800}"/>
               </a:ext>
             </a:extLst>
           </p:cNvPr>
@@ -28619,7 +29725,7 @@
           <p:cNvPr id="25" name="범위를 지키고 관련 동작을 검증">
             <a:extLst xmlns:a="http://schemas.openxmlformats.org/drawingml/2006/main">
               <a:ext uri="{FF2B5EF4-FFF2-40B4-BE49-F238E27FC236}">
-                <a16:creationId xmlns:a16="http://schemas.microsoft.com/office/drawing/2014/main" id="{94187C73-0003-41E8-A209-D019140523D2}"/>
+                <a16:creationId xmlns:a16="http://schemas.microsoft.com/office/drawing/2014/main" id="{7D5BD43F-884F-4E92-8562-53823716B2AE}"/>
               </a:ext>
             </a:extLst>
           </p:cNvPr>
@@ -28772,10 +29878,168 @@
           </a:p>
         </p:txBody>
       </p:sp>
+      <p:sp>
+        <p:nvSpPr>
+          <p:cNvPr id="26" name="Legacy module connection">
+            <a:extLst xmlns:a="http://schemas.openxmlformats.org/drawingml/2006/main">
+              <a:ext uri="{FF2B5EF4-FFF2-40B4-BE49-F238E27FC236}">
+                <a16:creationId xmlns:a16="http://schemas.microsoft.com/office/drawing/2014/main" id="{0F8F0099-333A-4ECC-8D70-D09E90F6D18A}"/>
+              </a:ext>
+            </a:extLst>
+          </p:cNvPr>
+          <p:cNvSpPr>
+            <a:spLocks xmlns:a="http://schemas.openxmlformats.org/drawingml/2006/main" noGrp="1"/>
+          </p:cNvSpPr>
+          <p:nvPr/>
+        </p:nvSpPr>
+        <p:spPr>
+          <a:xfrm xmlns:a="http://schemas.openxmlformats.org/drawingml/2006/main">
+            <a:off x="609600" y="6229350"/>
+            <a:ext cx="10972800" cy="171450"/>
+          </a:xfrm>
+          <a:prstGeom xmlns:a="http://schemas.openxmlformats.org/drawingml/2006/main" prst="rect">
+            <a:avLst/>
+          </a:prstGeom>
+          <a:noFill xmlns:a="http://schemas.openxmlformats.org/drawingml/2006/main"/>
+          <a:ln xmlns:a="http://schemas.openxmlformats.org/drawingml/2006/main" w="0">
+            <a:noFill/>
+          </a:ln>
+        </p:spPr>
+        <p:txBody>
+          <a:bodyPr xmlns:a="http://schemas.openxmlformats.org/drawingml/2006/main" wrap="none" lIns="0" tIns="0" rIns="0" bIns="0" anchor="ctr">
+            <a:noAutofit/>
+          </a:bodyPr>
+          <a:lstStyle xmlns:a="http://schemas.openxmlformats.org/drawingml/2006/main">
+            <a:defPPr algn="r">
+              <a:defRPr sz="1200" b="0">
+                <a:solidFill>
+                  <a:srgbClr val="4D5A68"/>
+                </a:solidFill>
+                <a:latin typeface="Malgun Gothic"/>
+                <a:ea typeface="Malgun Gothic"/>
+                <a:cs typeface="Malgun Gothic"/>
+              </a:defRPr>
+            </a:defPPr>
+            <a:lvl1pPr algn="r">
+              <a:defRPr sz="1200" b="0">
+                <a:solidFill>
+                  <a:srgbClr val="4D5A68"/>
+                </a:solidFill>
+                <a:latin typeface="Malgun Gothic"/>
+                <a:ea typeface="Malgun Gothic"/>
+                <a:cs typeface="Malgun Gothic"/>
+              </a:defRPr>
+            </a:lvl1pPr>
+            <a:lvl2pPr algn="r">
+              <a:defRPr sz="1200" b="0">
+                <a:solidFill>
+                  <a:srgbClr val="4D5A68"/>
+                </a:solidFill>
+                <a:latin typeface="Malgun Gothic"/>
+                <a:ea typeface="Malgun Gothic"/>
+                <a:cs typeface="Malgun Gothic"/>
+              </a:defRPr>
+            </a:lvl2pPr>
+            <a:lvl3pPr algn="r">
+              <a:defRPr sz="1200" b="0">
+                <a:solidFill>
+                  <a:srgbClr val="4D5A68"/>
+                </a:solidFill>
+                <a:latin typeface="Malgun Gothic"/>
+                <a:ea typeface="Malgun Gothic"/>
+                <a:cs typeface="Malgun Gothic"/>
+              </a:defRPr>
+            </a:lvl3pPr>
+            <a:lvl4pPr algn="r">
+              <a:defRPr sz="1200" b="0">
+                <a:solidFill>
+                  <a:srgbClr val="4D5A68"/>
+                </a:solidFill>
+                <a:latin typeface="Malgun Gothic"/>
+                <a:ea typeface="Malgun Gothic"/>
+                <a:cs typeface="Malgun Gothic"/>
+              </a:defRPr>
+            </a:lvl4pPr>
+            <a:lvl5pPr algn="r">
+              <a:defRPr sz="1200" b="0">
+                <a:solidFill>
+                  <a:srgbClr val="4D5A68"/>
+                </a:solidFill>
+                <a:latin typeface="Malgun Gothic"/>
+                <a:ea typeface="Malgun Gothic"/>
+                <a:cs typeface="Malgun Gothic"/>
+              </a:defRPr>
+            </a:lvl5pPr>
+            <a:lvl6pPr algn="r">
+              <a:defRPr sz="1200" b="0">
+                <a:solidFill>
+                  <a:srgbClr val="4D5A68"/>
+                </a:solidFill>
+                <a:latin typeface="Malgun Gothic"/>
+                <a:ea typeface="Malgun Gothic"/>
+                <a:cs typeface="Malgun Gothic"/>
+              </a:defRPr>
+            </a:lvl6pPr>
+            <a:lvl7pPr algn="r">
+              <a:defRPr sz="1200" b="0">
+                <a:solidFill>
+                  <a:srgbClr val="4D5A68"/>
+                </a:solidFill>
+                <a:latin typeface="Malgun Gothic"/>
+                <a:ea typeface="Malgun Gothic"/>
+                <a:cs typeface="Malgun Gothic"/>
+              </a:defRPr>
+            </a:lvl7pPr>
+            <a:lvl8pPr algn="r">
+              <a:defRPr sz="1200" b="0">
+                <a:solidFill>
+                  <a:srgbClr val="4D5A68"/>
+                </a:solidFill>
+                <a:latin typeface="Malgun Gothic"/>
+                <a:ea typeface="Malgun Gothic"/>
+                <a:cs typeface="Malgun Gothic"/>
+              </a:defRPr>
+            </a:lvl8pPr>
+            <a:lvl9pPr algn="r">
+              <a:defRPr sz="1200" b="0">
+                <a:solidFill>
+                  <a:srgbClr val="4D5A68"/>
+                </a:solidFill>
+                <a:latin typeface="Malgun Gothic"/>
+                <a:ea typeface="Malgun Gothic"/>
+                <a:cs typeface="Malgun Gothic"/>
+              </a:defRPr>
+            </a:lvl9pPr>
+          </a:lstStyle>
+          <a:p xmlns:a="http://schemas.openxmlformats.org/drawingml/2006/main">
+            <a:pPr algn="r">
+              <a:defRPr sz="1200" b="0">
+                <a:solidFill>
+                  <a:srgbClr val="4D5A68"/>
+                </a:solidFill>
+                <a:latin typeface="Malgun Gothic"/>
+                <a:ea typeface="Malgun Gothic"/>
+                <a:cs typeface="Malgun Gothic"/>
+              </a:defRPr>
+            </a:pPr>
+            <a:r>
+              <a:rPr sz="1200" b="0">
+                <a:solidFill>
+                  <a:srgbClr val="4D5A68"/>
+                </a:solidFill>
+                <a:latin typeface="Malgun Gothic"/>
+                <a:ea typeface="Malgun Gothic"/>
+                <a:cs typeface="Malgun Gothic"/>
+              </a:rPr>
+              <a:t>M 연계 · M2</a:t>
+            </a:r>
+          </a:p>
+        </p:txBody>
+      </p:sp>
     </p:spTree>
     <p:extLst>
       <p:ext uri="{BB962C8B-B14F-4D97-AF65-F5344CB8AC3E}">
-        <p14:creationId xmlns:p14="http://schemas.microsoft.com/office/powerpoint/2010/main" val="1319496343"/>
+        <p14:creationId xmlns:p14="http://schemas.microsoft.com/office/powerpoint/2010/main" val="1070377751"/>
       </p:ext>
     </p:extLst>
   </p:cSld>
@@ -28803,10 +30067,10 @@
       </p:grpSpPr>
       <p:sp>
         <p:nvSpPr>
-          <p:cNvPr id="23" name="ACT 2 · 지침을 활용한 관찰">
+          <p:cNvPr id="24" name="ACT 2 · 지침을 활용한 관찰">
             <a:extLst xmlns:a="http://schemas.openxmlformats.org/drawingml/2006/main">
               <a:ext uri="{FF2B5EF4-FFF2-40B4-BE49-F238E27FC236}">
-                <a16:creationId xmlns:a16="http://schemas.microsoft.com/office/drawing/2014/main" id="{A2D23296-6BC9-4F9A-BC76-A9B5A65CC654}"/>
+                <a16:creationId xmlns:a16="http://schemas.microsoft.com/office/drawing/2014/main" id="{7A9185C7-A21C-4378-8608-A19FB9A08C34}"/>
               </a:ext>
             </a:extLst>
           </p:cNvPr>
@@ -28964,7 +30228,7 @@
           <p:cNvPr id="2" name="S24">
             <a:extLst xmlns:a="http://schemas.openxmlformats.org/drawingml/2006/main">
               <a:ext uri="{FF2B5EF4-FFF2-40B4-BE49-F238E27FC236}">
-                <a16:creationId xmlns:a16="http://schemas.microsoft.com/office/drawing/2014/main" id="{4754E805-026F-499E-BE77-B49D55EBF944}"/>
+                <a16:creationId xmlns:a16="http://schemas.microsoft.com/office/drawing/2014/main" id="{D1A8C059-A598-4F26-B308-AB016C88BEF2}"/>
               </a:ext>
             </a:extLst>
           </p:cNvPr>
@@ -29122,7 +30386,7 @@
           <p:cNvPr id="3" name="한 번의 사용에서 확인된 것">
             <a:extLst xmlns:a="http://schemas.openxmlformats.org/drawingml/2006/main">
               <a:ext uri="{FF2B5EF4-FFF2-40B4-BE49-F238E27FC236}">
-                <a16:creationId xmlns:a16="http://schemas.microsoft.com/office/drawing/2014/main" id="{519885CC-4C93-480E-AF28-44F36FFC3199}"/>
+                <a16:creationId xmlns:a16="http://schemas.microsoft.com/office/drawing/2014/main" id="{0DD77485-446D-417A-9770-3C7C448F609A}"/>
               </a:ext>
             </a:extLst>
           </p:cNvPr>
@@ -29280,7 +30544,7 @@
           <p:cNvPr id="4" name="">
             <a:extLst xmlns:a="http://schemas.openxmlformats.org/drawingml/2006/main">
               <a:ext uri="{FF2B5EF4-FFF2-40B4-BE49-F238E27FC236}">
-                <a16:creationId xmlns:a16="http://schemas.microsoft.com/office/drawing/2014/main" id="{30CDBD93-9ED8-43AA-A6D5-31F64EDC224D}"/>
+                <a16:creationId xmlns:a16="http://schemas.microsoft.com/office/drawing/2014/main" id="{83CB4F03-0193-407B-9C53-10DFE375689A}"/>
               </a:ext>
             </a:extLst>
           </p:cNvPr>
@@ -29291,7 +30555,7 @@
         </p:nvSpPr>
         <p:spPr>
           <a:xfrm xmlns:a="http://schemas.openxmlformats.org/drawingml/2006/main">
-            <a:off x="609600" y="5829300"/>
+            <a:off x="609600" y="5753100"/>
             <a:ext cx="10972800" cy="0"/>
           </a:xfrm>
           <a:prstGeom xmlns:a="http://schemas.openxmlformats.org/drawingml/2006/main" prst="line">
@@ -29311,7 +30575,7 @@
           <p:cNvPr id="5" name="TRIAL-003 · Codex CLI 기록을 재구성 · 전체 테스트 11/11 PASS">
             <a:extLst xmlns:a="http://schemas.openxmlformats.org/drawingml/2006/main">
               <a:ext uri="{FF2B5EF4-FFF2-40B4-BE49-F238E27FC236}">
-                <a16:creationId xmlns:a16="http://schemas.microsoft.com/office/drawing/2014/main" id="{2B8CD001-3E4A-40EA-AC55-6A9299149B70}"/>
+                <a16:creationId xmlns:a16="http://schemas.microsoft.com/office/drawing/2014/main" id="{BD1ABEDF-03F0-4E09-A803-8D06096D8A93}"/>
               </a:ext>
             </a:extLst>
           </p:cNvPr>
@@ -29322,8 +30586,8 @@
         </p:nvSpPr>
         <p:spPr>
           <a:xfrm xmlns:a="http://schemas.openxmlformats.org/drawingml/2006/main">
-            <a:off x="609600" y="5915025"/>
-            <a:ext cx="10972800" cy="247650"/>
+            <a:off x="609600" y="5791200"/>
+            <a:ext cx="10972800" cy="228600"/>
           </a:xfrm>
           <a:prstGeom xmlns:a="http://schemas.openxmlformats.org/drawingml/2006/main" prst="rect">
             <a:avLst/>
@@ -29469,7 +30733,7 @@
           <p:cNvPr id="6" name="Personal/global Skills도 실행됨 · AGENTS.md만의 독립적인 효과로 해석하지 않음">
             <a:extLst xmlns:a="http://schemas.openxmlformats.org/drawingml/2006/main">
               <a:ext uri="{FF2B5EF4-FFF2-40B4-BE49-F238E27FC236}">
-                <a16:creationId xmlns:a16="http://schemas.microsoft.com/office/drawing/2014/main" id="{A5225122-8A59-4A1D-A6D0-1740B9A1E38D}"/>
+                <a16:creationId xmlns:a16="http://schemas.microsoft.com/office/drawing/2014/main" id="{7A06F4CC-8D37-4E59-A4E5-290CB8EB745D}"/>
               </a:ext>
             </a:extLst>
           </p:cNvPr>
@@ -29480,7 +30744,7 @@
         </p:nvSpPr>
         <p:spPr>
           <a:xfrm xmlns:a="http://schemas.openxmlformats.org/drawingml/2006/main">
-            <a:off x="609600" y="6191250"/>
+            <a:off x="609600" y="6019800"/>
             <a:ext cx="10972800" cy="209550"/>
           </a:xfrm>
           <a:prstGeom xmlns:a="http://schemas.openxmlformats.org/drawingml/2006/main" prst="rect">
@@ -29627,7 +30891,7 @@
           <p:cNvPr id="7" name="요청">
             <a:extLst xmlns:a="http://schemas.openxmlformats.org/drawingml/2006/main">
               <a:ext uri="{FF2B5EF4-FFF2-40B4-BE49-F238E27FC236}">
-                <a16:creationId xmlns:a16="http://schemas.microsoft.com/office/drawing/2014/main" id="{FC284514-D61C-49C9-B575-6568625A7097}"/>
+                <a16:creationId xmlns:a16="http://schemas.microsoft.com/office/drawing/2014/main" id="{B014E960-CD70-4664-A75E-7D6DD51518FD}"/>
               </a:ext>
             </a:extLst>
           </p:cNvPr>
@@ -29785,7 +31049,7 @@
           <p:cNvPr id="8" name="">
             <a:extLst xmlns:a="http://schemas.openxmlformats.org/drawingml/2006/main">
               <a:ext uri="{FF2B5EF4-FFF2-40B4-BE49-F238E27FC236}">
-                <a16:creationId xmlns:a16="http://schemas.microsoft.com/office/drawing/2014/main" id="{929BE0D8-B9CB-467B-AF75-293DAF100FC7}"/>
+                <a16:creationId xmlns:a16="http://schemas.microsoft.com/office/drawing/2014/main" id="{A0D05937-99D0-4F6A-968B-7319BD937F59}"/>
               </a:ext>
             </a:extLst>
           </p:cNvPr>
@@ -29816,7 +31080,7 @@
           <p:cNvPr id="9" name="읽은 파일">
             <a:extLst xmlns:a="http://schemas.openxmlformats.org/drawingml/2006/main">
               <a:ext uri="{FF2B5EF4-FFF2-40B4-BE49-F238E27FC236}">
-                <a16:creationId xmlns:a16="http://schemas.microsoft.com/office/drawing/2014/main" id="{A98BF887-87BD-4B97-87D0-9D2362A9F147}"/>
+                <a16:creationId xmlns:a16="http://schemas.microsoft.com/office/drawing/2014/main" id="{B693AD5F-E479-4EF7-A33B-796F7D6B6141}"/>
               </a:ext>
             </a:extLst>
           </p:cNvPr>
@@ -29974,7 +31238,7 @@
           <p:cNvPr id="10" name="">
             <a:extLst xmlns:a="http://schemas.openxmlformats.org/drawingml/2006/main">
               <a:ext uri="{FF2B5EF4-FFF2-40B4-BE49-F238E27FC236}">
-                <a16:creationId xmlns:a16="http://schemas.microsoft.com/office/drawing/2014/main" id="{985C2C1C-0E4E-4115-8F3E-8C30AC901A1B}"/>
+                <a16:creationId xmlns:a16="http://schemas.microsoft.com/office/drawing/2014/main" id="{1023FCBC-7952-4486-965C-C7BDDDCA58F7}"/>
               </a:ext>
             </a:extLst>
           </p:cNvPr>
@@ -30005,7 +31269,7 @@
           <p:cNvPr id="11" name="실행 기록">
             <a:extLst xmlns:a="http://schemas.openxmlformats.org/drawingml/2006/main">
               <a:ext uri="{FF2B5EF4-FFF2-40B4-BE49-F238E27FC236}">
-                <a16:creationId xmlns:a16="http://schemas.microsoft.com/office/drawing/2014/main" id="{D24FFCD0-78B8-4D77-B7BC-DD38903766C4}"/>
+                <a16:creationId xmlns:a16="http://schemas.microsoft.com/office/drawing/2014/main" id="{F853FEF6-AEAE-45BD-AB36-428838B15961}"/>
               </a:ext>
             </a:extLst>
           </p:cNvPr>
@@ -30163,7 +31427,7 @@
           <p:cNvPr id="12" name="">
             <a:extLst xmlns:a="http://schemas.openxmlformats.org/drawingml/2006/main">
               <a:ext uri="{FF2B5EF4-FFF2-40B4-BE49-F238E27FC236}">
-                <a16:creationId xmlns:a16="http://schemas.microsoft.com/office/drawing/2014/main" id="{D2CB4EEE-E647-4A39-BF25-469470EFDBB8}"/>
+                <a16:creationId xmlns:a16="http://schemas.microsoft.com/office/drawing/2014/main" id="{2DECF7ED-FC95-4BFF-8FD0-99EDD739A113}"/>
               </a:ext>
             </a:extLst>
           </p:cNvPr>
@@ -30194,7 +31458,7 @@
           <p:cNvPr id="13" name="README만 수정&#10;테스트 명령은 없음">
             <a:extLst xmlns:a="http://schemas.openxmlformats.org/drawingml/2006/main">
               <a:ext uri="{FF2B5EF4-FFF2-40B4-BE49-F238E27FC236}">
-                <a16:creationId xmlns:a16="http://schemas.microsoft.com/office/drawing/2014/main" id="{22F58911-4EB3-47BD-B305-A5841FD1DFE5}"/>
+                <a16:creationId xmlns:a16="http://schemas.microsoft.com/office/drawing/2014/main" id="{AD5F6111-8C2D-479F-B986-96A2FA41A12A}"/>
               </a:ext>
             </a:extLst>
           </p:cNvPr>
@@ -30375,7 +31639,7 @@
           <p:cNvPr id="14" name="AGENTS.md">
             <a:extLst xmlns:a="http://schemas.openxmlformats.org/drawingml/2006/main">
               <a:ext uri="{FF2B5EF4-FFF2-40B4-BE49-F238E27FC236}">
-                <a16:creationId xmlns:a16="http://schemas.microsoft.com/office/drawing/2014/main" id="{B3C6FD4D-5863-4E5A-91FF-B731F9BF19EF}"/>
+                <a16:creationId xmlns:a16="http://schemas.microsoft.com/office/drawing/2014/main" id="{6ABC99D1-289E-4659-B015-5ED2C87B9778}"/>
               </a:ext>
             </a:extLst>
           </p:cNvPr>
@@ -30533,7 +31797,7 @@
           <p:cNvPr id="15" name="기록된 테스트&#10;명령을 사용">
             <a:extLst xmlns:a="http://schemas.openxmlformats.org/drawingml/2006/main">
               <a:ext uri="{FF2B5EF4-FFF2-40B4-BE49-F238E27FC236}">
-                <a16:creationId xmlns:a16="http://schemas.microsoft.com/office/drawing/2014/main" id="{3D199F7E-80F2-4ABB-A620-64A6C4BB2BF9}"/>
+                <a16:creationId xmlns:a16="http://schemas.microsoft.com/office/drawing/2014/main" id="{30783B54-4EF3-499F-98EA-2B0F9D126E83}"/>
               </a:ext>
             </a:extLst>
           </p:cNvPr>
@@ -30714,7 +31978,7 @@
           <p:cNvPr id="16" name="전체 테스트">
             <a:extLst xmlns:a="http://schemas.openxmlformats.org/drawingml/2006/main">
               <a:ext uri="{FF2B5EF4-FFF2-40B4-BE49-F238E27FC236}">
-                <a16:creationId xmlns:a16="http://schemas.microsoft.com/office/drawing/2014/main" id="{672FC87D-AE67-48AA-B0BB-5EEA0EA8A670}"/>
+                <a16:creationId xmlns:a16="http://schemas.microsoft.com/office/drawing/2014/main" id="{9B3B205C-6ADC-4A22-81DF-A8AFC63F227C}"/>
               </a:ext>
             </a:extLst>
           </p:cNvPr>
@@ -30872,7 +32136,7 @@
           <p:cNvPr id="17" name="11 / 11">
             <a:extLst xmlns:a="http://schemas.openxmlformats.org/drawingml/2006/main">
               <a:ext uri="{FF2B5EF4-FFF2-40B4-BE49-F238E27FC236}">
-                <a16:creationId xmlns:a16="http://schemas.microsoft.com/office/drawing/2014/main" id="{5D858D41-8D28-40E9-8CF3-FA8939AA18F6}"/>
+                <a16:creationId xmlns:a16="http://schemas.microsoft.com/office/drawing/2014/main" id="{6C88AD54-D5A0-49FC-B85F-401229B2C84B}"/>
               </a:ext>
             </a:extLst>
           </p:cNvPr>
@@ -31030,7 +32294,7 @@
           <p:cNvPr id="18" name="PASS">
             <a:extLst xmlns:a="http://schemas.openxmlformats.org/drawingml/2006/main">
               <a:ext uri="{FF2B5EF4-FFF2-40B4-BE49-F238E27FC236}">
-                <a16:creationId xmlns:a16="http://schemas.microsoft.com/office/drawing/2014/main" id="{0BF5E292-B589-41F0-8237-37BAA36A3A07}"/>
+                <a16:creationId xmlns:a16="http://schemas.microsoft.com/office/drawing/2014/main" id="{3A2CF285-3EF9-41CC-9E8E-DDA9EB0E8FCB}"/>
               </a:ext>
             </a:extLst>
           </p:cNvPr>
@@ -31188,7 +32452,7 @@
           <p:cNvPr id="19" name="">
             <a:extLst xmlns:a="http://schemas.openxmlformats.org/drawingml/2006/main">
               <a:ext uri="{FF2B5EF4-FFF2-40B4-BE49-F238E27FC236}">
-                <a16:creationId xmlns:a16="http://schemas.microsoft.com/office/drawing/2014/main" id="{622B5471-6D19-4E91-8D51-8DA19B6ABE99}"/>
+                <a16:creationId xmlns:a16="http://schemas.microsoft.com/office/drawing/2014/main" id="{43643DCA-852B-45AA-80FB-C0D8E891DA42}"/>
               </a:ext>
             </a:extLst>
           </p:cNvPr>
@@ -31218,7 +32482,7 @@
           <p:cNvPr id="20" name="">
             <a:extLst xmlns:a="http://schemas.openxmlformats.org/drawingml/2006/main">
               <a:ext uri="{FF2B5EF4-FFF2-40B4-BE49-F238E27FC236}">
-                <a16:creationId xmlns:a16="http://schemas.microsoft.com/office/drawing/2014/main" id="{BB77346A-BFA9-4BBB-A7D7-3E7AB0C10843}"/>
+                <a16:creationId xmlns:a16="http://schemas.microsoft.com/office/drawing/2014/main" id="{A03B8CCF-ACA2-4616-A790-6C4EC999076F}"/>
               </a:ext>
             </a:extLst>
           </p:cNvPr>
@@ -31248,7 +32512,7 @@
           <p:cNvPr id="21" name="">
             <a:extLst xmlns:a="http://schemas.openxmlformats.org/drawingml/2006/main">
               <a:ext uri="{FF2B5EF4-FFF2-40B4-BE49-F238E27FC236}">
-                <a16:creationId xmlns:a16="http://schemas.microsoft.com/office/drawing/2014/main" id="{3A4E51AC-D991-4EA9-A0A2-B933DDE3AA43}"/>
+                <a16:creationId xmlns:a16="http://schemas.microsoft.com/office/drawing/2014/main" id="{A4FFE757-5909-4457-9552-8D89B449C6A2}"/>
               </a:ext>
             </a:extLst>
           </p:cNvPr>
@@ -31279,7 +32543,7 @@
           <p:cNvPr id="22" name="README-only 범위는 작업 요청에도 명시돼 있었다">
             <a:extLst xmlns:a="http://schemas.openxmlformats.org/drawingml/2006/main">
               <a:ext uri="{FF2B5EF4-FFF2-40B4-BE49-F238E27FC236}">
-                <a16:creationId xmlns:a16="http://schemas.microsoft.com/office/drawing/2014/main" id="{D2155498-BE48-4E38-A759-6D1499EABB76}"/>
+                <a16:creationId xmlns:a16="http://schemas.microsoft.com/office/drawing/2014/main" id="{72893410-9511-4361-9B22-605E019F8FED}"/>
               </a:ext>
             </a:extLst>
           </p:cNvPr>
@@ -31432,10 +32696,168 @@
           </a:p>
         </p:txBody>
       </p:sp>
+      <p:sp>
+        <p:nvSpPr>
+          <p:cNvPr id="23" name="Legacy module connection">
+            <a:extLst xmlns:a="http://schemas.openxmlformats.org/drawingml/2006/main">
+              <a:ext uri="{FF2B5EF4-FFF2-40B4-BE49-F238E27FC236}">
+                <a16:creationId xmlns:a16="http://schemas.microsoft.com/office/drawing/2014/main" id="{C363ABEB-C575-4F7A-9F14-6F2AC13F3E6E}"/>
+              </a:ext>
+            </a:extLst>
+          </p:cNvPr>
+          <p:cNvSpPr>
+            <a:spLocks xmlns:a="http://schemas.openxmlformats.org/drawingml/2006/main" noGrp="1"/>
+          </p:cNvSpPr>
+          <p:nvPr/>
+        </p:nvSpPr>
+        <p:spPr>
+          <a:xfrm xmlns:a="http://schemas.openxmlformats.org/drawingml/2006/main">
+            <a:off x="609600" y="6229350"/>
+            <a:ext cx="10972800" cy="171450"/>
+          </a:xfrm>
+          <a:prstGeom xmlns:a="http://schemas.openxmlformats.org/drawingml/2006/main" prst="rect">
+            <a:avLst/>
+          </a:prstGeom>
+          <a:noFill xmlns:a="http://schemas.openxmlformats.org/drawingml/2006/main"/>
+          <a:ln xmlns:a="http://schemas.openxmlformats.org/drawingml/2006/main" w="0">
+            <a:noFill/>
+          </a:ln>
+        </p:spPr>
+        <p:txBody>
+          <a:bodyPr xmlns:a="http://schemas.openxmlformats.org/drawingml/2006/main" wrap="none" lIns="0" tIns="0" rIns="0" bIns="0" anchor="ctr">
+            <a:noAutofit/>
+          </a:bodyPr>
+          <a:lstStyle xmlns:a="http://schemas.openxmlformats.org/drawingml/2006/main">
+            <a:defPPr algn="r">
+              <a:defRPr sz="1200" b="0">
+                <a:solidFill>
+                  <a:srgbClr val="4D5A68"/>
+                </a:solidFill>
+                <a:latin typeface="Malgun Gothic"/>
+                <a:ea typeface="Malgun Gothic"/>
+                <a:cs typeface="Malgun Gothic"/>
+              </a:defRPr>
+            </a:defPPr>
+            <a:lvl1pPr algn="r">
+              <a:defRPr sz="1200" b="0">
+                <a:solidFill>
+                  <a:srgbClr val="4D5A68"/>
+                </a:solidFill>
+                <a:latin typeface="Malgun Gothic"/>
+                <a:ea typeface="Malgun Gothic"/>
+                <a:cs typeface="Malgun Gothic"/>
+              </a:defRPr>
+            </a:lvl1pPr>
+            <a:lvl2pPr algn="r">
+              <a:defRPr sz="1200" b="0">
+                <a:solidFill>
+                  <a:srgbClr val="4D5A68"/>
+                </a:solidFill>
+                <a:latin typeface="Malgun Gothic"/>
+                <a:ea typeface="Malgun Gothic"/>
+                <a:cs typeface="Malgun Gothic"/>
+              </a:defRPr>
+            </a:lvl2pPr>
+            <a:lvl3pPr algn="r">
+              <a:defRPr sz="1200" b="0">
+                <a:solidFill>
+                  <a:srgbClr val="4D5A68"/>
+                </a:solidFill>
+                <a:latin typeface="Malgun Gothic"/>
+                <a:ea typeface="Malgun Gothic"/>
+                <a:cs typeface="Malgun Gothic"/>
+              </a:defRPr>
+            </a:lvl3pPr>
+            <a:lvl4pPr algn="r">
+              <a:defRPr sz="1200" b="0">
+                <a:solidFill>
+                  <a:srgbClr val="4D5A68"/>
+                </a:solidFill>
+                <a:latin typeface="Malgun Gothic"/>
+                <a:ea typeface="Malgun Gothic"/>
+                <a:cs typeface="Malgun Gothic"/>
+              </a:defRPr>
+            </a:lvl4pPr>
+            <a:lvl5pPr algn="r">
+              <a:defRPr sz="1200" b="0">
+                <a:solidFill>
+                  <a:srgbClr val="4D5A68"/>
+                </a:solidFill>
+                <a:latin typeface="Malgun Gothic"/>
+                <a:ea typeface="Malgun Gothic"/>
+                <a:cs typeface="Malgun Gothic"/>
+              </a:defRPr>
+            </a:lvl5pPr>
+            <a:lvl6pPr algn="r">
+              <a:defRPr sz="1200" b="0">
+                <a:solidFill>
+                  <a:srgbClr val="4D5A68"/>
+                </a:solidFill>
+                <a:latin typeface="Malgun Gothic"/>
+                <a:ea typeface="Malgun Gothic"/>
+                <a:cs typeface="Malgun Gothic"/>
+              </a:defRPr>
+            </a:lvl6pPr>
+            <a:lvl7pPr algn="r">
+              <a:defRPr sz="1200" b="0">
+                <a:solidFill>
+                  <a:srgbClr val="4D5A68"/>
+                </a:solidFill>
+                <a:latin typeface="Malgun Gothic"/>
+                <a:ea typeface="Malgun Gothic"/>
+                <a:cs typeface="Malgun Gothic"/>
+              </a:defRPr>
+            </a:lvl7pPr>
+            <a:lvl8pPr algn="r">
+              <a:defRPr sz="1200" b="0">
+                <a:solidFill>
+                  <a:srgbClr val="4D5A68"/>
+                </a:solidFill>
+                <a:latin typeface="Malgun Gothic"/>
+                <a:ea typeface="Malgun Gothic"/>
+                <a:cs typeface="Malgun Gothic"/>
+              </a:defRPr>
+            </a:lvl8pPr>
+            <a:lvl9pPr algn="r">
+              <a:defRPr sz="1200" b="0">
+                <a:solidFill>
+                  <a:srgbClr val="4D5A68"/>
+                </a:solidFill>
+                <a:latin typeface="Malgun Gothic"/>
+                <a:ea typeface="Malgun Gothic"/>
+                <a:cs typeface="Malgun Gothic"/>
+              </a:defRPr>
+            </a:lvl9pPr>
+          </a:lstStyle>
+          <a:p xmlns:a="http://schemas.openxmlformats.org/drawingml/2006/main">
+            <a:pPr algn="r">
+              <a:defRPr sz="1200" b="0">
+                <a:solidFill>
+                  <a:srgbClr val="4D5A68"/>
+                </a:solidFill>
+                <a:latin typeface="Malgun Gothic"/>
+                <a:ea typeface="Malgun Gothic"/>
+                <a:cs typeface="Malgun Gothic"/>
+              </a:defRPr>
+            </a:pPr>
+            <a:r>
+              <a:rPr sz="1200" b="0">
+                <a:solidFill>
+                  <a:srgbClr val="4D5A68"/>
+                </a:solidFill>
+                <a:latin typeface="Malgun Gothic"/>
+                <a:ea typeface="Malgun Gothic"/>
+                <a:cs typeface="Malgun Gothic"/>
+              </a:rPr>
+              <a:t>M 연계 · M2</a:t>
+            </a:r>
+          </a:p>
+        </p:txBody>
+      </p:sp>
     </p:spTree>
     <p:extLst>
       <p:ext uri="{BB962C8B-B14F-4D97-AF65-F5344CB8AC3E}">
-        <p14:creationId xmlns:p14="http://schemas.microsoft.com/office/powerpoint/2010/main" val="944586695"/>
+        <p14:creationId xmlns:p14="http://schemas.microsoft.com/office/powerpoint/2010/main" val="1720756334"/>
       </p:ext>
     </p:extLst>
   </p:cSld>
@@ -31463,10 +32885,10 @@
       </p:grpSpPr>
       <p:sp>
         <p:nvSpPr>
-          <p:cNvPr id="20" name="ACT 2 · 정보의 범위와 수명">
+          <p:cNvPr id="21" name="ACT 2 · 정보의 범위와 수명">
             <a:extLst xmlns:a="http://schemas.openxmlformats.org/drawingml/2006/main">
               <a:ext uri="{FF2B5EF4-FFF2-40B4-BE49-F238E27FC236}">
-                <a16:creationId xmlns:a16="http://schemas.microsoft.com/office/drawing/2014/main" id="{7F56C700-16E1-40BF-A711-739CA5697449}"/>
+                <a16:creationId xmlns:a16="http://schemas.microsoft.com/office/drawing/2014/main" id="{6D02F3DB-3F79-4A71-873A-EA84E11E64D0}"/>
               </a:ext>
             </a:extLst>
           </p:cNvPr>
@@ -31624,7 +33046,7 @@
           <p:cNvPr id="2" name="S25">
             <a:extLst xmlns:a="http://schemas.openxmlformats.org/drawingml/2006/main">
               <a:ext uri="{FF2B5EF4-FFF2-40B4-BE49-F238E27FC236}">
-                <a16:creationId xmlns:a16="http://schemas.microsoft.com/office/drawing/2014/main" id="{1EA67E31-9043-4924-9B4F-E9502CE7C3EA}"/>
+                <a16:creationId xmlns:a16="http://schemas.microsoft.com/office/drawing/2014/main" id="{E2A986FC-86AE-4F79-9A40-78EF5F91E4B9}"/>
               </a:ext>
             </a:extLst>
           </p:cNvPr>
@@ -31782,7 +33204,7 @@
           <p:cNvPr id="3" name="Task Prompt와 Project Context">
             <a:extLst xmlns:a="http://schemas.openxmlformats.org/drawingml/2006/main">
               <a:ext uri="{FF2B5EF4-FFF2-40B4-BE49-F238E27FC236}">
-                <a16:creationId xmlns:a16="http://schemas.microsoft.com/office/drawing/2014/main" id="{2844A6FB-A62F-46AD-86B9-29781F24A711}"/>
+                <a16:creationId xmlns:a16="http://schemas.microsoft.com/office/drawing/2014/main" id="{5860E576-9194-4DE9-A9E9-59286FFD0A1F}"/>
               </a:ext>
             </a:extLst>
           </p:cNvPr>
@@ -31940,7 +33362,7 @@
           <p:cNvPr id="4" name="">
             <a:extLst xmlns:a="http://schemas.openxmlformats.org/drawingml/2006/main">
               <a:ext uri="{FF2B5EF4-FFF2-40B4-BE49-F238E27FC236}">
-                <a16:creationId xmlns:a16="http://schemas.microsoft.com/office/drawing/2014/main" id="{F30F2CC4-F964-4341-8B1A-10C8055F69BB}"/>
+                <a16:creationId xmlns:a16="http://schemas.microsoft.com/office/drawing/2014/main" id="{2203FB44-5920-493B-86B9-641E4673CCDC}"/>
               </a:ext>
             </a:extLst>
           </p:cNvPr>
@@ -31951,7 +33373,7 @@
         </p:nvSpPr>
         <p:spPr>
           <a:xfrm xmlns:a="http://schemas.openxmlformats.org/drawingml/2006/main">
-            <a:off x="609600" y="5829300"/>
+            <a:off x="609600" y="5753100"/>
             <a:ext cx="10972800" cy="0"/>
           </a:xfrm>
           <a:prstGeom xmlns:a="http://schemas.openxmlformats.org/drawingml/2006/main" prst="line">
@@ -31971,7 +33393,7 @@
           <p:cNvPr id="5" name="교육용 구분 · 현재 목표와 지속되는 프로젝트 사실">
             <a:extLst xmlns:a="http://schemas.openxmlformats.org/drawingml/2006/main">
               <a:ext uri="{FF2B5EF4-FFF2-40B4-BE49-F238E27FC236}">
-                <a16:creationId xmlns:a16="http://schemas.microsoft.com/office/drawing/2014/main" id="{B4A929AA-87EC-480C-A3E2-0686221CF914}"/>
+                <a16:creationId xmlns:a16="http://schemas.microsoft.com/office/drawing/2014/main" id="{52557598-ACC4-47DC-B2B0-A49FE7D8CD7A}"/>
               </a:ext>
             </a:extLst>
           </p:cNvPr>
@@ -31982,8 +33404,8 @@
         </p:nvSpPr>
         <p:spPr>
           <a:xfrm xmlns:a="http://schemas.openxmlformats.org/drawingml/2006/main">
-            <a:off x="609600" y="5915025"/>
-            <a:ext cx="10972800" cy="247650"/>
+            <a:off x="609600" y="5791200"/>
+            <a:ext cx="10972800" cy="228600"/>
           </a:xfrm>
           <a:prstGeom xmlns:a="http://schemas.openxmlformats.org/drawingml/2006/main" prst="rect">
             <a:avLst/>
@@ -32129,7 +33551,7 @@
           <p:cNvPr id="6" name="C++에서도 프로젝트 공통 제약과 이번 알고리즘 변경 조건은 범위가 다를 수 있다">
             <a:extLst xmlns:a="http://schemas.openxmlformats.org/drawingml/2006/main">
               <a:ext uri="{FF2B5EF4-FFF2-40B4-BE49-F238E27FC236}">
-                <a16:creationId xmlns:a16="http://schemas.microsoft.com/office/drawing/2014/main" id="{C85EDD66-0377-4A27-90A1-3D775C34AD9F}"/>
+                <a16:creationId xmlns:a16="http://schemas.microsoft.com/office/drawing/2014/main" id="{F4322792-8FE5-4C31-8FA6-B201B388C87B}"/>
               </a:ext>
             </a:extLst>
           </p:cNvPr>
@@ -32140,7 +33562,7 @@
         </p:nvSpPr>
         <p:spPr>
           <a:xfrm xmlns:a="http://schemas.openxmlformats.org/drawingml/2006/main">
-            <a:off x="609600" y="6191250"/>
+            <a:off x="609600" y="6019800"/>
             <a:ext cx="10972800" cy="209550"/>
           </a:xfrm>
           <a:prstGeom xmlns:a="http://schemas.openxmlformats.org/drawingml/2006/main" prst="rect">
@@ -32287,7 +33709,7 @@
           <p:cNvPr id="7" name="방금 본 기록을 범위와 수명으로 읽어보면">
             <a:extLst xmlns:a="http://schemas.openxmlformats.org/drawingml/2006/main">
               <a:ext uri="{FF2B5EF4-FFF2-40B4-BE49-F238E27FC236}">
-                <a16:creationId xmlns:a16="http://schemas.microsoft.com/office/drawing/2014/main" id="{688D7E81-338B-4D77-ADE5-E8B6380A8819}"/>
+                <a16:creationId xmlns:a16="http://schemas.microsoft.com/office/drawing/2014/main" id="{EF8F48DD-2305-4D57-870C-B593A39C8545}"/>
               </a:ext>
             </a:extLst>
           </p:cNvPr>
@@ -32445,7 +33867,7 @@
           <p:cNvPr id="8" name="Task Prompt">
             <a:extLst xmlns:a="http://schemas.openxmlformats.org/drawingml/2006/main">
               <a:ext uri="{FF2B5EF4-FFF2-40B4-BE49-F238E27FC236}">
-                <a16:creationId xmlns:a16="http://schemas.microsoft.com/office/drawing/2014/main" id="{445665D9-EAB0-451A-B495-BAB5C6B30956}"/>
+                <a16:creationId xmlns:a16="http://schemas.microsoft.com/office/drawing/2014/main" id="{FE959CD4-E559-44F3-8D7D-85B2BDD81142}"/>
               </a:ext>
             </a:extLst>
           </p:cNvPr>
@@ -32603,7 +34025,7 @@
           <p:cNvPr id="9" name="Project Context">
             <a:extLst xmlns:a="http://schemas.openxmlformats.org/drawingml/2006/main">
               <a:ext uri="{FF2B5EF4-FFF2-40B4-BE49-F238E27FC236}">
-                <a16:creationId xmlns:a16="http://schemas.microsoft.com/office/drawing/2014/main" id="{245A52E1-5C72-4F18-9873-8FF31E0049D1}"/>
+                <a16:creationId xmlns:a16="http://schemas.microsoft.com/office/drawing/2014/main" id="{8E50EB89-DAA1-4C04-9CE7-E870A6D79DEC}"/>
               </a:ext>
             </a:extLst>
           </p:cNvPr>
@@ -32761,7 +34183,7 @@
           <p:cNvPr id="10" name="">
             <a:extLst xmlns:a="http://schemas.openxmlformats.org/drawingml/2006/main">
               <a:ext uri="{FF2B5EF4-FFF2-40B4-BE49-F238E27FC236}">
-                <a16:creationId xmlns:a16="http://schemas.microsoft.com/office/drawing/2014/main" id="{1C5D9690-A3A3-46C9-8BCB-B7B55C646F17}"/>
+                <a16:creationId xmlns:a16="http://schemas.microsoft.com/office/drawing/2014/main" id="{77FA6A22-FC6F-4FE1-8720-8D20EA697692}"/>
               </a:ext>
             </a:extLst>
           </p:cNvPr>
@@ -32792,7 +34214,7 @@
           <p:cNvPr id="11" name="">
             <a:extLst xmlns:a="http://schemas.openxmlformats.org/drawingml/2006/main">
               <a:ext uri="{FF2B5EF4-FFF2-40B4-BE49-F238E27FC236}">
-                <a16:creationId xmlns:a16="http://schemas.microsoft.com/office/drawing/2014/main" id="{65546948-7A55-44C2-A067-89F364F8E998}"/>
+                <a16:creationId xmlns:a16="http://schemas.microsoft.com/office/drawing/2014/main" id="{AB1A27C4-0443-40DF-ABFD-FB1253C51EFB}"/>
               </a:ext>
             </a:extLst>
           </p:cNvPr>
@@ -32823,7 +34245,7 @@
           <p:cNvPr id="12" name="지금 원하는 결과">
             <a:extLst xmlns:a="http://schemas.openxmlformats.org/drawingml/2006/main">
               <a:ext uri="{FF2B5EF4-FFF2-40B4-BE49-F238E27FC236}">
-                <a16:creationId xmlns:a16="http://schemas.microsoft.com/office/drawing/2014/main" id="{B82A0FB1-34B3-42E2-A8FD-BB29EAD17AD8}"/>
+                <a16:creationId xmlns:a16="http://schemas.microsoft.com/office/drawing/2014/main" id="{00A1F813-B61A-4B75-A55C-55342CAAFF6A}"/>
               </a:ext>
             </a:extLst>
           </p:cNvPr>
@@ -32981,7 +34403,7 @@
           <p:cNvPr id="13" name="계속 참이어야 할 사실">
             <a:extLst xmlns:a="http://schemas.openxmlformats.org/drawingml/2006/main">
               <a:ext uri="{FF2B5EF4-FFF2-40B4-BE49-F238E27FC236}">
-                <a16:creationId xmlns:a16="http://schemas.microsoft.com/office/drawing/2014/main" id="{9652BF72-50BD-4810-9EF5-828B758758DF}"/>
+                <a16:creationId xmlns:a16="http://schemas.microsoft.com/office/drawing/2014/main" id="{BDFDA96C-2FAF-4B35-B97A-624F9B19A9AC}"/>
               </a:ext>
             </a:extLst>
           </p:cNvPr>
@@ -33139,7 +34561,7 @@
           <p:cNvPr id="14" name="crop 경계 버그 수정&#10;이번에는 README만 변경">
             <a:extLst xmlns:a="http://schemas.openxmlformats.org/drawingml/2006/main">
               <a:ext uri="{FF2B5EF4-FFF2-40B4-BE49-F238E27FC236}">
-                <a16:creationId xmlns:a16="http://schemas.microsoft.com/office/drawing/2014/main" id="{DC600B69-E53B-42AE-88FE-094D4B4BD92A}"/>
+                <a16:creationId xmlns:a16="http://schemas.microsoft.com/office/drawing/2014/main" id="{6AB23137-67F1-4296-9CA0-E1F09B9A4852}"/>
               </a:ext>
             </a:extLst>
           </p:cNvPr>
@@ -33320,7 +34742,7 @@
           <p:cNvPr id="15" name="프로젝트의 테스트 명령&#10;의존성 추가에는 작업상 근거 필요">
             <a:extLst xmlns:a="http://schemas.openxmlformats.org/drawingml/2006/main">
               <a:ext uri="{FF2B5EF4-FFF2-40B4-BE49-F238E27FC236}">
-                <a16:creationId xmlns:a16="http://schemas.microsoft.com/office/drawing/2014/main" id="{C674801E-BA19-479A-B34B-CF5BFF13BCCE}"/>
+                <a16:creationId xmlns:a16="http://schemas.microsoft.com/office/drawing/2014/main" id="{86D10C53-8134-4375-A1B2-AED1BA509F37}"/>
               </a:ext>
             </a:extLst>
           </p:cNvPr>
@@ -33501,7 +34923,7 @@
           <p:cNvPr id="16" name="">
             <a:extLst xmlns:a="http://schemas.openxmlformats.org/drawingml/2006/main">
               <a:ext uri="{FF2B5EF4-FFF2-40B4-BE49-F238E27FC236}">
-                <a16:creationId xmlns:a16="http://schemas.microsoft.com/office/drawing/2014/main" id="{70FA8E34-EE53-4A07-B831-B368A23599FF}"/>
+                <a16:creationId xmlns:a16="http://schemas.microsoft.com/office/drawing/2014/main" id="{7DFEDB2B-25BF-47F1-89B9-15BAB4096032}"/>
               </a:ext>
             </a:extLst>
           </p:cNvPr>
@@ -33534,7 +34956,7 @@
           <p:cNvPr id="17" name="">
             <a:extLst xmlns:a="http://schemas.openxmlformats.org/drawingml/2006/main">
               <a:ext uri="{FF2B5EF4-FFF2-40B4-BE49-F238E27FC236}">
-                <a16:creationId xmlns:a16="http://schemas.microsoft.com/office/drawing/2014/main" id="{F180724F-E3FB-4334-A5BB-CAA0B7F328A5}"/>
+                <a16:creationId xmlns:a16="http://schemas.microsoft.com/office/drawing/2014/main" id="{7A57FAF2-FDF0-4C8E-BC33-6BD145828016}"/>
               </a:ext>
             </a:extLst>
           </p:cNvPr>
@@ -33565,7 +34987,7 @@
           <p:cNvPr id="18" name="다음 작업에서는 목표가 달라짐">
             <a:extLst xmlns:a="http://schemas.openxmlformats.org/drawingml/2006/main">
               <a:ext uri="{FF2B5EF4-FFF2-40B4-BE49-F238E27FC236}">
-                <a16:creationId xmlns:a16="http://schemas.microsoft.com/office/drawing/2014/main" id="{72DF5D90-E641-4C53-ACE6-5F56C94AFA70}"/>
+                <a16:creationId xmlns:a16="http://schemas.microsoft.com/office/drawing/2014/main" id="{30A4FADB-C427-4562-81C4-D5E8BF6851B3}"/>
               </a:ext>
             </a:extLst>
           </p:cNvPr>
@@ -33723,7 +35145,7 @@
           <p:cNvPr id="19" name="여러 작업에서 다시 참고">
             <a:extLst xmlns:a="http://schemas.openxmlformats.org/drawingml/2006/main">
               <a:ext uri="{FF2B5EF4-FFF2-40B4-BE49-F238E27FC236}">
-                <a16:creationId xmlns:a16="http://schemas.microsoft.com/office/drawing/2014/main" id="{F3A4C6F1-6AF8-4D0F-A80C-2321ED734B36}"/>
+                <a16:creationId xmlns:a16="http://schemas.microsoft.com/office/drawing/2014/main" id="{8512FB62-7BD4-460B-9347-21A6C2279677}"/>
               </a:ext>
             </a:extLst>
           </p:cNvPr>
@@ -33876,10 +35298,168 @@
           </a:p>
         </p:txBody>
       </p:sp>
+      <p:sp>
+        <p:nvSpPr>
+          <p:cNvPr id="20" name="Legacy module connection">
+            <a:extLst xmlns:a="http://schemas.openxmlformats.org/drawingml/2006/main">
+              <a:ext uri="{FF2B5EF4-FFF2-40B4-BE49-F238E27FC236}">
+                <a16:creationId xmlns:a16="http://schemas.microsoft.com/office/drawing/2014/main" id="{9362139F-E546-46A6-94DB-93B89B3A7F3B}"/>
+              </a:ext>
+            </a:extLst>
+          </p:cNvPr>
+          <p:cNvSpPr>
+            <a:spLocks xmlns:a="http://schemas.openxmlformats.org/drawingml/2006/main" noGrp="1"/>
+          </p:cNvSpPr>
+          <p:nvPr/>
+        </p:nvSpPr>
+        <p:spPr>
+          <a:xfrm xmlns:a="http://schemas.openxmlformats.org/drawingml/2006/main">
+            <a:off x="609600" y="6229350"/>
+            <a:ext cx="10972800" cy="171450"/>
+          </a:xfrm>
+          <a:prstGeom xmlns:a="http://schemas.openxmlformats.org/drawingml/2006/main" prst="rect">
+            <a:avLst/>
+          </a:prstGeom>
+          <a:noFill xmlns:a="http://schemas.openxmlformats.org/drawingml/2006/main"/>
+          <a:ln xmlns:a="http://schemas.openxmlformats.org/drawingml/2006/main" w="0">
+            <a:noFill/>
+          </a:ln>
+        </p:spPr>
+        <p:txBody>
+          <a:bodyPr xmlns:a="http://schemas.openxmlformats.org/drawingml/2006/main" wrap="none" lIns="0" tIns="0" rIns="0" bIns="0" anchor="ctr">
+            <a:noAutofit/>
+          </a:bodyPr>
+          <a:lstStyle xmlns:a="http://schemas.openxmlformats.org/drawingml/2006/main">
+            <a:defPPr algn="r">
+              <a:defRPr sz="1200" b="0">
+                <a:solidFill>
+                  <a:srgbClr val="4D5A68"/>
+                </a:solidFill>
+                <a:latin typeface="Malgun Gothic"/>
+                <a:ea typeface="Malgun Gothic"/>
+                <a:cs typeface="Malgun Gothic"/>
+              </a:defRPr>
+            </a:defPPr>
+            <a:lvl1pPr algn="r">
+              <a:defRPr sz="1200" b="0">
+                <a:solidFill>
+                  <a:srgbClr val="4D5A68"/>
+                </a:solidFill>
+                <a:latin typeface="Malgun Gothic"/>
+                <a:ea typeface="Malgun Gothic"/>
+                <a:cs typeface="Malgun Gothic"/>
+              </a:defRPr>
+            </a:lvl1pPr>
+            <a:lvl2pPr algn="r">
+              <a:defRPr sz="1200" b="0">
+                <a:solidFill>
+                  <a:srgbClr val="4D5A68"/>
+                </a:solidFill>
+                <a:latin typeface="Malgun Gothic"/>
+                <a:ea typeface="Malgun Gothic"/>
+                <a:cs typeface="Malgun Gothic"/>
+              </a:defRPr>
+            </a:lvl2pPr>
+            <a:lvl3pPr algn="r">
+              <a:defRPr sz="1200" b="0">
+                <a:solidFill>
+                  <a:srgbClr val="4D5A68"/>
+                </a:solidFill>
+                <a:latin typeface="Malgun Gothic"/>
+                <a:ea typeface="Malgun Gothic"/>
+                <a:cs typeface="Malgun Gothic"/>
+              </a:defRPr>
+            </a:lvl3pPr>
+            <a:lvl4pPr algn="r">
+              <a:defRPr sz="1200" b="0">
+                <a:solidFill>
+                  <a:srgbClr val="4D5A68"/>
+                </a:solidFill>
+                <a:latin typeface="Malgun Gothic"/>
+                <a:ea typeface="Malgun Gothic"/>
+                <a:cs typeface="Malgun Gothic"/>
+              </a:defRPr>
+            </a:lvl4pPr>
+            <a:lvl5pPr algn="r">
+              <a:defRPr sz="1200" b="0">
+                <a:solidFill>
+                  <a:srgbClr val="4D5A68"/>
+                </a:solidFill>
+                <a:latin typeface="Malgun Gothic"/>
+                <a:ea typeface="Malgun Gothic"/>
+                <a:cs typeface="Malgun Gothic"/>
+              </a:defRPr>
+            </a:lvl5pPr>
+            <a:lvl6pPr algn="r">
+              <a:defRPr sz="1200" b="0">
+                <a:solidFill>
+                  <a:srgbClr val="4D5A68"/>
+                </a:solidFill>
+                <a:latin typeface="Malgun Gothic"/>
+                <a:ea typeface="Malgun Gothic"/>
+                <a:cs typeface="Malgun Gothic"/>
+              </a:defRPr>
+            </a:lvl6pPr>
+            <a:lvl7pPr algn="r">
+              <a:defRPr sz="1200" b="0">
+                <a:solidFill>
+                  <a:srgbClr val="4D5A68"/>
+                </a:solidFill>
+                <a:latin typeface="Malgun Gothic"/>
+                <a:ea typeface="Malgun Gothic"/>
+                <a:cs typeface="Malgun Gothic"/>
+              </a:defRPr>
+            </a:lvl7pPr>
+            <a:lvl8pPr algn="r">
+              <a:defRPr sz="1200" b="0">
+                <a:solidFill>
+                  <a:srgbClr val="4D5A68"/>
+                </a:solidFill>
+                <a:latin typeface="Malgun Gothic"/>
+                <a:ea typeface="Malgun Gothic"/>
+                <a:cs typeface="Malgun Gothic"/>
+              </a:defRPr>
+            </a:lvl8pPr>
+            <a:lvl9pPr algn="r">
+              <a:defRPr sz="1200" b="0">
+                <a:solidFill>
+                  <a:srgbClr val="4D5A68"/>
+                </a:solidFill>
+                <a:latin typeface="Malgun Gothic"/>
+                <a:ea typeface="Malgun Gothic"/>
+                <a:cs typeface="Malgun Gothic"/>
+              </a:defRPr>
+            </a:lvl9pPr>
+          </a:lstStyle>
+          <a:p xmlns:a="http://schemas.openxmlformats.org/drawingml/2006/main">
+            <a:pPr algn="r">
+              <a:defRPr sz="1200" b="0">
+                <a:solidFill>
+                  <a:srgbClr val="4D5A68"/>
+                </a:solidFill>
+                <a:latin typeface="Malgun Gothic"/>
+                <a:ea typeface="Malgun Gothic"/>
+                <a:cs typeface="Malgun Gothic"/>
+              </a:defRPr>
+            </a:pPr>
+            <a:r>
+              <a:rPr sz="1200" b="0">
+                <a:solidFill>
+                  <a:srgbClr val="4D5A68"/>
+                </a:solidFill>
+                <a:latin typeface="Malgun Gothic"/>
+                <a:ea typeface="Malgun Gothic"/>
+                <a:cs typeface="Malgun Gothic"/>
+              </a:rPr>
+              <a:t>M 연계 · M2</a:t>
+            </a:r>
+          </a:p>
+        </p:txBody>
+      </p:sp>
     </p:spTree>
     <p:extLst>
       <p:ext uri="{BB962C8B-B14F-4D97-AF65-F5344CB8AC3E}">
-        <p14:creationId xmlns:p14="http://schemas.microsoft.com/office/powerpoint/2010/main" val="400882369"/>
+        <p14:creationId xmlns:p14="http://schemas.microsoft.com/office/powerpoint/2010/main" val="1223768098"/>
       </p:ext>
     </p:extLst>
   </p:cSld>
@@ -33907,10 +35487,10 @@
       </p:grpSpPr>
       <p:sp>
         <p:nvSpPr>
-          <p:cNvPr id="26" name="ACT 2 · Context가 쌓이는 과정">
+          <p:cNvPr id="27" name="ACT 2 · Context가 쌓이는 과정">
             <a:extLst xmlns:a="http://schemas.openxmlformats.org/drawingml/2006/main">
               <a:ext uri="{FF2B5EF4-FFF2-40B4-BE49-F238E27FC236}">
-                <a16:creationId xmlns:a16="http://schemas.microsoft.com/office/drawing/2014/main" id="{1B44C9A3-6989-4BFB-AA46-D3EC70743946}"/>
+                <a16:creationId xmlns:a16="http://schemas.microsoft.com/office/drawing/2014/main" id="{21E65246-B0CF-4A9B-85EB-8F2AC62CC847}"/>
               </a:ext>
             </a:extLst>
           </p:cNvPr>
@@ -34068,7 +35648,7 @@
           <p:cNvPr id="2" name="S26">
             <a:extLst xmlns:a="http://schemas.openxmlformats.org/drawingml/2006/main">
               <a:ext uri="{FF2B5EF4-FFF2-40B4-BE49-F238E27FC236}">
-                <a16:creationId xmlns:a16="http://schemas.microsoft.com/office/drawing/2014/main" id="{1486B537-1460-44D0-8501-7DD17C2E0BF5}"/>
+                <a16:creationId xmlns:a16="http://schemas.microsoft.com/office/drawing/2014/main" id="{E2CDECCD-0C80-4C61-92C3-09D21C2337B9}"/>
               </a:ext>
             </a:extLst>
           </p:cNvPr>
@@ -34226,7 +35806,7 @@
           <p:cNvPr id="3" name="정확한 정보도 계속 늘어난다">
             <a:extLst xmlns:a="http://schemas.openxmlformats.org/drawingml/2006/main">
               <a:ext uri="{FF2B5EF4-FFF2-40B4-BE49-F238E27FC236}">
-                <a16:creationId xmlns:a16="http://schemas.microsoft.com/office/drawing/2014/main" id="{BE927105-068D-4639-8B53-64A4458BDEF3}"/>
+                <a16:creationId xmlns:a16="http://schemas.microsoft.com/office/drawing/2014/main" id="{69B880DD-2599-4B04-A882-3733B2521457}"/>
               </a:ext>
             </a:extLst>
           </p:cNvPr>
@@ -34384,7 +35964,7 @@
           <p:cNvPr id="4" name="">
             <a:extLst xmlns:a="http://schemas.openxmlformats.org/drawingml/2006/main">
               <a:ext uri="{FF2B5EF4-FFF2-40B4-BE49-F238E27FC236}">
-                <a16:creationId xmlns:a16="http://schemas.microsoft.com/office/drawing/2014/main" id="{DE72C25F-BD56-4040-A684-DBFB94CBA0E2}"/>
+                <a16:creationId xmlns:a16="http://schemas.microsoft.com/office/drawing/2014/main" id="{E9C84AE7-13F4-4FD5-8241-8BA46575E730}"/>
               </a:ext>
             </a:extLst>
           </p:cNvPr>
@@ -34395,7 +35975,7 @@
         </p:nvSpPr>
         <p:spPr>
           <a:xfrm xmlns:a="http://schemas.openxmlformats.org/drawingml/2006/main">
-            <a:off x="609600" y="5829300"/>
+            <a:off x="609600" y="5753100"/>
             <a:ext cx="10972800" cy="0"/>
           </a:xfrm>
           <a:prstGeom xmlns:a="http://schemas.openxmlformats.org/drawingml/2006/main" prst="line">
@@ -34415,7 +35995,7 @@
           <p:cNvPr id="5" name="STATE-01 → STATE-02 · 실제 AGENTS.md 상태 비교">
             <a:extLst xmlns:a="http://schemas.openxmlformats.org/drawingml/2006/main">
               <a:ext uri="{FF2B5EF4-FFF2-40B4-BE49-F238E27FC236}">
-                <a16:creationId xmlns:a16="http://schemas.microsoft.com/office/drawing/2014/main" id="{22AFF68A-878F-4960-93B0-3F830C138791}"/>
+                <a16:creationId xmlns:a16="http://schemas.microsoft.com/office/drawing/2014/main" id="{BD458301-BEB9-4C95-811F-8DC30E9C6734}"/>
               </a:ext>
             </a:extLst>
           </p:cNvPr>
@@ -34426,8 +36006,8 @@
         </p:nvSpPr>
         <p:spPr>
           <a:xfrm xmlns:a="http://schemas.openxmlformats.org/drawingml/2006/main">
-            <a:off x="609600" y="5915025"/>
-            <a:ext cx="10972800" cy="247650"/>
+            <a:off x="609600" y="5791200"/>
+            <a:ext cx="10972800" cy="228600"/>
           </a:xfrm>
           <a:prstGeom xmlns:a="http://schemas.openxmlformats.org/drawingml/2006/main" prst="rect">
             <a:avLst/>
@@ -34573,7 +36153,7 @@
           <p:cNvPr id="6" name="문서 크기는 상태 식별 정보 · Context 증가가 실패를 일으켰다는 근거는 아님">
             <a:extLst xmlns:a="http://schemas.openxmlformats.org/drawingml/2006/main">
               <a:ext uri="{FF2B5EF4-FFF2-40B4-BE49-F238E27FC236}">
-                <a16:creationId xmlns:a16="http://schemas.microsoft.com/office/drawing/2014/main" id="{41524FCC-0F3A-4BBB-AEEC-C3E2E740ADE9}"/>
+                <a16:creationId xmlns:a16="http://schemas.microsoft.com/office/drawing/2014/main" id="{3D522AD0-9648-4985-9110-4FDBFE1BF3D0}"/>
               </a:ext>
             </a:extLst>
           </p:cNvPr>
@@ -34584,7 +36164,7 @@
         </p:nvSpPr>
         <p:spPr>
           <a:xfrm xmlns:a="http://schemas.openxmlformats.org/drawingml/2006/main">
-            <a:off x="609600" y="6191250"/>
+            <a:off x="609600" y="6019800"/>
             <a:ext cx="10972800" cy="209550"/>
           </a:xfrm>
           <a:prstGeom xmlns:a="http://schemas.openxmlformats.org/drawingml/2006/main" prst="rect">
@@ -34731,7 +36311,7 @@
           <p:cNvPr id="7" name="STATE-01">
             <a:extLst xmlns:a="http://schemas.openxmlformats.org/drawingml/2006/main">
               <a:ext uri="{FF2B5EF4-FFF2-40B4-BE49-F238E27FC236}">
-                <a16:creationId xmlns:a16="http://schemas.microsoft.com/office/drawing/2014/main" id="{45141453-D735-4924-86EE-EFF25B4765F2}"/>
+                <a16:creationId xmlns:a16="http://schemas.microsoft.com/office/drawing/2014/main" id="{3E5A3276-9852-4730-A083-D459BFA5712F}"/>
               </a:ext>
             </a:extLst>
           </p:cNvPr>
@@ -34889,7 +36469,7 @@
           <p:cNvPr id="8" name="목적 · 실행 · 테스트&#10;기본 제약">
             <a:extLst xmlns:a="http://schemas.openxmlformats.org/drawingml/2006/main">
               <a:ext uri="{FF2B5EF4-FFF2-40B4-BE49-F238E27FC236}">
-                <a16:creationId xmlns:a16="http://schemas.microsoft.com/office/drawing/2014/main" id="{0A6D8A35-44AC-466E-B52F-E851D8225AD2}"/>
+                <a16:creationId xmlns:a16="http://schemas.microsoft.com/office/drawing/2014/main" id="{C07B7D1F-18EA-4F36-A9DA-E4F5370B5A7C}"/>
               </a:ext>
             </a:extLst>
           </p:cNvPr>
@@ -35070,7 +36650,7 @@
           <p:cNvPr id="9" name="15줄 · 567 bytes">
             <a:extLst xmlns:a="http://schemas.openxmlformats.org/drawingml/2006/main">
               <a:ext uri="{FF2B5EF4-FFF2-40B4-BE49-F238E27FC236}">
-                <a16:creationId xmlns:a16="http://schemas.microsoft.com/office/drawing/2014/main" id="{92805A75-DF76-4AA3-A10A-76DC8D3390E8}"/>
+                <a16:creationId xmlns:a16="http://schemas.microsoft.com/office/drawing/2014/main" id="{6FCE359E-06A6-48DE-8C1D-60F9C4952731}"/>
               </a:ext>
             </a:extLst>
           </p:cNvPr>
@@ -35228,7 +36808,7 @@
           <p:cNvPr id="10" name="">
             <a:extLst xmlns:a="http://schemas.openxmlformats.org/drawingml/2006/main">
               <a:ext uri="{FF2B5EF4-FFF2-40B4-BE49-F238E27FC236}">
-                <a16:creationId xmlns:a16="http://schemas.microsoft.com/office/drawing/2014/main" id="{0C43CCF3-8CE0-408A-8535-F96BF30C4B8B}"/>
+                <a16:creationId xmlns:a16="http://schemas.microsoft.com/office/drawing/2014/main" id="{65491B48-186E-4108-BFF7-3077171246EF}"/>
               </a:ext>
             </a:extLst>
           </p:cNvPr>
@@ -35258,7 +36838,7 @@
           <p:cNvPr id="11" name="STATE-02에 추가된 실제 정보">
             <a:extLst xmlns:a="http://schemas.openxmlformats.org/drawingml/2006/main">
               <a:ext uri="{FF2B5EF4-FFF2-40B4-BE49-F238E27FC236}">
-                <a16:creationId xmlns:a16="http://schemas.microsoft.com/office/drawing/2014/main" id="{836B223B-7A4F-495A-9A45-A0CB26F7572C}"/>
+                <a16:creationId xmlns:a16="http://schemas.microsoft.com/office/drawing/2014/main" id="{731094C6-BE24-4BA7-8111-443F016DE69D}"/>
               </a:ext>
             </a:extLst>
           </p:cNvPr>
@@ -35416,7 +36996,7 @@
           <p:cNvPr id="12" name="">
             <a:extLst xmlns:a="http://schemas.openxmlformats.org/drawingml/2006/main">
               <a:ext uri="{FF2B5EF4-FFF2-40B4-BE49-F238E27FC236}">
-                <a16:creationId xmlns:a16="http://schemas.microsoft.com/office/drawing/2014/main" id="{C4538EAC-CF86-4B26-9219-7353E5CCBC66}"/>
+                <a16:creationId xmlns:a16="http://schemas.microsoft.com/office/drawing/2014/main" id="{AFB7FFD8-238F-48E1-8A3C-11238BE6644F}"/>
               </a:ext>
             </a:extLst>
           </p:cNvPr>
@@ -35447,7 +37027,7 @@
           <p:cNvPr id="13" name="처리 순서">
             <a:extLst xmlns:a="http://schemas.openxmlformats.org/drawingml/2006/main">
               <a:ext uri="{FF2B5EF4-FFF2-40B4-BE49-F238E27FC236}">
-                <a16:creationId xmlns:a16="http://schemas.microsoft.com/office/drawing/2014/main" id="{3B681EA9-692C-47A7-AECB-D930A763DE0A}"/>
+                <a16:creationId xmlns:a16="http://schemas.microsoft.com/office/drawing/2014/main" id="{09CFCBB6-F43C-406F-8F56-ACC14DDD20EB}"/>
               </a:ext>
             </a:extLst>
           </p:cNvPr>
@@ -35605,7 +37185,7 @@
           <p:cNvPr id="14" name="load → normalize → … → write">
             <a:extLst xmlns:a="http://schemas.openxmlformats.org/drawingml/2006/main">
               <a:ext uri="{FF2B5EF4-FFF2-40B4-BE49-F238E27FC236}">
-                <a16:creationId xmlns:a16="http://schemas.microsoft.com/office/drawing/2014/main" id="{A2DA7FFD-A6A9-4081-92E4-DEE90E0ED90F}"/>
+                <a16:creationId xmlns:a16="http://schemas.microsoft.com/office/drawing/2014/main" id="{28CC6E4E-21B7-4B01-858E-97917D729AE0}"/>
               </a:ext>
             </a:extLst>
           </p:cNvPr>
@@ -35763,7 +37343,7 @@
           <p:cNvPr id="15" name="">
             <a:extLst xmlns:a="http://schemas.openxmlformats.org/drawingml/2006/main">
               <a:ext uri="{FF2B5EF4-FFF2-40B4-BE49-F238E27FC236}">
-                <a16:creationId xmlns:a16="http://schemas.microsoft.com/office/drawing/2014/main" id="{F6259343-EE1A-40F6-A7F6-3BEFF31DF8A6}"/>
+                <a16:creationId xmlns:a16="http://schemas.microsoft.com/office/drawing/2014/main" id="{6F230B4A-5DF7-4F6A-ADCB-2923972A933C}"/>
               </a:ext>
             </a:extLst>
           </p:cNvPr>
@@ -35794,7 +37374,7 @@
           <p:cNvPr id="16" name="이미지 계약">
             <a:extLst xmlns:a="http://schemas.openxmlformats.org/drawingml/2006/main">
               <a:ext uri="{FF2B5EF4-FFF2-40B4-BE49-F238E27FC236}">
-                <a16:creationId xmlns:a16="http://schemas.microsoft.com/office/drawing/2014/main" id="{C98E3716-5E48-4467-9389-0A39961080F9}"/>
+                <a16:creationId xmlns:a16="http://schemas.microsoft.com/office/drawing/2014/main" id="{6B8008E9-0F22-49EB-B753-70732BAFDE84}"/>
               </a:ext>
             </a:extLst>
           </p:cNvPr>
@@ -35952,7 +37532,7 @@
           <p:cNvPr id="17" name="crop: [x_start, x_end)">
             <a:extLst xmlns:a="http://schemas.openxmlformats.org/drawingml/2006/main">
               <a:ext uri="{FF2B5EF4-FFF2-40B4-BE49-F238E27FC236}">
-                <a16:creationId xmlns:a16="http://schemas.microsoft.com/office/drawing/2014/main" id="{7CC2117E-351D-4EB8-9C2D-1FECFA772C84}"/>
+                <a16:creationId xmlns:a16="http://schemas.microsoft.com/office/drawing/2014/main" id="{D3B9155B-FBAC-49EF-8045-22F0AEF50364}"/>
               </a:ext>
             </a:extLst>
           </p:cNvPr>
@@ -36110,7 +37690,7 @@
           <p:cNvPr id="18" name="">
             <a:extLst xmlns:a="http://schemas.openxmlformats.org/drawingml/2006/main">
               <a:ext uri="{FF2B5EF4-FFF2-40B4-BE49-F238E27FC236}">
-                <a16:creationId xmlns:a16="http://schemas.microsoft.com/office/drawing/2014/main" id="{7F7984AF-6A5F-4580-A841-6F3219804DE8}"/>
+                <a16:creationId xmlns:a16="http://schemas.microsoft.com/office/drawing/2014/main" id="{55A8B815-DDD1-4442-917F-2186B4C83054}"/>
               </a:ext>
             </a:extLst>
           </p:cNvPr>
@@ -36141,7 +37721,7 @@
           <p:cNvPr id="19" name="테스트 구조">
             <a:extLst xmlns:a="http://schemas.openxmlformats.org/drawingml/2006/main">
               <a:ext uri="{FF2B5EF4-FFF2-40B4-BE49-F238E27FC236}">
-                <a16:creationId xmlns:a16="http://schemas.microsoft.com/office/drawing/2014/main" id="{67AFFF37-45CC-49F9-B859-73DD4FD66EDE}"/>
+                <a16:creationId xmlns:a16="http://schemas.microsoft.com/office/drawing/2014/main" id="{91625D66-92C3-46E8-AC2A-42C5D9FE8E3B}"/>
               </a:ext>
             </a:extLst>
           </p:cNvPr>
@@ -36299,7 +37879,7 @@
           <p:cNvPr id="20" name="tests/test_pipeline.py">
             <a:extLst xmlns:a="http://schemas.openxmlformats.org/drawingml/2006/main">
               <a:ext uri="{FF2B5EF4-FFF2-40B4-BE49-F238E27FC236}">
-                <a16:creationId xmlns:a16="http://schemas.microsoft.com/office/drawing/2014/main" id="{8F01B361-F862-4480-96B7-B2AF93784CE3}"/>
+                <a16:creationId xmlns:a16="http://schemas.microsoft.com/office/drawing/2014/main" id="{9598B268-6B0B-4E18-9860-3C6E6C74F16C}"/>
               </a:ext>
             </a:extLst>
           </p:cNvPr>
@@ -36457,7 +38037,7 @@
           <p:cNvPr id="21" name="">
             <a:extLst xmlns:a="http://schemas.openxmlformats.org/drawingml/2006/main">
               <a:ext uri="{FF2B5EF4-FFF2-40B4-BE49-F238E27FC236}">
-                <a16:creationId xmlns:a16="http://schemas.microsoft.com/office/drawing/2014/main" id="{F4F161B2-DD70-42CC-98BD-7781F3C60127}"/>
+                <a16:creationId xmlns:a16="http://schemas.microsoft.com/office/drawing/2014/main" id="{F8229BDE-974D-4F18-8A6A-779D34A9F9FC}"/>
               </a:ext>
             </a:extLst>
           </p:cNvPr>
@@ -36488,7 +38068,7 @@
           <p:cNvPr id="22" name="CLI 출력">
             <a:extLst xmlns:a="http://schemas.openxmlformats.org/drawingml/2006/main">
               <a:ext uri="{FF2B5EF4-FFF2-40B4-BE49-F238E27FC236}">
-                <a16:creationId xmlns:a16="http://schemas.microsoft.com/office/drawing/2014/main" id="{69D107F1-2109-410D-AE1B-EBFF9E390B2E}"/>
+                <a16:creationId xmlns:a16="http://schemas.microsoft.com/office/drawing/2014/main" id="{5EE93A35-32BD-4118-A920-FDABC95C44F4}"/>
               </a:ext>
             </a:extLst>
           </p:cNvPr>
@@ -36646,7 +38226,7 @@
           <p:cNvPr id="23" name="width · height · pixel_count …">
             <a:extLst xmlns:a="http://schemas.openxmlformats.org/drawingml/2006/main">
               <a:ext uri="{FF2B5EF4-FFF2-40B4-BE49-F238E27FC236}">
-                <a16:creationId xmlns:a16="http://schemas.microsoft.com/office/drawing/2014/main" id="{ABDA8895-399F-488D-9BBF-B6CCD80F0A49}"/>
+                <a16:creationId xmlns:a16="http://schemas.microsoft.com/office/drawing/2014/main" id="{99B4558F-4B2A-43E9-8ACB-3137DBD78FE7}"/>
               </a:ext>
             </a:extLst>
           </p:cNvPr>
@@ -36804,7 +38384,7 @@
           <p:cNvPr id="24" name="32줄 · 1,303 bytes">
             <a:extLst xmlns:a="http://schemas.openxmlformats.org/drawingml/2006/main">
               <a:ext uri="{FF2B5EF4-FFF2-40B4-BE49-F238E27FC236}">
-                <a16:creationId xmlns:a16="http://schemas.microsoft.com/office/drawing/2014/main" id="{A07831D8-4577-4477-B9C3-6A475B8D9B62}"/>
+                <a16:creationId xmlns:a16="http://schemas.microsoft.com/office/drawing/2014/main" id="{DDE65E30-EE3B-4F24-A0A4-3FC8AD521F8A}"/>
               </a:ext>
             </a:extLst>
           </p:cNvPr>
@@ -36962,7 +38542,7 @@
           <p:cNvPr id="25" name="이번 Task에도 필요할까?">
             <a:extLst xmlns:a="http://schemas.openxmlformats.org/drawingml/2006/main">
               <a:ext uri="{FF2B5EF4-FFF2-40B4-BE49-F238E27FC236}">
-                <a16:creationId xmlns:a16="http://schemas.microsoft.com/office/drawing/2014/main" id="{967DFC57-F058-4CC1-8A9B-03DF2DB3EA15}"/>
+                <a16:creationId xmlns:a16="http://schemas.microsoft.com/office/drawing/2014/main" id="{CD34DFD8-EB0E-4944-96D8-C998D9003B0F}"/>
               </a:ext>
             </a:extLst>
           </p:cNvPr>
@@ -37115,10 +38695,168 @@
           </a:p>
         </p:txBody>
       </p:sp>
+      <p:sp>
+        <p:nvSpPr>
+          <p:cNvPr id="26" name="Legacy module connection">
+            <a:extLst xmlns:a="http://schemas.openxmlformats.org/drawingml/2006/main">
+              <a:ext uri="{FF2B5EF4-FFF2-40B4-BE49-F238E27FC236}">
+                <a16:creationId xmlns:a16="http://schemas.microsoft.com/office/drawing/2014/main" id="{C3460C20-D3A8-4614-BB48-63D449F2CC57}"/>
+              </a:ext>
+            </a:extLst>
+          </p:cNvPr>
+          <p:cNvSpPr>
+            <a:spLocks xmlns:a="http://schemas.openxmlformats.org/drawingml/2006/main" noGrp="1"/>
+          </p:cNvSpPr>
+          <p:nvPr/>
+        </p:nvSpPr>
+        <p:spPr>
+          <a:xfrm xmlns:a="http://schemas.openxmlformats.org/drawingml/2006/main">
+            <a:off x="609600" y="6229350"/>
+            <a:ext cx="10972800" cy="171450"/>
+          </a:xfrm>
+          <a:prstGeom xmlns:a="http://schemas.openxmlformats.org/drawingml/2006/main" prst="rect">
+            <a:avLst/>
+          </a:prstGeom>
+          <a:noFill xmlns:a="http://schemas.openxmlformats.org/drawingml/2006/main"/>
+          <a:ln xmlns:a="http://schemas.openxmlformats.org/drawingml/2006/main" w="0">
+            <a:noFill/>
+          </a:ln>
+        </p:spPr>
+        <p:txBody>
+          <a:bodyPr xmlns:a="http://schemas.openxmlformats.org/drawingml/2006/main" wrap="none" lIns="0" tIns="0" rIns="0" bIns="0" anchor="ctr">
+            <a:noAutofit/>
+          </a:bodyPr>
+          <a:lstStyle xmlns:a="http://schemas.openxmlformats.org/drawingml/2006/main">
+            <a:defPPr algn="r">
+              <a:defRPr sz="1200" b="0">
+                <a:solidFill>
+                  <a:srgbClr val="4D5A68"/>
+                </a:solidFill>
+                <a:latin typeface="Malgun Gothic"/>
+                <a:ea typeface="Malgun Gothic"/>
+                <a:cs typeface="Malgun Gothic"/>
+              </a:defRPr>
+            </a:defPPr>
+            <a:lvl1pPr algn="r">
+              <a:defRPr sz="1200" b="0">
+                <a:solidFill>
+                  <a:srgbClr val="4D5A68"/>
+                </a:solidFill>
+                <a:latin typeface="Malgun Gothic"/>
+                <a:ea typeface="Malgun Gothic"/>
+                <a:cs typeface="Malgun Gothic"/>
+              </a:defRPr>
+            </a:lvl1pPr>
+            <a:lvl2pPr algn="r">
+              <a:defRPr sz="1200" b="0">
+                <a:solidFill>
+                  <a:srgbClr val="4D5A68"/>
+                </a:solidFill>
+                <a:latin typeface="Malgun Gothic"/>
+                <a:ea typeface="Malgun Gothic"/>
+                <a:cs typeface="Malgun Gothic"/>
+              </a:defRPr>
+            </a:lvl2pPr>
+            <a:lvl3pPr algn="r">
+              <a:defRPr sz="1200" b="0">
+                <a:solidFill>
+                  <a:srgbClr val="4D5A68"/>
+                </a:solidFill>
+                <a:latin typeface="Malgun Gothic"/>
+                <a:ea typeface="Malgun Gothic"/>
+                <a:cs typeface="Malgun Gothic"/>
+              </a:defRPr>
+            </a:lvl3pPr>
+            <a:lvl4pPr algn="r">
+              <a:defRPr sz="1200" b="0">
+                <a:solidFill>
+                  <a:srgbClr val="4D5A68"/>
+                </a:solidFill>
+                <a:latin typeface="Malgun Gothic"/>
+                <a:ea typeface="Malgun Gothic"/>
+                <a:cs typeface="Malgun Gothic"/>
+              </a:defRPr>
+            </a:lvl4pPr>
+            <a:lvl5pPr algn="r">
+              <a:defRPr sz="1200" b="0">
+                <a:solidFill>
+                  <a:srgbClr val="4D5A68"/>
+                </a:solidFill>
+                <a:latin typeface="Malgun Gothic"/>
+                <a:ea typeface="Malgun Gothic"/>
+                <a:cs typeface="Malgun Gothic"/>
+              </a:defRPr>
+            </a:lvl5pPr>
+            <a:lvl6pPr algn="r">
+              <a:defRPr sz="1200" b="0">
+                <a:solidFill>
+                  <a:srgbClr val="4D5A68"/>
+                </a:solidFill>
+                <a:latin typeface="Malgun Gothic"/>
+                <a:ea typeface="Malgun Gothic"/>
+                <a:cs typeface="Malgun Gothic"/>
+              </a:defRPr>
+            </a:lvl6pPr>
+            <a:lvl7pPr algn="r">
+              <a:defRPr sz="1200" b="0">
+                <a:solidFill>
+                  <a:srgbClr val="4D5A68"/>
+                </a:solidFill>
+                <a:latin typeface="Malgun Gothic"/>
+                <a:ea typeface="Malgun Gothic"/>
+                <a:cs typeface="Malgun Gothic"/>
+              </a:defRPr>
+            </a:lvl7pPr>
+            <a:lvl8pPr algn="r">
+              <a:defRPr sz="1200" b="0">
+                <a:solidFill>
+                  <a:srgbClr val="4D5A68"/>
+                </a:solidFill>
+                <a:latin typeface="Malgun Gothic"/>
+                <a:ea typeface="Malgun Gothic"/>
+                <a:cs typeface="Malgun Gothic"/>
+              </a:defRPr>
+            </a:lvl8pPr>
+            <a:lvl9pPr algn="r">
+              <a:defRPr sz="1200" b="0">
+                <a:solidFill>
+                  <a:srgbClr val="4D5A68"/>
+                </a:solidFill>
+                <a:latin typeface="Malgun Gothic"/>
+                <a:ea typeface="Malgun Gothic"/>
+                <a:cs typeface="Malgun Gothic"/>
+              </a:defRPr>
+            </a:lvl9pPr>
+          </a:lstStyle>
+          <a:p xmlns:a="http://schemas.openxmlformats.org/drawingml/2006/main">
+            <a:pPr algn="r">
+              <a:defRPr sz="1200" b="0">
+                <a:solidFill>
+                  <a:srgbClr val="4D5A68"/>
+                </a:solidFill>
+                <a:latin typeface="Malgun Gothic"/>
+                <a:ea typeface="Malgun Gothic"/>
+                <a:cs typeface="Malgun Gothic"/>
+              </a:defRPr>
+            </a:pPr>
+            <a:r>
+              <a:rPr sz="1200" b="0">
+                <a:solidFill>
+                  <a:srgbClr val="4D5A68"/>
+                </a:solidFill>
+                <a:latin typeface="Malgun Gothic"/>
+                <a:ea typeface="Malgun Gothic"/>
+                <a:cs typeface="Malgun Gothic"/>
+              </a:rPr>
+              <a:t>M 연계 · 신규 확장</a:t>
+            </a:r>
+          </a:p>
+        </p:txBody>
+      </p:sp>
     </p:spTree>
     <p:extLst>
       <p:ext uri="{BB962C8B-B14F-4D97-AF65-F5344CB8AC3E}">
-        <p14:creationId xmlns:p14="http://schemas.microsoft.com/office/powerpoint/2010/main" val="198370632"/>
+        <p14:creationId xmlns:p14="http://schemas.microsoft.com/office/powerpoint/2010/main" val="557979166"/>
       </p:ext>
     </p:extLst>
   </p:cSld>
@@ -37146,10 +38884,10 @@
       </p:grpSpPr>
       <p:sp>
         <p:nvSpPr>
-          <p:cNvPr id="16" name="ACT 2 · 관련성을 확인하기">
+          <p:cNvPr id="17" name="ACT 2 · 관련성을 확인하기">
             <a:extLst xmlns:a="http://schemas.openxmlformats.org/drawingml/2006/main">
               <a:ext uri="{FF2B5EF4-FFF2-40B4-BE49-F238E27FC236}">
-                <a16:creationId xmlns:a16="http://schemas.microsoft.com/office/drawing/2014/main" id="{CC83437F-AA1E-47D9-A07C-B7375EE457CF}"/>
+                <a16:creationId xmlns:a16="http://schemas.microsoft.com/office/drawing/2014/main" id="{C6DEC060-98E4-40E2-9635-0A0AF0D1C6B0}"/>
               </a:ext>
             </a:extLst>
           </p:cNvPr>
@@ -37307,7 +39045,7 @@
           <p:cNvPr id="2" name="S27">
             <a:extLst xmlns:a="http://schemas.openxmlformats.org/drawingml/2006/main">
               <a:ext uri="{FF2B5EF4-FFF2-40B4-BE49-F238E27FC236}">
-                <a16:creationId xmlns:a16="http://schemas.microsoft.com/office/drawing/2014/main" id="{1B77A33A-6EE6-403C-8155-219E65A7E0D3}"/>
+                <a16:creationId xmlns:a16="http://schemas.microsoft.com/office/drawing/2014/main" id="{12CD205B-ED13-4948-B606-A0DB01D7DC1D}"/>
               </a:ext>
             </a:extLst>
           </p:cNvPr>
@@ -37465,7 +39203,7 @@
           <p:cNvPr id="3" name="정확하지만 이번 Task에는 불필요한 정보">
             <a:extLst xmlns:a="http://schemas.openxmlformats.org/drawingml/2006/main">
               <a:ext uri="{FF2B5EF4-FFF2-40B4-BE49-F238E27FC236}">
-                <a16:creationId xmlns:a16="http://schemas.microsoft.com/office/drawing/2014/main" id="{1F4D6F6D-BE2E-4DDD-BDE6-9F09BADB5ABC}"/>
+                <a16:creationId xmlns:a16="http://schemas.microsoft.com/office/drawing/2014/main" id="{ECEC04FF-CC80-46C6-BA8B-8CCF20BE07A0}"/>
               </a:ext>
             </a:extLst>
           </p:cNvPr>
@@ -37623,7 +39361,7 @@
           <p:cNvPr id="4" name="">
             <a:extLst xmlns:a="http://schemas.openxmlformats.org/drawingml/2006/main">
               <a:ext uri="{FF2B5EF4-FFF2-40B4-BE49-F238E27FC236}">
-                <a16:creationId xmlns:a16="http://schemas.microsoft.com/office/drawing/2014/main" id="{E995C9DA-78F2-4A82-8FEF-10310F390D3D}"/>
+                <a16:creationId xmlns:a16="http://schemas.microsoft.com/office/drawing/2014/main" id="{C06464AA-3887-4B15-BEFF-B33C355366AB}"/>
               </a:ext>
             </a:extLst>
           </p:cNvPr>
@@ -37634,7 +39372,7 @@
         </p:nvSpPr>
         <p:spPr>
           <a:xfrm xmlns:a="http://schemas.openxmlformats.org/drawingml/2006/main">
-            <a:off x="609600" y="5829300"/>
+            <a:off x="609600" y="5753100"/>
             <a:ext cx="10972800" cy="0"/>
           </a:xfrm>
           <a:prstGeom xmlns:a="http://schemas.openxmlformats.org/drawingml/2006/main" prst="line">
@@ -37654,7 +39392,7 @@
           <p:cNvPr id="5" name="TRIAL-004 · README의 build tools 안내를 명확히 하는 작업">
             <a:extLst xmlns:a="http://schemas.openxmlformats.org/drawingml/2006/main">
               <a:ext uri="{FF2B5EF4-FFF2-40B4-BE49-F238E27FC236}">
-                <a16:creationId xmlns:a16="http://schemas.microsoft.com/office/drawing/2014/main" id="{F7D7757C-41D0-448A-8BD9-A11046830E01}"/>
+                <a16:creationId xmlns:a16="http://schemas.microsoft.com/office/drawing/2014/main" id="{672E6479-5B59-4A35-A31B-A6AF5E7B819C}"/>
               </a:ext>
             </a:extLst>
           </p:cNvPr>
@@ -37665,8 +39403,8 @@
         </p:nvSpPr>
         <p:spPr>
           <a:xfrm xmlns:a="http://schemas.openxmlformats.org/drawingml/2006/main">
-            <a:off x="609600" y="5915025"/>
-            <a:ext cx="10972800" cy="247650"/>
+            <a:off x="609600" y="5791200"/>
+            <a:ext cx="10972800" cy="228600"/>
           </a:xfrm>
           <a:prstGeom xmlns:a="http://schemas.openxmlformats.org/drawingml/2006/main" prst="rect">
             <a:avLst/>
@@ -37812,7 +39550,7 @@
           <p:cNvPr id="6" name="Agent 혼란과 Context 관련 실패는 관찰되지 않았다">
             <a:extLst xmlns:a="http://schemas.openxmlformats.org/drawingml/2006/main">
               <a:ext uri="{FF2B5EF4-FFF2-40B4-BE49-F238E27FC236}">
-                <a16:creationId xmlns:a16="http://schemas.microsoft.com/office/drawing/2014/main" id="{E214E4E5-C297-4181-8FF8-CEA21E70E9C7}"/>
+                <a16:creationId xmlns:a16="http://schemas.microsoft.com/office/drawing/2014/main" id="{F8E6CE3B-1476-447E-9369-B3BC520851D6}"/>
               </a:ext>
             </a:extLst>
           </p:cNvPr>
@@ -37823,7 +39561,7 @@
         </p:nvSpPr>
         <p:spPr>
           <a:xfrm xmlns:a="http://schemas.openxmlformats.org/drawingml/2006/main">
-            <a:off x="609600" y="6191250"/>
+            <a:off x="609600" y="6019800"/>
             <a:ext cx="10972800" cy="209550"/>
           </a:xfrm>
           <a:prstGeom xmlns:a="http://schemas.openxmlformats.org/drawingml/2006/main" prst="rect">
@@ -37970,7 +39708,7 @@
           <p:cNvPr id="7" name="작업: README의 빌드 도구 안내를 고친다">
             <a:extLst xmlns:a="http://schemas.openxmlformats.org/drawingml/2006/main">
               <a:ext uri="{FF2B5EF4-FFF2-40B4-BE49-F238E27FC236}">
-                <a16:creationId xmlns:a16="http://schemas.microsoft.com/office/drawing/2014/main" id="{A62055C8-089B-40A2-BEF6-99BBB84AEDB8}"/>
+                <a16:creationId xmlns:a16="http://schemas.microsoft.com/office/drawing/2014/main" id="{1A4A3397-DADD-41F0-8602-C6BDCD5E85CE}"/>
               </a:ext>
             </a:extLst>
           </p:cNvPr>
@@ -38128,7 +39866,7 @@
           <p:cNvPr id="8" name="이번 질문과 직접 관련">
             <a:extLst xmlns:a="http://schemas.openxmlformats.org/drawingml/2006/main">
               <a:ext uri="{FF2B5EF4-FFF2-40B4-BE49-F238E27FC236}">
-                <a16:creationId xmlns:a16="http://schemas.microsoft.com/office/drawing/2014/main" id="{8CB7DA8B-FA4F-4D52-8A60-2451E2519559}"/>
+                <a16:creationId xmlns:a16="http://schemas.microsoft.com/office/drawing/2014/main" id="{F6B981D5-5750-47BC-8598-B95BE34114F4}"/>
               </a:ext>
             </a:extLst>
           </p:cNvPr>
@@ -38286,7 +40024,7 @@
           <p:cNvPr id="9" name="함께 있었지만 관련이 낮은 정보">
             <a:extLst xmlns:a="http://schemas.openxmlformats.org/drawingml/2006/main">
               <a:ext uri="{FF2B5EF4-FFF2-40B4-BE49-F238E27FC236}">
-                <a16:creationId xmlns:a16="http://schemas.microsoft.com/office/drawing/2014/main" id="{1E209C04-75FE-48E6-B108-BDDC14FF2AD0}"/>
+                <a16:creationId xmlns:a16="http://schemas.microsoft.com/office/drawing/2014/main" id="{04AE9457-3B35-44AF-9F0F-E43FB8ACF788}"/>
               </a:ext>
             </a:extLst>
           </p:cNvPr>
@@ -38444,7 +40182,7 @@
           <p:cNvPr id="10" name="">
             <a:extLst xmlns:a="http://schemas.openxmlformats.org/drawingml/2006/main">
               <a:ext uri="{FF2B5EF4-FFF2-40B4-BE49-F238E27FC236}">
-                <a16:creationId xmlns:a16="http://schemas.microsoft.com/office/drawing/2014/main" id="{82B5F688-097B-4473-8723-F87250AF9F93}"/>
+                <a16:creationId xmlns:a16="http://schemas.microsoft.com/office/drawing/2014/main" id="{6AA4091E-C715-40CB-B3C1-500EC0C475A5}"/>
               </a:ext>
             </a:extLst>
           </p:cNvPr>
@@ -38475,7 +40213,7 @@
           <p:cNvPr id="11" name="">
             <a:extLst xmlns:a="http://schemas.openxmlformats.org/drawingml/2006/main">
               <a:ext uri="{FF2B5EF4-FFF2-40B4-BE49-F238E27FC236}">
-                <a16:creationId xmlns:a16="http://schemas.microsoft.com/office/drawing/2014/main" id="{F96F622A-D334-46DB-8B2F-984CB77D583F}"/>
+                <a16:creationId xmlns:a16="http://schemas.microsoft.com/office/drawing/2014/main" id="{B423EF5D-93E5-44D9-AABB-0BB2DFABB08D}"/>
               </a:ext>
             </a:extLst>
           </p:cNvPr>
@@ -38506,7 +40244,7 @@
           <p:cNvPr id="12" name="">
             <a:extLst xmlns:a="http://schemas.openxmlformats.org/drawingml/2006/main">
               <a:ext uri="{FF2B5EF4-FFF2-40B4-BE49-F238E27FC236}">
-                <a16:creationId xmlns:a16="http://schemas.microsoft.com/office/drawing/2014/main" id="{943472E4-DD26-48A2-8F19-7E44FAC145ED}"/>
+                <a16:creationId xmlns:a16="http://schemas.microsoft.com/office/drawing/2014/main" id="{62B98010-3DC5-4DEB-AF78-5280AF98335E}"/>
               </a:ext>
             </a:extLst>
           </p:cNvPr>
@@ -38537,7 +40275,7 @@
           <p:cNvPr id="13" name="README&#10;pyproject.toml의 빌드 설정">
             <a:extLst xmlns:a="http://schemas.openxmlformats.org/drawingml/2006/main">
               <a:ext uri="{FF2B5EF4-FFF2-40B4-BE49-F238E27FC236}">
-                <a16:creationId xmlns:a16="http://schemas.microsoft.com/office/drawing/2014/main" id="{B7297723-294E-4077-9021-A75042DFDD8B}"/>
+                <a16:creationId xmlns:a16="http://schemas.microsoft.com/office/drawing/2014/main" id="{4BDC70A2-B9BC-4FDB-85BB-5DDCC37725DA}"/>
               </a:ext>
             </a:extLst>
           </p:cNvPr>
@@ -38718,7 +40456,7 @@
           <p:cNvPr id="14" name="crop / resize 계약&#10;이미지 처리 pipeline 세부사항">
             <a:extLst xmlns:a="http://schemas.openxmlformats.org/drawingml/2006/main">
               <a:ext uri="{FF2B5EF4-FFF2-40B4-BE49-F238E27FC236}">
-                <a16:creationId xmlns:a16="http://schemas.microsoft.com/office/drawing/2014/main" id="{BEC81D87-3220-4B25-B152-55C29F4F1B66}"/>
+                <a16:creationId xmlns:a16="http://schemas.microsoft.com/office/drawing/2014/main" id="{3AB63866-5314-4CF8-91FE-8892E67999A2}"/>
               </a:ext>
             </a:extLst>
           </p:cNvPr>
@@ -38899,7 +40637,7 @@
           <p:cNvPr id="15" name="정확한 정보라도, 모든 질문에 필요한 것은 아니다">
             <a:extLst xmlns:a="http://schemas.openxmlformats.org/drawingml/2006/main">
               <a:ext uri="{FF2B5EF4-FFF2-40B4-BE49-F238E27FC236}">
-                <a16:creationId xmlns:a16="http://schemas.microsoft.com/office/drawing/2014/main" id="{A9BD39B4-1815-4F5F-B01D-7F3F3772B8BF}"/>
+                <a16:creationId xmlns:a16="http://schemas.microsoft.com/office/drawing/2014/main" id="{EAC1957B-2299-4A00-AD3A-A71C39F949FF}"/>
               </a:ext>
             </a:extLst>
           </p:cNvPr>
@@ -39052,10 +40790,168 @@
           </a:p>
         </p:txBody>
       </p:sp>
+      <p:sp>
+        <p:nvSpPr>
+          <p:cNvPr id="16" name="Legacy module connection">
+            <a:extLst xmlns:a="http://schemas.openxmlformats.org/drawingml/2006/main">
+              <a:ext uri="{FF2B5EF4-FFF2-40B4-BE49-F238E27FC236}">
+                <a16:creationId xmlns:a16="http://schemas.microsoft.com/office/drawing/2014/main" id="{4F3C45A9-636B-4F36-A13A-4E3863E10A23}"/>
+              </a:ext>
+            </a:extLst>
+          </p:cNvPr>
+          <p:cNvSpPr>
+            <a:spLocks xmlns:a="http://schemas.openxmlformats.org/drawingml/2006/main" noGrp="1"/>
+          </p:cNvSpPr>
+          <p:nvPr/>
+        </p:nvSpPr>
+        <p:spPr>
+          <a:xfrm xmlns:a="http://schemas.openxmlformats.org/drawingml/2006/main">
+            <a:off x="609600" y="6229350"/>
+            <a:ext cx="10972800" cy="171450"/>
+          </a:xfrm>
+          <a:prstGeom xmlns:a="http://schemas.openxmlformats.org/drawingml/2006/main" prst="rect">
+            <a:avLst/>
+          </a:prstGeom>
+          <a:noFill xmlns:a="http://schemas.openxmlformats.org/drawingml/2006/main"/>
+          <a:ln xmlns:a="http://schemas.openxmlformats.org/drawingml/2006/main" w="0">
+            <a:noFill/>
+          </a:ln>
+        </p:spPr>
+        <p:txBody>
+          <a:bodyPr xmlns:a="http://schemas.openxmlformats.org/drawingml/2006/main" wrap="none" lIns="0" tIns="0" rIns="0" bIns="0" anchor="ctr">
+            <a:noAutofit/>
+          </a:bodyPr>
+          <a:lstStyle xmlns:a="http://schemas.openxmlformats.org/drawingml/2006/main">
+            <a:defPPr algn="r">
+              <a:defRPr sz="1200" b="0">
+                <a:solidFill>
+                  <a:srgbClr val="4D5A68"/>
+                </a:solidFill>
+                <a:latin typeface="Malgun Gothic"/>
+                <a:ea typeface="Malgun Gothic"/>
+                <a:cs typeface="Malgun Gothic"/>
+              </a:defRPr>
+            </a:defPPr>
+            <a:lvl1pPr algn="r">
+              <a:defRPr sz="1200" b="0">
+                <a:solidFill>
+                  <a:srgbClr val="4D5A68"/>
+                </a:solidFill>
+                <a:latin typeface="Malgun Gothic"/>
+                <a:ea typeface="Malgun Gothic"/>
+                <a:cs typeface="Malgun Gothic"/>
+              </a:defRPr>
+            </a:lvl1pPr>
+            <a:lvl2pPr algn="r">
+              <a:defRPr sz="1200" b="0">
+                <a:solidFill>
+                  <a:srgbClr val="4D5A68"/>
+                </a:solidFill>
+                <a:latin typeface="Malgun Gothic"/>
+                <a:ea typeface="Malgun Gothic"/>
+                <a:cs typeface="Malgun Gothic"/>
+              </a:defRPr>
+            </a:lvl2pPr>
+            <a:lvl3pPr algn="r">
+              <a:defRPr sz="1200" b="0">
+                <a:solidFill>
+                  <a:srgbClr val="4D5A68"/>
+                </a:solidFill>
+                <a:latin typeface="Malgun Gothic"/>
+                <a:ea typeface="Malgun Gothic"/>
+                <a:cs typeface="Malgun Gothic"/>
+              </a:defRPr>
+            </a:lvl3pPr>
+            <a:lvl4pPr algn="r">
+              <a:defRPr sz="1200" b="0">
+                <a:solidFill>
+                  <a:srgbClr val="4D5A68"/>
+                </a:solidFill>
+                <a:latin typeface="Malgun Gothic"/>
+                <a:ea typeface="Malgun Gothic"/>
+                <a:cs typeface="Malgun Gothic"/>
+              </a:defRPr>
+            </a:lvl4pPr>
+            <a:lvl5pPr algn="r">
+              <a:defRPr sz="1200" b="0">
+                <a:solidFill>
+                  <a:srgbClr val="4D5A68"/>
+                </a:solidFill>
+                <a:latin typeface="Malgun Gothic"/>
+                <a:ea typeface="Malgun Gothic"/>
+                <a:cs typeface="Malgun Gothic"/>
+              </a:defRPr>
+            </a:lvl5pPr>
+            <a:lvl6pPr algn="r">
+              <a:defRPr sz="1200" b="0">
+                <a:solidFill>
+                  <a:srgbClr val="4D5A68"/>
+                </a:solidFill>
+                <a:latin typeface="Malgun Gothic"/>
+                <a:ea typeface="Malgun Gothic"/>
+                <a:cs typeface="Malgun Gothic"/>
+              </a:defRPr>
+            </a:lvl6pPr>
+            <a:lvl7pPr algn="r">
+              <a:defRPr sz="1200" b="0">
+                <a:solidFill>
+                  <a:srgbClr val="4D5A68"/>
+                </a:solidFill>
+                <a:latin typeface="Malgun Gothic"/>
+                <a:ea typeface="Malgun Gothic"/>
+                <a:cs typeface="Malgun Gothic"/>
+              </a:defRPr>
+            </a:lvl7pPr>
+            <a:lvl8pPr algn="r">
+              <a:defRPr sz="1200" b="0">
+                <a:solidFill>
+                  <a:srgbClr val="4D5A68"/>
+                </a:solidFill>
+                <a:latin typeface="Malgun Gothic"/>
+                <a:ea typeface="Malgun Gothic"/>
+                <a:cs typeface="Malgun Gothic"/>
+              </a:defRPr>
+            </a:lvl8pPr>
+            <a:lvl9pPr algn="r">
+              <a:defRPr sz="1200" b="0">
+                <a:solidFill>
+                  <a:srgbClr val="4D5A68"/>
+                </a:solidFill>
+                <a:latin typeface="Malgun Gothic"/>
+                <a:ea typeface="Malgun Gothic"/>
+                <a:cs typeface="Malgun Gothic"/>
+              </a:defRPr>
+            </a:lvl9pPr>
+          </a:lstStyle>
+          <a:p xmlns:a="http://schemas.openxmlformats.org/drawingml/2006/main">
+            <a:pPr algn="r">
+              <a:defRPr sz="1200" b="0">
+                <a:solidFill>
+                  <a:srgbClr val="4D5A68"/>
+                </a:solidFill>
+                <a:latin typeface="Malgun Gothic"/>
+                <a:ea typeface="Malgun Gothic"/>
+                <a:cs typeface="Malgun Gothic"/>
+              </a:defRPr>
+            </a:pPr>
+            <a:r>
+              <a:rPr sz="1200" b="0">
+                <a:solidFill>
+                  <a:srgbClr val="4D5A68"/>
+                </a:solidFill>
+                <a:latin typeface="Malgun Gothic"/>
+                <a:ea typeface="Malgun Gothic"/>
+                <a:cs typeface="Malgun Gothic"/>
+              </a:rPr>
+              <a:t>M 연계 · 신규 확장</a:t>
+            </a:r>
+          </a:p>
+        </p:txBody>
+      </p:sp>
     </p:spTree>
     <p:extLst>
       <p:ext uri="{BB962C8B-B14F-4D97-AF65-F5344CB8AC3E}">
-        <p14:creationId xmlns:p14="http://schemas.microsoft.com/office/powerpoint/2010/main" val="1588996740"/>
+        <p14:creationId xmlns:p14="http://schemas.microsoft.com/office/powerpoint/2010/main" val="677995907"/>
       </p:ext>
     </p:extLst>
   </p:cSld>
@@ -39083,10 +40979,10 @@
       </p:grpSpPr>
       <p:sp>
         <p:nvSpPr>
-          <p:cNvPr id="19" name="ACT 2 · 언제 필요한 정보인가">
+          <p:cNvPr id="20" name="ACT 2 · 언제 필요한 정보인가">
             <a:extLst xmlns:a="http://schemas.openxmlformats.org/drawingml/2006/main">
               <a:ext uri="{FF2B5EF4-FFF2-40B4-BE49-F238E27FC236}">
-                <a16:creationId xmlns:a16="http://schemas.microsoft.com/office/drawing/2014/main" id="{0D7D9789-6676-464A-A079-C5E20E76F52E}"/>
+                <a16:creationId xmlns:a16="http://schemas.microsoft.com/office/drawing/2014/main" id="{F7E705C4-CBBA-4C4C-A6DA-F049FDD8EE5D}"/>
               </a:ext>
             </a:extLst>
           </p:cNvPr>
@@ -39244,7 +41140,7 @@
           <p:cNvPr id="2" name="S28">
             <a:extLst xmlns:a="http://schemas.openxmlformats.org/drawingml/2006/main">
               <a:ext uri="{FF2B5EF4-FFF2-40B4-BE49-F238E27FC236}">
-                <a16:creationId xmlns:a16="http://schemas.microsoft.com/office/drawing/2014/main" id="{9BA4E2EB-7BCE-45CA-8DB3-B53317B8A0B0}"/>
+                <a16:creationId xmlns:a16="http://schemas.microsoft.com/office/drawing/2014/main" id="{7392D531-0B8E-4156-8715-5C6560AB80A3}"/>
               </a:ext>
             </a:extLst>
           </p:cNvPr>
@@ -39402,7 +41298,7 @@
           <p:cNvPr id="3" name="정보의 범위와 제공 시점">
             <a:extLst xmlns:a="http://schemas.openxmlformats.org/drawingml/2006/main">
               <a:ext uri="{FF2B5EF4-FFF2-40B4-BE49-F238E27FC236}">
-                <a16:creationId xmlns:a16="http://schemas.microsoft.com/office/drawing/2014/main" id="{13F055EE-FA28-4731-8E79-4E40126EEAD7}"/>
+                <a16:creationId xmlns:a16="http://schemas.microsoft.com/office/drawing/2014/main" id="{5C063AB8-4099-46A9-B13E-CC2BC2226326}"/>
               </a:ext>
             </a:extLst>
           </p:cNvPr>
@@ -39560,7 +41456,7 @@
           <p:cNvPr id="4" name="">
             <a:extLst xmlns:a="http://schemas.openxmlformats.org/drawingml/2006/main">
               <a:ext uri="{FF2B5EF4-FFF2-40B4-BE49-F238E27FC236}">
-                <a16:creationId xmlns:a16="http://schemas.microsoft.com/office/drawing/2014/main" id="{BBDF1AD9-6A4B-429F-9F25-5077AD53A7D3}"/>
+                <a16:creationId xmlns:a16="http://schemas.microsoft.com/office/drawing/2014/main" id="{96B9314F-5102-49FE-8186-00E98BEBDE2F}"/>
               </a:ext>
             </a:extLst>
           </p:cNvPr>
@@ -39571,7 +41467,7 @@
         </p:nvSpPr>
         <p:spPr>
           <a:xfrm xmlns:a="http://schemas.openxmlformats.org/drawingml/2006/main">
-            <a:off x="609600" y="5829300"/>
+            <a:off x="609600" y="5753100"/>
             <a:ext cx="10972800" cy="0"/>
           </a:xfrm>
           <a:prstGeom xmlns:a="http://schemas.openxmlformats.org/drawingml/2006/main" prst="line">
@@ -39591,7 +41487,7 @@
           <p:cNvPr id="5" name="교육용 분류 모델 · OpenAI의 공식 기능 분류가 아님">
             <a:extLst xmlns:a="http://schemas.openxmlformats.org/drawingml/2006/main">
               <a:ext uri="{FF2B5EF4-FFF2-40B4-BE49-F238E27FC236}">
-                <a16:creationId xmlns:a16="http://schemas.microsoft.com/office/drawing/2014/main" id="{5B562F9C-74C2-44FD-A0CF-7AC5208A13E3}"/>
+                <a16:creationId xmlns:a16="http://schemas.microsoft.com/office/drawing/2014/main" id="{49DC0581-7D7B-4CA5-9931-CFF58FCDB824}"/>
               </a:ext>
             </a:extLst>
           </p:cNvPr>
@@ -39602,8 +41498,8 @@
         </p:nvSpPr>
         <p:spPr>
           <a:xfrm xmlns:a="http://schemas.openxmlformats.org/drawingml/2006/main">
-            <a:off x="609600" y="5915025"/>
-            <a:ext cx="10972800" cy="247650"/>
+            <a:off x="609600" y="5791200"/>
+            <a:ext cx="10972800" cy="228600"/>
           </a:xfrm>
           <a:prstGeom xmlns:a="http://schemas.openxmlformats.org/drawingml/2006/main" prst="rect">
             <a:avLst/>
@@ -39749,7 +41645,7 @@
           <p:cNvPr id="6" name="성능 조사 절차는 설명을 위한 예시이며 STATE-02에 저장돼 있었다는 뜻이 아님">
             <a:extLst xmlns:a="http://schemas.openxmlformats.org/drawingml/2006/main">
               <a:ext uri="{FF2B5EF4-FFF2-40B4-BE49-F238E27FC236}">
-                <a16:creationId xmlns:a16="http://schemas.microsoft.com/office/drawing/2014/main" id="{856DF5D0-BFB6-4616-855E-E0A4D4DA3F2D}"/>
+                <a16:creationId xmlns:a16="http://schemas.microsoft.com/office/drawing/2014/main" id="{E114A439-6D31-485C-8108-91F902D5D3AD}"/>
               </a:ext>
             </a:extLst>
           </p:cNvPr>
@@ -39760,7 +41656,7 @@
         </p:nvSpPr>
         <p:spPr>
           <a:xfrm xmlns:a="http://schemas.openxmlformats.org/drawingml/2006/main">
-            <a:off x="609600" y="6191250"/>
+            <a:off x="609600" y="6019800"/>
             <a:ext cx="10972800" cy="209550"/>
           </a:xfrm>
           <a:prstGeom xmlns:a="http://schemas.openxmlformats.org/drawingml/2006/main" prst="rect">
@@ -39907,7 +41803,7 @@
           <p:cNvPr id="7" name="">
             <a:extLst xmlns:a="http://schemas.openxmlformats.org/drawingml/2006/main">
               <a:ext uri="{FF2B5EF4-FFF2-40B4-BE49-F238E27FC236}">
-                <a16:creationId xmlns:a16="http://schemas.microsoft.com/office/drawing/2014/main" id="{54E3FF26-C5B0-488B-8EF2-CA87591476CB}"/>
+                <a16:creationId xmlns:a16="http://schemas.microsoft.com/office/drawing/2014/main" id="{235887FE-2CFA-4803-AE68-163DE256C3E6}"/>
               </a:ext>
             </a:extLst>
           </p:cNvPr>
@@ -39938,7 +41834,7 @@
           <p:cNvPr id="8" name="항상 알아야 할 안내">
             <a:extLst xmlns:a="http://schemas.openxmlformats.org/drawingml/2006/main">
               <a:ext uri="{FF2B5EF4-FFF2-40B4-BE49-F238E27FC236}">
-                <a16:creationId xmlns:a16="http://schemas.microsoft.com/office/drawing/2014/main" id="{45EE05D6-98B4-4E48-B958-F36248168D14}"/>
+                <a16:creationId xmlns:a16="http://schemas.microsoft.com/office/drawing/2014/main" id="{789D18E7-2788-4BC7-A057-54180DFFE7DE}"/>
               </a:ext>
             </a:extLst>
           </p:cNvPr>
@@ -40096,7 +41992,7 @@
           <p:cNvPr id="9" name="프로젝트 목적 · 기본 제약">
             <a:extLst xmlns:a="http://schemas.openxmlformats.org/drawingml/2006/main">
               <a:ext uri="{FF2B5EF4-FFF2-40B4-BE49-F238E27FC236}">
-                <a16:creationId xmlns:a16="http://schemas.microsoft.com/office/drawing/2014/main" id="{EA93CA48-AA68-4EAA-A6C5-9F7065F91B3C}"/>
+                <a16:creationId xmlns:a16="http://schemas.microsoft.com/office/drawing/2014/main" id="{4011DD17-BB89-4B6C-B92B-340766CE7144}"/>
               </a:ext>
             </a:extLst>
           </p:cNvPr>
@@ -40254,7 +42150,7 @@
           <p:cNvPr id="10" name="ALWAYS-ON">
             <a:extLst xmlns:a="http://schemas.openxmlformats.org/drawingml/2006/main">
               <a:ext uri="{FF2B5EF4-FFF2-40B4-BE49-F238E27FC236}">
-                <a16:creationId xmlns:a16="http://schemas.microsoft.com/office/drawing/2014/main" id="{239ED942-FE56-49A1-B304-32F137C87914}"/>
+                <a16:creationId xmlns:a16="http://schemas.microsoft.com/office/drawing/2014/main" id="{EC8BBE1B-BFB0-450D-A8F7-74AB449DF4A2}"/>
               </a:ext>
             </a:extLst>
           </p:cNvPr>
@@ -40412,7 +42308,7 @@
           <p:cNvPr id="11" name="">
             <a:extLst xmlns:a="http://schemas.openxmlformats.org/drawingml/2006/main">
               <a:ext uri="{FF2B5EF4-FFF2-40B4-BE49-F238E27FC236}">
-                <a16:creationId xmlns:a16="http://schemas.microsoft.com/office/drawing/2014/main" id="{6AB2441B-A99C-4D4C-BCC9-606DDF00DF03}"/>
+                <a16:creationId xmlns:a16="http://schemas.microsoft.com/office/drawing/2014/main" id="{514D149E-2986-49DB-94E3-53B3E78473C4}"/>
               </a:ext>
             </a:extLst>
           </p:cNvPr>
@@ -40443,7 +42339,7 @@
           <p:cNvPr id="12" name="질문에 따라 찾아볼 상세">
             <a:extLst xmlns:a="http://schemas.openxmlformats.org/drawingml/2006/main">
               <a:ext uri="{FF2B5EF4-FFF2-40B4-BE49-F238E27FC236}">
-                <a16:creationId xmlns:a16="http://schemas.microsoft.com/office/drawing/2014/main" id="{C60BBA22-717D-4789-ADCD-F0B7B7399AE4}"/>
+                <a16:creationId xmlns:a16="http://schemas.microsoft.com/office/drawing/2014/main" id="{5E8CCE0A-573E-49F1-BB19-8A7FA9A1C109}"/>
               </a:ext>
             </a:extLst>
           </p:cNvPr>
@@ -40601,7 +42497,7 @@
           <p:cNvPr id="13" name="crop 계약 · 모듈 구조">
             <a:extLst xmlns:a="http://schemas.openxmlformats.org/drawingml/2006/main">
               <a:ext uri="{FF2B5EF4-FFF2-40B4-BE49-F238E27FC236}">
-                <a16:creationId xmlns:a16="http://schemas.microsoft.com/office/drawing/2014/main" id="{1661AAD4-24A3-49C1-AA92-43A6A733D6CB}"/>
+                <a16:creationId xmlns:a16="http://schemas.microsoft.com/office/drawing/2014/main" id="{53B55AFD-7BB2-44D7-A7BD-4BC8629CF86A}"/>
               </a:ext>
             </a:extLst>
           </p:cNvPr>
@@ -40759,7 +42655,7 @@
           <p:cNvPr id="14" name="ON-DEMAND">
             <a:extLst xmlns:a="http://schemas.openxmlformats.org/drawingml/2006/main">
               <a:ext uri="{FF2B5EF4-FFF2-40B4-BE49-F238E27FC236}">
-                <a16:creationId xmlns:a16="http://schemas.microsoft.com/office/drawing/2014/main" id="{B9CB5E8F-3DAC-4360-80F5-144C1B0EB734}"/>
+                <a16:creationId xmlns:a16="http://schemas.microsoft.com/office/drawing/2014/main" id="{375BD9AD-26DA-48FB-B604-51618B902F2A}"/>
               </a:ext>
             </a:extLst>
           </p:cNvPr>
@@ -40917,7 +42813,7 @@
           <p:cNvPr id="15" name="">
             <a:extLst xmlns:a="http://schemas.openxmlformats.org/drawingml/2006/main">
               <a:ext uri="{FF2B5EF4-FFF2-40B4-BE49-F238E27FC236}">
-                <a16:creationId xmlns:a16="http://schemas.microsoft.com/office/drawing/2014/main" id="{29AFB86E-E1BB-4D03-B7A1-A77964CA44B3}"/>
+                <a16:creationId xmlns:a16="http://schemas.microsoft.com/office/drawing/2014/main" id="{54A6AA95-7457-4952-83F2-2CA7A0236FBF}"/>
               </a:ext>
             </a:extLst>
           </p:cNvPr>
@@ -40948,7 +42844,7 @@
           <p:cNvPr id="16" name="이런 일을 수행하는 방법">
             <a:extLst xmlns:a="http://schemas.openxmlformats.org/drawingml/2006/main">
               <a:ext uri="{FF2B5EF4-FFF2-40B4-BE49-F238E27FC236}">
-                <a16:creationId xmlns:a16="http://schemas.microsoft.com/office/drawing/2014/main" id="{18563B42-DB60-4C7E-8FCD-F7313C1ED868}"/>
+                <a16:creationId xmlns:a16="http://schemas.microsoft.com/office/drawing/2014/main" id="{82CB7E2D-EE10-4E75-9841-17442EBE2328}"/>
               </a:ext>
             </a:extLst>
           </p:cNvPr>
@@ -41106,7 +43002,7 @@
           <p:cNvPr id="17" name="변경 전 측정 → 조사 → 검증">
             <a:extLst xmlns:a="http://schemas.openxmlformats.org/drawingml/2006/main">
               <a:ext uri="{FF2B5EF4-FFF2-40B4-BE49-F238E27FC236}">
-                <a16:creationId xmlns:a16="http://schemas.microsoft.com/office/drawing/2014/main" id="{40D7A104-7FB2-4671-AD1E-984AFBFBE7CC}"/>
+                <a16:creationId xmlns:a16="http://schemas.microsoft.com/office/drawing/2014/main" id="{3A3DF577-F53E-4739-A088-56E5CE55813F}"/>
               </a:ext>
             </a:extLst>
           </p:cNvPr>
@@ -41264,7 +43160,7 @@
           <p:cNvPr id="18" name="WORKFLOW">
             <a:extLst xmlns:a="http://schemas.openxmlformats.org/drawingml/2006/main">
               <a:ext uri="{FF2B5EF4-FFF2-40B4-BE49-F238E27FC236}">
-                <a16:creationId xmlns:a16="http://schemas.microsoft.com/office/drawing/2014/main" id="{C4B4CABC-2D33-44C0-AB78-50ADCD84DB03}"/>
+                <a16:creationId xmlns:a16="http://schemas.microsoft.com/office/drawing/2014/main" id="{4BDFADA4-C1AC-40EA-A592-7AC5F817A3EF}"/>
               </a:ext>
             </a:extLst>
           </p:cNvPr>
@@ -41417,10 +43313,168 @@
           </a:p>
         </p:txBody>
       </p:sp>
+      <p:sp>
+        <p:nvSpPr>
+          <p:cNvPr id="19" name="Legacy module connection">
+            <a:extLst xmlns:a="http://schemas.openxmlformats.org/drawingml/2006/main">
+              <a:ext uri="{FF2B5EF4-FFF2-40B4-BE49-F238E27FC236}">
+                <a16:creationId xmlns:a16="http://schemas.microsoft.com/office/drawing/2014/main" id="{9285E2C7-210E-4968-A34D-FF0D62E6F183}"/>
+              </a:ext>
+            </a:extLst>
+          </p:cNvPr>
+          <p:cNvSpPr>
+            <a:spLocks xmlns:a="http://schemas.openxmlformats.org/drawingml/2006/main" noGrp="1"/>
+          </p:cNvSpPr>
+          <p:nvPr/>
+        </p:nvSpPr>
+        <p:spPr>
+          <a:xfrm xmlns:a="http://schemas.openxmlformats.org/drawingml/2006/main">
+            <a:off x="609600" y="6229350"/>
+            <a:ext cx="10972800" cy="171450"/>
+          </a:xfrm>
+          <a:prstGeom xmlns:a="http://schemas.openxmlformats.org/drawingml/2006/main" prst="rect">
+            <a:avLst/>
+          </a:prstGeom>
+          <a:noFill xmlns:a="http://schemas.openxmlformats.org/drawingml/2006/main"/>
+          <a:ln xmlns:a="http://schemas.openxmlformats.org/drawingml/2006/main" w="0">
+            <a:noFill/>
+          </a:ln>
+        </p:spPr>
+        <p:txBody>
+          <a:bodyPr xmlns:a="http://schemas.openxmlformats.org/drawingml/2006/main" wrap="none" lIns="0" tIns="0" rIns="0" bIns="0" anchor="ctr">
+            <a:noAutofit/>
+          </a:bodyPr>
+          <a:lstStyle xmlns:a="http://schemas.openxmlformats.org/drawingml/2006/main">
+            <a:defPPr algn="r">
+              <a:defRPr sz="1200" b="0">
+                <a:solidFill>
+                  <a:srgbClr val="4D5A68"/>
+                </a:solidFill>
+                <a:latin typeface="Malgun Gothic"/>
+                <a:ea typeface="Malgun Gothic"/>
+                <a:cs typeface="Malgun Gothic"/>
+              </a:defRPr>
+            </a:defPPr>
+            <a:lvl1pPr algn="r">
+              <a:defRPr sz="1200" b="0">
+                <a:solidFill>
+                  <a:srgbClr val="4D5A68"/>
+                </a:solidFill>
+                <a:latin typeface="Malgun Gothic"/>
+                <a:ea typeface="Malgun Gothic"/>
+                <a:cs typeface="Malgun Gothic"/>
+              </a:defRPr>
+            </a:lvl1pPr>
+            <a:lvl2pPr algn="r">
+              <a:defRPr sz="1200" b="0">
+                <a:solidFill>
+                  <a:srgbClr val="4D5A68"/>
+                </a:solidFill>
+                <a:latin typeface="Malgun Gothic"/>
+                <a:ea typeface="Malgun Gothic"/>
+                <a:cs typeface="Malgun Gothic"/>
+              </a:defRPr>
+            </a:lvl2pPr>
+            <a:lvl3pPr algn="r">
+              <a:defRPr sz="1200" b="0">
+                <a:solidFill>
+                  <a:srgbClr val="4D5A68"/>
+                </a:solidFill>
+                <a:latin typeface="Malgun Gothic"/>
+                <a:ea typeface="Malgun Gothic"/>
+                <a:cs typeface="Malgun Gothic"/>
+              </a:defRPr>
+            </a:lvl3pPr>
+            <a:lvl4pPr algn="r">
+              <a:defRPr sz="1200" b="0">
+                <a:solidFill>
+                  <a:srgbClr val="4D5A68"/>
+                </a:solidFill>
+                <a:latin typeface="Malgun Gothic"/>
+                <a:ea typeface="Malgun Gothic"/>
+                <a:cs typeface="Malgun Gothic"/>
+              </a:defRPr>
+            </a:lvl4pPr>
+            <a:lvl5pPr algn="r">
+              <a:defRPr sz="1200" b="0">
+                <a:solidFill>
+                  <a:srgbClr val="4D5A68"/>
+                </a:solidFill>
+                <a:latin typeface="Malgun Gothic"/>
+                <a:ea typeface="Malgun Gothic"/>
+                <a:cs typeface="Malgun Gothic"/>
+              </a:defRPr>
+            </a:lvl5pPr>
+            <a:lvl6pPr algn="r">
+              <a:defRPr sz="1200" b="0">
+                <a:solidFill>
+                  <a:srgbClr val="4D5A68"/>
+                </a:solidFill>
+                <a:latin typeface="Malgun Gothic"/>
+                <a:ea typeface="Malgun Gothic"/>
+                <a:cs typeface="Malgun Gothic"/>
+              </a:defRPr>
+            </a:lvl6pPr>
+            <a:lvl7pPr algn="r">
+              <a:defRPr sz="1200" b="0">
+                <a:solidFill>
+                  <a:srgbClr val="4D5A68"/>
+                </a:solidFill>
+                <a:latin typeface="Malgun Gothic"/>
+                <a:ea typeface="Malgun Gothic"/>
+                <a:cs typeface="Malgun Gothic"/>
+              </a:defRPr>
+            </a:lvl7pPr>
+            <a:lvl8pPr algn="r">
+              <a:defRPr sz="1200" b="0">
+                <a:solidFill>
+                  <a:srgbClr val="4D5A68"/>
+                </a:solidFill>
+                <a:latin typeface="Malgun Gothic"/>
+                <a:ea typeface="Malgun Gothic"/>
+                <a:cs typeface="Malgun Gothic"/>
+              </a:defRPr>
+            </a:lvl8pPr>
+            <a:lvl9pPr algn="r">
+              <a:defRPr sz="1200" b="0">
+                <a:solidFill>
+                  <a:srgbClr val="4D5A68"/>
+                </a:solidFill>
+                <a:latin typeface="Malgun Gothic"/>
+                <a:ea typeface="Malgun Gothic"/>
+                <a:cs typeface="Malgun Gothic"/>
+              </a:defRPr>
+            </a:lvl9pPr>
+          </a:lstStyle>
+          <a:p xmlns:a="http://schemas.openxmlformats.org/drawingml/2006/main">
+            <a:pPr algn="r">
+              <a:defRPr sz="1200" b="0">
+                <a:solidFill>
+                  <a:srgbClr val="4D5A68"/>
+                </a:solidFill>
+                <a:latin typeface="Malgun Gothic"/>
+                <a:ea typeface="Malgun Gothic"/>
+                <a:cs typeface="Malgun Gothic"/>
+              </a:defRPr>
+            </a:pPr>
+            <a:r>
+              <a:rPr sz="1200" b="0">
+                <a:solidFill>
+                  <a:srgbClr val="4D5A68"/>
+                </a:solidFill>
+                <a:latin typeface="Malgun Gothic"/>
+                <a:ea typeface="Malgun Gothic"/>
+                <a:cs typeface="Malgun Gothic"/>
+              </a:rPr>
+              <a:t>M 연계 · 신규 확장</a:t>
+            </a:r>
+          </a:p>
+        </p:txBody>
+      </p:sp>
     </p:spTree>
     <p:extLst>
       <p:ext uri="{BB962C8B-B14F-4D97-AF65-F5344CB8AC3E}">
-        <p14:creationId xmlns:p14="http://schemas.microsoft.com/office/powerpoint/2010/main" val="153827000"/>
+        <p14:creationId xmlns:p14="http://schemas.microsoft.com/office/powerpoint/2010/main" val="364279097"/>
       </p:ext>
     </p:extLst>
   </p:cSld>
@@ -41448,10 +43502,10 @@
       </p:grpSpPr>
       <p:sp>
         <p:nvSpPr>
-          <p:cNvPr id="37" name="ACT 2 · 정보의 양을 다시 묻는 연구">
+          <p:cNvPr id="38" name="ACT 2 · 정보의 양을 다시 묻는 연구">
             <a:extLst xmlns:a="http://schemas.openxmlformats.org/drawingml/2006/main">
               <a:ext uri="{FF2B5EF4-FFF2-40B4-BE49-F238E27FC236}">
-                <a16:creationId xmlns:a16="http://schemas.microsoft.com/office/drawing/2014/main" id="{24305BBC-B29B-49FD-B95B-95E3A42C9025}"/>
+                <a16:creationId xmlns:a16="http://schemas.microsoft.com/office/drawing/2014/main" id="{6B5BD888-374C-41AB-AE4D-752161DCCDA0}"/>
               </a:ext>
             </a:extLst>
           </p:cNvPr>
@@ -41609,7 +43663,7 @@
           <p:cNvPr id="2" name="S29">
             <a:extLst xmlns:a="http://schemas.openxmlformats.org/drawingml/2006/main">
               <a:ext uri="{FF2B5EF4-FFF2-40B4-BE49-F238E27FC236}">
-                <a16:creationId xmlns:a16="http://schemas.microsoft.com/office/drawing/2014/main" id="{CD2B4116-8A4C-4E3B-B57C-C10CECD9C903}"/>
+                <a16:creationId xmlns:a16="http://schemas.microsoft.com/office/drawing/2014/main" id="{D66B61FC-A8E0-4065-BE14-FE26E895CC08}"/>
               </a:ext>
             </a:extLst>
           </p:cNvPr>
@@ -41767,7 +43821,7 @@
           <p:cNvPr id="3" name="Long Context 연구가 말해주는 범위">
             <a:extLst xmlns:a="http://schemas.openxmlformats.org/drawingml/2006/main">
               <a:ext uri="{FF2B5EF4-FFF2-40B4-BE49-F238E27FC236}">
-                <a16:creationId xmlns:a16="http://schemas.microsoft.com/office/drawing/2014/main" id="{07AEAF4E-55FB-4B16-86C1-1F9EBB7FEC34}"/>
+                <a16:creationId xmlns:a16="http://schemas.microsoft.com/office/drawing/2014/main" id="{95840656-681F-496A-AFB7-64B76876E122}"/>
               </a:ext>
             </a:extLst>
           </p:cNvPr>
@@ -41925,7 +43979,7 @@
           <p:cNvPr id="4" name="">
             <a:extLst xmlns:a="http://schemas.openxmlformats.org/drawingml/2006/main">
               <a:ext uri="{FF2B5EF4-FFF2-40B4-BE49-F238E27FC236}">
-                <a16:creationId xmlns:a16="http://schemas.microsoft.com/office/drawing/2014/main" id="{82DCEC08-FC78-4224-BCB4-FA11EAD9C3D7}"/>
+                <a16:creationId xmlns:a16="http://schemas.microsoft.com/office/drawing/2014/main" id="{A512C702-1A45-41E8-A381-4A7EB42A55ED}"/>
               </a:ext>
             </a:extLst>
           </p:cNvPr>
@@ -41936,7 +43990,7 @@
         </p:nvSpPr>
         <p:spPr>
           <a:xfrm xmlns:a="http://schemas.openxmlformats.org/drawingml/2006/main">
-            <a:off x="609600" y="5829300"/>
+            <a:off x="609600" y="5753100"/>
             <a:ext cx="10972800" cy="0"/>
           </a:xfrm>
           <a:prstGeom xmlns:a="http://schemas.openxmlformats.org/drawingml/2006/main" prst="line">
@@ -41956,7 +44010,7 @@
           <p:cNvPr id="5" name="Liu et al., Lost in the Middle, TACL 2024 · RepoQA, 2024">
             <a:extLst xmlns:a="http://schemas.openxmlformats.org/drawingml/2006/main">
               <a:ext uri="{FF2B5EF4-FFF2-40B4-BE49-F238E27FC236}">
-                <a16:creationId xmlns:a16="http://schemas.microsoft.com/office/drawing/2014/main" id="{34E8D688-B135-4206-AA17-33A383E891A4}"/>
+                <a16:creationId xmlns:a16="http://schemas.microsoft.com/office/drawing/2014/main" id="{5A80DC4B-E4E9-4279-BA7D-0F6EC539D953}"/>
               </a:ext>
             </a:extLst>
           </p:cNvPr>
@@ -41967,8 +44021,8 @@
         </p:nvSpPr>
         <p:spPr>
           <a:xfrm xmlns:a="http://schemas.openxmlformats.org/drawingml/2006/main">
-            <a:off x="609600" y="5915025"/>
-            <a:ext cx="10972800" cy="247650"/>
+            <a:off x="609600" y="5791200"/>
+            <a:ext cx="10972800" cy="228600"/>
           </a:xfrm>
           <a:prstGeom xmlns:a="http://schemas.openxmlformats.org/drawingml/2006/main" prst="rect">
             <a:avLst/>
@@ -42114,7 +44168,7 @@
           <p:cNvPr id="6" name="특정 모델·과제의 결과 · 현재 Codex의 Repository coding 한계를 입증하지 않음">
             <a:extLst xmlns:a="http://schemas.openxmlformats.org/drawingml/2006/main">
               <a:ext uri="{FF2B5EF4-FFF2-40B4-BE49-F238E27FC236}">
-                <a16:creationId xmlns:a16="http://schemas.microsoft.com/office/drawing/2014/main" id="{D9FEABBA-E8ED-4CCD-9A48-39EF432CD893}"/>
+                <a16:creationId xmlns:a16="http://schemas.microsoft.com/office/drawing/2014/main" id="{CABCCE73-271B-4F38-9E90-6F36688C4B7E}"/>
               </a:ext>
             </a:extLst>
           </p:cNvPr>
@@ -42125,7 +44179,7 @@
         </p:nvSpPr>
         <p:spPr>
           <a:xfrm xmlns:a="http://schemas.openxmlformats.org/drawingml/2006/main">
-            <a:off x="609600" y="6191250"/>
+            <a:off x="609600" y="6019800"/>
             <a:ext cx="10972800" cy="209550"/>
           </a:xfrm>
           <a:prstGeom xmlns:a="http://schemas.openxmlformats.org/drawingml/2006/main" prst="rect">
@@ -42272,7 +44326,7 @@
           <p:cNvPr id="7" name="더 많은 Context가 항상 더 좋은 것은 아니다">
             <a:extLst xmlns:a="http://schemas.openxmlformats.org/drawingml/2006/main">
               <a:ext uri="{FF2B5EF4-FFF2-40B4-BE49-F238E27FC236}">
-                <a16:creationId xmlns:a16="http://schemas.microsoft.com/office/drawing/2014/main" id="{B82175DE-493A-40C8-AB01-B3D96DE20E31}"/>
+                <a16:creationId xmlns:a16="http://schemas.microsoft.com/office/drawing/2014/main" id="{840CD826-A639-4F65-BD66-7F1A8C114CE4}"/>
               </a:ext>
             </a:extLst>
           </p:cNvPr>
@@ -42430,7 +44484,7 @@
           <p:cNvPr id="8" name="Lost in the Middle">
             <a:extLst xmlns:a="http://schemas.openxmlformats.org/drawingml/2006/main">
               <a:ext uri="{FF2B5EF4-FFF2-40B4-BE49-F238E27FC236}">
-                <a16:creationId xmlns:a16="http://schemas.microsoft.com/office/drawing/2014/main" id="{A351098D-832F-4A4F-ADE1-0E87EBE5AEED}"/>
+                <a16:creationId xmlns:a16="http://schemas.microsoft.com/office/drawing/2014/main" id="{CBD98268-8513-4E70-BC14-D80275745D9E}"/>
               </a:ext>
             </a:extLst>
           </p:cNvPr>
@@ -42588,7 +44642,7 @@
           <p:cNvPr id="9" name="RepoQA">
             <a:extLst xmlns:a="http://schemas.openxmlformats.org/drawingml/2006/main">
               <a:ext uri="{FF2B5EF4-FFF2-40B4-BE49-F238E27FC236}">
-                <a16:creationId xmlns:a16="http://schemas.microsoft.com/office/drawing/2014/main" id="{D1C4064A-B940-465E-9D87-6B27A2ED0DB6}"/>
+                <a16:creationId xmlns:a16="http://schemas.microsoft.com/office/drawing/2014/main" id="{A1B76A26-3D0F-44C4-A933-73922578C71F}"/>
               </a:ext>
             </a:extLst>
           </p:cNvPr>
@@ -42746,7 +44800,7 @@
           <p:cNvPr id="10" name="여러 문서의 질문 답변 · key-value 검색">
             <a:extLst xmlns:a="http://schemas.openxmlformats.org/drawingml/2006/main">
               <a:ext uri="{FF2B5EF4-FFF2-40B4-BE49-F238E27FC236}">
-                <a16:creationId xmlns:a16="http://schemas.microsoft.com/office/drawing/2014/main" id="{D1C531B7-F545-4462-9287-A17F0BE0790B}"/>
+                <a16:creationId xmlns:a16="http://schemas.microsoft.com/office/drawing/2014/main" id="{44482FB0-8DE8-481A-945F-5B8E7206BA05}"/>
               </a:ext>
             </a:extLst>
           </p:cNvPr>
@@ -42904,7 +44958,7 @@
           <p:cNvPr id="11" name="50개 Repository의 코드 검색 과제">
             <a:extLst xmlns:a="http://schemas.openxmlformats.org/drawingml/2006/main">
               <a:ext uri="{FF2B5EF4-FFF2-40B4-BE49-F238E27FC236}">
-                <a16:creationId xmlns:a16="http://schemas.microsoft.com/office/drawing/2014/main" id="{A0EAA96F-4AE9-42DF-8A94-1CFD98E206D4}"/>
+                <a16:creationId xmlns:a16="http://schemas.microsoft.com/office/drawing/2014/main" id="{CAEDAAD5-EF59-468F-9C24-2F91973406D1}"/>
               </a:ext>
             </a:extLst>
           </p:cNvPr>
@@ -43062,7 +45116,7 @@
           <p:cNvPr id="12" name="관련 정보의 위치를 달리하는 구성">
             <a:extLst xmlns:a="http://schemas.openxmlformats.org/drawingml/2006/main">
               <a:ext uri="{FF2B5EF4-FFF2-40B4-BE49-F238E27FC236}">
-                <a16:creationId xmlns:a16="http://schemas.microsoft.com/office/drawing/2014/main" id="{B6D80274-125D-4F30-B51F-DA9D8867F82E}"/>
+                <a16:creationId xmlns:a16="http://schemas.microsoft.com/office/drawing/2014/main" id="{8BB4B8CE-A983-4122-AE13-51911061AF13}"/>
               </a:ext>
             </a:extLst>
           </p:cNvPr>
@@ -43220,7 +45274,7 @@
           <p:cNvPr id="13" name="">
             <a:extLst xmlns:a="http://schemas.openxmlformats.org/drawingml/2006/main">
               <a:ext uri="{FF2B5EF4-FFF2-40B4-BE49-F238E27FC236}">
-                <a16:creationId xmlns:a16="http://schemas.microsoft.com/office/drawing/2014/main" id="{F831AEC6-63D4-45B8-9CAB-4E8C45F523D3}"/>
+                <a16:creationId xmlns:a16="http://schemas.microsoft.com/office/drawing/2014/main" id="{1B10C2B4-950E-4E95-B168-04922FFE30AD}"/>
               </a:ext>
             </a:extLst>
           </p:cNvPr>
@@ -43253,7 +45307,7 @@
           <p:cNvPr id="14" name="">
             <a:extLst xmlns:a="http://schemas.openxmlformats.org/drawingml/2006/main">
               <a:ext uri="{FF2B5EF4-FFF2-40B4-BE49-F238E27FC236}">
-                <a16:creationId xmlns:a16="http://schemas.microsoft.com/office/drawing/2014/main" id="{EEE89FBD-8BBA-4D43-925B-EC8964E27458}"/>
+                <a16:creationId xmlns:a16="http://schemas.microsoft.com/office/drawing/2014/main" id="{B7D2B566-F65E-4C39-8396-90629D9C27F7}"/>
               </a:ext>
             </a:extLst>
           </p:cNvPr>
@@ -43286,7 +45340,7 @@
           <p:cNvPr id="15" name="">
             <a:extLst xmlns:a="http://schemas.openxmlformats.org/drawingml/2006/main">
               <a:ext uri="{FF2B5EF4-FFF2-40B4-BE49-F238E27FC236}">
-                <a16:creationId xmlns:a16="http://schemas.microsoft.com/office/drawing/2014/main" id="{6171872D-5B07-4528-A9D4-8F557470F253}"/>
+                <a16:creationId xmlns:a16="http://schemas.microsoft.com/office/drawing/2014/main" id="{BC5D6F11-1772-406C-9082-01CF6A970CF5}"/>
               </a:ext>
             </a:extLst>
           </p:cNvPr>
@@ -43319,7 +45373,7 @@
           <p:cNvPr id="16" name="">
             <a:extLst xmlns:a="http://schemas.openxmlformats.org/drawingml/2006/main">
               <a:ext uri="{FF2B5EF4-FFF2-40B4-BE49-F238E27FC236}">
-                <a16:creationId xmlns:a16="http://schemas.microsoft.com/office/drawing/2014/main" id="{D879D025-629D-479B-866B-F9E2B61548A3}"/>
+                <a16:creationId xmlns:a16="http://schemas.microsoft.com/office/drawing/2014/main" id="{5E99426C-3281-4840-935C-78BDE6292A9A}"/>
               </a:ext>
             </a:extLst>
           </p:cNvPr>
@@ -43352,7 +45406,7 @@
           <p:cNvPr id="17" name="">
             <a:extLst xmlns:a="http://schemas.openxmlformats.org/drawingml/2006/main">
               <a:ext uri="{FF2B5EF4-FFF2-40B4-BE49-F238E27FC236}">
-                <a16:creationId xmlns:a16="http://schemas.microsoft.com/office/drawing/2014/main" id="{23AB9085-8184-45A5-9B31-334125F94D6E}"/>
+                <a16:creationId xmlns:a16="http://schemas.microsoft.com/office/drawing/2014/main" id="{9F54F6FC-5906-4B64-B129-653E5F3DB93C}"/>
               </a:ext>
             </a:extLst>
           </p:cNvPr>
@@ -43385,7 +45439,7 @@
           <p:cNvPr id="18" name="">
             <a:extLst xmlns:a="http://schemas.openxmlformats.org/drawingml/2006/main">
               <a:ext uri="{FF2B5EF4-FFF2-40B4-BE49-F238E27FC236}">
-                <a16:creationId xmlns:a16="http://schemas.microsoft.com/office/drawing/2014/main" id="{44017979-543C-4FD5-B831-5F0A277E31B3}"/>
+                <a16:creationId xmlns:a16="http://schemas.microsoft.com/office/drawing/2014/main" id="{8E1D4279-7779-4AE1-ACBC-A56DC8D8EFA6}"/>
               </a:ext>
             </a:extLst>
           </p:cNvPr>
@@ -43418,7 +45472,7 @@
           <p:cNvPr id="19" name="">
             <a:extLst xmlns:a="http://schemas.openxmlformats.org/drawingml/2006/main">
               <a:ext uri="{FF2B5EF4-FFF2-40B4-BE49-F238E27FC236}">
-                <a16:creationId xmlns:a16="http://schemas.microsoft.com/office/drawing/2014/main" id="{41AA09AB-7FA2-4E4D-BF02-CD490600EDCC}"/>
+                <a16:creationId xmlns:a16="http://schemas.microsoft.com/office/drawing/2014/main" id="{216CB3A1-4D6B-41A4-820A-6090DB97248A}"/>
               </a:ext>
             </a:extLst>
           </p:cNvPr>
@@ -43451,7 +45505,7 @@
           <p:cNvPr id="20" name="">
             <a:extLst xmlns:a="http://schemas.openxmlformats.org/drawingml/2006/main">
               <a:ext uri="{FF2B5EF4-FFF2-40B4-BE49-F238E27FC236}">
-                <a16:creationId xmlns:a16="http://schemas.microsoft.com/office/drawing/2014/main" id="{2BCC02E5-52EA-4064-8284-9FF40ADC749C}"/>
+                <a16:creationId xmlns:a16="http://schemas.microsoft.com/office/drawing/2014/main" id="{20773A7E-8CD5-4DAD-9C6D-BB18C9493C5A}"/>
               </a:ext>
             </a:extLst>
           </p:cNvPr>
@@ -43484,7 +45538,7 @@
           <p:cNvPr id="21" name="">
             <a:extLst xmlns:a="http://schemas.openxmlformats.org/drawingml/2006/main">
               <a:ext uri="{FF2B5EF4-FFF2-40B4-BE49-F238E27FC236}">
-                <a16:creationId xmlns:a16="http://schemas.microsoft.com/office/drawing/2014/main" id="{DAE41790-CDE7-444F-B43F-00746686D392}"/>
+                <a16:creationId xmlns:a16="http://schemas.microsoft.com/office/drawing/2014/main" id="{7FF5880D-1733-4186-A376-722218D3375B}"/>
               </a:ext>
             </a:extLst>
           </p:cNvPr>
@@ -43517,7 +45571,7 @@
           <p:cNvPr id="22" name="">
             <a:extLst xmlns:a="http://schemas.openxmlformats.org/drawingml/2006/main">
               <a:ext uri="{FF2B5EF4-FFF2-40B4-BE49-F238E27FC236}">
-                <a16:creationId xmlns:a16="http://schemas.microsoft.com/office/drawing/2014/main" id="{012170D0-FEC8-44EF-AF46-B43564DD1000}"/>
+                <a16:creationId xmlns:a16="http://schemas.microsoft.com/office/drawing/2014/main" id="{F7EB0FEA-B45D-4583-9FC5-79A77F968AF4}"/>
               </a:ext>
             </a:extLst>
           </p:cNvPr>
@@ -43550,7 +45604,7 @@
           <p:cNvPr id="23" name="">
             <a:extLst xmlns:a="http://schemas.openxmlformats.org/drawingml/2006/main">
               <a:ext uri="{FF2B5EF4-FFF2-40B4-BE49-F238E27FC236}">
-                <a16:creationId xmlns:a16="http://schemas.microsoft.com/office/drawing/2014/main" id="{04174FEC-444C-4D06-8318-8015BF46B0E4}"/>
+                <a16:creationId xmlns:a16="http://schemas.microsoft.com/office/drawing/2014/main" id="{63BEF6DF-B980-4E7F-B7B8-7D1BB0ECC68D}"/>
               </a:ext>
             </a:extLst>
           </p:cNvPr>
@@ -43583,7 +45637,7 @@
           <p:cNvPr id="24" name="">
             <a:extLst xmlns:a="http://schemas.openxmlformats.org/drawingml/2006/main">
               <a:ext uri="{FF2B5EF4-FFF2-40B4-BE49-F238E27FC236}">
-                <a16:creationId xmlns:a16="http://schemas.microsoft.com/office/drawing/2014/main" id="{451EDA81-386F-40FB-8442-D78291C6A355}"/>
+                <a16:creationId xmlns:a16="http://schemas.microsoft.com/office/drawing/2014/main" id="{EB566585-4A44-4064-B0DD-F6C41D7BB070}"/>
               </a:ext>
             </a:extLst>
           </p:cNvPr>
@@ -43616,7 +45670,7 @@
           <p:cNvPr id="25" name="">
             <a:extLst xmlns:a="http://schemas.openxmlformats.org/drawingml/2006/main">
               <a:ext uri="{FF2B5EF4-FFF2-40B4-BE49-F238E27FC236}">
-                <a16:creationId xmlns:a16="http://schemas.microsoft.com/office/drawing/2014/main" id="{B3E4C46E-06C8-44C3-89FC-D40950C787EB}"/>
+                <a16:creationId xmlns:a16="http://schemas.microsoft.com/office/drawing/2014/main" id="{41ABBC57-58C0-40D7-81F0-F6DB83D47DC3}"/>
               </a:ext>
             </a:extLst>
           </p:cNvPr>
@@ -43649,7 +45703,7 @@
           <p:cNvPr id="26" name="">
             <a:extLst xmlns:a="http://schemas.openxmlformats.org/drawingml/2006/main">
               <a:ext uri="{FF2B5EF4-FFF2-40B4-BE49-F238E27FC236}">
-                <a16:creationId xmlns:a16="http://schemas.microsoft.com/office/drawing/2014/main" id="{07D84AAE-6ED7-41B3-B997-4D19DE78FA92}"/>
+                <a16:creationId xmlns:a16="http://schemas.microsoft.com/office/drawing/2014/main" id="{9899283A-84E8-45F0-A93C-F24A8E325342}"/>
               </a:ext>
             </a:extLst>
           </p:cNvPr>
@@ -43682,7 +45736,7 @@
           <p:cNvPr id="27" name="">
             <a:extLst xmlns:a="http://schemas.openxmlformats.org/drawingml/2006/main">
               <a:ext uri="{FF2B5EF4-FFF2-40B4-BE49-F238E27FC236}">
-                <a16:creationId xmlns:a16="http://schemas.microsoft.com/office/drawing/2014/main" id="{BEA67AF4-603A-4D39-ACE3-E231D2343D52}"/>
+                <a16:creationId xmlns:a16="http://schemas.microsoft.com/office/drawing/2014/main" id="{5511C79E-EFEF-49C8-8D9B-02BC35CC1037}"/>
               </a:ext>
             </a:extLst>
           </p:cNvPr>
@@ -43715,7 +45769,7 @@
           <p:cNvPr id="28" name="질문">
             <a:extLst xmlns:a="http://schemas.openxmlformats.org/drawingml/2006/main">
               <a:ext uri="{FF2B5EF4-FFF2-40B4-BE49-F238E27FC236}">
-                <a16:creationId xmlns:a16="http://schemas.microsoft.com/office/drawing/2014/main" id="{76318589-54E9-423E-99BC-4EF800F4B0D5}"/>
+                <a16:creationId xmlns:a16="http://schemas.microsoft.com/office/drawing/2014/main" id="{63CC55AA-7CCE-4DC4-8551-F8BFA163679E}"/>
               </a:ext>
             </a:extLst>
           </p:cNvPr>
@@ -43873,7 +45927,7 @@
           <p:cNvPr id="29" name="">
             <a:extLst xmlns:a="http://schemas.openxmlformats.org/drawingml/2006/main">
               <a:ext uri="{FF2B5EF4-FFF2-40B4-BE49-F238E27FC236}">
-                <a16:creationId xmlns:a16="http://schemas.microsoft.com/office/drawing/2014/main" id="{F6C3CAE5-0897-4B6E-91B4-E7D96C58D76C}"/>
+                <a16:creationId xmlns:a16="http://schemas.microsoft.com/office/drawing/2014/main" id="{8A575A69-B1C1-444F-831E-5DE34C0B2ABE}"/>
               </a:ext>
             </a:extLst>
           </p:cNvPr>
@@ -43903,7 +45957,7 @@
           <p:cNvPr id="30" name="">
             <a:extLst xmlns:a="http://schemas.openxmlformats.org/drawingml/2006/main">
               <a:ext uri="{FF2B5EF4-FFF2-40B4-BE49-F238E27FC236}">
-                <a16:creationId xmlns:a16="http://schemas.microsoft.com/office/drawing/2014/main" id="{B342EED0-9280-423A-8792-E16300D5C668}"/>
+                <a16:creationId xmlns:a16="http://schemas.microsoft.com/office/drawing/2014/main" id="{4E684215-11B4-4AE8-912B-3E24D7DA5B1A}"/>
               </a:ext>
             </a:extLst>
           </p:cNvPr>
@@ -43936,7 +45990,7 @@
           <p:cNvPr id="31" name="Repository의 코드">
             <a:extLst xmlns:a="http://schemas.openxmlformats.org/drawingml/2006/main">
               <a:ext uri="{FF2B5EF4-FFF2-40B4-BE49-F238E27FC236}">
-                <a16:creationId xmlns:a16="http://schemas.microsoft.com/office/drawing/2014/main" id="{B699C1F9-9FDB-4CF2-9BDF-B8A16C644844}"/>
+                <a16:creationId xmlns:a16="http://schemas.microsoft.com/office/drawing/2014/main" id="{EA6BDB7B-C7DF-4B9F-BC94-C2C51B3CE600}"/>
               </a:ext>
             </a:extLst>
           </p:cNvPr>
@@ -44094,7 +46148,7 @@
           <p:cNvPr id="32" name="관련 코드 찾기">
             <a:extLst xmlns:a="http://schemas.openxmlformats.org/drawingml/2006/main">
               <a:ext uri="{FF2B5EF4-FFF2-40B4-BE49-F238E27FC236}">
-                <a16:creationId xmlns:a16="http://schemas.microsoft.com/office/drawing/2014/main" id="{0828C954-7654-4398-B71C-D9C469F3903A}"/>
+                <a16:creationId xmlns:a16="http://schemas.microsoft.com/office/drawing/2014/main" id="{EB473A48-4082-43F9-AD86-C16A57A4BFD0}"/>
               </a:ext>
             </a:extLst>
           </p:cNvPr>
@@ -44252,7 +46306,7 @@
           <p:cNvPr id="33" name="관련 정보의 위치가&#10;일부 조건에서 중요할 수 있다">
             <a:extLst xmlns:a="http://schemas.openxmlformats.org/drawingml/2006/main">
               <a:ext uri="{FF2B5EF4-FFF2-40B4-BE49-F238E27FC236}">
-                <a16:creationId xmlns:a16="http://schemas.microsoft.com/office/drawing/2014/main" id="{B6A85BFC-CD5D-4864-8080-5F1B320AB6CB}"/>
+                <a16:creationId xmlns:a16="http://schemas.microsoft.com/office/drawing/2014/main" id="{4C31C400-A273-44AB-9547-E9F29FD04FDF}"/>
               </a:ext>
             </a:extLst>
           </p:cNvPr>
@@ -44433,7 +46487,7 @@
           <p:cNvPr id="34" name="관련 코드 정보를&#10;선택하고 찾는 능력을 평가">
             <a:extLst xmlns:a="http://schemas.openxmlformats.org/drawingml/2006/main">
               <a:ext uri="{FF2B5EF4-FFF2-40B4-BE49-F238E27FC236}">
-                <a16:creationId xmlns:a16="http://schemas.microsoft.com/office/drawing/2014/main" id="{08DCF009-13E7-49D6-B429-FB4E4B15ABD6}"/>
+                <a16:creationId xmlns:a16="http://schemas.microsoft.com/office/drawing/2014/main" id="{3BE7D024-D042-4CAF-8614-DB2CDB197CB4}"/>
               </a:ext>
             </a:extLst>
           </p:cNvPr>
@@ -44614,7 +46668,7 @@
           <p:cNvPr id="35" name="aclanthology.org/2024.tacl-1.9/">
             <a:extLst xmlns:a="http://schemas.openxmlformats.org/drawingml/2006/main">
               <a:ext uri="{FF2B5EF4-FFF2-40B4-BE49-F238E27FC236}">
-                <a16:creationId xmlns:a16="http://schemas.microsoft.com/office/drawing/2014/main" id="{3E48014D-2DA2-4F12-A55C-B1095A04A081}"/>
+                <a16:creationId xmlns:a16="http://schemas.microsoft.com/office/drawing/2014/main" id="{A76E8F8C-FC25-4FED-A040-A5420AB423E3}"/>
               </a:ext>
             </a:extLst>
           </p:cNvPr>
@@ -44772,7 +46826,7 @@
           <p:cNvPr id="36" name="arxiv.org/abs/2406.06025">
             <a:extLst xmlns:a="http://schemas.openxmlformats.org/drawingml/2006/main">
               <a:ext uri="{FF2B5EF4-FFF2-40B4-BE49-F238E27FC236}">
-                <a16:creationId xmlns:a16="http://schemas.microsoft.com/office/drawing/2014/main" id="{C55DD358-AC0F-469F-ADCE-D7ED51BFF4B2}"/>
+                <a16:creationId xmlns:a16="http://schemas.microsoft.com/office/drawing/2014/main" id="{3619DCD2-D6AF-4C6D-9206-C5726753D983}"/>
               </a:ext>
             </a:extLst>
           </p:cNvPr>
@@ -44925,10 +46979,168 @@
           </a:p>
         </p:txBody>
       </p:sp>
+      <p:sp>
+        <p:nvSpPr>
+          <p:cNvPr id="37" name="Legacy module connection">
+            <a:extLst xmlns:a="http://schemas.openxmlformats.org/drawingml/2006/main">
+              <a:ext uri="{FF2B5EF4-FFF2-40B4-BE49-F238E27FC236}">
+                <a16:creationId xmlns:a16="http://schemas.microsoft.com/office/drawing/2014/main" id="{7AC6A856-02E2-4005-A004-ECFD27DCEA99}"/>
+              </a:ext>
+            </a:extLst>
+          </p:cNvPr>
+          <p:cNvSpPr>
+            <a:spLocks xmlns:a="http://schemas.openxmlformats.org/drawingml/2006/main" noGrp="1"/>
+          </p:cNvSpPr>
+          <p:nvPr/>
+        </p:nvSpPr>
+        <p:spPr>
+          <a:xfrm xmlns:a="http://schemas.openxmlformats.org/drawingml/2006/main">
+            <a:off x="609600" y="6229350"/>
+            <a:ext cx="10972800" cy="171450"/>
+          </a:xfrm>
+          <a:prstGeom xmlns:a="http://schemas.openxmlformats.org/drawingml/2006/main" prst="rect">
+            <a:avLst/>
+          </a:prstGeom>
+          <a:noFill xmlns:a="http://schemas.openxmlformats.org/drawingml/2006/main"/>
+          <a:ln xmlns:a="http://schemas.openxmlformats.org/drawingml/2006/main" w="0">
+            <a:noFill/>
+          </a:ln>
+        </p:spPr>
+        <p:txBody>
+          <a:bodyPr xmlns:a="http://schemas.openxmlformats.org/drawingml/2006/main" wrap="none" lIns="0" tIns="0" rIns="0" bIns="0" anchor="ctr">
+            <a:noAutofit/>
+          </a:bodyPr>
+          <a:lstStyle xmlns:a="http://schemas.openxmlformats.org/drawingml/2006/main">
+            <a:defPPr algn="r">
+              <a:defRPr sz="1200" b="0">
+                <a:solidFill>
+                  <a:srgbClr val="4D5A68"/>
+                </a:solidFill>
+                <a:latin typeface="Malgun Gothic"/>
+                <a:ea typeface="Malgun Gothic"/>
+                <a:cs typeface="Malgun Gothic"/>
+              </a:defRPr>
+            </a:defPPr>
+            <a:lvl1pPr algn="r">
+              <a:defRPr sz="1200" b="0">
+                <a:solidFill>
+                  <a:srgbClr val="4D5A68"/>
+                </a:solidFill>
+                <a:latin typeface="Malgun Gothic"/>
+                <a:ea typeface="Malgun Gothic"/>
+                <a:cs typeface="Malgun Gothic"/>
+              </a:defRPr>
+            </a:lvl1pPr>
+            <a:lvl2pPr algn="r">
+              <a:defRPr sz="1200" b="0">
+                <a:solidFill>
+                  <a:srgbClr val="4D5A68"/>
+                </a:solidFill>
+                <a:latin typeface="Malgun Gothic"/>
+                <a:ea typeface="Malgun Gothic"/>
+                <a:cs typeface="Malgun Gothic"/>
+              </a:defRPr>
+            </a:lvl2pPr>
+            <a:lvl3pPr algn="r">
+              <a:defRPr sz="1200" b="0">
+                <a:solidFill>
+                  <a:srgbClr val="4D5A68"/>
+                </a:solidFill>
+                <a:latin typeface="Malgun Gothic"/>
+                <a:ea typeface="Malgun Gothic"/>
+                <a:cs typeface="Malgun Gothic"/>
+              </a:defRPr>
+            </a:lvl3pPr>
+            <a:lvl4pPr algn="r">
+              <a:defRPr sz="1200" b="0">
+                <a:solidFill>
+                  <a:srgbClr val="4D5A68"/>
+                </a:solidFill>
+                <a:latin typeface="Malgun Gothic"/>
+                <a:ea typeface="Malgun Gothic"/>
+                <a:cs typeface="Malgun Gothic"/>
+              </a:defRPr>
+            </a:lvl4pPr>
+            <a:lvl5pPr algn="r">
+              <a:defRPr sz="1200" b="0">
+                <a:solidFill>
+                  <a:srgbClr val="4D5A68"/>
+                </a:solidFill>
+                <a:latin typeface="Malgun Gothic"/>
+                <a:ea typeface="Malgun Gothic"/>
+                <a:cs typeface="Malgun Gothic"/>
+              </a:defRPr>
+            </a:lvl5pPr>
+            <a:lvl6pPr algn="r">
+              <a:defRPr sz="1200" b="0">
+                <a:solidFill>
+                  <a:srgbClr val="4D5A68"/>
+                </a:solidFill>
+                <a:latin typeface="Malgun Gothic"/>
+                <a:ea typeface="Malgun Gothic"/>
+                <a:cs typeface="Malgun Gothic"/>
+              </a:defRPr>
+            </a:lvl6pPr>
+            <a:lvl7pPr algn="r">
+              <a:defRPr sz="1200" b="0">
+                <a:solidFill>
+                  <a:srgbClr val="4D5A68"/>
+                </a:solidFill>
+                <a:latin typeface="Malgun Gothic"/>
+                <a:ea typeface="Malgun Gothic"/>
+                <a:cs typeface="Malgun Gothic"/>
+              </a:defRPr>
+            </a:lvl7pPr>
+            <a:lvl8pPr algn="r">
+              <a:defRPr sz="1200" b="0">
+                <a:solidFill>
+                  <a:srgbClr val="4D5A68"/>
+                </a:solidFill>
+                <a:latin typeface="Malgun Gothic"/>
+                <a:ea typeface="Malgun Gothic"/>
+                <a:cs typeface="Malgun Gothic"/>
+              </a:defRPr>
+            </a:lvl8pPr>
+            <a:lvl9pPr algn="r">
+              <a:defRPr sz="1200" b="0">
+                <a:solidFill>
+                  <a:srgbClr val="4D5A68"/>
+                </a:solidFill>
+                <a:latin typeface="Malgun Gothic"/>
+                <a:ea typeface="Malgun Gothic"/>
+                <a:cs typeface="Malgun Gothic"/>
+              </a:defRPr>
+            </a:lvl9pPr>
+          </a:lstStyle>
+          <a:p xmlns:a="http://schemas.openxmlformats.org/drawingml/2006/main">
+            <a:pPr algn="r">
+              <a:defRPr sz="1200" b="0">
+                <a:solidFill>
+                  <a:srgbClr val="4D5A68"/>
+                </a:solidFill>
+                <a:latin typeface="Malgun Gothic"/>
+                <a:ea typeface="Malgun Gothic"/>
+                <a:cs typeface="Malgun Gothic"/>
+              </a:defRPr>
+            </a:pPr>
+            <a:r>
+              <a:rPr sz="1200" b="0">
+                <a:solidFill>
+                  <a:srgbClr val="4D5A68"/>
+                </a:solidFill>
+                <a:latin typeface="Malgun Gothic"/>
+                <a:ea typeface="Malgun Gothic"/>
+                <a:cs typeface="Malgun Gothic"/>
+              </a:rPr>
+              <a:t>M 연계 · 신규 확장</a:t>
+            </a:r>
+          </a:p>
+        </p:txBody>
+      </p:sp>
     </p:spTree>
     <p:extLst>
       <p:ext uri="{BB962C8B-B14F-4D97-AF65-F5344CB8AC3E}">
-        <p14:creationId xmlns:p14="http://schemas.microsoft.com/office/powerpoint/2010/main" val="238896563"/>
+        <p14:creationId xmlns:p14="http://schemas.microsoft.com/office/powerpoint/2010/main" val="1626958265"/>
       </p:ext>
     </p:extLst>
   </p:cSld>
@@ -44956,10 +47168,10 @@
       </p:grpSpPr>
       <p:sp>
         <p:nvSpPr>
-          <p:cNvPr id="20" name="ACT 2 · 필요한 상세 정보의 탐색 경로">
+          <p:cNvPr id="21" name="ACT 2 · 필요한 상세 정보의 탐색 경로">
             <a:extLst xmlns:a="http://schemas.openxmlformats.org/drawingml/2006/main">
               <a:ext uri="{FF2B5EF4-FFF2-40B4-BE49-F238E27FC236}">
-                <a16:creationId xmlns:a16="http://schemas.microsoft.com/office/drawing/2014/main" id="{4660E4E5-DFAC-462B-BD9B-A5229E3DC1CE}"/>
+                <a16:creationId xmlns:a16="http://schemas.microsoft.com/office/drawing/2014/main" id="{E047D274-5A51-48AD-A07D-242FBA8D002E}"/>
               </a:ext>
             </a:extLst>
           </p:cNvPr>
@@ -45117,7 +47329,7 @@
           <p:cNvPr id="2" name="S30">
             <a:extLst xmlns:a="http://schemas.openxmlformats.org/drawingml/2006/main">
               <a:ext uri="{FF2B5EF4-FFF2-40B4-BE49-F238E27FC236}">
-                <a16:creationId xmlns:a16="http://schemas.microsoft.com/office/drawing/2014/main" id="{5FA279D2-1F39-4924-92D9-B751483352E0}"/>
+                <a16:creationId xmlns:a16="http://schemas.microsoft.com/office/drawing/2014/main" id="{8C7C18F4-64F2-435D-AEA9-5B7C105236A6}"/>
               </a:ext>
             </a:extLst>
           </p:cNvPr>
@@ -45275,7 +47487,7 @@
           <p:cNvPr id="3" name="필요한 상세 정보로 가는 길">
             <a:extLst xmlns:a="http://schemas.openxmlformats.org/drawingml/2006/main">
               <a:ext uri="{FF2B5EF4-FFF2-40B4-BE49-F238E27FC236}">
-                <a16:creationId xmlns:a16="http://schemas.microsoft.com/office/drawing/2014/main" id="{11A7C445-158C-4B2F-9D4D-908B719EBDA3}"/>
+                <a16:creationId xmlns:a16="http://schemas.microsoft.com/office/drawing/2014/main" id="{29A9B5D7-421F-4CB0-9940-2183C5515D1E}"/>
               </a:ext>
             </a:extLst>
           </p:cNvPr>
@@ -45433,7 +47645,7 @@
           <p:cNvPr id="4" name="">
             <a:extLst xmlns:a="http://schemas.openxmlformats.org/drawingml/2006/main">
               <a:ext uri="{FF2B5EF4-FFF2-40B4-BE49-F238E27FC236}">
-                <a16:creationId xmlns:a16="http://schemas.microsoft.com/office/drawing/2014/main" id="{65EAA62C-3E18-48B7-8A3B-F28C58AABA67}"/>
+                <a16:creationId xmlns:a16="http://schemas.microsoft.com/office/drawing/2014/main" id="{3CFD27FC-2DF5-4194-AD6E-6525A0E005AB}"/>
               </a:ext>
             </a:extLst>
           </p:cNvPr>
@@ -45444,7 +47656,7 @@
         </p:nvSpPr>
         <p:spPr>
           <a:xfrm xmlns:a="http://schemas.openxmlformats.org/drawingml/2006/main">
-            <a:off x="609600" y="5829300"/>
+            <a:off x="609600" y="5753100"/>
             <a:ext cx="10972800" cy="0"/>
           </a:xfrm>
           <a:prstGeom xmlns:a="http://schemas.openxmlformats.org/drawingml/2006/main" prst="line">
@@ -45464,7 +47676,7 @@
           <p:cNvPr id="5" name="교육용 Routing 모델 · 실제 문서 접근 결과는 다음 구간에서 확인">
             <a:extLst xmlns:a="http://schemas.openxmlformats.org/drawingml/2006/main">
               <a:ext uri="{FF2B5EF4-FFF2-40B4-BE49-F238E27FC236}">
-                <a16:creationId xmlns:a16="http://schemas.microsoft.com/office/drawing/2014/main" id="{3CC58BC5-310A-4AFE-B73E-AD67C4AAADAA}"/>
+                <a16:creationId xmlns:a16="http://schemas.microsoft.com/office/drawing/2014/main" id="{BBD6CEE1-9A4A-47AA-9D63-427539A81579}"/>
               </a:ext>
             </a:extLst>
           </p:cNvPr>
@@ -45475,8 +47687,8 @@
         </p:nvSpPr>
         <p:spPr>
           <a:xfrm xmlns:a="http://schemas.openxmlformats.org/drawingml/2006/main">
-            <a:off x="609600" y="5915025"/>
-            <a:ext cx="10972800" cy="247650"/>
+            <a:off x="609600" y="5791200"/>
+            <a:ext cx="10972800" cy="228600"/>
           </a:xfrm>
           <a:prstGeom xmlns:a="http://schemas.openxmlformats.org/drawingml/2006/main" prst="rect">
             <a:avLst/>
@@ -45622,7 +47834,7 @@
           <p:cNvPr id="6" name="검색 성능 향상이나 토큰 절약을 입증한 그림이 아님">
             <a:extLst xmlns:a="http://schemas.openxmlformats.org/drawingml/2006/main">
               <a:ext uri="{FF2B5EF4-FFF2-40B4-BE49-F238E27FC236}">
-                <a16:creationId xmlns:a16="http://schemas.microsoft.com/office/drawing/2014/main" id="{D195A35F-F593-4A63-8B59-2DEA453D6C85}"/>
+                <a16:creationId xmlns:a16="http://schemas.microsoft.com/office/drawing/2014/main" id="{53C4A453-4F14-49F6-8F57-B3CAF8D4B90B}"/>
               </a:ext>
             </a:extLst>
           </p:cNvPr>
@@ -45633,7 +47845,7 @@
         </p:nvSpPr>
         <p:spPr>
           <a:xfrm xmlns:a="http://schemas.openxmlformats.org/drawingml/2006/main">
-            <a:off x="609600" y="6191250"/>
+            <a:off x="609600" y="6019800"/>
             <a:ext cx="10972800" cy="209550"/>
           </a:xfrm>
           <a:prstGeom xmlns:a="http://schemas.openxmlformats.org/drawingml/2006/main" prst="rect">
@@ -45780,7 +47992,7 @@
           <p:cNvPr id="7" name="어떤 질문에서 어떤 상세 정보가 필요할까?">
             <a:extLst xmlns:a="http://schemas.openxmlformats.org/drawingml/2006/main">
               <a:ext uri="{FF2B5EF4-FFF2-40B4-BE49-F238E27FC236}">
-                <a16:creationId xmlns:a16="http://schemas.microsoft.com/office/drawing/2014/main" id="{1F33B4BA-F4C4-4C34-A798-9BEEEC27AA08}"/>
+                <a16:creationId xmlns:a16="http://schemas.microsoft.com/office/drawing/2014/main" id="{614B3746-DDA1-4D53-96A7-F18C4A870B4F}"/>
               </a:ext>
             </a:extLst>
           </p:cNvPr>
@@ -45938,7 +48150,7 @@
           <p:cNvPr id="8" name="">
             <a:extLst xmlns:a="http://schemas.openxmlformats.org/drawingml/2006/main">
               <a:ext uri="{FF2B5EF4-FFF2-40B4-BE49-F238E27FC236}">
-                <a16:creationId xmlns:a16="http://schemas.microsoft.com/office/drawing/2014/main" id="{CD729D97-9C38-495D-81A4-9F41B980A63B}"/>
+                <a16:creationId xmlns:a16="http://schemas.microsoft.com/office/drawing/2014/main" id="{B1807B88-997B-40FC-97C3-6ED166F05DEE}"/>
               </a:ext>
             </a:extLst>
           </p:cNvPr>
@@ -45969,7 +48181,7 @@
           <p:cNvPr id="9" name="Task">
             <a:extLst xmlns:a="http://schemas.openxmlformats.org/drawingml/2006/main">
               <a:ext uri="{FF2B5EF4-FFF2-40B4-BE49-F238E27FC236}">
-                <a16:creationId xmlns:a16="http://schemas.microsoft.com/office/drawing/2014/main" id="{B16E67B9-6FF4-4794-8F6E-991286EDA724}"/>
+                <a16:creationId xmlns:a16="http://schemas.microsoft.com/office/drawing/2014/main" id="{7FFEE3A0-8D10-480C-8714-E4064E1613DA}"/>
               </a:ext>
             </a:extLst>
           </p:cNvPr>
@@ -46127,7 +48339,7 @@
           <p:cNvPr id="10" name="지금 해결할 질문">
             <a:extLst xmlns:a="http://schemas.openxmlformats.org/drawingml/2006/main">
               <a:ext uri="{FF2B5EF4-FFF2-40B4-BE49-F238E27FC236}">
-                <a16:creationId xmlns:a16="http://schemas.microsoft.com/office/drawing/2014/main" id="{757E536D-5058-4C38-B52F-4BB89D376C52}"/>
+                <a16:creationId xmlns:a16="http://schemas.microsoft.com/office/drawing/2014/main" id="{600EEAB5-4703-4F89-810B-297576C50713}"/>
               </a:ext>
             </a:extLst>
           </p:cNvPr>
@@ -46285,7 +48497,7 @@
           <p:cNvPr id="11" name="">
             <a:extLst xmlns:a="http://schemas.openxmlformats.org/drawingml/2006/main">
               <a:ext uri="{FF2B5EF4-FFF2-40B4-BE49-F238E27FC236}">
-                <a16:creationId xmlns:a16="http://schemas.microsoft.com/office/drawing/2014/main" id="{F173A335-5B59-4619-B738-AEC998BC41DC}"/>
+                <a16:creationId xmlns:a16="http://schemas.microsoft.com/office/drawing/2014/main" id="{D23C0358-F8BC-40C6-ABF0-3FDC659F138D}"/>
               </a:ext>
             </a:extLst>
           </p:cNvPr>
@@ -46315,7 +48527,7 @@
           <p:cNvPr id="12" name="">
             <a:extLst xmlns:a="http://schemas.openxmlformats.org/drawingml/2006/main">
               <a:ext uri="{FF2B5EF4-FFF2-40B4-BE49-F238E27FC236}">
-                <a16:creationId xmlns:a16="http://schemas.microsoft.com/office/drawing/2014/main" id="{3C4C112B-1668-4714-803A-C18F4AF4E105}"/>
+                <a16:creationId xmlns:a16="http://schemas.microsoft.com/office/drawing/2014/main" id="{31B407D5-37EF-4804-8927-962B2B17589A}"/>
               </a:ext>
             </a:extLst>
           </p:cNvPr>
@@ -46346,7 +48558,7 @@
           <p:cNvPr id="13" name="Core Context">
             <a:extLst xmlns:a="http://schemas.openxmlformats.org/drawingml/2006/main">
               <a:ext uri="{FF2B5EF4-FFF2-40B4-BE49-F238E27FC236}">
-                <a16:creationId xmlns:a16="http://schemas.microsoft.com/office/drawing/2014/main" id="{A8B82F8E-097E-413F-86AA-0C7C2EDC664D}"/>
+                <a16:creationId xmlns:a16="http://schemas.microsoft.com/office/drawing/2014/main" id="{268AA27B-1890-4FB1-AA06-4360B2DDC36A}"/>
               </a:ext>
             </a:extLst>
           </p:cNvPr>
@@ -46504,7 +48716,7 @@
           <p:cNvPr id="14" name="프로젝트 안내와&#10;찾아갈 위치">
             <a:extLst xmlns:a="http://schemas.openxmlformats.org/drawingml/2006/main">
               <a:ext uri="{FF2B5EF4-FFF2-40B4-BE49-F238E27FC236}">
-                <a16:creationId xmlns:a16="http://schemas.microsoft.com/office/drawing/2014/main" id="{1B081A7B-4115-4CED-9EFF-7687E7366329}"/>
+                <a16:creationId xmlns:a16="http://schemas.microsoft.com/office/drawing/2014/main" id="{2BA83ACD-A9DB-499F-8D25-4CF84B2EBC8A}"/>
               </a:ext>
             </a:extLst>
           </p:cNvPr>
@@ -46685,7 +48897,7 @@
           <p:cNvPr id="15" name="">
             <a:extLst xmlns:a="http://schemas.openxmlformats.org/drawingml/2006/main">
               <a:ext uri="{FF2B5EF4-FFF2-40B4-BE49-F238E27FC236}">
-                <a16:creationId xmlns:a16="http://schemas.microsoft.com/office/drawing/2014/main" id="{5E91A82D-E068-4CFA-A22A-2F4018EC920A}"/>
+                <a16:creationId xmlns:a16="http://schemas.microsoft.com/office/drawing/2014/main" id="{CEF74C54-63F7-409D-9AC4-78E2974AD65A}"/>
               </a:ext>
             </a:extLst>
           </p:cNvPr>
@@ -46715,7 +48927,7 @@
           <p:cNvPr id="16" name="">
             <a:extLst xmlns:a="http://schemas.openxmlformats.org/drawingml/2006/main">
               <a:ext uri="{FF2B5EF4-FFF2-40B4-BE49-F238E27FC236}">
-                <a16:creationId xmlns:a16="http://schemas.microsoft.com/office/drawing/2014/main" id="{F6612FD8-E5C4-4F53-8BC6-7B7B07E5CF28}"/>
+                <a16:creationId xmlns:a16="http://schemas.microsoft.com/office/drawing/2014/main" id="{8E6E1998-AEB3-45DA-BDE4-16F81AC335D6}"/>
               </a:ext>
             </a:extLst>
           </p:cNvPr>
@@ -46746,7 +48958,7 @@
           <p:cNvPr id="17" name="관련 상세 정보">
             <a:extLst xmlns:a="http://schemas.openxmlformats.org/drawingml/2006/main">
               <a:ext uri="{FF2B5EF4-FFF2-40B4-BE49-F238E27FC236}">
-                <a16:creationId xmlns:a16="http://schemas.microsoft.com/office/drawing/2014/main" id="{5D51DE27-8E73-495E-8991-38D5069D2109}"/>
+                <a16:creationId xmlns:a16="http://schemas.microsoft.com/office/drawing/2014/main" id="{41355798-3F02-4B38-B895-7B13EF119D93}"/>
               </a:ext>
             </a:extLst>
           </p:cNvPr>
@@ -46904,7 +49116,7 @@
           <p:cNvPr id="18" name="질문에 필요한&#10;계약 · 구조 · 테스트">
             <a:extLst xmlns:a="http://schemas.openxmlformats.org/drawingml/2006/main">
               <a:ext uri="{FF2B5EF4-FFF2-40B4-BE49-F238E27FC236}">
-                <a16:creationId xmlns:a16="http://schemas.microsoft.com/office/drawing/2014/main" id="{BE86A12F-BA35-4F7B-BF6A-C592277B485F}"/>
+                <a16:creationId xmlns:a16="http://schemas.microsoft.com/office/drawing/2014/main" id="{139C4921-D440-439F-890E-367C3CC206DD}"/>
               </a:ext>
             </a:extLst>
           </p:cNvPr>
@@ -47085,7 +49297,7 @@
           <p:cNvPr id="19" name="C++ 예: 공통 제약을 확인한 뒤, 해당 알고리즘의 계약으로">
             <a:extLst xmlns:a="http://schemas.openxmlformats.org/drawingml/2006/main">
               <a:ext uri="{FF2B5EF4-FFF2-40B4-BE49-F238E27FC236}">
-                <a16:creationId xmlns:a16="http://schemas.microsoft.com/office/drawing/2014/main" id="{FB39CE3D-2A88-4A1D-AB63-16929397BD0B}"/>
+                <a16:creationId xmlns:a16="http://schemas.microsoft.com/office/drawing/2014/main" id="{D146BAF3-1A32-4737-97E1-A45D783B24DB}"/>
               </a:ext>
             </a:extLst>
           </p:cNvPr>
@@ -47238,10 +49450,168 @@
           </a:p>
         </p:txBody>
       </p:sp>
+      <p:sp>
+        <p:nvSpPr>
+          <p:cNvPr id="20" name="Legacy module connection">
+            <a:extLst xmlns:a="http://schemas.openxmlformats.org/drawingml/2006/main">
+              <a:ext uri="{FF2B5EF4-FFF2-40B4-BE49-F238E27FC236}">
+                <a16:creationId xmlns:a16="http://schemas.microsoft.com/office/drawing/2014/main" id="{C80B9BDE-3806-494B-A253-A31FC88AEE3D}"/>
+              </a:ext>
+            </a:extLst>
+          </p:cNvPr>
+          <p:cNvSpPr>
+            <a:spLocks xmlns:a="http://schemas.openxmlformats.org/drawingml/2006/main" noGrp="1"/>
+          </p:cNvSpPr>
+          <p:nvPr/>
+        </p:nvSpPr>
+        <p:spPr>
+          <a:xfrm xmlns:a="http://schemas.openxmlformats.org/drawingml/2006/main">
+            <a:off x="609600" y="6229350"/>
+            <a:ext cx="10972800" cy="171450"/>
+          </a:xfrm>
+          <a:prstGeom xmlns:a="http://schemas.openxmlformats.org/drawingml/2006/main" prst="rect">
+            <a:avLst/>
+          </a:prstGeom>
+          <a:noFill xmlns:a="http://schemas.openxmlformats.org/drawingml/2006/main"/>
+          <a:ln xmlns:a="http://schemas.openxmlformats.org/drawingml/2006/main" w="0">
+            <a:noFill/>
+          </a:ln>
+        </p:spPr>
+        <p:txBody>
+          <a:bodyPr xmlns:a="http://schemas.openxmlformats.org/drawingml/2006/main" wrap="none" lIns="0" tIns="0" rIns="0" bIns="0" anchor="ctr">
+            <a:noAutofit/>
+          </a:bodyPr>
+          <a:lstStyle xmlns:a="http://schemas.openxmlformats.org/drawingml/2006/main">
+            <a:defPPr algn="r">
+              <a:defRPr sz="1200" b="0">
+                <a:solidFill>
+                  <a:srgbClr val="4D5A68"/>
+                </a:solidFill>
+                <a:latin typeface="Malgun Gothic"/>
+                <a:ea typeface="Malgun Gothic"/>
+                <a:cs typeface="Malgun Gothic"/>
+              </a:defRPr>
+            </a:defPPr>
+            <a:lvl1pPr algn="r">
+              <a:defRPr sz="1200" b="0">
+                <a:solidFill>
+                  <a:srgbClr val="4D5A68"/>
+                </a:solidFill>
+                <a:latin typeface="Malgun Gothic"/>
+                <a:ea typeface="Malgun Gothic"/>
+                <a:cs typeface="Malgun Gothic"/>
+              </a:defRPr>
+            </a:lvl1pPr>
+            <a:lvl2pPr algn="r">
+              <a:defRPr sz="1200" b="0">
+                <a:solidFill>
+                  <a:srgbClr val="4D5A68"/>
+                </a:solidFill>
+                <a:latin typeface="Malgun Gothic"/>
+                <a:ea typeface="Malgun Gothic"/>
+                <a:cs typeface="Malgun Gothic"/>
+              </a:defRPr>
+            </a:lvl2pPr>
+            <a:lvl3pPr algn="r">
+              <a:defRPr sz="1200" b="0">
+                <a:solidFill>
+                  <a:srgbClr val="4D5A68"/>
+                </a:solidFill>
+                <a:latin typeface="Malgun Gothic"/>
+                <a:ea typeface="Malgun Gothic"/>
+                <a:cs typeface="Malgun Gothic"/>
+              </a:defRPr>
+            </a:lvl3pPr>
+            <a:lvl4pPr algn="r">
+              <a:defRPr sz="1200" b="0">
+                <a:solidFill>
+                  <a:srgbClr val="4D5A68"/>
+                </a:solidFill>
+                <a:latin typeface="Malgun Gothic"/>
+                <a:ea typeface="Malgun Gothic"/>
+                <a:cs typeface="Malgun Gothic"/>
+              </a:defRPr>
+            </a:lvl4pPr>
+            <a:lvl5pPr algn="r">
+              <a:defRPr sz="1200" b="0">
+                <a:solidFill>
+                  <a:srgbClr val="4D5A68"/>
+                </a:solidFill>
+                <a:latin typeface="Malgun Gothic"/>
+                <a:ea typeface="Malgun Gothic"/>
+                <a:cs typeface="Malgun Gothic"/>
+              </a:defRPr>
+            </a:lvl5pPr>
+            <a:lvl6pPr algn="r">
+              <a:defRPr sz="1200" b="0">
+                <a:solidFill>
+                  <a:srgbClr val="4D5A68"/>
+                </a:solidFill>
+                <a:latin typeface="Malgun Gothic"/>
+                <a:ea typeface="Malgun Gothic"/>
+                <a:cs typeface="Malgun Gothic"/>
+              </a:defRPr>
+            </a:lvl6pPr>
+            <a:lvl7pPr algn="r">
+              <a:defRPr sz="1200" b="0">
+                <a:solidFill>
+                  <a:srgbClr val="4D5A68"/>
+                </a:solidFill>
+                <a:latin typeface="Malgun Gothic"/>
+                <a:ea typeface="Malgun Gothic"/>
+                <a:cs typeface="Malgun Gothic"/>
+              </a:defRPr>
+            </a:lvl7pPr>
+            <a:lvl8pPr algn="r">
+              <a:defRPr sz="1200" b="0">
+                <a:solidFill>
+                  <a:srgbClr val="4D5A68"/>
+                </a:solidFill>
+                <a:latin typeface="Malgun Gothic"/>
+                <a:ea typeface="Malgun Gothic"/>
+                <a:cs typeface="Malgun Gothic"/>
+              </a:defRPr>
+            </a:lvl8pPr>
+            <a:lvl9pPr algn="r">
+              <a:defRPr sz="1200" b="0">
+                <a:solidFill>
+                  <a:srgbClr val="4D5A68"/>
+                </a:solidFill>
+                <a:latin typeface="Malgun Gothic"/>
+                <a:ea typeface="Malgun Gothic"/>
+                <a:cs typeface="Malgun Gothic"/>
+              </a:defRPr>
+            </a:lvl9pPr>
+          </a:lstStyle>
+          <a:p xmlns:a="http://schemas.openxmlformats.org/drawingml/2006/main">
+            <a:pPr algn="r">
+              <a:defRPr sz="1200" b="0">
+                <a:solidFill>
+                  <a:srgbClr val="4D5A68"/>
+                </a:solidFill>
+                <a:latin typeface="Malgun Gothic"/>
+                <a:ea typeface="Malgun Gothic"/>
+                <a:cs typeface="Malgun Gothic"/>
+              </a:defRPr>
+            </a:pPr>
+            <a:r>
+              <a:rPr sz="1200" b="0">
+                <a:solidFill>
+                  <a:srgbClr val="4D5A68"/>
+                </a:solidFill>
+                <a:latin typeface="Malgun Gothic"/>
+                <a:ea typeface="Malgun Gothic"/>
+                <a:cs typeface="Malgun Gothic"/>
+              </a:rPr>
+              <a:t>M 연계 · 신규 확장</a:t>
+            </a:r>
+          </a:p>
+        </p:txBody>
+      </p:sp>
     </p:spTree>
     <p:extLst>
       <p:ext uri="{BB962C8B-B14F-4D97-AF65-F5344CB8AC3E}">
-        <p14:creationId xmlns:p14="http://schemas.microsoft.com/office/powerpoint/2010/main" val="968915325"/>
+        <p14:creationId xmlns:p14="http://schemas.microsoft.com/office/powerpoint/2010/main" val="56066540"/>
       </p:ext>
     </p:extLst>
   </p:cSld>

--- a/production/ACT_2.pptx
+++ b/production/ACT_2.pptx
@@ -2,27 +2,27 @@
 <file path=ppt/presentation.xml><?xml version="1.0" encoding="utf-8"?>
 <p:presentation xmlns:p="http://schemas.openxmlformats.org/presentationml/2006/main">
   <p:sldMasterIdLst>
-    <p:sldMasterId xmlns:r="http://schemas.openxmlformats.org/officeDocument/2006/relationships" id="2147483648" r:id="R8e608f6b925f495f"/>
+    <p:sldMasterId xmlns:r="http://schemas.openxmlformats.org/officeDocument/2006/relationships" id="2147483648" r:id="R5fe03118b4e04a37"/>
   </p:sldMasterIdLst>
   <p:notesMasterIdLst>
-    <p:notesMasterId xmlns:r="http://schemas.openxmlformats.org/officeDocument/2006/relationships" r:id="Rd149eeb698d04bb4"/>
+    <p:notesMasterId xmlns:r="http://schemas.openxmlformats.org/officeDocument/2006/relationships" r:id="Ra61a47b0500d46d5"/>
   </p:notesMasterIdLst>
   <p:sldIdLst>
-    <p:sldId xmlns:r="http://schemas.openxmlformats.org/officeDocument/2006/relationships" id="256" r:id="R0d21b2d36c6045ed"/>
-    <p:sldId xmlns:r="http://schemas.openxmlformats.org/officeDocument/2006/relationships" id="257" r:id="Radfd4d1f50664128"/>
-    <p:sldId xmlns:r="http://schemas.openxmlformats.org/officeDocument/2006/relationships" id="258" r:id="Rbb44b974f3884402"/>
-    <p:sldId xmlns:r="http://schemas.openxmlformats.org/officeDocument/2006/relationships" id="259" r:id="Rc43ca39e055f4cd6"/>
-    <p:sldId xmlns:r="http://schemas.openxmlformats.org/officeDocument/2006/relationships" id="260" r:id="R5274a4cf40d442a4"/>
-    <p:sldId xmlns:r="http://schemas.openxmlformats.org/officeDocument/2006/relationships" id="261" r:id="Rf7386489936c4040"/>
-    <p:sldId xmlns:r="http://schemas.openxmlformats.org/officeDocument/2006/relationships" id="262" r:id="R86c29ffb72f14ac3"/>
-    <p:sldId xmlns:r="http://schemas.openxmlformats.org/officeDocument/2006/relationships" id="263" r:id="R63ff6dda26654b9d"/>
-    <p:sldId xmlns:r="http://schemas.openxmlformats.org/officeDocument/2006/relationships" id="264" r:id="R557bc57a801c49fb"/>
-    <p:sldId xmlns:r="http://schemas.openxmlformats.org/officeDocument/2006/relationships" id="265" r:id="R5f32cdd1e4fe48cc"/>
-    <p:sldId xmlns:r="http://schemas.openxmlformats.org/officeDocument/2006/relationships" id="266" r:id="Rc2827b7dc0454d5c"/>
-    <p:sldId xmlns:r="http://schemas.openxmlformats.org/officeDocument/2006/relationships" id="267" r:id="Rb4a1a09ab5c14ae3"/>
-    <p:sldId xmlns:r="http://schemas.openxmlformats.org/officeDocument/2006/relationships" id="268" r:id="R99ae46b200dc4b20"/>
-    <p:sldId xmlns:r="http://schemas.openxmlformats.org/officeDocument/2006/relationships" id="269" r:id="Ree9cea8d17ae4fe9"/>
-    <p:sldId xmlns:r="http://schemas.openxmlformats.org/officeDocument/2006/relationships" id="270" r:id="R72c47c521cf843eb"/>
+    <p:sldId xmlns:r="http://schemas.openxmlformats.org/officeDocument/2006/relationships" id="256" r:id="R634470b95049401c"/>
+    <p:sldId xmlns:r="http://schemas.openxmlformats.org/officeDocument/2006/relationships" id="257" r:id="R87b770e04ab84cc6"/>
+    <p:sldId xmlns:r="http://schemas.openxmlformats.org/officeDocument/2006/relationships" id="258" r:id="R2c9a1dce9d114d01"/>
+    <p:sldId xmlns:r="http://schemas.openxmlformats.org/officeDocument/2006/relationships" id="259" r:id="R89ee310942d84251"/>
+    <p:sldId xmlns:r="http://schemas.openxmlformats.org/officeDocument/2006/relationships" id="260" r:id="R2614831bd0514f9a"/>
+    <p:sldId xmlns:r="http://schemas.openxmlformats.org/officeDocument/2006/relationships" id="261" r:id="Rfcb445d69c5e4ee7"/>
+    <p:sldId xmlns:r="http://schemas.openxmlformats.org/officeDocument/2006/relationships" id="262" r:id="R7d6b1f43c7e1417f"/>
+    <p:sldId xmlns:r="http://schemas.openxmlformats.org/officeDocument/2006/relationships" id="263" r:id="R28f25e3ec81b4a8d"/>
+    <p:sldId xmlns:r="http://schemas.openxmlformats.org/officeDocument/2006/relationships" id="264" r:id="R955212d72eb64b82"/>
+    <p:sldId xmlns:r="http://schemas.openxmlformats.org/officeDocument/2006/relationships" id="265" r:id="R1d9b125da1b340ba"/>
+    <p:sldId xmlns:r="http://schemas.openxmlformats.org/officeDocument/2006/relationships" id="266" r:id="R39929d429f364f38"/>
+    <p:sldId xmlns:r="http://schemas.openxmlformats.org/officeDocument/2006/relationships" id="267" r:id="Rc71d728467cd44be"/>
+    <p:sldId xmlns:r="http://schemas.openxmlformats.org/officeDocument/2006/relationships" id="268" r:id="R808ea0f94de74c17"/>
+    <p:sldId xmlns:r="http://schemas.openxmlformats.org/officeDocument/2006/relationships" id="269" r:id="R4a31673dccd84c2a"/>
+    <p:sldId xmlns:r="http://schemas.openxmlformats.org/officeDocument/2006/relationships" id="270" r:id="R0b5fa52ea74544a7"/>
   </p:sldIdLst>
   <p:sldSz cx="12192000" cy="6858000"/>
   <p:notesSz cx="6858000" cy="9144000"/>
@@ -456,7 +456,7 @@
           <a:lstStyle xmlns:a="http://schemas.openxmlformats.org/drawingml/2006/main"/>
           <a:p xmlns:a="http://schemas.openxmlformats.org/drawingml/2006/main">
             <a:r>
-              <a:t>## S22 — 다른 Task에 같은 설명이 반복된다</a:t>
+              <a:t>## S23 — 다른 Task에 같은 설명이 반복된다</a:t>
             </a:r>
           </a:p>
           <a:p xmlns:a="http://schemas.openxmlformats.org/drawingml/2006/main">
@@ -466,7 +466,7 @@
           </a:p>
           <a:p xmlns:a="http://schemas.openxmlformats.org/drawingml/2006/main">
             <a:r>
-              <a:t>Slide ID: S22</a:t>
+              <a:t>Slide ID: S23</a:t>
             </a:r>
           </a:p>
           <a:p xmlns:a="http://schemas.openxmlformats.org/drawingml/2006/main">
@@ -656,7 +656,7 @@
           </a:p>
           <a:p xmlns:a="http://schemas.openxmlformats.org/drawingml/2006/main">
             <a:r>
-              <a:t>Fallback: LOCAL STATIC ARTIFACT — 발표 기본 경로는 `production/ACT_2.pptx`의 S22 또는 `production/preview/act2/S22.png`다. 수정 초안 정적 화면은 존재하며 최종 release 경로·내용 일치는 통합 검토에서 확인한다. 실제 Trial 캡처나 현재 제품 실행으로 표현하지 않는다.</a:t>
+              <a:t>Fallback: LOCAL STATIC ARTIFACT — 발표 기본 경로는 `production/ACT_2.pptx`의 S23 또는 `production/preview/act2/S23.png`다. 수정 초안 정적 화면은 존재하며 최종 release 경로·내용 일치는 통합 검토에서 확인한다. 실제 Trial 캡처나 현재 제품 실행으로 표현하지 않는다.</a:t>
             </a:r>
           </a:p>
           <a:p xmlns:a="http://schemas.openxmlformats.org/drawingml/2006/main">
@@ -736,7 +736,7 @@
           <a:lstStyle xmlns:a="http://schemas.openxmlformats.org/drawingml/2006/main"/>
           <a:p xmlns:a="http://schemas.openxmlformats.org/drawingml/2006/main">
             <a:r>
-              <a:t>## S31 — Core Context에서 상세 정보로 가는 길</a:t>
+              <a:t>## S32 — Core Context에서 상세 정보로 가는 길</a:t>
             </a:r>
           </a:p>
           <a:p xmlns:a="http://schemas.openxmlformats.org/drawingml/2006/main">
@@ -746,7 +746,7 @@
           </a:p>
           <a:p xmlns:a="http://schemas.openxmlformats.org/drawingml/2006/main">
             <a:r>
-              <a:t>Slide ID: S31</a:t>
+              <a:t>Slide ID: S32</a:t>
             </a:r>
           </a:p>
           <a:p xmlns:a="http://schemas.openxmlformats.org/drawingml/2006/main">
@@ -846,7 +846,7 @@
           </a:p>
           <a:p xmlns:a="http://schemas.openxmlformats.org/drawingml/2006/main">
             <a:r>
-              <a:t>화면 진행: Core의 세 항목을 먼저 읽고 필요한 상세의 세 행으로 이동한다. S30의 탐색 경로를 반복 설명하기보다 항상 읽을 기본 안내와 필요할 때 찾을 상세의 경계를 확인한다.</a:t>
+              <a:t>화면 진행: Core의 세 항목을 먼저 읽고 필요한 상세의 세 행으로 이동한다. S31의 탐색 경로를 반복 설명하기보다 항상 읽을 기본 안내와 필요할 때 찾을 상세의 경계를 확인한다.</a:t>
             </a:r>
           </a:p>
           <a:p xmlns:a="http://schemas.openxmlformats.org/drawingml/2006/main">
@@ -856,7 +856,7 @@
           </a:p>
           <a:p xmlns:a="http://schemas.openxmlformats.org/drawingml/2006/main">
             <a:r>
-              <a:t>Evidence / Source: BEAT-014, CLM-0003, CLM-0005, CLM-0014, CLM-0015. TEACHING_MODEL / CONCEPTUAL; describe STATE-03 structure in S32.</a:t>
+              <a:t>Evidence / Source: BEAT-014, CLM-0003, CLM-0005, CLM-0014, CLM-0015. TEACHING_MODEL / CONCEPTUAL; describe STATE-03 structure in S33.</a:t>
             </a:r>
           </a:p>
           <a:p xmlns:a="http://schemas.openxmlformats.org/drawingml/2006/main">
@@ -906,7 +906,7 @@
           </a:p>
           <a:p xmlns:a="http://schemas.openxmlformats.org/drawingml/2006/main">
             <a:r>
-              <a:t>Demo Operation: N/A — the observed repository structure follows on S32.</a:t>
+              <a:t>Demo Operation: N/A — the observed repository structure follows on S33.</a:t>
             </a:r>
           </a:p>
           <a:p xmlns:a="http://schemas.openxmlformats.org/drawingml/2006/main">
@@ -946,7 +946,7 @@
           </a:p>
           <a:p xmlns:a="http://schemas.openxmlformats.org/drawingml/2006/main">
             <a:r>
-              <a:t>Fallback: LOCAL STATIC ARTIFACT — 발표 기본 경로는 `production/ACT_2.pptx`의 S31 또는 `production/preview/act2/S31.png`다. 수정 초안 정적 화면은 존재하며 최종 release 경로·내용 일치는 통합 검토에서 확인한다. 실제 Trial 캡처나 현재 제품 실행으로 표현하지 않는다.</a:t>
+              <a:t>Fallback: LOCAL STATIC ARTIFACT — 발표 기본 경로는 `production/ACT_2.pptx`의 S32 또는 `production/preview/act2/S32.png`다. 수정 초안 정적 화면은 존재하며 최종 release 경로·내용 일치는 통합 검토에서 확인한다. 실제 Trial 캡처나 현재 제품 실행으로 표현하지 않는다.</a:t>
             </a:r>
           </a:p>
           <a:p xmlns:a="http://schemas.openxmlformats.org/drawingml/2006/main">
@@ -1026,7 +1026,7 @@
           <a:lstStyle xmlns:a="http://schemas.openxmlformats.org/drawingml/2006/main"/>
           <a:p xmlns:a="http://schemas.openxmlformats.org/drawingml/2006/main">
             <a:r>
-              <a:t>## S32 — 정보를 지우지 않고 위치를 나누기</a:t>
+              <a:t>## S33 — 정보를 지우지 않고 위치를 나누기</a:t>
             </a:r>
           </a:p>
           <a:p xmlns:a="http://schemas.openxmlformats.org/drawingml/2006/main">
@@ -1036,7 +1036,7 @@
           </a:p>
           <a:p xmlns:a="http://schemas.openxmlformats.org/drawingml/2006/main">
             <a:r>
-              <a:t>Slide ID: S32</a:t>
+              <a:t>Slide ID: S33</a:t>
             </a:r>
           </a:p>
           <a:p xmlns:a="http://schemas.openxmlformats.org/drawingml/2006/main">
@@ -1231,7 +1231,7 @@
           </a:p>
           <a:p xmlns:a="http://schemas.openxmlformats.org/drawingml/2006/main">
             <a:r>
-              <a:t>Fallback: LOCAL STATIC ARTIFACT — 발표 기본 경로는 `production/ACT_2.pptx`의 S32 또는 `production/preview/act2/S32.png`다. 수정 초안 정적 화면은 존재하며 최종 release 경로·내용 일치는 통합 검토에서 확인한다. 실제 Trial 캡처나 현재 제품 실행으로 표현하지 않는다.</a:t>
+              <a:t>Fallback: LOCAL STATIC ARTIFACT — 발표 기본 경로는 `production/ACT_2.pptx`의 S33 또는 `production/preview/act2/S33.png`다. 수정 초안 정적 화면은 존재하며 최종 release 경로·내용 일치는 통합 검토에서 확인한다. 실제 Trial 캡처나 현재 제품 실행으로 표현하지 않는다.</a:t>
             </a:r>
           </a:p>
           <a:p xmlns:a="http://schemas.openxmlformats.org/drawingml/2006/main">
@@ -1311,7 +1311,7 @@
           <a:lstStyle xmlns:a="http://schemas.openxmlformats.org/drawingml/2006/main"/>
           <a:p xmlns:a="http://schemas.openxmlformats.org/drawingml/2006/main">
             <a:r>
-              <a:t>## S33 — 서로 다른 두 Task가 무엇을 읽을까?</a:t>
+              <a:t>## S34 — 서로 다른 두 Task가 무엇을 읽을까?</a:t>
             </a:r>
           </a:p>
           <a:p xmlns:a="http://schemas.openxmlformats.org/drawingml/2006/main">
@@ -1321,7 +1321,7 @@
           </a:p>
           <a:p xmlns:a="http://schemas.openxmlformats.org/drawingml/2006/main">
             <a:r>
-              <a:t>Slide ID: S33</a:t>
+              <a:t>Slide ID: S34</a:t>
             </a:r>
           </a:p>
           <a:p xmlns:a="http://schemas.openxmlformats.org/drawingml/2006/main">
@@ -1511,7 +1511,7 @@
           </a:p>
           <a:p xmlns:a="http://schemas.openxmlformats.org/drawingml/2006/main">
             <a:r>
-              <a:t>Fallback: LOCAL STATIC ARTIFACT — 발표 기본 경로는 `production/ACT_2.pptx`의 S33 또는 `production/preview/act2/S33.png`다. 수정 초안 정적 화면은 존재하며 최종 release 경로·내용 일치는 통합 검토에서 확인한다. 실제 Trial 캡처나 현재 제품 실행으로 표현하지 않는다.</a:t>
+              <a:t>Fallback: LOCAL STATIC ARTIFACT — 발표 기본 경로는 `production/ACT_2.pptx`의 S34 또는 `production/preview/act2/S34.png`다. 수정 초안 정적 화면은 존재하며 최종 release 경로·내용 일치는 통합 검토에서 확인한다. 실제 Trial 캡처나 현재 제품 실행으로 표현하지 않는다.</a:t>
             </a:r>
           </a:p>
           <a:p xmlns:a="http://schemas.openxmlformats.org/drawingml/2006/main">
@@ -1591,7 +1591,7 @@
           <a:lstStyle xmlns:a="http://schemas.openxmlformats.org/drawingml/2006/main"/>
           <a:p xmlns:a="http://schemas.openxmlformats.org/drawingml/2006/main">
             <a:r>
-              <a:t>## S34 — Crop Task에서 관찰한 접근</a:t>
+              <a:t>## S35 — Crop Task에서 관찰한 접근</a:t>
             </a:r>
           </a:p>
           <a:p xmlns:a="http://schemas.openxmlformats.org/drawingml/2006/main">
@@ -1601,7 +1601,7 @@
           </a:p>
           <a:p xmlns:a="http://schemas.openxmlformats.org/drawingml/2006/main">
             <a:r>
-              <a:t>Slide ID: S34</a:t>
+              <a:t>Slide ID: S35</a:t>
             </a:r>
           </a:p>
           <a:p xmlns:a="http://schemas.openxmlformats.org/drawingml/2006/main">
@@ -1796,7 +1796,7 @@
           </a:p>
           <a:p xmlns:a="http://schemas.openxmlformats.org/drawingml/2006/main">
             <a:r>
-              <a:t>Fallback: LOCAL STATIC ARTIFACT — 발표 기본 경로는 `production/ACT_2.pptx`의 S34 또는 `production/preview/act2/S34.png`다. 수정 초안 정적 화면은 존재하며 최종 release 경로·내용 일치는 통합 검토에서 확인한다. 실제 Trial 캡처나 현재 제품 실행으로 표현하지 않는다.</a:t>
+              <a:t>Fallback: LOCAL STATIC ARTIFACT — 발표 기본 경로는 `production/ACT_2.pptx`의 S35 또는 `production/preview/act2/S35.png`다. 수정 초안 정적 화면은 존재하며 최종 release 경로·내용 일치는 통합 검토에서 확인한다. 실제 Trial 캡처나 현재 제품 실행으로 표현하지 않는다.</a:t>
             </a:r>
           </a:p>
           <a:p xmlns:a="http://schemas.openxmlformats.org/drawingml/2006/main">
@@ -1876,7 +1876,7 @@
           <a:lstStyle xmlns:a="http://schemas.openxmlformats.org/drawingml/2006/main"/>
           <a:p xmlns:a="http://schemas.openxmlformats.org/drawingml/2006/main">
             <a:r>
-              <a:t>## S35 — Task별 접근은 달랐지만 완벽하지는 않다</a:t>
+              <a:t>## S36 — Task별 접근은 달랐지만 완벽하지는 않다</a:t>
             </a:r>
           </a:p>
           <a:p xmlns:a="http://schemas.openxmlformats.org/drawingml/2006/main">
@@ -1886,7 +1886,7 @@
           </a:p>
           <a:p xmlns:a="http://schemas.openxmlformats.org/drawingml/2006/main">
             <a:r>
-              <a:t>Slide ID: S35</a:t>
+              <a:t>Slide ID: S36</a:t>
             </a:r>
           </a:p>
           <a:p xmlns:a="http://schemas.openxmlformats.org/drawingml/2006/main">
@@ -2086,7 +2086,7 @@
           </a:p>
           <a:p xmlns:a="http://schemas.openxmlformats.org/drawingml/2006/main">
             <a:r>
-              <a:t>Fallback: LOCAL STATIC ARTIFACT — 발표 기본 경로는 `production/ACT_2.pptx`의 S35 또는 `production/preview/act2/S35.png`다. 수정 초안 정적 화면은 존재하며 최종 release 경로·내용 일치는 통합 검토에서 확인한다. 실제 Trial 캡처나 현재 제품 실행으로 표현하지 않는다.</a:t>
+              <a:t>Fallback: LOCAL STATIC ARTIFACT — 발표 기본 경로는 `production/ACT_2.pptx`의 S36 또는 `production/preview/act2/S36.png`다. 수정 초안 정적 화면은 존재하며 최종 release 경로·내용 일치는 통합 검토에서 확인한다. 실제 Trial 캡처나 현재 제품 실행으로 표현하지 않는다.</a:t>
             </a:r>
           </a:p>
           <a:p xmlns:a="http://schemas.openxmlformats.org/drawingml/2006/main">
@@ -2166,7 +2166,7 @@
           <a:lstStyle xmlns:a="http://schemas.openxmlformats.org/drawingml/2006/main"/>
           <a:p xmlns:a="http://schemas.openxmlformats.org/drawingml/2006/main">
             <a:r>
-              <a:t>## S36 — 지식은 정리됐지만 절차는 반복된다</a:t>
+              <a:t>## S37 — 지식은 정리됐지만 절차는 반복된다</a:t>
             </a:r>
           </a:p>
           <a:p xmlns:a="http://schemas.openxmlformats.org/drawingml/2006/main">
@@ -2176,7 +2176,7 @@
           </a:p>
           <a:p xmlns:a="http://schemas.openxmlformats.org/drawingml/2006/main">
             <a:r>
-              <a:t>Slide ID: S36</a:t>
+              <a:t>Slide ID: S37</a:t>
             </a:r>
           </a:p>
           <a:p xmlns:a="http://schemas.openxmlformats.org/drawingml/2006/main">
@@ -2366,7 +2366,7 @@
           </a:p>
           <a:p xmlns:a="http://schemas.openxmlformats.org/drawingml/2006/main">
             <a:r>
-              <a:t>Fallback: LOCAL STATIC ARTIFACT — 발표 기본 경로는 `production/ACT_2.pptx`의 S36 또는 `production/preview/act2/S36.png`다. 수정 초안 정적 화면은 존재하며 최종 release 경로·내용 일치는 통합 검토에서 확인한다. 실제 Trial 캡처나 현재 제품 실행으로 표현하지 않는다. 질문이 없으면 Audience Interaction의 준비 질문으로 진행한다.</a:t>
+              <a:t>Fallback: LOCAL STATIC ARTIFACT — 발표 기본 경로는 `production/ACT_2.pptx`의 S37 또는 `production/preview/act2/S37.png`다. 수정 초안 정적 화면은 존재하며 최종 release 경로·내용 일치는 통합 검토에서 확인한다. 실제 Trial 캡처나 현재 제품 실행으로 표현하지 않는다. 질문이 없으면 Audience Interaction의 준비 질문으로 진행한다.</a:t>
             </a:r>
           </a:p>
           <a:p xmlns:a="http://schemas.openxmlformats.org/drawingml/2006/main">
@@ -2446,7 +2446,7 @@
           <a:lstStyle xmlns:a="http://schemas.openxmlformats.org/drawingml/2006/main"/>
           <a:p xmlns:a="http://schemas.openxmlformats.org/drawingml/2006/main">
             <a:r>
-              <a:t>## S23 — 작은 Project Context의 첫 기록</a:t>
+              <a:t>## S24 — 작은 Project Context의 첫 기록</a:t>
             </a:r>
           </a:p>
           <a:p xmlns:a="http://schemas.openxmlformats.org/drawingml/2006/main">
@@ -2456,7 +2456,7 @@
           </a:p>
           <a:p xmlns:a="http://schemas.openxmlformats.org/drawingml/2006/main">
             <a:r>
-              <a:t>Slide ID: S23</a:t>
+              <a:t>Slide ID: S24</a:t>
             </a:r>
           </a:p>
           <a:p xmlns:a="http://schemas.openxmlformats.org/drawingml/2006/main">
@@ -2546,7 +2546,7 @@
           </a:p>
           <a:p xmlns:a="http://schemas.openxmlformats.org/drawingml/2006/main">
             <a:r>
-              <a:t>3. (3:00–4:00) Task마다 반복 설명하던 사실을 저장소에 둔 설계 의도를 정리하고, 실제 활용 관찰은 S24로 넘긴다.</a:t>
+              <a:t>3. (3:00–4:00) Task마다 반복 설명하던 사실을 저장소에 둔 설계 의도를 정리하고, 실제 활용 관찰은 S25로 넘긴다.</a:t>
             </a:r>
           </a:p>
           <a:p xmlns:a="http://schemas.openxmlformats.org/drawingml/2006/main">
@@ -2576,7 +2576,7 @@
           </a:p>
           <a:p xmlns:a="http://schemas.openxmlformats.org/drawingml/2006/main">
             <a:r>
-              <a:t>Claim Boundary: 실제 파일이 그 상태에 존재했다는 근거다. 성능, 정확도, 토큰 절감 또는 AGENTS.md 단독 인과효과를 주장하지 않는다. 제품 코드·테스트·README는 그 상태 전환에서 바뀌지 않았다. S24의 지침 활용 관찰을 이 장의 결과로 앞당기지 않는다. 현재 Desktop 자동 로딩이나 교육 환경을 검증한 것이 아니다.</a:t>
+              <a:t>Claim Boundary: 실제 파일이 그 상태에 존재했다는 근거다. 성능, 정확도, 토큰 절감 또는 AGENTS.md 단독 인과효과를 주장하지 않는다. 제품 코드·테스트·README는 그 상태 전환에서 바뀌지 않았다. S25의 지침 활용 관찰을 이 장의 결과로 앞당기지 않는다. 현재 Desktop 자동 로딩이나 교육 환경을 검증한 것이 아니다.</a:t>
             </a:r>
           </a:p>
           <a:p xmlns:a="http://schemas.openxmlformats.org/drawingml/2006/main">
@@ -2616,7 +2616,7 @@
           </a:p>
           <a:p xmlns:a="http://schemas.openxmlformats.org/drawingml/2006/main">
             <a:r>
-              <a:t>Demo Operation: `production/ACT_2.pptx`의 S23 및 `production/preview/act2/S23.png`에 있는 실제 AGENTS.md 원문 발췌를 가리킨다. 편집기 screenshot이 아니다. Live/HYBRID는 발표 환경 검증 전까지 비활성이다.</a:t>
+              <a:t>Demo Operation: `production/ACT_2.pptx`의 S24 및 `production/preview/act2/S24.png`에 있는 실제 AGENTS.md 원문 발췌를 가리킨다. 편집기 screenshot이 아니다. Live/HYBRID는 발표 환경 검증 전까지 비활성이다.</a:t>
             </a:r>
           </a:p>
           <a:p xmlns:a="http://schemas.openxmlformats.org/drawingml/2006/main">
@@ -2646,7 +2646,7 @@
           </a:p>
           <a:p xmlns:a="http://schemas.openxmlformats.org/drawingml/2006/main">
             <a:r>
-              <a:t>Time Management: Demo 4분 유지. 1분 상태 전환, 2분 네 발췌, 1분 의미와 S24 handoff. 명령어 옵션별 설명은 생략한다.</a:t>
+              <a:t>Time Management: Demo 4분 유지. 1분 상태 전환, 2분 네 발췌, 1분 의미와 S25 handoff. 명령어 옵션별 설명은 생략한다.</a:t>
             </a:r>
           </a:p>
           <a:p xmlns:a="http://schemas.openxmlformats.org/drawingml/2006/main">
@@ -2656,7 +2656,7 @@
           </a:p>
           <a:p xmlns:a="http://schemas.openxmlformats.org/drawingml/2006/main">
             <a:r>
-              <a:t>Fallback: LOCAL STATIC ARTIFACT — 발표 기본 경로는 `production/ACT_2.pptx`의 S23 또는 `production/preview/act2/S23.png`다. 수정 초안 정적 화면은 존재하며 최종 release 경로·내용 일치는 통합 검토에서 확인한다. 실제 Trial 캡처나 현재 제품 실행으로 표현하지 않는다.</a:t>
+              <a:t>Fallback: LOCAL STATIC ARTIFACT — 발표 기본 경로는 `production/ACT_2.pptx`의 S24 또는 `production/preview/act2/S24.png`다. 수정 초안 정적 화면은 존재하며 최종 release 경로·내용 일치는 통합 검토에서 확인한다. 실제 Trial 캡처나 현재 제품 실행으로 표현하지 않는다.</a:t>
             </a:r>
           </a:p>
           <a:p xmlns:a="http://schemas.openxmlformats.org/drawingml/2006/main">
@@ -2736,7 +2736,7 @@
           <a:lstStyle xmlns:a="http://schemas.openxmlformats.org/drawingml/2006/main"/>
           <a:p xmlns:a="http://schemas.openxmlformats.org/drawingml/2006/main">
             <a:r>
-              <a:t>## S24 — 한 번의 사용에서 확인된 것</a:t>
+              <a:t>## S25 — 한 번의 사용에서 확인된 것</a:t>
             </a:r>
           </a:p>
           <a:p xmlns:a="http://schemas.openxmlformats.org/drawingml/2006/main">
@@ -2746,7 +2746,7 @@
           </a:p>
           <a:p xmlns:a="http://schemas.openxmlformats.org/drawingml/2006/main">
             <a:r>
-              <a:t>Slide ID: S24</a:t>
+              <a:t>Slide ID: S25</a:t>
             </a:r>
           </a:p>
           <a:p xmlns:a="http://schemas.openxmlformats.org/drawingml/2006/main">
@@ -2936,7 +2936,7 @@
           </a:p>
           <a:p xmlns:a="http://schemas.openxmlformats.org/drawingml/2006/main">
             <a:r>
-              <a:t>Fallback: LOCAL STATIC ARTIFACT — 발표 기본 경로는 `production/ACT_2.pptx`의 S24 또는 `production/preview/act2/S24.png`다. 수정 초안 정적 화면은 존재하며 최종 release 경로·내용 일치는 통합 검토에서 확인한다. 실제 Trial 캡처나 현재 제품 실행으로 표현하지 않는다.</a:t>
+              <a:t>Fallback: LOCAL STATIC ARTIFACT — 발표 기본 경로는 `production/ACT_2.pptx`의 S25 또는 `production/preview/act2/S25.png`다. 수정 초안 정적 화면은 존재하며 최종 release 경로·내용 일치는 통합 검토에서 확인한다. 실제 Trial 캡처나 현재 제품 실행으로 표현하지 않는다.</a:t>
             </a:r>
           </a:p>
           <a:p xmlns:a="http://schemas.openxmlformats.org/drawingml/2006/main">
@@ -3016,7 +3016,7 @@
           <a:lstStyle xmlns:a="http://schemas.openxmlformats.org/drawingml/2006/main"/>
           <a:p xmlns:a="http://schemas.openxmlformats.org/drawingml/2006/main">
             <a:r>
-              <a:t>## S25 — Task Prompt와 Project Context</a:t>
+              <a:t>## S26 — Task Prompt와 Project Context</a:t>
             </a:r>
           </a:p>
           <a:p xmlns:a="http://schemas.openxmlformats.org/drawingml/2006/main">
@@ -3026,7 +3026,7 @@
           </a:p>
           <a:p xmlns:a="http://schemas.openxmlformats.org/drawingml/2006/main">
             <a:r>
-              <a:t>Slide ID: S25</a:t>
+              <a:t>Slide ID: S26</a:t>
             </a:r>
           </a:p>
           <a:p xmlns:a="http://schemas.openxmlformats.org/drawingml/2006/main">
@@ -3126,7 +3126,7 @@
           </a:p>
           <a:p xmlns:a="http://schemas.openxmlformats.org/drawingml/2006/main">
             <a:r>
-              <a:t>화면 진행: S24에서 본 기록을 회수한 뒤 두 열의 수명을 비교한다. 왼쪽은 다음 작업에서 바뀔 목표, 오른쪽은 여러 작업에서 다시 참고할 사실이다. S21의 분류 질문을 처음부터 반복하지 않는다.</a:t>
+              <a:t>화면 진행: S25에서 본 기록을 회수한 뒤 두 열의 수명을 비교한다. 왼쪽은 다음 작업에서 바뀔 목표, 오른쪽은 여러 작업에서 다시 참고할 사실이다. S22의 분류 질문을 처음부터 반복하지 않는다.</a:t>
             </a:r>
           </a:p>
           <a:p xmlns:a="http://schemas.openxmlformats.org/drawingml/2006/main">
@@ -3136,7 +3136,7 @@
           </a:p>
           <a:p xmlns:a="http://schemas.openxmlformats.org/drawingml/2006/main">
             <a:r>
-              <a:t>Evidence / Source: BEAT-009–010, TRANS-003, CLM-0003, CLM-0005. TEACHING_MODEL / CONCEPTUAL; examples summarize S22–S24.</a:t>
+              <a:t>Evidence / Source: BEAT-009–010, TRANS-003, CLM-0003, CLM-0005. TEACHING_MODEL / CONCEPTUAL; examples summarize S23–S25.</a:t>
             </a:r>
           </a:p>
           <a:p xmlns:a="http://schemas.openxmlformats.org/drawingml/2006/main">
@@ -3226,7 +3226,7 @@
           </a:p>
           <a:p xmlns:a="http://schemas.openxmlformats.org/drawingml/2006/main">
             <a:r>
-              <a:t>Fallback: LOCAL STATIC ARTIFACT — 발표 기본 경로는 `production/ACT_2.pptx`의 S25 또는 `production/preview/act2/S25.png`다. 수정 초안 정적 화면은 존재하며 최종 release 경로·내용 일치는 통합 검토에서 확인한다. 실제 Trial 캡처나 현재 제품 실행으로 표현하지 않는다.</a:t>
+              <a:t>Fallback: LOCAL STATIC ARTIFACT — 발표 기본 경로는 `production/ACT_2.pptx`의 S26 또는 `production/preview/act2/S26.png`다. 수정 초안 정적 화면은 존재하며 최종 release 경로·내용 일치는 통합 검토에서 확인한다. 실제 Trial 캡처나 현재 제품 실행으로 표현하지 않는다.</a:t>
             </a:r>
           </a:p>
           <a:p xmlns:a="http://schemas.openxmlformats.org/drawingml/2006/main">
@@ -3306,7 +3306,7 @@
           <a:lstStyle xmlns:a="http://schemas.openxmlformats.org/drawingml/2006/main"/>
           <a:p xmlns:a="http://schemas.openxmlformats.org/drawingml/2006/main">
             <a:r>
-              <a:t>## S26 — 정확한 정보도 계속 늘어난다</a:t>
+              <a:t>## S27 — 정확한 정보도 계속 늘어난다</a:t>
             </a:r>
           </a:p>
           <a:p xmlns:a="http://schemas.openxmlformats.org/drawingml/2006/main">
@@ -3316,7 +3316,7 @@
           </a:p>
           <a:p xmlns:a="http://schemas.openxmlformats.org/drawingml/2006/main">
             <a:r>
-              <a:t>Slide ID: S26</a:t>
+              <a:t>Slide ID: S27</a:t>
             </a:r>
           </a:p>
           <a:p xmlns:a="http://schemas.openxmlformats.org/drawingml/2006/main">
@@ -3506,7 +3506,7 @@
           </a:p>
           <a:p xmlns:a="http://schemas.openxmlformats.org/drawingml/2006/main">
             <a:r>
-              <a:t>Fallback: LOCAL STATIC ARTIFACT — 발표 기본 경로는 `production/ACT_2.pptx`의 S26 또는 `production/preview/act2/S26.png`다. 수정 초안 정적 화면은 존재하며 최종 release 경로·내용 일치는 통합 검토에서 확인한다. 실제 Trial 캡처나 현재 제품 실행으로 표현하지 않는다.</a:t>
+              <a:t>Fallback: LOCAL STATIC ARTIFACT — 발표 기본 경로는 `production/ACT_2.pptx`의 S27 또는 `production/preview/act2/S27.png`다. 수정 초안 정적 화면은 존재하며 최종 release 경로·내용 일치는 통합 검토에서 확인한다. 실제 Trial 캡처나 현재 제품 실행으로 표현하지 않는다.</a:t>
             </a:r>
           </a:p>
           <a:p xmlns:a="http://schemas.openxmlformats.org/drawingml/2006/main">
@@ -3586,7 +3586,7 @@
           <a:lstStyle xmlns:a="http://schemas.openxmlformats.org/drawingml/2006/main"/>
           <a:p xmlns:a="http://schemas.openxmlformats.org/drawingml/2006/main">
             <a:r>
-              <a:t>## S27 — 정확하지만 이번 Task에는 불필요한 정보</a:t>
+              <a:t>## S28 — 정확하지만 이번 Task에는 불필요한 정보</a:t>
             </a:r>
           </a:p>
           <a:p xmlns:a="http://schemas.openxmlformats.org/drawingml/2006/main">
@@ -3596,7 +3596,7 @@
           </a:p>
           <a:p xmlns:a="http://schemas.openxmlformats.org/drawingml/2006/main">
             <a:r>
-              <a:t>Slide ID: S27</a:t>
+              <a:t>Slide ID: S28</a:t>
             </a:r>
           </a:p>
           <a:p xmlns:a="http://schemas.openxmlformats.org/drawingml/2006/main">
@@ -3786,7 +3786,7 @@
           </a:p>
           <a:p xmlns:a="http://schemas.openxmlformats.org/drawingml/2006/main">
             <a:r>
-              <a:t>Fallback: LOCAL STATIC ARTIFACT — 발표 기본 경로는 `production/ACT_2.pptx`의 S27 또는 `production/preview/act2/S27.png`다. 수정 초안 정적 화면은 존재하며 최종 release 경로·내용 일치는 통합 검토에서 확인한다. 실제 Trial 캡처나 현재 제품 실행으로 표현하지 않는다.</a:t>
+              <a:t>Fallback: LOCAL STATIC ARTIFACT — 발표 기본 경로는 `production/ACT_2.pptx`의 S28 또는 `production/preview/act2/S28.png`다. 수정 초안 정적 화면은 존재하며 최종 release 경로·내용 일치는 통합 검토에서 확인한다. 실제 Trial 캡처나 현재 제품 실행으로 표현하지 않는다.</a:t>
             </a:r>
           </a:p>
           <a:p xmlns:a="http://schemas.openxmlformats.org/drawingml/2006/main">
@@ -3866,7 +3866,7 @@
           <a:lstStyle xmlns:a="http://schemas.openxmlformats.org/drawingml/2006/main"/>
           <a:p xmlns:a="http://schemas.openxmlformats.org/drawingml/2006/main">
             <a:r>
-              <a:t>## S28 — 정보의 범위와 제공 시점</a:t>
+              <a:t>## S29 — 정보의 범위와 제공 시점</a:t>
             </a:r>
           </a:p>
           <a:p xmlns:a="http://schemas.openxmlformats.org/drawingml/2006/main">
@@ -3876,7 +3876,7 @@
           </a:p>
           <a:p xmlns:a="http://schemas.openxmlformats.org/drawingml/2006/main">
             <a:r>
-              <a:t>Slide ID: S28</a:t>
+              <a:t>Slide ID: S29</a:t>
             </a:r>
           </a:p>
           <a:p xmlns:a="http://schemas.openxmlformats.org/drawingml/2006/main">
@@ -4066,7 +4066,7 @@
           </a:p>
           <a:p xmlns:a="http://schemas.openxmlformats.org/drawingml/2006/main">
             <a:r>
-              <a:t>Fallback: LOCAL STATIC ARTIFACT — 발표 기본 경로는 `production/ACT_2.pptx`의 S28 또는 `production/preview/act2/S28.png`다. 수정 초안 정적 화면은 존재하며 최종 release 경로·내용 일치는 통합 검토에서 확인한다. 실제 Trial 캡처나 현재 제품 실행으로 표현하지 않는다.</a:t>
+              <a:t>Fallback: LOCAL STATIC ARTIFACT — 발표 기본 경로는 `production/ACT_2.pptx`의 S29 또는 `production/preview/act2/S29.png`다. 수정 초안 정적 화면은 존재하며 최종 release 경로·내용 일치는 통합 검토에서 확인한다. 실제 Trial 캡처나 현재 제품 실행으로 표현하지 않는다.</a:t>
             </a:r>
           </a:p>
           <a:p xmlns:a="http://schemas.openxmlformats.org/drawingml/2006/main">
@@ -4146,7 +4146,7 @@
           <a:lstStyle xmlns:a="http://schemas.openxmlformats.org/drawingml/2006/main"/>
           <a:p xmlns:a="http://schemas.openxmlformats.org/drawingml/2006/main">
             <a:r>
-              <a:t>## S29 — Long Context 연구가 말해주는 범위</a:t>
+              <a:t>## S30 — Long Context 연구가 말해주는 범위</a:t>
             </a:r>
           </a:p>
           <a:p xmlns:a="http://schemas.openxmlformats.org/drawingml/2006/main">
@@ -4156,7 +4156,7 @@
           </a:p>
           <a:p xmlns:a="http://schemas.openxmlformats.org/drawingml/2006/main">
             <a:r>
-              <a:t>Slide ID: S29</a:t>
+              <a:t>Slide ID: S30</a:t>
             </a:r>
           </a:p>
           <a:p xmlns:a="http://schemas.openxmlformats.org/drawingml/2006/main">
@@ -4356,7 +4356,7 @@
           </a:p>
           <a:p xmlns:a="http://schemas.openxmlformats.org/drawingml/2006/main">
             <a:r>
-              <a:t>Fallback: LOCAL STATIC ARTIFACT — 발표 기본 경로는 `production/ACT_2.pptx`의 S29 또는 `production/preview/act2/S29.png`다. 수정 초안 정적 화면은 존재하며 최종 release 경로·내용 일치는 통합 검토에서 확인한다. 실제 Trial 캡처나 현재 제품 실행으로 표현하지 않는다.</a:t>
+              <a:t>Fallback: LOCAL STATIC ARTIFACT — 발표 기본 경로는 `production/ACT_2.pptx`의 S30 또는 `production/preview/act2/S30.png`다. 수정 초안 정적 화면은 존재하며 최종 release 경로·내용 일치는 통합 검토에서 확인한다. 실제 Trial 캡처나 현재 제품 실행으로 표현하지 않는다.</a:t>
             </a:r>
           </a:p>
           <a:p xmlns:a="http://schemas.openxmlformats.org/drawingml/2006/main">
@@ -4436,7 +4436,7 @@
           <a:lstStyle xmlns:a="http://schemas.openxmlformats.org/drawingml/2006/main"/>
           <a:p xmlns:a="http://schemas.openxmlformats.org/drawingml/2006/main">
             <a:r>
-              <a:t>## S30 — 필요한 상세 정보로 가는 길</a:t>
+              <a:t>## S31 — 필요한 상세 정보로 가는 길</a:t>
             </a:r>
           </a:p>
           <a:p xmlns:a="http://schemas.openxmlformats.org/drawingml/2006/main">
@@ -4446,7 +4446,7 @@
           </a:p>
           <a:p xmlns:a="http://schemas.openxmlformats.org/drawingml/2006/main">
             <a:r>
-              <a:t>Slide ID: S30</a:t>
+              <a:t>Slide ID: S31</a:t>
             </a:r>
           </a:p>
           <a:p xmlns:a="http://schemas.openxmlformats.org/drawingml/2006/main">
@@ -4646,7 +4646,7 @@
           </a:p>
           <a:p xmlns:a="http://schemas.openxmlformats.org/drawingml/2006/main">
             <a:r>
-              <a:t>Fallback: LOCAL STATIC ARTIFACT — 발표 기본 경로는 `production/ACT_2.pptx`의 S30 또는 `production/preview/act2/S30.png`다. 수정 초안 정적 화면은 존재하며 최종 release 경로·내용 일치는 통합 검토에서 확인한다. 실제 Trial 캡처나 현재 제품 실행으로 표현하지 않는다.</a:t>
+              <a:t>Fallback: LOCAL STATIC ARTIFACT — 발표 기본 경로는 `production/ACT_2.pptx`의 S31 또는 `production/preview/act2/S31.png`다. 수정 초안 정적 화면은 존재하며 최종 release 경로·내용 일치는 통합 검토에서 확인한다. 실제 Trial 캡처나 현재 제품 실행으로 표현하지 않는다.</a:t>
             </a:r>
           </a:p>
           <a:p xmlns:a="http://schemas.openxmlformats.org/drawingml/2006/main">
@@ -4703,7 +4703,7 @@
           <p:cNvPr id="3" name="Title">
             <a:extLst xmlns:a="http://schemas.openxmlformats.org/drawingml/2006/main">
               <a:ext uri="{FF2B5EF4-FFF2-40B4-BE49-F238E27FC236}">
-                <a16:creationId xmlns:a16="http://schemas.microsoft.com/office/drawing/2014/main" id="{7713D891-BCA9-4E2C-B4D8-DD85BE59CD68}"/>
+                <a16:creationId xmlns:a16="http://schemas.microsoft.com/office/drawing/2014/main" id="{B1C574A0-954F-430D-9F3A-DB5E541EFAC7}"/>
               </a:ext>
             </a:extLst>
           </p:cNvPr>
@@ -4932,7 +4932,7 @@
           <p:cNvPr id="2" name="Subtitle">
             <a:extLst xmlns:a="http://schemas.openxmlformats.org/drawingml/2006/main">
               <a:ext uri="{FF2B5EF4-FFF2-40B4-BE49-F238E27FC236}">
-                <a16:creationId xmlns:a16="http://schemas.microsoft.com/office/drawing/2014/main" id="{FFB417C0-3E8C-46C0-ACDC-B9DCEB83EBD9}"/>
+                <a16:creationId xmlns:a16="http://schemas.microsoft.com/office/drawing/2014/main" id="{F4316642-7C57-4F3C-87D6-AFF42E6CF5CC}"/>
               </a:ext>
             </a:extLst>
           </p:cNvPr>
@@ -5178,7 +5178,7 @@
           <p:cNvPr id="2" name="Section title">
             <a:extLst xmlns:a="http://schemas.openxmlformats.org/drawingml/2006/main">
               <a:ext uri="{FF2B5EF4-FFF2-40B4-BE49-F238E27FC236}">
-                <a16:creationId xmlns:a16="http://schemas.microsoft.com/office/drawing/2014/main" id="{2C0E45E4-C5FF-4AD2-B96D-8FB031D9BB54}"/>
+                <a16:creationId xmlns:a16="http://schemas.microsoft.com/office/drawing/2014/main" id="{312B9973-9E5F-46B5-B495-0B1FCE04B22C}"/>
               </a:ext>
             </a:extLst>
           </p:cNvPr>
@@ -5424,7 +5424,7 @@
           <p:cNvPr id="3" name="Title">
             <a:extLst xmlns:a="http://schemas.openxmlformats.org/drawingml/2006/main">
               <a:ext uri="{FF2B5EF4-FFF2-40B4-BE49-F238E27FC236}">
-                <a16:creationId xmlns:a16="http://schemas.microsoft.com/office/drawing/2014/main" id="{72D335BE-A886-4C6C-8F54-A5077D1987CD}"/>
+                <a16:creationId xmlns:a16="http://schemas.microsoft.com/office/drawing/2014/main" id="{3A6B6FC0-317A-4250-B320-BBAE2A914B1A}"/>
               </a:ext>
             </a:extLst>
           </p:cNvPr>
@@ -5653,7 +5653,7 @@
           <p:cNvPr id="2" name="Body">
             <a:extLst xmlns:a="http://schemas.openxmlformats.org/drawingml/2006/main">
               <a:ext uri="{FF2B5EF4-FFF2-40B4-BE49-F238E27FC236}">
-                <a16:creationId xmlns:a16="http://schemas.microsoft.com/office/drawing/2014/main" id="{24082072-2DFE-4EAE-889B-51AB677993A7}"/>
+                <a16:creationId xmlns:a16="http://schemas.microsoft.com/office/drawing/2014/main" id="{6A2972F4-B353-458C-8BEE-0248B975DFCD}"/>
               </a:ext>
             </a:extLst>
           </p:cNvPr>
@@ -5899,7 +5899,7 @@
           <p:cNvPr id="4" name="Title">
             <a:extLst xmlns:a="http://schemas.openxmlformats.org/drawingml/2006/main">
               <a:ext uri="{FF2B5EF4-FFF2-40B4-BE49-F238E27FC236}">
-                <a16:creationId xmlns:a16="http://schemas.microsoft.com/office/drawing/2014/main" id="{2E56D10E-B34C-47E8-A95D-2B5D046E1E85}"/>
+                <a16:creationId xmlns:a16="http://schemas.microsoft.com/office/drawing/2014/main" id="{1A851C9F-C5A4-4B1C-8FC2-BF239E4C5350}"/>
               </a:ext>
             </a:extLst>
           </p:cNvPr>
@@ -6128,7 +6128,7 @@
           <p:cNvPr id="2" name="Left column">
             <a:extLst xmlns:a="http://schemas.openxmlformats.org/drawingml/2006/main">
               <a:ext uri="{FF2B5EF4-FFF2-40B4-BE49-F238E27FC236}">
-                <a16:creationId xmlns:a16="http://schemas.microsoft.com/office/drawing/2014/main" id="{93B170AD-4102-4B3A-9E90-A066EDA6C095}"/>
+                <a16:creationId xmlns:a16="http://schemas.microsoft.com/office/drawing/2014/main" id="{C29D2271-0E12-4040-810E-CBDFD1E05BF1}"/>
               </a:ext>
             </a:extLst>
           </p:cNvPr>
@@ -6357,7 +6357,7 @@
           <p:cNvPr id="3" name="Right column">
             <a:extLst xmlns:a="http://schemas.openxmlformats.org/drawingml/2006/main">
               <a:ext uri="{FF2B5EF4-FFF2-40B4-BE49-F238E27FC236}">
-                <a16:creationId xmlns:a16="http://schemas.microsoft.com/office/drawing/2014/main" id="{DE68F22C-FD65-439C-ACA3-3E240D3A006E}"/>
+                <a16:creationId xmlns:a16="http://schemas.microsoft.com/office/drawing/2014/main" id="{1977A701-DBDA-4F6F-9BD4-81DFF094E769}"/>
               </a:ext>
             </a:extLst>
           </p:cNvPr>
@@ -6603,7 +6603,7 @@
           <p:cNvPr id="3" name="Title">
             <a:extLst xmlns:a="http://schemas.openxmlformats.org/drawingml/2006/main">
               <a:ext uri="{FF2B5EF4-FFF2-40B4-BE49-F238E27FC236}">
-                <a16:creationId xmlns:a16="http://schemas.microsoft.com/office/drawing/2014/main" id="{2C152618-673A-47A6-A9F6-CAC7A0C6CFE0}"/>
+                <a16:creationId xmlns:a16="http://schemas.microsoft.com/office/drawing/2014/main" id="{EC204DE6-1603-4FF7-BAF2-C284051CB935}"/>
               </a:ext>
             </a:extLst>
           </p:cNvPr>
@@ -6832,7 +6832,7 @@
           <p:cNvPr id="2" name="Left column">
             <a:extLst xmlns:a="http://schemas.openxmlformats.org/drawingml/2006/main">
               <a:ext uri="{FF2B5EF4-FFF2-40B4-BE49-F238E27FC236}">
-                <a16:creationId xmlns:a16="http://schemas.microsoft.com/office/drawing/2014/main" id="{F0565BEC-0A91-429D-8030-5AD688A63B51}"/>
+                <a16:creationId xmlns:a16="http://schemas.microsoft.com/office/drawing/2014/main" id="{D6B49BB9-51E5-44D3-930A-B78E667B0E0F}"/>
               </a:ext>
             </a:extLst>
           </p:cNvPr>
@@ -7099,12 +7099,12 @@
   </p:cSld>
   <p:clrMap bg1="lt1" tx1="dk1" bg2="lt2" tx2="dk2" accent1="accent1" accent2="accent2" accent3="accent3" accent4="accent4" accent5="accent5" accent6="accent6" hlink="hlink" folHlink="folHlink"/>
   <p:sldLayoutIdLst>
-    <p:sldLayoutId xmlns:r="http://schemas.openxmlformats.org/officeDocument/2006/relationships" id="2147483649" r:id="R94159041c6c942d9"/>
-    <p:sldLayoutId xmlns:r="http://schemas.openxmlformats.org/officeDocument/2006/relationships" id="2147483650" r:id="Rfbc5a78a8e6f4efe"/>
-    <p:sldLayoutId xmlns:r="http://schemas.openxmlformats.org/officeDocument/2006/relationships" id="2147483651" r:id="R64a80f1e93b44ef5"/>
-    <p:sldLayoutId xmlns:r="http://schemas.openxmlformats.org/officeDocument/2006/relationships" id="2147483652" r:id="R84fa851239ba4889"/>
-    <p:sldLayoutId xmlns:r="http://schemas.openxmlformats.org/officeDocument/2006/relationships" id="2147483653" r:id="R0f0ba64e208b4b46"/>
-    <p:sldLayoutId xmlns:r="http://schemas.openxmlformats.org/officeDocument/2006/relationships" id="2147483654" r:id="R0b20351628864d66"/>
+    <p:sldLayoutId xmlns:r="http://schemas.openxmlformats.org/officeDocument/2006/relationships" id="2147483649" r:id="R46cb27cccba645fd"/>
+    <p:sldLayoutId xmlns:r="http://schemas.openxmlformats.org/officeDocument/2006/relationships" id="2147483650" r:id="Rd6f76a175cb843d0"/>
+    <p:sldLayoutId xmlns:r="http://schemas.openxmlformats.org/officeDocument/2006/relationships" id="2147483651" r:id="Rae9905441a524cbd"/>
+    <p:sldLayoutId xmlns:r="http://schemas.openxmlformats.org/officeDocument/2006/relationships" id="2147483652" r:id="R79f35d48d9e74481"/>
+    <p:sldLayoutId xmlns:r="http://schemas.openxmlformats.org/officeDocument/2006/relationships" id="2147483653" r:id="R6025fe1f954547a5"/>
+    <p:sldLayoutId xmlns:r="http://schemas.openxmlformats.org/officeDocument/2006/relationships" id="2147483654" r:id="Rca6249531a35462d"/>
   </p:sldLayoutIdLst>
   <p:txStyles>
     <p:titleStyle>
@@ -7655,7 +7655,7 @@
           <p:cNvPr id="24" name="ACT 2 · 반복되는 프로젝트 설명">
             <a:extLst xmlns:a="http://schemas.openxmlformats.org/drawingml/2006/main">
               <a:ext uri="{FF2B5EF4-FFF2-40B4-BE49-F238E27FC236}">
-                <a16:creationId xmlns:a16="http://schemas.microsoft.com/office/drawing/2014/main" id="{128F6C12-D6A3-4677-98F5-906EBB1A4BEF}"/>
+                <a16:creationId xmlns:a16="http://schemas.microsoft.com/office/drawing/2014/main" id="{F1B9C7D3-971A-4765-983A-0C80AEDF671B}"/>
               </a:ext>
             </a:extLst>
           </p:cNvPr>
@@ -7810,10 +7810,10 @@
       </p:sp>
       <p:sp>
         <p:nvSpPr>
-          <p:cNvPr id="2" name="S22">
+          <p:cNvPr id="2" name="S23">
             <a:extLst xmlns:a="http://schemas.openxmlformats.org/drawingml/2006/main">
               <a:ext uri="{FF2B5EF4-FFF2-40B4-BE49-F238E27FC236}">
-                <a16:creationId xmlns:a16="http://schemas.microsoft.com/office/drawing/2014/main" id="{E11200AB-3C0D-456B-8451-929ABD0BDB14}"/>
+                <a16:creationId xmlns:a16="http://schemas.microsoft.com/office/drawing/2014/main" id="{A410835B-6461-4C3F-8CBD-92F32043526A}"/>
               </a:ext>
             </a:extLst>
           </p:cNvPr>
@@ -7961,7 +7961,7 @@
                 <a:ea typeface="Malgun Gothic"/>
                 <a:cs typeface="Malgun Gothic"/>
               </a:rPr>
-              <a:t>S22</a:t>
+              <a:t>S23</a:t>
             </a:r>
           </a:p>
         </p:txBody>
@@ -7971,7 +7971,7 @@
           <p:cNvPr id="3" name="다른 Task에 같은 설명이 반복된다">
             <a:extLst xmlns:a="http://schemas.openxmlformats.org/drawingml/2006/main">
               <a:ext uri="{FF2B5EF4-FFF2-40B4-BE49-F238E27FC236}">
-                <a16:creationId xmlns:a16="http://schemas.microsoft.com/office/drawing/2014/main" id="{AC9755E9-2F73-4451-87C2-9A5E060D836D}"/>
+                <a16:creationId xmlns:a16="http://schemas.microsoft.com/office/drawing/2014/main" id="{BF1FE2AB-6701-4BE4-9CC9-480F94B0449F}"/>
               </a:ext>
             </a:extLst>
           </p:cNvPr>
@@ -8129,7 +8129,7 @@
           <p:cNvPr id="4" name="">
             <a:extLst xmlns:a="http://schemas.openxmlformats.org/drawingml/2006/main">
               <a:ext uri="{FF2B5EF4-FFF2-40B4-BE49-F238E27FC236}">
-                <a16:creationId xmlns:a16="http://schemas.microsoft.com/office/drawing/2014/main" id="{F8A379ED-511C-4AC9-A05D-8C39FE1E0DB4}"/>
+                <a16:creationId xmlns:a16="http://schemas.microsoft.com/office/drawing/2014/main" id="{79EE3B6A-90C1-4C1E-B20C-59672D77CC28}"/>
               </a:ext>
             </a:extLst>
           </p:cNvPr>
@@ -8160,7 +8160,7 @@
           <p:cNvPr id="5" name="교육용 구성 사례 · Bug fix / Performance / README 작업">
             <a:extLst xmlns:a="http://schemas.openxmlformats.org/drawingml/2006/main">
               <a:ext uri="{FF2B5EF4-FFF2-40B4-BE49-F238E27FC236}">
-                <a16:creationId xmlns:a16="http://schemas.microsoft.com/office/drawing/2014/main" id="{5603F5FB-3CC7-4600-8240-DB88A71211FA}"/>
+                <a16:creationId xmlns:a16="http://schemas.microsoft.com/office/drawing/2014/main" id="{B0A17663-52D3-4905-8B9B-ABCA8FF451F8}"/>
               </a:ext>
             </a:extLst>
           </p:cNvPr>
@@ -8318,7 +8318,7 @@
           <p:cNvPr id="6" name="서로 다른 요청에 같은 프로젝트 정보가 반복되는 상황을 보여준다">
             <a:extLst xmlns:a="http://schemas.openxmlformats.org/drawingml/2006/main">
               <a:ext uri="{FF2B5EF4-FFF2-40B4-BE49-F238E27FC236}">
-                <a16:creationId xmlns:a16="http://schemas.microsoft.com/office/drawing/2014/main" id="{36A68D7F-0195-41ED-A9F9-29D5D098D8FF}"/>
+                <a16:creationId xmlns:a16="http://schemas.microsoft.com/office/drawing/2014/main" id="{A63592A2-AAA1-4A44-AF9F-1D06B76EF7EB}"/>
               </a:ext>
             </a:extLst>
           </p:cNvPr>
@@ -8476,7 +8476,7 @@
           <p:cNvPr id="7" name="버그 수정">
             <a:extLst xmlns:a="http://schemas.openxmlformats.org/drawingml/2006/main">
               <a:ext uri="{FF2B5EF4-FFF2-40B4-BE49-F238E27FC236}">
-                <a16:creationId xmlns:a16="http://schemas.microsoft.com/office/drawing/2014/main" id="{2F36A949-7CCE-444F-B9BA-9806846CC160}"/>
+                <a16:creationId xmlns:a16="http://schemas.microsoft.com/office/drawing/2014/main" id="{728A11F4-619B-47FF-B3C8-B9AFE2563744}"/>
               </a:ext>
             </a:extLst>
           </p:cNvPr>
@@ -8634,7 +8634,7 @@
           <p:cNvPr id="8" name="crop 경계를 수정해줘">
             <a:extLst xmlns:a="http://schemas.openxmlformats.org/drawingml/2006/main">
               <a:ext uri="{FF2B5EF4-FFF2-40B4-BE49-F238E27FC236}">
-                <a16:creationId xmlns:a16="http://schemas.microsoft.com/office/drawing/2014/main" id="{053004F5-7EA5-4715-BF20-F2795DAC9243}"/>
+                <a16:creationId xmlns:a16="http://schemas.microsoft.com/office/drawing/2014/main" id="{591368B9-02E4-4CFE-AB8B-AE9B8CC93681}"/>
               </a:ext>
             </a:extLst>
           </p:cNvPr>
@@ -8792,7 +8792,7 @@
           <p:cNvPr id="9" name="">
             <a:extLst xmlns:a="http://schemas.openxmlformats.org/drawingml/2006/main">
               <a:ext uri="{FF2B5EF4-FFF2-40B4-BE49-F238E27FC236}">
-                <a16:creationId xmlns:a16="http://schemas.microsoft.com/office/drawing/2014/main" id="{DA91326D-C1E9-4AE2-BCE3-E84B8CBC6750}"/>
+                <a16:creationId xmlns:a16="http://schemas.microsoft.com/office/drawing/2014/main" id="{1821BB16-9F31-4F92-AE54-4BB87C2CC8FA}"/>
               </a:ext>
             </a:extLst>
           </p:cNvPr>
@@ -8823,7 +8823,7 @@
           <p:cNvPr id="10" name="">
             <a:extLst xmlns:a="http://schemas.openxmlformats.org/drawingml/2006/main">
               <a:ext uri="{FF2B5EF4-FFF2-40B4-BE49-F238E27FC236}">
-                <a16:creationId xmlns:a16="http://schemas.microsoft.com/office/drawing/2014/main" id="{FA002002-DCCB-4ED9-936E-08E1E0A08F22}"/>
+                <a16:creationId xmlns:a16="http://schemas.microsoft.com/office/drawing/2014/main" id="{8D155C0A-B7C2-4128-9D23-8BD9C294D264}"/>
               </a:ext>
             </a:extLst>
           </p:cNvPr>
@@ -8854,7 +8854,7 @@
           <p:cNvPr id="11" name="지정된 테스트 실행&#10;의존성 추가에는 근거 필요&#10;로컬 합성 데이터 사용&#10;기존 동작 보존">
             <a:extLst xmlns:a="http://schemas.openxmlformats.org/drawingml/2006/main">
               <a:ext uri="{FF2B5EF4-FFF2-40B4-BE49-F238E27FC236}">
-                <a16:creationId xmlns:a16="http://schemas.microsoft.com/office/drawing/2014/main" id="{CD589A0A-F892-441E-A869-9A391FFEF004}"/>
+                <a16:creationId xmlns:a16="http://schemas.microsoft.com/office/drawing/2014/main" id="{36B1B786-174B-4793-B65B-7AEB7E303615}"/>
               </a:ext>
             </a:extLst>
           </p:cNvPr>
@@ -9081,7 +9081,7 @@
           <p:cNvPr id="12" name="성능 조사">
             <a:extLst xmlns:a="http://schemas.openxmlformats.org/drawingml/2006/main">
               <a:ext uri="{FF2B5EF4-FFF2-40B4-BE49-F238E27FC236}">
-                <a16:creationId xmlns:a16="http://schemas.microsoft.com/office/drawing/2014/main" id="{3DBB63DA-18FC-4251-8739-5B3CAFA1E9E0}"/>
+                <a16:creationId xmlns:a16="http://schemas.microsoft.com/office/drawing/2014/main" id="{DCA6C20E-F206-45FB-8D66-8EBC41FD953C}"/>
               </a:ext>
             </a:extLst>
           </p:cNvPr>
@@ -9239,7 +9239,7 @@
           <p:cNvPr id="13" name="통계 계산을 조사해줘">
             <a:extLst xmlns:a="http://schemas.openxmlformats.org/drawingml/2006/main">
               <a:ext uri="{FF2B5EF4-FFF2-40B4-BE49-F238E27FC236}">
-                <a16:creationId xmlns:a16="http://schemas.microsoft.com/office/drawing/2014/main" id="{E72A5824-DE0B-411C-9E10-43CDBDD18F6E}"/>
+                <a16:creationId xmlns:a16="http://schemas.microsoft.com/office/drawing/2014/main" id="{0D957D93-BE7E-4E64-9D5D-3A948BC1AD90}"/>
               </a:ext>
             </a:extLst>
           </p:cNvPr>
@@ -9397,7 +9397,7 @@
           <p:cNvPr id="14" name="">
             <a:extLst xmlns:a="http://schemas.openxmlformats.org/drawingml/2006/main">
               <a:ext uri="{FF2B5EF4-FFF2-40B4-BE49-F238E27FC236}">
-                <a16:creationId xmlns:a16="http://schemas.microsoft.com/office/drawing/2014/main" id="{B1BCEFA1-FD9C-43D4-A527-2C2147516C37}"/>
+                <a16:creationId xmlns:a16="http://schemas.microsoft.com/office/drawing/2014/main" id="{9FD99C30-8125-4818-AB33-B4F104C41726}"/>
               </a:ext>
             </a:extLst>
           </p:cNvPr>
@@ -9428,7 +9428,7 @@
           <p:cNvPr id="15" name="">
             <a:extLst xmlns:a="http://schemas.openxmlformats.org/drawingml/2006/main">
               <a:ext uri="{FF2B5EF4-FFF2-40B4-BE49-F238E27FC236}">
-                <a16:creationId xmlns:a16="http://schemas.microsoft.com/office/drawing/2014/main" id="{46A7CF95-F7F4-4C03-A696-3C632AD56EBE}"/>
+                <a16:creationId xmlns:a16="http://schemas.microsoft.com/office/drawing/2014/main" id="{21C7C8A5-C8F7-4676-8865-D5E01462E81B}"/>
               </a:ext>
             </a:extLst>
           </p:cNvPr>
@@ -9459,7 +9459,7 @@
           <p:cNvPr id="16" name="지정된 테스트 실행&#10;의존성 추가에는 근거 필요&#10;로컬 합성 데이터 사용&#10;기존 동작 보존">
             <a:extLst xmlns:a="http://schemas.openxmlformats.org/drawingml/2006/main">
               <a:ext uri="{FF2B5EF4-FFF2-40B4-BE49-F238E27FC236}">
-                <a16:creationId xmlns:a16="http://schemas.microsoft.com/office/drawing/2014/main" id="{A74B142B-D2E3-480C-B4AB-AC7BD1E35B8E}"/>
+                <a16:creationId xmlns:a16="http://schemas.microsoft.com/office/drawing/2014/main" id="{B2E104A1-3327-4D99-AE5C-68697176CC37}"/>
               </a:ext>
             </a:extLst>
           </p:cNvPr>
@@ -9686,7 +9686,7 @@
           <p:cNvPr id="17" name="README 수정">
             <a:extLst xmlns:a="http://schemas.openxmlformats.org/drawingml/2006/main">
               <a:ext uri="{FF2B5EF4-FFF2-40B4-BE49-F238E27FC236}">
-                <a16:creationId xmlns:a16="http://schemas.microsoft.com/office/drawing/2014/main" id="{D71C05F2-21BC-42B1-AD34-D3A15723426D}"/>
+                <a16:creationId xmlns:a16="http://schemas.microsoft.com/office/drawing/2014/main" id="{D8AF3AB1-D469-43CB-B2E1-494B41DC54BD}"/>
               </a:ext>
             </a:extLst>
           </p:cNvPr>
@@ -9844,7 +9844,7 @@
           <p:cNvPr id="18" name="빌드 안내를 명확히 해줘">
             <a:extLst xmlns:a="http://schemas.openxmlformats.org/drawingml/2006/main">
               <a:ext uri="{FF2B5EF4-FFF2-40B4-BE49-F238E27FC236}">
-                <a16:creationId xmlns:a16="http://schemas.microsoft.com/office/drawing/2014/main" id="{29298788-F777-4AAC-B9C4-C4085E30136E}"/>
+                <a16:creationId xmlns:a16="http://schemas.microsoft.com/office/drawing/2014/main" id="{411AFFBE-93A4-4B90-A495-96C4D47579CE}"/>
               </a:ext>
             </a:extLst>
           </p:cNvPr>
@@ -10002,7 +10002,7 @@
           <p:cNvPr id="19" name="">
             <a:extLst xmlns:a="http://schemas.openxmlformats.org/drawingml/2006/main">
               <a:ext uri="{FF2B5EF4-FFF2-40B4-BE49-F238E27FC236}">
-                <a16:creationId xmlns:a16="http://schemas.microsoft.com/office/drawing/2014/main" id="{7257FBD8-7947-44FF-BCB7-8EB4ADF69682}"/>
+                <a16:creationId xmlns:a16="http://schemas.microsoft.com/office/drawing/2014/main" id="{80CCF612-651D-437D-86E2-172783CCF856}"/>
               </a:ext>
             </a:extLst>
           </p:cNvPr>
@@ -10033,7 +10033,7 @@
           <p:cNvPr id="20" name="">
             <a:extLst xmlns:a="http://schemas.openxmlformats.org/drawingml/2006/main">
               <a:ext uri="{FF2B5EF4-FFF2-40B4-BE49-F238E27FC236}">
-                <a16:creationId xmlns:a16="http://schemas.microsoft.com/office/drawing/2014/main" id="{0ECAA8C1-FBCA-4D6A-A16C-15D8840DADEB}"/>
+                <a16:creationId xmlns:a16="http://schemas.microsoft.com/office/drawing/2014/main" id="{5ECBEF5E-E4C8-42D3-A72F-85ADD5193DD3}"/>
               </a:ext>
             </a:extLst>
           </p:cNvPr>
@@ -10064,7 +10064,7 @@
           <p:cNvPr id="21" name="지정된 테스트 실행&#10;의존성 추가에는 근거 필요&#10;로컬 합성 데이터 사용&#10;기존 동작 보존">
             <a:extLst xmlns:a="http://schemas.openxmlformats.org/drawingml/2006/main">
               <a:ext uri="{FF2B5EF4-FFF2-40B4-BE49-F238E27FC236}">
-                <a16:creationId xmlns:a16="http://schemas.microsoft.com/office/drawing/2014/main" id="{13811FF9-5A08-4FB5-A720-08C85808C95C}"/>
+                <a16:creationId xmlns:a16="http://schemas.microsoft.com/office/drawing/2014/main" id="{AEDB14FE-3F6D-4F63-A50A-BA3321EF3CA6}"/>
               </a:ext>
             </a:extLst>
           </p:cNvPr>
@@ -10291,7 +10291,7 @@
           <p:cNvPr id="22" name="요청은 다른데, 아래 설명은 왜 계속 같을까?">
             <a:extLst xmlns:a="http://schemas.openxmlformats.org/drawingml/2006/main">
               <a:ext uri="{FF2B5EF4-FFF2-40B4-BE49-F238E27FC236}">
-                <a16:creationId xmlns:a16="http://schemas.microsoft.com/office/drawing/2014/main" id="{7B31FB24-F767-432B-945F-C07BACE54058}"/>
+                <a16:creationId xmlns:a16="http://schemas.microsoft.com/office/drawing/2014/main" id="{70A81202-4F87-48C4-A1CB-5CD62720DC66}"/>
               </a:ext>
             </a:extLst>
           </p:cNvPr>
@@ -10449,7 +10449,7 @@
           <p:cNvPr id="23" name="Legacy module connection">
             <a:extLst xmlns:a="http://schemas.openxmlformats.org/drawingml/2006/main">
               <a:ext uri="{FF2B5EF4-FFF2-40B4-BE49-F238E27FC236}">
-                <a16:creationId xmlns:a16="http://schemas.microsoft.com/office/drawing/2014/main" id="{C0891BA0-B822-43B7-86AA-252163215B6D}"/>
+                <a16:creationId xmlns:a16="http://schemas.microsoft.com/office/drawing/2014/main" id="{2AAC7271-2290-4849-9556-1956338A9A07}"/>
               </a:ext>
             </a:extLst>
           </p:cNvPr>
@@ -10605,7 +10605,7 @@
     </p:spTree>
     <p:extLst>
       <p:ext uri="{BB962C8B-B14F-4D97-AF65-F5344CB8AC3E}">
-        <p14:creationId xmlns:p14="http://schemas.microsoft.com/office/powerpoint/2010/main" val="1859686861"/>
+        <p14:creationId xmlns:p14="http://schemas.microsoft.com/office/powerpoint/2010/main" val="1668977982"/>
       </p:ext>
     </p:extLst>
   </p:cSld>
@@ -10636,7 +10636,7 @@
           <p:cNvPr id="24" name="ACT 2 · Core에 남길 기본 안내">
             <a:extLst xmlns:a="http://schemas.openxmlformats.org/drawingml/2006/main">
               <a:ext uri="{FF2B5EF4-FFF2-40B4-BE49-F238E27FC236}">
-                <a16:creationId xmlns:a16="http://schemas.microsoft.com/office/drawing/2014/main" id="{47F8E357-8511-40B4-8A19-5BB9DC64E677}"/>
+                <a16:creationId xmlns:a16="http://schemas.microsoft.com/office/drawing/2014/main" id="{BB2791FB-C2BE-4F24-8191-D490C88AD056}"/>
               </a:ext>
             </a:extLst>
           </p:cNvPr>
@@ -10791,10 +10791,10 @@
       </p:sp>
       <p:sp>
         <p:nvSpPr>
-          <p:cNvPr id="2" name="S31">
+          <p:cNvPr id="2" name="S32">
             <a:extLst xmlns:a="http://schemas.openxmlformats.org/drawingml/2006/main">
               <a:ext uri="{FF2B5EF4-FFF2-40B4-BE49-F238E27FC236}">
-                <a16:creationId xmlns:a16="http://schemas.microsoft.com/office/drawing/2014/main" id="{463FFC55-97BA-4B99-8185-43418C226410}"/>
+                <a16:creationId xmlns:a16="http://schemas.microsoft.com/office/drawing/2014/main" id="{82CAAF52-F05F-4B8B-A137-6B1ED1F1940A}"/>
               </a:ext>
             </a:extLst>
           </p:cNvPr>
@@ -10942,7 +10942,7 @@
                 <a:ea typeface="Malgun Gothic"/>
                 <a:cs typeface="Malgun Gothic"/>
               </a:rPr>
-              <a:t>S31</a:t>
+              <a:t>S32</a:t>
             </a:r>
           </a:p>
         </p:txBody>
@@ -10952,7 +10952,7 @@
           <p:cNvPr id="3" name="Core Context에서 상세 정보로 가는 길">
             <a:extLst xmlns:a="http://schemas.openxmlformats.org/drawingml/2006/main">
               <a:ext uri="{FF2B5EF4-FFF2-40B4-BE49-F238E27FC236}">
-                <a16:creationId xmlns:a16="http://schemas.microsoft.com/office/drawing/2014/main" id="{CF0A2DB8-BDC5-42CE-8AC0-5E6EAA3D19CF}"/>
+                <a16:creationId xmlns:a16="http://schemas.microsoft.com/office/drawing/2014/main" id="{348FE439-A36A-48E1-A6C0-FFB4CE298ADA}"/>
               </a:ext>
             </a:extLst>
           </p:cNvPr>
@@ -11110,7 +11110,7 @@
           <p:cNvPr id="4" name="">
             <a:extLst xmlns:a="http://schemas.openxmlformats.org/drawingml/2006/main">
               <a:ext uri="{FF2B5EF4-FFF2-40B4-BE49-F238E27FC236}">
-                <a16:creationId xmlns:a16="http://schemas.microsoft.com/office/drawing/2014/main" id="{38CF6AD9-943D-41DC-B718-154DEC574B7E}"/>
+                <a16:creationId xmlns:a16="http://schemas.microsoft.com/office/drawing/2014/main" id="{42847423-35B8-45C9-BE2F-9B3A314379A8}"/>
               </a:ext>
             </a:extLst>
           </p:cNvPr>
@@ -11141,7 +11141,7 @@
           <p:cNvPr id="5" name="교육용 정보 설계 · Root/Core는 상세 정보의 출발점">
             <a:extLst xmlns:a="http://schemas.openxmlformats.org/drawingml/2006/main">
               <a:ext uri="{FF2B5EF4-FFF2-40B4-BE49-F238E27FC236}">
-                <a16:creationId xmlns:a16="http://schemas.microsoft.com/office/drawing/2014/main" id="{ED8C06D4-ADA5-49E0-98CD-2896CD965445}"/>
+                <a16:creationId xmlns:a16="http://schemas.microsoft.com/office/drawing/2014/main" id="{A2B282E0-2F6E-459B-BC98-8B2EF5484DDD}"/>
               </a:ext>
             </a:extLst>
           </p:cNvPr>
@@ -11299,7 +11299,7 @@
           <p:cNvPr id="6" name="C++ 예: build/test 진입점과 기본 제약 → 알고리즘 계약·하드웨어 조건">
             <a:extLst xmlns:a="http://schemas.openxmlformats.org/drawingml/2006/main">
               <a:ext uri="{FF2B5EF4-FFF2-40B4-BE49-F238E27FC236}">
-                <a16:creationId xmlns:a16="http://schemas.microsoft.com/office/drawing/2014/main" id="{DD19603D-33DF-40DD-9CF6-D33A83F2F76A}"/>
+                <a16:creationId xmlns:a16="http://schemas.microsoft.com/office/drawing/2014/main" id="{7B9C3DA8-6F76-4C3C-A13C-AFB14DB32D85}"/>
               </a:ext>
             </a:extLst>
           </p:cNvPr>
@@ -11457,7 +11457,7 @@
           <p:cNvPr id="7" name="무엇을 항상 읽고, 무엇을 필요할 때 찾게 할까?">
             <a:extLst xmlns:a="http://schemas.openxmlformats.org/drawingml/2006/main">
               <a:ext uri="{FF2B5EF4-FFF2-40B4-BE49-F238E27FC236}">
-                <a16:creationId xmlns:a16="http://schemas.microsoft.com/office/drawing/2014/main" id="{FC94FBB6-45DD-4D89-9258-FB476DD86196}"/>
+                <a16:creationId xmlns:a16="http://schemas.microsoft.com/office/drawing/2014/main" id="{64F66690-CBA7-4BA3-968F-93394FE81783}"/>
               </a:ext>
             </a:extLst>
           </p:cNvPr>
@@ -11615,7 +11615,7 @@
           <p:cNvPr id="8" name="">
             <a:extLst xmlns:a="http://schemas.openxmlformats.org/drawingml/2006/main">
               <a:ext uri="{FF2B5EF4-FFF2-40B4-BE49-F238E27FC236}">
-                <a16:creationId xmlns:a16="http://schemas.microsoft.com/office/drawing/2014/main" id="{2CC66FD8-2C5C-4178-91F2-D76A1F81790B}"/>
+                <a16:creationId xmlns:a16="http://schemas.microsoft.com/office/drawing/2014/main" id="{2E1CEA6F-E49B-457E-A6FB-D11EDBD81679}"/>
               </a:ext>
             </a:extLst>
           </p:cNvPr>
@@ -11646,7 +11646,7 @@
           <p:cNvPr id="9" name="CORE · 기본 안내">
             <a:extLst xmlns:a="http://schemas.openxmlformats.org/drawingml/2006/main">
               <a:ext uri="{FF2B5EF4-FFF2-40B4-BE49-F238E27FC236}">
-                <a16:creationId xmlns:a16="http://schemas.microsoft.com/office/drawing/2014/main" id="{44305B62-CC2E-443F-A0F4-85BFFC7FB424}"/>
+                <a16:creationId xmlns:a16="http://schemas.microsoft.com/office/drawing/2014/main" id="{CEDDE3F8-4276-4632-AA2F-23BE6BB93DB1}"/>
               </a:ext>
             </a:extLst>
           </p:cNvPr>
@@ -11804,7 +11804,7 @@
           <p:cNvPr id="10" name="프로젝트의 목적&#10;항상 지켜야 할 제약&#10;상세 정보를 찾을 위치">
             <a:extLst xmlns:a="http://schemas.openxmlformats.org/drawingml/2006/main">
               <a:ext uri="{FF2B5EF4-FFF2-40B4-BE49-F238E27FC236}">
-                <a16:creationId xmlns:a16="http://schemas.microsoft.com/office/drawing/2014/main" id="{6EAEDD43-FB54-4CEE-B78F-F1E30B72F1A9}"/>
+                <a16:creationId xmlns:a16="http://schemas.microsoft.com/office/drawing/2014/main" id="{4BA1A6A5-8A07-4327-BFFE-11E3DBDE3808}"/>
               </a:ext>
             </a:extLst>
           </p:cNvPr>
@@ -12008,7 +12008,7 @@
           <p:cNvPr id="11" name="">
             <a:extLst xmlns:a="http://schemas.openxmlformats.org/drawingml/2006/main">
               <a:ext uri="{FF2B5EF4-FFF2-40B4-BE49-F238E27FC236}">
-                <a16:creationId xmlns:a16="http://schemas.microsoft.com/office/drawing/2014/main" id="{DB557734-FB43-4D72-9454-6841B192C563}"/>
+                <a16:creationId xmlns:a16="http://schemas.microsoft.com/office/drawing/2014/main" id="{B984C9D6-46F1-421F-9266-D4A13BE8A06C}"/>
               </a:ext>
             </a:extLst>
           </p:cNvPr>
@@ -12038,7 +12038,7 @@
           <p:cNvPr id="12" name="DETAIL · 필요한 상세">
             <a:extLst xmlns:a="http://schemas.openxmlformats.org/drawingml/2006/main">
               <a:ext uri="{FF2B5EF4-FFF2-40B4-BE49-F238E27FC236}">
-                <a16:creationId xmlns:a16="http://schemas.microsoft.com/office/drawing/2014/main" id="{9B8A5759-A234-4E91-8098-654AC0638A65}"/>
+                <a16:creationId xmlns:a16="http://schemas.microsoft.com/office/drawing/2014/main" id="{EF45DB43-C7AD-48E6-93EB-95AD54CF5A6E}"/>
               </a:ext>
             </a:extLst>
           </p:cNvPr>
@@ -12196,7 +12196,7 @@
           <p:cNvPr id="13" name="">
             <a:extLst xmlns:a="http://schemas.openxmlformats.org/drawingml/2006/main">
               <a:ext uri="{FF2B5EF4-FFF2-40B4-BE49-F238E27FC236}">
-                <a16:creationId xmlns:a16="http://schemas.microsoft.com/office/drawing/2014/main" id="{C8BCA4FC-D44F-4CE5-A096-67E3CDBE962D}"/>
+                <a16:creationId xmlns:a16="http://schemas.microsoft.com/office/drawing/2014/main" id="{27ED6065-57F4-4510-97CC-0B6BFC7C8D98}"/>
               </a:ext>
             </a:extLst>
           </p:cNvPr>
@@ -12227,7 +12227,7 @@
           <p:cNvPr id="14" name="architecture">
             <a:extLst xmlns:a="http://schemas.openxmlformats.org/drawingml/2006/main">
               <a:ext uri="{FF2B5EF4-FFF2-40B4-BE49-F238E27FC236}">
-                <a16:creationId xmlns:a16="http://schemas.microsoft.com/office/drawing/2014/main" id="{2696D8C3-6A60-446E-A354-9701B276E2D9}"/>
+                <a16:creationId xmlns:a16="http://schemas.microsoft.com/office/drawing/2014/main" id="{57DD2CC1-A7F0-4E17-99DF-D0025B1DD720}"/>
               </a:ext>
             </a:extLst>
           </p:cNvPr>
@@ -12385,7 +12385,7 @@
           <p:cNvPr id="15" name="모듈과 처리 순서">
             <a:extLst xmlns:a="http://schemas.openxmlformats.org/drawingml/2006/main">
               <a:ext uri="{FF2B5EF4-FFF2-40B4-BE49-F238E27FC236}">
-                <a16:creationId xmlns:a16="http://schemas.microsoft.com/office/drawing/2014/main" id="{18905EE9-B01C-4743-B903-9E9B68673B2D}"/>
+                <a16:creationId xmlns:a16="http://schemas.microsoft.com/office/drawing/2014/main" id="{F19C6DF6-A290-4C25-8F80-B43503EFD59E}"/>
               </a:ext>
             </a:extLst>
           </p:cNvPr>
@@ -12543,7 +12543,7 @@
           <p:cNvPr id="16" name="">
             <a:extLst xmlns:a="http://schemas.openxmlformats.org/drawingml/2006/main">
               <a:ext uri="{FF2B5EF4-FFF2-40B4-BE49-F238E27FC236}">
-                <a16:creationId xmlns:a16="http://schemas.microsoft.com/office/drawing/2014/main" id="{2A722490-8C7D-4B2B-A54E-F48CAF6A2443}"/>
+                <a16:creationId xmlns:a16="http://schemas.microsoft.com/office/drawing/2014/main" id="{D19744C6-DA76-4DCD-B1B1-D7C111AB3767}"/>
               </a:ext>
             </a:extLst>
           </p:cNvPr>
@@ -12574,7 +12574,7 @@
           <p:cNvPr id="17" name="image contracts">
             <a:extLst xmlns:a="http://schemas.openxmlformats.org/drawingml/2006/main">
               <a:ext uri="{FF2B5EF4-FFF2-40B4-BE49-F238E27FC236}">
-                <a16:creationId xmlns:a16="http://schemas.microsoft.com/office/drawing/2014/main" id="{6BF02855-DD22-45A9-B11A-3A6846F38706}"/>
+                <a16:creationId xmlns:a16="http://schemas.microsoft.com/office/drawing/2014/main" id="{698A93C0-7BC2-4162-B3FB-BC2DF3C7B31D}"/>
               </a:ext>
             </a:extLst>
           </p:cNvPr>
@@ -12732,7 +12732,7 @@
           <p:cNvPr id="18" name="이미지 동작의 계약">
             <a:extLst xmlns:a="http://schemas.openxmlformats.org/drawingml/2006/main">
               <a:ext uri="{FF2B5EF4-FFF2-40B4-BE49-F238E27FC236}">
-                <a16:creationId xmlns:a16="http://schemas.microsoft.com/office/drawing/2014/main" id="{5FD58823-BC0B-4460-BAE2-7D5D58528294}"/>
+                <a16:creationId xmlns:a16="http://schemas.microsoft.com/office/drawing/2014/main" id="{77C5142D-0700-4538-9693-AE9BE2C05455}"/>
               </a:ext>
             </a:extLst>
           </p:cNvPr>
@@ -12890,7 +12890,7 @@
           <p:cNvPr id="19" name="">
             <a:extLst xmlns:a="http://schemas.openxmlformats.org/drawingml/2006/main">
               <a:ext uri="{FF2B5EF4-FFF2-40B4-BE49-F238E27FC236}">
-                <a16:creationId xmlns:a16="http://schemas.microsoft.com/office/drawing/2014/main" id="{D13F884E-ECD0-4C8C-BFAD-49976EFD021F}"/>
+                <a16:creationId xmlns:a16="http://schemas.microsoft.com/office/drawing/2014/main" id="{B9E26C40-31C7-496F-9AEC-9663A1721E8B}"/>
               </a:ext>
             </a:extLst>
           </p:cNvPr>
@@ -12921,7 +12921,7 @@
           <p:cNvPr id="20" name="testing">
             <a:extLst xmlns:a="http://schemas.openxmlformats.org/drawingml/2006/main">
               <a:ext uri="{FF2B5EF4-FFF2-40B4-BE49-F238E27FC236}">
-                <a16:creationId xmlns:a16="http://schemas.microsoft.com/office/drawing/2014/main" id="{411AB0D6-4211-4049-A65E-FE92B3418BEE}"/>
+                <a16:creationId xmlns:a16="http://schemas.microsoft.com/office/drawing/2014/main" id="{3D84487C-FEC2-4831-8605-8E5BCBFDFB07}"/>
               </a:ext>
             </a:extLst>
           </p:cNvPr>
@@ -13079,7 +13079,7 @@
           <p:cNvPr id="21" name="테스트 위치와 범위">
             <a:extLst xmlns:a="http://schemas.openxmlformats.org/drawingml/2006/main">
               <a:ext uri="{FF2B5EF4-FFF2-40B4-BE49-F238E27FC236}">
-                <a16:creationId xmlns:a16="http://schemas.microsoft.com/office/drawing/2014/main" id="{E1BD78B9-6F3B-4B5A-B390-74AB499A51B3}"/>
+                <a16:creationId xmlns:a16="http://schemas.microsoft.com/office/drawing/2014/main" id="{287A70D8-571E-463B-A937-2E384003A4DA}"/>
               </a:ext>
             </a:extLst>
           </p:cNvPr>
@@ -13237,7 +13237,7 @@
           <p:cNvPr id="22" name="모든 지식을 넣기보다, 상세 정보까지 가는 길을 안내한다">
             <a:extLst xmlns:a="http://schemas.openxmlformats.org/drawingml/2006/main">
               <a:ext uri="{FF2B5EF4-FFF2-40B4-BE49-F238E27FC236}">
-                <a16:creationId xmlns:a16="http://schemas.microsoft.com/office/drawing/2014/main" id="{0BF5E8E3-E2A7-4FC5-A435-25BDFAF0A73D}"/>
+                <a16:creationId xmlns:a16="http://schemas.microsoft.com/office/drawing/2014/main" id="{F940D70F-19E1-4C2D-8060-640DD6C991A4}"/>
               </a:ext>
             </a:extLst>
           </p:cNvPr>
@@ -13395,7 +13395,7 @@
           <p:cNvPr id="23" name="Legacy module connection">
             <a:extLst xmlns:a="http://schemas.openxmlformats.org/drawingml/2006/main">
               <a:ext uri="{FF2B5EF4-FFF2-40B4-BE49-F238E27FC236}">
-                <a16:creationId xmlns:a16="http://schemas.microsoft.com/office/drawing/2014/main" id="{4A10E91D-2B78-4D75-A4CC-CE9502521738}"/>
+                <a16:creationId xmlns:a16="http://schemas.microsoft.com/office/drawing/2014/main" id="{745F9CAD-3C03-4A56-95FE-23E5D00AE5A7}"/>
               </a:ext>
             </a:extLst>
           </p:cNvPr>
@@ -13551,7 +13551,7 @@
     </p:spTree>
     <p:extLst>
       <p:ext uri="{BB962C8B-B14F-4D97-AF65-F5344CB8AC3E}">
-        <p14:creationId xmlns:p14="http://schemas.microsoft.com/office/powerpoint/2010/main" val="410692087"/>
+        <p14:creationId xmlns:p14="http://schemas.microsoft.com/office/powerpoint/2010/main" val="2079332930"/>
       </p:ext>
     </p:extLst>
   </p:cSld>
@@ -13582,7 +13582,7 @@
           <p:cNvPr id="23" name="ACT 2 · STATE-03의 문서 구조">
             <a:extLst xmlns:a="http://schemas.openxmlformats.org/drawingml/2006/main">
               <a:ext uri="{FF2B5EF4-FFF2-40B4-BE49-F238E27FC236}">
-                <a16:creationId xmlns:a16="http://schemas.microsoft.com/office/drawing/2014/main" id="{D7919BBE-CD71-451D-AC90-E53094074FF8}"/>
+                <a16:creationId xmlns:a16="http://schemas.microsoft.com/office/drawing/2014/main" id="{0B505515-58D2-46C2-875C-D1959E42A3F0}"/>
               </a:ext>
             </a:extLst>
           </p:cNvPr>
@@ -13737,10 +13737,10 @@
       </p:sp>
       <p:sp>
         <p:nvSpPr>
-          <p:cNvPr id="2" name="S32">
+          <p:cNvPr id="2" name="S33">
             <a:extLst xmlns:a="http://schemas.openxmlformats.org/drawingml/2006/main">
               <a:ext uri="{FF2B5EF4-FFF2-40B4-BE49-F238E27FC236}">
-                <a16:creationId xmlns:a16="http://schemas.microsoft.com/office/drawing/2014/main" id="{0146FE3F-053A-49F7-8D7D-CE462901E379}"/>
+                <a16:creationId xmlns:a16="http://schemas.microsoft.com/office/drawing/2014/main" id="{A7ED2E10-EC9D-46E7-A7BE-3A7CCA9EF837}"/>
               </a:ext>
             </a:extLst>
           </p:cNvPr>
@@ -13888,7 +13888,7 @@
                 <a:ea typeface="Malgun Gothic"/>
                 <a:cs typeface="Malgun Gothic"/>
               </a:rPr>
-              <a:t>S32</a:t>
+              <a:t>S33</a:t>
             </a:r>
           </a:p>
         </p:txBody>
@@ -13898,7 +13898,7 @@
           <p:cNvPr id="3" name="정보를 지우지 않고 위치를 나누기">
             <a:extLst xmlns:a="http://schemas.openxmlformats.org/drawingml/2006/main">
               <a:ext uri="{FF2B5EF4-FFF2-40B4-BE49-F238E27FC236}">
-                <a16:creationId xmlns:a16="http://schemas.microsoft.com/office/drawing/2014/main" id="{4931F818-CE20-44CE-A6A4-9CFF59C92F79}"/>
+                <a16:creationId xmlns:a16="http://schemas.microsoft.com/office/drawing/2014/main" id="{216A8AC4-9F21-457E-B2A3-81F9C0FAA305}"/>
               </a:ext>
             </a:extLst>
           </p:cNvPr>
@@ -14056,7 +14056,7 @@
           <p:cNvPr id="4" name="">
             <a:extLst xmlns:a="http://schemas.openxmlformats.org/drawingml/2006/main">
               <a:ext uri="{FF2B5EF4-FFF2-40B4-BE49-F238E27FC236}">
-                <a16:creationId xmlns:a16="http://schemas.microsoft.com/office/drawing/2014/main" id="{751D9531-124C-4DE2-BA37-A7EC0A765074}"/>
+                <a16:creationId xmlns:a16="http://schemas.microsoft.com/office/drawing/2014/main" id="{A1456D1A-5B0F-421A-A28F-9E655876BB99}"/>
               </a:ext>
             </a:extLst>
           </p:cNvPr>
@@ -14087,7 +14087,7 @@
           <p:cNvPr id="5" name="STATE-02 → STATE-03 · 실제 파일 구조와 Routing 문구 발췌">
             <a:extLst xmlns:a="http://schemas.openxmlformats.org/drawingml/2006/main">
               <a:ext uri="{FF2B5EF4-FFF2-40B4-BE49-F238E27FC236}">
-                <a16:creationId xmlns:a16="http://schemas.microsoft.com/office/drawing/2014/main" id="{AFC010C7-BEC1-4CBD-8B63-7516AD638BE9}"/>
+                <a16:creationId xmlns:a16="http://schemas.microsoft.com/office/drawing/2014/main" id="{8AD71633-D09F-465E-9028-140D965ABD78}"/>
               </a:ext>
             </a:extLst>
           </p:cNvPr>
@@ -14245,7 +14245,7 @@
           <p:cNvPr id="6" name="내용을 Scope에 맞춰 이동 · 구조 변화 자체가 완벽한 Routing이나 성능 향상 증거는 아님">
             <a:extLst xmlns:a="http://schemas.openxmlformats.org/drawingml/2006/main">
               <a:ext uri="{FF2B5EF4-FFF2-40B4-BE49-F238E27FC236}">
-                <a16:creationId xmlns:a16="http://schemas.microsoft.com/office/drawing/2014/main" id="{8F4AEA6C-93CC-40E2-BDB9-EB3F880FFCC7}"/>
+                <a16:creationId xmlns:a16="http://schemas.microsoft.com/office/drawing/2014/main" id="{98A5E948-2C83-411B-924B-0618BE947047}"/>
               </a:ext>
             </a:extLst>
           </p:cNvPr>
@@ -14403,7 +14403,7 @@
           <p:cNvPr id="7" name="이전: AGENTS.md 안에 세부사항까지">
             <a:extLst xmlns:a="http://schemas.openxmlformats.org/drawingml/2006/main">
               <a:ext uri="{FF2B5EF4-FFF2-40B4-BE49-F238E27FC236}">
-                <a16:creationId xmlns:a16="http://schemas.microsoft.com/office/drawing/2014/main" id="{2106702F-7FA2-4D82-B889-1621AE1FD177}"/>
+                <a16:creationId xmlns:a16="http://schemas.microsoft.com/office/drawing/2014/main" id="{9AC2A439-E973-4959-9FF0-8BDF39391667}"/>
               </a:ext>
             </a:extLst>
           </p:cNvPr>
@@ -14561,7 +14561,7 @@
           <p:cNvPr id="8" name="이후: 기본 안내 + 상세 문서로 가는 링크">
             <a:extLst xmlns:a="http://schemas.openxmlformats.org/drawingml/2006/main">
               <a:ext uri="{FF2B5EF4-FFF2-40B4-BE49-F238E27FC236}">
-                <a16:creationId xmlns:a16="http://schemas.microsoft.com/office/drawing/2014/main" id="{731C0D69-BCC9-4BC6-9757-731570721301}"/>
+                <a16:creationId xmlns:a16="http://schemas.microsoft.com/office/drawing/2014/main" id="{FA8E577A-4610-4590-A04F-1B66AE1A045E}"/>
               </a:ext>
             </a:extLst>
           </p:cNvPr>
@@ -14719,7 +14719,7 @@
           <p:cNvPr id="9" name="">
             <a:extLst xmlns:a="http://schemas.openxmlformats.org/drawingml/2006/main">
               <a:ext uri="{FF2B5EF4-FFF2-40B4-BE49-F238E27FC236}">
-                <a16:creationId xmlns:a16="http://schemas.microsoft.com/office/drawing/2014/main" id="{DB0FB24B-0FEB-4A0F-B228-931E47672ED0}"/>
+                <a16:creationId xmlns:a16="http://schemas.microsoft.com/office/drawing/2014/main" id="{5F61CCD7-98AC-434A-B872-0BDE527A3093}"/>
               </a:ext>
             </a:extLst>
           </p:cNvPr>
@@ -14750,7 +14750,7 @@
           <p:cNvPr id="10" name="처리 순서 · 모듈 역할">
             <a:extLst xmlns:a="http://schemas.openxmlformats.org/drawingml/2006/main">
               <a:ext uri="{FF2B5EF4-FFF2-40B4-BE49-F238E27FC236}">
-                <a16:creationId xmlns:a16="http://schemas.microsoft.com/office/drawing/2014/main" id="{324CC99C-5BED-465E-A3C8-27A73F1AB5BE}"/>
+                <a16:creationId xmlns:a16="http://schemas.microsoft.com/office/drawing/2014/main" id="{A0A09CF6-9D0C-40FD-A4EF-4DC064C7AC4B}"/>
               </a:ext>
             </a:extLst>
           </p:cNvPr>
@@ -14908,7 +14908,7 @@
           <p:cNvPr id="11" name="">
             <a:extLst xmlns:a="http://schemas.openxmlformats.org/drawingml/2006/main">
               <a:ext uri="{FF2B5EF4-FFF2-40B4-BE49-F238E27FC236}">
-                <a16:creationId xmlns:a16="http://schemas.microsoft.com/office/drawing/2014/main" id="{F0150678-29A3-4E6D-A72D-92F3F1513D2C}"/>
+                <a16:creationId xmlns:a16="http://schemas.microsoft.com/office/drawing/2014/main" id="{E3D244EB-ECAD-47D8-84B9-0C75E7541C51}"/>
               </a:ext>
             </a:extLst>
           </p:cNvPr>
@@ -14938,7 +14938,7 @@
           <p:cNvPr id="12" name="docs/architecture.md">
             <a:extLst xmlns:a="http://schemas.openxmlformats.org/drawingml/2006/main">
               <a:ext uri="{FF2B5EF4-FFF2-40B4-BE49-F238E27FC236}">
-                <a16:creationId xmlns:a16="http://schemas.microsoft.com/office/drawing/2014/main" id="{D1F32168-1981-4BEF-A474-452C654683BE}"/>
+                <a16:creationId xmlns:a16="http://schemas.microsoft.com/office/drawing/2014/main" id="{ABE687CB-0856-4848-B6AE-258CC674A0E4}"/>
               </a:ext>
             </a:extLst>
           </p:cNvPr>
@@ -15096,7 +15096,7 @@
           <p:cNvPr id="13" name="">
             <a:extLst xmlns:a="http://schemas.openxmlformats.org/drawingml/2006/main">
               <a:ext uri="{FF2B5EF4-FFF2-40B4-BE49-F238E27FC236}">
-                <a16:creationId xmlns:a16="http://schemas.microsoft.com/office/drawing/2014/main" id="{AE7452DA-977F-48CB-8A8F-A2286C75636C}"/>
+                <a16:creationId xmlns:a16="http://schemas.microsoft.com/office/drawing/2014/main" id="{3CDE0321-A386-4587-BD35-18CD5BC3A98F}"/>
               </a:ext>
             </a:extLst>
           </p:cNvPr>
@@ -15127,7 +15127,7 @@
           <p:cNvPr id="14" name="이미지 형식 · crop · resize">
             <a:extLst xmlns:a="http://schemas.openxmlformats.org/drawingml/2006/main">
               <a:ext uri="{FF2B5EF4-FFF2-40B4-BE49-F238E27FC236}">
-                <a16:creationId xmlns:a16="http://schemas.microsoft.com/office/drawing/2014/main" id="{1E47464D-3DD7-4DCC-988E-A00363586995}"/>
+                <a16:creationId xmlns:a16="http://schemas.microsoft.com/office/drawing/2014/main" id="{016F85D7-CE2F-44C8-96D8-95AC78E917E6}"/>
               </a:ext>
             </a:extLst>
           </p:cNvPr>
@@ -15285,7 +15285,7 @@
           <p:cNvPr id="15" name="">
             <a:extLst xmlns:a="http://schemas.openxmlformats.org/drawingml/2006/main">
               <a:ext uri="{FF2B5EF4-FFF2-40B4-BE49-F238E27FC236}">
-                <a16:creationId xmlns:a16="http://schemas.microsoft.com/office/drawing/2014/main" id="{4275CB25-BC6D-4CF2-9ECA-71B72B6AAB0C}"/>
+                <a16:creationId xmlns:a16="http://schemas.microsoft.com/office/drawing/2014/main" id="{07899048-1643-4358-93C4-DB2DF73F2ABB}"/>
               </a:ext>
             </a:extLst>
           </p:cNvPr>
@@ -15315,7 +15315,7 @@
           <p:cNvPr id="16" name="docs/image-contracts.md">
             <a:extLst xmlns:a="http://schemas.openxmlformats.org/drawingml/2006/main">
               <a:ext uri="{FF2B5EF4-FFF2-40B4-BE49-F238E27FC236}">
-                <a16:creationId xmlns:a16="http://schemas.microsoft.com/office/drawing/2014/main" id="{66B60E54-0A02-42E8-9E1A-F2B943ABDCEB}"/>
+                <a16:creationId xmlns:a16="http://schemas.microsoft.com/office/drawing/2014/main" id="{F746725D-711A-423C-B81F-2A5856DF70EE}"/>
               </a:ext>
             </a:extLst>
           </p:cNvPr>
@@ -15473,7 +15473,7 @@
           <p:cNvPr id="17" name="">
             <a:extLst xmlns:a="http://schemas.openxmlformats.org/drawingml/2006/main">
               <a:ext uri="{FF2B5EF4-FFF2-40B4-BE49-F238E27FC236}">
-                <a16:creationId xmlns:a16="http://schemas.microsoft.com/office/drawing/2014/main" id="{7EB9AE7B-0C0E-440E-B5C5-83A883C3CE31}"/>
+                <a16:creationId xmlns:a16="http://schemas.microsoft.com/office/drawing/2014/main" id="{66B77B3D-CEC5-4625-AA20-E6CCE5581FA5}"/>
               </a:ext>
             </a:extLst>
           </p:cNvPr>
@@ -15504,7 +15504,7 @@
           <p:cNvPr id="18" name="테스트 구조 · 관련 테스트">
             <a:extLst xmlns:a="http://schemas.openxmlformats.org/drawingml/2006/main">
               <a:ext uri="{FF2B5EF4-FFF2-40B4-BE49-F238E27FC236}">
-                <a16:creationId xmlns:a16="http://schemas.microsoft.com/office/drawing/2014/main" id="{9B22F788-8B8F-460B-B508-9BA89F40CD5F}"/>
+                <a16:creationId xmlns:a16="http://schemas.microsoft.com/office/drawing/2014/main" id="{75AEE999-9C60-4CBF-A598-57E80B5E8354}"/>
               </a:ext>
             </a:extLst>
           </p:cNvPr>
@@ -15662,7 +15662,7 @@
           <p:cNvPr id="19" name="">
             <a:extLst xmlns:a="http://schemas.openxmlformats.org/drawingml/2006/main">
               <a:ext uri="{FF2B5EF4-FFF2-40B4-BE49-F238E27FC236}">
-                <a16:creationId xmlns:a16="http://schemas.microsoft.com/office/drawing/2014/main" id="{5D70F61E-2399-43D1-928A-1F4E229C7411}"/>
+                <a16:creationId xmlns:a16="http://schemas.microsoft.com/office/drawing/2014/main" id="{538F809A-AC62-4ADD-AA52-385E65494232}"/>
               </a:ext>
             </a:extLst>
           </p:cNvPr>
@@ -15692,7 +15692,7 @@
           <p:cNvPr id="20" name="docs/testing.md">
             <a:extLst xmlns:a="http://schemas.openxmlformats.org/drawingml/2006/main">
               <a:ext uri="{FF2B5EF4-FFF2-40B4-BE49-F238E27FC236}">
-                <a16:creationId xmlns:a16="http://schemas.microsoft.com/office/drawing/2014/main" id="{9304882F-C6CF-47BE-8CCB-0CBFA80FD109}"/>
+                <a16:creationId xmlns:a16="http://schemas.microsoft.com/office/drawing/2014/main" id="{47C0581E-33C4-4137-AE56-2CD7B898CF18}"/>
               </a:ext>
             </a:extLst>
           </p:cNvPr>
@@ -15850,7 +15850,7 @@
           <p:cNvPr id="21" name="원문: Test organization or relevant tests → docs/testing.md">
             <a:extLst xmlns:a="http://schemas.openxmlformats.org/drawingml/2006/main">
               <a:ext uri="{FF2B5EF4-FFF2-40B4-BE49-F238E27FC236}">
-                <a16:creationId xmlns:a16="http://schemas.microsoft.com/office/drawing/2014/main" id="{A53D2086-E24A-41DB-9828-2DA335740462}"/>
+                <a16:creationId xmlns:a16="http://schemas.microsoft.com/office/drawing/2014/main" id="{819A8290-84AC-4E1C-8CAE-B0B3014E829C}"/>
               </a:ext>
             </a:extLst>
           </p:cNvPr>
@@ -16008,7 +16008,7 @@
           <p:cNvPr id="22" name="Legacy module connection">
             <a:extLst xmlns:a="http://schemas.openxmlformats.org/drawingml/2006/main">
               <a:ext uri="{FF2B5EF4-FFF2-40B4-BE49-F238E27FC236}">
-                <a16:creationId xmlns:a16="http://schemas.microsoft.com/office/drawing/2014/main" id="{2CD4FAE6-9429-497B-96CE-D3EED97F6AFE}"/>
+                <a16:creationId xmlns:a16="http://schemas.microsoft.com/office/drawing/2014/main" id="{CA258F2E-0FD5-4F57-B44A-948E9E980F13}"/>
               </a:ext>
             </a:extLst>
           </p:cNvPr>
@@ -16164,7 +16164,7 @@
     </p:spTree>
     <p:extLst>
       <p:ext uri="{BB962C8B-B14F-4D97-AF65-F5344CB8AC3E}">
-        <p14:creationId xmlns:p14="http://schemas.microsoft.com/office/powerpoint/2010/main" val="1881540053"/>
+        <p14:creationId xmlns:p14="http://schemas.microsoft.com/office/powerpoint/2010/main" val="1565696227"/>
       </p:ext>
     </p:extLst>
   </p:cSld>
@@ -16195,7 +16195,7 @@
           <p:cNvPr id="15" name="ACT 2 · 관찰하기 전에 질문하기">
             <a:extLst xmlns:a="http://schemas.openxmlformats.org/drawingml/2006/main">
               <a:ext uri="{FF2B5EF4-FFF2-40B4-BE49-F238E27FC236}">
-                <a16:creationId xmlns:a16="http://schemas.microsoft.com/office/drawing/2014/main" id="{233957DF-7DC3-4CD4-82FB-4F45485C775B}"/>
+                <a16:creationId xmlns:a16="http://schemas.microsoft.com/office/drawing/2014/main" id="{669044B2-E008-4AC6-B6F2-E2DC2E778801}"/>
               </a:ext>
             </a:extLst>
           </p:cNvPr>
@@ -16350,10 +16350,10 @@
       </p:sp>
       <p:sp>
         <p:nvSpPr>
-          <p:cNvPr id="2" name="S33">
+          <p:cNvPr id="2" name="S34">
             <a:extLst xmlns:a="http://schemas.openxmlformats.org/drawingml/2006/main">
               <a:ext uri="{FF2B5EF4-FFF2-40B4-BE49-F238E27FC236}">
-                <a16:creationId xmlns:a16="http://schemas.microsoft.com/office/drawing/2014/main" id="{08B2C716-D585-4831-AFCE-8CF7F4DC6B74}"/>
+                <a16:creationId xmlns:a16="http://schemas.microsoft.com/office/drawing/2014/main" id="{010C2470-6580-4DDB-8CE6-03BB079EBB05}"/>
               </a:ext>
             </a:extLst>
           </p:cNvPr>
@@ -16501,7 +16501,7 @@
                 <a:ea typeface="Malgun Gothic"/>
                 <a:cs typeface="Malgun Gothic"/>
               </a:rPr>
-              <a:t>S33</a:t>
+              <a:t>S34</a:t>
             </a:r>
           </a:p>
         </p:txBody>
@@ -16511,7 +16511,7 @@
           <p:cNvPr id="3" name="서로 다른 두 Task가 무엇을 읽을까?">
             <a:extLst xmlns:a="http://schemas.openxmlformats.org/drawingml/2006/main">
               <a:ext uri="{FF2B5EF4-FFF2-40B4-BE49-F238E27FC236}">
-                <a16:creationId xmlns:a16="http://schemas.microsoft.com/office/drawing/2014/main" id="{484CB6E7-0D77-4717-B638-5103E2B42971}"/>
+                <a16:creationId xmlns:a16="http://schemas.microsoft.com/office/drawing/2014/main" id="{E0EE2D42-2BF0-4D18-970B-87613EEDA7EB}"/>
               </a:ext>
             </a:extLst>
           </p:cNvPr>
@@ -16669,7 +16669,7 @@
           <p:cNvPr id="4" name="">
             <a:extLst xmlns:a="http://schemas.openxmlformats.org/drawingml/2006/main">
               <a:ext uri="{FF2B5EF4-FFF2-40B4-BE49-F238E27FC236}">
-                <a16:creationId xmlns:a16="http://schemas.microsoft.com/office/drawing/2014/main" id="{45CCDDBD-9047-4B31-8C34-DB4E6CD6AA6B}"/>
+                <a16:creationId xmlns:a16="http://schemas.microsoft.com/office/drawing/2014/main" id="{A2A51A67-5E65-4381-BD7E-808EA06563B1}"/>
               </a:ext>
             </a:extLst>
           </p:cNvPr>
@@ -16700,7 +16700,7 @@
           <p:cNvPr id="5" name="TRIAL-005A/B · 읽기 전용 Task의 질문을 재구성">
             <a:extLst xmlns:a="http://schemas.openxmlformats.org/drawingml/2006/main">
               <a:ext uri="{FF2B5EF4-FFF2-40B4-BE49-F238E27FC236}">
-                <a16:creationId xmlns:a16="http://schemas.microsoft.com/office/drawing/2014/main" id="{E7456354-6166-49FD-9BCA-E543401D6EC9}"/>
+                <a16:creationId xmlns:a16="http://schemas.microsoft.com/office/drawing/2014/main" id="{4746A3DF-F8C7-4F59-A096-9AF5DC2D219E}"/>
               </a:ext>
             </a:extLst>
           </p:cNvPr>
@@ -16858,7 +16858,7 @@
           <p:cNvPr id="6" name="어떤 상세 문서를 읽을지는 실제 접근 기록으로 확인한다">
             <a:extLst xmlns:a="http://schemas.openxmlformats.org/drawingml/2006/main">
               <a:ext uri="{FF2B5EF4-FFF2-40B4-BE49-F238E27FC236}">
-                <a16:creationId xmlns:a16="http://schemas.microsoft.com/office/drawing/2014/main" id="{07A54C61-8A09-4C84-9AE0-821A5F29755D}"/>
+                <a16:creationId xmlns:a16="http://schemas.microsoft.com/office/drawing/2014/main" id="{F60CE8AF-F0E8-4635-A2D5-BE77515F8C76}"/>
               </a:ext>
             </a:extLst>
           </p:cNvPr>
@@ -17016,7 +17016,7 @@
           <p:cNvPr id="7" name="Task A">
             <a:extLst xmlns:a="http://schemas.openxmlformats.org/drawingml/2006/main">
               <a:ext uri="{FF2B5EF4-FFF2-40B4-BE49-F238E27FC236}">
-                <a16:creationId xmlns:a16="http://schemas.microsoft.com/office/drawing/2014/main" id="{8B703F54-74D7-4880-A1AB-45B9DEA9A68A}"/>
+                <a16:creationId xmlns:a16="http://schemas.microsoft.com/office/drawing/2014/main" id="{7C4F25C6-C299-40E7-AD45-947E6CDDC19E}"/>
               </a:ext>
             </a:extLst>
           </p:cNvPr>
@@ -17174,7 +17174,7 @@
           <p:cNvPr id="8" name="Task B">
             <a:extLst xmlns:a="http://schemas.openxmlformats.org/drawingml/2006/main">
               <a:ext uri="{FF2B5EF4-FFF2-40B4-BE49-F238E27FC236}">
-                <a16:creationId xmlns:a16="http://schemas.microsoft.com/office/drawing/2014/main" id="{3548529A-8259-47EC-A129-5AF0426B4E78}"/>
+                <a16:creationId xmlns:a16="http://schemas.microsoft.com/office/drawing/2014/main" id="{FFB22156-8A69-4F2E-A261-137BE81634B4}"/>
               </a:ext>
             </a:extLst>
           </p:cNvPr>
@@ -17332,7 +17332,7 @@
           <p:cNvPr id="9" name="">
             <a:extLst xmlns:a="http://schemas.openxmlformats.org/drawingml/2006/main">
               <a:ext uri="{FF2B5EF4-FFF2-40B4-BE49-F238E27FC236}">
-                <a16:creationId xmlns:a16="http://schemas.microsoft.com/office/drawing/2014/main" id="{F40BACCD-1E2E-4FEF-B210-21863EB32885}"/>
+                <a16:creationId xmlns:a16="http://schemas.microsoft.com/office/drawing/2014/main" id="{E13C8055-D815-4943-98FE-8AA24E8CB621}"/>
               </a:ext>
             </a:extLst>
           </p:cNvPr>
@@ -17363,7 +17363,7 @@
           <p:cNvPr id="10" name="">
             <a:extLst xmlns:a="http://schemas.openxmlformats.org/drawingml/2006/main">
               <a:ext uri="{FF2B5EF4-FFF2-40B4-BE49-F238E27FC236}">
-                <a16:creationId xmlns:a16="http://schemas.microsoft.com/office/drawing/2014/main" id="{A00722C7-EC0E-404D-B2C8-D4E2921437AE}"/>
+                <a16:creationId xmlns:a16="http://schemas.microsoft.com/office/drawing/2014/main" id="{255D3CE3-F056-4D71-B639-D9224DAE20A0}"/>
               </a:ext>
             </a:extLst>
           </p:cNvPr>
@@ -17394,7 +17394,7 @@
           <p:cNvPr id="11" name="crop 1 3은&#10;어떤 source column을&#10;포함하는가?">
             <a:extLst xmlns:a="http://schemas.openxmlformats.org/drawingml/2006/main">
               <a:ext uri="{FF2B5EF4-FFF2-40B4-BE49-F238E27FC236}">
-                <a16:creationId xmlns:a16="http://schemas.microsoft.com/office/drawing/2014/main" id="{C3731B31-9564-4A64-8A10-C83B65594C93}"/>
+                <a16:creationId xmlns:a16="http://schemas.microsoft.com/office/drawing/2014/main" id="{2FBC9EA8-5879-46D5-AF0B-DE820F693F0E}"/>
               </a:ext>
             </a:extLst>
           </p:cNvPr>
@@ -17598,7 +17598,7 @@
           <p:cNvPr id="12" name="이 Project에&#10;runtime dependency가&#10;있는가?">
             <a:extLst xmlns:a="http://schemas.openxmlformats.org/drawingml/2006/main">
               <a:ext uri="{FF2B5EF4-FFF2-40B4-BE49-F238E27FC236}">
-                <a16:creationId xmlns:a16="http://schemas.microsoft.com/office/drawing/2014/main" id="{28E0439B-20CA-4606-BBD5-7A6C8B443AFC}"/>
+                <a16:creationId xmlns:a16="http://schemas.microsoft.com/office/drawing/2014/main" id="{654A1E94-1FF0-4CB0-A972-2302F5763554}"/>
               </a:ext>
             </a:extLst>
           </p:cNvPr>
@@ -17802,7 +17802,7 @@
           <p:cNvPr id="13" name="두 Task에서 같은 상세 문서를 읽을까?">
             <a:extLst xmlns:a="http://schemas.openxmlformats.org/drawingml/2006/main">
               <a:ext uri="{FF2B5EF4-FFF2-40B4-BE49-F238E27FC236}">
-                <a16:creationId xmlns:a16="http://schemas.microsoft.com/office/drawing/2014/main" id="{93F0F5F5-743A-499B-9915-E637C18A2758}"/>
+                <a16:creationId xmlns:a16="http://schemas.microsoft.com/office/drawing/2014/main" id="{B38E1127-3450-4350-AE8F-25B7E9767166}"/>
               </a:ext>
             </a:extLst>
           </p:cNvPr>
@@ -17960,7 +17960,7 @@
           <p:cNvPr id="14" name="Legacy module connection">
             <a:extLst xmlns:a="http://schemas.openxmlformats.org/drawingml/2006/main">
               <a:ext uri="{FF2B5EF4-FFF2-40B4-BE49-F238E27FC236}">
-                <a16:creationId xmlns:a16="http://schemas.microsoft.com/office/drawing/2014/main" id="{124B802F-993F-4126-9460-DF2239DAD27C}"/>
+                <a16:creationId xmlns:a16="http://schemas.microsoft.com/office/drawing/2014/main" id="{DF8F068C-F996-4B4F-B845-DFF66FA4ABB5}"/>
               </a:ext>
             </a:extLst>
           </p:cNvPr>
@@ -18116,7 +18116,7 @@
     </p:spTree>
     <p:extLst>
       <p:ext uri="{BB962C8B-B14F-4D97-AF65-F5344CB8AC3E}">
-        <p14:creationId xmlns:p14="http://schemas.microsoft.com/office/powerpoint/2010/main" val="1444056187"/>
+        <p14:creationId xmlns:p14="http://schemas.microsoft.com/office/powerpoint/2010/main" val="606460420"/>
       </p:ext>
     </p:extLst>
   </p:cSld>
@@ -18147,7 +18147,7 @@
           <p:cNvPr id="25" name="ACT 2 · 질문과 근거를 연결하기">
             <a:extLst xmlns:a="http://schemas.openxmlformats.org/drawingml/2006/main">
               <a:ext uri="{FF2B5EF4-FFF2-40B4-BE49-F238E27FC236}">
-                <a16:creationId xmlns:a16="http://schemas.microsoft.com/office/drawing/2014/main" id="{B675E7E3-0E1C-43C7-B531-E6E92EE71960}"/>
+                <a16:creationId xmlns:a16="http://schemas.microsoft.com/office/drawing/2014/main" id="{C648E52F-E6A5-47F3-B743-909A349D021A}"/>
               </a:ext>
             </a:extLst>
           </p:cNvPr>
@@ -18302,10 +18302,10 @@
       </p:sp>
       <p:sp>
         <p:nvSpPr>
-          <p:cNvPr id="2" name="S34">
+          <p:cNvPr id="2" name="S35">
             <a:extLst xmlns:a="http://schemas.openxmlformats.org/drawingml/2006/main">
               <a:ext uri="{FF2B5EF4-FFF2-40B4-BE49-F238E27FC236}">
-                <a16:creationId xmlns:a16="http://schemas.microsoft.com/office/drawing/2014/main" id="{E72380D3-0D1B-44C3-B984-1DAB850C9052}"/>
+                <a16:creationId xmlns:a16="http://schemas.microsoft.com/office/drawing/2014/main" id="{77E3958F-CA10-4920-B835-4D73F3A38CA1}"/>
               </a:ext>
             </a:extLst>
           </p:cNvPr>
@@ -18453,7 +18453,7 @@
                 <a:ea typeface="Malgun Gothic"/>
                 <a:cs typeface="Malgun Gothic"/>
               </a:rPr>
-              <a:t>S34</a:t>
+              <a:t>S35</a:t>
             </a:r>
           </a:p>
         </p:txBody>
@@ -18463,7 +18463,7 @@
           <p:cNvPr id="3" name="Crop Task에서 관찰한 접근">
             <a:extLst xmlns:a="http://schemas.openxmlformats.org/drawingml/2006/main">
               <a:ext uri="{FF2B5EF4-FFF2-40B4-BE49-F238E27FC236}">
-                <a16:creationId xmlns:a16="http://schemas.microsoft.com/office/drawing/2014/main" id="{35013328-7EDE-48D3-9267-414B2053D9B4}"/>
+                <a16:creationId xmlns:a16="http://schemas.microsoft.com/office/drawing/2014/main" id="{01067BC2-8211-4818-8B1D-EBDF1FD69FD6}"/>
               </a:ext>
             </a:extLst>
           </p:cNvPr>
@@ -18621,7 +18621,7 @@
           <p:cNvPr id="4" name="">
             <a:extLst xmlns:a="http://schemas.openxmlformats.org/drawingml/2006/main">
               <a:ext uri="{FF2B5EF4-FFF2-40B4-BE49-F238E27FC236}">
-                <a16:creationId xmlns:a16="http://schemas.microsoft.com/office/drawing/2014/main" id="{2946BA88-908A-4A0E-B776-296B07C72290}"/>
+                <a16:creationId xmlns:a16="http://schemas.microsoft.com/office/drawing/2014/main" id="{A15997AF-3781-413B-9689-25D066FC7A6A}"/>
               </a:ext>
             </a:extLst>
           </p:cNvPr>
@@ -18652,7 +18652,7 @@
           <p:cNvPr id="5" name="TRIAL-005A · 최종 실행의 접근과 답을 기록에서 재구성">
             <a:extLst xmlns:a="http://schemas.openxmlformats.org/drawingml/2006/main">
               <a:ext uri="{FF2B5EF4-FFF2-40B4-BE49-F238E27FC236}">
-                <a16:creationId xmlns:a16="http://schemas.microsoft.com/office/drawing/2014/main" id="{57D86CF2-BDEC-4FA0-8FFA-9EE777C73666}"/>
+                <a16:creationId xmlns:a16="http://schemas.microsoft.com/office/drawing/2014/main" id="{BA0875F0-DEFE-4A5A-8E76-590517674CAA}"/>
               </a:ext>
             </a:extLst>
           </p:cNvPr>
@@ -18810,7 +18810,7 @@
           <p:cNvPr id="6" name="architecture 등 넓은 Context도 접근 · testing.md는 최종 실행에서 관찰, 반복 간">
             <a:extLst xmlns:a="http://schemas.openxmlformats.org/drawingml/2006/main">
               <a:ext uri="{FF2B5EF4-FFF2-40B4-BE49-F238E27FC236}">
-                <a16:creationId xmlns:a16="http://schemas.microsoft.com/office/drawing/2014/main" id="{3F6ABE2E-AEBA-43B3-AA7F-6B11AA8235EA}"/>
+                <a16:creationId xmlns:a16="http://schemas.microsoft.com/office/drawing/2014/main" id="{BEA2E5FD-3A45-43BA-B016-14EF98913396}"/>
               </a:ext>
             </a:extLst>
           </p:cNvPr>
@@ -18968,7 +18968,7 @@
           <p:cNvPr id="7" name="접근한 계약 문서">
             <a:extLst xmlns:a="http://schemas.openxmlformats.org/drawingml/2006/main">
               <a:ext uri="{FF2B5EF4-FFF2-40B4-BE49-F238E27FC236}">
-                <a16:creationId xmlns:a16="http://schemas.microsoft.com/office/drawing/2014/main" id="{11AC6206-61B1-4635-AAC5-FED0064875A6}"/>
+                <a16:creationId xmlns:a16="http://schemas.microsoft.com/office/drawing/2014/main" id="{7FA92589-72F9-4953-8FC4-1D754AB4FB12}"/>
               </a:ext>
             </a:extLst>
           </p:cNvPr>
@@ -19126,7 +19126,7 @@
           <p:cNvPr id="8" name="image-contracts.md">
             <a:extLst xmlns:a="http://schemas.openxmlformats.org/drawingml/2006/main">
               <a:ext uri="{FF2B5EF4-FFF2-40B4-BE49-F238E27FC236}">
-                <a16:creationId xmlns:a16="http://schemas.microsoft.com/office/drawing/2014/main" id="{13939EE6-6747-44B8-AA2D-BF0B3A71511C}"/>
+                <a16:creationId xmlns:a16="http://schemas.microsoft.com/office/drawing/2014/main" id="{647B1B3A-B442-4698-A26E-C34E6AD2352B}"/>
               </a:ext>
             </a:extLst>
           </p:cNvPr>
@@ -19284,7 +19284,7 @@
           <p:cNvPr id="9" name="">
             <a:extLst xmlns:a="http://schemas.openxmlformats.org/drawingml/2006/main">
               <a:ext uri="{FF2B5EF4-FFF2-40B4-BE49-F238E27FC236}">
-                <a16:creationId xmlns:a16="http://schemas.microsoft.com/office/drawing/2014/main" id="{BD344917-98B6-4C3E-92A3-BB33545F7DAB}"/>
+                <a16:creationId xmlns:a16="http://schemas.microsoft.com/office/drawing/2014/main" id="{35A82B36-2BC6-44B4-B65E-3C8384F3A3F5}"/>
               </a:ext>
             </a:extLst>
           </p:cNvPr>
@@ -19315,7 +19315,7 @@
           <p:cNvPr id="10" name="[x_start, x_end)">
             <a:extLst xmlns:a="http://schemas.openxmlformats.org/drawingml/2006/main">
               <a:ext uri="{FF2B5EF4-FFF2-40B4-BE49-F238E27FC236}">
-                <a16:creationId xmlns:a16="http://schemas.microsoft.com/office/drawing/2014/main" id="{EF34891F-0D7F-408C-8AD7-7730C0C94990}"/>
+                <a16:creationId xmlns:a16="http://schemas.microsoft.com/office/drawing/2014/main" id="{A2572DE9-C135-4A58-AD89-80B851CC38FC}"/>
               </a:ext>
             </a:extLst>
           </p:cNvPr>
@@ -19473,7 +19473,7 @@
           <p:cNvPr id="11" name="시작 열 포함 · 끝 좌표 제외">
             <a:extLst xmlns:a="http://schemas.openxmlformats.org/drawingml/2006/main">
               <a:ext uri="{FF2B5EF4-FFF2-40B4-BE49-F238E27FC236}">
-                <a16:creationId xmlns:a16="http://schemas.microsoft.com/office/drawing/2014/main" id="{5CC2DC1F-06DC-4146-B3C4-4313701582A1}"/>
+                <a16:creationId xmlns:a16="http://schemas.microsoft.com/office/drawing/2014/main" id="{6C46F78A-1A2D-4B07-A072-31A96FBB143E}"/>
               </a:ext>
             </a:extLst>
           </p:cNvPr>
@@ -19631,7 +19631,7 @@
           <p:cNvPr id="12" name="기록된 답">
             <a:extLst xmlns:a="http://schemas.openxmlformats.org/drawingml/2006/main">
               <a:ext uri="{FF2B5EF4-FFF2-40B4-BE49-F238E27FC236}">
-                <a16:creationId xmlns:a16="http://schemas.microsoft.com/office/drawing/2014/main" id="{52721800-3817-4B3F-9821-374B4C73A1BA}"/>
+                <a16:creationId xmlns:a16="http://schemas.microsoft.com/office/drawing/2014/main" id="{DDC68B4A-8B34-4481-ABF9-B542B149E353}"/>
               </a:ext>
             </a:extLst>
           </p:cNvPr>
@@ -19789,7 +19789,7 @@
           <p:cNvPr id="13" name="crop 1 3">
             <a:extLst xmlns:a="http://schemas.openxmlformats.org/drawingml/2006/main">
               <a:ext uri="{FF2B5EF4-FFF2-40B4-BE49-F238E27FC236}">
-                <a16:creationId xmlns:a16="http://schemas.microsoft.com/office/drawing/2014/main" id="{4F17F605-6AA3-4961-B652-E9637BD21744}"/>
+                <a16:creationId xmlns:a16="http://schemas.microsoft.com/office/drawing/2014/main" id="{F699A00A-BEF0-4DD9-887E-075845AD1810}"/>
               </a:ext>
             </a:extLst>
           </p:cNvPr>
@@ -19947,7 +19947,7 @@
           <p:cNvPr id="14" name="">
             <a:extLst xmlns:a="http://schemas.openxmlformats.org/drawingml/2006/main">
               <a:ext uri="{FF2B5EF4-FFF2-40B4-BE49-F238E27FC236}">
-                <a16:creationId xmlns:a16="http://schemas.microsoft.com/office/drawing/2014/main" id="{86A4A6E4-CFB0-4009-8AF1-1571441B34C5}"/>
+                <a16:creationId xmlns:a16="http://schemas.microsoft.com/office/drawing/2014/main" id="{3344FFBF-98DE-4F4B-BA41-B9EDAC0449F2}"/>
               </a:ext>
             </a:extLst>
           </p:cNvPr>
@@ -19980,7 +19980,7 @@
           <p:cNvPr id="15" name="0">
             <a:extLst xmlns:a="http://schemas.openxmlformats.org/drawingml/2006/main">
               <a:ext uri="{FF2B5EF4-FFF2-40B4-BE49-F238E27FC236}">
-                <a16:creationId xmlns:a16="http://schemas.microsoft.com/office/drawing/2014/main" id="{C240611C-413D-4038-9664-6F2B961C134F}"/>
+                <a16:creationId xmlns:a16="http://schemas.microsoft.com/office/drawing/2014/main" id="{5D894417-B4EE-40D4-8594-E0D845931E1C}"/>
               </a:ext>
             </a:extLst>
           </p:cNvPr>
@@ -20138,7 +20138,7 @@
           <p:cNvPr id="16" name="">
             <a:extLst xmlns:a="http://schemas.openxmlformats.org/drawingml/2006/main">
               <a:ext uri="{FF2B5EF4-FFF2-40B4-BE49-F238E27FC236}">
-                <a16:creationId xmlns:a16="http://schemas.microsoft.com/office/drawing/2014/main" id="{13DFBF94-207C-4959-85C9-5AE6CF8C92E5}"/>
+                <a16:creationId xmlns:a16="http://schemas.microsoft.com/office/drawing/2014/main" id="{3ADA382F-ED19-4C71-9EEF-F3DB4FC87E43}"/>
               </a:ext>
             </a:extLst>
           </p:cNvPr>
@@ -20171,7 +20171,7 @@
           <p:cNvPr id="17" name="1">
             <a:extLst xmlns:a="http://schemas.openxmlformats.org/drawingml/2006/main">
               <a:ext uri="{FF2B5EF4-FFF2-40B4-BE49-F238E27FC236}">
-                <a16:creationId xmlns:a16="http://schemas.microsoft.com/office/drawing/2014/main" id="{69D34DF1-CF57-4E80-B5E1-109BD748DAC6}"/>
+                <a16:creationId xmlns:a16="http://schemas.microsoft.com/office/drawing/2014/main" id="{1607E52F-C0F0-40EC-8BC6-78F7FD858B55}"/>
               </a:ext>
             </a:extLst>
           </p:cNvPr>
@@ -20329,7 +20329,7 @@
           <p:cNvPr id="18" name="">
             <a:extLst xmlns:a="http://schemas.openxmlformats.org/drawingml/2006/main">
               <a:ext uri="{FF2B5EF4-FFF2-40B4-BE49-F238E27FC236}">
-                <a16:creationId xmlns:a16="http://schemas.microsoft.com/office/drawing/2014/main" id="{F264F501-3DDD-4BD2-BF86-077B433D034B}"/>
+                <a16:creationId xmlns:a16="http://schemas.microsoft.com/office/drawing/2014/main" id="{CAE27427-D26C-400C-A85E-F7046D35DA76}"/>
               </a:ext>
             </a:extLst>
           </p:cNvPr>
@@ -20362,7 +20362,7 @@
           <p:cNvPr id="19" name="2">
             <a:extLst xmlns:a="http://schemas.openxmlformats.org/drawingml/2006/main">
               <a:ext uri="{FF2B5EF4-FFF2-40B4-BE49-F238E27FC236}">
-                <a16:creationId xmlns:a16="http://schemas.microsoft.com/office/drawing/2014/main" id="{C4777029-6C7D-4C6B-8E5A-254CAAC99941}"/>
+                <a16:creationId xmlns:a16="http://schemas.microsoft.com/office/drawing/2014/main" id="{974D2A02-4BE4-4B65-A1BE-6BB8AFBF1E14}"/>
               </a:ext>
             </a:extLst>
           </p:cNvPr>
@@ -20520,7 +20520,7 @@
           <p:cNvPr id="20" name="">
             <a:extLst xmlns:a="http://schemas.openxmlformats.org/drawingml/2006/main">
               <a:ext uri="{FF2B5EF4-FFF2-40B4-BE49-F238E27FC236}">
-                <a16:creationId xmlns:a16="http://schemas.microsoft.com/office/drawing/2014/main" id="{3BE728D2-061D-41A8-97DA-EE5B47DB9A3D}"/>
+                <a16:creationId xmlns:a16="http://schemas.microsoft.com/office/drawing/2014/main" id="{6A61FFFD-D35B-43F2-8E85-0E378582200B}"/>
               </a:ext>
             </a:extLst>
           </p:cNvPr>
@@ -20553,7 +20553,7 @@
           <p:cNvPr id="21" name="3">
             <a:extLst xmlns:a="http://schemas.openxmlformats.org/drawingml/2006/main">
               <a:ext uri="{FF2B5EF4-FFF2-40B4-BE49-F238E27FC236}">
-                <a16:creationId xmlns:a16="http://schemas.microsoft.com/office/drawing/2014/main" id="{BCCDBD00-A28F-4B64-992E-3FEA68C1577A}"/>
+                <a16:creationId xmlns:a16="http://schemas.microsoft.com/office/drawing/2014/main" id="{95231584-AF17-4359-A60B-1E29CA78B8D5}"/>
               </a:ext>
             </a:extLst>
           </p:cNvPr>
@@ -20711,7 +20711,7 @@
           <p:cNvPr id="22" name="포함 열: 1, 2&#10;출력 폭: 2">
             <a:extLst xmlns:a="http://schemas.openxmlformats.org/drawingml/2006/main">
               <a:ext uri="{FF2B5EF4-FFF2-40B4-BE49-F238E27FC236}">
-                <a16:creationId xmlns:a16="http://schemas.microsoft.com/office/drawing/2014/main" id="{F05B8DB3-0E3B-4A1D-A9E9-E010BAA5C926}"/>
+                <a16:creationId xmlns:a16="http://schemas.microsoft.com/office/drawing/2014/main" id="{E2CFF831-8D5E-43AD-8C24-E6310A7F1A1A}"/>
               </a:ext>
             </a:extLst>
           </p:cNvPr>
@@ -20892,7 +20892,7 @@
           <p:cNvPr id="23" name="답을 파일의 계약과 연결해 확인했다">
             <a:extLst xmlns:a="http://schemas.openxmlformats.org/drawingml/2006/main">
               <a:ext uri="{FF2B5EF4-FFF2-40B4-BE49-F238E27FC236}">
-                <a16:creationId xmlns:a16="http://schemas.microsoft.com/office/drawing/2014/main" id="{F1716A33-1913-4251-BDDC-DBD0EE5C9B40}"/>
+                <a16:creationId xmlns:a16="http://schemas.microsoft.com/office/drawing/2014/main" id="{3AB9C2EB-F63A-4A79-95DC-C668973DD1A5}"/>
               </a:ext>
             </a:extLst>
           </p:cNvPr>
@@ -21050,7 +21050,7 @@
           <p:cNvPr id="24" name="Legacy module connection">
             <a:extLst xmlns:a="http://schemas.openxmlformats.org/drawingml/2006/main">
               <a:ext uri="{FF2B5EF4-FFF2-40B4-BE49-F238E27FC236}">
-                <a16:creationId xmlns:a16="http://schemas.microsoft.com/office/drawing/2014/main" id="{F99E7CE1-E91E-4C26-B197-5FC0277B1F54}"/>
+                <a16:creationId xmlns:a16="http://schemas.microsoft.com/office/drawing/2014/main" id="{CE2BA3DA-73D8-4EC5-B688-B357CA07CD6A}"/>
               </a:ext>
             </a:extLst>
           </p:cNvPr>
@@ -21206,7 +21206,7 @@
     </p:spTree>
     <p:extLst>
       <p:ext uri="{BB962C8B-B14F-4D97-AF65-F5344CB8AC3E}">
-        <p14:creationId xmlns:p14="http://schemas.microsoft.com/office/powerpoint/2010/main" val="35518024"/>
+        <p14:creationId xmlns:p14="http://schemas.microsoft.com/office/powerpoint/2010/main" val="1031494023"/>
       </p:ext>
     </p:extLst>
   </p:cSld>
@@ -21237,7 +21237,7 @@
           <p:cNvPr id="25" name="ACT 2 · 두 Task의 문서 접근 비교">
             <a:extLst xmlns:a="http://schemas.openxmlformats.org/drawingml/2006/main">
               <a:ext uri="{FF2B5EF4-FFF2-40B4-BE49-F238E27FC236}">
-                <a16:creationId xmlns:a16="http://schemas.microsoft.com/office/drawing/2014/main" id="{B2B42509-D191-4089-8868-41059B7AB233}"/>
+                <a16:creationId xmlns:a16="http://schemas.microsoft.com/office/drawing/2014/main" id="{D38E99E9-82A0-4C36-A703-742E754AF494}"/>
               </a:ext>
             </a:extLst>
           </p:cNvPr>
@@ -21392,10 +21392,10 @@
       </p:sp>
       <p:sp>
         <p:nvSpPr>
-          <p:cNvPr id="2" name="S35">
+          <p:cNvPr id="2" name="S36">
             <a:extLst xmlns:a="http://schemas.openxmlformats.org/drawingml/2006/main">
               <a:ext uri="{FF2B5EF4-FFF2-40B4-BE49-F238E27FC236}">
-                <a16:creationId xmlns:a16="http://schemas.microsoft.com/office/drawing/2014/main" id="{1B29F362-E559-44B2-A0C2-989A36F280B9}"/>
+                <a16:creationId xmlns:a16="http://schemas.microsoft.com/office/drawing/2014/main" id="{76F0B925-299C-4A02-B1C1-82B81EAEE223}"/>
               </a:ext>
             </a:extLst>
           </p:cNvPr>
@@ -21543,7 +21543,7 @@
                 <a:ea typeface="Malgun Gothic"/>
                 <a:cs typeface="Malgun Gothic"/>
               </a:rPr>
-              <a:t>S35</a:t>
+              <a:t>S36</a:t>
             </a:r>
           </a:p>
         </p:txBody>
@@ -21553,7 +21553,7 @@
           <p:cNvPr id="3" name="Task별 접근은 달랐지만 완벽하지는 않다">
             <a:extLst xmlns:a="http://schemas.openxmlformats.org/drawingml/2006/main">
               <a:ext uri="{FF2B5EF4-FFF2-40B4-BE49-F238E27FC236}">
-                <a16:creationId xmlns:a16="http://schemas.microsoft.com/office/drawing/2014/main" id="{803D70F4-F6A5-42E0-8DC2-DC9C7A049516}"/>
+                <a16:creationId xmlns:a16="http://schemas.microsoft.com/office/drawing/2014/main" id="{8E41C467-500C-414E-A20C-28271B0D3CB5}"/>
               </a:ext>
             </a:extLst>
           </p:cNvPr>
@@ -21711,7 +21711,7 @@
           <p:cNvPr id="4" name="">
             <a:extLst xmlns:a="http://schemas.openxmlformats.org/drawingml/2006/main">
               <a:ext uri="{FF2B5EF4-FFF2-40B4-BE49-F238E27FC236}">
-                <a16:creationId xmlns:a16="http://schemas.microsoft.com/office/drawing/2014/main" id="{EA3E7B59-62AC-46E5-8DFF-FE8A607112B8}"/>
+                <a16:creationId xmlns:a16="http://schemas.microsoft.com/office/drawing/2014/main" id="{6CBDC411-9E1E-46E2-BA27-622295CED1DD}"/>
               </a:ext>
             </a:extLst>
           </p:cNvPr>
@@ -21742,7 +21742,7 @@
           <p:cNvPr id="5" name="TRIAL-005A/B · 실제 접근 기록을 요약한 비교">
             <a:extLst xmlns:a="http://schemas.openxmlformats.org/drawingml/2006/main">
               <a:ext uri="{FF2B5EF4-FFF2-40B4-BE49-F238E27FC236}">
-                <a16:creationId xmlns:a16="http://schemas.microsoft.com/office/drawing/2014/main" id="{677053A5-07BB-4680-AD68-968FD9CADCB9}"/>
+                <a16:creationId xmlns:a16="http://schemas.microsoft.com/office/drawing/2014/main" id="{E2A5E9D5-4B6A-425D-A40E-152CBFE1A555}"/>
               </a:ext>
             </a:extLst>
           </p:cNvPr>
@@ -21900,7 +21900,7 @@
           <p:cNvPr id="6" name="완벽한 Routing 미입증 · 토큰 절약·성능 개선 미측정 · 실행 간 변동 존재">
             <a:extLst xmlns:a="http://schemas.openxmlformats.org/drawingml/2006/main">
               <a:ext uri="{FF2B5EF4-FFF2-40B4-BE49-F238E27FC236}">
-                <a16:creationId xmlns:a16="http://schemas.microsoft.com/office/drawing/2014/main" id="{9180A9DD-BB73-4C48-83CC-2B3BED93B45A}"/>
+                <a16:creationId xmlns:a16="http://schemas.microsoft.com/office/drawing/2014/main" id="{DBDA86E8-2817-4ECB-8745-FCE4400B4634}"/>
               </a:ext>
             </a:extLst>
           </p:cNvPr>
@@ -22058,7 +22058,7 @@
           <p:cNvPr id="7" name="같은 Repository에서 질문이 달랐다">
             <a:extLst xmlns:a="http://schemas.openxmlformats.org/drawingml/2006/main">
               <a:ext uri="{FF2B5EF4-FFF2-40B4-BE49-F238E27FC236}">
-                <a16:creationId xmlns:a16="http://schemas.microsoft.com/office/drawing/2014/main" id="{C71105A4-2FD0-41C6-ADE4-83CEEC3A2FBD}"/>
+                <a16:creationId xmlns:a16="http://schemas.microsoft.com/office/drawing/2014/main" id="{DCEC31D9-1199-4AD0-9357-E5E488AB4346}"/>
               </a:ext>
             </a:extLst>
           </p:cNvPr>
@@ -22216,7 +22216,7 @@
           <p:cNvPr id="8" name="문서">
             <a:extLst xmlns:a="http://schemas.openxmlformats.org/drawingml/2006/main">
               <a:ext uri="{FF2B5EF4-FFF2-40B4-BE49-F238E27FC236}">
-                <a16:creationId xmlns:a16="http://schemas.microsoft.com/office/drawing/2014/main" id="{7C74DA7F-C9DC-4733-AF32-8EBB5BCACD4F}"/>
+                <a16:creationId xmlns:a16="http://schemas.microsoft.com/office/drawing/2014/main" id="{ADBD5AA6-366B-431F-9634-40C6F42746F3}"/>
               </a:ext>
             </a:extLst>
           </p:cNvPr>
@@ -22374,7 +22374,7 @@
           <p:cNvPr id="9" name="A · crop 계약">
             <a:extLst xmlns:a="http://schemas.openxmlformats.org/drawingml/2006/main">
               <a:ext uri="{FF2B5EF4-FFF2-40B4-BE49-F238E27FC236}">
-                <a16:creationId xmlns:a16="http://schemas.microsoft.com/office/drawing/2014/main" id="{B2F4472B-EB4D-4BDB-96C3-11482D98EE1E}"/>
+                <a16:creationId xmlns:a16="http://schemas.microsoft.com/office/drawing/2014/main" id="{9037E315-710C-4696-94A7-508E56DD4711}"/>
               </a:ext>
             </a:extLst>
           </p:cNvPr>
@@ -22532,7 +22532,7 @@
           <p:cNvPr id="10" name="B · 실행 의존성">
             <a:extLst xmlns:a="http://schemas.openxmlformats.org/drawingml/2006/main">
               <a:ext uri="{FF2B5EF4-FFF2-40B4-BE49-F238E27FC236}">
-                <a16:creationId xmlns:a16="http://schemas.microsoft.com/office/drawing/2014/main" id="{6070F0E9-05BE-4BBF-9DBD-D6EA22C6FEBE}"/>
+                <a16:creationId xmlns:a16="http://schemas.microsoft.com/office/drawing/2014/main" id="{E32E098A-9E0F-44CE-817C-C4DD207C5312}"/>
               </a:ext>
             </a:extLst>
           </p:cNvPr>
@@ -22690,7 +22690,7 @@
           <p:cNvPr id="11" name="">
             <a:extLst xmlns:a="http://schemas.openxmlformats.org/drawingml/2006/main">
               <a:ext uri="{FF2B5EF4-FFF2-40B4-BE49-F238E27FC236}">
-                <a16:creationId xmlns:a16="http://schemas.microsoft.com/office/drawing/2014/main" id="{851ACC36-669E-4597-87DA-FFC62266C1F7}"/>
+                <a16:creationId xmlns:a16="http://schemas.microsoft.com/office/drawing/2014/main" id="{941ACC31-C374-408D-8D44-2403835563ED}"/>
               </a:ext>
             </a:extLst>
           </p:cNvPr>
@@ -22721,7 +22721,7 @@
           <p:cNvPr id="12" name="image-contracts.md">
             <a:extLst xmlns:a="http://schemas.openxmlformats.org/drawingml/2006/main">
               <a:ext uri="{FF2B5EF4-FFF2-40B4-BE49-F238E27FC236}">
-                <a16:creationId xmlns:a16="http://schemas.microsoft.com/office/drawing/2014/main" id="{8DCDB674-77CD-4420-BF48-5D81EBACAA59}"/>
+                <a16:creationId xmlns:a16="http://schemas.microsoft.com/office/drawing/2014/main" id="{88C28E18-93A8-4993-83F6-F383C361C4C5}"/>
               </a:ext>
             </a:extLst>
           </p:cNvPr>
@@ -22879,7 +22879,7 @@
           <p:cNvPr id="13" name="읽음">
             <a:extLst xmlns:a="http://schemas.openxmlformats.org/drawingml/2006/main">
               <a:ext uri="{FF2B5EF4-FFF2-40B4-BE49-F238E27FC236}">
-                <a16:creationId xmlns:a16="http://schemas.microsoft.com/office/drawing/2014/main" id="{745E904A-8715-4AAB-B771-EB369AB7EF17}"/>
+                <a16:creationId xmlns:a16="http://schemas.microsoft.com/office/drawing/2014/main" id="{FC6292E1-88A5-447C-A6AB-FB06C1C97BD5}"/>
               </a:ext>
             </a:extLst>
           </p:cNvPr>
@@ -23037,7 +23037,7 @@
           <p:cNvPr id="14" name="읽지 않음">
             <a:extLst xmlns:a="http://schemas.openxmlformats.org/drawingml/2006/main">
               <a:ext uri="{FF2B5EF4-FFF2-40B4-BE49-F238E27FC236}">
-                <a16:creationId xmlns:a16="http://schemas.microsoft.com/office/drawing/2014/main" id="{4D6899A2-3CE7-4D65-9534-A788AA050320}"/>
+                <a16:creationId xmlns:a16="http://schemas.microsoft.com/office/drawing/2014/main" id="{DD6E6329-4116-4C92-AF65-62F09F15859E}"/>
               </a:ext>
             </a:extLst>
           </p:cNvPr>
@@ -23195,7 +23195,7 @@
           <p:cNvPr id="15" name="">
             <a:extLst xmlns:a="http://schemas.openxmlformats.org/drawingml/2006/main">
               <a:ext uri="{FF2B5EF4-FFF2-40B4-BE49-F238E27FC236}">
-                <a16:creationId xmlns:a16="http://schemas.microsoft.com/office/drawing/2014/main" id="{9D0F3327-245F-4FA6-B185-DCB3584AD2CE}"/>
+                <a16:creationId xmlns:a16="http://schemas.microsoft.com/office/drawing/2014/main" id="{E3E8B9B9-232F-4A92-8EF4-AA446B6B2898}"/>
               </a:ext>
             </a:extLst>
           </p:cNvPr>
@@ -23226,7 +23226,7 @@
           <p:cNvPr id="16" name="architecture.md">
             <a:extLst xmlns:a="http://schemas.openxmlformats.org/drawingml/2006/main">
               <a:ext uri="{FF2B5EF4-FFF2-40B4-BE49-F238E27FC236}">
-                <a16:creationId xmlns:a16="http://schemas.microsoft.com/office/drawing/2014/main" id="{69C416F5-3F20-4717-A708-B4CD688DE240}"/>
+                <a16:creationId xmlns:a16="http://schemas.microsoft.com/office/drawing/2014/main" id="{30E7C1E3-2009-4D04-8765-736BB4DF75CD}"/>
               </a:ext>
             </a:extLst>
           </p:cNvPr>
@@ -23384,7 +23384,7 @@
           <p:cNvPr id="17" name="읽음">
             <a:extLst xmlns:a="http://schemas.openxmlformats.org/drawingml/2006/main">
               <a:ext uri="{FF2B5EF4-FFF2-40B4-BE49-F238E27FC236}">
-                <a16:creationId xmlns:a16="http://schemas.microsoft.com/office/drawing/2014/main" id="{C91A8F05-29BE-4513-9055-B49A26CB6A71}"/>
+                <a16:creationId xmlns:a16="http://schemas.microsoft.com/office/drawing/2014/main" id="{C896CB88-894A-420B-86AA-EF1CD087FE40}"/>
               </a:ext>
             </a:extLst>
           </p:cNvPr>
@@ -23542,7 +23542,7 @@
           <p:cNvPr id="18" name="읽음">
             <a:extLst xmlns:a="http://schemas.openxmlformats.org/drawingml/2006/main">
               <a:ext uri="{FF2B5EF4-FFF2-40B4-BE49-F238E27FC236}">
-                <a16:creationId xmlns:a16="http://schemas.microsoft.com/office/drawing/2014/main" id="{5682F7A6-615C-4808-9E2A-660759DC4AF6}"/>
+                <a16:creationId xmlns:a16="http://schemas.microsoft.com/office/drawing/2014/main" id="{70B0859E-9AE9-469C-BC09-00402003AA92}"/>
               </a:ext>
             </a:extLst>
           </p:cNvPr>
@@ -23700,7 +23700,7 @@
           <p:cNvPr id="19" name="">
             <a:extLst xmlns:a="http://schemas.openxmlformats.org/drawingml/2006/main">
               <a:ext uri="{FF2B5EF4-FFF2-40B4-BE49-F238E27FC236}">
-                <a16:creationId xmlns:a16="http://schemas.microsoft.com/office/drawing/2014/main" id="{3590DF77-55E2-4E5B-85D8-C07F3E9E9022}"/>
+                <a16:creationId xmlns:a16="http://schemas.microsoft.com/office/drawing/2014/main" id="{2F7B3E1D-7EB5-43D6-BC79-D0DD6809C338}"/>
               </a:ext>
             </a:extLst>
           </p:cNvPr>
@@ -23731,7 +23731,7 @@
           <p:cNvPr id="20" name="testing.md">
             <a:extLst xmlns:a="http://schemas.openxmlformats.org/drawingml/2006/main">
               <a:ext uri="{FF2B5EF4-FFF2-40B4-BE49-F238E27FC236}">
-                <a16:creationId xmlns:a16="http://schemas.microsoft.com/office/drawing/2014/main" id="{CBF868B8-836C-4172-A0B3-981F8D0195B7}"/>
+                <a16:creationId xmlns:a16="http://schemas.microsoft.com/office/drawing/2014/main" id="{F478CB2F-4AD5-4E46-B304-E0CE8DFA28AB}"/>
               </a:ext>
             </a:extLst>
           </p:cNvPr>
@@ -23889,7 +23889,7 @@
           <p:cNvPr id="21" name="최종 실행에서 읽음">
             <a:extLst xmlns:a="http://schemas.openxmlformats.org/drawingml/2006/main">
               <a:ext uri="{FF2B5EF4-FFF2-40B4-BE49-F238E27FC236}">
-                <a16:creationId xmlns:a16="http://schemas.microsoft.com/office/drawing/2014/main" id="{090379EA-E431-4759-8559-09CDB7241FFB}"/>
+                <a16:creationId xmlns:a16="http://schemas.microsoft.com/office/drawing/2014/main" id="{250CCEB0-53A8-4279-9124-362782D7788E}"/>
               </a:ext>
             </a:extLst>
           </p:cNvPr>
@@ -24047,7 +24047,7 @@
           <p:cNvPr id="22" name="읽지 않음">
             <a:extLst xmlns:a="http://schemas.openxmlformats.org/drawingml/2006/main">
               <a:ext uri="{FF2B5EF4-FFF2-40B4-BE49-F238E27FC236}">
-                <a16:creationId xmlns:a16="http://schemas.microsoft.com/office/drawing/2014/main" id="{77F95BAB-E9E2-470B-950E-7CBAF06B2B25}"/>
+                <a16:creationId xmlns:a16="http://schemas.microsoft.com/office/drawing/2014/main" id="{8609880C-B356-486C-AE6A-C9A1A415B1C6}"/>
               </a:ext>
             </a:extLst>
           </p:cNvPr>
@@ -24205,7 +24205,7 @@
           <p:cNvPr id="23" name="A에는 더 넓은 읽기도 존재 · B는 설정·README·source도 확인">
             <a:extLst xmlns:a="http://schemas.openxmlformats.org/drawingml/2006/main">
               <a:ext uri="{FF2B5EF4-FFF2-40B4-BE49-F238E27FC236}">
-                <a16:creationId xmlns:a16="http://schemas.microsoft.com/office/drawing/2014/main" id="{A36BCA7A-2AC9-47D0-AE3C-A1D747AC628F}"/>
+                <a16:creationId xmlns:a16="http://schemas.microsoft.com/office/drawing/2014/main" id="{BA4D77AA-5960-43C9-A4D7-A72963F93D78}"/>
               </a:ext>
             </a:extLst>
           </p:cNvPr>
@@ -24363,7 +24363,7 @@
           <p:cNvPr id="24" name="Legacy module connection">
             <a:extLst xmlns:a="http://schemas.openxmlformats.org/drawingml/2006/main">
               <a:ext uri="{FF2B5EF4-FFF2-40B4-BE49-F238E27FC236}">
-                <a16:creationId xmlns:a16="http://schemas.microsoft.com/office/drawing/2014/main" id="{BFB7E6CE-6529-400B-AC8F-6455959122A2}"/>
+                <a16:creationId xmlns:a16="http://schemas.microsoft.com/office/drawing/2014/main" id="{AD9CC529-F0A2-49F0-A52F-18A038776A08}"/>
               </a:ext>
             </a:extLst>
           </p:cNvPr>
@@ -24519,7 +24519,7 @@
     </p:spTree>
     <p:extLst>
       <p:ext uri="{BB962C8B-B14F-4D97-AF65-F5344CB8AC3E}">
-        <p14:creationId xmlns:p14="http://schemas.microsoft.com/office/powerpoint/2010/main" val="343095936"/>
+        <p14:creationId xmlns:p14="http://schemas.microsoft.com/office/powerpoint/2010/main" val="693085023"/>
       </p:ext>
     </p:extLst>
   </p:cSld>
@@ -24550,7 +24550,7 @@
           <p:cNvPr id="15" name="ACT 2 · 다음 문제로 넘어가기">
             <a:extLst xmlns:a="http://schemas.openxmlformats.org/drawingml/2006/main">
               <a:ext uri="{FF2B5EF4-FFF2-40B4-BE49-F238E27FC236}">
-                <a16:creationId xmlns:a16="http://schemas.microsoft.com/office/drawing/2014/main" id="{23F2E0D0-A0E5-46F2-8E6B-887943BDCABF}"/>
+                <a16:creationId xmlns:a16="http://schemas.microsoft.com/office/drawing/2014/main" id="{9877698C-F714-4FFA-9E6B-D97B07EF6878}"/>
               </a:ext>
             </a:extLst>
           </p:cNvPr>
@@ -24705,10 +24705,10 @@
       </p:sp>
       <p:sp>
         <p:nvSpPr>
-          <p:cNvPr id="2" name="S36">
+          <p:cNvPr id="2" name="S37">
             <a:extLst xmlns:a="http://schemas.openxmlformats.org/drawingml/2006/main">
               <a:ext uri="{FF2B5EF4-FFF2-40B4-BE49-F238E27FC236}">
-                <a16:creationId xmlns:a16="http://schemas.microsoft.com/office/drawing/2014/main" id="{77BFD1D5-32CB-48FF-B3C1-CD059CB16F6B}"/>
+                <a16:creationId xmlns:a16="http://schemas.microsoft.com/office/drawing/2014/main" id="{05D89F62-F547-4A11-93BC-62C9D4DC86B5}"/>
               </a:ext>
             </a:extLst>
           </p:cNvPr>
@@ -24856,7 +24856,7 @@
                 <a:ea typeface="Malgun Gothic"/>
                 <a:cs typeface="Malgun Gothic"/>
               </a:rPr>
-              <a:t>S36</a:t>
+              <a:t>S37</a:t>
             </a:r>
           </a:p>
         </p:txBody>
@@ -24866,7 +24866,7 @@
           <p:cNvPr id="3" name="지식은 정리됐지만 절차는 반복된다">
             <a:extLst xmlns:a="http://schemas.openxmlformats.org/drawingml/2006/main">
               <a:ext uri="{FF2B5EF4-FFF2-40B4-BE49-F238E27FC236}">
-                <a16:creationId xmlns:a16="http://schemas.microsoft.com/office/drawing/2014/main" id="{3D4CF1AF-FE02-47C6-965F-3850767E7230}"/>
+                <a16:creationId xmlns:a16="http://schemas.microsoft.com/office/drawing/2014/main" id="{661742C3-307C-4AF6-BD22-B648383F6D46}"/>
               </a:ext>
             </a:extLst>
           </p:cNvPr>
@@ -25024,7 +25024,7 @@
           <p:cNvPr id="4" name="">
             <a:extLst xmlns:a="http://schemas.openxmlformats.org/drawingml/2006/main">
               <a:ext uri="{FF2B5EF4-FFF2-40B4-BE49-F238E27FC236}">
-                <a16:creationId xmlns:a16="http://schemas.microsoft.com/office/drawing/2014/main" id="{022AA1A0-F277-448B-A152-01BDD0743D30}"/>
+                <a16:creationId xmlns:a16="http://schemas.microsoft.com/office/drawing/2014/main" id="{49A1A8D2-229B-4658-A643-865DA840997E}"/>
               </a:ext>
             </a:extLst>
           </p:cNvPr>
@@ -25055,7 +25055,7 @@
           <p:cNvPr id="5" name="Project Context 정리 + TRIAL-006/007의 반복 절차 · 기록 요약과 교육용 해석">
             <a:extLst xmlns:a="http://schemas.openxmlformats.org/drawingml/2006/main">
               <a:ext uri="{FF2B5EF4-FFF2-40B4-BE49-F238E27FC236}">
-                <a16:creationId xmlns:a16="http://schemas.microsoft.com/office/drawing/2014/main" id="{C08ECE7D-ACCD-4F9C-977E-B27968CDACC3}"/>
+                <a16:creationId xmlns:a16="http://schemas.microsoft.com/office/drawing/2014/main" id="{BE39118B-F16F-4442-9893-B6A3405A2015}"/>
               </a:ext>
             </a:extLst>
           </p:cNvPr>
@@ -25213,7 +25213,7 @@
           <p:cNvPr id="6" name="절차가 반복된 원인을 Prompt만으로 분리하지 않음">
             <a:extLst xmlns:a="http://schemas.openxmlformats.org/drawingml/2006/main">
               <a:ext uri="{FF2B5EF4-FFF2-40B4-BE49-F238E27FC236}">
-                <a16:creationId xmlns:a16="http://schemas.microsoft.com/office/drawing/2014/main" id="{7B02F2AD-6E2B-460E-9169-F7D70153BA6F}"/>
+                <a16:creationId xmlns:a16="http://schemas.microsoft.com/office/drawing/2014/main" id="{5CDE4EF2-4EDF-45ED-A988-7443EC4DCEB0}"/>
               </a:ext>
             </a:extLst>
           </p:cNvPr>
@@ -25371,7 +25371,7 @@
           <p:cNvPr id="7" name="정리한 것">
             <a:extLst xmlns:a="http://schemas.openxmlformats.org/drawingml/2006/main">
               <a:ext uri="{FF2B5EF4-FFF2-40B4-BE49-F238E27FC236}">
-                <a16:creationId xmlns:a16="http://schemas.microsoft.com/office/drawing/2014/main" id="{696ECE32-5700-4423-8B08-2AE44CBB077D}"/>
+                <a16:creationId xmlns:a16="http://schemas.microsoft.com/office/drawing/2014/main" id="{6059CEBD-5957-4AF4-9266-D7CEEC22BDCC}"/>
               </a:ext>
             </a:extLst>
           </p:cNvPr>
@@ -25529,7 +25529,7 @@
           <p:cNvPr id="8" name="아직 반복되는 것">
             <a:extLst xmlns:a="http://schemas.openxmlformats.org/drawingml/2006/main">
               <a:ext uri="{FF2B5EF4-FFF2-40B4-BE49-F238E27FC236}">
-                <a16:creationId xmlns:a16="http://schemas.microsoft.com/office/drawing/2014/main" id="{8244243C-A851-4960-93F9-68D7F8055B65}"/>
+                <a16:creationId xmlns:a16="http://schemas.microsoft.com/office/drawing/2014/main" id="{5489A7F0-F9A3-4153-8763-03DFE9B00733}"/>
               </a:ext>
             </a:extLst>
           </p:cNvPr>
@@ -25687,7 +25687,7 @@
           <p:cNvPr id="9" name="">
             <a:extLst xmlns:a="http://schemas.openxmlformats.org/drawingml/2006/main">
               <a:ext uri="{FF2B5EF4-FFF2-40B4-BE49-F238E27FC236}">
-                <a16:creationId xmlns:a16="http://schemas.microsoft.com/office/drawing/2014/main" id="{A0C11EA7-FFF6-457C-A1F9-9FFB8EE09FBE}"/>
+                <a16:creationId xmlns:a16="http://schemas.microsoft.com/office/drawing/2014/main" id="{C8F3C442-E901-44A9-B728-75DC20A0B197}"/>
               </a:ext>
             </a:extLst>
           </p:cNvPr>
@@ -25718,7 +25718,7 @@
           <p:cNvPr id="10" name="">
             <a:extLst xmlns:a="http://schemas.openxmlformats.org/drawingml/2006/main">
               <a:ext uri="{FF2B5EF4-FFF2-40B4-BE49-F238E27FC236}">
-                <a16:creationId xmlns:a16="http://schemas.microsoft.com/office/drawing/2014/main" id="{E60AA313-0F0D-446D-A4A0-38F5A312A891}"/>
+                <a16:creationId xmlns:a16="http://schemas.microsoft.com/office/drawing/2014/main" id="{618670E1-6958-4E43-BB4D-16A237175D70}"/>
               </a:ext>
             </a:extLst>
           </p:cNvPr>
@@ -25749,7 +25749,7 @@
           <p:cNvPr id="11" name="현재 목표는 Prompt에&#10;공통 사실은 Project Context에&#10;상세 정보는 Routing으로">
             <a:extLst xmlns:a="http://schemas.openxmlformats.org/drawingml/2006/main">
               <a:ext uri="{FF2B5EF4-FFF2-40B4-BE49-F238E27FC236}">
-                <a16:creationId xmlns:a16="http://schemas.microsoft.com/office/drawing/2014/main" id="{137AA26C-AA07-4728-BA6D-12A7F18E288C}"/>
+                <a16:creationId xmlns:a16="http://schemas.microsoft.com/office/drawing/2014/main" id="{CB988634-4056-4AD6-9BDB-0E8CDE26C0FF}"/>
               </a:ext>
             </a:extLst>
           </p:cNvPr>
@@ -25953,7 +25953,7 @@
           <p:cNvPr id="12" name="먼저 측정하고&#10;조사한 뒤 변경하고&#10;같은 조건으로 확인해줘">
             <a:extLst xmlns:a="http://schemas.openxmlformats.org/drawingml/2006/main">
               <a:ext uri="{FF2B5EF4-FFF2-40B4-BE49-F238E27FC236}">
-                <a16:creationId xmlns:a16="http://schemas.microsoft.com/office/drawing/2014/main" id="{7ABAB425-7223-49DB-ABB7-8156BBC0E01E}"/>
+                <a16:creationId xmlns:a16="http://schemas.microsoft.com/office/drawing/2014/main" id="{4B703351-0DC5-4C6C-A544-9D62282D3B8C}"/>
               </a:ext>
             </a:extLst>
           </p:cNvPr>
@@ -26157,7 +26157,7 @@
           <p:cNvPr id="13" name="같은 작업 절차도 다시 써야 할까?">
             <a:extLst xmlns:a="http://schemas.openxmlformats.org/drawingml/2006/main">
               <a:ext uri="{FF2B5EF4-FFF2-40B4-BE49-F238E27FC236}">
-                <a16:creationId xmlns:a16="http://schemas.microsoft.com/office/drawing/2014/main" id="{5EE16F4E-1183-444C-9B8E-6B2F0C4A7120}"/>
+                <a16:creationId xmlns:a16="http://schemas.microsoft.com/office/drawing/2014/main" id="{F4F7AD2B-E4F7-49B5-9EA9-838EBA56B209}"/>
               </a:ext>
             </a:extLst>
           </p:cNvPr>
@@ -26315,7 +26315,7 @@
           <p:cNvPr id="14" name="Legacy module connection">
             <a:extLst xmlns:a="http://schemas.openxmlformats.org/drawingml/2006/main">
               <a:ext uri="{FF2B5EF4-FFF2-40B4-BE49-F238E27FC236}">
-                <a16:creationId xmlns:a16="http://schemas.microsoft.com/office/drawing/2014/main" id="{6AA808C3-4846-4994-9FFC-A6AE5B0B9D71}"/>
+                <a16:creationId xmlns:a16="http://schemas.microsoft.com/office/drawing/2014/main" id="{35F2E078-EE81-407C-9051-3D0AB02FA6FB}"/>
               </a:ext>
             </a:extLst>
           </p:cNvPr>
@@ -26471,7 +26471,7 @@
     </p:spTree>
     <p:extLst>
       <p:ext uri="{BB962C8B-B14F-4D97-AF65-F5344CB8AC3E}">
-        <p14:creationId xmlns:p14="http://schemas.microsoft.com/office/powerpoint/2010/main" val="916994113"/>
+        <p14:creationId xmlns:p14="http://schemas.microsoft.com/office/powerpoint/2010/main" val="390318342"/>
       </p:ext>
     </p:extLst>
   </p:cSld>
@@ -26502,7 +26502,7 @@
           <p:cNvPr id="27" name="ACT 2  ·  Project Context">
             <a:extLst xmlns:a="http://schemas.openxmlformats.org/drawingml/2006/main">
               <a:ext uri="{FF2B5EF4-FFF2-40B4-BE49-F238E27FC236}">
-                <a16:creationId xmlns:a16="http://schemas.microsoft.com/office/drawing/2014/main" id="{F4EF799C-B8A9-4DFD-910C-B64C75AE0B9A}"/>
+                <a16:creationId xmlns:a16="http://schemas.microsoft.com/office/drawing/2014/main" id="{A6E814FF-8AE4-4A18-AB10-884339F64CBB}"/>
               </a:ext>
             </a:extLst>
           </p:cNvPr>
@@ -26657,10 +26657,10 @@
       </p:sp>
       <p:sp>
         <p:nvSpPr>
-          <p:cNvPr id="2" name="S23">
+          <p:cNvPr id="2" name="S24">
             <a:extLst xmlns:a="http://schemas.openxmlformats.org/drawingml/2006/main">
               <a:ext uri="{FF2B5EF4-FFF2-40B4-BE49-F238E27FC236}">
-                <a16:creationId xmlns:a16="http://schemas.microsoft.com/office/drawing/2014/main" id="{A0E9A247-1D86-434C-9807-BA8580C44A35}"/>
+                <a16:creationId xmlns:a16="http://schemas.microsoft.com/office/drawing/2014/main" id="{3F3986D5-B558-4221-A46B-1CE47D0E91ED}"/>
               </a:ext>
             </a:extLst>
           </p:cNvPr>
@@ -26808,7 +26808,7 @@
                 <a:ea typeface="Malgun Gothic"/>
                 <a:cs typeface="Malgun Gothic"/>
               </a:rPr>
-              <a:t>S23</a:t>
+              <a:t>S24</a:t>
             </a:r>
           </a:p>
         </p:txBody>
@@ -26818,7 +26818,7 @@
           <p:cNvPr id="3" name="작은 Project Context의 첫 기록">
             <a:extLst xmlns:a="http://schemas.openxmlformats.org/drawingml/2006/main">
               <a:ext uri="{FF2B5EF4-FFF2-40B4-BE49-F238E27FC236}">
-                <a16:creationId xmlns:a16="http://schemas.microsoft.com/office/drawing/2014/main" id="{8B53D983-777C-4C62-9E2C-81A797C28013}"/>
+                <a16:creationId xmlns:a16="http://schemas.microsoft.com/office/drawing/2014/main" id="{32A536E4-7A06-4B06-98CC-6ED2421EF73A}"/>
               </a:ext>
             </a:extLst>
           </p:cNvPr>
@@ -26976,7 +26976,7 @@
           <p:cNvPr id="4" name="">
             <a:extLst xmlns:a="http://schemas.openxmlformats.org/drawingml/2006/main">
               <a:ext uri="{FF2B5EF4-FFF2-40B4-BE49-F238E27FC236}">
-                <a16:creationId xmlns:a16="http://schemas.microsoft.com/office/drawing/2014/main" id="{7F7976E0-E5C0-447C-B6C3-C142DB696729}"/>
+                <a16:creationId xmlns:a16="http://schemas.microsoft.com/office/drawing/2014/main" id="{93E7E7C3-3257-4824-B2DC-03A6C4CFE2DD}"/>
               </a:ext>
             </a:extLst>
           </p:cNvPr>
@@ -27007,7 +27007,7 @@
           <p:cNvPr id="5" name="OBSERVED PRODUCT  |  STATE-01 · AGENTS.md 실제 원문 발췌">
             <a:extLst xmlns:a="http://schemas.openxmlformats.org/drawingml/2006/main">
               <a:ext uri="{FF2B5EF4-FFF2-40B4-BE49-F238E27FC236}">
-                <a16:creationId xmlns:a16="http://schemas.microsoft.com/office/drawing/2014/main" id="{EB6BF10D-FBC8-455D-B21E-57D6D6D767D4}"/>
+                <a16:creationId xmlns:a16="http://schemas.microsoft.com/office/drawing/2014/main" id="{468802D9-9EF2-432A-B00E-DB739995C675}"/>
               </a:ext>
             </a:extLst>
           </p:cNvPr>
@@ -27165,7 +27165,7 @@
           <p:cNvPr id="6" name="파일의 내용과 기록 위치를 보여주는 장 · Agent의 활용 관찰은 다음 장에서 확인">
             <a:extLst xmlns:a="http://schemas.openxmlformats.org/drawingml/2006/main">
               <a:ext uri="{FF2B5EF4-FFF2-40B4-BE49-F238E27FC236}">
-                <a16:creationId xmlns:a16="http://schemas.microsoft.com/office/drawing/2014/main" id="{DB24C6C8-C01C-4FFB-9C83-914FFA22E83F}"/>
+                <a16:creationId xmlns:a16="http://schemas.microsoft.com/office/drawing/2014/main" id="{A6E975BF-D389-495B-B721-7C871FD399DC}"/>
               </a:ext>
             </a:extLst>
           </p:cNvPr>
@@ -27323,7 +27323,7 @@
           <p:cNvPr id="7" name="반복해서 설명하던 내용을 저장소에 남겼다">
             <a:extLst xmlns:a="http://schemas.openxmlformats.org/drawingml/2006/main">
               <a:ext uri="{FF2B5EF4-FFF2-40B4-BE49-F238E27FC236}">
-                <a16:creationId xmlns:a16="http://schemas.microsoft.com/office/drawing/2014/main" id="{CF72B2E8-6E63-4BA3-9A1F-938192CB57E5}"/>
+                <a16:creationId xmlns:a16="http://schemas.microsoft.com/office/drawing/2014/main" id="{35D7E0E2-11E9-41E4-84AE-7032C05DDF4E}"/>
               </a:ext>
             </a:extLst>
           </p:cNvPr>
@@ -27481,7 +27481,7 @@
           <p:cNvPr id="8" name="AGENTS.md">
             <a:extLst xmlns:a="http://schemas.openxmlformats.org/drawingml/2006/main">
               <a:ext uri="{FF2B5EF4-FFF2-40B4-BE49-F238E27FC236}">
-                <a16:creationId xmlns:a16="http://schemas.microsoft.com/office/drawing/2014/main" id="{F79922D3-2C3C-495D-9E9F-F812A1AAED4C}"/>
+                <a16:creationId xmlns:a16="http://schemas.microsoft.com/office/drawing/2014/main" id="{0170F4A9-1A09-4C6E-A938-32126712C2D4}"/>
               </a:ext>
             </a:extLst>
           </p:cNvPr>
@@ -27639,7 +27639,7 @@
           <p:cNvPr id="9" name="STATE-00-FIXED → STATE-01">
             <a:extLst xmlns:a="http://schemas.openxmlformats.org/drawingml/2006/main">
               <a:ext uri="{FF2B5EF4-FFF2-40B4-BE49-F238E27FC236}">
-                <a16:creationId xmlns:a16="http://schemas.microsoft.com/office/drawing/2014/main" id="{ED763512-782E-4B90-B625-9F7795FBEB0C}"/>
+                <a16:creationId xmlns:a16="http://schemas.microsoft.com/office/drawing/2014/main" id="{896ABFF8-0B63-4CE5-9B6F-A4A9BB0428AF}"/>
               </a:ext>
             </a:extLst>
           </p:cNvPr>
@@ -27797,7 +27797,7 @@
           <p:cNvPr id="10" name="">
             <a:extLst xmlns:a="http://schemas.openxmlformats.org/drawingml/2006/main">
               <a:ext uri="{FF2B5EF4-FFF2-40B4-BE49-F238E27FC236}">
-                <a16:creationId xmlns:a16="http://schemas.microsoft.com/office/drawing/2014/main" id="{F88532C4-9F78-493A-A7F9-B7B730C59762}"/>
+                <a16:creationId xmlns:a16="http://schemas.microsoft.com/office/drawing/2014/main" id="{B16F2892-65BF-4997-8D09-507B4B8C5C9C}"/>
               </a:ext>
             </a:extLst>
           </p:cNvPr>
@@ -27828,7 +27828,7 @@
           <p:cNvPr id="11" name="프로젝트 목적">
             <a:extLst xmlns:a="http://schemas.openxmlformats.org/drawingml/2006/main">
               <a:ext uri="{FF2B5EF4-FFF2-40B4-BE49-F238E27FC236}">
-                <a16:creationId xmlns:a16="http://schemas.microsoft.com/office/drawing/2014/main" id="{0772BD83-2104-40C8-A7D8-59ACF2D26BF9}"/>
+                <a16:creationId xmlns:a16="http://schemas.microsoft.com/office/drawing/2014/main" id="{C39975C2-2CDB-4090-BACA-485D4F65F04D}"/>
               </a:ext>
             </a:extLst>
           </p:cNvPr>
@@ -27986,7 +27986,7 @@
           <p:cNvPr id="12" name="Local grayscale image-processing CLI using synthetic ASCII P">
             <a:extLst xmlns:a="http://schemas.openxmlformats.org/drawingml/2006/main">
               <a:ext uri="{FF2B5EF4-FFF2-40B4-BE49-F238E27FC236}">
-                <a16:creationId xmlns:a16="http://schemas.microsoft.com/office/drawing/2014/main" id="{B1709D4C-C7DE-4EC2-907B-41BF428FF814}"/>
+                <a16:creationId xmlns:a16="http://schemas.microsoft.com/office/drawing/2014/main" id="{FF4A87D4-5B2B-41EB-9A91-A3CC2C6CC993}"/>
               </a:ext>
             </a:extLst>
           </p:cNvPr>
@@ -28166,7 +28166,7 @@
           <p:cNvPr id="13" name="로컬 합성 이미지로 동작하는 흑백 처리 CLI">
             <a:extLst xmlns:a="http://schemas.openxmlformats.org/drawingml/2006/main">
               <a:ext uri="{FF2B5EF4-FFF2-40B4-BE49-F238E27FC236}">
-                <a16:creationId xmlns:a16="http://schemas.microsoft.com/office/drawing/2014/main" id="{6E11F8E9-3905-471A-A96A-F089DE73A9AF}"/>
+                <a16:creationId xmlns:a16="http://schemas.microsoft.com/office/drawing/2014/main" id="{35BDFD64-B2F0-406E-8F4A-BD00F1B5DAA3}"/>
               </a:ext>
             </a:extLst>
           </p:cNvPr>
@@ -28324,7 +28324,7 @@
           <p:cNvPr id="14" name="">
             <a:extLst xmlns:a="http://schemas.openxmlformats.org/drawingml/2006/main">
               <a:ext uri="{FF2B5EF4-FFF2-40B4-BE49-F238E27FC236}">
-                <a16:creationId xmlns:a16="http://schemas.microsoft.com/office/drawing/2014/main" id="{C51CC416-A90A-4D0E-A280-49881DAEF3D9}"/>
+                <a16:creationId xmlns:a16="http://schemas.microsoft.com/office/drawing/2014/main" id="{8680C336-AF5F-4C6C-A5BD-10FA6F1D52C1}"/>
               </a:ext>
             </a:extLst>
           </p:cNvPr>
@@ -28355,7 +28355,7 @@
           <p:cNvPr id="15" name="실행 방법">
             <a:extLst xmlns:a="http://schemas.openxmlformats.org/drawingml/2006/main">
               <a:ext uri="{FF2B5EF4-FFF2-40B4-BE49-F238E27FC236}">
-                <a16:creationId xmlns:a16="http://schemas.microsoft.com/office/drawing/2014/main" id="{E9A028CC-DF2B-45A3-BA9A-FB8CE6953E62}"/>
+                <a16:creationId xmlns:a16="http://schemas.microsoft.com/office/drawing/2014/main" id="{401BF9FF-F80B-495B-B5D9-BB1CFC9B7E10}"/>
               </a:ext>
             </a:extLst>
           </p:cNvPr>
@@ -28513,7 +28513,7 @@
           <p:cNvPr id="16" name="Use the prepared build and CLI commands documented in `READM">
             <a:extLst xmlns:a="http://schemas.openxmlformats.org/drawingml/2006/main">
               <a:ext uri="{FF2B5EF4-FFF2-40B4-BE49-F238E27FC236}">
-                <a16:creationId xmlns:a16="http://schemas.microsoft.com/office/drawing/2014/main" id="{317DB7F1-5E1D-4041-9F48-798B5EE1D023}"/>
+                <a16:creationId xmlns:a16="http://schemas.microsoft.com/office/drawing/2014/main" id="{EA3A4656-CB0C-4A25-A06C-CA21CEC21EE9}"/>
               </a:ext>
             </a:extLst>
           </p:cNvPr>
@@ -28693,7 +28693,7 @@
           <p:cNvPr id="17" name="실행 방법은 README에서 확인">
             <a:extLst xmlns:a="http://schemas.openxmlformats.org/drawingml/2006/main">
               <a:ext uri="{FF2B5EF4-FFF2-40B4-BE49-F238E27FC236}">
-                <a16:creationId xmlns:a16="http://schemas.microsoft.com/office/drawing/2014/main" id="{79ED1585-A05E-4455-A964-44EB31EC7D7C}"/>
+                <a16:creationId xmlns:a16="http://schemas.microsoft.com/office/drawing/2014/main" id="{31E8D67D-5CA0-40E9-8BC3-0B75075121E2}"/>
               </a:ext>
             </a:extLst>
           </p:cNvPr>
@@ -28851,7 +28851,7 @@
           <p:cNvPr id="18" name="">
             <a:extLst xmlns:a="http://schemas.openxmlformats.org/drawingml/2006/main">
               <a:ext uri="{FF2B5EF4-FFF2-40B4-BE49-F238E27FC236}">
-                <a16:creationId xmlns:a16="http://schemas.microsoft.com/office/drawing/2014/main" id="{50369E1B-3C01-4893-AB03-24243FBE0AD3}"/>
+                <a16:creationId xmlns:a16="http://schemas.microsoft.com/office/drawing/2014/main" id="{A27517CC-D9E5-4110-97E4-CD5CD2BCC299}"/>
               </a:ext>
             </a:extLst>
           </p:cNvPr>
@@ -28882,7 +28882,7 @@
           <p:cNvPr id="19" name="테스트 명령">
             <a:extLst xmlns:a="http://schemas.openxmlformats.org/drawingml/2006/main">
               <a:ext uri="{FF2B5EF4-FFF2-40B4-BE49-F238E27FC236}">
-                <a16:creationId xmlns:a16="http://schemas.microsoft.com/office/drawing/2014/main" id="{669F54B9-8740-4DB3-9F09-94ABBD8F8A50}"/>
+                <a16:creationId xmlns:a16="http://schemas.microsoft.com/office/drawing/2014/main" id="{9E84E8CD-0B33-404B-A430-8C831EF4B472}"/>
               </a:ext>
             </a:extLst>
           </p:cNvPr>
@@ -29040,7 +29040,7 @@
           <p:cNvPr id="20" name="PYTHONPATH=src python3 -m unittest discover -s tests -v">
             <a:extLst xmlns:a="http://schemas.openxmlformats.org/drawingml/2006/main">
               <a:ext uri="{FF2B5EF4-FFF2-40B4-BE49-F238E27FC236}">
-                <a16:creationId xmlns:a16="http://schemas.microsoft.com/office/drawing/2014/main" id="{EF3B5004-2DD4-4606-8C97-CB826FB4F6D2}"/>
+                <a16:creationId xmlns:a16="http://schemas.microsoft.com/office/drawing/2014/main" id="{7F4B348C-E7DC-4CE2-8AB6-966B56BCBB3F}"/>
               </a:ext>
             </a:extLst>
           </p:cNvPr>
@@ -29198,7 +29198,7 @@
           <p:cNvPr id="21" name="반복해서 쓸 테스트 명령">
             <a:extLst xmlns:a="http://schemas.openxmlformats.org/drawingml/2006/main">
               <a:ext uri="{FF2B5EF4-FFF2-40B4-BE49-F238E27FC236}">
-                <a16:creationId xmlns:a16="http://schemas.microsoft.com/office/drawing/2014/main" id="{B1013EEA-5991-428B-82B8-B5553B5CA60A}"/>
+                <a16:creationId xmlns:a16="http://schemas.microsoft.com/office/drawing/2014/main" id="{B41FC6D7-7650-4E8C-B39D-8FAB8340994C}"/>
               </a:ext>
             </a:extLst>
           </p:cNvPr>
@@ -29356,7 +29356,7 @@
           <p:cNvPr id="22" name="">
             <a:extLst xmlns:a="http://schemas.openxmlformats.org/drawingml/2006/main">
               <a:ext uri="{FF2B5EF4-FFF2-40B4-BE49-F238E27FC236}">
-                <a16:creationId xmlns:a16="http://schemas.microsoft.com/office/drawing/2014/main" id="{07212868-1F90-4CAA-8F21-16344E44112A}"/>
+                <a16:creationId xmlns:a16="http://schemas.microsoft.com/office/drawing/2014/main" id="{03B57B3B-3F1D-4ACE-886D-84ED55BEEC8A}"/>
               </a:ext>
             </a:extLst>
           </p:cNvPr>
@@ -29387,7 +29387,7 @@
           <p:cNvPr id="23" name="기본 제약">
             <a:extLst xmlns:a="http://schemas.openxmlformats.org/drawingml/2006/main">
               <a:ext uri="{FF2B5EF4-FFF2-40B4-BE49-F238E27FC236}">
-                <a16:creationId xmlns:a16="http://schemas.microsoft.com/office/drawing/2014/main" id="{36A11B34-BEF9-4BA0-AB73-E6D871D050FB}"/>
+                <a16:creationId xmlns:a16="http://schemas.microsoft.com/office/drawing/2014/main" id="{791335AE-9DDB-4422-94E2-04612A951E2E}"/>
               </a:ext>
             </a:extLst>
           </p:cNvPr>
@@ -29545,7 +29545,7 @@
           <p:cNvPr id="24" name="Keep changes scoped and verify relevant behavior.">
             <a:extLst xmlns:a="http://schemas.openxmlformats.org/drawingml/2006/main">
               <a:ext uri="{FF2B5EF4-FFF2-40B4-BE49-F238E27FC236}">
-                <a16:creationId xmlns:a16="http://schemas.microsoft.com/office/drawing/2014/main" id="{F56D968E-C237-456B-9C18-BBEFDC0F7800}"/>
+                <a16:creationId xmlns:a16="http://schemas.microsoft.com/office/drawing/2014/main" id="{49BB673B-7047-43EB-8BCA-A08FBB110378}"/>
               </a:ext>
             </a:extLst>
           </p:cNvPr>
@@ -29725,7 +29725,7 @@
           <p:cNvPr id="25" name="범위를 지키고 관련 동작을 검증">
             <a:extLst xmlns:a="http://schemas.openxmlformats.org/drawingml/2006/main">
               <a:ext uri="{FF2B5EF4-FFF2-40B4-BE49-F238E27FC236}">
-                <a16:creationId xmlns:a16="http://schemas.microsoft.com/office/drawing/2014/main" id="{7D5BD43F-884F-4E92-8562-53823716B2AE}"/>
+                <a16:creationId xmlns:a16="http://schemas.microsoft.com/office/drawing/2014/main" id="{9808622C-F54A-4F3A-9A09-CD7D3EAB2A12}"/>
               </a:ext>
             </a:extLst>
           </p:cNvPr>
@@ -29883,7 +29883,7 @@
           <p:cNvPr id="26" name="Legacy module connection">
             <a:extLst xmlns:a="http://schemas.openxmlformats.org/drawingml/2006/main">
               <a:ext uri="{FF2B5EF4-FFF2-40B4-BE49-F238E27FC236}">
-                <a16:creationId xmlns:a16="http://schemas.microsoft.com/office/drawing/2014/main" id="{0F8F0099-333A-4ECC-8D70-D09E90F6D18A}"/>
+                <a16:creationId xmlns:a16="http://schemas.microsoft.com/office/drawing/2014/main" id="{C1896A96-0A13-40C2-8486-EB85DC461849}"/>
               </a:ext>
             </a:extLst>
           </p:cNvPr>
@@ -30039,7 +30039,7 @@
     </p:spTree>
     <p:extLst>
       <p:ext uri="{BB962C8B-B14F-4D97-AF65-F5344CB8AC3E}">
-        <p14:creationId xmlns:p14="http://schemas.microsoft.com/office/powerpoint/2010/main" val="1070377751"/>
+        <p14:creationId xmlns:p14="http://schemas.microsoft.com/office/powerpoint/2010/main" val="1425282623"/>
       </p:ext>
     </p:extLst>
   </p:cSld>
@@ -30070,7 +30070,7 @@
           <p:cNvPr id="24" name="ACT 2 · 지침을 활용한 관찰">
             <a:extLst xmlns:a="http://schemas.openxmlformats.org/drawingml/2006/main">
               <a:ext uri="{FF2B5EF4-FFF2-40B4-BE49-F238E27FC236}">
-                <a16:creationId xmlns:a16="http://schemas.microsoft.com/office/drawing/2014/main" id="{7A9185C7-A21C-4378-8608-A19FB9A08C34}"/>
+                <a16:creationId xmlns:a16="http://schemas.microsoft.com/office/drawing/2014/main" id="{04669A8E-ED4F-4061-8A32-A199D3160775}"/>
               </a:ext>
             </a:extLst>
           </p:cNvPr>
@@ -30225,10 +30225,10 @@
       </p:sp>
       <p:sp>
         <p:nvSpPr>
-          <p:cNvPr id="2" name="S24">
+          <p:cNvPr id="2" name="S25">
             <a:extLst xmlns:a="http://schemas.openxmlformats.org/drawingml/2006/main">
               <a:ext uri="{FF2B5EF4-FFF2-40B4-BE49-F238E27FC236}">
-                <a16:creationId xmlns:a16="http://schemas.microsoft.com/office/drawing/2014/main" id="{D1A8C059-A598-4F26-B308-AB016C88BEF2}"/>
+                <a16:creationId xmlns:a16="http://schemas.microsoft.com/office/drawing/2014/main" id="{2C0B68E0-2CF6-433F-AA37-C0CF5E48D491}"/>
               </a:ext>
             </a:extLst>
           </p:cNvPr>
@@ -30376,7 +30376,7 @@
                 <a:ea typeface="Malgun Gothic"/>
                 <a:cs typeface="Malgun Gothic"/>
               </a:rPr>
-              <a:t>S24</a:t>
+              <a:t>S25</a:t>
             </a:r>
           </a:p>
         </p:txBody>
@@ -30386,7 +30386,7 @@
           <p:cNvPr id="3" name="한 번의 사용에서 확인된 것">
             <a:extLst xmlns:a="http://schemas.openxmlformats.org/drawingml/2006/main">
               <a:ext uri="{FF2B5EF4-FFF2-40B4-BE49-F238E27FC236}">
-                <a16:creationId xmlns:a16="http://schemas.microsoft.com/office/drawing/2014/main" id="{0DD77485-446D-417A-9770-3C7C448F609A}"/>
+                <a16:creationId xmlns:a16="http://schemas.microsoft.com/office/drawing/2014/main" id="{CA7B8947-346F-436F-B432-DEAE6A3F6C89}"/>
               </a:ext>
             </a:extLst>
           </p:cNvPr>
@@ -30544,7 +30544,7 @@
           <p:cNvPr id="4" name="">
             <a:extLst xmlns:a="http://schemas.openxmlformats.org/drawingml/2006/main">
               <a:ext uri="{FF2B5EF4-FFF2-40B4-BE49-F238E27FC236}">
-                <a16:creationId xmlns:a16="http://schemas.microsoft.com/office/drawing/2014/main" id="{83CB4F03-0193-407B-9C53-10DFE375689A}"/>
+                <a16:creationId xmlns:a16="http://schemas.microsoft.com/office/drawing/2014/main" id="{7880C4F2-FD13-417D-83E3-4F072CDD430F}"/>
               </a:ext>
             </a:extLst>
           </p:cNvPr>
@@ -30575,7 +30575,7 @@
           <p:cNvPr id="5" name="TRIAL-003 · Codex CLI 기록을 재구성 · 전체 테스트 11/11 PASS">
             <a:extLst xmlns:a="http://schemas.openxmlformats.org/drawingml/2006/main">
               <a:ext uri="{FF2B5EF4-FFF2-40B4-BE49-F238E27FC236}">
-                <a16:creationId xmlns:a16="http://schemas.microsoft.com/office/drawing/2014/main" id="{BD1ABEDF-03F0-4E09-A803-8D06096D8A93}"/>
+                <a16:creationId xmlns:a16="http://schemas.microsoft.com/office/drawing/2014/main" id="{EE40660C-B03F-43EE-AFE0-DBB6108B12BF}"/>
               </a:ext>
             </a:extLst>
           </p:cNvPr>
@@ -30733,7 +30733,7 @@
           <p:cNvPr id="6" name="Personal/global Skills도 실행됨 · AGENTS.md만의 독립적인 효과로 해석하지 않음">
             <a:extLst xmlns:a="http://schemas.openxmlformats.org/drawingml/2006/main">
               <a:ext uri="{FF2B5EF4-FFF2-40B4-BE49-F238E27FC236}">
-                <a16:creationId xmlns:a16="http://schemas.microsoft.com/office/drawing/2014/main" id="{7A06F4CC-8D37-4E59-A4E5-290CB8EB745D}"/>
+                <a16:creationId xmlns:a16="http://schemas.microsoft.com/office/drawing/2014/main" id="{54303DDD-DA27-44DD-A26C-02BA981466D4}"/>
               </a:ext>
             </a:extLst>
           </p:cNvPr>
@@ -30891,7 +30891,7 @@
           <p:cNvPr id="7" name="요청">
             <a:extLst xmlns:a="http://schemas.openxmlformats.org/drawingml/2006/main">
               <a:ext uri="{FF2B5EF4-FFF2-40B4-BE49-F238E27FC236}">
-                <a16:creationId xmlns:a16="http://schemas.microsoft.com/office/drawing/2014/main" id="{B014E960-CD70-4664-A75E-7D6DD51518FD}"/>
+                <a16:creationId xmlns:a16="http://schemas.microsoft.com/office/drawing/2014/main" id="{70E4E330-AFEC-4B6B-89EA-4C93F48F11D7}"/>
               </a:ext>
             </a:extLst>
           </p:cNvPr>
@@ -31049,7 +31049,7 @@
           <p:cNvPr id="8" name="">
             <a:extLst xmlns:a="http://schemas.openxmlformats.org/drawingml/2006/main">
               <a:ext uri="{FF2B5EF4-FFF2-40B4-BE49-F238E27FC236}">
-                <a16:creationId xmlns:a16="http://schemas.microsoft.com/office/drawing/2014/main" id="{A0D05937-99D0-4F6A-968B-7319BD937F59}"/>
+                <a16:creationId xmlns:a16="http://schemas.microsoft.com/office/drawing/2014/main" id="{19D8D52F-61FF-4C55-97A7-D4BF51FB5BEF}"/>
               </a:ext>
             </a:extLst>
           </p:cNvPr>
@@ -31080,7 +31080,7 @@
           <p:cNvPr id="9" name="읽은 파일">
             <a:extLst xmlns:a="http://schemas.openxmlformats.org/drawingml/2006/main">
               <a:ext uri="{FF2B5EF4-FFF2-40B4-BE49-F238E27FC236}">
-                <a16:creationId xmlns:a16="http://schemas.microsoft.com/office/drawing/2014/main" id="{B693AD5F-E479-4EF7-A33B-796F7D6B6141}"/>
+                <a16:creationId xmlns:a16="http://schemas.microsoft.com/office/drawing/2014/main" id="{15D6D93E-90F9-4209-A073-8241AEDDCDF6}"/>
               </a:ext>
             </a:extLst>
           </p:cNvPr>
@@ -31238,7 +31238,7 @@
           <p:cNvPr id="10" name="">
             <a:extLst xmlns:a="http://schemas.openxmlformats.org/drawingml/2006/main">
               <a:ext uri="{FF2B5EF4-FFF2-40B4-BE49-F238E27FC236}">
-                <a16:creationId xmlns:a16="http://schemas.microsoft.com/office/drawing/2014/main" id="{1023FCBC-7952-4486-965C-C7BDDDCA58F7}"/>
+                <a16:creationId xmlns:a16="http://schemas.microsoft.com/office/drawing/2014/main" id="{F56D38FB-37A3-4BE6-8621-C03C89B1D5C3}"/>
               </a:ext>
             </a:extLst>
           </p:cNvPr>
@@ -31269,7 +31269,7 @@
           <p:cNvPr id="11" name="실행 기록">
             <a:extLst xmlns:a="http://schemas.openxmlformats.org/drawingml/2006/main">
               <a:ext uri="{FF2B5EF4-FFF2-40B4-BE49-F238E27FC236}">
-                <a16:creationId xmlns:a16="http://schemas.microsoft.com/office/drawing/2014/main" id="{F853FEF6-AEAE-45BD-AB36-428838B15961}"/>
+                <a16:creationId xmlns:a16="http://schemas.microsoft.com/office/drawing/2014/main" id="{F21E31E4-6F0D-4B45-A8E9-F66EC5BC03D1}"/>
               </a:ext>
             </a:extLst>
           </p:cNvPr>
@@ -31427,7 +31427,7 @@
           <p:cNvPr id="12" name="">
             <a:extLst xmlns:a="http://schemas.openxmlformats.org/drawingml/2006/main">
               <a:ext uri="{FF2B5EF4-FFF2-40B4-BE49-F238E27FC236}">
-                <a16:creationId xmlns:a16="http://schemas.microsoft.com/office/drawing/2014/main" id="{2DECF7ED-FC95-4BFF-8FD0-99EDD739A113}"/>
+                <a16:creationId xmlns:a16="http://schemas.microsoft.com/office/drawing/2014/main" id="{B35ADA7C-A47C-4835-93B6-8EC2541C874D}"/>
               </a:ext>
             </a:extLst>
           </p:cNvPr>
@@ -31458,7 +31458,7 @@
           <p:cNvPr id="13" name="README만 수정&#10;테스트 명령은 없음">
             <a:extLst xmlns:a="http://schemas.openxmlformats.org/drawingml/2006/main">
               <a:ext uri="{FF2B5EF4-FFF2-40B4-BE49-F238E27FC236}">
-                <a16:creationId xmlns:a16="http://schemas.microsoft.com/office/drawing/2014/main" id="{AD5F6111-8C2D-479F-B986-96A2FA41A12A}"/>
+                <a16:creationId xmlns:a16="http://schemas.microsoft.com/office/drawing/2014/main" id="{03930D5C-9C38-4238-8937-99641F85AE45}"/>
               </a:ext>
             </a:extLst>
           </p:cNvPr>
@@ -31639,7 +31639,7 @@
           <p:cNvPr id="14" name="AGENTS.md">
             <a:extLst xmlns:a="http://schemas.openxmlformats.org/drawingml/2006/main">
               <a:ext uri="{FF2B5EF4-FFF2-40B4-BE49-F238E27FC236}">
-                <a16:creationId xmlns:a16="http://schemas.microsoft.com/office/drawing/2014/main" id="{6ABC99D1-289E-4659-B015-5ED2C87B9778}"/>
+                <a16:creationId xmlns:a16="http://schemas.microsoft.com/office/drawing/2014/main" id="{F8893F21-67AB-42FA-B33B-B0BE13B8E222}"/>
               </a:ext>
             </a:extLst>
           </p:cNvPr>
@@ -31797,7 +31797,7 @@
           <p:cNvPr id="15" name="기록된 테스트&#10;명령을 사용">
             <a:extLst xmlns:a="http://schemas.openxmlformats.org/drawingml/2006/main">
               <a:ext uri="{FF2B5EF4-FFF2-40B4-BE49-F238E27FC236}">
-                <a16:creationId xmlns:a16="http://schemas.microsoft.com/office/drawing/2014/main" id="{30783B54-4EF3-499F-98EA-2B0F9D126E83}"/>
+                <a16:creationId xmlns:a16="http://schemas.microsoft.com/office/drawing/2014/main" id="{04B86BAC-3FB2-45F9-B372-7A6966B3021F}"/>
               </a:ext>
             </a:extLst>
           </p:cNvPr>
@@ -31978,7 +31978,7 @@
           <p:cNvPr id="16" name="전체 테스트">
             <a:extLst xmlns:a="http://schemas.openxmlformats.org/drawingml/2006/main">
               <a:ext uri="{FF2B5EF4-FFF2-40B4-BE49-F238E27FC236}">
-                <a16:creationId xmlns:a16="http://schemas.microsoft.com/office/drawing/2014/main" id="{9B3B205C-6ADC-4A22-81DF-A8AFC63F227C}"/>
+                <a16:creationId xmlns:a16="http://schemas.microsoft.com/office/drawing/2014/main" id="{9D687161-3097-4AC8-B8C1-7DBB26D3AE42}"/>
               </a:ext>
             </a:extLst>
           </p:cNvPr>
@@ -32136,7 +32136,7 @@
           <p:cNvPr id="17" name="11 / 11">
             <a:extLst xmlns:a="http://schemas.openxmlformats.org/drawingml/2006/main">
               <a:ext uri="{FF2B5EF4-FFF2-40B4-BE49-F238E27FC236}">
-                <a16:creationId xmlns:a16="http://schemas.microsoft.com/office/drawing/2014/main" id="{6C88AD54-D5A0-49FC-B85F-401229B2C84B}"/>
+                <a16:creationId xmlns:a16="http://schemas.microsoft.com/office/drawing/2014/main" id="{C3DA19CE-7B6B-42C5-A9AE-3214B724884A}"/>
               </a:ext>
             </a:extLst>
           </p:cNvPr>
@@ -32294,7 +32294,7 @@
           <p:cNvPr id="18" name="PASS">
             <a:extLst xmlns:a="http://schemas.openxmlformats.org/drawingml/2006/main">
               <a:ext uri="{FF2B5EF4-FFF2-40B4-BE49-F238E27FC236}">
-                <a16:creationId xmlns:a16="http://schemas.microsoft.com/office/drawing/2014/main" id="{3A2CF285-3EF9-41CC-9E8E-DDA9EB0E8FCB}"/>
+                <a16:creationId xmlns:a16="http://schemas.microsoft.com/office/drawing/2014/main" id="{E992FDB9-9298-410D-B7B8-32A2FA66A4F7}"/>
               </a:ext>
             </a:extLst>
           </p:cNvPr>
@@ -32452,7 +32452,7 @@
           <p:cNvPr id="19" name="">
             <a:extLst xmlns:a="http://schemas.openxmlformats.org/drawingml/2006/main">
               <a:ext uri="{FF2B5EF4-FFF2-40B4-BE49-F238E27FC236}">
-                <a16:creationId xmlns:a16="http://schemas.microsoft.com/office/drawing/2014/main" id="{43643DCA-852B-45AA-80FB-C0D8E891DA42}"/>
+                <a16:creationId xmlns:a16="http://schemas.microsoft.com/office/drawing/2014/main" id="{4156A19D-4B60-4BF3-A7D5-BE9E66B6693C}"/>
               </a:ext>
             </a:extLst>
           </p:cNvPr>
@@ -32482,7 +32482,7 @@
           <p:cNvPr id="20" name="">
             <a:extLst xmlns:a="http://schemas.openxmlformats.org/drawingml/2006/main">
               <a:ext uri="{FF2B5EF4-FFF2-40B4-BE49-F238E27FC236}">
-                <a16:creationId xmlns:a16="http://schemas.microsoft.com/office/drawing/2014/main" id="{A03B8CCF-ACA2-4616-A790-6C4EC999076F}"/>
+                <a16:creationId xmlns:a16="http://schemas.microsoft.com/office/drawing/2014/main" id="{F2B2A422-E35B-485D-B235-47178C7755E3}"/>
               </a:ext>
             </a:extLst>
           </p:cNvPr>
@@ -32512,7 +32512,7 @@
           <p:cNvPr id="21" name="">
             <a:extLst xmlns:a="http://schemas.openxmlformats.org/drawingml/2006/main">
               <a:ext uri="{FF2B5EF4-FFF2-40B4-BE49-F238E27FC236}">
-                <a16:creationId xmlns:a16="http://schemas.microsoft.com/office/drawing/2014/main" id="{A4FFE757-5909-4457-9552-8D89B449C6A2}"/>
+                <a16:creationId xmlns:a16="http://schemas.microsoft.com/office/drawing/2014/main" id="{0EA0D342-F91D-4381-94C4-5F6A003925CC}"/>
               </a:ext>
             </a:extLst>
           </p:cNvPr>
@@ -32543,7 +32543,7 @@
           <p:cNvPr id="22" name="README-only 범위는 작업 요청에도 명시돼 있었다">
             <a:extLst xmlns:a="http://schemas.openxmlformats.org/drawingml/2006/main">
               <a:ext uri="{FF2B5EF4-FFF2-40B4-BE49-F238E27FC236}">
-                <a16:creationId xmlns:a16="http://schemas.microsoft.com/office/drawing/2014/main" id="{72893410-9511-4361-9B22-605E019F8FED}"/>
+                <a16:creationId xmlns:a16="http://schemas.microsoft.com/office/drawing/2014/main" id="{E8650F61-F50F-467D-9BAA-65A7DFBB58A4}"/>
               </a:ext>
             </a:extLst>
           </p:cNvPr>
@@ -32701,7 +32701,7 @@
           <p:cNvPr id="23" name="Legacy module connection">
             <a:extLst xmlns:a="http://schemas.openxmlformats.org/drawingml/2006/main">
               <a:ext uri="{FF2B5EF4-FFF2-40B4-BE49-F238E27FC236}">
-                <a16:creationId xmlns:a16="http://schemas.microsoft.com/office/drawing/2014/main" id="{C363ABEB-C575-4F7A-9F14-6F2AC13F3E6E}"/>
+                <a16:creationId xmlns:a16="http://schemas.microsoft.com/office/drawing/2014/main" id="{D5A0ABF1-3E26-4134-9A62-040EAA86B718}"/>
               </a:ext>
             </a:extLst>
           </p:cNvPr>
@@ -32857,7 +32857,7 @@
     </p:spTree>
     <p:extLst>
       <p:ext uri="{BB962C8B-B14F-4D97-AF65-F5344CB8AC3E}">
-        <p14:creationId xmlns:p14="http://schemas.microsoft.com/office/powerpoint/2010/main" val="1720756334"/>
+        <p14:creationId xmlns:p14="http://schemas.microsoft.com/office/powerpoint/2010/main" val="823345676"/>
       </p:ext>
     </p:extLst>
   </p:cSld>
@@ -32888,7 +32888,7 @@
           <p:cNvPr id="21" name="ACT 2 · 정보의 범위와 수명">
             <a:extLst xmlns:a="http://schemas.openxmlformats.org/drawingml/2006/main">
               <a:ext uri="{FF2B5EF4-FFF2-40B4-BE49-F238E27FC236}">
-                <a16:creationId xmlns:a16="http://schemas.microsoft.com/office/drawing/2014/main" id="{6D02F3DB-3F79-4A71-873A-EA84E11E64D0}"/>
+                <a16:creationId xmlns:a16="http://schemas.microsoft.com/office/drawing/2014/main" id="{C03E63A4-45A5-4AF1-AC34-562792B21486}"/>
               </a:ext>
             </a:extLst>
           </p:cNvPr>
@@ -33043,10 +33043,10 @@
       </p:sp>
       <p:sp>
         <p:nvSpPr>
-          <p:cNvPr id="2" name="S25">
+          <p:cNvPr id="2" name="S26">
             <a:extLst xmlns:a="http://schemas.openxmlformats.org/drawingml/2006/main">
               <a:ext uri="{FF2B5EF4-FFF2-40B4-BE49-F238E27FC236}">
-                <a16:creationId xmlns:a16="http://schemas.microsoft.com/office/drawing/2014/main" id="{E2A986FC-86AE-4F79-9A40-78EF5F91E4B9}"/>
+                <a16:creationId xmlns:a16="http://schemas.microsoft.com/office/drawing/2014/main" id="{0A2F4E99-483C-4414-8F45-DA225C31D946}"/>
               </a:ext>
             </a:extLst>
           </p:cNvPr>
@@ -33194,7 +33194,7 @@
                 <a:ea typeface="Malgun Gothic"/>
                 <a:cs typeface="Malgun Gothic"/>
               </a:rPr>
-              <a:t>S25</a:t>
+              <a:t>S26</a:t>
             </a:r>
           </a:p>
         </p:txBody>
@@ -33204,7 +33204,7 @@
           <p:cNvPr id="3" name="Task Prompt와 Project Context">
             <a:extLst xmlns:a="http://schemas.openxmlformats.org/drawingml/2006/main">
               <a:ext uri="{FF2B5EF4-FFF2-40B4-BE49-F238E27FC236}">
-                <a16:creationId xmlns:a16="http://schemas.microsoft.com/office/drawing/2014/main" id="{5860E576-9194-4DE9-A9E9-59286FFD0A1F}"/>
+                <a16:creationId xmlns:a16="http://schemas.microsoft.com/office/drawing/2014/main" id="{A9A8B1C5-5F07-4C01-9683-99AF36E6FFBA}"/>
               </a:ext>
             </a:extLst>
           </p:cNvPr>
@@ -33362,7 +33362,7 @@
           <p:cNvPr id="4" name="">
             <a:extLst xmlns:a="http://schemas.openxmlformats.org/drawingml/2006/main">
               <a:ext uri="{FF2B5EF4-FFF2-40B4-BE49-F238E27FC236}">
-                <a16:creationId xmlns:a16="http://schemas.microsoft.com/office/drawing/2014/main" id="{2203FB44-5920-493B-86B9-641E4673CCDC}"/>
+                <a16:creationId xmlns:a16="http://schemas.microsoft.com/office/drawing/2014/main" id="{6E1CD843-89BA-476F-979B-B358330E50FE}"/>
               </a:ext>
             </a:extLst>
           </p:cNvPr>
@@ -33393,7 +33393,7 @@
           <p:cNvPr id="5" name="교육용 구분 · 현재 목표와 지속되는 프로젝트 사실">
             <a:extLst xmlns:a="http://schemas.openxmlformats.org/drawingml/2006/main">
               <a:ext uri="{FF2B5EF4-FFF2-40B4-BE49-F238E27FC236}">
-                <a16:creationId xmlns:a16="http://schemas.microsoft.com/office/drawing/2014/main" id="{52557598-ACC4-47DC-B2B0-A49FE7D8CD7A}"/>
+                <a16:creationId xmlns:a16="http://schemas.microsoft.com/office/drawing/2014/main" id="{6CE25407-0A59-48E5-8A27-CC69953ADC45}"/>
               </a:ext>
             </a:extLst>
           </p:cNvPr>
@@ -33551,7 +33551,7 @@
           <p:cNvPr id="6" name="C++에서도 프로젝트 공통 제약과 이번 알고리즘 변경 조건은 범위가 다를 수 있다">
             <a:extLst xmlns:a="http://schemas.openxmlformats.org/drawingml/2006/main">
               <a:ext uri="{FF2B5EF4-FFF2-40B4-BE49-F238E27FC236}">
-                <a16:creationId xmlns:a16="http://schemas.microsoft.com/office/drawing/2014/main" id="{F4322792-8FE5-4C31-8FA6-B201B388C87B}"/>
+                <a16:creationId xmlns:a16="http://schemas.microsoft.com/office/drawing/2014/main" id="{F0DF239A-9CD1-4D2A-A331-939450FF0CD0}"/>
               </a:ext>
             </a:extLst>
           </p:cNvPr>
@@ -33709,7 +33709,7 @@
           <p:cNvPr id="7" name="방금 본 기록을 범위와 수명으로 읽어보면">
             <a:extLst xmlns:a="http://schemas.openxmlformats.org/drawingml/2006/main">
               <a:ext uri="{FF2B5EF4-FFF2-40B4-BE49-F238E27FC236}">
-                <a16:creationId xmlns:a16="http://schemas.microsoft.com/office/drawing/2014/main" id="{EF8F48DD-2305-4D57-870C-B593A39C8545}"/>
+                <a16:creationId xmlns:a16="http://schemas.microsoft.com/office/drawing/2014/main" id="{FD9F0B7F-EF79-4239-8ABC-300ECB22B5DC}"/>
               </a:ext>
             </a:extLst>
           </p:cNvPr>
@@ -33867,7 +33867,7 @@
           <p:cNvPr id="8" name="Task Prompt">
             <a:extLst xmlns:a="http://schemas.openxmlformats.org/drawingml/2006/main">
               <a:ext uri="{FF2B5EF4-FFF2-40B4-BE49-F238E27FC236}">
-                <a16:creationId xmlns:a16="http://schemas.microsoft.com/office/drawing/2014/main" id="{FE959CD4-E559-44F3-8D7D-85B2BDD81142}"/>
+                <a16:creationId xmlns:a16="http://schemas.microsoft.com/office/drawing/2014/main" id="{2D7EDE7D-F481-4666-92CE-1455986A123B}"/>
               </a:ext>
             </a:extLst>
           </p:cNvPr>
@@ -34025,7 +34025,7 @@
           <p:cNvPr id="9" name="Project Context">
             <a:extLst xmlns:a="http://schemas.openxmlformats.org/drawingml/2006/main">
               <a:ext uri="{FF2B5EF4-FFF2-40B4-BE49-F238E27FC236}">
-                <a16:creationId xmlns:a16="http://schemas.microsoft.com/office/drawing/2014/main" id="{8E50EB89-DAA1-4C04-9CE7-E870A6D79DEC}"/>
+                <a16:creationId xmlns:a16="http://schemas.microsoft.com/office/drawing/2014/main" id="{ED8262C1-91CF-41ED-AC62-551E0D101EAE}"/>
               </a:ext>
             </a:extLst>
           </p:cNvPr>
@@ -34183,7 +34183,7 @@
           <p:cNvPr id="10" name="">
             <a:extLst xmlns:a="http://schemas.openxmlformats.org/drawingml/2006/main">
               <a:ext uri="{FF2B5EF4-FFF2-40B4-BE49-F238E27FC236}">
-                <a16:creationId xmlns:a16="http://schemas.microsoft.com/office/drawing/2014/main" id="{77FA6A22-FC6F-4FE1-8720-8D20EA697692}"/>
+                <a16:creationId xmlns:a16="http://schemas.microsoft.com/office/drawing/2014/main" id="{9353B260-476B-4BFF-88B9-E34211384B6C}"/>
               </a:ext>
             </a:extLst>
           </p:cNvPr>
@@ -34214,7 +34214,7 @@
           <p:cNvPr id="11" name="">
             <a:extLst xmlns:a="http://schemas.openxmlformats.org/drawingml/2006/main">
               <a:ext uri="{FF2B5EF4-FFF2-40B4-BE49-F238E27FC236}">
-                <a16:creationId xmlns:a16="http://schemas.microsoft.com/office/drawing/2014/main" id="{AB1A27C4-0443-40DF-ABFD-FB1253C51EFB}"/>
+                <a16:creationId xmlns:a16="http://schemas.microsoft.com/office/drawing/2014/main" id="{14BF3932-7849-43AF-8E2F-FCAB1FF2FBE6}"/>
               </a:ext>
             </a:extLst>
           </p:cNvPr>
@@ -34245,7 +34245,7 @@
           <p:cNvPr id="12" name="지금 원하는 결과">
             <a:extLst xmlns:a="http://schemas.openxmlformats.org/drawingml/2006/main">
               <a:ext uri="{FF2B5EF4-FFF2-40B4-BE49-F238E27FC236}">
-                <a16:creationId xmlns:a16="http://schemas.microsoft.com/office/drawing/2014/main" id="{00A1F813-B61A-4B75-A55C-55342CAAFF6A}"/>
+                <a16:creationId xmlns:a16="http://schemas.microsoft.com/office/drawing/2014/main" id="{45D38631-4784-402F-A9AE-E77514A5BDFE}"/>
               </a:ext>
             </a:extLst>
           </p:cNvPr>
@@ -34403,7 +34403,7 @@
           <p:cNvPr id="13" name="계속 참이어야 할 사실">
             <a:extLst xmlns:a="http://schemas.openxmlformats.org/drawingml/2006/main">
               <a:ext uri="{FF2B5EF4-FFF2-40B4-BE49-F238E27FC236}">
-                <a16:creationId xmlns:a16="http://schemas.microsoft.com/office/drawing/2014/main" id="{BDFDA96C-2FAF-4B35-B97A-624F9B19A9AC}"/>
+                <a16:creationId xmlns:a16="http://schemas.microsoft.com/office/drawing/2014/main" id="{9C144FE6-794C-4413-98E8-4F5E2E4A97F1}"/>
               </a:ext>
             </a:extLst>
           </p:cNvPr>
@@ -34561,7 +34561,7 @@
           <p:cNvPr id="14" name="crop 경계 버그 수정&#10;이번에는 README만 변경">
             <a:extLst xmlns:a="http://schemas.openxmlformats.org/drawingml/2006/main">
               <a:ext uri="{FF2B5EF4-FFF2-40B4-BE49-F238E27FC236}">
-                <a16:creationId xmlns:a16="http://schemas.microsoft.com/office/drawing/2014/main" id="{6AB23137-67F1-4296-9CA0-E1F09B9A4852}"/>
+                <a16:creationId xmlns:a16="http://schemas.microsoft.com/office/drawing/2014/main" id="{D0E6C4D7-19DA-4CFD-94C8-FB2643E6FAB8}"/>
               </a:ext>
             </a:extLst>
           </p:cNvPr>
@@ -34742,7 +34742,7 @@
           <p:cNvPr id="15" name="프로젝트의 테스트 명령&#10;의존성 추가에는 작업상 근거 필요">
             <a:extLst xmlns:a="http://schemas.openxmlformats.org/drawingml/2006/main">
               <a:ext uri="{FF2B5EF4-FFF2-40B4-BE49-F238E27FC236}">
-                <a16:creationId xmlns:a16="http://schemas.microsoft.com/office/drawing/2014/main" id="{86D10C53-8134-4375-A1B2-AED1BA509F37}"/>
+                <a16:creationId xmlns:a16="http://schemas.microsoft.com/office/drawing/2014/main" id="{D0E6FA20-2CC2-4CE1-8B3B-084AE624EC0F}"/>
               </a:ext>
             </a:extLst>
           </p:cNvPr>
@@ -34923,7 +34923,7 @@
           <p:cNvPr id="16" name="">
             <a:extLst xmlns:a="http://schemas.openxmlformats.org/drawingml/2006/main">
               <a:ext uri="{FF2B5EF4-FFF2-40B4-BE49-F238E27FC236}">
-                <a16:creationId xmlns:a16="http://schemas.microsoft.com/office/drawing/2014/main" id="{7DFEDB2B-25BF-47F1-89B9-15BAB4096032}"/>
+                <a16:creationId xmlns:a16="http://schemas.microsoft.com/office/drawing/2014/main" id="{68ED051A-C2A7-4935-8E5C-6D1015FBB25C}"/>
               </a:ext>
             </a:extLst>
           </p:cNvPr>
@@ -34956,7 +34956,7 @@
           <p:cNvPr id="17" name="">
             <a:extLst xmlns:a="http://schemas.openxmlformats.org/drawingml/2006/main">
               <a:ext uri="{FF2B5EF4-FFF2-40B4-BE49-F238E27FC236}">
-                <a16:creationId xmlns:a16="http://schemas.microsoft.com/office/drawing/2014/main" id="{7A57FAF2-FDF0-4C8E-BC33-6BD145828016}"/>
+                <a16:creationId xmlns:a16="http://schemas.microsoft.com/office/drawing/2014/main" id="{829A0601-2CFD-475F-923E-184F19B2206F}"/>
               </a:ext>
             </a:extLst>
           </p:cNvPr>
@@ -34987,7 +34987,7 @@
           <p:cNvPr id="18" name="다음 작업에서는 목표가 달라짐">
             <a:extLst xmlns:a="http://schemas.openxmlformats.org/drawingml/2006/main">
               <a:ext uri="{FF2B5EF4-FFF2-40B4-BE49-F238E27FC236}">
-                <a16:creationId xmlns:a16="http://schemas.microsoft.com/office/drawing/2014/main" id="{30A4FADB-C427-4562-81C4-D5E8BF6851B3}"/>
+                <a16:creationId xmlns:a16="http://schemas.microsoft.com/office/drawing/2014/main" id="{AFE20849-472E-4F62-BC71-046DBF41FB91}"/>
               </a:ext>
             </a:extLst>
           </p:cNvPr>
@@ -35145,7 +35145,7 @@
           <p:cNvPr id="19" name="여러 작업에서 다시 참고">
             <a:extLst xmlns:a="http://schemas.openxmlformats.org/drawingml/2006/main">
               <a:ext uri="{FF2B5EF4-FFF2-40B4-BE49-F238E27FC236}">
-                <a16:creationId xmlns:a16="http://schemas.microsoft.com/office/drawing/2014/main" id="{8512FB62-7BD4-460B-9347-21A6C2279677}"/>
+                <a16:creationId xmlns:a16="http://schemas.microsoft.com/office/drawing/2014/main" id="{7B3EB87E-D891-4A70-9BBA-D855FD4BED89}"/>
               </a:ext>
             </a:extLst>
           </p:cNvPr>
@@ -35303,7 +35303,7 @@
           <p:cNvPr id="20" name="Legacy module connection">
             <a:extLst xmlns:a="http://schemas.openxmlformats.org/drawingml/2006/main">
               <a:ext uri="{FF2B5EF4-FFF2-40B4-BE49-F238E27FC236}">
-                <a16:creationId xmlns:a16="http://schemas.microsoft.com/office/drawing/2014/main" id="{9362139F-E546-46A6-94DB-93B89B3A7F3B}"/>
+                <a16:creationId xmlns:a16="http://schemas.microsoft.com/office/drawing/2014/main" id="{2E1A095E-371F-4B3D-AED6-620D5BED407A}"/>
               </a:ext>
             </a:extLst>
           </p:cNvPr>
@@ -35459,7 +35459,7 @@
     </p:spTree>
     <p:extLst>
       <p:ext uri="{BB962C8B-B14F-4D97-AF65-F5344CB8AC3E}">
-        <p14:creationId xmlns:p14="http://schemas.microsoft.com/office/powerpoint/2010/main" val="1223768098"/>
+        <p14:creationId xmlns:p14="http://schemas.microsoft.com/office/powerpoint/2010/main" val="509389047"/>
       </p:ext>
     </p:extLst>
   </p:cSld>
@@ -35490,7 +35490,7 @@
           <p:cNvPr id="27" name="ACT 2 · Context가 쌓이는 과정">
             <a:extLst xmlns:a="http://schemas.openxmlformats.org/drawingml/2006/main">
               <a:ext uri="{FF2B5EF4-FFF2-40B4-BE49-F238E27FC236}">
-                <a16:creationId xmlns:a16="http://schemas.microsoft.com/office/drawing/2014/main" id="{21E65246-B0CF-4A9B-85EB-8F2AC62CC847}"/>
+                <a16:creationId xmlns:a16="http://schemas.microsoft.com/office/drawing/2014/main" id="{93074CD6-539C-438B-8524-3BE66A9623C7}"/>
               </a:ext>
             </a:extLst>
           </p:cNvPr>
@@ -35645,10 +35645,10 @@
       </p:sp>
       <p:sp>
         <p:nvSpPr>
-          <p:cNvPr id="2" name="S26">
+          <p:cNvPr id="2" name="S27">
             <a:extLst xmlns:a="http://schemas.openxmlformats.org/drawingml/2006/main">
               <a:ext uri="{FF2B5EF4-FFF2-40B4-BE49-F238E27FC236}">
-                <a16:creationId xmlns:a16="http://schemas.microsoft.com/office/drawing/2014/main" id="{E2CDECCD-0C80-4C61-92C3-09D21C2337B9}"/>
+                <a16:creationId xmlns:a16="http://schemas.microsoft.com/office/drawing/2014/main" id="{3E12F743-2CD9-45E1-8331-56A19A2C3843}"/>
               </a:ext>
             </a:extLst>
           </p:cNvPr>
@@ -35796,7 +35796,7 @@
                 <a:ea typeface="Malgun Gothic"/>
                 <a:cs typeface="Malgun Gothic"/>
               </a:rPr>
-              <a:t>S26</a:t>
+              <a:t>S27</a:t>
             </a:r>
           </a:p>
         </p:txBody>
@@ -35806,7 +35806,7 @@
           <p:cNvPr id="3" name="정확한 정보도 계속 늘어난다">
             <a:extLst xmlns:a="http://schemas.openxmlformats.org/drawingml/2006/main">
               <a:ext uri="{FF2B5EF4-FFF2-40B4-BE49-F238E27FC236}">
-                <a16:creationId xmlns:a16="http://schemas.microsoft.com/office/drawing/2014/main" id="{69B880DD-2599-4B04-A882-3733B2521457}"/>
+                <a16:creationId xmlns:a16="http://schemas.microsoft.com/office/drawing/2014/main" id="{B15156A6-413B-4179-8B85-08105BA8ED71}"/>
               </a:ext>
             </a:extLst>
           </p:cNvPr>
@@ -35964,7 +35964,7 @@
           <p:cNvPr id="4" name="">
             <a:extLst xmlns:a="http://schemas.openxmlformats.org/drawingml/2006/main">
               <a:ext uri="{FF2B5EF4-FFF2-40B4-BE49-F238E27FC236}">
-                <a16:creationId xmlns:a16="http://schemas.microsoft.com/office/drawing/2014/main" id="{E9C84AE7-13F4-4FD5-8241-8BA46575E730}"/>
+                <a16:creationId xmlns:a16="http://schemas.microsoft.com/office/drawing/2014/main" id="{9D60CCAD-2C76-4DD2-A273-3EADA34F7764}"/>
               </a:ext>
             </a:extLst>
           </p:cNvPr>
@@ -35995,7 +35995,7 @@
           <p:cNvPr id="5" name="STATE-01 → STATE-02 · 실제 AGENTS.md 상태 비교">
             <a:extLst xmlns:a="http://schemas.openxmlformats.org/drawingml/2006/main">
               <a:ext uri="{FF2B5EF4-FFF2-40B4-BE49-F238E27FC236}">
-                <a16:creationId xmlns:a16="http://schemas.microsoft.com/office/drawing/2014/main" id="{BD458301-BEB9-4C95-811F-8DC30E9C6734}"/>
+                <a16:creationId xmlns:a16="http://schemas.microsoft.com/office/drawing/2014/main" id="{5CDC589E-08AF-4892-A37D-8CD76E787B99}"/>
               </a:ext>
             </a:extLst>
           </p:cNvPr>
@@ -36153,7 +36153,7 @@
           <p:cNvPr id="6" name="문서 크기는 상태 식별 정보 · Context 증가가 실패를 일으켰다는 근거는 아님">
             <a:extLst xmlns:a="http://schemas.openxmlformats.org/drawingml/2006/main">
               <a:ext uri="{FF2B5EF4-FFF2-40B4-BE49-F238E27FC236}">
-                <a16:creationId xmlns:a16="http://schemas.microsoft.com/office/drawing/2014/main" id="{3D522AD0-9648-4985-9110-4FDBFE1BF3D0}"/>
+                <a16:creationId xmlns:a16="http://schemas.microsoft.com/office/drawing/2014/main" id="{C97F4943-CBE8-4E0A-9D10-C97927DBFBD1}"/>
               </a:ext>
             </a:extLst>
           </p:cNvPr>
@@ -36311,7 +36311,7 @@
           <p:cNvPr id="7" name="STATE-01">
             <a:extLst xmlns:a="http://schemas.openxmlformats.org/drawingml/2006/main">
               <a:ext uri="{FF2B5EF4-FFF2-40B4-BE49-F238E27FC236}">
-                <a16:creationId xmlns:a16="http://schemas.microsoft.com/office/drawing/2014/main" id="{3E5A3276-9852-4730-A083-D459BFA5712F}"/>
+                <a16:creationId xmlns:a16="http://schemas.microsoft.com/office/drawing/2014/main" id="{DD597653-DA7C-4153-A685-6E60071DF5C3}"/>
               </a:ext>
             </a:extLst>
           </p:cNvPr>
@@ -36469,7 +36469,7 @@
           <p:cNvPr id="8" name="목적 · 실행 · 테스트&#10;기본 제약">
             <a:extLst xmlns:a="http://schemas.openxmlformats.org/drawingml/2006/main">
               <a:ext uri="{FF2B5EF4-FFF2-40B4-BE49-F238E27FC236}">
-                <a16:creationId xmlns:a16="http://schemas.microsoft.com/office/drawing/2014/main" id="{C07B7D1F-18EA-4F36-A9DA-E4F5370B5A7C}"/>
+                <a16:creationId xmlns:a16="http://schemas.microsoft.com/office/drawing/2014/main" id="{254119A8-4AE3-44FE-AB4A-E71B8B7B45F2}"/>
               </a:ext>
             </a:extLst>
           </p:cNvPr>
@@ -36650,7 +36650,7 @@
           <p:cNvPr id="9" name="15줄 · 567 bytes">
             <a:extLst xmlns:a="http://schemas.openxmlformats.org/drawingml/2006/main">
               <a:ext uri="{FF2B5EF4-FFF2-40B4-BE49-F238E27FC236}">
-                <a16:creationId xmlns:a16="http://schemas.microsoft.com/office/drawing/2014/main" id="{6FCE359E-06A6-48DE-8C1D-60F9C4952731}"/>
+                <a16:creationId xmlns:a16="http://schemas.microsoft.com/office/drawing/2014/main" id="{5D892670-7E35-4FCD-B420-D45A876CD9C9}"/>
               </a:ext>
             </a:extLst>
           </p:cNvPr>
@@ -36808,7 +36808,7 @@
           <p:cNvPr id="10" name="">
             <a:extLst xmlns:a="http://schemas.openxmlformats.org/drawingml/2006/main">
               <a:ext uri="{FF2B5EF4-FFF2-40B4-BE49-F238E27FC236}">
-                <a16:creationId xmlns:a16="http://schemas.microsoft.com/office/drawing/2014/main" id="{65491B48-186E-4108-BFF7-3077171246EF}"/>
+                <a16:creationId xmlns:a16="http://schemas.microsoft.com/office/drawing/2014/main" id="{5D5433DF-C44D-4331-A0C8-77D4515BF237}"/>
               </a:ext>
             </a:extLst>
           </p:cNvPr>
@@ -36838,7 +36838,7 @@
           <p:cNvPr id="11" name="STATE-02에 추가된 실제 정보">
             <a:extLst xmlns:a="http://schemas.openxmlformats.org/drawingml/2006/main">
               <a:ext uri="{FF2B5EF4-FFF2-40B4-BE49-F238E27FC236}">
-                <a16:creationId xmlns:a16="http://schemas.microsoft.com/office/drawing/2014/main" id="{731094C6-BE24-4BA7-8111-443F016DE69D}"/>
+                <a16:creationId xmlns:a16="http://schemas.microsoft.com/office/drawing/2014/main" id="{21D97A0B-13D6-4351-BDBE-D177E403BE0D}"/>
               </a:ext>
             </a:extLst>
           </p:cNvPr>
@@ -36996,7 +36996,7 @@
           <p:cNvPr id="12" name="">
             <a:extLst xmlns:a="http://schemas.openxmlformats.org/drawingml/2006/main">
               <a:ext uri="{FF2B5EF4-FFF2-40B4-BE49-F238E27FC236}">
-                <a16:creationId xmlns:a16="http://schemas.microsoft.com/office/drawing/2014/main" id="{AFB7FFD8-238F-48E1-8A3C-11238BE6644F}"/>
+                <a16:creationId xmlns:a16="http://schemas.microsoft.com/office/drawing/2014/main" id="{37FD8FE8-345F-43D7-862D-03D68B8B0FB1}"/>
               </a:ext>
             </a:extLst>
           </p:cNvPr>
@@ -37027,7 +37027,7 @@
           <p:cNvPr id="13" name="처리 순서">
             <a:extLst xmlns:a="http://schemas.openxmlformats.org/drawingml/2006/main">
               <a:ext uri="{FF2B5EF4-FFF2-40B4-BE49-F238E27FC236}">
-                <a16:creationId xmlns:a16="http://schemas.microsoft.com/office/drawing/2014/main" id="{09CFCBB6-F43C-406F-8F56-ACC14DDD20EB}"/>
+                <a16:creationId xmlns:a16="http://schemas.microsoft.com/office/drawing/2014/main" id="{179CC1F2-F4DB-406D-A372-18F1348186E4}"/>
               </a:ext>
             </a:extLst>
           </p:cNvPr>
@@ -37185,7 +37185,7 @@
           <p:cNvPr id="14" name="load → normalize → … → write">
             <a:extLst xmlns:a="http://schemas.openxmlformats.org/drawingml/2006/main">
               <a:ext uri="{FF2B5EF4-FFF2-40B4-BE49-F238E27FC236}">
-                <a16:creationId xmlns:a16="http://schemas.microsoft.com/office/drawing/2014/main" id="{28CC6E4E-21B7-4B01-858E-97917D729AE0}"/>
+                <a16:creationId xmlns:a16="http://schemas.microsoft.com/office/drawing/2014/main" id="{C73B7985-B905-4C04-95CE-668EEEE89C01}"/>
               </a:ext>
             </a:extLst>
           </p:cNvPr>
@@ -37343,7 +37343,7 @@
           <p:cNvPr id="15" name="">
             <a:extLst xmlns:a="http://schemas.openxmlformats.org/drawingml/2006/main">
               <a:ext uri="{FF2B5EF4-FFF2-40B4-BE49-F238E27FC236}">
-                <a16:creationId xmlns:a16="http://schemas.microsoft.com/office/drawing/2014/main" id="{6F230B4A-5DF7-4F6A-ADCB-2923972A933C}"/>
+                <a16:creationId xmlns:a16="http://schemas.microsoft.com/office/drawing/2014/main" id="{99841428-3A87-44FB-AFF4-23A24BBA168D}"/>
               </a:ext>
             </a:extLst>
           </p:cNvPr>
@@ -37374,7 +37374,7 @@
           <p:cNvPr id="16" name="이미지 계약">
             <a:extLst xmlns:a="http://schemas.openxmlformats.org/drawingml/2006/main">
               <a:ext uri="{FF2B5EF4-FFF2-40B4-BE49-F238E27FC236}">
-                <a16:creationId xmlns:a16="http://schemas.microsoft.com/office/drawing/2014/main" id="{6B8008E9-0F22-49EB-B753-70732BAFDE84}"/>
+                <a16:creationId xmlns:a16="http://schemas.microsoft.com/office/drawing/2014/main" id="{76AE66C8-D56E-4B43-8910-1F86775BCCDA}"/>
               </a:ext>
             </a:extLst>
           </p:cNvPr>
@@ -37532,7 +37532,7 @@
           <p:cNvPr id="17" name="crop: [x_start, x_end)">
             <a:extLst xmlns:a="http://schemas.openxmlformats.org/drawingml/2006/main">
               <a:ext uri="{FF2B5EF4-FFF2-40B4-BE49-F238E27FC236}">
-                <a16:creationId xmlns:a16="http://schemas.microsoft.com/office/drawing/2014/main" id="{D3B9155B-FBAC-49EF-8045-22F0AEF50364}"/>
+                <a16:creationId xmlns:a16="http://schemas.microsoft.com/office/drawing/2014/main" id="{9025308A-F871-44EF-8214-BED9F61B4854}"/>
               </a:ext>
             </a:extLst>
           </p:cNvPr>
@@ -37690,7 +37690,7 @@
           <p:cNvPr id="18" name="">
             <a:extLst xmlns:a="http://schemas.openxmlformats.org/drawingml/2006/main">
               <a:ext uri="{FF2B5EF4-FFF2-40B4-BE49-F238E27FC236}">
-                <a16:creationId xmlns:a16="http://schemas.microsoft.com/office/drawing/2014/main" id="{55A8B815-DDD1-4442-917F-2186B4C83054}"/>
+                <a16:creationId xmlns:a16="http://schemas.microsoft.com/office/drawing/2014/main" id="{89F190D8-4E88-4C91-97BB-436956656F77}"/>
               </a:ext>
             </a:extLst>
           </p:cNvPr>
@@ -37721,7 +37721,7 @@
           <p:cNvPr id="19" name="테스트 구조">
             <a:extLst xmlns:a="http://schemas.openxmlformats.org/drawingml/2006/main">
               <a:ext uri="{FF2B5EF4-FFF2-40B4-BE49-F238E27FC236}">
-                <a16:creationId xmlns:a16="http://schemas.microsoft.com/office/drawing/2014/main" id="{91625D66-92C3-46E8-AC2A-42C5D9FE8E3B}"/>
+                <a16:creationId xmlns:a16="http://schemas.microsoft.com/office/drawing/2014/main" id="{931B34E3-7737-4A02-8EAC-53C9FA0EC9EA}"/>
               </a:ext>
             </a:extLst>
           </p:cNvPr>
@@ -37879,7 +37879,7 @@
           <p:cNvPr id="20" name="tests/test_pipeline.py">
             <a:extLst xmlns:a="http://schemas.openxmlformats.org/drawingml/2006/main">
               <a:ext uri="{FF2B5EF4-FFF2-40B4-BE49-F238E27FC236}">
-                <a16:creationId xmlns:a16="http://schemas.microsoft.com/office/drawing/2014/main" id="{9598B268-6B0B-4E18-9860-3C6E6C74F16C}"/>
+                <a16:creationId xmlns:a16="http://schemas.microsoft.com/office/drawing/2014/main" id="{5F1DFA9F-D520-4E02-A8F4-537D67846252}"/>
               </a:ext>
             </a:extLst>
           </p:cNvPr>
@@ -38037,7 +38037,7 @@
           <p:cNvPr id="21" name="">
             <a:extLst xmlns:a="http://schemas.openxmlformats.org/drawingml/2006/main">
               <a:ext uri="{FF2B5EF4-FFF2-40B4-BE49-F238E27FC236}">
-                <a16:creationId xmlns:a16="http://schemas.microsoft.com/office/drawing/2014/main" id="{F8229BDE-974D-4F18-8A6A-779D34A9F9FC}"/>
+                <a16:creationId xmlns:a16="http://schemas.microsoft.com/office/drawing/2014/main" id="{613B93ED-6502-4941-943F-A67E6F021411}"/>
               </a:ext>
             </a:extLst>
           </p:cNvPr>
@@ -38068,7 +38068,7 @@
           <p:cNvPr id="22" name="CLI 출력">
             <a:extLst xmlns:a="http://schemas.openxmlformats.org/drawingml/2006/main">
               <a:ext uri="{FF2B5EF4-FFF2-40B4-BE49-F238E27FC236}">
-                <a16:creationId xmlns:a16="http://schemas.microsoft.com/office/drawing/2014/main" id="{5EE93A35-32BD-4118-A920-FDABC95C44F4}"/>
+                <a16:creationId xmlns:a16="http://schemas.microsoft.com/office/drawing/2014/main" id="{3236FBC8-383E-44E3-A313-8BCDC603F42E}"/>
               </a:ext>
             </a:extLst>
           </p:cNvPr>
@@ -38226,7 +38226,7 @@
           <p:cNvPr id="23" name="width · height · pixel_count …">
             <a:extLst xmlns:a="http://schemas.openxmlformats.org/drawingml/2006/main">
               <a:ext uri="{FF2B5EF4-FFF2-40B4-BE49-F238E27FC236}">
-                <a16:creationId xmlns:a16="http://schemas.microsoft.com/office/drawing/2014/main" id="{99B4558F-4B2A-43E9-8ACB-3137DBD78FE7}"/>
+                <a16:creationId xmlns:a16="http://schemas.microsoft.com/office/drawing/2014/main" id="{1B480C39-14C1-4B35-ABB7-B4EA75A5F3E8}"/>
               </a:ext>
             </a:extLst>
           </p:cNvPr>
@@ -38384,7 +38384,7 @@
           <p:cNvPr id="24" name="32줄 · 1,303 bytes">
             <a:extLst xmlns:a="http://schemas.openxmlformats.org/drawingml/2006/main">
               <a:ext uri="{FF2B5EF4-FFF2-40B4-BE49-F238E27FC236}">
-                <a16:creationId xmlns:a16="http://schemas.microsoft.com/office/drawing/2014/main" id="{DDE65E30-EE3B-4F24-A0A4-3FC8AD521F8A}"/>
+                <a16:creationId xmlns:a16="http://schemas.microsoft.com/office/drawing/2014/main" id="{BC85A8AC-6DB5-4C19-B7F0-1D5E1AC26F3A}"/>
               </a:ext>
             </a:extLst>
           </p:cNvPr>
@@ -38542,7 +38542,7 @@
           <p:cNvPr id="25" name="이번 Task에도 필요할까?">
             <a:extLst xmlns:a="http://schemas.openxmlformats.org/drawingml/2006/main">
               <a:ext uri="{FF2B5EF4-FFF2-40B4-BE49-F238E27FC236}">
-                <a16:creationId xmlns:a16="http://schemas.microsoft.com/office/drawing/2014/main" id="{CD34DFD8-EB0E-4944-96D8-C998D9003B0F}"/>
+                <a16:creationId xmlns:a16="http://schemas.microsoft.com/office/drawing/2014/main" id="{D70BF8F9-E2E8-4959-BF45-1D2D0EB28A26}"/>
               </a:ext>
             </a:extLst>
           </p:cNvPr>
@@ -38700,7 +38700,7 @@
           <p:cNvPr id="26" name="Legacy module connection">
             <a:extLst xmlns:a="http://schemas.openxmlformats.org/drawingml/2006/main">
               <a:ext uri="{FF2B5EF4-FFF2-40B4-BE49-F238E27FC236}">
-                <a16:creationId xmlns:a16="http://schemas.microsoft.com/office/drawing/2014/main" id="{C3460C20-D3A8-4614-BB48-63D449F2CC57}"/>
+                <a16:creationId xmlns:a16="http://schemas.microsoft.com/office/drawing/2014/main" id="{5147E33E-CC8D-4151-A7B8-500508F515A2}"/>
               </a:ext>
             </a:extLst>
           </p:cNvPr>
@@ -38856,7 +38856,7 @@
     </p:spTree>
     <p:extLst>
       <p:ext uri="{BB962C8B-B14F-4D97-AF65-F5344CB8AC3E}">
-        <p14:creationId xmlns:p14="http://schemas.microsoft.com/office/powerpoint/2010/main" val="557979166"/>
+        <p14:creationId xmlns:p14="http://schemas.microsoft.com/office/powerpoint/2010/main" val="992709160"/>
       </p:ext>
     </p:extLst>
   </p:cSld>
@@ -38887,7 +38887,7 @@
           <p:cNvPr id="17" name="ACT 2 · 관련성을 확인하기">
             <a:extLst xmlns:a="http://schemas.openxmlformats.org/drawingml/2006/main">
               <a:ext uri="{FF2B5EF4-FFF2-40B4-BE49-F238E27FC236}">
-                <a16:creationId xmlns:a16="http://schemas.microsoft.com/office/drawing/2014/main" id="{C6DEC060-98E4-40E2-9635-0A0AF0D1C6B0}"/>
+                <a16:creationId xmlns:a16="http://schemas.microsoft.com/office/drawing/2014/main" id="{24E840A6-3F5E-4548-990B-84D0995106BA}"/>
               </a:ext>
             </a:extLst>
           </p:cNvPr>
@@ -39042,10 +39042,10 @@
       </p:sp>
       <p:sp>
         <p:nvSpPr>
-          <p:cNvPr id="2" name="S27">
+          <p:cNvPr id="2" name="S28">
             <a:extLst xmlns:a="http://schemas.openxmlformats.org/drawingml/2006/main">
               <a:ext uri="{FF2B5EF4-FFF2-40B4-BE49-F238E27FC236}">
-                <a16:creationId xmlns:a16="http://schemas.microsoft.com/office/drawing/2014/main" id="{12CD205B-ED13-4948-B606-A0DB01D7DC1D}"/>
+                <a16:creationId xmlns:a16="http://schemas.microsoft.com/office/drawing/2014/main" id="{83702BA9-6765-44F9-A3EA-16E55BF382B0}"/>
               </a:ext>
             </a:extLst>
           </p:cNvPr>
@@ -39193,7 +39193,7 @@
                 <a:ea typeface="Malgun Gothic"/>
                 <a:cs typeface="Malgun Gothic"/>
               </a:rPr>
-              <a:t>S27</a:t>
+              <a:t>S28</a:t>
             </a:r>
           </a:p>
         </p:txBody>
@@ -39203,7 +39203,7 @@
           <p:cNvPr id="3" name="정확하지만 이번 Task에는 불필요한 정보">
             <a:extLst xmlns:a="http://schemas.openxmlformats.org/drawingml/2006/main">
               <a:ext uri="{FF2B5EF4-FFF2-40B4-BE49-F238E27FC236}">
-                <a16:creationId xmlns:a16="http://schemas.microsoft.com/office/drawing/2014/main" id="{ECEC04FF-CC80-46C6-BA8B-8CCF20BE07A0}"/>
+                <a16:creationId xmlns:a16="http://schemas.microsoft.com/office/drawing/2014/main" id="{6DCFB517-301C-47D6-82A3-4C2718F93730}"/>
               </a:ext>
             </a:extLst>
           </p:cNvPr>
@@ -39361,7 +39361,7 @@
           <p:cNvPr id="4" name="">
             <a:extLst xmlns:a="http://schemas.openxmlformats.org/drawingml/2006/main">
               <a:ext uri="{FF2B5EF4-FFF2-40B4-BE49-F238E27FC236}">
-                <a16:creationId xmlns:a16="http://schemas.microsoft.com/office/drawing/2014/main" id="{C06464AA-3887-4B15-BEFF-B33C355366AB}"/>
+                <a16:creationId xmlns:a16="http://schemas.microsoft.com/office/drawing/2014/main" id="{7140FEB2-523D-4DF0-9B7A-47EAA4382E39}"/>
               </a:ext>
             </a:extLst>
           </p:cNvPr>
@@ -39392,7 +39392,7 @@
           <p:cNvPr id="5" name="TRIAL-004 · README의 build tools 안내를 명확히 하는 작업">
             <a:extLst xmlns:a="http://schemas.openxmlformats.org/drawingml/2006/main">
               <a:ext uri="{FF2B5EF4-FFF2-40B4-BE49-F238E27FC236}">
-                <a16:creationId xmlns:a16="http://schemas.microsoft.com/office/drawing/2014/main" id="{672E6479-5B59-4A35-A31B-A6AF5E7B819C}"/>
+                <a16:creationId xmlns:a16="http://schemas.microsoft.com/office/drawing/2014/main" id="{1F1D9421-CB81-4BCE-85BA-936236CB6719}"/>
               </a:ext>
             </a:extLst>
           </p:cNvPr>
@@ -39550,7 +39550,7 @@
           <p:cNvPr id="6" name="Agent 혼란과 Context 관련 실패는 관찰되지 않았다">
             <a:extLst xmlns:a="http://schemas.openxmlformats.org/drawingml/2006/main">
               <a:ext uri="{FF2B5EF4-FFF2-40B4-BE49-F238E27FC236}">
-                <a16:creationId xmlns:a16="http://schemas.microsoft.com/office/drawing/2014/main" id="{F8E6CE3B-1476-447E-9369-B3BC520851D6}"/>
+                <a16:creationId xmlns:a16="http://schemas.microsoft.com/office/drawing/2014/main" id="{27F0E951-8F7E-4EEB-B575-DBEE880F76A4}"/>
               </a:ext>
             </a:extLst>
           </p:cNvPr>
@@ -39708,7 +39708,7 @@
           <p:cNvPr id="7" name="작업: README의 빌드 도구 안내를 고친다">
             <a:extLst xmlns:a="http://schemas.openxmlformats.org/drawingml/2006/main">
               <a:ext uri="{FF2B5EF4-FFF2-40B4-BE49-F238E27FC236}">
-                <a16:creationId xmlns:a16="http://schemas.microsoft.com/office/drawing/2014/main" id="{1A4A3397-DADD-41F0-8602-C6BDCD5E85CE}"/>
+                <a16:creationId xmlns:a16="http://schemas.microsoft.com/office/drawing/2014/main" id="{24761129-D9FF-481C-B9E9-E86E8747B7BB}"/>
               </a:ext>
             </a:extLst>
           </p:cNvPr>
@@ -39866,7 +39866,7 @@
           <p:cNvPr id="8" name="이번 질문과 직접 관련">
             <a:extLst xmlns:a="http://schemas.openxmlformats.org/drawingml/2006/main">
               <a:ext uri="{FF2B5EF4-FFF2-40B4-BE49-F238E27FC236}">
-                <a16:creationId xmlns:a16="http://schemas.microsoft.com/office/drawing/2014/main" id="{F6B981D5-5750-47BC-8598-B95BE34114F4}"/>
+                <a16:creationId xmlns:a16="http://schemas.microsoft.com/office/drawing/2014/main" id="{4D70BC53-7521-4ED3-9302-EAF6F3B1A56E}"/>
               </a:ext>
             </a:extLst>
           </p:cNvPr>
@@ -40024,7 +40024,7 @@
           <p:cNvPr id="9" name="함께 있었지만 관련이 낮은 정보">
             <a:extLst xmlns:a="http://schemas.openxmlformats.org/drawingml/2006/main">
               <a:ext uri="{FF2B5EF4-FFF2-40B4-BE49-F238E27FC236}">
-                <a16:creationId xmlns:a16="http://schemas.microsoft.com/office/drawing/2014/main" id="{04AE9457-3B35-44AF-9F0F-E43FB8ACF788}"/>
+                <a16:creationId xmlns:a16="http://schemas.microsoft.com/office/drawing/2014/main" id="{73625BB2-8D61-4E29-A984-ABAB7FFF4288}"/>
               </a:ext>
             </a:extLst>
           </p:cNvPr>
@@ -40182,7 +40182,7 @@
           <p:cNvPr id="10" name="">
             <a:extLst xmlns:a="http://schemas.openxmlformats.org/drawingml/2006/main">
               <a:ext uri="{FF2B5EF4-FFF2-40B4-BE49-F238E27FC236}">
-                <a16:creationId xmlns:a16="http://schemas.microsoft.com/office/drawing/2014/main" id="{6AA4091E-C715-40CB-B3C1-500EC0C475A5}"/>
+                <a16:creationId xmlns:a16="http://schemas.microsoft.com/office/drawing/2014/main" id="{FDB01741-FF18-4E7F-8268-3A4D27EDC56B}"/>
               </a:ext>
             </a:extLst>
           </p:cNvPr>
@@ -40213,7 +40213,7 @@
           <p:cNvPr id="11" name="">
             <a:extLst xmlns:a="http://schemas.openxmlformats.org/drawingml/2006/main">
               <a:ext uri="{FF2B5EF4-FFF2-40B4-BE49-F238E27FC236}">
-                <a16:creationId xmlns:a16="http://schemas.microsoft.com/office/drawing/2014/main" id="{B423EF5D-93E5-44D9-AABB-0BB2DFABB08D}"/>
+                <a16:creationId xmlns:a16="http://schemas.microsoft.com/office/drawing/2014/main" id="{50C34739-CB2C-400A-9CD5-CA3D7F1EBB45}"/>
               </a:ext>
             </a:extLst>
           </p:cNvPr>
@@ -40244,7 +40244,7 @@
           <p:cNvPr id="12" name="">
             <a:extLst xmlns:a="http://schemas.openxmlformats.org/drawingml/2006/main">
               <a:ext uri="{FF2B5EF4-FFF2-40B4-BE49-F238E27FC236}">
-                <a16:creationId xmlns:a16="http://schemas.microsoft.com/office/drawing/2014/main" id="{62B98010-3DC5-4DEB-AF78-5280AF98335E}"/>
+                <a16:creationId xmlns:a16="http://schemas.microsoft.com/office/drawing/2014/main" id="{EB4681EA-DCC6-4D01-A682-FC0E6388759A}"/>
               </a:ext>
             </a:extLst>
           </p:cNvPr>
@@ -40275,7 +40275,7 @@
           <p:cNvPr id="13" name="README&#10;pyproject.toml의 빌드 설정">
             <a:extLst xmlns:a="http://schemas.openxmlformats.org/drawingml/2006/main">
               <a:ext uri="{FF2B5EF4-FFF2-40B4-BE49-F238E27FC236}">
-                <a16:creationId xmlns:a16="http://schemas.microsoft.com/office/drawing/2014/main" id="{4BDC70A2-B9BC-4FDB-85BB-5DDCC37725DA}"/>
+                <a16:creationId xmlns:a16="http://schemas.microsoft.com/office/drawing/2014/main" id="{233E8564-4E85-43A1-9CB5-67893F39FF66}"/>
               </a:ext>
             </a:extLst>
           </p:cNvPr>
@@ -40456,7 +40456,7 @@
           <p:cNvPr id="14" name="crop / resize 계약&#10;이미지 처리 pipeline 세부사항">
             <a:extLst xmlns:a="http://schemas.openxmlformats.org/drawingml/2006/main">
               <a:ext uri="{FF2B5EF4-FFF2-40B4-BE49-F238E27FC236}">
-                <a16:creationId xmlns:a16="http://schemas.microsoft.com/office/drawing/2014/main" id="{3AB63866-5314-4CF8-91FE-8892E67999A2}"/>
+                <a16:creationId xmlns:a16="http://schemas.microsoft.com/office/drawing/2014/main" id="{08204108-1714-44EB-B3B1-E9C3E2E31B1F}"/>
               </a:ext>
             </a:extLst>
           </p:cNvPr>
@@ -40637,7 +40637,7 @@
           <p:cNvPr id="15" name="정확한 정보라도, 모든 질문에 필요한 것은 아니다">
             <a:extLst xmlns:a="http://schemas.openxmlformats.org/drawingml/2006/main">
               <a:ext uri="{FF2B5EF4-FFF2-40B4-BE49-F238E27FC236}">
-                <a16:creationId xmlns:a16="http://schemas.microsoft.com/office/drawing/2014/main" id="{EAC1957B-2299-4A00-AD3A-A71C39F949FF}"/>
+                <a16:creationId xmlns:a16="http://schemas.microsoft.com/office/drawing/2014/main" id="{6EF991D4-AB2A-40FC-84FB-BF219A71AF54}"/>
               </a:ext>
             </a:extLst>
           </p:cNvPr>
@@ -40795,7 +40795,7 @@
           <p:cNvPr id="16" name="Legacy module connection">
             <a:extLst xmlns:a="http://schemas.openxmlformats.org/drawingml/2006/main">
               <a:ext uri="{FF2B5EF4-FFF2-40B4-BE49-F238E27FC236}">
-                <a16:creationId xmlns:a16="http://schemas.microsoft.com/office/drawing/2014/main" id="{4F3C45A9-636B-4F36-A13A-4E3863E10A23}"/>
+                <a16:creationId xmlns:a16="http://schemas.microsoft.com/office/drawing/2014/main" id="{C4BF3782-9D84-44CC-99DC-8337D56D3B87}"/>
               </a:ext>
             </a:extLst>
           </p:cNvPr>
@@ -40951,7 +40951,7 @@
     </p:spTree>
     <p:extLst>
       <p:ext uri="{BB962C8B-B14F-4D97-AF65-F5344CB8AC3E}">
-        <p14:creationId xmlns:p14="http://schemas.microsoft.com/office/powerpoint/2010/main" val="677995907"/>
+        <p14:creationId xmlns:p14="http://schemas.microsoft.com/office/powerpoint/2010/main" val="1960805026"/>
       </p:ext>
     </p:extLst>
   </p:cSld>
@@ -40982,7 +40982,7 @@
           <p:cNvPr id="20" name="ACT 2 · 언제 필요한 정보인가">
             <a:extLst xmlns:a="http://schemas.openxmlformats.org/drawingml/2006/main">
               <a:ext uri="{FF2B5EF4-FFF2-40B4-BE49-F238E27FC236}">
-                <a16:creationId xmlns:a16="http://schemas.microsoft.com/office/drawing/2014/main" id="{F7E705C4-CBBA-4C4C-A6DA-F049FDD8EE5D}"/>
+                <a16:creationId xmlns:a16="http://schemas.microsoft.com/office/drawing/2014/main" id="{B76A332C-9E81-4A79-AA68-68C3B923033E}"/>
               </a:ext>
             </a:extLst>
           </p:cNvPr>
@@ -41137,10 +41137,10 @@
       </p:sp>
       <p:sp>
         <p:nvSpPr>
-          <p:cNvPr id="2" name="S28">
+          <p:cNvPr id="2" name="S29">
             <a:extLst xmlns:a="http://schemas.openxmlformats.org/drawingml/2006/main">
               <a:ext uri="{FF2B5EF4-FFF2-40B4-BE49-F238E27FC236}">
-                <a16:creationId xmlns:a16="http://schemas.microsoft.com/office/drawing/2014/main" id="{7392D531-0B8E-4156-8715-5C6560AB80A3}"/>
+                <a16:creationId xmlns:a16="http://schemas.microsoft.com/office/drawing/2014/main" id="{616ED2D7-1A53-401B-B019-0EE43F7D921D}"/>
               </a:ext>
             </a:extLst>
           </p:cNvPr>
@@ -41288,7 +41288,7 @@
                 <a:ea typeface="Malgun Gothic"/>
                 <a:cs typeface="Malgun Gothic"/>
               </a:rPr>
-              <a:t>S28</a:t>
+              <a:t>S29</a:t>
             </a:r>
           </a:p>
         </p:txBody>
@@ -41298,7 +41298,7 @@
           <p:cNvPr id="3" name="정보의 범위와 제공 시점">
             <a:extLst xmlns:a="http://schemas.openxmlformats.org/drawingml/2006/main">
               <a:ext uri="{FF2B5EF4-FFF2-40B4-BE49-F238E27FC236}">
-                <a16:creationId xmlns:a16="http://schemas.microsoft.com/office/drawing/2014/main" id="{5C063AB8-4099-46A9-B13E-CC2BC2226326}"/>
+                <a16:creationId xmlns:a16="http://schemas.microsoft.com/office/drawing/2014/main" id="{D373FB9F-F85E-44FA-A1AB-996A8FDF9ACF}"/>
               </a:ext>
             </a:extLst>
           </p:cNvPr>
@@ -41456,7 +41456,7 @@
           <p:cNvPr id="4" name="">
             <a:extLst xmlns:a="http://schemas.openxmlformats.org/drawingml/2006/main">
               <a:ext uri="{FF2B5EF4-FFF2-40B4-BE49-F238E27FC236}">
-                <a16:creationId xmlns:a16="http://schemas.microsoft.com/office/drawing/2014/main" id="{96B9314F-5102-49FE-8186-00E98BEBDE2F}"/>
+                <a16:creationId xmlns:a16="http://schemas.microsoft.com/office/drawing/2014/main" id="{BFAC3F30-070A-49FF-B9E8-E01488E377A4}"/>
               </a:ext>
             </a:extLst>
           </p:cNvPr>
@@ -41487,7 +41487,7 @@
           <p:cNvPr id="5" name="교육용 분류 모델 · OpenAI의 공식 기능 분류가 아님">
             <a:extLst xmlns:a="http://schemas.openxmlformats.org/drawingml/2006/main">
               <a:ext uri="{FF2B5EF4-FFF2-40B4-BE49-F238E27FC236}">
-                <a16:creationId xmlns:a16="http://schemas.microsoft.com/office/drawing/2014/main" id="{49DC0581-7D7B-4CA5-9931-CFF58FCDB824}"/>
+                <a16:creationId xmlns:a16="http://schemas.microsoft.com/office/drawing/2014/main" id="{BD8D5CE3-E8D9-4BC7-95D5-3C8745056194}"/>
               </a:ext>
             </a:extLst>
           </p:cNvPr>
@@ -41645,7 +41645,7 @@
           <p:cNvPr id="6" name="성능 조사 절차는 설명을 위한 예시이며 STATE-02에 저장돼 있었다는 뜻이 아님">
             <a:extLst xmlns:a="http://schemas.openxmlformats.org/drawingml/2006/main">
               <a:ext uri="{FF2B5EF4-FFF2-40B4-BE49-F238E27FC236}">
-                <a16:creationId xmlns:a16="http://schemas.microsoft.com/office/drawing/2014/main" id="{E114A439-6D31-485C-8108-91F902D5D3AD}"/>
+                <a16:creationId xmlns:a16="http://schemas.microsoft.com/office/drawing/2014/main" id="{D4CDF2A8-378A-477C-B2DE-60B563695ADA}"/>
               </a:ext>
             </a:extLst>
           </p:cNvPr>
@@ -41803,7 +41803,7 @@
           <p:cNvPr id="7" name="">
             <a:extLst xmlns:a="http://schemas.openxmlformats.org/drawingml/2006/main">
               <a:ext uri="{FF2B5EF4-FFF2-40B4-BE49-F238E27FC236}">
-                <a16:creationId xmlns:a16="http://schemas.microsoft.com/office/drawing/2014/main" id="{235887FE-2CFA-4803-AE68-163DE256C3E6}"/>
+                <a16:creationId xmlns:a16="http://schemas.microsoft.com/office/drawing/2014/main" id="{00161FDD-9672-41A9-B2C2-422E1204B458}"/>
               </a:ext>
             </a:extLst>
           </p:cNvPr>
@@ -41834,7 +41834,7 @@
           <p:cNvPr id="8" name="항상 알아야 할 안내">
             <a:extLst xmlns:a="http://schemas.openxmlformats.org/drawingml/2006/main">
               <a:ext uri="{FF2B5EF4-FFF2-40B4-BE49-F238E27FC236}">
-                <a16:creationId xmlns:a16="http://schemas.microsoft.com/office/drawing/2014/main" id="{789D18E7-2788-4BC7-A057-54180DFFE7DE}"/>
+                <a16:creationId xmlns:a16="http://schemas.microsoft.com/office/drawing/2014/main" id="{C771CDC4-F9A5-4E3D-A612-6385174045F5}"/>
               </a:ext>
             </a:extLst>
           </p:cNvPr>
@@ -41992,7 +41992,7 @@
           <p:cNvPr id="9" name="프로젝트 목적 · 기본 제약">
             <a:extLst xmlns:a="http://schemas.openxmlformats.org/drawingml/2006/main">
               <a:ext uri="{FF2B5EF4-FFF2-40B4-BE49-F238E27FC236}">
-                <a16:creationId xmlns:a16="http://schemas.microsoft.com/office/drawing/2014/main" id="{4011DD17-BB89-4B6C-B92B-340766CE7144}"/>
+                <a16:creationId xmlns:a16="http://schemas.microsoft.com/office/drawing/2014/main" id="{12F27B09-0789-4810-B081-B5E7DEFB4D75}"/>
               </a:ext>
             </a:extLst>
           </p:cNvPr>
@@ -42150,7 +42150,7 @@
           <p:cNvPr id="10" name="ALWAYS-ON">
             <a:extLst xmlns:a="http://schemas.openxmlformats.org/drawingml/2006/main">
               <a:ext uri="{FF2B5EF4-FFF2-40B4-BE49-F238E27FC236}">
-                <a16:creationId xmlns:a16="http://schemas.microsoft.com/office/drawing/2014/main" id="{EC8BBE1B-BFB0-450D-A8F7-74AB449DF4A2}"/>
+                <a16:creationId xmlns:a16="http://schemas.microsoft.com/office/drawing/2014/main" id="{AEF0084F-C9DF-43B8-9E83-34768CF6F871}"/>
               </a:ext>
             </a:extLst>
           </p:cNvPr>
@@ -42308,7 +42308,7 @@
           <p:cNvPr id="11" name="">
             <a:extLst xmlns:a="http://schemas.openxmlformats.org/drawingml/2006/main">
               <a:ext uri="{FF2B5EF4-FFF2-40B4-BE49-F238E27FC236}">
-                <a16:creationId xmlns:a16="http://schemas.microsoft.com/office/drawing/2014/main" id="{514D149E-2986-49DB-94E3-53B3E78473C4}"/>
+                <a16:creationId xmlns:a16="http://schemas.microsoft.com/office/drawing/2014/main" id="{A1419FAB-754D-4EC1-B254-42F5D184A2DF}"/>
               </a:ext>
             </a:extLst>
           </p:cNvPr>
@@ -42339,7 +42339,7 @@
           <p:cNvPr id="12" name="질문에 따라 찾아볼 상세">
             <a:extLst xmlns:a="http://schemas.openxmlformats.org/drawingml/2006/main">
               <a:ext uri="{FF2B5EF4-FFF2-40B4-BE49-F238E27FC236}">
-                <a16:creationId xmlns:a16="http://schemas.microsoft.com/office/drawing/2014/main" id="{5E8CCE0A-573E-49F1-BB19-8A7FA9A1C109}"/>
+                <a16:creationId xmlns:a16="http://schemas.microsoft.com/office/drawing/2014/main" id="{DA741A5A-57AA-4F3A-AA2C-5624060BB566}"/>
               </a:ext>
             </a:extLst>
           </p:cNvPr>
@@ -42497,7 +42497,7 @@
           <p:cNvPr id="13" name="crop 계약 · 모듈 구조">
             <a:extLst xmlns:a="http://schemas.openxmlformats.org/drawingml/2006/main">
               <a:ext uri="{FF2B5EF4-FFF2-40B4-BE49-F238E27FC236}">
-                <a16:creationId xmlns:a16="http://schemas.microsoft.com/office/drawing/2014/main" id="{53B55AFD-7BB2-44D7-A7BD-4BC8629CF86A}"/>
+                <a16:creationId xmlns:a16="http://schemas.microsoft.com/office/drawing/2014/main" id="{D8239EAB-BEE5-4F16-BCB3-B24587D35BB8}"/>
               </a:ext>
             </a:extLst>
           </p:cNvPr>
@@ -42655,7 +42655,7 @@
           <p:cNvPr id="14" name="ON-DEMAND">
             <a:extLst xmlns:a="http://schemas.openxmlformats.org/drawingml/2006/main">
               <a:ext uri="{FF2B5EF4-FFF2-40B4-BE49-F238E27FC236}">
-                <a16:creationId xmlns:a16="http://schemas.microsoft.com/office/drawing/2014/main" id="{375BD9AD-26DA-48FB-B604-51618B902F2A}"/>
+                <a16:creationId xmlns:a16="http://schemas.microsoft.com/office/drawing/2014/main" id="{65721B4F-7C34-4FFD-8174-06D967E8D868}"/>
               </a:ext>
             </a:extLst>
           </p:cNvPr>
@@ -42813,7 +42813,7 @@
           <p:cNvPr id="15" name="">
             <a:extLst xmlns:a="http://schemas.openxmlformats.org/drawingml/2006/main">
               <a:ext uri="{FF2B5EF4-FFF2-40B4-BE49-F238E27FC236}">
-                <a16:creationId xmlns:a16="http://schemas.microsoft.com/office/drawing/2014/main" id="{54A6AA95-7457-4952-83F2-2CA7A0236FBF}"/>
+                <a16:creationId xmlns:a16="http://schemas.microsoft.com/office/drawing/2014/main" id="{A0665B7D-4EB1-4056-8A82-6C10D995F4C4}"/>
               </a:ext>
             </a:extLst>
           </p:cNvPr>
@@ -42844,7 +42844,7 @@
           <p:cNvPr id="16" name="이런 일을 수행하는 방법">
             <a:extLst xmlns:a="http://schemas.openxmlformats.org/drawingml/2006/main">
               <a:ext uri="{FF2B5EF4-FFF2-40B4-BE49-F238E27FC236}">
-                <a16:creationId xmlns:a16="http://schemas.microsoft.com/office/drawing/2014/main" id="{82CB7E2D-EE10-4E75-9841-17442EBE2328}"/>
+                <a16:creationId xmlns:a16="http://schemas.microsoft.com/office/drawing/2014/main" id="{03BD394B-124A-455A-8F77-1F5E5E9D6C72}"/>
               </a:ext>
             </a:extLst>
           </p:cNvPr>
@@ -43002,7 +43002,7 @@
           <p:cNvPr id="17" name="변경 전 측정 → 조사 → 검증">
             <a:extLst xmlns:a="http://schemas.openxmlformats.org/drawingml/2006/main">
               <a:ext uri="{FF2B5EF4-FFF2-40B4-BE49-F238E27FC236}">
-                <a16:creationId xmlns:a16="http://schemas.microsoft.com/office/drawing/2014/main" id="{3A3DF577-F53E-4739-A088-56E5CE55813F}"/>
+                <a16:creationId xmlns:a16="http://schemas.microsoft.com/office/drawing/2014/main" id="{B5A0B89D-105B-428E-9172-C8486596B2C2}"/>
               </a:ext>
             </a:extLst>
           </p:cNvPr>
@@ -43160,7 +43160,7 @@
           <p:cNvPr id="18" name="WORKFLOW">
             <a:extLst xmlns:a="http://schemas.openxmlformats.org/drawingml/2006/main">
               <a:ext uri="{FF2B5EF4-FFF2-40B4-BE49-F238E27FC236}">
-                <a16:creationId xmlns:a16="http://schemas.microsoft.com/office/drawing/2014/main" id="{4BDFADA4-C1AC-40EA-A592-7AC5F817A3EF}"/>
+                <a16:creationId xmlns:a16="http://schemas.microsoft.com/office/drawing/2014/main" id="{1783775F-BAAD-4DDD-A864-8864ACFDE746}"/>
               </a:ext>
             </a:extLst>
           </p:cNvPr>
@@ -43318,7 +43318,7 @@
           <p:cNvPr id="19" name="Legacy module connection">
             <a:extLst xmlns:a="http://schemas.openxmlformats.org/drawingml/2006/main">
               <a:ext uri="{FF2B5EF4-FFF2-40B4-BE49-F238E27FC236}">
-                <a16:creationId xmlns:a16="http://schemas.microsoft.com/office/drawing/2014/main" id="{9285E2C7-210E-4968-A34D-FF0D62E6F183}"/>
+                <a16:creationId xmlns:a16="http://schemas.microsoft.com/office/drawing/2014/main" id="{ED855481-A84B-4E94-90FD-76A8EDFED695}"/>
               </a:ext>
             </a:extLst>
           </p:cNvPr>
@@ -43474,7 +43474,7 @@
     </p:spTree>
     <p:extLst>
       <p:ext uri="{BB962C8B-B14F-4D97-AF65-F5344CB8AC3E}">
-        <p14:creationId xmlns:p14="http://schemas.microsoft.com/office/powerpoint/2010/main" val="364279097"/>
+        <p14:creationId xmlns:p14="http://schemas.microsoft.com/office/powerpoint/2010/main" val="420389293"/>
       </p:ext>
     </p:extLst>
   </p:cSld>
@@ -43505,7 +43505,7 @@
           <p:cNvPr id="38" name="ACT 2 · 정보의 양을 다시 묻는 연구">
             <a:extLst xmlns:a="http://schemas.openxmlformats.org/drawingml/2006/main">
               <a:ext uri="{FF2B5EF4-FFF2-40B4-BE49-F238E27FC236}">
-                <a16:creationId xmlns:a16="http://schemas.microsoft.com/office/drawing/2014/main" id="{6B5BD888-374C-41AB-AE4D-752161DCCDA0}"/>
+                <a16:creationId xmlns:a16="http://schemas.microsoft.com/office/drawing/2014/main" id="{F6E67BF3-23AE-488C-832E-7BFA0AE83F1D}"/>
               </a:ext>
             </a:extLst>
           </p:cNvPr>
@@ -43660,10 +43660,10 @@
       </p:sp>
       <p:sp>
         <p:nvSpPr>
-          <p:cNvPr id="2" name="S29">
+          <p:cNvPr id="2" name="S30">
             <a:extLst xmlns:a="http://schemas.openxmlformats.org/drawingml/2006/main">
               <a:ext uri="{FF2B5EF4-FFF2-40B4-BE49-F238E27FC236}">
-                <a16:creationId xmlns:a16="http://schemas.microsoft.com/office/drawing/2014/main" id="{D66B61FC-A8E0-4065-BE14-FE26E895CC08}"/>
+                <a16:creationId xmlns:a16="http://schemas.microsoft.com/office/drawing/2014/main" id="{A1639D6C-8B6C-40F0-BCB8-584780AD7B97}"/>
               </a:ext>
             </a:extLst>
           </p:cNvPr>
@@ -43811,7 +43811,7 @@
                 <a:ea typeface="Malgun Gothic"/>
                 <a:cs typeface="Malgun Gothic"/>
               </a:rPr>
-              <a:t>S29</a:t>
+              <a:t>S30</a:t>
             </a:r>
           </a:p>
         </p:txBody>
@@ -43821,7 +43821,7 @@
           <p:cNvPr id="3" name="Long Context 연구가 말해주는 범위">
             <a:extLst xmlns:a="http://schemas.openxmlformats.org/drawingml/2006/main">
               <a:ext uri="{FF2B5EF4-FFF2-40B4-BE49-F238E27FC236}">
-                <a16:creationId xmlns:a16="http://schemas.microsoft.com/office/drawing/2014/main" id="{95840656-681F-496A-AFB7-64B76876E122}"/>
+                <a16:creationId xmlns:a16="http://schemas.microsoft.com/office/drawing/2014/main" id="{C96F666D-371A-4DD6-9003-CE51C4AA9127}"/>
               </a:ext>
             </a:extLst>
           </p:cNvPr>
@@ -43979,7 +43979,7 @@
           <p:cNvPr id="4" name="">
             <a:extLst xmlns:a="http://schemas.openxmlformats.org/drawingml/2006/main">
               <a:ext uri="{FF2B5EF4-FFF2-40B4-BE49-F238E27FC236}">
-                <a16:creationId xmlns:a16="http://schemas.microsoft.com/office/drawing/2014/main" id="{A512C702-1A45-41E8-A381-4A7EB42A55ED}"/>
+                <a16:creationId xmlns:a16="http://schemas.microsoft.com/office/drawing/2014/main" id="{820D2CFE-863A-4F3C-97A1-2E239E3D7061}"/>
               </a:ext>
             </a:extLst>
           </p:cNvPr>
@@ -44010,7 +44010,7 @@
           <p:cNvPr id="5" name="Liu et al., Lost in the Middle, TACL 2024 · RepoQA, 2024">
             <a:extLst xmlns:a="http://schemas.openxmlformats.org/drawingml/2006/main">
               <a:ext uri="{FF2B5EF4-FFF2-40B4-BE49-F238E27FC236}">
-                <a16:creationId xmlns:a16="http://schemas.microsoft.com/office/drawing/2014/main" id="{5A80DC4B-E4E9-4279-BA7D-0F6EC539D953}"/>
+                <a16:creationId xmlns:a16="http://schemas.microsoft.com/office/drawing/2014/main" id="{7426758E-E9A1-4ACB-B3E8-774594904D66}"/>
               </a:ext>
             </a:extLst>
           </p:cNvPr>
@@ -44168,7 +44168,7 @@
           <p:cNvPr id="6" name="특정 모델·과제의 결과 · 현재 Codex의 Repository coding 한계를 입증하지 않음">
             <a:extLst xmlns:a="http://schemas.openxmlformats.org/drawingml/2006/main">
               <a:ext uri="{FF2B5EF4-FFF2-40B4-BE49-F238E27FC236}">
-                <a16:creationId xmlns:a16="http://schemas.microsoft.com/office/drawing/2014/main" id="{CABCCE73-271B-4F38-9E90-6F36688C4B7E}"/>
+                <a16:creationId xmlns:a16="http://schemas.microsoft.com/office/drawing/2014/main" id="{994848F9-4515-46D2-9915-2215A9C74D1E}"/>
               </a:ext>
             </a:extLst>
           </p:cNvPr>
@@ -44326,7 +44326,7 @@
           <p:cNvPr id="7" name="더 많은 Context가 항상 더 좋은 것은 아니다">
             <a:extLst xmlns:a="http://schemas.openxmlformats.org/drawingml/2006/main">
               <a:ext uri="{FF2B5EF4-FFF2-40B4-BE49-F238E27FC236}">
-                <a16:creationId xmlns:a16="http://schemas.microsoft.com/office/drawing/2014/main" id="{840CD826-A639-4F65-BD66-7F1A8C114CE4}"/>
+                <a16:creationId xmlns:a16="http://schemas.microsoft.com/office/drawing/2014/main" id="{0BD8D887-5824-4A98-A046-B3F52566C4ED}"/>
               </a:ext>
             </a:extLst>
           </p:cNvPr>
@@ -44484,7 +44484,7 @@
           <p:cNvPr id="8" name="Lost in the Middle">
             <a:extLst xmlns:a="http://schemas.openxmlformats.org/drawingml/2006/main">
               <a:ext uri="{FF2B5EF4-FFF2-40B4-BE49-F238E27FC236}">
-                <a16:creationId xmlns:a16="http://schemas.microsoft.com/office/drawing/2014/main" id="{CBD98268-8513-4E70-BC14-D80275745D9E}"/>
+                <a16:creationId xmlns:a16="http://schemas.microsoft.com/office/drawing/2014/main" id="{76D5C8B9-7E73-407F-8967-6FAD4E6F102D}"/>
               </a:ext>
             </a:extLst>
           </p:cNvPr>
@@ -44642,7 +44642,7 @@
           <p:cNvPr id="9" name="RepoQA">
             <a:extLst xmlns:a="http://schemas.openxmlformats.org/drawingml/2006/main">
               <a:ext uri="{FF2B5EF4-FFF2-40B4-BE49-F238E27FC236}">
-                <a16:creationId xmlns:a16="http://schemas.microsoft.com/office/drawing/2014/main" id="{A1B76A26-3D0F-44C4-A933-73922578C71F}"/>
+                <a16:creationId xmlns:a16="http://schemas.microsoft.com/office/drawing/2014/main" id="{4077AA63-CE13-42FF-A158-641810477FC4}"/>
               </a:ext>
             </a:extLst>
           </p:cNvPr>
@@ -44800,7 +44800,7 @@
           <p:cNvPr id="10" name="여러 문서의 질문 답변 · key-value 검색">
             <a:extLst xmlns:a="http://schemas.openxmlformats.org/drawingml/2006/main">
               <a:ext uri="{FF2B5EF4-FFF2-40B4-BE49-F238E27FC236}">
-                <a16:creationId xmlns:a16="http://schemas.microsoft.com/office/drawing/2014/main" id="{44482FB0-8DE8-481A-945F-5B8E7206BA05}"/>
+                <a16:creationId xmlns:a16="http://schemas.microsoft.com/office/drawing/2014/main" id="{90EDA993-6FE7-492D-A9E0-78FD5E581F32}"/>
               </a:ext>
             </a:extLst>
           </p:cNvPr>
@@ -44958,7 +44958,7 @@
           <p:cNvPr id="11" name="50개 Repository의 코드 검색 과제">
             <a:extLst xmlns:a="http://schemas.openxmlformats.org/drawingml/2006/main">
               <a:ext uri="{FF2B5EF4-FFF2-40B4-BE49-F238E27FC236}">
-                <a16:creationId xmlns:a16="http://schemas.microsoft.com/office/drawing/2014/main" id="{CAEDAAD5-EF59-468F-9C24-2F91973406D1}"/>
+                <a16:creationId xmlns:a16="http://schemas.microsoft.com/office/drawing/2014/main" id="{10C213D2-12C7-456E-93A2-41A0EA1C358E}"/>
               </a:ext>
             </a:extLst>
           </p:cNvPr>
@@ -45116,7 +45116,7 @@
           <p:cNvPr id="12" name="관련 정보의 위치를 달리하는 구성">
             <a:extLst xmlns:a="http://schemas.openxmlformats.org/drawingml/2006/main">
               <a:ext uri="{FF2B5EF4-FFF2-40B4-BE49-F238E27FC236}">
-                <a16:creationId xmlns:a16="http://schemas.microsoft.com/office/drawing/2014/main" id="{8BB4B8CE-A983-4122-AE13-51911061AF13}"/>
+                <a16:creationId xmlns:a16="http://schemas.microsoft.com/office/drawing/2014/main" id="{D3ECF003-EACE-4A7F-AD27-0CD55544ED34}"/>
               </a:ext>
             </a:extLst>
           </p:cNvPr>
@@ -45274,7 +45274,7 @@
           <p:cNvPr id="13" name="">
             <a:extLst xmlns:a="http://schemas.openxmlformats.org/drawingml/2006/main">
               <a:ext uri="{FF2B5EF4-FFF2-40B4-BE49-F238E27FC236}">
-                <a16:creationId xmlns:a16="http://schemas.microsoft.com/office/drawing/2014/main" id="{1B10C2B4-950E-4E95-B168-04922FFE30AD}"/>
+                <a16:creationId xmlns:a16="http://schemas.microsoft.com/office/drawing/2014/main" id="{0975BEA4-515F-4617-BBCB-236F74587056}"/>
               </a:ext>
             </a:extLst>
           </p:cNvPr>
@@ -45307,7 +45307,7 @@
           <p:cNvPr id="14" name="">
             <a:extLst xmlns:a="http://schemas.openxmlformats.org/drawingml/2006/main">
               <a:ext uri="{FF2B5EF4-FFF2-40B4-BE49-F238E27FC236}">
-                <a16:creationId xmlns:a16="http://schemas.microsoft.com/office/drawing/2014/main" id="{B7D2B566-F65E-4C39-8396-90629D9C27F7}"/>
+                <a16:creationId xmlns:a16="http://schemas.microsoft.com/office/drawing/2014/main" id="{B9EDF8CF-1416-4547-8E86-9D68DA989B66}"/>
               </a:ext>
             </a:extLst>
           </p:cNvPr>
@@ -45340,7 +45340,7 @@
           <p:cNvPr id="15" name="">
             <a:extLst xmlns:a="http://schemas.openxmlformats.org/drawingml/2006/main">
               <a:ext uri="{FF2B5EF4-FFF2-40B4-BE49-F238E27FC236}">
-                <a16:creationId xmlns:a16="http://schemas.microsoft.com/office/drawing/2014/main" id="{BC5D6F11-1772-406C-9082-01CF6A970CF5}"/>
+                <a16:creationId xmlns:a16="http://schemas.microsoft.com/office/drawing/2014/main" id="{E334BE2D-3F1B-45EC-80DC-D27ACC16B74C}"/>
               </a:ext>
             </a:extLst>
           </p:cNvPr>
@@ -45373,7 +45373,7 @@
           <p:cNvPr id="16" name="">
             <a:extLst xmlns:a="http://schemas.openxmlformats.org/drawingml/2006/main">
               <a:ext uri="{FF2B5EF4-FFF2-40B4-BE49-F238E27FC236}">
-                <a16:creationId xmlns:a16="http://schemas.microsoft.com/office/drawing/2014/main" id="{5E99426C-3281-4840-935C-78BDE6292A9A}"/>
+                <a16:creationId xmlns:a16="http://schemas.microsoft.com/office/drawing/2014/main" id="{46CDAE26-5413-4F43-B099-2C11D227BD8A}"/>
               </a:ext>
             </a:extLst>
           </p:cNvPr>
@@ -45406,7 +45406,7 @@
           <p:cNvPr id="17" name="">
             <a:extLst xmlns:a="http://schemas.openxmlformats.org/drawingml/2006/main">
               <a:ext uri="{FF2B5EF4-FFF2-40B4-BE49-F238E27FC236}">
-                <a16:creationId xmlns:a16="http://schemas.microsoft.com/office/drawing/2014/main" id="{9F54F6FC-5906-4B64-B129-653E5F3DB93C}"/>
+                <a16:creationId xmlns:a16="http://schemas.microsoft.com/office/drawing/2014/main" id="{24A16CE5-79B4-4218-B294-25C2FBFA3F1D}"/>
               </a:ext>
             </a:extLst>
           </p:cNvPr>
@@ -45439,7 +45439,7 @@
           <p:cNvPr id="18" name="">
             <a:extLst xmlns:a="http://schemas.openxmlformats.org/drawingml/2006/main">
               <a:ext uri="{FF2B5EF4-FFF2-40B4-BE49-F238E27FC236}">
-                <a16:creationId xmlns:a16="http://schemas.microsoft.com/office/drawing/2014/main" id="{8E1D4279-7779-4AE1-ACBC-A56DC8D8EFA6}"/>
+                <a16:creationId xmlns:a16="http://schemas.microsoft.com/office/drawing/2014/main" id="{02A557A6-B79D-4B53-B432-1103D9CBCA60}"/>
               </a:ext>
             </a:extLst>
           </p:cNvPr>
@@ -45472,7 +45472,7 @@
           <p:cNvPr id="19" name="">
             <a:extLst xmlns:a="http://schemas.openxmlformats.org/drawingml/2006/main">
               <a:ext uri="{FF2B5EF4-FFF2-40B4-BE49-F238E27FC236}">
-                <a16:creationId xmlns:a16="http://schemas.microsoft.com/office/drawing/2014/main" id="{216CB3A1-4D6B-41A4-820A-6090DB97248A}"/>
+                <a16:creationId xmlns:a16="http://schemas.microsoft.com/office/drawing/2014/main" id="{9FEF51FF-7941-47B9-89A0-15BACC1A78EC}"/>
               </a:ext>
             </a:extLst>
           </p:cNvPr>
@@ -45505,7 +45505,7 @@
           <p:cNvPr id="20" name="">
             <a:extLst xmlns:a="http://schemas.openxmlformats.org/drawingml/2006/main">
               <a:ext uri="{FF2B5EF4-FFF2-40B4-BE49-F238E27FC236}">
-                <a16:creationId xmlns:a16="http://schemas.microsoft.com/office/drawing/2014/main" id="{20773A7E-8CD5-4DAD-9C6D-BB18C9493C5A}"/>
+                <a16:creationId xmlns:a16="http://schemas.microsoft.com/office/drawing/2014/main" id="{817B63D8-A9C4-42AD-AAC8-D31BE7BC1876}"/>
               </a:ext>
             </a:extLst>
           </p:cNvPr>
@@ -45538,7 +45538,7 @@
           <p:cNvPr id="21" name="">
             <a:extLst xmlns:a="http://schemas.openxmlformats.org/drawingml/2006/main">
               <a:ext uri="{FF2B5EF4-FFF2-40B4-BE49-F238E27FC236}">
-                <a16:creationId xmlns:a16="http://schemas.microsoft.com/office/drawing/2014/main" id="{7FF5880D-1733-4186-A376-722218D3375B}"/>
+                <a16:creationId xmlns:a16="http://schemas.microsoft.com/office/drawing/2014/main" id="{62D02BE6-D4ED-421C-B683-873A92CFE820}"/>
               </a:ext>
             </a:extLst>
           </p:cNvPr>
@@ -45571,7 +45571,7 @@
           <p:cNvPr id="22" name="">
             <a:extLst xmlns:a="http://schemas.openxmlformats.org/drawingml/2006/main">
               <a:ext uri="{FF2B5EF4-FFF2-40B4-BE49-F238E27FC236}">
-                <a16:creationId xmlns:a16="http://schemas.microsoft.com/office/drawing/2014/main" id="{F7EB0FEA-B45D-4583-9FC5-79A77F968AF4}"/>
+                <a16:creationId xmlns:a16="http://schemas.microsoft.com/office/drawing/2014/main" id="{C988E8BE-6D85-44F6-9853-B692F53F21F3}"/>
               </a:ext>
             </a:extLst>
           </p:cNvPr>
@@ -45604,7 +45604,7 @@
           <p:cNvPr id="23" name="">
             <a:extLst xmlns:a="http://schemas.openxmlformats.org/drawingml/2006/main">
               <a:ext uri="{FF2B5EF4-FFF2-40B4-BE49-F238E27FC236}">
-                <a16:creationId xmlns:a16="http://schemas.microsoft.com/office/drawing/2014/main" id="{63BEF6DF-B980-4E7F-B7B8-7D1BB0ECC68D}"/>
+                <a16:creationId xmlns:a16="http://schemas.microsoft.com/office/drawing/2014/main" id="{6648ADBF-C836-4A61-A387-B4758ACA5BFC}"/>
               </a:ext>
             </a:extLst>
           </p:cNvPr>
@@ -45637,7 +45637,7 @@
           <p:cNvPr id="24" name="">
             <a:extLst xmlns:a="http://schemas.openxmlformats.org/drawingml/2006/main">
               <a:ext uri="{FF2B5EF4-FFF2-40B4-BE49-F238E27FC236}">
-                <a16:creationId xmlns:a16="http://schemas.microsoft.com/office/drawing/2014/main" id="{EB566585-4A44-4064-B0DD-F6C41D7BB070}"/>
+                <a16:creationId xmlns:a16="http://schemas.microsoft.com/office/drawing/2014/main" id="{D62D051F-F69B-4880-ACBA-F3134DCA5157}"/>
               </a:ext>
             </a:extLst>
           </p:cNvPr>
@@ -45670,7 +45670,7 @@
           <p:cNvPr id="25" name="">
             <a:extLst xmlns:a="http://schemas.openxmlformats.org/drawingml/2006/main">
               <a:ext uri="{FF2B5EF4-FFF2-40B4-BE49-F238E27FC236}">
-                <a16:creationId xmlns:a16="http://schemas.microsoft.com/office/drawing/2014/main" id="{41ABBC57-58C0-40D7-81F0-F6DB83D47DC3}"/>
+                <a16:creationId xmlns:a16="http://schemas.microsoft.com/office/drawing/2014/main" id="{8C862985-8993-4A3F-BE1A-BCF9A3EC008C}"/>
               </a:ext>
             </a:extLst>
           </p:cNvPr>
@@ -45703,7 +45703,7 @@
           <p:cNvPr id="26" name="">
             <a:extLst xmlns:a="http://schemas.openxmlformats.org/drawingml/2006/main">
               <a:ext uri="{FF2B5EF4-FFF2-40B4-BE49-F238E27FC236}">
-                <a16:creationId xmlns:a16="http://schemas.microsoft.com/office/drawing/2014/main" id="{9899283A-84E8-45F0-A93C-F24A8E325342}"/>
+                <a16:creationId xmlns:a16="http://schemas.microsoft.com/office/drawing/2014/main" id="{5627AF6A-EE7D-447B-A825-4E64B4D6042B}"/>
               </a:ext>
             </a:extLst>
           </p:cNvPr>
@@ -45736,7 +45736,7 @@
           <p:cNvPr id="27" name="">
             <a:extLst xmlns:a="http://schemas.openxmlformats.org/drawingml/2006/main">
               <a:ext uri="{FF2B5EF4-FFF2-40B4-BE49-F238E27FC236}">
-                <a16:creationId xmlns:a16="http://schemas.microsoft.com/office/drawing/2014/main" id="{5511C79E-EFEF-49C8-8D9B-02BC35CC1037}"/>
+                <a16:creationId xmlns:a16="http://schemas.microsoft.com/office/drawing/2014/main" id="{183421D9-A0FB-4E8F-A3FE-C1C8D1D66920}"/>
               </a:ext>
             </a:extLst>
           </p:cNvPr>
@@ -45769,7 +45769,7 @@
           <p:cNvPr id="28" name="질문">
             <a:extLst xmlns:a="http://schemas.openxmlformats.org/drawingml/2006/main">
               <a:ext uri="{FF2B5EF4-FFF2-40B4-BE49-F238E27FC236}">
-                <a16:creationId xmlns:a16="http://schemas.microsoft.com/office/drawing/2014/main" id="{63CC55AA-7CCE-4DC4-8551-F8BFA163679E}"/>
+                <a16:creationId xmlns:a16="http://schemas.microsoft.com/office/drawing/2014/main" id="{4660DF9F-CCA2-4037-AD7C-206000E252AF}"/>
               </a:ext>
             </a:extLst>
           </p:cNvPr>
@@ -45927,7 +45927,7 @@
           <p:cNvPr id="29" name="">
             <a:extLst xmlns:a="http://schemas.openxmlformats.org/drawingml/2006/main">
               <a:ext uri="{FF2B5EF4-FFF2-40B4-BE49-F238E27FC236}">
-                <a16:creationId xmlns:a16="http://schemas.microsoft.com/office/drawing/2014/main" id="{8A575A69-B1C1-444F-831E-5DE34C0B2ABE}"/>
+                <a16:creationId xmlns:a16="http://schemas.microsoft.com/office/drawing/2014/main" id="{C02638CB-2D5C-46CD-89A1-58FC3E748DB6}"/>
               </a:ext>
             </a:extLst>
           </p:cNvPr>
@@ -45957,7 +45957,7 @@
           <p:cNvPr id="30" name="">
             <a:extLst xmlns:a="http://schemas.openxmlformats.org/drawingml/2006/main">
               <a:ext uri="{FF2B5EF4-FFF2-40B4-BE49-F238E27FC236}">
-                <a16:creationId xmlns:a16="http://schemas.microsoft.com/office/drawing/2014/main" id="{4E684215-11B4-4AE8-912B-3E24D7DA5B1A}"/>
+                <a16:creationId xmlns:a16="http://schemas.microsoft.com/office/drawing/2014/main" id="{C1E4543F-03FC-47DA-A6C3-3A70D913EF11}"/>
               </a:ext>
             </a:extLst>
           </p:cNvPr>
@@ -45990,7 +45990,7 @@
           <p:cNvPr id="31" name="Repository의 코드">
             <a:extLst xmlns:a="http://schemas.openxmlformats.org/drawingml/2006/main">
               <a:ext uri="{FF2B5EF4-FFF2-40B4-BE49-F238E27FC236}">
-                <a16:creationId xmlns:a16="http://schemas.microsoft.com/office/drawing/2014/main" id="{EA6BDB7B-C7DF-4B9F-BC94-C2C51B3CE600}"/>
+                <a16:creationId xmlns:a16="http://schemas.microsoft.com/office/drawing/2014/main" id="{148CE76A-AB49-4BB1-ABC4-2619906D3A9C}"/>
               </a:ext>
             </a:extLst>
           </p:cNvPr>
@@ -46148,7 +46148,7 @@
           <p:cNvPr id="32" name="관련 코드 찾기">
             <a:extLst xmlns:a="http://schemas.openxmlformats.org/drawingml/2006/main">
               <a:ext uri="{FF2B5EF4-FFF2-40B4-BE49-F238E27FC236}">
-                <a16:creationId xmlns:a16="http://schemas.microsoft.com/office/drawing/2014/main" id="{EB473A48-4082-43F9-AD86-C16A57A4BFD0}"/>
+                <a16:creationId xmlns:a16="http://schemas.microsoft.com/office/drawing/2014/main" id="{759CC08C-34BD-4DD2-BCAF-324FF6627231}"/>
               </a:ext>
             </a:extLst>
           </p:cNvPr>
@@ -46306,7 +46306,7 @@
           <p:cNvPr id="33" name="관련 정보의 위치가&#10;일부 조건에서 중요할 수 있다">
             <a:extLst xmlns:a="http://schemas.openxmlformats.org/drawingml/2006/main">
               <a:ext uri="{FF2B5EF4-FFF2-40B4-BE49-F238E27FC236}">
-                <a16:creationId xmlns:a16="http://schemas.microsoft.com/office/drawing/2014/main" id="{4C31C400-A273-44AB-9547-E9F29FD04FDF}"/>
+                <a16:creationId xmlns:a16="http://schemas.microsoft.com/office/drawing/2014/main" id="{753CF5FC-61FA-43F4-8F72-FEC1D76CFF23}"/>
               </a:ext>
             </a:extLst>
           </p:cNvPr>
@@ -46487,7 +46487,7 @@
           <p:cNvPr id="34" name="관련 코드 정보를&#10;선택하고 찾는 능력을 평가">
             <a:extLst xmlns:a="http://schemas.openxmlformats.org/drawingml/2006/main">
               <a:ext uri="{FF2B5EF4-FFF2-40B4-BE49-F238E27FC236}">
-                <a16:creationId xmlns:a16="http://schemas.microsoft.com/office/drawing/2014/main" id="{3BE7D024-D042-4CAF-8614-DB2CDB197CB4}"/>
+                <a16:creationId xmlns:a16="http://schemas.microsoft.com/office/drawing/2014/main" id="{7B3E8464-4BC9-46AE-8236-2848936AA663}"/>
               </a:ext>
             </a:extLst>
           </p:cNvPr>
@@ -46668,7 +46668,7 @@
           <p:cNvPr id="35" name="aclanthology.org/2024.tacl-1.9/">
             <a:extLst xmlns:a="http://schemas.openxmlformats.org/drawingml/2006/main">
               <a:ext uri="{FF2B5EF4-FFF2-40B4-BE49-F238E27FC236}">
-                <a16:creationId xmlns:a16="http://schemas.microsoft.com/office/drawing/2014/main" id="{A76E8F8C-FC25-4FED-A040-A5420AB423E3}"/>
+                <a16:creationId xmlns:a16="http://schemas.microsoft.com/office/drawing/2014/main" id="{4136F4D8-A219-450A-90A7-D0BB5BE2B7E1}"/>
               </a:ext>
             </a:extLst>
           </p:cNvPr>
@@ -46826,7 +46826,7 @@
           <p:cNvPr id="36" name="arxiv.org/abs/2406.06025">
             <a:extLst xmlns:a="http://schemas.openxmlformats.org/drawingml/2006/main">
               <a:ext uri="{FF2B5EF4-FFF2-40B4-BE49-F238E27FC236}">
-                <a16:creationId xmlns:a16="http://schemas.microsoft.com/office/drawing/2014/main" id="{3619DCD2-D6AF-4C6D-9206-C5726753D983}"/>
+                <a16:creationId xmlns:a16="http://schemas.microsoft.com/office/drawing/2014/main" id="{FA54E933-1CB9-4FFC-BB23-3F7386606AEB}"/>
               </a:ext>
             </a:extLst>
           </p:cNvPr>
@@ -46984,7 +46984,7 @@
           <p:cNvPr id="37" name="Legacy module connection">
             <a:extLst xmlns:a="http://schemas.openxmlformats.org/drawingml/2006/main">
               <a:ext uri="{FF2B5EF4-FFF2-40B4-BE49-F238E27FC236}">
-                <a16:creationId xmlns:a16="http://schemas.microsoft.com/office/drawing/2014/main" id="{7AC6A856-02E2-4005-A004-ECFD27DCEA99}"/>
+                <a16:creationId xmlns:a16="http://schemas.microsoft.com/office/drawing/2014/main" id="{E0E706F6-6318-4625-A179-13AB2915DE60}"/>
               </a:ext>
             </a:extLst>
           </p:cNvPr>
@@ -47140,7 +47140,7 @@
     </p:spTree>
     <p:extLst>
       <p:ext uri="{BB962C8B-B14F-4D97-AF65-F5344CB8AC3E}">
-        <p14:creationId xmlns:p14="http://schemas.microsoft.com/office/powerpoint/2010/main" val="1626958265"/>
+        <p14:creationId xmlns:p14="http://schemas.microsoft.com/office/powerpoint/2010/main" val="249873862"/>
       </p:ext>
     </p:extLst>
   </p:cSld>
@@ -47171,7 +47171,7 @@
           <p:cNvPr id="21" name="ACT 2 · 필요한 상세 정보의 탐색 경로">
             <a:extLst xmlns:a="http://schemas.openxmlformats.org/drawingml/2006/main">
               <a:ext uri="{FF2B5EF4-FFF2-40B4-BE49-F238E27FC236}">
-                <a16:creationId xmlns:a16="http://schemas.microsoft.com/office/drawing/2014/main" id="{E047D274-5A51-48AD-A07D-242FBA8D002E}"/>
+                <a16:creationId xmlns:a16="http://schemas.microsoft.com/office/drawing/2014/main" id="{2994C100-44B8-4F0F-A84E-A033AF0CE6FC}"/>
               </a:ext>
             </a:extLst>
           </p:cNvPr>
@@ -47326,10 +47326,10 @@
       </p:sp>
       <p:sp>
         <p:nvSpPr>
-          <p:cNvPr id="2" name="S30">
+          <p:cNvPr id="2" name="S31">
             <a:extLst xmlns:a="http://schemas.openxmlformats.org/drawingml/2006/main">
               <a:ext uri="{FF2B5EF4-FFF2-40B4-BE49-F238E27FC236}">
-                <a16:creationId xmlns:a16="http://schemas.microsoft.com/office/drawing/2014/main" id="{8C7C18F4-64F2-435D-AEA9-5B7C105236A6}"/>
+                <a16:creationId xmlns:a16="http://schemas.microsoft.com/office/drawing/2014/main" id="{A01B06D9-F428-405E-85D0-B1767AC4BB6E}"/>
               </a:ext>
             </a:extLst>
           </p:cNvPr>
@@ -47477,7 +47477,7 @@
                 <a:ea typeface="Malgun Gothic"/>
                 <a:cs typeface="Malgun Gothic"/>
               </a:rPr>
-              <a:t>S30</a:t>
+              <a:t>S31</a:t>
             </a:r>
           </a:p>
         </p:txBody>
@@ -47487,7 +47487,7 @@
           <p:cNvPr id="3" name="필요한 상세 정보로 가는 길">
             <a:extLst xmlns:a="http://schemas.openxmlformats.org/drawingml/2006/main">
               <a:ext uri="{FF2B5EF4-FFF2-40B4-BE49-F238E27FC236}">
-                <a16:creationId xmlns:a16="http://schemas.microsoft.com/office/drawing/2014/main" id="{29A9B5D7-421F-4CB0-9940-2183C5515D1E}"/>
+                <a16:creationId xmlns:a16="http://schemas.microsoft.com/office/drawing/2014/main" id="{1AB663EA-F76A-45E9-94CB-632DED293D54}"/>
               </a:ext>
             </a:extLst>
           </p:cNvPr>
@@ -47645,7 +47645,7 @@
           <p:cNvPr id="4" name="">
             <a:extLst xmlns:a="http://schemas.openxmlformats.org/drawingml/2006/main">
               <a:ext uri="{FF2B5EF4-FFF2-40B4-BE49-F238E27FC236}">
-                <a16:creationId xmlns:a16="http://schemas.microsoft.com/office/drawing/2014/main" id="{3CFD27FC-2DF5-4194-AD6E-6525A0E005AB}"/>
+                <a16:creationId xmlns:a16="http://schemas.microsoft.com/office/drawing/2014/main" id="{1907E8DD-1358-455D-B925-0E99E57524D0}"/>
               </a:ext>
             </a:extLst>
           </p:cNvPr>
@@ -47676,7 +47676,7 @@
           <p:cNvPr id="5" name="교육용 Routing 모델 · 실제 문서 접근 결과는 다음 구간에서 확인">
             <a:extLst xmlns:a="http://schemas.openxmlformats.org/drawingml/2006/main">
               <a:ext uri="{FF2B5EF4-FFF2-40B4-BE49-F238E27FC236}">
-                <a16:creationId xmlns:a16="http://schemas.microsoft.com/office/drawing/2014/main" id="{BBD6CEE1-9A4A-47AA-9D63-427539A81579}"/>
+                <a16:creationId xmlns:a16="http://schemas.microsoft.com/office/drawing/2014/main" id="{406FF35C-73E3-4840-883A-EB843D6959A5}"/>
               </a:ext>
             </a:extLst>
           </p:cNvPr>
@@ -47834,7 +47834,7 @@
           <p:cNvPr id="6" name="검색 성능 향상이나 토큰 절약을 입증한 그림이 아님">
             <a:extLst xmlns:a="http://schemas.openxmlformats.org/drawingml/2006/main">
               <a:ext uri="{FF2B5EF4-FFF2-40B4-BE49-F238E27FC236}">
-                <a16:creationId xmlns:a16="http://schemas.microsoft.com/office/drawing/2014/main" id="{53C4A453-4F14-49F6-8F57-B3CAF8D4B90B}"/>
+                <a16:creationId xmlns:a16="http://schemas.microsoft.com/office/drawing/2014/main" id="{1ABF6580-437B-47D2-AF3C-64481636BB9D}"/>
               </a:ext>
             </a:extLst>
           </p:cNvPr>
@@ -47992,7 +47992,7 @@
           <p:cNvPr id="7" name="어떤 질문에서 어떤 상세 정보가 필요할까?">
             <a:extLst xmlns:a="http://schemas.openxmlformats.org/drawingml/2006/main">
               <a:ext uri="{FF2B5EF4-FFF2-40B4-BE49-F238E27FC236}">
-                <a16:creationId xmlns:a16="http://schemas.microsoft.com/office/drawing/2014/main" id="{614B3746-DDA1-4D53-96A7-F18C4A870B4F}"/>
+                <a16:creationId xmlns:a16="http://schemas.microsoft.com/office/drawing/2014/main" id="{19560103-1862-422A-9DFA-1FBB5C5E3D75}"/>
               </a:ext>
             </a:extLst>
           </p:cNvPr>
@@ -48150,7 +48150,7 @@
           <p:cNvPr id="8" name="">
             <a:extLst xmlns:a="http://schemas.openxmlformats.org/drawingml/2006/main">
               <a:ext uri="{FF2B5EF4-FFF2-40B4-BE49-F238E27FC236}">
-                <a16:creationId xmlns:a16="http://schemas.microsoft.com/office/drawing/2014/main" id="{B1807B88-997B-40FC-97C3-6ED166F05DEE}"/>
+                <a16:creationId xmlns:a16="http://schemas.microsoft.com/office/drawing/2014/main" id="{43BA1B1A-2076-46C8-BD83-72AAF4D58E52}"/>
               </a:ext>
             </a:extLst>
           </p:cNvPr>
@@ -48181,7 +48181,7 @@
           <p:cNvPr id="9" name="Task">
             <a:extLst xmlns:a="http://schemas.openxmlformats.org/drawingml/2006/main">
               <a:ext uri="{FF2B5EF4-FFF2-40B4-BE49-F238E27FC236}">
-                <a16:creationId xmlns:a16="http://schemas.microsoft.com/office/drawing/2014/main" id="{7FFEE3A0-8D10-480C-8714-E4064E1613DA}"/>
+                <a16:creationId xmlns:a16="http://schemas.microsoft.com/office/drawing/2014/main" id="{99465FE6-A207-4EB9-A2AC-2D1A081E380F}"/>
               </a:ext>
             </a:extLst>
           </p:cNvPr>
@@ -48339,7 +48339,7 @@
           <p:cNvPr id="10" name="지금 해결할 질문">
             <a:extLst xmlns:a="http://schemas.openxmlformats.org/drawingml/2006/main">
               <a:ext uri="{FF2B5EF4-FFF2-40B4-BE49-F238E27FC236}">
-                <a16:creationId xmlns:a16="http://schemas.microsoft.com/office/drawing/2014/main" id="{600EEAB5-4703-4F89-810B-297576C50713}"/>
+                <a16:creationId xmlns:a16="http://schemas.microsoft.com/office/drawing/2014/main" id="{48CED4D1-74B9-4F19-82C4-6A5CDEE05DB1}"/>
               </a:ext>
             </a:extLst>
           </p:cNvPr>
@@ -48497,7 +48497,7 @@
           <p:cNvPr id="11" name="">
             <a:extLst xmlns:a="http://schemas.openxmlformats.org/drawingml/2006/main">
               <a:ext uri="{FF2B5EF4-FFF2-40B4-BE49-F238E27FC236}">
-                <a16:creationId xmlns:a16="http://schemas.microsoft.com/office/drawing/2014/main" id="{D23C0358-F8BC-40C6-ABF0-3FDC659F138D}"/>
+                <a16:creationId xmlns:a16="http://schemas.microsoft.com/office/drawing/2014/main" id="{22610A07-8AB0-4047-8D84-BBFFA2753FAA}"/>
               </a:ext>
             </a:extLst>
           </p:cNvPr>
@@ -48527,7 +48527,7 @@
           <p:cNvPr id="12" name="">
             <a:extLst xmlns:a="http://schemas.openxmlformats.org/drawingml/2006/main">
               <a:ext uri="{FF2B5EF4-FFF2-40B4-BE49-F238E27FC236}">
-                <a16:creationId xmlns:a16="http://schemas.microsoft.com/office/drawing/2014/main" id="{31B407D5-37EF-4804-8927-962B2B17589A}"/>
+                <a16:creationId xmlns:a16="http://schemas.microsoft.com/office/drawing/2014/main" id="{47716F5E-9E11-4BC9-9CB6-E09CDBCC9883}"/>
               </a:ext>
             </a:extLst>
           </p:cNvPr>
@@ -48558,7 +48558,7 @@
           <p:cNvPr id="13" name="Core Context">
             <a:extLst xmlns:a="http://schemas.openxmlformats.org/drawingml/2006/main">
               <a:ext uri="{FF2B5EF4-FFF2-40B4-BE49-F238E27FC236}">
-                <a16:creationId xmlns:a16="http://schemas.microsoft.com/office/drawing/2014/main" id="{268AA27B-1890-4FB1-AA06-4360B2DDC36A}"/>
+                <a16:creationId xmlns:a16="http://schemas.microsoft.com/office/drawing/2014/main" id="{7671F511-9877-47B1-B4D4-CD6E20A9F371}"/>
               </a:ext>
             </a:extLst>
           </p:cNvPr>
@@ -48716,7 +48716,7 @@
           <p:cNvPr id="14" name="프로젝트 안내와&#10;찾아갈 위치">
             <a:extLst xmlns:a="http://schemas.openxmlformats.org/drawingml/2006/main">
               <a:ext uri="{FF2B5EF4-FFF2-40B4-BE49-F238E27FC236}">
-                <a16:creationId xmlns:a16="http://schemas.microsoft.com/office/drawing/2014/main" id="{2BA83ACD-A9DB-499F-8D25-4CF84B2EBC8A}"/>
+                <a16:creationId xmlns:a16="http://schemas.microsoft.com/office/drawing/2014/main" id="{AFE675BD-F6C3-413C-9ED9-E9F0FFCFDA1D}"/>
               </a:ext>
             </a:extLst>
           </p:cNvPr>
@@ -48897,7 +48897,7 @@
           <p:cNvPr id="15" name="">
             <a:extLst xmlns:a="http://schemas.openxmlformats.org/drawingml/2006/main">
               <a:ext uri="{FF2B5EF4-FFF2-40B4-BE49-F238E27FC236}">
-                <a16:creationId xmlns:a16="http://schemas.microsoft.com/office/drawing/2014/main" id="{CEF74C54-63F7-409D-9AC4-78E2974AD65A}"/>
+                <a16:creationId xmlns:a16="http://schemas.microsoft.com/office/drawing/2014/main" id="{66C841A4-AB81-4ABE-B142-18A0F6419B4B}"/>
               </a:ext>
             </a:extLst>
           </p:cNvPr>
@@ -48927,7 +48927,7 @@
           <p:cNvPr id="16" name="">
             <a:extLst xmlns:a="http://schemas.openxmlformats.org/drawingml/2006/main">
               <a:ext uri="{FF2B5EF4-FFF2-40B4-BE49-F238E27FC236}">
-                <a16:creationId xmlns:a16="http://schemas.microsoft.com/office/drawing/2014/main" id="{8E6E1998-AEB3-45DA-BDE4-16F81AC335D6}"/>
+                <a16:creationId xmlns:a16="http://schemas.microsoft.com/office/drawing/2014/main" id="{3B6DC8F5-E5AF-407F-B17A-170CA17D02A6}"/>
               </a:ext>
             </a:extLst>
           </p:cNvPr>
@@ -48958,7 +48958,7 @@
           <p:cNvPr id="17" name="관련 상세 정보">
             <a:extLst xmlns:a="http://schemas.openxmlformats.org/drawingml/2006/main">
               <a:ext uri="{FF2B5EF4-FFF2-40B4-BE49-F238E27FC236}">
-                <a16:creationId xmlns:a16="http://schemas.microsoft.com/office/drawing/2014/main" id="{41355798-3F02-4B38-B895-7B13EF119D93}"/>
+                <a16:creationId xmlns:a16="http://schemas.microsoft.com/office/drawing/2014/main" id="{270368C0-4F58-4213-9B78-EE11F7487333}"/>
               </a:ext>
             </a:extLst>
           </p:cNvPr>
@@ -49116,7 +49116,7 @@
           <p:cNvPr id="18" name="질문에 필요한&#10;계약 · 구조 · 테스트">
             <a:extLst xmlns:a="http://schemas.openxmlformats.org/drawingml/2006/main">
               <a:ext uri="{FF2B5EF4-FFF2-40B4-BE49-F238E27FC236}">
-                <a16:creationId xmlns:a16="http://schemas.microsoft.com/office/drawing/2014/main" id="{139C4921-D440-439F-890E-367C3CC206DD}"/>
+                <a16:creationId xmlns:a16="http://schemas.microsoft.com/office/drawing/2014/main" id="{6AD7D134-5C4E-4537-9671-AFA9647C7A52}"/>
               </a:ext>
             </a:extLst>
           </p:cNvPr>
@@ -49297,7 +49297,7 @@
           <p:cNvPr id="19" name="C++ 예: 공통 제약을 확인한 뒤, 해당 알고리즘의 계약으로">
             <a:extLst xmlns:a="http://schemas.openxmlformats.org/drawingml/2006/main">
               <a:ext uri="{FF2B5EF4-FFF2-40B4-BE49-F238E27FC236}">
-                <a16:creationId xmlns:a16="http://schemas.microsoft.com/office/drawing/2014/main" id="{D146BAF3-1A32-4737-97E1-A45D783B24DB}"/>
+                <a16:creationId xmlns:a16="http://schemas.microsoft.com/office/drawing/2014/main" id="{AB9DF8E7-3D57-4EEB-BE69-0E9531408CD4}"/>
               </a:ext>
             </a:extLst>
           </p:cNvPr>
@@ -49455,7 +49455,7 @@
           <p:cNvPr id="20" name="Legacy module connection">
             <a:extLst xmlns:a="http://schemas.openxmlformats.org/drawingml/2006/main">
               <a:ext uri="{FF2B5EF4-FFF2-40B4-BE49-F238E27FC236}">
-                <a16:creationId xmlns:a16="http://schemas.microsoft.com/office/drawing/2014/main" id="{C80B9BDE-3806-494B-A253-A31FC88AEE3D}"/>
+                <a16:creationId xmlns:a16="http://schemas.microsoft.com/office/drawing/2014/main" id="{4B13B949-3B40-461E-B37A-374503D33879}"/>
               </a:ext>
             </a:extLst>
           </p:cNvPr>
@@ -49611,7 +49611,7 @@
     </p:spTree>
     <p:extLst>
       <p:ext uri="{BB962C8B-B14F-4D97-AF65-F5344CB8AC3E}">
-        <p14:creationId xmlns:p14="http://schemas.microsoft.com/office/powerpoint/2010/main" val="56066540"/>
+        <p14:creationId xmlns:p14="http://schemas.microsoft.com/office/powerpoint/2010/main" val="1420398213"/>
       </p:ext>
     </p:extLst>
   </p:cSld>

--- a/production/ACT_2.pptx
+++ b/production/ACT_2.pptx
@@ -2,27 +2,27 @@
 <file path=ppt/presentation.xml><?xml version="1.0" encoding="utf-8"?>
 <p:presentation xmlns:p="http://schemas.openxmlformats.org/presentationml/2006/main">
   <p:sldMasterIdLst>
-    <p:sldMasterId xmlns:r="http://schemas.openxmlformats.org/officeDocument/2006/relationships" id="2147483648" r:id="R5fe03118b4e04a37"/>
+    <p:sldMasterId xmlns:r="http://schemas.openxmlformats.org/officeDocument/2006/relationships" id="2147483648" r:id="R3fe6753ade3a4969"/>
   </p:sldMasterIdLst>
   <p:notesMasterIdLst>
-    <p:notesMasterId xmlns:r="http://schemas.openxmlformats.org/officeDocument/2006/relationships" r:id="Ra61a47b0500d46d5"/>
+    <p:notesMasterId xmlns:r="http://schemas.openxmlformats.org/officeDocument/2006/relationships" r:id="Rcbfa6c063d274d0c"/>
   </p:notesMasterIdLst>
   <p:sldIdLst>
-    <p:sldId xmlns:r="http://schemas.openxmlformats.org/officeDocument/2006/relationships" id="256" r:id="R634470b95049401c"/>
-    <p:sldId xmlns:r="http://schemas.openxmlformats.org/officeDocument/2006/relationships" id="257" r:id="R87b770e04ab84cc6"/>
-    <p:sldId xmlns:r="http://schemas.openxmlformats.org/officeDocument/2006/relationships" id="258" r:id="R2c9a1dce9d114d01"/>
-    <p:sldId xmlns:r="http://schemas.openxmlformats.org/officeDocument/2006/relationships" id="259" r:id="R89ee310942d84251"/>
-    <p:sldId xmlns:r="http://schemas.openxmlformats.org/officeDocument/2006/relationships" id="260" r:id="R2614831bd0514f9a"/>
-    <p:sldId xmlns:r="http://schemas.openxmlformats.org/officeDocument/2006/relationships" id="261" r:id="Rfcb445d69c5e4ee7"/>
-    <p:sldId xmlns:r="http://schemas.openxmlformats.org/officeDocument/2006/relationships" id="262" r:id="R7d6b1f43c7e1417f"/>
-    <p:sldId xmlns:r="http://schemas.openxmlformats.org/officeDocument/2006/relationships" id="263" r:id="R28f25e3ec81b4a8d"/>
-    <p:sldId xmlns:r="http://schemas.openxmlformats.org/officeDocument/2006/relationships" id="264" r:id="R955212d72eb64b82"/>
-    <p:sldId xmlns:r="http://schemas.openxmlformats.org/officeDocument/2006/relationships" id="265" r:id="R1d9b125da1b340ba"/>
-    <p:sldId xmlns:r="http://schemas.openxmlformats.org/officeDocument/2006/relationships" id="266" r:id="R39929d429f364f38"/>
-    <p:sldId xmlns:r="http://schemas.openxmlformats.org/officeDocument/2006/relationships" id="267" r:id="Rc71d728467cd44be"/>
-    <p:sldId xmlns:r="http://schemas.openxmlformats.org/officeDocument/2006/relationships" id="268" r:id="R808ea0f94de74c17"/>
-    <p:sldId xmlns:r="http://schemas.openxmlformats.org/officeDocument/2006/relationships" id="269" r:id="R4a31673dccd84c2a"/>
-    <p:sldId xmlns:r="http://schemas.openxmlformats.org/officeDocument/2006/relationships" id="270" r:id="R0b5fa52ea74544a7"/>
+    <p:sldId xmlns:r="http://schemas.openxmlformats.org/officeDocument/2006/relationships" id="256" r:id="R2c781d7d032a4105"/>
+    <p:sldId xmlns:r="http://schemas.openxmlformats.org/officeDocument/2006/relationships" id="257" r:id="R30d075eb5be14490"/>
+    <p:sldId xmlns:r="http://schemas.openxmlformats.org/officeDocument/2006/relationships" id="258" r:id="R1c155e570dc34f63"/>
+    <p:sldId xmlns:r="http://schemas.openxmlformats.org/officeDocument/2006/relationships" id="259" r:id="Rfbfd711d8dc14881"/>
+    <p:sldId xmlns:r="http://schemas.openxmlformats.org/officeDocument/2006/relationships" id="260" r:id="R8b5e30b3a121496b"/>
+    <p:sldId xmlns:r="http://schemas.openxmlformats.org/officeDocument/2006/relationships" id="261" r:id="Rc5204b05b5c14b59"/>
+    <p:sldId xmlns:r="http://schemas.openxmlformats.org/officeDocument/2006/relationships" id="262" r:id="Re0597e6c33fe4a4d"/>
+    <p:sldId xmlns:r="http://schemas.openxmlformats.org/officeDocument/2006/relationships" id="263" r:id="R2f2236cb1953404a"/>
+    <p:sldId xmlns:r="http://schemas.openxmlformats.org/officeDocument/2006/relationships" id="264" r:id="R155053507f1b453d"/>
+    <p:sldId xmlns:r="http://schemas.openxmlformats.org/officeDocument/2006/relationships" id="265" r:id="R5100a09c97d546f3"/>
+    <p:sldId xmlns:r="http://schemas.openxmlformats.org/officeDocument/2006/relationships" id="266" r:id="R00f8908e436b467a"/>
+    <p:sldId xmlns:r="http://schemas.openxmlformats.org/officeDocument/2006/relationships" id="267" r:id="R8cca08415d064fd4"/>
+    <p:sldId xmlns:r="http://schemas.openxmlformats.org/officeDocument/2006/relationships" id="268" r:id="R096b96132dbd48e8"/>
+    <p:sldId xmlns:r="http://schemas.openxmlformats.org/officeDocument/2006/relationships" id="269" r:id="R9ca327edd7a74c17"/>
+    <p:sldId xmlns:r="http://schemas.openxmlformats.org/officeDocument/2006/relationships" id="270" r:id="Ra2d90fa2a39d4aab"/>
   </p:sldIdLst>
   <p:sldSz cx="12192000" cy="6858000"/>
   <p:notesSz cx="6858000" cy="9144000"/>
@@ -456,7 +456,7 @@
           <a:lstStyle xmlns:a="http://schemas.openxmlformats.org/drawingml/2006/main"/>
           <a:p xmlns:a="http://schemas.openxmlformats.org/drawingml/2006/main">
             <a:r>
-              <a:t>## S23 — 다른 Task에 같은 설명이 반복된다</a:t>
+              <a:t>## S24 — 다른 Task에 같은 설명이 반복된다</a:t>
             </a:r>
           </a:p>
           <a:p xmlns:a="http://schemas.openxmlformats.org/drawingml/2006/main">
@@ -466,7 +466,7 @@
           </a:p>
           <a:p xmlns:a="http://schemas.openxmlformats.org/drawingml/2006/main">
             <a:r>
-              <a:t>Slide ID: S23</a:t>
+              <a:t>Slide ID: S24</a:t>
             </a:r>
           </a:p>
           <a:p xmlns:a="http://schemas.openxmlformats.org/drawingml/2006/main">
@@ -656,7 +656,7 @@
           </a:p>
           <a:p xmlns:a="http://schemas.openxmlformats.org/drawingml/2006/main">
             <a:r>
-              <a:t>Fallback: LOCAL STATIC ARTIFACT — 발표 기본 경로는 `production/ACT_2.pptx`의 S23 또는 `production/preview/act2/S23.png`다. 수정 초안 정적 화면은 존재하며 최종 release 경로·내용 일치는 통합 검토에서 확인한다. 실제 Trial 캡처나 현재 제품 실행으로 표현하지 않는다.</a:t>
+              <a:t>Fallback: LOCAL STATIC ARTIFACT — 발표 기본 경로는 `production/ACT_2.pptx`의 S24 또는 `production/preview/act2/S24.png`다. 수정 초안 정적 화면은 존재하며 최종 release 경로·내용 일치는 통합 검토에서 확인한다. 실제 Trial 캡처나 현재 제품 실행으로 표현하지 않는다.</a:t>
             </a:r>
           </a:p>
           <a:p xmlns:a="http://schemas.openxmlformats.org/drawingml/2006/main">
@@ -736,7 +736,7 @@
           <a:lstStyle xmlns:a="http://schemas.openxmlformats.org/drawingml/2006/main"/>
           <a:p xmlns:a="http://schemas.openxmlformats.org/drawingml/2006/main">
             <a:r>
-              <a:t>## S32 — Core Context에서 상세 정보로 가는 길</a:t>
+              <a:t>## S33 — Core Context에서 상세 정보로 가는 길</a:t>
             </a:r>
           </a:p>
           <a:p xmlns:a="http://schemas.openxmlformats.org/drawingml/2006/main">
@@ -746,7 +746,7 @@
           </a:p>
           <a:p xmlns:a="http://schemas.openxmlformats.org/drawingml/2006/main">
             <a:r>
-              <a:t>Slide ID: S32</a:t>
+              <a:t>Slide ID: S33</a:t>
             </a:r>
           </a:p>
           <a:p xmlns:a="http://schemas.openxmlformats.org/drawingml/2006/main">
@@ -846,7 +846,7 @@
           </a:p>
           <a:p xmlns:a="http://schemas.openxmlformats.org/drawingml/2006/main">
             <a:r>
-              <a:t>화면 진행: Core의 세 항목을 먼저 읽고 필요한 상세의 세 행으로 이동한다. S31의 탐색 경로를 반복 설명하기보다 항상 읽을 기본 안내와 필요할 때 찾을 상세의 경계를 확인한다.</a:t>
+              <a:t>화면 진행: Core의 세 항목을 먼저 읽고 필요한 상세의 세 행으로 이동한다. S32의 탐색 경로를 반복 설명하기보다 항상 읽을 기본 안내와 필요할 때 찾을 상세의 경계를 확인한다.</a:t>
             </a:r>
           </a:p>
           <a:p xmlns:a="http://schemas.openxmlformats.org/drawingml/2006/main">
@@ -856,7 +856,7 @@
           </a:p>
           <a:p xmlns:a="http://schemas.openxmlformats.org/drawingml/2006/main">
             <a:r>
-              <a:t>Evidence / Source: BEAT-014, CLM-0003, CLM-0005, CLM-0014, CLM-0015. TEACHING_MODEL / CONCEPTUAL; describe STATE-03 structure in S33.</a:t>
+              <a:t>Evidence / Source: BEAT-014, CLM-0003, CLM-0005, CLM-0014, CLM-0015. TEACHING_MODEL / CONCEPTUAL; describe STATE-03 structure in S34.</a:t>
             </a:r>
           </a:p>
           <a:p xmlns:a="http://schemas.openxmlformats.org/drawingml/2006/main">
@@ -906,7 +906,7 @@
           </a:p>
           <a:p xmlns:a="http://schemas.openxmlformats.org/drawingml/2006/main">
             <a:r>
-              <a:t>Demo Operation: N/A — the observed repository structure follows on S33.</a:t>
+              <a:t>Demo Operation: N/A — the observed repository structure follows on S34.</a:t>
             </a:r>
           </a:p>
           <a:p xmlns:a="http://schemas.openxmlformats.org/drawingml/2006/main">
@@ -946,7 +946,7 @@
           </a:p>
           <a:p xmlns:a="http://schemas.openxmlformats.org/drawingml/2006/main">
             <a:r>
-              <a:t>Fallback: LOCAL STATIC ARTIFACT — 발표 기본 경로는 `production/ACT_2.pptx`의 S32 또는 `production/preview/act2/S32.png`다. 수정 초안 정적 화면은 존재하며 최종 release 경로·내용 일치는 통합 검토에서 확인한다. 실제 Trial 캡처나 현재 제품 실행으로 표현하지 않는다.</a:t>
+              <a:t>Fallback: LOCAL STATIC ARTIFACT — 발표 기본 경로는 `production/ACT_2.pptx`의 S33 또는 `production/preview/act2/S33.png`다. 수정 초안 정적 화면은 존재하며 최종 release 경로·내용 일치는 통합 검토에서 확인한다. 실제 Trial 캡처나 현재 제품 실행으로 표현하지 않는다.</a:t>
             </a:r>
           </a:p>
           <a:p xmlns:a="http://schemas.openxmlformats.org/drawingml/2006/main">
@@ -1026,7 +1026,7 @@
           <a:lstStyle xmlns:a="http://schemas.openxmlformats.org/drawingml/2006/main"/>
           <a:p xmlns:a="http://schemas.openxmlformats.org/drawingml/2006/main">
             <a:r>
-              <a:t>## S33 — 정보를 지우지 않고 위치를 나누기</a:t>
+              <a:t>## S34 — 정보를 지우지 않고 위치를 나누기</a:t>
             </a:r>
           </a:p>
           <a:p xmlns:a="http://schemas.openxmlformats.org/drawingml/2006/main">
@@ -1036,7 +1036,7 @@
           </a:p>
           <a:p xmlns:a="http://schemas.openxmlformats.org/drawingml/2006/main">
             <a:r>
-              <a:t>Slide ID: S33</a:t>
+              <a:t>Slide ID: S34</a:t>
             </a:r>
           </a:p>
           <a:p xmlns:a="http://schemas.openxmlformats.org/drawingml/2006/main">
@@ -1231,7 +1231,7 @@
           </a:p>
           <a:p xmlns:a="http://schemas.openxmlformats.org/drawingml/2006/main">
             <a:r>
-              <a:t>Fallback: LOCAL STATIC ARTIFACT — 발표 기본 경로는 `production/ACT_2.pptx`의 S33 또는 `production/preview/act2/S33.png`다. 수정 초안 정적 화면은 존재하며 최종 release 경로·내용 일치는 통합 검토에서 확인한다. 실제 Trial 캡처나 현재 제품 실행으로 표현하지 않는다.</a:t>
+              <a:t>Fallback: LOCAL STATIC ARTIFACT — 발표 기본 경로는 `production/ACT_2.pptx`의 S34 또는 `production/preview/act2/S34.png`다. 수정 초안 정적 화면은 존재하며 최종 release 경로·내용 일치는 통합 검토에서 확인한다. 실제 Trial 캡처나 현재 제품 실행으로 표현하지 않는다.</a:t>
             </a:r>
           </a:p>
           <a:p xmlns:a="http://schemas.openxmlformats.org/drawingml/2006/main">
@@ -1311,7 +1311,7 @@
           <a:lstStyle xmlns:a="http://schemas.openxmlformats.org/drawingml/2006/main"/>
           <a:p xmlns:a="http://schemas.openxmlformats.org/drawingml/2006/main">
             <a:r>
-              <a:t>## S34 — 서로 다른 두 Task가 무엇을 읽을까?</a:t>
+              <a:t>## S35 — 서로 다른 두 Task가 무엇을 읽을까?</a:t>
             </a:r>
           </a:p>
           <a:p xmlns:a="http://schemas.openxmlformats.org/drawingml/2006/main">
@@ -1321,7 +1321,7 @@
           </a:p>
           <a:p xmlns:a="http://schemas.openxmlformats.org/drawingml/2006/main">
             <a:r>
-              <a:t>Slide ID: S34</a:t>
+              <a:t>Slide ID: S35</a:t>
             </a:r>
           </a:p>
           <a:p xmlns:a="http://schemas.openxmlformats.org/drawingml/2006/main">
@@ -1511,7 +1511,7 @@
           </a:p>
           <a:p xmlns:a="http://schemas.openxmlformats.org/drawingml/2006/main">
             <a:r>
-              <a:t>Fallback: LOCAL STATIC ARTIFACT — 발표 기본 경로는 `production/ACT_2.pptx`의 S34 또는 `production/preview/act2/S34.png`다. 수정 초안 정적 화면은 존재하며 최종 release 경로·내용 일치는 통합 검토에서 확인한다. 실제 Trial 캡처나 현재 제품 실행으로 표현하지 않는다.</a:t>
+              <a:t>Fallback: LOCAL STATIC ARTIFACT — 발표 기본 경로는 `production/ACT_2.pptx`의 S35 또는 `production/preview/act2/S35.png`다. 수정 초안 정적 화면은 존재하며 최종 release 경로·내용 일치는 통합 검토에서 확인한다. 실제 Trial 캡처나 현재 제품 실행으로 표현하지 않는다.</a:t>
             </a:r>
           </a:p>
           <a:p xmlns:a="http://schemas.openxmlformats.org/drawingml/2006/main">
@@ -1591,7 +1591,7 @@
           <a:lstStyle xmlns:a="http://schemas.openxmlformats.org/drawingml/2006/main"/>
           <a:p xmlns:a="http://schemas.openxmlformats.org/drawingml/2006/main">
             <a:r>
-              <a:t>## S35 — Crop Task에서 관찰한 접근</a:t>
+              <a:t>## S36 — Crop Task에서 관찰한 접근</a:t>
             </a:r>
           </a:p>
           <a:p xmlns:a="http://schemas.openxmlformats.org/drawingml/2006/main">
@@ -1601,7 +1601,7 @@
           </a:p>
           <a:p xmlns:a="http://schemas.openxmlformats.org/drawingml/2006/main">
             <a:r>
-              <a:t>Slide ID: S35</a:t>
+              <a:t>Slide ID: S36</a:t>
             </a:r>
           </a:p>
           <a:p xmlns:a="http://schemas.openxmlformats.org/drawingml/2006/main">
@@ -1796,7 +1796,7 @@
           </a:p>
           <a:p xmlns:a="http://schemas.openxmlformats.org/drawingml/2006/main">
             <a:r>
-              <a:t>Fallback: LOCAL STATIC ARTIFACT — 발표 기본 경로는 `production/ACT_2.pptx`의 S35 또는 `production/preview/act2/S35.png`다. 수정 초안 정적 화면은 존재하며 최종 release 경로·내용 일치는 통합 검토에서 확인한다. 실제 Trial 캡처나 현재 제품 실행으로 표현하지 않는다.</a:t>
+              <a:t>Fallback: LOCAL STATIC ARTIFACT — 발표 기본 경로는 `production/ACT_2.pptx`의 S36 또는 `production/preview/act2/S36.png`다. 수정 초안 정적 화면은 존재하며 최종 release 경로·내용 일치는 통합 검토에서 확인한다. 실제 Trial 캡처나 현재 제품 실행으로 표현하지 않는다.</a:t>
             </a:r>
           </a:p>
           <a:p xmlns:a="http://schemas.openxmlformats.org/drawingml/2006/main">
@@ -1876,7 +1876,7 @@
           <a:lstStyle xmlns:a="http://schemas.openxmlformats.org/drawingml/2006/main"/>
           <a:p xmlns:a="http://schemas.openxmlformats.org/drawingml/2006/main">
             <a:r>
-              <a:t>## S36 — Task별 접근은 달랐지만 완벽하지는 않다</a:t>
+              <a:t>## S37 — Task별 접근은 달랐지만 완벽하지는 않다</a:t>
             </a:r>
           </a:p>
           <a:p xmlns:a="http://schemas.openxmlformats.org/drawingml/2006/main">
@@ -1886,7 +1886,7 @@
           </a:p>
           <a:p xmlns:a="http://schemas.openxmlformats.org/drawingml/2006/main">
             <a:r>
-              <a:t>Slide ID: S36</a:t>
+              <a:t>Slide ID: S37</a:t>
             </a:r>
           </a:p>
           <a:p xmlns:a="http://schemas.openxmlformats.org/drawingml/2006/main">
@@ -2086,7 +2086,7 @@
           </a:p>
           <a:p xmlns:a="http://schemas.openxmlformats.org/drawingml/2006/main">
             <a:r>
-              <a:t>Fallback: LOCAL STATIC ARTIFACT — 발표 기본 경로는 `production/ACT_2.pptx`의 S36 또는 `production/preview/act2/S36.png`다. 수정 초안 정적 화면은 존재하며 최종 release 경로·내용 일치는 통합 검토에서 확인한다. 실제 Trial 캡처나 현재 제품 실행으로 표현하지 않는다.</a:t>
+              <a:t>Fallback: LOCAL STATIC ARTIFACT — 발표 기본 경로는 `production/ACT_2.pptx`의 S37 또는 `production/preview/act2/S37.png`다. 수정 초안 정적 화면은 존재하며 최종 release 경로·내용 일치는 통합 검토에서 확인한다. 실제 Trial 캡처나 현재 제품 실행으로 표현하지 않는다.</a:t>
             </a:r>
           </a:p>
           <a:p xmlns:a="http://schemas.openxmlformats.org/drawingml/2006/main">
@@ -2166,7 +2166,7 @@
           <a:lstStyle xmlns:a="http://schemas.openxmlformats.org/drawingml/2006/main"/>
           <a:p xmlns:a="http://schemas.openxmlformats.org/drawingml/2006/main">
             <a:r>
-              <a:t>## S37 — 지식은 정리됐지만 절차는 반복된다</a:t>
+              <a:t>## S38 — 지식은 정리됐지만 절차는 반복된다</a:t>
             </a:r>
           </a:p>
           <a:p xmlns:a="http://schemas.openxmlformats.org/drawingml/2006/main">
@@ -2176,7 +2176,7 @@
           </a:p>
           <a:p xmlns:a="http://schemas.openxmlformats.org/drawingml/2006/main">
             <a:r>
-              <a:t>Slide ID: S37</a:t>
+              <a:t>Slide ID: S38</a:t>
             </a:r>
           </a:p>
           <a:p xmlns:a="http://schemas.openxmlformats.org/drawingml/2006/main">
@@ -2366,7 +2366,7 @@
           </a:p>
           <a:p xmlns:a="http://schemas.openxmlformats.org/drawingml/2006/main">
             <a:r>
-              <a:t>Fallback: LOCAL STATIC ARTIFACT — 발표 기본 경로는 `production/ACT_2.pptx`의 S37 또는 `production/preview/act2/S37.png`다. 수정 초안 정적 화면은 존재하며 최종 release 경로·내용 일치는 통합 검토에서 확인한다. 실제 Trial 캡처나 현재 제품 실행으로 표현하지 않는다. 질문이 없으면 Audience Interaction의 준비 질문으로 진행한다.</a:t>
+              <a:t>Fallback: LOCAL STATIC ARTIFACT — 발표 기본 경로는 `production/ACT_2.pptx`의 S38 또는 `production/preview/act2/S38.png`다. 수정 초안 정적 화면은 존재하며 최종 release 경로·내용 일치는 통합 검토에서 확인한다. 실제 Trial 캡처나 현재 제품 실행으로 표현하지 않는다. 질문이 없으면 Audience Interaction의 준비 질문으로 진행한다.</a:t>
             </a:r>
           </a:p>
           <a:p xmlns:a="http://schemas.openxmlformats.org/drawingml/2006/main">
@@ -2446,7 +2446,7 @@
           <a:lstStyle xmlns:a="http://schemas.openxmlformats.org/drawingml/2006/main"/>
           <a:p xmlns:a="http://schemas.openxmlformats.org/drawingml/2006/main">
             <a:r>
-              <a:t>## S24 — 작은 Project Context의 첫 기록</a:t>
+              <a:t>## S25 — 작은 Project Context의 첫 기록</a:t>
             </a:r>
           </a:p>
           <a:p xmlns:a="http://schemas.openxmlformats.org/drawingml/2006/main">
@@ -2456,7 +2456,7 @@
           </a:p>
           <a:p xmlns:a="http://schemas.openxmlformats.org/drawingml/2006/main">
             <a:r>
-              <a:t>Slide ID: S24</a:t>
+              <a:t>Slide ID: S25</a:t>
             </a:r>
           </a:p>
           <a:p xmlns:a="http://schemas.openxmlformats.org/drawingml/2006/main">
@@ -2546,7 +2546,7 @@
           </a:p>
           <a:p xmlns:a="http://schemas.openxmlformats.org/drawingml/2006/main">
             <a:r>
-              <a:t>3. (3:00–4:00) Task마다 반복 설명하던 사실을 저장소에 둔 설계 의도를 정리하고, 실제 활용 관찰은 S25로 넘긴다.</a:t>
+              <a:t>3. (3:00–4:00) Task마다 반복 설명하던 사실을 저장소에 둔 설계 의도를 정리하고, 실제 활용 관찰은 S26로 넘긴다.</a:t>
             </a:r>
           </a:p>
           <a:p xmlns:a="http://schemas.openxmlformats.org/drawingml/2006/main">
@@ -2576,7 +2576,7 @@
           </a:p>
           <a:p xmlns:a="http://schemas.openxmlformats.org/drawingml/2006/main">
             <a:r>
-              <a:t>Claim Boundary: 실제 파일이 그 상태에 존재했다는 근거다. 성능, 정확도, 토큰 절감 또는 AGENTS.md 단독 인과효과를 주장하지 않는다. 제품 코드·테스트·README는 그 상태 전환에서 바뀌지 않았다. S25의 지침 활용 관찰을 이 장의 결과로 앞당기지 않는다. 현재 Desktop 자동 로딩이나 교육 환경을 검증한 것이 아니다.</a:t>
+              <a:t>Claim Boundary: 실제 파일이 그 상태에 존재했다는 근거다. 성능, 정확도, 토큰 절감 또는 AGENTS.md 단독 인과효과를 주장하지 않는다. 제품 코드·테스트·README는 그 상태 전환에서 바뀌지 않았다. S26의 지침 활용 관찰을 이 장의 결과로 앞당기지 않는다. 현재 Desktop 자동 로딩이나 교육 환경을 검증한 것이 아니다.</a:t>
             </a:r>
           </a:p>
           <a:p xmlns:a="http://schemas.openxmlformats.org/drawingml/2006/main">
@@ -2616,7 +2616,7 @@
           </a:p>
           <a:p xmlns:a="http://schemas.openxmlformats.org/drawingml/2006/main">
             <a:r>
-              <a:t>Demo Operation: `production/ACT_2.pptx`의 S24 및 `production/preview/act2/S24.png`에 있는 실제 AGENTS.md 원문 발췌를 가리킨다. 편집기 screenshot이 아니다. Live/HYBRID는 발표 환경 검증 전까지 비활성이다.</a:t>
+              <a:t>Demo Operation: `production/ACT_2.pptx`의 S25 및 `production/preview/act2/S25.png`에 있는 실제 AGENTS.md 원문 발췌를 가리킨다. 편집기 screenshot이 아니다. Live/HYBRID는 발표 환경 검증 전까지 비활성이다.</a:t>
             </a:r>
           </a:p>
           <a:p xmlns:a="http://schemas.openxmlformats.org/drawingml/2006/main">
@@ -2646,7 +2646,7 @@
           </a:p>
           <a:p xmlns:a="http://schemas.openxmlformats.org/drawingml/2006/main">
             <a:r>
-              <a:t>Time Management: Demo 4분 유지. 1분 상태 전환, 2분 네 발췌, 1분 의미와 S25 handoff. 명령어 옵션별 설명은 생략한다.</a:t>
+              <a:t>Time Management: Demo 4분 유지. 1분 상태 전환, 2분 네 발췌, 1분 의미와 S26 handoff. 명령어 옵션별 설명은 생략한다.</a:t>
             </a:r>
           </a:p>
           <a:p xmlns:a="http://schemas.openxmlformats.org/drawingml/2006/main">
@@ -2656,7 +2656,7 @@
           </a:p>
           <a:p xmlns:a="http://schemas.openxmlformats.org/drawingml/2006/main">
             <a:r>
-              <a:t>Fallback: LOCAL STATIC ARTIFACT — 발표 기본 경로는 `production/ACT_2.pptx`의 S24 또는 `production/preview/act2/S24.png`다. 수정 초안 정적 화면은 존재하며 최종 release 경로·내용 일치는 통합 검토에서 확인한다. 실제 Trial 캡처나 현재 제품 실행으로 표현하지 않는다.</a:t>
+              <a:t>Fallback: LOCAL STATIC ARTIFACT — 발표 기본 경로는 `production/ACT_2.pptx`의 S25 또는 `production/preview/act2/S25.png`다. 수정 초안 정적 화면은 존재하며 최종 release 경로·내용 일치는 통합 검토에서 확인한다. 실제 Trial 캡처나 현재 제품 실행으로 표현하지 않는다.</a:t>
             </a:r>
           </a:p>
           <a:p xmlns:a="http://schemas.openxmlformats.org/drawingml/2006/main">
@@ -2736,7 +2736,7 @@
           <a:lstStyle xmlns:a="http://schemas.openxmlformats.org/drawingml/2006/main"/>
           <a:p xmlns:a="http://schemas.openxmlformats.org/drawingml/2006/main">
             <a:r>
-              <a:t>## S25 — 한 번의 사용에서 확인된 것</a:t>
+              <a:t>## S26 — 한 번의 사용에서 확인된 것</a:t>
             </a:r>
           </a:p>
           <a:p xmlns:a="http://schemas.openxmlformats.org/drawingml/2006/main">
@@ -2746,7 +2746,7 @@
           </a:p>
           <a:p xmlns:a="http://schemas.openxmlformats.org/drawingml/2006/main">
             <a:r>
-              <a:t>Slide ID: S25</a:t>
+              <a:t>Slide ID: S26</a:t>
             </a:r>
           </a:p>
           <a:p xmlns:a="http://schemas.openxmlformats.org/drawingml/2006/main">
@@ -2936,7 +2936,7 @@
           </a:p>
           <a:p xmlns:a="http://schemas.openxmlformats.org/drawingml/2006/main">
             <a:r>
-              <a:t>Fallback: LOCAL STATIC ARTIFACT — 발표 기본 경로는 `production/ACT_2.pptx`의 S25 또는 `production/preview/act2/S25.png`다. 수정 초안 정적 화면은 존재하며 최종 release 경로·내용 일치는 통합 검토에서 확인한다. 실제 Trial 캡처나 현재 제품 실행으로 표현하지 않는다.</a:t>
+              <a:t>Fallback: LOCAL STATIC ARTIFACT — 발표 기본 경로는 `production/ACT_2.pptx`의 S26 또는 `production/preview/act2/S26.png`다. 수정 초안 정적 화면은 존재하며 최종 release 경로·내용 일치는 통합 검토에서 확인한다. 실제 Trial 캡처나 현재 제품 실행으로 표현하지 않는다.</a:t>
             </a:r>
           </a:p>
           <a:p xmlns:a="http://schemas.openxmlformats.org/drawingml/2006/main">
@@ -3016,7 +3016,7 @@
           <a:lstStyle xmlns:a="http://schemas.openxmlformats.org/drawingml/2006/main"/>
           <a:p xmlns:a="http://schemas.openxmlformats.org/drawingml/2006/main">
             <a:r>
-              <a:t>## S26 — Task Prompt와 Project Context</a:t>
+              <a:t>## S27 — Task Prompt와 Project Context</a:t>
             </a:r>
           </a:p>
           <a:p xmlns:a="http://schemas.openxmlformats.org/drawingml/2006/main">
@@ -3026,7 +3026,7 @@
           </a:p>
           <a:p xmlns:a="http://schemas.openxmlformats.org/drawingml/2006/main">
             <a:r>
-              <a:t>Slide ID: S26</a:t>
+              <a:t>Slide ID: S27</a:t>
             </a:r>
           </a:p>
           <a:p xmlns:a="http://schemas.openxmlformats.org/drawingml/2006/main">
@@ -3126,7 +3126,7 @@
           </a:p>
           <a:p xmlns:a="http://schemas.openxmlformats.org/drawingml/2006/main">
             <a:r>
-              <a:t>화면 진행: S25에서 본 기록을 회수한 뒤 두 열의 수명을 비교한다. 왼쪽은 다음 작업에서 바뀔 목표, 오른쪽은 여러 작업에서 다시 참고할 사실이다. S22의 분류 질문을 처음부터 반복하지 않는다.</a:t>
+              <a:t>화면 진행: S26에서 본 기록을 회수한 뒤 두 열의 수명을 비교한다. 왼쪽은 다음 작업에서 바뀔 목표, 오른쪽은 여러 작업에서 다시 참고할 사실이다. S23의 분류 질문을 처음부터 반복하지 않는다.</a:t>
             </a:r>
           </a:p>
           <a:p xmlns:a="http://schemas.openxmlformats.org/drawingml/2006/main">
@@ -3136,7 +3136,7 @@
           </a:p>
           <a:p xmlns:a="http://schemas.openxmlformats.org/drawingml/2006/main">
             <a:r>
-              <a:t>Evidence / Source: BEAT-009–010, TRANS-003, CLM-0003, CLM-0005. TEACHING_MODEL / CONCEPTUAL; examples summarize S23–S25.</a:t>
+              <a:t>Evidence / Source: BEAT-009–010, TRANS-003, CLM-0003, CLM-0005. TEACHING_MODEL / CONCEPTUAL; examples summarize S24–S26.</a:t>
             </a:r>
           </a:p>
           <a:p xmlns:a="http://schemas.openxmlformats.org/drawingml/2006/main">
@@ -3226,7 +3226,7 @@
           </a:p>
           <a:p xmlns:a="http://schemas.openxmlformats.org/drawingml/2006/main">
             <a:r>
-              <a:t>Fallback: LOCAL STATIC ARTIFACT — 발표 기본 경로는 `production/ACT_2.pptx`의 S26 또는 `production/preview/act2/S26.png`다. 수정 초안 정적 화면은 존재하며 최종 release 경로·내용 일치는 통합 검토에서 확인한다. 실제 Trial 캡처나 현재 제품 실행으로 표현하지 않는다.</a:t>
+              <a:t>Fallback: LOCAL STATIC ARTIFACT — 발표 기본 경로는 `production/ACT_2.pptx`의 S27 또는 `production/preview/act2/S27.png`다. 수정 초안 정적 화면은 존재하며 최종 release 경로·내용 일치는 통합 검토에서 확인한다. 실제 Trial 캡처나 현재 제품 실행으로 표현하지 않는다.</a:t>
             </a:r>
           </a:p>
           <a:p xmlns:a="http://schemas.openxmlformats.org/drawingml/2006/main">
@@ -3306,7 +3306,7 @@
           <a:lstStyle xmlns:a="http://schemas.openxmlformats.org/drawingml/2006/main"/>
           <a:p xmlns:a="http://schemas.openxmlformats.org/drawingml/2006/main">
             <a:r>
-              <a:t>## S27 — 정확한 정보도 계속 늘어난다</a:t>
+              <a:t>## S28 — 정확한 정보도 계속 늘어난다</a:t>
             </a:r>
           </a:p>
           <a:p xmlns:a="http://schemas.openxmlformats.org/drawingml/2006/main">
@@ -3316,7 +3316,7 @@
           </a:p>
           <a:p xmlns:a="http://schemas.openxmlformats.org/drawingml/2006/main">
             <a:r>
-              <a:t>Slide ID: S27</a:t>
+              <a:t>Slide ID: S28</a:t>
             </a:r>
           </a:p>
           <a:p xmlns:a="http://schemas.openxmlformats.org/drawingml/2006/main">
@@ -3506,7 +3506,7 @@
           </a:p>
           <a:p xmlns:a="http://schemas.openxmlformats.org/drawingml/2006/main">
             <a:r>
-              <a:t>Fallback: LOCAL STATIC ARTIFACT — 발표 기본 경로는 `production/ACT_2.pptx`의 S27 또는 `production/preview/act2/S27.png`다. 수정 초안 정적 화면은 존재하며 최종 release 경로·내용 일치는 통합 검토에서 확인한다. 실제 Trial 캡처나 현재 제품 실행으로 표현하지 않는다.</a:t>
+              <a:t>Fallback: LOCAL STATIC ARTIFACT — 발표 기본 경로는 `production/ACT_2.pptx`의 S28 또는 `production/preview/act2/S28.png`다. 수정 초안 정적 화면은 존재하며 최종 release 경로·내용 일치는 통합 검토에서 확인한다. 실제 Trial 캡처나 현재 제품 실행으로 표현하지 않는다.</a:t>
             </a:r>
           </a:p>
           <a:p xmlns:a="http://schemas.openxmlformats.org/drawingml/2006/main">
@@ -3586,7 +3586,7 @@
           <a:lstStyle xmlns:a="http://schemas.openxmlformats.org/drawingml/2006/main"/>
           <a:p xmlns:a="http://schemas.openxmlformats.org/drawingml/2006/main">
             <a:r>
-              <a:t>## S28 — 정확하지만 이번 Task에는 불필요한 정보</a:t>
+              <a:t>## S29 — 정확하지만 이번 Task에는 불필요한 정보</a:t>
             </a:r>
           </a:p>
           <a:p xmlns:a="http://schemas.openxmlformats.org/drawingml/2006/main">
@@ -3596,7 +3596,7 @@
           </a:p>
           <a:p xmlns:a="http://schemas.openxmlformats.org/drawingml/2006/main">
             <a:r>
-              <a:t>Slide ID: S28</a:t>
+              <a:t>Slide ID: S29</a:t>
             </a:r>
           </a:p>
           <a:p xmlns:a="http://schemas.openxmlformats.org/drawingml/2006/main">
@@ -3786,7 +3786,7 @@
           </a:p>
           <a:p xmlns:a="http://schemas.openxmlformats.org/drawingml/2006/main">
             <a:r>
-              <a:t>Fallback: LOCAL STATIC ARTIFACT — 발표 기본 경로는 `production/ACT_2.pptx`의 S28 또는 `production/preview/act2/S28.png`다. 수정 초안 정적 화면은 존재하며 최종 release 경로·내용 일치는 통합 검토에서 확인한다. 실제 Trial 캡처나 현재 제품 실행으로 표현하지 않는다.</a:t>
+              <a:t>Fallback: LOCAL STATIC ARTIFACT — 발표 기본 경로는 `production/ACT_2.pptx`의 S29 또는 `production/preview/act2/S29.png`다. 수정 초안 정적 화면은 존재하며 최종 release 경로·내용 일치는 통합 검토에서 확인한다. 실제 Trial 캡처나 현재 제품 실행으로 표현하지 않는다.</a:t>
             </a:r>
           </a:p>
           <a:p xmlns:a="http://schemas.openxmlformats.org/drawingml/2006/main">
@@ -3866,7 +3866,7 @@
           <a:lstStyle xmlns:a="http://schemas.openxmlformats.org/drawingml/2006/main"/>
           <a:p xmlns:a="http://schemas.openxmlformats.org/drawingml/2006/main">
             <a:r>
-              <a:t>## S29 — 정보의 범위와 제공 시점</a:t>
+              <a:t>## S30 — 정보의 범위와 제공 시점</a:t>
             </a:r>
           </a:p>
           <a:p xmlns:a="http://schemas.openxmlformats.org/drawingml/2006/main">
@@ -3876,7 +3876,7 @@
           </a:p>
           <a:p xmlns:a="http://schemas.openxmlformats.org/drawingml/2006/main">
             <a:r>
-              <a:t>Slide ID: S29</a:t>
+              <a:t>Slide ID: S30</a:t>
             </a:r>
           </a:p>
           <a:p xmlns:a="http://schemas.openxmlformats.org/drawingml/2006/main">
@@ -4066,7 +4066,7 @@
           </a:p>
           <a:p xmlns:a="http://schemas.openxmlformats.org/drawingml/2006/main">
             <a:r>
-              <a:t>Fallback: LOCAL STATIC ARTIFACT — 발표 기본 경로는 `production/ACT_2.pptx`의 S29 또는 `production/preview/act2/S29.png`다. 수정 초안 정적 화면은 존재하며 최종 release 경로·내용 일치는 통합 검토에서 확인한다. 실제 Trial 캡처나 현재 제품 실행으로 표현하지 않는다.</a:t>
+              <a:t>Fallback: LOCAL STATIC ARTIFACT — 발표 기본 경로는 `production/ACT_2.pptx`의 S30 또는 `production/preview/act2/S30.png`다. 수정 초안 정적 화면은 존재하며 최종 release 경로·내용 일치는 통합 검토에서 확인한다. 실제 Trial 캡처나 현재 제품 실행으로 표현하지 않는다.</a:t>
             </a:r>
           </a:p>
           <a:p xmlns:a="http://schemas.openxmlformats.org/drawingml/2006/main">
@@ -4146,7 +4146,7 @@
           <a:lstStyle xmlns:a="http://schemas.openxmlformats.org/drawingml/2006/main"/>
           <a:p xmlns:a="http://schemas.openxmlformats.org/drawingml/2006/main">
             <a:r>
-              <a:t>## S30 — Long Context 연구가 말해주는 범위</a:t>
+              <a:t>## S31 — Long Context 연구가 말해주는 범위</a:t>
             </a:r>
           </a:p>
           <a:p xmlns:a="http://schemas.openxmlformats.org/drawingml/2006/main">
@@ -4156,7 +4156,7 @@
           </a:p>
           <a:p xmlns:a="http://schemas.openxmlformats.org/drawingml/2006/main">
             <a:r>
-              <a:t>Slide ID: S30</a:t>
+              <a:t>Slide ID: S31</a:t>
             </a:r>
           </a:p>
           <a:p xmlns:a="http://schemas.openxmlformats.org/drawingml/2006/main">
@@ -4356,7 +4356,7 @@
           </a:p>
           <a:p xmlns:a="http://schemas.openxmlformats.org/drawingml/2006/main">
             <a:r>
-              <a:t>Fallback: LOCAL STATIC ARTIFACT — 발표 기본 경로는 `production/ACT_2.pptx`의 S30 또는 `production/preview/act2/S30.png`다. 수정 초안 정적 화면은 존재하며 최종 release 경로·내용 일치는 통합 검토에서 확인한다. 실제 Trial 캡처나 현재 제품 실행으로 표현하지 않는다.</a:t>
+              <a:t>Fallback: LOCAL STATIC ARTIFACT — 발표 기본 경로는 `production/ACT_2.pptx`의 S31 또는 `production/preview/act2/S31.png`다. 수정 초안 정적 화면은 존재하며 최종 release 경로·내용 일치는 통합 검토에서 확인한다. 실제 Trial 캡처나 현재 제품 실행으로 표현하지 않는다.</a:t>
             </a:r>
           </a:p>
           <a:p xmlns:a="http://schemas.openxmlformats.org/drawingml/2006/main">
@@ -4436,7 +4436,7 @@
           <a:lstStyle xmlns:a="http://schemas.openxmlformats.org/drawingml/2006/main"/>
           <a:p xmlns:a="http://schemas.openxmlformats.org/drawingml/2006/main">
             <a:r>
-              <a:t>## S31 — 필요한 상세 정보로 가는 길</a:t>
+              <a:t>## S32 — 필요한 상세 정보로 가는 길</a:t>
             </a:r>
           </a:p>
           <a:p xmlns:a="http://schemas.openxmlformats.org/drawingml/2006/main">
@@ -4446,7 +4446,7 @@
           </a:p>
           <a:p xmlns:a="http://schemas.openxmlformats.org/drawingml/2006/main">
             <a:r>
-              <a:t>Slide ID: S31</a:t>
+              <a:t>Slide ID: S32</a:t>
             </a:r>
           </a:p>
           <a:p xmlns:a="http://schemas.openxmlformats.org/drawingml/2006/main">
@@ -4646,7 +4646,7 @@
           </a:p>
           <a:p xmlns:a="http://schemas.openxmlformats.org/drawingml/2006/main">
             <a:r>
-              <a:t>Fallback: LOCAL STATIC ARTIFACT — 발표 기본 경로는 `production/ACT_2.pptx`의 S31 또는 `production/preview/act2/S31.png`다. 수정 초안 정적 화면은 존재하며 최종 release 경로·내용 일치는 통합 검토에서 확인한다. 실제 Trial 캡처나 현재 제품 실행으로 표현하지 않는다.</a:t>
+              <a:t>Fallback: LOCAL STATIC ARTIFACT — 발표 기본 경로는 `production/ACT_2.pptx`의 S32 또는 `production/preview/act2/S32.png`다. 수정 초안 정적 화면은 존재하며 최종 release 경로·내용 일치는 통합 검토에서 확인한다. 실제 Trial 캡처나 현재 제품 실행으로 표현하지 않는다.</a:t>
             </a:r>
           </a:p>
           <a:p xmlns:a="http://schemas.openxmlformats.org/drawingml/2006/main">
@@ -4703,7 +4703,7 @@
           <p:cNvPr id="3" name="Title">
             <a:extLst xmlns:a="http://schemas.openxmlformats.org/drawingml/2006/main">
               <a:ext uri="{FF2B5EF4-FFF2-40B4-BE49-F238E27FC236}">
-                <a16:creationId xmlns:a16="http://schemas.microsoft.com/office/drawing/2014/main" id="{B1C574A0-954F-430D-9F3A-DB5E541EFAC7}"/>
+                <a16:creationId xmlns:a16="http://schemas.microsoft.com/office/drawing/2014/main" id="{225AA4F9-44D3-41D6-82D9-9857035AAC61}"/>
               </a:ext>
             </a:extLst>
           </p:cNvPr>
@@ -4932,7 +4932,7 @@
           <p:cNvPr id="2" name="Subtitle">
             <a:extLst xmlns:a="http://schemas.openxmlformats.org/drawingml/2006/main">
               <a:ext uri="{FF2B5EF4-FFF2-40B4-BE49-F238E27FC236}">
-                <a16:creationId xmlns:a16="http://schemas.microsoft.com/office/drawing/2014/main" id="{F4316642-7C57-4F3C-87D6-AFF42E6CF5CC}"/>
+                <a16:creationId xmlns:a16="http://schemas.microsoft.com/office/drawing/2014/main" id="{E1DA430D-D4B9-46B1-BCE3-281A973B6C4E}"/>
               </a:ext>
             </a:extLst>
           </p:cNvPr>
@@ -5178,7 +5178,7 @@
           <p:cNvPr id="2" name="Section title">
             <a:extLst xmlns:a="http://schemas.openxmlformats.org/drawingml/2006/main">
               <a:ext uri="{FF2B5EF4-FFF2-40B4-BE49-F238E27FC236}">
-                <a16:creationId xmlns:a16="http://schemas.microsoft.com/office/drawing/2014/main" id="{312B9973-9E5F-46B5-B495-0B1FCE04B22C}"/>
+                <a16:creationId xmlns:a16="http://schemas.microsoft.com/office/drawing/2014/main" id="{7CFC81A1-A640-4D48-9EB6-2D2FFD2F882D}"/>
               </a:ext>
             </a:extLst>
           </p:cNvPr>
@@ -5424,7 +5424,7 @@
           <p:cNvPr id="3" name="Title">
             <a:extLst xmlns:a="http://schemas.openxmlformats.org/drawingml/2006/main">
               <a:ext uri="{FF2B5EF4-FFF2-40B4-BE49-F238E27FC236}">
-                <a16:creationId xmlns:a16="http://schemas.microsoft.com/office/drawing/2014/main" id="{3A6B6FC0-317A-4250-B320-BBAE2A914B1A}"/>
+                <a16:creationId xmlns:a16="http://schemas.microsoft.com/office/drawing/2014/main" id="{D468D8D4-16C7-4257-92D1-EC2BB04A0327}"/>
               </a:ext>
             </a:extLst>
           </p:cNvPr>
@@ -5653,7 +5653,7 @@
           <p:cNvPr id="2" name="Body">
             <a:extLst xmlns:a="http://schemas.openxmlformats.org/drawingml/2006/main">
               <a:ext uri="{FF2B5EF4-FFF2-40B4-BE49-F238E27FC236}">
-                <a16:creationId xmlns:a16="http://schemas.microsoft.com/office/drawing/2014/main" id="{6A2972F4-B353-458C-8BEE-0248B975DFCD}"/>
+                <a16:creationId xmlns:a16="http://schemas.microsoft.com/office/drawing/2014/main" id="{90AAB1DE-13CE-4D56-93DB-006873E60EB5}"/>
               </a:ext>
             </a:extLst>
           </p:cNvPr>
@@ -5899,7 +5899,7 @@
           <p:cNvPr id="4" name="Title">
             <a:extLst xmlns:a="http://schemas.openxmlformats.org/drawingml/2006/main">
               <a:ext uri="{FF2B5EF4-FFF2-40B4-BE49-F238E27FC236}">
-                <a16:creationId xmlns:a16="http://schemas.microsoft.com/office/drawing/2014/main" id="{1A851C9F-C5A4-4B1C-8FC2-BF239E4C5350}"/>
+                <a16:creationId xmlns:a16="http://schemas.microsoft.com/office/drawing/2014/main" id="{5C2CC74D-674A-4342-9737-97268476ACC0}"/>
               </a:ext>
             </a:extLst>
           </p:cNvPr>
@@ -6128,7 +6128,7 @@
           <p:cNvPr id="2" name="Left column">
             <a:extLst xmlns:a="http://schemas.openxmlformats.org/drawingml/2006/main">
               <a:ext uri="{FF2B5EF4-FFF2-40B4-BE49-F238E27FC236}">
-                <a16:creationId xmlns:a16="http://schemas.microsoft.com/office/drawing/2014/main" id="{C29D2271-0E12-4040-810E-CBDFD1E05BF1}"/>
+                <a16:creationId xmlns:a16="http://schemas.microsoft.com/office/drawing/2014/main" id="{CB884949-8E5E-41A0-8D77-C8945E8444E6}"/>
               </a:ext>
             </a:extLst>
           </p:cNvPr>
@@ -6357,7 +6357,7 @@
           <p:cNvPr id="3" name="Right column">
             <a:extLst xmlns:a="http://schemas.openxmlformats.org/drawingml/2006/main">
               <a:ext uri="{FF2B5EF4-FFF2-40B4-BE49-F238E27FC236}">
-                <a16:creationId xmlns:a16="http://schemas.microsoft.com/office/drawing/2014/main" id="{1977A701-DBDA-4F6F-9BD4-81DFF094E769}"/>
+                <a16:creationId xmlns:a16="http://schemas.microsoft.com/office/drawing/2014/main" id="{1A623C67-415A-47DD-AC15-5F48F408D3F1}"/>
               </a:ext>
             </a:extLst>
           </p:cNvPr>
@@ -6603,7 +6603,7 @@
           <p:cNvPr id="3" name="Title">
             <a:extLst xmlns:a="http://schemas.openxmlformats.org/drawingml/2006/main">
               <a:ext uri="{FF2B5EF4-FFF2-40B4-BE49-F238E27FC236}">
-                <a16:creationId xmlns:a16="http://schemas.microsoft.com/office/drawing/2014/main" id="{EC204DE6-1603-4FF7-BAF2-C284051CB935}"/>
+                <a16:creationId xmlns:a16="http://schemas.microsoft.com/office/drawing/2014/main" id="{28E3289F-6B7B-4AD6-BF51-24C557B95605}"/>
               </a:ext>
             </a:extLst>
           </p:cNvPr>
@@ -6832,7 +6832,7 @@
           <p:cNvPr id="2" name="Left column">
             <a:extLst xmlns:a="http://schemas.openxmlformats.org/drawingml/2006/main">
               <a:ext uri="{FF2B5EF4-FFF2-40B4-BE49-F238E27FC236}">
-                <a16:creationId xmlns:a16="http://schemas.microsoft.com/office/drawing/2014/main" id="{D6B49BB9-51E5-44D3-930A-B78E667B0E0F}"/>
+                <a16:creationId xmlns:a16="http://schemas.microsoft.com/office/drawing/2014/main" id="{2D240CBA-2679-494D-8F8C-75CA73460C99}"/>
               </a:ext>
             </a:extLst>
           </p:cNvPr>
@@ -7099,12 +7099,12 @@
   </p:cSld>
   <p:clrMap bg1="lt1" tx1="dk1" bg2="lt2" tx2="dk2" accent1="accent1" accent2="accent2" accent3="accent3" accent4="accent4" accent5="accent5" accent6="accent6" hlink="hlink" folHlink="folHlink"/>
   <p:sldLayoutIdLst>
-    <p:sldLayoutId xmlns:r="http://schemas.openxmlformats.org/officeDocument/2006/relationships" id="2147483649" r:id="R46cb27cccba645fd"/>
-    <p:sldLayoutId xmlns:r="http://schemas.openxmlformats.org/officeDocument/2006/relationships" id="2147483650" r:id="Rd6f76a175cb843d0"/>
-    <p:sldLayoutId xmlns:r="http://schemas.openxmlformats.org/officeDocument/2006/relationships" id="2147483651" r:id="Rae9905441a524cbd"/>
-    <p:sldLayoutId xmlns:r="http://schemas.openxmlformats.org/officeDocument/2006/relationships" id="2147483652" r:id="R79f35d48d9e74481"/>
-    <p:sldLayoutId xmlns:r="http://schemas.openxmlformats.org/officeDocument/2006/relationships" id="2147483653" r:id="R6025fe1f954547a5"/>
-    <p:sldLayoutId xmlns:r="http://schemas.openxmlformats.org/officeDocument/2006/relationships" id="2147483654" r:id="Rca6249531a35462d"/>
+    <p:sldLayoutId xmlns:r="http://schemas.openxmlformats.org/officeDocument/2006/relationships" id="2147483649" r:id="R52d0a4563072455c"/>
+    <p:sldLayoutId xmlns:r="http://schemas.openxmlformats.org/officeDocument/2006/relationships" id="2147483650" r:id="Rdbd468a25e6d4380"/>
+    <p:sldLayoutId xmlns:r="http://schemas.openxmlformats.org/officeDocument/2006/relationships" id="2147483651" r:id="Rba9be64c0092470b"/>
+    <p:sldLayoutId xmlns:r="http://schemas.openxmlformats.org/officeDocument/2006/relationships" id="2147483652" r:id="Rd188ade1b3854ab5"/>
+    <p:sldLayoutId xmlns:r="http://schemas.openxmlformats.org/officeDocument/2006/relationships" id="2147483653" r:id="R33da9d9613b048b7"/>
+    <p:sldLayoutId xmlns:r="http://schemas.openxmlformats.org/officeDocument/2006/relationships" id="2147483654" r:id="R5ad62035cb234dc2"/>
   </p:sldLayoutIdLst>
   <p:txStyles>
     <p:titleStyle>
@@ -7655,7 +7655,7 @@
           <p:cNvPr id="24" name="ACT 2 · 반복되는 프로젝트 설명">
             <a:extLst xmlns:a="http://schemas.openxmlformats.org/drawingml/2006/main">
               <a:ext uri="{FF2B5EF4-FFF2-40B4-BE49-F238E27FC236}">
-                <a16:creationId xmlns:a16="http://schemas.microsoft.com/office/drawing/2014/main" id="{F1B9C7D3-971A-4765-983A-0C80AEDF671B}"/>
+                <a16:creationId xmlns:a16="http://schemas.microsoft.com/office/drawing/2014/main" id="{D3466745-7086-4799-A2B4-210DCBEC9A2A}"/>
               </a:ext>
             </a:extLst>
           </p:cNvPr>
@@ -7810,10 +7810,10 @@
       </p:sp>
       <p:sp>
         <p:nvSpPr>
-          <p:cNvPr id="2" name="S23">
+          <p:cNvPr id="2" name="S24">
             <a:extLst xmlns:a="http://schemas.openxmlformats.org/drawingml/2006/main">
               <a:ext uri="{FF2B5EF4-FFF2-40B4-BE49-F238E27FC236}">
-                <a16:creationId xmlns:a16="http://schemas.microsoft.com/office/drawing/2014/main" id="{A410835B-6461-4C3F-8CBD-92F32043526A}"/>
+                <a16:creationId xmlns:a16="http://schemas.microsoft.com/office/drawing/2014/main" id="{D9D048CA-3E44-4B40-91F2-D725F5976779}"/>
               </a:ext>
             </a:extLst>
           </p:cNvPr>
@@ -7961,7 +7961,7 @@
                 <a:ea typeface="Malgun Gothic"/>
                 <a:cs typeface="Malgun Gothic"/>
               </a:rPr>
-              <a:t>S23</a:t>
+              <a:t>S24</a:t>
             </a:r>
           </a:p>
         </p:txBody>
@@ -7971,7 +7971,7 @@
           <p:cNvPr id="3" name="다른 Task에 같은 설명이 반복된다">
             <a:extLst xmlns:a="http://schemas.openxmlformats.org/drawingml/2006/main">
               <a:ext uri="{FF2B5EF4-FFF2-40B4-BE49-F238E27FC236}">
-                <a16:creationId xmlns:a16="http://schemas.microsoft.com/office/drawing/2014/main" id="{BF1FE2AB-6701-4BE4-9CC9-480F94B0449F}"/>
+                <a16:creationId xmlns:a16="http://schemas.microsoft.com/office/drawing/2014/main" id="{26895B03-7C22-4664-B0BA-6E93F70207D7}"/>
               </a:ext>
             </a:extLst>
           </p:cNvPr>
@@ -8129,7 +8129,7 @@
           <p:cNvPr id="4" name="">
             <a:extLst xmlns:a="http://schemas.openxmlformats.org/drawingml/2006/main">
               <a:ext uri="{FF2B5EF4-FFF2-40B4-BE49-F238E27FC236}">
-                <a16:creationId xmlns:a16="http://schemas.microsoft.com/office/drawing/2014/main" id="{79EE3B6A-90C1-4C1E-B20C-59672D77CC28}"/>
+                <a16:creationId xmlns:a16="http://schemas.microsoft.com/office/drawing/2014/main" id="{1B025458-C137-4679-802C-1315305F8918}"/>
               </a:ext>
             </a:extLst>
           </p:cNvPr>
@@ -8160,7 +8160,7 @@
           <p:cNvPr id="5" name="교육용 구성 사례 · Bug fix / Performance / README 작업">
             <a:extLst xmlns:a="http://schemas.openxmlformats.org/drawingml/2006/main">
               <a:ext uri="{FF2B5EF4-FFF2-40B4-BE49-F238E27FC236}">
-                <a16:creationId xmlns:a16="http://schemas.microsoft.com/office/drawing/2014/main" id="{B0A17663-52D3-4905-8B9B-ABCA8FF451F8}"/>
+                <a16:creationId xmlns:a16="http://schemas.microsoft.com/office/drawing/2014/main" id="{60820342-7D9F-43A0-B314-382C3F8588E7}"/>
               </a:ext>
             </a:extLst>
           </p:cNvPr>
@@ -8318,7 +8318,7 @@
           <p:cNvPr id="6" name="서로 다른 요청에 같은 프로젝트 정보가 반복되는 상황을 보여준다">
             <a:extLst xmlns:a="http://schemas.openxmlformats.org/drawingml/2006/main">
               <a:ext uri="{FF2B5EF4-FFF2-40B4-BE49-F238E27FC236}">
-                <a16:creationId xmlns:a16="http://schemas.microsoft.com/office/drawing/2014/main" id="{A63592A2-AAA1-4A44-AF9F-1D06B76EF7EB}"/>
+                <a16:creationId xmlns:a16="http://schemas.microsoft.com/office/drawing/2014/main" id="{DC44D61A-160F-4BB4-9BAF-FBD543350AA8}"/>
               </a:ext>
             </a:extLst>
           </p:cNvPr>
@@ -8476,7 +8476,7 @@
           <p:cNvPr id="7" name="버그 수정">
             <a:extLst xmlns:a="http://schemas.openxmlformats.org/drawingml/2006/main">
               <a:ext uri="{FF2B5EF4-FFF2-40B4-BE49-F238E27FC236}">
-                <a16:creationId xmlns:a16="http://schemas.microsoft.com/office/drawing/2014/main" id="{728A11F4-619B-47FF-B3C8-B9AFE2563744}"/>
+                <a16:creationId xmlns:a16="http://schemas.microsoft.com/office/drawing/2014/main" id="{72524DA4-1D0F-495E-9B2B-5A09F09C6E4D}"/>
               </a:ext>
             </a:extLst>
           </p:cNvPr>
@@ -8634,7 +8634,7 @@
           <p:cNvPr id="8" name="crop 경계를 수정해줘">
             <a:extLst xmlns:a="http://schemas.openxmlformats.org/drawingml/2006/main">
               <a:ext uri="{FF2B5EF4-FFF2-40B4-BE49-F238E27FC236}">
-                <a16:creationId xmlns:a16="http://schemas.microsoft.com/office/drawing/2014/main" id="{591368B9-02E4-4CFE-AB8B-AE9B8CC93681}"/>
+                <a16:creationId xmlns:a16="http://schemas.microsoft.com/office/drawing/2014/main" id="{04F9214B-4EAE-4C70-A30A-7A785AF9F65D}"/>
               </a:ext>
             </a:extLst>
           </p:cNvPr>
@@ -8792,7 +8792,7 @@
           <p:cNvPr id="9" name="">
             <a:extLst xmlns:a="http://schemas.openxmlformats.org/drawingml/2006/main">
               <a:ext uri="{FF2B5EF4-FFF2-40B4-BE49-F238E27FC236}">
-                <a16:creationId xmlns:a16="http://schemas.microsoft.com/office/drawing/2014/main" id="{1821BB16-9F31-4F92-AE54-4BB87C2CC8FA}"/>
+                <a16:creationId xmlns:a16="http://schemas.microsoft.com/office/drawing/2014/main" id="{B55DC843-DFB6-4200-8AB0-C9DBAB101B65}"/>
               </a:ext>
             </a:extLst>
           </p:cNvPr>
@@ -8823,7 +8823,7 @@
           <p:cNvPr id="10" name="">
             <a:extLst xmlns:a="http://schemas.openxmlformats.org/drawingml/2006/main">
               <a:ext uri="{FF2B5EF4-FFF2-40B4-BE49-F238E27FC236}">
-                <a16:creationId xmlns:a16="http://schemas.microsoft.com/office/drawing/2014/main" id="{8D155C0A-B7C2-4128-9D23-8BD9C294D264}"/>
+                <a16:creationId xmlns:a16="http://schemas.microsoft.com/office/drawing/2014/main" id="{60302E61-B39D-4306-B3F5-E526F9777823}"/>
               </a:ext>
             </a:extLst>
           </p:cNvPr>
@@ -8854,7 +8854,7 @@
           <p:cNvPr id="11" name="지정된 테스트 실행&#10;의존성 추가에는 근거 필요&#10;로컬 합성 데이터 사용&#10;기존 동작 보존">
             <a:extLst xmlns:a="http://schemas.openxmlformats.org/drawingml/2006/main">
               <a:ext uri="{FF2B5EF4-FFF2-40B4-BE49-F238E27FC236}">
-                <a16:creationId xmlns:a16="http://schemas.microsoft.com/office/drawing/2014/main" id="{36B1B786-174B-4793-B65B-7AEB7E303615}"/>
+                <a16:creationId xmlns:a16="http://schemas.microsoft.com/office/drawing/2014/main" id="{4A6092B1-2D09-4BA8-9FF9-B08D7AAA10E1}"/>
               </a:ext>
             </a:extLst>
           </p:cNvPr>
@@ -9081,7 +9081,7 @@
           <p:cNvPr id="12" name="성능 조사">
             <a:extLst xmlns:a="http://schemas.openxmlformats.org/drawingml/2006/main">
               <a:ext uri="{FF2B5EF4-FFF2-40B4-BE49-F238E27FC236}">
-                <a16:creationId xmlns:a16="http://schemas.microsoft.com/office/drawing/2014/main" id="{DCA6C20E-F206-45FB-8D66-8EBC41FD953C}"/>
+                <a16:creationId xmlns:a16="http://schemas.microsoft.com/office/drawing/2014/main" id="{CFFF52F9-CAE1-49FD-8F64-D24C80F30E09}"/>
               </a:ext>
             </a:extLst>
           </p:cNvPr>
@@ -9239,7 +9239,7 @@
           <p:cNvPr id="13" name="통계 계산을 조사해줘">
             <a:extLst xmlns:a="http://schemas.openxmlformats.org/drawingml/2006/main">
               <a:ext uri="{FF2B5EF4-FFF2-40B4-BE49-F238E27FC236}">
-                <a16:creationId xmlns:a16="http://schemas.microsoft.com/office/drawing/2014/main" id="{0D957D93-BE7E-4E64-9D5D-3A948BC1AD90}"/>
+                <a16:creationId xmlns:a16="http://schemas.microsoft.com/office/drawing/2014/main" id="{F90DD313-9B47-4DB3-BC95-6E70961A2465}"/>
               </a:ext>
             </a:extLst>
           </p:cNvPr>
@@ -9397,7 +9397,7 @@
           <p:cNvPr id="14" name="">
             <a:extLst xmlns:a="http://schemas.openxmlformats.org/drawingml/2006/main">
               <a:ext uri="{FF2B5EF4-FFF2-40B4-BE49-F238E27FC236}">
-                <a16:creationId xmlns:a16="http://schemas.microsoft.com/office/drawing/2014/main" id="{9FD99C30-8125-4818-AB33-B4F104C41726}"/>
+                <a16:creationId xmlns:a16="http://schemas.microsoft.com/office/drawing/2014/main" id="{E4A1DA25-4AA8-416B-876F-63F12BA40E9C}"/>
               </a:ext>
             </a:extLst>
           </p:cNvPr>
@@ -9428,7 +9428,7 @@
           <p:cNvPr id="15" name="">
             <a:extLst xmlns:a="http://schemas.openxmlformats.org/drawingml/2006/main">
               <a:ext uri="{FF2B5EF4-FFF2-40B4-BE49-F238E27FC236}">
-                <a16:creationId xmlns:a16="http://schemas.microsoft.com/office/drawing/2014/main" id="{21C7C8A5-C8F7-4676-8865-D5E01462E81B}"/>
+                <a16:creationId xmlns:a16="http://schemas.microsoft.com/office/drawing/2014/main" id="{719B974C-6407-47C4-809D-30AB2B3D54F1}"/>
               </a:ext>
             </a:extLst>
           </p:cNvPr>
@@ -9459,7 +9459,7 @@
           <p:cNvPr id="16" name="지정된 테스트 실행&#10;의존성 추가에는 근거 필요&#10;로컬 합성 데이터 사용&#10;기존 동작 보존">
             <a:extLst xmlns:a="http://schemas.openxmlformats.org/drawingml/2006/main">
               <a:ext uri="{FF2B5EF4-FFF2-40B4-BE49-F238E27FC236}">
-                <a16:creationId xmlns:a16="http://schemas.microsoft.com/office/drawing/2014/main" id="{B2E104A1-3327-4D99-AE5C-68697176CC37}"/>
+                <a16:creationId xmlns:a16="http://schemas.microsoft.com/office/drawing/2014/main" id="{922DAC3A-178C-4814-A300-C853C3F49DE4}"/>
               </a:ext>
             </a:extLst>
           </p:cNvPr>
@@ -9686,7 +9686,7 @@
           <p:cNvPr id="17" name="README 수정">
             <a:extLst xmlns:a="http://schemas.openxmlformats.org/drawingml/2006/main">
               <a:ext uri="{FF2B5EF4-FFF2-40B4-BE49-F238E27FC236}">
-                <a16:creationId xmlns:a16="http://schemas.microsoft.com/office/drawing/2014/main" id="{D8AF3AB1-D469-43CB-B2E1-494B41DC54BD}"/>
+                <a16:creationId xmlns:a16="http://schemas.microsoft.com/office/drawing/2014/main" id="{0092E21B-311F-4F6F-8AFA-1601F6026E39}"/>
               </a:ext>
             </a:extLst>
           </p:cNvPr>
@@ -9844,7 +9844,7 @@
           <p:cNvPr id="18" name="빌드 안내를 명확히 해줘">
             <a:extLst xmlns:a="http://schemas.openxmlformats.org/drawingml/2006/main">
               <a:ext uri="{FF2B5EF4-FFF2-40B4-BE49-F238E27FC236}">
-                <a16:creationId xmlns:a16="http://schemas.microsoft.com/office/drawing/2014/main" id="{411AFFBE-93A4-4B90-A495-96C4D47579CE}"/>
+                <a16:creationId xmlns:a16="http://schemas.microsoft.com/office/drawing/2014/main" id="{126DF129-70AB-444B-9C35-86F3541EBB20}"/>
               </a:ext>
             </a:extLst>
           </p:cNvPr>
@@ -10002,7 +10002,7 @@
           <p:cNvPr id="19" name="">
             <a:extLst xmlns:a="http://schemas.openxmlformats.org/drawingml/2006/main">
               <a:ext uri="{FF2B5EF4-FFF2-40B4-BE49-F238E27FC236}">
-                <a16:creationId xmlns:a16="http://schemas.microsoft.com/office/drawing/2014/main" id="{80CCF612-651D-437D-86E2-172783CCF856}"/>
+                <a16:creationId xmlns:a16="http://schemas.microsoft.com/office/drawing/2014/main" id="{588F7A3F-F079-44C7-891E-4CE9E2D4C5DD}"/>
               </a:ext>
             </a:extLst>
           </p:cNvPr>
@@ -10033,7 +10033,7 @@
           <p:cNvPr id="20" name="">
             <a:extLst xmlns:a="http://schemas.openxmlformats.org/drawingml/2006/main">
               <a:ext uri="{FF2B5EF4-FFF2-40B4-BE49-F238E27FC236}">
-                <a16:creationId xmlns:a16="http://schemas.microsoft.com/office/drawing/2014/main" id="{5ECBEF5E-E4C8-42D3-A72F-85ADD5193DD3}"/>
+                <a16:creationId xmlns:a16="http://schemas.microsoft.com/office/drawing/2014/main" id="{BE91894A-C516-41DA-80DF-8B092C0F5BF8}"/>
               </a:ext>
             </a:extLst>
           </p:cNvPr>
@@ -10064,7 +10064,7 @@
           <p:cNvPr id="21" name="지정된 테스트 실행&#10;의존성 추가에는 근거 필요&#10;로컬 합성 데이터 사용&#10;기존 동작 보존">
             <a:extLst xmlns:a="http://schemas.openxmlformats.org/drawingml/2006/main">
               <a:ext uri="{FF2B5EF4-FFF2-40B4-BE49-F238E27FC236}">
-                <a16:creationId xmlns:a16="http://schemas.microsoft.com/office/drawing/2014/main" id="{AEDB14FE-3F6D-4F63-A50A-BA3321EF3CA6}"/>
+                <a16:creationId xmlns:a16="http://schemas.microsoft.com/office/drawing/2014/main" id="{006D8636-F730-450E-8B88-B3B8F4B47928}"/>
               </a:ext>
             </a:extLst>
           </p:cNvPr>
@@ -10291,7 +10291,7 @@
           <p:cNvPr id="22" name="요청은 다른데, 아래 설명은 왜 계속 같을까?">
             <a:extLst xmlns:a="http://schemas.openxmlformats.org/drawingml/2006/main">
               <a:ext uri="{FF2B5EF4-FFF2-40B4-BE49-F238E27FC236}">
-                <a16:creationId xmlns:a16="http://schemas.microsoft.com/office/drawing/2014/main" id="{70A81202-4F87-48C4-A1CB-5CD62720DC66}"/>
+                <a16:creationId xmlns:a16="http://schemas.microsoft.com/office/drawing/2014/main" id="{6501C640-C329-4596-AD6F-C42FD6A5E664}"/>
               </a:ext>
             </a:extLst>
           </p:cNvPr>
@@ -10449,7 +10449,7 @@
           <p:cNvPr id="23" name="Legacy module connection">
             <a:extLst xmlns:a="http://schemas.openxmlformats.org/drawingml/2006/main">
               <a:ext uri="{FF2B5EF4-FFF2-40B4-BE49-F238E27FC236}">
-                <a16:creationId xmlns:a16="http://schemas.microsoft.com/office/drawing/2014/main" id="{2AAC7271-2290-4849-9556-1956338A9A07}"/>
+                <a16:creationId xmlns:a16="http://schemas.microsoft.com/office/drawing/2014/main" id="{8290108A-3614-4841-A0DA-26D805D39E96}"/>
               </a:ext>
             </a:extLst>
           </p:cNvPr>
@@ -10605,7 +10605,7 @@
     </p:spTree>
     <p:extLst>
       <p:ext uri="{BB962C8B-B14F-4D97-AF65-F5344CB8AC3E}">
-        <p14:creationId xmlns:p14="http://schemas.microsoft.com/office/powerpoint/2010/main" val="1668977982"/>
+        <p14:creationId xmlns:p14="http://schemas.microsoft.com/office/powerpoint/2010/main" val="1007247781"/>
       </p:ext>
     </p:extLst>
   </p:cSld>
@@ -10636,7 +10636,7 @@
           <p:cNvPr id="24" name="ACT 2 · Core에 남길 기본 안내">
             <a:extLst xmlns:a="http://schemas.openxmlformats.org/drawingml/2006/main">
               <a:ext uri="{FF2B5EF4-FFF2-40B4-BE49-F238E27FC236}">
-                <a16:creationId xmlns:a16="http://schemas.microsoft.com/office/drawing/2014/main" id="{BB2791FB-C2BE-4F24-8191-D490C88AD056}"/>
+                <a16:creationId xmlns:a16="http://schemas.microsoft.com/office/drawing/2014/main" id="{8A3A73D2-3997-43A9-AC7B-1719455D8780}"/>
               </a:ext>
             </a:extLst>
           </p:cNvPr>
@@ -10791,10 +10791,10 @@
       </p:sp>
       <p:sp>
         <p:nvSpPr>
-          <p:cNvPr id="2" name="S32">
+          <p:cNvPr id="2" name="S33">
             <a:extLst xmlns:a="http://schemas.openxmlformats.org/drawingml/2006/main">
               <a:ext uri="{FF2B5EF4-FFF2-40B4-BE49-F238E27FC236}">
-                <a16:creationId xmlns:a16="http://schemas.microsoft.com/office/drawing/2014/main" id="{82CAAF52-F05F-4B8B-A137-6B1ED1F1940A}"/>
+                <a16:creationId xmlns:a16="http://schemas.microsoft.com/office/drawing/2014/main" id="{B5115B91-9E4E-4496-AD3B-4E628F3B4B61}"/>
               </a:ext>
             </a:extLst>
           </p:cNvPr>
@@ -10942,7 +10942,7 @@
                 <a:ea typeface="Malgun Gothic"/>
                 <a:cs typeface="Malgun Gothic"/>
               </a:rPr>
-              <a:t>S32</a:t>
+              <a:t>S33</a:t>
             </a:r>
           </a:p>
         </p:txBody>
@@ -10952,7 +10952,7 @@
           <p:cNvPr id="3" name="Core Context에서 상세 정보로 가는 길">
             <a:extLst xmlns:a="http://schemas.openxmlformats.org/drawingml/2006/main">
               <a:ext uri="{FF2B5EF4-FFF2-40B4-BE49-F238E27FC236}">
-                <a16:creationId xmlns:a16="http://schemas.microsoft.com/office/drawing/2014/main" id="{348FE439-A36A-48E1-A6C0-FFB4CE298ADA}"/>
+                <a16:creationId xmlns:a16="http://schemas.microsoft.com/office/drawing/2014/main" id="{D70A43BF-F1D3-4E90-80F3-81023D8DE907}"/>
               </a:ext>
             </a:extLst>
           </p:cNvPr>
@@ -11110,7 +11110,7 @@
           <p:cNvPr id="4" name="">
             <a:extLst xmlns:a="http://schemas.openxmlformats.org/drawingml/2006/main">
               <a:ext uri="{FF2B5EF4-FFF2-40B4-BE49-F238E27FC236}">
-                <a16:creationId xmlns:a16="http://schemas.microsoft.com/office/drawing/2014/main" id="{42847423-35B8-45C9-BE2F-9B3A314379A8}"/>
+                <a16:creationId xmlns:a16="http://schemas.microsoft.com/office/drawing/2014/main" id="{AF8F4016-D7A2-4651-9A67-B6D1146A7C80}"/>
               </a:ext>
             </a:extLst>
           </p:cNvPr>
@@ -11141,7 +11141,7 @@
           <p:cNvPr id="5" name="교육용 정보 설계 · Root/Core는 상세 정보의 출발점">
             <a:extLst xmlns:a="http://schemas.openxmlformats.org/drawingml/2006/main">
               <a:ext uri="{FF2B5EF4-FFF2-40B4-BE49-F238E27FC236}">
-                <a16:creationId xmlns:a16="http://schemas.microsoft.com/office/drawing/2014/main" id="{A2B282E0-2F6E-459B-BC98-8B2EF5484DDD}"/>
+                <a16:creationId xmlns:a16="http://schemas.microsoft.com/office/drawing/2014/main" id="{6CFF8BFC-8B3E-4C10-88D7-8E3BC77A3C78}"/>
               </a:ext>
             </a:extLst>
           </p:cNvPr>
@@ -11299,7 +11299,7 @@
           <p:cNvPr id="6" name="C++ 예: build/test 진입점과 기본 제약 → 알고리즘 계약·하드웨어 조건">
             <a:extLst xmlns:a="http://schemas.openxmlformats.org/drawingml/2006/main">
               <a:ext uri="{FF2B5EF4-FFF2-40B4-BE49-F238E27FC236}">
-                <a16:creationId xmlns:a16="http://schemas.microsoft.com/office/drawing/2014/main" id="{7B9C3DA8-6F76-4C3C-A13C-AFB14DB32D85}"/>
+                <a16:creationId xmlns:a16="http://schemas.microsoft.com/office/drawing/2014/main" id="{27111A9B-27E8-4CB5-B61C-9B15AF96638D}"/>
               </a:ext>
             </a:extLst>
           </p:cNvPr>
@@ -11457,7 +11457,7 @@
           <p:cNvPr id="7" name="무엇을 항상 읽고, 무엇을 필요할 때 찾게 할까?">
             <a:extLst xmlns:a="http://schemas.openxmlformats.org/drawingml/2006/main">
               <a:ext uri="{FF2B5EF4-FFF2-40B4-BE49-F238E27FC236}">
-                <a16:creationId xmlns:a16="http://schemas.microsoft.com/office/drawing/2014/main" id="{64F66690-CBA7-4BA3-968F-93394FE81783}"/>
+                <a16:creationId xmlns:a16="http://schemas.microsoft.com/office/drawing/2014/main" id="{70FC77B1-F8E9-45C6-91D9-440D4DB2213B}"/>
               </a:ext>
             </a:extLst>
           </p:cNvPr>
@@ -11615,7 +11615,7 @@
           <p:cNvPr id="8" name="">
             <a:extLst xmlns:a="http://schemas.openxmlformats.org/drawingml/2006/main">
               <a:ext uri="{FF2B5EF4-FFF2-40B4-BE49-F238E27FC236}">
-                <a16:creationId xmlns:a16="http://schemas.microsoft.com/office/drawing/2014/main" id="{2E1CEA6F-E49B-457E-A6FB-D11EDBD81679}"/>
+                <a16:creationId xmlns:a16="http://schemas.microsoft.com/office/drawing/2014/main" id="{2F262897-D382-4D7B-802A-EEDCE54C7DDE}"/>
               </a:ext>
             </a:extLst>
           </p:cNvPr>
@@ -11646,7 +11646,7 @@
           <p:cNvPr id="9" name="CORE · 기본 안내">
             <a:extLst xmlns:a="http://schemas.openxmlformats.org/drawingml/2006/main">
               <a:ext uri="{FF2B5EF4-FFF2-40B4-BE49-F238E27FC236}">
-                <a16:creationId xmlns:a16="http://schemas.microsoft.com/office/drawing/2014/main" id="{CEDDE3F8-4276-4632-AA2F-23BE6BB93DB1}"/>
+                <a16:creationId xmlns:a16="http://schemas.microsoft.com/office/drawing/2014/main" id="{C901F962-E276-45FC-9F73-A5B45C22FB53}"/>
               </a:ext>
             </a:extLst>
           </p:cNvPr>
@@ -11804,7 +11804,7 @@
           <p:cNvPr id="10" name="프로젝트의 목적&#10;항상 지켜야 할 제약&#10;상세 정보를 찾을 위치">
             <a:extLst xmlns:a="http://schemas.openxmlformats.org/drawingml/2006/main">
               <a:ext uri="{FF2B5EF4-FFF2-40B4-BE49-F238E27FC236}">
-                <a16:creationId xmlns:a16="http://schemas.microsoft.com/office/drawing/2014/main" id="{4BA1A6A5-8A07-4327-BFFE-11E3DBDE3808}"/>
+                <a16:creationId xmlns:a16="http://schemas.microsoft.com/office/drawing/2014/main" id="{F63D33FC-C5DF-4B82-B14A-FA9A3527DBE9}"/>
               </a:ext>
             </a:extLst>
           </p:cNvPr>
@@ -12008,7 +12008,7 @@
           <p:cNvPr id="11" name="">
             <a:extLst xmlns:a="http://schemas.openxmlformats.org/drawingml/2006/main">
               <a:ext uri="{FF2B5EF4-FFF2-40B4-BE49-F238E27FC236}">
-                <a16:creationId xmlns:a16="http://schemas.microsoft.com/office/drawing/2014/main" id="{B984C9D6-46F1-421F-9266-D4A13BE8A06C}"/>
+                <a16:creationId xmlns:a16="http://schemas.microsoft.com/office/drawing/2014/main" id="{D3E0FB86-E057-4B5E-842D-A780021D6204}"/>
               </a:ext>
             </a:extLst>
           </p:cNvPr>
@@ -12038,7 +12038,7 @@
           <p:cNvPr id="12" name="DETAIL · 필요한 상세">
             <a:extLst xmlns:a="http://schemas.openxmlformats.org/drawingml/2006/main">
               <a:ext uri="{FF2B5EF4-FFF2-40B4-BE49-F238E27FC236}">
-                <a16:creationId xmlns:a16="http://schemas.microsoft.com/office/drawing/2014/main" id="{EF45DB43-C7AD-48E6-93EB-95AD54CF5A6E}"/>
+                <a16:creationId xmlns:a16="http://schemas.microsoft.com/office/drawing/2014/main" id="{996FCB9D-3978-4D7B-BC45-709B39176942}"/>
               </a:ext>
             </a:extLst>
           </p:cNvPr>
@@ -12196,7 +12196,7 @@
           <p:cNvPr id="13" name="">
             <a:extLst xmlns:a="http://schemas.openxmlformats.org/drawingml/2006/main">
               <a:ext uri="{FF2B5EF4-FFF2-40B4-BE49-F238E27FC236}">
-                <a16:creationId xmlns:a16="http://schemas.microsoft.com/office/drawing/2014/main" id="{27ED6065-57F4-4510-97CC-0B6BFC7C8D98}"/>
+                <a16:creationId xmlns:a16="http://schemas.microsoft.com/office/drawing/2014/main" id="{9FC7A149-9317-4827-B8D5-505E8C815283}"/>
               </a:ext>
             </a:extLst>
           </p:cNvPr>
@@ -12227,7 +12227,7 @@
           <p:cNvPr id="14" name="architecture">
             <a:extLst xmlns:a="http://schemas.openxmlformats.org/drawingml/2006/main">
               <a:ext uri="{FF2B5EF4-FFF2-40B4-BE49-F238E27FC236}">
-                <a16:creationId xmlns:a16="http://schemas.microsoft.com/office/drawing/2014/main" id="{57DD2CC1-A7F0-4E17-99DF-D0025B1DD720}"/>
+                <a16:creationId xmlns:a16="http://schemas.microsoft.com/office/drawing/2014/main" id="{523D9235-4A74-46B4-A852-DDAC9C5DFB42}"/>
               </a:ext>
             </a:extLst>
           </p:cNvPr>
@@ -12385,7 +12385,7 @@
           <p:cNvPr id="15" name="모듈과 처리 순서">
             <a:extLst xmlns:a="http://schemas.openxmlformats.org/drawingml/2006/main">
               <a:ext uri="{FF2B5EF4-FFF2-40B4-BE49-F238E27FC236}">
-                <a16:creationId xmlns:a16="http://schemas.microsoft.com/office/drawing/2014/main" id="{F19C6DF6-A290-4C25-8F80-B43503EFD59E}"/>
+                <a16:creationId xmlns:a16="http://schemas.microsoft.com/office/drawing/2014/main" id="{5F85CDF1-6E11-4A01-9869-53C3754A198C}"/>
               </a:ext>
             </a:extLst>
           </p:cNvPr>
@@ -12543,7 +12543,7 @@
           <p:cNvPr id="16" name="">
             <a:extLst xmlns:a="http://schemas.openxmlformats.org/drawingml/2006/main">
               <a:ext uri="{FF2B5EF4-FFF2-40B4-BE49-F238E27FC236}">
-                <a16:creationId xmlns:a16="http://schemas.microsoft.com/office/drawing/2014/main" id="{D19744C6-DA76-4DCD-B1B1-D7C111AB3767}"/>
+                <a16:creationId xmlns:a16="http://schemas.microsoft.com/office/drawing/2014/main" id="{5090C6CE-0D26-4B56-B48D-7E295A7856DD}"/>
               </a:ext>
             </a:extLst>
           </p:cNvPr>
@@ -12574,7 +12574,7 @@
           <p:cNvPr id="17" name="image contracts">
             <a:extLst xmlns:a="http://schemas.openxmlformats.org/drawingml/2006/main">
               <a:ext uri="{FF2B5EF4-FFF2-40B4-BE49-F238E27FC236}">
-                <a16:creationId xmlns:a16="http://schemas.microsoft.com/office/drawing/2014/main" id="{698A93C0-7BC2-4162-B3FB-BC2DF3C7B31D}"/>
+                <a16:creationId xmlns:a16="http://schemas.microsoft.com/office/drawing/2014/main" id="{6AD5821C-513A-446F-9127-5C4883CD66A3}"/>
               </a:ext>
             </a:extLst>
           </p:cNvPr>
@@ -12732,7 +12732,7 @@
           <p:cNvPr id="18" name="이미지 동작의 계약">
             <a:extLst xmlns:a="http://schemas.openxmlformats.org/drawingml/2006/main">
               <a:ext uri="{FF2B5EF4-FFF2-40B4-BE49-F238E27FC236}">
-                <a16:creationId xmlns:a16="http://schemas.microsoft.com/office/drawing/2014/main" id="{77C5142D-0700-4538-9693-AE9BE2C05455}"/>
+                <a16:creationId xmlns:a16="http://schemas.microsoft.com/office/drawing/2014/main" id="{D1ADE284-4830-4234-9EBB-BD49236AFAE1}"/>
               </a:ext>
             </a:extLst>
           </p:cNvPr>
@@ -12890,7 +12890,7 @@
           <p:cNvPr id="19" name="">
             <a:extLst xmlns:a="http://schemas.openxmlformats.org/drawingml/2006/main">
               <a:ext uri="{FF2B5EF4-FFF2-40B4-BE49-F238E27FC236}">
-                <a16:creationId xmlns:a16="http://schemas.microsoft.com/office/drawing/2014/main" id="{B9E26C40-31C7-496F-9AEC-9663A1721E8B}"/>
+                <a16:creationId xmlns:a16="http://schemas.microsoft.com/office/drawing/2014/main" id="{79B5D4D2-AB93-407B-86C6-743A2A1B5284}"/>
               </a:ext>
             </a:extLst>
           </p:cNvPr>
@@ -12921,7 +12921,7 @@
           <p:cNvPr id="20" name="testing">
             <a:extLst xmlns:a="http://schemas.openxmlformats.org/drawingml/2006/main">
               <a:ext uri="{FF2B5EF4-FFF2-40B4-BE49-F238E27FC236}">
-                <a16:creationId xmlns:a16="http://schemas.microsoft.com/office/drawing/2014/main" id="{3D84487C-FEC2-4831-8605-8E5BCBFDFB07}"/>
+                <a16:creationId xmlns:a16="http://schemas.microsoft.com/office/drawing/2014/main" id="{E6C96C3D-33F1-4127-AF14-91D708C9653E}"/>
               </a:ext>
             </a:extLst>
           </p:cNvPr>
@@ -13079,7 +13079,7 @@
           <p:cNvPr id="21" name="테스트 위치와 범위">
             <a:extLst xmlns:a="http://schemas.openxmlformats.org/drawingml/2006/main">
               <a:ext uri="{FF2B5EF4-FFF2-40B4-BE49-F238E27FC236}">
-                <a16:creationId xmlns:a16="http://schemas.microsoft.com/office/drawing/2014/main" id="{287A70D8-571E-463B-A937-2E384003A4DA}"/>
+                <a16:creationId xmlns:a16="http://schemas.microsoft.com/office/drawing/2014/main" id="{153D5219-50E7-414E-9432-A120315ADC2E}"/>
               </a:ext>
             </a:extLst>
           </p:cNvPr>
@@ -13237,7 +13237,7 @@
           <p:cNvPr id="22" name="모든 지식을 넣기보다, 상세 정보까지 가는 길을 안내한다">
             <a:extLst xmlns:a="http://schemas.openxmlformats.org/drawingml/2006/main">
               <a:ext uri="{FF2B5EF4-FFF2-40B4-BE49-F238E27FC236}">
-                <a16:creationId xmlns:a16="http://schemas.microsoft.com/office/drawing/2014/main" id="{F940D70F-19E1-4C2D-8060-640DD6C991A4}"/>
+                <a16:creationId xmlns:a16="http://schemas.microsoft.com/office/drawing/2014/main" id="{37620AA0-4208-4932-8D09-41D00F096694}"/>
               </a:ext>
             </a:extLst>
           </p:cNvPr>
@@ -13395,7 +13395,7 @@
           <p:cNvPr id="23" name="Legacy module connection">
             <a:extLst xmlns:a="http://schemas.openxmlformats.org/drawingml/2006/main">
               <a:ext uri="{FF2B5EF4-FFF2-40B4-BE49-F238E27FC236}">
-                <a16:creationId xmlns:a16="http://schemas.microsoft.com/office/drawing/2014/main" id="{745F9CAD-3C03-4A56-95FE-23E5D00AE5A7}"/>
+                <a16:creationId xmlns:a16="http://schemas.microsoft.com/office/drawing/2014/main" id="{9A5C5B8D-C21F-4F35-A061-8AF35263FC44}"/>
               </a:ext>
             </a:extLst>
           </p:cNvPr>
@@ -13551,7 +13551,7 @@
     </p:spTree>
     <p:extLst>
       <p:ext uri="{BB962C8B-B14F-4D97-AF65-F5344CB8AC3E}">
-        <p14:creationId xmlns:p14="http://schemas.microsoft.com/office/powerpoint/2010/main" val="2079332930"/>
+        <p14:creationId xmlns:p14="http://schemas.microsoft.com/office/powerpoint/2010/main" val="992549738"/>
       </p:ext>
     </p:extLst>
   </p:cSld>
@@ -13582,7 +13582,7 @@
           <p:cNvPr id="23" name="ACT 2 · STATE-03의 문서 구조">
             <a:extLst xmlns:a="http://schemas.openxmlformats.org/drawingml/2006/main">
               <a:ext uri="{FF2B5EF4-FFF2-40B4-BE49-F238E27FC236}">
-                <a16:creationId xmlns:a16="http://schemas.microsoft.com/office/drawing/2014/main" id="{0B505515-58D2-46C2-875C-D1959E42A3F0}"/>
+                <a16:creationId xmlns:a16="http://schemas.microsoft.com/office/drawing/2014/main" id="{5806ED22-8CCE-4E0F-B9C5-D060D0E0CB5A}"/>
               </a:ext>
             </a:extLst>
           </p:cNvPr>
@@ -13737,10 +13737,10 @@
       </p:sp>
       <p:sp>
         <p:nvSpPr>
-          <p:cNvPr id="2" name="S33">
+          <p:cNvPr id="2" name="S34">
             <a:extLst xmlns:a="http://schemas.openxmlformats.org/drawingml/2006/main">
               <a:ext uri="{FF2B5EF4-FFF2-40B4-BE49-F238E27FC236}">
-                <a16:creationId xmlns:a16="http://schemas.microsoft.com/office/drawing/2014/main" id="{A7ED2E10-EC9D-46E7-A7BE-3A7CCA9EF837}"/>
+                <a16:creationId xmlns:a16="http://schemas.microsoft.com/office/drawing/2014/main" id="{F071112A-145F-4AF9-AF3B-CE6B7E4AAFDD}"/>
               </a:ext>
             </a:extLst>
           </p:cNvPr>
@@ -13888,7 +13888,7 @@
                 <a:ea typeface="Malgun Gothic"/>
                 <a:cs typeface="Malgun Gothic"/>
               </a:rPr>
-              <a:t>S33</a:t>
+              <a:t>S34</a:t>
             </a:r>
           </a:p>
         </p:txBody>
@@ -13898,7 +13898,7 @@
           <p:cNvPr id="3" name="정보를 지우지 않고 위치를 나누기">
             <a:extLst xmlns:a="http://schemas.openxmlformats.org/drawingml/2006/main">
               <a:ext uri="{FF2B5EF4-FFF2-40B4-BE49-F238E27FC236}">
-                <a16:creationId xmlns:a16="http://schemas.microsoft.com/office/drawing/2014/main" id="{216A8AC4-9F21-457E-B2A3-81F9C0FAA305}"/>
+                <a16:creationId xmlns:a16="http://schemas.microsoft.com/office/drawing/2014/main" id="{82CE19EC-F016-4C44-85FF-23AC4FC64BF4}"/>
               </a:ext>
             </a:extLst>
           </p:cNvPr>
@@ -14056,7 +14056,7 @@
           <p:cNvPr id="4" name="">
             <a:extLst xmlns:a="http://schemas.openxmlformats.org/drawingml/2006/main">
               <a:ext uri="{FF2B5EF4-FFF2-40B4-BE49-F238E27FC236}">
-                <a16:creationId xmlns:a16="http://schemas.microsoft.com/office/drawing/2014/main" id="{A1456D1A-5B0F-421A-A28F-9E655876BB99}"/>
+                <a16:creationId xmlns:a16="http://schemas.microsoft.com/office/drawing/2014/main" id="{53D74C30-238A-4BD1-933B-5C365F3C92AC}"/>
               </a:ext>
             </a:extLst>
           </p:cNvPr>
@@ -14087,7 +14087,7 @@
           <p:cNvPr id="5" name="STATE-02 → STATE-03 · 실제 파일 구조와 Routing 문구 발췌">
             <a:extLst xmlns:a="http://schemas.openxmlformats.org/drawingml/2006/main">
               <a:ext uri="{FF2B5EF4-FFF2-40B4-BE49-F238E27FC236}">
-                <a16:creationId xmlns:a16="http://schemas.microsoft.com/office/drawing/2014/main" id="{8AD71633-D09F-465E-9028-140D965ABD78}"/>
+                <a16:creationId xmlns:a16="http://schemas.microsoft.com/office/drawing/2014/main" id="{AD060CC0-DAB5-4FC9-A6C0-42A0A92EFA6E}"/>
               </a:ext>
             </a:extLst>
           </p:cNvPr>
@@ -14245,7 +14245,7 @@
           <p:cNvPr id="6" name="내용을 Scope에 맞춰 이동 · 구조 변화 자체가 완벽한 Routing이나 성능 향상 증거는 아님">
             <a:extLst xmlns:a="http://schemas.openxmlformats.org/drawingml/2006/main">
               <a:ext uri="{FF2B5EF4-FFF2-40B4-BE49-F238E27FC236}">
-                <a16:creationId xmlns:a16="http://schemas.microsoft.com/office/drawing/2014/main" id="{98A5E948-2C83-411B-924B-0618BE947047}"/>
+                <a16:creationId xmlns:a16="http://schemas.microsoft.com/office/drawing/2014/main" id="{1C6073C8-B1B4-4ECC-B43B-2F64946554FF}"/>
               </a:ext>
             </a:extLst>
           </p:cNvPr>
@@ -14403,7 +14403,7 @@
           <p:cNvPr id="7" name="이전: AGENTS.md 안에 세부사항까지">
             <a:extLst xmlns:a="http://schemas.openxmlformats.org/drawingml/2006/main">
               <a:ext uri="{FF2B5EF4-FFF2-40B4-BE49-F238E27FC236}">
-                <a16:creationId xmlns:a16="http://schemas.microsoft.com/office/drawing/2014/main" id="{9AC2A439-E973-4959-9FF0-8BDF39391667}"/>
+                <a16:creationId xmlns:a16="http://schemas.microsoft.com/office/drawing/2014/main" id="{7A93CFD9-3078-4C3F-80EE-BE7ABD9693DA}"/>
               </a:ext>
             </a:extLst>
           </p:cNvPr>
@@ -14561,7 +14561,7 @@
           <p:cNvPr id="8" name="이후: 기본 안내 + 상세 문서로 가는 링크">
             <a:extLst xmlns:a="http://schemas.openxmlformats.org/drawingml/2006/main">
               <a:ext uri="{FF2B5EF4-FFF2-40B4-BE49-F238E27FC236}">
-                <a16:creationId xmlns:a16="http://schemas.microsoft.com/office/drawing/2014/main" id="{FA8E577A-4610-4590-A04F-1B66AE1A045E}"/>
+                <a16:creationId xmlns:a16="http://schemas.microsoft.com/office/drawing/2014/main" id="{8587CEB5-4243-4CED-AED7-E3C8A148EEB4}"/>
               </a:ext>
             </a:extLst>
           </p:cNvPr>
@@ -14719,7 +14719,7 @@
           <p:cNvPr id="9" name="">
             <a:extLst xmlns:a="http://schemas.openxmlformats.org/drawingml/2006/main">
               <a:ext uri="{FF2B5EF4-FFF2-40B4-BE49-F238E27FC236}">
-                <a16:creationId xmlns:a16="http://schemas.microsoft.com/office/drawing/2014/main" id="{5F61CCD7-98AC-434A-B872-0BDE527A3093}"/>
+                <a16:creationId xmlns:a16="http://schemas.microsoft.com/office/drawing/2014/main" id="{0CE5C30B-670F-4864-9B96-16FED35E9672}"/>
               </a:ext>
             </a:extLst>
           </p:cNvPr>
@@ -14750,7 +14750,7 @@
           <p:cNvPr id="10" name="처리 순서 · 모듈 역할">
             <a:extLst xmlns:a="http://schemas.openxmlformats.org/drawingml/2006/main">
               <a:ext uri="{FF2B5EF4-FFF2-40B4-BE49-F238E27FC236}">
-                <a16:creationId xmlns:a16="http://schemas.microsoft.com/office/drawing/2014/main" id="{A0A09CF6-9D0C-40FD-A4EF-4DC064C7AC4B}"/>
+                <a16:creationId xmlns:a16="http://schemas.microsoft.com/office/drawing/2014/main" id="{46227097-5539-4D01-9FF9-92ADCCCCA454}"/>
               </a:ext>
             </a:extLst>
           </p:cNvPr>
@@ -14908,7 +14908,7 @@
           <p:cNvPr id="11" name="">
             <a:extLst xmlns:a="http://schemas.openxmlformats.org/drawingml/2006/main">
               <a:ext uri="{FF2B5EF4-FFF2-40B4-BE49-F238E27FC236}">
-                <a16:creationId xmlns:a16="http://schemas.microsoft.com/office/drawing/2014/main" id="{E3D244EB-ECAD-47D8-84B9-0C75E7541C51}"/>
+                <a16:creationId xmlns:a16="http://schemas.microsoft.com/office/drawing/2014/main" id="{1FAFAF25-2D07-4277-B7A8-B12919C9A091}"/>
               </a:ext>
             </a:extLst>
           </p:cNvPr>
@@ -14938,7 +14938,7 @@
           <p:cNvPr id="12" name="docs/architecture.md">
             <a:extLst xmlns:a="http://schemas.openxmlformats.org/drawingml/2006/main">
               <a:ext uri="{FF2B5EF4-FFF2-40B4-BE49-F238E27FC236}">
-                <a16:creationId xmlns:a16="http://schemas.microsoft.com/office/drawing/2014/main" id="{ABE687CB-0856-4848-B6AE-258CC674A0E4}"/>
+                <a16:creationId xmlns:a16="http://schemas.microsoft.com/office/drawing/2014/main" id="{0F3AE027-15B6-4D71-8020-C96DB6C7297A}"/>
               </a:ext>
             </a:extLst>
           </p:cNvPr>
@@ -15096,7 +15096,7 @@
           <p:cNvPr id="13" name="">
             <a:extLst xmlns:a="http://schemas.openxmlformats.org/drawingml/2006/main">
               <a:ext uri="{FF2B5EF4-FFF2-40B4-BE49-F238E27FC236}">
-                <a16:creationId xmlns:a16="http://schemas.microsoft.com/office/drawing/2014/main" id="{3CDE0321-A386-4587-BD35-18CD5BC3A98F}"/>
+                <a16:creationId xmlns:a16="http://schemas.microsoft.com/office/drawing/2014/main" id="{F026E129-64E8-4CD9-B6FC-80640EED458E}"/>
               </a:ext>
             </a:extLst>
           </p:cNvPr>
@@ -15127,7 +15127,7 @@
           <p:cNvPr id="14" name="이미지 형식 · crop · resize">
             <a:extLst xmlns:a="http://schemas.openxmlformats.org/drawingml/2006/main">
               <a:ext uri="{FF2B5EF4-FFF2-40B4-BE49-F238E27FC236}">
-                <a16:creationId xmlns:a16="http://schemas.microsoft.com/office/drawing/2014/main" id="{016F85D7-CE2F-44C8-96D8-95AC78E917E6}"/>
+                <a16:creationId xmlns:a16="http://schemas.microsoft.com/office/drawing/2014/main" id="{AC8CDBB6-9D0D-4CEF-9FFD-2DB8E42ED9A0}"/>
               </a:ext>
             </a:extLst>
           </p:cNvPr>
@@ -15285,7 +15285,7 @@
           <p:cNvPr id="15" name="">
             <a:extLst xmlns:a="http://schemas.openxmlformats.org/drawingml/2006/main">
               <a:ext uri="{FF2B5EF4-FFF2-40B4-BE49-F238E27FC236}">
-                <a16:creationId xmlns:a16="http://schemas.microsoft.com/office/drawing/2014/main" id="{07899048-1643-4358-93C4-DB2DF73F2ABB}"/>
+                <a16:creationId xmlns:a16="http://schemas.microsoft.com/office/drawing/2014/main" id="{72482B81-7BF0-4448-AAC3-656E1E478A1C}"/>
               </a:ext>
             </a:extLst>
           </p:cNvPr>
@@ -15315,7 +15315,7 @@
           <p:cNvPr id="16" name="docs/image-contracts.md">
             <a:extLst xmlns:a="http://schemas.openxmlformats.org/drawingml/2006/main">
               <a:ext uri="{FF2B5EF4-FFF2-40B4-BE49-F238E27FC236}">
-                <a16:creationId xmlns:a16="http://schemas.microsoft.com/office/drawing/2014/main" id="{F746725D-711A-423C-B81F-2A5856DF70EE}"/>
+                <a16:creationId xmlns:a16="http://schemas.microsoft.com/office/drawing/2014/main" id="{38C9D747-98B0-441C-951E-14780455596E}"/>
               </a:ext>
             </a:extLst>
           </p:cNvPr>
@@ -15473,7 +15473,7 @@
           <p:cNvPr id="17" name="">
             <a:extLst xmlns:a="http://schemas.openxmlformats.org/drawingml/2006/main">
               <a:ext uri="{FF2B5EF4-FFF2-40B4-BE49-F238E27FC236}">
-                <a16:creationId xmlns:a16="http://schemas.microsoft.com/office/drawing/2014/main" id="{66B77B3D-CEC5-4625-AA20-E6CCE5581FA5}"/>
+                <a16:creationId xmlns:a16="http://schemas.microsoft.com/office/drawing/2014/main" id="{E6E0019F-845F-4823-AFF6-93B452DC75DC}"/>
               </a:ext>
             </a:extLst>
           </p:cNvPr>
@@ -15504,7 +15504,7 @@
           <p:cNvPr id="18" name="테스트 구조 · 관련 테스트">
             <a:extLst xmlns:a="http://schemas.openxmlformats.org/drawingml/2006/main">
               <a:ext uri="{FF2B5EF4-FFF2-40B4-BE49-F238E27FC236}">
-                <a16:creationId xmlns:a16="http://schemas.microsoft.com/office/drawing/2014/main" id="{75AEE999-9C60-4CBF-A598-57E80B5E8354}"/>
+                <a16:creationId xmlns:a16="http://schemas.microsoft.com/office/drawing/2014/main" id="{667420AD-D3F7-4DFC-AD2D-714D13AD3AB9}"/>
               </a:ext>
             </a:extLst>
           </p:cNvPr>
@@ -15662,7 +15662,7 @@
           <p:cNvPr id="19" name="">
             <a:extLst xmlns:a="http://schemas.openxmlformats.org/drawingml/2006/main">
               <a:ext uri="{FF2B5EF4-FFF2-40B4-BE49-F238E27FC236}">
-                <a16:creationId xmlns:a16="http://schemas.microsoft.com/office/drawing/2014/main" id="{538F809A-AC62-4ADD-AA52-385E65494232}"/>
+                <a16:creationId xmlns:a16="http://schemas.microsoft.com/office/drawing/2014/main" id="{0AB00C2D-EA8D-4DD7-9741-27F0C1D2CD38}"/>
               </a:ext>
             </a:extLst>
           </p:cNvPr>
@@ -15692,7 +15692,7 @@
           <p:cNvPr id="20" name="docs/testing.md">
             <a:extLst xmlns:a="http://schemas.openxmlformats.org/drawingml/2006/main">
               <a:ext uri="{FF2B5EF4-FFF2-40B4-BE49-F238E27FC236}">
-                <a16:creationId xmlns:a16="http://schemas.microsoft.com/office/drawing/2014/main" id="{47C0581E-33C4-4137-AE56-2CD7B898CF18}"/>
+                <a16:creationId xmlns:a16="http://schemas.microsoft.com/office/drawing/2014/main" id="{FC28BF48-B360-4BF0-9B7F-EFE28FB75C81}"/>
               </a:ext>
             </a:extLst>
           </p:cNvPr>
@@ -15850,7 +15850,7 @@
           <p:cNvPr id="21" name="원문: Test organization or relevant tests → docs/testing.md">
             <a:extLst xmlns:a="http://schemas.openxmlformats.org/drawingml/2006/main">
               <a:ext uri="{FF2B5EF4-FFF2-40B4-BE49-F238E27FC236}">
-                <a16:creationId xmlns:a16="http://schemas.microsoft.com/office/drawing/2014/main" id="{819A8290-84AC-4E1C-8CAE-B0B3014E829C}"/>
+                <a16:creationId xmlns:a16="http://schemas.microsoft.com/office/drawing/2014/main" id="{39FD4B9F-92AA-4D62-9F7D-820D403295DA}"/>
               </a:ext>
             </a:extLst>
           </p:cNvPr>
@@ -16008,7 +16008,7 @@
           <p:cNvPr id="22" name="Legacy module connection">
             <a:extLst xmlns:a="http://schemas.openxmlformats.org/drawingml/2006/main">
               <a:ext uri="{FF2B5EF4-FFF2-40B4-BE49-F238E27FC236}">
-                <a16:creationId xmlns:a16="http://schemas.microsoft.com/office/drawing/2014/main" id="{CA258F2E-0FD5-4F57-B44A-948E9E980F13}"/>
+                <a16:creationId xmlns:a16="http://schemas.microsoft.com/office/drawing/2014/main" id="{C25AB7D9-09BD-499A-AB5C-8435D5FD8BEF}"/>
               </a:ext>
             </a:extLst>
           </p:cNvPr>
@@ -16164,7 +16164,7 @@
     </p:spTree>
     <p:extLst>
       <p:ext uri="{BB962C8B-B14F-4D97-AF65-F5344CB8AC3E}">
-        <p14:creationId xmlns:p14="http://schemas.microsoft.com/office/powerpoint/2010/main" val="1565696227"/>
+        <p14:creationId xmlns:p14="http://schemas.microsoft.com/office/powerpoint/2010/main" val="482626291"/>
       </p:ext>
     </p:extLst>
   </p:cSld>
@@ -16195,7 +16195,7 @@
           <p:cNvPr id="15" name="ACT 2 · 관찰하기 전에 질문하기">
             <a:extLst xmlns:a="http://schemas.openxmlformats.org/drawingml/2006/main">
               <a:ext uri="{FF2B5EF4-FFF2-40B4-BE49-F238E27FC236}">
-                <a16:creationId xmlns:a16="http://schemas.microsoft.com/office/drawing/2014/main" id="{669044B2-E008-4AC6-B6F2-E2DC2E778801}"/>
+                <a16:creationId xmlns:a16="http://schemas.microsoft.com/office/drawing/2014/main" id="{A4C75A6D-D273-429E-B0D4-C84F3DD69A5A}"/>
               </a:ext>
             </a:extLst>
           </p:cNvPr>
@@ -16350,10 +16350,10 @@
       </p:sp>
       <p:sp>
         <p:nvSpPr>
-          <p:cNvPr id="2" name="S34">
+          <p:cNvPr id="2" name="S35">
             <a:extLst xmlns:a="http://schemas.openxmlformats.org/drawingml/2006/main">
               <a:ext uri="{FF2B5EF4-FFF2-40B4-BE49-F238E27FC236}">
-                <a16:creationId xmlns:a16="http://schemas.microsoft.com/office/drawing/2014/main" id="{010C2470-6580-4DDB-8CE6-03BB079EBB05}"/>
+                <a16:creationId xmlns:a16="http://schemas.microsoft.com/office/drawing/2014/main" id="{0B89FD35-12C9-482C-BD5D-D053857E3F8C}"/>
               </a:ext>
             </a:extLst>
           </p:cNvPr>
@@ -16501,7 +16501,7 @@
                 <a:ea typeface="Malgun Gothic"/>
                 <a:cs typeface="Malgun Gothic"/>
               </a:rPr>
-              <a:t>S34</a:t>
+              <a:t>S35</a:t>
             </a:r>
           </a:p>
         </p:txBody>
@@ -16511,7 +16511,7 @@
           <p:cNvPr id="3" name="서로 다른 두 Task가 무엇을 읽을까?">
             <a:extLst xmlns:a="http://schemas.openxmlformats.org/drawingml/2006/main">
               <a:ext uri="{FF2B5EF4-FFF2-40B4-BE49-F238E27FC236}">
-                <a16:creationId xmlns:a16="http://schemas.microsoft.com/office/drawing/2014/main" id="{E0EE2D42-2BF0-4D18-970B-87613EEDA7EB}"/>
+                <a16:creationId xmlns:a16="http://schemas.microsoft.com/office/drawing/2014/main" id="{3EB3115B-F0C1-4369-9432-5D6F20745169}"/>
               </a:ext>
             </a:extLst>
           </p:cNvPr>
@@ -16669,7 +16669,7 @@
           <p:cNvPr id="4" name="">
             <a:extLst xmlns:a="http://schemas.openxmlformats.org/drawingml/2006/main">
               <a:ext uri="{FF2B5EF4-FFF2-40B4-BE49-F238E27FC236}">
-                <a16:creationId xmlns:a16="http://schemas.microsoft.com/office/drawing/2014/main" id="{A2A51A67-5E65-4381-BD7E-808EA06563B1}"/>
+                <a16:creationId xmlns:a16="http://schemas.microsoft.com/office/drawing/2014/main" id="{E4DE2CAB-84DA-46BB-A7B6-9D2A29C1D839}"/>
               </a:ext>
             </a:extLst>
           </p:cNvPr>
@@ -16700,7 +16700,7 @@
           <p:cNvPr id="5" name="TRIAL-005A/B · 읽기 전용 Task의 질문을 재구성">
             <a:extLst xmlns:a="http://schemas.openxmlformats.org/drawingml/2006/main">
               <a:ext uri="{FF2B5EF4-FFF2-40B4-BE49-F238E27FC236}">
-                <a16:creationId xmlns:a16="http://schemas.microsoft.com/office/drawing/2014/main" id="{4746A3DF-F8C7-4F59-A096-9AF5DC2D219E}"/>
+                <a16:creationId xmlns:a16="http://schemas.microsoft.com/office/drawing/2014/main" id="{967BCFFA-8C42-4149-890D-C313E0A38A54}"/>
               </a:ext>
             </a:extLst>
           </p:cNvPr>
@@ -16858,7 +16858,7 @@
           <p:cNvPr id="6" name="어떤 상세 문서를 읽을지는 실제 접근 기록으로 확인한다">
             <a:extLst xmlns:a="http://schemas.openxmlformats.org/drawingml/2006/main">
               <a:ext uri="{FF2B5EF4-FFF2-40B4-BE49-F238E27FC236}">
-                <a16:creationId xmlns:a16="http://schemas.microsoft.com/office/drawing/2014/main" id="{F60CE8AF-F0E8-4635-A2D5-BE77515F8C76}"/>
+                <a16:creationId xmlns:a16="http://schemas.microsoft.com/office/drawing/2014/main" id="{A8946A90-EE9D-4384-8545-F8FC37236412}"/>
               </a:ext>
             </a:extLst>
           </p:cNvPr>
@@ -17016,7 +17016,7 @@
           <p:cNvPr id="7" name="Task A">
             <a:extLst xmlns:a="http://schemas.openxmlformats.org/drawingml/2006/main">
               <a:ext uri="{FF2B5EF4-FFF2-40B4-BE49-F238E27FC236}">
-                <a16:creationId xmlns:a16="http://schemas.microsoft.com/office/drawing/2014/main" id="{7C4F25C6-C299-40E7-AD45-947E6CDDC19E}"/>
+                <a16:creationId xmlns:a16="http://schemas.microsoft.com/office/drawing/2014/main" id="{9C17FACC-C644-46AC-B655-6DC7F633B7F7}"/>
               </a:ext>
             </a:extLst>
           </p:cNvPr>
@@ -17174,7 +17174,7 @@
           <p:cNvPr id="8" name="Task B">
             <a:extLst xmlns:a="http://schemas.openxmlformats.org/drawingml/2006/main">
               <a:ext uri="{FF2B5EF4-FFF2-40B4-BE49-F238E27FC236}">
-                <a16:creationId xmlns:a16="http://schemas.microsoft.com/office/drawing/2014/main" id="{FFB22156-8A69-4F2E-A261-137BE81634B4}"/>
+                <a16:creationId xmlns:a16="http://schemas.microsoft.com/office/drawing/2014/main" id="{A8553834-12E9-4316-89F2-064DCB12F0DC}"/>
               </a:ext>
             </a:extLst>
           </p:cNvPr>
@@ -17332,7 +17332,7 @@
           <p:cNvPr id="9" name="">
             <a:extLst xmlns:a="http://schemas.openxmlformats.org/drawingml/2006/main">
               <a:ext uri="{FF2B5EF4-FFF2-40B4-BE49-F238E27FC236}">
-                <a16:creationId xmlns:a16="http://schemas.microsoft.com/office/drawing/2014/main" id="{E13C8055-D815-4943-98FE-8AA24E8CB621}"/>
+                <a16:creationId xmlns:a16="http://schemas.microsoft.com/office/drawing/2014/main" id="{99AF6A44-68C4-45BD-9948-1C3D5C6120C5}"/>
               </a:ext>
             </a:extLst>
           </p:cNvPr>
@@ -17363,7 +17363,7 @@
           <p:cNvPr id="10" name="">
             <a:extLst xmlns:a="http://schemas.openxmlformats.org/drawingml/2006/main">
               <a:ext uri="{FF2B5EF4-FFF2-40B4-BE49-F238E27FC236}">
-                <a16:creationId xmlns:a16="http://schemas.microsoft.com/office/drawing/2014/main" id="{255D3CE3-F056-4D71-B639-D9224DAE20A0}"/>
+                <a16:creationId xmlns:a16="http://schemas.microsoft.com/office/drawing/2014/main" id="{3D30A006-4B12-4921-A45A-DC9988D3BCE1}"/>
               </a:ext>
             </a:extLst>
           </p:cNvPr>
@@ -17394,7 +17394,7 @@
           <p:cNvPr id="11" name="crop 1 3은&#10;어떤 source column을&#10;포함하는가?">
             <a:extLst xmlns:a="http://schemas.openxmlformats.org/drawingml/2006/main">
               <a:ext uri="{FF2B5EF4-FFF2-40B4-BE49-F238E27FC236}">
-                <a16:creationId xmlns:a16="http://schemas.microsoft.com/office/drawing/2014/main" id="{2FBC9EA8-5879-46D5-AF0B-DE820F693F0E}"/>
+                <a16:creationId xmlns:a16="http://schemas.microsoft.com/office/drawing/2014/main" id="{E4932F89-EC71-44E9-9E74-9C0AC131B964}"/>
               </a:ext>
             </a:extLst>
           </p:cNvPr>
@@ -17598,7 +17598,7 @@
           <p:cNvPr id="12" name="이 Project에&#10;runtime dependency가&#10;있는가?">
             <a:extLst xmlns:a="http://schemas.openxmlformats.org/drawingml/2006/main">
               <a:ext uri="{FF2B5EF4-FFF2-40B4-BE49-F238E27FC236}">
-                <a16:creationId xmlns:a16="http://schemas.microsoft.com/office/drawing/2014/main" id="{654A1E94-1FF0-4CB0-A972-2302F5763554}"/>
+                <a16:creationId xmlns:a16="http://schemas.microsoft.com/office/drawing/2014/main" id="{EC9A7992-87C9-4681-A80D-F14FA2DEE7D0}"/>
               </a:ext>
             </a:extLst>
           </p:cNvPr>
@@ -17802,7 +17802,7 @@
           <p:cNvPr id="13" name="두 Task에서 같은 상세 문서를 읽을까?">
             <a:extLst xmlns:a="http://schemas.openxmlformats.org/drawingml/2006/main">
               <a:ext uri="{FF2B5EF4-FFF2-40B4-BE49-F238E27FC236}">
-                <a16:creationId xmlns:a16="http://schemas.microsoft.com/office/drawing/2014/main" id="{B38E1127-3450-4350-AE8F-25B7E9767166}"/>
+                <a16:creationId xmlns:a16="http://schemas.microsoft.com/office/drawing/2014/main" id="{C6070B1B-B787-437D-A70D-B0CB8F61772F}"/>
               </a:ext>
             </a:extLst>
           </p:cNvPr>
@@ -17960,7 +17960,7 @@
           <p:cNvPr id="14" name="Legacy module connection">
             <a:extLst xmlns:a="http://schemas.openxmlformats.org/drawingml/2006/main">
               <a:ext uri="{FF2B5EF4-FFF2-40B4-BE49-F238E27FC236}">
-                <a16:creationId xmlns:a16="http://schemas.microsoft.com/office/drawing/2014/main" id="{DF8F068C-F996-4B4F-B845-DFF66FA4ABB5}"/>
+                <a16:creationId xmlns:a16="http://schemas.microsoft.com/office/drawing/2014/main" id="{C7DABF67-F294-455F-98EC-31A27434655F}"/>
               </a:ext>
             </a:extLst>
           </p:cNvPr>
@@ -18116,7 +18116,7 @@
     </p:spTree>
     <p:extLst>
       <p:ext uri="{BB962C8B-B14F-4D97-AF65-F5344CB8AC3E}">
-        <p14:creationId xmlns:p14="http://schemas.microsoft.com/office/powerpoint/2010/main" val="606460420"/>
+        <p14:creationId xmlns:p14="http://schemas.microsoft.com/office/powerpoint/2010/main" val="1805514392"/>
       </p:ext>
     </p:extLst>
   </p:cSld>
@@ -18147,7 +18147,7 @@
           <p:cNvPr id="25" name="ACT 2 · 질문과 근거를 연결하기">
             <a:extLst xmlns:a="http://schemas.openxmlformats.org/drawingml/2006/main">
               <a:ext uri="{FF2B5EF4-FFF2-40B4-BE49-F238E27FC236}">
-                <a16:creationId xmlns:a16="http://schemas.microsoft.com/office/drawing/2014/main" id="{C648E52F-E6A5-47F3-B743-909A349D021A}"/>
+                <a16:creationId xmlns:a16="http://schemas.microsoft.com/office/drawing/2014/main" id="{DE628AB9-7F53-489E-A3F3-FE1368E548D9}"/>
               </a:ext>
             </a:extLst>
           </p:cNvPr>
@@ -18302,10 +18302,10 @@
       </p:sp>
       <p:sp>
         <p:nvSpPr>
-          <p:cNvPr id="2" name="S35">
+          <p:cNvPr id="2" name="S36">
             <a:extLst xmlns:a="http://schemas.openxmlformats.org/drawingml/2006/main">
               <a:ext uri="{FF2B5EF4-FFF2-40B4-BE49-F238E27FC236}">
-                <a16:creationId xmlns:a16="http://schemas.microsoft.com/office/drawing/2014/main" id="{77E3958F-CA10-4920-B835-4D73F3A38CA1}"/>
+                <a16:creationId xmlns:a16="http://schemas.microsoft.com/office/drawing/2014/main" id="{9E552FFC-E12D-41CB-BAAC-7CCF0356746E}"/>
               </a:ext>
             </a:extLst>
           </p:cNvPr>
@@ -18453,7 +18453,7 @@
                 <a:ea typeface="Malgun Gothic"/>
                 <a:cs typeface="Malgun Gothic"/>
               </a:rPr>
-              <a:t>S35</a:t>
+              <a:t>S36</a:t>
             </a:r>
           </a:p>
         </p:txBody>
@@ -18463,7 +18463,7 @@
           <p:cNvPr id="3" name="Crop Task에서 관찰한 접근">
             <a:extLst xmlns:a="http://schemas.openxmlformats.org/drawingml/2006/main">
               <a:ext uri="{FF2B5EF4-FFF2-40B4-BE49-F238E27FC236}">
-                <a16:creationId xmlns:a16="http://schemas.microsoft.com/office/drawing/2014/main" id="{01067BC2-8211-4818-8B1D-EBDF1FD69FD6}"/>
+                <a16:creationId xmlns:a16="http://schemas.microsoft.com/office/drawing/2014/main" id="{BBA18BFE-0524-49C2-9D60-246F4F667229}"/>
               </a:ext>
             </a:extLst>
           </p:cNvPr>
@@ -18621,7 +18621,7 @@
           <p:cNvPr id="4" name="">
             <a:extLst xmlns:a="http://schemas.openxmlformats.org/drawingml/2006/main">
               <a:ext uri="{FF2B5EF4-FFF2-40B4-BE49-F238E27FC236}">
-                <a16:creationId xmlns:a16="http://schemas.microsoft.com/office/drawing/2014/main" id="{A15997AF-3781-413B-9689-25D066FC7A6A}"/>
+                <a16:creationId xmlns:a16="http://schemas.microsoft.com/office/drawing/2014/main" id="{C9E29B7C-49C1-424E-BB32-E3962B3FD84F}"/>
               </a:ext>
             </a:extLst>
           </p:cNvPr>
@@ -18652,7 +18652,7 @@
           <p:cNvPr id="5" name="TRIAL-005A · 최종 실행의 접근과 답을 기록에서 재구성">
             <a:extLst xmlns:a="http://schemas.openxmlformats.org/drawingml/2006/main">
               <a:ext uri="{FF2B5EF4-FFF2-40B4-BE49-F238E27FC236}">
-                <a16:creationId xmlns:a16="http://schemas.microsoft.com/office/drawing/2014/main" id="{BA0875F0-DEFE-4A5A-8E76-590517674CAA}"/>
+                <a16:creationId xmlns:a16="http://schemas.microsoft.com/office/drawing/2014/main" id="{E49C2A36-C0EA-4346-84FC-6DC5B2EBDD4A}"/>
               </a:ext>
             </a:extLst>
           </p:cNvPr>
@@ -18810,7 +18810,7 @@
           <p:cNvPr id="6" name="architecture 등 넓은 Context도 접근 · testing.md는 최종 실행에서 관찰, 반복 간">
             <a:extLst xmlns:a="http://schemas.openxmlformats.org/drawingml/2006/main">
               <a:ext uri="{FF2B5EF4-FFF2-40B4-BE49-F238E27FC236}">
-                <a16:creationId xmlns:a16="http://schemas.microsoft.com/office/drawing/2014/main" id="{BEA2E5FD-3A45-43BA-B016-14EF98913396}"/>
+                <a16:creationId xmlns:a16="http://schemas.microsoft.com/office/drawing/2014/main" id="{D9AB5C2B-69EE-4CA2-87B2-06E5BDC518B4}"/>
               </a:ext>
             </a:extLst>
           </p:cNvPr>
@@ -18968,7 +18968,7 @@
           <p:cNvPr id="7" name="접근한 계약 문서">
             <a:extLst xmlns:a="http://schemas.openxmlformats.org/drawingml/2006/main">
               <a:ext uri="{FF2B5EF4-FFF2-40B4-BE49-F238E27FC236}">
-                <a16:creationId xmlns:a16="http://schemas.microsoft.com/office/drawing/2014/main" id="{7FA92589-72F9-4953-8FC4-1D754AB4FB12}"/>
+                <a16:creationId xmlns:a16="http://schemas.microsoft.com/office/drawing/2014/main" id="{A6972D9A-6E37-460A-B547-23CC13085C51}"/>
               </a:ext>
             </a:extLst>
           </p:cNvPr>
@@ -19126,7 +19126,7 @@
           <p:cNvPr id="8" name="image-contracts.md">
             <a:extLst xmlns:a="http://schemas.openxmlformats.org/drawingml/2006/main">
               <a:ext uri="{FF2B5EF4-FFF2-40B4-BE49-F238E27FC236}">
-                <a16:creationId xmlns:a16="http://schemas.microsoft.com/office/drawing/2014/main" id="{647B1B3A-B442-4698-A26E-C34E6AD2352B}"/>
+                <a16:creationId xmlns:a16="http://schemas.microsoft.com/office/drawing/2014/main" id="{720F8481-3546-465B-A183-05786D734C4E}"/>
               </a:ext>
             </a:extLst>
           </p:cNvPr>
@@ -19284,7 +19284,7 @@
           <p:cNvPr id="9" name="">
             <a:extLst xmlns:a="http://schemas.openxmlformats.org/drawingml/2006/main">
               <a:ext uri="{FF2B5EF4-FFF2-40B4-BE49-F238E27FC236}">
-                <a16:creationId xmlns:a16="http://schemas.microsoft.com/office/drawing/2014/main" id="{35A82B36-2BC6-44B4-B65E-3C8384F3A3F5}"/>
+                <a16:creationId xmlns:a16="http://schemas.microsoft.com/office/drawing/2014/main" id="{5C60A8BA-A06F-43D6-BB22-DA4B9A304955}"/>
               </a:ext>
             </a:extLst>
           </p:cNvPr>
@@ -19315,7 +19315,7 @@
           <p:cNvPr id="10" name="[x_start, x_end)">
             <a:extLst xmlns:a="http://schemas.openxmlformats.org/drawingml/2006/main">
               <a:ext uri="{FF2B5EF4-FFF2-40B4-BE49-F238E27FC236}">
-                <a16:creationId xmlns:a16="http://schemas.microsoft.com/office/drawing/2014/main" id="{A2572DE9-C135-4A58-AD89-80B851CC38FC}"/>
+                <a16:creationId xmlns:a16="http://schemas.microsoft.com/office/drawing/2014/main" id="{63E26A71-FCB1-48A3-AA96-FD794F653375}"/>
               </a:ext>
             </a:extLst>
           </p:cNvPr>
@@ -19473,7 +19473,7 @@
           <p:cNvPr id="11" name="시작 열 포함 · 끝 좌표 제외">
             <a:extLst xmlns:a="http://schemas.openxmlformats.org/drawingml/2006/main">
               <a:ext uri="{FF2B5EF4-FFF2-40B4-BE49-F238E27FC236}">
-                <a16:creationId xmlns:a16="http://schemas.microsoft.com/office/drawing/2014/main" id="{6C46F78A-1A2D-4B07-A072-31A96FBB143E}"/>
+                <a16:creationId xmlns:a16="http://schemas.microsoft.com/office/drawing/2014/main" id="{94BEFA3D-74B1-42D0-8769-CF94E7450E10}"/>
               </a:ext>
             </a:extLst>
           </p:cNvPr>
@@ -19631,7 +19631,7 @@
           <p:cNvPr id="12" name="기록된 답">
             <a:extLst xmlns:a="http://schemas.openxmlformats.org/drawingml/2006/main">
               <a:ext uri="{FF2B5EF4-FFF2-40B4-BE49-F238E27FC236}">
-                <a16:creationId xmlns:a16="http://schemas.microsoft.com/office/drawing/2014/main" id="{DDC68B4A-8B34-4481-ABF9-B542B149E353}"/>
+                <a16:creationId xmlns:a16="http://schemas.microsoft.com/office/drawing/2014/main" id="{6654A380-E6D8-4D9C-8034-DBCE91680510}"/>
               </a:ext>
             </a:extLst>
           </p:cNvPr>
@@ -19789,7 +19789,7 @@
           <p:cNvPr id="13" name="crop 1 3">
             <a:extLst xmlns:a="http://schemas.openxmlformats.org/drawingml/2006/main">
               <a:ext uri="{FF2B5EF4-FFF2-40B4-BE49-F238E27FC236}">
-                <a16:creationId xmlns:a16="http://schemas.microsoft.com/office/drawing/2014/main" id="{F699A00A-BEF0-4DD9-887E-075845AD1810}"/>
+                <a16:creationId xmlns:a16="http://schemas.microsoft.com/office/drawing/2014/main" id="{2E993104-471E-4F7E-8061-6AA1B0DC3514}"/>
               </a:ext>
             </a:extLst>
           </p:cNvPr>
@@ -19947,7 +19947,7 @@
           <p:cNvPr id="14" name="">
             <a:extLst xmlns:a="http://schemas.openxmlformats.org/drawingml/2006/main">
               <a:ext uri="{FF2B5EF4-FFF2-40B4-BE49-F238E27FC236}">
-                <a16:creationId xmlns:a16="http://schemas.microsoft.com/office/drawing/2014/main" id="{3344FFBF-98DE-4F4B-BA41-B9EDAC0449F2}"/>
+                <a16:creationId xmlns:a16="http://schemas.microsoft.com/office/drawing/2014/main" id="{0475738D-3BE7-4C90-A19F-8F02DD38D3FF}"/>
               </a:ext>
             </a:extLst>
           </p:cNvPr>
@@ -19980,7 +19980,7 @@
           <p:cNvPr id="15" name="0">
             <a:extLst xmlns:a="http://schemas.openxmlformats.org/drawingml/2006/main">
               <a:ext uri="{FF2B5EF4-FFF2-40B4-BE49-F238E27FC236}">
-                <a16:creationId xmlns:a16="http://schemas.microsoft.com/office/drawing/2014/main" id="{5D894417-B4EE-40D4-8594-E0D845931E1C}"/>
+                <a16:creationId xmlns:a16="http://schemas.microsoft.com/office/drawing/2014/main" id="{994359DD-5EC6-409B-A8BE-C2B088A8D5B4}"/>
               </a:ext>
             </a:extLst>
           </p:cNvPr>
@@ -20138,7 +20138,7 @@
           <p:cNvPr id="16" name="">
             <a:extLst xmlns:a="http://schemas.openxmlformats.org/drawingml/2006/main">
               <a:ext uri="{FF2B5EF4-FFF2-40B4-BE49-F238E27FC236}">
-                <a16:creationId xmlns:a16="http://schemas.microsoft.com/office/drawing/2014/main" id="{3ADA382F-ED19-4C71-9EEF-F3DB4FC87E43}"/>
+                <a16:creationId xmlns:a16="http://schemas.microsoft.com/office/drawing/2014/main" id="{73CCEAC3-2A6C-4A80-9D70-638AA35E77C5}"/>
               </a:ext>
             </a:extLst>
           </p:cNvPr>
@@ -20171,7 +20171,7 @@
           <p:cNvPr id="17" name="1">
             <a:extLst xmlns:a="http://schemas.openxmlformats.org/drawingml/2006/main">
               <a:ext uri="{FF2B5EF4-FFF2-40B4-BE49-F238E27FC236}">
-                <a16:creationId xmlns:a16="http://schemas.microsoft.com/office/drawing/2014/main" id="{1607E52F-C0F0-40EC-8BC6-78F7FD858B55}"/>
+                <a16:creationId xmlns:a16="http://schemas.microsoft.com/office/drawing/2014/main" id="{D7AAC234-B950-417E-9574-FFDC98097E80}"/>
               </a:ext>
             </a:extLst>
           </p:cNvPr>
@@ -20329,7 +20329,7 @@
           <p:cNvPr id="18" name="">
             <a:extLst xmlns:a="http://schemas.openxmlformats.org/drawingml/2006/main">
               <a:ext uri="{FF2B5EF4-FFF2-40B4-BE49-F238E27FC236}">
-                <a16:creationId xmlns:a16="http://schemas.microsoft.com/office/drawing/2014/main" id="{CAE27427-D26C-400C-A85E-F7046D35DA76}"/>
+                <a16:creationId xmlns:a16="http://schemas.microsoft.com/office/drawing/2014/main" id="{A7E8071A-B9D3-4BDD-BEE3-09DD8B34DCEA}"/>
               </a:ext>
             </a:extLst>
           </p:cNvPr>
@@ -20362,7 +20362,7 @@
           <p:cNvPr id="19" name="2">
             <a:extLst xmlns:a="http://schemas.openxmlformats.org/drawingml/2006/main">
               <a:ext uri="{FF2B5EF4-FFF2-40B4-BE49-F238E27FC236}">
-                <a16:creationId xmlns:a16="http://schemas.microsoft.com/office/drawing/2014/main" id="{974D2A02-4BE4-4B65-A1BE-6BB8AFBF1E14}"/>
+                <a16:creationId xmlns:a16="http://schemas.microsoft.com/office/drawing/2014/main" id="{2E1E0DA1-85CC-46D3-AF2F-E27CF3C95A3E}"/>
               </a:ext>
             </a:extLst>
           </p:cNvPr>
@@ -20520,7 +20520,7 @@
           <p:cNvPr id="20" name="">
             <a:extLst xmlns:a="http://schemas.openxmlformats.org/drawingml/2006/main">
               <a:ext uri="{FF2B5EF4-FFF2-40B4-BE49-F238E27FC236}">
-                <a16:creationId xmlns:a16="http://schemas.microsoft.com/office/drawing/2014/main" id="{6A61FFFD-D35B-43F2-8E85-0E378582200B}"/>
+                <a16:creationId xmlns:a16="http://schemas.microsoft.com/office/drawing/2014/main" id="{254F5A02-0F6B-4717-8BEF-323BB441AD4A}"/>
               </a:ext>
             </a:extLst>
           </p:cNvPr>
@@ -20553,7 +20553,7 @@
           <p:cNvPr id="21" name="3">
             <a:extLst xmlns:a="http://schemas.openxmlformats.org/drawingml/2006/main">
               <a:ext uri="{FF2B5EF4-FFF2-40B4-BE49-F238E27FC236}">
-                <a16:creationId xmlns:a16="http://schemas.microsoft.com/office/drawing/2014/main" id="{95231584-AF17-4359-A60B-1E29CA78B8D5}"/>
+                <a16:creationId xmlns:a16="http://schemas.microsoft.com/office/drawing/2014/main" id="{C6602D89-1B2E-492B-8B17-F8D60645848A}"/>
               </a:ext>
             </a:extLst>
           </p:cNvPr>
@@ -20711,7 +20711,7 @@
           <p:cNvPr id="22" name="포함 열: 1, 2&#10;출력 폭: 2">
             <a:extLst xmlns:a="http://schemas.openxmlformats.org/drawingml/2006/main">
               <a:ext uri="{FF2B5EF4-FFF2-40B4-BE49-F238E27FC236}">
-                <a16:creationId xmlns:a16="http://schemas.microsoft.com/office/drawing/2014/main" id="{E2CFF831-8D5E-43AD-8C24-E6310A7F1A1A}"/>
+                <a16:creationId xmlns:a16="http://schemas.microsoft.com/office/drawing/2014/main" id="{B6DEADCF-64D0-415B-B2E3-731BBB668244}"/>
               </a:ext>
             </a:extLst>
           </p:cNvPr>
@@ -20892,7 +20892,7 @@
           <p:cNvPr id="23" name="답을 파일의 계약과 연결해 확인했다">
             <a:extLst xmlns:a="http://schemas.openxmlformats.org/drawingml/2006/main">
               <a:ext uri="{FF2B5EF4-FFF2-40B4-BE49-F238E27FC236}">
-                <a16:creationId xmlns:a16="http://schemas.microsoft.com/office/drawing/2014/main" id="{3AB9C2EB-F63A-4A79-95DC-C668973DD1A5}"/>
+                <a16:creationId xmlns:a16="http://schemas.microsoft.com/office/drawing/2014/main" id="{127815BD-A9CC-4617-AC74-9FB34CA7D9BC}"/>
               </a:ext>
             </a:extLst>
           </p:cNvPr>
@@ -21050,7 +21050,7 @@
           <p:cNvPr id="24" name="Legacy module connection">
             <a:extLst xmlns:a="http://schemas.openxmlformats.org/drawingml/2006/main">
               <a:ext uri="{FF2B5EF4-FFF2-40B4-BE49-F238E27FC236}">
-                <a16:creationId xmlns:a16="http://schemas.microsoft.com/office/drawing/2014/main" id="{CE2BA3DA-73D8-4EC5-B688-B357CA07CD6A}"/>
+                <a16:creationId xmlns:a16="http://schemas.microsoft.com/office/drawing/2014/main" id="{BD0047D5-33A6-493D-8746-27C0C46A2A79}"/>
               </a:ext>
             </a:extLst>
           </p:cNvPr>
@@ -21206,7 +21206,7 @@
     </p:spTree>
     <p:extLst>
       <p:ext uri="{BB962C8B-B14F-4D97-AF65-F5344CB8AC3E}">
-        <p14:creationId xmlns:p14="http://schemas.microsoft.com/office/powerpoint/2010/main" val="1031494023"/>
+        <p14:creationId xmlns:p14="http://schemas.microsoft.com/office/powerpoint/2010/main" val="2003350271"/>
       </p:ext>
     </p:extLst>
   </p:cSld>
@@ -21237,7 +21237,7 @@
           <p:cNvPr id="25" name="ACT 2 · 두 Task의 문서 접근 비교">
             <a:extLst xmlns:a="http://schemas.openxmlformats.org/drawingml/2006/main">
               <a:ext uri="{FF2B5EF4-FFF2-40B4-BE49-F238E27FC236}">
-                <a16:creationId xmlns:a16="http://schemas.microsoft.com/office/drawing/2014/main" id="{D38E99E9-82A0-4C36-A703-742E754AF494}"/>
+                <a16:creationId xmlns:a16="http://schemas.microsoft.com/office/drawing/2014/main" id="{793CBDF5-15FA-46B0-AE76-4345D8B8219C}"/>
               </a:ext>
             </a:extLst>
           </p:cNvPr>
@@ -21392,10 +21392,10 @@
       </p:sp>
       <p:sp>
         <p:nvSpPr>
-          <p:cNvPr id="2" name="S36">
+          <p:cNvPr id="2" name="S37">
             <a:extLst xmlns:a="http://schemas.openxmlformats.org/drawingml/2006/main">
               <a:ext uri="{FF2B5EF4-FFF2-40B4-BE49-F238E27FC236}">
-                <a16:creationId xmlns:a16="http://schemas.microsoft.com/office/drawing/2014/main" id="{76F0B925-299C-4A02-B1C1-82B81EAEE223}"/>
+                <a16:creationId xmlns:a16="http://schemas.microsoft.com/office/drawing/2014/main" id="{D3E00EC0-CE38-494D-B750-13E3489AAA76}"/>
               </a:ext>
             </a:extLst>
           </p:cNvPr>
@@ -21543,7 +21543,7 @@
                 <a:ea typeface="Malgun Gothic"/>
                 <a:cs typeface="Malgun Gothic"/>
               </a:rPr>
-              <a:t>S36</a:t>
+              <a:t>S37</a:t>
             </a:r>
           </a:p>
         </p:txBody>
@@ -21553,7 +21553,7 @@
           <p:cNvPr id="3" name="Task별 접근은 달랐지만 완벽하지는 않다">
             <a:extLst xmlns:a="http://schemas.openxmlformats.org/drawingml/2006/main">
               <a:ext uri="{FF2B5EF4-FFF2-40B4-BE49-F238E27FC236}">
-                <a16:creationId xmlns:a16="http://schemas.microsoft.com/office/drawing/2014/main" id="{8E41C467-500C-414E-A20C-28271B0D3CB5}"/>
+                <a16:creationId xmlns:a16="http://schemas.microsoft.com/office/drawing/2014/main" id="{DAD21BAC-8852-4E1A-91D1-736A7FD45077}"/>
               </a:ext>
             </a:extLst>
           </p:cNvPr>
@@ -21711,7 +21711,7 @@
           <p:cNvPr id="4" name="">
             <a:extLst xmlns:a="http://schemas.openxmlformats.org/drawingml/2006/main">
               <a:ext uri="{FF2B5EF4-FFF2-40B4-BE49-F238E27FC236}">
-                <a16:creationId xmlns:a16="http://schemas.microsoft.com/office/drawing/2014/main" id="{6CBDC411-9E1E-46E2-BA27-622295CED1DD}"/>
+                <a16:creationId xmlns:a16="http://schemas.microsoft.com/office/drawing/2014/main" id="{F81E8DE2-2DE9-4532-AAF0-FF2A9349FC2C}"/>
               </a:ext>
             </a:extLst>
           </p:cNvPr>
@@ -21742,7 +21742,7 @@
           <p:cNvPr id="5" name="TRIAL-005A/B · 실제 접근 기록을 요약한 비교">
             <a:extLst xmlns:a="http://schemas.openxmlformats.org/drawingml/2006/main">
               <a:ext uri="{FF2B5EF4-FFF2-40B4-BE49-F238E27FC236}">
-                <a16:creationId xmlns:a16="http://schemas.microsoft.com/office/drawing/2014/main" id="{E2A5E9D5-4B6A-425D-A40E-152CBFE1A555}"/>
+                <a16:creationId xmlns:a16="http://schemas.microsoft.com/office/drawing/2014/main" id="{255900DB-965F-4EC9-8673-F4172294C329}"/>
               </a:ext>
             </a:extLst>
           </p:cNvPr>
@@ -21900,7 +21900,7 @@
           <p:cNvPr id="6" name="완벽한 Routing 미입증 · 토큰 절약·성능 개선 미측정 · 실행 간 변동 존재">
             <a:extLst xmlns:a="http://schemas.openxmlformats.org/drawingml/2006/main">
               <a:ext uri="{FF2B5EF4-FFF2-40B4-BE49-F238E27FC236}">
-                <a16:creationId xmlns:a16="http://schemas.microsoft.com/office/drawing/2014/main" id="{DBDA86E8-2817-4ECB-8745-FCE4400B4634}"/>
+                <a16:creationId xmlns:a16="http://schemas.microsoft.com/office/drawing/2014/main" id="{2090F088-FAED-4082-815C-527040932A86}"/>
               </a:ext>
             </a:extLst>
           </p:cNvPr>
@@ -22058,7 +22058,7 @@
           <p:cNvPr id="7" name="같은 Repository에서 질문이 달랐다">
             <a:extLst xmlns:a="http://schemas.openxmlformats.org/drawingml/2006/main">
               <a:ext uri="{FF2B5EF4-FFF2-40B4-BE49-F238E27FC236}">
-                <a16:creationId xmlns:a16="http://schemas.microsoft.com/office/drawing/2014/main" id="{DCEC31D9-1199-4AD0-9357-E5E488AB4346}"/>
+                <a16:creationId xmlns:a16="http://schemas.microsoft.com/office/drawing/2014/main" id="{AD2FA958-55FE-4CEF-BBFB-C7E4830BE721}"/>
               </a:ext>
             </a:extLst>
           </p:cNvPr>
@@ -22216,7 +22216,7 @@
           <p:cNvPr id="8" name="문서">
             <a:extLst xmlns:a="http://schemas.openxmlformats.org/drawingml/2006/main">
               <a:ext uri="{FF2B5EF4-FFF2-40B4-BE49-F238E27FC236}">
-                <a16:creationId xmlns:a16="http://schemas.microsoft.com/office/drawing/2014/main" id="{ADBD5AA6-366B-431F-9634-40C6F42746F3}"/>
+                <a16:creationId xmlns:a16="http://schemas.microsoft.com/office/drawing/2014/main" id="{8352376E-43DA-452E-B9B7-B7EC144B1C54}"/>
               </a:ext>
             </a:extLst>
           </p:cNvPr>
@@ -22374,7 +22374,7 @@
           <p:cNvPr id="9" name="A · crop 계약">
             <a:extLst xmlns:a="http://schemas.openxmlformats.org/drawingml/2006/main">
               <a:ext uri="{FF2B5EF4-FFF2-40B4-BE49-F238E27FC236}">
-                <a16:creationId xmlns:a16="http://schemas.microsoft.com/office/drawing/2014/main" id="{9037E315-710C-4696-94A7-508E56DD4711}"/>
+                <a16:creationId xmlns:a16="http://schemas.microsoft.com/office/drawing/2014/main" id="{45D4E11F-41AA-4286-8BCB-C8713DEFF9EE}"/>
               </a:ext>
             </a:extLst>
           </p:cNvPr>
@@ -22532,7 +22532,7 @@
           <p:cNvPr id="10" name="B · 실행 의존성">
             <a:extLst xmlns:a="http://schemas.openxmlformats.org/drawingml/2006/main">
               <a:ext uri="{FF2B5EF4-FFF2-40B4-BE49-F238E27FC236}">
-                <a16:creationId xmlns:a16="http://schemas.microsoft.com/office/drawing/2014/main" id="{E32E098A-9E0F-44CE-817C-C4DD207C5312}"/>
+                <a16:creationId xmlns:a16="http://schemas.microsoft.com/office/drawing/2014/main" id="{4A1B3610-47BB-4CFF-B48C-9CFF2E1484A9}"/>
               </a:ext>
             </a:extLst>
           </p:cNvPr>
@@ -22690,7 +22690,7 @@
           <p:cNvPr id="11" name="">
             <a:extLst xmlns:a="http://schemas.openxmlformats.org/drawingml/2006/main">
               <a:ext uri="{FF2B5EF4-FFF2-40B4-BE49-F238E27FC236}">
-                <a16:creationId xmlns:a16="http://schemas.microsoft.com/office/drawing/2014/main" id="{941ACC31-C374-408D-8D44-2403835563ED}"/>
+                <a16:creationId xmlns:a16="http://schemas.microsoft.com/office/drawing/2014/main" id="{4B95CC5A-5C7E-4101-8FDD-AE8AF5D9BF5D}"/>
               </a:ext>
             </a:extLst>
           </p:cNvPr>
@@ -22721,7 +22721,7 @@
           <p:cNvPr id="12" name="image-contracts.md">
             <a:extLst xmlns:a="http://schemas.openxmlformats.org/drawingml/2006/main">
               <a:ext uri="{FF2B5EF4-FFF2-40B4-BE49-F238E27FC236}">
-                <a16:creationId xmlns:a16="http://schemas.microsoft.com/office/drawing/2014/main" id="{88C28E18-93A8-4993-83F6-F383C361C4C5}"/>
+                <a16:creationId xmlns:a16="http://schemas.microsoft.com/office/drawing/2014/main" id="{60DD992B-3694-483C-8F13-6DD2566435F1}"/>
               </a:ext>
             </a:extLst>
           </p:cNvPr>
@@ -22879,7 +22879,7 @@
           <p:cNvPr id="13" name="읽음">
             <a:extLst xmlns:a="http://schemas.openxmlformats.org/drawingml/2006/main">
               <a:ext uri="{FF2B5EF4-FFF2-40B4-BE49-F238E27FC236}">
-                <a16:creationId xmlns:a16="http://schemas.microsoft.com/office/drawing/2014/main" id="{FC6292E1-88A5-447C-A6AB-FB06C1C97BD5}"/>
+                <a16:creationId xmlns:a16="http://schemas.microsoft.com/office/drawing/2014/main" id="{892848F4-FF14-44F7-AFDA-80570F351933}"/>
               </a:ext>
             </a:extLst>
           </p:cNvPr>
@@ -23037,7 +23037,7 @@
           <p:cNvPr id="14" name="읽지 않음">
             <a:extLst xmlns:a="http://schemas.openxmlformats.org/drawingml/2006/main">
               <a:ext uri="{FF2B5EF4-FFF2-40B4-BE49-F238E27FC236}">
-                <a16:creationId xmlns:a16="http://schemas.microsoft.com/office/drawing/2014/main" id="{DD6E6329-4116-4C92-AF65-62F09F15859E}"/>
+                <a16:creationId xmlns:a16="http://schemas.microsoft.com/office/drawing/2014/main" id="{DB0C7DDB-6ABA-4699-A51E-6F7C16E7E92D}"/>
               </a:ext>
             </a:extLst>
           </p:cNvPr>
@@ -23195,7 +23195,7 @@
           <p:cNvPr id="15" name="">
             <a:extLst xmlns:a="http://schemas.openxmlformats.org/drawingml/2006/main">
               <a:ext uri="{FF2B5EF4-FFF2-40B4-BE49-F238E27FC236}">
-                <a16:creationId xmlns:a16="http://schemas.microsoft.com/office/drawing/2014/main" id="{E3E8B9B9-232F-4A92-8EF4-AA446B6B2898}"/>
+                <a16:creationId xmlns:a16="http://schemas.microsoft.com/office/drawing/2014/main" id="{2CE15A9A-6993-48C2-B8D6-2EE369DD4B8D}"/>
               </a:ext>
             </a:extLst>
           </p:cNvPr>
@@ -23226,7 +23226,7 @@
           <p:cNvPr id="16" name="architecture.md">
             <a:extLst xmlns:a="http://schemas.openxmlformats.org/drawingml/2006/main">
               <a:ext uri="{FF2B5EF4-FFF2-40B4-BE49-F238E27FC236}">
-                <a16:creationId xmlns:a16="http://schemas.microsoft.com/office/drawing/2014/main" id="{30E7C1E3-2009-4D04-8765-736BB4DF75CD}"/>
+                <a16:creationId xmlns:a16="http://schemas.microsoft.com/office/drawing/2014/main" id="{AAB4FA31-84BB-452C-90BA-850FDF723435}"/>
               </a:ext>
             </a:extLst>
           </p:cNvPr>
@@ -23384,7 +23384,7 @@
           <p:cNvPr id="17" name="읽음">
             <a:extLst xmlns:a="http://schemas.openxmlformats.org/drawingml/2006/main">
               <a:ext uri="{FF2B5EF4-FFF2-40B4-BE49-F238E27FC236}">
-                <a16:creationId xmlns:a16="http://schemas.microsoft.com/office/drawing/2014/main" id="{C896CB88-894A-420B-86AA-EF1CD087FE40}"/>
+                <a16:creationId xmlns:a16="http://schemas.microsoft.com/office/drawing/2014/main" id="{E9728C91-2B3B-44FA-94AF-858C42CB5C29}"/>
               </a:ext>
             </a:extLst>
           </p:cNvPr>
@@ -23542,7 +23542,7 @@
           <p:cNvPr id="18" name="읽음">
             <a:extLst xmlns:a="http://schemas.openxmlformats.org/drawingml/2006/main">
               <a:ext uri="{FF2B5EF4-FFF2-40B4-BE49-F238E27FC236}">
-                <a16:creationId xmlns:a16="http://schemas.microsoft.com/office/drawing/2014/main" id="{70B0859E-9AE9-469C-BC09-00402003AA92}"/>
+                <a16:creationId xmlns:a16="http://schemas.microsoft.com/office/drawing/2014/main" id="{83B45993-FCB1-49C6-99BA-F7B22538930D}"/>
               </a:ext>
             </a:extLst>
           </p:cNvPr>
@@ -23700,7 +23700,7 @@
           <p:cNvPr id="19" name="">
             <a:extLst xmlns:a="http://schemas.openxmlformats.org/drawingml/2006/main">
               <a:ext uri="{FF2B5EF4-FFF2-40B4-BE49-F238E27FC236}">
-                <a16:creationId xmlns:a16="http://schemas.microsoft.com/office/drawing/2014/main" id="{2F7B3E1D-7EB5-43D6-BC79-D0DD6809C338}"/>
+                <a16:creationId xmlns:a16="http://schemas.microsoft.com/office/drawing/2014/main" id="{38F6034A-59C1-45CD-B77E-8D8FCA62DFEF}"/>
               </a:ext>
             </a:extLst>
           </p:cNvPr>
@@ -23731,7 +23731,7 @@
           <p:cNvPr id="20" name="testing.md">
             <a:extLst xmlns:a="http://schemas.openxmlformats.org/drawingml/2006/main">
               <a:ext uri="{FF2B5EF4-FFF2-40B4-BE49-F238E27FC236}">
-                <a16:creationId xmlns:a16="http://schemas.microsoft.com/office/drawing/2014/main" id="{F478CB2F-4AD5-4E46-B304-E0CE8DFA28AB}"/>
+                <a16:creationId xmlns:a16="http://schemas.microsoft.com/office/drawing/2014/main" id="{75DAD287-871B-4CB4-82DD-07EE63F75171}"/>
               </a:ext>
             </a:extLst>
           </p:cNvPr>
@@ -23889,7 +23889,7 @@
           <p:cNvPr id="21" name="최종 실행에서 읽음">
             <a:extLst xmlns:a="http://schemas.openxmlformats.org/drawingml/2006/main">
               <a:ext uri="{FF2B5EF4-FFF2-40B4-BE49-F238E27FC236}">
-                <a16:creationId xmlns:a16="http://schemas.microsoft.com/office/drawing/2014/main" id="{250CCEB0-53A8-4279-9124-362782D7788E}"/>
+                <a16:creationId xmlns:a16="http://schemas.microsoft.com/office/drawing/2014/main" id="{C461EFEF-7848-4854-B4C5-D20DB4217727}"/>
               </a:ext>
             </a:extLst>
           </p:cNvPr>
@@ -24047,7 +24047,7 @@
           <p:cNvPr id="22" name="읽지 않음">
             <a:extLst xmlns:a="http://schemas.openxmlformats.org/drawingml/2006/main">
               <a:ext uri="{FF2B5EF4-FFF2-40B4-BE49-F238E27FC236}">
-                <a16:creationId xmlns:a16="http://schemas.microsoft.com/office/drawing/2014/main" id="{8609880C-B356-486C-AE6A-C9A1A415B1C6}"/>
+                <a16:creationId xmlns:a16="http://schemas.microsoft.com/office/drawing/2014/main" id="{E09E663C-F7B0-445A-9B59-980E1091F93B}"/>
               </a:ext>
             </a:extLst>
           </p:cNvPr>
@@ -24205,7 +24205,7 @@
           <p:cNvPr id="23" name="A에는 더 넓은 읽기도 존재 · B는 설정·README·source도 확인">
             <a:extLst xmlns:a="http://schemas.openxmlformats.org/drawingml/2006/main">
               <a:ext uri="{FF2B5EF4-FFF2-40B4-BE49-F238E27FC236}">
-                <a16:creationId xmlns:a16="http://schemas.microsoft.com/office/drawing/2014/main" id="{BA4D77AA-5960-43C9-A4D7-A72963F93D78}"/>
+                <a16:creationId xmlns:a16="http://schemas.microsoft.com/office/drawing/2014/main" id="{DFFF32B3-E9E2-4BEB-970B-A46CEFF3BFD1}"/>
               </a:ext>
             </a:extLst>
           </p:cNvPr>
@@ -24363,7 +24363,7 @@
           <p:cNvPr id="24" name="Legacy module connection">
             <a:extLst xmlns:a="http://schemas.openxmlformats.org/drawingml/2006/main">
               <a:ext uri="{FF2B5EF4-FFF2-40B4-BE49-F238E27FC236}">
-                <a16:creationId xmlns:a16="http://schemas.microsoft.com/office/drawing/2014/main" id="{AD9CC529-F0A2-49F0-A52F-18A038776A08}"/>
+                <a16:creationId xmlns:a16="http://schemas.microsoft.com/office/drawing/2014/main" id="{C1AA4D3C-4EAD-4A79-B439-E66CE52BC9C3}"/>
               </a:ext>
             </a:extLst>
           </p:cNvPr>
@@ -24519,7 +24519,7 @@
     </p:spTree>
     <p:extLst>
       <p:ext uri="{BB962C8B-B14F-4D97-AF65-F5344CB8AC3E}">
-        <p14:creationId xmlns:p14="http://schemas.microsoft.com/office/powerpoint/2010/main" val="693085023"/>
+        <p14:creationId xmlns:p14="http://schemas.microsoft.com/office/powerpoint/2010/main" val="977044045"/>
       </p:ext>
     </p:extLst>
   </p:cSld>
@@ -24550,7 +24550,7 @@
           <p:cNvPr id="15" name="ACT 2 · 다음 문제로 넘어가기">
             <a:extLst xmlns:a="http://schemas.openxmlformats.org/drawingml/2006/main">
               <a:ext uri="{FF2B5EF4-FFF2-40B4-BE49-F238E27FC236}">
-                <a16:creationId xmlns:a16="http://schemas.microsoft.com/office/drawing/2014/main" id="{9877698C-F714-4FFA-9E6B-D97B07EF6878}"/>
+                <a16:creationId xmlns:a16="http://schemas.microsoft.com/office/drawing/2014/main" id="{F2F59B86-25DA-46F3-A351-54D55D037A66}"/>
               </a:ext>
             </a:extLst>
           </p:cNvPr>
@@ -24705,10 +24705,10 @@
       </p:sp>
       <p:sp>
         <p:nvSpPr>
-          <p:cNvPr id="2" name="S37">
+          <p:cNvPr id="2" name="S38">
             <a:extLst xmlns:a="http://schemas.openxmlformats.org/drawingml/2006/main">
               <a:ext uri="{FF2B5EF4-FFF2-40B4-BE49-F238E27FC236}">
-                <a16:creationId xmlns:a16="http://schemas.microsoft.com/office/drawing/2014/main" id="{05D89F62-F547-4A11-93BC-62C9D4DC86B5}"/>
+                <a16:creationId xmlns:a16="http://schemas.microsoft.com/office/drawing/2014/main" id="{1D0091E2-F529-45FE-91DD-9E40362208CA}"/>
               </a:ext>
             </a:extLst>
           </p:cNvPr>
@@ -24856,7 +24856,7 @@
                 <a:ea typeface="Malgun Gothic"/>
                 <a:cs typeface="Malgun Gothic"/>
               </a:rPr>
-              <a:t>S37</a:t>
+              <a:t>S38</a:t>
             </a:r>
           </a:p>
         </p:txBody>
@@ -24866,7 +24866,7 @@
           <p:cNvPr id="3" name="지식은 정리됐지만 절차는 반복된다">
             <a:extLst xmlns:a="http://schemas.openxmlformats.org/drawingml/2006/main">
               <a:ext uri="{FF2B5EF4-FFF2-40B4-BE49-F238E27FC236}">
-                <a16:creationId xmlns:a16="http://schemas.microsoft.com/office/drawing/2014/main" id="{661742C3-307C-4AF6-BD22-B648383F6D46}"/>
+                <a16:creationId xmlns:a16="http://schemas.microsoft.com/office/drawing/2014/main" id="{AB1EC7B7-316B-4338-BF80-88A92D253F2A}"/>
               </a:ext>
             </a:extLst>
           </p:cNvPr>
@@ -25024,7 +25024,7 @@
           <p:cNvPr id="4" name="">
             <a:extLst xmlns:a="http://schemas.openxmlformats.org/drawingml/2006/main">
               <a:ext uri="{FF2B5EF4-FFF2-40B4-BE49-F238E27FC236}">
-                <a16:creationId xmlns:a16="http://schemas.microsoft.com/office/drawing/2014/main" id="{49A1A8D2-229B-4658-A643-865DA840997E}"/>
+                <a16:creationId xmlns:a16="http://schemas.microsoft.com/office/drawing/2014/main" id="{2272D1AF-0C06-418D-9990-A4D4B2FCEFFF}"/>
               </a:ext>
             </a:extLst>
           </p:cNvPr>
@@ -25055,7 +25055,7 @@
           <p:cNvPr id="5" name="Project Context 정리 + TRIAL-006/007의 반복 절차 · 기록 요약과 교육용 해석">
             <a:extLst xmlns:a="http://schemas.openxmlformats.org/drawingml/2006/main">
               <a:ext uri="{FF2B5EF4-FFF2-40B4-BE49-F238E27FC236}">
-                <a16:creationId xmlns:a16="http://schemas.microsoft.com/office/drawing/2014/main" id="{BE39118B-F16F-4442-9893-B6A3405A2015}"/>
+                <a16:creationId xmlns:a16="http://schemas.microsoft.com/office/drawing/2014/main" id="{DDBC6394-132B-4EF0-9626-E1686EC64729}"/>
               </a:ext>
             </a:extLst>
           </p:cNvPr>
@@ -25213,7 +25213,7 @@
           <p:cNvPr id="6" name="절차가 반복된 원인을 Prompt만으로 분리하지 않음">
             <a:extLst xmlns:a="http://schemas.openxmlformats.org/drawingml/2006/main">
               <a:ext uri="{FF2B5EF4-FFF2-40B4-BE49-F238E27FC236}">
-                <a16:creationId xmlns:a16="http://schemas.microsoft.com/office/drawing/2014/main" id="{5CDE4EF2-4EDF-45ED-A988-7443EC4DCEB0}"/>
+                <a16:creationId xmlns:a16="http://schemas.microsoft.com/office/drawing/2014/main" id="{393946CD-5EE2-4C34-898C-8D83C48A9330}"/>
               </a:ext>
             </a:extLst>
           </p:cNvPr>
@@ -25371,7 +25371,7 @@
           <p:cNvPr id="7" name="정리한 것">
             <a:extLst xmlns:a="http://schemas.openxmlformats.org/drawingml/2006/main">
               <a:ext uri="{FF2B5EF4-FFF2-40B4-BE49-F238E27FC236}">
-                <a16:creationId xmlns:a16="http://schemas.microsoft.com/office/drawing/2014/main" id="{6059CEBD-5957-4AF4-9266-D7CEEC22BDCC}"/>
+                <a16:creationId xmlns:a16="http://schemas.microsoft.com/office/drawing/2014/main" id="{EF6CA940-CEE3-43A4-9243-71208E2ACE89}"/>
               </a:ext>
             </a:extLst>
           </p:cNvPr>
@@ -25529,7 +25529,7 @@
           <p:cNvPr id="8" name="아직 반복되는 것">
             <a:extLst xmlns:a="http://schemas.openxmlformats.org/drawingml/2006/main">
               <a:ext uri="{FF2B5EF4-FFF2-40B4-BE49-F238E27FC236}">
-                <a16:creationId xmlns:a16="http://schemas.microsoft.com/office/drawing/2014/main" id="{5489A7F0-F9A3-4153-8763-03DFE9B00733}"/>
+                <a16:creationId xmlns:a16="http://schemas.microsoft.com/office/drawing/2014/main" id="{EBCBB723-29BC-4BA2-ACF3-CCAF77E3C2EF}"/>
               </a:ext>
             </a:extLst>
           </p:cNvPr>
@@ -25687,7 +25687,7 @@
           <p:cNvPr id="9" name="">
             <a:extLst xmlns:a="http://schemas.openxmlformats.org/drawingml/2006/main">
               <a:ext uri="{FF2B5EF4-FFF2-40B4-BE49-F238E27FC236}">
-                <a16:creationId xmlns:a16="http://schemas.microsoft.com/office/drawing/2014/main" id="{C8F3C442-E901-44A9-B728-75DC20A0B197}"/>
+                <a16:creationId xmlns:a16="http://schemas.microsoft.com/office/drawing/2014/main" id="{346F96E6-26B2-4773-98B1-831B29A3615E}"/>
               </a:ext>
             </a:extLst>
           </p:cNvPr>
@@ -25718,7 +25718,7 @@
           <p:cNvPr id="10" name="">
             <a:extLst xmlns:a="http://schemas.openxmlformats.org/drawingml/2006/main">
               <a:ext uri="{FF2B5EF4-FFF2-40B4-BE49-F238E27FC236}">
-                <a16:creationId xmlns:a16="http://schemas.microsoft.com/office/drawing/2014/main" id="{618670E1-6958-4E43-BB4D-16A237175D70}"/>
+                <a16:creationId xmlns:a16="http://schemas.microsoft.com/office/drawing/2014/main" id="{A3A0A84A-26F5-46DB-B12E-F414D7469476}"/>
               </a:ext>
             </a:extLst>
           </p:cNvPr>
@@ -25749,7 +25749,7 @@
           <p:cNvPr id="11" name="현재 목표는 Prompt에&#10;공통 사실은 Project Context에&#10;상세 정보는 Routing으로">
             <a:extLst xmlns:a="http://schemas.openxmlformats.org/drawingml/2006/main">
               <a:ext uri="{FF2B5EF4-FFF2-40B4-BE49-F238E27FC236}">
-                <a16:creationId xmlns:a16="http://schemas.microsoft.com/office/drawing/2014/main" id="{CB988634-4056-4AD6-9BDB-0E8CDE26C0FF}"/>
+                <a16:creationId xmlns:a16="http://schemas.microsoft.com/office/drawing/2014/main" id="{FB457EF7-BBA0-4F93-B996-8346A712C989}"/>
               </a:ext>
             </a:extLst>
           </p:cNvPr>
@@ -25953,7 +25953,7 @@
           <p:cNvPr id="12" name="먼저 측정하고&#10;조사한 뒤 변경하고&#10;같은 조건으로 확인해줘">
             <a:extLst xmlns:a="http://schemas.openxmlformats.org/drawingml/2006/main">
               <a:ext uri="{FF2B5EF4-FFF2-40B4-BE49-F238E27FC236}">
-                <a16:creationId xmlns:a16="http://schemas.microsoft.com/office/drawing/2014/main" id="{4B703351-0DC5-4C6C-A544-9D62282D3B8C}"/>
+                <a16:creationId xmlns:a16="http://schemas.microsoft.com/office/drawing/2014/main" id="{006EDA5A-516F-40EA-A686-FC290C249F90}"/>
               </a:ext>
             </a:extLst>
           </p:cNvPr>
@@ -26157,7 +26157,7 @@
           <p:cNvPr id="13" name="같은 작업 절차도 다시 써야 할까?">
             <a:extLst xmlns:a="http://schemas.openxmlformats.org/drawingml/2006/main">
               <a:ext uri="{FF2B5EF4-FFF2-40B4-BE49-F238E27FC236}">
-                <a16:creationId xmlns:a16="http://schemas.microsoft.com/office/drawing/2014/main" id="{F4F7AD2B-E4F7-49B5-9EA9-838EBA56B209}"/>
+                <a16:creationId xmlns:a16="http://schemas.microsoft.com/office/drawing/2014/main" id="{91FD492B-DF20-46AE-BDC3-F23BAF883C75}"/>
               </a:ext>
             </a:extLst>
           </p:cNvPr>
@@ -26315,7 +26315,7 @@
           <p:cNvPr id="14" name="Legacy module connection">
             <a:extLst xmlns:a="http://schemas.openxmlformats.org/drawingml/2006/main">
               <a:ext uri="{FF2B5EF4-FFF2-40B4-BE49-F238E27FC236}">
-                <a16:creationId xmlns:a16="http://schemas.microsoft.com/office/drawing/2014/main" id="{35F2E078-EE81-407C-9051-3D0AB02FA6FB}"/>
+                <a16:creationId xmlns:a16="http://schemas.microsoft.com/office/drawing/2014/main" id="{B7292C99-5DC7-48AB-99CC-64A1391B27DB}"/>
               </a:ext>
             </a:extLst>
           </p:cNvPr>
@@ -26471,7 +26471,7 @@
     </p:spTree>
     <p:extLst>
       <p:ext uri="{BB962C8B-B14F-4D97-AF65-F5344CB8AC3E}">
-        <p14:creationId xmlns:p14="http://schemas.microsoft.com/office/powerpoint/2010/main" val="390318342"/>
+        <p14:creationId xmlns:p14="http://schemas.microsoft.com/office/powerpoint/2010/main" val="70205586"/>
       </p:ext>
     </p:extLst>
   </p:cSld>
@@ -26502,7 +26502,7 @@
           <p:cNvPr id="27" name="ACT 2  ·  Project Context">
             <a:extLst xmlns:a="http://schemas.openxmlformats.org/drawingml/2006/main">
               <a:ext uri="{FF2B5EF4-FFF2-40B4-BE49-F238E27FC236}">
-                <a16:creationId xmlns:a16="http://schemas.microsoft.com/office/drawing/2014/main" id="{A6E814FF-8AE4-4A18-AB10-884339F64CBB}"/>
+                <a16:creationId xmlns:a16="http://schemas.microsoft.com/office/drawing/2014/main" id="{5EA525EC-3102-4308-B12A-FF7DCA771532}"/>
               </a:ext>
             </a:extLst>
           </p:cNvPr>
@@ -26657,10 +26657,10 @@
       </p:sp>
       <p:sp>
         <p:nvSpPr>
-          <p:cNvPr id="2" name="S24">
+          <p:cNvPr id="2" name="S25">
             <a:extLst xmlns:a="http://schemas.openxmlformats.org/drawingml/2006/main">
               <a:ext uri="{FF2B5EF4-FFF2-40B4-BE49-F238E27FC236}">
-                <a16:creationId xmlns:a16="http://schemas.microsoft.com/office/drawing/2014/main" id="{3F3986D5-B558-4221-A46B-1CE47D0E91ED}"/>
+                <a16:creationId xmlns:a16="http://schemas.microsoft.com/office/drawing/2014/main" id="{8A020322-D3A4-4D7E-A1A7-94B1B6C5FF90}"/>
               </a:ext>
             </a:extLst>
           </p:cNvPr>
@@ -26808,7 +26808,7 @@
                 <a:ea typeface="Malgun Gothic"/>
                 <a:cs typeface="Malgun Gothic"/>
               </a:rPr>
-              <a:t>S24</a:t>
+              <a:t>S25</a:t>
             </a:r>
           </a:p>
         </p:txBody>
@@ -26818,7 +26818,7 @@
           <p:cNvPr id="3" name="작은 Project Context의 첫 기록">
             <a:extLst xmlns:a="http://schemas.openxmlformats.org/drawingml/2006/main">
               <a:ext uri="{FF2B5EF4-FFF2-40B4-BE49-F238E27FC236}">
-                <a16:creationId xmlns:a16="http://schemas.microsoft.com/office/drawing/2014/main" id="{32A536E4-7A06-4B06-98CC-6ED2421EF73A}"/>
+                <a16:creationId xmlns:a16="http://schemas.microsoft.com/office/drawing/2014/main" id="{2AF56E88-9176-416D-BB44-E60AD4DA5933}"/>
               </a:ext>
             </a:extLst>
           </p:cNvPr>
@@ -26976,7 +26976,7 @@
           <p:cNvPr id="4" name="">
             <a:extLst xmlns:a="http://schemas.openxmlformats.org/drawingml/2006/main">
               <a:ext uri="{FF2B5EF4-FFF2-40B4-BE49-F238E27FC236}">
-                <a16:creationId xmlns:a16="http://schemas.microsoft.com/office/drawing/2014/main" id="{93E7E7C3-3257-4824-B2DC-03A6C4CFE2DD}"/>
+                <a16:creationId xmlns:a16="http://schemas.microsoft.com/office/drawing/2014/main" id="{C8D6C66F-53A2-4207-B823-A18ADC0D02CA}"/>
               </a:ext>
             </a:extLst>
           </p:cNvPr>
@@ -27007,7 +27007,7 @@
           <p:cNvPr id="5" name="OBSERVED PRODUCT  |  STATE-01 · AGENTS.md 실제 원문 발췌">
             <a:extLst xmlns:a="http://schemas.openxmlformats.org/drawingml/2006/main">
               <a:ext uri="{FF2B5EF4-FFF2-40B4-BE49-F238E27FC236}">
-                <a16:creationId xmlns:a16="http://schemas.microsoft.com/office/drawing/2014/main" id="{468802D9-9EF2-432A-B00E-DB739995C675}"/>
+                <a16:creationId xmlns:a16="http://schemas.microsoft.com/office/drawing/2014/main" id="{AB30341F-4C1A-423A-874E-32B4E498442F}"/>
               </a:ext>
             </a:extLst>
           </p:cNvPr>
@@ -27165,7 +27165,7 @@
           <p:cNvPr id="6" name="파일의 내용과 기록 위치를 보여주는 장 · Agent의 활용 관찰은 다음 장에서 확인">
             <a:extLst xmlns:a="http://schemas.openxmlformats.org/drawingml/2006/main">
               <a:ext uri="{FF2B5EF4-FFF2-40B4-BE49-F238E27FC236}">
-                <a16:creationId xmlns:a16="http://schemas.microsoft.com/office/drawing/2014/main" id="{A6E975BF-D389-495B-B721-7C871FD399DC}"/>
+                <a16:creationId xmlns:a16="http://schemas.microsoft.com/office/drawing/2014/main" id="{C2035953-989D-465A-A1D4-B18FC3F24B2D}"/>
               </a:ext>
             </a:extLst>
           </p:cNvPr>
@@ -27323,7 +27323,7 @@
           <p:cNvPr id="7" name="반복해서 설명하던 내용을 저장소에 남겼다">
             <a:extLst xmlns:a="http://schemas.openxmlformats.org/drawingml/2006/main">
               <a:ext uri="{FF2B5EF4-FFF2-40B4-BE49-F238E27FC236}">
-                <a16:creationId xmlns:a16="http://schemas.microsoft.com/office/drawing/2014/main" id="{35D7E0E2-11E9-41E4-84AE-7032C05DDF4E}"/>
+                <a16:creationId xmlns:a16="http://schemas.microsoft.com/office/drawing/2014/main" id="{52D8D9EE-7919-4948-9DE4-D5254778CBB1}"/>
               </a:ext>
             </a:extLst>
           </p:cNvPr>
@@ -27481,7 +27481,7 @@
           <p:cNvPr id="8" name="AGENTS.md">
             <a:extLst xmlns:a="http://schemas.openxmlformats.org/drawingml/2006/main">
               <a:ext uri="{FF2B5EF4-FFF2-40B4-BE49-F238E27FC236}">
-                <a16:creationId xmlns:a16="http://schemas.microsoft.com/office/drawing/2014/main" id="{0170F4A9-1A09-4C6E-A938-32126712C2D4}"/>
+                <a16:creationId xmlns:a16="http://schemas.microsoft.com/office/drawing/2014/main" id="{E76EDB8E-F916-492A-9DA3-BA11A0883D59}"/>
               </a:ext>
             </a:extLst>
           </p:cNvPr>
@@ -27639,7 +27639,7 @@
           <p:cNvPr id="9" name="STATE-00-FIXED → STATE-01">
             <a:extLst xmlns:a="http://schemas.openxmlformats.org/drawingml/2006/main">
               <a:ext uri="{FF2B5EF4-FFF2-40B4-BE49-F238E27FC236}">
-                <a16:creationId xmlns:a16="http://schemas.microsoft.com/office/drawing/2014/main" id="{896ABFF8-0B63-4CE5-9B6F-A4A9BB0428AF}"/>
+                <a16:creationId xmlns:a16="http://schemas.microsoft.com/office/drawing/2014/main" id="{570D8D2A-35D9-467A-A070-61E2582FECBB}"/>
               </a:ext>
             </a:extLst>
           </p:cNvPr>
@@ -27797,7 +27797,7 @@
           <p:cNvPr id="10" name="">
             <a:extLst xmlns:a="http://schemas.openxmlformats.org/drawingml/2006/main">
               <a:ext uri="{FF2B5EF4-FFF2-40B4-BE49-F238E27FC236}">
-                <a16:creationId xmlns:a16="http://schemas.microsoft.com/office/drawing/2014/main" id="{B16F2892-65BF-4997-8D09-507B4B8C5C9C}"/>
+                <a16:creationId xmlns:a16="http://schemas.microsoft.com/office/drawing/2014/main" id="{D44B208C-BA99-4DA9-A154-523D566D0CBD}"/>
               </a:ext>
             </a:extLst>
           </p:cNvPr>
@@ -27828,7 +27828,7 @@
           <p:cNvPr id="11" name="프로젝트 목적">
             <a:extLst xmlns:a="http://schemas.openxmlformats.org/drawingml/2006/main">
               <a:ext uri="{FF2B5EF4-FFF2-40B4-BE49-F238E27FC236}">
-                <a16:creationId xmlns:a16="http://schemas.microsoft.com/office/drawing/2014/main" id="{C39975C2-2CDB-4090-BACA-485D4F65F04D}"/>
+                <a16:creationId xmlns:a16="http://schemas.microsoft.com/office/drawing/2014/main" id="{99FE8E53-F31F-4261-BD05-5CF3FB12AE92}"/>
               </a:ext>
             </a:extLst>
           </p:cNvPr>
@@ -27986,7 +27986,7 @@
           <p:cNvPr id="12" name="Local grayscale image-processing CLI using synthetic ASCII P">
             <a:extLst xmlns:a="http://schemas.openxmlformats.org/drawingml/2006/main">
               <a:ext uri="{FF2B5EF4-FFF2-40B4-BE49-F238E27FC236}">
-                <a16:creationId xmlns:a16="http://schemas.microsoft.com/office/drawing/2014/main" id="{FF4A87D4-5B2B-41EB-9A91-A3CC2C6CC993}"/>
+                <a16:creationId xmlns:a16="http://schemas.microsoft.com/office/drawing/2014/main" id="{654B969D-3CE6-49D8-A9AB-030343568C11}"/>
               </a:ext>
             </a:extLst>
           </p:cNvPr>
@@ -28166,7 +28166,7 @@
           <p:cNvPr id="13" name="로컬 합성 이미지로 동작하는 흑백 처리 CLI">
             <a:extLst xmlns:a="http://schemas.openxmlformats.org/drawingml/2006/main">
               <a:ext uri="{FF2B5EF4-FFF2-40B4-BE49-F238E27FC236}">
-                <a16:creationId xmlns:a16="http://schemas.microsoft.com/office/drawing/2014/main" id="{35BDFD64-B2F0-406E-8F4A-BD00F1B5DAA3}"/>
+                <a16:creationId xmlns:a16="http://schemas.microsoft.com/office/drawing/2014/main" id="{C549EF8A-0ABC-4549-B806-CEA9422181D5}"/>
               </a:ext>
             </a:extLst>
           </p:cNvPr>
@@ -28324,7 +28324,7 @@
           <p:cNvPr id="14" name="">
             <a:extLst xmlns:a="http://schemas.openxmlformats.org/drawingml/2006/main">
               <a:ext uri="{FF2B5EF4-FFF2-40B4-BE49-F238E27FC236}">
-                <a16:creationId xmlns:a16="http://schemas.microsoft.com/office/drawing/2014/main" id="{8680C336-AF5F-4C6C-A5BD-10FA6F1D52C1}"/>
+                <a16:creationId xmlns:a16="http://schemas.microsoft.com/office/drawing/2014/main" id="{8CFF0CF9-8264-45F4-AA14-39FDC36325F4}"/>
               </a:ext>
             </a:extLst>
           </p:cNvPr>
@@ -28355,7 +28355,7 @@
           <p:cNvPr id="15" name="실행 방법">
             <a:extLst xmlns:a="http://schemas.openxmlformats.org/drawingml/2006/main">
               <a:ext uri="{FF2B5EF4-FFF2-40B4-BE49-F238E27FC236}">
-                <a16:creationId xmlns:a16="http://schemas.microsoft.com/office/drawing/2014/main" id="{401BF9FF-F80B-495B-B5D9-BB1CFC9B7E10}"/>
+                <a16:creationId xmlns:a16="http://schemas.microsoft.com/office/drawing/2014/main" id="{268491DD-CC6F-4491-B16C-D999782934F1}"/>
               </a:ext>
             </a:extLst>
           </p:cNvPr>
@@ -28513,7 +28513,7 @@
           <p:cNvPr id="16" name="Use the prepared build and CLI commands documented in `READM">
             <a:extLst xmlns:a="http://schemas.openxmlformats.org/drawingml/2006/main">
               <a:ext uri="{FF2B5EF4-FFF2-40B4-BE49-F238E27FC236}">
-                <a16:creationId xmlns:a16="http://schemas.microsoft.com/office/drawing/2014/main" id="{EA3A4656-CB0C-4A25-A06C-CA21CEC21EE9}"/>
+                <a16:creationId xmlns:a16="http://schemas.microsoft.com/office/drawing/2014/main" id="{96F0DDF4-AD7A-4B2D-8CC0-FBF1A6B3290D}"/>
               </a:ext>
             </a:extLst>
           </p:cNvPr>
@@ -28693,7 +28693,7 @@
           <p:cNvPr id="17" name="실행 방법은 README에서 확인">
             <a:extLst xmlns:a="http://schemas.openxmlformats.org/drawingml/2006/main">
               <a:ext uri="{FF2B5EF4-FFF2-40B4-BE49-F238E27FC236}">
-                <a16:creationId xmlns:a16="http://schemas.microsoft.com/office/drawing/2014/main" id="{31E8D67D-5CA0-40E9-8BC3-0B75075121E2}"/>
+                <a16:creationId xmlns:a16="http://schemas.microsoft.com/office/drawing/2014/main" id="{2DA3F826-9F61-45AF-8E0F-FDE9B55D024F}"/>
               </a:ext>
             </a:extLst>
           </p:cNvPr>
@@ -28851,7 +28851,7 @@
           <p:cNvPr id="18" name="">
             <a:extLst xmlns:a="http://schemas.openxmlformats.org/drawingml/2006/main">
               <a:ext uri="{FF2B5EF4-FFF2-40B4-BE49-F238E27FC236}">
-                <a16:creationId xmlns:a16="http://schemas.microsoft.com/office/drawing/2014/main" id="{A27517CC-D9E5-4110-97E4-CD5CD2BCC299}"/>
+                <a16:creationId xmlns:a16="http://schemas.microsoft.com/office/drawing/2014/main" id="{8EF27CE2-BC28-45DB-91AE-A1D6A2D43FFB}"/>
               </a:ext>
             </a:extLst>
           </p:cNvPr>
@@ -28882,7 +28882,7 @@
           <p:cNvPr id="19" name="테스트 명령">
             <a:extLst xmlns:a="http://schemas.openxmlformats.org/drawingml/2006/main">
               <a:ext uri="{FF2B5EF4-FFF2-40B4-BE49-F238E27FC236}">
-                <a16:creationId xmlns:a16="http://schemas.microsoft.com/office/drawing/2014/main" id="{9E84E8CD-0B33-404B-A430-8C831EF4B472}"/>
+                <a16:creationId xmlns:a16="http://schemas.microsoft.com/office/drawing/2014/main" id="{B351ADAA-A0CA-4E03-BC27-AEEEBFA5C675}"/>
               </a:ext>
             </a:extLst>
           </p:cNvPr>
@@ -29040,7 +29040,7 @@
           <p:cNvPr id="20" name="PYTHONPATH=src python3 -m unittest discover -s tests -v">
             <a:extLst xmlns:a="http://schemas.openxmlformats.org/drawingml/2006/main">
               <a:ext uri="{FF2B5EF4-FFF2-40B4-BE49-F238E27FC236}">
-                <a16:creationId xmlns:a16="http://schemas.microsoft.com/office/drawing/2014/main" id="{7F4B348C-E7DC-4CE2-8AB6-966B56BCBB3F}"/>
+                <a16:creationId xmlns:a16="http://schemas.microsoft.com/office/drawing/2014/main" id="{1FBB4BA4-3D15-46C8-B025-D0C7B0210B99}"/>
               </a:ext>
             </a:extLst>
           </p:cNvPr>
@@ -29198,7 +29198,7 @@
           <p:cNvPr id="21" name="반복해서 쓸 테스트 명령">
             <a:extLst xmlns:a="http://schemas.openxmlformats.org/drawingml/2006/main">
               <a:ext uri="{FF2B5EF4-FFF2-40B4-BE49-F238E27FC236}">
-                <a16:creationId xmlns:a16="http://schemas.microsoft.com/office/drawing/2014/main" id="{B41FC6D7-7650-4E8C-B39D-8FAB8340994C}"/>
+                <a16:creationId xmlns:a16="http://schemas.microsoft.com/office/drawing/2014/main" id="{0C3327A6-9CC1-4AFC-9246-54C5C3A696CB}"/>
               </a:ext>
             </a:extLst>
           </p:cNvPr>
@@ -29356,7 +29356,7 @@
           <p:cNvPr id="22" name="">
             <a:extLst xmlns:a="http://schemas.openxmlformats.org/drawingml/2006/main">
               <a:ext uri="{FF2B5EF4-FFF2-40B4-BE49-F238E27FC236}">
-                <a16:creationId xmlns:a16="http://schemas.microsoft.com/office/drawing/2014/main" id="{03B57B3B-3F1D-4ACE-886D-84ED55BEEC8A}"/>
+                <a16:creationId xmlns:a16="http://schemas.microsoft.com/office/drawing/2014/main" id="{676D1D36-0E7C-4288-B764-5D6BC26BA802}"/>
               </a:ext>
             </a:extLst>
           </p:cNvPr>
@@ -29387,7 +29387,7 @@
           <p:cNvPr id="23" name="기본 제약">
             <a:extLst xmlns:a="http://schemas.openxmlformats.org/drawingml/2006/main">
               <a:ext uri="{FF2B5EF4-FFF2-40B4-BE49-F238E27FC236}">
-                <a16:creationId xmlns:a16="http://schemas.microsoft.com/office/drawing/2014/main" id="{791335AE-9DDB-4422-94E2-04612A951E2E}"/>
+                <a16:creationId xmlns:a16="http://schemas.microsoft.com/office/drawing/2014/main" id="{8DBF654B-0266-48A3-827E-FEF961A85E55}"/>
               </a:ext>
             </a:extLst>
           </p:cNvPr>
@@ -29545,7 +29545,7 @@
           <p:cNvPr id="24" name="Keep changes scoped and verify relevant behavior.">
             <a:extLst xmlns:a="http://schemas.openxmlformats.org/drawingml/2006/main">
               <a:ext uri="{FF2B5EF4-FFF2-40B4-BE49-F238E27FC236}">
-                <a16:creationId xmlns:a16="http://schemas.microsoft.com/office/drawing/2014/main" id="{49BB673B-7047-43EB-8BCA-A08FBB110378}"/>
+                <a16:creationId xmlns:a16="http://schemas.microsoft.com/office/drawing/2014/main" id="{6D05210F-EC13-4142-BF5A-BBEABABD10AC}"/>
               </a:ext>
             </a:extLst>
           </p:cNvPr>
@@ -29725,7 +29725,7 @@
           <p:cNvPr id="25" name="범위를 지키고 관련 동작을 검증">
             <a:extLst xmlns:a="http://schemas.openxmlformats.org/drawingml/2006/main">
               <a:ext uri="{FF2B5EF4-FFF2-40B4-BE49-F238E27FC236}">
-                <a16:creationId xmlns:a16="http://schemas.microsoft.com/office/drawing/2014/main" id="{9808622C-F54A-4F3A-9A09-CD7D3EAB2A12}"/>
+                <a16:creationId xmlns:a16="http://schemas.microsoft.com/office/drawing/2014/main" id="{6F40A8AD-75E7-455D-80DC-65D0568DB70B}"/>
               </a:ext>
             </a:extLst>
           </p:cNvPr>
@@ -29883,7 +29883,7 @@
           <p:cNvPr id="26" name="Legacy module connection">
             <a:extLst xmlns:a="http://schemas.openxmlformats.org/drawingml/2006/main">
               <a:ext uri="{FF2B5EF4-FFF2-40B4-BE49-F238E27FC236}">
-                <a16:creationId xmlns:a16="http://schemas.microsoft.com/office/drawing/2014/main" id="{C1896A96-0A13-40C2-8486-EB85DC461849}"/>
+                <a16:creationId xmlns:a16="http://schemas.microsoft.com/office/drawing/2014/main" id="{7D1D38B8-D1E0-4986-990C-BC141E7F7609}"/>
               </a:ext>
             </a:extLst>
           </p:cNvPr>
@@ -30039,7 +30039,7 @@
     </p:spTree>
     <p:extLst>
       <p:ext uri="{BB962C8B-B14F-4D97-AF65-F5344CB8AC3E}">
-        <p14:creationId xmlns:p14="http://schemas.microsoft.com/office/powerpoint/2010/main" val="1425282623"/>
+        <p14:creationId xmlns:p14="http://schemas.microsoft.com/office/powerpoint/2010/main" val="1728219836"/>
       </p:ext>
     </p:extLst>
   </p:cSld>
@@ -30070,7 +30070,7 @@
           <p:cNvPr id="24" name="ACT 2 · 지침을 활용한 관찰">
             <a:extLst xmlns:a="http://schemas.openxmlformats.org/drawingml/2006/main">
               <a:ext uri="{FF2B5EF4-FFF2-40B4-BE49-F238E27FC236}">
-                <a16:creationId xmlns:a16="http://schemas.microsoft.com/office/drawing/2014/main" id="{04669A8E-ED4F-4061-8A32-A199D3160775}"/>
+                <a16:creationId xmlns:a16="http://schemas.microsoft.com/office/drawing/2014/main" id="{CB99CDCC-E303-484B-BF87-CF0995DEFA90}"/>
               </a:ext>
             </a:extLst>
           </p:cNvPr>
@@ -30225,10 +30225,10 @@
       </p:sp>
       <p:sp>
         <p:nvSpPr>
-          <p:cNvPr id="2" name="S25">
+          <p:cNvPr id="2" name="S26">
             <a:extLst xmlns:a="http://schemas.openxmlformats.org/drawingml/2006/main">
               <a:ext uri="{FF2B5EF4-FFF2-40B4-BE49-F238E27FC236}">
-                <a16:creationId xmlns:a16="http://schemas.microsoft.com/office/drawing/2014/main" id="{2C0B68E0-2CF6-433F-AA37-C0CF5E48D491}"/>
+                <a16:creationId xmlns:a16="http://schemas.microsoft.com/office/drawing/2014/main" id="{A8FDA1EC-3BCA-417F-A956-23D9A049301F}"/>
               </a:ext>
             </a:extLst>
           </p:cNvPr>
@@ -30376,7 +30376,7 @@
                 <a:ea typeface="Malgun Gothic"/>
                 <a:cs typeface="Malgun Gothic"/>
               </a:rPr>
-              <a:t>S25</a:t>
+              <a:t>S26</a:t>
             </a:r>
           </a:p>
         </p:txBody>
@@ -30386,7 +30386,7 @@
           <p:cNvPr id="3" name="한 번의 사용에서 확인된 것">
             <a:extLst xmlns:a="http://schemas.openxmlformats.org/drawingml/2006/main">
               <a:ext uri="{FF2B5EF4-FFF2-40B4-BE49-F238E27FC236}">
-                <a16:creationId xmlns:a16="http://schemas.microsoft.com/office/drawing/2014/main" id="{CA7B8947-346F-436F-B432-DEAE6A3F6C89}"/>
+                <a16:creationId xmlns:a16="http://schemas.microsoft.com/office/drawing/2014/main" id="{009264A7-602D-4D0A-AA2B-854C4A627E88}"/>
               </a:ext>
             </a:extLst>
           </p:cNvPr>
@@ -30544,7 +30544,7 @@
           <p:cNvPr id="4" name="">
             <a:extLst xmlns:a="http://schemas.openxmlformats.org/drawingml/2006/main">
               <a:ext uri="{FF2B5EF4-FFF2-40B4-BE49-F238E27FC236}">
-                <a16:creationId xmlns:a16="http://schemas.microsoft.com/office/drawing/2014/main" id="{7880C4F2-FD13-417D-83E3-4F072CDD430F}"/>
+                <a16:creationId xmlns:a16="http://schemas.microsoft.com/office/drawing/2014/main" id="{F9EE68DA-B049-450E-B579-541DCCA0B007}"/>
               </a:ext>
             </a:extLst>
           </p:cNvPr>
@@ -30575,7 +30575,7 @@
           <p:cNvPr id="5" name="TRIAL-003 · Codex CLI 기록을 재구성 · 전체 테스트 11/11 PASS">
             <a:extLst xmlns:a="http://schemas.openxmlformats.org/drawingml/2006/main">
               <a:ext uri="{FF2B5EF4-FFF2-40B4-BE49-F238E27FC236}">
-                <a16:creationId xmlns:a16="http://schemas.microsoft.com/office/drawing/2014/main" id="{EE40660C-B03F-43EE-AFE0-DBB6108B12BF}"/>
+                <a16:creationId xmlns:a16="http://schemas.microsoft.com/office/drawing/2014/main" id="{8A73DE97-3F8B-4CAD-98F7-CB0FF1C820D2}"/>
               </a:ext>
             </a:extLst>
           </p:cNvPr>
@@ -30733,7 +30733,7 @@
           <p:cNvPr id="6" name="Personal/global Skills도 실행됨 · AGENTS.md만의 독립적인 효과로 해석하지 않음">
             <a:extLst xmlns:a="http://schemas.openxmlformats.org/drawingml/2006/main">
               <a:ext uri="{FF2B5EF4-FFF2-40B4-BE49-F238E27FC236}">
-                <a16:creationId xmlns:a16="http://schemas.microsoft.com/office/drawing/2014/main" id="{54303DDD-DA27-44DD-A26C-02BA981466D4}"/>
+                <a16:creationId xmlns:a16="http://schemas.microsoft.com/office/drawing/2014/main" id="{CC7D92F6-E4D2-44A1-9F82-5C2539862A7F}"/>
               </a:ext>
             </a:extLst>
           </p:cNvPr>
@@ -30891,7 +30891,7 @@
           <p:cNvPr id="7" name="요청">
             <a:extLst xmlns:a="http://schemas.openxmlformats.org/drawingml/2006/main">
               <a:ext uri="{FF2B5EF4-FFF2-40B4-BE49-F238E27FC236}">
-                <a16:creationId xmlns:a16="http://schemas.microsoft.com/office/drawing/2014/main" id="{70E4E330-AFEC-4B6B-89EA-4C93F48F11D7}"/>
+                <a16:creationId xmlns:a16="http://schemas.microsoft.com/office/drawing/2014/main" id="{A478A99F-DB61-49B2-A990-5BDD7E93C522}"/>
               </a:ext>
             </a:extLst>
           </p:cNvPr>
@@ -31049,7 +31049,7 @@
           <p:cNvPr id="8" name="">
             <a:extLst xmlns:a="http://schemas.openxmlformats.org/drawingml/2006/main">
               <a:ext uri="{FF2B5EF4-FFF2-40B4-BE49-F238E27FC236}">
-                <a16:creationId xmlns:a16="http://schemas.microsoft.com/office/drawing/2014/main" id="{19D8D52F-61FF-4C55-97A7-D4BF51FB5BEF}"/>
+                <a16:creationId xmlns:a16="http://schemas.microsoft.com/office/drawing/2014/main" id="{726EB8DC-F2D0-4BB9-9CA2-61521F363B9C}"/>
               </a:ext>
             </a:extLst>
           </p:cNvPr>
@@ -31080,7 +31080,7 @@
           <p:cNvPr id="9" name="읽은 파일">
             <a:extLst xmlns:a="http://schemas.openxmlformats.org/drawingml/2006/main">
               <a:ext uri="{FF2B5EF4-FFF2-40B4-BE49-F238E27FC236}">
-                <a16:creationId xmlns:a16="http://schemas.microsoft.com/office/drawing/2014/main" id="{15D6D93E-90F9-4209-A073-8241AEDDCDF6}"/>
+                <a16:creationId xmlns:a16="http://schemas.microsoft.com/office/drawing/2014/main" id="{676F8199-ABF1-42EB-89C3-CE7CFB5736D4}"/>
               </a:ext>
             </a:extLst>
           </p:cNvPr>
@@ -31238,7 +31238,7 @@
           <p:cNvPr id="10" name="">
             <a:extLst xmlns:a="http://schemas.openxmlformats.org/drawingml/2006/main">
               <a:ext uri="{FF2B5EF4-FFF2-40B4-BE49-F238E27FC236}">
-                <a16:creationId xmlns:a16="http://schemas.microsoft.com/office/drawing/2014/main" id="{F56D38FB-37A3-4BE6-8621-C03C89B1D5C3}"/>
+                <a16:creationId xmlns:a16="http://schemas.microsoft.com/office/drawing/2014/main" id="{1C7FC57F-0BA5-4EB7-B2EB-9BCE237ABA01}"/>
               </a:ext>
             </a:extLst>
           </p:cNvPr>
@@ -31269,7 +31269,7 @@
           <p:cNvPr id="11" name="실행 기록">
             <a:extLst xmlns:a="http://schemas.openxmlformats.org/drawingml/2006/main">
               <a:ext uri="{FF2B5EF4-FFF2-40B4-BE49-F238E27FC236}">
-                <a16:creationId xmlns:a16="http://schemas.microsoft.com/office/drawing/2014/main" id="{F21E31E4-6F0D-4B45-A8E9-F66EC5BC03D1}"/>
+                <a16:creationId xmlns:a16="http://schemas.microsoft.com/office/drawing/2014/main" id="{1708ABA0-44BE-43C0-9AAF-FF3C6817F6F6}"/>
               </a:ext>
             </a:extLst>
           </p:cNvPr>
@@ -31427,7 +31427,7 @@
           <p:cNvPr id="12" name="">
             <a:extLst xmlns:a="http://schemas.openxmlformats.org/drawingml/2006/main">
               <a:ext uri="{FF2B5EF4-FFF2-40B4-BE49-F238E27FC236}">
-                <a16:creationId xmlns:a16="http://schemas.microsoft.com/office/drawing/2014/main" id="{B35ADA7C-A47C-4835-93B6-8EC2541C874D}"/>
+                <a16:creationId xmlns:a16="http://schemas.microsoft.com/office/drawing/2014/main" id="{CA09ACAF-6B78-49A6-85D0-A26BFEDD1321}"/>
               </a:ext>
             </a:extLst>
           </p:cNvPr>
@@ -31458,7 +31458,7 @@
           <p:cNvPr id="13" name="README만 수정&#10;테스트 명령은 없음">
             <a:extLst xmlns:a="http://schemas.openxmlformats.org/drawingml/2006/main">
               <a:ext uri="{FF2B5EF4-FFF2-40B4-BE49-F238E27FC236}">
-                <a16:creationId xmlns:a16="http://schemas.microsoft.com/office/drawing/2014/main" id="{03930D5C-9C38-4238-8937-99641F85AE45}"/>
+                <a16:creationId xmlns:a16="http://schemas.microsoft.com/office/drawing/2014/main" id="{12B29FE3-B576-4305-8692-3682D8DF6753}"/>
               </a:ext>
             </a:extLst>
           </p:cNvPr>
@@ -31639,7 +31639,7 @@
           <p:cNvPr id="14" name="AGENTS.md">
             <a:extLst xmlns:a="http://schemas.openxmlformats.org/drawingml/2006/main">
               <a:ext uri="{FF2B5EF4-FFF2-40B4-BE49-F238E27FC236}">
-                <a16:creationId xmlns:a16="http://schemas.microsoft.com/office/drawing/2014/main" id="{F8893F21-67AB-42FA-B33B-B0BE13B8E222}"/>
+                <a16:creationId xmlns:a16="http://schemas.microsoft.com/office/drawing/2014/main" id="{4A19CFDC-BDC7-4879-BBE4-FAC8B350DD3C}"/>
               </a:ext>
             </a:extLst>
           </p:cNvPr>
@@ -31797,7 +31797,7 @@
           <p:cNvPr id="15" name="기록된 테스트&#10;명령을 사용">
             <a:extLst xmlns:a="http://schemas.openxmlformats.org/drawingml/2006/main">
               <a:ext uri="{FF2B5EF4-FFF2-40B4-BE49-F238E27FC236}">
-                <a16:creationId xmlns:a16="http://schemas.microsoft.com/office/drawing/2014/main" id="{04B86BAC-3FB2-45F9-B372-7A6966B3021F}"/>
+                <a16:creationId xmlns:a16="http://schemas.microsoft.com/office/drawing/2014/main" id="{E19084F2-0CD5-4D89-88ED-5CBE7ECCFDDA}"/>
               </a:ext>
             </a:extLst>
           </p:cNvPr>
@@ -31978,7 +31978,7 @@
           <p:cNvPr id="16" name="전체 테스트">
             <a:extLst xmlns:a="http://schemas.openxmlformats.org/drawingml/2006/main">
               <a:ext uri="{FF2B5EF4-FFF2-40B4-BE49-F238E27FC236}">
-                <a16:creationId xmlns:a16="http://schemas.microsoft.com/office/drawing/2014/main" id="{9D687161-3097-4AC8-B8C1-7DBB26D3AE42}"/>
+                <a16:creationId xmlns:a16="http://schemas.microsoft.com/office/drawing/2014/main" id="{389E83DA-161D-4DE2-8DF9-D230FEED0822}"/>
               </a:ext>
             </a:extLst>
           </p:cNvPr>
@@ -32136,7 +32136,7 @@
           <p:cNvPr id="17" name="11 / 11">
             <a:extLst xmlns:a="http://schemas.openxmlformats.org/drawingml/2006/main">
               <a:ext uri="{FF2B5EF4-FFF2-40B4-BE49-F238E27FC236}">
-                <a16:creationId xmlns:a16="http://schemas.microsoft.com/office/drawing/2014/main" id="{C3DA19CE-7B6B-42C5-A9AE-3214B724884A}"/>
+                <a16:creationId xmlns:a16="http://schemas.microsoft.com/office/drawing/2014/main" id="{F7ECB9CE-103B-4281-8B38-082FABE7D363}"/>
               </a:ext>
             </a:extLst>
           </p:cNvPr>
@@ -32294,7 +32294,7 @@
           <p:cNvPr id="18" name="PASS">
             <a:extLst xmlns:a="http://schemas.openxmlformats.org/drawingml/2006/main">
               <a:ext uri="{FF2B5EF4-FFF2-40B4-BE49-F238E27FC236}">
-                <a16:creationId xmlns:a16="http://schemas.microsoft.com/office/drawing/2014/main" id="{E992FDB9-9298-410D-B7B8-32A2FA66A4F7}"/>
+                <a16:creationId xmlns:a16="http://schemas.microsoft.com/office/drawing/2014/main" id="{92DE243C-4484-43D5-AB88-AAAC14EF2122}"/>
               </a:ext>
             </a:extLst>
           </p:cNvPr>
@@ -32452,7 +32452,7 @@
           <p:cNvPr id="19" name="">
             <a:extLst xmlns:a="http://schemas.openxmlformats.org/drawingml/2006/main">
               <a:ext uri="{FF2B5EF4-FFF2-40B4-BE49-F238E27FC236}">
-                <a16:creationId xmlns:a16="http://schemas.microsoft.com/office/drawing/2014/main" id="{4156A19D-4B60-4BF3-A7D5-BE9E66B6693C}"/>
+                <a16:creationId xmlns:a16="http://schemas.microsoft.com/office/drawing/2014/main" id="{81843F9B-6EFE-4291-994B-16B4B6E31FD0}"/>
               </a:ext>
             </a:extLst>
           </p:cNvPr>
@@ -32482,7 +32482,7 @@
           <p:cNvPr id="20" name="">
             <a:extLst xmlns:a="http://schemas.openxmlformats.org/drawingml/2006/main">
               <a:ext uri="{FF2B5EF4-FFF2-40B4-BE49-F238E27FC236}">
-                <a16:creationId xmlns:a16="http://schemas.microsoft.com/office/drawing/2014/main" id="{F2B2A422-E35B-485D-B235-47178C7755E3}"/>
+                <a16:creationId xmlns:a16="http://schemas.microsoft.com/office/drawing/2014/main" id="{516111BE-A0DA-4F50-9645-0D49011C3A04}"/>
               </a:ext>
             </a:extLst>
           </p:cNvPr>
@@ -32512,7 +32512,7 @@
           <p:cNvPr id="21" name="">
             <a:extLst xmlns:a="http://schemas.openxmlformats.org/drawingml/2006/main">
               <a:ext uri="{FF2B5EF4-FFF2-40B4-BE49-F238E27FC236}">
-                <a16:creationId xmlns:a16="http://schemas.microsoft.com/office/drawing/2014/main" id="{0EA0D342-F91D-4381-94C4-5F6A003925CC}"/>
+                <a16:creationId xmlns:a16="http://schemas.microsoft.com/office/drawing/2014/main" id="{62747271-9CAF-42BC-91ED-0C9BB883A7DF}"/>
               </a:ext>
             </a:extLst>
           </p:cNvPr>
@@ -32543,7 +32543,7 @@
           <p:cNvPr id="22" name="README-only 범위는 작업 요청에도 명시돼 있었다">
             <a:extLst xmlns:a="http://schemas.openxmlformats.org/drawingml/2006/main">
               <a:ext uri="{FF2B5EF4-FFF2-40B4-BE49-F238E27FC236}">
-                <a16:creationId xmlns:a16="http://schemas.microsoft.com/office/drawing/2014/main" id="{E8650F61-F50F-467D-9BAA-65A7DFBB58A4}"/>
+                <a16:creationId xmlns:a16="http://schemas.microsoft.com/office/drawing/2014/main" id="{57DD5FD7-A2BC-4EB2-95DD-7A65B7EB6BCA}"/>
               </a:ext>
             </a:extLst>
           </p:cNvPr>
@@ -32701,7 +32701,7 @@
           <p:cNvPr id="23" name="Legacy module connection">
             <a:extLst xmlns:a="http://schemas.openxmlformats.org/drawingml/2006/main">
               <a:ext uri="{FF2B5EF4-FFF2-40B4-BE49-F238E27FC236}">
-                <a16:creationId xmlns:a16="http://schemas.microsoft.com/office/drawing/2014/main" id="{D5A0ABF1-3E26-4134-9A62-040EAA86B718}"/>
+                <a16:creationId xmlns:a16="http://schemas.microsoft.com/office/drawing/2014/main" id="{467BFE52-4DC5-42A9-9B96-E36761878EE4}"/>
               </a:ext>
             </a:extLst>
           </p:cNvPr>
@@ -32857,7 +32857,7 @@
     </p:spTree>
     <p:extLst>
       <p:ext uri="{BB962C8B-B14F-4D97-AF65-F5344CB8AC3E}">
-        <p14:creationId xmlns:p14="http://schemas.microsoft.com/office/powerpoint/2010/main" val="823345676"/>
+        <p14:creationId xmlns:p14="http://schemas.microsoft.com/office/powerpoint/2010/main" val="823408595"/>
       </p:ext>
     </p:extLst>
   </p:cSld>
@@ -32888,7 +32888,7 @@
           <p:cNvPr id="21" name="ACT 2 · 정보의 범위와 수명">
             <a:extLst xmlns:a="http://schemas.openxmlformats.org/drawingml/2006/main">
               <a:ext uri="{FF2B5EF4-FFF2-40B4-BE49-F238E27FC236}">
-                <a16:creationId xmlns:a16="http://schemas.microsoft.com/office/drawing/2014/main" id="{C03E63A4-45A5-4AF1-AC34-562792B21486}"/>
+                <a16:creationId xmlns:a16="http://schemas.microsoft.com/office/drawing/2014/main" id="{DDF9F7F7-00C1-40A8-BB4E-33F6448EE06E}"/>
               </a:ext>
             </a:extLst>
           </p:cNvPr>
@@ -33043,10 +33043,10 @@
       </p:sp>
       <p:sp>
         <p:nvSpPr>
-          <p:cNvPr id="2" name="S26">
+          <p:cNvPr id="2" name="S27">
             <a:extLst xmlns:a="http://schemas.openxmlformats.org/drawingml/2006/main">
               <a:ext uri="{FF2B5EF4-FFF2-40B4-BE49-F238E27FC236}">
-                <a16:creationId xmlns:a16="http://schemas.microsoft.com/office/drawing/2014/main" id="{0A2F4E99-483C-4414-8F45-DA225C31D946}"/>
+                <a16:creationId xmlns:a16="http://schemas.microsoft.com/office/drawing/2014/main" id="{19882B97-0979-46D7-B684-19A4E67CA75F}"/>
               </a:ext>
             </a:extLst>
           </p:cNvPr>
@@ -33194,7 +33194,7 @@
                 <a:ea typeface="Malgun Gothic"/>
                 <a:cs typeface="Malgun Gothic"/>
               </a:rPr>
-              <a:t>S26</a:t>
+              <a:t>S27</a:t>
             </a:r>
           </a:p>
         </p:txBody>
@@ -33204,7 +33204,7 @@
           <p:cNvPr id="3" name="Task Prompt와 Project Context">
             <a:extLst xmlns:a="http://schemas.openxmlformats.org/drawingml/2006/main">
               <a:ext uri="{FF2B5EF4-FFF2-40B4-BE49-F238E27FC236}">
-                <a16:creationId xmlns:a16="http://schemas.microsoft.com/office/drawing/2014/main" id="{A9A8B1C5-5F07-4C01-9683-99AF36E6FFBA}"/>
+                <a16:creationId xmlns:a16="http://schemas.microsoft.com/office/drawing/2014/main" id="{727B0D5C-D876-4E28-BFBF-E389D57099DA}"/>
               </a:ext>
             </a:extLst>
           </p:cNvPr>
@@ -33362,7 +33362,7 @@
           <p:cNvPr id="4" name="">
             <a:extLst xmlns:a="http://schemas.openxmlformats.org/drawingml/2006/main">
               <a:ext uri="{FF2B5EF4-FFF2-40B4-BE49-F238E27FC236}">
-                <a16:creationId xmlns:a16="http://schemas.microsoft.com/office/drawing/2014/main" id="{6E1CD843-89BA-476F-979B-B358330E50FE}"/>
+                <a16:creationId xmlns:a16="http://schemas.microsoft.com/office/drawing/2014/main" id="{A910BFE9-30DA-4029-8872-B904D070F88B}"/>
               </a:ext>
             </a:extLst>
           </p:cNvPr>
@@ -33393,7 +33393,7 @@
           <p:cNvPr id="5" name="교육용 구분 · 현재 목표와 지속되는 프로젝트 사실">
             <a:extLst xmlns:a="http://schemas.openxmlformats.org/drawingml/2006/main">
               <a:ext uri="{FF2B5EF4-FFF2-40B4-BE49-F238E27FC236}">
-                <a16:creationId xmlns:a16="http://schemas.microsoft.com/office/drawing/2014/main" id="{6CE25407-0A59-48E5-8A27-CC69953ADC45}"/>
+                <a16:creationId xmlns:a16="http://schemas.microsoft.com/office/drawing/2014/main" id="{5C2A53C1-3793-4D1F-BFA2-7286AA4B3779}"/>
               </a:ext>
             </a:extLst>
           </p:cNvPr>
@@ -33551,7 +33551,7 @@
           <p:cNvPr id="6" name="C++에서도 프로젝트 공통 제약과 이번 알고리즘 변경 조건은 범위가 다를 수 있다">
             <a:extLst xmlns:a="http://schemas.openxmlformats.org/drawingml/2006/main">
               <a:ext uri="{FF2B5EF4-FFF2-40B4-BE49-F238E27FC236}">
-                <a16:creationId xmlns:a16="http://schemas.microsoft.com/office/drawing/2014/main" id="{F0DF239A-9CD1-4D2A-A331-939450FF0CD0}"/>
+                <a16:creationId xmlns:a16="http://schemas.microsoft.com/office/drawing/2014/main" id="{776C1879-6E91-40CB-AE66-0DB0C0EAFFC9}"/>
               </a:ext>
             </a:extLst>
           </p:cNvPr>
@@ -33709,7 +33709,7 @@
           <p:cNvPr id="7" name="방금 본 기록을 범위와 수명으로 읽어보면">
             <a:extLst xmlns:a="http://schemas.openxmlformats.org/drawingml/2006/main">
               <a:ext uri="{FF2B5EF4-FFF2-40B4-BE49-F238E27FC236}">
-                <a16:creationId xmlns:a16="http://schemas.microsoft.com/office/drawing/2014/main" id="{FD9F0B7F-EF79-4239-8ABC-300ECB22B5DC}"/>
+                <a16:creationId xmlns:a16="http://schemas.microsoft.com/office/drawing/2014/main" id="{7CA50D52-8953-414C-996B-1121289FA705}"/>
               </a:ext>
             </a:extLst>
           </p:cNvPr>
@@ -33867,7 +33867,7 @@
           <p:cNvPr id="8" name="Task Prompt">
             <a:extLst xmlns:a="http://schemas.openxmlformats.org/drawingml/2006/main">
               <a:ext uri="{FF2B5EF4-FFF2-40B4-BE49-F238E27FC236}">
-                <a16:creationId xmlns:a16="http://schemas.microsoft.com/office/drawing/2014/main" id="{2D7EDE7D-F481-4666-92CE-1455986A123B}"/>
+                <a16:creationId xmlns:a16="http://schemas.microsoft.com/office/drawing/2014/main" id="{9AF4AA50-EB37-4967-B446-79F938262BA4}"/>
               </a:ext>
             </a:extLst>
           </p:cNvPr>
@@ -34025,7 +34025,7 @@
           <p:cNvPr id="9" name="Project Context">
             <a:extLst xmlns:a="http://schemas.openxmlformats.org/drawingml/2006/main">
               <a:ext uri="{FF2B5EF4-FFF2-40B4-BE49-F238E27FC236}">
-                <a16:creationId xmlns:a16="http://schemas.microsoft.com/office/drawing/2014/main" id="{ED8262C1-91CF-41ED-AC62-551E0D101EAE}"/>
+                <a16:creationId xmlns:a16="http://schemas.microsoft.com/office/drawing/2014/main" id="{45FBA96C-4C6B-4378-8D96-49B08F2EC1B0}"/>
               </a:ext>
             </a:extLst>
           </p:cNvPr>
@@ -34183,7 +34183,7 @@
           <p:cNvPr id="10" name="">
             <a:extLst xmlns:a="http://schemas.openxmlformats.org/drawingml/2006/main">
               <a:ext uri="{FF2B5EF4-FFF2-40B4-BE49-F238E27FC236}">
-                <a16:creationId xmlns:a16="http://schemas.microsoft.com/office/drawing/2014/main" id="{9353B260-476B-4BFF-88B9-E34211384B6C}"/>
+                <a16:creationId xmlns:a16="http://schemas.microsoft.com/office/drawing/2014/main" id="{20F9ED89-5982-4218-B16B-DB25BB050BE4}"/>
               </a:ext>
             </a:extLst>
           </p:cNvPr>
@@ -34214,7 +34214,7 @@
           <p:cNvPr id="11" name="">
             <a:extLst xmlns:a="http://schemas.openxmlformats.org/drawingml/2006/main">
               <a:ext uri="{FF2B5EF4-FFF2-40B4-BE49-F238E27FC236}">
-                <a16:creationId xmlns:a16="http://schemas.microsoft.com/office/drawing/2014/main" id="{14BF3932-7849-43AF-8E2F-FCAB1FF2FBE6}"/>
+                <a16:creationId xmlns:a16="http://schemas.microsoft.com/office/drawing/2014/main" id="{23FD16CD-1DDC-4A0F-956F-6C0D7054B1A0}"/>
               </a:ext>
             </a:extLst>
           </p:cNvPr>
@@ -34245,7 +34245,7 @@
           <p:cNvPr id="12" name="지금 원하는 결과">
             <a:extLst xmlns:a="http://schemas.openxmlformats.org/drawingml/2006/main">
               <a:ext uri="{FF2B5EF4-FFF2-40B4-BE49-F238E27FC236}">
-                <a16:creationId xmlns:a16="http://schemas.microsoft.com/office/drawing/2014/main" id="{45D38631-4784-402F-A9AE-E77514A5BDFE}"/>
+                <a16:creationId xmlns:a16="http://schemas.microsoft.com/office/drawing/2014/main" id="{606F025D-05A1-469E-8C15-3897978DA5D9}"/>
               </a:ext>
             </a:extLst>
           </p:cNvPr>
@@ -34403,7 +34403,7 @@
           <p:cNvPr id="13" name="계속 참이어야 할 사실">
             <a:extLst xmlns:a="http://schemas.openxmlformats.org/drawingml/2006/main">
               <a:ext uri="{FF2B5EF4-FFF2-40B4-BE49-F238E27FC236}">
-                <a16:creationId xmlns:a16="http://schemas.microsoft.com/office/drawing/2014/main" id="{9C144FE6-794C-4413-98E8-4F5E2E4A97F1}"/>
+                <a16:creationId xmlns:a16="http://schemas.microsoft.com/office/drawing/2014/main" id="{0CDB6F0B-F99A-477D-9F1B-87F43B5C55A6}"/>
               </a:ext>
             </a:extLst>
           </p:cNvPr>
@@ -34561,7 +34561,7 @@
           <p:cNvPr id="14" name="crop 경계 버그 수정&#10;이번에는 README만 변경">
             <a:extLst xmlns:a="http://schemas.openxmlformats.org/drawingml/2006/main">
               <a:ext uri="{FF2B5EF4-FFF2-40B4-BE49-F238E27FC236}">
-                <a16:creationId xmlns:a16="http://schemas.microsoft.com/office/drawing/2014/main" id="{D0E6C4D7-19DA-4CFD-94C8-FB2643E6FAB8}"/>
+                <a16:creationId xmlns:a16="http://schemas.microsoft.com/office/drawing/2014/main" id="{D71A95B9-A257-44C1-BAFA-55101ADD0D21}"/>
               </a:ext>
             </a:extLst>
           </p:cNvPr>
@@ -34742,7 +34742,7 @@
           <p:cNvPr id="15" name="프로젝트의 테스트 명령&#10;의존성 추가에는 작업상 근거 필요">
             <a:extLst xmlns:a="http://schemas.openxmlformats.org/drawingml/2006/main">
               <a:ext uri="{FF2B5EF4-FFF2-40B4-BE49-F238E27FC236}">
-                <a16:creationId xmlns:a16="http://schemas.microsoft.com/office/drawing/2014/main" id="{D0E6FA20-2CC2-4CE1-8B3B-084AE624EC0F}"/>
+                <a16:creationId xmlns:a16="http://schemas.microsoft.com/office/drawing/2014/main" id="{2B3E1366-1C2E-49E9-B9B2-0A3E3DDA94C9}"/>
               </a:ext>
             </a:extLst>
           </p:cNvPr>
@@ -34923,7 +34923,7 @@
           <p:cNvPr id="16" name="">
             <a:extLst xmlns:a="http://schemas.openxmlformats.org/drawingml/2006/main">
               <a:ext uri="{FF2B5EF4-FFF2-40B4-BE49-F238E27FC236}">
-                <a16:creationId xmlns:a16="http://schemas.microsoft.com/office/drawing/2014/main" id="{68ED051A-C2A7-4935-8E5C-6D1015FBB25C}"/>
+                <a16:creationId xmlns:a16="http://schemas.microsoft.com/office/drawing/2014/main" id="{E32E3AEF-BF2E-4F2B-90AC-135E420E51C9}"/>
               </a:ext>
             </a:extLst>
           </p:cNvPr>
@@ -34956,7 +34956,7 @@
           <p:cNvPr id="17" name="">
             <a:extLst xmlns:a="http://schemas.openxmlformats.org/drawingml/2006/main">
               <a:ext uri="{FF2B5EF4-FFF2-40B4-BE49-F238E27FC236}">
-                <a16:creationId xmlns:a16="http://schemas.microsoft.com/office/drawing/2014/main" id="{829A0601-2CFD-475F-923E-184F19B2206F}"/>
+                <a16:creationId xmlns:a16="http://schemas.microsoft.com/office/drawing/2014/main" id="{9753085C-ECC0-4F65-9506-F5679E04C4FC}"/>
               </a:ext>
             </a:extLst>
           </p:cNvPr>
@@ -34987,7 +34987,7 @@
           <p:cNvPr id="18" name="다음 작업에서는 목표가 달라짐">
             <a:extLst xmlns:a="http://schemas.openxmlformats.org/drawingml/2006/main">
               <a:ext uri="{FF2B5EF4-FFF2-40B4-BE49-F238E27FC236}">
-                <a16:creationId xmlns:a16="http://schemas.microsoft.com/office/drawing/2014/main" id="{AFE20849-472E-4F62-BC71-046DBF41FB91}"/>
+                <a16:creationId xmlns:a16="http://schemas.microsoft.com/office/drawing/2014/main" id="{6827BB06-FBD1-404F-B25C-9F846236C680}"/>
               </a:ext>
             </a:extLst>
           </p:cNvPr>
@@ -35145,7 +35145,7 @@
           <p:cNvPr id="19" name="여러 작업에서 다시 참고">
             <a:extLst xmlns:a="http://schemas.openxmlformats.org/drawingml/2006/main">
               <a:ext uri="{FF2B5EF4-FFF2-40B4-BE49-F238E27FC236}">
-                <a16:creationId xmlns:a16="http://schemas.microsoft.com/office/drawing/2014/main" id="{7B3EB87E-D891-4A70-9BBA-D855FD4BED89}"/>
+                <a16:creationId xmlns:a16="http://schemas.microsoft.com/office/drawing/2014/main" id="{B035E686-B62F-4F3C-B393-9C315FEC5E84}"/>
               </a:ext>
             </a:extLst>
           </p:cNvPr>
@@ -35303,7 +35303,7 @@
           <p:cNvPr id="20" name="Legacy module connection">
             <a:extLst xmlns:a="http://schemas.openxmlformats.org/drawingml/2006/main">
               <a:ext uri="{FF2B5EF4-FFF2-40B4-BE49-F238E27FC236}">
-                <a16:creationId xmlns:a16="http://schemas.microsoft.com/office/drawing/2014/main" id="{2E1A095E-371F-4B3D-AED6-620D5BED407A}"/>
+                <a16:creationId xmlns:a16="http://schemas.microsoft.com/office/drawing/2014/main" id="{621893FA-6A02-46FF-969B-6BEC2B97EEB7}"/>
               </a:ext>
             </a:extLst>
           </p:cNvPr>
@@ -35459,7 +35459,7 @@
     </p:spTree>
     <p:extLst>
       <p:ext uri="{BB962C8B-B14F-4D97-AF65-F5344CB8AC3E}">
-        <p14:creationId xmlns:p14="http://schemas.microsoft.com/office/powerpoint/2010/main" val="509389047"/>
+        <p14:creationId xmlns:p14="http://schemas.microsoft.com/office/powerpoint/2010/main" val="1480938011"/>
       </p:ext>
     </p:extLst>
   </p:cSld>
@@ -35490,7 +35490,7 @@
           <p:cNvPr id="27" name="ACT 2 · Context가 쌓이는 과정">
             <a:extLst xmlns:a="http://schemas.openxmlformats.org/drawingml/2006/main">
               <a:ext uri="{FF2B5EF4-FFF2-40B4-BE49-F238E27FC236}">
-                <a16:creationId xmlns:a16="http://schemas.microsoft.com/office/drawing/2014/main" id="{93074CD6-539C-438B-8524-3BE66A9623C7}"/>
+                <a16:creationId xmlns:a16="http://schemas.microsoft.com/office/drawing/2014/main" id="{751E7FFA-F00F-41B4-8923-F8DBBE9F1EDE}"/>
               </a:ext>
             </a:extLst>
           </p:cNvPr>
@@ -35645,10 +35645,10 @@
       </p:sp>
       <p:sp>
         <p:nvSpPr>
-          <p:cNvPr id="2" name="S27">
+          <p:cNvPr id="2" name="S28">
             <a:extLst xmlns:a="http://schemas.openxmlformats.org/drawingml/2006/main">
               <a:ext uri="{FF2B5EF4-FFF2-40B4-BE49-F238E27FC236}">
-                <a16:creationId xmlns:a16="http://schemas.microsoft.com/office/drawing/2014/main" id="{3E12F743-2CD9-45E1-8331-56A19A2C3843}"/>
+                <a16:creationId xmlns:a16="http://schemas.microsoft.com/office/drawing/2014/main" id="{267A8194-166F-44B6-9441-F3CB79FE94B0}"/>
               </a:ext>
             </a:extLst>
           </p:cNvPr>
@@ -35796,7 +35796,7 @@
                 <a:ea typeface="Malgun Gothic"/>
                 <a:cs typeface="Malgun Gothic"/>
               </a:rPr>
-              <a:t>S27</a:t>
+              <a:t>S28</a:t>
             </a:r>
           </a:p>
         </p:txBody>
@@ -35806,7 +35806,7 @@
           <p:cNvPr id="3" name="정확한 정보도 계속 늘어난다">
             <a:extLst xmlns:a="http://schemas.openxmlformats.org/drawingml/2006/main">
               <a:ext uri="{FF2B5EF4-FFF2-40B4-BE49-F238E27FC236}">
-                <a16:creationId xmlns:a16="http://schemas.microsoft.com/office/drawing/2014/main" id="{B15156A6-413B-4179-8B85-08105BA8ED71}"/>
+                <a16:creationId xmlns:a16="http://schemas.microsoft.com/office/drawing/2014/main" id="{2884C122-122D-4EF5-A896-E7A8C06097C9}"/>
               </a:ext>
             </a:extLst>
           </p:cNvPr>
@@ -35964,7 +35964,7 @@
           <p:cNvPr id="4" name="">
             <a:extLst xmlns:a="http://schemas.openxmlformats.org/drawingml/2006/main">
               <a:ext uri="{FF2B5EF4-FFF2-40B4-BE49-F238E27FC236}">
-                <a16:creationId xmlns:a16="http://schemas.microsoft.com/office/drawing/2014/main" id="{9D60CCAD-2C76-4DD2-A273-3EADA34F7764}"/>
+                <a16:creationId xmlns:a16="http://schemas.microsoft.com/office/drawing/2014/main" id="{4F5B0CC4-133F-4BE4-A31E-C3570805110D}"/>
               </a:ext>
             </a:extLst>
           </p:cNvPr>
@@ -35995,7 +35995,7 @@
           <p:cNvPr id="5" name="STATE-01 → STATE-02 · 실제 AGENTS.md 상태 비교">
             <a:extLst xmlns:a="http://schemas.openxmlformats.org/drawingml/2006/main">
               <a:ext uri="{FF2B5EF4-FFF2-40B4-BE49-F238E27FC236}">
-                <a16:creationId xmlns:a16="http://schemas.microsoft.com/office/drawing/2014/main" id="{5CDC589E-08AF-4892-A37D-8CD76E787B99}"/>
+                <a16:creationId xmlns:a16="http://schemas.microsoft.com/office/drawing/2014/main" id="{40FB8DC8-327A-4A7B-AE7E-60B14FD757A2}"/>
               </a:ext>
             </a:extLst>
           </p:cNvPr>
@@ -36153,7 +36153,7 @@
           <p:cNvPr id="6" name="문서 크기는 상태 식별 정보 · Context 증가가 실패를 일으켰다는 근거는 아님">
             <a:extLst xmlns:a="http://schemas.openxmlformats.org/drawingml/2006/main">
               <a:ext uri="{FF2B5EF4-FFF2-40B4-BE49-F238E27FC236}">
-                <a16:creationId xmlns:a16="http://schemas.microsoft.com/office/drawing/2014/main" id="{C97F4943-CBE8-4E0A-9D10-C97927DBFBD1}"/>
+                <a16:creationId xmlns:a16="http://schemas.microsoft.com/office/drawing/2014/main" id="{A7DFAD1E-8361-4461-91F6-A8E755E6DE16}"/>
               </a:ext>
             </a:extLst>
           </p:cNvPr>
@@ -36311,7 +36311,7 @@
           <p:cNvPr id="7" name="STATE-01">
             <a:extLst xmlns:a="http://schemas.openxmlformats.org/drawingml/2006/main">
               <a:ext uri="{FF2B5EF4-FFF2-40B4-BE49-F238E27FC236}">
-                <a16:creationId xmlns:a16="http://schemas.microsoft.com/office/drawing/2014/main" id="{DD597653-DA7C-4153-A685-6E60071DF5C3}"/>
+                <a16:creationId xmlns:a16="http://schemas.microsoft.com/office/drawing/2014/main" id="{04C525CC-BC9D-4306-9044-1DF71EEF6C7A}"/>
               </a:ext>
             </a:extLst>
           </p:cNvPr>
@@ -36469,7 +36469,7 @@
           <p:cNvPr id="8" name="목적 · 실행 · 테스트&#10;기본 제약">
             <a:extLst xmlns:a="http://schemas.openxmlformats.org/drawingml/2006/main">
               <a:ext uri="{FF2B5EF4-FFF2-40B4-BE49-F238E27FC236}">
-                <a16:creationId xmlns:a16="http://schemas.microsoft.com/office/drawing/2014/main" id="{254119A8-4AE3-44FE-AB4A-E71B8B7B45F2}"/>
+                <a16:creationId xmlns:a16="http://schemas.microsoft.com/office/drawing/2014/main" id="{5A6E8518-A49F-4457-AACA-76A79DC7E542}"/>
               </a:ext>
             </a:extLst>
           </p:cNvPr>
@@ -36650,7 +36650,7 @@
           <p:cNvPr id="9" name="15줄 · 567 bytes">
             <a:extLst xmlns:a="http://schemas.openxmlformats.org/drawingml/2006/main">
               <a:ext uri="{FF2B5EF4-FFF2-40B4-BE49-F238E27FC236}">
-                <a16:creationId xmlns:a16="http://schemas.microsoft.com/office/drawing/2014/main" id="{5D892670-7E35-4FCD-B420-D45A876CD9C9}"/>
+                <a16:creationId xmlns:a16="http://schemas.microsoft.com/office/drawing/2014/main" id="{E739AD71-6302-4D72-8FFD-8BBAEAD314FB}"/>
               </a:ext>
             </a:extLst>
           </p:cNvPr>
@@ -36808,7 +36808,7 @@
           <p:cNvPr id="10" name="">
             <a:extLst xmlns:a="http://schemas.openxmlformats.org/drawingml/2006/main">
               <a:ext uri="{FF2B5EF4-FFF2-40B4-BE49-F238E27FC236}">
-                <a16:creationId xmlns:a16="http://schemas.microsoft.com/office/drawing/2014/main" id="{5D5433DF-C44D-4331-A0C8-77D4515BF237}"/>
+                <a16:creationId xmlns:a16="http://schemas.microsoft.com/office/drawing/2014/main" id="{154C7B35-EC9D-487A-9978-CB82612D9D50}"/>
               </a:ext>
             </a:extLst>
           </p:cNvPr>
@@ -36838,7 +36838,7 @@
           <p:cNvPr id="11" name="STATE-02에 추가된 실제 정보">
             <a:extLst xmlns:a="http://schemas.openxmlformats.org/drawingml/2006/main">
               <a:ext uri="{FF2B5EF4-FFF2-40B4-BE49-F238E27FC236}">
-                <a16:creationId xmlns:a16="http://schemas.microsoft.com/office/drawing/2014/main" id="{21D97A0B-13D6-4351-BDBE-D177E403BE0D}"/>
+                <a16:creationId xmlns:a16="http://schemas.microsoft.com/office/drawing/2014/main" id="{56E77DB3-C74B-4432-992A-752B4C7799DB}"/>
               </a:ext>
             </a:extLst>
           </p:cNvPr>
@@ -36996,7 +36996,7 @@
           <p:cNvPr id="12" name="">
             <a:extLst xmlns:a="http://schemas.openxmlformats.org/drawingml/2006/main">
               <a:ext uri="{FF2B5EF4-FFF2-40B4-BE49-F238E27FC236}">
-                <a16:creationId xmlns:a16="http://schemas.microsoft.com/office/drawing/2014/main" id="{37FD8FE8-345F-43D7-862D-03D68B8B0FB1}"/>
+                <a16:creationId xmlns:a16="http://schemas.microsoft.com/office/drawing/2014/main" id="{9E467596-A136-4460-8441-C62C5EF5BF27}"/>
               </a:ext>
             </a:extLst>
           </p:cNvPr>
@@ -37027,7 +37027,7 @@
           <p:cNvPr id="13" name="처리 순서">
             <a:extLst xmlns:a="http://schemas.openxmlformats.org/drawingml/2006/main">
               <a:ext uri="{FF2B5EF4-FFF2-40B4-BE49-F238E27FC236}">
-                <a16:creationId xmlns:a16="http://schemas.microsoft.com/office/drawing/2014/main" id="{179CC1F2-F4DB-406D-A372-18F1348186E4}"/>
+                <a16:creationId xmlns:a16="http://schemas.microsoft.com/office/drawing/2014/main" id="{19BDFD19-B872-4069-9455-79A2383BB779}"/>
               </a:ext>
             </a:extLst>
           </p:cNvPr>
@@ -37185,7 +37185,7 @@
           <p:cNvPr id="14" name="load → normalize → … → write">
             <a:extLst xmlns:a="http://schemas.openxmlformats.org/drawingml/2006/main">
               <a:ext uri="{FF2B5EF4-FFF2-40B4-BE49-F238E27FC236}">
-                <a16:creationId xmlns:a16="http://schemas.microsoft.com/office/drawing/2014/main" id="{C73B7985-B905-4C04-95CE-668EEEE89C01}"/>
+                <a16:creationId xmlns:a16="http://schemas.microsoft.com/office/drawing/2014/main" id="{FB99D8FC-F51F-481F-866E-9E2308C0080A}"/>
               </a:ext>
             </a:extLst>
           </p:cNvPr>
@@ -37343,7 +37343,7 @@
           <p:cNvPr id="15" name="">
             <a:extLst xmlns:a="http://schemas.openxmlformats.org/drawingml/2006/main">
               <a:ext uri="{FF2B5EF4-FFF2-40B4-BE49-F238E27FC236}">
-                <a16:creationId xmlns:a16="http://schemas.microsoft.com/office/drawing/2014/main" id="{99841428-3A87-44FB-AFF4-23A24BBA168D}"/>
+                <a16:creationId xmlns:a16="http://schemas.microsoft.com/office/drawing/2014/main" id="{8A12D990-09B6-4947-93E1-2C8CECF279A6}"/>
               </a:ext>
             </a:extLst>
           </p:cNvPr>
@@ -37374,7 +37374,7 @@
           <p:cNvPr id="16" name="이미지 계약">
             <a:extLst xmlns:a="http://schemas.openxmlformats.org/drawingml/2006/main">
               <a:ext uri="{FF2B5EF4-FFF2-40B4-BE49-F238E27FC236}">
-                <a16:creationId xmlns:a16="http://schemas.microsoft.com/office/drawing/2014/main" id="{76AE66C8-D56E-4B43-8910-1F86775BCCDA}"/>
+                <a16:creationId xmlns:a16="http://schemas.microsoft.com/office/drawing/2014/main" id="{F938C6A1-EFE1-4BC8-9D43-AFC7322B693F}"/>
               </a:ext>
             </a:extLst>
           </p:cNvPr>
@@ -37532,7 +37532,7 @@
           <p:cNvPr id="17" name="crop: [x_start, x_end)">
             <a:extLst xmlns:a="http://schemas.openxmlformats.org/drawingml/2006/main">
               <a:ext uri="{FF2B5EF4-FFF2-40B4-BE49-F238E27FC236}">
-                <a16:creationId xmlns:a16="http://schemas.microsoft.com/office/drawing/2014/main" id="{9025308A-F871-44EF-8214-BED9F61B4854}"/>
+                <a16:creationId xmlns:a16="http://schemas.microsoft.com/office/drawing/2014/main" id="{C54741AD-F773-48FB-9F5F-ECF666BF6B68}"/>
               </a:ext>
             </a:extLst>
           </p:cNvPr>
@@ -37690,7 +37690,7 @@
           <p:cNvPr id="18" name="">
             <a:extLst xmlns:a="http://schemas.openxmlformats.org/drawingml/2006/main">
               <a:ext uri="{FF2B5EF4-FFF2-40B4-BE49-F238E27FC236}">
-                <a16:creationId xmlns:a16="http://schemas.microsoft.com/office/drawing/2014/main" id="{89F190D8-4E88-4C91-97BB-436956656F77}"/>
+                <a16:creationId xmlns:a16="http://schemas.microsoft.com/office/drawing/2014/main" id="{F3321A30-CFE0-4129-8565-EDB515A18F96}"/>
               </a:ext>
             </a:extLst>
           </p:cNvPr>
@@ -37721,7 +37721,7 @@
           <p:cNvPr id="19" name="테스트 구조">
             <a:extLst xmlns:a="http://schemas.openxmlformats.org/drawingml/2006/main">
               <a:ext uri="{FF2B5EF4-FFF2-40B4-BE49-F238E27FC236}">
-                <a16:creationId xmlns:a16="http://schemas.microsoft.com/office/drawing/2014/main" id="{931B34E3-7737-4A02-8EAC-53C9FA0EC9EA}"/>
+                <a16:creationId xmlns:a16="http://schemas.microsoft.com/office/drawing/2014/main" id="{63B27F2D-0A87-41C0-AE49-C8ABC9CA5271}"/>
               </a:ext>
             </a:extLst>
           </p:cNvPr>
@@ -37879,7 +37879,7 @@
           <p:cNvPr id="20" name="tests/test_pipeline.py">
             <a:extLst xmlns:a="http://schemas.openxmlformats.org/drawingml/2006/main">
               <a:ext uri="{FF2B5EF4-FFF2-40B4-BE49-F238E27FC236}">
-                <a16:creationId xmlns:a16="http://schemas.microsoft.com/office/drawing/2014/main" id="{5F1DFA9F-D520-4E02-A8F4-537D67846252}"/>
+                <a16:creationId xmlns:a16="http://schemas.microsoft.com/office/drawing/2014/main" id="{3DCE8FA0-4C58-4DC8-903E-550B6BDCFA39}"/>
               </a:ext>
             </a:extLst>
           </p:cNvPr>
@@ -38037,7 +38037,7 @@
           <p:cNvPr id="21" name="">
             <a:extLst xmlns:a="http://schemas.openxmlformats.org/drawingml/2006/main">
               <a:ext uri="{FF2B5EF4-FFF2-40B4-BE49-F238E27FC236}">
-                <a16:creationId xmlns:a16="http://schemas.microsoft.com/office/drawing/2014/main" id="{613B93ED-6502-4941-943F-A67E6F021411}"/>
+                <a16:creationId xmlns:a16="http://schemas.microsoft.com/office/drawing/2014/main" id="{5544379A-2DF8-4A8A-9720-066C715723F7}"/>
               </a:ext>
             </a:extLst>
           </p:cNvPr>
@@ -38068,7 +38068,7 @@
           <p:cNvPr id="22" name="CLI 출력">
             <a:extLst xmlns:a="http://schemas.openxmlformats.org/drawingml/2006/main">
               <a:ext uri="{FF2B5EF4-FFF2-40B4-BE49-F238E27FC236}">
-                <a16:creationId xmlns:a16="http://schemas.microsoft.com/office/drawing/2014/main" id="{3236FBC8-383E-44E3-A313-8BCDC603F42E}"/>
+                <a16:creationId xmlns:a16="http://schemas.microsoft.com/office/drawing/2014/main" id="{AB282F90-DA8F-4E15-BBD7-51C912B98248}"/>
               </a:ext>
             </a:extLst>
           </p:cNvPr>
@@ -38226,7 +38226,7 @@
           <p:cNvPr id="23" name="width · height · pixel_count …">
             <a:extLst xmlns:a="http://schemas.openxmlformats.org/drawingml/2006/main">
               <a:ext uri="{FF2B5EF4-FFF2-40B4-BE49-F238E27FC236}">
-                <a16:creationId xmlns:a16="http://schemas.microsoft.com/office/drawing/2014/main" id="{1B480C39-14C1-4B35-ABB7-B4EA75A5F3E8}"/>
+                <a16:creationId xmlns:a16="http://schemas.microsoft.com/office/drawing/2014/main" id="{40AE1C97-9B1B-4CD6-A530-DB76761AD8CF}"/>
               </a:ext>
             </a:extLst>
           </p:cNvPr>
@@ -38384,7 +38384,7 @@
           <p:cNvPr id="24" name="32줄 · 1,303 bytes">
             <a:extLst xmlns:a="http://schemas.openxmlformats.org/drawingml/2006/main">
               <a:ext uri="{FF2B5EF4-FFF2-40B4-BE49-F238E27FC236}">
-                <a16:creationId xmlns:a16="http://schemas.microsoft.com/office/drawing/2014/main" id="{BC85A8AC-6DB5-4C19-B7F0-1D5E1AC26F3A}"/>
+                <a16:creationId xmlns:a16="http://schemas.microsoft.com/office/drawing/2014/main" id="{7A5A97A7-4E8B-41E5-AD9E-E9010A548B67}"/>
               </a:ext>
             </a:extLst>
           </p:cNvPr>
@@ -38542,7 +38542,7 @@
           <p:cNvPr id="25" name="이번 Task에도 필요할까?">
             <a:extLst xmlns:a="http://schemas.openxmlformats.org/drawingml/2006/main">
               <a:ext uri="{FF2B5EF4-FFF2-40B4-BE49-F238E27FC236}">
-                <a16:creationId xmlns:a16="http://schemas.microsoft.com/office/drawing/2014/main" id="{D70BF8F9-E2E8-4959-BF45-1D2D0EB28A26}"/>
+                <a16:creationId xmlns:a16="http://schemas.microsoft.com/office/drawing/2014/main" id="{9D0588BF-43DE-416C-85B8-0D3F088F9512}"/>
               </a:ext>
             </a:extLst>
           </p:cNvPr>
@@ -38700,7 +38700,7 @@
           <p:cNvPr id="26" name="Legacy module connection">
             <a:extLst xmlns:a="http://schemas.openxmlformats.org/drawingml/2006/main">
               <a:ext uri="{FF2B5EF4-FFF2-40B4-BE49-F238E27FC236}">
-                <a16:creationId xmlns:a16="http://schemas.microsoft.com/office/drawing/2014/main" id="{5147E33E-CC8D-4151-A7B8-500508F515A2}"/>
+                <a16:creationId xmlns:a16="http://schemas.microsoft.com/office/drawing/2014/main" id="{EACFF834-11D3-4093-B92A-6DD95B36B6BE}"/>
               </a:ext>
             </a:extLst>
           </p:cNvPr>
@@ -38856,7 +38856,7 @@
     </p:spTree>
     <p:extLst>
       <p:ext uri="{BB962C8B-B14F-4D97-AF65-F5344CB8AC3E}">
-        <p14:creationId xmlns:p14="http://schemas.microsoft.com/office/powerpoint/2010/main" val="992709160"/>
+        <p14:creationId xmlns:p14="http://schemas.microsoft.com/office/powerpoint/2010/main" val="649155487"/>
       </p:ext>
     </p:extLst>
   </p:cSld>
@@ -38887,7 +38887,7 @@
           <p:cNvPr id="17" name="ACT 2 · 관련성을 확인하기">
             <a:extLst xmlns:a="http://schemas.openxmlformats.org/drawingml/2006/main">
               <a:ext uri="{FF2B5EF4-FFF2-40B4-BE49-F238E27FC236}">
-                <a16:creationId xmlns:a16="http://schemas.microsoft.com/office/drawing/2014/main" id="{24E840A6-3F5E-4548-990B-84D0995106BA}"/>
+                <a16:creationId xmlns:a16="http://schemas.microsoft.com/office/drawing/2014/main" id="{BA60A74B-9FE1-4A38-939C-E234BCA354C8}"/>
               </a:ext>
             </a:extLst>
           </p:cNvPr>
@@ -39042,10 +39042,10 @@
       </p:sp>
       <p:sp>
         <p:nvSpPr>
-          <p:cNvPr id="2" name="S28">
+          <p:cNvPr id="2" name="S29">
             <a:extLst xmlns:a="http://schemas.openxmlformats.org/drawingml/2006/main">
               <a:ext uri="{FF2B5EF4-FFF2-40B4-BE49-F238E27FC236}">
-                <a16:creationId xmlns:a16="http://schemas.microsoft.com/office/drawing/2014/main" id="{83702BA9-6765-44F9-A3EA-16E55BF382B0}"/>
+                <a16:creationId xmlns:a16="http://schemas.microsoft.com/office/drawing/2014/main" id="{0BEEA1F5-042D-4227-BB9D-536A1A530F5C}"/>
               </a:ext>
             </a:extLst>
           </p:cNvPr>
@@ -39193,7 +39193,7 @@
                 <a:ea typeface="Malgun Gothic"/>
                 <a:cs typeface="Malgun Gothic"/>
               </a:rPr>
-              <a:t>S28</a:t>
+              <a:t>S29</a:t>
             </a:r>
           </a:p>
         </p:txBody>
@@ -39203,7 +39203,7 @@
           <p:cNvPr id="3" name="정확하지만 이번 Task에는 불필요한 정보">
             <a:extLst xmlns:a="http://schemas.openxmlformats.org/drawingml/2006/main">
               <a:ext uri="{FF2B5EF4-FFF2-40B4-BE49-F238E27FC236}">
-                <a16:creationId xmlns:a16="http://schemas.microsoft.com/office/drawing/2014/main" id="{6DCFB517-301C-47D6-82A3-4C2718F93730}"/>
+                <a16:creationId xmlns:a16="http://schemas.microsoft.com/office/drawing/2014/main" id="{B3647C86-E620-4D7F-998C-73FC8C4DFE27}"/>
               </a:ext>
             </a:extLst>
           </p:cNvPr>
@@ -39361,7 +39361,7 @@
           <p:cNvPr id="4" name="">
             <a:extLst xmlns:a="http://schemas.openxmlformats.org/drawingml/2006/main">
               <a:ext uri="{FF2B5EF4-FFF2-40B4-BE49-F238E27FC236}">
-                <a16:creationId xmlns:a16="http://schemas.microsoft.com/office/drawing/2014/main" id="{7140FEB2-523D-4DF0-9B7A-47EAA4382E39}"/>
+                <a16:creationId xmlns:a16="http://schemas.microsoft.com/office/drawing/2014/main" id="{1F77B39E-F96D-4938-9DF9-71DA7145F63A}"/>
               </a:ext>
             </a:extLst>
           </p:cNvPr>
@@ -39392,7 +39392,7 @@
           <p:cNvPr id="5" name="TRIAL-004 · README의 build tools 안내를 명확히 하는 작업">
             <a:extLst xmlns:a="http://schemas.openxmlformats.org/drawingml/2006/main">
               <a:ext uri="{FF2B5EF4-FFF2-40B4-BE49-F238E27FC236}">
-                <a16:creationId xmlns:a16="http://schemas.microsoft.com/office/drawing/2014/main" id="{1F1D9421-CB81-4BCE-85BA-936236CB6719}"/>
+                <a16:creationId xmlns:a16="http://schemas.microsoft.com/office/drawing/2014/main" id="{004E45D6-947B-4A18-BBFA-6BD3D1AE3FAF}"/>
               </a:ext>
             </a:extLst>
           </p:cNvPr>
@@ -39550,7 +39550,7 @@
           <p:cNvPr id="6" name="Agent 혼란과 Context 관련 실패는 관찰되지 않았다">
             <a:extLst xmlns:a="http://schemas.openxmlformats.org/drawingml/2006/main">
               <a:ext uri="{FF2B5EF4-FFF2-40B4-BE49-F238E27FC236}">
-                <a16:creationId xmlns:a16="http://schemas.microsoft.com/office/drawing/2014/main" id="{27F0E951-8F7E-4EEB-B575-DBEE880F76A4}"/>
+                <a16:creationId xmlns:a16="http://schemas.microsoft.com/office/drawing/2014/main" id="{039AFD3D-9268-421F-896C-7A0792966CAB}"/>
               </a:ext>
             </a:extLst>
           </p:cNvPr>
@@ -39708,7 +39708,7 @@
           <p:cNvPr id="7" name="작업: README의 빌드 도구 안내를 고친다">
             <a:extLst xmlns:a="http://schemas.openxmlformats.org/drawingml/2006/main">
               <a:ext uri="{FF2B5EF4-FFF2-40B4-BE49-F238E27FC236}">
-                <a16:creationId xmlns:a16="http://schemas.microsoft.com/office/drawing/2014/main" id="{24761129-D9FF-481C-B9E9-E86E8747B7BB}"/>
+                <a16:creationId xmlns:a16="http://schemas.microsoft.com/office/drawing/2014/main" id="{CB1CEFF0-7C15-4708-A0BE-BD23E1EA8ECD}"/>
               </a:ext>
             </a:extLst>
           </p:cNvPr>
@@ -39866,7 +39866,7 @@
           <p:cNvPr id="8" name="이번 질문과 직접 관련">
             <a:extLst xmlns:a="http://schemas.openxmlformats.org/drawingml/2006/main">
               <a:ext uri="{FF2B5EF4-FFF2-40B4-BE49-F238E27FC236}">
-                <a16:creationId xmlns:a16="http://schemas.microsoft.com/office/drawing/2014/main" id="{4D70BC53-7521-4ED3-9302-EAF6F3B1A56E}"/>
+                <a16:creationId xmlns:a16="http://schemas.microsoft.com/office/drawing/2014/main" id="{AB8BFB26-AAE1-48DD-935D-21CDF7D91D1D}"/>
               </a:ext>
             </a:extLst>
           </p:cNvPr>
@@ -40024,7 +40024,7 @@
           <p:cNvPr id="9" name="함께 있었지만 관련이 낮은 정보">
             <a:extLst xmlns:a="http://schemas.openxmlformats.org/drawingml/2006/main">
               <a:ext uri="{FF2B5EF4-FFF2-40B4-BE49-F238E27FC236}">
-                <a16:creationId xmlns:a16="http://schemas.microsoft.com/office/drawing/2014/main" id="{73625BB2-8D61-4E29-A984-ABAB7FFF4288}"/>
+                <a16:creationId xmlns:a16="http://schemas.microsoft.com/office/drawing/2014/main" id="{847AEF8D-694B-432B-B9C9-080468D8654D}"/>
               </a:ext>
             </a:extLst>
           </p:cNvPr>
@@ -40182,7 +40182,7 @@
           <p:cNvPr id="10" name="">
             <a:extLst xmlns:a="http://schemas.openxmlformats.org/drawingml/2006/main">
               <a:ext uri="{FF2B5EF4-FFF2-40B4-BE49-F238E27FC236}">
-                <a16:creationId xmlns:a16="http://schemas.microsoft.com/office/drawing/2014/main" id="{FDB01741-FF18-4E7F-8268-3A4D27EDC56B}"/>
+                <a16:creationId xmlns:a16="http://schemas.microsoft.com/office/drawing/2014/main" id="{58926CD2-CA53-44C0-8A85-86207A91EA28}"/>
               </a:ext>
             </a:extLst>
           </p:cNvPr>
@@ -40213,7 +40213,7 @@
           <p:cNvPr id="11" name="">
             <a:extLst xmlns:a="http://schemas.openxmlformats.org/drawingml/2006/main">
               <a:ext uri="{FF2B5EF4-FFF2-40B4-BE49-F238E27FC236}">
-                <a16:creationId xmlns:a16="http://schemas.microsoft.com/office/drawing/2014/main" id="{50C34739-CB2C-400A-9CD5-CA3D7F1EBB45}"/>
+                <a16:creationId xmlns:a16="http://schemas.microsoft.com/office/drawing/2014/main" id="{71CC3813-961A-4EAC-94DA-68BFE875A817}"/>
               </a:ext>
             </a:extLst>
           </p:cNvPr>
@@ -40244,7 +40244,7 @@
           <p:cNvPr id="12" name="">
             <a:extLst xmlns:a="http://schemas.openxmlformats.org/drawingml/2006/main">
               <a:ext uri="{FF2B5EF4-FFF2-40B4-BE49-F238E27FC236}">
-                <a16:creationId xmlns:a16="http://schemas.microsoft.com/office/drawing/2014/main" id="{EB4681EA-DCC6-4D01-A682-FC0E6388759A}"/>
+                <a16:creationId xmlns:a16="http://schemas.microsoft.com/office/drawing/2014/main" id="{D775FF71-D8D3-40E2-A254-5905A63C59D6}"/>
               </a:ext>
             </a:extLst>
           </p:cNvPr>
@@ -40275,7 +40275,7 @@
           <p:cNvPr id="13" name="README&#10;pyproject.toml의 빌드 설정">
             <a:extLst xmlns:a="http://schemas.openxmlformats.org/drawingml/2006/main">
               <a:ext uri="{FF2B5EF4-FFF2-40B4-BE49-F238E27FC236}">
-                <a16:creationId xmlns:a16="http://schemas.microsoft.com/office/drawing/2014/main" id="{233E8564-4E85-43A1-9CB5-67893F39FF66}"/>
+                <a16:creationId xmlns:a16="http://schemas.microsoft.com/office/drawing/2014/main" id="{9930D8EB-8275-4793-8A13-44EFB3F3FDA6}"/>
               </a:ext>
             </a:extLst>
           </p:cNvPr>
@@ -40456,7 +40456,7 @@
           <p:cNvPr id="14" name="crop / resize 계약&#10;이미지 처리 pipeline 세부사항">
             <a:extLst xmlns:a="http://schemas.openxmlformats.org/drawingml/2006/main">
               <a:ext uri="{FF2B5EF4-FFF2-40B4-BE49-F238E27FC236}">
-                <a16:creationId xmlns:a16="http://schemas.microsoft.com/office/drawing/2014/main" id="{08204108-1714-44EB-B3B1-E9C3E2E31B1F}"/>
+                <a16:creationId xmlns:a16="http://schemas.microsoft.com/office/drawing/2014/main" id="{9FBEBDAA-4C8E-4114-AEDF-24E720F2F36B}"/>
               </a:ext>
             </a:extLst>
           </p:cNvPr>
@@ -40637,7 +40637,7 @@
           <p:cNvPr id="15" name="정확한 정보라도, 모든 질문에 필요한 것은 아니다">
             <a:extLst xmlns:a="http://schemas.openxmlformats.org/drawingml/2006/main">
               <a:ext uri="{FF2B5EF4-FFF2-40B4-BE49-F238E27FC236}">
-                <a16:creationId xmlns:a16="http://schemas.microsoft.com/office/drawing/2014/main" id="{6EF991D4-AB2A-40FC-84FB-BF219A71AF54}"/>
+                <a16:creationId xmlns:a16="http://schemas.microsoft.com/office/drawing/2014/main" id="{FCD20457-5927-4A21-93D9-53A39F48BE76}"/>
               </a:ext>
             </a:extLst>
           </p:cNvPr>
@@ -40795,7 +40795,7 @@
           <p:cNvPr id="16" name="Legacy module connection">
             <a:extLst xmlns:a="http://schemas.openxmlformats.org/drawingml/2006/main">
               <a:ext uri="{FF2B5EF4-FFF2-40B4-BE49-F238E27FC236}">
-                <a16:creationId xmlns:a16="http://schemas.microsoft.com/office/drawing/2014/main" id="{C4BF3782-9D84-44CC-99DC-8337D56D3B87}"/>
+                <a16:creationId xmlns:a16="http://schemas.microsoft.com/office/drawing/2014/main" id="{B41ADE80-D6D0-4628-9B09-6A427469174C}"/>
               </a:ext>
             </a:extLst>
           </p:cNvPr>
@@ -40951,7 +40951,7 @@
     </p:spTree>
     <p:extLst>
       <p:ext uri="{BB962C8B-B14F-4D97-AF65-F5344CB8AC3E}">
-        <p14:creationId xmlns:p14="http://schemas.microsoft.com/office/powerpoint/2010/main" val="1960805026"/>
+        <p14:creationId xmlns:p14="http://schemas.microsoft.com/office/powerpoint/2010/main" val="1752223276"/>
       </p:ext>
     </p:extLst>
   </p:cSld>
@@ -40982,7 +40982,7 @@
           <p:cNvPr id="20" name="ACT 2 · 언제 필요한 정보인가">
             <a:extLst xmlns:a="http://schemas.openxmlformats.org/drawingml/2006/main">
               <a:ext uri="{FF2B5EF4-FFF2-40B4-BE49-F238E27FC236}">
-                <a16:creationId xmlns:a16="http://schemas.microsoft.com/office/drawing/2014/main" id="{B76A332C-9E81-4A79-AA68-68C3B923033E}"/>
+                <a16:creationId xmlns:a16="http://schemas.microsoft.com/office/drawing/2014/main" id="{C799C139-460B-4845-8E25-10D3BDCC792E}"/>
               </a:ext>
             </a:extLst>
           </p:cNvPr>
@@ -41137,10 +41137,10 @@
       </p:sp>
       <p:sp>
         <p:nvSpPr>
-          <p:cNvPr id="2" name="S29">
+          <p:cNvPr id="2" name="S30">
             <a:extLst xmlns:a="http://schemas.openxmlformats.org/drawingml/2006/main">
               <a:ext uri="{FF2B5EF4-FFF2-40B4-BE49-F238E27FC236}">
-                <a16:creationId xmlns:a16="http://schemas.microsoft.com/office/drawing/2014/main" id="{616ED2D7-1A53-401B-B019-0EE43F7D921D}"/>
+                <a16:creationId xmlns:a16="http://schemas.microsoft.com/office/drawing/2014/main" id="{5A1CA48B-DBD9-4319-8D2D-EAFA5D147BCF}"/>
               </a:ext>
             </a:extLst>
           </p:cNvPr>
@@ -41288,7 +41288,7 @@
                 <a:ea typeface="Malgun Gothic"/>
                 <a:cs typeface="Malgun Gothic"/>
               </a:rPr>
-              <a:t>S29</a:t>
+              <a:t>S30</a:t>
             </a:r>
           </a:p>
         </p:txBody>
@@ -41298,7 +41298,7 @@
           <p:cNvPr id="3" name="정보의 범위와 제공 시점">
             <a:extLst xmlns:a="http://schemas.openxmlformats.org/drawingml/2006/main">
               <a:ext uri="{FF2B5EF4-FFF2-40B4-BE49-F238E27FC236}">
-                <a16:creationId xmlns:a16="http://schemas.microsoft.com/office/drawing/2014/main" id="{D373FB9F-F85E-44FA-A1AB-996A8FDF9ACF}"/>
+                <a16:creationId xmlns:a16="http://schemas.microsoft.com/office/drawing/2014/main" id="{8EBEB1EF-6888-42CC-B06C-2A76CF8E9B9A}"/>
               </a:ext>
             </a:extLst>
           </p:cNvPr>
@@ -41456,7 +41456,7 @@
           <p:cNvPr id="4" name="">
             <a:extLst xmlns:a="http://schemas.openxmlformats.org/drawingml/2006/main">
               <a:ext uri="{FF2B5EF4-FFF2-40B4-BE49-F238E27FC236}">
-                <a16:creationId xmlns:a16="http://schemas.microsoft.com/office/drawing/2014/main" id="{BFAC3F30-070A-49FF-B9E8-E01488E377A4}"/>
+                <a16:creationId xmlns:a16="http://schemas.microsoft.com/office/drawing/2014/main" id="{5C224DDE-BEEE-470D-B586-40CF6E192DFF}"/>
               </a:ext>
             </a:extLst>
           </p:cNvPr>
@@ -41487,7 +41487,7 @@
           <p:cNvPr id="5" name="교육용 분류 모델 · OpenAI의 공식 기능 분류가 아님">
             <a:extLst xmlns:a="http://schemas.openxmlformats.org/drawingml/2006/main">
               <a:ext uri="{FF2B5EF4-FFF2-40B4-BE49-F238E27FC236}">
-                <a16:creationId xmlns:a16="http://schemas.microsoft.com/office/drawing/2014/main" id="{BD8D5CE3-E8D9-4BC7-95D5-3C8745056194}"/>
+                <a16:creationId xmlns:a16="http://schemas.microsoft.com/office/drawing/2014/main" id="{376F206B-20A7-42D9-815F-431C9FC4448C}"/>
               </a:ext>
             </a:extLst>
           </p:cNvPr>
@@ -41645,7 +41645,7 @@
           <p:cNvPr id="6" name="성능 조사 절차는 설명을 위한 예시이며 STATE-02에 저장돼 있었다는 뜻이 아님">
             <a:extLst xmlns:a="http://schemas.openxmlformats.org/drawingml/2006/main">
               <a:ext uri="{FF2B5EF4-FFF2-40B4-BE49-F238E27FC236}">
-                <a16:creationId xmlns:a16="http://schemas.microsoft.com/office/drawing/2014/main" id="{D4CDF2A8-378A-477C-B2DE-60B563695ADA}"/>
+                <a16:creationId xmlns:a16="http://schemas.microsoft.com/office/drawing/2014/main" id="{6C4B2FDF-7633-4FB3-84D6-2BC798ADBB59}"/>
               </a:ext>
             </a:extLst>
           </p:cNvPr>
@@ -41803,7 +41803,7 @@
           <p:cNvPr id="7" name="">
             <a:extLst xmlns:a="http://schemas.openxmlformats.org/drawingml/2006/main">
               <a:ext uri="{FF2B5EF4-FFF2-40B4-BE49-F238E27FC236}">
-                <a16:creationId xmlns:a16="http://schemas.microsoft.com/office/drawing/2014/main" id="{00161FDD-9672-41A9-B2C2-422E1204B458}"/>
+                <a16:creationId xmlns:a16="http://schemas.microsoft.com/office/drawing/2014/main" id="{777DC095-7868-41D8-9C56-BD2853063D36}"/>
               </a:ext>
             </a:extLst>
           </p:cNvPr>
@@ -41834,7 +41834,7 @@
           <p:cNvPr id="8" name="항상 알아야 할 안내">
             <a:extLst xmlns:a="http://schemas.openxmlformats.org/drawingml/2006/main">
               <a:ext uri="{FF2B5EF4-FFF2-40B4-BE49-F238E27FC236}">
-                <a16:creationId xmlns:a16="http://schemas.microsoft.com/office/drawing/2014/main" id="{C771CDC4-F9A5-4E3D-A612-6385174045F5}"/>
+                <a16:creationId xmlns:a16="http://schemas.microsoft.com/office/drawing/2014/main" id="{0B112C6C-189E-4AF1-BD90-F0D6A0801B84}"/>
               </a:ext>
             </a:extLst>
           </p:cNvPr>
@@ -41992,7 +41992,7 @@
           <p:cNvPr id="9" name="프로젝트 목적 · 기본 제약">
             <a:extLst xmlns:a="http://schemas.openxmlformats.org/drawingml/2006/main">
               <a:ext uri="{FF2B5EF4-FFF2-40B4-BE49-F238E27FC236}">
-                <a16:creationId xmlns:a16="http://schemas.microsoft.com/office/drawing/2014/main" id="{12F27B09-0789-4810-B081-B5E7DEFB4D75}"/>
+                <a16:creationId xmlns:a16="http://schemas.microsoft.com/office/drawing/2014/main" id="{9C92B6E3-71D9-4EA1-B5F9-9DC080ACC39C}"/>
               </a:ext>
             </a:extLst>
           </p:cNvPr>
@@ -42150,7 +42150,7 @@
           <p:cNvPr id="10" name="ALWAYS-ON">
             <a:extLst xmlns:a="http://schemas.openxmlformats.org/drawingml/2006/main">
               <a:ext uri="{FF2B5EF4-FFF2-40B4-BE49-F238E27FC236}">
-                <a16:creationId xmlns:a16="http://schemas.microsoft.com/office/drawing/2014/main" id="{AEF0084F-C9DF-43B8-9E83-34768CF6F871}"/>
+                <a16:creationId xmlns:a16="http://schemas.microsoft.com/office/drawing/2014/main" id="{0AB0C1B4-55D2-4A23-AEFE-65C7A6417DA4}"/>
               </a:ext>
             </a:extLst>
           </p:cNvPr>
@@ -42308,7 +42308,7 @@
           <p:cNvPr id="11" name="">
             <a:extLst xmlns:a="http://schemas.openxmlformats.org/drawingml/2006/main">
               <a:ext uri="{FF2B5EF4-FFF2-40B4-BE49-F238E27FC236}">
-                <a16:creationId xmlns:a16="http://schemas.microsoft.com/office/drawing/2014/main" id="{A1419FAB-754D-4EC1-B254-42F5D184A2DF}"/>
+                <a16:creationId xmlns:a16="http://schemas.microsoft.com/office/drawing/2014/main" id="{47DAB3D7-987F-49C9-A916-3F1032F32160}"/>
               </a:ext>
             </a:extLst>
           </p:cNvPr>
@@ -42339,7 +42339,7 @@
           <p:cNvPr id="12" name="질문에 따라 찾아볼 상세">
             <a:extLst xmlns:a="http://schemas.openxmlformats.org/drawingml/2006/main">
               <a:ext uri="{FF2B5EF4-FFF2-40B4-BE49-F238E27FC236}">
-                <a16:creationId xmlns:a16="http://schemas.microsoft.com/office/drawing/2014/main" id="{DA741A5A-57AA-4F3A-AA2C-5624060BB566}"/>
+                <a16:creationId xmlns:a16="http://schemas.microsoft.com/office/drawing/2014/main" id="{9A5F14DC-1486-4C2C-8717-5E50FE4AB621}"/>
               </a:ext>
             </a:extLst>
           </p:cNvPr>
@@ -42497,7 +42497,7 @@
           <p:cNvPr id="13" name="crop 계약 · 모듈 구조">
             <a:extLst xmlns:a="http://schemas.openxmlformats.org/drawingml/2006/main">
               <a:ext uri="{FF2B5EF4-FFF2-40B4-BE49-F238E27FC236}">
-                <a16:creationId xmlns:a16="http://schemas.microsoft.com/office/drawing/2014/main" id="{D8239EAB-BEE5-4F16-BCB3-B24587D35BB8}"/>
+                <a16:creationId xmlns:a16="http://schemas.microsoft.com/office/drawing/2014/main" id="{486EC4FF-1DAC-4060-8580-93BD51904518}"/>
               </a:ext>
             </a:extLst>
           </p:cNvPr>
@@ -42655,7 +42655,7 @@
           <p:cNvPr id="14" name="ON-DEMAND">
             <a:extLst xmlns:a="http://schemas.openxmlformats.org/drawingml/2006/main">
               <a:ext uri="{FF2B5EF4-FFF2-40B4-BE49-F238E27FC236}">
-                <a16:creationId xmlns:a16="http://schemas.microsoft.com/office/drawing/2014/main" id="{65721B4F-7C34-4FFD-8174-06D967E8D868}"/>
+                <a16:creationId xmlns:a16="http://schemas.microsoft.com/office/drawing/2014/main" id="{222F3500-9D07-4B50-87B9-D35CF69525F8}"/>
               </a:ext>
             </a:extLst>
           </p:cNvPr>
@@ -42813,7 +42813,7 @@
           <p:cNvPr id="15" name="">
             <a:extLst xmlns:a="http://schemas.openxmlformats.org/drawingml/2006/main">
               <a:ext uri="{FF2B5EF4-FFF2-40B4-BE49-F238E27FC236}">
-                <a16:creationId xmlns:a16="http://schemas.microsoft.com/office/drawing/2014/main" id="{A0665B7D-4EB1-4056-8A82-6C10D995F4C4}"/>
+                <a16:creationId xmlns:a16="http://schemas.microsoft.com/office/drawing/2014/main" id="{5408687C-06DD-479A-BD91-AC15B2B46B2A}"/>
               </a:ext>
             </a:extLst>
           </p:cNvPr>
@@ -42844,7 +42844,7 @@
           <p:cNvPr id="16" name="이런 일을 수행하는 방법">
             <a:extLst xmlns:a="http://schemas.openxmlformats.org/drawingml/2006/main">
               <a:ext uri="{FF2B5EF4-FFF2-40B4-BE49-F238E27FC236}">
-                <a16:creationId xmlns:a16="http://schemas.microsoft.com/office/drawing/2014/main" id="{03BD394B-124A-455A-8F77-1F5E5E9D6C72}"/>
+                <a16:creationId xmlns:a16="http://schemas.microsoft.com/office/drawing/2014/main" id="{9DE5B00E-3C28-4E47-842D-AB307B0FF00A}"/>
               </a:ext>
             </a:extLst>
           </p:cNvPr>
@@ -43002,7 +43002,7 @@
           <p:cNvPr id="17" name="변경 전 측정 → 조사 → 검증">
             <a:extLst xmlns:a="http://schemas.openxmlformats.org/drawingml/2006/main">
               <a:ext uri="{FF2B5EF4-FFF2-40B4-BE49-F238E27FC236}">
-                <a16:creationId xmlns:a16="http://schemas.microsoft.com/office/drawing/2014/main" id="{B5A0B89D-105B-428E-9172-C8486596B2C2}"/>
+                <a16:creationId xmlns:a16="http://schemas.microsoft.com/office/drawing/2014/main" id="{18DCA656-CD64-4452-900F-08DF3AFCDB6A}"/>
               </a:ext>
             </a:extLst>
           </p:cNvPr>
@@ -43160,7 +43160,7 @@
           <p:cNvPr id="18" name="WORKFLOW">
             <a:extLst xmlns:a="http://schemas.openxmlformats.org/drawingml/2006/main">
               <a:ext uri="{FF2B5EF4-FFF2-40B4-BE49-F238E27FC236}">
-                <a16:creationId xmlns:a16="http://schemas.microsoft.com/office/drawing/2014/main" id="{1783775F-BAAD-4DDD-A864-8864ACFDE746}"/>
+                <a16:creationId xmlns:a16="http://schemas.microsoft.com/office/drawing/2014/main" id="{CDF5EC49-7E6A-4C99-992E-8DD25E99F412}"/>
               </a:ext>
             </a:extLst>
           </p:cNvPr>
@@ -43318,7 +43318,7 @@
           <p:cNvPr id="19" name="Legacy module connection">
             <a:extLst xmlns:a="http://schemas.openxmlformats.org/drawingml/2006/main">
               <a:ext uri="{FF2B5EF4-FFF2-40B4-BE49-F238E27FC236}">
-                <a16:creationId xmlns:a16="http://schemas.microsoft.com/office/drawing/2014/main" id="{ED855481-A84B-4E94-90FD-76A8EDFED695}"/>
+                <a16:creationId xmlns:a16="http://schemas.microsoft.com/office/drawing/2014/main" id="{7B5B132F-2EE7-420D-8EEB-92FBE5F9A4CE}"/>
               </a:ext>
             </a:extLst>
           </p:cNvPr>
@@ -43474,7 +43474,7 @@
     </p:spTree>
     <p:extLst>
       <p:ext uri="{BB962C8B-B14F-4D97-AF65-F5344CB8AC3E}">
-        <p14:creationId xmlns:p14="http://schemas.microsoft.com/office/powerpoint/2010/main" val="420389293"/>
+        <p14:creationId xmlns:p14="http://schemas.microsoft.com/office/powerpoint/2010/main" val="1394434875"/>
       </p:ext>
     </p:extLst>
   </p:cSld>
@@ -43505,7 +43505,7 @@
           <p:cNvPr id="38" name="ACT 2 · 정보의 양을 다시 묻는 연구">
             <a:extLst xmlns:a="http://schemas.openxmlformats.org/drawingml/2006/main">
               <a:ext uri="{FF2B5EF4-FFF2-40B4-BE49-F238E27FC236}">
-                <a16:creationId xmlns:a16="http://schemas.microsoft.com/office/drawing/2014/main" id="{F6E67BF3-23AE-488C-832E-7BFA0AE83F1D}"/>
+                <a16:creationId xmlns:a16="http://schemas.microsoft.com/office/drawing/2014/main" id="{425BB323-B1F3-4994-8B43-806E9CF02F57}"/>
               </a:ext>
             </a:extLst>
           </p:cNvPr>
@@ -43660,10 +43660,10 @@
       </p:sp>
       <p:sp>
         <p:nvSpPr>
-          <p:cNvPr id="2" name="S30">
+          <p:cNvPr id="2" name="S31">
             <a:extLst xmlns:a="http://schemas.openxmlformats.org/drawingml/2006/main">
               <a:ext uri="{FF2B5EF4-FFF2-40B4-BE49-F238E27FC236}">
-                <a16:creationId xmlns:a16="http://schemas.microsoft.com/office/drawing/2014/main" id="{A1639D6C-8B6C-40F0-BCB8-584780AD7B97}"/>
+                <a16:creationId xmlns:a16="http://schemas.microsoft.com/office/drawing/2014/main" id="{7C977493-1307-4323-9284-F7CAF6133F11}"/>
               </a:ext>
             </a:extLst>
           </p:cNvPr>
@@ -43811,7 +43811,7 @@
                 <a:ea typeface="Malgun Gothic"/>
                 <a:cs typeface="Malgun Gothic"/>
               </a:rPr>
-              <a:t>S30</a:t>
+              <a:t>S31</a:t>
             </a:r>
           </a:p>
         </p:txBody>
@@ -43821,7 +43821,7 @@
           <p:cNvPr id="3" name="Long Context 연구가 말해주는 범위">
             <a:extLst xmlns:a="http://schemas.openxmlformats.org/drawingml/2006/main">
               <a:ext uri="{FF2B5EF4-FFF2-40B4-BE49-F238E27FC236}">
-                <a16:creationId xmlns:a16="http://schemas.microsoft.com/office/drawing/2014/main" id="{C96F666D-371A-4DD6-9003-CE51C4AA9127}"/>
+                <a16:creationId xmlns:a16="http://schemas.microsoft.com/office/drawing/2014/main" id="{702852F1-E955-4DD5-8B3A-B9A7A58457F2}"/>
               </a:ext>
             </a:extLst>
           </p:cNvPr>
@@ -43979,7 +43979,7 @@
           <p:cNvPr id="4" name="">
             <a:extLst xmlns:a="http://schemas.openxmlformats.org/drawingml/2006/main">
               <a:ext uri="{FF2B5EF4-FFF2-40B4-BE49-F238E27FC236}">
-                <a16:creationId xmlns:a16="http://schemas.microsoft.com/office/drawing/2014/main" id="{820D2CFE-863A-4F3C-97A1-2E239E3D7061}"/>
+                <a16:creationId xmlns:a16="http://schemas.microsoft.com/office/drawing/2014/main" id="{1BCB2ABB-CD44-4D89-9200-BB34DAD3E0C9}"/>
               </a:ext>
             </a:extLst>
           </p:cNvPr>
@@ -44010,7 +44010,7 @@
           <p:cNvPr id="5" name="Liu et al., Lost in the Middle, TACL 2024 · RepoQA, 2024">
             <a:extLst xmlns:a="http://schemas.openxmlformats.org/drawingml/2006/main">
               <a:ext uri="{FF2B5EF4-FFF2-40B4-BE49-F238E27FC236}">
-                <a16:creationId xmlns:a16="http://schemas.microsoft.com/office/drawing/2014/main" id="{7426758E-E9A1-4ACB-B3E8-774594904D66}"/>
+                <a16:creationId xmlns:a16="http://schemas.microsoft.com/office/drawing/2014/main" id="{9E95174A-A7DD-4826-89F8-F44D90B8EB0D}"/>
               </a:ext>
             </a:extLst>
           </p:cNvPr>
@@ -44168,7 +44168,7 @@
           <p:cNvPr id="6" name="특정 모델·과제의 결과 · 현재 Codex의 Repository coding 한계를 입증하지 않음">
             <a:extLst xmlns:a="http://schemas.openxmlformats.org/drawingml/2006/main">
               <a:ext uri="{FF2B5EF4-FFF2-40B4-BE49-F238E27FC236}">
-                <a16:creationId xmlns:a16="http://schemas.microsoft.com/office/drawing/2014/main" id="{994848F9-4515-46D2-9915-2215A9C74D1E}"/>
+                <a16:creationId xmlns:a16="http://schemas.microsoft.com/office/drawing/2014/main" id="{66389AF9-4D63-4C6D-AA2B-A732FBBB23DE}"/>
               </a:ext>
             </a:extLst>
           </p:cNvPr>
@@ -44326,7 +44326,7 @@
           <p:cNvPr id="7" name="더 많은 Context가 항상 더 좋은 것은 아니다">
             <a:extLst xmlns:a="http://schemas.openxmlformats.org/drawingml/2006/main">
               <a:ext uri="{FF2B5EF4-FFF2-40B4-BE49-F238E27FC236}">
-                <a16:creationId xmlns:a16="http://schemas.microsoft.com/office/drawing/2014/main" id="{0BD8D887-5824-4A98-A046-B3F52566C4ED}"/>
+                <a16:creationId xmlns:a16="http://schemas.microsoft.com/office/drawing/2014/main" id="{5E898CA4-C755-45A1-B81A-FF0CC58CD7F9}"/>
               </a:ext>
             </a:extLst>
           </p:cNvPr>
@@ -44484,7 +44484,7 @@
           <p:cNvPr id="8" name="Lost in the Middle">
             <a:extLst xmlns:a="http://schemas.openxmlformats.org/drawingml/2006/main">
               <a:ext uri="{FF2B5EF4-FFF2-40B4-BE49-F238E27FC236}">
-                <a16:creationId xmlns:a16="http://schemas.microsoft.com/office/drawing/2014/main" id="{76D5C8B9-7E73-407F-8967-6FAD4E6F102D}"/>
+                <a16:creationId xmlns:a16="http://schemas.microsoft.com/office/drawing/2014/main" id="{387E86CD-5BE3-4B72-A847-04396F23CDE2}"/>
               </a:ext>
             </a:extLst>
           </p:cNvPr>
@@ -44642,7 +44642,7 @@
           <p:cNvPr id="9" name="RepoQA">
             <a:extLst xmlns:a="http://schemas.openxmlformats.org/drawingml/2006/main">
               <a:ext uri="{FF2B5EF4-FFF2-40B4-BE49-F238E27FC236}">
-                <a16:creationId xmlns:a16="http://schemas.microsoft.com/office/drawing/2014/main" id="{4077AA63-CE13-42FF-A158-641810477FC4}"/>
+                <a16:creationId xmlns:a16="http://schemas.microsoft.com/office/drawing/2014/main" id="{D94CA73A-1F37-4CDF-90AA-1DCB10B13A69}"/>
               </a:ext>
             </a:extLst>
           </p:cNvPr>
@@ -44800,7 +44800,7 @@
           <p:cNvPr id="10" name="여러 문서의 질문 답변 · key-value 검색">
             <a:extLst xmlns:a="http://schemas.openxmlformats.org/drawingml/2006/main">
               <a:ext uri="{FF2B5EF4-FFF2-40B4-BE49-F238E27FC236}">
-                <a16:creationId xmlns:a16="http://schemas.microsoft.com/office/drawing/2014/main" id="{90EDA993-6FE7-492D-A9E0-78FD5E581F32}"/>
+                <a16:creationId xmlns:a16="http://schemas.microsoft.com/office/drawing/2014/main" id="{4B875860-D597-419A-9B03-75CC7ABE6337}"/>
               </a:ext>
             </a:extLst>
           </p:cNvPr>
@@ -44958,7 +44958,7 @@
           <p:cNvPr id="11" name="50개 Repository의 코드 검색 과제">
             <a:extLst xmlns:a="http://schemas.openxmlformats.org/drawingml/2006/main">
               <a:ext uri="{FF2B5EF4-FFF2-40B4-BE49-F238E27FC236}">
-                <a16:creationId xmlns:a16="http://schemas.microsoft.com/office/drawing/2014/main" id="{10C213D2-12C7-456E-93A2-41A0EA1C358E}"/>
+                <a16:creationId xmlns:a16="http://schemas.microsoft.com/office/drawing/2014/main" id="{D041D59E-19F1-4166-A0E8-8A6755B3F660}"/>
               </a:ext>
             </a:extLst>
           </p:cNvPr>
@@ -45116,7 +45116,7 @@
           <p:cNvPr id="12" name="관련 정보의 위치를 달리하는 구성">
             <a:extLst xmlns:a="http://schemas.openxmlformats.org/drawingml/2006/main">
               <a:ext uri="{FF2B5EF4-FFF2-40B4-BE49-F238E27FC236}">
-                <a16:creationId xmlns:a16="http://schemas.microsoft.com/office/drawing/2014/main" id="{D3ECF003-EACE-4A7F-AD27-0CD55544ED34}"/>
+                <a16:creationId xmlns:a16="http://schemas.microsoft.com/office/drawing/2014/main" id="{8557B346-DE4A-47A1-AB33-1E33AA572435}"/>
               </a:ext>
             </a:extLst>
           </p:cNvPr>
@@ -45274,7 +45274,7 @@
           <p:cNvPr id="13" name="">
             <a:extLst xmlns:a="http://schemas.openxmlformats.org/drawingml/2006/main">
               <a:ext uri="{FF2B5EF4-FFF2-40B4-BE49-F238E27FC236}">
-                <a16:creationId xmlns:a16="http://schemas.microsoft.com/office/drawing/2014/main" id="{0975BEA4-515F-4617-BBCB-236F74587056}"/>
+                <a16:creationId xmlns:a16="http://schemas.microsoft.com/office/drawing/2014/main" id="{65E2A3C9-505F-4ACE-B507-E94908B451F4}"/>
               </a:ext>
             </a:extLst>
           </p:cNvPr>
@@ -45307,7 +45307,7 @@
           <p:cNvPr id="14" name="">
             <a:extLst xmlns:a="http://schemas.openxmlformats.org/drawingml/2006/main">
               <a:ext uri="{FF2B5EF4-FFF2-40B4-BE49-F238E27FC236}">
-                <a16:creationId xmlns:a16="http://schemas.microsoft.com/office/drawing/2014/main" id="{B9EDF8CF-1416-4547-8E86-9D68DA989B66}"/>
+                <a16:creationId xmlns:a16="http://schemas.microsoft.com/office/drawing/2014/main" id="{DE8E9A65-5F93-46D0-B973-6C82FA44CFBF}"/>
               </a:ext>
             </a:extLst>
           </p:cNvPr>
@@ -45340,7 +45340,7 @@
           <p:cNvPr id="15" name="">
             <a:extLst xmlns:a="http://schemas.openxmlformats.org/drawingml/2006/main">
               <a:ext uri="{FF2B5EF4-FFF2-40B4-BE49-F238E27FC236}">
-                <a16:creationId xmlns:a16="http://schemas.microsoft.com/office/drawing/2014/main" id="{E334BE2D-3F1B-45EC-80DC-D27ACC16B74C}"/>
+                <a16:creationId xmlns:a16="http://schemas.microsoft.com/office/drawing/2014/main" id="{E190351D-17F5-401F-AE3E-7E5D8D8B091F}"/>
               </a:ext>
             </a:extLst>
           </p:cNvPr>
@@ -45373,7 +45373,7 @@
           <p:cNvPr id="16" name="">
             <a:extLst xmlns:a="http://schemas.openxmlformats.org/drawingml/2006/main">
               <a:ext uri="{FF2B5EF4-FFF2-40B4-BE49-F238E27FC236}">
-                <a16:creationId xmlns:a16="http://schemas.microsoft.com/office/drawing/2014/main" id="{46CDAE26-5413-4F43-B099-2C11D227BD8A}"/>
+                <a16:creationId xmlns:a16="http://schemas.microsoft.com/office/drawing/2014/main" id="{6FF0F157-E65F-4C4D-BAED-9B94A768A669}"/>
               </a:ext>
             </a:extLst>
           </p:cNvPr>
@@ -45406,7 +45406,7 @@
           <p:cNvPr id="17" name="">
             <a:extLst xmlns:a="http://schemas.openxmlformats.org/drawingml/2006/main">
               <a:ext uri="{FF2B5EF4-FFF2-40B4-BE49-F238E27FC236}">
-                <a16:creationId xmlns:a16="http://schemas.microsoft.com/office/drawing/2014/main" id="{24A16CE5-79B4-4218-B294-25C2FBFA3F1D}"/>
+                <a16:creationId xmlns:a16="http://schemas.microsoft.com/office/drawing/2014/main" id="{0CC127F3-6185-4FDE-9192-6DAF888C85CE}"/>
               </a:ext>
             </a:extLst>
           </p:cNvPr>
@@ -45439,7 +45439,7 @@
           <p:cNvPr id="18" name="">
             <a:extLst xmlns:a="http://schemas.openxmlformats.org/drawingml/2006/main">
               <a:ext uri="{FF2B5EF4-FFF2-40B4-BE49-F238E27FC236}">
-                <a16:creationId xmlns:a16="http://schemas.microsoft.com/office/drawing/2014/main" id="{02A557A6-B79D-4B53-B432-1103D9CBCA60}"/>
+                <a16:creationId xmlns:a16="http://schemas.microsoft.com/office/drawing/2014/main" id="{2C23A8A1-BE2C-406C-B6CF-5B2E2B9407E2}"/>
               </a:ext>
             </a:extLst>
           </p:cNvPr>
@@ -45472,7 +45472,7 @@
           <p:cNvPr id="19" name="">
             <a:extLst xmlns:a="http://schemas.openxmlformats.org/drawingml/2006/main">
               <a:ext uri="{FF2B5EF4-FFF2-40B4-BE49-F238E27FC236}">
-                <a16:creationId xmlns:a16="http://schemas.microsoft.com/office/drawing/2014/main" id="{9FEF51FF-7941-47B9-89A0-15BACC1A78EC}"/>
+                <a16:creationId xmlns:a16="http://schemas.microsoft.com/office/drawing/2014/main" id="{08EB6308-5A8F-4A14-A1DC-77F55F40FB8F}"/>
               </a:ext>
             </a:extLst>
           </p:cNvPr>
@@ -45505,7 +45505,7 @@
           <p:cNvPr id="20" name="">
             <a:extLst xmlns:a="http://schemas.openxmlformats.org/drawingml/2006/main">
               <a:ext uri="{FF2B5EF4-FFF2-40B4-BE49-F238E27FC236}">
-                <a16:creationId xmlns:a16="http://schemas.microsoft.com/office/drawing/2014/main" id="{817B63D8-A9C4-42AD-AAC8-D31BE7BC1876}"/>
+                <a16:creationId xmlns:a16="http://schemas.microsoft.com/office/drawing/2014/main" id="{E3472CA9-0F63-48A1-80BA-82A783232405}"/>
               </a:ext>
             </a:extLst>
           </p:cNvPr>
@@ -45538,7 +45538,7 @@
           <p:cNvPr id="21" name="">
             <a:extLst xmlns:a="http://schemas.openxmlformats.org/drawingml/2006/main">
               <a:ext uri="{FF2B5EF4-FFF2-40B4-BE49-F238E27FC236}">
-                <a16:creationId xmlns:a16="http://schemas.microsoft.com/office/drawing/2014/main" id="{62D02BE6-D4ED-421C-B683-873A92CFE820}"/>
+                <a16:creationId xmlns:a16="http://schemas.microsoft.com/office/drawing/2014/main" id="{1B498836-6345-4D1F-98CD-CB7A51C0DC31}"/>
               </a:ext>
             </a:extLst>
           </p:cNvPr>
@@ -45571,7 +45571,7 @@
           <p:cNvPr id="22" name="">
             <a:extLst xmlns:a="http://schemas.openxmlformats.org/drawingml/2006/main">
               <a:ext uri="{FF2B5EF4-FFF2-40B4-BE49-F238E27FC236}">
-                <a16:creationId xmlns:a16="http://schemas.microsoft.com/office/drawing/2014/main" id="{C988E8BE-6D85-44F6-9853-B692F53F21F3}"/>
+                <a16:creationId xmlns:a16="http://schemas.microsoft.com/office/drawing/2014/main" id="{380E3F25-2374-4AF2-B99F-B7024835E9EF}"/>
               </a:ext>
             </a:extLst>
           </p:cNvPr>
@@ -45604,7 +45604,7 @@
           <p:cNvPr id="23" name="">
             <a:extLst xmlns:a="http://schemas.openxmlformats.org/drawingml/2006/main">
               <a:ext uri="{FF2B5EF4-FFF2-40B4-BE49-F238E27FC236}">
-                <a16:creationId xmlns:a16="http://schemas.microsoft.com/office/drawing/2014/main" id="{6648ADBF-C836-4A61-A387-B4758ACA5BFC}"/>
+                <a16:creationId xmlns:a16="http://schemas.microsoft.com/office/drawing/2014/main" id="{BD31E22D-361B-45D2-A8B5-41B8931D4E34}"/>
               </a:ext>
             </a:extLst>
           </p:cNvPr>
@@ -45637,7 +45637,7 @@
           <p:cNvPr id="24" name="">
             <a:extLst xmlns:a="http://schemas.openxmlformats.org/drawingml/2006/main">
               <a:ext uri="{FF2B5EF4-FFF2-40B4-BE49-F238E27FC236}">
-                <a16:creationId xmlns:a16="http://schemas.microsoft.com/office/drawing/2014/main" id="{D62D051F-F69B-4880-ACBA-F3134DCA5157}"/>
+                <a16:creationId xmlns:a16="http://schemas.microsoft.com/office/drawing/2014/main" id="{AFE1F7B1-5A54-4909-8D4F-18460AA5DF94}"/>
               </a:ext>
             </a:extLst>
           </p:cNvPr>
@@ -45670,7 +45670,7 @@
           <p:cNvPr id="25" name="">
             <a:extLst xmlns:a="http://schemas.openxmlformats.org/drawingml/2006/main">
               <a:ext uri="{FF2B5EF4-FFF2-40B4-BE49-F238E27FC236}">
-                <a16:creationId xmlns:a16="http://schemas.microsoft.com/office/drawing/2014/main" id="{8C862985-8993-4A3F-BE1A-BCF9A3EC008C}"/>
+                <a16:creationId xmlns:a16="http://schemas.microsoft.com/office/drawing/2014/main" id="{DE4D2960-15B4-4FC9-B68D-8302296F1AC4}"/>
               </a:ext>
             </a:extLst>
           </p:cNvPr>
@@ -45703,7 +45703,7 @@
           <p:cNvPr id="26" name="">
             <a:extLst xmlns:a="http://schemas.openxmlformats.org/drawingml/2006/main">
               <a:ext uri="{FF2B5EF4-FFF2-40B4-BE49-F238E27FC236}">
-                <a16:creationId xmlns:a16="http://schemas.microsoft.com/office/drawing/2014/main" id="{5627AF6A-EE7D-447B-A825-4E64B4D6042B}"/>
+                <a16:creationId xmlns:a16="http://schemas.microsoft.com/office/drawing/2014/main" id="{07CAC182-08CE-4C22-806F-5C70D0A5BE48}"/>
               </a:ext>
             </a:extLst>
           </p:cNvPr>
@@ -45736,7 +45736,7 @@
           <p:cNvPr id="27" name="">
             <a:extLst xmlns:a="http://schemas.openxmlformats.org/drawingml/2006/main">
               <a:ext uri="{FF2B5EF4-FFF2-40B4-BE49-F238E27FC236}">
-                <a16:creationId xmlns:a16="http://schemas.microsoft.com/office/drawing/2014/main" id="{183421D9-A0FB-4E8F-A3FE-C1C8D1D66920}"/>
+                <a16:creationId xmlns:a16="http://schemas.microsoft.com/office/drawing/2014/main" id="{6E06434E-293D-4135-BD12-2CE5A2DBD932}"/>
               </a:ext>
             </a:extLst>
           </p:cNvPr>
@@ -45769,7 +45769,7 @@
           <p:cNvPr id="28" name="질문">
             <a:extLst xmlns:a="http://schemas.openxmlformats.org/drawingml/2006/main">
               <a:ext uri="{FF2B5EF4-FFF2-40B4-BE49-F238E27FC236}">
-                <a16:creationId xmlns:a16="http://schemas.microsoft.com/office/drawing/2014/main" id="{4660DF9F-CCA2-4037-AD7C-206000E252AF}"/>
+                <a16:creationId xmlns:a16="http://schemas.microsoft.com/office/drawing/2014/main" id="{EB561274-93C6-4329-8AD7-9724F6CAA049}"/>
               </a:ext>
             </a:extLst>
           </p:cNvPr>
@@ -45927,7 +45927,7 @@
           <p:cNvPr id="29" name="">
             <a:extLst xmlns:a="http://schemas.openxmlformats.org/drawingml/2006/main">
               <a:ext uri="{FF2B5EF4-FFF2-40B4-BE49-F238E27FC236}">
-                <a16:creationId xmlns:a16="http://schemas.microsoft.com/office/drawing/2014/main" id="{C02638CB-2D5C-46CD-89A1-58FC3E748DB6}"/>
+                <a16:creationId xmlns:a16="http://schemas.microsoft.com/office/drawing/2014/main" id="{69428B5F-7BBB-4481-B0E4-474334D916B5}"/>
               </a:ext>
             </a:extLst>
           </p:cNvPr>
@@ -45957,7 +45957,7 @@
           <p:cNvPr id="30" name="">
             <a:extLst xmlns:a="http://schemas.openxmlformats.org/drawingml/2006/main">
               <a:ext uri="{FF2B5EF4-FFF2-40B4-BE49-F238E27FC236}">
-                <a16:creationId xmlns:a16="http://schemas.microsoft.com/office/drawing/2014/main" id="{C1E4543F-03FC-47DA-A6C3-3A70D913EF11}"/>
+                <a16:creationId xmlns:a16="http://schemas.microsoft.com/office/drawing/2014/main" id="{917D9954-692B-4336-8CF2-10461D5B8171}"/>
               </a:ext>
             </a:extLst>
           </p:cNvPr>
@@ -45990,7 +45990,7 @@
           <p:cNvPr id="31" name="Repository의 코드">
             <a:extLst xmlns:a="http://schemas.openxmlformats.org/drawingml/2006/main">
               <a:ext uri="{FF2B5EF4-FFF2-40B4-BE49-F238E27FC236}">
-                <a16:creationId xmlns:a16="http://schemas.microsoft.com/office/drawing/2014/main" id="{148CE76A-AB49-4BB1-ABC4-2619906D3A9C}"/>
+                <a16:creationId xmlns:a16="http://schemas.microsoft.com/office/drawing/2014/main" id="{CF8C2BB8-1F16-47EB-9A79-8595637D7578}"/>
               </a:ext>
             </a:extLst>
           </p:cNvPr>
@@ -46148,7 +46148,7 @@
           <p:cNvPr id="32" name="관련 코드 찾기">
             <a:extLst xmlns:a="http://schemas.openxmlformats.org/drawingml/2006/main">
               <a:ext uri="{FF2B5EF4-FFF2-40B4-BE49-F238E27FC236}">
-                <a16:creationId xmlns:a16="http://schemas.microsoft.com/office/drawing/2014/main" id="{759CC08C-34BD-4DD2-BCAF-324FF6627231}"/>
+                <a16:creationId xmlns:a16="http://schemas.microsoft.com/office/drawing/2014/main" id="{6B0F6515-AD04-49FA-9E03-AC2A1DE123F6}"/>
               </a:ext>
             </a:extLst>
           </p:cNvPr>
@@ -46306,7 +46306,7 @@
           <p:cNvPr id="33" name="관련 정보의 위치가&#10;일부 조건에서 중요할 수 있다">
             <a:extLst xmlns:a="http://schemas.openxmlformats.org/drawingml/2006/main">
               <a:ext uri="{FF2B5EF4-FFF2-40B4-BE49-F238E27FC236}">
-                <a16:creationId xmlns:a16="http://schemas.microsoft.com/office/drawing/2014/main" id="{753CF5FC-61FA-43F4-8F72-FEC1D76CFF23}"/>
+                <a16:creationId xmlns:a16="http://schemas.microsoft.com/office/drawing/2014/main" id="{F776B4D8-3FB0-474F-8148-8B1A7CDC8411}"/>
               </a:ext>
             </a:extLst>
           </p:cNvPr>
@@ -46487,7 +46487,7 @@
           <p:cNvPr id="34" name="관련 코드 정보를&#10;선택하고 찾는 능력을 평가">
             <a:extLst xmlns:a="http://schemas.openxmlformats.org/drawingml/2006/main">
               <a:ext uri="{FF2B5EF4-FFF2-40B4-BE49-F238E27FC236}">
-                <a16:creationId xmlns:a16="http://schemas.microsoft.com/office/drawing/2014/main" id="{7B3E8464-4BC9-46AE-8236-2848936AA663}"/>
+                <a16:creationId xmlns:a16="http://schemas.microsoft.com/office/drawing/2014/main" id="{703AA459-F52C-4E2E-BDF0-3911DDA41A7A}"/>
               </a:ext>
             </a:extLst>
           </p:cNvPr>
@@ -46668,7 +46668,7 @@
           <p:cNvPr id="35" name="aclanthology.org/2024.tacl-1.9/">
             <a:extLst xmlns:a="http://schemas.openxmlformats.org/drawingml/2006/main">
               <a:ext uri="{FF2B5EF4-FFF2-40B4-BE49-F238E27FC236}">
-                <a16:creationId xmlns:a16="http://schemas.microsoft.com/office/drawing/2014/main" id="{4136F4D8-A219-450A-90A7-D0BB5BE2B7E1}"/>
+                <a16:creationId xmlns:a16="http://schemas.microsoft.com/office/drawing/2014/main" id="{FF420632-78C8-41AE-86B4-F0725B5EA6E7}"/>
               </a:ext>
             </a:extLst>
           </p:cNvPr>
@@ -46826,7 +46826,7 @@
           <p:cNvPr id="36" name="arxiv.org/abs/2406.06025">
             <a:extLst xmlns:a="http://schemas.openxmlformats.org/drawingml/2006/main">
               <a:ext uri="{FF2B5EF4-FFF2-40B4-BE49-F238E27FC236}">
-                <a16:creationId xmlns:a16="http://schemas.microsoft.com/office/drawing/2014/main" id="{FA54E933-1CB9-4FFC-BB23-3F7386606AEB}"/>
+                <a16:creationId xmlns:a16="http://schemas.microsoft.com/office/drawing/2014/main" id="{A364B8D8-DD78-4483-8719-9F4A5E31770F}"/>
               </a:ext>
             </a:extLst>
           </p:cNvPr>
@@ -46984,7 +46984,7 @@
           <p:cNvPr id="37" name="Legacy module connection">
             <a:extLst xmlns:a="http://schemas.openxmlformats.org/drawingml/2006/main">
               <a:ext uri="{FF2B5EF4-FFF2-40B4-BE49-F238E27FC236}">
-                <a16:creationId xmlns:a16="http://schemas.microsoft.com/office/drawing/2014/main" id="{E0E706F6-6318-4625-A179-13AB2915DE60}"/>
+                <a16:creationId xmlns:a16="http://schemas.microsoft.com/office/drawing/2014/main" id="{F2E4C352-53E6-4BD3-8F4C-B18F17D9CFBE}"/>
               </a:ext>
             </a:extLst>
           </p:cNvPr>
@@ -47140,7 +47140,7 @@
     </p:spTree>
     <p:extLst>
       <p:ext uri="{BB962C8B-B14F-4D97-AF65-F5344CB8AC3E}">
-        <p14:creationId xmlns:p14="http://schemas.microsoft.com/office/powerpoint/2010/main" val="249873862"/>
+        <p14:creationId xmlns:p14="http://schemas.microsoft.com/office/powerpoint/2010/main" val="1348319445"/>
       </p:ext>
     </p:extLst>
   </p:cSld>
@@ -47171,7 +47171,7 @@
           <p:cNvPr id="21" name="ACT 2 · 필요한 상세 정보의 탐색 경로">
             <a:extLst xmlns:a="http://schemas.openxmlformats.org/drawingml/2006/main">
               <a:ext uri="{FF2B5EF4-FFF2-40B4-BE49-F238E27FC236}">
-                <a16:creationId xmlns:a16="http://schemas.microsoft.com/office/drawing/2014/main" id="{2994C100-44B8-4F0F-A84E-A033AF0CE6FC}"/>
+                <a16:creationId xmlns:a16="http://schemas.microsoft.com/office/drawing/2014/main" id="{4667B5C0-B1D0-425D-910E-3B29253FD555}"/>
               </a:ext>
             </a:extLst>
           </p:cNvPr>
@@ -47326,10 +47326,10 @@
       </p:sp>
       <p:sp>
         <p:nvSpPr>
-          <p:cNvPr id="2" name="S31">
+          <p:cNvPr id="2" name="S32">
             <a:extLst xmlns:a="http://schemas.openxmlformats.org/drawingml/2006/main">
               <a:ext uri="{FF2B5EF4-FFF2-40B4-BE49-F238E27FC236}">
-                <a16:creationId xmlns:a16="http://schemas.microsoft.com/office/drawing/2014/main" id="{A01B06D9-F428-405E-85D0-B1767AC4BB6E}"/>
+                <a16:creationId xmlns:a16="http://schemas.microsoft.com/office/drawing/2014/main" id="{313C36CD-13BF-4148-9745-8DE91CDB75C5}"/>
               </a:ext>
             </a:extLst>
           </p:cNvPr>
@@ -47477,7 +47477,7 @@
                 <a:ea typeface="Malgun Gothic"/>
                 <a:cs typeface="Malgun Gothic"/>
               </a:rPr>
-              <a:t>S31</a:t>
+              <a:t>S32</a:t>
             </a:r>
           </a:p>
         </p:txBody>
@@ -47487,7 +47487,7 @@
           <p:cNvPr id="3" name="필요한 상세 정보로 가는 길">
             <a:extLst xmlns:a="http://schemas.openxmlformats.org/drawingml/2006/main">
               <a:ext uri="{FF2B5EF4-FFF2-40B4-BE49-F238E27FC236}">
-                <a16:creationId xmlns:a16="http://schemas.microsoft.com/office/drawing/2014/main" id="{1AB663EA-F76A-45E9-94CB-632DED293D54}"/>
+                <a16:creationId xmlns:a16="http://schemas.microsoft.com/office/drawing/2014/main" id="{EF02402D-E93E-45E3-AEE9-72C1E162AEC9}"/>
               </a:ext>
             </a:extLst>
           </p:cNvPr>
@@ -47645,7 +47645,7 @@
           <p:cNvPr id="4" name="">
             <a:extLst xmlns:a="http://schemas.openxmlformats.org/drawingml/2006/main">
               <a:ext uri="{FF2B5EF4-FFF2-40B4-BE49-F238E27FC236}">
-                <a16:creationId xmlns:a16="http://schemas.microsoft.com/office/drawing/2014/main" id="{1907E8DD-1358-455D-B925-0E99E57524D0}"/>
+                <a16:creationId xmlns:a16="http://schemas.microsoft.com/office/drawing/2014/main" id="{B8FC1BA9-3629-477C-A2F4-08D0D6BC5EAB}"/>
               </a:ext>
             </a:extLst>
           </p:cNvPr>
@@ -47676,7 +47676,7 @@
           <p:cNvPr id="5" name="교육용 Routing 모델 · 실제 문서 접근 결과는 다음 구간에서 확인">
             <a:extLst xmlns:a="http://schemas.openxmlformats.org/drawingml/2006/main">
               <a:ext uri="{FF2B5EF4-FFF2-40B4-BE49-F238E27FC236}">
-                <a16:creationId xmlns:a16="http://schemas.microsoft.com/office/drawing/2014/main" id="{406FF35C-73E3-4840-883A-EB843D6959A5}"/>
+                <a16:creationId xmlns:a16="http://schemas.microsoft.com/office/drawing/2014/main" id="{9B0D8327-90FB-4F9F-AB02-842ADC61A10A}"/>
               </a:ext>
             </a:extLst>
           </p:cNvPr>
@@ -47834,7 +47834,7 @@
           <p:cNvPr id="6" name="검색 성능 향상이나 토큰 절약을 입증한 그림이 아님">
             <a:extLst xmlns:a="http://schemas.openxmlformats.org/drawingml/2006/main">
               <a:ext uri="{FF2B5EF4-FFF2-40B4-BE49-F238E27FC236}">
-                <a16:creationId xmlns:a16="http://schemas.microsoft.com/office/drawing/2014/main" id="{1ABF6580-437B-47D2-AF3C-64481636BB9D}"/>
+                <a16:creationId xmlns:a16="http://schemas.microsoft.com/office/drawing/2014/main" id="{339E2E1C-C8BE-416C-A95D-00F2D418030E}"/>
               </a:ext>
             </a:extLst>
           </p:cNvPr>
@@ -47992,7 +47992,7 @@
           <p:cNvPr id="7" name="어떤 질문에서 어떤 상세 정보가 필요할까?">
             <a:extLst xmlns:a="http://schemas.openxmlformats.org/drawingml/2006/main">
               <a:ext uri="{FF2B5EF4-FFF2-40B4-BE49-F238E27FC236}">
-                <a16:creationId xmlns:a16="http://schemas.microsoft.com/office/drawing/2014/main" id="{19560103-1862-422A-9DFA-1FBB5C5E3D75}"/>
+                <a16:creationId xmlns:a16="http://schemas.microsoft.com/office/drawing/2014/main" id="{71C29E6D-3D2C-4C45-BAFA-5045859AAEEF}"/>
               </a:ext>
             </a:extLst>
           </p:cNvPr>
@@ -48150,7 +48150,7 @@
           <p:cNvPr id="8" name="">
             <a:extLst xmlns:a="http://schemas.openxmlformats.org/drawingml/2006/main">
               <a:ext uri="{FF2B5EF4-FFF2-40B4-BE49-F238E27FC236}">
-                <a16:creationId xmlns:a16="http://schemas.microsoft.com/office/drawing/2014/main" id="{43BA1B1A-2076-46C8-BD83-72AAF4D58E52}"/>
+                <a16:creationId xmlns:a16="http://schemas.microsoft.com/office/drawing/2014/main" id="{CDC1E14C-81DD-4541-968B-9DB0BC0033D7}"/>
               </a:ext>
             </a:extLst>
           </p:cNvPr>
@@ -48181,7 +48181,7 @@
           <p:cNvPr id="9" name="Task">
             <a:extLst xmlns:a="http://schemas.openxmlformats.org/drawingml/2006/main">
               <a:ext uri="{FF2B5EF4-FFF2-40B4-BE49-F238E27FC236}">
-                <a16:creationId xmlns:a16="http://schemas.microsoft.com/office/drawing/2014/main" id="{99465FE6-A207-4EB9-A2AC-2D1A081E380F}"/>
+                <a16:creationId xmlns:a16="http://schemas.microsoft.com/office/drawing/2014/main" id="{9C3A81C5-E12B-40BD-8833-CB3B9D9BC5F2}"/>
               </a:ext>
             </a:extLst>
           </p:cNvPr>
@@ -48339,7 +48339,7 @@
           <p:cNvPr id="10" name="지금 해결할 질문">
             <a:extLst xmlns:a="http://schemas.openxmlformats.org/drawingml/2006/main">
               <a:ext uri="{FF2B5EF4-FFF2-40B4-BE49-F238E27FC236}">
-                <a16:creationId xmlns:a16="http://schemas.microsoft.com/office/drawing/2014/main" id="{48CED4D1-74B9-4F19-82C4-6A5CDEE05DB1}"/>
+                <a16:creationId xmlns:a16="http://schemas.microsoft.com/office/drawing/2014/main" id="{F0905F7D-B4AC-4622-9E42-19DCCCC72ED5}"/>
               </a:ext>
             </a:extLst>
           </p:cNvPr>
@@ -48497,7 +48497,7 @@
           <p:cNvPr id="11" name="">
             <a:extLst xmlns:a="http://schemas.openxmlformats.org/drawingml/2006/main">
               <a:ext uri="{FF2B5EF4-FFF2-40B4-BE49-F238E27FC236}">
-                <a16:creationId xmlns:a16="http://schemas.microsoft.com/office/drawing/2014/main" id="{22610A07-8AB0-4047-8D84-BBFFA2753FAA}"/>
+                <a16:creationId xmlns:a16="http://schemas.microsoft.com/office/drawing/2014/main" id="{D31299D9-871E-4535-B05B-F991D1DFD482}"/>
               </a:ext>
             </a:extLst>
           </p:cNvPr>
@@ -48527,7 +48527,7 @@
           <p:cNvPr id="12" name="">
             <a:extLst xmlns:a="http://schemas.openxmlformats.org/drawingml/2006/main">
               <a:ext uri="{FF2B5EF4-FFF2-40B4-BE49-F238E27FC236}">
-                <a16:creationId xmlns:a16="http://schemas.microsoft.com/office/drawing/2014/main" id="{47716F5E-9E11-4BC9-9CB6-E09CDBCC9883}"/>
+                <a16:creationId xmlns:a16="http://schemas.microsoft.com/office/drawing/2014/main" id="{2F008C2B-943A-4C76-A84D-AD4BFDDB514B}"/>
               </a:ext>
             </a:extLst>
           </p:cNvPr>
@@ -48558,7 +48558,7 @@
           <p:cNvPr id="13" name="Core Context">
             <a:extLst xmlns:a="http://schemas.openxmlformats.org/drawingml/2006/main">
               <a:ext uri="{FF2B5EF4-FFF2-40B4-BE49-F238E27FC236}">
-                <a16:creationId xmlns:a16="http://schemas.microsoft.com/office/drawing/2014/main" id="{7671F511-9877-47B1-B4D4-CD6E20A9F371}"/>
+                <a16:creationId xmlns:a16="http://schemas.microsoft.com/office/drawing/2014/main" id="{4BF8B9C9-FF72-4DCF-98A9-DBA1BE83A51C}"/>
               </a:ext>
             </a:extLst>
           </p:cNvPr>
@@ -48716,7 +48716,7 @@
           <p:cNvPr id="14" name="프로젝트 안내와&#10;찾아갈 위치">
             <a:extLst xmlns:a="http://schemas.openxmlformats.org/drawingml/2006/main">
               <a:ext uri="{FF2B5EF4-FFF2-40B4-BE49-F238E27FC236}">
-                <a16:creationId xmlns:a16="http://schemas.microsoft.com/office/drawing/2014/main" id="{AFE675BD-F6C3-413C-9ED9-E9F0FFCFDA1D}"/>
+                <a16:creationId xmlns:a16="http://schemas.microsoft.com/office/drawing/2014/main" id="{3BEFA54B-C41F-4C7D-A9BC-88CC1B97BCF1}"/>
               </a:ext>
             </a:extLst>
           </p:cNvPr>
@@ -48897,7 +48897,7 @@
           <p:cNvPr id="15" name="">
             <a:extLst xmlns:a="http://schemas.openxmlformats.org/drawingml/2006/main">
               <a:ext uri="{FF2B5EF4-FFF2-40B4-BE49-F238E27FC236}">
-                <a16:creationId xmlns:a16="http://schemas.microsoft.com/office/drawing/2014/main" id="{66C841A4-AB81-4ABE-B142-18A0F6419B4B}"/>
+                <a16:creationId xmlns:a16="http://schemas.microsoft.com/office/drawing/2014/main" id="{DA87EAC6-51C7-4D74-9EA8-3CFA6E396506}"/>
               </a:ext>
             </a:extLst>
           </p:cNvPr>
@@ -48927,7 +48927,7 @@
           <p:cNvPr id="16" name="">
             <a:extLst xmlns:a="http://schemas.openxmlformats.org/drawingml/2006/main">
               <a:ext uri="{FF2B5EF4-FFF2-40B4-BE49-F238E27FC236}">
-                <a16:creationId xmlns:a16="http://schemas.microsoft.com/office/drawing/2014/main" id="{3B6DC8F5-E5AF-407F-B17A-170CA17D02A6}"/>
+                <a16:creationId xmlns:a16="http://schemas.microsoft.com/office/drawing/2014/main" id="{A4CAF7B5-DFE4-48FE-9BF4-3F00EED2510F}"/>
               </a:ext>
             </a:extLst>
           </p:cNvPr>
@@ -48958,7 +48958,7 @@
           <p:cNvPr id="17" name="관련 상세 정보">
             <a:extLst xmlns:a="http://schemas.openxmlformats.org/drawingml/2006/main">
               <a:ext uri="{FF2B5EF4-FFF2-40B4-BE49-F238E27FC236}">
-                <a16:creationId xmlns:a16="http://schemas.microsoft.com/office/drawing/2014/main" id="{270368C0-4F58-4213-9B78-EE11F7487333}"/>
+                <a16:creationId xmlns:a16="http://schemas.microsoft.com/office/drawing/2014/main" id="{8ECAA4D7-9200-4071-BD8E-800928B25931}"/>
               </a:ext>
             </a:extLst>
           </p:cNvPr>
@@ -49116,7 +49116,7 @@
           <p:cNvPr id="18" name="질문에 필요한&#10;계약 · 구조 · 테스트">
             <a:extLst xmlns:a="http://schemas.openxmlformats.org/drawingml/2006/main">
               <a:ext uri="{FF2B5EF4-FFF2-40B4-BE49-F238E27FC236}">
-                <a16:creationId xmlns:a16="http://schemas.microsoft.com/office/drawing/2014/main" id="{6AD7D134-5C4E-4537-9671-AFA9647C7A52}"/>
+                <a16:creationId xmlns:a16="http://schemas.microsoft.com/office/drawing/2014/main" id="{EA66A5B8-A7CF-4918-9494-2D91DBD4EC0C}"/>
               </a:ext>
             </a:extLst>
           </p:cNvPr>
@@ -49297,7 +49297,7 @@
           <p:cNvPr id="19" name="C++ 예: 공통 제약을 확인한 뒤, 해당 알고리즘의 계약으로">
             <a:extLst xmlns:a="http://schemas.openxmlformats.org/drawingml/2006/main">
               <a:ext uri="{FF2B5EF4-FFF2-40B4-BE49-F238E27FC236}">
-                <a16:creationId xmlns:a16="http://schemas.microsoft.com/office/drawing/2014/main" id="{AB9DF8E7-3D57-4EEB-BE69-0E9531408CD4}"/>
+                <a16:creationId xmlns:a16="http://schemas.microsoft.com/office/drawing/2014/main" id="{6FF09B60-E5E9-4470-9257-D3BB6037D029}"/>
               </a:ext>
             </a:extLst>
           </p:cNvPr>
@@ -49455,7 +49455,7 @@
           <p:cNvPr id="20" name="Legacy module connection">
             <a:extLst xmlns:a="http://schemas.openxmlformats.org/drawingml/2006/main">
               <a:ext uri="{FF2B5EF4-FFF2-40B4-BE49-F238E27FC236}">
-                <a16:creationId xmlns:a16="http://schemas.microsoft.com/office/drawing/2014/main" id="{4B13B949-3B40-461E-B37A-374503D33879}"/>
+                <a16:creationId xmlns:a16="http://schemas.microsoft.com/office/drawing/2014/main" id="{13FCAB07-84AD-4ED4-A9A5-4C4DD7252F39}"/>
               </a:ext>
             </a:extLst>
           </p:cNvPr>
@@ -49611,7 +49611,7 @@
     </p:spTree>
     <p:extLst>
       <p:ext uri="{BB962C8B-B14F-4D97-AF65-F5344CB8AC3E}">
-        <p14:creationId xmlns:p14="http://schemas.microsoft.com/office/powerpoint/2010/main" val="1420398213"/>
+        <p14:creationId xmlns:p14="http://schemas.microsoft.com/office/powerpoint/2010/main" val="1580477114"/>
       </p:ext>
     </p:extLst>
   </p:cSld>

--- a/production/ACT_2.pptx
+++ b/production/ACT_2.pptx
@@ -2,27 +2,27 @@
 <file path=ppt/presentation.xml><?xml version="1.0" encoding="utf-8"?>
 <p:presentation xmlns:p="http://schemas.openxmlformats.org/presentationml/2006/main">
   <p:sldMasterIdLst>
-    <p:sldMasterId xmlns:r="http://schemas.openxmlformats.org/officeDocument/2006/relationships" id="2147483648" r:id="R3fe6753ade3a4969"/>
+    <p:sldMasterId xmlns:r="http://schemas.openxmlformats.org/officeDocument/2006/relationships" id="2147483648" r:id="Ref5176de796e4ecf"/>
   </p:sldMasterIdLst>
   <p:notesMasterIdLst>
-    <p:notesMasterId xmlns:r="http://schemas.openxmlformats.org/officeDocument/2006/relationships" r:id="Rcbfa6c063d274d0c"/>
+    <p:notesMasterId xmlns:r="http://schemas.openxmlformats.org/officeDocument/2006/relationships" r:id="Rdc91cfe6260946dd"/>
   </p:notesMasterIdLst>
   <p:sldIdLst>
-    <p:sldId xmlns:r="http://schemas.openxmlformats.org/officeDocument/2006/relationships" id="256" r:id="R2c781d7d032a4105"/>
-    <p:sldId xmlns:r="http://schemas.openxmlformats.org/officeDocument/2006/relationships" id="257" r:id="R30d075eb5be14490"/>
-    <p:sldId xmlns:r="http://schemas.openxmlformats.org/officeDocument/2006/relationships" id="258" r:id="R1c155e570dc34f63"/>
-    <p:sldId xmlns:r="http://schemas.openxmlformats.org/officeDocument/2006/relationships" id="259" r:id="Rfbfd711d8dc14881"/>
-    <p:sldId xmlns:r="http://schemas.openxmlformats.org/officeDocument/2006/relationships" id="260" r:id="R8b5e30b3a121496b"/>
-    <p:sldId xmlns:r="http://schemas.openxmlformats.org/officeDocument/2006/relationships" id="261" r:id="Rc5204b05b5c14b59"/>
-    <p:sldId xmlns:r="http://schemas.openxmlformats.org/officeDocument/2006/relationships" id="262" r:id="Re0597e6c33fe4a4d"/>
-    <p:sldId xmlns:r="http://schemas.openxmlformats.org/officeDocument/2006/relationships" id="263" r:id="R2f2236cb1953404a"/>
-    <p:sldId xmlns:r="http://schemas.openxmlformats.org/officeDocument/2006/relationships" id="264" r:id="R155053507f1b453d"/>
-    <p:sldId xmlns:r="http://schemas.openxmlformats.org/officeDocument/2006/relationships" id="265" r:id="R5100a09c97d546f3"/>
-    <p:sldId xmlns:r="http://schemas.openxmlformats.org/officeDocument/2006/relationships" id="266" r:id="R00f8908e436b467a"/>
-    <p:sldId xmlns:r="http://schemas.openxmlformats.org/officeDocument/2006/relationships" id="267" r:id="R8cca08415d064fd4"/>
-    <p:sldId xmlns:r="http://schemas.openxmlformats.org/officeDocument/2006/relationships" id="268" r:id="R096b96132dbd48e8"/>
-    <p:sldId xmlns:r="http://schemas.openxmlformats.org/officeDocument/2006/relationships" id="269" r:id="R9ca327edd7a74c17"/>
-    <p:sldId xmlns:r="http://schemas.openxmlformats.org/officeDocument/2006/relationships" id="270" r:id="Ra2d90fa2a39d4aab"/>
+    <p:sldId xmlns:r="http://schemas.openxmlformats.org/officeDocument/2006/relationships" id="256" r:id="R62840e897c624e88"/>
+    <p:sldId xmlns:r="http://schemas.openxmlformats.org/officeDocument/2006/relationships" id="257" r:id="Rb1344b0df96845ac"/>
+    <p:sldId xmlns:r="http://schemas.openxmlformats.org/officeDocument/2006/relationships" id="258" r:id="Rbd910bfddb08485b"/>
+    <p:sldId xmlns:r="http://schemas.openxmlformats.org/officeDocument/2006/relationships" id="259" r:id="R8617adf3b4854f0f"/>
+    <p:sldId xmlns:r="http://schemas.openxmlformats.org/officeDocument/2006/relationships" id="260" r:id="R61da981287c545fe"/>
+    <p:sldId xmlns:r="http://schemas.openxmlformats.org/officeDocument/2006/relationships" id="261" r:id="R9fb1d4ea04484058"/>
+    <p:sldId xmlns:r="http://schemas.openxmlformats.org/officeDocument/2006/relationships" id="262" r:id="R51f9d52b25a34e18"/>
+    <p:sldId xmlns:r="http://schemas.openxmlformats.org/officeDocument/2006/relationships" id="263" r:id="R89278e629a8f494c"/>
+    <p:sldId xmlns:r="http://schemas.openxmlformats.org/officeDocument/2006/relationships" id="264" r:id="Rfe3b5bc1faf34bda"/>
+    <p:sldId xmlns:r="http://schemas.openxmlformats.org/officeDocument/2006/relationships" id="265" r:id="Rbb03b898e4ad4749"/>
+    <p:sldId xmlns:r="http://schemas.openxmlformats.org/officeDocument/2006/relationships" id="266" r:id="R1e2f7c913a674854"/>
+    <p:sldId xmlns:r="http://schemas.openxmlformats.org/officeDocument/2006/relationships" id="267" r:id="R34b58192e3674d65"/>
+    <p:sldId xmlns:r="http://schemas.openxmlformats.org/officeDocument/2006/relationships" id="268" r:id="Red12ceb17244463e"/>
+    <p:sldId xmlns:r="http://schemas.openxmlformats.org/officeDocument/2006/relationships" id="269" r:id="R2405336ccf8046b0"/>
+    <p:sldId xmlns:r="http://schemas.openxmlformats.org/officeDocument/2006/relationships" id="270" r:id="R200897ef6e6745d2"/>
   </p:sldIdLst>
   <p:sldSz cx="12192000" cy="6858000"/>
   <p:notesSz cx="6858000" cy="9144000"/>
@@ -456,7 +456,7 @@
           <a:lstStyle xmlns:a="http://schemas.openxmlformats.org/drawingml/2006/main"/>
           <a:p xmlns:a="http://schemas.openxmlformats.org/drawingml/2006/main">
             <a:r>
-              <a:t>## S24 — 다른 Task에 같은 설명이 반복된다</a:t>
+              <a:t>## S32 — 다른 Task에 같은 설명이 반복된다</a:t>
             </a:r>
           </a:p>
           <a:p xmlns:a="http://schemas.openxmlformats.org/drawingml/2006/main">
@@ -466,7 +466,7 @@
           </a:p>
           <a:p xmlns:a="http://schemas.openxmlformats.org/drawingml/2006/main">
             <a:r>
-              <a:t>Slide ID: S24</a:t>
+              <a:t>Slide ID: S32</a:t>
             </a:r>
           </a:p>
           <a:p xmlns:a="http://schemas.openxmlformats.org/drawingml/2006/main">
@@ -656,7 +656,7 @@
           </a:p>
           <a:p xmlns:a="http://schemas.openxmlformats.org/drawingml/2006/main">
             <a:r>
-              <a:t>Fallback: LOCAL STATIC ARTIFACT — 발표 기본 경로는 `production/ACT_2.pptx`의 S24 또는 `production/preview/act2/S24.png`다. 수정 초안 정적 화면은 존재하며 최종 release 경로·내용 일치는 통합 검토에서 확인한다. 실제 Trial 캡처나 현재 제품 실행으로 표현하지 않는다.</a:t>
+              <a:t>Fallback: LOCAL STATIC ARTIFACT — 발표 기본 경로는 `production/ACT_2.pptx`의 S32 또는 `production/preview/act2/S32.png`다. 수정 초안 정적 화면은 존재하며 최종 release 경로·내용 일치는 통합 검토에서 확인한다. 실제 Trial 캡처나 현재 제품 실행으로 표현하지 않는다.</a:t>
             </a:r>
           </a:p>
           <a:p xmlns:a="http://schemas.openxmlformats.org/drawingml/2006/main">
@@ -736,7 +736,7 @@
           <a:lstStyle xmlns:a="http://schemas.openxmlformats.org/drawingml/2006/main"/>
           <a:p xmlns:a="http://schemas.openxmlformats.org/drawingml/2006/main">
             <a:r>
-              <a:t>## S33 — Core Context에서 상세 정보로 가는 길</a:t>
+              <a:t>## S41 — Core Context에서 상세 정보로 가는 길</a:t>
             </a:r>
           </a:p>
           <a:p xmlns:a="http://schemas.openxmlformats.org/drawingml/2006/main">
@@ -746,7 +746,7 @@
           </a:p>
           <a:p xmlns:a="http://schemas.openxmlformats.org/drawingml/2006/main">
             <a:r>
-              <a:t>Slide ID: S33</a:t>
+              <a:t>Slide ID: S41</a:t>
             </a:r>
           </a:p>
           <a:p xmlns:a="http://schemas.openxmlformats.org/drawingml/2006/main">
@@ -846,7 +846,7 @@
           </a:p>
           <a:p xmlns:a="http://schemas.openxmlformats.org/drawingml/2006/main">
             <a:r>
-              <a:t>화면 진행: Core의 세 항목을 먼저 읽고 필요한 상세의 세 행으로 이동한다. S32의 탐색 경로를 반복 설명하기보다 항상 읽을 기본 안내와 필요할 때 찾을 상세의 경계를 확인한다.</a:t>
+              <a:t>화면 진행: Core의 세 항목을 먼저 읽고 필요한 상세의 세 행으로 이동한다. S40의 탐색 경로를 반복 설명하기보다 항상 읽을 기본 안내와 필요할 때 찾을 상세의 경계를 확인한다.</a:t>
             </a:r>
           </a:p>
           <a:p xmlns:a="http://schemas.openxmlformats.org/drawingml/2006/main">
@@ -856,7 +856,7 @@
           </a:p>
           <a:p xmlns:a="http://schemas.openxmlformats.org/drawingml/2006/main">
             <a:r>
-              <a:t>Evidence / Source: BEAT-014, CLM-0003, CLM-0005, CLM-0014, CLM-0015. TEACHING_MODEL / CONCEPTUAL; describe STATE-03 structure in S34.</a:t>
+              <a:t>Evidence / Source: BEAT-014, CLM-0003, CLM-0005, CLM-0014, CLM-0015. TEACHING_MODEL / CONCEPTUAL; describe STATE-03 structure in S42.</a:t>
             </a:r>
           </a:p>
           <a:p xmlns:a="http://schemas.openxmlformats.org/drawingml/2006/main">
@@ -906,7 +906,7 @@
           </a:p>
           <a:p xmlns:a="http://schemas.openxmlformats.org/drawingml/2006/main">
             <a:r>
-              <a:t>Demo Operation: N/A — the observed repository structure follows on S34.</a:t>
+              <a:t>Demo Operation: N/A — the observed repository structure follows on S42.</a:t>
             </a:r>
           </a:p>
           <a:p xmlns:a="http://schemas.openxmlformats.org/drawingml/2006/main">
@@ -946,7 +946,7 @@
           </a:p>
           <a:p xmlns:a="http://schemas.openxmlformats.org/drawingml/2006/main">
             <a:r>
-              <a:t>Fallback: LOCAL STATIC ARTIFACT — 발표 기본 경로는 `production/ACT_2.pptx`의 S33 또는 `production/preview/act2/S33.png`다. 수정 초안 정적 화면은 존재하며 최종 release 경로·내용 일치는 통합 검토에서 확인한다. 실제 Trial 캡처나 현재 제품 실행으로 표현하지 않는다.</a:t>
+              <a:t>Fallback: LOCAL STATIC ARTIFACT — 발표 기본 경로는 `production/ACT_2.pptx`의 S41 또는 `production/preview/act2/S41.png`다. 수정 초안 정적 화면은 존재하며 최종 release 경로·내용 일치는 통합 검토에서 확인한다. 실제 Trial 캡처나 현재 제품 실행으로 표현하지 않는다.</a:t>
             </a:r>
           </a:p>
           <a:p xmlns:a="http://schemas.openxmlformats.org/drawingml/2006/main">
@@ -1026,7 +1026,7 @@
           <a:lstStyle xmlns:a="http://schemas.openxmlformats.org/drawingml/2006/main"/>
           <a:p xmlns:a="http://schemas.openxmlformats.org/drawingml/2006/main">
             <a:r>
-              <a:t>## S34 — 정보를 지우지 않고 위치를 나누기</a:t>
+              <a:t>## S42 — 정보를 지우지 않고 위치를 나누기</a:t>
             </a:r>
           </a:p>
           <a:p xmlns:a="http://schemas.openxmlformats.org/drawingml/2006/main">
@@ -1036,7 +1036,7 @@
           </a:p>
           <a:p xmlns:a="http://schemas.openxmlformats.org/drawingml/2006/main">
             <a:r>
-              <a:t>Slide ID: S34</a:t>
+              <a:t>Slide ID: S42</a:t>
             </a:r>
           </a:p>
           <a:p xmlns:a="http://schemas.openxmlformats.org/drawingml/2006/main">
@@ -1231,7 +1231,7 @@
           </a:p>
           <a:p xmlns:a="http://schemas.openxmlformats.org/drawingml/2006/main">
             <a:r>
-              <a:t>Fallback: LOCAL STATIC ARTIFACT — 발표 기본 경로는 `production/ACT_2.pptx`의 S34 또는 `production/preview/act2/S34.png`다. 수정 초안 정적 화면은 존재하며 최종 release 경로·내용 일치는 통합 검토에서 확인한다. 실제 Trial 캡처나 현재 제품 실행으로 표현하지 않는다.</a:t>
+              <a:t>Fallback: LOCAL STATIC ARTIFACT — 발표 기본 경로는 `production/ACT_2.pptx`의 S42 또는 `production/preview/act2/S42.png`다. 수정 초안 정적 화면은 존재하며 최종 release 경로·내용 일치는 통합 검토에서 확인한다. 실제 Trial 캡처나 현재 제품 실행으로 표현하지 않는다.</a:t>
             </a:r>
           </a:p>
           <a:p xmlns:a="http://schemas.openxmlformats.org/drawingml/2006/main">
@@ -1311,7 +1311,7 @@
           <a:lstStyle xmlns:a="http://schemas.openxmlformats.org/drawingml/2006/main"/>
           <a:p xmlns:a="http://schemas.openxmlformats.org/drawingml/2006/main">
             <a:r>
-              <a:t>## S35 — 서로 다른 두 Task가 무엇을 읽을까?</a:t>
+              <a:t>## S43 — 서로 다른 두 Task가 무엇을 읽을까?</a:t>
             </a:r>
           </a:p>
           <a:p xmlns:a="http://schemas.openxmlformats.org/drawingml/2006/main">
@@ -1321,7 +1321,7 @@
           </a:p>
           <a:p xmlns:a="http://schemas.openxmlformats.org/drawingml/2006/main">
             <a:r>
-              <a:t>Slide ID: S35</a:t>
+              <a:t>Slide ID: S43</a:t>
             </a:r>
           </a:p>
           <a:p xmlns:a="http://schemas.openxmlformats.org/drawingml/2006/main">
@@ -1511,7 +1511,7 @@
           </a:p>
           <a:p xmlns:a="http://schemas.openxmlformats.org/drawingml/2006/main">
             <a:r>
-              <a:t>Fallback: LOCAL STATIC ARTIFACT — 발표 기본 경로는 `production/ACT_2.pptx`의 S35 또는 `production/preview/act2/S35.png`다. 수정 초안 정적 화면은 존재하며 최종 release 경로·내용 일치는 통합 검토에서 확인한다. 실제 Trial 캡처나 현재 제품 실행으로 표현하지 않는다.</a:t>
+              <a:t>Fallback: LOCAL STATIC ARTIFACT — 발표 기본 경로는 `production/ACT_2.pptx`의 S43 또는 `production/preview/act2/S43.png`다. 수정 초안 정적 화면은 존재하며 최종 release 경로·내용 일치는 통합 검토에서 확인한다. 실제 Trial 캡처나 현재 제품 실행으로 표현하지 않는다.</a:t>
             </a:r>
           </a:p>
           <a:p xmlns:a="http://schemas.openxmlformats.org/drawingml/2006/main">
@@ -1591,7 +1591,7 @@
           <a:lstStyle xmlns:a="http://schemas.openxmlformats.org/drawingml/2006/main"/>
           <a:p xmlns:a="http://schemas.openxmlformats.org/drawingml/2006/main">
             <a:r>
-              <a:t>## S36 — Crop Task에서 관찰한 접근</a:t>
+              <a:t>## S44 — Crop Task에서 관찰한 접근</a:t>
             </a:r>
           </a:p>
           <a:p xmlns:a="http://schemas.openxmlformats.org/drawingml/2006/main">
@@ -1601,7 +1601,7 @@
           </a:p>
           <a:p xmlns:a="http://schemas.openxmlformats.org/drawingml/2006/main">
             <a:r>
-              <a:t>Slide ID: S36</a:t>
+              <a:t>Slide ID: S44</a:t>
             </a:r>
           </a:p>
           <a:p xmlns:a="http://schemas.openxmlformats.org/drawingml/2006/main">
@@ -1796,7 +1796,7 @@
           </a:p>
           <a:p xmlns:a="http://schemas.openxmlformats.org/drawingml/2006/main">
             <a:r>
-              <a:t>Fallback: LOCAL STATIC ARTIFACT — 발표 기본 경로는 `production/ACT_2.pptx`의 S36 또는 `production/preview/act2/S36.png`다. 수정 초안 정적 화면은 존재하며 최종 release 경로·내용 일치는 통합 검토에서 확인한다. 실제 Trial 캡처나 현재 제품 실행으로 표현하지 않는다.</a:t>
+              <a:t>Fallback: LOCAL STATIC ARTIFACT — 발표 기본 경로는 `production/ACT_2.pptx`의 S44 또는 `production/preview/act2/S44.png`다. 수정 초안 정적 화면은 존재하며 최종 release 경로·내용 일치는 통합 검토에서 확인한다. 실제 Trial 캡처나 현재 제품 실행으로 표현하지 않는다.</a:t>
             </a:r>
           </a:p>
           <a:p xmlns:a="http://schemas.openxmlformats.org/drawingml/2006/main">
@@ -1876,7 +1876,7 @@
           <a:lstStyle xmlns:a="http://schemas.openxmlformats.org/drawingml/2006/main"/>
           <a:p xmlns:a="http://schemas.openxmlformats.org/drawingml/2006/main">
             <a:r>
-              <a:t>## S37 — Task별 접근은 달랐지만 완벽하지는 않다</a:t>
+              <a:t>## S45 — Task별 접근은 달랐지만 완벽하지는 않다</a:t>
             </a:r>
           </a:p>
           <a:p xmlns:a="http://schemas.openxmlformats.org/drawingml/2006/main">
@@ -1886,7 +1886,7 @@
           </a:p>
           <a:p xmlns:a="http://schemas.openxmlformats.org/drawingml/2006/main">
             <a:r>
-              <a:t>Slide ID: S37</a:t>
+              <a:t>Slide ID: S45</a:t>
             </a:r>
           </a:p>
           <a:p xmlns:a="http://schemas.openxmlformats.org/drawingml/2006/main">
@@ -2086,7 +2086,7 @@
           </a:p>
           <a:p xmlns:a="http://schemas.openxmlformats.org/drawingml/2006/main">
             <a:r>
-              <a:t>Fallback: LOCAL STATIC ARTIFACT — 발표 기본 경로는 `production/ACT_2.pptx`의 S37 또는 `production/preview/act2/S37.png`다. 수정 초안 정적 화면은 존재하며 최종 release 경로·내용 일치는 통합 검토에서 확인한다. 실제 Trial 캡처나 현재 제품 실행으로 표현하지 않는다.</a:t>
+              <a:t>Fallback: LOCAL STATIC ARTIFACT — 발표 기본 경로는 `production/ACT_2.pptx`의 S45 또는 `production/preview/act2/S45.png`다. 수정 초안 정적 화면은 존재하며 최종 release 경로·내용 일치는 통합 검토에서 확인한다. 실제 Trial 캡처나 현재 제품 실행으로 표현하지 않는다.</a:t>
             </a:r>
           </a:p>
           <a:p xmlns:a="http://schemas.openxmlformats.org/drawingml/2006/main">
@@ -2166,7 +2166,7 @@
           <a:lstStyle xmlns:a="http://schemas.openxmlformats.org/drawingml/2006/main"/>
           <a:p xmlns:a="http://schemas.openxmlformats.org/drawingml/2006/main">
             <a:r>
-              <a:t>## S38 — 지식은 정리됐지만 절차는 반복된다</a:t>
+              <a:t>## S46 — 지식은 정리됐지만 절차는 반복된다</a:t>
             </a:r>
           </a:p>
           <a:p xmlns:a="http://schemas.openxmlformats.org/drawingml/2006/main">
@@ -2176,7 +2176,7 @@
           </a:p>
           <a:p xmlns:a="http://schemas.openxmlformats.org/drawingml/2006/main">
             <a:r>
-              <a:t>Slide ID: S38</a:t>
+              <a:t>Slide ID: S46</a:t>
             </a:r>
           </a:p>
           <a:p xmlns:a="http://schemas.openxmlformats.org/drawingml/2006/main">
@@ -2366,7 +2366,7 @@
           </a:p>
           <a:p xmlns:a="http://schemas.openxmlformats.org/drawingml/2006/main">
             <a:r>
-              <a:t>Fallback: LOCAL STATIC ARTIFACT — 발표 기본 경로는 `production/ACT_2.pptx`의 S38 또는 `production/preview/act2/S38.png`다. 수정 초안 정적 화면은 존재하며 최종 release 경로·내용 일치는 통합 검토에서 확인한다. 실제 Trial 캡처나 현재 제품 실행으로 표현하지 않는다. 질문이 없으면 Audience Interaction의 준비 질문으로 진행한다.</a:t>
+              <a:t>Fallback: LOCAL STATIC ARTIFACT — 발표 기본 경로는 `production/ACT_2.pptx`의 S46 또는 `production/preview/act2/S46.png`다. 수정 초안 정적 화면은 존재하며 최종 release 경로·내용 일치는 통합 검토에서 확인한다. 실제 Trial 캡처나 현재 제품 실행으로 표현하지 않는다. 질문이 없으면 Audience Interaction의 준비 질문으로 진행한다.</a:t>
             </a:r>
           </a:p>
           <a:p xmlns:a="http://schemas.openxmlformats.org/drawingml/2006/main">
@@ -2446,7 +2446,7 @@
           <a:lstStyle xmlns:a="http://schemas.openxmlformats.org/drawingml/2006/main"/>
           <a:p xmlns:a="http://schemas.openxmlformats.org/drawingml/2006/main">
             <a:r>
-              <a:t>## S25 — 작은 Project Context의 첫 기록</a:t>
+              <a:t>## S33 — 작은 Project Context의 첫 기록</a:t>
             </a:r>
           </a:p>
           <a:p xmlns:a="http://schemas.openxmlformats.org/drawingml/2006/main">
@@ -2456,7 +2456,7 @@
           </a:p>
           <a:p xmlns:a="http://schemas.openxmlformats.org/drawingml/2006/main">
             <a:r>
-              <a:t>Slide ID: S25</a:t>
+              <a:t>Slide ID: S33</a:t>
             </a:r>
           </a:p>
           <a:p xmlns:a="http://schemas.openxmlformats.org/drawingml/2006/main">
@@ -2546,7 +2546,7 @@
           </a:p>
           <a:p xmlns:a="http://schemas.openxmlformats.org/drawingml/2006/main">
             <a:r>
-              <a:t>3. (3:00–4:00) Task마다 반복 설명하던 사실을 저장소에 둔 설계 의도를 정리하고, 실제 활용 관찰은 S26로 넘긴다.</a:t>
+              <a:t>3. (3:00–4:00) Task마다 반복 설명하던 사실을 저장소에 둔 설계 의도를 정리하고, 실제 활용 관찰은 S34로 넘긴다.</a:t>
             </a:r>
           </a:p>
           <a:p xmlns:a="http://schemas.openxmlformats.org/drawingml/2006/main">
@@ -2576,7 +2576,7 @@
           </a:p>
           <a:p xmlns:a="http://schemas.openxmlformats.org/drawingml/2006/main">
             <a:r>
-              <a:t>Claim Boundary: 실제 파일이 그 상태에 존재했다는 근거다. 성능, 정확도, 토큰 절감 또는 AGENTS.md 단독 인과효과를 주장하지 않는다. 제품 코드·테스트·README는 그 상태 전환에서 바뀌지 않았다. S26의 지침 활용 관찰을 이 장의 결과로 앞당기지 않는다. 현재 Desktop 자동 로딩이나 교육 환경을 검증한 것이 아니다.</a:t>
+              <a:t>Claim Boundary: 실제 파일이 그 상태에 존재했다는 근거다. 성능, 정확도, 토큰 절감 또는 AGENTS.md 단독 인과효과를 주장하지 않는다. 제품 코드·테스트·README는 그 상태 전환에서 바뀌지 않았다. S34의 지침 활용 관찰을 이 장의 결과로 앞당기지 않는다. 현재 Desktop 자동 로딩이나 교육 환경을 검증한 것이 아니다.</a:t>
             </a:r>
           </a:p>
           <a:p xmlns:a="http://schemas.openxmlformats.org/drawingml/2006/main">
@@ -2616,7 +2616,7 @@
           </a:p>
           <a:p xmlns:a="http://schemas.openxmlformats.org/drawingml/2006/main">
             <a:r>
-              <a:t>Demo Operation: `production/ACT_2.pptx`의 S25 및 `production/preview/act2/S25.png`에 있는 실제 AGENTS.md 원문 발췌를 가리킨다. 편집기 screenshot이 아니다. Live/HYBRID는 발표 환경 검증 전까지 비활성이다.</a:t>
+              <a:t>Demo Operation: `production/ACT_2.pptx`의 S33 및 `production/preview/act2/S33.png`에 있는 실제 AGENTS.md 원문 발췌를 가리킨다. 편집기 screenshot이 아니다. Live/HYBRID는 발표 환경 검증 전까지 비활성이다.</a:t>
             </a:r>
           </a:p>
           <a:p xmlns:a="http://schemas.openxmlformats.org/drawingml/2006/main">
@@ -2646,7 +2646,7 @@
           </a:p>
           <a:p xmlns:a="http://schemas.openxmlformats.org/drawingml/2006/main">
             <a:r>
-              <a:t>Time Management: Demo 4분 유지. 1분 상태 전환, 2분 네 발췌, 1분 의미와 S26 handoff. 명령어 옵션별 설명은 생략한다.</a:t>
+              <a:t>Time Management: Demo 4분 유지. 1분 상태 전환, 2분 네 발췌, 1분 의미와 S34 handoff. 명령어 옵션별 설명은 생략한다.</a:t>
             </a:r>
           </a:p>
           <a:p xmlns:a="http://schemas.openxmlformats.org/drawingml/2006/main">
@@ -2656,7 +2656,7 @@
           </a:p>
           <a:p xmlns:a="http://schemas.openxmlformats.org/drawingml/2006/main">
             <a:r>
-              <a:t>Fallback: LOCAL STATIC ARTIFACT — 발표 기본 경로는 `production/ACT_2.pptx`의 S25 또는 `production/preview/act2/S25.png`다. 수정 초안 정적 화면은 존재하며 최종 release 경로·내용 일치는 통합 검토에서 확인한다. 실제 Trial 캡처나 현재 제품 실행으로 표현하지 않는다.</a:t>
+              <a:t>Fallback: LOCAL STATIC ARTIFACT — 발표 기본 경로는 `production/ACT_2.pptx`의 S33 또는 `production/preview/act2/S33.png`다. 수정 초안 정적 화면은 존재하며 최종 release 경로·내용 일치는 통합 검토에서 확인한다. 실제 Trial 캡처나 현재 제품 실행으로 표현하지 않는다.</a:t>
             </a:r>
           </a:p>
           <a:p xmlns:a="http://schemas.openxmlformats.org/drawingml/2006/main">
@@ -2736,7 +2736,7 @@
           <a:lstStyle xmlns:a="http://schemas.openxmlformats.org/drawingml/2006/main"/>
           <a:p xmlns:a="http://schemas.openxmlformats.org/drawingml/2006/main">
             <a:r>
-              <a:t>## S26 — 한 번의 사용에서 확인된 것</a:t>
+              <a:t>## S34 — 한 번의 사용에서 확인된 것</a:t>
             </a:r>
           </a:p>
           <a:p xmlns:a="http://schemas.openxmlformats.org/drawingml/2006/main">
@@ -2746,7 +2746,7 @@
           </a:p>
           <a:p xmlns:a="http://schemas.openxmlformats.org/drawingml/2006/main">
             <a:r>
-              <a:t>Slide ID: S26</a:t>
+              <a:t>Slide ID: S34</a:t>
             </a:r>
           </a:p>
           <a:p xmlns:a="http://schemas.openxmlformats.org/drawingml/2006/main">
@@ -2936,7 +2936,7 @@
           </a:p>
           <a:p xmlns:a="http://schemas.openxmlformats.org/drawingml/2006/main">
             <a:r>
-              <a:t>Fallback: LOCAL STATIC ARTIFACT — 발표 기본 경로는 `production/ACT_2.pptx`의 S26 또는 `production/preview/act2/S26.png`다. 수정 초안 정적 화면은 존재하며 최종 release 경로·내용 일치는 통합 검토에서 확인한다. 실제 Trial 캡처나 현재 제품 실행으로 표현하지 않는다.</a:t>
+              <a:t>Fallback: LOCAL STATIC ARTIFACT — 발표 기본 경로는 `production/ACT_2.pptx`의 S34 또는 `production/preview/act2/S34.png`다. 수정 초안 정적 화면은 존재하며 최종 release 경로·내용 일치는 통합 검토에서 확인한다. 실제 Trial 캡처나 현재 제품 실행으로 표현하지 않는다.</a:t>
             </a:r>
           </a:p>
           <a:p xmlns:a="http://schemas.openxmlformats.org/drawingml/2006/main">
@@ -3016,7 +3016,7 @@
           <a:lstStyle xmlns:a="http://schemas.openxmlformats.org/drawingml/2006/main"/>
           <a:p xmlns:a="http://schemas.openxmlformats.org/drawingml/2006/main">
             <a:r>
-              <a:t>## S27 — Task Prompt와 Project Context</a:t>
+              <a:t>## S35 — Task Prompt와 Project Context</a:t>
             </a:r>
           </a:p>
           <a:p xmlns:a="http://schemas.openxmlformats.org/drawingml/2006/main">
@@ -3026,7 +3026,7 @@
           </a:p>
           <a:p xmlns:a="http://schemas.openxmlformats.org/drawingml/2006/main">
             <a:r>
-              <a:t>Slide ID: S27</a:t>
+              <a:t>Slide ID: S35</a:t>
             </a:r>
           </a:p>
           <a:p xmlns:a="http://schemas.openxmlformats.org/drawingml/2006/main">
@@ -3126,7 +3126,7 @@
           </a:p>
           <a:p xmlns:a="http://schemas.openxmlformats.org/drawingml/2006/main">
             <a:r>
-              <a:t>화면 진행: S26에서 본 기록을 회수한 뒤 두 열의 수명을 비교한다. 왼쪽은 다음 작업에서 바뀔 목표, 오른쪽은 여러 작업에서 다시 참고할 사실이다. S23의 분류 질문을 처음부터 반복하지 않는다.</a:t>
+              <a:t>화면 진행: S34에서 본 기록을 회수한 뒤 두 열의 수명을 비교한다. 왼쪽은 다음 작업에서 바뀔 목표, 오른쪽은 여러 작업에서 다시 참고할 사실이다. S31의 분류 질문을 처음부터 반복하지 않는다.</a:t>
             </a:r>
           </a:p>
           <a:p xmlns:a="http://schemas.openxmlformats.org/drawingml/2006/main">
@@ -3136,7 +3136,7 @@
           </a:p>
           <a:p xmlns:a="http://schemas.openxmlformats.org/drawingml/2006/main">
             <a:r>
-              <a:t>Evidence / Source: BEAT-009–010, TRANS-003, CLM-0003, CLM-0005. TEACHING_MODEL / CONCEPTUAL; examples summarize S24–S26.</a:t>
+              <a:t>Evidence / Source: BEAT-009–010, TRANS-003, CLM-0003, CLM-0005. TEACHING_MODEL / CONCEPTUAL; examples summarize S32–S34.</a:t>
             </a:r>
           </a:p>
           <a:p xmlns:a="http://schemas.openxmlformats.org/drawingml/2006/main">
@@ -3226,7 +3226,7 @@
           </a:p>
           <a:p xmlns:a="http://schemas.openxmlformats.org/drawingml/2006/main">
             <a:r>
-              <a:t>Fallback: LOCAL STATIC ARTIFACT — 발표 기본 경로는 `production/ACT_2.pptx`의 S27 또는 `production/preview/act2/S27.png`다. 수정 초안 정적 화면은 존재하며 최종 release 경로·내용 일치는 통합 검토에서 확인한다. 실제 Trial 캡처나 현재 제품 실행으로 표현하지 않는다.</a:t>
+              <a:t>Fallback: LOCAL STATIC ARTIFACT — 발표 기본 경로는 `production/ACT_2.pptx`의 S35 또는 `production/preview/act2/S35.png`다. 수정 초안 정적 화면은 존재하며 최종 release 경로·내용 일치는 통합 검토에서 확인한다. 실제 Trial 캡처나 현재 제품 실행으로 표현하지 않는다.</a:t>
             </a:r>
           </a:p>
           <a:p xmlns:a="http://schemas.openxmlformats.org/drawingml/2006/main">
@@ -3306,7 +3306,7 @@
           <a:lstStyle xmlns:a="http://schemas.openxmlformats.org/drawingml/2006/main"/>
           <a:p xmlns:a="http://schemas.openxmlformats.org/drawingml/2006/main">
             <a:r>
-              <a:t>## S28 — 정확한 정보도 계속 늘어난다</a:t>
+              <a:t>## S36 — 정확한 정보도 계속 늘어난다</a:t>
             </a:r>
           </a:p>
           <a:p xmlns:a="http://schemas.openxmlformats.org/drawingml/2006/main">
@@ -3316,7 +3316,7 @@
           </a:p>
           <a:p xmlns:a="http://schemas.openxmlformats.org/drawingml/2006/main">
             <a:r>
-              <a:t>Slide ID: S28</a:t>
+              <a:t>Slide ID: S36</a:t>
             </a:r>
           </a:p>
           <a:p xmlns:a="http://schemas.openxmlformats.org/drawingml/2006/main">
@@ -3506,7 +3506,7 @@
           </a:p>
           <a:p xmlns:a="http://schemas.openxmlformats.org/drawingml/2006/main">
             <a:r>
-              <a:t>Fallback: LOCAL STATIC ARTIFACT — 발표 기본 경로는 `production/ACT_2.pptx`의 S28 또는 `production/preview/act2/S28.png`다. 수정 초안 정적 화면은 존재하며 최종 release 경로·내용 일치는 통합 검토에서 확인한다. 실제 Trial 캡처나 현재 제품 실행으로 표현하지 않는다.</a:t>
+              <a:t>Fallback: LOCAL STATIC ARTIFACT — 발표 기본 경로는 `production/ACT_2.pptx`의 S36 또는 `production/preview/act2/S36.png`다. 수정 초안 정적 화면은 존재하며 최종 release 경로·내용 일치는 통합 검토에서 확인한다. 실제 Trial 캡처나 현재 제품 실행으로 표현하지 않는다.</a:t>
             </a:r>
           </a:p>
           <a:p xmlns:a="http://schemas.openxmlformats.org/drawingml/2006/main">
@@ -3586,7 +3586,7 @@
           <a:lstStyle xmlns:a="http://schemas.openxmlformats.org/drawingml/2006/main"/>
           <a:p xmlns:a="http://schemas.openxmlformats.org/drawingml/2006/main">
             <a:r>
-              <a:t>## S29 — 정확하지만 이번 Task에는 불필요한 정보</a:t>
+              <a:t>## S37 — 정확하지만 이번 Task에는 불필요한 정보</a:t>
             </a:r>
           </a:p>
           <a:p xmlns:a="http://schemas.openxmlformats.org/drawingml/2006/main">
@@ -3596,7 +3596,7 @@
           </a:p>
           <a:p xmlns:a="http://schemas.openxmlformats.org/drawingml/2006/main">
             <a:r>
-              <a:t>Slide ID: S29</a:t>
+              <a:t>Slide ID: S37</a:t>
             </a:r>
           </a:p>
           <a:p xmlns:a="http://schemas.openxmlformats.org/drawingml/2006/main">
@@ -3786,7 +3786,7 @@
           </a:p>
           <a:p xmlns:a="http://schemas.openxmlformats.org/drawingml/2006/main">
             <a:r>
-              <a:t>Fallback: LOCAL STATIC ARTIFACT — 발표 기본 경로는 `production/ACT_2.pptx`의 S29 또는 `production/preview/act2/S29.png`다. 수정 초안 정적 화면은 존재하며 최종 release 경로·내용 일치는 통합 검토에서 확인한다. 실제 Trial 캡처나 현재 제품 실행으로 표현하지 않는다.</a:t>
+              <a:t>Fallback: LOCAL STATIC ARTIFACT — 발표 기본 경로는 `production/ACT_2.pptx`의 S37 또는 `production/preview/act2/S37.png`다. 수정 초안 정적 화면은 존재하며 최종 release 경로·내용 일치는 통합 검토에서 확인한다. 실제 Trial 캡처나 현재 제품 실행으로 표현하지 않는다.</a:t>
             </a:r>
           </a:p>
           <a:p xmlns:a="http://schemas.openxmlformats.org/drawingml/2006/main">
@@ -3866,7 +3866,7 @@
           <a:lstStyle xmlns:a="http://schemas.openxmlformats.org/drawingml/2006/main"/>
           <a:p xmlns:a="http://schemas.openxmlformats.org/drawingml/2006/main">
             <a:r>
-              <a:t>## S30 — 정보의 범위와 제공 시점</a:t>
+              <a:t>## S38 — 정보의 범위와 제공 시점</a:t>
             </a:r>
           </a:p>
           <a:p xmlns:a="http://schemas.openxmlformats.org/drawingml/2006/main">
@@ -3876,7 +3876,7 @@
           </a:p>
           <a:p xmlns:a="http://schemas.openxmlformats.org/drawingml/2006/main">
             <a:r>
-              <a:t>Slide ID: S30</a:t>
+              <a:t>Slide ID: S38</a:t>
             </a:r>
           </a:p>
           <a:p xmlns:a="http://schemas.openxmlformats.org/drawingml/2006/main">
@@ -4066,7 +4066,7 @@
           </a:p>
           <a:p xmlns:a="http://schemas.openxmlformats.org/drawingml/2006/main">
             <a:r>
-              <a:t>Fallback: LOCAL STATIC ARTIFACT — 발표 기본 경로는 `production/ACT_2.pptx`의 S30 또는 `production/preview/act2/S30.png`다. 수정 초안 정적 화면은 존재하며 최종 release 경로·내용 일치는 통합 검토에서 확인한다. 실제 Trial 캡처나 현재 제품 실행으로 표현하지 않는다.</a:t>
+              <a:t>Fallback: LOCAL STATIC ARTIFACT — 발표 기본 경로는 `production/ACT_2.pptx`의 S38 또는 `production/preview/act2/S38.png`다. 수정 초안 정적 화면은 존재하며 최종 release 경로·내용 일치는 통합 검토에서 확인한다. 실제 Trial 캡처나 현재 제품 실행으로 표현하지 않는다.</a:t>
             </a:r>
           </a:p>
           <a:p xmlns:a="http://schemas.openxmlformats.org/drawingml/2006/main">
@@ -4146,7 +4146,7 @@
           <a:lstStyle xmlns:a="http://schemas.openxmlformats.org/drawingml/2006/main"/>
           <a:p xmlns:a="http://schemas.openxmlformats.org/drawingml/2006/main">
             <a:r>
-              <a:t>## S31 — Long Context 연구가 말해주는 범위</a:t>
+              <a:t>## S39 — Long Context 연구가 말해주는 범위</a:t>
             </a:r>
           </a:p>
           <a:p xmlns:a="http://schemas.openxmlformats.org/drawingml/2006/main">
@@ -4156,7 +4156,7 @@
           </a:p>
           <a:p xmlns:a="http://schemas.openxmlformats.org/drawingml/2006/main">
             <a:r>
-              <a:t>Slide ID: S31</a:t>
+              <a:t>Slide ID: S39</a:t>
             </a:r>
           </a:p>
           <a:p xmlns:a="http://schemas.openxmlformats.org/drawingml/2006/main">
@@ -4356,7 +4356,7 @@
           </a:p>
           <a:p xmlns:a="http://schemas.openxmlformats.org/drawingml/2006/main">
             <a:r>
-              <a:t>Fallback: LOCAL STATIC ARTIFACT — 발표 기본 경로는 `production/ACT_2.pptx`의 S31 또는 `production/preview/act2/S31.png`다. 수정 초안 정적 화면은 존재하며 최종 release 경로·내용 일치는 통합 검토에서 확인한다. 실제 Trial 캡처나 현재 제품 실행으로 표현하지 않는다.</a:t>
+              <a:t>Fallback: LOCAL STATIC ARTIFACT — 발표 기본 경로는 `production/ACT_2.pptx`의 S39 또는 `production/preview/act2/S39.png`다. 수정 초안 정적 화면은 존재하며 최종 release 경로·내용 일치는 통합 검토에서 확인한다. 실제 Trial 캡처나 현재 제품 실행으로 표현하지 않는다.</a:t>
             </a:r>
           </a:p>
           <a:p xmlns:a="http://schemas.openxmlformats.org/drawingml/2006/main">
@@ -4436,7 +4436,7 @@
           <a:lstStyle xmlns:a="http://schemas.openxmlformats.org/drawingml/2006/main"/>
           <a:p xmlns:a="http://schemas.openxmlformats.org/drawingml/2006/main">
             <a:r>
-              <a:t>## S32 — 필요한 상세 정보로 가는 길</a:t>
+              <a:t>## S40 — 필요한 상세 정보로 가는 길</a:t>
             </a:r>
           </a:p>
           <a:p xmlns:a="http://schemas.openxmlformats.org/drawingml/2006/main">
@@ -4446,7 +4446,7 @@
           </a:p>
           <a:p xmlns:a="http://schemas.openxmlformats.org/drawingml/2006/main">
             <a:r>
-              <a:t>Slide ID: S32</a:t>
+              <a:t>Slide ID: S40</a:t>
             </a:r>
           </a:p>
           <a:p xmlns:a="http://schemas.openxmlformats.org/drawingml/2006/main">
@@ -4646,7 +4646,7 @@
           </a:p>
           <a:p xmlns:a="http://schemas.openxmlformats.org/drawingml/2006/main">
             <a:r>
-              <a:t>Fallback: LOCAL STATIC ARTIFACT — 발표 기본 경로는 `production/ACT_2.pptx`의 S32 또는 `production/preview/act2/S32.png`다. 수정 초안 정적 화면은 존재하며 최종 release 경로·내용 일치는 통합 검토에서 확인한다. 실제 Trial 캡처나 현재 제품 실행으로 표현하지 않는다.</a:t>
+              <a:t>Fallback: LOCAL STATIC ARTIFACT — 발표 기본 경로는 `production/ACT_2.pptx`의 S40 또는 `production/preview/act2/S40.png`다. 수정 초안 정적 화면은 존재하며 최종 release 경로·내용 일치는 통합 검토에서 확인한다. 실제 Trial 캡처나 현재 제품 실행으로 표현하지 않는다.</a:t>
             </a:r>
           </a:p>
           <a:p xmlns:a="http://schemas.openxmlformats.org/drawingml/2006/main">
@@ -4703,7 +4703,7 @@
           <p:cNvPr id="3" name="Title">
             <a:extLst xmlns:a="http://schemas.openxmlformats.org/drawingml/2006/main">
               <a:ext uri="{FF2B5EF4-FFF2-40B4-BE49-F238E27FC236}">
-                <a16:creationId xmlns:a16="http://schemas.microsoft.com/office/drawing/2014/main" id="{225AA4F9-44D3-41D6-82D9-9857035AAC61}"/>
+                <a16:creationId xmlns:a16="http://schemas.microsoft.com/office/drawing/2014/main" id="{007A0870-7C90-46FA-854D-4258A25D3851}"/>
               </a:ext>
             </a:extLst>
           </p:cNvPr>
@@ -4932,7 +4932,7 @@
           <p:cNvPr id="2" name="Subtitle">
             <a:extLst xmlns:a="http://schemas.openxmlformats.org/drawingml/2006/main">
               <a:ext uri="{FF2B5EF4-FFF2-40B4-BE49-F238E27FC236}">
-                <a16:creationId xmlns:a16="http://schemas.microsoft.com/office/drawing/2014/main" id="{E1DA430D-D4B9-46B1-BCE3-281A973B6C4E}"/>
+                <a16:creationId xmlns:a16="http://schemas.microsoft.com/office/drawing/2014/main" id="{0D5C75F9-2616-4143-9AAF-84B2E42A7676}"/>
               </a:ext>
             </a:extLst>
           </p:cNvPr>
@@ -5178,7 +5178,7 @@
           <p:cNvPr id="2" name="Section title">
             <a:extLst xmlns:a="http://schemas.openxmlformats.org/drawingml/2006/main">
               <a:ext uri="{FF2B5EF4-FFF2-40B4-BE49-F238E27FC236}">
-                <a16:creationId xmlns:a16="http://schemas.microsoft.com/office/drawing/2014/main" id="{7CFC81A1-A640-4D48-9EB6-2D2FFD2F882D}"/>
+                <a16:creationId xmlns:a16="http://schemas.microsoft.com/office/drawing/2014/main" id="{E32039E4-9C48-48AC-9653-C32111F23AE9}"/>
               </a:ext>
             </a:extLst>
           </p:cNvPr>
@@ -5424,7 +5424,7 @@
           <p:cNvPr id="3" name="Title">
             <a:extLst xmlns:a="http://schemas.openxmlformats.org/drawingml/2006/main">
               <a:ext uri="{FF2B5EF4-FFF2-40B4-BE49-F238E27FC236}">
-                <a16:creationId xmlns:a16="http://schemas.microsoft.com/office/drawing/2014/main" id="{D468D8D4-16C7-4257-92D1-EC2BB04A0327}"/>
+                <a16:creationId xmlns:a16="http://schemas.microsoft.com/office/drawing/2014/main" id="{44917C48-E4B6-471E-B4E0-DCF77361CAD9}"/>
               </a:ext>
             </a:extLst>
           </p:cNvPr>
@@ -5653,7 +5653,7 @@
           <p:cNvPr id="2" name="Body">
             <a:extLst xmlns:a="http://schemas.openxmlformats.org/drawingml/2006/main">
               <a:ext uri="{FF2B5EF4-FFF2-40B4-BE49-F238E27FC236}">
-                <a16:creationId xmlns:a16="http://schemas.microsoft.com/office/drawing/2014/main" id="{90AAB1DE-13CE-4D56-93DB-006873E60EB5}"/>
+                <a16:creationId xmlns:a16="http://schemas.microsoft.com/office/drawing/2014/main" id="{2C9FA366-C8D4-4CAF-BCBA-D67A04503383}"/>
               </a:ext>
             </a:extLst>
           </p:cNvPr>
@@ -5899,7 +5899,7 @@
           <p:cNvPr id="4" name="Title">
             <a:extLst xmlns:a="http://schemas.openxmlformats.org/drawingml/2006/main">
               <a:ext uri="{FF2B5EF4-FFF2-40B4-BE49-F238E27FC236}">
-                <a16:creationId xmlns:a16="http://schemas.microsoft.com/office/drawing/2014/main" id="{5C2CC74D-674A-4342-9737-97268476ACC0}"/>
+                <a16:creationId xmlns:a16="http://schemas.microsoft.com/office/drawing/2014/main" id="{053C24BB-79E9-47E6-B28A-8AC01C4179B6}"/>
               </a:ext>
             </a:extLst>
           </p:cNvPr>
@@ -6128,7 +6128,7 @@
           <p:cNvPr id="2" name="Left column">
             <a:extLst xmlns:a="http://schemas.openxmlformats.org/drawingml/2006/main">
               <a:ext uri="{FF2B5EF4-FFF2-40B4-BE49-F238E27FC236}">
-                <a16:creationId xmlns:a16="http://schemas.microsoft.com/office/drawing/2014/main" id="{CB884949-8E5E-41A0-8D77-C8945E8444E6}"/>
+                <a16:creationId xmlns:a16="http://schemas.microsoft.com/office/drawing/2014/main" id="{E7D58B39-83C6-45BD-944E-B54CC68D1642}"/>
               </a:ext>
             </a:extLst>
           </p:cNvPr>
@@ -6357,7 +6357,7 @@
           <p:cNvPr id="3" name="Right column">
             <a:extLst xmlns:a="http://schemas.openxmlformats.org/drawingml/2006/main">
               <a:ext uri="{FF2B5EF4-FFF2-40B4-BE49-F238E27FC236}">
-                <a16:creationId xmlns:a16="http://schemas.microsoft.com/office/drawing/2014/main" id="{1A623C67-415A-47DD-AC15-5F48F408D3F1}"/>
+                <a16:creationId xmlns:a16="http://schemas.microsoft.com/office/drawing/2014/main" id="{7D72AA0E-DF5C-4CDC-AD0B-F67BB168EAD3}"/>
               </a:ext>
             </a:extLst>
           </p:cNvPr>
@@ -6603,7 +6603,7 @@
           <p:cNvPr id="3" name="Title">
             <a:extLst xmlns:a="http://schemas.openxmlformats.org/drawingml/2006/main">
               <a:ext uri="{FF2B5EF4-FFF2-40B4-BE49-F238E27FC236}">
-                <a16:creationId xmlns:a16="http://schemas.microsoft.com/office/drawing/2014/main" id="{28E3289F-6B7B-4AD6-BF51-24C557B95605}"/>
+                <a16:creationId xmlns:a16="http://schemas.microsoft.com/office/drawing/2014/main" id="{AE56343C-FE5D-419E-99D9-923904A47945}"/>
               </a:ext>
             </a:extLst>
           </p:cNvPr>
@@ -6832,7 +6832,7 @@
           <p:cNvPr id="2" name="Left column">
             <a:extLst xmlns:a="http://schemas.openxmlformats.org/drawingml/2006/main">
               <a:ext uri="{FF2B5EF4-FFF2-40B4-BE49-F238E27FC236}">
-                <a16:creationId xmlns:a16="http://schemas.microsoft.com/office/drawing/2014/main" id="{2D240CBA-2679-494D-8F8C-75CA73460C99}"/>
+                <a16:creationId xmlns:a16="http://schemas.microsoft.com/office/drawing/2014/main" id="{06D1CE9B-FE8A-4118-8F77-2B83D94BF2C7}"/>
               </a:ext>
             </a:extLst>
           </p:cNvPr>
@@ -7099,12 +7099,12 @@
   </p:cSld>
   <p:clrMap bg1="lt1" tx1="dk1" bg2="lt2" tx2="dk2" accent1="accent1" accent2="accent2" accent3="accent3" accent4="accent4" accent5="accent5" accent6="accent6" hlink="hlink" folHlink="folHlink"/>
   <p:sldLayoutIdLst>
-    <p:sldLayoutId xmlns:r="http://schemas.openxmlformats.org/officeDocument/2006/relationships" id="2147483649" r:id="R52d0a4563072455c"/>
-    <p:sldLayoutId xmlns:r="http://schemas.openxmlformats.org/officeDocument/2006/relationships" id="2147483650" r:id="Rdbd468a25e6d4380"/>
-    <p:sldLayoutId xmlns:r="http://schemas.openxmlformats.org/officeDocument/2006/relationships" id="2147483651" r:id="Rba9be64c0092470b"/>
-    <p:sldLayoutId xmlns:r="http://schemas.openxmlformats.org/officeDocument/2006/relationships" id="2147483652" r:id="Rd188ade1b3854ab5"/>
-    <p:sldLayoutId xmlns:r="http://schemas.openxmlformats.org/officeDocument/2006/relationships" id="2147483653" r:id="R33da9d9613b048b7"/>
-    <p:sldLayoutId xmlns:r="http://schemas.openxmlformats.org/officeDocument/2006/relationships" id="2147483654" r:id="R5ad62035cb234dc2"/>
+    <p:sldLayoutId xmlns:r="http://schemas.openxmlformats.org/officeDocument/2006/relationships" id="2147483649" r:id="R4a51a0b39c4141d2"/>
+    <p:sldLayoutId xmlns:r="http://schemas.openxmlformats.org/officeDocument/2006/relationships" id="2147483650" r:id="Rf9bd4775177e4486"/>
+    <p:sldLayoutId xmlns:r="http://schemas.openxmlformats.org/officeDocument/2006/relationships" id="2147483651" r:id="Rb45675ea0eb241d2"/>
+    <p:sldLayoutId xmlns:r="http://schemas.openxmlformats.org/officeDocument/2006/relationships" id="2147483652" r:id="R3dcd61b9fbf8483a"/>
+    <p:sldLayoutId xmlns:r="http://schemas.openxmlformats.org/officeDocument/2006/relationships" id="2147483653" r:id="Ra1220709701b4bb8"/>
+    <p:sldLayoutId xmlns:r="http://schemas.openxmlformats.org/officeDocument/2006/relationships" id="2147483654" r:id="R2d5e7bb1917d488d"/>
   </p:sldLayoutIdLst>
   <p:txStyles>
     <p:titleStyle>
@@ -7655,7 +7655,7 @@
           <p:cNvPr id="24" name="ACT 2 · 반복되는 프로젝트 설명">
             <a:extLst xmlns:a="http://schemas.openxmlformats.org/drawingml/2006/main">
               <a:ext uri="{FF2B5EF4-FFF2-40B4-BE49-F238E27FC236}">
-                <a16:creationId xmlns:a16="http://schemas.microsoft.com/office/drawing/2014/main" id="{D3466745-7086-4799-A2B4-210DCBEC9A2A}"/>
+                <a16:creationId xmlns:a16="http://schemas.microsoft.com/office/drawing/2014/main" id="{4A4247C4-E68E-4B22-AE4E-3C3CBD2D4FBC}"/>
               </a:ext>
             </a:extLst>
           </p:cNvPr>
@@ -7810,10 +7810,10 @@
       </p:sp>
       <p:sp>
         <p:nvSpPr>
-          <p:cNvPr id="2" name="S24">
+          <p:cNvPr id="2" name="S32">
             <a:extLst xmlns:a="http://schemas.openxmlformats.org/drawingml/2006/main">
               <a:ext uri="{FF2B5EF4-FFF2-40B4-BE49-F238E27FC236}">
-                <a16:creationId xmlns:a16="http://schemas.microsoft.com/office/drawing/2014/main" id="{D9D048CA-3E44-4B40-91F2-D725F5976779}"/>
+                <a16:creationId xmlns:a16="http://schemas.microsoft.com/office/drawing/2014/main" id="{6E2F74F3-98D9-4A65-BB78-E740F1BFD535}"/>
               </a:ext>
             </a:extLst>
           </p:cNvPr>
@@ -7961,7 +7961,7 @@
                 <a:ea typeface="Malgun Gothic"/>
                 <a:cs typeface="Malgun Gothic"/>
               </a:rPr>
-              <a:t>S24</a:t>
+              <a:t>S32</a:t>
             </a:r>
           </a:p>
         </p:txBody>
@@ -7971,7 +7971,7 @@
           <p:cNvPr id="3" name="다른 Task에 같은 설명이 반복된다">
             <a:extLst xmlns:a="http://schemas.openxmlformats.org/drawingml/2006/main">
               <a:ext uri="{FF2B5EF4-FFF2-40B4-BE49-F238E27FC236}">
-                <a16:creationId xmlns:a16="http://schemas.microsoft.com/office/drawing/2014/main" id="{26895B03-7C22-4664-B0BA-6E93F70207D7}"/>
+                <a16:creationId xmlns:a16="http://schemas.microsoft.com/office/drawing/2014/main" id="{9523D165-75B4-49CD-AC6A-A086771D57D0}"/>
               </a:ext>
             </a:extLst>
           </p:cNvPr>
@@ -8129,7 +8129,7 @@
           <p:cNvPr id="4" name="">
             <a:extLst xmlns:a="http://schemas.openxmlformats.org/drawingml/2006/main">
               <a:ext uri="{FF2B5EF4-FFF2-40B4-BE49-F238E27FC236}">
-                <a16:creationId xmlns:a16="http://schemas.microsoft.com/office/drawing/2014/main" id="{1B025458-C137-4679-802C-1315305F8918}"/>
+                <a16:creationId xmlns:a16="http://schemas.microsoft.com/office/drawing/2014/main" id="{86F2EDA0-A5CF-4134-B92D-27624D75D98B}"/>
               </a:ext>
             </a:extLst>
           </p:cNvPr>
@@ -8160,7 +8160,7 @@
           <p:cNvPr id="5" name="교육용 구성 사례 · Bug fix / Performance / README 작업">
             <a:extLst xmlns:a="http://schemas.openxmlformats.org/drawingml/2006/main">
               <a:ext uri="{FF2B5EF4-FFF2-40B4-BE49-F238E27FC236}">
-                <a16:creationId xmlns:a16="http://schemas.microsoft.com/office/drawing/2014/main" id="{60820342-7D9F-43A0-B314-382C3F8588E7}"/>
+                <a16:creationId xmlns:a16="http://schemas.microsoft.com/office/drawing/2014/main" id="{D1467637-EDAD-435A-BAF5-4DE5012C1BB0}"/>
               </a:ext>
             </a:extLst>
           </p:cNvPr>
@@ -8318,7 +8318,7 @@
           <p:cNvPr id="6" name="서로 다른 요청에 같은 프로젝트 정보가 반복되는 상황을 보여준다">
             <a:extLst xmlns:a="http://schemas.openxmlformats.org/drawingml/2006/main">
               <a:ext uri="{FF2B5EF4-FFF2-40B4-BE49-F238E27FC236}">
-                <a16:creationId xmlns:a16="http://schemas.microsoft.com/office/drawing/2014/main" id="{DC44D61A-160F-4BB4-9BAF-FBD543350AA8}"/>
+                <a16:creationId xmlns:a16="http://schemas.microsoft.com/office/drawing/2014/main" id="{8A2F0381-DADD-42B4-AACA-3F5927D8FDD7}"/>
               </a:ext>
             </a:extLst>
           </p:cNvPr>
@@ -8476,7 +8476,7 @@
           <p:cNvPr id="7" name="버그 수정">
             <a:extLst xmlns:a="http://schemas.openxmlformats.org/drawingml/2006/main">
               <a:ext uri="{FF2B5EF4-FFF2-40B4-BE49-F238E27FC236}">
-                <a16:creationId xmlns:a16="http://schemas.microsoft.com/office/drawing/2014/main" id="{72524DA4-1D0F-495E-9B2B-5A09F09C6E4D}"/>
+                <a16:creationId xmlns:a16="http://schemas.microsoft.com/office/drawing/2014/main" id="{62AE1473-8A9E-4A2D-9F77-07510B8FBF0F}"/>
               </a:ext>
             </a:extLst>
           </p:cNvPr>
@@ -8634,7 +8634,7 @@
           <p:cNvPr id="8" name="crop 경계를 수정해줘">
             <a:extLst xmlns:a="http://schemas.openxmlformats.org/drawingml/2006/main">
               <a:ext uri="{FF2B5EF4-FFF2-40B4-BE49-F238E27FC236}">
-                <a16:creationId xmlns:a16="http://schemas.microsoft.com/office/drawing/2014/main" id="{04F9214B-4EAE-4C70-A30A-7A785AF9F65D}"/>
+                <a16:creationId xmlns:a16="http://schemas.microsoft.com/office/drawing/2014/main" id="{89BDABD7-D870-42B2-AE63-EC0FA23C68AF}"/>
               </a:ext>
             </a:extLst>
           </p:cNvPr>
@@ -8792,7 +8792,7 @@
           <p:cNvPr id="9" name="">
             <a:extLst xmlns:a="http://schemas.openxmlformats.org/drawingml/2006/main">
               <a:ext uri="{FF2B5EF4-FFF2-40B4-BE49-F238E27FC236}">
-                <a16:creationId xmlns:a16="http://schemas.microsoft.com/office/drawing/2014/main" id="{B55DC843-DFB6-4200-8AB0-C9DBAB101B65}"/>
+                <a16:creationId xmlns:a16="http://schemas.microsoft.com/office/drawing/2014/main" id="{DB075F8A-921A-4550-AD77-CF13D2FAACB7}"/>
               </a:ext>
             </a:extLst>
           </p:cNvPr>
@@ -8823,7 +8823,7 @@
           <p:cNvPr id="10" name="">
             <a:extLst xmlns:a="http://schemas.openxmlformats.org/drawingml/2006/main">
               <a:ext uri="{FF2B5EF4-FFF2-40B4-BE49-F238E27FC236}">
-                <a16:creationId xmlns:a16="http://schemas.microsoft.com/office/drawing/2014/main" id="{60302E61-B39D-4306-B3F5-E526F9777823}"/>
+                <a16:creationId xmlns:a16="http://schemas.microsoft.com/office/drawing/2014/main" id="{1BF95B93-5717-4338-A4C3-E2DA1E4BC8E4}"/>
               </a:ext>
             </a:extLst>
           </p:cNvPr>
@@ -8854,7 +8854,7 @@
           <p:cNvPr id="11" name="지정된 테스트 실행&#10;의존성 추가에는 근거 필요&#10;로컬 합성 데이터 사용&#10;기존 동작 보존">
             <a:extLst xmlns:a="http://schemas.openxmlformats.org/drawingml/2006/main">
               <a:ext uri="{FF2B5EF4-FFF2-40B4-BE49-F238E27FC236}">
-                <a16:creationId xmlns:a16="http://schemas.microsoft.com/office/drawing/2014/main" id="{4A6092B1-2D09-4BA8-9FF9-B08D7AAA10E1}"/>
+                <a16:creationId xmlns:a16="http://schemas.microsoft.com/office/drawing/2014/main" id="{251B0F81-7530-413E-96CB-3B04B3859EAD}"/>
               </a:ext>
             </a:extLst>
           </p:cNvPr>
@@ -9081,7 +9081,7 @@
           <p:cNvPr id="12" name="성능 조사">
             <a:extLst xmlns:a="http://schemas.openxmlformats.org/drawingml/2006/main">
               <a:ext uri="{FF2B5EF4-FFF2-40B4-BE49-F238E27FC236}">
-                <a16:creationId xmlns:a16="http://schemas.microsoft.com/office/drawing/2014/main" id="{CFFF52F9-CAE1-49FD-8F64-D24C80F30E09}"/>
+                <a16:creationId xmlns:a16="http://schemas.microsoft.com/office/drawing/2014/main" id="{6A977824-D12A-428D-9A7F-C63C94B572E8}"/>
               </a:ext>
             </a:extLst>
           </p:cNvPr>
@@ -9239,7 +9239,7 @@
           <p:cNvPr id="13" name="통계 계산을 조사해줘">
             <a:extLst xmlns:a="http://schemas.openxmlformats.org/drawingml/2006/main">
               <a:ext uri="{FF2B5EF4-FFF2-40B4-BE49-F238E27FC236}">
-                <a16:creationId xmlns:a16="http://schemas.microsoft.com/office/drawing/2014/main" id="{F90DD313-9B47-4DB3-BC95-6E70961A2465}"/>
+                <a16:creationId xmlns:a16="http://schemas.microsoft.com/office/drawing/2014/main" id="{D280E139-2872-4E85-8983-302191E4A33A}"/>
               </a:ext>
             </a:extLst>
           </p:cNvPr>
@@ -9397,7 +9397,7 @@
           <p:cNvPr id="14" name="">
             <a:extLst xmlns:a="http://schemas.openxmlformats.org/drawingml/2006/main">
               <a:ext uri="{FF2B5EF4-FFF2-40B4-BE49-F238E27FC236}">
-                <a16:creationId xmlns:a16="http://schemas.microsoft.com/office/drawing/2014/main" id="{E4A1DA25-4AA8-416B-876F-63F12BA40E9C}"/>
+                <a16:creationId xmlns:a16="http://schemas.microsoft.com/office/drawing/2014/main" id="{E30A9A6A-9398-4289-B7FD-7583A1158B7D}"/>
               </a:ext>
             </a:extLst>
           </p:cNvPr>
@@ -9428,7 +9428,7 @@
           <p:cNvPr id="15" name="">
             <a:extLst xmlns:a="http://schemas.openxmlformats.org/drawingml/2006/main">
               <a:ext uri="{FF2B5EF4-FFF2-40B4-BE49-F238E27FC236}">
-                <a16:creationId xmlns:a16="http://schemas.microsoft.com/office/drawing/2014/main" id="{719B974C-6407-47C4-809D-30AB2B3D54F1}"/>
+                <a16:creationId xmlns:a16="http://schemas.microsoft.com/office/drawing/2014/main" id="{EBA1AC4F-2A09-4BE6-81F4-83EF90C6574B}"/>
               </a:ext>
             </a:extLst>
           </p:cNvPr>
@@ -9459,7 +9459,7 @@
           <p:cNvPr id="16" name="지정된 테스트 실행&#10;의존성 추가에는 근거 필요&#10;로컬 합성 데이터 사용&#10;기존 동작 보존">
             <a:extLst xmlns:a="http://schemas.openxmlformats.org/drawingml/2006/main">
               <a:ext uri="{FF2B5EF4-FFF2-40B4-BE49-F238E27FC236}">
-                <a16:creationId xmlns:a16="http://schemas.microsoft.com/office/drawing/2014/main" id="{922DAC3A-178C-4814-A300-C853C3F49DE4}"/>
+                <a16:creationId xmlns:a16="http://schemas.microsoft.com/office/drawing/2014/main" id="{7DB0345B-2446-43D5-BA91-63D465F99A2B}"/>
               </a:ext>
             </a:extLst>
           </p:cNvPr>
@@ -9686,7 +9686,7 @@
           <p:cNvPr id="17" name="README 수정">
             <a:extLst xmlns:a="http://schemas.openxmlformats.org/drawingml/2006/main">
               <a:ext uri="{FF2B5EF4-FFF2-40B4-BE49-F238E27FC236}">
-                <a16:creationId xmlns:a16="http://schemas.microsoft.com/office/drawing/2014/main" id="{0092E21B-311F-4F6F-8AFA-1601F6026E39}"/>
+                <a16:creationId xmlns:a16="http://schemas.microsoft.com/office/drawing/2014/main" id="{FB5E309A-43D5-4747-B374-FE48DB385FF8}"/>
               </a:ext>
             </a:extLst>
           </p:cNvPr>
@@ -9844,7 +9844,7 @@
           <p:cNvPr id="18" name="빌드 안내를 명확히 해줘">
             <a:extLst xmlns:a="http://schemas.openxmlformats.org/drawingml/2006/main">
               <a:ext uri="{FF2B5EF4-FFF2-40B4-BE49-F238E27FC236}">
-                <a16:creationId xmlns:a16="http://schemas.microsoft.com/office/drawing/2014/main" id="{126DF129-70AB-444B-9C35-86F3541EBB20}"/>
+                <a16:creationId xmlns:a16="http://schemas.microsoft.com/office/drawing/2014/main" id="{0F5DA080-CA6A-49C1-90E1-BDF2A837131A}"/>
               </a:ext>
             </a:extLst>
           </p:cNvPr>
@@ -10002,7 +10002,7 @@
           <p:cNvPr id="19" name="">
             <a:extLst xmlns:a="http://schemas.openxmlformats.org/drawingml/2006/main">
               <a:ext uri="{FF2B5EF4-FFF2-40B4-BE49-F238E27FC236}">
-                <a16:creationId xmlns:a16="http://schemas.microsoft.com/office/drawing/2014/main" id="{588F7A3F-F079-44C7-891E-4CE9E2D4C5DD}"/>
+                <a16:creationId xmlns:a16="http://schemas.microsoft.com/office/drawing/2014/main" id="{10535672-104A-41C8-B045-245837C40A3E}"/>
               </a:ext>
             </a:extLst>
           </p:cNvPr>
@@ -10033,7 +10033,7 @@
           <p:cNvPr id="20" name="">
             <a:extLst xmlns:a="http://schemas.openxmlformats.org/drawingml/2006/main">
               <a:ext uri="{FF2B5EF4-FFF2-40B4-BE49-F238E27FC236}">
-                <a16:creationId xmlns:a16="http://schemas.microsoft.com/office/drawing/2014/main" id="{BE91894A-C516-41DA-80DF-8B092C0F5BF8}"/>
+                <a16:creationId xmlns:a16="http://schemas.microsoft.com/office/drawing/2014/main" id="{0AFB77C3-A29D-439B-A7E9-ECBF21164EF1}"/>
               </a:ext>
             </a:extLst>
           </p:cNvPr>
@@ -10064,7 +10064,7 @@
           <p:cNvPr id="21" name="지정된 테스트 실행&#10;의존성 추가에는 근거 필요&#10;로컬 합성 데이터 사용&#10;기존 동작 보존">
             <a:extLst xmlns:a="http://schemas.openxmlformats.org/drawingml/2006/main">
               <a:ext uri="{FF2B5EF4-FFF2-40B4-BE49-F238E27FC236}">
-                <a16:creationId xmlns:a16="http://schemas.microsoft.com/office/drawing/2014/main" id="{006D8636-F730-450E-8B88-B3B8F4B47928}"/>
+                <a16:creationId xmlns:a16="http://schemas.microsoft.com/office/drawing/2014/main" id="{40773AD9-3DCB-4D7E-A421-8ADDE681FF34}"/>
               </a:ext>
             </a:extLst>
           </p:cNvPr>
@@ -10291,7 +10291,7 @@
           <p:cNvPr id="22" name="요청은 다른데, 아래 설명은 왜 계속 같을까?">
             <a:extLst xmlns:a="http://schemas.openxmlformats.org/drawingml/2006/main">
               <a:ext uri="{FF2B5EF4-FFF2-40B4-BE49-F238E27FC236}">
-                <a16:creationId xmlns:a16="http://schemas.microsoft.com/office/drawing/2014/main" id="{6501C640-C329-4596-AD6F-C42FD6A5E664}"/>
+                <a16:creationId xmlns:a16="http://schemas.microsoft.com/office/drawing/2014/main" id="{E23EADF8-91C3-4C89-B92C-CA6428EB86A8}"/>
               </a:ext>
             </a:extLst>
           </p:cNvPr>
@@ -10449,7 +10449,7 @@
           <p:cNvPr id="23" name="Legacy module connection">
             <a:extLst xmlns:a="http://schemas.openxmlformats.org/drawingml/2006/main">
               <a:ext uri="{FF2B5EF4-FFF2-40B4-BE49-F238E27FC236}">
-                <a16:creationId xmlns:a16="http://schemas.microsoft.com/office/drawing/2014/main" id="{8290108A-3614-4841-A0DA-26D805D39E96}"/>
+                <a16:creationId xmlns:a16="http://schemas.microsoft.com/office/drawing/2014/main" id="{A5558DDC-B0A1-40E3-B93F-0AC8BBAB452F}"/>
               </a:ext>
             </a:extLst>
           </p:cNvPr>
@@ -10605,7 +10605,7 @@
     </p:spTree>
     <p:extLst>
       <p:ext uri="{BB962C8B-B14F-4D97-AF65-F5344CB8AC3E}">
-        <p14:creationId xmlns:p14="http://schemas.microsoft.com/office/powerpoint/2010/main" val="1007247781"/>
+        <p14:creationId xmlns:p14="http://schemas.microsoft.com/office/powerpoint/2010/main" val="1947119079"/>
       </p:ext>
     </p:extLst>
   </p:cSld>
@@ -10636,7 +10636,7 @@
           <p:cNvPr id="24" name="ACT 2 · Core에 남길 기본 안내">
             <a:extLst xmlns:a="http://schemas.openxmlformats.org/drawingml/2006/main">
               <a:ext uri="{FF2B5EF4-FFF2-40B4-BE49-F238E27FC236}">
-                <a16:creationId xmlns:a16="http://schemas.microsoft.com/office/drawing/2014/main" id="{8A3A73D2-3997-43A9-AC7B-1719455D8780}"/>
+                <a16:creationId xmlns:a16="http://schemas.microsoft.com/office/drawing/2014/main" id="{F279B446-B9D8-47CE-88F2-C93B32D5BF8A}"/>
               </a:ext>
             </a:extLst>
           </p:cNvPr>
@@ -10791,10 +10791,10 @@
       </p:sp>
       <p:sp>
         <p:nvSpPr>
-          <p:cNvPr id="2" name="S33">
+          <p:cNvPr id="2" name="S41">
             <a:extLst xmlns:a="http://schemas.openxmlformats.org/drawingml/2006/main">
               <a:ext uri="{FF2B5EF4-FFF2-40B4-BE49-F238E27FC236}">
-                <a16:creationId xmlns:a16="http://schemas.microsoft.com/office/drawing/2014/main" id="{B5115B91-9E4E-4496-AD3B-4E628F3B4B61}"/>
+                <a16:creationId xmlns:a16="http://schemas.microsoft.com/office/drawing/2014/main" id="{CFDDF731-0B6E-49F5-BB51-A8EDC25B1592}"/>
               </a:ext>
             </a:extLst>
           </p:cNvPr>
@@ -10942,7 +10942,7 @@
                 <a:ea typeface="Malgun Gothic"/>
                 <a:cs typeface="Malgun Gothic"/>
               </a:rPr>
-              <a:t>S33</a:t>
+              <a:t>S41</a:t>
             </a:r>
           </a:p>
         </p:txBody>
@@ -10952,7 +10952,7 @@
           <p:cNvPr id="3" name="Core Context에서 상세 정보로 가는 길">
             <a:extLst xmlns:a="http://schemas.openxmlformats.org/drawingml/2006/main">
               <a:ext uri="{FF2B5EF4-FFF2-40B4-BE49-F238E27FC236}">
-                <a16:creationId xmlns:a16="http://schemas.microsoft.com/office/drawing/2014/main" id="{D70A43BF-F1D3-4E90-80F3-81023D8DE907}"/>
+                <a16:creationId xmlns:a16="http://schemas.microsoft.com/office/drawing/2014/main" id="{0FABFB5F-FE2A-4D60-A995-9C9C35AA059B}"/>
               </a:ext>
             </a:extLst>
           </p:cNvPr>
@@ -11110,7 +11110,7 @@
           <p:cNvPr id="4" name="">
             <a:extLst xmlns:a="http://schemas.openxmlformats.org/drawingml/2006/main">
               <a:ext uri="{FF2B5EF4-FFF2-40B4-BE49-F238E27FC236}">
-                <a16:creationId xmlns:a16="http://schemas.microsoft.com/office/drawing/2014/main" id="{AF8F4016-D7A2-4651-9A67-B6D1146A7C80}"/>
+                <a16:creationId xmlns:a16="http://schemas.microsoft.com/office/drawing/2014/main" id="{5D14997F-3F88-4914-BB61-E3CB0E82A281}"/>
               </a:ext>
             </a:extLst>
           </p:cNvPr>
@@ -11141,7 +11141,7 @@
           <p:cNvPr id="5" name="교육용 정보 설계 · Root/Core는 상세 정보의 출발점">
             <a:extLst xmlns:a="http://schemas.openxmlformats.org/drawingml/2006/main">
               <a:ext uri="{FF2B5EF4-FFF2-40B4-BE49-F238E27FC236}">
-                <a16:creationId xmlns:a16="http://schemas.microsoft.com/office/drawing/2014/main" id="{6CFF8BFC-8B3E-4C10-88D7-8E3BC77A3C78}"/>
+                <a16:creationId xmlns:a16="http://schemas.microsoft.com/office/drawing/2014/main" id="{4871D425-F804-406A-8918-288142E079A2}"/>
               </a:ext>
             </a:extLst>
           </p:cNvPr>
@@ -11299,7 +11299,7 @@
           <p:cNvPr id="6" name="C++ 예: build/test 진입점과 기본 제약 → 알고리즘 계약·하드웨어 조건">
             <a:extLst xmlns:a="http://schemas.openxmlformats.org/drawingml/2006/main">
               <a:ext uri="{FF2B5EF4-FFF2-40B4-BE49-F238E27FC236}">
-                <a16:creationId xmlns:a16="http://schemas.microsoft.com/office/drawing/2014/main" id="{27111A9B-27E8-4CB5-B61C-9B15AF96638D}"/>
+                <a16:creationId xmlns:a16="http://schemas.microsoft.com/office/drawing/2014/main" id="{BA50DB9F-E909-41F7-B26C-244F43C68682}"/>
               </a:ext>
             </a:extLst>
           </p:cNvPr>
@@ -11457,7 +11457,7 @@
           <p:cNvPr id="7" name="무엇을 항상 읽고, 무엇을 필요할 때 찾게 할까?">
             <a:extLst xmlns:a="http://schemas.openxmlformats.org/drawingml/2006/main">
               <a:ext uri="{FF2B5EF4-FFF2-40B4-BE49-F238E27FC236}">
-                <a16:creationId xmlns:a16="http://schemas.microsoft.com/office/drawing/2014/main" id="{70FC77B1-F8E9-45C6-91D9-440D4DB2213B}"/>
+                <a16:creationId xmlns:a16="http://schemas.microsoft.com/office/drawing/2014/main" id="{9BAF24EF-0706-4B92-BAC8-53342A9B2B39}"/>
               </a:ext>
             </a:extLst>
           </p:cNvPr>
@@ -11615,7 +11615,7 @@
           <p:cNvPr id="8" name="">
             <a:extLst xmlns:a="http://schemas.openxmlformats.org/drawingml/2006/main">
               <a:ext uri="{FF2B5EF4-FFF2-40B4-BE49-F238E27FC236}">
-                <a16:creationId xmlns:a16="http://schemas.microsoft.com/office/drawing/2014/main" id="{2F262897-D382-4D7B-802A-EEDCE54C7DDE}"/>
+                <a16:creationId xmlns:a16="http://schemas.microsoft.com/office/drawing/2014/main" id="{DAD28BBB-A3D7-4FB5-9B23-FBC7C9B9574C}"/>
               </a:ext>
             </a:extLst>
           </p:cNvPr>
@@ -11646,7 +11646,7 @@
           <p:cNvPr id="9" name="CORE · 기본 안내">
             <a:extLst xmlns:a="http://schemas.openxmlformats.org/drawingml/2006/main">
               <a:ext uri="{FF2B5EF4-FFF2-40B4-BE49-F238E27FC236}">
-                <a16:creationId xmlns:a16="http://schemas.microsoft.com/office/drawing/2014/main" id="{C901F962-E276-45FC-9F73-A5B45C22FB53}"/>
+                <a16:creationId xmlns:a16="http://schemas.microsoft.com/office/drawing/2014/main" id="{9571863D-5A34-4DDC-97E9-27FA34163964}"/>
               </a:ext>
             </a:extLst>
           </p:cNvPr>
@@ -11804,7 +11804,7 @@
           <p:cNvPr id="10" name="프로젝트의 목적&#10;항상 지켜야 할 제약&#10;상세 정보를 찾을 위치">
             <a:extLst xmlns:a="http://schemas.openxmlformats.org/drawingml/2006/main">
               <a:ext uri="{FF2B5EF4-FFF2-40B4-BE49-F238E27FC236}">
-                <a16:creationId xmlns:a16="http://schemas.microsoft.com/office/drawing/2014/main" id="{F63D33FC-C5DF-4B82-B14A-FA9A3527DBE9}"/>
+                <a16:creationId xmlns:a16="http://schemas.microsoft.com/office/drawing/2014/main" id="{248A41FC-0868-476A-B518-66D0511D7ED7}"/>
               </a:ext>
             </a:extLst>
           </p:cNvPr>
@@ -12008,7 +12008,7 @@
           <p:cNvPr id="11" name="">
             <a:extLst xmlns:a="http://schemas.openxmlformats.org/drawingml/2006/main">
               <a:ext uri="{FF2B5EF4-FFF2-40B4-BE49-F238E27FC236}">
-                <a16:creationId xmlns:a16="http://schemas.microsoft.com/office/drawing/2014/main" id="{D3E0FB86-E057-4B5E-842D-A780021D6204}"/>
+                <a16:creationId xmlns:a16="http://schemas.microsoft.com/office/drawing/2014/main" id="{748198BC-43F0-4A8D-A73B-84148D550917}"/>
               </a:ext>
             </a:extLst>
           </p:cNvPr>
@@ -12038,7 +12038,7 @@
           <p:cNvPr id="12" name="DETAIL · 필요한 상세">
             <a:extLst xmlns:a="http://schemas.openxmlformats.org/drawingml/2006/main">
               <a:ext uri="{FF2B5EF4-FFF2-40B4-BE49-F238E27FC236}">
-                <a16:creationId xmlns:a16="http://schemas.microsoft.com/office/drawing/2014/main" id="{996FCB9D-3978-4D7B-BC45-709B39176942}"/>
+                <a16:creationId xmlns:a16="http://schemas.microsoft.com/office/drawing/2014/main" id="{1DE7764A-50AD-4A4C-A09F-EEC2990441F1}"/>
               </a:ext>
             </a:extLst>
           </p:cNvPr>
@@ -12196,7 +12196,7 @@
           <p:cNvPr id="13" name="">
             <a:extLst xmlns:a="http://schemas.openxmlformats.org/drawingml/2006/main">
               <a:ext uri="{FF2B5EF4-FFF2-40B4-BE49-F238E27FC236}">
-                <a16:creationId xmlns:a16="http://schemas.microsoft.com/office/drawing/2014/main" id="{9FC7A149-9317-4827-B8D5-505E8C815283}"/>
+                <a16:creationId xmlns:a16="http://schemas.microsoft.com/office/drawing/2014/main" id="{8968EEF4-1F6B-43E5-AB86-425DDA227415}"/>
               </a:ext>
             </a:extLst>
           </p:cNvPr>
@@ -12227,7 +12227,7 @@
           <p:cNvPr id="14" name="architecture">
             <a:extLst xmlns:a="http://schemas.openxmlformats.org/drawingml/2006/main">
               <a:ext uri="{FF2B5EF4-FFF2-40B4-BE49-F238E27FC236}">
-                <a16:creationId xmlns:a16="http://schemas.microsoft.com/office/drawing/2014/main" id="{523D9235-4A74-46B4-A852-DDAC9C5DFB42}"/>
+                <a16:creationId xmlns:a16="http://schemas.microsoft.com/office/drawing/2014/main" id="{6A2E7FDF-059E-40CB-A557-CAFECCD8AB23}"/>
               </a:ext>
             </a:extLst>
           </p:cNvPr>
@@ -12385,7 +12385,7 @@
           <p:cNvPr id="15" name="모듈과 처리 순서">
             <a:extLst xmlns:a="http://schemas.openxmlformats.org/drawingml/2006/main">
               <a:ext uri="{FF2B5EF4-FFF2-40B4-BE49-F238E27FC236}">
-                <a16:creationId xmlns:a16="http://schemas.microsoft.com/office/drawing/2014/main" id="{5F85CDF1-6E11-4A01-9869-53C3754A198C}"/>
+                <a16:creationId xmlns:a16="http://schemas.microsoft.com/office/drawing/2014/main" id="{1C974FB6-0DC8-43E9-BE1B-98A189C50406}"/>
               </a:ext>
             </a:extLst>
           </p:cNvPr>
@@ -12543,7 +12543,7 @@
           <p:cNvPr id="16" name="">
             <a:extLst xmlns:a="http://schemas.openxmlformats.org/drawingml/2006/main">
               <a:ext uri="{FF2B5EF4-FFF2-40B4-BE49-F238E27FC236}">
-                <a16:creationId xmlns:a16="http://schemas.microsoft.com/office/drawing/2014/main" id="{5090C6CE-0D26-4B56-B48D-7E295A7856DD}"/>
+                <a16:creationId xmlns:a16="http://schemas.microsoft.com/office/drawing/2014/main" id="{55BB3D88-31F8-4E6A-B627-CFB5154CF05B}"/>
               </a:ext>
             </a:extLst>
           </p:cNvPr>
@@ -12574,7 +12574,7 @@
           <p:cNvPr id="17" name="image contracts">
             <a:extLst xmlns:a="http://schemas.openxmlformats.org/drawingml/2006/main">
               <a:ext uri="{FF2B5EF4-FFF2-40B4-BE49-F238E27FC236}">
-                <a16:creationId xmlns:a16="http://schemas.microsoft.com/office/drawing/2014/main" id="{6AD5821C-513A-446F-9127-5C4883CD66A3}"/>
+                <a16:creationId xmlns:a16="http://schemas.microsoft.com/office/drawing/2014/main" id="{8DC542C4-97FF-4200-898A-FF8B166E0B99}"/>
               </a:ext>
             </a:extLst>
           </p:cNvPr>
@@ -12732,7 +12732,7 @@
           <p:cNvPr id="18" name="이미지 동작의 계약">
             <a:extLst xmlns:a="http://schemas.openxmlformats.org/drawingml/2006/main">
               <a:ext uri="{FF2B5EF4-FFF2-40B4-BE49-F238E27FC236}">
-                <a16:creationId xmlns:a16="http://schemas.microsoft.com/office/drawing/2014/main" id="{D1ADE284-4830-4234-9EBB-BD49236AFAE1}"/>
+                <a16:creationId xmlns:a16="http://schemas.microsoft.com/office/drawing/2014/main" id="{B05862F5-5A5A-4F73-8527-5EDA31CE9977}"/>
               </a:ext>
             </a:extLst>
           </p:cNvPr>
@@ -12890,7 +12890,7 @@
           <p:cNvPr id="19" name="">
             <a:extLst xmlns:a="http://schemas.openxmlformats.org/drawingml/2006/main">
               <a:ext uri="{FF2B5EF4-FFF2-40B4-BE49-F238E27FC236}">
-                <a16:creationId xmlns:a16="http://schemas.microsoft.com/office/drawing/2014/main" id="{79B5D4D2-AB93-407B-86C6-743A2A1B5284}"/>
+                <a16:creationId xmlns:a16="http://schemas.microsoft.com/office/drawing/2014/main" id="{15D48E0D-CE0D-4EF9-8A85-9430811B3A7B}"/>
               </a:ext>
             </a:extLst>
           </p:cNvPr>
@@ -12921,7 +12921,7 @@
           <p:cNvPr id="20" name="testing">
             <a:extLst xmlns:a="http://schemas.openxmlformats.org/drawingml/2006/main">
               <a:ext uri="{FF2B5EF4-FFF2-40B4-BE49-F238E27FC236}">
-                <a16:creationId xmlns:a16="http://schemas.microsoft.com/office/drawing/2014/main" id="{E6C96C3D-33F1-4127-AF14-91D708C9653E}"/>
+                <a16:creationId xmlns:a16="http://schemas.microsoft.com/office/drawing/2014/main" id="{B103AB2F-8686-494E-BCDF-E99397072C23}"/>
               </a:ext>
             </a:extLst>
           </p:cNvPr>
@@ -13079,7 +13079,7 @@
           <p:cNvPr id="21" name="테스트 위치와 범위">
             <a:extLst xmlns:a="http://schemas.openxmlformats.org/drawingml/2006/main">
               <a:ext uri="{FF2B5EF4-FFF2-40B4-BE49-F238E27FC236}">
-                <a16:creationId xmlns:a16="http://schemas.microsoft.com/office/drawing/2014/main" id="{153D5219-50E7-414E-9432-A120315ADC2E}"/>
+                <a16:creationId xmlns:a16="http://schemas.microsoft.com/office/drawing/2014/main" id="{218125D9-F267-4305-8C91-2A8FA88DF43D}"/>
               </a:ext>
             </a:extLst>
           </p:cNvPr>
@@ -13237,7 +13237,7 @@
           <p:cNvPr id="22" name="모든 지식을 넣기보다, 상세 정보까지 가는 길을 안내한다">
             <a:extLst xmlns:a="http://schemas.openxmlformats.org/drawingml/2006/main">
               <a:ext uri="{FF2B5EF4-FFF2-40B4-BE49-F238E27FC236}">
-                <a16:creationId xmlns:a16="http://schemas.microsoft.com/office/drawing/2014/main" id="{37620AA0-4208-4932-8D09-41D00F096694}"/>
+                <a16:creationId xmlns:a16="http://schemas.microsoft.com/office/drawing/2014/main" id="{5327D5AE-3B0B-434F-B6B2-05949332B1E8}"/>
               </a:ext>
             </a:extLst>
           </p:cNvPr>
@@ -13395,7 +13395,7 @@
           <p:cNvPr id="23" name="Legacy module connection">
             <a:extLst xmlns:a="http://schemas.openxmlformats.org/drawingml/2006/main">
               <a:ext uri="{FF2B5EF4-FFF2-40B4-BE49-F238E27FC236}">
-                <a16:creationId xmlns:a16="http://schemas.microsoft.com/office/drawing/2014/main" id="{9A5C5B8D-C21F-4F35-A061-8AF35263FC44}"/>
+                <a16:creationId xmlns:a16="http://schemas.microsoft.com/office/drawing/2014/main" id="{ECE5C021-31A1-47AE-BD8B-D30BFDB1BB5E}"/>
               </a:ext>
             </a:extLst>
           </p:cNvPr>
@@ -13551,7 +13551,7 @@
     </p:spTree>
     <p:extLst>
       <p:ext uri="{BB962C8B-B14F-4D97-AF65-F5344CB8AC3E}">
-        <p14:creationId xmlns:p14="http://schemas.microsoft.com/office/powerpoint/2010/main" val="992549738"/>
+        <p14:creationId xmlns:p14="http://schemas.microsoft.com/office/powerpoint/2010/main" val="1865005977"/>
       </p:ext>
     </p:extLst>
   </p:cSld>
@@ -13582,7 +13582,7 @@
           <p:cNvPr id="23" name="ACT 2 · STATE-03의 문서 구조">
             <a:extLst xmlns:a="http://schemas.openxmlformats.org/drawingml/2006/main">
               <a:ext uri="{FF2B5EF4-FFF2-40B4-BE49-F238E27FC236}">
-                <a16:creationId xmlns:a16="http://schemas.microsoft.com/office/drawing/2014/main" id="{5806ED22-8CCE-4E0F-B9C5-D060D0E0CB5A}"/>
+                <a16:creationId xmlns:a16="http://schemas.microsoft.com/office/drawing/2014/main" id="{788C7682-62F6-4932-BC7E-D18B1B5438C4}"/>
               </a:ext>
             </a:extLst>
           </p:cNvPr>
@@ -13737,10 +13737,10 @@
       </p:sp>
       <p:sp>
         <p:nvSpPr>
-          <p:cNvPr id="2" name="S34">
+          <p:cNvPr id="2" name="S42">
             <a:extLst xmlns:a="http://schemas.openxmlformats.org/drawingml/2006/main">
               <a:ext uri="{FF2B5EF4-FFF2-40B4-BE49-F238E27FC236}">
-                <a16:creationId xmlns:a16="http://schemas.microsoft.com/office/drawing/2014/main" id="{F071112A-145F-4AF9-AF3B-CE6B7E4AAFDD}"/>
+                <a16:creationId xmlns:a16="http://schemas.microsoft.com/office/drawing/2014/main" id="{485D5109-07F8-44BF-A7CA-EF584EDA0344}"/>
               </a:ext>
             </a:extLst>
           </p:cNvPr>
@@ -13888,7 +13888,7 @@
                 <a:ea typeface="Malgun Gothic"/>
                 <a:cs typeface="Malgun Gothic"/>
               </a:rPr>
-              <a:t>S34</a:t>
+              <a:t>S42</a:t>
             </a:r>
           </a:p>
         </p:txBody>
@@ -13898,7 +13898,7 @@
           <p:cNvPr id="3" name="정보를 지우지 않고 위치를 나누기">
             <a:extLst xmlns:a="http://schemas.openxmlformats.org/drawingml/2006/main">
               <a:ext uri="{FF2B5EF4-FFF2-40B4-BE49-F238E27FC236}">
-                <a16:creationId xmlns:a16="http://schemas.microsoft.com/office/drawing/2014/main" id="{82CE19EC-F016-4C44-85FF-23AC4FC64BF4}"/>
+                <a16:creationId xmlns:a16="http://schemas.microsoft.com/office/drawing/2014/main" id="{A2A911FA-53BC-4251-A2ED-743BA7ABD2A3}"/>
               </a:ext>
             </a:extLst>
           </p:cNvPr>
@@ -14056,7 +14056,7 @@
           <p:cNvPr id="4" name="">
             <a:extLst xmlns:a="http://schemas.openxmlformats.org/drawingml/2006/main">
               <a:ext uri="{FF2B5EF4-FFF2-40B4-BE49-F238E27FC236}">
-                <a16:creationId xmlns:a16="http://schemas.microsoft.com/office/drawing/2014/main" id="{53D74C30-238A-4BD1-933B-5C365F3C92AC}"/>
+                <a16:creationId xmlns:a16="http://schemas.microsoft.com/office/drawing/2014/main" id="{C343BEF1-AC21-443B-B9DF-BB21B603EE6C}"/>
               </a:ext>
             </a:extLst>
           </p:cNvPr>
@@ -14087,7 +14087,7 @@
           <p:cNvPr id="5" name="STATE-02 → STATE-03 · 실제 파일 구조와 Routing 문구 발췌">
             <a:extLst xmlns:a="http://schemas.openxmlformats.org/drawingml/2006/main">
               <a:ext uri="{FF2B5EF4-FFF2-40B4-BE49-F238E27FC236}">
-                <a16:creationId xmlns:a16="http://schemas.microsoft.com/office/drawing/2014/main" id="{AD060CC0-DAB5-4FC9-A6C0-42A0A92EFA6E}"/>
+                <a16:creationId xmlns:a16="http://schemas.microsoft.com/office/drawing/2014/main" id="{E02A7D44-936E-47D2-962A-822CBD77A21E}"/>
               </a:ext>
             </a:extLst>
           </p:cNvPr>
@@ -14245,7 +14245,7 @@
           <p:cNvPr id="6" name="내용을 Scope에 맞춰 이동 · 구조 변화 자체가 완벽한 Routing이나 성능 향상 증거는 아님">
             <a:extLst xmlns:a="http://schemas.openxmlformats.org/drawingml/2006/main">
               <a:ext uri="{FF2B5EF4-FFF2-40B4-BE49-F238E27FC236}">
-                <a16:creationId xmlns:a16="http://schemas.microsoft.com/office/drawing/2014/main" id="{1C6073C8-B1B4-4ECC-B43B-2F64946554FF}"/>
+                <a16:creationId xmlns:a16="http://schemas.microsoft.com/office/drawing/2014/main" id="{567C2588-92EF-40C4-B06C-39174E335032}"/>
               </a:ext>
             </a:extLst>
           </p:cNvPr>
@@ -14403,7 +14403,7 @@
           <p:cNvPr id="7" name="이전: AGENTS.md 안에 세부사항까지">
             <a:extLst xmlns:a="http://schemas.openxmlformats.org/drawingml/2006/main">
               <a:ext uri="{FF2B5EF4-FFF2-40B4-BE49-F238E27FC236}">
-                <a16:creationId xmlns:a16="http://schemas.microsoft.com/office/drawing/2014/main" id="{7A93CFD9-3078-4C3F-80EE-BE7ABD9693DA}"/>
+                <a16:creationId xmlns:a16="http://schemas.microsoft.com/office/drawing/2014/main" id="{1810B824-E25D-4AD5-ADF8-2DFAFD5EEBEB}"/>
               </a:ext>
             </a:extLst>
           </p:cNvPr>
@@ -14561,7 +14561,7 @@
           <p:cNvPr id="8" name="이후: 기본 안내 + 상세 문서로 가는 링크">
             <a:extLst xmlns:a="http://schemas.openxmlformats.org/drawingml/2006/main">
               <a:ext uri="{FF2B5EF4-FFF2-40B4-BE49-F238E27FC236}">
-                <a16:creationId xmlns:a16="http://schemas.microsoft.com/office/drawing/2014/main" id="{8587CEB5-4243-4CED-AED7-E3C8A148EEB4}"/>
+                <a16:creationId xmlns:a16="http://schemas.microsoft.com/office/drawing/2014/main" id="{96F9D346-B233-4FD3-8858-F61B2CF50139}"/>
               </a:ext>
             </a:extLst>
           </p:cNvPr>
@@ -14719,7 +14719,7 @@
           <p:cNvPr id="9" name="">
             <a:extLst xmlns:a="http://schemas.openxmlformats.org/drawingml/2006/main">
               <a:ext uri="{FF2B5EF4-FFF2-40B4-BE49-F238E27FC236}">
-                <a16:creationId xmlns:a16="http://schemas.microsoft.com/office/drawing/2014/main" id="{0CE5C30B-670F-4864-9B96-16FED35E9672}"/>
+                <a16:creationId xmlns:a16="http://schemas.microsoft.com/office/drawing/2014/main" id="{8DA9F01A-4602-4715-B728-D217824526B8}"/>
               </a:ext>
             </a:extLst>
           </p:cNvPr>
@@ -14750,7 +14750,7 @@
           <p:cNvPr id="10" name="처리 순서 · 모듈 역할">
             <a:extLst xmlns:a="http://schemas.openxmlformats.org/drawingml/2006/main">
               <a:ext uri="{FF2B5EF4-FFF2-40B4-BE49-F238E27FC236}">
-                <a16:creationId xmlns:a16="http://schemas.microsoft.com/office/drawing/2014/main" id="{46227097-5539-4D01-9FF9-92ADCCCCA454}"/>
+                <a16:creationId xmlns:a16="http://schemas.microsoft.com/office/drawing/2014/main" id="{76284F08-992E-4361-BEF6-95B4267D307F}"/>
               </a:ext>
             </a:extLst>
           </p:cNvPr>
@@ -14908,7 +14908,7 @@
           <p:cNvPr id="11" name="">
             <a:extLst xmlns:a="http://schemas.openxmlformats.org/drawingml/2006/main">
               <a:ext uri="{FF2B5EF4-FFF2-40B4-BE49-F238E27FC236}">
-                <a16:creationId xmlns:a16="http://schemas.microsoft.com/office/drawing/2014/main" id="{1FAFAF25-2D07-4277-B7A8-B12919C9A091}"/>
+                <a16:creationId xmlns:a16="http://schemas.microsoft.com/office/drawing/2014/main" id="{767F4CC7-55BE-4CC4-AD84-19C1A9219F69}"/>
               </a:ext>
             </a:extLst>
           </p:cNvPr>
@@ -14938,7 +14938,7 @@
           <p:cNvPr id="12" name="docs/architecture.md">
             <a:extLst xmlns:a="http://schemas.openxmlformats.org/drawingml/2006/main">
               <a:ext uri="{FF2B5EF4-FFF2-40B4-BE49-F238E27FC236}">
-                <a16:creationId xmlns:a16="http://schemas.microsoft.com/office/drawing/2014/main" id="{0F3AE027-15B6-4D71-8020-C96DB6C7297A}"/>
+                <a16:creationId xmlns:a16="http://schemas.microsoft.com/office/drawing/2014/main" id="{D4CBBAD9-663C-4826-B198-131668892B7E}"/>
               </a:ext>
             </a:extLst>
           </p:cNvPr>
@@ -15096,7 +15096,7 @@
           <p:cNvPr id="13" name="">
             <a:extLst xmlns:a="http://schemas.openxmlformats.org/drawingml/2006/main">
               <a:ext uri="{FF2B5EF4-FFF2-40B4-BE49-F238E27FC236}">
-                <a16:creationId xmlns:a16="http://schemas.microsoft.com/office/drawing/2014/main" id="{F026E129-64E8-4CD9-B6FC-80640EED458E}"/>
+                <a16:creationId xmlns:a16="http://schemas.microsoft.com/office/drawing/2014/main" id="{759D69EE-1331-4590-BEAD-7271FB238C3E}"/>
               </a:ext>
             </a:extLst>
           </p:cNvPr>
@@ -15127,7 +15127,7 @@
           <p:cNvPr id="14" name="이미지 형식 · crop · resize">
             <a:extLst xmlns:a="http://schemas.openxmlformats.org/drawingml/2006/main">
               <a:ext uri="{FF2B5EF4-FFF2-40B4-BE49-F238E27FC236}">
-                <a16:creationId xmlns:a16="http://schemas.microsoft.com/office/drawing/2014/main" id="{AC8CDBB6-9D0D-4CEF-9FFD-2DB8E42ED9A0}"/>
+                <a16:creationId xmlns:a16="http://schemas.microsoft.com/office/drawing/2014/main" id="{7893676E-AA8E-4C95-AA0E-52A812736D87}"/>
               </a:ext>
             </a:extLst>
           </p:cNvPr>
@@ -15285,7 +15285,7 @@
           <p:cNvPr id="15" name="">
             <a:extLst xmlns:a="http://schemas.openxmlformats.org/drawingml/2006/main">
               <a:ext uri="{FF2B5EF4-FFF2-40B4-BE49-F238E27FC236}">
-                <a16:creationId xmlns:a16="http://schemas.microsoft.com/office/drawing/2014/main" id="{72482B81-7BF0-4448-AAC3-656E1E478A1C}"/>
+                <a16:creationId xmlns:a16="http://schemas.microsoft.com/office/drawing/2014/main" id="{28FEDE20-44F3-4D8D-9237-B3D945B95D67}"/>
               </a:ext>
             </a:extLst>
           </p:cNvPr>
@@ -15315,7 +15315,7 @@
           <p:cNvPr id="16" name="docs/image-contracts.md">
             <a:extLst xmlns:a="http://schemas.openxmlformats.org/drawingml/2006/main">
               <a:ext uri="{FF2B5EF4-FFF2-40B4-BE49-F238E27FC236}">
-                <a16:creationId xmlns:a16="http://schemas.microsoft.com/office/drawing/2014/main" id="{38C9D747-98B0-441C-951E-14780455596E}"/>
+                <a16:creationId xmlns:a16="http://schemas.microsoft.com/office/drawing/2014/main" id="{C158F668-C4D0-4483-B0DC-A49E66E5F0DF}"/>
               </a:ext>
             </a:extLst>
           </p:cNvPr>
@@ -15473,7 +15473,7 @@
           <p:cNvPr id="17" name="">
             <a:extLst xmlns:a="http://schemas.openxmlformats.org/drawingml/2006/main">
               <a:ext uri="{FF2B5EF4-FFF2-40B4-BE49-F238E27FC236}">
-                <a16:creationId xmlns:a16="http://schemas.microsoft.com/office/drawing/2014/main" id="{E6E0019F-845F-4823-AFF6-93B452DC75DC}"/>
+                <a16:creationId xmlns:a16="http://schemas.microsoft.com/office/drawing/2014/main" id="{99C00B97-688C-42D1-B38A-6D0917222F6D}"/>
               </a:ext>
             </a:extLst>
           </p:cNvPr>
@@ -15504,7 +15504,7 @@
           <p:cNvPr id="18" name="테스트 구조 · 관련 테스트">
             <a:extLst xmlns:a="http://schemas.openxmlformats.org/drawingml/2006/main">
               <a:ext uri="{FF2B5EF4-FFF2-40B4-BE49-F238E27FC236}">
-                <a16:creationId xmlns:a16="http://schemas.microsoft.com/office/drawing/2014/main" id="{667420AD-D3F7-4DFC-AD2D-714D13AD3AB9}"/>
+                <a16:creationId xmlns:a16="http://schemas.microsoft.com/office/drawing/2014/main" id="{83872947-375B-4EEC-A7DF-1D01038DC11B}"/>
               </a:ext>
             </a:extLst>
           </p:cNvPr>
@@ -15662,7 +15662,7 @@
           <p:cNvPr id="19" name="">
             <a:extLst xmlns:a="http://schemas.openxmlformats.org/drawingml/2006/main">
               <a:ext uri="{FF2B5EF4-FFF2-40B4-BE49-F238E27FC236}">
-                <a16:creationId xmlns:a16="http://schemas.microsoft.com/office/drawing/2014/main" id="{0AB00C2D-EA8D-4DD7-9741-27F0C1D2CD38}"/>
+                <a16:creationId xmlns:a16="http://schemas.microsoft.com/office/drawing/2014/main" id="{3654CAE9-99A1-4F5B-ADC4-BBCCAB66F2BC}"/>
               </a:ext>
             </a:extLst>
           </p:cNvPr>
@@ -15692,7 +15692,7 @@
           <p:cNvPr id="20" name="docs/testing.md">
             <a:extLst xmlns:a="http://schemas.openxmlformats.org/drawingml/2006/main">
               <a:ext uri="{FF2B5EF4-FFF2-40B4-BE49-F238E27FC236}">
-                <a16:creationId xmlns:a16="http://schemas.microsoft.com/office/drawing/2014/main" id="{FC28BF48-B360-4BF0-9B7F-EFE28FB75C81}"/>
+                <a16:creationId xmlns:a16="http://schemas.microsoft.com/office/drawing/2014/main" id="{08C1C694-D7E8-4977-9F5A-0C4B2E75922F}"/>
               </a:ext>
             </a:extLst>
           </p:cNvPr>
@@ -15850,7 +15850,7 @@
           <p:cNvPr id="21" name="원문: Test organization or relevant tests → docs/testing.md">
             <a:extLst xmlns:a="http://schemas.openxmlformats.org/drawingml/2006/main">
               <a:ext uri="{FF2B5EF4-FFF2-40B4-BE49-F238E27FC236}">
-                <a16:creationId xmlns:a16="http://schemas.microsoft.com/office/drawing/2014/main" id="{39FD4B9F-92AA-4D62-9F7D-820D403295DA}"/>
+                <a16:creationId xmlns:a16="http://schemas.microsoft.com/office/drawing/2014/main" id="{E0238A23-F41D-47B3-BBBF-EC08A9DF9526}"/>
               </a:ext>
             </a:extLst>
           </p:cNvPr>
@@ -16008,7 +16008,7 @@
           <p:cNvPr id="22" name="Legacy module connection">
             <a:extLst xmlns:a="http://schemas.openxmlformats.org/drawingml/2006/main">
               <a:ext uri="{FF2B5EF4-FFF2-40B4-BE49-F238E27FC236}">
-                <a16:creationId xmlns:a16="http://schemas.microsoft.com/office/drawing/2014/main" id="{C25AB7D9-09BD-499A-AB5C-8435D5FD8BEF}"/>
+                <a16:creationId xmlns:a16="http://schemas.microsoft.com/office/drawing/2014/main" id="{DD8BE3B5-CFE5-42FA-BF7A-278CEFB2931F}"/>
               </a:ext>
             </a:extLst>
           </p:cNvPr>
@@ -16164,7 +16164,7 @@
     </p:spTree>
     <p:extLst>
       <p:ext uri="{BB962C8B-B14F-4D97-AF65-F5344CB8AC3E}">
-        <p14:creationId xmlns:p14="http://schemas.microsoft.com/office/powerpoint/2010/main" val="482626291"/>
+        <p14:creationId xmlns:p14="http://schemas.microsoft.com/office/powerpoint/2010/main" val="2121864522"/>
       </p:ext>
     </p:extLst>
   </p:cSld>
@@ -16195,7 +16195,7 @@
           <p:cNvPr id="15" name="ACT 2 · 관찰하기 전에 질문하기">
             <a:extLst xmlns:a="http://schemas.openxmlformats.org/drawingml/2006/main">
               <a:ext uri="{FF2B5EF4-FFF2-40B4-BE49-F238E27FC236}">
-                <a16:creationId xmlns:a16="http://schemas.microsoft.com/office/drawing/2014/main" id="{A4C75A6D-D273-429E-B0D4-C84F3DD69A5A}"/>
+                <a16:creationId xmlns:a16="http://schemas.microsoft.com/office/drawing/2014/main" id="{24AD7013-AEC1-45F4-A8CD-5433D342BEBA}"/>
               </a:ext>
             </a:extLst>
           </p:cNvPr>
@@ -16350,10 +16350,10 @@
       </p:sp>
       <p:sp>
         <p:nvSpPr>
-          <p:cNvPr id="2" name="S35">
+          <p:cNvPr id="2" name="S43">
             <a:extLst xmlns:a="http://schemas.openxmlformats.org/drawingml/2006/main">
               <a:ext uri="{FF2B5EF4-FFF2-40B4-BE49-F238E27FC236}">
-                <a16:creationId xmlns:a16="http://schemas.microsoft.com/office/drawing/2014/main" id="{0B89FD35-12C9-482C-BD5D-D053857E3F8C}"/>
+                <a16:creationId xmlns:a16="http://schemas.microsoft.com/office/drawing/2014/main" id="{594878E5-2F57-44B3-96EE-1185E1EFCD4A}"/>
               </a:ext>
             </a:extLst>
           </p:cNvPr>
@@ -16501,7 +16501,7 @@
                 <a:ea typeface="Malgun Gothic"/>
                 <a:cs typeface="Malgun Gothic"/>
               </a:rPr>
-              <a:t>S35</a:t>
+              <a:t>S43</a:t>
             </a:r>
           </a:p>
         </p:txBody>
@@ -16511,7 +16511,7 @@
           <p:cNvPr id="3" name="서로 다른 두 Task가 무엇을 읽을까?">
             <a:extLst xmlns:a="http://schemas.openxmlformats.org/drawingml/2006/main">
               <a:ext uri="{FF2B5EF4-FFF2-40B4-BE49-F238E27FC236}">
-                <a16:creationId xmlns:a16="http://schemas.microsoft.com/office/drawing/2014/main" id="{3EB3115B-F0C1-4369-9432-5D6F20745169}"/>
+                <a16:creationId xmlns:a16="http://schemas.microsoft.com/office/drawing/2014/main" id="{6476FFDA-C39B-40BC-811E-732F448C7CE7}"/>
               </a:ext>
             </a:extLst>
           </p:cNvPr>
@@ -16669,7 +16669,7 @@
           <p:cNvPr id="4" name="">
             <a:extLst xmlns:a="http://schemas.openxmlformats.org/drawingml/2006/main">
               <a:ext uri="{FF2B5EF4-FFF2-40B4-BE49-F238E27FC236}">
-                <a16:creationId xmlns:a16="http://schemas.microsoft.com/office/drawing/2014/main" id="{E4DE2CAB-84DA-46BB-A7B6-9D2A29C1D839}"/>
+                <a16:creationId xmlns:a16="http://schemas.microsoft.com/office/drawing/2014/main" id="{ECCA15CD-FAF5-411E-B24E-5E3D99307636}"/>
               </a:ext>
             </a:extLst>
           </p:cNvPr>
@@ -16700,7 +16700,7 @@
           <p:cNvPr id="5" name="TRIAL-005A/B · 읽기 전용 Task의 질문을 재구성">
             <a:extLst xmlns:a="http://schemas.openxmlformats.org/drawingml/2006/main">
               <a:ext uri="{FF2B5EF4-FFF2-40B4-BE49-F238E27FC236}">
-                <a16:creationId xmlns:a16="http://schemas.microsoft.com/office/drawing/2014/main" id="{967BCFFA-8C42-4149-890D-C313E0A38A54}"/>
+                <a16:creationId xmlns:a16="http://schemas.microsoft.com/office/drawing/2014/main" id="{E1F675C6-4D55-4519-B783-C6853E892504}"/>
               </a:ext>
             </a:extLst>
           </p:cNvPr>
@@ -16858,7 +16858,7 @@
           <p:cNvPr id="6" name="어떤 상세 문서를 읽을지는 실제 접근 기록으로 확인한다">
             <a:extLst xmlns:a="http://schemas.openxmlformats.org/drawingml/2006/main">
               <a:ext uri="{FF2B5EF4-FFF2-40B4-BE49-F238E27FC236}">
-                <a16:creationId xmlns:a16="http://schemas.microsoft.com/office/drawing/2014/main" id="{A8946A90-EE9D-4384-8545-F8FC37236412}"/>
+                <a16:creationId xmlns:a16="http://schemas.microsoft.com/office/drawing/2014/main" id="{61F23037-9A98-4775-B971-8DE661C4D202}"/>
               </a:ext>
             </a:extLst>
           </p:cNvPr>
@@ -17016,7 +17016,7 @@
           <p:cNvPr id="7" name="Task A">
             <a:extLst xmlns:a="http://schemas.openxmlformats.org/drawingml/2006/main">
               <a:ext uri="{FF2B5EF4-FFF2-40B4-BE49-F238E27FC236}">
-                <a16:creationId xmlns:a16="http://schemas.microsoft.com/office/drawing/2014/main" id="{9C17FACC-C644-46AC-B655-6DC7F633B7F7}"/>
+                <a16:creationId xmlns:a16="http://schemas.microsoft.com/office/drawing/2014/main" id="{1F524A42-FAE2-4F19-A669-BD49A8BFCDFF}"/>
               </a:ext>
             </a:extLst>
           </p:cNvPr>
@@ -17174,7 +17174,7 @@
           <p:cNvPr id="8" name="Task B">
             <a:extLst xmlns:a="http://schemas.openxmlformats.org/drawingml/2006/main">
               <a:ext uri="{FF2B5EF4-FFF2-40B4-BE49-F238E27FC236}">
-                <a16:creationId xmlns:a16="http://schemas.microsoft.com/office/drawing/2014/main" id="{A8553834-12E9-4316-89F2-064DCB12F0DC}"/>
+                <a16:creationId xmlns:a16="http://schemas.microsoft.com/office/drawing/2014/main" id="{DB318CD6-BEA2-43D8-8E6E-885BAC1AA46F}"/>
               </a:ext>
             </a:extLst>
           </p:cNvPr>
@@ -17332,7 +17332,7 @@
           <p:cNvPr id="9" name="">
             <a:extLst xmlns:a="http://schemas.openxmlformats.org/drawingml/2006/main">
               <a:ext uri="{FF2B5EF4-FFF2-40B4-BE49-F238E27FC236}">
-                <a16:creationId xmlns:a16="http://schemas.microsoft.com/office/drawing/2014/main" id="{99AF6A44-68C4-45BD-9948-1C3D5C6120C5}"/>
+                <a16:creationId xmlns:a16="http://schemas.microsoft.com/office/drawing/2014/main" id="{771F8D7C-889D-4813-8350-A19A9E72DEED}"/>
               </a:ext>
             </a:extLst>
           </p:cNvPr>
@@ -17363,7 +17363,7 @@
           <p:cNvPr id="10" name="">
             <a:extLst xmlns:a="http://schemas.openxmlformats.org/drawingml/2006/main">
               <a:ext uri="{FF2B5EF4-FFF2-40B4-BE49-F238E27FC236}">
-                <a16:creationId xmlns:a16="http://schemas.microsoft.com/office/drawing/2014/main" id="{3D30A006-4B12-4921-A45A-DC9988D3BCE1}"/>
+                <a16:creationId xmlns:a16="http://schemas.microsoft.com/office/drawing/2014/main" id="{82FE8741-B596-40F6-BB1A-5D28EF4E370F}"/>
               </a:ext>
             </a:extLst>
           </p:cNvPr>
@@ -17394,7 +17394,7 @@
           <p:cNvPr id="11" name="crop 1 3은&#10;어떤 source column을&#10;포함하는가?">
             <a:extLst xmlns:a="http://schemas.openxmlformats.org/drawingml/2006/main">
               <a:ext uri="{FF2B5EF4-FFF2-40B4-BE49-F238E27FC236}">
-                <a16:creationId xmlns:a16="http://schemas.microsoft.com/office/drawing/2014/main" id="{E4932F89-EC71-44E9-9E74-9C0AC131B964}"/>
+                <a16:creationId xmlns:a16="http://schemas.microsoft.com/office/drawing/2014/main" id="{2F85E9B8-4C20-489F-916A-EF7B7358E99F}"/>
               </a:ext>
             </a:extLst>
           </p:cNvPr>
@@ -17598,7 +17598,7 @@
           <p:cNvPr id="12" name="이 Project에&#10;runtime dependency가&#10;있는가?">
             <a:extLst xmlns:a="http://schemas.openxmlformats.org/drawingml/2006/main">
               <a:ext uri="{FF2B5EF4-FFF2-40B4-BE49-F238E27FC236}">
-                <a16:creationId xmlns:a16="http://schemas.microsoft.com/office/drawing/2014/main" id="{EC9A7992-87C9-4681-A80D-F14FA2DEE7D0}"/>
+                <a16:creationId xmlns:a16="http://schemas.microsoft.com/office/drawing/2014/main" id="{C2DB9346-DD7D-4E58-BC16-BC3F4CEA7F2A}"/>
               </a:ext>
             </a:extLst>
           </p:cNvPr>
@@ -17802,7 +17802,7 @@
           <p:cNvPr id="13" name="두 Task에서 같은 상세 문서를 읽을까?">
             <a:extLst xmlns:a="http://schemas.openxmlformats.org/drawingml/2006/main">
               <a:ext uri="{FF2B5EF4-FFF2-40B4-BE49-F238E27FC236}">
-                <a16:creationId xmlns:a16="http://schemas.microsoft.com/office/drawing/2014/main" id="{C6070B1B-B787-437D-A70D-B0CB8F61772F}"/>
+                <a16:creationId xmlns:a16="http://schemas.microsoft.com/office/drawing/2014/main" id="{9498B67D-DED8-41B0-BEF9-DDEEC9F409E9}"/>
               </a:ext>
             </a:extLst>
           </p:cNvPr>
@@ -17960,7 +17960,7 @@
           <p:cNvPr id="14" name="Legacy module connection">
             <a:extLst xmlns:a="http://schemas.openxmlformats.org/drawingml/2006/main">
               <a:ext uri="{FF2B5EF4-FFF2-40B4-BE49-F238E27FC236}">
-                <a16:creationId xmlns:a16="http://schemas.microsoft.com/office/drawing/2014/main" id="{C7DABF67-F294-455F-98EC-31A27434655F}"/>
+                <a16:creationId xmlns:a16="http://schemas.microsoft.com/office/drawing/2014/main" id="{13971672-6000-45C8-85C0-8672A22C032A}"/>
               </a:ext>
             </a:extLst>
           </p:cNvPr>
@@ -18116,7 +18116,7 @@
     </p:spTree>
     <p:extLst>
       <p:ext uri="{BB962C8B-B14F-4D97-AF65-F5344CB8AC3E}">
-        <p14:creationId xmlns:p14="http://schemas.microsoft.com/office/powerpoint/2010/main" val="1805514392"/>
+        <p14:creationId xmlns:p14="http://schemas.microsoft.com/office/powerpoint/2010/main" val="1139166884"/>
       </p:ext>
     </p:extLst>
   </p:cSld>
@@ -18147,7 +18147,7 @@
           <p:cNvPr id="25" name="ACT 2 · 질문과 근거를 연결하기">
             <a:extLst xmlns:a="http://schemas.openxmlformats.org/drawingml/2006/main">
               <a:ext uri="{FF2B5EF4-FFF2-40B4-BE49-F238E27FC236}">
-                <a16:creationId xmlns:a16="http://schemas.microsoft.com/office/drawing/2014/main" id="{DE628AB9-7F53-489E-A3F3-FE1368E548D9}"/>
+                <a16:creationId xmlns:a16="http://schemas.microsoft.com/office/drawing/2014/main" id="{EA7B2933-2A05-46FD-B5E5-ADC2B392E334}"/>
               </a:ext>
             </a:extLst>
           </p:cNvPr>
@@ -18302,10 +18302,10 @@
       </p:sp>
       <p:sp>
         <p:nvSpPr>
-          <p:cNvPr id="2" name="S36">
+          <p:cNvPr id="2" name="S44">
             <a:extLst xmlns:a="http://schemas.openxmlformats.org/drawingml/2006/main">
               <a:ext uri="{FF2B5EF4-FFF2-40B4-BE49-F238E27FC236}">
-                <a16:creationId xmlns:a16="http://schemas.microsoft.com/office/drawing/2014/main" id="{9E552FFC-E12D-41CB-BAAC-7CCF0356746E}"/>
+                <a16:creationId xmlns:a16="http://schemas.microsoft.com/office/drawing/2014/main" id="{899A0EF5-0A9A-41C8-B22A-126B1ECB08DF}"/>
               </a:ext>
             </a:extLst>
           </p:cNvPr>
@@ -18453,7 +18453,7 @@
                 <a:ea typeface="Malgun Gothic"/>
                 <a:cs typeface="Malgun Gothic"/>
               </a:rPr>
-              <a:t>S36</a:t>
+              <a:t>S44</a:t>
             </a:r>
           </a:p>
         </p:txBody>
@@ -18463,7 +18463,7 @@
           <p:cNvPr id="3" name="Crop Task에서 관찰한 접근">
             <a:extLst xmlns:a="http://schemas.openxmlformats.org/drawingml/2006/main">
               <a:ext uri="{FF2B5EF4-FFF2-40B4-BE49-F238E27FC236}">
-                <a16:creationId xmlns:a16="http://schemas.microsoft.com/office/drawing/2014/main" id="{BBA18BFE-0524-49C2-9D60-246F4F667229}"/>
+                <a16:creationId xmlns:a16="http://schemas.microsoft.com/office/drawing/2014/main" id="{05C1FFB3-C986-4DC4-BC16-95F5FAD20BFD}"/>
               </a:ext>
             </a:extLst>
           </p:cNvPr>
@@ -18621,7 +18621,7 @@
           <p:cNvPr id="4" name="">
             <a:extLst xmlns:a="http://schemas.openxmlformats.org/drawingml/2006/main">
               <a:ext uri="{FF2B5EF4-FFF2-40B4-BE49-F238E27FC236}">
-                <a16:creationId xmlns:a16="http://schemas.microsoft.com/office/drawing/2014/main" id="{C9E29B7C-49C1-424E-BB32-E3962B3FD84F}"/>
+                <a16:creationId xmlns:a16="http://schemas.microsoft.com/office/drawing/2014/main" id="{3F0DE139-7371-46A2-9FFD-CB0339A64613}"/>
               </a:ext>
             </a:extLst>
           </p:cNvPr>
@@ -18652,7 +18652,7 @@
           <p:cNvPr id="5" name="TRIAL-005A · 최종 실행의 접근과 답을 기록에서 재구성">
             <a:extLst xmlns:a="http://schemas.openxmlformats.org/drawingml/2006/main">
               <a:ext uri="{FF2B5EF4-FFF2-40B4-BE49-F238E27FC236}">
-                <a16:creationId xmlns:a16="http://schemas.microsoft.com/office/drawing/2014/main" id="{E49C2A36-C0EA-4346-84FC-6DC5B2EBDD4A}"/>
+                <a16:creationId xmlns:a16="http://schemas.microsoft.com/office/drawing/2014/main" id="{D1892A36-CCD1-4DA4-BA39-E912087FFF6A}"/>
               </a:ext>
             </a:extLst>
           </p:cNvPr>
@@ -18810,7 +18810,7 @@
           <p:cNvPr id="6" name="architecture 등 넓은 Context도 접근 · testing.md는 최종 실행에서 관찰, 반복 간">
             <a:extLst xmlns:a="http://schemas.openxmlformats.org/drawingml/2006/main">
               <a:ext uri="{FF2B5EF4-FFF2-40B4-BE49-F238E27FC236}">
-                <a16:creationId xmlns:a16="http://schemas.microsoft.com/office/drawing/2014/main" id="{D9AB5C2B-69EE-4CA2-87B2-06E5BDC518B4}"/>
+                <a16:creationId xmlns:a16="http://schemas.microsoft.com/office/drawing/2014/main" id="{305C54B9-C2EB-4A27-9198-0ADA9AACDBCA}"/>
               </a:ext>
             </a:extLst>
           </p:cNvPr>
@@ -18968,7 +18968,7 @@
           <p:cNvPr id="7" name="접근한 계약 문서">
             <a:extLst xmlns:a="http://schemas.openxmlformats.org/drawingml/2006/main">
               <a:ext uri="{FF2B5EF4-FFF2-40B4-BE49-F238E27FC236}">
-                <a16:creationId xmlns:a16="http://schemas.microsoft.com/office/drawing/2014/main" id="{A6972D9A-6E37-460A-B547-23CC13085C51}"/>
+                <a16:creationId xmlns:a16="http://schemas.microsoft.com/office/drawing/2014/main" id="{096ADA4A-001A-4C3F-B0F7-0C4693412F5A}"/>
               </a:ext>
             </a:extLst>
           </p:cNvPr>
@@ -19126,7 +19126,7 @@
           <p:cNvPr id="8" name="image-contracts.md">
             <a:extLst xmlns:a="http://schemas.openxmlformats.org/drawingml/2006/main">
               <a:ext uri="{FF2B5EF4-FFF2-40B4-BE49-F238E27FC236}">
-                <a16:creationId xmlns:a16="http://schemas.microsoft.com/office/drawing/2014/main" id="{720F8481-3546-465B-A183-05786D734C4E}"/>
+                <a16:creationId xmlns:a16="http://schemas.microsoft.com/office/drawing/2014/main" id="{88A12559-52D8-41ED-85EA-06FE30CCA5FB}"/>
               </a:ext>
             </a:extLst>
           </p:cNvPr>
@@ -19284,7 +19284,7 @@
           <p:cNvPr id="9" name="">
             <a:extLst xmlns:a="http://schemas.openxmlformats.org/drawingml/2006/main">
               <a:ext uri="{FF2B5EF4-FFF2-40B4-BE49-F238E27FC236}">
-                <a16:creationId xmlns:a16="http://schemas.microsoft.com/office/drawing/2014/main" id="{5C60A8BA-A06F-43D6-BB22-DA4B9A304955}"/>
+                <a16:creationId xmlns:a16="http://schemas.microsoft.com/office/drawing/2014/main" id="{A5E967C4-B4BE-4472-BE2F-527BC4E5D053}"/>
               </a:ext>
             </a:extLst>
           </p:cNvPr>
@@ -19315,7 +19315,7 @@
           <p:cNvPr id="10" name="[x_start, x_end)">
             <a:extLst xmlns:a="http://schemas.openxmlformats.org/drawingml/2006/main">
               <a:ext uri="{FF2B5EF4-FFF2-40B4-BE49-F238E27FC236}">
-                <a16:creationId xmlns:a16="http://schemas.microsoft.com/office/drawing/2014/main" id="{63E26A71-FCB1-48A3-AA96-FD794F653375}"/>
+                <a16:creationId xmlns:a16="http://schemas.microsoft.com/office/drawing/2014/main" id="{E733ABF8-408A-4EDF-98DF-85A9534E1FF1}"/>
               </a:ext>
             </a:extLst>
           </p:cNvPr>
@@ -19473,7 +19473,7 @@
           <p:cNvPr id="11" name="시작 열 포함 · 끝 좌표 제외">
             <a:extLst xmlns:a="http://schemas.openxmlformats.org/drawingml/2006/main">
               <a:ext uri="{FF2B5EF4-FFF2-40B4-BE49-F238E27FC236}">
-                <a16:creationId xmlns:a16="http://schemas.microsoft.com/office/drawing/2014/main" id="{94BEFA3D-74B1-42D0-8769-CF94E7450E10}"/>
+                <a16:creationId xmlns:a16="http://schemas.microsoft.com/office/drawing/2014/main" id="{40F61E7E-1D99-4CA4-8B70-C624BC26EC10}"/>
               </a:ext>
             </a:extLst>
           </p:cNvPr>
@@ -19631,7 +19631,7 @@
           <p:cNvPr id="12" name="기록된 답">
             <a:extLst xmlns:a="http://schemas.openxmlformats.org/drawingml/2006/main">
               <a:ext uri="{FF2B5EF4-FFF2-40B4-BE49-F238E27FC236}">
-                <a16:creationId xmlns:a16="http://schemas.microsoft.com/office/drawing/2014/main" id="{6654A380-E6D8-4D9C-8034-DBCE91680510}"/>
+                <a16:creationId xmlns:a16="http://schemas.microsoft.com/office/drawing/2014/main" id="{36D102E0-F84D-4CCB-BC6C-5A9127EAE932}"/>
               </a:ext>
             </a:extLst>
           </p:cNvPr>
@@ -19789,7 +19789,7 @@
           <p:cNvPr id="13" name="crop 1 3">
             <a:extLst xmlns:a="http://schemas.openxmlformats.org/drawingml/2006/main">
               <a:ext uri="{FF2B5EF4-FFF2-40B4-BE49-F238E27FC236}">
-                <a16:creationId xmlns:a16="http://schemas.microsoft.com/office/drawing/2014/main" id="{2E993104-471E-4F7E-8061-6AA1B0DC3514}"/>
+                <a16:creationId xmlns:a16="http://schemas.microsoft.com/office/drawing/2014/main" id="{BE927560-F695-4A3E-81F9-586871A15CD9}"/>
               </a:ext>
             </a:extLst>
           </p:cNvPr>
@@ -19947,7 +19947,7 @@
           <p:cNvPr id="14" name="">
             <a:extLst xmlns:a="http://schemas.openxmlformats.org/drawingml/2006/main">
               <a:ext uri="{FF2B5EF4-FFF2-40B4-BE49-F238E27FC236}">
-                <a16:creationId xmlns:a16="http://schemas.microsoft.com/office/drawing/2014/main" id="{0475738D-3BE7-4C90-A19F-8F02DD38D3FF}"/>
+                <a16:creationId xmlns:a16="http://schemas.microsoft.com/office/drawing/2014/main" id="{3C4EFC32-5701-4F83-BDB6-12B50280BF14}"/>
               </a:ext>
             </a:extLst>
           </p:cNvPr>
@@ -19980,7 +19980,7 @@
           <p:cNvPr id="15" name="0">
             <a:extLst xmlns:a="http://schemas.openxmlformats.org/drawingml/2006/main">
               <a:ext uri="{FF2B5EF4-FFF2-40B4-BE49-F238E27FC236}">
-                <a16:creationId xmlns:a16="http://schemas.microsoft.com/office/drawing/2014/main" id="{994359DD-5EC6-409B-A8BE-C2B088A8D5B4}"/>
+                <a16:creationId xmlns:a16="http://schemas.microsoft.com/office/drawing/2014/main" id="{02928CCD-0E87-43AB-9317-E17972609FB2}"/>
               </a:ext>
             </a:extLst>
           </p:cNvPr>
@@ -20138,7 +20138,7 @@
           <p:cNvPr id="16" name="">
             <a:extLst xmlns:a="http://schemas.openxmlformats.org/drawingml/2006/main">
               <a:ext uri="{FF2B5EF4-FFF2-40B4-BE49-F238E27FC236}">
-                <a16:creationId xmlns:a16="http://schemas.microsoft.com/office/drawing/2014/main" id="{73CCEAC3-2A6C-4A80-9D70-638AA35E77C5}"/>
+                <a16:creationId xmlns:a16="http://schemas.microsoft.com/office/drawing/2014/main" id="{779DFA37-65BD-49CB-8D3B-8E735D641312}"/>
               </a:ext>
             </a:extLst>
           </p:cNvPr>
@@ -20171,7 +20171,7 @@
           <p:cNvPr id="17" name="1">
             <a:extLst xmlns:a="http://schemas.openxmlformats.org/drawingml/2006/main">
               <a:ext uri="{FF2B5EF4-FFF2-40B4-BE49-F238E27FC236}">
-                <a16:creationId xmlns:a16="http://schemas.microsoft.com/office/drawing/2014/main" id="{D7AAC234-B950-417E-9574-FFDC98097E80}"/>
+                <a16:creationId xmlns:a16="http://schemas.microsoft.com/office/drawing/2014/main" id="{58809225-D579-4FAA-9EBD-8C2EBDBA60BF}"/>
               </a:ext>
             </a:extLst>
           </p:cNvPr>
@@ -20329,7 +20329,7 @@
           <p:cNvPr id="18" name="">
             <a:extLst xmlns:a="http://schemas.openxmlformats.org/drawingml/2006/main">
               <a:ext uri="{FF2B5EF4-FFF2-40B4-BE49-F238E27FC236}">
-                <a16:creationId xmlns:a16="http://schemas.microsoft.com/office/drawing/2014/main" id="{A7E8071A-B9D3-4BDD-BEE3-09DD8B34DCEA}"/>
+                <a16:creationId xmlns:a16="http://schemas.microsoft.com/office/drawing/2014/main" id="{5BD7CF9D-5515-47D5-8BCD-694CBE3C8FC9}"/>
               </a:ext>
             </a:extLst>
           </p:cNvPr>
@@ -20362,7 +20362,7 @@
           <p:cNvPr id="19" name="2">
             <a:extLst xmlns:a="http://schemas.openxmlformats.org/drawingml/2006/main">
               <a:ext uri="{FF2B5EF4-FFF2-40B4-BE49-F238E27FC236}">
-                <a16:creationId xmlns:a16="http://schemas.microsoft.com/office/drawing/2014/main" id="{2E1E0DA1-85CC-46D3-AF2F-E27CF3C95A3E}"/>
+                <a16:creationId xmlns:a16="http://schemas.microsoft.com/office/drawing/2014/main" id="{1CBA6E19-6476-4575-9B20-B4EF150D7B01}"/>
               </a:ext>
             </a:extLst>
           </p:cNvPr>
@@ -20520,7 +20520,7 @@
           <p:cNvPr id="20" name="">
             <a:extLst xmlns:a="http://schemas.openxmlformats.org/drawingml/2006/main">
               <a:ext uri="{FF2B5EF4-FFF2-40B4-BE49-F238E27FC236}">
-                <a16:creationId xmlns:a16="http://schemas.microsoft.com/office/drawing/2014/main" id="{254F5A02-0F6B-4717-8BEF-323BB441AD4A}"/>
+                <a16:creationId xmlns:a16="http://schemas.microsoft.com/office/drawing/2014/main" id="{0B0AC74D-520A-4931-A751-F8D271F91AD6}"/>
               </a:ext>
             </a:extLst>
           </p:cNvPr>
@@ -20553,7 +20553,7 @@
           <p:cNvPr id="21" name="3">
             <a:extLst xmlns:a="http://schemas.openxmlformats.org/drawingml/2006/main">
               <a:ext uri="{FF2B5EF4-FFF2-40B4-BE49-F238E27FC236}">
-                <a16:creationId xmlns:a16="http://schemas.microsoft.com/office/drawing/2014/main" id="{C6602D89-1B2E-492B-8B17-F8D60645848A}"/>
+                <a16:creationId xmlns:a16="http://schemas.microsoft.com/office/drawing/2014/main" id="{CACDA20A-173C-4372-89AF-D13B7E897C63}"/>
               </a:ext>
             </a:extLst>
           </p:cNvPr>
@@ -20711,7 +20711,7 @@
           <p:cNvPr id="22" name="포함 열: 1, 2&#10;출력 폭: 2">
             <a:extLst xmlns:a="http://schemas.openxmlformats.org/drawingml/2006/main">
               <a:ext uri="{FF2B5EF4-FFF2-40B4-BE49-F238E27FC236}">
-                <a16:creationId xmlns:a16="http://schemas.microsoft.com/office/drawing/2014/main" id="{B6DEADCF-64D0-415B-B2E3-731BBB668244}"/>
+                <a16:creationId xmlns:a16="http://schemas.microsoft.com/office/drawing/2014/main" id="{CF80D5F1-23F2-4F24-A0B9-2F0A40B3225C}"/>
               </a:ext>
             </a:extLst>
           </p:cNvPr>
@@ -20892,7 +20892,7 @@
           <p:cNvPr id="23" name="답을 파일의 계약과 연결해 확인했다">
             <a:extLst xmlns:a="http://schemas.openxmlformats.org/drawingml/2006/main">
               <a:ext uri="{FF2B5EF4-FFF2-40B4-BE49-F238E27FC236}">
-                <a16:creationId xmlns:a16="http://schemas.microsoft.com/office/drawing/2014/main" id="{127815BD-A9CC-4617-AC74-9FB34CA7D9BC}"/>
+                <a16:creationId xmlns:a16="http://schemas.microsoft.com/office/drawing/2014/main" id="{F48903B5-211A-4A40-BD98-E5F2D6B73C84}"/>
               </a:ext>
             </a:extLst>
           </p:cNvPr>
@@ -21050,7 +21050,7 @@
           <p:cNvPr id="24" name="Legacy module connection">
             <a:extLst xmlns:a="http://schemas.openxmlformats.org/drawingml/2006/main">
               <a:ext uri="{FF2B5EF4-FFF2-40B4-BE49-F238E27FC236}">
-                <a16:creationId xmlns:a16="http://schemas.microsoft.com/office/drawing/2014/main" id="{BD0047D5-33A6-493D-8746-27C0C46A2A79}"/>
+                <a16:creationId xmlns:a16="http://schemas.microsoft.com/office/drawing/2014/main" id="{89B6CAF5-C829-4121-BCB6-7B71E438B6F9}"/>
               </a:ext>
             </a:extLst>
           </p:cNvPr>
@@ -21206,7 +21206,7 @@
     </p:spTree>
     <p:extLst>
       <p:ext uri="{BB962C8B-B14F-4D97-AF65-F5344CB8AC3E}">
-        <p14:creationId xmlns:p14="http://schemas.microsoft.com/office/powerpoint/2010/main" val="2003350271"/>
+        <p14:creationId xmlns:p14="http://schemas.microsoft.com/office/powerpoint/2010/main" val="2122750341"/>
       </p:ext>
     </p:extLst>
   </p:cSld>
@@ -21237,7 +21237,7 @@
           <p:cNvPr id="25" name="ACT 2 · 두 Task의 문서 접근 비교">
             <a:extLst xmlns:a="http://schemas.openxmlformats.org/drawingml/2006/main">
               <a:ext uri="{FF2B5EF4-FFF2-40B4-BE49-F238E27FC236}">
-                <a16:creationId xmlns:a16="http://schemas.microsoft.com/office/drawing/2014/main" id="{793CBDF5-15FA-46B0-AE76-4345D8B8219C}"/>
+                <a16:creationId xmlns:a16="http://schemas.microsoft.com/office/drawing/2014/main" id="{CD3F34D0-B4CA-46AF-B6D1-4EDC9C3D1C1F}"/>
               </a:ext>
             </a:extLst>
           </p:cNvPr>
@@ -21392,10 +21392,10 @@
       </p:sp>
       <p:sp>
         <p:nvSpPr>
-          <p:cNvPr id="2" name="S37">
+          <p:cNvPr id="2" name="S45">
             <a:extLst xmlns:a="http://schemas.openxmlformats.org/drawingml/2006/main">
               <a:ext uri="{FF2B5EF4-FFF2-40B4-BE49-F238E27FC236}">
-                <a16:creationId xmlns:a16="http://schemas.microsoft.com/office/drawing/2014/main" id="{D3E00EC0-CE38-494D-B750-13E3489AAA76}"/>
+                <a16:creationId xmlns:a16="http://schemas.microsoft.com/office/drawing/2014/main" id="{DDEE0625-F634-4B82-A0CA-AC9C2E94DEF8}"/>
               </a:ext>
             </a:extLst>
           </p:cNvPr>
@@ -21543,7 +21543,7 @@
                 <a:ea typeface="Malgun Gothic"/>
                 <a:cs typeface="Malgun Gothic"/>
               </a:rPr>
-              <a:t>S37</a:t>
+              <a:t>S45</a:t>
             </a:r>
           </a:p>
         </p:txBody>
@@ -21553,7 +21553,7 @@
           <p:cNvPr id="3" name="Task별 접근은 달랐지만 완벽하지는 않다">
             <a:extLst xmlns:a="http://schemas.openxmlformats.org/drawingml/2006/main">
               <a:ext uri="{FF2B5EF4-FFF2-40B4-BE49-F238E27FC236}">
-                <a16:creationId xmlns:a16="http://schemas.microsoft.com/office/drawing/2014/main" id="{DAD21BAC-8852-4E1A-91D1-736A7FD45077}"/>
+                <a16:creationId xmlns:a16="http://schemas.microsoft.com/office/drawing/2014/main" id="{B037C8CE-4BDE-47C6-A1B9-D35CCC20A042}"/>
               </a:ext>
             </a:extLst>
           </p:cNvPr>
@@ -21711,7 +21711,7 @@
           <p:cNvPr id="4" name="">
             <a:extLst xmlns:a="http://schemas.openxmlformats.org/drawingml/2006/main">
               <a:ext uri="{FF2B5EF4-FFF2-40B4-BE49-F238E27FC236}">
-                <a16:creationId xmlns:a16="http://schemas.microsoft.com/office/drawing/2014/main" id="{F81E8DE2-2DE9-4532-AAF0-FF2A9349FC2C}"/>
+                <a16:creationId xmlns:a16="http://schemas.microsoft.com/office/drawing/2014/main" id="{E6BF2874-C338-48B2-B14A-7E4D8AA09E9D}"/>
               </a:ext>
             </a:extLst>
           </p:cNvPr>
@@ -21742,7 +21742,7 @@
           <p:cNvPr id="5" name="TRIAL-005A/B · 실제 접근 기록을 요약한 비교">
             <a:extLst xmlns:a="http://schemas.openxmlformats.org/drawingml/2006/main">
               <a:ext uri="{FF2B5EF4-FFF2-40B4-BE49-F238E27FC236}">
-                <a16:creationId xmlns:a16="http://schemas.microsoft.com/office/drawing/2014/main" id="{255900DB-965F-4EC9-8673-F4172294C329}"/>
+                <a16:creationId xmlns:a16="http://schemas.microsoft.com/office/drawing/2014/main" id="{9337D07F-AAAB-48FD-8498-711866938599}"/>
               </a:ext>
             </a:extLst>
           </p:cNvPr>
@@ -21900,7 +21900,7 @@
           <p:cNvPr id="6" name="완벽한 Routing 미입증 · 토큰 절약·성능 개선 미측정 · 실행 간 변동 존재">
             <a:extLst xmlns:a="http://schemas.openxmlformats.org/drawingml/2006/main">
               <a:ext uri="{FF2B5EF4-FFF2-40B4-BE49-F238E27FC236}">
-                <a16:creationId xmlns:a16="http://schemas.microsoft.com/office/drawing/2014/main" id="{2090F088-FAED-4082-815C-527040932A86}"/>
+                <a16:creationId xmlns:a16="http://schemas.microsoft.com/office/drawing/2014/main" id="{C5EBD1D5-E070-4A21-B263-15682BFE6F28}"/>
               </a:ext>
             </a:extLst>
           </p:cNvPr>
@@ -22058,7 +22058,7 @@
           <p:cNvPr id="7" name="같은 Repository에서 질문이 달랐다">
             <a:extLst xmlns:a="http://schemas.openxmlformats.org/drawingml/2006/main">
               <a:ext uri="{FF2B5EF4-FFF2-40B4-BE49-F238E27FC236}">
-                <a16:creationId xmlns:a16="http://schemas.microsoft.com/office/drawing/2014/main" id="{AD2FA958-55FE-4CEF-BBFB-C7E4830BE721}"/>
+                <a16:creationId xmlns:a16="http://schemas.microsoft.com/office/drawing/2014/main" id="{6C72B2FF-C34F-4843-AE3A-FBD6C85415E7}"/>
               </a:ext>
             </a:extLst>
           </p:cNvPr>
@@ -22216,7 +22216,7 @@
           <p:cNvPr id="8" name="문서">
             <a:extLst xmlns:a="http://schemas.openxmlformats.org/drawingml/2006/main">
               <a:ext uri="{FF2B5EF4-FFF2-40B4-BE49-F238E27FC236}">
-                <a16:creationId xmlns:a16="http://schemas.microsoft.com/office/drawing/2014/main" id="{8352376E-43DA-452E-B9B7-B7EC144B1C54}"/>
+                <a16:creationId xmlns:a16="http://schemas.microsoft.com/office/drawing/2014/main" id="{0856ADD7-AFD4-433C-A9E1-89009A1DF44F}"/>
               </a:ext>
             </a:extLst>
           </p:cNvPr>
@@ -22374,7 +22374,7 @@
           <p:cNvPr id="9" name="A · crop 계약">
             <a:extLst xmlns:a="http://schemas.openxmlformats.org/drawingml/2006/main">
               <a:ext uri="{FF2B5EF4-FFF2-40B4-BE49-F238E27FC236}">
-                <a16:creationId xmlns:a16="http://schemas.microsoft.com/office/drawing/2014/main" id="{45D4E11F-41AA-4286-8BCB-C8713DEFF9EE}"/>
+                <a16:creationId xmlns:a16="http://schemas.microsoft.com/office/drawing/2014/main" id="{F5F8AA10-A690-403D-A15D-B27025D123E6}"/>
               </a:ext>
             </a:extLst>
           </p:cNvPr>
@@ -22532,7 +22532,7 @@
           <p:cNvPr id="10" name="B · 실행 의존성">
             <a:extLst xmlns:a="http://schemas.openxmlformats.org/drawingml/2006/main">
               <a:ext uri="{FF2B5EF4-FFF2-40B4-BE49-F238E27FC236}">
-                <a16:creationId xmlns:a16="http://schemas.microsoft.com/office/drawing/2014/main" id="{4A1B3610-47BB-4CFF-B48C-9CFF2E1484A9}"/>
+                <a16:creationId xmlns:a16="http://schemas.microsoft.com/office/drawing/2014/main" id="{4B1D64F5-DC8F-4B05-ABCE-EFBB36B91630}"/>
               </a:ext>
             </a:extLst>
           </p:cNvPr>
@@ -22690,7 +22690,7 @@
           <p:cNvPr id="11" name="">
             <a:extLst xmlns:a="http://schemas.openxmlformats.org/drawingml/2006/main">
               <a:ext uri="{FF2B5EF4-FFF2-40B4-BE49-F238E27FC236}">
-                <a16:creationId xmlns:a16="http://schemas.microsoft.com/office/drawing/2014/main" id="{4B95CC5A-5C7E-4101-8FDD-AE8AF5D9BF5D}"/>
+                <a16:creationId xmlns:a16="http://schemas.microsoft.com/office/drawing/2014/main" id="{4C2B0E09-6E28-455F-8C01-8D5868ED091A}"/>
               </a:ext>
             </a:extLst>
           </p:cNvPr>
@@ -22721,7 +22721,7 @@
           <p:cNvPr id="12" name="image-contracts.md">
             <a:extLst xmlns:a="http://schemas.openxmlformats.org/drawingml/2006/main">
               <a:ext uri="{FF2B5EF4-FFF2-40B4-BE49-F238E27FC236}">
-                <a16:creationId xmlns:a16="http://schemas.microsoft.com/office/drawing/2014/main" id="{60DD992B-3694-483C-8F13-6DD2566435F1}"/>
+                <a16:creationId xmlns:a16="http://schemas.microsoft.com/office/drawing/2014/main" id="{0BE29909-2443-4399-9146-46A774833577}"/>
               </a:ext>
             </a:extLst>
           </p:cNvPr>
@@ -22879,7 +22879,7 @@
           <p:cNvPr id="13" name="읽음">
             <a:extLst xmlns:a="http://schemas.openxmlformats.org/drawingml/2006/main">
               <a:ext uri="{FF2B5EF4-FFF2-40B4-BE49-F238E27FC236}">
-                <a16:creationId xmlns:a16="http://schemas.microsoft.com/office/drawing/2014/main" id="{892848F4-FF14-44F7-AFDA-80570F351933}"/>
+                <a16:creationId xmlns:a16="http://schemas.microsoft.com/office/drawing/2014/main" id="{F0D31294-9BBC-4462-8DB4-F3957312DE70}"/>
               </a:ext>
             </a:extLst>
           </p:cNvPr>
@@ -23037,7 +23037,7 @@
           <p:cNvPr id="14" name="읽지 않음">
             <a:extLst xmlns:a="http://schemas.openxmlformats.org/drawingml/2006/main">
               <a:ext uri="{FF2B5EF4-FFF2-40B4-BE49-F238E27FC236}">
-                <a16:creationId xmlns:a16="http://schemas.microsoft.com/office/drawing/2014/main" id="{DB0C7DDB-6ABA-4699-A51E-6F7C16E7E92D}"/>
+                <a16:creationId xmlns:a16="http://schemas.microsoft.com/office/drawing/2014/main" id="{33F166E5-EEDA-4D8D-9F40-5694832A75C9}"/>
               </a:ext>
             </a:extLst>
           </p:cNvPr>
@@ -23195,7 +23195,7 @@
           <p:cNvPr id="15" name="">
             <a:extLst xmlns:a="http://schemas.openxmlformats.org/drawingml/2006/main">
               <a:ext uri="{FF2B5EF4-FFF2-40B4-BE49-F238E27FC236}">
-                <a16:creationId xmlns:a16="http://schemas.microsoft.com/office/drawing/2014/main" id="{2CE15A9A-6993-48C2-B8D6-2EE369DD4B8D}"/>
+                <a16:creationId xmlns:a16="http://schemas.microsoft.com/office/drawing/2014/main" id="{2B98DB04-2015-43AF-8AEB-5CD6AF934EFB}"/>
               </a:ext>
             </a:extLst>
           </p:cNvPr>
@@ -23226,7 +23226,7 @@
           <p:cNvPr id="16" name="architecture.md">
             <a:extLst xmlns:a="http://schemas.openxmlformats.org/drawingml/2006/main">
               <a:ext uri="{FF2B5EF4-FFF2-40B4-BE49-F238E27FC236}">
-                <a16:creationId xmlns:a16="http://schemas.microsoft.com/office/drawing/2014/main" id="{AAB4FA31-84BB-452C-90BA-850FDF723435}"/>
+                <a16:creationId xmlns:a16="http://schemas.microsoft.com/office/drawing/2014/main" id="{C75C48EC-8575-4633-BDFE-41598AA7E10A}"/>
               </a:ext>
             </a:extLst>
           </p:cNvPr>
@@ -23384,7 +23384,7 @@
           <p:cNvPr id="17" name="읽음">
             <a:extLst xmlns:a="http://schemas.openxmlformats.org/drawingml/2006/main">
               <a:ext uri="{FF2B5EF4-FFF2-40B4-BE49-F238E27FC236}">
-                <a16:creationId xmlns:a16="http://schemas.microsoft.com/office/drawing/2014/main" id="{E9728C91-2B3B-44FA-94AF-858C42CB5C29}"/>
+                <a16:creationId xmlns:a16="http://schemas.microsoft.com/office/drawing/2014/main" id="{4C38ADF4-1BC5-4612-A4B6-CF1315BD6338}"/>
               </a:ext>
             </a:extLst>
           </p:cNvPr>
@@ -23542,7 +23542,7 @@
           <p:cNvPr id="18" name="읽음">
             <a:extLst xmlns:a="http://schemas.openxmlformats.org/drawingml/2006/main">
               <a:ext uri="{FF2B5EF4-FFF2-40B4-BE49-F238E27FC236}">
-                <a16:creationId xmlns:a16="http://schemas.microsoft.com/office/drawing/2014/main" id="{83B45993-FCB1-49C6-99BA-F7B22538930D}"/>
+                <a16:creationId xmlns:a16="http://schemas.microsoft.com/office/drawing/2014/main" id="{B0CBE9A0-42DC-473D-A90B-5D4DCE795D7B}"/>
               </a:ext>
             </a:extLst>
           </p:cNvPr>
@@ -23700,7 +23700,7 @@
           <p:cNvPr id="19" name="">
             <a:extLst xmlns:a="http://schemas.openxmlformats.org/drawingml/2006/main">
               <a:ext uri="{FF2B5EF4-FFF2-40B4-BE49-F238E27FC236}">
-                <a16:creationId xmlns:a16="http://schemas.microsoft.com/office/drawing/2014/main" id="{38F6034A-59C1-45CD-B77E-8D8FCA62DFEF}"/>
+                <a16:creationId xmlns:a16="http://schemas.microsoft.com/office/drawing/2014/main" id="{77FC11CD-67E2-48EB-AE6C-792220B55167}"/>
               </a:ext>
             </a:extLst>
           </p:cNvPr>
@@ -23731,7 +23731,7 @@
           <p:cNvPr id="20" name="testing.md">
             <a:extLst xmlns:a="http://schemas.openxmlformats.org/drawingml/2006/main">
               <a:ext uri="{FF2B5EF4-FFF2-40B4-BE49-F238E27FC236}">
-                <a16:creationId xmlns:a16="http://schemas.microsoft.com/office/drawing/2014/main" id="{75DAD287-871B-4CB4-82DD-07EE63F75171}"/>
+                <a16:creationId xmlns:a16="http://schemas.microsoft.com/office/drawing/2014/main" id="{7C2840AA-F514-4407-8C4E-6A3E0FA50580}"/>
               </a:ext>
             </a:extLst>
           </p:cNvPr>
@@ -23889,7 +23889,7 @@
           <p:cNvPr id="21" name="최종 실행에서 읽음">
             <a:extLst xmlns:a="http://schemas.openxmlformats.org/drawingml/2006/main">
               <a:ext uri="{FF2B5EF4-FFF2-40B4-BE49-F238E27FC236}">
-                <a16:creationId xmlns:a16="http://schemas.microsoft.com/office/drawing/2014/main" id="{C461EFEF-7848-4854-B4C5-D20DB4217727}"/>
+                <a16:creationId xmlns:a16="http://schemas.microsoft.com/office/drawing/2014/main" id="{F0C425D9-6B4D-45C3-87B0-3C4959CB7B2C}"/>
               </a:ext>
             </a:extLst>
           </p:cNvPr>
@@ -24047,7 +24047,7 @@
           <p:cNvPr id="22" name="읽지 않음">
             <a:extLst xmlns:a="http://schemas.openxmlformats.org/drawingml/2006/main">
               <a:ext uri="{FF2B5EF4-FFF2-40B4-BE49-F238E27FC236}">
-                <a16:creationId xmlns:a16="http://schemas.microsoft.com/office/drawing/2014/main" id="{E09E663C-F7B0-445A-9B59-980E1091F93B}"/>
+                <a16:creationId xmlns:a16="http://schemas.microsoft.com/office/drawing/2014/main" id="{E2F83B06-B930-453A-9759-20FEF39C59B1}"/>
               </a:ext>
             </a:extLst>
           </p:cNvPr>
@@ -24205,7 +24205,7 @@
           <p:cNvPr id="23" name="A에는 더 넓은 읽기도 존재 · B는 설정·README·source도 확인">
             <a:extLst xmlns:a="http://schemas.openxmlformats.org/drawingml/2006/main">
               <a:ext uri="{FF2B5EF4-FFF2-40B4-BE49-F238E27FC236}">
-                <a16:creationId xmlns:a16="http://schemas.microsoft.com/office/drawing/2014/main" id="{DFFF32B3-E9E2-4BEB-970B-A46CEFF3BFD1}"/>
+                <a16:creationId xmlns:a16="http://schemas.microsoft.com/office/drawing/2014/main" id="{28EC7615-6EAB-4072-ADFE-C8F025930335}"/>
               </a:ext>
             </a:extLst>
           </p:cNvPr>
@@ -24363,7 +24363,7 @@
           <p:cNvPr id="24" name="Legacy module connection">
             <a:extLst xmlns:a="http://schemas.openxmlformats.org/drawingml/2006/main">
               <a:ext uri="{FF2B5EF4-FFF2-40B4-BE49-F238E27FC236}">
-                <a16:creationId xmlns:a16="http://schemas.microsoft.com/office/drawing/2014/main" id="{C1AA4D3C-4EAD-4A79-B439-E66CE52BC9C3}"/>
+                <a16:creationId xmlns:a16="http://schemas.microsoft.com/office/drawing/2014/main" id="{251F5933-9A8F-4226-9295-E24BB9CCCE46}"/>
               </a:ext>
             </a:extLst>
           </p:cNvPr>
@@ -24519,7 +24519,7 @@
     </p:spTree>
     <p:extLst>
       <p:ext uri="{BB962C8B-B14F-4D97-AF65-F5344CB8AC3E}">
-        <p14:creationId xmlns:p14="http://schemas.microsoft.com/office/powerpoint/2010/main" val="977044045"/>
+        <p14:creationId xmlns:p14="http://schemas.microsoft.com/office/powerpoint/2010/main" val="1247628781"/>
       </p:ext>
     </p:extLst>
   </p:cSld>
@@ -24550,7 +24550,7 @@
           <p:cNvPr id="15" name="ACT 2 · 다음 문제로 넘어가기">
             <a:extLst xmlns:a="http://schemas.openxmlformats.org/drawingml/2006/main">
               <a:ext uri="{FF2B5EF4-FFF2-40B4-BE49-F238E27FC236}">
-                <a16:creationId xmlns:a16="http://schemas.microsoft.com/office/drawing/2014/main" id="{F2F59B86-25DA-46F3-A351-54D55D037A66}"/>
+                <a16:creationId xmlns:a16="http://schemas.microsoft.com/office/drawing/2014/main" id="{D2074795-EC50-4C00-8A2A-05D598C4C641}"/>
               </a:ext>
             </a:extLst>
           </p:cNvPr>
@@ -24705,10 +24705,10 @@
       </p:sp>
       <p:sp>
         <p:nvSpPr>
-          <p:cNvPr id="2" name="S38">
+          <p:cNvPr id="2" name="S46">
             <a:extLst xmlns:a="http://schemas.openxmlformats.org/drawingml/2006/main">
               <a:ext uri="{FF2B5EF4-FFF2-40B4-BE49-F238E27FC236}">
-                <a16:creationId xmlns:a16="http://schemas.microsoft.com/office/drawing/2014/main" id="{1D0091E2-F529-45FE-91DD-9E40362208CA}"/>
+                <a16:creationId xmlns:a16="http://schemas.microsoft.com/office/drawing/2014/main" id="{3B3F5327-DE06-4000-8543-C90B3BB0A767}"/>
               </a:ext>
             </a:extLst>
           </p:cNvPr>
@@ -24856,7 +24856,7 @@
                 <a:ea typeface="Malgun Gothic"/>
                 <a:cs typeface="Malgun Gothic"/>
               </a:rPr>
-              <a:t>S38</a:t>
+              <a:t>S46</a:t>
             </a:r>
           </a:p>
         </p:txBody>
@@ -24866,7 +24866,7 @@
           <p:cNvPr id="3" name="지식은 정리됐지만 절차는 반복된다">
             <a:extLst xmlns:a="http://schemas.openxmlformats.org/drawingml/2006/main">
               <a:ext uri="{FF2B5EF4-FFF2-40B4-BE49-F238E27FC236}">
-                <a16:creationId xmlns:a16="http://schemas.microsoft.com/office/drawing/2014/main" id="{AB1EC7B7-316B-4338-BF80-88A92D253F2A}"/>
+                <a16:creationId xmlns:a16="http://schemas.microsoft.com/office/drawing/2014/main" id="{9DB6241A-ED1A-4B90-BED4-7028FCB66EDE}"/>
               </a:ext>
             </a:extLst>
           </p:cNvPr>
@@ -25024,7 +25024,7 @@
           <p:cNvPr id="4" name="">
             <a:extLst xmlns:a="http://schemas.openxmlformats.org/drawingml/2006/main">
               <a:ext uri="{FF2B5EF4-FFF2-40B4-BE49-F238E27FC236}">
-                <a16:creationId xmlns:a16="http://schemas.microsoft.com/office/drawing/2014/main" id="{2272D1AF-0C06-418D-9990-A4D4B2FCEFFF}"/>
+                <a16:creationId xmlns:a16="http://schemas.microsoft.com/office/drawing/2014/main" id="{97C228F2-E776-4BB8-9213-BD3DEB4581EA}"/>
               </a:ext>
             </a:extLst>
           </p:cNvPr>
@@ -25055,7 +25055,7 @@
           <p:cNvPr id="5" name="Project Context 정리 + TRIAL-006/007의 반복 절차 · 기록 요약과 교육용 해석">
             <a:extLst xmlns:a="http://schemas.openxmlformats.org/drawingml/2006/main">
               <a:ext uri="{FF2B5EF4-FFF2-40B4-BE49-F238E27FC236}">
-                <a16:creationId xmlns:a16="http://schemas.microsoft.com/office/drawing/2014/main" id="{DDBC6394-132B-4EF0-9626-E1686EC64729}"/>
+                <a16:creationId xmlns:a16="http://schemas.microsoft.com/office/drawing/2014/main" id="{BBA2F423-1DFD-4ED2-8639-343BBA787C2C}"/>
               </a:ext>
             </a:extLst>
           </p:cNvPr>
@@ -25213,7 +25213,7 @@
           <p:cNvPr id="6" name="절차가 반복된 원인을 Prompt만으로 분리하지 않음">
             <a:extLst xmlns:a="http://schemas.openxmlformats.org/drawingml/2006/main">
               <a:ext uri="{FF2B5EF4-FFF2-40B4-BE49-F238E27FC236}">
-                <a16:creationId xmlns:a16="http://schemas.microsoft.com/office/drawing/2014/main" id="{393946CD-5EE2-4C34-898C-8D83C48A9330}"/>
+                <a16:creationId xmlns:a16="http://schemas.microsoft.com/office/drawing/2014/main" id="{CCEF938C-0398-4001-AC1C-412A9E3DB132}"/>
               </a:ext>
             </a:extLst>
           </p:cNvPr>
@@ -25371,7 +25371,7 @@
           <p:cNvPr id="7" name="정리한 것">
             <a:extLst xmlns:a="http://schemas.openxmlformats.org/drawingml/2006/main">
               <a:ext uri="{FF2B5EF4-FFF2-40B4-BE49-F238E27FC236}">
-                <a16:creationId xmlns:a16="http://schemas.microsoft.com/office/drawing/2014/main" id="{EF6CA940-CEE3-43A4-9243-71208E2ACE89}"/>
+                <a16:creationId xmlns:a16="http://schemas.microsoft.com/office/drawing/2014/main" id="{B027F458-54E3-4BD9-BDD1-1E2812B9BDE6}"/>
               </a:ext>
             </a:extLst>
           </p:cNvPr>
@@ -25529,7 +25529,7 @@
           <p:cNvPr id="8" name="아직 반복되는 것">
             <a:extLst xmlns:a="http://schemas.openxmlformats.org/drawingml/2006/main">
               <a:ext uri="{FF2B5EF4-FFF2-40B4-BE49-F238E27FC236}">
-                <a16:creationId xmlns:a16="http://schemas.microsoft.com/office/drawing/2014/main" id="{EBCBB723-29BC-4BA2-ACF3-CCAF77E3C2EF}"/>
+                <a16:creationId xmlns:a16="http://schemas.microsoft.com/office/drawing/2014/main" id="{698707A9-FC5C-4CBF-899D-FE4E6DEB24C7}"/>
               </a:ext>
             </a:extLst>
           </p:cNvPr>
@@ -25687,7 +25687,7 @@
           <p:cNvPr id="9" name="">
             <a:extLst xmlns:a="http://schemas.openxmlformats.org/drawingml/2006/main">
               <a:ext uri="{FF2B5EF4-FFF2-40B4-BE49-F238E27FC236}">
-                <a16:creationId xmlns:a16="http://schemas.microsoft.com/office/drawing/2014/main" id="{346F96E6-26B2-4773-98B1-831B29A3615E}"/>
+                <a16:creationId xmlns:a16="http://schemas.microsoft.com/office/drawing/2014/main" id="{632D5674-816C-4A98-B8EF-8FED9AEF89A6}"/>
               </a:ext>
             </a:extLst>
           </p:cNvPr>
@@ -25718,7 +25718,7 @@
           <p:cNvPr id="10" name="">
             <a:extLst xmlns:a="http://schemas.openxmlformats.org/drawingml/2006/main">
               <a:ext uri="{FF2B5EF4-FFF2-40B4-BE49-F238E27FC236}">
-                <a16:creationId xmlns:a16="http://schemas.microsoft.com/office/drawing/2014/main" id="{A3A0A84A-26F5-46DB-B12E-F414D7469476}"/>
+                <a16:creationId xmlns:a16="http://schemas.microsoft.com/office/drawing/2014/main" id="{3DC5FC71-FA40-49D8-B95D-52F7BBFC81A7}"/>
               </a:ext>
             </a:extLst>
           </p:cNvPr>
@@ -25749,7 +25749,7 @@
           <p:cNvPr id="11" name="현재 목표는 Prompt에&#10;공통 사실은 Project Context에&#10;상세 정보는 Routing으로">
             <a:extLst xmlns:a="http://schemas.openxmlformats.org/drawingml/2006/main">
               <a:ext uri="{FF2B5EF4-FFF2-40B4-BE49-F238E27FC236}">
-                <a16:creationId xmlns:a16="http://schemas.microsoft.com/office/drawing/2014/main" id="{FB457EF7-BBA0-4F93-B996-8346A712C989}"/>
+                <a16:creationId xmlns:a16="http://schemas.microsoft.com/office/drawing/2014/main" id="{ACC831F5-A271-4273-8D6F-8604B1C5D18A}"/>
               </a:ext>
             </a:extLst>
           </p:cNvPr>
@@ -25953,7 +25953,7 @@
           <p:cNvPr id="12" name="먼저 측정하고&#10;조사한 뒤 변경하고&#10;같은 조건으로 확인해줘">
             <a:extLst xmlns:a="http://schemas.openxmlformats.org/drawingml/2006/main">
               <a:ext uri="{FF2B5EF4-FFF2-40B4-BE49-F238E27FC236}">
-                <a16:creationId xmlns:a16="http://schemas.microsoft.com/office/drawing/2014/main" id="{006EDA5A-516F-40EA-A686-FC290C249F90}"/>
+                <a16:creationId xmlns:a16="http://schemas.microsoft.com/office/drawing/2014/main" id="{A3DD0C4A-40C6-487F-B47C-F7935BFB16ED}"/>
               </a:ext>
             </a:extLst>
           </p:cNvPr>
@@ -26157,7 +26157,7 @@
           <p:cNvPr id="13" name="같은 작업 절차도 다시 써야 할까?">
             <a:extLst xmlns:a="http://schemas.openxmlformats.org/drawingml/2006/main">
               <a:ext uri="{FF2B5EF4-FFF2-40B4-BE49-F238E27FC236}">
-                <a16:creationId xmlns:a16="http://schemas.microsoft.com/office/drawing/2014/main" id="{91FD492B-DF20-46AE-BDC3-F23BAF883C75}"/>
+                <a16:creationId xmlns:a16="http://schemas.microsoft.com/office/drawing/2014/main" id="{4772B232-DD05-4D02-9BB9-F70367FE68F1}"/>
               </a:ext>
             </a:extLst>
           </p:cNvPr>
@@ -26315,7 +26315,7 @@
           <p:cNvPr id="14" name="Legacy module connection">
             <a:extLst xmlns:a="http://schemas.openxmlformats.org/drawingml/2006/main">
               <a:ext uri="{FF2B5EF4-FFF2-40B4-BE49-F238E27FC236}">
-                <a16:creationId xmlns:a16="http://schemas.microsoft.com/office/drawing/2014/main" id="{B7292C99-5DC7-48AB-99CC-64A1391B27DB}"/>
+                <a16:creationId xmlns:a16="http://schemas.microsoft.com/office/drawing/2014/main" id="{AD459938-2815-4A57-8BAC-6772D4E327E9}"/>
               </a:ext>
             </a:extLst>
           </p:cNvPr>
@@ -26471,7 +26471,7 @@
     </p:spTree>
     <p:extLst>
       <p:ext uri="{BB962C8B-B14F-4D97-AF65-F5344CB8AC3E}">
-        <p14:creationId xmlns:p14="http://schemas.microsoft.com/office/powerpoint/2010/main" val="70205586"/>
+        <p14:creationId xmlns:p14="http://schemas.microsoft.com/office/powerpoint/2010/main" val="1813346992"/>
       </p:ext>
     </p:extLst>
   </p:cSld>
@@ -26502,7 +26502,7 @@
           <p:cNvPr id="27" name="ACT 2  ·  Project Context">
             <a:extLst xmlns:a="http://schemas.openxmlformats.org/drawingml/2006/main">
               <a:ext uri="{FF2B5EF4-FFF2-40B4-BE49-F238E27FC236}">
-                <a16:creationId xmlns:a16="http://schemas.microsoft.com/office/drawing/2014/main" id="{5EA525EC-3102-4308-B12A-FF7DCA771532}"/>
+                <a16:creationId xmlns:a16="http://schemas.microsoft.com/office/drawing/2014/main" id="{B151911A-29E0-4AE4-A662-A06F938A0CDB}"/>
               </a:ext>
             </a:extLst>
           </p:cNvPr>
@@ -26657,10 +26657,10 @@
       </p:sp>
       <p:sp>
         <p:nvSpPr>
-          <p:cNvPr id="2" name="S25">
+          <p:cNvPr id="2" name="S33">
             <a:extLst xmlns:a="http://schemas.openxmlformats.org/drawingml/2006/main">
               <a:ext uri="{FF2B5EF4-FFF2-40B4-BE49-F238E27FC236}">
-                <a16:creationId xmlns:a16="http://schemas.microsoft.com/office/drawing/2014/main" id="{8A020322-D3A4-4D7E-A1A7-94B1B6C5FF90}"/>
+                <a16:creationId xmlns:a16="http://schemas.microsoft.com/office/drawing/2014/main" id="{26C4688C-44FF-47DF-B058-8EFEBAD293E8}"/>
               </a:ext>
             </a:extLst>
           </p:cNvPr>
@@ -26808,7 +26808,7 @@
                 <a:ea typeface="Malgun Gothic"/>
                 <a:cs typeface="Malgun Gothic"/>
               </a:rPr>
-              <a:t>S25</a:t>
+              <a:t>S33</a:t>
             </a:r>
           </a:p>
         </p:txBody>
@@ -26818,7 +26818,7 @@
           <p:cNvPr id="3" name="작은 Project Context의 첫 기록">
             <a:extLst xmlns:a="http://schemas.openxmlformats.org/drawingml/2006/main">
               <a:ext uri="{FF2B5EF4-FFF2-40B4-BE49-F238E27FC236}">
-                <a16:creationId xmlns:a16="http://schemas.microsoft.com/office/drawing/2014/main" id="{2AF56E88-9176-416D-BB44-E60AD4DA5933}"/>
+                <a16:creationId xmlns:a16="http://schemas.microsoft.com/office/drawing/2014/main" id="{0247EA3D-A134-4D35-809C-1C1FD1FADEE0}"/>
               </a:ext>
             </a:extLst>
           </p:cNvPr>
@@ -26976,7 +26976,7 @@
           <p:cNvPr id="4" name="">
             <a:extLst xmlns:a="http://schemas.openxmlformats.org/drawingml/2006/main">
               <a:ext uri="{FF2B5EF4-FFF2-40B4-BE49-F238E27FC236}">
-                <a16:creationId xmlns:a16="http://schemas.microsoft.com/office/drawing/2014/main" id="{C8D6C66F-53A2-4207-B823-A18ADC0D02CA}"/>
+                <a16:creationId xmlns:a16="http://schemas.microsoft.com/office/drawing/2014/main" id="{B5800E12-2DDC-4847-83FC-5FB247C13F32}"/>
               </a:ext>
             </a:extLst>
           </p:cNvPr>
@@ -27007,7 +27007,7 @@
           <p:cNvPr id="5" name="OBSERVED PRODUCT  |  STATE-01 · AGENTS.md 실제 원문 발췌">
             <a:extLst xmlns:a="http://schemas.openxmlformats.org/drawingml/2006/main">
               <a:ext uri="{FF2B5EF4-FFF2-40B4-BE49-F238E27FC236}">
-                <a16:creationId xmlns:a16="http://schemas.microsoft.com/office/drawing/2014/main" id="{AB30341F-4C1A-423A-874E-32B4E498442F}"/>
+                <a16:creationId xmlns:a16="http://schemas.microsoft.com/office/drawing/2014/main" id="{4DFA1924-D945-4092-B1D3-61A59B8F054D}"/>
               </a:ext>
             </a:extLst>
           </p:cNvPr>
@@ -27165,7 +27165,7 @@
           <p:cNvPr id="6" name="파일의 내용과 기록 위치를 보여주는 장 · Agent의 활용 관찰은 다음 장에서 확인">
             <a:extLst xmlns:a="http://schemas.openxmlformats.org/drawingml/2006/main">
               <a:ext uri="{FF2B5EF4-FFF2-40B4-BE49-F238E27FC236}">
-                <a16:creationId xmlns:a16="http://schemas.microsoft.com/office/drawing/2014/main" id="{C2035953-989D-465A-A1D4-B18FC3F24B2D}"/>
+                <a16:creationId xmlns:a16="http://schemas.microsoft.com/office/drawing/2014/main" id="{996CC426-F1C8-411C-818E-7488C11270CD}"/>
               </a:ext>
             </a:extLst>
           </p:cNvPr>
@@ -27323,7 +27323,7 @@
           <p:cNvPr id="7" name="반복해서 설명하던 내용을 저장소에 남겼다">
             <a:extLst xmlns:a="http://schemas.openxmlformats.org/drawingml/2006/main">
               <a:ext uri="{FF2B5EF4-FFF2-40B4-BE49-F238E27FC236}">
-                <a16:creationId xmlns:a16="http://schemas.microsoft.com/office/drawing/2014/main" id="{52D8D9EE-7919-4948-9DE4-D5254778CBB1}"/>
+                <a16:creationId xmlns:a16="http://schemas.microsoft.com/office/drawing/2014/main" id="{68C8C39C-9C70-4342-86B4-8537BC4EAF82}"/>
               </a:ext>
             </a:extLst>
           </p:cNvPr>
@@ -27481,7 +27481,7 @@
           <p:cNvPr id="8" name="AGENTS.md">
             <a:extLst xmlns:a="http://schemas.openxmlformats.org/drawingml/2006/main">
               <a:ext uri="{FF2B5EF4-FFF2-40B4-BE49-F238E27FC236}">
-                <a16:creationId xmlns:a16="http://schemas.microsoft.com/office/drawing/2014/main" id="{E76EDB8E-F916-492A-9DA3-BA11A0883D59}"/>
+                <a16:creationId xmlns:a16="http://schemas.microsoft.com/office/drawing/2014/main" id="{0D15D344-8B8D-4EF5-A22B-3508278EDAC6}"/>
               </a:ext>
             </a:extLst>
           </p:cNvPr>
@@ -27639,7 +27639,7 @@
           <p:cNvPr id="9" name="STATE-00-FIXED → STATE-01">
             <a:extLst xmlns:a="http://schemas.openxmlformats.org/drawingml/2006/main">
               <a:ext uri="{FF2B5EF4-FFF2-40B4-BE49-F238E27FC236}">
-                <a16:creationId xmlns:a16="http://schemas.microsoft.com/office/drawing/2014/main" id="{570D8D2A-35D9-467A-A070-61E2582FECBB}"/>
+                <a16:creationId xmlns:a16="http://schemas.microsoft.com/office/drawing/2014/main" id="{359769FA-0C24-4854-8955-48DE2BA6F013}"/>
               </a:ext>
             </a:extLst>
           </p:cNvPr>
@@ -27797,7 +27797,7 @@
           <p:cNvPr id="10" name="">
             <a:extLst xmlns:a="http://schemas.openxmlformats.org/drawingml/2006/main">
               <a:ext uri="{FF2B5EF4-FFF2-40B4-BE49-F238E27FC236}">
-                <a16:creationId xmlns:a16="http://schemas.microsoft.com/office/drawing/2014/main" id="{D44B208C-BA99-4DA9-A154-523D566D0CBD}"/>
+                <a16:creationId xmlns:a16="http://schemas.microsoft.com/office/drawing/2014/main" id="{6D43D2A3-FA1B-4F37-A2C2-BCA67912F646}"/>
               </a:ext>
             </a:extLst>
           </p:cNvPr>
@@ -27828,7 +27828,7 @@
           <p:cNvPr id="11" name="프로젝트 목적">
             <a:extLst xmlns:a="http://schemas.openxmlformats.org/drawingml/2006/main">
               <a:ext uri="{FF2B5EF4-FFF2-40B4-BE49-F238E27FC236}">
-                <a16:creationId xmlns:a16="http://schemas.microsoft.com/office/drawing/2014/main" id="{99FE8E53-F31F-4261-BD05-5CF3FB12AE92}"/>
+                <a16:creationId xmlns:a16="http://schemas.microsoft.com/office/drawing/2014/main" id="{18DA471A-573C-49FF-BFEB-1D5C0DADE4F9}"/>
               </a:ext>
             </a:extLst>
           </p:cNvPr>
@@ -27986,7 +27986,7 @@
           <p:cNvPr id="12" name="Local grayscale image-processing CLI using synthetic ASCII P">
             <a:extLst xmlns:a="http://schemas.openxmlformats.org/drawingml/2006/main">
               <a:ext uri="{FF2B5EF4-FFF2-40B4-BE49-F238E27FC236}">
-                <a16:creationId xmlns:a16="http://schemas.microsoft.com/office/drawing/2014/main" id="{654B969D-3CE6-49D8-A9AB-030343568C11}"/>
+                <a16:creationId xmlns:a16="http://schemas.microsoft.com/office/drawing/2014/main" id="{2894C121-0D64-47F7-858C-A48FA5D556A4}"/>
               </a:ext>
             </a:extLst>
           </p:cNvPr>
@@ -28166,7 +28166,7 @@
           <p:cNvPr id="13" name="로컬 합성 이미지로 동작하는 흑백 처리 CLI">
             <a:extLst xmlns:a="http://schemas.openxmlformats.org/drawingml/2006/main">
               <a:ext uri="{FF2B5EF4-FFF2-40B4-BE49-F238E27FC236}">
-                <a16:creationId xmlns:a16="http://schemas.microsoft.com/office/drawing/2014/main" id="{C549EF8A-0ABC-4549-B806-CEA9422181D5}"/>
+                <a16:creationId xmlns:a16="http://schemas.microsoft.com/office/drawing/2014/main" id="{73E66AD6-164F-4776-9F6B-DC47D5FC6B38}"/>
               </a:ext>
             </a:extLst>
           </p:cNvPr>
@@ -28324,7 +28324,7 @@
           <p:cNvPr id="14" name="">
             <a:extLst xmlns:a="http://schemas.openxmlformats.org/drawingml/2006/main">
               <a:ext uri="{FF2B5EF4-FFF2-40B4-BE49-F238E27FC236}">
-                <a16:creationId xmlns:a16="http://schemas.microsoft.com/office/drawing/2014/main" id="{8CFF0CF9-8264-45F4-AA14-39FDC36325F4}"/>
+                <a16:creationId xmlns:a16="http://schemas.microsoft.com/office/drawing/2014/main" id="{785D22AA-9D40-4FC5-99C7-E33AE058E70F}"/>
               </a:ext>
             </a:extLst>
           </p:cNvPr>
@@ -28355,7 +28355,7 @@
           <p:cNvPr id="15" name="실행 방법">
             <a:extLst xmlns:a="http://schemas.openxmlformats.org/drawingml/2006/main">
               <a:ext uri="{FF2B5EF4-FFF2-40B4-BE49-F238E27FC236}">
-                <a16:creationId xmlns:a16="http://schemas.microsoft.com/office/drawing/2014/main" id="{268491DD-CC6F-4491-B16C-D999782934F1}"/>
+                <a16:creationId xmlns:a16="http://schemas.microsoft.com/office/drawing/2014/main" id="{AE62AEE4-6328-4ECC-9F05-41B4D2AE27FC}"/>
               </a:ext>
             </a:extLst>
           </p:cNvPr>
@@ -28513,7 +28513,7 @@
           <p:cNvPr id="16" name="Use the prepared build and CLI commands documented in `READM">
             <a:extLst xmlns:a="http://schemas.openxmlformats.org/drawingml/2006/main">
               <a:ext uri="{FF2B5EF4-FFF2-40B4-BE49-F238E27FC236}">
-                <a16:creationId xmlns:a16="http://schemas.microsoft.com/office/drawing/2014/main" id="{96F0DDF4-AD7A-4B2D-8CC0-FBF1A6B3290D}"/>
+                <a16:creationId xmlns:a16="http://schemas.microsoft.com/office/drawing/2014/main" id="{AEE73BC0-A114-4241-9602-2919F548EAD9}"/>
               </a:ext>
             </a:extLst>
           </p:cNvPr>
@@ -28693,7 +28693,7 @@
           <p:cNvPr id="17" name="실행 방법은 README에서 확인">
             <a:extLst xmlns:a="http://schemas.openxmlformats.org/drawingml/2006/main">
               <a:ext uri="{FF2B5EF4-FFF2-40B4-BE49-F238E27FC236}">
-                <a16:creationId xmlns:a16="http://schemas.microsoft.com/office/drawing/2014/main" id="{2DA3F826-9F61-45AF-8E0F-FDE9B55D024F}"/>
+                <a16:creationId xmlns:a16="http://schemas.microsoft.com/office/drawing/2014/main" id="{41B4B794-E4C4-42CE-8541-AE527A026DDE}"/>
               </a:ext>
             </a:extLst>
           </p:cNvPr>
@@ -28851,7 +28851,7 @@
           <p:cNvPr id="18" name="">
             <a:extLst xmlns:a="http://schemas.openxmlformats.org/drawingml/2006/main">
               <a:ext uri="{FF2B5EF4-FFF2-40B4-BE49-F238E27FC236}">
-                <a16:creationId xmlns:a16="http://schemas.microsoft.com/office/drawing/2014/main" id="{8EF27CE2-BC28-45DB-91AE-A1D6A2D43FFB}"/>
+                <a16:creationId xmlns:a16="http://schemas.microsoft.com/office/drawing/2014/main" id="{3894BC0C-25F9-4B30-9975-E719A2025CA9}"/>
               </a:ext>
             </a:extLst>
           </p:cNvPr>
@@ -28882,7 +28882,7 @@
           <p:cNvPr id="19" name="테스트 명령">
             <a:extLst xmlns:a="http://schemas.openxmlformats.org/drawingml/2006/main">
               <a:ext uri="{FF2B5EF4-FFF2-40B4-BE49-F238E27FC236}">
-                <a16:creationId xmlns:a16="http://schemas.microsoft.com/office/drawing/2014/main" id="{B351ADAA-A0CA-4E03-BC27-AEEEBFA5C675}"/>
+                <a16:creationId xmlns:a16="http://schemas.microsoft.com/office/drawing/2014/main" id="{4BE4D2C4-C558-4282-9D95-8EAD07FDE798}"/>
               </a:ext>
             </a:extLst>
           </p:cNvPr>
@@ -29040,7 +29040,7 @@
           <p:cNvPr id="20" name="PYTHONPATH=src python3 -m unittest discover -s tests -v">
             <a:extLst xmlns:a="http://schemas.openxmlformats.org/drawingml/2006/main">
               <a:ext uri="{FF2B5EF4-FFF2-40B4-BE49-F238E27FC236}">
-                <a16:creationId xmlns:a16="http://schemas.microsoft.com/office/drawing/2014/main" id="{1FBB4BA4-3D15-46C8-B025-D0C7B0210B99}"/>
+                <a16:creationId xmlns:a16="http://schemas.microsoft.com/office/drawing/2014/main" id="{BC423AA7-FDF4-48C3-8B91-2960D69C31C8}"/>
               </a:ext>
             </a:extLst>
           </p:cNvPr>
@@ -29198,7 +29198,7 @@
           <p:cNvPr id="21" name="반복해서 쓸 테스트 명령">
             <a:extLst xmlns:a="http://schemas.openxmlformats.org/drawingml/2006/main">
               <a:ext uri="{FF2B5EF4-FFF2-40B4-BE49-F238E27FC236}">
-                <a16:creationId xmlns:a16="http://schemas.microsoft.com/office/drawing/2014/main" id="{0C3327A6-9CC1-4AFC-9246-54C5C3A696CB}"/>
+                <a16:creationId xmlns:a16="http://schemas.microsoft.com/office/drawing/2014/main" id="{8DAADDBD-BA14-4AFA-8A30-BE6400C2FBEE}"/>
               </a:ext>
             </a:extLst>
           </p:cNvPr>
@@ -29356,7 +29356,7 @@
           <p:cNvPr id="22" name="">
             <a:extLst xmlns:a="http://schemas.openxmlformats.org/drawingml/2006/main">
               <a:ext uri="{FF2B5EF4-FFF2-40B4-BE49-F238E27FC236}">
-                <a16:creationId xmlns:a16="http://schemas.microsoft.com/office/drawing/2014/main" id="{676D1D36-0E7C-4288-B764-5D6BC26BA802}"/>
+                <a16:creationId xmlns:a16="http://schemas.microsoft.com/office/drawing/2014/main" id="{DE8CD8EE-99A6-4113-A14D-B19EB35C1B0C}"/>
               </a:ext>
             </a:extLst>
           </p:cNvPr>
@@ -29387,7 +29387,7 @@
           <p:cNvPr id="23" name="기본 제약">
             <a:extLst xmlns:a="http://schemas.openxmlformats.org/drawingml/2006/main">
               <a:ext uri="{FF2B5EF4-FFF2-40B4-BE49-F238E27FC236}">
-                <a16:creationId xmlns:a16="http://schemas.microsoft.com/office/drawing/2014/main" id="{8DBF654B-0266-48A3-827E-FEF961A85E55}"/>
+                <a16:creationId xmlns:a16="http://schemas.microsoft.com/office/drawing/2014/main" id="{79999889-D779-4790-B921-149B148BA2C2}"/>
               </a:ext>
             </a:extLst>
           </p:cNvPr>
@@ -29545,7 +29545,7 @@
           <p:cNvPr id="24" name="Keep changes scoped and verify relevant behavior.">
             <a:extLst xmlns:a="http://schemas.openxmlformats.org/drawingml/2006/main">
               <a:ext uri="{FF2B5EF4-FFF2-40B4-BE49-F238E27FC236}">
-                <a16:creationId xmlns:a16="http://schemas.microsoft.com/office/drawing/2014/main" id="{6D05210F-EC13-4142-BF5A-BBEABABD10AC}"/>
+                <a16:creationId xmlns:a16="http://schemas.microsoft.com/office/drawing/2014/main" id="{3FA66A92-4679-4D31-A6D1-AA4253A4C650}"/>
               </a:ext>
             </a:extLst>
           </p:cNvPr>
@@ -29725,7 +29725,7 @@
           <p:cNvPr id="25" name="범위를 지키고 관련 동작을 검증">
             <a:extLst xmlns:a="http://schemas.openxmlformats.org/drawingml/2006/main">
               <a:ext uri="{FF2B5EF4-FFF2-40B4-BE49-F238E27FC236}">
-                <a16:creationId xmlns:a16="http://schemas.microsoft.com/office/drawing/2014/main" id="{6F40A8AD-75E7-455D-80DC-65D0568DB70B}"/>
+                <a16:creationId xmlns:a16="http://schemas.microsoft.com/office/drawing/2014/main" id="{B4684E36-7BF3-4783-B48A-7A4916F0F156}"/>
               </a:ext>
             </a:extLst>
           </p:cNvPr>
@@ -29883,7 +29883,7 @@
           <p:cNvPr id="26" name="Legacy module connection">
             <a:extLst xmlns:a="http://schemas.openxmlformats.org/drawingml/2006/main">
               <a:ext uri="{FF2B5EF4-FFF2-40B4-BE49-F238E27FC236}">
-                <a16:creationId xmlns:a16="http://schemas.microsoft.com/office/drawing/2014/main" id="{7D1D38B8-D1E0-4986-990C-BC141E7F7609}"/>
+                <a16:creationId xmlns:a16="http://schemas.microsoft.com/office/drawing/2014/main" id="{AA7293DD-EC92-435E-950D-0A1CC39053D8}"/>
               </a:ext>
             </a:extLst>
           </p:cNvPr>
@@ -30039,7 +30039,7 @@
     </p:spTree>
     <p:extLst>
       <p:ext uri="{BB962C8B-B14F-4D97-AF65-F5344CB8AC3E}">
-        <p14:creationId xmlns:p14="http://schemas.microsoft.com/office/powerpoint/2010/main" val="1728219836"/>
+        <p14:creationId xmlns:p14="http://schemas.microsoft.com/office/powerpoint/2010/main" val="1043602072"/>
       </p:ext>
     </p:extLst>
   </p:cSld>
@@ -30070,7 +30070,7 @@
           <p:cNvPr id="24" name="ACT 2 · 지침을 활용한 관찰">
             <a:extLst xmlns:a="http://schemas.openxmlformats.org/drawingml/2006/main">
               <a:ext uri="{FF2B5EF4-FFF2-40B4-BE49-F238E27FC236}">
-                <a16:creationId xmlns:a16="http://schemas.microsoft.com/office/drawing/2014/main" id="{CB99CDCC-E303-484B-BF87-CF0995DEFA90}"/>
+                <a16:creationId xmlns:a16="http://schemas.microsoft.com/office/drawing/2014/main" id="{3A0E2348-95C0-47F7-80E4-38F194F87024}"/>
               </a:ext>
             </a:extLst>
           </p:cNvPr>
@@ -30225,10 +30225,10 @@
       </p:sp>
       <p:sp>
         <p:nvSpPr>
-          <p:cNvPr id="2" name="S26">
+          <p:cNvPr id="2" name="S34">
             <a:extLst xmlns:a="http://schemas.openxmlformats.org/drawingml/2006/main">
               <a:ext uri="{FF2B5EF4-FFF2-40B4-BE49-F238E27FC236}">
-                <a16:creationId xmlns:a16="http://schemas.microsoft.com/office/drawing/2014/main" id="{A8FDA1EC-3BCA-417F-A956-23D9A049301F}"/>
+                <a16:creationId xmlns:a16="http://schemas.microsoft.com/office/drawing/2014/main" id="{8A8B91A6-D668-45EE-BBC2-6FBF3CC814E3}"/>
               </a:ext>
             </a:extLst>
           </p:cNvPr>
@@ -30376,7 +30376,7 @@
                 <a:ea typeface="Malgun Gothic"/>
                 <a:cs typeface="Malgun Gothic"/>
               </a:rPr>
-              <a:t>S26</a:t>
+              <a:t>S34</a:t>
             </a:r>
           </a:p>
         </p:txBody>
@@ -30386,7 +30386,7 @@
           <p:cNvPr id="3" name="한 번의 사용에서 확인된 것">
             <a:extLst xmlns:a="http://schemas.openxmlformats.org/drawingml/2006/main">
               <a:ext uri="{FF2B5EF4-FFF2-40B4-BE49-F238E27FC236}">
-                <a16:creationId xmlns:a16="http://schemas.microsoft.com/office/drawing/2014/main" id="{009264A7-602D-4D0A-AA2B-854C4A627E88}"/>
+                <a16:creationId xmlns:a16="http://schemas.microsoft.com/office/drawing/2014/main" id="{6C704AED-400E-451F-8B93-50BA940F7935}"/>
               </a:ext>
             </a:extLst>
           </p:cNvPr>
@@ -30544,7 +30544,7 @@
           <p:cNvPr id="4" name="">
             <a:extLst xmlns:a="http://schemas.openxmlformats.org/drawingml/2006/main">
               <a:ext uri="{FF2B5EF4-FFF2-40B4-BE49-F238E27FC236}">
-                <a16:creationId xmlns:a16="http://schemas.microsoft.com/office/drawing/2014/main" id="{F9EE68DA-B049-450E-B579-541DCCA0B007}"/>
+                <a16:creationId xmlns:a16="http://schemas.microsoft.com/office/drawing/2014/main" id="{2EC8DA53-FF72-4373-97F1-C80B861A8E49}"/>
               </a:ext>
             </a:extLst>
           </p:cNvPr>
@@ -30575,7 +30575,7 @@
           <p:cNvPr id="5" name="TRIAL-003 · Codex CLI 기록을 재구성 · 전체 테스트 11/11 PASS">
             <a:extLst xmlns:a="http://schemas.openxmlformats.org/drawingml/2006/main">
               <a:ext uri="{FF2B5EF4-FFF2-40B4-BE49-F238E27FC236}">
-                <a16:creationId xmlns:a16="http://schemas.microsoft.com/office/drawing/2014/main" id="{8A73DE97-3F8B-4CAD-98F7-CB0FF1C820D2}"/>
+                <a16:creationId xmlns:a16="http://schemas.microsoft.com/office/drawing/2014/main" id="{00B56F22-23B9-4ABA-8773-82EDC0B23B9A}"/>
               </a:ext>
             </a:extLst>
           </p:cNvPr>
@@ -30733,7 +30733,7 @@
           <p:cNvPr id="6" name="Personal/global Skills도 실행됨 · AGENTS.md만의 독립적인 효과로 해석하지 않음">
             <a:extLst xmlns:a="http://schemas.openxmlformats.org/drawingml/2006/main">
               <a:ext uri="{FF2B5EF4-FFF2-40B4-BE49-F238E27FC236}">
-                <a16:creationId xmlns:a16="http://schemas.microsoft.com/office/drawing/2014/main" id="{CC7D92F6-E4D2-44A1-9F82-5C2539862A7F}"/>
+                <a16:creationId xmlns:a16="http://schemas.microsoft.com/office/drawing/2014/main" id="{9424DE84-B0F3-4758-A475-55051A9B6BE2}"/>
               </a:ext>
             </a:extLst>
           </p:cNvPr>
@@ -30891,7 +30891,7 @@
           <p:cNvPr id="7" name="요청">
             <a:extLst xmlns:a="http://schemas.openxmlformats.org/drawingml/2006/main">
               <a:ext uri="{FF2B5EF4-FFF2-40B4-BE49-F238E27FC236}">
-                <a16:creationId xmlns:a16="http://schemas.microsoft.com/office/drawing/2014/main" id="{A478A99F-DB61-49B2-A990-5BDD7E93C522}"/>
+                <a16:creationId xmlns:a16="http://schemas.microsoft.com/office/drawing/2014/main" id="{A294877E-36F7-4182-B6D8-91A54D7A73FB}"/>
               </a:ext>
             </a:extLst>
           </p:cNvPr>
@@ -31049,7 +31049,7 @@
           <p:cNvPr id="8" name="">
             <a:extLst xmlns:a="http://schemas.openxmlformats.org/drawingml/2006/main">
               <a:ext uri="{FF2B5EF4-FFF2-40B4-BE49-F238E27FC236}">
-                <a16:creationId xmlns:a16="http://schemas.microsoft.com/office/drawing/2014/main" id="{726EB8DC-F2D0-4BB9-9CA2-61521F363B9C}"/>
+                <a16:creationId xmlns:a16="http://schemas.microsoft.com/office/drawing/2014/main" id="{54FEBC1E-9B3B-4A67-95E3-4CCBE6244B09}"/>
               </a:ext>
             </a:extLst>
           </p:cNvPr>
@@ -31080,7 +31080,7 @@
           <p:cNvPr id="9" name="읽은 파일">
             <a:extLst xmlns:a="http://schemas.openxmlformats.org/drawingml/2006/main">
               <a:ext uri="{FF2B5EF4-FFF2-40B4-BE49-F238E27FC236}">
-                <a16:creationId xmlns:a16="http://schemas.microsoft.com/office/drawing/2014/main" id="{676F8199-ABF1-42EB-89C3-CE7CFB5736D4}"/>
+                <a16:creationId xmlns:a16="http://schemas.microsoft.com/office/drawing/2014/main" id="{3C26CDA9-7011-43A5-B320-E8992CD954AF}"/>
               </a:ext>
             </a:extLst>
           </p:cNvPr>
@@ -31238,7 +31238,7 @@
           <p:cNvPr id="10" name="">
             <a:extLst xmlns:a="http://schemas.openxmlformats.org/drawingml/2006/main">
               <a:ext uri="{FF2B5EF4-FFF2-40B4-BE49-F238E27FC236}">
-                <a16:creationId xmlns:a16="http://schemas.microsoft.com/office/drawing/2014/main" id="{1C7FC57F-0BA5-4EB7-B2EB-9BCE237ABA01}"/>
+                <a16:creationId xmlns:a16="http://schemas.microsoft.com/office/drawing/2014/main" id="{DA6F45CE-6C43-49FA-A416-7699EDB92977}"/>
               </a:ext>
             </a:extLst>
           </p:cNvPr>
@@ -31269,7 +31269,7 @@
           <p:cNvPr id="11" name="실행 기록">
             <a:extLst xmlns:a="http://schemas.openxmlformats.org/drawingml/2006/main">
               <a:ext uri="{FF2B5EF4-FFF2-40B4-BE49-F238E27FC236}">
-                <a16:creationId xmlns:a16="http://schemas.microsoft.com/office/drawing/2014/main" id="{1708ABA0-44BE-43C0-9AAF-FF3C6817F6F6}"/>
+                <a16:creationId xmlns:a16="http://schemas.microsoft.com/office/drawing/2014/main" id="{3EBFA5CD-1FA4-443B-9ABE-96A4E8AADF09}"/>
               </a:ext>
             </a:extLst>
           </p:cNvPr>
@@ -31427,7 +31427,7 @@
           <p:cNvPr id="12" name="">
             <a:extLst xmlns:a="http://schemas.openxmlformats.org/drawingml/2006/main">
               <a:ext uri="{FF2B5EF4-FFF2-40B4-BE49-F238E27FC236}">
-                <a16:creationId xmlns:a16="http://schemas.microsoft.com/office/drawing/2014/main" id="{CA09ACAF-6B78-49A6-85D0-A26BFEDD1321}"/>
+                <a16:creationId xmlns:a16="http://schemas.microsoft.com/office/drawing/2014/main" id="{B1BFCAAA-7690-465B-B265-48031FCFE4B9}"/>
               </a:ext>
             </a:extLst>
           </p:cNvPr>
@@ -31458,7 +31458,7 @@
           <p:cNvPr id="13" name="README만 수정&#10;테스트 명령은 없음">
             <a:extLst xmlns:a="http://schemas.openxmlformats.org/drawingml/2006/main">
               <a:ext uri="{FF2B5EF4-FFF2-40B4-BE49-F238E27FC236}">
-                <a16:creationId xmlns:a16="http://schemas.microsoft.com/office/drawing/2014/main" id="{12B29FE3-B576-4305-8692-3682D8DF6753}"/>
+                <a16:creationId xmlns:a16="http://schemas.microsoft.com/office/drawing/2014/main" id="{B8637B59-F576-4B62-993F-434DA4CBB43B}"/>
               </a:ext>
             </a:extLst>
           </p:cNvPr>
@@ -31639,7 +31639,7 @@
           <p:cNvPr id="14" name="AGENTS.md">
             <a:extLst xmlns:a="http://schemas.openxmlformats.org/drawingml/2006/main">
               <a:ext uri="{FF2B5EF4-FFF2-40B4-BE49-F238E27FC236}">
-                <a16:creationId xmlns:a16="http://schemas.microsoft.com/office/drawing/2014/main" id="{4A19CFDC-BDC7-4879-BBE4-FAC8B350DD3C}"/>
+                <a16:creationId xmlns:a16="http://schemas.microsoft.com/office/drawing/2014/main" id="{51CB64AD-CD91-4113-AB0D-B1FA3FA4B14E}"/>
               </a:ext>
             </a:extLst>
           </p:cNvPr>
@@ -31797,7 +31797,7 @@
           <p:cNvPr id="15" name="기록된 테스트&#10;명령을 사용">
             <a:extLst xmlns:a="http://schemas.openxmlformats.org/drawingml/2006/main">
               <a:ext uri="{FF2B5EF4-FFF2-40B4-BE49-F238E27FC236}">
-                <a16:creationId xmlns:a16="http://schemas.microsoft.com/office/drawing/2014/main" id="{E19084F2-0CD5-4D89-88ED-5CBE7ECCFDDA}"/>
+                <a16:creationId xmlns:a16="http://schemas.microsoft.com/office/drawing/2014/main" id="{D3B22B93-559F-4802-B0C0-D88BEFD228F8}"/>
               </a:ext>
             </a:extLst>
           </p:cNvPr>
@@ -31978,7 +31978,7 @@
           <p:cNvPr id="16" name="전체 테스트">
             <a:extLst xmlns:a="http://schemas.openxmlformats.org/drawingml/2006/main">
               <a:ext uri="{FF2B5EF4-FFF2-40B4-BE49-F238E27FC236}">
-                <a16:creationId xmlns:a16="http://schemas.microsoft.com/office/drawing/2014/main" id="{389E83DA-161D-4DE2-8DF9-D230FEED0822}"/>
+                <a16:creationId xmlns:a16="http://schemas.microsoft.com/office/drawing/2014/main" id="{10774065-B4F3-4FE2-9BFD-374120BC576A}"/>
               </a:ext>
             </a:extLst>
           </p:cNvPr>
@@ -32136,7 +32136,7 @@
           <p:cNvPr id="17" name="11 / 11">
             <a:extLst xmlns:a="http://schemas.openxmlformats.org/drawingml/2006/main">
               <a:ext uri="{FF2B5EF4-FFF2-40B4-BE49-F238E27FC236}">
-                <a16:creationId xmlns:a16="http://schemas.microsoft.com/office/drawing/2014/main" id="{F7ECB9CE-103B-4281-8B38-082FABE7D363}"/>
+                <a16:creationId xmlns:a16="http://schemas.microsoft.com/office/drawing/2014/main" id="{FEF88C7E-E5B1-40CE-A21B-2925908A56F8}"/>
               </a:ext>
             </a:extLst>
           </p:cNvPr>
@@ -32294,7 +32294,7 @@
           <p:cNvPr id="18" name="PASS">
             <a:extLst xmlns:a="http://schemas.openxmlformats.org/drawingml/2006/main">
               <a:ext uri="{FF2B5EF4-FFF2-40B4-BE49-F238E27FC236}">
-                <a16:creationId xmlns:a16="http://schemas.microsoft.com/office/drawing/2014/main" id="{92DE243C-4484-43D5-AB88-AAAC14EF2122}"/>
+                <a16:creationId xmlns:a16="http://schemas.microsoft.com/office/drawing/2014/main" id="{0BD00DE5-4A06-4031-823B-A0469D76793D}"/>
               </a:ext>
             </a:extLst>
           </p:cNvPr>
@@ -32452,7 +32452,7 @@
           <p:cNvPr id="19" name="">
             <a:extLst xmlns:a="http://schemas.openxmlformats.org/drawingml/2006/main">
               <a:ext uri="{FF2B5EF4-FFF2-40B4-BE49-F238E27FC236}">
-                <a16:creationId xmlns:a16="http://schemas.microsoft.com/office/drawing/2014/main" id="{81843F9B-6EFE-4291-994B-16B4B6E31FD0}"/>
+                <a16:creationId xmlns:a16="http://schemas.microsoft.com/office/drawing/2014/main" id="{B5589E61-F5CE-4437-B10D-D86D27C30830}"/>
               </a:ext>
             </a:extLst>
           </p:cNvPr>
@@ -32482,7 +32482,7 @@
           <p:cNvPr id="20" name="">
             <a:extLst xmlns:a="http://schemas.openxmlformats.org/drawingml/2006/main">
               <a:ext uri="{FF2B5EF4-FFF2-40B4-BE49-F238E27FC236}">
-                <a16:creationId xmlns:a16="http://schemas.microsoft.com/office/drawing/2014/main" id="{516111BE-A0DA-4F50-9645-0D49011C3A04}"/>
+                <a16:creationId xmlns:a16="http://schemas.microsoft.com/office/drawing/2014/main" id="{350F9F33-1B81-4F4A-80EA-58FD5A2E48E2}"/>
               </a:ext>
             </a:extLst>
           </p:cNvPr>
@@ -32512,7 +32512,7 @@
           <p:cNvPr id="21" name="">
             <a:extLst xmlns:a="http://schemas.openxmlformats.org/drawingml/2006/main">
               <a:ext uri="{FF2B5EF4-FFF2-40B4-BE49-F238E27FC236}">
-                <a16:creationId xmlns:a16="http://schemas.microsoft.com/office/drawing/2014/main" id="{62747271-9CAF-42BC-91ED-0C9BB883A7DF}"/>
+                <a16:creationId xmlns:a16="http://schemas.microsoft.com/office/drawing/2014/main" id="{5F4402A2-2BF9-45CD-B4F8-B28FA04225E9}"/>
               </a:ext>
             </a:extLst>
           </p:cNvPr>
@@ -32543,7 +32543,7 @@
           <p:cNvPr id="22" name="README-only 범위는 작업 요청에도 명시돼 있었다">
             <a:extLst xmlns:a="http://schemas.openxmlformats.org/drawingml/2006/main">
               <a:ext uri="{FF2B5EF4-FFF2-40B4-BE49-F238E27FC236}">
-                <a16:creationId xmlns:a16="http://schemas.microsoft.com/office/drawing/2014/main" id="{57DD5FD7-A2BC-4EB2-95DD-7A65B7EB6BCA}"/>
+                <a16:creationId xmlns:a16="http://schemas.microsoft.com/office/drawing/2014/main" id="{621872E9-978E-4067-BA4C-ECEC54CF9C2B}"/>
               </a:ext>
             </a:extLst>
           </p:cNvPr>
@@ -32701,7 +32701,7 @@
           <p:cNvPr id="23" name="Legacy module connection">
             <a:extLst xmlns:a="http://schemas.openxmlformats.org/drawingml/2006/main">
               <a:ext uri="{FF2B5EF4-FFF2-40B4-BE49-F238E27FC236}">
-                <a16:creationId xmlns:a16="http://schemas.microsoft.com/office/drawing/2014/main" id="{467BFE52-4DC5-42A9-9B96-E36761878EE4}"/>
+                <a16:creationId xmlns:a16="http://schemas.microsoft.com/office/drawing/2014/main" id="{5CB5503D-04B3-417D-BC86-CF0D2102AEF8}"/>
               </a:ext>
             </a:extLst>
           </p:cNvPr>
@@ -32857,7 +32857,7 @@
     </p:spTree>
     <p:extLst>
       <p:ext uri="{BB962C8B-B14F-4D97-AF65-F5344CB8AC3E}">
-        <p14:creationId xmlns:p14="http://schemas.microsoft.com/office/powerpoint/2010/main" val="823408595"/>
+        <p14:creationId xmlns:p14="http://schemas.microsoft.com/office/powerpoint/2010/main" val="944522724"/>
       </p:ext>
     </p:extLst>
   </p:cSld>
@@ -32888,7 +32888,7 @@
           <p:cNvPr id="21" name="ACT 2 · 정보의 범위와 수명">
             <a:extLst xmlns:a="http://schemas.openxmlformats.org/drawingml/2006/main">
               <a:ext uri="{FF2B5EF4-FFF2-40B4-BE49-F238E27FC236}">
-                <a16:creationId xmlns:a16="http://schemas.microsoft.com/office/drawing/2014/main" id="{DDF9F7F7-00C1-40A8-BB4E-33F6448EE06E}"/>
+                <a16:creationId xmlns:a16="http://schemas.microsoft.com/office/drawing/2014/main" id="{370B6AD8-4284-435A-B5F6-C3715655901B}"/>
               </a:ext>
             </a:extLst>
           </p:cNvPr>
@@ -33043,10 +33043,10 @@
       </p:sp>
       <p:sp>
         <p:nvSpPr>
-          <p:cNvPr id="2" name="S27">
+          <p:cNvPr id="2" name="S35">
             <a:extLst xmlns:a="http://schemas.openxmlformats.org/drawingml/2006/main">
               <a:ext uri="{FF2B5EF4-FFF2-40B4-BE49-F238E27FC236}">
-                <a16:creationId xmlns:a16="http://schemas.microsoft.com/office/drawing/2014/main" id="{19882B97-0979-46D7-B684-19A4E67CA75F}"/>
+                <a16:creationId xmlns:a16="http://schemas.microsoft.com/office/drawing/2014/main" id="{1987D40C-1B99-4171-A85B-FFE135B7CEC9}"/>
               </a:ext>
             </a:extLst>
           </p:cNvPr>
@@ -33194,7 +33194,7 @@
                 <a:ea typeface="Malgun Gothic"/>
                 <a:cs typeface="Malgun Gothic"/>
               </a:rPr>
-              <a:t>S27</a:t>
+              <a:t>S35</a:t>
             </a:r>
           </a:p>
         </p:txBody>
@@ -33204,7 +33204,7 @@
           <p:cNvPr id="3" name="Task Prompt와 Project Context">
             <a:extLst xmlns:a="http://schemas.openxmlformats.org/drawingml/2006/main">
               <a:ext uri="{FF2B5EF4-FFF2-40B4-BE49-F238E27FC236}">
-                <a16:creationId xmlns:a16="http://schemas.microsoft.com/office/drawing/2014/main" id="{727B0D5C-D876-4E28-BFBF-E389D57099DA}"/>
+                <a16:creationId xmlns:a16="http://schemas.microsoft.com/office/drawing/2014/main" id="{563A829D-EB0D-4DCA-A5ED-B2A8D621BB25}"/>
               </a:ext>
             </a:extLst>
           </p:cNvPr>
@@ -33362,7 +33362,7 @@
           <p:cNvPr id="4" name="">
             <a:extLst xmlns:a="http://schemas.openxmlformats.org/drawingml/2006/main">
               <a:ext uri="{FF2B5EF4-FFF2-40B4-BE49-F238E27FC236}">
-                <a16:creationId xmlns:a16="http://schemas.microsoft.com/office/drawing/2014/main" id="{A910BFE9-30DA-4029-8872-B904D070F88B}"/>
+                <a16:creationId xmlns:a16="http://schemas.microsoft.com/office/drawing/2014/main" id="{F41FF0BF-A9F4-4F2D-A01D-E4861139894B}"/>
               </a:ext>
             </a:extLst>
           </p:cNvPr>
@@ -33393,7 +33393,7 @@
           <p:cNvPr id="5" name="교육용 구분 · 현재 목표와 지속되는 프로젝트 사실">
             <a:extLst xmlns:a="http://schemas.openxmlformats.org/drawingml/2006/main">
               <a:ext uri="{FF2B5EF4-FFF2-40B4-BE49-F238E27FC236}">
-                <a16:creationId xmlns:a16="http://schemas.microsoft.com/office/drawing/2014/main" id="{5C2A53C1-3793-4D1F-BFA2-7286AA4B3779}"/>
+                <a16:creationId xmlns:a16="http://schemas.microsoft.com/office/drawing/2014/main" id="{52C1E52C-62F2-4F4A-B3DB-937F2216B26B}"/>
               </a:ext>
             </a:extLst>
           </p:cNvPr>
@@ -33551,7 +33551,7 @@
           <p:cNvPr id="6" name="C++에서도 프로젝트 공통 제약과 이번 알고리즘 변경 조건은 범위가 다를 수 있다">
             <a:extLst xmlns:a="http://schemas.openxmlformats.org/drawingml/2006/main">
               <a:ext uri="{FF2B5EF4-FFF2-40B4-BE49-F238E27FC236}">
-                <a16:creationId xmlns:a16="http://schemas.microsoft.com/office/drawing/2014/main" id="{776C1879-6E91-40CB-AE66-0DB0C0EAFFC9}"/>
+                <a16:creationId xmlns:a16="http://schemas.microsoft.com/office/drawing/2014/main" id="{18C55F86-C0CC-4921-98E3-6BA282383794}"/>
               </a:ext>
             </a:extLst>
           </p:cNvPr>
@@ -33709,7 +33709,7 @@
           <p:cNvPr id="7" name="방금 본 기록을 범위와 수명으로 읽어보면">
             <a:extLst xmlns:a="http://schemas.openxmlformats.org/drawingml/2006/main">
               <a:ext uri="{FF2B5EF4-FFF2-40B4-BE49-F238E27FC236}">
-                <a16:creationId xmlns:a16="http://schemas.microsoft.com/office/drawing/2014/main" id="{7CA50D52-8953-414C-996B-1121289FA705}"/>
+                <a16:creationId xmlns:a16="http://schemas.microsoft.com/office/drawing/2014/main" id="{B6E9F95F-D82F-49B6-A492-975C4E65EC7B}"/>
               </a:ext>
             </a:extLst>
           </p:cNvPr>
@@ -33867,7 +33867,7 @@
           <p:cNvPr id="8" name="Task Prompt">
             <a:extLst xmlns:a="http://schemas.openxmlformats.org/drawingml/2006/main">
               <a:ext uri="{FF2B5EF4-FFF2-40B4-BE49-F238E27FC236}">
-                <a16:creationId xmlns:a16="http://schemas.microsoft.com/office/drawing/2014/main" id="{9AF4AA50-EB37-4967-B446-79F938262BA4}"/>
+                <a16:creationId xmlns:a16="http://schemas.microsoft.com/office/drawing/2014/main" id="{8BE4CCF9-48BA-4890-BEC6-E7683D868BC7}"/>
               </a:ext>
             </a:extLst>
           </p:cNvPr>
@@ -34025,7 +34025,7 @@
           <p:cNvPr id="9" name="Project Context">
             <a:extLst xmlns:a="http://schemas.openxmlformats.org/drawingml/2006/main">
               <a:ext uri="{FF2B5EF4-FFF2-40B4-BE49-F238E27FC236}">
-                <a16:creationId xmlns:a16="http://schemas.microsoft.com/office/drawing/2014/main" id="{45FBA96C-4C6B-4378-8D96-49B08F2EC1B0}"/>
+                <a16:creationId xmlns:a16="http://schemas.microsoft.com/office/drawing/2014/main" id="{14CF9B0E-5E24-4470-BA9B-EC05FAA4009E}"/>
               </a:ext>
             </a:extLst>
           </p:cNvPr>
@@ -34183,7 +34183,7 @@
           <p:cNvPr id="10" name="">
             <a:extLst xmlns:a="http://schemas.openxmlformats.org/drawingml/2006/main">
               <a:ext uri="{FF2B5EF4-FFF2-40B4-BE49-F238E27FC236}">
-                <a16:creationId xmlns:a16="http://schemas.microsoft.com/office/drawing/2014/main" id="{20F9ED89-5982-4218-B16B-DB25BB050BE4}"/>
+                <a16:creationId xmlns:a16="http://schemas.microsoft.com/office/drawing/2014/main" id="{AE3C170F-5B7D-4286-904C-7AC2D0C355B2}"/>
               </a:ext>
             </a:extLst>
           </p:cNvPr>
@@ -34214,7 +34214,7 @@
           <p:cNvPr id="11" name="">
             <a:extLst xmlns:a="http://schemas.openxmlformats.org/drawingml/2006/main">
               <a:ext uri="{FF2B5EF4-FFF2-40B4-BE49-F238E27FC236}">
-                <a16:creationId xmlns:a16="http://schemas.microsoft.com/office/drawing/2014/main" id="{23FD16CD-1DDC-4A0F-956F-6C0D7054B1A0}"/>
+                <a16:creationId xmlns:a16="http://schemas.microsoft.com/office/drawing/2014/main" id="{A6CDF00D-3408-4062-8125-83F79117695C}"/>
               </a:ext>
             </a:extLst>
           </p:cNvPr>
@@ -34245,7 +34245,7 @@
           <p:cNvPr id="12" name="지금 원하는 결과">
             <a:extLst xmlns:a="http://schemas.openxmlformats.org/drawingml/2006/main">
               <a:ext uri="{FF2B5EF4-FFF2-40B4-BE49-F238E27FC236}">
-                <a16:creationId xmlns:a16="http://schemas.microsoft.com/office/drawing/2014/main" id="{606F025D-05A1-469E-8C15-3897978DA5D9}"/>
+                <a16:creationId xmlns:a16="http://schemas.microsoft.com/office/drawing/2014/main" id="{EBCDD3D8-3B4C-4B07-8528-028B7AEBFFEB}"/>
               </a:ext>
             </a:extLst>
           </p:cNvPr>
@@ -34403,7 +34403,7 @@
           <p:cNvPr id="13" name="계속 참이어야 할 사실">
             <a:extLst xmlns:a="http://schemas.openxmlformats.org/drawingml/2006/main">
               <a:ext uri="{FF2B5EF4-FFF2-40B4-BE49-F238E27FC236}">
-                <a16:creationId xmlns:a16="http://schemas.microsoft.com/office/drawing/2014/main" id="{0CDB6F0B-F99A-477D-9F1B-87F43B5C55A6}"/>
+                <a16:creationId xmlns:a16="http://schemas.microsoft.com/office/drawing/2014/main" id="{06C88E4F-212B-4ABA-A683-73EF6958A223}"/>
               </a:ext>
             </a:extLst>
           </p:cNvPr>
@@ -34561,7 +34561,7 @@
           <p:cNvPr id="14" name="crop 경계 버그 수정&#10;이번에는 README만 변경">
             <a:extLst xmlns:a="http://schemas.openxmlformats.org/drawingml/2006/main">
               <a:ext uri="{FF2B5EF4-FFF2-40B4-BE49-F238E27FC236}">
-                <a16:creationId xmlns:a16="http://schemas.microsoft.com/office/drawing/2014/main" id="{D71A95B9-A257-44C1-BAFA-55101ADD0D21}"/>
+                <a16:creationId xmlns:a16="http://schemas.microsoft.com/office/drawing/2014/main" id="{FF25CD2C-F479-4546-BB83-649BC88E31B5}"/>
               </a:ext>
             </a:extLst>
           </p:cNvPr>
@@ -34742,7 +34742,7 @@
           <p:cNvPr id="15" name="프로젝트의 테스트 명령&#10;의존성 추가에는 작업상 근거 필요">
             <a:extLst xmlns:a="http://schemas.openxmlformats.org/drawingml/2006/main">
               <a:ext uri="{FF2B5EF4-FFF2-40B4-BE49-F238E27FC236}">
-                <a16:creationId xmlns:a16="http://schemas.microsoft.com/office/drawing/2014/main" id="{2B3E1366-1C2E-49E9-B9B2-0A3E3DDA94C9}"/>
+                <a16:creationId xmlns:a16="http://schemas.microsoft.com/office/drawing/2014/main" id="{5A7AB845-4151-4B07-9F8F-F427F7F9472B}"/>
               </a:ext>
             </a:extLst>
           </p:cNvPr>
@@ -34923,7 +34923,7 @@
           <p:cNvPr id="16" name="">
             <a:extLst xmlns:a="http://schemas.openxmlformats.org/drawingml/2006/main">
               <a:ext uri="{FF2B5EF4-FFF2-40B4-BE49-F238E27FC236}">
-                <a16:creationId xmlns:a16="http://schemas.microsoft.com/office/drawing/2014/main" id="{E32E3AEF-BF2E-4F2B-90AC-135E420E51C9}"/>
+                <a16:creationId xmlns:a16="http://schemas.microsoft.com/office/drawing/2014/main" id="{FD4A8570-3FC8-4941-A410-BA558CAA0CEE}"/>
               </a:ext>
             </a:extLst>
           </p:cNvPr>
@@ -34956,7 +34956,7 @@
           <p:cNvPr id="17" name="">
             <a:extLst xmlns:a="http://schemas.openxmlformats.org/drawingml/2006/main">
               <a:ext uri="{FF2B5EF4-FFF2-40B4-BE49-F238E27FC236}">
-                <a16:creationId xmlns:a16="http://schemas.microsoft.com/office/drawing/2014/main" id="{9753085C-ECC0-4F65-9506-F5679E04C4FC}"/>
+                <a16:creationId xmlns:a16="http://schemas.microsoft.com/office/drawing/2014/main" id="{6F44B0CF-D6DC-4F49-AF49-3A7FF92FC9EF}"/>
               </a:ext>
             </a:extLst>
           </p:cNvPr>
@@ -34987,7 +34987,7 @@
           <p:cNvPr id="18" name="다음 작업에서는 목표가 달라짐">
             <a:extLst xmlns:a="http://schemas.openxmlformats.org/drawingml/2006/main">
               <a:ext uri="{FF2B5EF4-FFF2-40B4-BE49-F238E27FC236}">
-                <a16:creationId xmlns:a16="http://schemas.microsoft.com/office/drawing/2014/main" id="{6827BB06-FBD1-404F-B25C-9F846236C680}"/>
+                <a16:creationId xmlns:a16="http://schemas.microsoft.com/office/drawing/2014/main" id="{761C29BC-F507-41BF-BAD1-860DB126DC51}"/>
               </a:ext>
             </a:extLst>
           </p:cNvPr>
@@ -35145,7 +35145,7 @@
           <p:cNvPr id="19" name="여러 작업에서 다시 참고">
             <a:extLst xmlns:a="http://schemas.openxmlformats.org/drawingml/2006/main">
               <a:ext uri="{FF2B5EF4-FFF2-40B4-BE49-F238E27FC236}">
-                <a16:creationId xmlns:a16="http://schemas.microsoft.com/office/drawing/2014/main" id="{B035E686-B62F-4F3C-B393-9C315FEC5E84}"/>
+                <a16:creationId xmlns:a16="http://schemas.microsoft.com/office/drawing/2014/main" id="{CE672148-7298-41C9-BFC6-02810DBB3A4A}"/>
               </a:ext>
             </a:extLst>
           </p:cNvPr>
@@ -35303,7 +35303,7 @@
           <p:cNvPr id="20" name="Legacy module connection">
             <a:extLst xmlns:a="http://schemas.openxmlformats.org/drawingml/2006/main">
               <a:ext uri="{FF2B5EF4-FFF2-40B4-BE49-F238E27FC236}">
-                <a16:creationId xmlns:a16="http://schemas.microsoft.com/office/drawing/2014/main" id="{621893FA-6A02-46FF-969B-6BEC2B97EEB7}"/>
+                <a16:creationId xmlns:a16="http://schemas.microsoft.com/office/drawing/2014/main" id="{11E4B9DE-2B5E-48EE-B2B6-E2F2734B59B2}"/>
               </a:ext>
             </a:extLst>
           </p:cNvPr>
@@ -35459,7 +35459,7 @@
     </p:spTree>
     <p:extLst>
       <p:ext uri="{BB962C8B-B14F-4D97-AF65-F5344CB8AC3E}">
-        <p14:creationId xmlns:p14="http://schemas.microsoft.com/office/powerpoint/2010/main" val="1480938011"/>
+        <p14:creationId xmlns:p14="http://schemas.microsoft.com/office/powerpoint/2010/main" val="403419196"/>
       </p:ext>
     </p:extLst>
   </p:cSld>
@@ -35490,7 +35490,7 @@
           <p:cNvPr id="27" name="ACT 2 · Context가 쌓이는 과정">
             <a:extLst xmlns:a="http://schemas.openxmlformats.org/drawingml/2006/main">
               <a:ext uri="{FF2B5EF4-FFF2-40B4-BE49-F238E27FC236}">
-                <a16:creationId xmlns:a16="http://schemas.microsoft.com/office/drawing/2014/main" id="{751E7FFA-F00F-41B4-8923-F8DBBE9F1EDE}"/>
+                <a16:creationId xmlns:a16="http://schemas.microsoft.com/office/drawing/2014/main" id="{9797694B-8A08-40AE-849E-396528ECF71A}"/>
               </a:ext>
             </a:extLst>
           </p:cNvPr>
@@ -35645,10 +35645,10 @@
       </p:sp>
       <p:sp>
         <p:nvSpPr>
-          <p:cNvPr id="2" name="S28">
+          <p:cNvPr id="2" name="S36">
             <a:extLst xmlns:a="http://schemas.openxmlformats.org/drawingml/2006/main">
               <a:ext uri="{FF2B5EF4-FFF2-40B4-BE49-F238E27FC236}">
-                <a16:creationId xmlns:a16="http://schemas.microsoft.com/office/drawing/2014/main" id="{267A8194-166F-44B6-9441-F3CB79FE94B0}"/>
+                <a16:creationId xmlns:a16="http://schemas.microsoft.com/office/drawing/2014/main" id="{8FCF5E9A-7AA8-4901-B0FB-D67195BA8282}"/>
               </a:ext>
             </a:extLst>
           </p:cNvPr>
@@ -35796,7 +35796,7 @@
                 <a:ea typeface="Malgun Gothic"/>
                 <a:cs typeface="Malgun Gothic"/>
               </a:rPr>
-              <a:t>S28</a:t>
+              <a:t>S36</a:t>
             </a:r>
           </a:p>
         </p:txBody>
@@ -35806,7 +35806,7 @@
           <p:cNvPr id="3" name="정확한 정보도 계속 늘어난다">
             <a:extLst xmlns:a="http://schemas.openxmlformats.org/drawingml/2006/main">
               <a:ext uri="{FF2B5EF4-FFF2-40B4-BE49-F238E27FC236}">
-                <a16:creationId xmlns:a16="http://schemas.microsoft.com/office/drawing/2014/main" id="{2884C122-122D-4EF5-A896-E7A8C06097C9}"/>
+                <a16:creationId xmlns:a16="http://schemas.microsoft.com/office/drawing/2014/main" id="{10B4D636-6D0C-42A0-B489-DB271BA32441}"/>
               </a:ext>
             </a:extLst>
           </p:cNvPr>
@@ -35964,7 +35964,7 @@
           <p:cNvPr id="4" name="">
             <a:extLst xmlns:a="http://schemas.openxmlformats.org/drawingml/2006/main">
               <a:ext uri="{FF2B5EF4-FFF2-40B4-BE49-F238E27FC236}">
-                <a16:creationId xmlns:a16="http://schemas.microsoft.com/office/drawing/2014/main" id="{4F5B0CC4-133F-4BE4-A31E-C3570805110D}"/>
+                <a16:creationId xmlns:a16="http://schemas.microsoft.com/office/drawing/2014/main" id="{2AFDF035-0CF5-4F6F-BF52-3495CB9CE764}"/>
               </a:ext>
             </a:extLst>
           </p:cNvPr>
@@ -35995,7 +35995,7 @@
           <p:cNvPr id="5" name="STATE-01 → STATE-02 · 실제 AGENTS.md 상태 비교">
             <a:extLst xmlns:a="http://schemas.openxmlformats.org/drawingml/2006/main">
               <a:ext uri="{FF2B5EF4-FFF2-40B4-BE49-F238E27FC236}">
-                <a16:creationId xmlns:a16="http://schemas.microsoft.com/office/drawing/2014/main" id="{40FB8DC8-327A-4A7B-AE7E-60B14FD757A2}"/>
+                <a16:creationId xmlns:a16="http://schemas.microsoft.com/office/drawing/2014/main" id="{C0A0EF01-CF78-4889-8C98-2E8BA4105BBA}"/>
               </a:ext>
             </a:extLst>
           </p:cNvPr>
@@ -36153,7 +36153,7 @@
           <p:cNvPr id="6" name="문서 크기는 상태 식별 정보 · Context 증가가 실패를 일으켰다는 근거는 아님">
             <a:extLst xmlns:a="http://schemas.openxmlformats.org/drawingml/2006/main">
               <a:ext uri="{FF2B5EF4-FFF2-40B4-BE49-F238E27FC236}">
-                <a16:creationId xmlns:a16="http://schemas.microsoft.com/office/drawing/2014/main" id="{A7DFAD1E-8361-4461-91F6-A8E755E6DE16}"/>
+                <a16:creationId xmlns:a16="http://schemas.microsoft.com/office/drawing/2014/main" id="{7A709BFA-76DF-46CB-A45E-B328E114495F}"/>
               </a:ext>
             </a:extLst>
           </p:cNvPr>
@@ -36311,7 +36311,7 @@
           <p:cNvPr id="7" name="STATE-01">
             <a:extLst xmlns:a="http://schemas.openxmlformats.org/drawingml/2006/main">
               <a:ext uri="{FF2B5EF4-FFF2-40B4-BE49-F238E27FC236}">
-                <a16:creationId xmlns:a16="http://schemas.microsoft.com/office/drawing/2014/main" id="{04C525CC-BC9D-4306-9044-1DF71EEF6C7A}"/>
+                <a16:creationId xmlns:a16="http://schemas.microsoft.com/office/drawing/2014/main" id="{19134183-A001-401D-A5B0-F29E08BB27B4}"/>
               </a:ext>
             </a:extLst>
           </p:cNvPr>
@@ -36469,7 +36469,7 @@
           <p:cNvPr id="8" name="목적 · 실행 · 테스트&#10;기본 제약">
             <a:extLst xmlns:a="http://schemas.openxmlformats.org/drawingml/2006/main">
               <a:ext uri="{FF2B5EF4-FFF2-40B4-BE49-F238E27FC236}">
-                <a16:creationId xmlns:a16="http://schemas.microsoft.com/office/drawing/2014/main" id="{5A6E8518-A49F-4457-AACA-76A79DC7E542}"/>
+                <a16:creationId xmlns:a16="http://schemas.microsoft.com/office/drawing/2014/main" id="{F15A2634-B628-42F1-A4D8-EF6414E21406}"/>
               </a:ext>
             </a:extLst>
           </p:cNvPr>
@@ -36650,7 +36650,7 @@
           <p:cNvPr id="9" name="15줄 · 567 bytes">
             <a:extLst xmlns:a="http://schemas.openxmlformats.org/drawingml/2006/main">
               <a:ext uri="{FF2B5EF4-FFF2-40B4-BE49-F238E27FC236}">
-                <a16:creationId xmlns:a16="http://schemas.microsoft.com/office/drawing/2014/main" id="{E739AD71-6302-4D72-8FFD-8BBAEAD314FB}"/>
+                <a16:creationId xmlns:a16="http://schemas.microsoft.com/office/drawing/2014/main" id="{5796BAC6-0B43-44EA-BD3B-E2DB50B4A12E}"/>
               </a:ext>
             </a:extLst>
           </p:cNvPr>
@@ -36808,7 +36808,7 @@
           <p:cNvPr id="10" name="">
             <a:extLst xmlns:a="http://schemas.openxmlformats.org/drawingml/2006/main">
               <a:ext uri="{FF2B5EF4-FFF2-40B4-BE49-F238E27FC236}">
-                <a16:creationId xmlns:a16="http://schemas.microsoft.com/office/drawing/2014/main" id="{154C7B35-EC9D-487A-9978-CB82612D9D50}"/>
+                <a16:creationId xmlns:a16="http://schemas.microsoft.com/office/drawing/2014/main" id="{D9F50817-64C3-492C-9FC1-E747221579BB}"/>
               </a:ext>
             </a:extLst>
           </p:cNvPr>
@@ -36838,7 +36838,7 @@
           <p:cNvPr id="11" name="STATE-02에 추가된 실제 정보">
             <a:extLst xmlns:a="http://schemas.openxmlformats.org/drawingml/2006/main">
               <a:ext uri="{FF2B5EF4-FFF2-40B4-BE49-F238E27FC236}">
-                <a16:creationId xmlns:a16="http://schemas.microsoft.com/office/drawing/2014/main" id="{56E77DB3-C74B-4432-992A-752B4C7799DB}"/>
+                <a16:creationId xmlns:a16="http://schemas.microsoft.com/office/drawing/2014/main" id="{B634FDF9-DB55-467A-8EED-8A95733097E4}"/>
               </a:ext>
             </a:extLst>
           </p:cNvPr>
@@ -36996,7 +36996,7 @@
           <p:cNvPr id="12" name="">
             <a:extLst xmlns:a="http://schemas.openxmlformats.org/drawingml/2006/main">
               <a:ext uri="{FF2B5EF4-FFF2-40B4-BE49-F238E27FC236}">
-                <a16:creationId xmlns:a16="http://schemas.microsoft.com/office/drawing/2014/main" id="{9E467596-A136-4460-8441-C62C5EF5BF27}"/>
+                <a16:creationId xmlns:a16="http://schemas.microsoft.com/office/drawing/2014/main" id="{ADD5C464-950D-4644-B31F-F49F7F0AF713}"/>
               </a:ext>
             </a:extLst>
           </p:cNvPr>
@@ -37027,7 +37027,7 @@
           <p:cNvPr id="13" name="처리 순서">
             <a:extLst xmlns:a="http://schemas.openxmlformats.org/drawingml/2006/main">
               <a:ext uri="{FF2B5EF4-FFF2-40B4-BE49-F238E27FC236}">
-                <a16:creationId xmlns:a16="http://schemas.microsoft.com/office/drawing/2014/main" id="{19BDFD19-B872-4069-9455-79A2383BB779}"/>
+                <a16:creationId xmlns:a16="http://schemas.microsoft.com/office/drawing/2014/main" id="{C061B364-8F27-49ED-8CF4-E67B6614DFE9}"/>
               </a:ext>
             </a:extLst>
           </p:cNvPr>
@@ -37185,7 +37185,7 @@
           <p:cNvPr id="14" name="load → normalize → … → write">
             <a:extLst xmlns:a="http://schemas.openxmlformats.org/drawingml/2006/main">
               <a:ext uri="{FF2B5EF4-FFF2-40B4-BE49-F238E27FC236}">
-                <a16:creationId xmlns:a16="http://schemas.microsoft.com/office/drawing/2014/main" id="{FB99D8FC-F51F-481F-866E-9E2308C0080A}"/>
+                <a16:creationId xmlns:a16="http://schemas.microsoft.com/office/drawing/2014/main" id="{F296361A-65C0-40F1-A3A3-13271DD32B38}"/>
               </a:ext>
             </a:extLst>
           </p:cNvPr>
@@ -37343,7 +37343,7 @@
           <p:cNvPr id="15" name="">
             <a:extLst xmlns:a="http://schemas.openxmlformats.org/drawingml/2006/main">
               <a:ext uri="{FF2B5EF4-FFF2-40B4-BE49-F238E27FC236}">
-                <a16:creationId xmlns:a16="http://schemas.microsoft.com/office/drawing/2014/main" id="{8A12D990-09B6-4947-93E1-2C8CECF279A6}"/>
+                <a16:creationId xmlns:a16="http://schemas.microsoft.com/office/drawing/2014/main" id="{F9F8C748-4796-4159-8D4A-49D3293270F1}"/>
               </a:ext>
             </a:extLst>
           </p:cNvPr>
@@ -37374,7 +37374,7 @@
           <p:cNvPr id="16" name="이미지 계약">
             <a:extLst xmlns:a="http://schemas.openxmlformats.org/drawingml/2006/main">
               <a:ext uri="{FF2B5EF4-FFF2-40B4-BE49-F238E27FC236}">
-                <a16:creationId xmlns:a16="http://schemas.microsoft.com/office/drawing/2014/main" id="{F938C6A1-EFE1-4BC8-9D43-AFC7322B693F}"/>
+                <a16:creationId xmlns:a16="http://schemas.microsoft.com/office/drawing/2014/main" id="{EC9D0D28-E0D9-4AAA-B8CC-90F64510C268}"/>
               </a:ext>
             </a:extLst>
           </p:cNvPr>
@@ -37532,7 +37532,7 @@
           <p:cNvPr id="17" name="crop: [x_start, x_end)">
             <a:extLst xmlns:a="http://schemas.openxmlformats.org/drawingml/2006/main">
               <a:ext uri="{FF2B5EF4-FFF2-40B4-BE49-F238E27FC236}">
-                <a16:creationId xmlns:a16="http://schemas.microsoft.com/office/drawing/2014/main" id="{C54741AD-F773-48FB-9F5F-ECF666BF6B68}"/>
+                <a16:creationId xmlns:a16="http://schemas.microsoft.com/office/drawing/2014/main" id="{A0DEF1BF-089E-4D51-BA47-DD1CECE2D53F}"/>
               </a:ext>
             </a:extLst>
           </p:cNvPr>
@@ -37690,7 +37690,7 @@
           <p:cNvPr id="18" name="">
             <a:extLst xmlns:a="http://schemas.openxmlformats.org/drawingml/2006/main">
               <a:ext uri="{FF2B5EF4-FFF2-40B4-BE49-F238E27FC236}">
-                <a16:creationId xmlns:a16="http://schemas.microsoft.com/office/drawing/2014/main" id="{F3321A30-CFE0-4129-8565-EDB515A18F96}"/>
+                <a16:creationId xmlns:a16="http://schemas.microsoft.com/office/drawing/2014/main" id="{98623167-80A1-4DC2-AB94-7F7041F88B50}"/>
               </a:ext>
             </a:extLst>
           </p:cNvPr>
@@ -37721,7 +37721,7 @@
           <p:cNvPr id="19" name="테스트 구조">
             <a:extLst xmlns:a="http://schemas.openxmlformats.org/drawingml/2006/main">
               <a:ext uri="{FF2B5EF4-FFF2-40B4-BE49-F238E27FC236}">
-                <a16:creationId xmlns:a16="http://schemas.microsoft.com/office/drawing/2014/main" id="{63B27F2D-0A87-41C0-AE49-C8ABC9CA5271}"/>
+                <a16:creationId xmlns:a16="http://schemas.microsoft.com/office/drawing/2014/main" id="{989414E1-3703-4B79-A9C8-34A86320E68A}"/>
               </a:ext>
             </a:extLst>
           </p:cNvPr>
@@ -37879,7 +37879,7 @@
           <p:cNvPr id="20" name="tests/test_pipeline.py">
             <a:extLst xmlns:a="http://schemas.openxmlformats.org/drawingml/2006/main">
               <a:ext uri="{FF2B5EF4-FFF2-40B4-BE49-F238E27FC236}">
-                <a16:creationId xmlns:a16="http://schemas.microsoft.com/office/drawing/2014/main" id="{3DCE8FA0-4C58-4DC8-903E-550B6BDCFA39}"/>
+                <a16:creationId xmlns:a16="http://schemas.microsoft.com/office/drawing/2014/main" id="{C9B5D153-CC6D-4693-AFAC-4BE49FD9A1CD}"/>
               </a:ext>
             </a:extLst>
           </p:cNvPr>
@@ -38037,7 +38037,7 @@
           <p:cNvPr id="21" name="">
             <a:extLst xmlns:a="http://schemas.openxmlformats.org/drawingml/2006/main">
               <a:ext uri="{FF2B5EF4-FFF2-40B4-BE49-F238E27FC236}">
-                <a16:creationId xmlns:a16="http://schemas.microsoft.com/office/drawing/2014/main" id="{5544379A-2DF8-4A8A-9720-066C715723F7}"/>
+                <a16:creationId xmlns:a16="http://schemas.microsoft.com/office/drawing/2014/main" id="{0D26240C-AAE1-46D3-BA91-381D6D19226A}"/>
               </a:ext>
             </a:extLst>
           </p:cNvPr>
@@ -38068,7 +38068,7 @@
           <p:cNvPr id="22" name="CLI 출력">
             <a:extLst xmlns:a="http://schemas.openxmlformats.org/drawingml/2006/main">
               <a:ext uri="{FF2B5EF4-FFF2-40B4-BE49-F238E27FC236}">
-                <a16:creationId xmlns:a16="http://schemas.microsoft.com/office/drawing/2014/main" id="{AB282F90-DA8F-4E15-BBD7-51C912B98248}"/>
+                <a16:creationId xmlns:a16="http://schemas.microsoft.com/office/drawing/2014/main" id="{272C7178-A64D-46B2-9DAA-27466912491D}"/>
               </a:ext>
             </a:extLst>
           </p:cNvPr>
@@ -38226,7 +38226,7 @@
           <p:cNvPr id="23" name="width · height · pixel_count …">
             <a:extLst xmlns:a="http://schemas.openxmlformats.org/drawingml/2006/main">
               <a:ext uri="{FF2B5EF4-FFF2-40B4-BE49-F238E27FC236}">
-                <a16:creationId xmlns:a16="http://schemas.microsoft.com/office/drawing/2014/main" id="{40AE1C97-9B1B-4CD6-A530-DB76761AD8CF}"/>
+                <a16:creationId xmlns:a16="http://schemas.microsoft.com/office/drawing/2014/main" id="{613E6E63-64BB-4034-B3DB-52521786B326}"/>
               </a:ext>
             </a:extLst>
           </p:cNvPr>
@@ -38384,7 +38384,7 @@
           <p:cNvPr id="24" name="32줄 · 1,303 bytes">
             <a:extLst xmlns:a="http://schemas.openxmlformats.org/drawingml/2006/main">
               <a:ext uri="{FF2B5EF4-FFF2-40B4-BE49-F238E27FC236}">
-                <a16:creationId xmlns:a16="http://schemas.microsoft.com/office/drawing/2014/main" id="{7A5A97A7-4E8B-41E5-AD9E-E9010A548B67}"/>
+                <a16:creationId xmlns:a16="http://schemas.microsoft.com/office/drawing/2014/main" id="{D438F208-4CBB-4F30-BA17-DAEBDC03ECE8}"/>
               </a:ext>
             </a:extLst>
           </p:cNvPr>
@@ -38542,7 +38542,7 @@
           <p:cNvPr id="25" name="이번 Task에도 필요할까?">
             <a:extLst xmlns:a="http://schemas.openxmlformats.org/drawingml/2006/main">
               <a:ext uri="{FF2B5EF4-FFF2-40B4-BE49-F238E27FC236}">
-                <a16:creationId xmlns:a16="http://schemas.microsoft.com/office/drawing/2014/main" id="{9D0588BF-43DE-416C-85B8-0D3F088F9512}"/>
+                <a16:creationId xmlns:a16="http://schemas.microsoft.com/office/drawing/2014/main" id="{C547E1FF-A929-4575-95EA-E2F55EF32470}"/>
               </a:ext>
             </a:extLst>
           </p:cNvPr>
@@ -38700,7 +38700,7 @@
           <p:cNvPr id="26" name="Legacy module connection">
             <a:extLst xmlns:a="http://schemas.openxmlformats.org/drawingml/2006/main">
               <a:ext uri="{FF2B5EF4-FFF2-40B4-BE49-F238E27FC236}">
-                <a16:creationId xmlns:a16="http://schemas.microsoft.com/office/drawing/2014/main" id="{EACFF834-11D3-4093-B92A-6DD95B36B6BE}"/>
+                <a16:creationId xmlns:a16="http://schemas.microsoft.com/office/drawing/2014/main" id="{50721512-6B70-4529-BC54-C666AFC726E5}"/>
               </a:ext>
             </a:extLst>
           </p:cNvPr>
@@ -38856,7 +38856,7 @@
     </p:spTree>
     <p:extLst>
       <p:ext uri="{BB962C8B-B14F-4D97-AF65-F5344CB8AC3E}">
-        <p14:creationId xmlns:p14="http://schemas.microsoft.com/office/powerpoint/2010/main" val="649155487"/>
+        <p14:creationId xmlns:p14="http://schemas.microsoft.com/office/powerpoint/2010/main" val="533264254"/>
       </p:ext>
     </p:extLst>
   </p:cSld>
@@ -38887,7 +38887,7 @@
           <p:cNvPr id="17" name="ACT 2 · 관련성을 확인하기">
             <a:extLst xmlns:a="http://schemas.openxmlformats.org/drawingml/2006/main">
               <a:ext uri="{FF2B5EF4-FFF2-40B4-BE49-F238E27FC236}">
-                <a16:creationId xmlns:a16="http://schemas.microsoft.com/office/drawing/2014/main" id="{BA60A74B-9FE1-4A38-939C-E234BCA354C8}"/>
+                <a16:creationId xmlns:a16="http://schemas.microsoft.com/office/drawing/2014/main" id="{586BCBB9-F055-49CF-BC2B-7714102BEE6D}"/>
               </a:ext>
             </a:extLst>
           </p:cNvPr>
@@ -39042,10 +39042,10 @@
       </p:sp>
       <p:sp>
         <p:nvSpPr>
-          <p:cNvPr id="2" name="S29">
+          <p:cNvPr id="2" name="S37">
             <a:extLst xmlns:a="http://schemas.openxmlformats.org/drawingml/2006/main">
               <a:ext uri="{FF2B5EF4-FFF2-40B4-BE49-F238E27FC236}">
-                <a16:creationId xmlns:a16="http://schemas.microsoft.com/office/drawing/2014/main" id="{0BEEA1F5-042D-4227-BB9D-536A1A530F5C}"/>
+                <a16:creationId xmlns:a16="http://schemas.microsoft.com/office/drawing/2014/main" id="{D50AB93F-48AA-46EB-A4F6-D7F5E573A08E}"/>
               </a:ext>
             </a:extLst>
           </p:cNvPr>
@@ -39193,7 +39193,7 @@
                 <a:ea typeface="Malgun Gothic"/>
                 <a:cs typeface="Malgun Gothic"/>
               </a:rPr>
-              <a:t>S29</a:t>
+              <a:t>S37</a:t>
             </a:r>
           </a:p>
         </p:txBody>
@@ -39203,7 +39203,7 @@
           <p:cNvPr id="3" name="정확하지만 이번 Task에는 불필요한 정보">
             <a:extLst xmlns:a="http://schemas.openxmlformats.org/drawingml/2006/main">
               <a:ext uri="{FF2B5EF4-FFF2-40B4-BE49-F238E27FC236}">
-                <a16:creationId xmlns:a16="http://schemas.microsoft.com/office/drawing/2014/main" id="{B3647C86-E620-4D7F-998C-73FC8C4DFE27}"/>
+                <a16:creationId xmlns:a16="http://schemas.microsoft.com/office/drawing/2014/main" id="{1BB52CA4-936C-4BF9-A77B-8C416EEFA287}"/>
               </a:ext>
             </a:extLst>
           </p:cNvPr>
@@ -39361,7 +39361,7 @@
           <p:cNvPr id="4" name="">
             <a:extLst xmlns:a="http://schemas.openxmlformats.org/drawingml/2006/main">
               <a:ext uri="{FF2B5EF4-FFF2-40B4-BE49-F238E27FC236}">
-                <a16:creationId xmlns:a16="http://schemas.microsoft.com/office/drawing/2014/main" id="{1F77B39E-F96D-4938-9DF9-71DA7145F63A}"/>
+                <a16:creationId xmlns:a16="http://schemas.microsoft.com/office/drawing/2014/main" id="{CB2A9ADC-91E4-4ADF-94BF-212925164717}"/>
               </a:ext>
             </a:extLst>
           </p:cNvPr>
@@ -39392,7 +39392,7 @@
           <p:cNvPr id="5" name="TRIAL-004 · README의 build tools 안내를 명확히 하는 작업">
             <a:extLst xmlns:a="http://schemas.openxmlformats.org/drawingml/2006/main">
               <a:ext uri="{FF2B5EF4-FFF2-40B4-BE49-F238E27FC236}">
-                <a16:creationId xmlns:a16="http://schemas.microsoft.com/office/drawing/2014/main" id="{004E45D6-947B-4A18-BBFA-6BD3D1AE3FAF}"/>
+                <a16:creationId xmlns:a16="http://schemas.microsoft.com/office/drawing/2014/main" id="{D72D5240-A136-4922-A6FE-CD608A0BE751}"/>
               </a:ext>
             </a:extLst>
           </p:cNvPr>
@@ -39550,7 +39550,7 @@
           <p:cNvPr id="6" name="Agent 혼란과 Context 관련 실패는 관찰되지 않았다">
             <a:extLst xmlns:a="http://schemas.openxmlformats.org/drawingml/2006/main">
               <a:ext uri="{FF2B5EF4-FFF2-40B4-BE49-F238E27FC236}">
-                <a16:creationId xmlns:a16="http://schemas.microsoft.com/office/drawing/2014/main" id="{039AFD3D-9268-421F-896C-7A0792966CAB}"/>
+                <a16:creationId xmlns:a16="http://schemas.microsoft.com/office/drawing/2014/main" id="{340B20E4-BF28-4E1B-8E2A-9E781BD49F60}"/>
               </a:ext>
             </a:extLst>
           </p:cNvPr>
@@ -39708,7 +39708,7 @@
           <p:cNvPr id="7" name="작업: README의 빌드 도구 안내를 고친다">
             <a:extLst xmlns:a="http://schemas.openxmlformats.org/drawingml/2006/main">
               <a:ext uri="{FF2B5EF4-FFF2-40B4-BE49-F238E27FC236}">
-                <a16:creationId xmlns:a16="http://schemas.microsoft.com/office/drawing/2014/main" id="{CB1CEFF0-7C15-4708-A0BE-BD23E1EA8ECD}"/>
+                <a16:creationId xmlns:a16="http://schemas.microsoft.com/office/drawing/2014/main" id="{C9A74AC1-9A0C-46D6-BFEA-A101A9C1E2A5}"/>
               </a:ext>
             </a:extLst>
           </p:cNvPr>
@@ -39866,7 +39866,7 @@
           <p:cNvPr id="8" name="이번 질문과 직접 관련">
             <a:extLst xmlns:a="http://schemas.openxmlformats.org/drawingml/2006/main">
               <a:ext uri="{FF2B5EF4-FFF2-40B4-BE49-F238E27FC236}">
-                <a16:creationId xmlns:a16="http://schemas.microsoft.com/office/drawing/2014/main" id="{AB8BFB26-AAE1-48DD-935D-21CDF7D91D1D}"/>
+                <a16:creationId xmlns:a16="http://schemas.microsoft.com/office/drawing/2014/main" id="{FA9F3C03-67FA-465C-B8BA-9A7EB21B7128}"/>
               </a:ext>
             </a:extLst>
           </p:cNvPr>
@@ -40024,7 +40024,7 @@
           <p:cNvPr id="9" name="함께 있었지만 관련이 낮은 정보">
             <a:extLst xmlns:a="http://schemas.openxmlformats.org/drawingml/2006/main">
               <a:ext uri="{FF2B5EF4-FFF2-40B4-BE49-F238E27FC236}">
-                <a16:creationId xmlns:a16="http://schemas.microsoft.com/office/drawing/2014/main" id="{847AEF8D-694B-432B-B9C9-080468D8654D}"/>
+                <a16:creationId xmlns:a16="http://schemas.microsoft.com/office/drawing/2014/main" id="{88A0C49D-816A-4CDA-B2E6-84A00A8BDF57}"/>
               </a:ext>
             </a:extLst>
           </p:cNvPr>
@@ -40182,7 +40182,7 @@
           <p:cNvPr id="10" name="">
             <a:extLst xmlns:a="http://schemas.openxmlformats.org/drawingml/2006/main">
               <a:ext uri="{FF2B5EF4-FFF2-40B4-BE49-F238E27FC236}">
-                <a16:creationId xmlns:a16="http://schemas.microsoft.com/office/drawing/2014/main" id="{58926CD2-CA53-44C0-8A85-86207A91EA28}"/>
+                <a16:creationId xmlns:a16="http://schemas.microsoft.com/office/drawing/2014/main" id="{2FBB20E5-33FE-4F3D-9FDD-CC88E74B8A1F}"/>
               </a:ext>
             </a:extLst>
           </p:cNvPr>
@@ -40213,7 +40213,7 @@
           <p:cNvPr id="11" name="">
             <a:extLst xmlns:a="http://schemas.openxmlformats.org/drawingml/2006/main">
               <a:ext uri="{FF2B5EF4-FFF2-40B4-BE49-F238E27FC236}">
-                <a16:creationId xmlns:a16="http://schemas.microsoft.com/office/drawing/2014/main" id="{71CC3813-961A-4EAC-94DA-68BFE875A817}"/>
+                <a16:creationId xmlns:a16="http://schemas.microsoft.com/office/drawing/2014/main" id="{DDFAE7F2-22F3-44D9-AA53-B404F860CD88}"/>
               </a:ext>
             </a:extLst>
           </p:cNvPr>
@@ -40244,7 +40244,7 @@
           <p:cNvPr id="12" name="">
             <a:extLst xmlns:a="http://schemas.openxmlformats.org/drawingml/2006/main">
               <a:ext uri="{FF2B5EF4-FFF2-40B4-BE49-F238E27FC236}">
-                <a16:creationId xmlns:a16="http://schemas.microsoft.com/office/drawing/2014/main" id="{D775FF71-D8D3-40E2-A254-5905A63C59D6}"/>
+                <a16:creationId xmlns:a16="http://schemas.microsoft.com/office/drawing/2014/main" id="{AC37F22B-86D0-4C1B-860F-8FD440DCDCD0}"/>
               </a:ext>
             </a:extLst>
           </p:cNvPr>
@@ -40275,7 +40275,7 @@
           <p:cNvPr id="13" name="README&#10;pyproject.toml의 빌드 설정">
             <a:extLst xmlns:a="http://schemas.openxmlformats.org/drawingml/2006/main">
               <a:ext uri="{FF2B5EF4-FFF2-40B4-BE49-F238E27FC236}">
-                <a16:creationId xmlns:a16="http://schemas.microsoft.com/office/drawing/2014/main" id="{9930D8EB-8275-4793-8A13-44EFB3F3FDA6}"/>
+                <a16:creationId xmlns:a16="http://schemas.microsoft.com/office/drawing/2014/main" id="{F3D80731-AFAE-4080-B3CC-7EB6F8118C65}"/>
               </a:ext>
             </a:extLst>
           </p:cNvPr>
@@ -40456,7 +40456,7 @@
           <p:cNvPr id="14" name="crop / resize 계약&#10;이미지 처리 pipeline 세부사항">
             <a:extLst xmlns:a="http://schemas.openxmlformats.org/drawingml/2006/main">
               <a:ext uri="{FF2B5EF4-FFF2-40B4-BE49-F238E27FC236}">
-                <a16:creationId xmlns:a16="http://schemas.microsoft.com/office/drawing/2014/main" id="{9FBEBDAA-4C8E-4114-AEDF-24E720F2F36B}"/>
+                <a16:creationId xmlns:a16="http://schemas.microsoft.com/office/drawing/2014/main" id="{14BF5DCA-001D-41B1-88F6-9D41F786C71E}"/>
               </a:ext>
             </a:extLst>
           </p:cNvPr>
@@ -40637,7 +40637,7 @@
           <p:cNvPr id="15" name="정확한 정보라도, 모든 질문에 필요한 것은 아니다">
             <a:extLst xmlns:a="http://schemas.openxmlformats.org/drawingml/2006/main">
               <a:ext uri="{FF2B5EF4-FFF2-40B4-BE49-F238E27FC236}">
-                <a16:creationId xmlns:a16="http://schemas.microsoft.com/office/drawing/2014/main" id="{FCD20457-5927-4A21-93D9-53A39F48BE76}"/>
+                <a16:creationId xmlns:a16="http://schemas.microsoft.com/office/drawing/2014/main" id="{E25AE782-E782-448A-AD3F-A3CD3F30A18C}"/>
               </a:ext>
             </a:extLst>
           </p:cNvPr>
@@ -40795,7 +40795,7 @@
           <p:cNvPr id="16" name="Legacy module connection">
             <a:extLst xmlns:a="http://schemas.openxmlformats.org/drawingml/2006/main">
               <a:ext uri="{FF2B5EF4-FFF2-40B4-BE49-F238E27FC236}">
-                <a16:creationId xmlns:a16="http://schemas.microsoft.com/office/drawing/2014/main" id="{B41ADE80-D6D0-4628-9B09-6A427469174C}"/>
+                <a16:creationId xmlns:a16="http://schemas.microsoft.com/office/drawing/2014/main" id="{EFC567FE-BACB-4CC4-89F2-BE1877513048}"/>
               </a:ext>
             </a:extLst>
           </p:cNvPr>
@@ -40951,7 +40951,7 @@
     </p:spTree>
     <p:extLst>
       <p:ext uri="{BB962C8B-B14F-4D97-AF65-F5344CB8AC3E}">
-        <p14:creationId xmlns:p14="http://schemas.microsoft.com/office/powerpoint/2010/main" val="1752223276"/>
+        <p14:creationId xmlns:p14="http://schemas.microsoft.com/office/powerpoint/2010/main" val="1863675344"/>
       </p:ext>
     </p:extLst>
   </p:cSld>
@@ -40982,7 +40982,7 @@
           <p:cNvPr id="20" name="ACT 2 · 언제 필요한 정보인가">
             <a:extLst xmlns:a="http://schemas.openxmlformats.org/drawingml/2006/main">
               <a:ext uri="{FF2B5EF4-FFF2-40B4-BE49-F238E27FC236}">
-                <a16:creationId xmlns:a16="http://schemas.microsoft.com/office/drawing/2014/main" id="{C799C139-460B-4845-8E25-10D3BDCC792E}"/>
+                <a16:creationId xmlns:a16="http://schemas.microsoft.com/office/drawing/2014/main" id="{CC9CB057-CEF0-40E2-9715-7584E5071BCE}"/>
               </a:ext>
             </a:extLst>
           </p:cNvPr>
@@ -41137,10 +41137,10 @@
       </p:sp>
       <p:sp>
         <p:nvSpPr>
-          <p:cNvPr id="2" name="S30">
+          <p:cNvPr id="2" name="S38">
             <a:extLst xmlns:a="http://schemas.openxmlformats.org/drawingml/2006/main">
               <a:ext uri="{FF2B5EF4-FFF2-40B4-BE49-F238E27FC236}">
-                <a16:creationId xmlns:a16="http://schemas.microsoft.com/office/drawing/2014/main" id="{5A1CA48B-DBD9-4319-8D2D-EAFA5D147BCF}"/>
+                <a16:creationId xmlns:a16="http://schemas.microsoft.com/office/drawing/2014/main" id="{5EE8507A-D406-402E-B022-AA9323DBB29E}"/>
               </a:ext>
             </a:extLst>
           </p:cNvPr>
@@ -41288,7 +41288,7 @@
                 <a:ea typeface="Malgun Gothic"/>
                 <a:cs typeface="Malgun Gothic"/>
               </a:rPr>
-              <a:t>S30</a:t>
+              <a:t>S38</a:t>
             </a:r>
           </a:p>
         </p:txBody>
@@ -41298,7 +41298,7 @@
           <p:cNvPr id="3" name="정보의 범위와 제공 시점">
             <a:extLst xmlns:a="http://schemas.openxmlformats.org/drawingml/2006/main">
               <a:ext uri="{FF2B5EF4-FFF2-40B4-BE49-F238E27FC236}">
-                <a16:creationId xmlns:a16="http://schemas.microsoft.com/office/drawing/2014/main" id="{8EBEB1EF-6888-42CC-B06C-2A76CF8E9B9A}"/>
+                <a16:creationId xmlns:a16="http://schemas.microsoft.com/office/drawing/2014/main" id="{60C97437-0FF3-46B6-AC63-E0AC3D37171B}"/>
               </a:ext>
             </a:extLst>
           </p:cNvPr>
@@ -41456,7 +41456,7 @@
           <p:cNvPr id="4" name="">
             <a:extLst xmlns:a="http://schemas.openxmlformats.org/drawingml/2006/main">
               <a:ext uri="{FF2B5EF4-FFF2-40B4-BE49-F238E27FC236}">
-                <a16:creationId xmlns:a16="http://schemas.microsoft.com/office/drawing/2014/main" id="{5C224DDE-BEEE-470D-B586-40CF6E192DFF}"/>
+                <a16:creationId xmlns:a16="http://schemas.microsoft.com/office/drawing/2014/main" id="{196900AA-1058-40F4-9727-B8E6E16CBFF2}"/>
               </a:ext>
             </a:extLst>
           </p:cNvPr>
@@ -41487,7 +41487,7 @@
           <p:cNvPr id="5" name="교육용 분류 모델 · OpenAI의 공식 기능 분류가 아님">
             <a:extLst xmlns:a="http://schemas.openxmlformats.org/drawingml/2006/main">
               <a:ext uri="{FF2B5EF4-FFF2-40B4-BE49-F238E27FC236}">
-                <a16:creationId xmlns:a16="http://schemas.microsoft.com/office/drawing/2014/main" id="{376F206B-20A7-42D9-815F-431C9FC4448C}"/>
+                <a16:creationId xmlns:a16="http://schemas.microsoft.com/office/drawing/2014/main" id="{73AC593C-F26C-466A-A744-1E1CA6A37DF4}"/>
               </a:ext>
             </a:extLst>
           </p:cNvPr>
@@ -41645,7 +41645,7 @@
           <p:cNvPr id="6" name="성능 조사 절차는 설명을 위한 예시이며 STATE-02에 저장돼 있었다는 뜻이 아님">
             <a:extLst xmlns:a="http://schemas.openxmlformats.org/drawingml/2006/main">
               <a:ext uri="{FF2B5EF4-FFF2-40B4-BE49-F238E27FC236}">
-                <a16:creationId xmlns:a16="http://schemas.microsoft.com/office/drawing/2014/main" id="{6C4B2FDF-7633-4FB3-84D6-2BC798ADBB59}"/>
+                <a16:creationId xmlns:a16="http://schemas.microsoft.com/office/drawing/2014/main" id="{CE41F7AB-CE23-4561-90AA-18452A64DD8A}"/>
               </a:ext>
             </a:extLst>
           </p:cNvPr>
@@ -41803,7 +41803,7 @@
           <p:cNvPr id="7" name="">
             <a:extLst xmlns:a="http://schemas.openxmlformats.org/drawingml/2006/main">
               <a:ext uri="{FF2B5EF4-FFF2-40B4-BE49-F238E27FC236}">
-                <a16:creationId xmlns:a16="http://schemas.microsoft.com/office/drawing/2014/main" id="{777DC095-7868-41D8-9C56-BD2853063D36}"/>
+                <a16:creationId xmlns:a16="http://schemas.microsoft.com/office/drawing/2014/main" id="{E5031754-656E-4386-96D2-61C697A7D48F}"/>
               </a:ext>
             </a:extLst>
           </p:cNvPr>
@@ -41834,7 +41834,7 @@
           <p:cNvPr id="8" name="항상 알아야 할 안내">
             <a:extLst xmlns:a="http://schemas.openxmlformats.org/drawingml/2006/main">
               <a:ext uri="{FF2B5EF4-FFF2-40B4-BE49-F238E27FC236}">
-                <a16:creationId xmlns:a16="http://schemas.microsoft.com/office/drawing/2014/main" id="{0B112C6C-189E-4AF1-BD90-F0D6A0801B84}"/>
+                <a16:creationId xmlns:a16="http://schemas.microsoft.com/office/drawing/2014/main" id="{D6EF15F9-38A7-43FD-B831-D44EF968BD8A}"/>
               </a:ext>
             </a:extLst>
           </p:cNvPr>
@@ -41992,7 +41992,7 @@
           <p:cNvPr id="9" name="프로젝트 목적 · 기본 제약">
             <a:extLst xmlns:a="http://schemas.openxmlformats.org/drawingml/2006/main">
               <a:ext uri="{FF2B5EF4-FFF2-40B4-BE49-F238E27FC236}">
-                <a16:creationId xmlns:a16="http://schemas.microsoft.com/office/drawing/2014/main" id="{9C92B6E3-71D9-4EA1-B5F9-9DC080ACC39C}"/>
+                <a16:creationId xmlns:a16="http://schemas.microsoft.com/office/drawing/2014/main" id="{D90B6140-55BF-4B8E-B077-12DF744128FD}"/>
               </a:ext>
             </a:extLst>
           </p:cNvPr>
@@ -42150,7 +42150,7 @@
           <p:cNvPr id="10" name="ALWAYS-ON">
             <a:extLst xmlns:a="http://schemas.openxmlformats.org/drawingml/2006/main">
               <a:ext uri="{FF2B5EF4-FFF2-40B4-BE49-F238E27FC236}">
-                <a16:creationId xmlns:a16="http://schemas.microsoft.com/office/drawing/2014/main" id="{0AB0C1B4-55D2-4A23-AEFE-65C7A6417DA4}"/>
+                <a16:creationId xmlns:a16="http://schemas.microsoft.com/office/drawing/2014/main" id="{1E508521-27F5-4CF6-82CE-BAD20D0D2E8A}"/>
               </a:ext>
             </a:extLst>
           </p:cNvPr>
@@ -42308,7 +42308,7 @@
           <p:cNvPr id="11" name="">
             <a:extLst xmlns:a="http://schemas.openxmlformats.org/drawingml/2006/main">
               <a:ext uri="{FF2B5EF4-FFF2-40B4-BE49-F238E27FC236}">
-                <a16:creationId xmlns:a16="http://schemas.microsoft.com/office/drawing/2014/main" id="{47DAB3D7-987F-49C9-A916-3F1032F32160}"/>
+                <a16:creationId xmlns:a16="http://schemas.microsoft.com/office/drawing/2014/main" id="{35506272-891B-4183-B830-DB14CF08672A}"/>
               </a:ext>
             </a:extLst>
           </p:cNvPr>
@@ -42339,7 +42339,7 @@
           <p:cNvPr id="12" name="질문에 따라 찾아볼 상세">
             <a:extLst xmlns:a="http://schemas.openxmlformats.org/drawingml/2006/main">
               <a:ext uri="{FF2B5EF4-FFF2-40B4-BE49-F238E27FC236}">
-                <a16:creationId xmlns:a16="http://schemas.microsoft.com/office/drawing/2014/main" id="{9A5F14DC-1486-4C2C-8717-5E50FE4AB621}"/>
+                <a16:creationId xmlns:a16="http://schemas.microsoft.com/office/drawing/2014/main" id="{D96EDA47-40E2-40F2-83BB-4022E67E86F1}"/>
               </a:ext>
             </a:extLst>
           </p:cNvPr>
@@ -42497,7 +42497,7 @@
           <p:cNvPr id="13" name="crop 계약 · 모듈 구조">
             <a:extLst xmlns:a="http://schemas.openxmlformats.org/drawingml/2006/main">
               <a:ext uri="{FF2B5EF4-FFF2-40B4-BE49-F238E27FC236}">
-                <a16:creationId xmlns:a16="http://schemas.microsoft.com/office/drawing/2014/main" id="{486EC4FF-1DAC-4060-8580-93BD51904518}"/>
+                <a16:creationId xmlns:a16="http://schemas.microsoft.com/office/drawing/2014/main" id="{11B8E7BF-AAD0-484A-8DF3-90AA06795A21}"/>
               </a:ext>
             </a:extLst>
           </p:cNvPr>
@@ -42655,7 +42655,7 @@
           <p:cNvPr id="14" name="ON-DEMAND">
             <a:extLst xmlns:a="http://schemas.openxmlformats.org/drawingml/2006/main">
               <a:ext uri="{FF2B5EF4-FFF2-40B4-BE49-F238E27FC236}">
-                <a16:creationId xmlns:a16="http://schemas.microsoft.com/office/drawing/2014/main" id="{222F3500-9D07-4B50-87B9-D35CF69525F8}"/>
+                <a16:creationId xmlns:a16="http://schemas.microsoft.com/office/drawing/2014/main" id="{115778E6-0DD4-4946-9ADB-73C290BE6289}"/>
               </a:ext>
             </a:extLst>
           </p:cNvPr>
@@ -42813,7 +42813,7 @@
           <p:cNvPr id="15" name="">
             <a:extLst xmlns:a="http://schemas.openxmlformats.org/drawingml/2006/main">
               <a:ext uri="{FF2B5EF4-FFF2-40B4-BE49-F238E27FC236}">
-                <a16:creationId xmlns:a16="http://schemas.microsoft.com/office/drawing/2014/main" id="{5408687C-06DD-479A-BD91-AC15B2B46B2A}"/>
+                <a16:creationId xmlns:a16="http://schemas.microsoft.com/office/drawing/2014/main" id="{B77FA98A-02D2-415C-B8C9-3F657AD83AB0}"/>
               </a:ext>
             </a:extLst>
           </p:cNvPr>
@@ -42844,7 +42844,7 @@
           <p:cNvPr id="16" name="이런 일을 수행하는 방법">
             <a:extLst xmlns:a="http://schemas.openxmlformats.org/drawingml/2006/main">
               <a:ext uri="{FF2B5EF4-FFF2-40B4-BE49-F238E27FC236}">
-                <a16:creationId xmlns:a16="http://schemas.microsoft.com/office/drawing/2014/main" id="{9DE5B00E-3C28-4E47-842D-AB307B0FF00A}"/>
+                <a16:creationId xmlns:a16="http://schemas.microsoft.com/office/drawing/2014/main" id="{C6228961-C7C9-4C85-8AD0-C9C01455059C}"/>
               </a:ext>
             </a:extLst>
           </p:cNvPr>
@@ -43002,7 +43002,7 @@
           <p:cNvPr id="17" name="변경 전 측정 → 조사 → 검증">
             <a:extLst xmlns:a="http://schemas.openxmlformats.org/drawingml/2006/main">
               <a:ext uri="{FF2B5EF4-FFF2-40B4-BE49-F238E27FC236}">
-                <a16:creationId xmlns:a16="http://schemas.microsoft.com/office/drawing/2014/main" id="{18DCA656-CD64-4452-900F-08DF3AFCDB6A}"/>
+                <a16:creationId xmlns:a16="http://schemas.microsoft.com/office/drawing/2014/main" id="{3120F62D-8F30-47CA-9970-DAC14054A5DD}"/>
               </a:ext>
             </a:extLst>
           </p:cNvPr>
@@ -43160,7 +43160,7 @@
           <p:cNvPr id="18" name="WORKFLOW">
             <a:extLst xmlns:a="http://schemas.openxmlformats.org/drawingml/2006/main">
               <a:ext uri="{FF2B5EF4-FFF2-40B4-BE49-F238E27FC236}">
-                <a16:creationId xmlns:a16="http://schemas.microsoft.com/office/drawing/2014/main" id="{CDF5EC49-7E6A-4C99-992E-8DD25E99F412}"/>
+                <a16:creationId xmlns:a16="http://schemas.microsoft.com/office/drawing/2014/main" id="{4C9D711A-3B59-4B48-AACD-2E17908E1E2D}"/>
               </a:ext>
             </a:extLst>
           </p:cNvPr>
@@ -43318,7 +43318,7 @@
           <p:cNvPr id="19" name="Legacy module connection">
             <a:extLst xmlns:a="http://schemas.openxmlformats.org/drawingml/2006/main">
               <a:ext uri="{FF2B5EF4-FFF2-40B4-BE49-F238E27FC236}">
-                <a16:creationId xmlns:a16="http://schemas.microsoft.com/office/drawing/2014/main" id="{7B5B132F-2EE7-420D-8EEB-92FBE5F9A4CE}"/>
+                <a16:creationId xmlns:a16="http://schemas.microsoft.com/office/drawing/2014/main" id="{836A9727-9052-4279-B6A3-2AE29363D032}"/>
               </a:ext>
             </a:extLst>
           </p:cNvPr>
@@ -43474,7 +43474,7 @@
     </p:spTree>
     <p:extLst>
       <p:ext uri="{BB962C8B-B14F-4D97-AF65-F5344CB8AC3E}">
-        <p14:creationId xmlns:p14="http://schemas.microsoft.com/office/powerpoint/2010/main" val="1394434875"/>
+        <p14:creationId xmlns:p14="http://schemas.microsoft.com/office/powerpoint/2010/main" val="1336713854"/>
       </p:ext>
     </p:extLst>
   </p:cSld>
@@ -43505,7 +43505,7 @@
           <p:cNvPr id="38" name="ACT 2 · 정보의 양을 다시 묻는 연구">
             <a:extLst xmlns:a="http://schemas.openxmlformats.org/drawingml/2006/main">
               <a:ext uri="{FF2B5EF4-FFF2-40B4-BE49-F238E27FC236}">
-                <a16:creationId xmlns:a16="http://schemas.microsoft.com/office/drawing/2014/main" id="{425BB323-B1F3-4994-8B43-806E9CF02F57}"/>
+                <a16:creationId xmlns:a16="http://schemas.microsoft.com/office/drawing/2014/main" id="{7C128BB3-5EB7-455E-8DDF-F3FAA44D9740}"/>
               </a:ext>
             </a:extLst>
           </p:cNvPr>
@@ -43660,10 +43660,10 @@
       </p:sp>
       <p:sp>
         <p:nvSpPr>
-          <p:cNvPr id="2" name="S31">
+          <p:cNvPr id="2" name="S39">
             <a:extLst xmlns:a="http://schemas.openxmlformats.org/drawingml/2006/main">
               <a:ext uri="{FF2B5EF4-FFF2-40B4-BE49-F238E27FC236}">
-                <a16:creationId xmlns:a16="http://schemas.microsoft.com/office/drawing/2014/main" id="{7C977493-1307-4323-9284-F7CAF6133F11}"/>
+                <a16:creationId xmlns:a16="http://schemas.microsoft.com/office/drawing/2014/main" id="{E4600FBA-5C28-44FF-9655-F94680B851EB}"/>
               </a:ext>
             </a:extLst>
           </p:cNvPr>
@@ -43811,7 +43811,7 @@
                 <a:ea typeface="Malgun Gothic"/>
                 <a:cs typeface="Malgun Gothic"/>
               </a:rPr>
-              <a:t>S31</a:t>
+              <a:t>S39</a:t>
             </a:r>
           </a:p>
         </p:txBody>
@@ -43821,7 +43821,7 @@
           <p:cNvPr id="3" name="Long Context 연구가 말해주는 범위">
             <a:extLst xmlns:a="http://schemas.openxmlformats.org/drawingml/2006/main">
               <a:ext uri="{FF2B5EF4-FFF2-40B4-BE49-F238E27FC236}">
-                <a16:creationId xmlns:a16="http://schemas.microsoft.com/office/drawing/2014/main" id="{702852F1-E955-4DD5-8B3A-B9A7A58457F2}"/>
+                <a16:creationId xmlns:a16="http://schemas.microsoft.com/office/drawing/2014/main" id="{BE2046A1-7552-439F-90B1-823C365EC61E}"/>
               </a:ext>
             </a:extLst>
           </p:cNvPr>
@@ -43979,7 +43979,7 @@
           <p:cNvPr id="4" name="">
             <a:extLst xmlns:a="http://schemas.openxmlformats.org/drawingml/2006/main">
               <a:ext uri="{FF2B5EF4-FFF2-40B4-BE49-F238E27FC236}">
-                <a16:creationId xmlns:a16="http://schemas.microsoft.com/office/drawing/2014/main" id="{1BCB2ABB-CD44-4D89-9200-BB34DAD3E0C9}"/>
+                <a16:creationId xmlns:a16="http://schemas.microsoft.com/office/drawing/2014/main" id="{504416E8-75E8-4B18-A9BB-BE25EC1BF28D}"/>
               </a:ext>
             </a:extLst>
           </p:cNvPr>
@@ -44010,7 +44010,7 @@
           <p:cNvPr id="5" name="Liu et al., Lost in the Middle, TACL 2024 · RepoQA, 2024">
             <a:extLst xmlns:a="http://schemas.openxmlformats.org/drawingml/2006/main">
               <a:ext uri="{FF2B5EF4-FFF2-40B4-BE49-F238E27FC236}">
-                <a16:creationId xmlns:a16="http://schemas.microsoft.com/office/drawing/2014/main" id="{9E95174A-A7DD-4826-89F8-F44D90B8EB0D}"/>
+                <a16:creationId xmlns:a16="http://schemas.microsoft.com/office/drawing/2014/main" id="{E0EAD1A3-7307-4BBD-8F55-344EC2AE1966}"/>
               </a:ext>
             </a:extLst>
           </p:cNvPr>
@@ -44168,7 +44168,7 @@
           <p:cNvPr id="6" name="특정 모델·과제의 결과 · 현재 Codex의 Repository coding 한계를 입증하지 않음">
             <a:extLst xmlns:a="http://schemas.openxmlformats.org/drawingml/2006/main">
               <a:ext uri="{FF2B5EF4-FFF2-40B4-BE49-F238E27FC236}">
-                <a16:creationId xmlns:a16="http://schemas.microsoft.com/office/drawing/2014/main" id="{66389AF9-4D63-4C6D-AA2B-A732FBBB23DE}"/>
+                <a16:creationId xmlns:a16="http://schemas.microsoft.com/office/drawing/2014/main" id="{38E2D5C3-663E-472A-90BD-399D7D37FCE4}"/>
               </a:ext>
             </a:extLst>
           </p:cNvPr>
@@ -44326,7 +44326,7 @@
           <p:cNvPr id="7" name="더 많은 Context가 항상 더 좋은 것은 아니다">
             <a:extLst xmlns:a="http://schemas.openxmlformats.org/drawingml/2006/main">
               <a:ext uri="{FF2B5EF4-FFF2-40B4-BE49-F238E27FC236}">
-                <a16:creationId xmlns:a16="http://schemas.microsoft.com/office/drawing/2014/main" id="{5E898CA4-C755-45A1-B81A-FF0CC58CD7F9}"/>
+                <a16:creationId xmlns:a16="http://schemas.microsoft.com/office/drawing/2014/main" id="{136D2CBD-F13C-42E2-B01F-504A53D39EBC}"/>
               </a:ext>
             </a:extLst>
           </p:cNvPr>
@@ -44484,7 +44484,7 @@
           <p:cNvPr id="8" name="Lost in the Middle">
             <a:extLst xmlns:a="http://schemas.openxmlformats.org/drawingml/2006/main">
               <a:ext uri="{FF2B5EF4-FFF2-40B4-BE49-F238E27FC236}">
-                <a16:creationId xmlns:a16="http://schemas.microsoft.com/office/drawing/2014/main" id="{387E86CD-5BE3-4B72-A847-04396F23CDE2}"/>
+                <a16:creationId xmlns:a16="http://schemas.microsoft.com/office/drawing/2014/main" id="{0CE07E84-494E-4903-82EC-2A0B72496CF8}"/>
               </a:ext>
             </a:extLst>
           </p:cNvPr>
@@ -44642,7 +44642,7 @@
           <p:cNvPr id="9" name="RepoQA">
             <a:extLst xmlns:a="http://schemas.openxmlformats.org/drawingml/2006/main">
               <a:ext uri="{FF2B5EF4-FFF2-40B4-BE49-F238E27FC236}">
-                <a16:creationId xmlns:a16="http://schemas.microsoft.com/office/drawing/2014/main" id="{D94CA73A-1F37-4CDF-90AA-1DCB10B13A69}"/>
+                <a16:creationId xmlns:a16="http://schemas.microsoft.com/office/drawing/2014/main" id="{07F26D39-948A-4BE4-9C94-10BE87625C06}"/>
               </a:ext>
             </a:extLst>
           </p:cNvPr>
@@ -44800,7 +44800,7 @@
           <p:cNvPr id="10" name="여러 문서의 질문 답변 · key-value 검색">
             <a:extLst xmlns:a="http://schemas.openxmlformats.org/drawingml/2006/main">
               <a:ext uri="{FF2B5EF4-FFF2-40B4-BE49-F238E27FC236}">
-                <a16:creationId xmlns:a16="http://schemas.microsoft.com/office/drawing/2014/main" id="{4B875860-D597-419A-9B03-75CC7ABE6337}"/>
+                <a16:creationId xmlns:a16="http://schemas.microsoft.com/office/drawing/2014/main" id="{7FFA4F4D-BD00-4E67-922A-43B6E6B68FE0}"/>
               </a:ext>
             </a:extLst>
           </p:cNvPr>
@@ -44958,7 +44958,7 @@
           <p:cNvPr id="11" name="50개 Repository의 코드 검색 과제">
             <a:extLst xmlns:a="http://schemas.openxmlformats.org/drawingml/2006/main">
               <a:ext uri="{FF2B5EF4-FFF2-40B4-BE49-F238E27FC236}">
-                <a16:creationId xmlns:a16="http://schemas.microsoft.com/office/drawing/2014/main" id="{D041D59E-19F1-4166-A0E8-8A6755B3F660}"/>
+                <a16:creationId xmlns:a16="http://schemas.microsoft.com/office/drawing/2014/main" id="{D5BEC1CD-220E-49B3-9A7D-BF72726647EF}"/>
               </a:ext>
             </a:extLst>
           </p:cNvPr>
@@ -45116,7 +45116,7 @@
           <p:cNvPr id="12" name="관련 정보의 위치를 달리하는 구성">
             <a:extLst xmlns:a="http://schemas.openxmlformats.org/drawingml/2006/main">
               <a:ext uri="{FF2B5EF4-FFF2-40B4-BE49-F238E27FC236}">
-                <a16:creationId xmlns:a16="http://schemas.microsoft.com/office/drawing/2014/main" id="{8557B346-DE4A-47A1-AB33-1E33AA572435}"/>
+                <a16:creationId xmlns:a16="http://schemas.microsoft.com/office/drawing/2014/main" id="{2035B199-3492-416D-90EE-DE5351BCC144}"/>
               </a:ext>
             </a:extLst>
           </p:cNvPr>
@@ -45274,7 +45274,7 @@
           <p:cNvPr id="13" name="">
             <a:extLst xmlns:a="http://schemas.openxmlformats.org/drawingml/2006/main">
               <a:ext uri="{FF2B5EF4-FFF2-40B4-BE49-F238E27FC236}">
-                <a16:creationId xmlns:a16="http://schemas.microsoft.com/office/drawing/2014/main" id="{65E2A3C9-505F-4ACE-B507-E94908B451F4}"/>
+                <a16:creationId xmlns:a16="http://schemas.microsoft.com/office/drawing/2014/main" id="{3241FD08-2262-4CF4-8AC5-AE347387AE37}"/>
               </a:ext>
             </a:extLst>
           </p:cNvPr>
@@ -45307,7 +45307,7 @@
           <p:cNvPr id="14" name="">
             <a:extLst xmlns:a="http://schemas.openxmlformats.org/drawingml/2006/main">
               <a:ext uri="{FF2B5EF4-FFF2-40B4-BE49-F238E27FC236}">
-                <a16:creationId xmlns:a16="http://schemas.microsoft.com/office/drawing/2014/main" id="{DE8E9A65-5F93-46D0-B973-6C82FA44CFBF}"/>
+                <a16:creationId xmlns:a16="http://schemas.microsoft.com/office/drawing/2014/main" id="{0451B282-54E1-40DE-B2F1-686D59124B75}"/>
               </a:ext>
             </a:extLst>
           </p:cNvPr>
@@ -45340,7 +45340,7 @@
           <p:cNvPr id="15" name="">
             <a:extLst xmlns:a="http://schemas.openxmlformats.org/drawingml/2006/main">
               <a:ext uri="{FF2B5EF4-FFF2-40B4-BE49-F238E27FC236}">
-                <a16:creationId xmlns:a16="http://schemas.microsoft.com/office/drawing/2014/main" id="{E190351D-17F5-401F-AE3E-7E5D8D8B091F}"/>
+                <a16:creationId xmlns:a16="http://schemas.microsoft.com/office/drawing/2014/main" id="{70A67FC4-AB6E-4510-A3A0-6AA8E4D51493}"/>
               </a:ext>
             </a:extLst>
           </p:cNvPr>
@@ -45373,7 +45373,7 @@
           <p:cNvPr id="16" name="">
             <a:extLst xmlns:a="http://schemas.openxmlformats.org/drawingml/2006/main">
               <a:ext uri="{FF2B5EF4-FFF2-40B4-BE49-F238E27FC236}">
-                <a16:creationId xmlns:a16="http://schemas.microsoft.com/office/drawing/2014/main" id="{6FF0F157-E65F-4C4D-BAED-9B94A768A669}"/>
+                <a16:creationId xmlns:a16="http://schemas.microsoft.com/office/drawing/2014/main" id="{1D4FB2D3-BD2B-47DF-AAB6-8ABF56DCBF38}"/>
               </a:ext>
             </a:extLst>
           </p:cNvPr>
@@ -45406,7 +45406,7 @@
           <p:cNvPr id="17" name="">
             <a:extLst xmlns:a="http://schemas.openxmlformats.org/drawingml/2006/main">
               <a:ext uri="{FF2B5EF4-FFF2-40B4-BE49-F238E27FC236}">
-                <a16:creationId xmlns:a16="http://schemas.microsoft.com/office/drawing/2014/main" id="{0CC127F3-6185-4FDE-9192-6DAF888C85CE}"/>
+                <a16:creationId xmlns:a16="http://schemas.microsoft.com/office/drawing/2014/main" id="{10BCB6D7-632E-436B-83F0-A6E14C2CB91C}"/>
               </a:ext>
             </a:extLst>
           </p:cNvPr>
@@ -45439,7 +45439,7 @@
           <p:cNvPr id="18" name="">
             <a:extLst xmlns:a="http://schemas.openxmlformats.org/drawingml/2006/main">
               <a:ext uri="{FF2B5EF4-FFF2-40B4-BE49-F238E27FC236}">
-                <a16:creationId xmlns:a16="http://schemas.microsoft.com/office/drawing/2014/main" id="{2C23A8A1-BE2C-406C-B6CF-5B2E2B9407E2}"/>
+                <a16:creationId xmlns:a16="http://schemas.microsoft.com/office/drawing/2014/main" id="{5D514FDD-B78B-4960-903B-0A3A5F961C72}"/>
               </a:ext>
             </a:extLst>
           </p:cNvPr>
@@ -45472,7 +45472,7 @@
           <p:cNvPr id="19" name="">
             <a:extLst xmlns:a="http://schemas.openxmlformats.org/drawingml/2006/main">
               <a:ext uri="{FF2B5EF4-FFF2-40B4-BE49-F238E27FC236}">
-                <a16:creationId xmlns:a16="http://schemas.microsoft.com/office/drawing/2014/main" id="{08EB6308-5A8F-4A14-A1DC-77F55F40FB8F}"/>
+                <a16:creationId xmlns:a16="http://schemas.microsoft.com/office/drawing/2014/main" id="{B421C779-23E2-4974-889F-F6F21CA5A0C1}"/>
               </a:ext>
             </a:extLst>
           </p:cNvPr>
@@ -45505,7 +45505,7 @@
           <p:cNvPr id="20" name="">
             <a:extLst xmlns:a="http://schemas.openxmlformats.org/drawingml/2006/main">
               <a:ext uri="{FF2B5EF4-FFF2-40B4-BE49-F238E27FC236}">
-                <a16:creationId xmlns:a16="http://schemas.microsoft.com/office/drawing/2014/main" id="{E3472CA9-0F63-48A1-80BA-82A783232405}"/>
+                <a16:creationId xmlns:a16="http://schemas.microsoft.com/office/drawing/2014/main" id="{2B0E2A48-84A5-451B-B61B-25040A184D98}"/>
               </a:ext>
             </a:extLst>
           </p:cNvPr>
@@ -45538,7 +45538,7 @@
           <p:cNvPr id="21" name="">
             <a:extLst xmlns:a="http://schemas.openxmlformats.org/drawingml/2006/main">
               <a:ext uri="{FF2B5EF4-FFF2-40B4-BE49-F238E27FC236}">
-                <a16:creationId xmlns:a16="http://schemas.microsoft.com/office/drawing/2014/main" id="{1B498836-6345-4D1F-98CD-CB7A51C0DC31}"/>
+                <a16:creationId xmlns:a16="http://schemas.microsoft.com/office/drawing/2014/main" id="{8ECD6C1E-037C-4F1B-A898-9F8F35086F1C}"/>
               </a:ext>
             </a:extLst>
           </p:cNvPr>
@@ -45571,7 +45571,7 @@
           <p:cNvPr id="22" name="">
             <a:extLst xmlns:a="http://schemas.openxmlformats.org/drawingml/2006/main">
               <a:ext uri="{FF2B5EF4-FFF2-40B4-BE49-F238E27FC236}">
-                <a16:creationId xmlns:a16="http://schemas.microsoft.com/office/drawing/2014/main" id="{380E3F25-2374-4AF2-B99F-B7024835E9EF}"/>
+                <a16:creationId xmlns:a16="http://schemas.microsoft.com/office/drawing/2014/main" id="{D0115620-A373-403E-B7FA-52E32B5E8609}"/>
               </a:ext>
             </a:extLst>
           </p:cNvPr>
@@ -45604,7 +45604,7 @@
           <p:cNvPr id="23" name="">
             <a:extLst xmlns:a="http://schemas.openxmlformats.org/drawingml/2006/main">
               <a:ext uri="{FF2B5EF4-FFF2-40B4-BE49-F238E27FC236}">
-                <a16:creationId xmlns:a16="http://schemas.microsoft.com/office/drawing/2014/main" id="{BD31E22D-361B-45D2-A8B5-41B8931D4E34}"/>
+                <a16:creationId xmlns:a16="http://schemas.microsoft.com/office/drawing/2014/main" id="{5C3D7B77-9D2C-4322-BBE8-C232DB4CAB06}"/>
               </a:ext>
             </a:extLst>
           </p:cNvPr>
@@ -45637,7 +45637,7 @@
           <p:cNvPr id="24" name="">
             <a:extLst xmlns:a="http://schemas.openxmlformats.org/drawingml/2006/main">
               <a:ext uri="{FF2B5EF4-FFF2-40B4-BE49-F238E27FC236}">
-                <a16:creationId xmlns:a16="http://schemas.microsoft.com/office/drawing/2014/main" id="{AFE1F7B1-5A54-4909-8D4F-18460AA5DF94}"/>
+                <a16:creationId xmlns:a16="http://schemas.microsoft.com/office/drawing/2014/main" id="{CD3AC52F-38C6-4914-95F6-D4678FD4CD79}"/>
               </a:ext>
             </a:extLst>
           </p:cNvPr>
@@ -45670,7 +45670,7 @@
           <p:cNvPr id="25" name="">
             <a:extLst xmlns:a="http://schemas.openxmlformats.org/drawingml/2006/main">
               <a:ext uri="{FF2B5EF4-FFF2-40B4-BE49-F238E27FC236}">
-                <a16:creationId xmlns:a16="http://schemas.microsoft.com/office/drawing/2014/main" id="{DE4D2960-15B4-4FC9-B68D-8302296F1AC4}"/>
+                <a16:creationId xmlns:a16="http://schemas.microsoft.com/office/drawing/2014/main" id="{8F1FACF3-1A9C-45DF-AB4F-6AD68609E94E}"/>
               </a:ext>
             </a:extLst>
           </p:cNvPr>
@@ -45703,7 +45703,7 @@
           <p:cNvPr id="26" name="">
             <a:extLst xmlns:a="http://schemas.openxmlformats.org/drawingml/2006/main">
               <a:ext uri="{FF2B5EF4-FFF2-40B4-BE49-F238E27FC236}">
-                <a16:creationId xmlns:a16="http://schemas.microsoft.com/office/drawing/2014/main" id="{07CAC182-08CE-4C22-806F-5C70D0A5BE48}"/>
+                <a16:creationId xmlns:a16="http://schemas.microsoft.com/office/drawing/2014/main" id="{8B4EEFEB-6C5A-443D-AD3A-2EB031CEDBDE}"/>
               </a:ext>
             </a:extLst>
           </p:cNvPr>
@@ -45736,7 +45736,7 @@
           <p:cNvPr id="27" name="">
             <a:extLst xmlns:a="http://schemas.openxmlformats.org/drawingml/2006/main">
               <a:ext uri="{FF2B5EF4-FFF2-40B4-BE49-F238E27FC236}">
-                <a16:creationId xmlns:a16="http://schemas.microsoft.com/office/drawing/2014/main" id="{6E06434E-293D-4135-BD12-2CE5A2DBD932}"/>
+                <a16:creationId xmlns:a16="http://schemas.microsoft.com/office/drawing/2014/main" id="{CD357FE5-5974-47BE-A33A-FE75A4E8B20C}"/>
               </a:ext>
             </a:extLst>
           </p:cNvPr>
@@ -45769,7 +45769,7 @@
           <p:cNvPr id="28" name="질문">
             <a:extLst xmlns:a="http://schemas.openxmlformats.org/drawingml/2006/main">
               <a:ext uri="{FF2B5EF4-FFF2-40B4-BE49-F238E27FC236}">
-                <a16:creationId xmlns:a16="http://schemas.microsoft.com/office/drawing/2014/main" id="{EB561274-93C6-4329-8AD7-9724F6CAA049}"/>
+                <a16:creationId xmlns:a16="http://schemas.microsoft.com/office/drawing/2014/main" id="{303E3EC0-E84D-405A-9EE5-AD25D39B428C}"/>
               </a:ext>
             </a:extLst>
           </p:cNvPr>
@@ -45927,7 +45927,7 @@
           <p:cNvPr id="29" name="">
             <a:extLst xmlns:a="http://schemas.openxmlformats.org/drawingml/2006/main">
               <a:ext uri="{FF2B5EF4-FFF2-40B4-BE49-F238E27FC236}">
-                <a16:creationId xmlns:a16="http://schemas.microsoft.com/office/drawing/2014/main" id="{69428B5F-7BBB-4481-B0E4-474334D916B5}"/>
+                <a16:creationId xmlns:a16="http://schemas.microsoft.com/office/drawing/2014/main" id="{A96DBBA2-93BC-40FD-8C9A-D818F3B225E8}"/>
               </a:ext>
             </a:extLst>
           </p:cNvPr>
@@ -45957,7 +45957,7 @@
           <p:cNvPr id="30" name="">
             <a:extLst xmlns:a="http://schemas.openxmlformats.org/drawingml/2006/main">
               <a:ext uri="{FF2B5EF4-FFF2-40B4-BE49-F238E27FC236}">
-                <a16:creationId xmlns:a16="http://schemas.microsoft.com/office/drawing/2014/main" id="{917D9954-692B-4336-8CF2-10461D5B8171}"/>
+                <a16:creationId xmlns:a16="http://schemas.microsoft.com/office/drawing/2014/main" id="{0764A1F9-3846-4D5F-817B-46194AF1112E}"/>
               </a:ext>
             </a:extLst>
           </p:cNvPr>
@@ -45990,7 +45990,7 @@
           <p:cNvPr id="31" name="Repository의 코드">
             <a:extLst xmlns:a="http://schemas.openxmlformats.org/drawingml/2006/main">
               <a:ext uri="{FF2B5EF4-FFF2-40B4-BE49-F238E27FC236}">
-                <a16:creationId xmlns:a16="http://schemas.microsoft.com/office/drawing/2014/main" id="{CF8C2BB8-1F16-47EB-9A79-8595637D7578}"/>
+                <a16:creationId xmlns:a16="http://schemas.microsoft.com/office/drawing/2014/main" id="{6DC06317-9402-4BE9-9383-FA2E4C1FF447}"/>
               </a:ext>
             </a:extLst>
           </p:cNvPr>
@@ -46148,7 +46148,7 @@
           <p:cNvPr id="32" name="관련 코드 찾기">
             <a:extLst xmlns:a="http://schemas.openxmlformats.org/drawingml/2006/main">
               <a:ext uri="{FF2B5EF4-FFF2-40B4-BE49-F238E27FC236}">
-                <a16:creationId xmlns:a16="http://schemas.microsoft.com/office/drawing/2014/main" id="{6B0F6515-AD04-49FA-9E03-AC2A1DE123F6}"/>
+                <a16:creationId xmlns:a16="http://schemas.microsoft.com/office/drawing/2014/main" id="{49CAFEAA-00AA-46E1-8274-A53886A6B7CA}"/>
               </a:ext>
             </a:extLst>
           </p:cNvPr>
@@ -46306,7 +46306,7 @@
           <p:cNvPr id="33" name="관련 정보의 위치가&#10;일부 조건에서 중요할 수 있다">
             <a:extLst xmlns:a="http://schemas.openxmlformats.org/drawingml/2006/main">
               <a:ext uri="{FF2B5EF4-FFF2-40B4-BE49-F238E27FC236}">
-                <a16:creationId xmlns:a16="http://schemas.microsoft.com/office/drawing/2014/main" id="{F776B4D8-3FB0-474F-8148-8B1A7CDC8411}"/>
+                <a16:creationId xmlns:a16="http://schemas.microsoft.com/office/drawing/2014/main" id="{803FB023-1DA1-4331-8F62-441A6A39C700}"/>
               </a:ext>
             </a:extLst>
           </p:cNvPr>
@@ -46487,7 +46487,7 @@
           <p:cNvPr id="34" name="관련 코드 정보를&#10;선택하고 찾는 능력을 평가">
             <a:extLst xmlns:a="http://schemas.openxmlformats.org/drawingml/2006/main">
               <a:ext uri="{FF2B5EF4-FFF2-40B4-BE49-F238E27FC236}">
-                <a16:creationId xmlns:a16="http://schemas.microsoft.com/office/drawing/2014/main" id="{703AA459-F52C-4E2E-BDF0-3911DDA41A7A}"/>
+                <a16:creationId xmlns:a16="http://schemas.microsoft.com/office/drawing/2014/main" id="{572C394E-5C1F-4274-88A9-642C498D4E41}"/>
               </a:ext>
             </a:extLst>
           </p:cNvPr>
@@ -46668,7 +46668,7 @@
           <p:cNvPr id="35" name="aclanthology.org/2024.tacl-1.9/">
             <a:extLst xmlns:a="http://schemas.openxmlformats.org/drawingml/2006/main">
               <a:ext uri="{FF2B5EF4-FFF2-40B4-BE49-F238E27FC236}">
-                <a16:creationId xmlns:a16="http://schemas.microsoft.com/office/drawing/2014/main" id="{FF420632-78C8-41AE-86B4-F0725B5EA6E7}"/>
+                <a16:creationId xmlns:a16="http://schemas.microsoft.com/office/drawing/2014/main" id="{720122DF-67BC-44EB-89A0-B3453F23BDDF}"/>
               </a:ext>
             </a:extLst>
           </p:cNvPr>
@@ -46826,7 +46826,7 @@
           <p:cNvPr id="36" name="arxiv.org/abs/2406.06025">
             <a:extLst xmlns:a="http://schemas.openxmlformats.org/drawingml/2006/main">
               <a:ext uri="{FF2B5EF4-FFF2-40B4-BE49-F238E27FC236}">
-                <a16:creationId xmlns:a16="http://schemas.microsoft.com/office/drawing/2014/main" id="{A364B8D8-DD78-4483-8719-9F4A5E31770F}"/>
+                <a16:creationId xmlns:a16="http://schemas.microsoft.com/office/drawing/2014/main" id="{85D4E282-6F05-47DC-904B-F0CDD86F05BE}"/>
               </a:ext>
             </a:extLst>
           </p:cNvPr>
@@ -46984,7 +46984,7 @@
           <p:cNvPr id="37" name="Legacy module connection">
             <a:extLst xmlns:a="http://schemas.openxmlformats.org/drawingml/2006/main">
               <a:ext uri="{FF2B5EF4-FFF2-40B4-BE49-F238E27FC236}">
-                <a16:creationId xmlns:a16="http://schemas.microsoft.com/office/drawing/2014/main" id="{F2E4C352-53E6-4BD3-8F4C-B18F17D9CFBE}"/>
+                <a16:creationId xmlns:a16="http://schemas.microsoft.com/office/drawing/2014/main" id="{632852C7-C7B4-4858-A2F0-9A6CB2E4CD7A}"/>
               </a:ext>
             </a:extLst>
           </p:cNvPr>
@@ -47140,7 +47140,7 @@
     </p:spTree>
     <p:extLst>
       <p:ext uri="{BB962C8B-B14F-4D97-AF65-F5344CB8AC3E}">
-        <p14:creationId xmlns:p14="http://schemas.microsoft.com/office/powerpoint/2010/main" val="1348319445"/>
+        <p14:creationId xmlns:p14="http://schemas.microsoft.com/office/powerpoint/2010/main" val="377690732"/>
       </p:ext>
     </p:extLst>
   </p:cSld>
@@ -47171,7 +47171,7 @@
           <p:cNvPr id="21" name="ACT 2 · 필요한 상세 정보의 탐색 경로">
             <a:extLst xmlns:a="http://schemas.openxmlformats.org/drawingml/2006/main">
               <a:ext uri="{FF2B5EF4-FFF2-40B4-BE49-F238E27FC236}">
-                <a16:creationId xmlns:a16="http://schemas.microsoft.com/office/drawing/2014/main" id="{4667B5C0-B1D0-425D-910E-3B29253FD555}"/>
+                <a16:creationId xmlns:a16="http://schemas.microsoft.com/office/drawing/2014/main" id="{74BABB10-91D4-4009-AA17-210B4936D26F}"/>
               </a:ext>
             </a:extLst>
           </p:cNvPr>
@@ -47326,10 +47326,10 @@
       </p:sp>
       <p:sp>
         <p:nvSpPr>
-          <p:cNvPr id="2" name="S32">
+          <p:cNvPr id="2" name="S40">
             <a:extLst xmlns:a="http://schemas.openxmlformats.org/drawingml/2006/main">
               <a:ext uri="{FF2B5EF4-FFF2-40B4-BE49-F238E27FC236}">
-                <a16:creationId xmlns:a16="http://schemas.microsoft.com/office/drawing/2014/main" id="{313C36CD-13BF-4148-9745-8DE91CDB75C5}"/>
+                <a16:creationId xmlns:a16="http://schemas.microsoft.com/office/drawing/2014/main" id="{4D8106C2-3C20-418F-ACD8-BD5AFEA7D416}"/>
               </a:ext>
             </a:extLst>
           </p:cNvPr>
@@ -47477,7 +47477,7 @@
                 <a:ea typeface="Malgun Gothic"/>
                 <a:cs typeface="Malgun Gothic"/>
               </a:rPr>
-              <a:t>S32</a:t>
+              <a:t>S40</a:t>
             </a:r>
           </a:p>
         </p:txBody>
@@ -47487,7 +47487,7 @@
           <p:cNvPr id="3" name="필요한 상세 정보로 가는 길">
             <a:extLst xmlns:a="http://schemas.openxmlformats.org/drawingml/2006/main">
               <a:ext uri="{FF2B5EF4-FFF2-40B4-BE49-F238E27FC236}">
-                <a16:creationId xmlns:a16="http://schemas.microsoft.com/office/drawing/2014/main" id="{EF02402D-E93E-45E3-AEE9-72C1E162AEC9}"/>
+                <a16:creationId xmlns:a16="http://schemas.microsoft.com/office/drawing/2014/main" id="{2A511D63-C4FF-45DA-8943-69ED6512BD11}"/>
               </a:ext>
             </a:extLst>
           </p:cNvPr>
@@ -47645,7 +47645,7 @@
           <p:cNvPr id="4" name="">
             <a:extLst xmlns:a="http://schemas.openxmlformats.org/drawingml/2006/main">
               <a:ext uri="{FF2B5EF4-FFF2-40B4-BE49-F238E27FC236}">
-                <a16:creationId xmlns:a16="http://schemas.microsoft.com/office/drawing/2014/main" id="{B8FC1BA9-3629-477C-A2F4-08D0D6BC5EAB}"/>
+                <a16:creationId xmlns:a16="http://schemas.microsoft.com/office/drawing/2014/main" id="{1C000521-FBEB-4947-9C86-B751A5F993F3}"/>
               </a:ext>
             </a:extLst>
           </p:cNvPr>
@@ -47676,7 +47676,7 @@
           <p:cNvPr id="5" name="교육용 Routing 모델 · 실제 문서 접근 결과는 다음 구간에서 확인">
             <a:extLst xmlns:a="http://schemas.openxmlformats.org/drawingml/2006/main">
               <a:ext uri="{FF2B5EF4-FFF2-40B4-BE49-F238E27FC236}">
-                <a16:creationId xmlns:a16="http://schemas.microsoft.com/office/drawing/2014/main" id="{9B0D8327-90FB-4F9F-AB02-842ADC61A10A}"/>
+                <a16:creationId xmlns:a16="http://schemas.microsoft.com/office/drawing/2014/main" id="{8B1BB493-FF6E-4632-9494-4B5553557E2F}"/>
               </a:ext>
             </a:extLst>
           </p:cNvPr>
@@ -47834,7 +47834,7 @@
           <p:cNvPr id="6" name="검색 성능 향상이나 토큰 절약을 입증한 그림이 아님">
             <a:extLst xmlns:a="http://schemas.openxmlformats.org/drawingml/2006/main">
               <a:ext uri="{FF2B5EF4-FFF2-40B4-BE49-F238E27FC236}">
-                <a16:creationId xmlns:a16="http://schemas.microsoft.com/office/drawing/2014/main" id="{339E2E1C-C8BE-416C-A95D-00F2D418030E}"/>
+                <a16:creationId xmlns:a16="http://schemas.microsoft.com/office/drawing/2014/main" id="{0797909E-AFA6-47AA-A506-4CCB68A755BE}"/>
               </a:ext>
             </a:extLst>
           </p:cNvPr>
@@ -47992,7 +47992,7 @@
           <p:cNvPr id="7" name="어떤 질문에서 어떤 상세 정보가 필요할까?">
             <a:extLst xmlns:a="http://schemas.openxmlformats.org/drawingml/2006/main">
               <a:ext uri="{FF2B5EF4-FFF2-40B4-BE49-F238E27FC236}">
-                <a16:creationId xmlns:a16="http://schemas.microsoft.com/office/drawing/2014/main" id="{71C29E6D-3D2C-4C45-BAFA-5045859AAEEF}"/>
+                <a16:creationId xmlns:a16="http://schemas.microsoft.com/office/drawing/2014/main" id="{54D8AF2E-EAE5-4023-B34E-ECB1B4F76704}"/>
               </a:ext>
             </a:extLst>
           </p:cNvPr>
@@ -48150,7 +48150,7 @@
           <p:cNvPr id="8" name="">
             <a:extLst xmlns:a="http://schemas.openxmlformats.org/drawingml/2006/main">
               <a:ext uri="{FF2B5EF4-FFF2-40B4-BE49-F238E27FC236}">
-                <a16:creationId xmlns:a16="http://schemas.microsoft.com/office/drawing/2014/main" id="{CDC1E14C-81DD-4541-968B-9DB0BC0033D7}"/>
+                <a16:creationId xmlns:a16="http://schemas.microsoft.com/office/drawing/2014/main" id="{1FA60849-3FDC-44A4-B902-F31FF139F301}"/>
               </a:ext>
             </a:extLst>
           </p:cNvPr>
@@ -48181,7 +48181,7 @@
           <p:cNvPr id="9" name="Task">
             <a:extLst xmlns:a="http://schemas.openxmlformats.org/drawingml/2006/main">
               <a:ext uri="{FF2B5EF4-FFF2-40B4-BE49-F238E27FC236}">
-                <a16:creationId xmlns:a16="http://schemas.microsoft.com/office/drawing/2014/main" id="{9C3A81C5-E12B-40BD-8833-CB3B9D9BC5F2}"/>
+                <a16:creationId xmlns:a16="http://schemas.microsoft.com/office/drawing/2014/main" id="{0F7C6C0A-B02A-417F-8342-A4239E4F4CF9}"/>
               </a:ext>
             </a:extLst>
           </p:cNvPr>
@@ -48339,7 +48339,7 @@
           <p:cNvPr id="10" name="지금 해결할 질문">
             <a:extLst xmlns:a="http://schemas.openxmlformats.org/drawingml/2006/main">
               <a:ext uri="{FF2B5EF4-FFF2-40B4-BE49-F238E27FC236}">
-                <a16:creationId xmlns:a16="http://schemas.microsoft.com/office/drawing/2014/main" id="{F0905F7D-B4AC-4622-9E42-19DCCCC72ED5}"/>
+                <a16:creationId xmlns:a16="http://schemas.microsoft.com/office/drawing/2014/main" id="{D2B623E9-CCC2-4087-A278-AEBAA96D355E}"/>
               </a:ext>
             </a:extLst>
           </p:cNvPr>
@@ -48497,7 +48497,7 @@
           <p:cNvPr id="11" name="">
             <a:extLst xmlns:a="http://schemas.openxmlformats.org/drawingml/2006/main">
               <a:ext uri="{FF2B5EF4-FFF2-40B4-BE49-F238E27FC236}">
-                <a16:creationId xmlns:a16="http://schemas.microsoft.com/office/drawing/2014/main" id="{D31299D9-871E-4535-B05B-F991D1DFD482}"/>
+                <a16:creationId xmlns:a16="http://schemas.microsoft.com/office/drawing/2014/main" id="{CE958E34-D219-405C-A419-811B93279ABA}"/>
               </a:ext>
             </a:extLst>
           </p:cNvPr>
@@ -48527,7 +48527,7 @@
           <p:cNvPr id="12" name="">
             <a:extLst xmlns:a="http://schemas.openxmlformats.org/drawingml/2006/main">
               <a:ext uri="{FF2B5EF4-FFF2-40B4-BE49-F238E27FC236}">
-                <a16:creationId xmlns:a16="http://schemas.microsoft.com/office/drawing/2014/main" id="{2F008C2B-943A-4C76-A84D-AD4BFDDB514B}"/>
+                <a16:creationId xmlns:a16="http://schemas.microsoft.com/office/drawing/2014/main" id="{47A284D2-A06A-4DE7-A4EA-9C068AAB80E8}"/>
               </a:ext>
             </a:extLst>
           </p:cNvPr>
@@ -48558,7 +48558,7 @@
           <p:cNvPr id="13" name="Core Context">
             <a:extLst xmlns:a="http://schemas.openxmlformats.org/drawingml/2006/main">
               <a:ext uri="{FF2B5EF4-FFF2-40B4-BE49-F238E27FC236}">
-                <a16:creationId xmlns:a16="http://schemas.microsoft.com/office/drawing/2014/main" id="{4BF8B9C9-FF72-4DCF-98A9-DBA1BE83A51C}"/>
+                <a16:creationId xmlns:a16="http://schemas.microsoft.com/office/drawing/2014/main" id="{A78A26AF-266C-4DC4-B08F-3B98AB9BFC98}"/>
               </a:ext>
             </a:extLst>
           </p:cNvPr>
@@ -48716,7 +48716,7 @@
           <p:cNvPr id="14" name="프로젝트 안내와&#10;찾아갈 위치">
             <a:extLst xmlns:a="http://schemas.openxmlformats.org/drawingml/2006/main">
               <a:ext uri="{FF2B5EF4-FFF2-40B4-BE49-F238E27FC236}">
-                <a16:creationId xmlns:a16="http://schemas.microsoft.com/office/drawing/2014/main" id="{3BEFA54B-C41F-4C7D-A9BC-88CC1B97BCF1}"/>
+                <a16:creationId xmlns:a16="http://schemas.microsoft.com/office/drawing/2014/main" id="{7B7B7D7C-6C6A-46E3-A0ED-39F8A129C544}"/>
               </a:ext>
             </a:extLst>
           </p:cNvPr>
@@ -48897,7 +48897,7 @@
           <p:cNvPr id="15" name="">
             <a:extLst xmlns:a="http://schemas.openxmlformats.org/drawingml/2006/main">
               <a:ext uri="{FF2B5EF4-FFF2-40B4-BE49-F238E27FC236}">
-                <a16:creationId xmlns:a16="http://schemas.microsoft.com/office/drawing/2014/main" id="{DA87EAC6-51C7-4D74-9EA8-3CFA6E396506}"/>
+                <a16:creationId xmlns:a16="http://schemas.microsoft.com/office/drawing/2014/main" id="{B3C63980-5F1B-4084-A496-743F6DDBDE8F}"/>
               </a:ext>
             </a:extLst>
           </p:cNvPr>
@@ -48927,7 +48927,7 @@
           <p:cNvPr id="16" name="">
             <a:extLst xmlns:a="http://schemas.openxmlformats.org/drawingml/2006/main">
               <a:ext uri="{FF2B5EF4-FFF2-40B4-BE49-F238E27FC236}">
-                <a16:creationId xmlns:a16="http://schemas.microsoft.com/office/drawing/2014/main" id="{A4CAF7B5-DFE4-48FE-9BF4-3F00EED2510F}"/>
+                <a16:creationId xmlns:a16="http://schemas.microsoft.com/office/drawing/2014/main" id="{2CCFE5D2-2B0F-414B-9A6A-415B0C62DCE5}"/>
               </a:ext>
             </a:extLst>
           </p:cNvPr>
@@ -48958,7 +48958,7 @@
           <p:cNvPr id="17" name="관련 상세 정보">
             <a:extLst xmlns:a="http://schemas.openxmlformats.org/drawingml/2006/main">
               <a:ext uri="{FF2B5EF4-FFF2-40B4-BE49-F238E27FC236}">
-                <a16:creationId xmlns:a16="http://schemas.microsoft.com/office/drawing/2014/main" id="{8ECAA4D7-9200-4071-BD8E-800928B25931}"/>
+                <a16:creationId xmlns:a16="http://schemas.microsoft.com/office/drawing/2014/main" id="{21573FAC-F474-45A1-8890-C6767356771E}"/>
               </a:ext>
             </a:extLst>
           </p:cNvPr>
@@ -49116,7 +49116,7 @@
           <p:cNvPr id="18" name="질문에 필요한&#10;계약 · 구조 · 테스트">
             <a:extLst xmlns:a="http://schemas.openxmlformats.org/drawingml/2006/main">
               <a:ext uri="{FF2B5EF4-FFF2-40B4-BE49-F238E27FC236}">
-                <a16:creationId xmlns:a16="http://schemas.microsoft.com/office/drawing/2014/main" id="{EA66A5B8-A7CF-4918-9494-2D91DBD4EC0C}"/>
+                <a16:creationId xmlns:a16="http://schemas.microsoft.com/office/drawing/2014/main" id="{A95AD691-9BC8-4233-B426-0421D9688EF1}"/>
               </a:ext>
             </a:extLst>
           </p:cNvPr>
@@ -49297,7 +49297,7 @@
           <p:cNvPr id="19" name="C++ 예: 공통 제약을 확인한 뒤, 해당 알고리즘의 계약으로">
             <a:extLst xmlns:a="http://schemas.openxmlformats.org/drawingml/2006/main">
               <a:ext uri="{FF2B5EF4-FFF2-40B4-BE49-F238E27FC236}">
-                <a16:creationId xmlns:a16="http://schemas.microsoft.com/office/drawing/2014/main" id="{6FF09B60-E5E9-4470-9257-D3BB6037D029}"/>
+                <a16:creationId xmlns:a16="http://schemas.microsoft.com/office/drawing/2014/main" id="{48641AA7-A114-4D8B-94C7-C7606AE8B01A}"/>
               </a:ext>
             </a:extLst>
           </p:cNvPr>
@@ -49455,7 +49455,7 @@
           <p:cNvPr id="20" name="Legacy module connection">
             <a:extLst xmlns:a="http://schemas.openxmlformats.org/drawingml/2006/main">
               <a:ext uri="{FF2B5EF4-FFF2-40B4-BE49-F238E27FC236}">
-                <a16:creationId xmlns:a16="http://schemas.microsoft.com/office/drawing/2014/main" id="{13FCAB07-84AD-4ED4-A9A5-4C4DD7252F39}"/>
+                <a16:creationId xmlns:a16="http://schemas.microsoft.com/office/drawing/2014/main" id="{FAA8BCE5-F661-4F9B-A9E6-F8C811069C71}"/>
               </a:ext>
             </a:extLst>
           </p:cNvPr>
@@ -49611,7 +49611,7 @@
     </p:spTree>
     <p:extLst>
       <p:ext uri="{BB962C8B-B14F-4D97-AF65-F5344CB8AC3E}">
-        <p14:creationId xmlns:p14="http://schemas.microsoft.com/office/powerpoint/2010/main" val="1580477114"/>
+        <p14:creationId xmlns:p14="http://schemas.microsoft.com/office/powerpoint/2010/main" val="881488602"/>
       </p:ext>
     </p:extLst>
   </p:cSld>

--- a/production/ACT_2.pptx
+++ b/production/ACT_2.pptx
@@ -2,27 +2,27 @@
 <file path=ppt/presentation.xml><?xml version="1.0" encoding="utf-8"?>
 <p:presentation xmlns:p="http://schemas.openxmlformats.org/presentationml/2006/main">
   <p:sldMasterIdLst>
-    <p:sldMasterId xmlns:r="http://schemas.openxmlformats.org/officeDocument/2006/relationships" id="2147483648" r:id="Ref5176de796e4ecf"/>
+    <p:sldMasterId xmlns:r="http://schemas.openxmlformats.org/officeDocument/2006/relationships" id="2147483648" r:id="R48c04b366cac4d14"/>
   </p:sldMasterIdLst>
   <p:notesMasterIdLst>
-    <p:notesMasterId xmlns:r="http://schemas.openxmlformats.org/officeDocument/2006/relationships" r:id="Rdc91cfe6260946dd"/>
+    <p:notesMasterId xmlns:r="http://schemas.openxmlformats.org/officeDocument/2006/relationships" r:id="R19132cb0b82c42a3"/>
   </p:notesMasterIdLst>
   <p:sldIdLst>
-    <p:sldId xmlns:r="http://schemas.openxmlformats.org/officeDocument/2006/relationships" id="256" r:id="R62840e897c624e88"/>
-    <p:sldId xmlns:r="http://schemas.openxmlformats.org/officeDocument/2006/relationships" id="257" r:id="Rb1344b0df96845ac"/>
-    <p:sldId xmlns:r="http://schemas.openxmlformats.org/officeDocument/2006/relationships" id="258" r:id="Rbd910bfddb08485b"/>
-    <p:sldId xmlns:r="http://schemas.openxmlformats.org/officeDocument/2006/relationships" id="259" r:id="R8617adf3b4854f0f"/>
-    <p:sldId xmlns:r="http://schemas.openxmlformats.org/officeDocument/2006/relationships" id="260" r:id="R61da981287c545fe"/>
-    <p:sldId xmlns:r="http://schemas.openxmlformats.org/officeDocument/2006/relationships" id="261" r:id="R9fb1d4ea04484058"/>
-    <p:sldId xmlns:r="http://schemas.openxmlformats.org/officeDocument/2006/relationships" id="262" r:id="R51f9d52b25a34e18"/>
-    <p:sldId xmlns:r="http://schemas.openxmlformats.org/officeDocument/2006/relationships" id="263" r:id="R89278e629a8f494c"/>
-    <p:sldId xmlns:r="http://schemas.openxmlformats.org/officeDocument/2006/relationships" id="264" r:id="Rfe3b5bc1faf34bda"/>
-    <p:sldId xmlns:r="http://schemas.openxmlformats.org/officeDocument/2006/relationships" id="265" r:id="Rbb03b898e4ad4749"/>
-    <p:sldId xmlns:r="http://schemas.openxmlformats.org/officeDocument/2006/relationships" id="266" r:id="R1e2f7c913a674854"/>
-    <p:sldId xmlns:r="http://schemas.openxmlformats.org/officeDocument/2006/relationships" id="267" r:id="R34b58192e3674d65"/>
-    <p:sldId xmlns:r="http://schemas.openxmlformats.org/officeDocument/2006/relationships" id="268" r:id="Red12ceb17244463e"/>
-    <p:sldId xmlns:r="http://schemas.openxmlformats.org/officeDocument/2006/relationships" id="269" r:id="R2405336ccf8046b0"/>
-    <p:sldId xmlns:r="http://schemas.openxmlformats.org/officeDocument/2006/relationships" id="270" r:id="R200897ef6e6745d2"/>
+    <p:sldId xmlns:r="http://schemas.openxmlformats.org/officeDocument/2006/relationships" id="256" r:id="Re2e5600259c54d2c"/>
+    <p:sldId xmlns:r="http://schemas.openxmlformats.org/officeDocument/2006/relationships" id="257" r:id="Rb3f2b78a15a24e6c"/>
+    <p:sldId xmlns:r="http://schemas.openxmlformats.org/officeDocument/2006/relationships" id="258" r:id="Rec5e7a5bc8c44fd5"/>
+    <p:sldId xmlns:r="http://schemas.openxmlformats.org/officeDocument/2006/relationships" id="259" r:id="R1c0ecbbd685e4bc6"/>
+    <p:sldId xmlns:r="http://schemas.openxmlformats.org/officeDocument/2006/relationships" id="260" r:id="R97d9e53529184743"/>
+    <p:sldId xmlns:r="http://schemas.openxmlformats.org/officeDocument/2006/relationships" id="261" r:id="R47425c7497734372"/>
+    <p:sldId xmlns:r="http://schemas.openxmlformats.org/officeDocument/2006/relationships" id="262" r:id="Rf4b74d3db58d49c2"/>
+    <p:sldId xmlns:r="http://schemas.openxmlformats.org/officeDocument/2006/relationships" id="263" r:id="Rbd79a9b82d654688"/>
+    <p:sldId xmlns:r="http://schemas.openxmlformats.org/officeDocument/2006/relationships" id="264" r:id="Rfa28ba7248e94fc1"/>
+    <p:sldId xmlns:r="http://schemas.openxmlformats.org/officeDocument/2006/relationships" id="265" r:id="R7ab1fe7ef455409a"/>
+    <p:sldId xmlns:r="http://schemas.openxmlformats.org/officeDocument/2006/relationships" id="266" r:id="Re684bb071c8342fc"/>
+    <p:sldId xmlns:r="http://schemas.openxmlformats.org/officeDocument/2006/relationships" id="267" r:id="R97417fb4fca74fbe"/>
+    <p:sldId xmlns:r="http://schemas.openxmlformats.org/officeDocument/2006/relationships" id="268" r:id="R495f4d6f988c422c"/>
+    <p:sldId xmlns:r="http://schemas.openxmlformats.org/officeDocument/2006/relationships" id="269" r:id="R6f48fec7feae4c97"/>
+    <p:sldId xmlns:r="http://schemas.openxmlformats.org/officeDocument/2006/relationships" id="270" r:id="R142851b4dcf048dc"/>
   </p:sldIdLst>
   <p:sldSz cx="12192000" cy="6858000"/>
   <p:notesSz cx="6858000" cy="9144000"/>
@@ -2736,7 +2736,7 @@
           <a:lstStyle xmlns:a="http://schemas.openxmlformats.org/drawingml/2006/main"/>
           <a:p xmlns:a="http://schemas.openxmlformats.org/drawingml/2006/main">
             <a:r>
-              <a:t>## S34 — 한 번의 사용에서 확인된 것</a:t>
+              <a:t>## S34 — AGENTS.md의 지침대로 검증했다</a:t>
             </a:r>
           </a:p>
           <a:p xmlns:a="http://schemas.openxmlformats.org/drawingml/2006/main">
@@ -2756,7 +2756,7 @@
           </a:p>
           <a:p xmlns:a="http://schemas.openxmlformats.org/drawingml/2006/main">
             <a:r>
-              <a:t>Working Title: 한 번의 사용에서 확인된 것</a:t>
+              <a:t>Working Title: AGENTS.md의 지침대로 검증했다</a:t>
             </a:r>
           </a:p>
           <a:p xmlns:a="http://schemas.openxmlformats.org/drawingml/2006/main">
@@ -2796,7 +2796,7 @@
           </a:p>
           <a:p xmlns:a="http://schemas.openxmlformats.org/drawingml/2006/main">
             <a:r>
-              <a:t>Primary Message: In the recorded TRIAL-003 run, the agent inspected `AGENTS.md` and used the documented test command that was absent from the Task Prompt.</a:t>
+              <a:t>Primary Message: 이번 기록에서는 Agent가 AGENTS.md의 테스트 지침을 실제 작업에 적용했다. 작업 Prompt에는 검증 근거 보고가 있었지만 테스트 실행 명령은 없었다.</a:t>
             </a:r>
           </a:p>
           <a:p xmlns:a="http://schemas.openxmlformats.org/drawingml/2006/main">
@@ -2806,7 +2806,7 @@
           </a:p>
           <a:p xmlns:a="http://schemas.openxmlformats.org/drawingml/2006/main">
             <a:r>
-              <a:t>Opening Question: “Prompt에 없던 test command는 어디서 왔을까?”</a:t>
+              <a:t>Opening Question: “Prompt에 다시 적지 않은 테스트 명령을 Agent는 어디에서 확인했을까?”</a:t>
             </a:r>
           </a:p>
           <a:p xmlns:a="http://schemas.openxmlformats.org/drawingml/2006/main">
@@ -2826,17 +2826,22 @@
           </a:p>
           <a:p xmlns:a="http://schemas.openxmlformats.org/drawingml/2006/main">
             <a:r>
-              <a:t>1. (0:00–1:00) 왼쪽 요청에는 README-only 범위가 있었지만 전체 테스트 명령은 없었다고 짚는다.</a:t>
-            </a:r>
-          </a:p>
-          <a:p xmlns:a="http://schemas.openxmlformats.org/drawingml/2006/main">
-            <a:r>
-              <a:t>2. (1:00–3:00) 가운데 AGENTS.md 접근과 기록된 테스트 명령 사용을 오른쪽 11/11 PASS 기록에 연결한다. 화면은 Trial 기록을 요약한 설명 구조다.</a:t>
-            </a:r>
-          </a:p>
-          <a:p xmlns:a="http://schemas.openxmlformats.org/drawingml/2006/main">
-            <a:r>
-              <a:t>3. (3:00–4:00) Personal/global Skills도 실행됐으므로 AGENTS.md 단독 효과를 분리할 수 없다고 밝힌다. README-only 범위는 요청에도 있었다고 마무리한다.</a:t>
+              <a:t>1. (0:00–1:00) 왼쪽 Prompt 창의 실제 요청 핵심 발췌·번역을 읽는다. README Test 절의 과거 STATE-00 실패와 현재 checkout을 구분하고, README.md만 변경하며 최종 diff·관련 검증 근거를 보고하라는 실제 요청이다. 아래 원문 밖 주석은 교육자의 설명이며 Agent에게 보낸 문장이 아니다. 검증 자체를 요청하지 않은 것이 아니라 구체 테스트 명령을 Prompt에 넣지 않은 것이다.</a:t>
+            </a:r>
+          </a:p>
+          <a:p xmlns:a="http://schemas.openxmlformats.org/drawingml/2006/main">
+            <a:r>
+              <a:t>2. (1:00–2:00) 가운데 AGENTS.md가 프로젝트 작업 지침이라는 역할을 강조한다. STATE-01 지침은 지정된 unittest 명령으로 테스트를 실행하라고 한다. TRIAL-003에서는 Agent가 루트 지침을 확인·출력한 뒤 그 프로젝트 테스트 명령을 실행했다. 파일을 읽었다는 사실에 더해 테스트 지침과 대응하는 실행 기록이 있음을 보여준다.</a:t>
+            </a:r>
+          </a:p>
+          <a:p xmlns:a="http://schemas.openxmlformats.org/drawingml/2006/main">
+            <a:r>
+              <a:t>3. (2:00–3:00) 오른쪽 전체11/11 PASS는 당시 관찰 결과다. 실제 실행은 지침의 PYTHONPATH=src python3 -m unittest discover -s tests -v 앞에 PYTHONDONTWRITEBYTECODE=1을 붙였다. 전체 command bytes가 동일하다거나 새 실행 결과라고 표현하지 않는다. 명령 옵션별 설명이나 입력 실습으로 확장하지 않는다.</a:t>
+            </a:r>
+          </a:p>
+          <a:p xmlns:a="http://schemas.openxmlformats.org/drawingml/2006/main">
+            <a:r>
+              <a:t>4. (3:00–4:00) 하단의 Prompt 밖 테스트 지침이 실제 실행에 적용됐다는 메시지를 회수한다. Personal/global Skills도 실행됐고 active instruction-chain dump가 없어 강제 준수 보장·AGENTS.md 단독 효과·모든 규칙 준수는 증명하지 않는다. README-only는 Prompt에도 있었으므로 독립적인 지침 효과로 세지 않는다. Task Prompt와 Project Context의 역할을 나누는 S35로 연결한다.</a:t>
             </a:r>
           </a:p>
           <a:p xmlns:a="http://schemas.openxmlformats.org/drawingml/2006/main">
@@ -2846,7 +2851,7 @@
           </a:p>
           <a:p xmlns:a="http://schemas.openxmlformats.org/drawingml/2006/main">
             <a:r>
-              <a:t>Evidence / Source: TRIAL-003, STATE-01, DEMO-02. OBSERVED_PRODUCT; one recorded CLI run. Personal/global Skills also ran.</a:t>
+              <a:t>Evidence / Source: TRIAL-003 / STATE-01 / DEMO-02 / OBSERVED_PRODUCT. plan/DEMO_MATRIX.md의 Interface/Product627–634행, 실제 Prompt636–644행, Verification657–672행, Project Context Used674–678행. 지침 명령은 ai-dev-training-demo STATE-01 AGENTS.md9행과 대조했다. 행 번호는 DEC-0046 작성 시점의 locator다. 원본 Trial·지침은 수정하지 않았다.</a:t>
             </a:r>
           </a:p>
           <a:p xmlns:a="http://schemas.openxmlformats.org/drawingml/2006/main">
@@ -2856,7 +2861,7 @@
           </a:p>
           <a:p xmlns:a="http://schemas.openxmlformats.org/drawingml/2006/main">
             <a:r>
-              <a:t>Claim Boundary: This run does not isolate an independent causal effect of `AGENTS.md`, establish general superiority, or show that repository guidance alone determined file scope.</a:t>
+              <a:t>Claim Boundary: 단일 CLI 실행의 테스트 지침 사용 관찰이다. 테스트 명령이 없었다는 주석은 실제 지시문이 아니며, 요청에는 최종 diff와 관련 검증 근거 보고가 있었다. AGENTS.md가 모든 지침 준수를 강제했다거나 단독 원인이었다고 주장하지 않는다. Personal readchk/re0/sip도 실행됐고 active instruction-chain trace가 없다. README-only는 Prompt와 중복된 제약이며 local-data/runtime-dependency 규칙은 이번 작업에서 필요하지 않았다. 현재 Desktop·계정·반복성·성능·정확도·토큰 절감 근거가 아니다.</a:t>
             </a:r>
           </a:p>
           <a:p xmlns:a="http://schemas.openxmlformats.org/drawingml/2006/main">
@@ -2866,7 +2871,7 @@
           </a:p>
           <a:p xmlns:a="http://schemas.openxmlformats.org/drawingml/2006/main">
             <a:r>
-              <a:t>Beginner Explanation: The record shows one example where a Project test command was available outside the current Prompt and was used.</a:t>
+              <a:t>Beginner Explanation: 실제 Prompt는 현재 README 작업을 요청한다. AGENTS.md는 프로젝트 작업 지침을 담고 있으며 이 기록에서는 그 테스트 지침의 명령을 사용했다. 검증 근거 요청과 구체 테스트 명령의 위치를 구분한다.</a:t>
             </a:r>
           </a:p>
           <a:p xmlns:a="http://schemas.openxmlformats.org/drawingml/2006/main">
@@ -2876,7 +2881,7 @@
           </a:p>
           <a:p xmlns:a="http://schemas.openxmlformats.org/drawingml/2006/main">
             <a:r>
-              <a:t>Advanced Insight: Keep the observed action, other active instructions, and Task scope separate when interpreting causality.</a:t>
+              <a:t>Advanced Insight: Observed use of the repository test instruction is supported. Enforcement, an isolated instruction-loading cause and attribution of README-only scope to AGENTS.md are not established by this run.</a:t>
             </a:r>
           </a:p>
           <a:p xmlns:a="http://schemas.openxmlformats.org/drawingml/2006/main">
@@ -2896,7 +2901,7 @@
           </a:p>
           <a:p xmlns:a="http://schemas.openxmlformats.org/drawingml/2006/main">
             <a:r>
-              <a:t>Demo Operation: Present the captured/reconstructed Trial record. Do not represent it as a current Desktop run or a live screenshot. HYBRID activation is UNVERIFIED.</a:t>
+              <a:t>Demo Operation: 기존 DEMO-02의 Demo4분에 실제 요청 발췌·번역, 외부 주석, 지침 적용 관찰,11/11 결과를 순서대로 가리킨다. 화면은 기록 요약이며 실제 제품 입력창·터미널 캡처 또는 현재 Desktop 실행이 아니다. HYBRID 활성화는 UNVERIFIED이고 기본 경로는 정적 PPT/PNG다.</a:t>
             </a:r>
           </a:p>
           <a:p xmlns:a="http://schemas.openxmlformats.org/drawingml/2006/main">
@@ -2926,7 +2931,7 @@
           </a:p>
           <a:p xmlns:a="http://schemas.openxmlformats.org/drawingml/2006/main">
             <a:r>
-              <a:t>Time Management: Use three minutes for the recorded sequence and one minute for the causal boundary. Do not elaborate on unrelated Trial details.</a:t>
+              <a:t>Time Management: 1분 실제 요청과 외부 주석,1분 프로젝트 작업 지침,1분 테스트 실행·11/11 결과,1분 해석 한계와 S35 연결. Demo4분·기존 Mode는 유지하며 실측 리허설은 UNVERIFIED다.</a:t>
             </a:r>
           </a:p>
           <a:p xmlns:a="http://schemas.openxmlformats.org/drawingml/2006/main">
@@ -2936,7 +2941,7 @@
           </a:p>
           <a:p xmlns:a="http://schemas.openxmlformats.org/drawingml/2006/main">
             <a:r>
-              <a:t>Fallback: LOCAL STATIC ARTIFACT — 발표 기본 경로는 `production/ACT_2.pptx`의 S34 또는 `production/preview/act2/S34.png`다. 수정 초안 정적 화면은 존재하며 최종 release 경로·내용 일치는 통합 검토에서 확인한다. 실제 Trial 캡처나 현재 제품 실행으로 표현하지 않는다.</a:t>
+              <a:t>Fallback: production/ACT_2.pptx S34 또는 production/preview/act2/S34.png를 정적 기본 경로로 사용한다. 실제 Prompt 발췌·번역과 원문 밖 주석을 구분한다. 로컬 렌더·내장 Notes 대조는 production/evaluation/S34_GUIDANCE_REVISION.md를 따른다. 원본 Trial 캡처나 새 실행을 만들지 않는다.</a:t>
             </a:r>
           </a:p>
           <a:p xmlns:a="http://schemas.openxmlformats.org/drawingml/2006/main">
@@ -2946,7 +2951,7 @@
           </a:p>
           <a:p xmlns:a="http://schemas.openxmlformats.org/drawingml/2006/main">
             <a:r>
-              <a:t>Validation Status: REVIEWED — 원문·Claim 경계, 화면의 설명 순서와 운영 지침을 대조했다. 최종 PPT/Notes/PNG 대조 결과는 production/evaluation/FULL_DECK_PRESENTATION_REVISION.md에 기록한다. Windows PowerPoint, 발표 PC 글꼴, 교육장 투사, 실제 시간 리허설은 UNVERIFIED.</a:t>
+              <a:t>Validation Status: ALIGNED — DEC-0046의 실제 Prompt/외부 주석 분리와 관찰된 지침 준수 강조를 반영했다. 최종 PPT/Notes/PNG 검토는 production/evaluation/S34_GUIDANCE_REVISION.md에 기록한다. Windows PowerPoint·발표 PC 글꼴·교육장·현재 제품/계정·실측 리허설은 UNVERIFIED.</a:t>
             </a:r>
           </a:p>
         </p:txBody>
@@ -4703,7 +4708,7 @@
           <p:cNvPr id="3" name="Title">
             <a:extLst xmlns:a="http://schemas.openxmlformats.org/drawingml/2006/main">
               <a:ext uri="{FF2B5EF4-FFF2-40B4-BE49-F238E27FC236}">
-                <a16:creationId xmlns:a16="http://schemas.microsoft.com/office/drawing/2014/main" id="{007A0870-7C90-46FA-854D-4258A25D3851}"/>
+                <a16:creationId xmlns:a16="http://schemas.microsoft.com/office/drawing/2014/main" id="{B7DF5881-264E-44D7-A635-3BB714D7F12A}"/>
               </a:ext>
             </a:extLst>
           </p:cNvPr>
@@ -4932,7 +4937,7 @@
           <p:cNvPr id="2" name="Subtitle">
             <a:extLst xmlns:a="http://schemas.openxmlformats.org/drawingml/2006/main">
               <a:ext uri="{FF2B5EF4-FFF2-40B4-BE49-F238E27FC236}">
-                <a16:creationId xmlns:a16="http://schemas.microsoft.com/office/drawing/2014/main" id="{0D5C75F9-2616-4143-9AAF-84B2E42A7676}"/>
+                <a16:creationId xmlns:a16="http://schemas.microsoft.com/office/drawing/2014/main" id="{B90DCB29-F45E-4712-B650-643FFBC7EC0A}"/>
               </a:ext>
             </a:extLst>
           </p:cNvPr>
@@ -5178,7 +5183,7 @@
           <p:cNvPr id="2" name="Section title">
             <a:extLst xmlns:a="http://schemas.openxmlformats.org/drawingml/2006/main">
               <a:ext uri="{FF2B5EF4-FFF2-40B4-BE49-F238E27FC236}">
-                <a16:creationId xmlns:a16="http://schemas.microsoft.com/office/drawing/2014/main" id="{E32039E4-9C48-48AC-9653-C32111F23AE9}"/>
+                <a16:creationId xmlns:a16="http://schemas.microsoft.com/office/drawing/2014/main" id="{F330AF74-ED51-4219-8425-AAAA778F5911}"/>
               </a:ext>
             </a:extLst>
           </p:cNvPr>
@@ -5424,7 +5429,7 @@
           <p:cNvPr id="3" name="Title">
             <a:extLst xmlns:a="http://schemas.openxmlformats.org/drawingml/2006/main">
               <a:ext uri="{FF2B5EF4-FFF2-40B4-BE49-F238E27FC236}">
-                <a16:creationId xmlns:a16="http://schemas.microsoft.com/office/drawing/2014/main" id="{44917C48-E4B6-471E-B4E0-DCF77361CAD9}"/>
+                <a16:creationId xmlns:a16="http://schemas.microsoft.com/office/drawing/2014/main" id="{A084F0B4-6A34-49C8-A8B6-8CF9A60DEAAB}"/>
               </a:ext>
             </a:extLst>
           </p:cNvPr>
@@ -5653,7 +5658,7 @@
           <p:cNvPr id="2" name="Body">
             <a:extLst xmlns:a="http://schemas.openxmlformats.org/drawingml/2006/main">
               <a:ext uri="{FF2B5EF4-FFF2-40B4-BE49-F238E27FC236}">
-                <a16:creationId xmlns:a16="http://schemas.microsoft.com/office/drawing/2014/main" id="{2C9FA366-C8D4-4CAF-BCBA-D67A04503383}"/>
+                <a16:creationId xmlns:a16="http://schemas.microsoft.com/office/drawing/2014/main" id="{264FDFBA-E59F-41E2-8E70-CA593FEBCA18}"/>
               </a:ext>
             </a:extLst>
           </p:cNvPr>
@@ -5899,7 +5904,7 @@
           <p:cNvPr id="4" name="Title">
             <a:extLst xmlns:a="http://schemas.openxmlformats.org/drawingml/2006/main">
               <a:ext uri="{FF2B5EF4-FFF2-40B4-BE49-F238E27FC236}">
-                <a16:creationId xmlns:a16="http://schemas.microsoft.com/office/drawing/2014/main" id="{053C24BB-79E9-47E6-B28A-8AC01C4179B6}"/>
+                <a16:creationId xmlns:a16="http://schemas.microsoft.com/office/drawing/2014/main" id="{B9A8F840-72F3-4584-91B1-2E7C1ECEE34D}"/>
               </a:ext>
             </a:extLst>
           </p:cNvPr>
@@ -6128,7 +6133,7 @@
           <p:cNvPr id="2" name="Left column">
             <a:extLst xmlns:a="http://schemas.openxmlformats.org/drawingml/2006/main">
               <a:ext uri="{FF2B5EF4-FFF2-40B4-BE49-F238E27FC236}">
-                <a16:creationId xmlns:a16="http://schemas.microsoft.com/office/drawing/2014/main" id="{E7D58B39-83C6-45BD-944E-B54CC68D1642}"/>
+                <a16:creationId xmlns:a16="http://schemas.microsoft.com/office/drawing/2014/main" id="{8B691EE8-2295-4E30-BF1C-72EEF33C3B8C}"/>
               </a:ext>
             </a:extLst>
           </p:cNvPr>
@@ -6357,7 +6362,7 @@
           <p:cNvPr id="3" name="Right column">
             <a:extLst xmlns:a="http://schemas.openxmlformats.org/drawingml/2006/main">
               <a:ext uri="{FF2B5EF4-FFF2-40B4-BE49-F238E27FC236}">
-                <a16:creationId xmlns:a16="http://schemas.microsoft.com/office/drawing/2014/main" id="{7D72AA0E-DF5C-4CDC-AD0B-F67BB168EAD3}"/>
+                <a16:creationId xmlns:a16="http://schemas.microsoft.com/office/drawing/2014/main" id="{84BB77F0-5B8D-4DCF-A85A-02A4C2F420B7}"/>
               </a:ext>
             </a:extLst>
           </p:cNvPr>
@@ -6603,7 +6608,7 @@
           <p:cNvPr id="3" name="Title">
             <a:extLst xmlns:a="http://schemas.openxmlformats.org/drawingml/2006/main">
               <a:ext uri="{FF2B5EF4-FFF2-40B4-BE49-F238E27FC236}">
-                <a16:creationId xmlns:a16="http://schemas.microsoft.com/office/drawing/2014/main" id="{AE56343C-FE5D-419E-99D9-923904A47945}"/>
+                <a16:creationId xmlns:a16="http://schemas.microsoft.com/office/drawing/2014/main" id="{3F929841-6CAF-4866-ACCF-BE9D688833FE}"/>
               </a:ext>
             </a:extLst>
           </p:cNvPr>
@@ -6832,7 +6837,7 @@
           <p:cNvPr id="2" name="Left column">
             <a:extLst xmlns:a="http://schemas.openxmlformats.org/drawingml/2006/main">
               <a:ext uri="{FF2B5EF4-FFF2-40B4-BE49-F238E27FC236}">
-                <a16:creationId xmlns:a16="http://schemas.microsoft.com/office/drawing/2014/main" id="{06D1CE9B-FE8A-4118-8F77-2B83D94BF2C7}"/>
+                <a16:creationId xmlns:a16="http://schemas.microsoft.com/office/drawing/2014/main" id="{9044E1F5-6AF5-4459-B687-2414A996E388}"/>
               </a:ext>
             </a:extLst>
           </p:cNvPr>
@@ -7099,12 +7104,12 @@
   </p:cSld>
   <p:clrMap bg1="lt1" tx1="dk1" bg2="lt2" tx2="dk2" accent1="accent1" accent2="accent2" accent3="accent3" accent4="accent4" accent5="accent5" accent6="accent6" hlink="hlink" folHlink="folHlink"/>
   <p:sldLayoutIdLst>
-    <p:sldLayoutId xmlns:r="http://schemas.openxmlformats.org/officeDocument/2006/relationships" id="2147483649" r:id="R4a51a0b39c4141d2"/>
-    <p:sldLayoutId xmlns:r="http://schemas.openxmlformats.org/officeDocument/2006/relationships" id="2147483650" r:id="Rf9bd4775177e4486"/>
-    <p:sldLayoutId xmlns:r="http://schemas.openxmlformats.org/officeDocument/2006/relationships" id="2147483651" r:id="Rb45675ea0eb241d2"/>
-    <p:sldLayoutId xmlns:r="http://schemas.openxmlformats.org/officeDocument/2006/relationships" id="2147483652" r:id="R3dcd61b9fbf8483a"/>
-    <p:sldLayoutId xmlns:r="http://schemas.openxmlformats.org/officeDocument/2006/relationships" id="2147483653" r:id="Ra1220709701b4bb8"/>
-    <p:sldLayoutId xmlns:r="http://schemas.openxmlformats.org/officeDocument/2006/relationships" id="2147483654" r:id="R2d5e7bb1917d488d"/>
+    <p:sldLayoutId xmlns:r="http://schemas.openxmlformats.org/officeDocument/2006/relationships" id="2147483649" r:id="R1bc9d7cdfdd54871"/>
+    <p:sldLayoutId xmlns:r="http://schemas.openxmlformats.org/officeDocument/2006/relationships" id="2147483650" r:id="Ra085ec864561459a"/>
+    <p:sldLayoutId xmlns:r="http://schemas.openxmlformats.org/officeDocument/2006/relationships" id="2147483651" r:id="R759f130e187c453e"/>
+    <p:sldLayoutId xmlns:r="http://schemas.openxmlformats.org/officeDocument/2006/relationships" id="2147483652" r:id="R08ac9a16f6ad4c6b"/>
+    <p:sldLayoutId xmlns:r="http://schemas.openxmlformats.org/officeDocument/2006/relationships" id="2147483653" r:id="Rfc9c5bb7d8144efc"/>
+    <p:sldLayoutId xmlns:r="http://schemas.openxmlformats.org/officeDocument/2006/relationships" id="2147483654" r:id="R48cf5b3273844c95"/>
   </p:sldLayoutIdLst>
   <p:txStyles>
     <p:titleStyle>
@@ -7655,7 +7660,7 @@
           <p:cNvPr id="24" name="ACT 2 · 반복되는 프로젝트 설명">
             <a:extLst xmlns:a="http://schemas.openxmlformats.org/drawingml/2006/main">
               <a:ext uri="{FF2B5EF4-FFF2-40B4-BE49-F238E27FC236}">
-                <a16:creationId xmlns:a16="http://schemas.microsoft.com/office/drawing/2014/main" id="{4A4247C4-E68E-4B22-AE4E-3C3CBD2D4FBC}"/>
+                <a16:creationId xmlns:a16="http://schemas.microsoft.com/office/drawing/2014/main" id="{D0894A7B-3DC7-4332-A05B-66001CD426DC}"/>
               </a:ext>
             </a:extLst>
           </p:cNvPr>
@@ -7813,7 +7818,7 @@
           <p:cNvPr id="2" name="S32">
             <a:extLst xmlns:a="http://schemas.openxmlformats.org/drawingml/2006/main">
               <a:ext uri="{FF2B5EF4-FFF2-40B4-BE49-F238E27FC236}">
-                <a16:creationId xmlns:a16="http://schemas.microsoft.com/office/drawing/2014/main" id="{6E2F74F3-98D9-4A65-BB78-E740F1BFD535}"/>
+                <a16:creationId xmlns:a16="http://schemas.microsoft.com/office/drawing/2014/main" id="{5A675DEA-2A47-4FC4-A319-4265BA083D1D}"/>
               </a:ext>
             </a:extLst>
           </p:cNvPr>
@@ -7971,7 +7976,7 @@
           <p:cNvPr id="3" name="다른 Task에 같은 설명이 반복된다">
             <a:extLst xmlns:a="http://schemas.openxmlformats.org/drawingml/2006/main">
               <a:ext uri="{FF2B5EF4-FFF2-40B4-BE49-F238E27FC236}">
-                <a16:creationId xmlns:a16="http://schemas.microsoft.com/office/drawing/2014/main" id="{9523D165-75B4-49CD-AC6A-A086771D57D0}"/>
+                <a16:creationId xmlns:a16="http://schemas.microsoft.com/office/drawing/2014/main" id="{E4177645-AF9B-4884-BA8D-FA751166A31A}"/>
               </a:ext>
             </a:extLst>
           </p:cNvPr>
@@ -8129,7 +8134,7 @@
           <p:cNvPr id="4" name="">
             <a:extLst xmlns:a="http://schemas.openxmlformats.org/drawingml/2006/main">
               <a:ext uri="{FF2B5EF4-FFF2-40B4-BE49-F238E27FC236}">
-                <a16:creationId xmlns:a16="http://schemas.microsoft.com/office/drawing/2014/main" id="{86F2EDA0-A5CF-4134-B92D-27624D75D98B}"/>
+                <a16:creationId xmlns:a16="http://schemas.microsoft.com/office/drawing/2014/main" id="{33D01951-31EB-4A8F-80DC-C5CD546E84FB}"/>
               </a:ext>
             </a:extLst>
           </p:cNvPr>
@@ -8160,7 +8165,7 @@
           <p:cNvPr id="5" name="교육용 구성 사례 · Bug fix / Performance / README 작업">
             <a:extLst xmlns:a="http://schemas.openxmlformats.org/drawingml/2006/main">
               <a:ext uri="{FF2B5EF4-FFF2-40B4-BE49-F238E27FC236}">
-                <a16:creationId xmlns:a16="http://schemas.microsoft.com/office/drawing/2014/main" id="{D1467637-EDAD-435A-BAF5-4DE5012C1BB0}"/>
+                <a16:creationId xmlns:a16="http://schemas.microsoft.com/office/drawing/2014/main" id="{68E9945C-DD60-43C7-9FB6-C2FB875BF83B}"/>
               </a:ext>
             </a:extLst>
           </p:cNvPr>
@@ -8318,7 +8323,7 @@
           <p:cNvPr id="6" name="서로 다른 요청에 같은 프로젝트 정보가 반복되는 상황을 보여준다">
             <a:extLst xmlns:a="http://schemas.openxmlformats.org/drawingml/2006/main">
               <a:ext uri="{FF2B5EF4-FFF2-40B4-BE49-F238E27FC236}">
-                <a16:creationId xmlns:a16="http://schemas.microsoft.com/office/drawing/2014/main" id="{8A2F0381-DADD-42B4-AACA-3F5927D8FDD7}"/>
+                <a16:creationId xmlns:a16="http://schemas.microsoft.com/office/drawing/2014/main" id="{C7202511-EA80-456C-967E-5AF20CC3AA67}"/>
               </a:ext>
             </a:extLst>
           </p:cNvPr>
@@ -8476,7 +8481,7 @@
           <p:cNvPr id="7" name="버그 수정">
             <a:extLst xmlns:a="http://schemas.openxmlformats.org/drawingml/2006/main">
               <a:ext uri="{FF2B5EF4-FFF2-40B4-BE49-F238E27FC236}">
-                <a16:creationId xmlns:a16="http://schemas.microsoft.com/office/drawing/2014/main" id="{62AE1473-8A9E-4A2D-9F77-07510B8FBF0F}"/>
+                <a16:creationId xmlns:a16="http://schemas.microsoft.com/office/drawing/2014/main" id="{C282B0A4-9045-48C0-944D-FC1093B56742}"/>
               </a:ext>
             </a:extLst>
           </p:cNvPr>
@@ -8634,7 +8639,7 @@
           <p:cNvPr id="8" name="crop 경계를 수정해줘">
             <a:extLst xmlns:a="http://schemas.openxmlformats.org/drawingml/2006/main">
               <a:ext uri="{FF2B5EF4-FFF2-40B4-BE49-F238E27FC236}">
-                <a16:creationId xmlns:a16="http://schemas.microsoft.com/office/drawing/2014/main" id="{89BDABD7-D870-42B2-AE63-EC0FA23C68AF}"/>
+                <a16:creationId xmlns:a16="http://schemas.microsoft.com/office/drawing/2014/main" id="{4225B9E7-DBD8-49BE-AA39-135E547806AF}"/>
               </a:ext>
             </a:extLst>
           </p:cNvPr>
@@ -8792,7 +8797,7 @@
           <p:cNvPr id="9" name="">
             <a:extLst xmlns:a="http://schemas.openxmlformats.org/drawingml/2006/main">
               <a:ext uri="{FF2B5EF4-FFF2-40B4-BE49-F238E27FC236}">
-                <a16:creationId xmlns:a16="http://schemas.microsoft.com/office/drawing/2014/main" id="{DB075F8A-921A-4550-AD77-CF13D2FAACB7}"/>
+                <a16:creationId xmlns:a16="http://schemas.microsoft.com/office/drawing/2014/main" id="{64E02788-4D93-4F0E-BBF3-6F65D199881B}"/>
               </a:ext>
             </a:extLst>
           </p:cNvPr>
@@ -8823,7 +8828,7 @@
           <p:cNvPr id="10" name="">
             <a:extLst xmlns:a="http://schemas.openxmlformats.org/drawingml/2006/main">
               <a:ext uri="{FF2B5EF4-FFF2-40B4-BE49-F238E27FC236}">
-                <a16:creationId xmlns:a16="http://schemas.microsoft.com/office/drawing/2014/main" id="{1BF95B93-5717-4338-A4C3-E2DA1E4BC8E4}"/>
+                <a16:creationId xmlns:a16="http://schemas.microsoft.com/office/drawing/2014/main" id="{4FE2D200-34CD-466F-AA55-29833F87CE77}"/>
               </a:ext>
             </a:extLst>
           </p:cNvPr>
@@ -8854,7 +8859,7 @@
           <p:cNvPr id="11" name="지정된 테스트 실행&#10;의존성 추가에는 근거 필요&#10;로컬 합성 데이터 사용&#10;기존 동작 보존">
             <a:extLst xmlns:a="http://schemas.openxmlformats.org/drawingml/2006/main">
               <a:ext uri="{FF2B5EF4-FFF2-40B4-BE49-F238E27FC236}">
-                <a16:creationId xmlns:a16="http://schemas.microsoft.com/office/drawing/2014/main" id="{251B0F81-7530-413E-96CB-3B04B3859EAD}"/>
+                <a16:creationId xmlns:a16="http://schemas.microsoft.com/office/drawing/2014/main" id="{29917155-FC76-493D-8C6C-6C22B593D025}"/>
               </a:ext>
             </a:extLst>
           </p:cNvPr>
@@ -9081,7 +9086,7 @@
           <p:cNvPr id="12" name="성능 조사">
             <a:extLst xmlns:a="http://schemas.openxmlformats.org/drawingml/2006/main">
               <a:ext uri="{FF2B5EF4-FFF2-40B4-BE49-F238E27FC236}">
-                <a16:creationId xmlns:a16="http://schemas.microsoft.com/office/drawing/2014/main" id="{6A977824-D12A-428D-9A7F-C63C94B572E8}"/>
+                <a16:creationId xmlns:a16="http://schemas.microsoft.com/office/drawing/2014/main" id="{96025AC1-DD4F-4ED8-8DCB-0F9760AF8645}"/>
               </a:ext>
             </a:extLst>
           </p:cNvPr>
@@ -9239,7 +9244,7 @@
           <p:cNvPr id="13" name="통계 계산을 조사해줘">
             <a:extLst xmlns:a="http://schemas.openxmlformats.org/drawingml/2006/main">
               <a:ext uri="{FF2B5EF4-FFF2-40B4-BE49-F238E27FC236}">
-                <a16:creationId xmlns:a16="http://schemas.microsoft.com/office/drawing/2014/main" id="{D280E139-2872-4E85-8983-302191E4A33A}"/>
+                <a16:creationId xmlns:a16="http://schemas.microsoft.com/office/drawing/2014/main" id="{8BA64B73-C3CF-4918-B115-583C7BAB59AB}"/>
               </a:ext>
             </a:extLst>
           </p:cNvPr>
@@ -9397,7 +9402,7 @@
           <p:cNvPr id="14" name="">
             <a:extLst xmlns:a="http://schemas.openxmlformats.org/drawingml/2006/main">
               <a:ext uri="{FF2B5EF4-FFF2-40B4-BE49-F238E27FC236}">
-                <a16:creationId xmlns:a16="http://schemas.microsoft.com/office/drawing/2014/main" id="{E30A9A6A-9398-4289-B7FD-7583A1158B7D}"/>
+                <a16:creationId xmlns:a16="http://schemas.microsoft.com/office/drawing/2014/main" id="{6B0121EC-C41B-4F2C-A6A6-CA4C899E9EEE}"/>
               </a:ext>
             </a:extLst>
           </p:cNvPr>
@@ -9428,7 +9433,7 @@
           <p:cNvPr id="15" name="">
             <a:extLst xmlns:a="http://schemas.openxmlformats.org/drawingml/2006/main">
               <a:ext uri="{FF2B5EF4-FFF2-40B4-BE49-F238E27FC236}">
-                <a16:creationId xmlns:a16="http://schemas.microsoft.com/office/drawing/2014/main" id="{EBA1AC4F-2A09-4BE6-81F4-83EF90C6574B}"/>
+                <a16:creationId xmlns:a16="http://schemas.microsoft.com/office/drawing/2014/main" id="{48CC922E-09A9-4041-A8A4-8317F182171B}"/>
               </a:ext>
             </a:extLst>
           </p:cNvPr>
@@ -9459,7 +9464,7 @@
           <p:cNvPr id="16" name="지정된 테스트 실행&#10;의존성 추가에는 근거 필요&#10;로컬 합성 데이터 사용&#10;기존 동작 보존">
             <a:extLst xmlns:a="http://schemas.openxmlformats.org/drawingml/2006/main">
               <a:ext uri="{FF2B5EF4-FFF2-40B4-BE49-F238E27FC236}">
-                <a16:creationId xmlns:a16="http://schemas.microsoft.com/office/drawing/2014/main" id="{7DB0345B-2446-43D5-BA91-63D465F99A2B}"/>
+                <a16:creationId xmlns:a16="http://schemas.microsoft.com/office/drawing/2014/main" id="{0E89AD4C-D78C-4A50-8ACA-10BAAE023722}"/>
               </a:ext>
             </a:extLst>
           </p:cNvPr>
@@ -9686,7 +9691,7 @@
           <p:cNvPr id="17" name="README 수정">
             <a:extLst xmlns:a="http://schemas.openxmlformats.org/drawingml/2006/main">
               <a:ext uri="{FF2B5EF4-FFF2-40B4-BE49-F238E27FC236}">
-                <a16:creationId xmlns:a16="http://schemas.microsoft.com/office/drawing/2014/main" id="{FB5E309A-43D5-4747-B374-FE48DB385FF8}"/>
+                <a16:creationId xmlns:a16="http://schemas.microsoft.com/office/drawing/2014/main" id="{09000C0F-9C61-49B2-84D9-4EF6F3DD42C2}"/>
               </a:ext>
             </a:extLst>
           </p:cNvPr>
@@ -9844,7 +9849,7 @@
           <p:cNvPr id="18" name="빌드 안내를 명확히 해줘">
             <a:extLst xmlns:a="http://schemas.openxmlformats.org/drawingml/2006/main">
               <a:ext uri="{FF2B5EF4-FFF2-40B4-BE49-F238E27FC236}">
-                <a16:creationId xmlns:a16="http://schemas.microsoft.com/office/drawing/2014/main" id="{0F5DA080-CA6A-49C1-90E1-BDF2A837131A}"/>
+                <a16:creationId xmlns:a16="http://schemas.microsoft.com/office/drawing/2014/main" id="{0E1C9DEA-C849-49D3-A811-6CB8571E4F75}"/>
               </a:ext>
             </a:extLst>
           </p:cNvPr>
@@ -10002,7 +10007,7 @@
           <p:cNvPr id="19" name="">
             <a:extLst xmlns:a="http://schemas.openxmlformats.org/drawingml/2006/main">
               <a:ext uri="{FF2B5EF4-FFF2-40B4-BE49-F238E27FC236}">
-                <a16:creationId xmlns:a16="http://schemas.microsoft.com/office/drawing/2014/main" id="{10535672-104A-41C8-B045-245837C40A3E}"/>
+                <a16:creationId xmlns:a16="http://schemas.microsoft.com/office/drawing/2014/main" id="{3A9E51D3-2503-481B-9C6C-4AABB9B77D28}"/>
               </a:ext>
             </a:extLst>
           </p:cNvPr>
@@ -10033,7 +10038,7 @@
           <p:cNvPr id="20" name="">
             <a:extLst xmlns:a="http://schemas.openxmlformats.org/drawingml/2006/main">
               <a:ext uri="{FF2B5EF4-FFF2-40B4-BE49-F238E27FC236}">
-                <a16:creationId xmlns:a16="http://schemas.microsoft.com/office/drawing/2014/main" id="{0AFB77C3-A29D-439B-A7E9-ECBF21164EF1}"/>
+                <a16:creationId xmlns:a16="http://schemas.microsoft.com/office/drawing/2014/main" id="{5539C1A1-CCE9-4856-95D9-85C0166D7FBF}"/>
               </a:ext>
             </a:extLst>
           </p:cNvPr>
@@ -10064,7 +10069,7 @@
           <p:cNvPr id="21" name="지정된 테스트 실행&#10;의존성 추가에는 근거 필요&#10;로컬 합성 데이터 사용&#10;기존 동작 보존">
             <a:extLst xmlns:a="http://schemas.openxmlformats.org/drawingml/2006/main">
               <a:ext uri="{FF2B5EF4-FFF2-40B4-BE49-F238E27FC236}">
-                <a16:creationId xmlns:a16="http://schemas.microsoft.com/office/drawing/2014/main" id="{40773AD9-3DCB-4D7E-A421-8ADDE681FF34}"/>
+                <a16:creationId xmlns:a16="http://schemas.microsoft.com/office/drawing/2014/main" id="{852A6C1A-FF2F-4CC5-AA06-1120DFDE2553}"/>
               </a:ext>
             </a:extLst>
           </p:cNvPr>
@@ -10291,7 +10296,7 @@
           <p:cNvPr id="22" name="요청은 다른데, 아래 설명은 왜 계속 같을까?">
             <a:extLst xmlns:a="http://schemas.openxmlformats.org/drawingml/2006/main">
               <a:ext uri="{FF2B5EF4-FFF2-40B4-BE49-F238E27FC236}">
-                <a16:creationId xmlns:a16="http://schemas.microsoft.com/office/drawing/2014/main" id="{E23EADF8-91C3-4C89-B92C-CA6428EB86A8}"/>
+                <a16:creationId xmlns:a16="http://schemas.microsoft.com/office/drawing/2014/main" id="{A1D01295-DCAA-44A0-AFCB-27806E9CBD6B}"/>
               </a:ext>
             </a:extLst>
           </p:cNvPr>
@@ -10449,7 +10454,7 @@
           <p:cNvPr id="23" name="Legacy module connection">
             <a:extLst xmlns:a="http://schemas.openxmlformats.org/drawingml/2006/main">
               <a:ext uri="{FF2B5EF4-FFF2-40B4-BE49-F238E27FC236}">
-                <a16:creationId xmlns:a16="http://schemas.microsoft.com/office/drawing/2014/main" id="{A5558DDC-B0A1-40E3-B93F-0AC8BBAB452F}"/>
+                <a16:creationId xmlns:a16="http://schemas.microsoft.com/office/drawing/2014/main" id="{EF94BF3A-A7AB-41D4-94FB-6D0322FD1EFE}"/>
               </a:ext>
             </a:extLst>
           </p:cNvPr>
@@ -10605,7 +10610,7 @@
     </p:spTree>
     <p:extLst>
       <p:ext uri="{BB962C8B-B14F-4D97-AF65-F5344CB8AC3E}">
-        <p14:creationId xmlns:p14="http://schemas.microsoft.com/office/powerpoint/2010/main" val="1947119079"/>
+        <p14:creationId xmlns:p14="http://schemas.microsoft.com/office/powerpoint/2010/main" val="1792335939"/>
       </p:ext>
     </p:extLst>
   </p:cSld>
@@ -10636,7 +10641,7 @@
           <p:cNvPr id="24" name="ACT 2 · Core에 남길 기본 안내">
             <a:extLst xmlns:a="http://schemas.openxmlformats.org/drawingml/2006/main">
               <a:ext uri="{FF2B5EF4-FFF2-40B4-BE49-F238E27FC236}">
-                <a16:creationId xmlns:a16="http://schemas.microsoft.com/office/drawing/2014/main" id="{F279B446-B9D8-47CE-88F2-C93B32D5BF8A}"/>
+                <a16:creationId xmlns:a16="http://schemas.microsoft.com/office/drawing/2014/main" id="{BF04823F-D1EE-4D15-B595-13951C4E5801}"/>
               </a:ext>
             </a:extLst>
           </p:cNvPr>
@@ -10794,7 +10799,7 @@
           <p:cNvPr id="2" name="S41">
             <a:extLst xmlns:a="http://schemas.openxmlformats.org/drawingml/2006/main">
               <a:ext uri="{FF2B5EF4-FFF2-40B4-BE49-F238E27FC236}">
-                <a16:creationId xmlns:a16="http://schemas.microsoft.com/office/drawing/2014/main" id="{CFDDF731-0B6E-49F5-BB51-A8EDC25B1592}"/>
+                <a16:creationId xmlns:a16="http://schemas.microsoft.com/office/drawing/2014/main" id="{418DE1F6-54BB-4BBB-8BAD-25B4855D260A}"/>
               </a:ext>
             </a:extLst>
           </p:cNvPr>
@@ -10952,7 +10957,7 @@
           <p:cNvPr id="3" name="Core Context에서 상세 정보로 가는 길">
             <a:extLst xmlns:a="http://schemas.openxmlformats.org/drawingml/2006/main">
               <a:ext uri="{FF2B5EF4-FFF2-40B4-BE49-F238E27FC236}">
-                <a16:creationId xmlns:a16="http://schemas.microsoft.com/office/drawing/2014/main" id="{0FABFB5F-FE2A-4D60-A995-9C9C35AA059B}"/>
+                <a16:creationId xmlns:a16="http://schemas.microsoft.com/office/drawing/2014/main" id="{5A017F05-43F1-44F7-AA02-5F232EE2AF3E}"/>
               </a:ext>
             </a:extLst>
           </p:cNvPr>
@@ -11110,7 +11115,7 @@
           <p:cNvPr id="4" name="">
             <a:extLst xmlns:a="http://schemas.openxmlformats.org/drawingml/2006/main">
               <a:ext uri="{FF2B5EF4-FFF2-40B4-BE49-F238E27FC236}">
-                <a16:creationId xmlns:a16="http://schemas.microsoft.com/office/drawing/2014/main" id="{5D14997F-3F88-4914-BB61-E3CB0E82A281}"/>
+                <a16:creationId xmlns:a16="http://schemas.microsoft.com/office/drawing/2014/main" id="{705070AD-B1DA-4CEE-97FD-EB5AEFC462CA}"/>
               </a:ext>
             </a:extLst>
           </p:cNvPr>
@@ -11141,7 +11146,7 @@
           <p:cNvPr id="5" name="교육용 정보 설계 · Root/Core는 상세 정보의 출발점">
             <a:extLst xmlns:a="http://schemas.openxmlformats.org/drawingml/2006/main">
               <a:ext uri="{FF2B5EF4-FFF2-40B4-BE49-F238E27FC236}">
-                <a16:creationId xmlns:a16="http://schemas.microsoft.com/office/drawing/2014/main" id="{4871D425-F804-406A-8918-288142E079A2}"/>
+                <a16:creationId xmlns:a16="http://schemas.microsoft.com/office/drawing/2014/main" id="{47443AC8-BDA1-4E2C-B969-4EA91538582D}"/>
               </a:ext>
             </a:extLst>
           </p:cNvPr>
@@ -11299,7 +11304,7 @@
           <p:cNvPr id="6" name="C++ 예: build/test 진입점과 기본 제약 → 알고리즘 계약·하드웨어 조건">
             <a:extLst xmlns:a="http://schemas.openxmlformats.org/drawingml/2006/main">
               <a:ext uri="{FF2B5EF4-FFF2-40B4-BE49-F238E27FC236}">
-                <a16:creationId xmlns:a16="http://schemas.microsoft.com/office/drawing/2014/main" id="{BA50DB9F-E909-41F7-B26C-244F43C68682}"/>
+                <a16:creationId xmlns:a16="http://schemas.microsoft.com/office/drawing/2014/main" id="{429A4371-0DA1-4EAB-B3A8-A6471D791A61}"/>
               </a:ext>
             </a:extLst>
           </p:cNvPr>
@@ -11457,7 +11462,7 @@
           <p:cNvPr id="7" name="무엇을 항상 읽고, 무엇을 필요할 때 찾게 할까?">
             <a:extLst xmlns:a="http://schemas.openxmlformats.org/drawingml/2006/main">
               <a:ext uri="{FF2B5EF4-FFF2-40B4-BE49-F238E27FC236}">
-                <a16:creationId xmlns:a16="http://schemas.microsoft.com/office/drawing/2014/main" id="{9BAF24EF-0706-4B92-BAC8-53342A9B2B39}"/>
+                <a16:creationId xmlns:a16="http://schemas.microsoft.com/office/drawing/2014/main" id="{F2B72A04-B411-4A7E-847A-50EE63045937}"/>
               </a:ext>
             </a:extLst>
           </p:cNvPr>
@@ -11615,7 +11620,7 @@
           <p:cNvPr id="8" name="">
             <a:extLst xmlns:a="http://schemas.openxmlformats.org/drawingml/2006/main">
               <a:ext uri="{FF2B5EF4-FFF2-40B4-BE49-F238E27FC236}">
-                <a16:creationId xmlns:a16="http://schemas.microsoft.com/office/drawing/2014/main" id="{DAD28BBB-A3D7-4FB5-9B23-FBC7C9B9574C}"/>
+                <a16:creationId xmlns:a16="http://schemas.microsoft.com/office/drawing/2014/main" id="{8B2E297F-B1F7-474C-A50B-C1B667EA6C29}"/>
               </a:ext>
             </a:extLst>
           </p:cNvPr>
@@ -11646,7 +11651,7 @@
           <p:cNvPr id="9" name="CORE · 기본 안내">
             <a:extLst xmlns:a="http://schemas.openxmlformats.org/drawingml/2006/main">
               <a:ext uri="{FF2B5EF4-FFF2-40B4-BE49-F238E27FC236}">
-                <a16:creationId xmlns:a16="http://schemas.microsoft.com/office/drawing/2014/main" id="{9571863D-5A34-4DDC-97E9-27FA34163964}"/>
+                <a16:creationId xmlns:a16="http://schemas.microsoft.com/office/drawing/2014/main" id="{730F96F8-0FF9-4130-9B60-3DFF8279C51F}"/>
               </a:ext>
             </a:extLst>
           </p:cNvPr>
@@ -11804,7 +11809,7 @@
           <p:cNvPr id="10" name="프로젝트의 목적&#10;항상 지켜야 할 제약&#10;상세 정보를 찾을 위치">
             <a:extLst xmlns:a="http://schemas.openxmlformats.org/drawingml/2006/main">
               <a:ext uri="{FF2B5EF4-FFF2-40B4-BE49-F238E27FC236}">
-                <a16:creationId xmlns:a16="http://schemas.microsoft.com/office/drawing/2014/main" id="{248A41FC-0868-476A-B518-66D0511D7ED7}"/>
+                <a16:creationId xmlns:a16="http://schemas.microsoft.com/office/drawing/2014/main" id="{FE108564-DF4A-4B1B-8CDB-2E17AE886F65}"/>
               </a:ext>
             </a:extLst>
           </p:cNvPr>
@@ -12008,7 +12013,7 @@
           <p:cNvPr id="11" name="">
             <a:extLst xmlns:a="http://schemas.openxmlformats.org/drawingml/2006/main">
               <a:ext uri="{FF2B5EF4-FFF2-40B4-BE49-F238E27FC236}">
-                <a16:creationId xmlns:a16="http://schemas.microsoft.com/office/drawing/2014/main" id="{748198BC-43F0-4A8D-A73B-84148D550917}"/>
+                <a16:creationId xmlns:a16="http://schemas.microsoft.com/office/drawing/2014/main" id="{26347AE3-5ADB-4CC0-B128-6BC1451B8504}"/>
               </a:ext>
             </a:extLst>
           </p:cNvPr>
@@ -12038,7 +12043,7 @@
           <p:cNvPr id="12" name="DETAIL · 필요한 상세">
             <a:extLst xmlns:a="http://schemas.openxmlformats.org/drawingml/2006/main">
               <a:ext uri="{FF2B5EF4-FFF2-40B4-BE49-F238E27FC236}">
-                <a16:creationId xmlns:a16="http://schemas.microsoft.com/office/drawing/2014/main" id="{1DE7764A-50AD-4A4C-A09F-EEC2990441F1}"/>
+                <a16:creationId xmlns:a16="http://schemas.microsoft.com/office/drawing/2014/main" id="{26CC45DB-BF5A-4F15-87B8-09338C711643}"/>
               </a:ext>
             </a:extLst>
           </p:cNvPr>
@@ -12196,7 +12201,7 @@
           <p:cNvPr id="13" name="">
             <a:extLst xmlns:a="http://schemas.openxmlformats.org/drawingml/2006/main">
               <a:ext uri="{FF2B5EF4-FFF2-40B4-BE49-F238E27FC236}">
-                <a16:creationId xmlns:a16="http://schemas.microsoft.com/office/drawing/2014/main" id="{8968EEF4-1F6B-43E5-AB86-425DDA227415}"/>
+                <a16:creationId xmlns:a16="http://schemas.microsoft.com/office/drawing/2014/main" id="{B30E8E3E-4060-47C1-88AF-FFAA54F2CCC4}"/>
               </a:ext>
             </a:extLst>
           </p:cNvPr>
@@ -12227,7 +12232,7 @@
           <p:cNvPr id="14" name="architecture">
             <a:extLst xmlns:a="http://schemas.openxmlformats.org/drawingml/2006/main">
               <a:ext uri="{FF2B5EF4-FFF2-40B4-BE49-F238E27FC236}">
-                <a16:creationId xmlns:a16="http://schemas.microsoft.com/office/drawing/2014/main" id="{6A2E7FDF-059E-40CB-A557-CAFECCD8AB23}"/>
+                <a16:creationId xmlns:a16="http://schemas.microsoft.com/office/drawing/2014/main" id="{9849ABEC-66B5-44E9-96B7-3CE8149E2EAE}"/>
               </a:ext>
             </a:extLst>
           </p:cNvPr>
@@ -12385,7 +12390,7 @@
           <p:cNvPr id="15" name="모듈과 처리 순서">
             <a:extLst xmlns:a="http://schemas.openxmlformats.org/drawingml/2006/main">
               <a:ext uri="{FF2B5EF4-FFF2-40B4-BE49-F238E27FC236}">
-                <a16:creationId xmlns:a16="http://schemas.microsoft.com/office/drawing/2014/main" id="{1C974FB6-0DC8-43E9-BE1B-98A189C50406}"/>
+                <a16:creationId xmlns:a16="http://schemas.microsoft.com/office/drawing/2014/main" id="{5C2A3247-8BF3-4ACF-88EF-1C6928C77448}"/>
               </a:ext>
             </a:extLst>
           </p:cNvPr>
@@ -12543,7 +12548,7 @@
           <p:cNvPr id="16" name="">
             <a:extLst xmlns:a="http://schemas.openxmlformats.org/drawingml/2006/main">
               <a:ext uri="{FF2B5EF4-FFF2-40B4-BE49-F238E27FC236}">
-                <a16:creationId xmlns:a16="http://schemas.microsoft.com/office/drawing/2014/main" id="{55BB3D88-31F8-4E6A-B627-CFB5154CF05B}"/>
+                <a16:creationId xmlns:a16="http://schemas.microsoft.com/office/drawing/2014/main" id="{0DD8ED97-C991-40A8-9EA8-18C2702B596D}"/>
               </a:ext>
             </a:extLst>
           </p:cNvPr>
@@ -12574,7 +12579,7 @@
           <p:cNvPr id="17" name="image contracts">
             <a:extLst xmlns:a="http://schemas.openxmlformats.org/drawingml/2006/main">
               <a:ext uri="{FF2B5EF4-FFF2-40B4-BE49-F238E27FC236}">
-                <a16:creationId xmlns:a16="http://schemas.microsoft.com/office/drawing/2014/main" id="{8DC542C4-97FF-4200-898A-FF8B166E0B99}"/>
+                <a16:creationId xmlns:a16="http://schemas.microsoft.com/office/drawing/2014/main" id="{6C6C9D0A-C1FF-47F7-B4D8-38BEBCAD5AB6}"/>
               </a:ext>
             </a:extLst>
           </p:cNvPr>
@@ -12732,7 +12737,7 @@
           <p:cNvPr id="18" name="이미지 동작의 계약">
             <a:extLst xmlns:a="http://schemas.openxmlformats.org/drawingml/2006/main">
               <a:ext uri="{FF2B5EF4-FFF2-40B4-BE49-F238E27FC236}">
-                <a16:creationId xmlns:a16="http://schemas.microsoft.com/office/drawing/2014/main" id="{B05862F5-5A5A-4F73-8527-5EDA31CE9977}"/>
+                <a16:creationId xmlns:a16="http://schemas.microsoft.com/office/drawing/2014/main" id="{6EE63B3E-E64D-427F-9124-E62BE340C195}"/>
               </a:ext>
             </a:extLst>
           </p:cNvPr>
@@ -12890,7 +12895,7 @@
           <p:cNvPr id="19" name="">
             <a:extLst xmlns:a="http://schemas.openxmlformats.org/drawingml/2006/main">
               <a:ext uri="{FF2B5EF4-FFF2-40B4-BE49-F238E27FC236}">
-                <a16:creationId xmlns:a16="http://schemas.microsoft.com/office/drawing/2014/main" id="{15D48E0D-CE0D-4EF9-8A85-9430811B3A7B}"/>
+                <a16:creationId xmlns:a16="http://schemas.microsoft.com/office/drawing/2014/main" id="{776AB2FF-8727-4A5B-8020-902EE45C7AA5}"/>
               </a:ext>
             </a:extLst>
           </p:cNvPr>
@@ -12921,7 +12926,7 @@
           <p:cNvPr id="20" name="testing">
             <a:extLst xmlns:a="http://schemas.openxmlformats.org/drawingml/2006/main">
               <a:ext uri="{FF2B5EF4-FFF2-40B4-BE49-F238E27FC236}">
-                <a16:creationId xmlns:a16="http://schemas.microsoft.com/office/drawing/2014/main" id="{B103AB2F-8686-494E-BCDF-E99397072C23}"/>
+                <a16:creationId xmlns:a16="http://schemas.microsoft.com/office/drawing/2014/main" id="{20E5C796-716C-4092-992A-2DD522872C04}"/>
               </a:ext>
             </a:extLst>
           </p:cNvPr>
@@ -13079,7 +13084,7 @@
           <p:cNvPr id="21" name="테스트 위치와 범위">
             <a:extLst xmlns:a="http://schemas.openxmlformats.org/drawingml/2006/main">
               <a:ext uri="{FF2B5EF4-FFF2-40B4-BE49-F238E27FC236}">
-                <a16:creationId xmlns:a16="http://schemas.microsoft.com/office/drawing/2014/main" id="{218125D9-F267-4305-8C91-2A8FA88DF43D}"/>
+                <a16:creationId xmlns:a16="http://schemas.microsoft.com/office/drawing/2014/main" id="{28DA3AF0-7220-4D28-81F5-1490DB6B8C80}"/>
               </a:ext>
             </a:extLst>
           </p:cNvPr>
@@ -13237,7 +13242,7 @@
           <p:cNvPr id="22" name="모든 지식을 넣기보다, 상세 정보까지 가는 길을 안내한다">
             <a:extLst xmlns:a="http://schemas.openxmlformats.org/drawingml/2006/main">
               <a:ext uri="{FF2B5EF4-FFF2-40B4-BE49-F238E27FC236}">
-                <a16:creationId xmlns:a16="http://schemas.microsoft.com/office/drawing/2014/main" id="{5327D5AE-3B0B-434F-B6B2-05949332B1E8}"/>
+                <a16:creationId xmlns:a16="http://schemas.microsoft.com/office/drawing/2014/main" id="{D88E2F2B-9AB8-447C-A732-4E9E5518A1F1}"/>
               </a:ext>
             </a:extLst>
           </p:cNvPr>
@@ -13395,7 +13400,7 @@
           <p:cNvPr id="23" name="Legacy module connection">
             <a:extLst xmlns:a="http://schemas.openxmlformats.org/drawingml/2006/main">
               <a:ext uri="{FF2B5EF4-FFF2-40B4-BE49-F238E27FC236}">
-                <a16:creationId xmlns:a16="http://schemas.microsoft.com/office/drawing/2014/main" id="{ECE5C021-31A1-47AE-BD8B-D30BFDB1BB5E}"/>
+                <a16:creationId xmlns:a16="http://schemas.microsoft.com/office/drawing/2014/main" id="{7B3D1E79-B990-49C8-9CD6-30F7D8896CB5}"/>
               </a:ext>
             </a:extLst>
           </p:cNvPr>
@@ -13551,7 +13556,7 @@
     </p:spTree>
     <p:extLst>
       <p:ext uri="{BB962C8B-B14F-4D97-AF65-F5344CB8AC3E}">
-        <p14:creationId xmlns:p14="http://schemas.microsoft.com/office/powerpoint/2010/main" val="1865005977"/>
+        <p14:creationId xmlns:p14="http://schemas.microsoft.com/office/powerpoint/2010/main" val="1760887363"/>
       </p:ext>
     </p:extLst>
   </p:cSld>
@@ -13582,7 +13587,7 @@
           <p:cNvPr id="23" name="ACT 2 · STATE-03의 문서 구조">
             <a:extLst xmlns:a="http://schemas.openxmlformats.org/drawingml/2006/main">
               <a:ext uri="{FF2B5EF4-FFF2-40B4-BE49-F238E27FC236}">
-                <a16:creationId xmlns:a16="http://schemas.microsoft.com/office/drawing/2014/main" id="{788C7682-62F6-4932-BC7E-D18B1B5438C4}"/>
+                <a16:creationId xmlns:a16="http://schemas.microsoft.com/office/drawing/2014/main" id="{AE934988-40F7-4087-AE44-F6FFE6133366}"/>
               </a:ext>
             </a:extLst>
           </p:cNvPr>
@@ -13740,7 +13745,7 @@
           <p:cNvPr id="2" name="S42">
             <a:extLst xmlns:a="http://schemas.openxmlformats.org/drawingml/2006/main">
               <a:ext uri="{FF2B5EF4-FFF2-40B4-BE49-F238E27FC236}">
-                <a16:creationId xmlns:a16="http://schemas.microsoft.com/office/drawing/2014/main" id="{485D5109-07F8-44BF-A7CA-EF584EDA0344}"/>
+                <a16:creationId xmlns:a16="http://schemas.microsoft.com/office/drawing/2014/main" id="{C0F9AE18-225C-4B2F-ADFB-6A60C3AC3580}"/>
               </a:ext>
             </a:extLst>
           </p:cNvPr>
@@ -13898,7 +13903,7 @@
           <p:cNvPr id="3" name="정보를 지우지 않고 위치를 나누기">
             <a:extLst xmlns:a="http://schemas.openxmlformats.org/drawingml/2006/main">
               <a:ext uri="{FF2B5EF4-FFF2-40B4-BE49-F238E27FC236}">
-                <a16:creationId xmlns:a16="http://schemas.microsoft.com/office/drawing/2014/main" id="{A2A911FA-53BC-4251-A2ED-743BA7ABD2A3}"/>
+                <a16:creationId xmlns:a16="http://schemas.microsoft.com/office/drawing/2014/main" id="{5A82246C-559A-496C-B94B-3FBDFFC7DDB1}"/>
               </a:ext>
             </a:extLst>
           </p:cNvPr>
@@ -14056,7 +14061,7 @@
           <p:cNvPr id="4" name="">
             <a:extLst xmlns:a="http://schemas.openxmlformats.org/drawingml/2006/main">
               <a:ext uri="{FF2B5EF4-FFF2-40B4-BE49-F238E27FC236}">
-                <a16:creationId xmlns:a16="http://schemas.microsoft.com/office/drawing/2014/main" id="{C343BEF1-AC21-443B-B9DF-BB21B603EE6C}"/>
+                <a16:creationId xmlns:a16="http://schemas.microsoft.com/office/drawing/2014/main" id="{92E7B882-72C6-4927-8A62-B8EA31DAF61B}"/>
               </a:ext>
             </a:extLst>
           </p:cNvPr>
@@ -14087,7 +14092,7 @@
           <p:cNvPr id="5" name="STATE-02 → STATE-03 · 실제 파일 구조와 Routing 문구 발췌">
             <a:extLst xmlns:a="http://schemas.openxmlformats.org/drawingml/2006/main">
               <a:ext uri="{FF2B5EF4-FFF2-40B4-BE49-F238E27FC236}">
-                <a16:creationId xmlns:a16="http://schemas.microsoft.com/office/drawing/2014/main" id="{E02A7D44-936E-47D2-962A-822CBD77A21E}"/>
+                <a16:creationId xmlns:a16="http://schemas.microsoft.com/office/drawing/2014/main" id="{DD7A586F-8E90-460E-BAE0-6CC621ABB938}"/>
               </a:ext>
             </a:extLst>
           </p:cNvPr>
@@ -14245,7 +14250,7 @@
           <p:cNvPr id="6" name="내용을 Scope에 맞춰 이동 · 구조 변화 자체가 완벽한 Routing이나 성능 향상 증거는 아님">
             <a:extLst xmlns:a="http://schemas.openxmlformats.org/drawingml/2006/main">
               <a:ext uri="{FF2B5EF4-FFF2-40B4-BE49-F238E27FC236}">
-                <a16:creationId xmlns:a16="http://schemas.microsoft.com/office/drawing/2014/main" id="{567C2588-92EF-40C4-B06C-39174E335032}"/>
+                <a16:creationId xmlns:a16="http://schemas.microsoft.com/office/drawing/2014/main" id="{F81F3E5B-F4ED-4430-99F2-90F15FA8FDA5}"/>
               </a:ext>
             </a:extLst>
           </p:cNvPr>
@@ -14403,7 +14408,7 @@
           <p:cNvPr id="7" name="이전: AGENTS.md 안에 세부사항까지">
             <a:extLst xmlns:a="http://schemas.openxmlformats.org/drawingml/2006/main">
               <a:ext uri="{FF2B5EF4-FFF2-40B4-BE49-F238E27FC236}">
-                <a16:creationId xmlns:a16="http://schemas.microsoft.com/office/drawing/2014/main" id="{1810B824-E25D-4AD5-ADF8-2DFAFD5EEBEB}"/>
+                <a16:creationId xmlns:a16="http://schemas.microsoft.com/office/drawing/2014/main" id="{0F2A4CDA-CFE7-421C-AC71-660BB7A10B28}"/>
               </a:ext>
             </a:extLst>
           </p:cNvPr>
@@ -14561,7 +14566,7 @@
           <p:cNvPr id="8" name="이후: 기본 안내 + 상세 문서로 가는 링크">
             <a:extLst xmlns:a="http://schemas.openxmlformats.org/drawingml/2006/main">
               <a:ext uri="{FF2B5EF4-FFF2-40B4-BE49-F238E27FC236}">
-                <a16:creationId xmlns:a16="http://schemas.microsoft.com/office/drawing/2014/main" id="{96F9D346-B233-4FD3-8858-F61B2CF50139}"/>
+                <a16:creationId xmlns:a16="http://schemas.microsoft.com/office/drawing/2014/main" id="{4903F889-FCA5-40C5-8244-4163D7E4EB6E}"/>
               </a:ext>
             </a:extLst>
           </p:cNvPr>
@@ -14719,7 +14724,7 @@
           <p:cNvPr id="9" name="">
             <a:extLst xmlns:a="http://schemas.openxmlformats.org/drawingml/2006/main">
               <a:ext uri="{FF2B5EF4-FFF2-40B4-BE49-F238E27FC236}">
-                <a16:creationId xmlns:a16="http://schemas.microsoft.com/office/drawing/2014/main" id="{8DA9F01A-4602-4715-B728-D217824526B8}"/>
+                <a16:creationId xmlns:a16="http://schemas.microsoft.com/office/drawing/2014/main" id="{B3B2D7F1-6D53-4185-B57A-CA9A0F99A0C3}"/>
               </a:ext>
             </a:extLst>
           </p:cNvPr>
@@ -14750,7 +14755,7 @@
           <p:cNvPr id="10" name="처리 순서 · 모듈 역할">
             <a:extLst xmlns:a="http://schemas.openxmlformats.org/drawingml/2006/main">
               <a:ext uri="{FF2B5EF4-FFF2-40B4-BE49-F238E27FC236}">
-                <a16:creationId xmlns:a16="http://schemas.microsoft.com/office/drawing/2014/main" id="{76284F08-992E-4361-BEF6-95B4267D307F}"/>
+                <a16:creationId xmlns:a16="http://schemas.microsoft.com/office/drawing/2014/main" id="{61D8D41F-6636-4AED-BA50-2EB6346A3162}"/>
               </a:ext>
             </a:extLst>
           </p:cNvPr>
@@ -14908,7 +14913,7 @@
           <p:cNvPr id="11" name="">
             <a:extLst xmlns:a="http://schemas.openxmlformats.org/drawingml/2006/main">
               <a:ext uri="{FF2B5EF4-FFF2-40B4-BE49-F238E27FC236}">
-                <a16:creationId xmlns:a16="http://schemas.microsoft.com/office/drawing/2014/main" id="{767F4CC7-55BE-4CC4-AD84-19C1A9219F69}"/>
+                <a16:creationId xmlns:a16="http://schemas.microsoft.com/office/drawing/2014/main" id="{DC9BDE11-EB37-4B5D-B3CA-300D11B79F6C}"/>
               </a:ext>
             </a:extLst>
           </p:cNvPr>
@@ -14938,7 +14943,7 @@
           <p:cNvPr id="12" name="docs/architecture.md">
             <a:extLst xmlns:a="http://schemas.openxmlformats.org/drawingml/2006/main">
               <a:ext uri="{FF2B5EF4-FFF2-40B4-BE49-F238E27FC236}">
-                <a16:creationId xmlns:a16="http://schemas.microsoft.com/office/drawing/2014/main" id="{D4CBBAD9-663C-4826-B198-131668892B7E}"/>
+                <a16:creationId xmlns:a16="http://schemas.microsoft.com/office/drawing/2014/main" id="{86CBEC06-1309-43DC-BC2B-04D9BEA0A642}"/>
               </a:ext>
             </a:extLst>
           </p:cNvPr>
@@ -15096,7 +15101,7 @@
           <p:cNvPr id="13" name="">
             <a:extLst xmlns:a="http://schemas.openxmlformats.org/drawingml/2006/main">
               <a:ext uri="{FF2B5EF4-FFF2-40B4-BE49-F238E27FC236}">
-                <a16:creationId xmlns:a16="http://schemas.microsoft.com/office/drawing/2014/main" id="{759D69EE-1331-4590-BEAD-7271FB238C3E}"/>
+                <a16:creationId xmlns:a16="http://schemas.microsoft.com/office/drawing/2014/main" id="{D90A933C-F89F-425A-B4AD-75146774DB5E}"/>
               </a:ext>
             </a:extLst>
           </p:cNvPr>
@@ -15127,7 +15132,7 @@
           <p:cNvPr id="14" name="이미지 형식 · crop · resize">
             <a:extLst xmlns:a="http://schemas.openxmlformats.org/drawingml/2006/main">
               <a:ext uri="{FF2B5EF4-FFF2-40B4-BE49-F238E27FC236}">
-                <a16:creationId xmlns:a16="http://schemas.microsoft.com/office/drawing/2014/main" id="{7893676E-AA8E-4C95-AA0E-52A812736D87}"/>
+                <a16:creationId xmlns:a16="http://schemas.microsoft.com/office/drawing/2014/main" id="{239BA903-F428-4AD2-BE5A-5DA697EA33B2}"/>
               </a:ext>
             </a:extLst>
           </p:cNvPr>
@@ -15285,7 +15290,7 @@
           <p:cNvPr id="15" name="">
             <a:extLst xmlns:a="http://schemas.openxmlformats.org/drawingml/2006/main">
               <a:ext uri="{FF2B5EF4-FFF2-40B4-BE49-F238E27FC236}">
-                <a16:creationId xmlns:a16="http://schemas.microsoft.com/office/drawing/2014/main" id="{28FEDE20-44F3-4D8D-9237-B3D945B95D67}"/>
+                <a16:creationId xmlns:a16="http://schemas.microsoft.com/office/drawing/2014/main" id="{F21BF108-EBB8-41C7-9CE4-AE8F156714C6}"/>
               </a:ext>
             </a:extLst>
           </p:cNvPr>
@@ -15315,7 +15320,7 @@
           <p:cNvPr id="16" name="docs/image-contracts.md">
             <a:extLst xmlns:a="http://schemas.openxmlformats.org/drawingml/2006/main">
               <a:ext uri="{FF2B5EF4-FFF2-40B4-BE49-F238E27FC236}">
-                <a16:creationId xmlns:a16="http://schemas.microsoft.com/office/drawing/2014/main" id="{C158F668-C4D0-4483-B0DC-A49E66E5F0DF}"/>
+                <a16:creationId xmlns:a16="http://schemas.microsoft.com/office/drawing/2014/main" id="{6747FE6C-AE41-4DD3-B1BB-4579E2D3073D}"/>
               </a:ext>
             </a:extLst>
           </p:cNvPr>
@@ -15473,7 +15478,7 @@
           <p:cNvPr id="17" name="">
             <a:extLst xmlns:a="http://schemas.openxmlformats.org/drawingml/2006/main">
               <a:ext uri="{FF2B5EF4-FFF2-40B4-BE49-F238E27FC236}">
-                <a16:creationId xmlns:a16="http://schemas.microsoft.com/office/drawing/2014/main" id="{99C00B97-688C-42D1-B38A-6D0917222F6D}"/>
+                <a16:creationId xmlns:a16="http://schemas.microsoft.com/office/drawing/2014/main" id="{797BDB3A-7AEF-4DF2-B7FF-CBF779D4ED64}"/>
               </a:ext>
             </a:extLst>
           </p:cNvPr>
@@ -15504,7 +15509,7 @@
           <p:cNvPr id="18" name="테스트 구조 · 관련 테스트">
             <a:extLst xmlns:a="http://schemas.openxmlformats.org/drawingml/2006/main">
               <a:ext uri="{FF2B5EF4-FFF2-40B4-BE49-F238E27FC236}">
-                <a16:creationId xmlns:a16="http://schemas.microsoft.com/office/drawing/2014/main" id="{83872947-375B-4EEC-A7DF-1D01038DC11B}"/>
+                <a16:creationId xmlns:a16="http://schemas.microsoft.com/office/drawing/2014/main" id="{D72D90DB-A6F1-4D10-AFEB-4C6AF5EE0B7C}"/>
               </a:ext>
             </a:extLst>
           </p:cNvPr>
@@ -15662,7 +15667,7 @@
           <p:cNvPr id="19" name="">
             <a:extLst xmlns:a="http://schemas.openxmlformats.org/drawingml/2006/main">
               <a:ext uri="{FF2B5EF4-FFF2-40B4-BE49-F238E27FC236}">
-                <a16:creationId xmlns:a16="http://schemas.microsoft.com/office/drawing/2014/main" id="{3654CAE9-99A1-4F5B-ADC4-BBCCAB66F2BC}"/>
+                <a16:creationId xmlns:a16="http://schemas.microsoft.com/office/drawing/2014/main" id="{C37D1E36-74E3-4C24-9419-74F7A166A03D}"/>
               </a:ext>
             </a:extLst>
           </p:cNvPr>
@@ -15692,7 +15697,7 @@
           <p:cNvPr id="20" name="docs/testing.md">
             <a:extLst xmlns:a="http://schemas.openxmlformats.org/drawingml/2006/main">
               <a:ext uri="{FF2B5EF4-FFF2-40B4-BE49-F238E27FC236}">
-                <a16:creationId xmlns:a16="http://schemas.microsoft.com/office/drawing/2014/main" id="{08C1C694-D7E8-4977-9F5A-0C4B2E75922F}"/>
+                <a16:creationId xmlns:a16="http://schemas.microsoft.com/office/drawing/2014/main" id="{FE3D6798-2A64-4BB9-9ABF-D30C665D8F3C}"/>
               </a:ext>
             </a:extLst>
           </p:cNvPr>
@@ -15850,7 +15855,7 @@
           <p:cNvPr id="21" name="원문: Test organization or relevant tests → docs/testing.md">
             <a:extLst xmlns:a="http://schemas.openxmlformats.org/drawingml/2006/main">
               <a:ext uri="{FF2B5EF4-FFF2-40B4-BE49-F238E27FC236}">
-                <a16:creationId xmlns:a16="http://schemas.microsoft.com/office/drawing/2014/main" id="{E0238A23-F41D-47B3-BBBF-EC08A9DF9526}"/>
+                <a16:creationId xmlns:a16="http://schemas.microsoft.com/office/drawing/2014/main" id="{C5494EF0-E834-4D59-9E89-966C081572A3}"/>
               </a:ext>
             </a:extLst>
           </p:cNvPr>
@@ -16008,7 +16013,7 @@
           <p:cNvPr id="22" name="Legacy module connection">
             <a:extLst xmlns:a="http://schemas.openxmlformats.org/drawingml/2006/main">
               <a:ext uri="{FF2B5EF4-FFF2-40B4-BE49-F238E27FC236}">
-                <a16:creationId xmlns:a16="http://schemas.microsoft.com/office/drawing/2014/main" id="{DD8BE3B5-CFE5-42FA-BF7A-278CEFB2931F}"/>
+                <a16:creationId xmlns:a16="http://schemas.microsoft.com/office/drawing/2014/main" id="{D390B235-91B3-4615-9009-A24B112E4D6D}"/>
               </a:ext>
             </a:extLst>
           </p:cNvPr>
@@ -16164,7 +16169,7 @@
     </p:spTree>
     <p:extLst>
       <p:ext uri="{BB962C8B-B14F-4D97-AF65-F5344CB8AC3E}">
-        <p14:creationId xmlns:p14="http://schemas.microsoft.com/office/powerpoint/2010/main" val="2121864522"/>
+        <p14:creationId xmlns:p14="http://schemas.microsoft.com/office/powerpoint/2010/main" val="1456879567"/>
       </p:ext>
     </p:extLst>
   </p:cSld>
@@ -16195,7 +16200,7 @@
           <p:cNvPr id="15" name="ACT 2 · 관찰하기 전에 질문하기">
             <a:extLst xmlns:a="http://schemas.openxmlformats.org/drawingml/2006/main">
               <a:ext uri="{FF2B5EF4-FFF2-40B4-BE49-F238E27FC236}">
-                <a16:creationId xmlns:a16="http://schemas.microsoft.com/office/drawing/2014/main" id="{24AD7013-AEC1-45F4-A8CD-5433D342BEBA}"/>
+                <a16:creationId xmlns:a16="http://schemas.microsoft.com/office/drawing/2014/main" id="{6379DC24-B318-424C-ACC3-064FC8344ADA}"/>
               </a:ext>
             </a:extLst>
           </p:cNvPr>
@@ -16353,7 +16358,7 @@
           <p:cNvPr id="2" name="S43">
             <a:extLst xmlns:a="http://schemas.openxmlformats.org/drawingml/2006/main">
               <a:ext uri="{FF2B5EF4-FFF2-40B4-BE49-F238E27FC236}">
-                <a16:creationId xmlns:a16="http://schemas.microsoft.com/office/drawing/2014/main" id="{594878E5-2F57-44B3-96EE-1185E1EFCD4A}"/>
+                <a16:creationId xmlns:a16="http://schemas.microsoft.com/office/drawing/2014/main" id="{016666E4-B44A-4795-AF1F-D6A352F0870B}"/>
               </a:ext>
             </a:extLst>
           </p:cNvPr>
@@ -16511,7 +16516,7 @@
           <p:cNvPr id="3" name="서로 다른 두 Task가 무엇을 읽을까?">
             <a:extLst xmlns:a="http://schemas.openxmlformats.org/drawingml/2006/main">
               <a:ext uri="{FF2B5EF4-FFF2-40B4-BE49-F238E27FC236}">
-                <a16:creationId xmlns:a16="http://schemas.microsoft.com/office/drawing/2014/main" id="{6476FFDA-C39B-40BC-811E-732F448C7CE7}"/>
+                <a16:creationId xmlns:a16="http://schemas.microsoft.com/office/drawing/2014/main" id="{6943D656-A3FC-4A88-926D-03567E098A49}"/>
               </a:ext>
             </a:extLst>
           </p:cNvPr>
@@ -16669,7 +16674,7 @@
           <p:cNvPr id="4" name="">
             <a:extLst xmlns:a="http://schemas.openxmlformats.org/drawingml/2006/main">
               <a:ext uri="{FF2B5EF4-FFF2-40B4-BE49-F238E27FC236}">
-                <a16:creationId xmlns:a16="http://schemas.microsoft.com/office/drawing/2014/main" id="{ECCA15CD-FAF5-411E-B24E-5E3D99307636}"/>
+                <a16:creationId xmlns:a16="http://schemas.microsoft.com/office/drawing/2014/main" id="{A3A2538E-4F15-4FB4-B95D-D2318CF7C060}"/>
               </a:ext>
             </a:extLst>
           </p:cNvPr>
@@ -16700,7 +16705,7 @@
           <p:cNvPr id="5" name="TRIAL-005A/B · 읽기 전용 Task의 질문을 재구성">
             <a:extLst xmlns:a="http://schemas.openxmlformats.org/drawingml/2006/main">
               <a:ext uri="{FF2B5EF4-FFF2-40B4-BE49-F238E27FC236}">
-                <a16:creationId xmlns:a16="http://schemas.microsoft.com/office/drawing/2014/main" id="{E1F675C6-4D55-4519-B783-C6853E892504}"/>
+                <a16:creationId xmlns:a16="http://schemas.microsoft.com/office/drawing/2014/main" id="{7AADBE1E-08B2-4943-8944-718D5E2A5148}"/>
               </a:ext>
             </a:extLst>
           </p:cNvPr>
@@ -16858,7 +16863,7 @@
           <p:cNvPr id="6" name="어떤 상세 문서를 읽을지는 실제 접근 기록으로 확인한다">
             <a:extLst xmlns:a="http://schemas.openxmlformats.org/drawingml/2006/main">
               <a:ext uri="{FF2B5EF4-FFF2-40B4-BE49-F238E27FC236}">
-                <a16:creationId xmlns:a16="http://schemas.microsoft.com/office/drawing/2014/main" id="{61F23037-9A98-4775-B971-8DE661C4D202}"/>
+                <a16:creationId xmlns:a16="http://schemas.microsoft.com/office/drawing/2014/main" id="{38B74755-14E9-4812-9F0F-D8EC3B9CF13A}"/>
               </a:ext>
             </a:extLst>
           </p:cNvPr>
@@ -17016,7 +17021,7 @@
           <p:cNvPr id="7" name="Task A">
             <a:extLst xmlns:a="http://schemas.openxmlformats.org/drawingml/2006/main">
               <a:ext uri="{FF2B5EF4-FFF2-40B4-BE49-F238E27FC236}">
-                <a16:creationId xmlns:a16="http://schemas.microsoft.com/office/drawing/2014/main" id="{1F524A42-FAE2-4F19-A669-BD49A8BFCDFF}"/>
+                <a16:creationId xmlns:a16="http://schemas.microsoft.com/office/drawing/2014/main" id="{06528A0E-38EE-4FF0-BEA1-AD39BE1D34BF}"/>
               </a:ext>
             </a:extLst>
           </p:cNvPr>
@@ -17174,7 +17179,7 @@
           <p:cNvPr id="8" name="Task B">
             <a:extLst xmlns:a="http://schemas.openxmlformats.org/drawingml/2006/main">
               <a:ext uri="{FF2B5EF4-FFF2-40B4-BE49-F238E27FC236}">
-                <a16:creationId xmlns:a16="http://schemas.microsoft.com/office/drawing/2014/main" id="{DB318CD6-BEA2-43D8-8E6E-885BAC1AA46F}"/>
+                <a16:creationId xmlns:a16="http://schemas.microsoft.com/office/drawing/2014/main" id="{627D3778-5124-4AD4-B83B-CB10CC8EFDAB}"/>
               </a:ext>
             </a:extLst>
           </p:cNvPr>
@@ -17332,7 +17337,7 @@
           <p:cNvPr id="9" name="">
             <a:extLst xmlns:a="http://schemas.openxmlformats.org/drawingml/2006/main">
               <a:ext uri="{FF2B5EF4-FFF2-40B4-BE49-F238E27FC236}">
-                <a16:creationId xmlns:a16="http://schemas.microsoft.com/office/drawing/2014/main" id="{771F8D7C-889D-4813-8350-A19A9E72DEED}"/>
+                <a16:creationId xmlns:a16="http://schemas.microsoft.com/office/drawing/2014/main" id="{A07DDF62-A9CC-44DD-8BA6-5B3C777B1AA4}"/>
               </a:ext>
             </a:extLst>
           </p:cNvPr>
@@ -17363,7 +17368,7 @@
           <p:cNvPr id="10" name="">
             <a:extLst xmlns:a="http://schemas.openxmlformats.org/drawingml/2006/main">
               <a:ext uri="{FF2B5EF4-FFF2-40B4-BE49-F238E27FC236}">
-                <a16:creationId xmlns:a16="http://schemas.microsoft.com/office/drawing/2014/main" id="{82FE8741-B596-40F6-BB1A-5D28EF4E370F}"/>
+                <a16:creationId xmlns:a16="http://schemas.microsoft.com/office/drawing/2014/main" id="{81732334-4B6A-4053-BC1A-E404E80A7EA7}"/>
               </a:ext>
             </a:extLst>
           </p:cNvPr>
@@ -17394,7 +17399,7 @@
           <p:cNvPr id="11" name="crop 1 3은&#10;어떤 source column을&#10;포함하는가?">
             <a:extLst xmlns:a="http://schemas.openxmlformats.org/drawingml/2006/main">
               <a:ext uri="{FF2B5EF4-FFF2-40B4-BE49-F238E27FC236}">
-                <a16:creationId xmlns:a16="http://schemas.microsoft.com/office/drawing/2014/main" id="{2F85E9B8-4C20-489F-916A-EF7B7358E99F}"/>
+                <a16:creationId xmlns:a16="http://schemas.microsoft.com/office/drawing/2014/main" id="{5B6CA234-0CA4-43D2-B8F7-8934859E9329}"/>
               </a:ext>
             </a:extLst>
           </p:cNvPr>
@@ -17598,7 +17603,7 @@
           <p:cNvPr id="12" name="이 Project에&#10;runtime dependency가&#10;있는가?">
             <a:extLst xmlns:a="http://schemas.openxmlformats.org/drawingml/2006/main">
               <a:ext uri="{FF2B5EF4-FFF2-40B4-BE49-F238E27FC236}">
-                <a16:creationId xmlns:a16="http://schemas.microsoft.com/office/drawing/2014/main" id="{C2DB9346-DD7D-4E58-BC16-BC3F4CEA7F2A}"/>
+                <a16:creationId xmlns:a16="http://schemas.microsoft.com/office/drawing/2014/main" id="{FA251FA8-0CA1-4732-9DA2-ED7A73FE0607}"/>
               </a:ext>
             </a:extLst>
           </p:cNvPr>
@@ -17802,7 +17807,7 @@
           <p:cNvPr id="13" name="두 Task에서 같은 상세 문서를 읽을까?">
             <a:extLst xmlns:a="http://schemas.openxmlformats.org/drawingml/2006/main">
               <a:ext uri="{FF2B5EF4-FFF2-40B4-BE49-F238E27FC236}">
-                <a16:creationId xmlns:a16="http://schemas.microsoft.com/office/drawing/2014/main" id="{9498B67D-DED8-41B0-BEF9-DDEEC9F409E9}"/>
+                <a16:creationId xmlns:a16="http://schemas.microsoft.com/office/drawing/2014/main" id="{0CE885F0-E8AB-4AA3-84CE-7CB1129DC9E2}"/>
               </a:ext>
             </a:extLst>
           </p:cNvPr>
@@ -17960,7 +17965,7 @@
           <p:cNvPr id="14" name="Legacy module connection">
             <a:extLst xmlns:a="http://schemas.openxmlformats.org/drawingml/2006/main">
               <a:ext uri="{FF2B5EF4-FFF2-40B4-BE49-F238E27FC236}">
-                <a16:creationId xmlns:a16="http://schemas.microsoft.com/office/drawing/2014/main" id="{13971672-6000-45C8-85C0-8672A22C032A}"/>
+                <a16:creationId xmlns:a16="http://schemas.microsoft.com/office/drawing/2014/main" id="{C662D92D-BE69-4395-B634-A1688AED44E7}"/>
               </a:ext>
             </a:extLst>
           </p:cNvPr>
@@ -18116,7 +18121,7 @@
     </p:spTree>
     <p:extLst>
       <p:ext uri="{BB962C8B-B14F-4D97-AF65-F5344CB8AC3E}">
-        <p14:creationId xmlns:p14="http://schemas.microsoft.com/office/powerpoint/2010/main" val="1139166884"/>
+        <p14:creationId xmlns:p14="http://schemas.microsoft.com/office/powerpoint/2010/main" val="33269631"/>
       </p:ext>
     </p:extLst>
   </p:cSld>
@@ -18147,7 +18152,7 @@
           <p:cNvPr id="25" name="ACT 2 · 질문과 근거를 연결하기">
             <a:extLst xmlns:a="http://schemas.openxmlformats.org/drawingml/2006/main">
               <a:ext uri="{FF2B5EF4-FFF2-40B4-BE49-F238E27FC236}">
-                <a16:creationId xmlns:a16="http://schemas.microsoft.com/office/drawing/2014/main" id="{EA7B2933-2A05-46FD-B5E5-ADC2B392E334}"/>
+                <a16:creationId xmlns:a16="http://schemas.microsoft.com/office/drawing/2014/main" id="{F1839253-B1BD-46C8-9B97-B4A5BDF5C182}"/>
               </a:ext>
             </a:extLst>
           </p:cNvPr>
@@ -18305,7 +18310,7 @@
           <p:cNvPr id="2" name="S44">
             <a:extLst xmlns:a="http://schemas.openxmlformats.org/drawingml/2006/main">
               <a:ext uri="{FF2B5EF4-FFF2-40B4-BE49-F238E27FC236}">
-                <a16:creationId xmlns:a16="http://schemas.microsoft.com/office/drawing/2014/main" id="{899A0EF5-0A9A-41C8-B22A-126B1ECB08DF}"/>
+                <a16:creationId xmlns:a16="http://schemas.microsoft.com/office/drawing/2014/main" id="{9D65C997-E773-47E7-A72E-8ED9726C721D}"/>
               </a:ext>
             </a:extLst>
           </p:cNvPr>
@@ -18463,7 +18468,7 @@
           <p:cNvPr id="3" name="Crop Task에서 관찰한 접근">
             <a:extLst xmlns:a="http://schemas.openxmlformats.org/drawingml/2006/main">
               <a:ext uri="{FF2B5EF4-FFF2-40B4-BE49-F238E27FC236}">
-                <a16:creationId xmlns:a16="http://schemas.microsoft.com/office/drawing/2014/main" id="{05C1FFB3-C986-4DC4-BC16-95F5FAD20BFD}"/>
+                <a16:creationId xmlns:a16="http://schemas.microsoft.com/office/drawing/2014/main" id="{C23B94FB-4768-4A8C-B67F-563EB9B7C9C1}"/>
               </a:ext>
             </a:extLst>
           </p:cNvPr>
@@ -18621,7 +18626,7 @@
           <p:cNvPr id="4" name="">
             <a:extLst xmlns:a="http://schemas.openxmlformats.org/drawingml/2006/main">
               <a:ext uri="{FF2B5EF4-FFF2-40B4-BE49-F238E27FC236}">
-                <a16:creationId xmlns:a16="http://schemas.microsoft.com/office/drawing/2014/main" id="{3F0DE139-7371-46A2-9FFD-CB0339A64613}"/>
+                <a16:creationId xmlns:a16="http://schemas.microsoft.com/office/drawing/2014/main" id="{6FFDF331-1EAB-499C-8EFD-DE17EAE8E2CF}"/>
               </a:ext>
             </a:extLst>
           </p:cNvPr>
@@ -18652,7 +18657,7 @@
           <p:cNvPr id="5" name="TRIAL-005A · 최종 실행의 접근과 답을 기록에서 재구성">
             <a:extLst xmlns:a="http://schemas.openxmlformats.org/drawingml/2006/main">
               <a:ext uri="{FF2B5EF4-FFF2-40B4-BE49-F238E27FC236}">
-                <a16:creationId xmlns:a16="http://schemas.microsoft.com/office/drawing/2014/main" id="{D1892A36-CCD1-4DA4-BA39-E912087FFF6A}"/>
+                <a16:creationId xmlns:a16="http://schemas.microsoft.com/office/drawing/2014/main" id="{3813A8C3-E89D-4B94-A6EE-8883F73319F1}"/>
               </a:ext>
             </a:extLst>
           </p:cNvPr>
@@ -18810,7 +18815,7 @@
           <p:cNvPr id="6" name="architecture 등 넓은 Context도 접근 · testing.md는 최종 실행에서 관찰, 반복 간">
             <a:extLst xmlns:a="http://schemas.openxmlformats.org/drawingml/2006/main">
               <a:ext uri="{FF2B5EF4-FFF2-40B4-BE49-F238E27FC236}">
-                <a16:creationId xmlns:a16="http://schemas.microsoft.com/office/drawing/2014/main" id="{305C54B9-C2EB-4A27-9198-0ADA9AACDBCA}"/>
+                <a16:creationId xmlns:a16="http://schemas.microsoft.com/office/drawing/2014/main" id="{77CC37B7-5662-4F70-9E23-F3F20D268BB5}"/>
               </a:ext>
             </a:extLst>
           </p:cNvPr>
@@ -18968,7 +18973,7 @@
           <p:cNvPr id="7" name="접근한 계약 문서">
             <a:extLst xmlns:a="http://schemas.openxmlformats.org/drawingml/2006/main">
               <a:ext uri="{FF2B5EF4-FFF2-40B4-BE49-F238E27FC236}">
-                <a16:creationId xmlns:a16="http://schemas.microsoft.com/office/drawing/2014/main" id="{096ADA4A-001A-4C3F-B0F7-0C4693412F5A}"/>
+                <a16:creationId xmlns:a16="http://schemas.microsoft.com/office/drawing/2014/main" id="{11B3EFFC-CC4F-44EE-8286-B1C9D9380198}"/>
               </a:ext>
             </a:extLst>
           </p:cNvPr>
@@ -19126,7 +19131,7 @@
           <p:cNvPr id="8" name="image-contracts.md">
             <a:extLst xmlns:a="http://schemas.openxmlformats.org/drawingml/2006/main">
               <a:ext uri="{FF2B5EF4-FFF2-40B4-BE49-F238E27FC236}">
-                <a16:creationId xmlns:a16="http://schemas.microsoft.com/office/drawing/2014/main" id="{88A12559-52D8-41ED-85EA-06FE30CCA5FB}"/>
+                <a16:creationId xmlns:a16="http://schemas.microsoft.com/office/drawing/2014/main" id="{4E4779BB-0802-4E62-8AE1-536B36EB0F4C}"/>
               </a:ext>
             </a:extLst>
           </p:cNvPr>
@@ -19284,7 +19289,7 @@
           <p:cNvPr id="9" name="">
             <a:extLst xmlns:a="http://schemas.openxmlformats.org/drawingml/2006/main">
               <a:ext uri="{FF2B5EF4-FFF2-40B4-BE49-F238E27FC236}">
-                <a16:creationId xmlns:a16="http://schemas.microsoft.com/office/drawing/2014/main" id="{A5E967C4-B4BE-4472-BE2F-527BC4E5D053}"/>
+                <a16:creationId xmlns:a16="http://schemas.microsoft.com/office/drawing/2014/main" id="{B28D5384-55FA-4A69-B087-994BFEC54026}"/>
               </a:ext>
             </a:extLst>
           </p:cNvPr>
@@ -19315,7 +19320,7 @@
           <p:cNvPr id="10" name="[x_start, x_end)">
             <a:extLst xmlns:a="http://schemas.openxmlformats.org/drawingml/2006/main">
               <a:ext uri="{FF2B5EF4-FFF2-40B4-BE49-F238E27FC236}">
-                <a16:creationId xmlns:a16="http://schemas.microsoft.com/office/drawing/2014/main" id="{E733ABF8-408A-4EDF-98DF-85A9534E1FF1}"/>
+                <a16:creationId xmlns:a16="http://schemas.microsoft.com/office/drawing/2014/main" id="{35B8E305-A0EA-4A3C-88D0-36BC717CF184}"/>
               </a:ext>
             </a:extLst>
           </p:cNvPr>
@@ -19473,7 +19478,7 @@
           <p:cNvPr id="11" name="시작 열 포함 · 끝 좌표 제외">
             <a:extLst xmlns:a="http://schemas.openxmlformats.org/drawingml/2006/main">
               <a:ext uri="{FF2B5EF4-FFF2-40B4-BE49-F238E27FC236}">
-                <a16:creationId xmlns:a16="http://schemas.microsoft.com/office/drawing/2014/main" id="{40F61E7E-1D99-4CA4-8B70-C624BC26EC10}"/>
+                <a16:creationId xmlns:a16="http://schemas.microsoft.com/office/drawing/2014/main" id="{12D4F42C-52F9-43CB-B173-68E57F3227B0}"/>
               </a:ext>
             </a:extLst>
           </p:cNvPr>
@@ -19631,7 +19636,7 @@
           <p:cNvPr id="12" name="기록된 답">
             <a:extLst xmlns:a="http://schemas.openxmlformats.org/drawingml/2006/main">
               <a:ext uri="{FF2B5EF4-FFF2-40B4-BE49-F238E27FC236}">
-                <a16:creationId xmlns:a16="http://schemas.microsoft.com/office/drawing/2014/main" id="{36D102E0-F84D-4CCB-BC6C-5A9127EAE932}"/>
+                <a16:creationId xmlns:a16="http://schemas.microsoft.com/office/drawing/2014/main" id="{44A75084-485F-4DD4-B617-5840CA991D9E}"/>
               </a:ext>
             </a:extLst>
           </p:cNvPr>
@@ -19789,7 +19794,7 @@
           <p:cNvPr id="13" name="crop 1 3">
             <a:extLst xmlns:a="http://schemas.openxmlformats.org/drawingml/2006/main">
               <a:ext uri="{FF2B5EF4-FFF2-40B4-BE49-F238E27FC236}">
-                <a16:creationId xmlns:a16="http://schemas.microsoft.com/office/drawing/2014/main" id="{BE927560-F695-4A3E-81F9-586871A15CD9}"/>
+                <a16:creationId xmlns:a16="http://schemas.microsoft.com/office/drawing/2014/main" id="{6034B5EF-3DEE-49FB-8FC6-3E81530AAB53}"/>
               </a:ext>
             </a:extLst>
           </p:cNvPr>
@@ -19947,7 +19952,7 @@
           <p:cNvPr id="14" name="">
             <a:extLst xmlns:a="http://schemas.openxmlformats.org/drawingml/2006/main">
               <a:ext uri="{FF2B5EF4-FFF2-40B4-BE49-F238E27FC236}">
-                <a16:creationId xmlns:a16="http://schemas.microsoft.com/office/drawing/2014/main" id="{3C4EFC32-5701-4F83-BDB6-12B50280BF14}"/>
+                <a16:creationId xmlns:a16="http://schemas.microsoft.com/office/drawing/2014/main" id="{F76964EC-FE89-4664-910F-384D2D63CDE9}"/>
               </a:ext>
             </a:extLst>
           </p:cNvPr>
@@ -19980,7 +19985,7 @@
           <p:cNvPr id="15" name="0">
             <a:extLst xmlns:a="http://schemas.openxmlformats.org/drawingml/2006/main">
               <a:ext uri="{FF2B5EF4-FFF2-40B4-BE49-F238E27FC236}">
-                <a16:creationId xmlns:a16="http://schemas.microsoft.com/office/drawing/2014/main" id="{02928CCD-0E87-43AB-9317-E17972609FB2}"/>
+                <a16:creationId xmlns:a16="http://schemas.microsoft.com/office/drawing/2014/main" id="{A41545A1-979A-4FF8-A1EB-ECD62BA3CC8F}"/>
               </a:ext>
             </a:extLst>
           </p:cNvPr>
@@ -20138,7 +20143,7 @@
           <p:cNvPr id="16" name="">
             <a:extLst xmlns:a="http://schemas.openxmlformats.org/drawingml/2006/main">
               <a:ext uri="{FF2B5EF4-FFF2-40B4-BE49-F238E27FC236}">
-                <a16:creationId xmlns:a16="http://schemas.microsoft.com/office/drawing/2014/main" id="{779DFA37-65BD-49CB-8D3B-8E735D641312}"/>
+                <a16:creationId xmlns:a16="http://schemas.microsoft.com/office/drawing/2014/main" id="{C3FDBE82-D829-4198-BA5C-C56C8D68F743}"/>
               </a:ext>
             </a:extLst>
           </p:cNvPr>
@@ -20171,7 +20176,7 @@
           <p:cNvPr id="17" name="1">
             <a:extLst xmlns:a="http://schemas.openxmlformats.org/drawingml/2006/main">
               <a:ext uri="{FF2B5EF4-FFF2-40B4-BE49-F238E27FC236}">
-                <a16:creationId xmlns:a16="http://schemas.microsoft.com/office/drawing/2014/main" id="{58809225-D579-4FAA-9EBD-8C2EBDBA60BF}"/>
+                <a16:creationId xmlns:a16="http://schemas.microsoft.com/office/drawing/2014/main" id="{1B233383-F5FB-40D5-8570-CD976A9A612A}"/>
               </a:ext>
             </a:extLst>
           </p:cNvPr>
@@ -20329,7 +20334,7 @@
           <p:cNvPr id="18" name="">
             <a:extLst xmlns:a="http://schemas.openxmlformats.org/drawingml/2006/main">
               <a:ext uri="{FF2B5EF4-FFF2-40B4-BE49-F238E27FC236}">
-                <a16:creationId xmlns:a16="http://schemas.microsoft.com/office/drawing/2014/main" id="{5BD7CF9D-5515-47D5-8BCD-694CBE3C8FC9}"/>
+                <a16:creationId xmlns:a16="http://schemas.microsoft.com/office/drawing/2014/main" id="{22134701-1E71-4065-9817-EF2619CEB867}"/>
               </a:ext>
             </a:extLst>
           </p:cNvPr>
@@ -20362,7 +20367,7 @@
           <p:cNvPr id="19" name="2">
             <a:extLst xmlns:a="http://schemas.openxmlformats.org/drawingml/2006/main">
               <a:ext uri="{FF2B5EF4-FFF2-40B4-BE49-F238E27FC236}">
-                <a16:creationId xmlns:a16="http://schemas.microsoft.com/office/drawing/2014/main" id="{1CBA6E19-6476-4575-9B20-B4EF150D7B01}"/>
+                <a16:creationId xmlns:a16="http://schemas.microsoft.com/office/drawing/2014/main" id="{641EEB82-97D3-4BEF-A802-C9D64A71E2EE}"/>
               </a:ext>
             </a:extLst>
           </p:cNvPr>
@@ -20520,7 +20525,7 @@
           <p:cNvPr id="20" name="">
             <a:extLst xmlns:a="http://schemas.openxmlformats.org/drawingml/2006/main">
               <a:ext uri="{FF2B5EF4-FFF2-40B4-BE49-F238E27FC236}">
-                <a16:creationId xmlns:a16="http://schemas.microsoft.com/office/drawing/2014/main" id="{0B0AC74D-520A-4931-A751-F8D271F91AD6}"/>
+                <a16:creationId xmlns:a16="http://schemas.microsoft.com/office/drawing/2014/main" id="{3319C73D-77B4-4107-965E-6A8FE0DA41F6}"/>
               </a:ext>
             </a:extLst>
           </p:cNvPr>
@@ -20553,7 +20558,7 @@
           <p:cNvPr id="21" name="3">
             <a:extLst xmlns:a="http://schemas.openxmlformats.org/drawingml/2006/main">
               <a:ext uri="{FF2B5EF4-FFF2-40B4-BE49-F238E27FC236}">
-                <a16:creationId xmlns:a16="http://schemas.microsoft.com/office/drawing/2014/main" id="{CACDA20A-173C-4372-89AF-D13B7E897C63}"/>
+                <a16:creationId xmlns:a16="http://schemas.microsoft.com/office/drawing/2014/main" id="{D23255E7-8FA4-4821-86C1-06D17A7435EC}"/>
               </a:ext>
             </a:extLst>
           </p:cNvPr>
@@ -20711,7 +20716,7 @@
           <p:cNvPr id="22" name="포함 열: 1, 2&#10;출력 폭: 2">
             <a:extLst xmlns:a="http://schemas.openxmlformats.org/drawingml/2006/main">
               <a:ext uri="{FF2B5EF4-FFF2-40B4-BE49-F238E27FC236}">
-                <a16:creationId xmlns:a16="http://schemas.microsoft.com/office/drawing/2014/main" id="{CF80D5F1-23F2-4F24-A0B9-2F0A40B3225C}"/>
+                <a16:creationId xmlns:a16="http://schemas.microsoft.com/office/drawing/2014/main" id="{D14D84BD-B5AE-42D9-89D1-9C8DFD3D4ED3}"/>
               </a:ext>
             </a:extLst>
           </p:cNvPr>
@@ -20892,7 +20897,7 @@
           <p:cNvPr id="23" name="답을 파일의 계약과 연결해 확인했다">
             <a:extLst xmlns:a="http://schemas.openxmlformats.org/drawingml/2006/main">
               <a:ext uri="{FF2B5EF4-FFF2-40B4-BE49-F238E27FC236}">
-                <a16:creationId xmlns:a16="http://schemas.microsoft.com/office/drawing/2014/main" id="{F48903B5-211A-4A40-BD98-E5F2D6B73C84}"/>
+                <a16:creationId xmlns:a16="http://schemas.microsoft.com/office/drawing/2014/main" id="{C1C81D2B-1EA8-439B-B905-0F6DEE00E6B5}"/>
               </a:ext>
             </a:extLst>
           </p:cNvPr>
@@ -21050,7 +21055,7 @@
           <p:cNvPr id="24" name="Legacy module connection">
             <a:extLst xmlns:a="http://schemas.openxmlformats.org/drawingml/2006/main">
               <a:ext uri="{FF2B5EF4-FFF2-40B4-BE49-F238E27FC236}">
-                <a16:creationId xmlns:a16="http://schemas.microsoft.com/office/drawing/2014/main" id="{89B6CAF5-C829-4121-BCB6-7B71E438B6F9}"/>
+                <a16:creationId xmlns:a16="http://schemas.microsoft.com/office/drawing/2014/main" id="{264ADDDC-E614-4095-B095-5CCED2AE93AC}"/>
               </a:ext>
             </a:extLst>
           </p:cNvPr>
@@ -21206,7 +21211,7 @@
     </p:spTree>
     <p:extLst>
       <p:ext uri="{BB962C8B-B14F-4D97-AF65-F5344CB8AC3E}">
-        <p14:creationId xmlns:p14="http://schemas.microsoft.com/office/powerpoint/2010/main" val="2122750341"/>
+        <p14:creationId xmlns:p14="http://schemas.microsoft.com/office/powerpoint/2010/main" val="672720382"/>
       </p:ext>
     </p:extLst>
   </p:cSld>
@@ -21237,7 +21242,7 @@
           <p:cNvPr id="25" name="ACT 2 · 두 Task의 문서 접근 비교">
             <a:extLst xmlns:a="http://schemas.openxmlformats.org/drawingml/2006/main">
               <a:ext uri="{FF2B5EF4-FFF2-40B4-BE49-F238E27FC236}">
-                <a16:creationId xmlns:a16="http://schemas.microsoft.com/office/drawing/2014/main" id="{CD3F34D0-B4CA-46AF-B6D1-4EDC9C3D1C1F}"/>
+                <a16:creationId xmlns:a16="http://schemas.microsoft.com/office/drawing/2014/main" id="{2091EC04-3653-453F-A987-5B0237A81C83}"/>
               </a:ext>
             </a:extLst>
           </p:cNvPr>
@@ -21395,7 +21400,7 @@
           <p:cNvPr id="2" name="S45">
             <a:extLst xmlns:a="http://schemas.openxmlformats.org/drawingml/2006/main">
               <a:ext uri="{FF2B5EF4-FFF2-40B4-BE49-F238E27FC236}">
-                <a16:creationId xmlns:a16="http://schemas.microsoft.com/office/drawing/2014/main" id="{DDEE0625-F634-4B82-A0CA-AC9C2E94DEF8}"/>
+                <a16:creationId xmlns:a16="http://schemas.microsoft.com/office/drawing/2014/main" id="{5A9F4DE9-4F46-4649-96D6-F64B5FF048A0}"/>
               </a:ext>
             </a:extLst>
           </p:cNvPr>
@@ -21553,7 +21558,7 @@
           <p:cNvPr id="3" name="Task별 접근은 달랐지만 완벽하지는 않다">
             <a:extLst xmlns:a="http://schemas.openxmlformats.org/drawingml/2006/main">
               <a:ext uri="{FF2B5EF4-FFF2-40B4-BE49-F238E27FC236}">
-                <a16:creationId xmlns:a16="http://schemas.microsoft.com/office/drawing/2014/main" id="{B037C8CE-4BDE-47C6-A1B9-D35CCC20A042}"/>
+                <a16:creationId xmlns:a16="http://schemas.microsoft.com/office/drawing/2014/main" id="{1FD90C3F-AE92-43B4-8102-B7F2E818BB5C}"/>
               </a:ext>
             </a:extLst>
           </p:cNvPr>
@@ -21711,7 +21716,7 @@
           <p:cNvPr id="4" name="">
             <a:extLst xmlns:a="http://schemas.openxmlformats.org/drawingml/2006/main">
               <a:ext uri="{FF2B5EF4-FFF2-40B4-BE49-F238E27FC236}">
-                <a16:creationId xmlns:a16="http://schemas.microsoft.com/office/drawing/2014/main" id="{E6BF2874-C338-48B2-B14A-7E4D8AA09E9D}"/>
+                <a16:creationId xmlns:a16="http://schemas.microsoft.com/office/drawing/2014/main" id="{E7FE08EE-58A9-4563-BDD4-E2E388F709B7}"/>
               </a:ext>
             </a:extLst>
           </p:cNvPr>
@@ -21742,7 +21747,7 @@
           <p:cNvPr id="5" name="TRIAL-005A/B · 실제 접근 기록을 요약한 비교">
             <a:extLst xmlns:a="http://schemas.openxmlformats.org/drawingml/2006/main">
               <a:ext uri="{FF2B5EF4-FFF2-40B4-BE49-F238E27FC236}">
-                <a16:creationId xmlns:a16="http://schemas.microsoft.com/office/drawing/2014/main" id="{9337D07F-AAAB-48FD-8498-711866938599}"/>
+                <a16:creationId xmlns:a16="http://schemas.microsoft.com/office/drawing/2014/main" id="{AC784114-E11D-4922-8F2B-A9E39B3DF46A}"/>
               </a:ext>
             </a:extLst>
           </p:cNvPr>
@@ -21900,7 +21905,7 @@
           <p:cNvPr id="6" name="완벽한 Routing 미입증 · 토큰 절약·성능 개선 미측정 · 실행 간 변동 존재">
             <a:extLst xmlns:a="http://schemas.openxmlformats.org/drawingml/2006/main">
               <a:ext uri="{FF2B5EF4-FFF2-40B4-BE49-F238E27FC236}">
-                <a16:creationId xmlns:a16="http://schemas.microsoft.com/office/drawing/2014/main" id="{C5EBD1D5-E070-4A21-B263-15682BFE6F28}"/>
+                <a16:creationId xmlns:a16="http://schemas.microsoft.com/office/drawing/2014/main" id="{6151D4AE-4D2F-4CAC-A303-145C5D2B4FF3}"/>
               </a:ext>
             </a:extLst>
           </p:cNvPr>
@@ -22058,7 +22063,7 @@
           <p:cNvPr id="7" name="같은 Repository에서 질문이 달랐다">
             <a:extLst xmlns:a="http://schemas.openxmlformats.org/drawingml/2006/main">
               <a:ext uri="{FF2B5EF4-FFF2-40B4-BE49-F238E27FC236}">
-                <a16:creationId xmlns:a16="http://schemas.microsoft.com/office/drawing/2014/main" id="{6C72B2FF-C34F-4843-AE3A-FBD6C85415E7}"/>
+                <a16:creationId xmlns:a16="http://schemas.microsoft.com/office/drawing/2014/main" id="{DC080383-06F0-4CC9-B9B4-773765509B49}"/>
               </a:ext>
             </a:extLst>
           </p:cNvPr>
@@ -22216,7 +22221,7 @@
           <p:cNvPr id="8" name="문서">
             <a:extLst xmlns:a="http://schemas.openxmlformats.org/drawingml/2006/main">
               <a:ext uri="{FF2B5EF4-FFF2-40B4-BE49-F238E27FC236}">
-                <a16:creationId xmlns:a16="http://schemas.microsoft.com/office/drawing/2014/main" id="{0856ADD7-AFD4-433C-A9E1-89009A1DF44F}"/>
+                <a16:creationId xmlns:a16="http://schemas.microsoft.com/office/drawing/2014/main" id="{876A8F29-0D4F-4BFB-A8AF-BC9B53C11233}"/>
               </a:ext>
             </a:extLst>
           </p:cNvPr>
@@ -22374,7 +22379,7 @@
           <p:cNvPr id="9" name="A · crop 계약">
             <a:extLst xmlns:a="http://schemas.openxmlformats.org/drawingml/2006/main">
               <a:ext uri="{FF2B5EF4-FFF2-40B4-BE49-F238E27FC236}">
-                <a16:creationId xmlns:a16="http://schemas.microsoft.com/office/drawing/2014/main" id="{F5F8AA10-A690-403D-A15D-B27025D123E6}"/>
+                <a16:creationId xmlns:a16="http://schemas.microsoft.com/office/drawing/2014/main" id="{E2B0F14A-0403-409D-8FDB-2892956DE9FB}"/>
               </a:ext>
             </a:extLst>
           </p:cNvPr>
@@ -22532,7 +22537,7 @@
           <p:cNvPr id="10" name="B · 실행 의존성">
             <a:extLst xmlns:a="http://schemas.openxmlformats.org/drawingml/2006/main">
               <a:ext uri="{FF2B5EF4-FFF2-40B4-BE49-F238E27FC236}">
-                <a16:creationId xmlns:a16="http://schemas.microsoft.com/office/drawing/2014/main" id="{4B1D64F5-DC8F-4B05-ABCE-EFBB36B91630}"/>
+                <a16:creationId xmlns:a16="http://schemas.microsoft.com/office/drawing/2014/main" id="{1092D00A-CB0B-4B19-9688-92AE59A569B8}"/>
               </a:ext>
             </a:extLst>
           </p:cNvPr>
@@ -22690,7 +22695,7 @@
           <p:cNvPr id="11" name="">
             <a:extLst xmlns:a="http://schemas.openxmlformats.org/drawingml/2006/main">
               <a:ext uri="{FF2B5EF4-FFF2-40B4-BE49-F238E27FC236}">
-                <a16:creationId xmlns:a16="http://schemas.microsoft.com/office/drawing/2014/main" id="{4C2B0E09-6E28-455F-8C01-8D5868ED091A}"/>
+                <a16:creationId xmlns:a16="http://schemas.microsoft.com/office/drawing/2014/main" id="{DABC8090-34EE-401F-9B82-E9BEE9045CA1}"/>
               </a:ext>
             </a:extLst>
           </p:cNvPr>
@@ -22721,7 +22726,7 @@
           <p:cNvPr id="12" name="image-contracts.md">
             <a:extLst xmlns:a="http://schemas.openxmlformats.org/drawingml/2006/main">
               <a:ext uri="{FF2B5EF4-FFF2-40B4-BE49-F238E27FC236}">
-                <a16:creationId xmlns:a16="http://schemas.microsoft.com/office/drawing/2014/main" id="{0BE29909-2443-4399-9146-46A774833577}"/>
+                <a16:creationId xmlns:a16="http://schemas.microsoft.com/office/drawing/2014/main" id="{C97A9C72-ACE0-4722-A40E-C673135F0A6F}"/>
               </a:ext>
             </a:extLst>
           </p:cNvPr>
@@ -22879,7 +22884,7 @@
           <p:cNvPr id="13" name="읽음">
             <a:extLst xmlns:a="http://schemas.openxmlformats.org/drawingml/2006/main">
               <a:ext uri="{FF2B5EF4-FFF2-40B4-BE49-F238E27FC236}">
-                <a16:creationId xmlns:a16="http://schemas.microsoft.com/office/drawing/2014/main" id="{F0D31294-9BBC-4462-8DB4-F3957312DE70}"/>
+                <a16:creationId xmlns:a16="http://schemas.microsoft.com/office/drawing/2014/main" id="{F6B733B7-AE8E-4B2B-BDB7-BBDC926924E7}"/>
               </a:ext>
             </a:extLst>
           </p:cNvPr>
@@ -23037,7 +23042,7 @@
           <p:cNvPr id="14" name="읽지 않음">
             <a:extLst xmlns:a="http://schemas.openxmlformats.org/drawingml/2006/main">
               <a:ext uri="{FF2B5EF4-FFF2-40B4-BE49-F238E27FC236}">
-                <a16:creationId xmlns:a16="http://schemas.microsoft.com/office/drawing/2014/main" id="{33F166E5-EEDA-4D8D-9F40-5694832A75C9}"/>
+                <a16:creationId xmlns:a16="http://schemas.microsoft.com/office/drawing/2014/main" id="{36E0EBC0-211E-41D2-8FF1-8C7FD3745905}"/>
               </a:ext>
             </a:extLst>
           </p:cNvPr>
@@ -23195,7 +23200,7 @@
           <p:cNvPr id="15" name="">
             <a:extLst xmlns:a="http://schemas.openxmlformats.org/drawingml/2006/main">
               <a:ext uri="{FF2B5EF4-FFF2-40B4-BE49-F238E27FC236}">
-                <a16:creationId xmlns:a16="http://schemas.microsoft.com/office/drawing/2014/main" id="{2B98DB04-2015-43AF-8AEB-5CD6AF934EFB}"/>
+                <a16:creationId xmlns:a16="http://schemas.microsoft.com/office/drawing/2014/main" id="{B3FD7B73-0B98-44FE-855E-56C04CA2D51B}"/>
               </a:ext>
             </a:extLst>
           </p:cNvPr>
@@ -23226,7 +23231,7 @@
           <p:cNvPr id="16" name="architecture.md">
             <a:extLst xmlns:a="http://schemas.openxmlformats.org/drawingml/2006/main">
               <a:ext uri="{FF2B5EF4-FFF2-40B4-BE49-F238E27FC236}">
-                <a16:creationId xmlns:a16="http://schemas.microsoft.com/office/drawing/2014/main" id="{C75C48EC-8575-4633-BDFE-41598AA7E10A}"/>
+                <a16:creationId xmlns:a16="http://schemas.microsoft.com/office/drawing/2014/main" id="{FA5C0A42-579C-4962-BBA1-B49BC21EC050}"/>
               </a:ext>
             </a:extLst>
           </p:cNvPr>
@@ -23384,7 +23389,7 @@
           <p:cNvPr id="17" name="읽음">
             <a:extLst xmlns:a="http://schemas.openxmlformats.org/drawingml/2006/main">
               <a:ext uri="{FF2B5EF4-FFF2-40B4-BE49-F238E27FC236}">
-                <a16:creationId xmlns:a16="http://schemas.microsoft.com/office/drawing/2014/main" id="{4C38ADF4-1BC5-4612-A4B6-CF1315BD6338}"/>
+                <a16:creationId xmlns:a16="http://schemas.microsoft.com/office/drawing/2014/main" id="{76E63F2E-B7C0-4D75-B930-C8FC248F9BCD}"/>
               </a:ext>
             </a:extLst>
           </p:cNvPr>
@@ -23542,7 +23547,7 @@
           <p:cNvPr id="18" name="읽음">
             <a:extLst xmlns:a="http://schemas.openxmlformats.org/drawingml/2006/main">
               <a:ext uri="{FF2B5EF4-FFF2-40B4-BE49-F238E27FC236}">
-                <a16:creationId xmlns:a16="http://schemas.microsoft.com/office/drawing/2014/main" id="{B0CBE9A0-42DC-473D-A90B-5D4DCE795D7B}"/>
+                <a16:creationId xmlns:a16="http://schemas.microsoft.com/office/drawing/2014/main" id="{749B167F-1582-4632-A456-CF936837C07A}"/>
               </a:ext>
             </a:extLst>
           </p:cNvPr>
@@ -23700,7 +23705,7 @@
           <p:cNvPr id="19" name="">
             <a:extLst xmlns:a="http://schemas.openxmlformats.org/drawingml/2006/main">
               <a:ext uri="{FF2B5EF4-FFF2-40B4-BE49-F238E27FC236}">
-                <a16:creationId xmlns:a16="http://schemas.microsoft.com/office/drawing/2014/main" id="{77FC11CD-67E2-48EB-AE6C-792220B55167}"/>
+                <a16:creationId xmlns:a16="http://schemas.microsoft.com/office/drawing/2014/main" id="{9BC23918-0134-449B-8222-D7759B5DE621}"/>
               </a:ext>
             </a:extLst>
           </p:cNvPr>
@@ -23731,7 +23736,7 @@
           <p:cNvPr id="20" name="testing.md">
             <a:extLst xmlns:a="http://schemas.openxmlformats.org/drawingml/2006/main">
               <a:ext uri="{FF2B5EF4-FFF2-40B4-BE49-F238E27FC236}">
-                <a16:creationId xmlns:a16="http://schemas.microsoft.com/office/drawing/2014/main" id="{7C2840AA-F514-4407-8C4E-6A3E0FA50580}"/>
+                <a16:creationId xmlns:a16="http://schemas.microsoft.com/office/drawing/2014/main" id="{434B80D0-3BAC-4790-9F02-04B960798F47}"/>
               </a:ext>
             </a:extLst>
           </p:cNvPr>
@@ -23889,7 +23894,7 @@
           <p:cNvPr id="21" name="최종 실행에서 읽음">
             <a:extLst xmlns:a="http://schemas.openxmlformats.org/drawingml/2006/main">
               <a:ext uri="{FF2B5EF4-FFF2-40B4-BE49-F238E27FC236}">
-                <a16:creationId xmlns:a16="http://schemas.microsoft.com/office/drawing/2014/main" id="{F0C425D9-6B4D-45C3-87B0-3C4959CB7B2C}"/>
+                <a16:creationId xmlns:a16="http://schemas.microsoft.com/office/drawing/2014/main" id="{676E5065-7B30-4EDF-9B5E-9E74DED691C5}"/>
               </a:ext>
             </a:extLst>
           </p:cNvPr>
@@ -24047,7 +24052,7 @@
           <p:cNvPr id="22" name="읽지 않음">
             <a:extLst xmlns:a="http://schemas.openxmlformats.org/drawingml/2006/main">
               <a:ext uri="{FF2B5EF4-FFF2-40B4-BE49-F238E27FC236}">
-                <a16:creationId xmlns:a16="http://schemas.microsoft.com/office/drawing/2014/main" id="{E2F83B06-B930-453A-9759-20FEF39C59B1}"/>
+                <a16:creationId xmlns:a16="http://schemas.microsoft.com/office/drawing/2014/main" id="{F391D322-D43D-41F3-B52E-64B8AF2AB213}"/>
               </a:ext>
             </a:extLst>
           </p:cNvPr>
@@ -24205,7 +24210,7 @@
           <p:cNvPr id="23" name="A에는 더 넓은 읽기도 존재 · B는 설정·README·source도 확인">
             <a:extLst xmlns:a="http://schemas.openxmlformats.org/drawingml/2006/main">
               <a:ext uri="{FF2B5EF4-FFF2-40B4-BE49-F238E27FC236}">
-                <a16:creationId xmlns:a16="http://schemas.microsoft.com/office/drawing/2014/main" id="{28EC7615-6EAB-4072-ADFE-C8F025930335}"/>
+                <a16:creationId xmlns:a16="http://schemas.microsoft.com/office/drawing/2014/main" id="{3E4843DB-D3D2-452E-ADE1-91E63EEF9CA8}"/>
               </a:ext>
             </a:extLst>
           </p:cNvPr>
@@ -24363,7 +24368,7 @@
           <p:cNvPr id="24" name="Legacy module connection">
             <a:extLst xmlns:a="http://schemas.openxmlformats.org/drawingml/2006/main">
               <a:ext uri="{FF2B5EF4-FFF2-40B4-BE49-F238E27FC236}">
-                <a16:creationId xmlns:a16="http://schemas.microsoft.com/office/drawing/2014/main" id="{251F5933-9A8F-4226-9295-E24BB9CCCE46}"/>
+                <a16:creationId xmlns:a16="http://schemas.microsoft.com/office/drawing/2014/main" id="{95326358-1A29-4BF6-95DA-F375F0BF91D2}"/>
               </a:ext>
             </a:extLst>
           </p:cNvPr>
@@ -24519,7 +24524,7 @@
     </p:spTree>
     <p:extLst>
       <p:ext uri="{BB962C8B-B14F-4D97-AF65-F5344CB8AC3E}">
-        <p14:creationId xmlns:p14="http://schemas.microsoft.com/office/powerpoint/2010/main" val="1247628781"/>
+        <p14:creationId xmlns:p14="http://schemas.microsoft.com/office/powerpoint/2010/main" val="308832118"/>
       </p:ext>
     </p:extLst>
   </p:cSld>
@@ -24550,7 +24555,7 @@
           <p:cNvPr id="15" name="ACT 2 · 다음 문제로 넘어가기">
             <a:extLst xmlns:a="http://schemas.openxmlformats.org/drawingml/2006/main">
               <a:ext uri="{FF2B5EF4-FFF2-40B4-BE49-F238E27FC236}">
-                <a16:creationId xmlns:a16="http://schemas.microsoft.com/office/drawing/2014/main" id="{D2074795-EC50-4C00-8A2A-05D598C4C641}"/>
+                <a16:creationId xmlns:a16="http://schemas.microsoft.com/office/drawing/2014/main" id="{BBB0ABB5-B318-4D4C-A725-4E905031CA19}"/>
               </a:ext>
             </a:extLst>
           </p:cNvPr>
@@ -24708,7 +24713,7 @@
           <p:cNvPr id="2" name="S46">
             <a:extLst xmlns:a="http://schemas.openxmlformats.org/drawingml/2006/main">
               <a:ext uri="{FF2B5EF4-FFF2-40B4-BE49-F238E27FC236}">
-                <a16:creationId xmlns:a16="http://schemas.microsoft.com/office/drawing/2014/main" id="{3B3F5327-DE06-4000-8543-C90B3BB0A767}"/>
+                <a16:creationId xmlns:a16="http://schemas.microsoft.com/office/drawing/2014/main" id="{52431293-9E8E-4F03-AF51-6E4218FDBCA7}"/>
               </a:ext>
             </a:extLst>
           </p:cNvPr>
@@ -24866,7 +24871,7 @@
           <p:cNvPr id="3" name="지식은 정리됐지만 절차는 반복된다">
             <a:extLst xmlns:a="http://schemas.openxmlformats.org/drawingml/2006/main">
               <a:ext uri="{FF2B5EF4-FFF2-40B4-BE49-F238E27FC236}">
-                <a16:creationId xmlns:a16="http://schemas.microsoft.com/office/drawing/2014/main" id="{9DB6241A-ED1A-4B90-BED4-7028FCB66EDE}"/>
+                <a16:creationId xmlns:a16="http://schemas.microsoft.com/office/drawing/2014/main" id="{8E03F037-B45E-4098-8B0C-BE9757462BA4}"/>
               </a:ext>
             </a:extLst>
           </p:cNvPr>
@@ -25024,7 +25029,7 @@
           <p:cNvPr id="4" name="">
             <a:extLst xmlns:a="http://schemas.openxmlformats.org/drawingml/2006/main">
               <a:ext uri="{FF2B5EF4-FFF2-40B4-BE49-F238E27FC236}">
-                <a16:creationId xmlns:a16="http://schemas.microsoft.com/office/drawing/2014/main" id="{97C228F2-E776-4BB8-9213-BD3DEB4581EA}"/>
+                <a16:creationId xmlns:a16="http://schemas.microsoft.com/office/drawing/2014/main" id="{B949747E-C5B9-4CE5-AF74-1806B20FEF4C}"/>
               </a:ext>
             </a:extLst>
           </p:cNvPr>
@@ -25055,7 +25060,7 @@
           <p:cNvPr id="5" name="Project Context 정리 + TRIAL-006/007의 반복 절차 · 기록 요약과 교육용 해석">
             <a:extLst xmlns:a="http://schemas.openxmlformats.org/drawingml/2006/main">
               <a:ext uri="{FF2B5EF4-FFF2-40B4-BE49-F238E27FC236}">
-                <a16:creationId xmlns:a16="http://schemas.microsoft.com/office/drawing/2014/main" id="{BBA2F423-1DFD-4ED2-8639-343BBA787C2C}"/>
+                <a16:creationId xmlns:a16="http://schemas.microsoft.com/office/drawing/2014/main" id="{2B5156B8-A270-4B56-ACCC-F16C5AECDFDF}"/>
               </a:ext>
             </a:extLst>
           </p:cNvPr>
@@ -25213,7 +25218,7 @@
           <p:cNvPr id="6" name="절차가 반복된 원인을 Prompt만으로 분리하지 않음">
             <a:extLst xmlns:a="http://schemas.openxmlformats.org/drawingml/2006/main">
               <a:ext uri="{FF2B5EF4-FFF2-40B4-BE49-F238E27FC236}">
-                <a16:creationId xmlns:a16="http://schemas.microsoft.com/office/drawing/2014/main" id="{CCEF938C-0398-4001-AC1C-412A9E3DB132}"/>
+                <a16:creationId xmlns:a16="http://schemas.microsoft.com/office/drawing/2014/main" id="{379FD311-7B0E-4A56-AEC5-089C9A54B828}"/>
               </a:ext>
             </a:extLst>
           </p:cNvPr>
@@ -25371,7 +25376,7 @@
           <p:cNvPr id="7" name="정리한 것">
             <a:extLst xmlns:a="http://schemas.openxmlformats.org/drawingml/2006/main">
               <a:ext uri="{FF2B5EF4-FFF2-40B4-BE49-F238E27FC236}">
-                <a16:creationId xmlns:a16="http://schemas.microsoft.com/office/drawing/2014/main" id="{B027F458-54E3-4BD9-BDD1-1E2812B9BDE6}"/>
+                <a16:creationId xmlns:a16="http://schemas.microsoft.com/office/drawing/2014/main" id="{6F397A93-5B49-4662-B387-5153B89DB1FD}"/>
               </a:ext>
             </a:extLst>
           </p:cNvPr>
@@ -25529,7 +25534,7 @@
           <p:cNvPr id="8" name="아직 반복되는 것">
             <a:extLst xmlns:a="http://schemas.openxmlformats.org/drawingml/2006/main">
               <a:ext uri="{FF2B5EF4-FFF2-40B4-BE49-F238E27FC236}">
-                <a16:creationId xmlns:a16="http://schemas.microsoft.com/office/drawing/2014/main" id="{698707A9-FC5C-4CBF-899D-FE4E6DEB24C7}"/>
+                <a16:creationId xmlns:a16="http://schemas.microsoft.com/office/drawing/2014/main" id="{595A0120-C062-4025-9324-BA7CA96B0F9E}"/>
               </a:ext>
             </a:extLst>
           </p:cNvPr>
@@ -25687,7 +25692,7 @@
           <p:cNvPr id="9" name="">
             <a:extLst xmlns:a="http://schemas.openxmlformats.org/drawingml/2006/main">
               <a:ext uri="{FF2B5EF4-FFF2-40B4-BE49-F238E27FC236}">
-                <a16:creationId xmlns:a16="http://schemas.microsoft.com/office/drawing/2014/main" id="{632D5674-816C-4A98-B8EF-8FED9AEF89A6}"/>
+                <a16:creationId xmlns:a16="http://schemas.microsoft.com/office/drawing/2014/main" id="{84F305A6-0BC7-4657-B1AA-F4D905D56769}"/>
               </a:ext>
             </a:extLst>
           </p:cNvPr>
@@ -25718,7 +25723,7 @@
           <p:cNvPr id="10" name="">
             <a:extLst xmlns:a="http://schemas.openxmlformats.org/drawingml/2006/main">
               <a:ext uri="{FF2B5EF4-FFF2-40B4-BE49-F238E27FC236}">
-                <a16:creationId xmlns:a16="http://schemas.microsoft.com/office/drawing/2014/main" id="{3DC5FC71-FA40-49D8-B95D-52F7BBFC81A7}"/>
+                <a16:creationId xmlns:a16="http://schemas.microsoft.com/office/drawing/2014/main" id="{48D369FF-4A40-43D0-B8A5-B22933D714F3}"/>
               </a:ext>
             </a:extLst>
           </p:cNvPr>
@@ -25749,7 +25754,7 @@
           <p:cNvPr id="11" name="현재 목표는 Prompt에&#10;공통 사실은 Project Context에&#10;상세 정보는 Routing으로">
             <a:extLst xmlns:a="http://schemas.openxmlformats.org/drawingml/2006/main">
               <a:ext uri="{FF2B5EF4-FFF2-40B4-BE49-F238E27FC236}">
-                <a16:creationId xmlns:a16="http://schemas.microsoft.com/office/drawing/2014/main" id="{ACC831F5-A271-4273-8D6F-8604B1C5D18A}"/>
+                <a16:creationId xmlns:a16="http://schemas.microsoft.com/office/drawing/2014/main" id="{DE81EE7F-2815-49BB-AC04-AF29641C5B49}"/>
               </a:ext>
             </a:extLst>
           </p:cNvPr>
@@ -25953,7 +25958,7 @@
           <p:cNvPr id="12" name="먼저 측정하고&#10;조사한 뒤 변경하고&#10;같은 조건으로 확인해줘">
             <a:extLst xmlns:a="http://schemas.openxmlformats.org/drawingml/2006/main">
               <a:ext uri="{FF2B5EF4-FFF2-40B4-BE49-F238E27FC236}">
-                <a16:creationId xmlns:a16="http://schemas.microsoft.com/office/drawing/2014/main" id="{A3DD0C4A-40C6-487F-B47C-F7935BFB16ED}"/>
+                <a16:creationId xmlns:a16="http://schemas.microsoft.com/office/drawing/2014/main" id="{9083FC92-30E4-47D0-8185-2246DD1D5AFB}"/>
               </a:ext>
             </a:extLst>
           </p:cNvPr>
@@ -26157,7 +26162,7 @@
           <p:cNvPr id="13" name="같은 작업 절차도 다시 써야 할까?">
             <a:extLst xmlns:a="http://schemas.openxmlformats.org/drawingml/2006/main">
               <a:ext uri="{FF2B5EF4-FFF2-40B4-BE49-F238E27FC236}">
-                <a16:creationId xmlns:a16="http://schemas.microsoft.com/office/drawing/2014/main" id="{4772B232-DD05-4D02-9BB9-F70367FE68F1}"/>
+                <a16:creationId xmlns:a16="http://schemas.microsoft.com/office/drawing/2014/main" id="{C91A7280-3331-4D5C-A322-4AFB8A9DCB3A}"/>
               </a:ext>
             </a:extLst>
           </p:cNvPr>
@@ -26315,7 +26320,7 @@
           <p:cNvPr id="14" name="Legacy module connection">
             <a:extLst xmlns:a="http://schemas.openxmlformats.org/drawingml/2006/main">
               <a:ext uri="{FF2B5EF4-FFF2-40B4-BE49-F238E27FC236}">
-                <a16:creationId xmlns:a16="http://schemas.microsoft.com/office/drawing/2014/main" id="{AD459938-2815-4A57-8BAC-6772D4E327E9}"/>
+                <a16:creationId xmlns:a16="http://schemas.microsoft.com/office/drawing/2014/main" id="{2307BE9B-C0C0-48BA-94A3-D184E0C1C1B0}"/>
               </a:ext>
             </a:extLst>
           </p:cNvPr>
@@ -26471,7 +26476,7 @@
     </p:spTree>
     <p:extLst>
       <p:ext uri="{BB962C8B-B14F-4D97-AF65-F5344CB8AC3E}">
-        <p14:creationId xmlns:p14="http://schemas.microsoft.com/office/powerpoint/2010/main" val="1813346992"/>
+        <p14:creationId xmlns:p14="http://schemas.microsoft.com/office/powerpoint/2010/main" val="1205768698"/>
       </p:ext>
     </p:extLst>
   </p:cSld>
@@ -26502,7 +26507,7 @@
           <p:cNvPr id="27" name="ACT 2  ·  Project Context">
             <a:extLst xmlns:a="http://schemas.openxmlformats.org/drawingml/2006/main">
               <a:ext uri="{FF2B5EF4-FFF2-40B4-BE49-F238E27FC236}">
-                <a16:creationId xmlns:a16="http://schemas.microsoft.com/office/drawing/2014/main" id="{B151911A-29E0-4AE4-A662-A06F938A0CDB}"/>
+                <a16:creationId xmlns:a16="http://schemas.microsoft.com/office/drawing/2014/main" id="{EB69138B-22D1-4D66-A9C0-033A540CDB04}"/>
               </a:ext>
             </a:extLst>
           </p:cNvPr>
@@ -26660,7 +26665,7 @@
           <p:cNvPr id="2" name="S33">
             <a:extLst xmlns:a="http://schemas.openxmlformats.org/drawingml/2006/main">
               <a:ext uri="{FF2B5EF4-FFF2-40B4-BE49-F238E27FC236}">
-                <a16:creationId xmlns:a16="http://schemas.microsoft.com/office/drawing/2014/main" id="{26C4688C-44FF-47DF-B058-8EFEBAD293E8}"/>
+                <a16:creationId xmlns:a16="http://schemas.microsoft.com/office/drawing/2014/main" id="{CEE84F9D-8AD0-4225-AFBE-72A123D67B64}"/>
               </a:ext>
             </a:extLst>
           </p:cNvPr>
@@ -26818,7 +26823,7 @@
           <p:cNvPr id="3" name="작은 Project Context의 첫 기록">
             <a:extLst xmlns:a="http://schemas.openxmlformats.org/drawingml/2006/main">
               <a:ext uri="{FF2B5EF4-FFF2-40B4-BE49-F238E27FC236}">
-                <a16:creationId xmlns:a16="http://schemas.microsoft.com/office/drawing/2014/main" id="{0247EA3D-A134-4D35-809C-1C1FD1FADEE0}"/>
+                <a16:creationId xmlns:a16="http://schemas.microsoft.com/office/drawing/2014/main" id="{54EB8D8A-4CB1-445F-A05A-8AA344FA7E14}"/>
               </a:ext>
             </a:extLst>
           </p:cNvPr>
@@ -26976,7 +26981,7 @@
           <p:cNvPr id="4" name="">
             <a:extLst xmlns:a="http://schemas.openxmlformats.org/drawingml/2006/main">
               <a:ext uri="{FF2B5EF4-FFF2-40B4-BE49-F238E27FC236}">
-                <a16:creationId xmlns:a16="http://schemas.microsoft.com/office/drawing/2014/main" id="{B5800E12-2DDC-4847-83FC-5FB247C13F32}"/>
+                <a16:creationId xmlns:a16="http://schemas.microsoft.com/office/drawing/2014/main" id="{CEF9B45A-F8E0-461F-BD5F-0C573313CCC3}"/>
               </a:ext>
             </a:extLst>
           </p:cNvPr>
@@ -27007,7 +27012,7 @@
           <p:cNvPr id="5" name="OBSERVED PRODUCT  |  STATE-01 · AGENTS.md 실제 원문 발췌">
             <a:extLst xmlns:a="http://schemas.openxmlformats.org/drawingml/2006/main">
               <a:ext uri="{FF2B5EF4-FFF2-40B4-BE49-F238E27FC236}">
-                <a16:creationId xmlns:a16="http://schemas.microsoft.com/office/drawing/2014/main" id="{4DFA1924-D945-4092-B1D3-61A59B8F054D}"/>
+                <a16:creationId xmlns:a16="http://schemas.microsoft.com/office/drawing/2014/main" id="{242221A1-7E71-4D93-9DC5-176C68E4624A}"/>
               </a:ext>
             </a:extLst>
           </p:cNvPr>
@@ -27165,7 +27170,7 @@
           <p:cNvPr id="6" name="파일의 내용과 기록 위치를 보여주는 장 · Agent의 활용 관찰은 다음 장에서 확인">
             <a:extLst xmlns:a="http://schemas.openxmlformats.org/drawingml/2006/main">
               <a:ext uri="{FF2B5EF4-FFF2-40B4-BE49-F238E27FC236}">
-                <a16:creationId xmlns:a16="http://schemas.microsoft.com/office/drawing/2014/main" id="{996CC426-F1C8-411C-818E-7488C11270CD}"/>
+                <a16:creationId xmlns:a16="http://schemas.microsoft.com/office/drawing/2014/main" id="{3FFB8742-60B9-4E3E-946A-AC9D1C7F41BB}"/>
               </a:ext>
             </a:extLst>
           </p:cNvPr>
@@ -27323,7 +27328,7 @@
           <p:cNvPr id="7" name="반복해서 설명하던 내용을 저장소에 남겼다">
             <a:extLst xmlns:a="http://schemas.openxmlformats.org/drawingml/2006/main">
               <a:ext uri="{FF2B5EF4-FFF2-40B4-BE49-F238E27FC236}">
-                <a16:creationId xmlns:a16="http://schemas.microsoft.com/office/drawing/2014/main" id="{68C8C39C-9C70-4342-86B4-8537BC4EAF82}"/>
+                <a16:creationId xmlns:a16="http://schemas.microsoft.com/office/drawing/2014/main" id="{94C5BCF7-C51B-40D1-AE2E-38B1260E013E}"/>
               </a:ext>
             </a:extLst>
           </p:cNvPr>
@@ -27481,7 +27486,7 @@
           <p:cNvPr id="8" name="AGENTS.md">
             <a:extLst xmlns:a="http://schemas.openxmlformats.org/drawingml/2006/main">
               <a:ext uri="{FF2B5EF4-FFF2-40B4-BE49-F238E27FC236}">
-                <a16:creationId xmlns:a16="http://schemas.microsoft.com/office/drawing/2014/main" id="{0D15D344-8B8D-4EF5-A22B-3508278EDAC6}"/>
+                <a16:creationId xmlns:a16="http://schemas.microsoft.com/office/drawing/2014/main" id="{8558C74A-1B88-4361-8921-F013AB813AAB}"/>
               </a:ext>
             </a:extLst>
           </p:cNvPr>
@@ -27639,7 +27644,7 @@
           <p:cNvPr id="9" name="STATE-00-FIXED → STATE-01">
             <a:extLst xmlns:a="http://schemas.openxmlformats.org/drawingml/2006/main">
               <a:ext uri="{FF2B5EF4-FFF2-40B4-BE49-F238E27FC236}">
-                <a16:creationId xmlns:a16="http://schemas.microsoft.com/office/drawing/2014/main" id="{359769FA-0C24-4854-8955-48DE2BA6F013}"/>
+                <a16:creationId xmlns:a16="http://schemas.microsoft.com/office/drawing/2014/main" id="{0F1C856F-9430-44DB-8F9C-4608C191149F}"/>
               </a:ext>
             </a:extLst>
           </p:cNvPr>
@@ -27797,7 +27802,7 @@
           <p:cNvPr id="10" name="">
             <a:extLst xmlns:a="http://schemas.openxmlformats.org/drawingml/2006/main">
               <a:ext uri="{FF2B5EF4-FFF2-40B4-BE49-F238E27FC236}">
-                <a16:creationId xmlns:a16="http://schemas.microsoft.com/office/drawing/2014/main" id="{6D43D2A3-FA1B-4F37-A2C2-BCA67912F646}"/>
+                <a16:creationId xmlns:a16="http://schemas.microsoft.com/office/drawing/2014/main" id="{324B1061-A2BC-44D1-966B-5A546C4ADAAF}"/>
               </a:ext>
             </a:extLst>
           </p:cNvPr>
@@ -27828,7 +27833,7 @@
           <p:cNvPr id="11" name="프로젝트 목적">
             <a:extLst xmlns:a="http://schemas.openxmlformats.org/drawingml/2006/main">
               <a:ext uri="{FF2B5EF4-FFF2-40B4-BE49-F238E27FC236}">
-                <a16:creationId xmlns:a16="http://schemas.microsoft.com/office/drawing/2014/main" id="{18DA471A-573C-49FF-BFEB-1D5C0DADE4F9}"/>
+                <a16:creationId xmlns:a16="http://schemas.microsoft.com/office/drawing/2014/main" id="{D084F74A-E438-4037-87E7-7ADB4A14E58B}"/>
               </a:ext>
             </a:extLst>
           </p:cNvPr>
@@ -27986,7 +27991,7 @@
           <p:cNvPr id="12" name="Local grayscale image-processing CLI using synthetic ASCII P">
             <a:extLst xmlns:a="http://schemas.openxmlformats.org/drawingml/2006/main">
               <a:ext uri="{FF2B5EF4-FFF2-40B4-BE49-F238E27FC236}">
-                <a16:creationId xmlns:a16="http://schemas.microsoft.com/office/drawing/2014/main" id="{2894C121-0D64-47F7-858C-A48FA5D556A4}"/>
+                <a16:creationId xmlns:a16="http://schemas.microsoft.com/office/drawing/2014/main" id="{BDA5AC08-BDCE-4162-B24A-AD86711D331C}"/>
               </a:ext>
             </a:extLst>
           </p:cNvPr>
@@ -28166,7 +28171,7 @@
           <p:cNvPr id="13" name="로컬 합성 이미지로 동작하는 흑백 처리 CLI">
             <a:extLst xmlns:a="http://schemas.openxmlformats.org/drawingml/2006/main">
               <a:ext uri="{FF2B5EF4-FFF2-40B4-BE49-F238E27FC236}">
-                <a16:creationId xmlns:a16="http://schemas.microsoft.com/office/drawing/2014/main" id="{73E66AD6-164F-4776-9F6B-DC47D5FC6B38}"/>
+                <a16:creationId xmlns:a16="http://schemas.microsoft.com/office/drawing/2014/main" id="{BB074327-93C3-40E0-BCAF-D71EA840AD50}"/>
               </a:ext>
             </a:extLst>
           </p:cNvPr>
@@ -28324,7 +28329,7 @@
           <p:cNvPr id="14" name="">
             <a:extLst xmlns:a="http://schemas.openxmlformats.org/drawingml/2006/main">
               <a:ext uri="{FF2B5EF4-FFF2-40B4-BE49-F238E27FC236}">
-                <a16:creationId xmlns:a16="http://schemas.microsoft.com/office/drawing/2014/main" id="{785D22AA-9D40-4FC5-99C7-E33AE058E70F}"/>
+                <a16:creationId xmlns:a16="http://schemas.microsoft.com/office/drawing/2014/main" id="{D7B35717-8ADD-4171-A54A-274FA1513000}"/>
               </a:ext>
             </a:extLst>
           </p:cNvPr>
@@ -28355,7 +28360,7 @@
           <p:cNvPr id="15" name="실행 방법">
             <a:extLst xmlns:a="http://schemas.openxmlformats.org/drawingml/2006/main">
               <a:ext uri="{FF2B5EF4-FFF2-40B4-BE49-F238E27FC236}">
-                <a16:creationId xmlns:a16="http://schemas.microsoft.com/office/drawing/2014/main" id="{AE62AEE4-6328-4ECC-9F05-41B4D2AE27FC}"/>
+                <a16:creationId xmlns:a16="http://schemas.microsoft.com/office/drawing/2014/main" id="{86685801-A445-4571-97F9-AD6C7FF0672C}"/>
               </a:ext>
             </a:extLst>
           </p:cNvPr>
@@ -28513,7 +28518,7 @@
           <p:cNvPr id="16" name="Use the prepared build and CLI commands documented in `READM">
             <a:extLst xmlns:a="http://schemas.openxmlformats.org/drawingml/2006/main">
               <a:ext uri="{FF2B5EF4-FFF2-40B4-BE49-F238E27FC236}">
-                <a16:creationId xmlns:a16="http://schemas.microsoft.com/office/drawing/2014/main" id="{AEE73BC0-A114-4241-9602-2919F548EAD9}"/>
+                <a16:creationId xmlns:a16="http://schemas.microsoft.com/office/drawing/2014/main" id="{36C7A0AD-BEEA-4EA2-9FBA-AE407F8DCF1E}"/>
               </a:ext>
             </a:extLst>
           </p:cNvPr>
@@ -28693,7 +28698,7 @@
           <p:cNvPr id="17" name="실행 방법은 README에서 확인">
             <a:extLst xmlns:a="http://schemas.openxmlformats.org/drawingml/2006/main">
               <a:ext uri="{FF2B5EF4-FFF2-40B4-BE49-F238E27FC236}">
-                <a16:creationId xmlns:a16="http://schemas.microsoft.com/office/drawing/2014/main" id="{41B4B794-E4C4-42CE-8541-AE527A026DDE}"/>
+                <a16:creationId xmlns:a16="http://schemas.microsoft.com/office/drawing/2014/main" id="{63DF4A7A-9229-48BF-925E-9DB993D56E4D}"/>
               </a:ext>
             </a:extLst>
           </p:cNvPr>
@@ -28851,7 +28856,7 @@
           <p:cNvPr id="18" name="">
             <a:extLst xmlns:a="http://schemas.openxmlformats.org/drawingml/2006/main">
               <a:ext uri="{FF2B5EF4-FFF2-40B4-BE49-F238E27FC236}">
-                <a16:creationId xmlns:a16="http://schemas.microsoft.com/office/drawing/2014/main" id="{3894BC0C-25F9-4B30-9975-E719A2025CA9}"/>
+                <a16:creationId xmlns:a16="http://schemas.microsoft.com/office/drawing/2014/main" id="{8AFE3159-1CA9-4EC2-9EED-FA5057070F07}"/>
               </a:ext>
             </a:extLst>
           </p:cNvPr>
@@ -28882,7 +28887,7 @@
           <p:cNvPr id="19" name="테스트 명령">
             <a:extLst xmlns:a="http://schemas.openxmlformats.org/drawingml/2006/main">
               <a:ext uri="{FF2B5EF4-FFF2-40B4-BE49-F238E27FC236}">
-                <a16:creationId xmlns:a16="http://schemas.microsoft.com/office/drawing/2014/main" id="{4BE4D2C4-C558-4282-9D95-8EAD07FDE798}"/>
+                <a16:creationId xmlns:a16="http://schemas.microsoft.com/office/drawing/2014/main" id="{C60DA1D5-E8AE-4F55-AED5-120AE23189BC}"/>
               </a:ext>
             </a:extLst>
           </p:cNvPr>
@@ -29040,7 +29045,7 @@
           <p:cNvPr id="20" name="PYTHONPATH=src python3 -m unittest discover -s tests -v">
             <a:extLst xmlns:a="http://schemas.openxmlformats.org/drawingml/2006/main">
               <a:ext uri="{FF2B5EF4-FFF2-40B4-BE49-F238E27FC236}">
-                <a16:creationId xmlns:a16="http://schemas.microsoft.com/office/drawing/2014/main" id="{BC423AA7-FDF4-48C3-8B91-2960D69C31C8}"/>
+                <a16:creationId xmlns:a16="http://schemas.microsoft.com/office/drawing/2014/main" id="{61CC9956-BD33-4A20-ACA5-F8C513D5FB88}"/>
               </a:ext>
             </a:extLst>
           </p:cNvPr>
@@ -29198,7 +29203,7 @@
           <p:cNvPr id="21" name="반복해서 쓸 테스트 명령">
             <a:extLst xmlns:a="http://schemas.openxmlformats.org/drawingml/2006/main">
               <a:ext uri="{FF2B5EF4-FFF2-40B4-BE49-F238E27FC236}">
-                <a16:creationId xmlns:a16="http://schemas.microsoft.com/office/drawing/2014/main" id="{8DAADDBD-BA14-4AFA-8A30-BE6400C2FBEE}"/>
+                <a16:creationId xmlns:a16="http://schemas.microsoft.com/office/drawing/2014/main" id="{8CECD4F6-934C-4994-B7E6-DEA8B9852B75}"/>
               </a:ext>
             </a:extLst>
           </p:cNvPr>
@@ -29356,7 +29361,7 @@
           <p:cNvPr id="22" name="">
             <a:extLst xmlns:a="http://schemas.openxmlformats.org/drawingml/2006/main">
               <a:ext uri="{FF2B5EF4-FFF2-40B4-BE49-F238E27FC236}">
-                <a16:creationId xmlns:a16="http://schemas.microsoft.com/office/drawing/2014/main" id="{DE8CD8EE-99A6-4113-A14D-B19EB35C1B0C}"/>
+                <a16:creationId xmlns:a16="http://schemas.microsoft.com/office/drawing/2014/main" id="{75C0EC6C-56C6-434E-B6F8-41B692EFD2FC}"/>
               </a:ext>
             </a:extLst>
           </p:cNvPr>
@@ -29387,7 +29392,7 @@
           <p:cNvPr id="23" name="기본 제약">
             <a:extLst xmlns:a="http://schemas.openxmlformats.org/drawingml/2006/main">
               <a:ext uri="{FF2B5EF4-FFF2-40B4-BE49-F238E27FC236}">
-                <a16:creationId xmlns:a16="http://schemas.microsoft.com/office/drawing/2014/main" id="{79999889-D779-4790-B921-149B148BA2C2}"/>
+                <a16:creationId xmlns:a16="http://schemas.microsoft.com/office/drawing/2014/main" id="{56B3AC9A-C7CC-43F7-B323-31CDC238BF12}"/>
               </a:ext>
             </a:extLst>
           </p:cNvPr>
@@ -29545,7 +29550,7 @@
           <p:cNvPr id="24" name="Keep changes scoped and verify relevant behavior.">
             <a:extLst xmlns:a="http://schemas.openxmlformats.org/drawingml/2006/main">
               <a:ext uri="{FF2B5EF4-FFF2-40B4-BE49-F238E27FC236}">
-                <a16:creationId xmlns:a16="http://schemas.microsoft.com/office/drawing/2014/main" id="{3FA66A92-4679-4D31-A6D1-AA4253A4C650}"/>
+                <a16:creationId xmlns:a16="http://schemas.microsoft.com/office/drawing/2014/main" id="{B973DEA6-F09D-4CCE-9F09-AF49E489D4B7}"/>
               </a:ext>
             </a:extLst>
           </p:cNvPr>
@@ -29725,7 +29730,7 @@
           <p:cNvPr id="25" name="범위를 지키고 관련 동작을 검증">
             <a:extLst xmlns:a="http://schemas.openxmlformats.org/drawingml/2006/main">
               <a:ext uri="{FF2B5EF4-FFF2-40B4-BE49-F238E27FC236}">
-                <a16:creationId xmlns:a16="http://schemas.microsoft.com/office/drawing/2014/main" id="{B4684E36-7BF3-4783-B48A-7A4916F0F156}"/>
+                <a16:creationId xmlns:a16="http://schemas.microsoft.com/office/drawing/2014/main" id="{FFE9A5C2-BE8C-4776-AD4A-BCDE42C6609C}"/>
               </a:ext>
             </a:extLst>
           </p:cNvPr>
@@ -29883,7 +29888,7 @@
           <p:cNvPr id="26" name="Legacy module connection">
             <a:extLst xmlns:a="http://schemas.openxmlformats.org/drawingml/2006/main">
               <a:ext uri="{FF2B5EF4-FFF2-40B4-BE49-F238E27FC236}">
-                <a16:creationId xmlns:a16="http://schemas.microsoft.com/office/drawing/2014/main" id="{AA7293DD-EC92-435E-950D-0A1CC39053D8}"/>
+                <a16:creationId xmlns:a16="http://schemas.microsoft.com/office/drawing/2014/main" id="{EB58DC56-CBF2-479B-BC5F-99FACE174160}"/>
               </a:ext>
             </a:extLst>
           </p:cNvPr>
@@ -30039,7 +30044,7 @@
     </p:spTree>
     <p:extLst>
       <p:ext uri="{BB962C8B-B14F-4D97-AF65-F5344CB8AC3E}">
-        <p14:creationId xmlns:p14="http://schemas.microsoft.com/office/powerpoint/2010/main" val="1043602072"/>
+        <p14:creationId xmlns:p14="http://schemas.microsoft.com/office/powerpoint/2010/main" val="1614028191"/>
       </p:ext>
     </p:extLst>
   </p:cSld>
@@ -30067,10 +30072,10 @@
       </p:grpSpPr>
       <p:sp>
         <p:nvSpPr>
-          <p:cNvPr id="24" name="ACT 2 · 지침을 활용한 관찰">
+          <p:cNvPr id="29" name="ACT 2 · 프로젝트 작업 지침을 실제 실행에 적용">
             <a:extLst xmlns:a="http://schemas.openxmlformats.org/drawingml/2006/main">
               <a:ext uri="{FF2B5EF4-FFF2-40B4-BE49-F238E27FC236}">
-                <a16:creationId xmlns:a16="http://schemas.microsoft.com/office/drawing/2014/main" id="{3A0E2348-95C0-47F7-80E4-38F194F87024}"/>
+                <a16:creationId xmlns:a16="http://schemas.microsoft.com/office/drawing/2014/main" id="{6368ED7E-35DE-471A-8C4B-BA6B5D80DAE8}"/>
               </a:ext>
             </a:extLst>
           </p:cNvPr>
@@ -30218,7 +30223,7 @@
                 <a:ea typeface="Malgun Gothic"/>
                 <a:cs typeface="Malgun Gothic"/>
               </a:rPr>
-              <a:t>ACT 2 · 지침을 활용한 관찰</a:t>
+              <a:t>ACT 2 · 프로젝트 작업 지침을 실제 실행에 적용</a:t>
             </a:r>
           </a:p>
         </p:txBody>
@@ -30228,7 +30233,7 @@
           <p:cNvPr id="2" name="S34">
             <a:extLst xmlns:a="http://schemas.openxmlformats.org/drawingml/2006/main">
               <a:ext uri="{FF2B5EF4-FFF2-40B4-BE49-F238E27FC236}">
-                <a16:creationId xmlns:a16="http://schemas.microsoft.com/office/drawing/2014/main" id="{8A8B91A6-D668-45EE-BBC2-6FBF3CC814E3}"/>
+                <a16:creationId xmlns:a16="http://schemas.microsoft.com/office/drawing/2014/main" id="{DADFE9C4-210B-4AF6-8541-750E5CF3B525}"/>
               </a:ext>
             </a:extLst>
           </p:cNvPr>
@@ -30383,10 +30388,10 @@
       </p:sp>
       <p:sp>
         <p:nvSpPr>
-          <p:cNvPr id="3" name="한 번의 사용에서 확인된 것">
+          <p:cNvPr id="3" name="AGENTS.md의 지침대로 검증했다">
             <a:extLst xmlns:a="http://schemas.openxmlformats.org/drawingml/2006/main">
               <a:ext uri="{FF2B5EF4-FFF2-40B4-BE49-F238E27FC236}">
-                <a16:creationId xmlns:a16="http://schemas.microsoft.com/office/drawing/2014/main" id="{6C704AED-400E-451F-8B93-50BA940F7935}"/>
+                <a16:creationId xmlns:a16="http://schemas.microsoft.com/office/drawing/2014/main" id="{0C58F7CC-7E01-47A7-903D-657660DA7304}"/>
               </a:ext>
             </a:extLst>
           </p:cNvPr>
@@ -30534,7 +30539,7 @@
                 <a:ea typeface="Malgun Gothic"/>
                 <a:cs typeface="Malgun Gothic"/>
               </a:rPr>
-              <a:t>한 번의 사용에서 확인된 것</a:t>
+              <a:t>AGENTS.md의 지침대로 검증했다</a:t>
             </a:r>
           </a:p>
         </p:txBody>
@@ -30544,7 +30549,7 @@
           <p:cNvPr id="4" name="">
             <a:extLst xmlns:a="http://schemas.openxmlformats.org/drawingml/2006/main">
               <a:ext uri="{FF2B5EF4-FFF2-40B4-BE49-F238E27FC236}">
-                <a16:creationId xmlns:a16="http://schemas.microsoft.com/office/drawing/2014/main" id="{2EC8DA53-FF72-4373-97F1-C80B861A8E49}"/>
+                <a16:creationId xmlns:a16="http://schemas.microsoft.com/office/drawing/2014/main" id="{52296AFD-0089-4EDC-A415-7061C782317A}"/>
               </a:ext>
             </a:extLst>
           </p:cNvPr>
@@ -30572,10 +30577,10 @@
       </p:sp>
       <p:sp>
         <p:nvSpPr>
-          <p:cNvPr id="5" name="TRIAL-003 · Codex CLI 기록을 재구성 · 전체 테스트 11/11 PASS">
+          <p:cNvPr id="5" name="TRIAL-003 · 실제 요청 발췌·번역 / 실행 기록 요약 · Codex CLI 0.154.0">
             <a:extLst xmlns:a="http://schemas.openxmlformats.org/drawingml/2006/main">
               <a:ext uri="{FF2B5EF4-FFF2-40B4-BE49-F238E27FC236}">
-                <a16:creationId xmlns:a16="http://schemas.microsoft.com/office/drawing/2014/main" id="{00B56F22-23B9-4ABA-8773-82EDC0B23B9A}"/>
+                <a16:creationId xmlns:a16="http://schemas.microsoft.com/office/drawing/2014/main" id="{7FDAA33D-B90A-4169-BA3A-31FDF6B2E170}"/>
               </a:ext>
             </a:extLst>
           </p:cNvPr>
@@ -30723,17 +30728,17 @@
                 <a:ea typeface="Malgun Gothic"/>
                 <a:cs typeface="Malgun Gothic"/>
               </a:rPr>
-              <a:t>TRIAL-003 · Codex CLI 기록을 재구성 · 전체 테스트 11/11 PASS</a:t>
+              <a:t>TRIAL-003 · 실제 요청 발췌·번역 / 실행 기록 요약 · Codex CLI 0.154.0</a:t>
             </a:r>
           </a:p>
         </p:txBody>
       </p:sp>
       <p:sp>
         <p:nvSpPr>
-          <p:cNvPr id="6" name="Personal/global Skills도 실행됨 · AGENTS.md만의 독립적인 효과로 해석하지 않음">
+          <p:cNvPr id="6" name="Skills도 실행 · README-only는 Prompt에도 명시 · AGENTS.md 단독 효과·강제 준">
             <a:extLst xmlns:a="http://schemas.openxmlformats.org/drawingml/2006/main">
               <a:ext uri="{FF2B5EF4-FFF2-40B4-BE49-F238E27FC236}">
-                <a16:creationId xmlns:a16="http://schemas.microsoft.com/office/drawing/2014/main" id="{9424DE84-B0F3-4758-A475-55051A9B6BE2}"/>
+                <a16:creationId xmlns:a16="http://schemas.microsoft.com/office/drawing/2014/main" id="{D1EF4FCA-2F19-486E-929C-5F173CFD3942}"/>
               </a:ext>
             </a:extLst>
           </p:cNvPr>
@@ -30881,17 +30886,17 @@
                 <a:ea typeface="Malgun Gothic"/>
                 <a:cs typeface="Malgun Gothic"/>
               </a:rPr>
-              <a:t>Personal/global Skills도 실행됨 · AGENTS.md만의 독립적인 효과로 해석하지 않음</a:t>
+              <a:t>Skills도 실행 · README-only는 Prompt에도 명시 · AGENTS.md 단독 효과·강제 준수 보장은 미입증</a:t>
             </a:r>
           </a:p>
         </p:txBody>
       </p:sp>
       <p:sp>
         <p:nvSpPr>
-          <p:cNvPr id="7" name="요청">
+          <p:cNvPr id="7" name="Task Prompt">
             <a:extLst xmlns:a="http://schemas.openxmlformats.org/drawingml/2006/main">
               <a:ext uri="{FF2B5EF4-FFF2-40B4-BE49-F238E27FC236}">
-                <a16:creationId xmlns:a16="http://schemas.microsoft.com/office/drawing/2014/main" id="{A294877E-36F7-4182-B6D8-91A54D7A73FB}"/>
+                <a16:creationId xmlns:a16="http://schemas.microsoft.com/office/drawing/2014/main" id="{EEE43A46-01CB-4CBE-B3B9-2A508D29FE37}"/>
               </a:ext>
             </a:extLst>
           </p:cNvPr>
@@ -30902,8 +30907,8 @@
         </p:nvSpPr>
         <p:spPr>
           <a:xfrm xmlns:a="http://schemas.openxmlformats.org/drawingml/2006/main">
-            <a:off x="609600" y="2209800"/>
-            <a:ext cx="3314700" cy="323850"/>
+            <a:off x="609600" y="1685925"/>
+            <a:ext cx="4267200" cy="342900"/>
           </a:xfrm>
           <a:prstGeom xmlns:a="http://schemas.openxmlformats.org/drawingml/2006/main" prst="rect">
             <a:avLst/>
@@ -31039,17 +31044,17 @@
                 <a:ea typeface="Malgun Gothic"/>
                 <a:cs typeface="Malgun Gothic"/>
               </a:rPr>
-              <a:t>요청</a:t>
+              <a:t>Task Prompt</a:t>
             </a:r>
           </a:p>
         </p:txBody>
       </p:sp>
       <p:sp>
         <p:nvSpPr>
-          <p:cNvPr id="8" name="">
+          <p:cNvPr id="8" name="저장소의 작업 지침">
             <a:extLst xmlns:a="http://schemas.openxmlformats.org/drawingml/2006/main">
               <a:ext uri="{FF2B5EF4-FFF2-40B4-BE49-F238E27FC236}">
-                <a16:creationId xmlns:a16="http://schemas.microsoft.com/office/drawing/2014/main" id="{54FEBC1E-9B3B-4A67-95E3-4CCBE6244B09}"/>
+                <a16:creationId xmlns:a16="http://schemas.microsoft.com/office/drawing/2014/main" id="{C2C15DA8-4908-4642-8FBB-B22E507A5931}"/>
               </a:ext>
             </a:extLst>
           </p:cNvPr>
@@ -31060,39 +31065,8 @@
         </p:nvSpPr>
         <p:spPr>
           <a:xfrm xmlns:a="http://schemas.openxmlformats.org/drawingml/2006/main">
-            <a:off x="609600" y="2667000"/>
-            <a:ext cx="3314700" cy="0"/>
-          </a:xfrm>
-          <a:prstGeom xmlns:a="http://schemas.openxmlformats.org/drawingml/2006/main" prst="line">
-            <a:avLst/>
-          </a:prstGeom>
-          <a:noFill xmlns:a="http://schemas.openxmlformats.org/drawingml/2006/main"/>
-          <a:ln xmlns:a="http://schemas.openxmlformats.org/drawingml/2006/main" w="28575">
-            <a:solidFill>
-              <a:srgbClr val="0B6172"/>
-            </a:solidFill>
-            <a:prstDash val="solid"/>
-          </a:ln>
-        </p:spPr>
-      </p:sp>
-      <p:sp>
-        <p:nvSpPr>
-          <p:cNvPr id="9" name="읽은 파일">
-            <a:extLst xmlns:a="http://schemas.openxmlformats.org/drawingml/2006/main">
-              <a:ext uri="{FF2B5EF4-FFF2-40B4-BE49-F238E27FC236}">
-                <a16:creationId xmlns:a16="http://schemas.microsoft.com/office/drawing/2014/main" id="{3C26CDA9-7011-43A5-B320-E8992CD954AF}"/>
-              </a:ext>
-            </a:extLst>
-          </p:cNvPr>
-          <p:cNvSpPr>
-            <a:spLocks xmlns:a="http://schemas.openxmlformats.org/drawingml/2006/main" noGrp="1"/>
-          </p:cNvSpPr>
-          <p:nvPr/>
-        </p:nvSpPr>
-        <p:spPr>
-          <a:xfrm xmlns:a="http://schemas.openxmlformats.org/drawingml/2006/main">
-            <a:off x="4438650" y="2209800"/>
-            <a:ext cx="3314700" cy="323850"/>
+            <a:off x="5486400" y="1685925"/>
+            <a:ext cx="3124200" cy="342900"/>
           </a:xfrm>
           <a:prstGeom xmlns:a="http://schemas.openxmlformats.org/drawingml/2006/main" prst="rect">
             <a:avLst/>
@@ -31228,17 +31202,17 @@
                 <a:ea typeface="Malgun Gothic"/>
                 <a:cs typeface="Malgun Gothic"/>
               </a:rPr>
-              <a:t>읽은 파일</a:t>
+              <a:t>저장소의 작업 지침</a:t>
             </a:r>
           </a:p>
         </p:txBody>
       </p:sp>
       <p:sp>
         <p:nvSpPr>
-          <p:cNvPr id="10" name="">
+          <p:cNvPr id="9" name="실행 기록">
             <a:extLst xmlns:a="http://schemas.openxmlformats.org/drawingml/2006/main">
               <a:ext uri="{FF2B5EF4-FFF2-40B4-BE49-F238E27FC236}">
-                <a16:creationId xmlns:a16="http://schemas.microsoft.com/office/drawing/2014/main" id="{DA6F45CE-6C43-49FA-A416-7699EDB92977}"/>
+                <a16:creationId xmlns:a16="http://schemas.microsoft.com/office/drawing/2014/main" id="{B275BFA6-5783-4947-A802-F683B4CA792C}"/>
               </a:ext>
             </a:extLst>
           </p:cNvPr>
@@ -31249,39 +31223,8 @@
         </p:nvSpPr>
         <p:spPr>
           <a:xfrm xmlns:a="http://schemas.openxmlformats.org/drawingml/2006/main">
-            <a:off x="4438650" y="2667000"/>
-            <a:ext cx="3314700" cy="0"/>
-          </a:xfrm>
-          <a:prstGeom xmlns:a="http://schemas.openxmlformats.org/drawingml/2006/main" prst="line">
-            <a:avLst/>
-          </a:prstGeom>
-          <a:noFill xmlns:a="http://schemas.openxmlformats.org/drawingml/2006/main"/>
-          <a:ln xmlns:a="http://schemas.openxmlformats.org/drawingml/2006/main" w="28575">
-            <a:solidFill>
-              <a:srgbClr val="0B6172"/>
-            </a:solidFill>
-            <a:prstDash val="solid"/>
-          </a:ln>
-        </p:spPr>
-      </p:sp>
-      <p:sp>
-        <p:nvSpPr>
-          <p:cNvPr id="11" name="실행 기록">
-            <a:extLst xmlns:a="http://schemas.openxmlformats.org/drawingml/2006/main">
-              <a:ext uri="{FF2B5EF4-FFF2-40B4-BE49-F238E27FC236}">
-                <a16:creationId xmlns:a16="http://schemas.microsoft.com/office/drawing/2014/main" id="{3EBFA5CD-1FA4-443B-9ABE-96A4E8AADF09}"/>
-              </a:ext>
-            </a:extLst>
-          </p:cNvPr>
-          <p:cNvSpPr>
-            <a:spLocks xmlns:a="http://schemas.openxmlformats.org/drawingml/2006/main" noGrp="1"/>
-          </p:cNvSpPr>
-          <p:nvPr/>
-        </p:nvSpPr>
-        <p:spPr>
-          <a:xfrm xmlns:a="http://schemas.openxmlformats.org/drawingml/2006/main">
-            <a:off x="8267700" y="2209800"/>
-            <a:ext cx="3314700" cy="323850"/>
+            <a:off x="9220200" y="1685925"/>
+            <a:ext cx="2362200" cy="342900"/>
           </a:xfrm>
           <a:prstGeom xmlns:a="http://schemas.openxmlformats.org/drawingml/2006/main" prst="rect">
             <a:avLst/>
@@ -31424,10 +31367,10 @@
       </p:sp>
       <p:sp>
         <p:nvSpPr>
-          <p:cNvPr id="12" name="">
+          <p:cNvPr id="10" name="">
             <a:extLst xmlns:a="http://schemas.openxmlformats.org/drawingml/2006/main">
               <a:ext uri="{FF2B5EF4-FFF2-40B4-BE49-F238E27FC236}">
-                <a16:creationId xmlns:a16="http://schemas.microsoft.com/office/drawing/2014/main" id="{B1BFCAAA-7690-465B-B265-48031FCFE4B9}"/>
+                <a16:creationId xmlns:a16="http://schemas.microsoft.com/office/drawing/2014/main" id="{12BB19A6-A9EB-42D4-8FFC-E40F098D1DA2}"/>
               </a:ext>
             </a:extLst>
           </p:cNvPr>
@@ -31438,16 +31381,20 @@
         </p:nvSpPr>
         <p:spPr>
           <a:xfrm xmlns:a="http://schemas.openxmlformats.org/drawingml/2006/main">
-            <a:off x="8267700" y="2667000"/>
-            <a:ext cx="3314700" cy="0"/>
+            <a:off x="609600" y="2133600"/>
+            <a:ext cx="4267200" cy="2409825"/>
           </a:xfrm>
-          <a:prstGeom xmlns:a="http://schemas.openxmlformats.org/drawingml/2006/main" prst="line">
-            <a:avLst/>
+          <a:prstGeom xmlns:a="http://schemas.openxmlformats.org/drawingml/2006/main" prst="roundRect">
+            <a:avLst>
+              <a:gd name="adj" fmla="val 4743"/>
+            </a:avLst>
           </a:prstGeom>
-          <a:noFill xmlns:a="http://schemas.openxmlformats.org/drawingml/2006/main"/>
-          <a:ln xmlns:a="http://schemas.openxmlformats.org/drawingml/2006/main" w="28575">
+          <a:solidFill xmlns:a="http://schemas.openxmlformats.org/drawingml/2006/main">
+            <a:srgbClr val="FFFFFF"/>
+          </a:solidFill>
+          <a:ln xmlns:a="http://schemas.openxmlformats.org/drawingml/2006/main" w="14288">
             <a:solidFill>
-              <a:srgbClr val="0B6172"/>
+              <a:srgbClr val="C7D0DA"/>
             </a:solidFill>
             <a:prstDash val="solid"/>
           </a:ln>
@@ -31455,10 +31402,10 @@
       </p:sp>
       <p:sp>
         <p:nvSpPr>
-          <p:cNvPr id="13" name="README만 수정&#10;테스트 명령은 없음">
+          <p:cNvPr id="11" name="실제 요청 · 핵심 발췌·번역">
             <a:extLst xmlns:a="http://schemas.openxmlformats.org/drawingml/2006/main">
               <a:ext uri="{FF2B5EF4-FFF2-40B4-BE49-F238E27FC236}">
-                <a16:creationId xmlns:a16="http://schemas.microsoft.com/office/drawing/2014/main" id="{B8637B59-F576-4B62-993F-434DA4CBB43B}"/>
+                <a16:creationId xmlns:a16="http://schemas.microsoft.com/office/drawing/2014/main" id="{ADE16CD7-598D-44F9-8765-8A5BB9568096}"/>
               </a:ext>
             </a:extLst>
           </p:cNvPr>
@@ -31469,8 +31416,819 @@
         </p:nvSpPr>
         <p:spPr>
           <a:xfrm xmlns:a="http://schemas.openxmlformats.org/drawingml/2006/main">
-            <a:off x="609600" y="2876550"/>
-            <a:ext cx="3314700" cy="895350"/>
+            <a:off x="800100" y="2238375"/>
+            <a:ext cx="3886200" cy="276225"/>
+          </a:xfrm>
+          <a:prstGeom xmlns:a="http://schemas.openxmlformats.org/drawingml/2006/main" prst="rect">
+            <a:avLst/>
+          </a:prstGeom>
+          <a:noFill xmlns:a="http://schemas.openxmlformats.org/drawingml/2006/main"/>
+          <a:ln xmlns:a="http://schemas.openxmlformats.org/drawingml/2006/main" w="0">
+            <a:noFill/>
+          </a:ln>
+        </p:spPr>
+        <p:txBody>
+          <a:bodyPr xmlns:a="http://schemas.openxmlformats.org/drawingml/2006/main" wrap="none" lIns="0" tIns="0" rIns="0" bIns="0" anchor="ctr">
+            <a:noAutofit/>
+          </a:bodyPr>
+          <a:lstStyle xmlns:a="http://schemas.openxmlformats.org/drawingml/2006/main">
+            <a:defPPr algn="l">
+              <a:defRPr sz="1725" b="1">
+                <a:solidFill>
+                  <a:srgbClr val="4D5A68"/>
+                </a:solidFill>
+                <a:latin typeface="Malgun Gothic"/>
+                <a:ea typeface="Malgun Gothic"/>
+                <a:cs typeface="Malgun Gothic"/>
+              </a:defRPr>
+            </a:defPPr>
+            <a:lvl1pPr algn="l">
+              <a:defRPr sz="1725" b="1">
+                <a:solidFill>
+                  <a:srgbClr val="4D5A68"/>
+                </a:solidFill>
+                <a:latin typeface="Malgun Gothic"/>
+                <a:ea typeface="Malgun Gothic"/>
+                <a:cs typeface="Malgun Gothic"/>
+              </a:defRPr>
+            </a:lvl1pPr>
+            <a:lvl2pPr algn="l">
+              <a:defRPr sz="1725" b="1">
+                <a:solidFill>
+                  <a:srgbClr val="4D5A68"/>
+                </a:solidFill>
+                <a:latin typeface="Malgun Gothic"/>
+                <a:ea typeface="Malgun Gothic"/>
+                <a:cs typeface="Malgun Gothic"/>
+              </a:defRPr>
+            </a:lvl2pPr>
+            <a:lvl3pPr algn="l">
+              <a:defRPr sz="1725" b="1">
+                <a:solidFill>
+                  <a:srgbClr val="4D5A68"/>
+                </a:solidFill>
+                <a:latin typeface="Malgun Gothic"/>
+                <a:ea typeface="Malgun Gothic"/>
+                <a:cs typeface="Malgun Gothic"/>
+              </a:defRPr>
+            </a:lvl3pPr>
+            <a:lvl4pPr algn="l">
+              <a:defRPr sz="1725" b="1">
+                <a:solidFill>
+                  <a:srgbClr val="4D5A68"/>
+                </a:solidFill>
+                <a:latin typeface="Malgun Gothic"/>
+                <a:ea typeface="Malgun Gothic"/>
+                <a:cs typeface="Malgun Gothic"/>
+              </a:defRPr>
+            </a:lvl4pPr>
+            <a:lvl5pPr algn="l">
+              <a:defRPr sz="1725" b="1">
+                <a:solidFill>
+                  <a:srgbClr val="4D5A68"/>
+                </a:solidFill>
+                <a:latin typeface="Malgun Gothic"/>
+                <a:ea typeface="Malgun Gothic"/>
+                <a:cs typeface="Malgun Gothic"/>
+              </a:defRPr>
+            </a:lvl5pPr>
+            <a:lvl6pPr algn="l">
+              <a:defRPr sz="1725" b="1">
+                <a:solidFill>
+                  <a:srgbClr val="4D5A68"/>
+                </a:solidFill>
+                <a:latin typeface="Malgun Gothic"/>
+                <a:ea typeface="Malgun Gothic"/>
+                <a:cs typeface="Malgun Gothic"/>
+              </a:defRPr>
+            </a:lvl6pPr>
+            <a:lvl7pPr algn="l">
+              <a:defRPr sz="1725" b="1">
+                <a:solidFill>
+                  <a:srgbClr val="4D5A68"/>
+                </a:solidFill>
+                <a:latin typeface="Malgun Gothic"/>
+                <a:ea typeface="Malgun Gothic"/>
+                <a:cs typeface="Malgun Gothic"/>
+              </a:defRPr>
+            </a:lvl7pPr>
+            <a:lvl8pPr algn="l">
+              <a:defRPr sz="1725" b="1">
+                <a:solidFill>
+                  <a:srgbClr val="4D5A68"/>
+                </a:solidFill>
+                <a:latin typeface="Malgun Gothic"/>
+                <a:ea typeface="Malgun Gothic"/>
+                <a:cs typeface="Malgun Gothic"/>
+              </a:defRPr>
+            </a:lvl8pPr>
+            <a:lvl9pPr algn="l">
+              <a:defRPr sz="1725" b="1">
+                <a:solidFill>
+                  <a:srgbClr val="4D5A68"/>
+                </a:solidFill>
+                <a:latin typeface="Malgun Gothic"/>
+                <a:ea typeface="Malgun Gothic"/>
+                <a:cs typeface="Malgun Gothic"/>
+              </a:defRPr>
+            </a:lvl9pPr>
+          </a:lstStyle>
+          <a:p xmlns:a="http://schemas.openxmlformats.org/drawingml/2006/main">
+            <a:pPr algn="l">
+              <a:defRPr sz="1725" b="1">
+                <a:solidFill>
+                  <a:srgbClr val="4D5A68"/>
+                </a:solidFill>
+                <a:latin typeface="Malgun Gothic"/>
+                <a:ea typeface="Malgun Gothic"/>
+                <a:cs typeface="Malgun Gothic"/>
+              </a:defRPr>
+            </a:pPr>
+            <a:r>
+              <a:rPr sz="1725" b="1">
+                <a:solidFill>
+                  <a:srgbClr val="4D5A68"/>
+                </a:solidFill>
+                <a:latin typeface="Malgun Gothic"/>
+                <a:ea typeface="Malgun Gothic"/>
+                <a:cs typeface="Malgun Gothic"/>
+              </a:rPr>
+              <a:t>실제 요청 · 핵심 발췌·번역</a:t>
+            </a:r>
+          </a:p>
+        </p:txBody>
+      </p:sp>
+      <p:sp>
+        <p:nvSpPr>
+          <p:cNvPr id="12" name="">
+            <a:extLst xmlns:a="http://schemas.openxmlformats.org/drawingml/2006/main">
+              <a:ext uri="{FF2B5EF4-FFF2-40B4-BE49-F238E27FC236}">
+                <a16:creationId xmlns:a16="http://schemas.microsoft.com/office/drawing/2014/main" id="{0F783295-C5A1-488C-BCB7-884522613A89}"/>
+              </a:ext>
+            </a:extLst>
+          </p:cNvPr>
+          <p:cNvSpPr>
+            <a:spLocks xmlns:a="http://schemas.openxmlformats.org/drawingml/2006/main" noGrp="1"/>
+          </p:cNvSpPr>
+          <p:nvPr/>
+        </p:nvSpPr>
+        <p:spPr>
+          <a:xfrm xmlns:a="http://schemas.openxmlformats.org/drawingml/2006/main">
+            <a:off x="800100" y="2609850"/>
+            <a:ext cx="3886200" cy="0"/>
+          </a:xfrm>
+          <a:prstGeom xmlns:a="http://schemas.openxmlformats.org/drawingml/2006/main" prst="line">
+            <a:avLst/>
+          </a:prstGeom>
+          <a:noFill xmlns:a="http://schemas.openxmlformats.org/drawingml/2006/main"/>
+          <a:ln xmlns:a="http://schemas.openxmlformats.org/drawingml/2006/main" w="9525">
+            <a:solidFill>
+              <a:srgbClr val="C7D0DA"/>
+            </a:solidFill>
+            <a:prstDash val="solid"/>
+          </a:ln>
+        </p:spPr>
+      </p:sp>
+      <p:sp>
+        <p:nvSpPr>
+          <p:cNvPr id="13" name="README의 Test 섹션을 고쳐줘.&#10;과거 STATE-00 실패와&#10;현재 checkout을 구분해줘.&#10;근거 ">
+            <a:extLst xmlns:a="http://schemas.openxmlformats.org/drawingml/2006/main">
+              <a:ext uri="{FF2B5EF4-FFF2-40B4-BE49-F238E27FC236}">
+                <a16:creationId xmlns:a16="http://schemas.microsoft.com/office/drawing/2014/main" id="{8F283DB8-25BF-486E-A510-CD504D5B301E}"/>
+              </a:ext>
+            </a:extLst>
+          </p:cNvPr>
+          <p:cNvSpPr>
+            <a:spLocks xmlns:a="http://schemas.openxmlformats.org/drawingml/2006/main" noGrp="1"/>
+          </p:cNvSpPr>
+          <p:nvPr/>
+        </p:nvSpPr>
+        <p:spPr>
+          <a:xfrm xmlns:a="http://schemas.openxmlformats.org/drawingml/2006/main">
+            <a:off x="800100" y="2695575"/>
+            <a:ext cx="3886200" cy="1724025"/>
+          </a:xfrm>
+          <a:prstGeom xmlns:a="http://schemas.openxmlformats.org/drawingml/2006/main" prst="rect">
+            <a:avLst/>
+          </a:prstGeom>
+          <a:noFill xmlns:a="http://schemas.openxmlformats.org/drawingml/2006/main"/>
+          <a:ln xmlns:a="http://schemas.openxmlformats.org/drawingml/2006/main" w="0">
+            <a:noFill/>
+          </a:ln>
+        </p:spPr>
+        <p:txBody>
+          <a:bodyPr xmlns:a="http://schemas.openxmlformats.org/drawingml/2006/main" wrap="none" lIns="0" tIns="0" rIns="0" bIns="0" anchor="ctr">
+            <a:noAutofit/>
+          </a:bodyPr>
+          <a:lstStyle xmlns:a="http://schemas.openxmlformats.org/drawingml/2006/main">
+            <a:defPPr algn="l">
+              <a:defRPr sz="1800" b="0">
+                <a:solidFill>
+                  <a:srgbClr val="17212B"/>
+                </a:solidFill>
+                <a:latin typeface="Malgun Gothic"/>
+                <a:ea typeface="Malgun Gothic"/>
+                <a:cs typeface="Malgun Gothic"/>
+              </a:defRPr>
+            </a:defPPr>
+            <a:lvl1pPr algn="l">
+              <a:defRPr sz="1800" b="0">
+                <a:solidFill>
+                  <a:srgbClr val="17212B"/>
+                </a:solidFill>
+                <a:latin typeface="Malgun Gothic"/>
+                <a:ea typeface="Malgun Gothic"/>
+                <a:cs typeface="Malgun Gothic"/>
+              </a:defRPr>
+            </a:lvl1pPr>
+            <a:lvl2pPr algn="l">
+              <a:defRPr sz="1800" b="0">
+                <a:solidFill>
+                  <a:srgbClr val="17212B"/>
+                </a:solidFill>
+                <a:latin typeface="Malgun Gothic"/>
+                <a:ea typeface="Malgun Gothic"/>
+                <a:cs typeface="Malgun Gothic"/>
+              </a:defRPr>
+            </a:lvl2pPr>
+            <a:lvl3pPr algn="l">
+              <a:defRPr sz="1800" b="0">
+                <a:solidFill>
+                  <a:srgbClr val="17212B"/>
+                </a:solidFill>
+                <a:latin typeface="Malgun Gothic"/>
+                <a:ea typeface="Malgun Gothic"/>
+                <a:cs typeface="Malgun Gothic"/>
+              </a:defRPr>
+            </a:lvl3pPr>
+            <a:lvl4pPr algn="l">
+              <a:defRPr sz="1800" b="0">
+                <a:solidFill>
+                  <a:srgbClr val="17212B"/>
+                </a:solidFill>
+                <a:latin typeface="Malgun Gothic"/>
+                <a:ea typeface="Malgun Gothic"/>
+                <a:cs typeface="Malgun Gothic"/>
+              </a:defRPr>
+            </a:lvl4pPr>
+            <a:lvl5pPr algn="l">
+              <a:defRPr sz="1800" b="0">
+                <a:solidFill>
+                  <a:srgbClr val="17212B"/>
+                </a:solidFill>
+                <a:latin typeface="Malgun Gothic"/>
+                <a:ea typeface="Malgun Gothic"/>
+                <a:cs typeface="Malgun Gothic"/>
+              </a:defRPr>
+            </a:lvl5pPr>
+            <a:lvl6pPr algn="l">
+              <a:defRPr sz="1800" b="0">
+                <a:solidFill>
+                  <a:srgbClr val="17212B"/>
+                </a:solidFill>
+                <a:latin typeface="Malgun Gothic"/>
+                <a:ea typeface="Malgun Gothic"/>
+                <a:cs typeface="Malgun Gothic"/>
+              </a:defRPr>
+            </a:lvl6pPr>
+            <a:lvl7pPr algn="l">
+              <a:defRPr sz="1800" b="0">
+                <a:solidFill>
+                  <a:srgbClr val="17212B"/>
+                </a:solidFill>
+                <a:latin typeface="Malgun Gothic"/>
+                <a:ea typeface="Malgun Gothic"/>
+                <a:cs typeface="Malgun Gothic"/>
+              </a:defRPr>
+            </a:lvl7pPr>
+            <a:lvl8pPr algn="l">
+              <a:defRPr sz="1800" b="0">
+                <a:solidFill>
+                  <a:srgbClr val="17212B"/>
+                </a:solidFill>
+                <a:latin typeface="Malgun Gothic"/>
+                <a:ea typeface="Malgun Gothic"/>
+                <a:cs typeface="Malgun Gothic"/>
+              </a:defRPr>
+            </a:lvl8pPr>
+            <a:lvl9pPr algn="l">
+              <a:defRPr sz="1800" b="0">
+                <a:solidFill>
+                  <a:srgbClr val="17212B"/>
+                </a:solidFill>
+                <a:latin typeface="Malgun Gothic"/>
+                <a:ea typeface="Malgun Gothic"/>
+                <a:cs typeface="Malgun Gothic"/>
+              </a:defRPr>
+            </a:lvl9pPr>
+          </a:lstStyle>
+          <a:p xmlns:a="http://schemas.openxmlformats.org/drawingml/2006/main">
+            <a:pPr algn="l">
+              <a:defRPr sz="1800" b="0">
+                <a:solidFill>
+                  <a:srgbClr val="17212B"/>
+                </a:solidFill>
+                <a:latin typeface="Malgun Gothic"/>
+                <a:ea typeface="Malgun Gothic"/>
+                <a:cs typeface="Malgun Gothic"/>
+              </a:defRPr>
+            </a:pPr>
+            <a:r>
+              <a:rPr sz="1800" b="0">
+                <a:solidFill>
+                  <a:srgbClr val="17212B"/>
+                </a:solidFill>
+                <a:latin typeface="Malgun Gothic"/>
+                <a:ea typeface="Malgun Gothic"/>
+                <a:cs typeface="Malgun Gothic"/>
+              </a:rPr>
+              <a:t>README의 Test 섹션을 고쳐줘.</a:t>
+            </a:r>
+          </a:p>
+          <a:p xmlns:a="http://schemas.openxmlformats.org/drawingml/2006/main">
+            <a:pPr algn="l">
+              <a:defRPr sz="1800" b="0">
+                <a:solidFill>
+                  <a:srgbClr val="17212B"/>
+                </a:solidFill>
+                <a:latin typeface="Malgun Gothic"/>
+                <a:ea typeface="Malgun Gothic"/>
+                <a:cs typeface="Malgun Gothic"/>
+              </a:defRPr>
+            </a:pPr>
+            <a:r>
+              <a:rPr sz="1800" b="0">
+                <a:solidFill>
+                  <a:srgbClr val="17212B"/>
+                </a:solidFill>
+                <a:latin typeface="Malgun Gothic"/>
+                <a:ea typeface="Malgun Gothic"/>
+                <a:cs typeface="Malgun Gothic"/>
+              </a:rPr>
+              <a:t>과거 STATE-00 실패와</a:t>
+            </a:r>
+          </a:p>
+          <a:p xmlns:a="http://schemas.openxmlformats.org/drawingml/2006/main">
+            <a:pPr algn="l">
+              <a:defRPr sz="1800" b="0">
+                <a:solidFill>
+                  <a:srgbClr val="17212B"/>
+                </a:solidFill>
+                <a:latin typeface="Malgun Gothic"/>
+                <a:ea typeface="Malgun Gothic"/>
+                <a:cs typeface="Malgun Gothic"/>
+              </a:defRPr>
+            </a:pPr>
+            <a:r>
+              <a:rPr sz="1800" b="0">
+                <a:solidFill>
+                  <a:srgbClr val="17212B"/>
+                </a:solidFill>
+                <a:latin typeface="Malgun Gothic"/>
+                <a:ea typeface="Malgun Gothic"/>
+                <a:cs typeface="Malgun Gothic"/>
+              </a:rPr>
+              <a:t>현재 checkout을 구분해줘.</a:t>
+            </a:r>
+          </a:p>
+          <a:p xmlns:a="http://schemas.openxmlformats.org/drawingml/2006/main">
+            <a:pPr algn="l">
+              <a:defRPr sz="1800" b="0">
+                <a:solidFill>
+                  <a:srgbClr val="17212B"/>
+                </a:solidFill>
+                <a:latin typeface="Malgun Gothic"/>
+                <a:ea typeface="Malgun Gothic"/>
+                <a:cs typeface="Malgun Gothic"/>
+              </a:defRPr>
+            </a:pPr>
+            <a:r>
+              <a:rPr sz="1800" b="0">
+                <a:solidFill>
+                  <a:srgbClr val="17212B"/>
+                </a:solidFill>
+                <a:latin typeface="Malgun Gothic"/>
+                <a:ea typeface="Malgun Gothic"/>
+                <a:cs typeface="Malgun Gothic"/>
+              </a:rPr>
+              <a:t>근거 없는 주장은 하지 마.</a:t>
+            </a:r>
+          </a:p>
+          <a:p xmlns:a="http://schemas.openxmlformats.org/drawingml/2006/main">
+            <a:pPr algn="l">
+              <a:defRPr sz="1800" b="0">
+                <a:solidFill>
+                  <a:srgbClr val="17212B"/>
+                </a:solidFill>
+                <a:latin typeface="Malgun Gothic"/>
+                <a:ea typeface="Malgun Gothic"/>
+                <a:cs typeface="Malgun Gothic"/>
+              </a:defRPr>
+            </a:pPr>
+            <a:r>
+              <a:rPr sz="1800" b="0">
+                <a:solidFill>
+                  <a:srgbClr val="17212B"/>
+                </a:solidFill>
+                <a:latin typeface="Malgun Gothic"/>
+                <a:ea typeface="Malgun Gothic"/>
+                <a:cs typeface="Malgun Gothic"/>
+              </a:rPr>
+              <a:t>README.md만 변경하고,</a:t>
+            </a:r>
+          </a:p>
+          <a:p xmlns:a="http://schemas.openxmlformats.org/drawingml/2006/main">
+            <a:pPr algn="l">
+              <a:defRPr sz="1800" b="0">
+                <a:solidFill>
+                  <a:srgbClr val="17212B"/>
+                </a:solidFill>
+                <a:latin typeface="Malgun Gothic"/>
+                <a:ea typeface="Malgun Gothic"/>
+                <a:cs typeface="Malgun Gothic"/>
+              </a:defRPr>
+            </a:pPr>
+            <a:r>
+              <a:rPr sz="1800" b="0">
+                <a:solidFill>
+                  <a:srgbClr val="17212B"/>
+                </a:solidFill>
+                <a:latin typeface="Malgun Gothic"/>
+                <a:ea typeface="Malgun Gothic"/>
+                <a:cs typeface="Malgun Gothic"/>
+              </a:rPr>
+              <a:t>최종 diff·검증 근거를 보고해줘.</a:t>
+            </a:r>
+          </a:p>
+        </p:txBody>
+      </p:sp>
+      <p:sp>
+        <p:nvSpPr>
+          <p:cNvPr id="14" name="원문 밖 주석">
+            <a:extLst xmlns:a="http://schemas.openxmlformats.org/drawingml/2006/main">
+              <a:ext uri="{FF2B5EF4-FFF2-40B4-BE49-F238E27FC236}">
+                <a16:creationId xmlns:a16="http://schemas.microsoft.com/office/drawing/2014/main" id="{67FDDE5E-C189-4739-85D4-3D139A30768B}"/>
+              </a:ext>
+            </a:extLst>
+          </p:cNvPr>
+          <p:cNvSpPr>
+            <a:spLocks xmlns:a="http://schemas.openxmlformats.org/drawingml/2006/main" noGrp="1"/>
+          </p:cNvSpPr>
+          <p:nvPr/>
+        </p:nvSpPr>
+        <p:spPr>
+          <a:xfrm xmlns:a="http://schemas.openxmlformats.org/drawingml/2006/main">
+            <a:off x="609600" y="4657725"/>
+            <a:ext cx="4267200" cy="238125"/>
+          </a:xfrm>
+          <a:prstGeom xmlns:a="http://schemas.openxmlformats.org/drawingml/2006/main" prst="rect">
+            <a:avLst/>
+          </a:prstGeom>
+          <a:noFill xmlns:a="http://schemas.openxmlformats.org/drawingml/2006/main"/>
+          <a:ln xmlns:a="http://schemas.openxmlformats.org/drawingml/2006/main" w="0">
+            <a:noFill/>
+          </a:ln>
+        </p:spPr>
+        <p:txBody>
+          <a:bodyPr xmlns:a="http://schemas.openxmlformats.org/drawingml/2006/main" wrap="none" lIns="0" tIns="0" rIns="0" bIns="0" anchor="ctr">
+            <a:noAutofit/>
+          </a:bodyPr>
+          <a:lstStyle xmlns:a="http://schemas.openxmlformats.org/drawingml/2006/main">
+            <a:defPPr algn="l">
+              <a:defRPr sz="1500" b="1">
+                <a:solidFill>
+                  <a:srgbClr val="4D5A68"/>
+                </a:solidFill>
+                <a:latin typeface="Malgun Gothic"/>
+                <a:ea typeface="Malgun Gothic"/>
+                <a:cs typeface="Malgun Gothic"/>
+              </a:defRPr>
+            </a:defPPr>
+            <a:lvl1pPr algn="l">
+              <a:defRPr sz="1500" b="1">
+                <a:solidFill>
+                  <a:srgbClr val="4D5A68"/>
+                </a:solidFill>
+                <a:latin typeface="Malgun Gothic"/>
+                <a:ea typeface="Malgun Gothic"/>
+                <a:cs typeface="Malgun Gothic"/>
+              </a:defRPr>
+            </a:lvl1pPr>
+            <a:lvl2pPr algn="l">
+              <a:defRPr sz="1500" b="1">
+                <a:solidFill>
+                  <a:srgbClr val="4D5A68"/>
+                </a:solidFill>
+                <a:latin typeface="Malgun Gothic"/>
+                <a:ea typeface="Malgun Gothic"/>
+                <a:cs typeface="Malgun Gothic"/>
+              </a:defRPr>
+            </a:lvl2pPr>
+            <a:lvl3pPr algn="l">
+              <a:defRPr sz="1500" b="1">
+                <a:solidFill>
+                  <a:srgbClr val="4D5A68"/>
+                </a:solidFill>
+                <a:latin typeface="Malgun Gothic"/>
+                <a:ea typeface="Malgun Gothic"/>
+                <a:cs typeface="Malgun Gothic"/>
+              </a:defRPr>
+            </a:lvl3pPr>
+            <a:lvl4pPr algn="l">
+              <a:defRPr sz="1500" b="1">
+                <a:solidFill>
+                  <a:srgbClr val="4D5A68"/>
+                </a:solidFill>
+                <a:latin typeface="Malgun Gothic"/>
+                <a:ea typeface="Malgun Gothic"/>
+                <a:cs typeface="Malgun Gothic"/>
+              </a:defRPr>
+            </a:lvl4pPr>
+            <a:lvl5pPr algn="l">
+              <a:defRPr sz="1500" b="1">
+                <a:solidFill>
+                  <a:srgbClr val="4D5A68"/>
+                </a:solidFill>
+                <a:latin typeface="Malgun Gothic"/>
+                <a:ea typeface="Malgun Gothic"/>
+                <a:cs typeface="Malgun Gothic"/>
+              </a:defRPr>
+            </a:lvl5pPr>
+            <a:lvl6pPr algn="l">
+              <a:defRPr sz="1500" b="1">
+                <a:solidFill>
+                  <a:srgbClr val="4D5A68"/>
+                </a:solidFill>
+                <a:latin typeface="Malgun Gothic"/>
+                <a:ea typeface="Malgun Gothic"/>
+                <a:cs typeface="Malgun Gothic"/>
+              </a:defRPr>
+            </a:lvl6pPr>
+            <a:lvl7pPr algn="l">
+              <a:defRPr sz="1500" b="1">
+                <a:solidFill>
+                  <a:srgbClr val="4D5A68"/>
+                </a:solidFill>
+                <a:latin typeface="Malgun Gothic"/>
+                <a:ea typeface="Malgun Gothic"/>
+                <a:cs typeface="Malgun Gothic"/>
+              </a:defRPr>
+            </a:lvl7pPr>
+            <a:lvl8pPr algn="l">
+              <a:defRPr sz="1500" b="1">
+                <a:solidFill>
+                  <a:srgbClr val="4D5A68"/>
+                </a:solidFill>
+                <a:latin typeface="Malgun Gothic"/>
+                <a:ea typeface="Malgun Gothic"/>
+                <a:cs typeface="Malgun Gothic"/>
+              </a:defRPr>
+            </a:lvl8pPr>
+            <a:lvl9pPr algn="l">
+              <a:defRPr sz="1500" b="1">
+                <a:solidFill>
+                  <a:srgbClr val="4D5A68"/>
+                </a:solidFill>
+                <a:latin typeface="Malgun Gothic"/>
+                <a:ea typeface="Malgun Gothic"/>
+                <a:cs typeface="Malgun Gothic"/>
+              </a:defRPr>
+            </a:lvl9pPr>
+          </a:lstStyle>
+          <a:p xmlns:a="http://schemas.openxmlformats.org/drawingml/2006/main">
+            <a:pPr algn="l">
+              <a:defRPr sz="1500" b="1">
+                <a:solidFill>
+                  <a:srgbClr val="4D5A68"/>
+                </a:solidFill>
+                <a:latin typeface="Malgun Gothic"/>
+                <a:ea typeface="Malgun Gothic"/>
+                <a:cs typeface="Malgun Gothic"/>
+              </a:defRPr>
+            </a:pPr>
+            <a:r>
+              <a:rPr sz="1500" b="1">
+                <a:solidFill>
+                  <a:srgbClr val="4D5A68"/>
+                </a:solidFill>
+                <a:latin typeface="Malgun Gothic"/>
+                <a:ea typeface="Malgun Gothic"/>
+                <a:cs typeface="Malgun Gothic"/>
+              </a:rPr>
+              <a:t>원문 밖 주석</a:t>
+            </a:r>
+          </a:p>
+        </p:txBody>
+      </p:sp>
+      <p:sp>
+        <p:nvSpPr>
+          <p:cNvPr id="15" name="실제 요청에는 테스트 명령 미포함">
+            <a:extLst xmlns:a="http://schemas.openxmlformats.org/drawingml/2006/main">
+              <a:ext uri="{FF2B5EF4-FFF2-40B4-BE49-F238E27FC236}">
+                <a16:creationId xmlns:a16="http://schemas.microsoft.com/office/drawing/2014/main" id="{6EFBBF97-A090-4ADB-B47A-219C8C7D8BE6}"/>
+              </a:ext>
+            </a:extLst>
+          </p:cNvPr>
+          <p:cNvSpPr>
+            <a:spLocks xmlns:a="http://schemas.openxmlformats.org/drawingml/2006/main" noGrp="1"/>
+          </p:cNvSpPr>
+          <p:nvPr/>
+        </p:nvSpPr>
+        <p:spPr>
+          <a:xfrm xmlns:a="http://schemas.openxmlformats.org/drawingml/2006/main">
+            <a:off x="609600" y="4933950"/>
+            <a:ext cx="4267200" cy="285750"/>
+          </a:xfrm>
+          <a:prstGeom xmlns:a="http://schemas.openxmlformats.org/drawingml/2006/main" prst="rect">
+            <a:avLst/>
+          </a:prstGeom>
+          <a:noFill xmlns:a="http://schemas.openxmlformats.org/drawingml/2006/main"/>
+          <a:ln xmlns:a="http://schemas.openxmlformats.org/drawingml/2006/main" w="0">
+            <a:noFill/>
+          </a:ln>
+        </p:spPr>
+        <p:txBody>
+          <a:bodyPr xmlns:a="http://schemas.openxmlformats.org/drawingml/2006/main" wrap="none" lIns="0" tIns="0" rIns="0" bIns="0" anchor="ctr">
+            <a:noAutofit/>
+          </a:bodyPr>
+          <a:lstStyle xmlns:a="http://schemas.openxmlformats.org/drawingml/2006/main">
+            <a:defPPr algn="l">
+              <a:defRPr sz="1800" b="0">
+                <a:solidFill>
+                  <a:srgbClr val="4D5A68"/>
+                </a:solidFill>
+                <a:latin typeface="Malgun Gothic"/>
+                <a:ea typeface="Malgun Gothic"/>
+                <a:cs typeface="Malgun Gothic"/>
+              </a:defRPr>
+            </a:defPPr>
+            <a:lvl1pPr algn="l">
+              <a:defRPr sz="1800" b="0">
+                <a:solidFill>
+                  <a:srgbClr val="4D5A68"/>
+                </a:solidFill>
+                <a:latin typeface="Malgun Gothic"/>
+                <a:ea typeface="Malgun Gothic"/>
+                <a:cs typeface="Malgun Gothic"/>
+              </a:defRPr>
+            </a:lvl1pPr>
+            <a:lvl2pPr algn="l">
+              <a:defRPr sz="1800" b="0">
+                <a:solidFill>
+                  <a:srgbClr val="4D5A68"/>
+                </a:solidFill>
+                <a:latin typeface="Malgun Gothic"/>
+                <a:ea typeface="Malgun Gothic"/>
+                <a:cs typeface="Malgun Gothic"/>
+              </a:defRPr>
+            </a:lvl2pPr>
+            <a:lvl3pPr algn="l">
+              <a:defRPr sz="1800" b="0">
+                <a:solidFill>
+                  <a:srgbClr val="4D5A68"/>
+                </a:solidFill>
+                <a:latin typeface="Malgun Gothic"/>
+                <a:ea typeface="Malgun Gothic"/>
+                <a:cs typeface="Malgun Gothic"/>
+              </a:defRPr>
+            </a:lvl3pPr>
+            <a:lvl4pPr algn="l">
+              <a:defRPr sz="1800" b="0">
+                <a:solidFill>
+                  <a:srgbClr val="4D5A68"/>
+                </a:solidFill>
+                <a:latin typeface="Malgun Gothic"/>
+                <a:ea typeface="Malgun Gothic"/>
+                <a:cs typeface="Malgun Gothic"/>
+              </a:defRPr>
+            </a:lvl4pPr>
+            <a:lvl5pPr algn="l">
+              <a:defRPr sz="1800" b="0">
+                <a:solidFill>
+                  <a:srgbClr val="4D5A68"/>
+                </a:solidFill>
+                <a:latin typeface="Malgun Gothic"/>
+                <a:ea typeface="Malgun Gothic"/>
+                <a:cs typeface="Malgun Gothic"/>
+              </a:defRPr>
+            </a:lvl5pPr>
+            <a:lvl6pPr algn="l">
+              <a:defRPr sz="1800" b="0">
+                <a:solidFill>
+                  <a:srgbClr val="4D5A68"/>
+                </a:solidFill>
+                <a:latin typeface="Malgun Gothic"/>
+                <a:ea typeface="Malgun Gothic"/>
+                <a:cs typeface="Malgun Gothic"/>
+              </a:defRPr>
+            </a:lvl6pPr>
+            <a:lvl7pPr algn="l">
+              <a:defRPr sz="1800" b="0">
+                <a:solidFill>
+                  <a:srgbClr val="4D5A68"/>
+                </a:solidFill>
+                <a:latin typeface="Malgun Gothic"/>
+                <a:ea typeface="Malgun Gothic"/>
+                <a:cs typeface="Malgun Gothic"/>
+              </a:defRPr>
+            </a:lvl7pPr>
+            <a:lvl8pPr algn="l">
+              <a:defRPr sz="1800" b="0">
+                <a:solidFill>
+                  <a:srgbClr val="4D5A68"/>
+                </a:solidFill>
+                <a:latin typeface="Malgun Gothic"/>
+                <a:ea typeface="Malgun Gothic"/>
+                <a:cs typeface="Malgun Gothic"/>
+              </a:defRPr>
+            </a:lvl8pPr>
+            <a:lvl9pPr algn="l">
+              <a:defRPr sz="1800" b="0">
+                <a:solidFill>
+                  <a:srgbClr val="4D5A68"/>
+                </a:solidFill>
+                <a:latin typeface="Malgun Gothic"/>
+                <a:ea typeface="Malgun Gothic"/>
+                <a:cs typeface="Malgun Gothic"/>
+              </a:defRPr>
+            </a:lvl9pPr>
+          </a:lstStyle>
+          <a:p xmlns:a="http://schemas.openxmlformats.org/drawingml/2006/main">
+            <a:pPr algn="l">
+              <a:defRPr sz="1800" b="0">
+                <a:solidFill>
+                  <a:srgbClr val="4D5A68"/>
+                </a:solidFill>
+                <a:latin typeface="Malgun Gothic"/>
+                <a:ea typeface="Malgun Gothic"/>
+                <a:cs typeface="Malgun Gothic"/>
+              </a:defRPr>
+            </a:pPr>
+            <a:r>
+              <a:rPr sz="1800" b="0">
+                <a:solidFill>
+                  <a:srgbClr val="4D5A68"/>
+                </a:solidFill>
+                <a:latin typeface="Malgun Gothic"/>
+                <a:ea typeface="Malgun Gothic"/>
+                <a:cs typeface="Malgun Gothic"/>
+              </a:rPr>
+              <a:t>실제 요청에는 테스트 명령 미포함</a:t>
+            </a:r>
+          </a:p>
+        </p:txBody>
+      </p:sp>
+      <p:sp>
+        <p:nvSpPr>
+          <p:cNvPr id="16" name="">
+            <a:extLst xmlns:a="http://schemas.openxmlformats.org/drawingml/2006/main">
+              <a:ext uri="{FF2B5EF4-FFF2-40B4-BE49-F238E27FC236}">
+                <a16:creationId xmlns:a16="http://schemas.microsoft.com/office/drawing/2014/main" id="{51CBB0CB-B0D9-4534-ADF8-5820332C9C66}"/>
+              </a:ext>
+            </a:extLst>
+          </p:cNvPr>
+          <p:cNvSpPr>
+            <a:spLocks xmlns:a="http://schemas.openxmlformats.org/drawingml/2006/main" noGrp="1"/>
+          </p:cNvSpPr>
+          <p:nvPr/>
+        </p:nvSpPr>
+        <p:spPr>
+          <a:xfrm xmlns:a="http://schemas.openxmlformats.org/drawingml/2006/main">
+            <a:off x="5486400" y="2133600"/>
+            <a:ext cx="3124200" cy="2409825"/>
+          </a:xfrm>
+          <a:prstGeom xmlns:a="http://schemas.openxmlformats.org/drawingml/2006/main" prst="rect">
+            <a:avLst/>
+          </a:prstGeom>
+          <a:solidFill xmlns:a="http://schemas.openxmlformats.org/drawingml/2006/main">
+            <a:srgbClr val="E0EFF0"/>
+          </a:solidFill>
+          <a:ln xmlns:a="http://schemas.openxmlformats.org/drawingml/2006/main" w="14288">
+            <a:solidFill>
+              <a:srgbClr val="0B6172"/>
+            </a:solidFill>
+            <a:prstDash val="solid"/>
+          </a:ln>
+        </p:spPr>
+      </p:sp>
+      <p:sp>
+        <p:nvSpPr>
+          <p:cNvPr id="17" name="AGENTS.md">
+            <a:extLst xmlns:a="http://schemas.openxmlformats.org/drawingml/2006/main">
+              <a:ext uri="{FF2B5EF4-FFF2-40B4-BE49-F238E27FC236}">
+                <a16:creationId xmlns:a16="http://schemas.microsoft.com/office/drawing/2014/main" id="{3FF61EAC-2D9B-4E0F-BDA8-834E286938CA}"/>
+              </a:ext>
+            </a:extLst>
+          </p:cNvPr>
+          <p:cNvSpPr>
+            <a:spLocks xmlns:a="http://schemas.openxmlformats.org/drawingml/2006/main" noGrp="1"/>
+          </p:cNvSpPr>
+          <p:nvPr/>
+        </p:nvSpPr>
+        <p:spPr>
+          <a:xfrm xmlns:a="http://schemas.openxmlformats.org/drawingml/2006/main">
+            <a:off x="5676900" y="2362200"/>
+            <a:ext cx="2743200" cy="438150"/>
           </a:xfrm>
           <a:prstGeom xmlns:a="http://schemas.openxmlformats.org/drawingml/2006/main" prst="rect">
             <a:avLst/>
@@ -31488,101 +32246,101 @@
             <a:defPPr algn="l">
               <a:defRPr sz="2400" b="1">
                 <a:solidFill>
-                  <a:srgbClr val="17212B"/>
-                </a:solidFill>
-                <a:latin typeface="Malgun Gothic"/>
-                <a:ea typeface="Malgun Gothic"/>
-                <a:cs typeface="Malgun Gothic"/>
+                  <a:srgbClr val="0B6172"/>
+                </a:solidFill>
+                <a:latin typeface="Consolas"/>
+                <a:ea typeface="Consolas"/>
+                <a:cs typeface="Consolas"/>
               </a:defRPr>
             </a:defPPr>
             <a:lvl1pPr algn="l">
               <a:defRPr sz="2400" b="1">
                 <a:solidFill>
-                  <a:srgbClr val="17212B"/>
-                </a:solidFill>
-                <a:latin typeface="Malgun Gothic"/>
-                <a:ea typeface="Malgun Gothic"/>
-                <a:cs typeface="Malgun Gothic"/>
+                  <a:srgbClr val="0B6172"/>
+                </a:solidFill>
+                <a:latin typeface="Consolas"/>
+                <a:ea typeface="Consolas"/>
+                <a:cs typeface="Consolas"/>
               </a:defRPr>
             </a:lvl1pPr>
             <a:lvl2pPr algn="l">
               <a:defRPr sz="2400" b="1">
                 <a:solidFill>
-                  <a:srgbClr val="17212B"/>
-                </a:solidFill>
-                <a:latin typeface="Malgun Gothic"/>
-                <a:ea typeface="Malgun Gothic"/>
-                <a:cs typeface="Malgun Gothic"/>
+                  <a:srgbClr val="0B6172"/>
+                </a:solidFill>
+                <a:latin typeface="Consolas"/>
+                <a:ea typeface="Consolas"/>
+                <a:cs typeface="Consolas"/>
               </a:defRPr>
             </a:lvl2pPr>
             <a:lvl3pPr algn="l">
               <a:defRPr sz="2400" b="1">
                 <a:solidFill>
-                  <a:srgbClr val="17212B"/>
-                </a:solidFill>
-                <a:latin typeface="Malgun Gothic"/>
-                <a:ea typeface="Malgun Gothic"/>
-                <a:cs typeface="Malgun Gothic"/>
+                  <a:srgbClr val="0B6172"/>
+                </a:solidFill>
+                <a:latin typeface="Consolas"/>
+                <a:ea typeface="Consolas"/>
+                <a:cs typeface="Consolas"/>
               </a:defRPr>
             </a:lvl3pPr>
             <a:lvl4pPr algn="l">
               <a:defRPr sz="2400" b="1">
                 <a:solidFill>
-                  <a:srgbClr val="17212B"/>
-                </a:solidFill>
-                <a:latin typeface="Malgun Gothic"/>
-                <a:ea typeface="Malgun Gothic"/>
-                <a:cs typeface="Malgun Gothic"/>
+                  <a:srgbClr val="0B6172"/>
+                </a:solidFill>
+                <a:latin typeface="Consolas"/>
+                <a:ea typeface="Consolas"/>
+                <a:cs typeface="Consolas"/>
               </a:defRPr>
             </a:lvl4pPr>
             <a:lvl5pPr algn="l">
               <a:defRPr sz="2400" b="1">
                 <a:solidFill>
-                  <a:srgbClr val="17212B"/>
-                </a:solidFill>
-                <a:latin typeface="Malgun Gothic"/>
-                <a:ea typeface="Malgun Gothic"/>
-                <a:cs typeface="Malgun Gothic"/>
+                  <a:srgbClr val="0B6172"/>
+                </a:solidFill>
+                <a:latin typeface="Consolas"/>
+                <a:ea typeface="Consolas"/>
+                <a:cs typeface="Consolas"/>
               </a:defRPr>
             </a:lvl5pPr>
             <a:lvl6pPr algn="l">
               <a:defRPr sz="2400" b="1">
                 <a:solidFill>
-                  <a:srgbClr val="17212B"/>
-                </a:solidFill>
-                <a:latin typeface="Malgun Gothic"/>
-                <a:ea typeface="Malgun Gothic"/>
-                <a:cs typeface="Malgun Gothic"/>
+                  <a:srgbClr val="0B6172"/>
+                </a:solidFill>
+                <a:latin typeface="Consolas"/>
+                <a:ea typeface="Consolas"/>
+                <a:cs typeface="Consolas"/>
               </a:defRPr>
             </a:lvl6pPr>
             <a:lvl7pPr algn="l">
               <a:defRPr sz="2400" b="1">
                 <a:solidFill>
-                  <a:srgbClr val="17212B"/>
-                </a:solidFill>
-                <a:latin typeface="Malgun Gothic"/>
-                <a:ea typeface="Malgun Gothic"/>
-                <a:cs typeface="Malgun Gothic"/>
+                  <a:srgbClr val="0B6172"/>
+                </a:solidFill>
+                <a:latin typeface="Consolas"/>
+                <a:ea typeface="Consolas"/>
+                <a:cs typeface="Consolas"/>
               </a:defRPr>
             </a:lvl7pPr>
             <a:lvl8pPr algn="l">
               <a:defRPr sz="2400" b="1">
                 <a:solidFill>
-                  <a:srgbClr val="17212B"/>
-                </a:solidFill>
-                <a:latin typeface="Malgun Gothic"/>
-                <a:ea typeface="Malgun Gothic"/>
-                <a:cs typeface="Malgun Gothic"/>
+                  <a:srgbClr val="0B6172"/>
+                </a:solidFill>
+                <a:latin typeface="Consolas"/>
+                <a:ea typeface="Consolas"/>
+                <a:cs typeface="Consolas"/>
               </a:defRPr>
             </a:lvl8pPr>
             <a:lvl9pPr algn="l">
               <a:defRPr sz="2400" b="1">
                 <a:solidFill>
-                  <a:srgbClr val="17212B"/>
-                </a:solidFill>
-                <a:latin typeface="Malgun Gothic"/>
-                <a:ea typeface="Malgun Gothic"/>
-                <a:cs typeface="Malgun Gothic"/>
+                  <a:srgbClr val="0B6172"/>
+                </a:solidFill>
+                <a:latin typeface="Consolas"/>
+                <a:ea typeface="Consolas"/>
+                <a:cs typeface="Consolas"/>
               </a:defRPr>
             </a:lvl9pPr>
           </a:lstStyle>
@@ -31590,56 +32348,33 @@
             <a:pPr algn="l">
               <a:defRPr sz="2400" b="1">
                 <a:solidFill>
-                  <a:srgbClr val="17212B"/>
-                </a:solidFill>
-                <a:latin typeface="Malgun Gothic"/>
-                <a:ea typeface="Malgun Gothic"/>
-                <a:cs typeface="Malgun Gothic"/>
+                  <a:srgbClr val="0B6172"/>
+                </a:solidFill>
+                <a:latin typeface="Consolas"/>
+                <a:ea typeface="Consolas"/>
+                <a:cs typeface="Consolas"/>
               </a:defRPr>
             </a:pPr>
             <a:r>
               <a:rPr sz="2400" b="1">
                 <a:solidFill>
-                  <a:srgbClr val="17212B"/>
-                </a:solidFill>
-                <a:latin typeface="Malgun Gothic"/>
-                <a:ea typeface="Malgun Gothic"/>
-                <a:cs typeface="Malgun Gothic"/>
+                  <a:srgbClr val="0B6172"/>
+                </a:solidFill>
+                <a:latin typeface="Consolas"/>
+                <a:ea typeface="Consolas"/>
+                <a:cs typeface="Consolas"/>
               </a:rPr>
-              <a:t>README만 수정</a:t>
-            </a:r>
-          </a:p>
-          <a:p xmlns:a="http://schemas.openxmlformats.org/drawingml/2006/main">
-            <a:pPr algn="l">
-              <a:defRPr sz="2400" b="1">
-                <a:solidFill>
-                  <a:srgbClr val="17212B"/>
-                </a:solidFill>
-                <a:latin typeface="Malgun Gothic"/>
-                <a:ea typeface="Malgun Gothic"/>
-                <a:cs typeface="Malgun Gothic"/>
-              </a:defRPr>
-            </a:pPr>
-            <a:r>
-              <a:rPr sz="2400" b="1">
-                <a:solidFill>
-                  <a:srgbClr val="17212B"/>
-                </a:solidFill>
-                <a:latin typeface="Malgun Gothic"/>
-                <a:ea typeface="Malgun Gothic"/>
-                <a:cs typeface="Malgun Gothic"/>
-              </a:rPr>
-              <a:t>테스트 명령은 없음</a:t>
+              <a:t>AGENTS.md</a:t>
             </a:r>
           </a:p>
         </p:txBody>
       </p:sp>
       <p:sp>
         <p:nvSpPr>
-          <p:cNvPr id="14" name="AGENTS.md">
+          <p:cNvPr id="18" name="프로젝트 작업 규칙">
             <a:extLst xmlns:a="http://schemas.openxmlformats.org/drawingml/2006/main">
               <a:ext uri="{FF2B5EF4-FFF2-40B4-BE49-F238E27FC236}">
-                <a16:creationId xmlns:a16="http://schemas.microsoft.com/office/drawing/2014/main" id="{51CB64AD-CD91-4113-AB0D-B1FA3FA4B14E}"/>
+                <a16:creationId xmlns:a16="http://schemas.microsoft.com/office/drawing/2014/main" id="{9EDF5B87-6CA9-417E-8993-C9ECDCDFF299}"/>
               </a:ext>
             </a:extLst>
           </p:cNvPr>
@@ -31650,8 +32385,8 @@
         </p:nvSpPr>
         <p:spPr>
           <a:xfrm xmlns:a="http://schemas.openxmlformats.org/drawingml/2006/main">
-            <a:off x="4438650" y="2876550"/>
-            <a:ext cx="3314700" cy="476250"/>
+            <a:off x="5676900" y="2924175"/>
+            <a:ext cx="2743200" cy="266700"/>
           </a:xfrm>
           <a:prstGeom xmlns:a="http://schemas.openxmlformats.org/drawingml/2006/main" prst="rect">
             <a:avLst/>
@@ -31667,137 +32402,137 @@
           </a:bodyPr>
           <a:lstStyle xmlns:a="http://schemas.openxmlformats.org/drawingml/2006/main">
             <a:defPPr algn="l">
-              <a:defRPr sz="2550" b="1">
-                <a:solidFill>
-                  <a:srgbClr val="17212B"/>
-                </a:solidFill>
-                <a:latin typeface="Consolas"/>
-                <a:ea typeface="Consolas"/>
-                <a:cs typeface="Consolas"/>
+              <a:defRPr sz="1725" b="0">
+                <a:solidFill>
+                  <a:srgbClr val="4D5A68"/>
+                </a:solidFill>
+                <a:latin typeface="Malgun Gothic"/>
+                <a:ea typeface="Malgun Gothic"/>
+                <a:cs typeface="Malgun Gothic"/>
               </a:defRPr>
             </a:defPPr>
             <a:lvl1pPr algn="l">
-              <a:defRPr sz="2550" b="1">
-                <a:solidFill>
-                  <a:srgbClr val="17212B"/>
-                </a:solidFill>
-                <a:latin typeface="Consolas"/>
-                <a:ea typeface="Consolas"/>
-                <a:cs typeface="Consolas"/>
+              <a:defRPr sz="1725" b="0">
+                <a:solidFill>
+                  <a:srgbClr val="4D5A68"/>
+                </a:solidFill>
+                <a:latin typeface="Malgun Gothic"/>
+                <a:ea typeface="Malgun Gothic"/>
+                <a:cs typeface="Malgun Gothic"/>
               </a:defRPr>
             </a:lvl1pPr>
             <a:lvl2pPr algn="l">
-              <a:defRPr sz="2550" b="1">
-                <a:solidFill>
-                  <a:srgbClr val="17212B"/>
-                </a:solidFill>
-                <a:latin typeface="Consolas"/>
-                <a:ea typeface="Consolas"/>
-                <a:cs typeface="Consolas"/>
+              <a:defRPr sz="1725" b="0">
+                <a:solidFill>
+                  <a:srgbClr val="4D5A68"/>
+                </a:solidFill>
+                <a:latin typeface="Malgun Gothic"/>
+                <a:ea typeface="Malgun Gothic"/>
+                <a:cs typeface="Malgun Gothic"/>
               </a:defRPr>
             </a:lvl2pPr>
             <a:lvl3pPr algn="l">
-              <a:defRPr sz="2550" b="1">
-                <a:solidFill>
-                  <a:srgbClr val="17212B"/>
-                </a:solidFill>
-                <a:latin typeface="Consolas"/>
-                <a:ea typeface="Consolas"/>
-                <a:cs typeface="Consolas"/>
+              <a:defRPr sz="1725" b="0">
+                <a:solidFill>
+                  <a:srgbClr val="4D5A68"/>
+                </a:solidFill>
+                <a:latin typeface="Malgun Gothic"/>
+                <a:ea typeface="Malgun Gothic"/>
+                <a:cs typeface="Malgun Gothic"/>
               </a:defRPr>
             </a:lvl3pPr>
             <a:lvl4pPr algn="l">
-              <a:defRPr sz="2550" b="1">
-                <a:solidFill>
-                  <a:srgbClr val="17212B"/>
-                </a:solidFill>
-                <a:latin typeface="Consolas"/>
-                <a:ea typeface="Consolas"/>
-                <a:cs typeface="Consolas"/>
+              <a:defRPr sz="1725" b="0">
+                <a:solidFill>
+                  <a:srgbClr val="4D5A68"/>
+                </a:solidFill>
+                <a:latin typeface="Malgun Gothic"/>
+                <a:ea typeface="Malgun Gothic"/>
+                <a:cs typeface="Malgun Gothic"/>
               </a:defRPr>
             </a:lvl4pPr>
             <a:lvl5pPr algn="l">
-              <a:defRPr sz="2550" b="1">
-                <a:solidFill>
-                  <a:srgbClr val="17212B"/>
-                </a:solidFill>
-                <a:latin typeface="Consolas"/>
-                <a:ea typeface="Consolas"/>
-                <a:cs typeface="Consolas"/>
+              <a:defRPr sz="1725" b="0">
+                <a:solidFill>
+                  <a:srgbClr val="4D5A68"/>
+                </a:solidFill>
+                <a:latin typeface="Malgun Gothic"/>
+                <a:ea typeface="Malgun Gothic"/>
+                <a:cs typeface="Malgun Gothic"/>
               </a:defRPr>
             </a:lvl5pPr>
             <a:lvl6pPr algn="l">
-              <a:defRPr sz="2550" b="1">
-                <a:solidFill>
-                  <a:srgbClr val="17212B"/>
-                </a:solidFill>
-                <a:latin typeface="Consolas"/>
-                <a:ea typeface="Consolas"/>
-                <a:cs typeface="Consolas"/>
+              <a:defRPr sz="1725" b="0">
+                <a:solidFill>
+                  <a:srgbClr val="4D5A68"/>
+                </a:solidFill>
+                <a:latin typeface="Malgun Gothic"/>
+                <a:ea typeface="Malgun Gothic"/>
+                <a:cs typeface="Malgun Gothic"/>
               </a:defRPr>
             </a:lvl6pPr>
             <a:lvl7pPr algn="l">
-              <a:defRPr sz="2550" b="1">
-                <a:solidFill>
-                  <a:srgbClr val="17212B"/>
-                </a:solidFill>
-                <a:latin typeface="Consolas"/>
-                <a:ea typeface="Consolas"/>
-                <a:cs typeface="Consolas"/>
+              <a:defRPr sz="1725" b="0">
+                <a:solidFill>
+                  <a:srgbClr val="4D5A68"/>
+                </a:solidFill>
+                <a:latin typeface="Malgun Gothic"/>
+                <a:ea typeface="Malgun Gothic"/>
+                <a:cs typeface="Malgun Gothic"/>
               </a:defRPr>
             </a:lvl7pPr>
             <a:lvl8pPr algn="l">
-              <a:defRPr sz="2550" b="1">
-                <a:solidFill>
-                  <a:srgbClr val="17212B"/>
-                </a:solidFill>
-                <a:latin typeface="Consolas"/>
-                <a:ea typeface="Consolas"/>
-                <a:cs typeface="Consolas"/>
+              <a:defRPr sz="1725" b="0">
+                <a:solidFill>
+                  <a:srgbClr val="4D5A68"/>
+                </a:solidFill>
+                <a:latin typeface="Malgun Gothic"/>
+                <a:ea typeface="Malgun Gothic"/>
+                <a:cs typeface="Malgun Gothic"/>
               </a:defRPr>
             </a:lvl8pPr>
             <a:lvl9pPr algn="l">
-              <a:defRPr sz="2550" b="1">
-                <a:solidFill>
-                  <a:srgbClr val="17212B"/>
-                </a:solidFill>
-                <a:latin typeface="Consolas"/>
-                <a:ea typeface="Consolas"/>
-                <a:cs typeface="Consolas"/>
+              <a:defRPr sz="1725" b="0">
+                <a:solidFill>
+                  <a:srgbClr val="4D5A68"/>
+                </a:solidFill>
+                <a:latin typeface="Malgun Gothic"/>
+                <a:ea typeface="Malgun Gothic"/>
+                <a:cs typeface="Malgun Gothic"/>
               </a:defRPr>
             </a:lvl9pPr>
           </a:lstStyle>
           <a:p xmlns:a="http://schemas.openxmlformats.org/drawingml/2006/main">
             <a:pPr algn="l">
-              <a:defRPr sz="2550" b="1">
-                <a:solidFill>
-                  <a:srgbClr val="17212B"/>
-                </a:solidFill>
-                <a:latin typeface="Consolas"/>
-                <a:ea typeface="Consolas"/>
-                <a:cs typeface="Consolas"/>
+              <a:defRPr sz="1725" b="0">
+                <a:solidFill>
+                  <a:srgbClr val="4D5A68"/>
+                </a:solidFill>
+                <a:latin typeface="Malgun Gothic"/>
+                <a:ea typeface="Malgun Gothic"/>
+                <a:cs typeface="Malgun Gothic"/>
               </a:defRPr>
             </a:pPr>
             <a:r>
-              <a:rPr sz="2550" b="1">
-                <a:solidFill>
-                  <a:srgbClr val="17212B"/>
-                </a:solidFill>
-                <a:latin typeface="Consolas"/>
-                <a:ea typeface="Consolas"/>
-                <a:cs typeface="Consolas"/>
+              <a:rPr sz="1725" b="0">
+                <a:solidFill>
+                  <a:srgbClr val="4D5A68"/>
+                </a:solidFill>
+                <a:latin typeface="Malgun Gothic"/>
+                <a:ea typeface="Malgun Gothic"/>
+                <a:cs typeface="Malgun Gothic"/>
               </a:rPr>
-              <a:t>AGENTS.md</a:t>
+              <a:t>프로젝트 작업 규칙</a:t>
             </a:r>
           </a:p>
         </p:txBody>
       </p:sp>
       <p:sp>
         <p:nvSpPr>
-          <p:cNvPr id="15" name="기록된 테스트&#10;명령을 사용">
+          <p:cNvPr id="19" name="">
             <a:extLst xmlns:a="http://schemas.openxmlformats.org/drawingml/2006/main">
               <a:ext uri="{FF2B5EF4-FFF2-40B4-BE49-F238E27FC236}">
-                <a16:creationId xmlns:a16="http://schemas.microsoft.com/office/drawing/2014/main" id="{D3B22B93-559F-4802-B0C0-D88BEFD228F8}"/>
+                <a16:creationId xmlns:a16="http://schemas.microsoft.com/office/drawing/2014/main" id="{1DE613C1-B27D-4C10-B870-06C6E441EA6B}"/>
               </a:ext>
             </a:extLst>
           </p:cNvPr>
@@ -31808,8 +32543,39 @@
         </p:nvSpPr>
         <p:spPr>
           <a:xfrm xmlns:a="http://schemas.openxmlformats.org/drawingml/2006/main">
-            <a:off x="4438650" y="3533775"/>
-            <a:ext cx="3314700" cy="762000"/>
+            <a:off x="5676900" y="3333750"/>
+            <a:ext cx="2743200" cy="0"/>
+          </a:xfrm>
+          <a:prstGeom xmlns:a="http://schemas.openxmlformats.org/drawingml/2006/main" prst="line">
+            <a:avLst/>
+          </a:prstGeom>
+          <a:noFill xmlns:a="http://schemas.openxmlformats.org/drawingml/2006/main"/>
+          <a:ln xmlns:a="http://schemas.openxmlformats.org/drawingml/2006/main" w="9525">
+            <a:solidFill>
+              <a:srgbClr val="C7D0DA"/>
+            </a:solidFill>
+            <a:prstDash val="solid"/>
+          </a:ln>
+        </p:spPr>
+      </p:sp>
+      <p:sp>
+        <p:nvSpPr>
+          <p:cNvPr id="20" name="지정된 명령으로&#10;전체 테스트를 실행">
+            <a:extLst xmlns:a="http://schemas.openxmlformats.org/drawingml/2006/main">
+              <a:ext uri="{FF2B5EF4-FFF2-40B4-BE49-F238E27FC236}">
+                <a16:creationId xmlns:a16="http://schemas.microsoft.com/office/drawing/2014/main" id="{E80435F8-89EB-458E-95C1-945AF7596E46}"/>
+              </a:ext>
+            </a:extLst>
+          </p:cNvPr>
+          <p:cNvSpPr>
+            <a:spLocks xmlns:a="http://schemas.openxmlformats.org/drawingml/2006/main" noGrp="1"/>
+          </p:cNvSpPr>
+          <p:nvPr/>
+        </p:nvSpPr>
+        <p:spPr>
+          <a:xfrm xmlns:a="http://schemas.openxmlformats.org/drawingml/2006/main">
+            <a:off x="5676900" y="3486150"/>
+            <a:ext cx="2743200" cy="666750"/>
           </a:xfrm>
           <a:prstGeom xmlns:a="http://schemas.openxmlformats.org/drawingml/2006/main" prst="rect">
             <a:avLst/>
@@ -31825,7 +32591,7 @@
           </a:bodyPr>
           <a:lstStyle xmlns:a="http://schemas.openxmlformats.org/drawingml/2006/main">
             <a:defPPr algn="l">
-              <a:defRPr sz="2100" b="0">
+              <a:defRPr sz="1875" b="1">
                 <a:solidFill>
                   <a:srgbClr val="17212B"/>
                 </a:solidFill>
@@ -31835,7 +32601,7 @@
               </a:defRPr>
             </a:defPPr>
             <a:lvl1pPr algn="l">
-              <a:defRPr sz="2100" b="0">
+              <a:defRPr sz="1875" b="1">
                 <a:solidFill>
                   <a:srgbClr val="17212B"/>
                 </a:solidFill>
@@ -31845,7 +32611,7 @@
               </a:defRPr>
             </a:lvl1pPr>
             <a:lvl2pPr algn="l">
-              <a:defRPr sz="2100" b="0">
+              <a:defRPr sz="1875" b="1">
                 <a:solidFill>
                   <a:srgbClr val="17212B"/>
                 </a:solidFill>
@@ -31855,7 +32621,7 @@
               </a:defRPr>
             </a:lvl2pPr>
             <a:lvl3pPr algn="l">
-              <a:defRPr sz="2100" b="0">
+              <a:defRPr sz="1875" b="1">
                 <a:solidFill>
                   <a:srgbClr val="17212B"/>
                 </a:solidFill>
@@ -31865,7 +32631,7 @@
               </a:defRPr>
             </a:lvl3pPr>
             <a:lvl4pPr algn="l">
-              <a:defRPr sz="2100" b="0">
+              <a:defRPr sz="1875" b="1">
                 <a:solidFill>
                   <a:srgbClr val="17212B"/>
                 </a:solidFill>
@@ -31875,7 +32641,7 @@
               </a:defRPr>
             </a:lvl4pPr>
             <a:lvl5pPr algn="l">
-              <a:defRPr sz="2100" b="0">
+              <a:defRPr sz="1875" b="1">
                 <a:solidFill>
                   <a:srgbClr val="17212B"/>
                 </a:solidFill>
@@ -31885,7 +32651,7 @@
               </a:defRPr>
             </a:lvl5pPr>
             <a:lvl6pPr algn="l">
-              <a:defRPr sz="2100" b="0">
+              <a:defRPr sz="1875" b="1">
                 <a:solidFill>
                   <a:srgbClr val="17212B"/>
                 </a:solidFill>
@@ -31895,7 +32661,7 @@
               </a:defRPr>
             </a:lvl6pPr>
             <a:lvl7pPr algn="l">
-              <a:defRPr sz="2100" b="0">
+              <a:defRPr sz="1875" b="1">
                 <a:solidFill>
                   <a:srgbClr val="17212B"/>
                 </a:solidFill>
@@ -31905,7 +32671,7 @@
               </a:defRPr>
             </a:lvl7pPr>
             <a:lvl8pPr algn="l">
-              <a:defRPr sz="2100" b="0">
+              <a:defRPr sz="1875" b="1">
                 <a:solidFill>
                   <a:srgbClr val="17212B"/>
                 </a:solidFill>
@@ -31915,7 +32681,7 @@
               </a:defRPr>
             </a:lvl8pPr>
             <a:lvl9pPr algn="l">
-              <a:defRPr sz="2100" b="0">
+              <a:defRPr sz="1875" b="1">
                 <a:solidFill>
                   <a:srgbClr val="17212B"/>
                 </a:solidFill>
@@ -31927,7 +32693,7 @@
           </a:lstStyle>
           <a:p xmlns:a="http://schemas.openxmlformats.org/drawingml/2006/main">
             <a:pPr algn="l">
-              <a:defRPr sz="2100" b="0">
+              <a:defRPr sz="1875" b="1">
                 <a:solidFill>
                   <a:srgbClr val="17212B"/>
                 </a:solidFill>
@@ -31937,7 +32703,7 @@
               </a:defRPr>
             </a:pPr>
             <a:r>
-              <a:rPr sz="2100" b="0">
+              <a:rPr sz="1875" b="1">
                 <a:solidFill>
                   <a:srgbClr val="17212B"/>
                 </a:solidFill>
@@ -31945,12 +32711,12 @@
                 <a:ea typeface="Malgun Gothic"/>
                 <a:cs typeface="Malgun Gothic"/>
               </a:rPr>
-              <a:t>기록된 테스트</a:t>
+              <a:t>지정된 명령으로</a:t>
             </a:r>
           </a:p>
           <a:p xmlns:a="http://schemas.openxmlformats.org/drawingml/2006/main">
             <a:pPr algn="l">
-              <a:defRPr sz="2100" b="0">
+              <a:defRPr sz="1875" b="1">
                 <a:solidFill>
                   <a:srgbClr val="17212B"/>
                 </a:solidFill>
@@ -31960,7 +32726,7 @@
               </a:defRPr>
             </a:pPr>
             <a:r>
-              <a:rPr sz="2100" b="0">
+              <a:rPr sz="1875" b="1">
                 <a:solidFill>
                   <a:srgbClr val="17212B"/>
                 </a:solidFill>
@@ -31968,17 +32734,17 @@
                 <a:ea typeface="Malgun Gothic"/>
                 <a:cs typeface="Malgun Gothic"/>
               </a:rPr>
-              <a:t>명령을 사용</a:t>
+              <a:t>전체 테스트를 실행</a:t>
             </a:r>
           </a:p>
         </p:txBody>
       </p:sp>
       <p:sp>
         <p:nvSpPr>
-          <p:cNvPr id="16" name="전체 테스트">
+          <p:cNvPr id="21" name="지침의 명령을 실제 사용">
             <a:extLst xmlns:a="http://schemas.openxmlformats.org/drawingml/2006/main">
               <a:ext uri="{FF2B5EF4-FFF2-40B4-BE49-F238E27FC236}">
-                <a16:creationId xmlns:a16="http://schemas.microsoft.com/office/drawing/2014/main" id="{10774065-B4F3-4FE2-9BFD-374120BC576A}"/>
+                <a16:creationId xmlns:a16="http://schemas.microsoft.com/office/drawing/2014/main" id="{3C2061B3-F83E-492D-B84F-F2F33DD826E5}"/>
               </a:ext>
             </a:extLst>
           </p:cNvPr>
@@ -31989,8 +32755,8 @@
         </p:nvSpPr>
         <p:spPr>
           <a:xfrm xmlns:a="http://schemas.openxmlformats.org/drawingml/2006/main">
-            <a:off x="8267700" y="2876550"/>
-            <a:ext cx="3314700" cy="457200"/>
+            <a:off x="5676900" y="4238625"/>
+            <a:ext cx="2743200" cy="238125"/>
           </a:xfrm>
           <a:prstGeom xmlns:a="http://schemas.openxmlformats.org/drawingml/2006/main" prst="rect">
             <a:avLst/>
@@ -32006,9 +32772,9 @@
           </a:bodyPr>
           <a:lstStyle xmlns:a="http://schemas.openxmlformats.org/drawingml/2006/main">
             <a:defPPr algn="l">
-              <a:defRPr sz="2400" b="1">
-                <a:solidFill>
-                  <a:srgbClr val="17212B"/>
+              <a:defRPr sz="1575" b="1">
+                <a:solidFill>
+                  <a:srgbClr val="0B6172"/>
                 </a:solidFill>
                 <a:latin typeface="Malgun Gothic"/>
                 <a:ea typeface="Malgun Gothic"/>
@@ -32016,9 +32782,9 @@
               </a:defRPr>
             </a:defPPr>
             <a:lvl1pPr algn="l">
-              <a:defRPr sz="2400" b="1">
-                <a:solidFill>
-                  <a:srgbClr val="17212B"/>
+              <a:defRPr sz="1575" b="1">
+                <a:solidFill>
+                  <a:srgbClr val="0B6172"/>
                 </a:solidFill>
                 <a:latin typeface="Malgun Gothic"/>
                 <a:ea typeface="Malgun Gothic"/>
@@ -32026,9 +32792,9 @@
               </a:defRPr>
             </a:lvl1pPr>
             <a:lvl2pPr algn="l">
-              <a:defRPr sz="2400" b="1">
-                <a:solidFill>
-                  <a:srgbClr val="17212B"/>
+              <a:defRPr sz="1575" b="1">
+                <a:solidFill>
+                  <a:srgbClr val="0B6172"/>
                 </a:solidFill>
                 <a:latin typeface="Malgun Gothic"/>
                 <a:ea typeface="Malgun Gothic"/>
@@ -32036,9 +32802,9 @@
               </a:defRPr>
             </a:lvl2pPr>
             <a:lvl3pPr algn="l">
-              <a:defRPr sz="2400" b="1">
-                <a:solidFill>
-                  <a:srgbClr val="17212B"/>
+              <a:defRPr sz="1575" b="1">
+                <a:solidFill>
+                  <a:srgbClr val="0B6172"/>
                 </a:solidFill>
                 <a:latin typeface="Malgun Gothic"/>
                 <a:ea typeface="Malgun Gothic"/>
@@ -32046,9 +32812,9 @@
               </a:defRPr>
             </a:lvl3pPr>
             <a:lvl4pPr algn="l">
-              <a:defRPr sz="2400" b="1">
-                <a:solidFill>
-                  <a:srgbClr val="17212B"/>
+              <a:defRPr sz="1575" b="1">
+                <a:solidFill>
+                  <a:srgbClr val="0B6172"/>
                 </a:solidFill>
                 <a:latin typeface="Malgun Gothic"/>
                 <a:ea typeface="Malgun Gothic"/>
@@ -32056,9 +32822,9 @@
               </a:defRPr>
             </a:lvl4pPr>
             <a:lvl5pPr algn="l">
-              <a:defRPr sz="2400" b="1">
-                <a:solidFill>
-                  <a:srgbClr val="17212B"/>
+              <a:defRPr sz="1575" b="1">
+                <a:solidFill>
+                  <a:srgbClr val="0B6172"/>
                 </a:solidFill>
                 <a:latin typeface="Malgun Gothic"/>
                 <a:ea typeface="Malgun Gothic"/>
@@ -32066,9 +32832,9 @@
               </a:defRPr>
             </a:lvl5pPr>
             <a:lvl6pPr algn="l">
-              <a:defRPr sz="2400" b="1">
-                <a:solidFill>
-                  <a:srgbClr val="17212B"/>
+              <a:defRPr sz="1575" b="1">
+                <a:solidFill>
+                  <a:srgbClr val="0B6172"/>
                 </a:solidFill>
                 <a:latin typeface="Malgun Gothic"/>
                 <a:ea typeface="Malgun Gothic"/>
@@ -32076,9 +32842,9 @@
               </a:defRPr>
             </a:lvl6pPr>
             <a:lvl7pPr algn="l">
-              <a:defRPr sz="2400" b="1">
-                <a:solidFill>
-                  <a:srgbClr val="17212B"/>
+              <a:defRPr sz="1575" b="1">
+                <a:solidFill>
+                  <a:srgbClr val="0B6172"/>
                 </a:solidFill>
                 <a:latin typeface="Malgun Gothic"/>
                 <a:ea typeface="Malgun Gothic"/>
@@ -32086,9 +32852,9 @@
               </a:defRPr>
             </a:lvl7pPr>
             <a:lvl8pPr algn="l">
-              <a:defRPr sz="2400" b="1">
-                <a:solidFill>
-                  <a:srgbClr val="17212B"/>
+              <a:defRPr sz="1575" b="1">
+                <a:solidFill>
+                  <a:srgbClr val="0B6172"/>
                 </a:solidFill>
                 <a:latin typeface="Malgun Gothic"/>
                 <a:ea typeface="Malgun Gothic"/>
@@ -32096,9 +32862,9 @@
               </a:defRPr>
             </a:lvl8pPr>
             <a:lvl9pPr algn="l">
-              <a:defRPr sz="2400" b="1">
-                <a:solidFill>
-                  <a:srgbClr val="17212B"/>
+              <a:defRPr sz="1575" b="1">
+                <a:solidFill>
+                  <a:srgbClr val="0B6172"/>
                 </a:solidFill>
                 <a:latin typeface="Malgun Gothic"/>
                 <a:ea typeface="Malgun Gothic"/>
@@ -32108,9 +32874,9 @@
           </a:lstStyle>
           <a:p xmlns:a="http://schemas.openxmlformats.org/drawingml/2006/main">
             <a:pPr algn="l">
-              <a:defRPr sz="2400" b="1">
-                <a:solidFill>
-                  <a:srgbClr val="17212B"/>
+              <a:defRPr sz="1575" b="1">
+                <a:solidFill>
+                  <a:srgbClr val="0B6172"/>
                 </a:solidFill>
                 <a:latin typeface="Malgun Gothic"/>
                 <a:ea typeface="Malgun Gothic"/>
@@ -32118,25 +32884,25 @@
               </a:defRPr>
             </a:pPr>
             <a:r>
-              <a:rPr sz="2400" b="1">
-                <a:solidFill>
-                  <a:srgbClr val="17212B"/>
+              <a:rPr sz="1575" b="1">
+                <a:solidFill>
+                  <a:srgbClr val="0B6172"/>
                 </a:solidFill>
                 <a:latin typeface="Malgun Gothic"/>
                 <a:ea typeface="Malgun Gothic"/>
                 <a:cs typeface="Malgun Gothic"/>
               </a:rPr>
-              <a:t>전체 테스트</a:t>
+              <a:t>지침의 명령을 실제 사용</a:t>
             </a:r>
           </a:p>
         </p:txBody>
       </p:sp>
       <p:sp>
         <p:nvSpPr>
-          <p:cNvPr id="17" name="11 / 11">
+          <p:cNvPr id="22" name="전체 테스트">
             <a:extLst xmlns:a="http://schemas.openxmlformats.org/drawingml/2006/main">
               <a:ext uri="{FF2B5EF4-FFF2-40B4-BE49-F238E27FC236}">
-                <a16:creationId xmlns:a16="http://schemas.microsoft.com/office/drawing/2014/main" id="{FEF88C7E-E5B1-40CE-A21B-2925908A56F8}"/>
+                <a16:creationId xmlns:a16="http://schemas.microsoft.com/office/drawing/2014/main" id="{9F02CB75-0F12-4EE2-A6EC-631FD3C1474D}"/>
               </a:ext>
             </a:extLst>
           </p:cNvPr>
@@ -32147,8 +32913,166 @@
         </p:nvSpPr>
         <p:spPr>
           <a:xfrm xmlns:a="http://schemas.openxmlformats.org/drawingml/2006/main">
-            <a:off x="8267700" y="3476625"/>
-            <a:ext cx="3314700" cy="619125"/>
+            <a:off x="9220200" y="2571750"/>
+            <a:ext cx="2362200" cy="409575"/>
+          </a:xfrm>
+          <a:prstGeom xmlns:a="http://schemas.openxmlformats.org/drawingml/2006/main" prst="rect">
+            <a:avLst/>
+          </a:prstGeom>
+          <a:noFill xmlns:a="http://schemas.openxmlformats.org/drawingml/2006/main"/>
+          <a:ln xmlns:a="http://schemas.openxmlformats.org/drawingml/2006/main" w="0">
+            <a:noFill/>
+          </a:ln>
+        </p:spPr>
+        <p:txBody>
+          <a:bodyPr xmlns:a="http://schemas.openxmlformats.org/drawingml/2006/main" wrap="none" lIns="0" tIns="0" rIns="0" bIns="0" anchor="ctr">
+            <a:noAutofit/>
+          </a:bodyPr>
+          <a:lstStyle xmlns:a="http://schemas.openxmlformats.org/drawingml/2006/main">
+            <a:defPPr algn="l">
+              <a:defRPr sz="2325" b="1">
+                <a:solidFill>
+                  <a:srgbClr val="17212B"/>
+                </a:solidFill>
+                <a:latin typeface="Malgun Gothic"/>
+                <a:ea typeface="Malgun Gothic"/>
+                <a:cs typeface="Malgun Gothic"/>
+              </a:defRPr>
+            </a:defPPr>
+            <a:lvl1pPr algn="l">
+              <a:defRPr sz="2325" b="1">
+                <a:solidFill>
+                  <a:srgbClr val="17212B"/>
+                </a:solidFill>
+                <a:latin typeface="Malgun Gothic"/>
+                <a:ea typeface="Malgun Gothic"/>
+                <a:cs typeface="Malgun Gothic"/>
+              </a:defRPr>
+            </a:lvl1pPr>
+            <a:lvl2pPr algn="l">
+              <a:defRPr sz="2325" b="1">
+                <a:solidFill>
+                  <a:srgbClr val="17212B"/>
+                </a:solidFill>
+                <a:latin typeface="Malgun Gothic"/>
+                <a:ea typeface="Malgun Gothic"/>
+                <a:cs typeface="Malgun Gothic"/>
+              </a:defRPr>
+            </a:lvl2pPr>
+            <a:lvl3pPr algn="l">
+              <a:defRPr sz="2325" b="1">
+                <a:solidFill>
+                  <a:srgbClr val="17212B"/>
+                </a:solidFill>
+                <a:latin typeface="Malgun Gothic"/>
+                <a:ea typeface="Malgun Gothic"/>
+                <a:cs typeface="Malgun Gothic"/>
+              </a:defRPr>
+            </a:lvl3pPr>
+            <a:lvl4pPr algn="l">
+              <a:defRPr sz="2325" b="1">
+                <a:solidFill>
+                  <a:srgbClr val="17212B"/>
+                </a:solidFill>
+                <a:latin typeface="Malgun Gothic"/>
+                <a:ea typeface="Malgun Gothic"/>
+                <a:cs typeface="Malgun Gothic"/>
+              </a:defRPr>
+            </a:lvl4pPr>
+            <a:lvl5pPr algn="l">
+              <a:defRPr sz="2325" b="1">
+                <a:solidFill>
+                  <a:srgbClr val="17212B"/>
+                </a:solidFill>
+                <a:latin typeface="Malgun Gothic"/>
+                <a:ea typeface="Malgun Gothic"/>
+                <a:cs typeface="Malgun Gothic"/>
+              </a:defRPr>
+            </a:lvl5pPr>
+            <a:lvl6pPr algn="l">
+              <a:defRPr sz="2325" b="1">
+                <a:solidFill>
+                  <a:srgbClr val="17212B"/>
+                </a:solidFill>
+                <a:latin typeface="Malgun Gothic"/>
+                <a:ea typeface="Malgun Gothic"/>
+                <a:cs typeface="Malgun Gothic"/>
+              </a:defRPr>
+            </a:lvl6pPr>
+            <a:lvl7pPr algn="l">
+              <a:defRPr sz="2325" b="1">
+                <a:solidFill>
+                  <a:srgbClr val="17212B"/>
+                </a:solidFill>
+                <a:latin typeface="Malgun Gothic"/>
+                <a:ea typeface="Malgun Gothic"/>
+                <a:cs typeface="Malgun Gothic"/>
+              </a:defRPr>
+            </a:lvl7pPr>
+            <a:lvl8pPr algn="l">
+              <a:defRPr sz="2325" b="1">
+                <a:solidFill>
+                  <a:srgbClr val="17212B"/>
+                </a:solidFill>
+                <a:latin typeface="Malgun Gothic"/>
+                <a:ea typeface="Malgun Gothic"/>
+                <a:cs typeface="Malgun Gothic"/>
+              </a:defRPr>
+            </a:lvl8pPr>
+            <a:lvl9pPr algn="l">
+              <a:defRPr sz="2325" b="1">
+                <a:solidFill>
+                  <a:srgbClr val="17212B"/>
+                </a:solidFill>
+                <a:latin typeface="Malgun Gothic"/>
+                <a:ea typeface="Malgun Gothic"/>
+                <a:cs typeface="Malgun Gothic"/>
+              </a:defRPr>
+            </a:lvl9pPr>
+          </a:lstStyle>
+          <a:p xmlns:a="http://schemas.openxmlformats.org/drawingml/2006/main">
+            <a:pPr algn="l">
+              <a:defRPr sz="2325" b="1">
+                <a:solidFill>
+                  <a:srgbClr val="17212B"/>
+                </a:solidFill>
+                <a:latin typeface="Malgun Gothic"/>
+                <a:ea typeface="Malgun Gothic"/>
+                <a:cs typeface="Malgun Gothic"/>
+              </a:defRPr>
+            </a:pPr>
+            <a:r>
+              <a:rPr sz="2325" b="1">
+                <a:solidFill>
+                  <a:srgbClr val="17212B"/>
+                </a:solidFill>
+                <a:latin typeface="Malgun Gothic"/>
+                <a:ea typeface="Malgun Gothic"/>
+                <a:cs typeface="Malgun Gothic"/>
+              </a:rPr>
+              <a:t>전체 테스트</a:t>
+            </a:r>
+          </a:p>
+        </p:txBody>
+      </p:sp>
+      <p:sp>
+        <p:nvSpPr>
+          <p:cNvPr id="23" name="11 / 11">
+            <a:extLst xmlns:a="http://schemas.openxmlformats.org/drawingml/2006/main">
+              <a:ext uri="{FF2B5EF4-FFF2-40B4-BE49-F238E27FC236}">
+                <a16:creationId xmlns:a16="http://schemas.microsoft.com/office/drawing/2014/main" id="{366237B6-E4EA-4254-A24A-7F11A8484E8F}"/>
+              </a:ext>
+            </a:extLst>
+          </p:cNvPr>
+          <p:cNvSpPr>
+            <a:spLocks xmlns:a="http://schemas.openxmlformats.org/drawingml/2006/main" noGrp="1"/>
+          </p:cNvSpPr>
+          <p:nvPr/>
+        </p:nvSpPr>
+        <p:spPr>
+          <a:xfrm xmlns:a="http://schemas.openxmlformats.org/drawingml/2006/main">
+            <a:off x="9220200" y="3171825"/>
+            <a:ext cx="2362200" cy="638175"/>
           </a:xfrm>
           <a:prstGeom xmlns:a="http://schemas.openxmlformats.org/drawingml/2006/main" prst="rect">
             <a:avLst/>
@@ -32291,10 +33215,10 @@
       </p:sp>
       <p:sp>
         <p:nvSpPr>
-          <p:cNvPr id="18" name="PASS">
+          <p:cNvPr id="24" name="PASS">
             <a:extLst xmlns:a="http://schemas.openxmlformats.org/drawingml/2006/main">
               <a:ext uri="{FF2B5EF4-FFF2-40B4-BE49-F238E27FC236}">
-                <a16:creationId xmlns:a16="http://schemas.microsoft.com/office/drawing/2014/main" id="{0BD00DE5-4A06-4031-823B-A0469D76793D}"/>
+                <a16:creationId xmlns:a16="http://schemas.microsoft.com/office/drawing/2014/main" id="{6C527183-82DD-482B-A921-E4234A97D0CF}"/>
               </a:ext>
             </a:extLst>
           </p:cNvPr>
@@ -32305,257 +33229,8 @@
         </p:nvSpPr>
         <p:spPr>
           <a:xfrm xmlns:a="http://schemas.openxmlformats.org/drawingml/2006/main">
-            <a:off x="8267700" y="4105275"/>
-            <a:ext cx="3314700" cy="371475"/>
-          </a:xfrm>
-          <a:prstGeom xmlns:a="http://schemas.openxmlformats.org/drawingml/2006/main" prst="rect">
-            <a:avLst/>
-          </a:prstGeom>
-          <a:noFill xmlns:a="http://schemas.openxmlformats.org/drawingml/2006/main"/>
-          <a:ln xmlns:a="http://schemas.openxmlformats.org/drawingml/2006/main" w="0">
-            <a:noFill/>
-          </a:ln>
-        </p:spPr>
-        <p:txBody>
-          <a:bodyPr xmlns:a="http://schemas.openxmlformats.org/drawingml/2006/main" wrap="none" lIns="0" tIns="0" rIns="0" bIns="0" anchor="ctr">
-            <a:noAutofit/>
-          </a:bodyPr>
-          <a:lstStyle xmlns:a="http://schemas.openxmlformats.org/drawingml/2006/main">
-            <a:defPPr algn="l">
-              <a:defRPr sz="2100" b="1">
-                <a:solidFill>
-                  <a:srgbClr val="176B4D"/>
-                </a:solidFill>
-                <a:latin typeface="Malgun Gothic"/>
-                <a:ea typeface="Malgun Gothic"/>
-                <a:cs typeface="Malgun Gothic"/>
-              </a:defRPr>
-            </a:defPPr>
-            <a:lvl1pPr algn="l">
-              <a:defRPr sz="2100" b="1">
-                <a:solidFill>
-                  <a:srgbClr val="176B4D"/>
-                </a:solidFill>
-                <a:latin typeface="Malgun Gothic"/>
-                <a:ea typeface="Malgun Gothic"/>
-                <a:cs typeface="Malgun Gothic"/>
-              </a:defRPr>
-            </a:lvl1pPr>
-            <a:lvl2pPr algn="l">
-              <a:defRPr sz="2100" b="1">
-                <a:solidFill>
-                  <a:srgbClr val="176B4D"/>
-                </a:solidFill>
-                <a:latin typeface="Malgun Gothic"/>
-                <a:ea typeface="Malgun Gothic"/>
-                <a:cs typeface="Malgun Gothic"/>
-              </a:defRPr>
-            </a:lvl2pPr>
-            <a:lvl3pPr algn="l">
-              <a:defRPr sz="2100" b="1">
-                <a:solidFill>
-                  <a:srgbClr val="176B4D"/>
-                </a:solidFill>
-                <a:latin typeface="Malgun Gothic"/>
-                <a:ea typeface="Malgun Gothic"/>
-                <a:cs typeface="Malgun Gothic"/>
-              </a:defRPr>
-            </a:lvl3pPr>
-            <a:lvl4pPr algn="l">
-              <a:defRPr sz="2100" b="1">
-                <a:solidFill>
-                  <a:srgbClr val="176B4D"/>
-                </a:solidFill>
-                <a:latin typeface="Malgun Gothic"/>
-                <a:ea typeface="Malgun Gothic"/>
-                <a:cs typeface="Malgun Gothic"/>
-              </a:defRPr>
-            </a:lvl4pPr>
-            <a:lvl5pPr algn="l">
-              <a:defRPr sz="2100" b="1">
-                <a:solidFill>
-                  <a:srgbClr val="176B4D"/>
-                </a:solidFill>
-                <a:latin typeface="Malgun Gothic"/>
-                <a:ea typeface="Malgun Gothic"/>
-                <a:cs typeface="Malgun Gothic"/>
-              </a:defRPr>
-            </a:lvl5pPr>
-            <a:lvl6pPr algn="l">
-              <a:defRPr sz="2100" b="1">
-                <a:solidFill>
-                  <a:srgbClr val="176B4D"/>
-                </a:solidFill>
-                <a:latin typeface="Malgun Gothic"/>
-                <a:ea typeface="Malgun Gothic"/>
-                <a:cs typeface="Malgun Gothic"/>
-              </a:defRPr>
-            </a:lvl6pPr>
-            <a:lvl7pPr algn="l">
-              <a:defRPr sz="2100" b="1">
-                <a:solidFill>
-                  <a:srgbClr val="176B4D"/>
-                </a:solidFill>
-                <a:latin typeface="Malgun Gothic"/>
-                <a:ea typeface="Malgun Gothic"/>
-                <a:cs typeface="Malgun Gothic"/>
-              </a:defRPr>
-            </a:lvl7pPr>
-            <a:lvl8pPr algn="l">
-              <a:defRPr sz="2100" b="1">
-                <a:solidFill>
-                  <a:srgbClr val="176B4D"/>
-                </a:solidFill>
-                <a:latin typeface="Malgun Gothic"/>
-                <a:ea typeface="Malgun Gothic"/>
-                <a:cs typeface="Malgun Gothic"/>
-              </a:defRPr>
-            </a:lvl8pPr>
-            <a:lvl9pPr algn="l">
-              <a:defRPr sz="2100" b="1">
-                <a:solidFill>
-                  <a:srgbClr val="176B4D"/>
-                </a:solidFill>
-                <a:latin typeface="Malgun Gothic"/>
-                <a:ea typeface="Malgun Gothic"/>
-                <a:cs typeface="Malgun Gothic"/>
-              </a:defRPr>
-            </a:lvl9pPr>
-          </a:lstStyle>
-          <a:p xmlns:a="http://schemas.openxmlformats.org/drawingml/2006/main">
-            <a:pPr algn="l">
-              <a:defRPr sz="2100" b="1">
-                <a:solidFill>
-                  <a:srgbClr val="176B4D"/>
-                </a:solidFill>
-                <a:latin typeface="Malgun Gothic"/>
-                <a:ea typeface="Malgun Gothic"/>
-                <a:cs typeface="Malgun Gothic"/>
-              </a:defRPr>
-            </a:pPr>
-            <a:r>
-              <a:rPr sz="2100" b="1">
-                <a:solidFill>
-                  <a:srgbClr val="176B4D"/>
-                </a:solidFill>
-                <a:latin typeface="Malgun Gothic"/>
-                <a:ea typeface="Malgun Gothic"/>
-                <a:cs typeface="Malgun Gothic"/>
-              </a:rPr>
-              <a:t>PASS</a:t>
-            </a:r>
-          </a:p>
-        </p:txBody>
-      </p:sp>
-      <p:sp>
-        <p:nvSpPr>
-          <p:cNvPr id="19" name="">
-            <a:extLst xmlns:a="http://schemas.openxmlformats.org/drawingml/2006/main">
-              <a:ext uri="{FF2B5EF4-FFF2-40B4-BE49-F238E27FC236}">
-                <a16:creationId xmlns:a16="http://schemas.microsoft.com/office/drawing/2014/main" id="{B5589E61-F5CE-4437-B10D-D86D27C30830}"/>
-              </a:ext>
-            </a:extLst>
-          </p:cNvPr>
-          <p:cNvSpPr>
-            <a:spLocks xmlns:a="http://schemas.openxmlformats.org/drawingml/2006/main" noGrp="1"/>
-          </p:cNvSpPr>
-          <p:nvPr/>
-        </p:nvSpPr>
-        <p:spPr>
-          <a:xfrm xmlns:a="http://schemas.openxmlformats.org/drawingml/2006/main">
-            <a:off x="3962400" y="3190875"/>
-            <a:ext cx="285750" cy="219075"/>
-          </a:xfrm>
-          <a:prstGeom xmlns:a="http://schemas.openxmlformats.org/drawingml/2006/main" prst="rightArrow">
-            <a:avLst/>
-          </a:prstGeom>
-          <a:solidFill xmlns:a="http://schemas.openxmlformats.org/drawingml/2006/main">
-            <a:srgbClr val="0B6172"/>
-          </a:solidFill>
-          <a:ln xmlns:a="http://schemas.openxmlformats.org/drawingml/2006/main" w="0">
-            <a:noFill/>
-          </a:ln>
-        </p:spPr>
-      </p:sp>
-      <p:sp>
-        <p:nvSpPr>
-          <p:cNvPr id="20" name="">
-            <a:extLst xmlns:a="http://schemas.openxmlformats.org/drawingml/2006/main">
-              <a:ext uri="{FF2B5EF4-FFF2-40B4-BE49-F238E27FC236}">
-                <a16:creationId xmlns:a16="http://schemas.microsoft.com/office/drawing/2014/main" id="{350F9F33-1B81-4F4A-80EA-58FD5A2E48E2}"/>
-              </a:ext>
-            </a:extLst>
-          </p:cNvPr>
-          <p:cNvSpPr>
-            <a:spLocks xmlns:a="http://schemas.openxmlformats.org/drawingml/2006/main" noGrp="1"/>
-          </p:cNvSpPr>
-          <p:nvPr/>
-        </p:nvSpPr>
-        <p:spPr>
-          <a:xfrm xmlns:a="http://schemas.openxmlformats.org/drawingml/2006/main">
-            <a:off x="7791450" y="3190875"/>
-            <a:ext cx="285750" cy="219075"/>
-          </a:xfrm>
-          <a:prstGeom xmlns:a="http://schemas.openxmlformats.org/drawingml/2006/main" prst="rightArrow">
-            <a:avLst/>
-          </a:prstGeom>
-          <a:solidFill xmlns:a="http://schemas.openxmlformats.org/drawingml/2006/main">
-            <a:srgbClr val="0B6172"/>
-          </a:solidFill>
-          <a:ln xmlns:a="http://schemas.openxmlformats.org/drawingml/2006/main" w="0">
-            <a:noFill/>
-          </a:ln>
-        </p:spPr>
-      </p:sp>
-      <p:sp>
-        <p:nvSpPr>
-          <p:cNvPr id="21" name="">
-            <a:extLst xmlns:a="http://schemas.openxmlformats.org/drawingml/2006/main">
-              <a:ext uri="{FF2B5EF4-FFF2-40B4-BE49-F238E27FC236}">
-                <a16:creationId xmlns:a16="http://schemas.microsoft.com/office/drawing/2014/main" id="{5F4402A2-2BF9-45CD-B4F8-B28FA04225E9}"/>
-              </a:ext>
-            </a:extLst>
-          </p:cNvPr>
-          <p:cNvSpPr>
-            <a:spLocks xmlns:a="http://schemas.openxmlformats.org/drawingml/2006/main" noGrp="1"/>
-          </p:cNvSpPr>
-          <p:nvPr/>
-        </p:nvSpPr>
-        <p:spPr>
-          <a:xfrm xmlns:a="http://schemas.openxmlformats.org/drawingml/2006/main">
-            <a:off x="609600" y="4772025"/>
-            <a:ext cx="10972800" cy="0"/>
-          </a:xfrm>
-          <a:prstGeom xmlns:a="http://schemas.openxmlformats.org/drawingml/2006/main" prst="line">
-            <a:avLst/>
-          </a:prstGeom>
-          <a:noFill xmlns:a="http://schemas.openxmlformats.org/drawingml/2006/main"/>
-          <a:ln xmlns:a="http://schemas.openxmlformats.org/drawingml/2006/main" w="9525">
-            <a:solidFill>
-              <a:srgbClr val="C7D0DA"/>
-            </a:solidFill>
-            <a:prstDash val="solid"/>
-          </a:ln>
-        </p:spPr>
-      </p:sp>
-      <p:sp>
-        <p:nvSpPr>
-          <p:cNvPr id="22" name="README-only 범위는 작업 요청에도 명시돼 있었다">
-            <a:extLst xmlns:a="http://schemas.openxmlformats.org/drawingml/2006/main">
-              <a:ext uri="{FF2B5EF4-FFF2-40B4-BE49-F238E27FC236}">
-                <a16:creationId xmlns:a16="http://schemas.microsoft.com/office/drawing/2014/main" id="{621872E9-978E-4067-BA4C-ECEC54CF9C2B}"/>
-              </a:ext>
-            </a:extLst>
-          </p:cNvPr>
-          <p:cNvSpPr>
-            <a:spLocks xmlns:a="http://schemas.openxmlformats.org/drawingml/2006/main" noGrp="1"/>
-          </p:cNvSpPr>
-          <p:nvPr/>
-        </p:nvSpPr>
-        <p:spPr>
-          <a:xfrm xmlns:a="http://schemas.openxmlformats.org/drawingml/2006/main">
-            <a:off x="609600" y="5048250"/>
-            <a:ext cx="10972800" cy="400050"/>
+            <a:off x="9220200" y="3943350"/>
+            <a:ext cx="2362200" cy="371475"/>
           </a:xfrm>
           <a:prstGeom xmlns:a="http://schemas.openxmlformats.org/drawingml/2006/main" prst="rect">
             <a:avLst/>
@@ -32573,7 +33248,7 @@
             <a:defPPr algn="l">
               <a:defRPr sz="2175" b="1">
                 <a:solidFill>
-                  <a:srgbClr val="17212B"/>
+                  <a:srgbClr val="176B4D"/>
                 </a:solidFill>
                 <a:latin typeface="Malgun Gothic"/>
                 <a:ea typeface="Malgun Gothic"/>
@@ -32583,7 +33258,7 @@
             <a:lvl1pPr algn="l">
               <a:defRPr sz="2175" b="1">
                 <a:solidFill>
-                  <a:srgbClr val="17212B"/>
+                  <a:srgbClr val="176B4D"/>
                 </a:solidFill>
                 <a:latin typeface="Malgun Gothic"/>
                 <a:ea typeface="Malgun Gothic"/>
@@ -32593,7 +33268,7 @@
             <a:lvl2pPr algn="l">
               <a:defRPr sz="2175" b="1">
                 <a:solidFill>
-                  <a:srgbClr val="17212B"/>
+                  <a:srgbClr val="176B4D"/>
                 </a:solidFill>
                 <a:latin typeface="Malgun Gothic"/>
                 <a:ea typeface="Malgun Gothic"/>
@@ -32603,7 +33278,7 @@
             <a:lvl3pPr algn="l">
               <a:defRPr sz="2175" b="1">
                 <a:solidFill>
-                  <a:srgbClr val="17212B"/>
+                  <a:srgbClr val="176B4D"/>
                 </a:solidFill>
                 <a:latin typeface="Malgun Gothic"/>
                 <a:ea typeface="Malgun Gothic"/>
@@ -32613,7 +33288,7 @@
             <a:lvl4pPr algn="l">
               <a:defRPr sz="2175" b="1">
                 <a:solidFill>
-                  <a:srgbClr val="17212B"/>
+                  <a:srgbClr val="176B4D"/>
                 </a:solidFill>
                 <a:latin typeface="Malgun Gothic"/>
                 <a:ea typeface="Malgun Gothic"/>
@@ -32623,7 +33298,7 @@
             <a:lvl5pPr algn="l">
               <a:defRPr sz="2175" b="1">
                 <a:solidFill>
-                  <a:srgbClr val="17212B"/>
+                  <a:srgbClr val="176B4D"/>
                 </a:solidFill>
                 <a:latin typeface="Malgun Gothic"/>
                 <a:ea typeface="Malgun Gothic"/>
@@ -32633,7 +33308,7 @@
             <a:lvl6pPr algn="l">
               <a:defRPr sz="2175" b="1">
                 <a:solidFill>
-                  <a:srgbClr val="17212B"/>
+                  <a:srgbClr val="176B4D"/>
                 </a:solidFill>
                 <a:latin typeface="Malgun Gothic"/>
                 <a:ea typeface="Malgun Gothic"/>
@@ -32643,7 +33318,7 @@
             <a:lvl7pPr algn="l">
               <a:defRPr sz="2175" b="1">
                 <a:solidFill>
-                  <a:srgbClr val="17212B"/>
+                  <a:srgbClr val="176B4D"/>
                 </a:solidFill>
                 <a:latin typeface="Malgun Gothic"/>
                 <a:ea typeface="Malgun Gothic"/>
@@ -32653,7 +33328,7 @@
             <a:lvl8pPr algn="l">
               <a:defRPr sz="2175" b="1">
                 <a:solidFill>
-                  <a:srgbClr val="17212B"/>
+                  <a:srgbClr val="176B4D"/>
                 </a:solidFill>
                 <a:latin typeface="Malgun Gothic"/>
                 <a:ea typeface="Malgun Gothic"/>
@@ -32663,7 +33338,7 @@
             <a:lvl9pPr algn="l">
               <a:defRPr sz="2175" b="1">
                 <a:solidFill>
-                  <a:srgbClr val="17212B"/>
+                  <a:srgbClr val="176B4D"/>
                 </a:solidFill>
                 <a:latin typeface="Malgun Gothic"/>
                 <a:ea typeface="Malgun Gothic"/>
@@ -32675,7 +33350,7 @@
             <a:pPr algn="l">
               <a:defRPr sz="2175" b="1">
                 <a:solidFill>
-                  <a:srgbClr val="17212B"/>
+                  <a:srgbClr val="176B4D"/>
                 </a:solidFill>
                 <a:latin typeface="Malgun Gothic"/>
                 <a:ea typeface="Malgun Gothic"/>
@@ -32685,23 +33360,241 @@
             <a:r>
               <a:rPr sz="2175" b="1">
                 <a:solidFill>
-                  <a:srgbClr val="17212B"/>
+                  <a:srgbClr val="176B4D"/>
                 </a:solidFill>
                 <a:latin typeface="Malgun Gothic"/>
                 <a:ea typeface="Malgun Gothic"/>
                 <a:cs typeface="Malgun Gothic"/>
               </a:rPr>
-              <a:t>README-only 범위는 작업 요청에도 명시돼 있었다</a:t>
+              <a:t>PASS</a:t>
             </a:r>
           </a:p>
         </p:txBody>
       </p:sp>
       <p:sp>
         <p:nvSpPr>
-          <p:cNvPr id="23" name="Legacy module connection">
+          <p:cNvPr id="25" name="">
             <a:extLst xmlns:a="http://schemas.openxmlformats.org/drawingml/2006/main">
               <a:ext uri="{FF2B5EF4-FFF2-40B4-BE49-F238E27FC236}">
-                <a16:creationId xmlns:a16="http://schemas.microsoft.com/office/drawing/2014/main" id="{5CB5503D-04B3-417D-BC86-CF0D2102AEF8}"/>
+                <a16:creationId xmlns:a16="http://schemas.microsoft.com/office/drawing/2014/main" id="{672BD2AC-8832-4866-BD3F-CAB12BCC9BF1}"/>
+              </a:ext>
+            </a:extLst>
+          </p:cNvPr>
+          <p:cNvSpPr>
+            <a:spLocks xmlns:a="http://schemas.openxmlformats.org/drawingml/2006/main" noGrp="1"/>
+          </p:cNvSpPr>
+          <p:nvPr/>
+        </p:nvSpPr>
+        <p:spPr>
+          <a:xfrm xmlns:a="http://schemas.openxmlformats.org/drawingml/2006/main">
+            <a:off x="5010150" y="3171825"/>
+            <a:ext cx="228600" cy="219075"/>
+          </a:xfrm>
+          <a:prstGeom xmlns:a="http://schemas.openxmlformats.org/drawingml/2006/main" prst="rightArrow">
+            <a:avLst/>
+          </a:prstGeom>
+          <a:solidFill xmlns:a="http://schemas.openxmlformats.org/drawingml/2006/main">
+            <a:srgbClr val="0B6172"/>
+          </a:solidFill>
+          <a:ln xmlns:a="http://schemas.openxmlformats.org/drawingml/2006/main" w="0">
+            <a:noFill/>
+          </a:ln>
+        </p:spPr>
+      </p:sp>
+      <p:sp>
+        <p:nvSpPr>
+          <p:cNvPr id="26" name="">
+            <a:extLst xmlns:a="http://schemas.openxmlformats.org/drawingml/2006/main">
+              <a:ext uri="{FF2B5EF4-FFF2-40B4-BE49-F238E27FC236}">
+                <a16:creationId xmlns:a16="http://schemas.microsoft.com/office/drawing/2014/main" id="{DCA5ADFE-A98C-4294-BADB-AE7E0BF566C1}"/>
+              </a:ext>
+            </a:extLst>
+          </p:cNvPr>
+          <p:cNvSpPr>
+            <a:spLocks xmlns:a="http://schemas.openxmlformats.org/drawingml/2006/main" noGrp="1"/>
+          </p:cNvSpPr>
+          <p:nvPr/>
+        </p:nvSpPr>
+        <p:spPr>
+          <a:xfrm xmlns:a="http://schemas.openxmlformats.org/drawingml/2006/main">
+            <a:off x="8743950" y="3171825"/>
+            <a:ext cx="228600" cy="219075"/>
+          </a:xfrm>
+          <a:prstGeom xmlns:a="http://schemas.openxmlformats.org/drawingml/2006/main" prst="rightArrow">
+            <a:avLst/>
+          </a:prstGeom>
+          <a:solidFill xmlns:a="http://schemas.openxmlformats.org/drawingml/2006/main">
+            <a:srgbClr val="0B6172"/>
+          </a:solidFill>
+          <a:ln xmlns:a="http://schemas.openxmlformats.org/drawingml/2006/main" w="0">
+            <a:noFill/>
+          </a:ln>
+        </p:spPr>
+      </p:sp>
+      <p:sp>
+        <p:nvSpPr>
+          <p:cNvPr id="27" name="Prompt 밖의 테스트 지침을 실제 실행에 적용했다">
+            <a:extLst xmlns:a="http://schemas.openxmlformats.org/drawingml/2006/main">
+              <a:ext uri="{FF2B5EF4-FFF2-40B4-BE49-F238E27FC236}">
+                <a16:creationId xmlns:a16="http://schemas.microsoft.com/office/drawing/2014/main" id="{4A0F2321-CC57-482B-8DEE-45D5AFCC8276}"/>
+              </a:ext>
+            </a:extLst>
+          </p:cNvPr>
+          <p:cNvSpPr>
+            <a:spLocks xmlns:a="http://schemas.openxmlformats.org/drawingml/2006/main" noGrp="1"/>
+          </p:cNvSpPr>
+          <p:nvPr/>
+        </p:nvSpPr>
+        <p:spPr>
+          <a:xfrm xmlns:a="http://schemas.openxmlformats.org/drawingml/2006/main">
+            <a:off x="609600" y="5381625"/>
+            <a:ext cx="10972800" cy="342900"/>
+          </a:xfrm>
+          <a:prstGeom xmlns:a="http://schemas.openxmlformats.org/drawingml/2006/main" prst="rect">
+            <a:avLst/>
+          </a:prstGeom>
+          <a:noFill xmlns:a="http://schemas.openxmlformats.org/drawingml/2006/main"/>
+          <a:ln xmlns:a="http://schemas.openxmlformats.org/drawingml/2006/main" w="0">
+            <a:noFill/>
+          </a:ln>
+        </p:spPr>
+        <p:txBody>
+          <a:bodyPr xmlns:a="http://schemas.openxmlformats.org/drawingml/2006/main" wrap="none" lIns="0" tIns="0" rIns="0" bIns="0" anchor="ctr">
+            <a:noAutofit/>
+          </a:bodyPr>
+          <a:lstStyle xmlns:a="http://schemas.openxmlformats.org/drawingml/2006/main">
+            <a:defPPr algn="l">
+              <a:defRPr sz="2250" b="1">
+                <a:solidFill>
+                  <a:srgbClr val="0B6172"/>
+                </a:solidFill>
+                <a:latin typeface="Malgun Gothic"/>
+                <a:ea typeface="Malgun Gothic"/>
+                <a:cs typeface="Malgun Gothic"/>
+              </a:defRPr>
+            </a:defPPr>
+            <a:lvl1pPr algn="l">
+              <a:defRPr sz="2250" b="1">
+                <a:solidFill>
+                  <a:srgbClr val="0B6172"/>
+                </a:solidFill>
+                <a:latin typeface="Malgun Gothic"/>
+                <a:ea typeface="Malgun Gothic"/>
+                <a:cs typeface="Malgun Gothic"/>
+              </a:defRPr>
+            </a:lvl1pPr>
+            <a:lvl2pPr algn="l">
+              <a:defRPr sz="2250" b="1">
+                <a:solidFill>
+                  <a:srgbClr val="0B6172"/>
+                </a:solidFill>
+                <a:latin typeface="Malgun Gothic"/>
+                <a:ea typeface="Malgun Gothic"/>
+                <a:cs typeface="Malgun Gothic"/>
+              </a:defRPr>
+            </a:lvl2pPr>
+            <a:lvl3pPr algn="l">
+              <a:defRPr sz="2250" b="1">
+                <a:solidFill>
+                  <a:srgbClr val="0B6172"/>
+                </a:solidFill>
+                <a:latin typeface="Malgun Gothic"/>
+                <a:ea typeface="Malgun Gothic"/>
+                <a:cs typeface="Malgun Gothic"/>
+              </a:defRPr>
+            </a:lvl3pPr>
+            <a:lvl4pPr algn="l">
+              <a:defRPr sz="2250" b="1">
+                <a:solidFill>
+                  <a:srgbClr val="0B6172"/>
+                </a:solidFill>
+                <a:latin typeface="Malgun Gothic"/>
+                <a:ea typeface="Malgun Gothic"/>
+                <a:cs typeface="Malgun Gothic"/>
+              </a:defRPr>
+            </a:lvl4pPr>
+            <a:lvl5pPr algn="l">
+              <a:defRPr sz="2250" b="1">
+                <a:solidFill>
+                  <a:srgbClr val="0B6172"/>
+                </a:solidFill>
+                <a:latin typeface="Malgun Gothic"/>
+                <a:ea typeface="Malgun Gothic"/>
+                <a:cs typeface="Malgun Gothic"/>
+              </a:defRPr>
+            </a:lvl5pPr>
+            <a:lvl6pPr algn="l">
+              <a:defRPr sz="2250" b="1">
+                <a:solidFill>
+                  <a:srgbClr val="0B6172"/>
+                </a:solidFill>
+                <a:latin typeface="Malgun Gothic"/>
+                <a:ea typeface="Malgun Gothic"/>
+                <a:cs typeface="Malgun Gothic"/>
+              </a:defRPr>
+            </a:lvl6pPr>
+            <a:lvl7pPr algn="l">
+              <a:defRPr sz="2250" b="1">
+                <a:solidFill>
+                  <a:srgbClr val="0B6172"/>
+                </a:solidFill>
+                <a:latin typeface="Malgun Gothic"/>
+                <a:ea typeface="Malgun Gothic"/>
+                <a:cs typeface="Malgun Gothic"/>
+              </a:defRPr>
+            </a:lvl7pPr>
+            <a:lvl8pPr algn="l">
+              <a:defRPr sz="2250" b="1">
+                <a:solidFill>
+                  <a:srgbClr val="0B6172"/>
+                </a:solidFill>
+                <a:latin typeface="Malgun Gothic"/>
+                <a:ea typeface="Malgun Gothic"/>
+                <a:cs typeface="Malgun Gothic"/>
+              </a:defRPr>
+            </a:lvl8pPr>
+            <a:lvl9pPr algn="l">
+              <a:defRPr sz="2250" b="1">
+                <a:solidFill>
+                  <a:srgbClr val="0B6172"/>
+                </a:solidFill>
+                <a:latin typeface="Malgun Gothic"/>
+                <a:ea typeface="Malgun Gothic"/>
+                <a:cs typeface="Malgun Gothic"/>
+              </a:defRPr>
+            </a:lvl9pPr>
+          </a:lstStyle>
+          <a:p xmlns:a="http://schemas.openxmlformats.org/drawingml/2006/main">
+            <a:pPr algn="l">
+              <a:defRPr sz="2250" b="1">
+                <a:solidFill>
+                  <a:srgbClr val="0B6172"/>
+                </a:solidFill>
+                <a:latin typeface="Malgun Gothic"/>
+                <a:ea typeface="Malgun Gothic"/>
+                <a:cs typeface="Malgun Gothic"/>
+              </a:defRPr>
+            </a:pPr>
+            <a:r>
+              <a:rPr sz="2250" b="1">
+                <a:solidFill>
+                  <a:srgbClr val="0B6172"/>
+                </a:solidFill>
+                <a:latin typeface="Malgun Gothic"/>
+                <a:ea typeface="Malgun Gothic"/>
+                <a:cs typeface="Malgun Gothic"/>
+              </a:rPr>
+              <a:t>Prompt 밖의 테스트 지침을 실제 실행에 적용했다</a:t>
+            </a:r>
+          </a:p>
+        </p:txBody>
+      </p:sp>
+      <p:sp>
+        <p:nvSpPr>
+          <p:cNvPr id="28" name="Legacy module connection">
+            <a:extLst xmlns:a="http://schemas.openxmlformats.org/drawingml/2006/main">
+              <a:ext uri="{FF2B5EF4-FFF2-40B4-BE49-F238E27FC236}">
+                <a16:creationId xmlns:a16="http://schemas.microsoft.com/office/drawing/2014/main" id="{33AE68E2-E31E-450E-B8B0-DB80C16E2557}"/>
               </a:ext>
             </a:extLst>
           </p:cNvPr>
@@ -32857,7 +33750,7 @@
     </p:spTree>
     <p:extLst>
       <p:ext uri="{BB962C8B-B14F-4D97-AF65-F5344CB8AC3E}">
-        <p14:creationId xmlns:p14="http://schemas.microsoft.com/office/powerpoint/2010/main" val="944522724"/>
+        <p14:creationId xmlns:p14="http://schemas.microsoft.com/office/powerpoint/2010/main" val="627095646"/>
       </p:ext>
     </p:extLst>
   </p:cSld>
@@ -32888,7 +33781,7 @@
           <p:cNvPr id="21" name="ACT 2 · 정보의 범위와 수명">
             <a:extLst xmlns:a="http://schemas.openxmlformats.org/drawingml/2006/main">
               <a:ext uri="{FF2B5EF4-FFF2-40B4-BE49-F238E27FC236}">
-                <a16:creationId xmlns:a16="http://schemas.microsoft.com/office/drawing/2014/main" id="{370B6AD8-4284-435A-B5F6-C3715655901B}"/>
+                <a16:creationId xmlns:a16="http://schemas.microsoft.com/office/drawing/2014/main" id="{064B24DB-0E24-45A2-9C11-527212E0D4FA}"/>
               </a:ext>
             </a:extLst>
           </p:cNvPr>
@@ -33046,7 +33939,7 @@
           <p:cNvPr id="2" name="S35">
             <a:extLst xmlns:a="http://schemas.openxmlformats.org/drawingml/2006/main">
               <a:ext uri="{FF2B5EF4-FFF2-40B4-BE49-F238E27FC236}">
-                <a16:creationId xmlns:a16="http://schemas.microsoft.com/office/drawing/2014/main" id="{1987D40C-1B99-4171-A85B-FFE135B7CEC9}"/>
+                <a16:creationId xmlns:a16="http://schemas.microsoft.com/office/drawing/2014/main" id="{0460DEF2-C619-4239-88DB-12DCCA911C98}"/>
               </a:ext>
             </a:extLst>
           </p:cNvPr>
@@ -33204,7 +34097,7 @@
           <p:cNvPr id="3" name="Task Prompt와 Project Context">
             <a:extLst xmlns:a="http://schemas.openxmlformats.org/drawingml/2006/main">
               <a:ext uri="{FF2B5EF4-FFF2-40B4-BE49-F238E27FC236}">
-                <a16:creationId xmlns:a16="http://schemas.microsoft.com/office/drawing/2014/main" id="{563A829D-EB0D-4DCA-A5ED-B2A8D621BB25}"/>
+                <a16:creationId xmlns:a16="http://schemas.microsoft.com/office/drawing/2014/main" id="{907C8313-B936-46AE-B97A-FDAF1FC517D6}"/>
               </a:ext>
             </a:extLst>
           </p:cNvPr>
@@ -33362,7 +34255,7 @@
           <p:cNvPr id="4" name="">
             <a:extLst xmlns:a="http://schemas.openxmlformats.org/drawingml/2006/main">
               <a:ext uri="{FF2B5EF4-FFF2-40B4-BE49-F238E27FC236}">
-                <a16:creationId xmlns:a16="http://schemas.microsoft.com/office/drawing/2014/main" id="{F41FF0BF-A9F4-4F2D-A01D-E4861139894B}"/>
+                <a16:creationId xmlns:a16="http://schemas.microsoft.com/office/drawing/2014/main" id="{5BEFC8A3-3C20-4064-932F-E0DB6BEE7639}"/>
               </a:ext>
             </a:extLst>
           </p:cNvPr>
@@ -33393,7 +34286,7 @@
           <p:cNvPr id="5" name="교육용 구분 · 현재 목표와 지속되는 프로젝트 사실">
             <a:extLst xmlns:a="http://schemas.openxmlformats.org/drawingml/2006/main">
               <a:ext uri="{FF2B5EF4-FFF2-40B4-BE49-F238E27FC236}">
-                <a16:creationId xmlns:a16="http://schemas.microsoft.com/office/drawing/2014/main" id="{52C1E52C-62F2-4F4A-B3DB-937F2216B26B}"/>
+                <a16:creationId xmlns:a16="http://schemas.microsoft.com/office/drawing/2014/main" id="{08D56BFD-0E19-4D1F-B8FB-EF1EE50E9DFC}"/>
               </a:ext>
             </a:extLst>
           </p:cNvPr>
@@ -33551,7 +34444,7 @@
           <p:cNvPr id="6" name="C++에서도 프로젝트 공통 제약과 이번 알고리즘 변경 조건은 범위가 다를 수 있다">
             <a:extLst xmlns:a="http://schemas.openxmlformats.org/drawingml/2006/main">
               <a:ext uri="{FF2B5EF4-FFF2-40B4-BE49-F238E27FC236}">
-                <a16:creationId xmlns:a16="http://schemas.microsoft.com/office/drawing/2014/main" id="{18C55F86-C0CC-4921-98E3-6BA282383794}"/>
+                <a16:creationId xmlns:a16="http://schemas.microsoft.com/office/drawing/2014/main" id="{1EBB9E36-B616-4C74-8068-B630FBB6049F}"/>
               </a:ext>
             </a:extLst>
           </p:cNvPr>
@@ -33709,7 +34602,7 @@
           <p:cNvPr id="7" name="방금 본 기록을 범위와 수명으로 읽어보면">
             <a:extLst xmlns:a="http://schemas.openxmlformats.org/drawingml/2006/main">
               <a:ext uri="{FF2B5EF4-FFF2-40B4-BE49-F238E27FC236}">
-                <a16:creationId xmlns:a16="http://schemas.microsoft.com/office/drawing/2014/main" id="{B6E9F95F-D82F-49B6-A492-975C4E65EC7B}"/>
+                <a16:creationId xmlns:a16="http://schemas.microsoft.com/office/drawing/2014/main" id="{1B3C4A8F-BBB6-4BFD-BA7A-9D27BD9FDAF3}"/>
               </a:ext>
             </a:extLst>
           </p:cNvPr>
@@ -33867,7 +34760,7 @@
           <p:cNvPr id="8" name="Task Prompt">
             <a:extLst xmlns:a="http://schemas.openxmlformats.org/drawingml/2006/main">
               <a:ext uri="{FF2B5EF4-FFF2-40B4-BE49-F238E27FC236}">
-                <a16:creationId xmlns:a16="http://schemas.microsoft.com/office/drawing/2014/main" id="{8BE4CCF9-48BA-4890-BEC6-E7683D868BC7}"/>
+                <a16:creationId xmlns:a16="http://schemas.microsoft.com/office/drawing/2014/main" id="{8E7FE595-A6F0-40B7-9B47-140B28EB5B10}"/>
               </a:ext>
             </a:extLst>
           </p:cNvPr>
@@ -34025,7 +34918,7 @@
           <p:cNvPr id="9" name="Project Context">
             <a:extLst xmlns:a="http://schemas.openxmlformats.org/drawingml/2006/main">
               <a:ext uri="{FF2B5EF4-FFF2-40B4-BE49-F238E27FC236}">
-                <a16:creationId xmlns:a16="http://schemas.microsoft.com/office/drawing/2014/main" id="{14CF9B0E-5E24-4470-BA9B-EC05FAA4009E}"/>
+                <a16:creationId xmlns:a16="http://schemas.microsoft.com/office/drawing/2014/main" id="{7E1C41E0-F1C6-46D0-9851-EF8CFCECF488}"/>
               </a:ext>
             </a:extLst>
           </p:cNvPr>
@@ -34183,7 +35076,7 @@
           <p:cNvPr id="10" name="">
             <a:extLst xmlns:a="http://schemas.openxmlformats.org/drawingml/2006/main">
               <a:ext uri="{FF2B5EF4-FFF2-40B4-BE49-F238E27FC236}">
-                <a16:creationId xmlns:a16="http://schemas.microsoft.com/office/drawing/2014/main" id="{AE3C170F-5B7D-4286-904C-7AC2D0C355B2}"/>
+                <a16:creationId xmlns:a16="http://schemas.microsoft.com/office/drawing/2014/main" id="{F9DDE614-4448-41AA-BA11-DC774114DED0}"/>
               </a:ext>
             </a:extLst>
           </p:cNvPr>
@@ -34214,7 +35107,7 @@
           <p:cNvPr id="11" name="">
             <a:extLst xmlns:a="http://schemas.openxmlformats.org/drawingml/2006/main">
               <a:ext uri="{FF2B5EF4-FFF2-40B4-BE49-F238E27FC236}">
-                <a16:creationId xmlns:a16="http://schemas.microsoft.com/office/drawing/2014/main" id="{A6CDF00D-3408-4062-8125-83F79117695C}"/>
+                <a16:creationId xmlns:a16="http://schemas.microsoft.com/office/drawing/2014/main" id="{CFAC97E1-D83D-4AC3-8E02-3EB3DCEFEAEB}"/>
               </a:ext>
             </a:extLst>
           </p:cNvPr>
@@ -34245,7 +35138,7 @@
           <p:cNvPr id="12" name="지금 원하는 결과">
             <a:extLst xmlns:a="http://schemas.openxmlformats.org/drawingml/2006/main">
               <a:ext uri="{FF2B5EF4-FFF2-40B4-BE49-F238E27FC236}">
-                <a16:creationId xmlns:a16="http://schemas.microsoft.com/office/drawing/2014/main" id="{EBCDD3D8-3B4C-4B07-8528-028B7AEBFFEB}"/>
+                <a16:creationId xmlns:a16="http://schemas.microsoft.com/office/drawing/2014/main" id="{454B30D7-5EE1-483A-8BC9-56C11620DF81}"/>
               </a:ext>
             </a:extLst>
           </p:cNvPr>
@@ -34403,7 +35296,7 @@
           <p:cNvPr id="13" name="계속 참이어야 할 사실">
             <a:extLst xmlns:a="http://schemas.openxmlformats.org/drawingml/2006/main">
               <a:ext uri="{FF2B5EF4-FFF2-40B4-BE49-F238E27FC236}">
-                <a16:creationId xmlns:a16="http://schemas.microsoft.com/office/drawing/2014/main" id="{06C88E4F-212B-4ABA-A683-73EF6958A223}"/>
+                <a16:creationId xmlns:a16="http://schemas.microsoft.com/office/drawing/2014/main" id="{B77CEF2F-53A1-47BE-9AAE-580A13ED64AE}"/>
               </a:ext>
             </a:extLst>
           </p:cNvPr>
@@ -34561,7 +35454,7 @@
           <p:cNvPr id="14" name="crop 경계 버그 수정&#10;이번에는 README만 변경">
             <a:extLst xmlns:a="http://schemas.openxmlformats.org/drawingml/2006/main">
               <a:ext uri="{FF2B5EF4-FFF2-40B4-BE49-F238E27FC236}">
-                <a16:creationId xmlns:a16="http://schemas.microsoft.com/office/drawing/2014/main" id="{FF25CD2C-F479-4546-BB83-649BC88E31B5}"/>
+                <a16:creationId xmlns:a16="http://schemas.microsoft.com/office/drawing/2014/main" id="{4CA90FAB-707E-4860-967F-D671BD50E15E}"/>
               </a:ext>
             </a:extLst>
           </p:cNvPr>
@@ -34742,7 +35635,7 @@
           <p:cNvPr id="15" name="프로젝트의 테스트 명령&#10;의존성 추가에는 작업상 근거 필요">
             <a:extLst xmlns:a="http://schemas.openxmlformats.org/drawingml/2006/main">
               <a:ext uri="{FF2B5EF4-FFF2-40B4-BE49-F238E27FC236}">
-                <a16:creationId xmlns:a16="http://schemas.microsoft.com/office/drawing/2014/main" id="{5A7AB845-4151-4B07-9F8F-F427F7F9472B}"/>
+                <a16:creationId xmlns:a16="http://schemas.microsoft.com/office/drawing/2014/main" id="{4F14577E-DC14-4DA3-A94C-E651E7972060}"/>
               </a:ext>
             </a:extLst>
           </p:cNvPr>
@@ -34923,7 +35816,7 @@
           <p:cNvPr id="16" name="">
             <a:extLst xmlns:a="http://schemas.openxmlformats.org/drawingml/2006/main">
               <a:ext uri="{FF2B5EF4-FFF2-40B4-BE49-F238E27FC236}">
-                <a16:creationId xmlns:a16="http://schemas.microsoft.com/office/drawing/2014/main" id="{FD4A8570-3FC8-4941-A410-BA558CAA0CEE}"/>
+                <a16:creationId xmlns:a16="http://schemas.microsoft.com/office/drawing/2014/main" id="{769C3EC7-34C1-4838-86E5-9157BBB93FDD}"/>
               </a:ext>
             </a:extLst>
           </p:cNvPr>
@@ -34956,7 +35849,7 @@
           <p:cNvPr id="17" name="">
             <a:extLst xmlns:a="http://schemas.openxmlformats.org/drawingml/2006/main">
               <a:ext uri="{FF2B5EF4-FFF2-40B4-BE49-F238E27FC236}">
-                <a16:creationId xmlns:a16="http://schemas.microsoft.com/office/drawing/2014/main" id="{6F44B0CF-D6DC-4F49-AF49-3A7FF92FC9EF}"/>
+                <a16:creationId xmlns:a16="http://schemas.microsoft.com/office/drawing/2014/main" id="{3910D542-5184-450B-B957-CC8C313858A3}"/>
               </a:ext>
             </a:extLst>
           </p:cNvPr>
@@ -34987,7 +35880,7 @@
           <p:cNvPr id="18" name="다음 작업에서는 목표가 달라짐">
             <a:extLst xmlns:a="http://schemas.openxmlformats.org/drawingml/2006/main">
               <a:ext uri="{FF2B5EF4-FFF2-40B4-BE49-F238E27FC236}">
-                <a16:creationId xmlns:a16="http://schemas.microsoft.com/office/drawing/2014/main" id="{761C29BC-F507-41BF-BAD1-860DB126DC51}"/>
+                <a16:creationId xmlns:a16="http://schemas.microsoft.com/office/drawing/2014/main" id="{5DBC62E0-3F2E-4793-AB3C-C64514B53077}"/>
               </a:ext>
             </a:extLst>
           </p:cNvPr>
@@ -35145,7 +36038,7 @@
           <p:cNvPr id="19" name="여러 작업에서 다시 참고">
             <a:extLst xmlns:a="http://schemas.openxmlformats.org/drawingml/2006/main">
               <a:ext uri="{FF2B5EF4-FFF2-40B4-BE49-F238E27FC236}">
-                <a16:creationId xmlns:a16="http://schemas.microsoft.com/office/drawing/2014/main" id="{CE672148-7298-41C9-BFC6-02810DBB3A4A}"/>
+                <a16:creationId xmlns:a16="http://schemas.microsoft.com/office/drawing/2014/main" id="{03AED6D8-06FD-4F87-B959-D53E00B1D08B}"/>
               </a:ext>
             </a:extLst>
           </p:cNvPr>
@@ -35303,7 +36196,7 @@
           <p:cNvPr id="20" name="Legacy module connection">
             <a:extLst xmlns:a="http://schemas.openxmlformats.org/drawingml/2006/main">
               <a:ext uri="{FF2B5EF4-FFF2-40B4-BE49-F238E27FC236}">
-                <a16:creationId xmlns:a16="http://schemas.microsoft.com/office/drawing/2014/main" id="{11E4B9DE-2B5E-48EE-B2B6-E2F2734B59B2}"/>
+                <a16:creationId xmlns:a16="http://schemas.microsoft.com/office/drawing/2014/main" id="{EC68D939-F63A-4253-83FF-B1192F154217}"/>
               </a:ext>
             </a:extLst>
           </p:cNvPr>
@@ -35459,7 +36352,7 @@
     </p:spTree>
     <p:extLst>
       <p:ext uri="{BB962C8B-B14F-4D97-AF65-F5344CB8AC3E}">
-        <p14:creationId xmlns:p14="http://schemas.microsoft.com/office/powerpoint/2010/main" val="403419196"/>
+        <p14:creationId xmlns:p14="http://schemas.microsoft.com/office/powerpoint/2010/main" val="415892411"/>
       </p:ext>
     </p:extLst>
   </p:cSld>
@@ -35490,7 +36383,7 @@
           <p:cNvPr id="27" name="ACT 2 · Context가 쌓이는 과정">
             <a:extLst xmlns:a="http://schemas.openxmlformats.org/drawingml/2006/main">
               <a:ext uri="{FF2B5EF4-FFF2-40B4-BE49-F238E27FC236}">
-                <a16:creationId xmlns:a16="http://schemas.microsoft.com/office/drawing/2014/main" id="{9797694B-8A08-40AE-849E-396528ECF71A}"/>
+                <a16:creationId xmlns:a16="http://schemas.microsoft.com/office/drawing/2014/main" id="{C7ECA2FD-0C8C-4BF4-B15C-C11CFC343C7D}"/>
               </a:ext>
             </a:extLst>
           </p:cNvPr>
@@ -35648,7 +36541,7 @@
           <p:cNvPr id="2" name="S36">
             <a:extLst xmlns:a="http://schemas.openxmlformats.org/drawingml/2006/main">
               <a:ext uri="{FF2B5EF4-FFF2-40B4-BE49-F238E27FC236}">
-                <a16:creationId xmlns:a16="http://schemas.microsoft.com/office/drawing/2014/main" id="{8FCF5E9A-7AA8-4901-B0FB-D67195BA8282}"/>
+                <a16:creationId xmlns:a16="http://schemas.microsoft.com/office/drawing/2014/main" id="{D82A908A-7A72-49F5-8A03-325CC16F0CBF}"/>
               </a:ext>
             </a:extLst>
           </p:cNvPr>
@@ -35806,7 +36699,7 @@
           <p:cNvPr id="3" name="정확한 정보도 계속 늘어난다">
             <a:extLst xmlns:a="http://schemas.openxmlformats.org/drawingml/2006/main">
               <a:ext uri="{FF2B5EF4-FFF2-40B4-BE49-F238E27FC236}">
-                <a16:creationId xmlns:a16="http://schemas.microsoft.com/office/drawing/2014/main" id="{10B4D636-6D0C-42A0-B489-DB271BA32441}"/>
+                <a16:creationId xmlns:a16="http://schemas.microsoft.com/office/drawing/2014/main" id="{C4338357-496D-4C83-9446-C5E154E2A1A7}"/>
               </a:ext>
             </a:extLst>
           </p:cNvPr>
@@ -35964,7 +36857,7 @@
           <p:cNvPr id="4" name="">
             <a:extLst xmlns:a="http://schemas.openxmlformats.org/drawingml/2006/main">
               <a:ext uri="{FF2B5EF4-FFF2-40B4-BE49-F238E27FC236}">
-                <a16:creationId xmlns:a16="http://schemas.microsoft.com/office/drawing/2014/main" id="{2AFDF035-0CF5-4F6F-BF52-3495CB9CE764}"/>
+                <a16:creationId xmlns:a16="http://schemas.microsoft.com/office/drawing/2014/main" id="{28DB0C7D-3967-4803-830A-484F5215233E}"/>
               </a:ext>
             </a:extLst>
           </p:cNvPr>
@@ -35995,7 +36888,7 @@
           <p:cNvPr id="5" name="STATE-01 → STATE-02 · 실제 AGENTS.md 상태 비교">
             <a:extLst xmlns:a="http://schemas.openxmlformats.org/drawingml/2006/main">
               <a:ext uri="{FF2B5EF4-FFF2-40B4-BE49-F238E27FC236}">
-                <a16:creationId xmlns:a16="http://schemas.microsoft.com/office/drawing/2014/main" id="{C0A0EF01-CF78-4889-8C98-2E8BA4105BBA}"/>
+                <a16:creationId xmlns:a16="http://schemas.microsoft.com/office/drawing/2014/main" id="{5591743B-DD9C-4417-B5A5-30A543DB9EA8}"/>
               </a:ext>
             </a:extLst>
           </p:cNvPr>
@@ -36153,7 +37046,7 @@
           <p:cNvPr id="6" name="문서 크기는 상태 식별 정보 · Context 증가가 실패를 일으켰다는 근거는 아님">
             <a:extLst xmlns:a="http://schemas.openxmlformats.org/drawingml/2006/main">
               <a:ext uri="{FF2B5EF4-FFF2-40B4-BE49-F238E27FC236}">
-                <a16:creationId xmlns:a16="http://schemas.microsoft.com/office/drawing/2014/main" id="{7A709BFA-76DF-46CB-A45E-B328E114495F}"/>
+                <a16:creationId xmlns:a16="http://schemas.microsoft.com/office/drawing/2014/main" id="{7D72EA76-728F-4521-B779-3D8FB598E2DC}"/>
               </a:ext>
             </a:extLst>
           </p:cNvPr>
@@ -36311,7 +37204,7 @@
           <p:cNvPr id="7" name="STATE-01">
             <a:extLst xmlns:a="http://schemas.openxmlformats.org/drawingml/2006/main">
               <a:ext uri="{FF2B5EF4-FFF2-40B4-BE49-F238E27FC236}">
-                <a16:creationId xmlns:a16="http://schemas.microsoft.com/office/drawing/2014/main" id="{19134183-A001-401D-A5B0-F29E08BB27B4}"/>
+                <a16:creationId xmlns:a16="http://schemas.microsoft.com/office/drawing/2014/main" id="{2B92228C-FC98-4220-A090-4A6461B1EE57}"/>
               </a:ext>
             </a:extLst>
           </p:cNvPr>
@@ -36469,7 +37362,7 @@
           <p:cNvPr id="8" name="목적 · 실행 · 테스트&#10;기본 제약">
             <a:extLst xmlns:a="http://schemas.openxmlformats.org/drawingml/2006/main">
               <a:ext uri="{FF2B5EF4-FFF2-40B4-BE49-F238E27FC236}">
-                <a16:creationId xmlns:a16="http://schemas.microsoft.com/office/drawing/2014/main" id="{F15A2634-B628-42F1-A4D8-EF6414E21406}"/>
+                <a16:creationId xmlns:a16="http://schemas.microsoft.com/office/drawing/2014/main" id="{A734A9CB-FD5B-44FA-B210-C8690F273901}"/>
               </a:ext>
             </a:extLst>
           </p:cNvPr>
@@ -36650,7 +37543,7 @@
           <p:cNvPr id="9" name="15줄 · 567 bytes">
             <a:extLst xmlns:a="http://schemas.openxmlformats.org/drawingml/2006/main">
               <a:ext uri="{FF2B5EF4-FFF2-40B4-BE49-F238E27FC236}">
-                <a16:creationId xmlns:a16="http://schemas.microsoft.com/office/drawing/2014/main" id="{5796BAC6-0B43-44EA-BD3B-E2DB50B4A12E}"/>
+                <a16:creationId xmlns:a16="http://schemas.microsoft.com/office/drawing/2014/main" id="{C9D96C0E-0C83-4A15-8B4A-8E6E29CA3AE3}"/>
               </a:ext>
             </a:extLst>
           </p:cNvPr>
@@ -36808,7 +37701,7 @@
           <p:cNvPr id="10" name="">
             <a:extLst xmlns:a="http://schemas.openxmlformats.org/drawingml/2006/main">
               <a:ext uri="{FF2B5EF4-FFF2-40B4-BE49-F238E27FC236}">
-                <a16:creationId xmlns:a16="http://schemas.microsoft.com/office/drawing/2014/main" id="{D9F50817-64C3-492C-9FC1-E747221579BB}"/>
+                <a16:creationId xmlns:a16="http://schemas.microsoft.com/office/drawing/2014/main" id="{13696680-B1FB-462A-81F0-0C8787D976F1}"/>
               </a:ext>
             </a:extLst>
           </p:cNvPr>
@@ -36838,7 +37731,7 @@
           <p:cNvPr id="11" name="STATE-02에 추가된 실제 정보">
             <a:extLst xmlns:a="http://schemas.openxmlformats.org/drawingml/2006/main">
               <a:ext uri="{FF2B5EF4-FFF2-40B4-BE49-F238E27FC236}">
-                <a16:creationId xmlns:a16="http://schemas.microsoft.com/office/drawing/2014/main" id="{B634FDF9-DB55-467A-8EED-8A95733097E4}"/>
+                <a16:creationId xmlns:a16="http://schemas.microsoft.com/office/drawing/2014/main" id="{0785D638-3E17-470F-A361-D9DBC0B2827A}"/>
               </a:ext>
             </a:extLst>
           </p:cNvPr>
@@ -36996,7 +37889,7 @@
           <p:cNvPr id="12" name="">
             <a:extLst xmlns:a="http://schemas.openxmlformats.org/drawingml/2006/main">
               <a:ext uri="{FF2B5EF4-FFF2-40B4-BE49-F238E27FC236}">
-                <a16:creationId xmlns:a16="http://schemas.microsoft.com/office/drawing/2014/main" id="{ADD5C464-950D-4644-B31F-F49F7F0AF713}"/>
+                <a16:creationId xmlns:a16="http://schemas.microsoft.com/office/drawing/2014/main" id="{38482859-2248-4ED8-A879-2C21A8F829D1}"/>
               </a:ext>
             </a:extLst>
           </p:cNvPr>
@@ -37027,7 +37920,7 @@
           <p:cNvPr id="13" name="처리 순서">
             <a:extLst xmlns:a="http://schemas.openxmlformats.org/drawingml/2006/main">
               <a:ext uri="{FF2B5EF4-FFF2-40B4-BE49-F238E27FC236}">
-                <a16:creationId xmlns:a16="http://schemas.microsoft.com/office/drawing/2014/main" id="{C061B364-8F27-49ED-8CF4-E67B6614DFE9}"/>
+                <a16:creationId xmlns:a16="http://schemas.microsoft.com/office/drawing/2014/main" id="{D937A920-C58B-43D2-82FE-36FCEF965C00}"/>
               </a:ext>
             </a:extLst>
           </p:cNvPr>
@@ -37185,7 +38078,7 @@
           <p:cNvPr id="14" name="load → normalize → … → write">
             <a:extLst xmlns:a="http://schemas.openxmlformats.org/drawingml/2006/main">
               <a:ext uri="{FF2B5EF4-FFF2-40B4-BE49-F238E27FC236}">
-                <a16:creationId xmlns:a16="http://schemas.microsoft.com/office/drawing/2014/main" id="{F296361A-65C0-40F1-A3A3-13271DD32B38}"/>
+                <a16:creationId xmlns:a16="http://schemas.microsoft.com/office/drawing/2014/main" id="{72F606B8-9D96-46DE-9D0C-689ED3305061}"/>
               </a:ext>
             </a:extLst>
           </p:cNvPr>
@@ -37343,7 +38236,7 @@
           <p:cNvPr id="15" name="">
             <a:extLst xmlns:a="http://schemas.openxmlformats.org/drawingml/2006/main">
               <a:ext uri="{FF2B5EF4-FFF2-40B4-BE49-F238E27FC236}">
-                <a16:creationId xmlns:a16="http://schemas.microsoft.com/office/drawing/2014/main" id="{F9F8C748-4796-4159-8D4A-49D3293270F1}"/>
+                <a16:creationId xmlns:a16="http://schemas.microsoft.com/office/drawing/2014/main" id="{C0AE5539-B216-4F86-8D05-42BE749DAAEE}"/>
               </a:ext>
             </a:extLst>
           </p:cNvPr>
@@ -37374,7 +38267,7 @@
           <p:cNvPr id="16" name="이미지 계약">
             <a:extLst xmlns:a="http://schemas.openxmlformats.org/drawingml/2006/main">
               <a:ext uri="{FF2B5EF4-FFF2-40B4-BE49-F238E27FC236}">
-                <a16:creationId xmlns:a16="http://schemas.microsoft.com/office/drawing/2014/main" id="{EC9D0D28-E0D9-4AAA-B8CC-90F64510C268}"/>
+                <a16:creationId xmlns:a16="http://schemas.microsoft.com/office/drawing/2014/main" id="{77BEA0B0-0DE4-4522-A21F-3F4F207661A1}"/>
               </a:ext>
             </a:extLst>
           </p:cNvPr>
@@ -37532,7 +38425,7 @@
           <p:cNvPr id="17" name="crop: [x_start, x_end)">
             <a:extLst xmlns:a="http://schemas.openxmlformats.org/drawingml/2006/main">
               <a:ext uri="{FF2B5EF4-FFF2-40B4-BE49-F238E27FC236}">
-                <a16:creationId xmlns:a16="http://schemas.microsoft.com/office/drawing/2014/main" id="{A0DEF1BF-089E-4D51-BA47-DD1CECE2D53F}"/>
+                <a16:creationId xmlns:a16="http://schemas.microsoft.com/office/drawing/2014/main" id="{BF40D6B5-2C0F-43B5-A48C-2A86902703D6}"/>
               </a:ext>
             </a:extLst>
           </p:cNvPr>
@@ -37690,7 +38583,7 @@
           <p:cNvPr id="18" name="">
             <a:extLst xmlns:a="http://schemas.openxmlformats.org/drawingml/2006/main">
               <a:ext uri="{FF2B5EF4-FFF2-40B4-BE49-F238E27FC236}">
-                <a16:creationId xmlns:a16="http://schemas.microsoft.com/office/drawing/2014/main" id="{98623167-80A1-4DC2-AB94-7F7041F88B50}"/>
+                <a16:creationId xmlns:a16="http://schemas.microsoft.com/office/drawing/2014/main" id="{BFFC6BFF-4D56-4FB3-9177-0889E98EA095}"/>
               </a:ext>
             </a:extLst>
           </p:cNvPr>
@@ -37721,7 +38614,7 @@
           <p:cNvPr id="19" name="테스트 구조">
             <a:extLst xmlns:a="http://schemas.openxmlformats.org/drawingml/2006/main">
               <a:ext uri="{FF2B5EF4-FFF2-40B4-BE49-F238E27FC236}">
-                <a16:creationId xmlns:a16="http://schemas.microsoft.com/office/drawing/2014/main" id="{989414E1-3703-4B79-A9C8-34A86320E68A}"/>
+                <a16:creationId xmlns:a16="http://schemas.microsoft.com/office/drawing/2014/main" id="{465CD36F-EC1B-46CE-9FC8-7493E88426A9}"/>
               </a:ext>
             </a:extLst>
           </p:cNvPr>
@@ -37879,7 +38772,7 @@
           <p:cNvPr id="20" name="tests/test_pipeline.py">
             <a:extLst xmlns:a="http://schemas.openxmlformats.org/drawingml/2006/main">
               <a:ext uri="{FF2B5EF4-FFF2-40B4-BE49-F238E27FC236}">
-                <a16:creationId xmlns:a16="http://schemas.microsoft.com/office/drawing/2014/main" id="{C9B5D153-CC6D-4693-AFAC-4BE49FD9A1CD}"/>
+                <a16:creationId xmlns:a16="http://schemas.microsoft.com/office/drawing/2014/main" id="{DFE5291E-378F-48A1-9F39-A7D7BBD99B3F}"/>
               </a:ext>
             </a:extLst>
           </p:cNvPr>
@@ -38037,7 +38930,7 @@
           <p:cNvPr id="21" name="">
             <a:extLst xmlns:a="http://schemas.openxmlformats.org/drawingml/2006/main">
               <a:ext uri="{FF2B5EF4-FFF2-40B4-BE49-F238E27FC236}">
-                <a16:creationId xmlns:a16="http://schemas.microsoft.com/office/drawing/2014/main" id="{0D26240C-AAE1-46D3-BA91-381D6D19226A}"/>
+                <a16:creationId xmlns:a16="http://schemas.microsoft.com/office/drawing/2014/main" id="{E3BCB735-BE30-457D-8081-59B148CE90DE}"/>
               </a:ext>
             </a:extLst>
           </p:cNvPr>
@@ -38068,7 +38961,7 @@
           <p:cNvPr id="22" name="CLI 출력">
             <a:extLst xmlns:a="http://schemas.openxmlformats.org/drawingml/2006/main">
               <a:ext uri="{FF2B5EF4-FFF2-40B4-BE49-F238E27FC236}">
-                <a16:creationId xmlns:a16="http://schemas.microsoft.com/office/drawing/2014/main" id="{272C7178-A64D-46B2-9DAA-27466912491D}"/>
+                <a16:creationId xmlns:a16="http://schemas.microsoft.com/office/drawing/2014/main" id="{591A48D0-E4C5-4694-87F0-4C4492BEE374}"/>
               </a:ext>
             </a:extLst>
           </p:cNvPr>
@@ -38226,7 +39119,7 @@
           <p:cNvPr id="23" name="width · height · pixel_count …">
             <a:extLst xmlns:a="http://schemas.openxmlformats.org/drawingml/2006/main">
               <a:ext uri="{FF2B5EF4-FFF2-40B4-BE49-F238E27FC236}">
-                <a16:creationId xmlns:a16="http://schemas.microsoft.com/office/drawing/2014/main" id="{613E6E63-64BB-4034-B3DB-52521786B326}"/>
+                <a16:creationId xmlns:a16="http://schemas.microsoft.com/office/drawing/2014/main" id="{7D62F280-C254-4C36-B2C7-74C530A6CED6}"/>
               </a:ext>
             </a:extLst>
           </p:cNvPr>
@@ -38384,7 +39277,7 @@
           <p:cNvPr id="24" name="32줄 · 1,303 bytes">
             <a:extLst xmlns:a="http://schemas.openxmlformats.org/drawingml/2006/main">
               <a:ext uri="{FF2B5EF4-FFF2-40B4-BE49-F238E27FC236}">
-                <a16:creationId xmlns:a16="http://schemas.microsoft.com/office/drawing/2014/main" id="{D438F208-4CBB-4F30-BA17-DAEBDC03ECE8}"/>
+                <a16:creationId xmlns:a16="http://schemas.microsoft.com/office/drawing/2014/main" id="{C5F5EE6C-1885-4457-894A-3ACBE53C9A6C}"/>
               </a:ext>
             </a:extLst>
           </p:cNvPr>
@@ -38542,7 +39435,7 @@
           <p:cNvPr id="25" name="이번 Task에도 필요할까?">
             <a:extLst xmlns:a="http://schemas.openxmlformats.org/drawingml/2006/main">
               <a:ext uri="{FF2B5EF4-FFF2-40B4-BE49-F238E27FC236}">
-                <a16:creationId xmlns:a16="http://schemas.microsoft.com/office/drawing/2014/main" id="{C547E1FF-A929-4575-95EA-E2F55EF32470}"/>
+                <a16:creationId xmlns:a16="http://schemas.microsoft.com/office/drawing/2014/main" id="{4B931394-46D9-4393-BC42-95DA063C48CF}"/>
               </a:ext>
             </a:extLst>
           </p:cNvPr>
@@ -38700,7 +39593,7 @@
           <p:cNvPr id="26" name="Legacy module connection">
             <a:extLst xmlns:a="http://schemas.openxmlformats.org/drawingml/2006/main">
               <a:ext uri="{FF2B5EF4-FFF2-40B4-BE49-F238E27FC236}">
-                <a16:creationId xmlns:a16="http://schemas.microsoft.com/office/drawing/2014/main" id="{50721512-6B70-4529-BC54-C666AFC726E5}"/>
+                <a16:creationId xmlns:a16="http://schemas.microsoft.com/office/drawing/2014/main" id="{CB5AC529-2A4E-40C2-9DF0-7291AEA5C47E}"/>
               </a:ext>
             </a:extLst>
           </p:cNvPr>
@@ -38856,7 +39749,7 @@
     </p:spTree>
     <p:extLst>
       <p:ext uri="{BB962C8B-B14F-4D97-AF65-F5344CB8AC3E}">
-        <p14:creationId xmlns:p14="http://schemas.microsoft.com/office/powerpoint/2010/main" val="533264254"/>
+        <p14:creationId xmlns:p14="http://schemas.microsoft.com/office/powerpoint/2010/main" val="1815039138"/>
       </p:ext>
     </p:extLst>
   </p:cSld>
@@ -38887,7 +39780,7 @@
           <p:cNvPr id="17" name="ACT 2 · 관련성을 확인하기">
             <a:extLst xmlns:a="http://schemas.openxmlformats.org/drawingml/2006/main">
               <a:ext uri="{FF2B5EF4-FFF2-40B4-BE49-F238E27FC236}">
-                <a16:creationId xmlns:a16="http://schemas.microsoft.com/office/drawing/2014/main" id="{586BCBB9-F055-49CF-BC2B-7714102BEE6D}"/>
+                <a16:creationId xmlns:a16="http://schemas.microsoft.com/office/drawing/2014/main" id="{85BF020B-4AEC-4E22-8059-8B0433665E8C}"/>
               </a:ext>
             </a:extLst>
           </p:cNvPr>
@@ -39045,7 +39938,7 @@
           <p:cNvPr id="2" name="S37">
             <a:extLst xmlns:a="http://schemas.openxmlformats.org/drawingml/2006/main">
               <a:ext uri="{FF2B5EF4-FFF2-40B4-BE49-F238E27FC236}">
-                <a16:creationId xmlns:a16="http://schemas.microsoft.com/office/drawing/2014/main" id="{D50AB93F-48AA-46EB-A4F6-D7F5E573A08E}"/>
+                <a16:creationId xmlns:a16="http://schemas.microsoft.com/office/drawing/2014/main" id="{06D44983-AF8E-4B8F-AFF4-2F293CB8FA4B}"/>
               </a:ext>
             </a:extLst>
           </p:cNvPr>
@@ -39203,7 +40096,7 @@
           <p:cNvPr id="3" name="정확하지만 이번 Task에는 불필요한 정보">
             <a:extLst xmlns:a="http://schemas.openxmlformats.org/drawingml/2006/main">
               <a:ext uri="{FF2B5EF4-FFF2-40B4-BE49-F238E27FC236}">
-                <a16:creationId xmlns:a16="http://schemas.microsoft.com/office/drawing/2014/main" id="{1BB52CA4-936C-4BF9-A77B-8C416EEFA287}"/>
+                <a16:creationId xmlns:a16="http://schemas.microsoft.com/office/drawing/2014/main" id="{B49E6C21-71ED-4284-A96C-C4AEE63B9424}"/>
               </a:ext>
             </a:extLst>
           </p:cNvPr>
@@ -39361,7 +40254,7 @@
           <p:cNvPr id="4" name="">
             <a:extLst xmlns:a="http://schemas.openxmlformats.org/drawingml/2006/main">
               <a:ext uri="{FF2B5EF4-FFF2-40B4-BE49-F238E27FC236}">
-                <a16:creationId xmlns:a16="http://schemas.microsoft.com/office/drawing/2014/main" id="{CB2A9ADC-91E4-4ADF-94BF-212925164717}"/>
+                <a16:creationId xmlns:a16="http://schemas.microsoft.com/office/drawing/2014/main" id="{2776CC55-5C14-4635-AD41-840E0F7C9978}"/>
               </a:ext>
             </a:extLst>
           </p:cNvPr>
@@ -39392,7 +40285,7 @@
           <p:cNvPr id="5" name="TRIAL-004 · README의 build tools 안내를 명확히 하는 작업">
             <a:extLst xmlns:a="http://schemas.openxmlformats.org/drawingml/2006/main">
               <a:ext uri="{FF2B5EF4-FFF2-40B4-BE49-F238E27FC236}">
-                <a16:creationId xmlns:a16="http://schemas.microsoft.com/office/drawing/2014/main" id="{D72D5240-A136-4922-A6FE-CD608A0BE751}"/>
+                <a16:creationId xmlns:a16="http://schemas.microsoft.com/office/drawing/2014/main" id="{05E5D316-8719-423B-8083-B0DAF7163E78}"/>
               </a:ext>
             </a:extLst>
           </p:cNvPr>
@@ -39550,7 +40443,7 @@
           <p:cNvPr id="6" name="Agent 혼란과 Context 관련 실패는 관찰되지 않았다">
             <a:extLst xmlns:a="http://schemas.openxmlformats.org/drawingml/2006/main">
               <a:ext uri="{FF2B5EF4-FFF2-40B4-BE49-F238E27FC236}">
-                <a16:creationId xmlns:a16="http://schemas.microsoft.com/office/drawing/2014/main" id="{340B20E4-BF28-4E1B-8E2A-9E781BD49F60}"/>
+                <a16:creationId xmlns:a16="http://schemas.microsoft.com/office/drawing/2014/main" id="{B48927F9-D39E-4B4E-B517-8C04160A4276}"/>
               </a:ext>
             </a:extLst>
           </p:cNvPr>
@@ -39708,7 +40601,7 @@
           <p:cNvPr id="7" name="작업: README의 빌드 도구 안내를 고친다">
             <a:extLst xmlns:a="http://schemas.openxmlformats.org/drawingml/2006/main">
               <a:ext uri="{FF2B5EF4-FFF2-40B4-BE49-F238E27FC236}">
-                <a16:creationId xmlns:a16="http://schemas.microsoft.com/office/drawing/2014/main" id="{C9A74AC1-9A0C-46D6-BFEA-A101A9C1E2A5}"/>
+                <a16:creationId xmlns:a16="http://schemas.microsoft.com/office/drawing/2014/main" id="{3AFDE055-96A6-47E0-9AD5-03F25A3ACD98}"/>
               </a:ext>
             </a:extLst>
           </p:cNvPr>
@@ -39866,7 +40759,7 @@
           <p:cNvPr id="8" name="이번 질문과 직접 관련">
             <a:extLst xmlns:a="http://schemas.openxmlformats.org/drawingml/2006/main">
               <a:ext uri="{FF2B5EF4-FFF2-40B4-BE49-F238E27FC236}">
-                <a16:creationId xmlns:a16="http://schemas.microsoft.com/office/drawing/2014/main" id="{FA9F3C03-67FA-465C-B8BA-9A7EB21B7128}"/>
+                <a16:creationId xmlns:a16="http://schemas.microsoft.com/office/drawing/2014/main" id="{7ACFFB66-C0ED-4530-9302-D45AA056C732}"/>
               </a:ext>
             </a:extLst>
           </p:cNvPr>
@@ -40024,7 +40917,7 @@
           <p:cNvPr id="9" name="함께 있었지만 관련이 낮은 정보">
             <a:extLst xmlns:a="http://schemas.openxmlformats.org/drawingml/2006/main">
               <a:ext uri="{FF2B5EF4-FFF2-40B4-BE49-F238E27FC236}">
-                <a16:creationId xmlns:a16="http://schemas.microsoft.com/office/drawing/2014/main" id="{88A0C49D-816A-4CDA-B2E6-84A00A8BDF57}"/>
+                <a16:creationId xmlns:a16="http://schemas.microsoft.com/office/drawing/2014/main" id="{2BFFA7C7-E716-4437-A8CF-B6BB2BB2BD7F}"/>
               </a:ext>
             </a:extLst>
           </p:cNvPr>
@@ -40182,7 +41075,7 @@
           <p:cNvPr id="10" name="">
             <a:extLst xmlns:a="http://schemas.openxmlformats.org/drawingml/2006/main">
               <a:ext uri="{FF2B5EF4-FFF2-40B4-BE49-F238E27FC236}">
-                <a16:creationId xmlns:a16="http://schemas.microsoft.com/office/drawing/2014/main" id="{2FBB20E5-33FE-4F3D-9FDD-CC88E74B8A1F}"/>
+                <a16:creationId xmlns:a16="http://schemas.microsoft.com/office/drawing/2014/main" id="{C22A2A44-1F27-450D-A4FF-4D62AA523994}"/>
               </a:ext>
             </a:extLst>
           </p:cNvPr>
@@ -40213,7 +41106,7 @@
           <p:cNvPr id="11" name="">
             <a:extLst xmlns:a="http://schemas.openxmlformats.org/drawingml/2006/main">
               <a:ext uri="{FF2B5EF4-FFF2-40B4-BE49-F238E27FC236}">
-                <a16:creationId xmlns:a16="http://schemas.microsoft.com/office/drawing/2014/main" id="{DDFAE7F2-22F3-44D9-AA53-B404F860CD88}"/>
+                <a16:creationId xmlns:a16="http://schemas.microsoft.com/office/drawing/2014/main" id="{A49F9FAB-2C50-45C2-A7FA-35D8B3937D5A}"/>
               </a:ext>
             </a:extLst>
           </p:cNvPr>
@@ -40244,7 +41137,7 @@
           <p:cNvPr id="12" name="">
             <a:extLst xmlns:a="http://schemas.openxmlformats.org/drawingml/2006/main">
               <a:ext uri="{FF2B5EF4-FFF2-40B4-BE49-F238E27FC236}">
-                <a16:creationId xmlns:a16="http://schemas.microsoft.com/office/drawing/2014/main" id="{AC37F22B-86D0-4C1B-860F-8FD440DCDCD0}"/>
+                <a16:creationId xmlns:a16="http://schemas.microsoft.com/office/drawing/2014/main" id="{584E3517-A902-4099-B553-A8C66350815B}"/>
               </a:ext>
             </a:extLst>
           </p:cNvPr>
@@ -40275,7 +41168,7 @@
           <p:cNvPr id="13" name="README&#10;pyproject.toml의 빌드 설정">
             <a:extLst xmlns:a="http://schemas.openxmlformats.org/drawingml/2006/main">
               <a:ext uri="{FF2B5EF4-FFF2-40B4-BE49-F238E27FC236}">
-                <a16:creationId xmlns:a16="http://schemas.microsoft.com/office/drawing/2014/main" id="{F3D80731-AFAE-4080-B3CC-7EB6F8118C65}"/>
+                <a16:creationId xmlns:a16="http://schemas.microsoft.com/office/drawing/2014/main" id="{96DC7E42-21F7-4EB0-98D8-C7C35869C851}"/>
               </a:ext>
             </a:extLst>
           </p:cNvPr>
@@ -40456,7 +41349,7 @@
           <p:cNvPr id="14" name="crop / resize 계약&#10;이미지 처리 pipeline 세부사항">
             <a:extLst xmlns:a="http://schemas.openxmlformats.org/drawingml/2006/main">
               <a:ext uri="{FF2B5EF4-FFF2-40B4-BE49-F238E27FC236}">
-                <a16:creationId xmlns:a16="http://schemas.microsoft.com/office/drawing/2014/main" id="{14BF5DCA-001D-41B1-88F6-9D41F786C71E}"/>
+                <a16:creationId xmlns:a16="http://schemas.microsoft.com/office/drawing/2014/main" id="{B49178CD-24E5-4B87-9D5E-C3D0D4CA7AFB}"/>
               </a:ext>
             </a:extLst>
           </p:cNvPr>
@@ -40637,7 +41530,7 @@
           <p:cNvPr id="15" name="정확한 정보라도, 모든 질문에 필요한 것은 아니다">
             <a:extLst xmlns:a="http://schemas.openxmlformats.org/drawingml/2006/main">
               <a:ext uri="{FF2B5EF4-FFF2-40B4-BE49-F238E27FC236}">
-                <a16:creationId xmlns:a16="http://schemas.microsoft.com/office/drawing/2014/main" id="{E25AE782-E782-448A-AD3F-A3CD3F30A18C}"/>
+                <a16:creationId xmlns:a16="http://schemas.microsoft.com/office/drawing/2014/main" id="{0B8CC011-6C5E-40BA-BB34-E890A02010A5}"/>
               </a:ext>
             </a:extLst>
           </p:cNvPr>
@@ -40795,7 +41688,7 @@
           <p:cNvPr id="16" name="Legacy module connection">
             <a:extLst xmlns:a="http://schemas.openxmlformats.org/drawingml/2006/main">
               <a:ext uri="{FF2B5EF4-FFF2-40B4-BE49-F238E27FC236}">
-                <a16:creationId xmlns:a16="http://schemas.microsoft.com/office/drawing/2014/main" id="{EFC567FE-BACB-4CC4-89F2-BE1877513048}"/>
+                <a16:creationId xmlns:a16="http://schemas.microsoft.com/office/drawing/2014/main" id="{337D2A5B-4EB2-4556-8400-3B25096878C7}"/>
               </a:ext>
             </a:extLst>
           </p:cNvPr>
@@ -40951,7 +41844,7 @@
     </p:spTree>
     <p:extLst>
       <p:ext uri="{BB962C8B-B14F-4D97-AF65-F5344CB8AC3E}">
-        <p14:creationId xmlns:p14="http://schemas.microsoft.com/office/powerpoint/2010/main" val="1863675344"/>
+        <p14:creationId xmlns:p14="http://schemas.microsoft.com/office/powerpoint/2010/main" val="256093687"/>
       </p:ext>
     </p:extLst>
   </p:cSld>
@@ -40982,7 +41875,7 @@
           <p:cNvPr id="20" name="ACT 2 · 언제 필요한 정보인가">
             <a:extLst xmlns:a="http://schemas.openxmlformats.org/drawingml/2006/main">
               <a:ext uri="{FF2B5EF4-FFF2-40B4-BE49-F238E27FC236}">
-                <a16:creationId xmlns:a16="http://schemas.microsoft.com/office/drawing/2014/main" id="{CC9CB057-CEF0-40E2-9715-7584E5071BCE}"/>
+                <a16:creationId xmlns:a16="http://schemas.microsoft.com/office/drawing/2014/main" id="{5A5C7810-2B1F-4C5E-8FBA-C57CB3DBCEBE}"/>
               </a:ext>
             </a:extLst>
           </p:cNvPr>
@@ -41140,7 +42033,7 @@
           <p:cNvPr id="2" name="S38">
             <a:extLst xmlns:a="http://schemas.openxmlformats.org/drawingml/2006/main">
               <a:ext uri="{FF2B5EF4-FFF2-40B4-BE49-F238E27FC236}">
-                <a16:creationId xmlns:a16="http://schemas.microsoft.com/office/drawing/2014/main" id="{5EE8507A-D406-402E-B022-AA9323DBB29E}"/>
+                <a16:creationId xmlns:a16="http://schemas.microsoft.com/office/drawing/2014/main" id="{4F10BD55-B5F1-41BA-88C6-0A6AB42034A4}"/>
               </a:ext>
             </a:extLst>
           </p:cNvPr>
@@ -41298,7 +42191,7 @@
           <p:cNvPr id="3" name="정보의 범위와 제공 시점">
             <a:extLst xmlns:a="http://schemas.openxmlformats.org/drawingml/2006/main">
               <a:ext uri="{FF2B5EF4-FFF2-40B4-BE49-F238E27FC236}">
-                <a16:creationId xmlns:a16="http://schemas.microsoft.com/office/drawing/2014/main" id="{60C97437-0FF3-46B6-AC63-E0AC3D37171B}"/>
+                <a16:creationId xmlns:a16="http://schemas.microsoft.com/office/drawing/2014/main" id="{6C012D7A-8A4C-450B-B338-08ADA6815E30}"/>
               </a:ext>
             </a:extLst>
           </p:cNvPr>
@@ -41456,7 +42349,7 @@
           <p:cNvPr id="4" name="">
             <a:extLst xmlns:a="http://schemas.openxmlformats.org/drawingml/2006/main">
               <a:ext uri="{FF2B5EF4-FFF2-40B4-BE49-F238E27FC236}">
-                <a16:creationId xmlns:a16="http://schemas.microsoft.com/office/drawing/2014/main" id="{196900AA-1058-40F4-9727-B8E6E16CBFF2}"/>
+                <a16:creationId xmlns:a16="http://schemas.microsoft.com/office/drawing/2014/main" id="{C18FA0DF-0EBD-41BB-99BF-5B2656E578C5}"/>
               </a:ext>
             </a:extLst>
           </p:cNvPr>
@@ -41487,7 +42380,7 @@
           <p:cNvPr id="5" name="교육용 분류 모델 · OpenAI의 공식 기능 분류가 아님">
             <a:extLst xmlns:a="http://schemas.openxmlformats.org/drawingml/2006/main">
               <a:ext uri="{FF2B5EF4-FFF2-40B4-BE49-F238E27FC236}">
-                <a16:creationId xmlns:a16="http://schemas.microsoft.com/office/drawing/2014/main" id="{73AC593C-F26C-466A-A744-1E1CA6A37DF4}"/>
+                <a16:creationId xmlns:a16="http://schemas.microsoft.com/office/drawing/2014/main" id="{170DB0CB-0FAC-416B-AF0B-94191D1702F5}"/>
               </a:ext>
             </a:extLst>
           </p:cNvPr>
@@ -41645,7 +42538,7 @@
           <p:cNvPr id="6" name="성능 조사 절차는 설명을 위한 예시이며 STATE-02에 저장돼 있었다는 뜻이 아님">
             <a:extLst xmlns:a="http://schemas.openxmlformats.org/drawingml/2006/main">
               <a:ext uri="{FF2B5EF4-FFF2-40B4-BE49-F238E27FC236}">
-                <a16:creationId xmlns:a16="http://schemas.microsoft.com/office/drawing/2014/main" id="{CE41F7AB-CE23-4561-90AA-18452A64DD8A}"/>
+                <a16:creationId xmlns:a16="http://schemas.microsoft.com/office/drawing/2014/main" id="{6D7FB37E-3FC7-49DA-BA94-3F18C6BD6337}"/>
               </a:ext>
             </a:extLst>
           </p:cNvPr>
@@ -41803,7 +42696,7 @@
           <p:cNvPr id="7" name="">
             <a:extLst xmlns:a="http://schemas.openxmlformats.org/drawingml/2006/main">
               <a:ext uri="{FF2B5EF4-FFF2-40B4-BE49-F238E27FC236}">
-                <a16:creationId xmlns:a16="http://schemas.microsoft.com/office/drawing/2014/main" id="{E5031754-656E-4386-96D2-61C697A7D48F}"/>
+                <a16:creationId xmlns:a16="http://schemas.microsoft.com/office/drawing/2014/main" id="{1CDAEDD0-1458-4DB2-B2DB-A65816327817}"/>
               </a:ext>
             </a:extLst>
           </p:cNvPr>
@@ -41834,7 +42727,7 @@
           <p:cNvPr id="8" name="항상 알아야 할 안내">
             <a:extLst xmlns:a="http://schemas.openxmlformats.org/drawingml/2006/main">
               <a:ext uri="{FF2B5EF4-FFF2-40B4-BE49-F238E27FC236}">
-                <a16:creationId xmlns:a16="http://schemas.microsoft.com/office/drawing/2014/main" id="{D6EF15F9-38A7-43FD-B831-D44EF968BD8A}"/>
+                <a16:creationId xmlns:a16="http://schemas.microsoft.com/office/drawing/2014/main" id="{0B41DEC0-C389-4FEC-9F60-E2180A6ECAB3}"/>
               </a:ext>
             </a:extLst>
           </p:cNvPr>
@@ -41992,7 +42885,7 @@
           <p:cNvPr id="9" name="프로젝트 목적 · 기본 제약">
             <a:extLst xmlns:a="http://schemas.openxmlformats.org/drawingml/2006/main">
               <a:ext uri="{FF2B5EF4-FFF2-40B4-BE49-F238E27FC236}">
-                <a16:creationId xmlns:a16="http://schemas.microsoft.com/office/drawing/2014/main" id="{D90B6140-55BF-4B8E-B077-12DF744128FD}"/>
+                <a16:creationId xmlns:a16="http://schemas.microsoft.com/office/drawing/2014/main" id="{996C1EB8-2C7C-46A9-95A5-D6C96D54FA4A}"/>
               </a:ext>
             </a:extLst>
           </p:cNvPr>
@@ -42150,7 +43043,7 @@
           <p:cNvPr id="10" name="ALWAYS-ON">
             <a:extLst xmlns:a="http://schemas.openxmlformats.org/drawingml/2006/main">
               <a:ext uri="{FF2B5EF4-FFF2-40B4-BE49-F238E27FC236}">
-                <a16:creationId xmlns:a16="http://schemas.microsoft.com/office/drawing/2014/main" id="{1E508521-27F5-4CF6-82CE-BAD20D0D2E8A}"/>
+                <a16:creationId xmlns:a16="http://schemas.microsoft.com/office/drawing/2014/main" id="{6670F1F0-FB12-4F6B-A1BD-A13D8C0B8F30}"/>
               </a:ext>
             </a:extLst>
           </p:cNvPr>
@@ -42308,7 +43201,7 @@
           <p:cNvPr id="11" name="">
             <a:extLst xmlns:a="http://schemas.openxmlformats.org/drawingml/2006/main">
               <a:ext uri="{FF2B5EF4-FFF2-40B4-BE49-F238E27FC236}">
-                <a16:creationId xmlns:a16="http://schemas.microsoft.com/office/drawing/2014/main" id="{35506272-891B-4183-B830-DB14CF08672A}"/>
+                <a16:creationId xmlns:a16="http://schemas.microsoft.com/office/drawing/2014/main" id="{33414DB0-6E25-4EAA-9695-1D36A56A794F}"/>
               </a:ext>
             </a:extLst>
           </p:cNvPr>
@@ -42339,7 +43232,7 @@
           <p:cNvPr id="12" name="질문에 따라 찾아볼 상세">
             <a:extLst xmlns:a="http://schemas.openxmlformats.org/drawingml/2006/main">
               <a:ext uri="{FF2B5EF4-FFF2-40B4-BE49-F238E27FC236}">
-                <a16:creationId xmlns:a16="http://schemas.microsoft.com/office/drawing/2014/main" id="{D96EDA47-40E2-40F2-83BB-4022E67E86F1}"/>
+                <a16:creationId xmlns:a16="http://schemas.microsoft.com/office/drawing/2014/main" id="{C4B9C729-CFB7-4F39-82AF-E5DC93E76B29}"/>
               </a:ext>
             </a:extLst>
           </p:cNvPr>
@@ -42497,7 +43390,7 @@
           <p:cNvPr id="13" name="crop 계약 · 모듈 구조">
             <a:extLst xmlns:a="http://schemas.openxmlformats.org/drawingml/2006/main">
               <a:ext uri="{FF2B5EF4-FFF2-40B4-BE49-F238E27FC236}">
-                <a16:creationId xmlns:a16="http://schemas.microsoft.com/office/drawing/2014/main" id="{11B8E7BF-AAD0-484A-8DF3-90AA06795A21}"/>
+                <a16:creationId xmlns:a16="http://schemas.microsoft.com/office/drawing/2014/main" id="{012D9743-CDEA-46CE-B857-5A4570560298}"/>
               </a:ext>
             </a:extLst>
           </p:cNvPr>
@@ -42655,7 +43548,7 @@
           <p:cNvPr id="14" name="ON-DEMAND">
             <a:extLst xmlns:a="http://schemas.openxmlformats.org/drawingml/2006/main">
               <a:ext uri="{FF2B5EF4-FFF2-40B4-BE49-F238E27FC236}">
-                <a16:creationId xmlns:a16="http://schemas.microsoft.com/office/drawing/2014/main" id="{115778E6-0DD4-4946-9ADB-73C290BE6289}"/>
+                <a16:creationId xmlns:a16="http://schemas.microsoft.com/office/drawing/2014/main" id="{CA654C58-9A25-4DD0-B1EA-0BA1ACA4AD89}"/>
               </a:ext>
             </a:extLst>
           </p:cNvPr>
@@ -42813,7 +43706,7 @@
           <p:cNvPr id="15" name="">
             <a:extLst xmlns:a="http://schemas.openxmlformats.org/drawingml/2006/main">
               <a:ext uri="{FF2B5EF4-FFF2-40B4-BE49-F238E27FC236}">
-                <a16:creationId xmlns:a16="http://schemas.microsoft.com/office/drawing/2014/main" id="{B77FA98A-02D2-415C-B8C9-3F657AD83AB0}"/>
+                <a16:creationId xmlns:a16="http://schemas.microsoft.com/office/drawing/2014/main" id="{CACB1A65-2D41-4B2F-BD49-8160CDA30AC4}"/>
               </a:ext>
             </a:extLst>
           </p:cNvPr>
@@ -42844,7 +43737,7 @@
           <p:cNvPr id="16" name="이런 일을 수행하는 방법">
             <a:extLst xmlns:a="http://schemas.openxmlformats.org/drawingml/2006/main">
               <a:ext uri="{FF2B5EF4-FFF2-40B4-BE49-F238E27FC236}">
-                <a16:creationId xmlns:a16="http://schemas.microsoft.com/office/drawing/2014/main" id="{C6228961-C7C9-4C85-8AD0-C9C01455059C}"/>
+                <a16:creationId xmlns:a16="http://schemas.microsoft.com/office/drawing/2014/main" id="{23170754-665D-4EA6-BA8E-C3665862523D}"/>
               </a:ext>
             </a:extLst>
           </p:cNvPr>
@@ -43002,7 +43895,7 @@
           <p:cNvPr id="17" name="변경 전 측정 → 조사 → 검증">
             <a:extLst xmlns:a="http://schemas.openxmlformats.org/drawingml/2006/main">
               <a:ext uri="{FF2B5EF4-FFF2-40B4-BE49-F238E27FC236}">
-                <a16:creationId xmlns:a16="http://schemas.microsoft.com/office/drawing/2014/main" id="{3120F62D-8F30-47CA-9970-DAC14054A5DD}"/>
+                <a16:creationId xmlns:a16="http://schemas.microsoft.com/office/drawing/2014/main" id="{0F1A1C7C-AA9C-473D-BD7F-B8380528DDA0}"/>
               </a:ext>
             </a:extLst>
           </p:cNvPr>
@@ -43160,7 +44053,7 @@
           <p:cNvPr id="18" name="WORKFLOW">
             <a:extLst xmlns:a="http://schemas.openxmlformats.org/drawingml/2006/main">
               <a:ext uri="{FF2B5EF4-FFF2-40B4-BE49-F238E27FC236}">
-                <a16:creationId xmlns:a16="http://schemas.microsoft.com/office/drawing/2014/main" id="{4C9D711A-3B59-4B48-AACD-2E17908E1E2D}"/>
+                <a16:creationId xmlns:a16="http://schemas.microsoft.com/office/drawing/2014/main" id="{E66CE3E4-AB37-48DF-9AF6-5DB0553F3A48}"/>
               </a:ext>
             </a:extLst>
           </p:cNvPr>
@@ -43318,7 +44211,7 @@
           <p:cNvPr id="19" name="Legacy module connection">
             <a:extLst xmlns:a="http://schemas.openxmlformats.org/drawingml/2006/main">
               <a:ext uri="{FF2B5EF4-FFF2-40B4-BE49-F238E27FC236}">
-                <a16:creationId xmlns:a16="http://schemas.microsoft.com/office/drawing/2014/main" id="{836A9727-9052-4279-B6A3-2AE29363D032}"/>
+                <a16:creationId xmlns:a16="http://schemas.microsoft.com/office/drawing/2014/main" id="{D4B90196-A69E-419A-B5DE-9BEBF7DBB728}"/>
               </a:ext>
             </a:extLst>
           </p:cNvPr>
@@ -43474,7 +44367,7 @@
     </p:spTree>
     <p:extLst>
       <p:ext uri="{BB962C8B-B14F-4D97-AF65-F5344CB8AC3E}">
-        <p14:creationId xmlns:p14="http://schemas.microsoft.com/office/powerpoint/2010/main" val="1336713854"/>
+        <p14:creationId xmlns:p14="http://schemas.microsoft.com/office/powerpoint/2010/main" val="2054581297"/>
       </p:ext>
     </p:extLst>
   </p:cSld>
@@ -43505,7 +44398,7 @@
           <p:cNvPr id="38" name="ACT 2 · 정보의 양을 다시 묻는 연구">
             <a:extLst xmlns:a="http://schemas.openxmlformats.org/drawingml/2006/main">
               <a:ext uri="{FF2B5EF4-FFF2-40B4-BE49-F238E27FC236}">
-                <a16:creationId xmlns:a16="http://schemas.microsoft.com/office/drawing/2014/main" id="{7C128BB3-5EB7-455E-8DDF-F3FAA44D9740}"/>
+                <a16:creationId xmlns:a16="http://schemas.microsoft.com/office/drawing/2014/main" id="{BE011435-7859-4E9A-840F-0B792688990E}"/>
               </a:ext>
             </a:extLst>
           </p:cNvPr>
@@ -43663,7 +44556,7 @@
           <p:cNvPr id="2" name="S39">
             <a:extLst xmlns:a="http://schemas.openxmlformats.org/drawingml/2006/main">
               <a:ext uri="{FF2B5EF4-FFF2-40B4-BE49-F238E27FC236}">
-                <a16:creationId xmlns:a16="http://schemas.microsoft.com/office/drawing/2014/main" id="{E4600FBA-5C28-44FF-9655-F94680B851EB}"/>
+                <a16:creationId xmlns:a16="http://schemas.microsoft.com/office/drawing/2014/main" id="{AA1088F1-AF99-4083-8BF1-B9BDD2C39334}"/>
               </a:ext>
             </a:extLst>
           </p:cNvPr>
@@ -43821,7 +44714,7 @@
           <p:cNvPr id="3" name="Long Context 연구가 말해주는 범위">
             <a:extLst xmlns:a="http://schemas.openxmlformats.org/drawingml/2006/main">
               <a:ext uri="{FF2B5EF4-FFF2-40B4-BE49-F238E27FC236}">
-                <a16:creationId xmlns:a16="http://schemas.microsoft.com/office/drawing/2014/main" id="{BE2046A1-7552-439F-90B1-823C365EC61E}"/>
+                <a16:creationId xmlns:a16="http://schemas.microsoft.com/office/drawing/2014/main" id="{EEF7D841-33BC-4F71-914C-BB0497CAA250}"/>
               </a:ext>
             </a:extLst>
           </p:cNvPr>
@@ -43979,7 +44872,7 @@
           <p:cNvPr id="4" name="">
             <a:extLst xmlns:a="http://schemas.openxmlformats.org/drawingml/2006/main">
               <a:ext uri="{FF2B5EF4-FFF2-40B4-BE49-F238E27FC236}">
-                <a16:creationId xmlns:a16="http://schemas.microsoft.com/office/drawing/2014/main" id="{504416E8-75E8-4B18-A9BB-BE25EC1BF28D}"/>
+                <a16:creationId xmlns:a16="http://schemas.microsoft.com/office/drawing/2014/main" id="{5BA1CDE0-DC0F-438E-A1C6-01368A204FE9}"/>
               </a:ext>
             </a:extLst>
           </p:cNvPr>
@@ -44010,7 +44903,7 @@
           <p:cNvPr id="5" name="Liu et al., Lost in the Middle, TACL 2024 · RepoQA, 2024">
             <a:extLst xmlns:a="http://schemas.openxmlformats.org/drawingml/2006/main">
               <a:ext uri="{FF2B5EF4-FFF2-40B4-BE49-F238E27FC236}">
-                <a16:creationId xmlns:a16="http://schemas.microsoft.com/office/drawing/2014/main" id="{E0EAD1A3-7307-4BBD-8F55-344EC2AE1966}"/>
+                <a16:creationId xmlns:a16="http://schemas.microsoft.com/office/drawing/2014/main" id="{58D6E41A-512D-4360-BD73-A396FA61D08B}"/>
               </a:ext>
             </a:extLst>
           </p:cNvPr>
@@ -44168,7 +45061,7 @@
           <p:cNvPr id="6" name="특정 모델·과제의 결과 · 현재 Codex의 Repository coding 한계를 입증하지 않음">
             <a:extLst xmlns:a="http://schemas.openxmlformats.org/drawingml/2006/main">
               <a:ext uri="{FF2B5EF4-FFF2-40B4-BE49-F238E27FC236}">
-                <a16:creationId xmlns:a16="http://schemas.microsoft.com/office/drawing/2014/main" id="{38E2D5C3-663E-472A-90BD-399D7D37FCE4}"/>
+                <a16:creationId xmlns:a16="http://schemas.microsoft.com/office/drawing/2014/main" id="{5BC92802-D012-4854-AEAC-04B17D9D799C}"/>
               </a:ext>
             </a:extLst>
           </p:cNvPr>
@@ -44326,7 +45219,7 @@
           <p:cNvPr id="7" name="더 많은 Context가 항상 더 좋은 것은 아니다">
             <a:extLst xmlns:a="http://schemas.openxmlformats.org/drawingml/2006/main">
               <a:ext uri="{FF2B5EF4-FFF2-40B4-BE49-F238E27FC236}">
-                <a16:creationId xmlns:a16="http://schemas.microsoft.com/office/drawing/2014/main" id="{136D2CBD-F13C-42E2-B01F-504A53D39EBC}"/>
+                <a16:creationId xmlns:a16="http://schemas.microsoft.com/office/drawing/2014/main" id="{98EFC674-6174-43AE-84B5-6673298FBD25}"/>
               </a:ext>
             </a:extLst>
           </p:cNvPr>
@@ -44484,7 +45377,7 @@
           <p:cNvPr id="8" name="Lost in the Middle">
             <a:extLst xmlns:a="http://schemas.openxmlformats.org/drawingml/2006/main">
               <a:ext uri="{FF2B5EF4-FFF2-40B4-BE49-F238E27FC236}">
-                <a16:creationId xmlns:a16="http://schemas.microsoft.com/office/drawing/2014/main" id="{0CE07E84-494E-4903-82EC-2A0B72496CF8}"/>
+                <a16:creationId xmlns:a16="http://schemas.microsoft.com/office/drawing/2014/main" id="{90EB6B7D-2264-4CA6-9A33-A6653724351F}"/>
               </a:ext>
             </a:extLst>
           </p:cNvPr>
@@ -44642,7 +45535,7 @@
           <p:cNvPr id="9" name="RepoQA">
             <a:extLst xmlns:a="http://schemas.openxmlformats.org/drawingml/2006/main">
               <a:ext uri="{FF2B5EF4-FFF2-40B4-BE49-F238E27FC236}">
-                <a16:creationId xmlns:a16="http://schemas.microsoft.com/office/drawing/2014/main" id="{07F26D39-948A-4BE4-9C94-10BE87625C06}"/>
+                <a16:creationId xmlns:a16="http://schemas.microsoft.com/office/drawing/2014/main" id="{0907F42B-86D7-4EE8-A6C6-57AEA0CB2851}"/>
               </a:ext>
             </a:extLst>
           </p:cNvPr>
@@ -44800,7 +45693,7 @@
           <p:cNvPr id="10" name="여러 문서의 질문 답변 · key-value 검색">
             <a:extLst xmlns:a="http://schemas.openxmlformats.org/drawingml/2006/main">
               <a:ext uri="{FF2B5EF4-FFF2-40B4-BE49-F238E27FC236}">
-                <a16:creationId xmlns:a16="http://schemas.microsoft.com/office/drawing/2014/main" id="{7FFA4F4D-BD00-4E67-922A-43B6E6B68FE0}"/>
+                <a16:creationId xmlns:a16="http://schemas.microsoft.com/office/drawing/2014/main" id="{E9DB280A-D4B4-43E1-8FCE-D152A33EEC9F}"/>
               </a:ext>
             </a:extLst>
           </p:cNvPr>
@@ -44958,7 +45851,7 @@
           <p:cNvPr id="11" name="50개 Repository의 코드 검색 과제">
             <a:extLst xmlns:a="http://schemas.openxmlformats.org/drawingml/2006/main">
               <a:ext uri="{FF2B5EF4-FFF2-40B4-BE49-F238E27FC236}">
-                <a16:creationId xmlns:a16="http://schemas.microsoft.com/office/drawing/2014/main" id="{D5BEC1CD-220E-49B3-9A7D-BF72726647EF}"/>
+                <a16:creationId xmlns:a16="http://schemas.microsoft.com/office/drawing/2014/main" id="{3ADC0F69-E9CE-434E-BDDF-74116156D858}"/>
               </a:ext>
             </a:extLst>
           </p:cNvPr>
@@ -45116,7 +46009,7 @@
           <p:cNvPr id="12" name="관련 정보의 위치를 달리하는 구성">
             <a:extLst xmlns:a="http://schemas.openxmlformats.org/drawingml/2006/main">
               <a:ext uri="{FF2B5EF4-FFF2-40B4-BE49-F238E27FC236}">
-                <a16:creationId xmlns:a16="http://schemas.microsoft.com/office/drawing/2014/main" id="{2035B199-3492-416D-90EE-DE5351BCC144}"/>
+                <a16:creationId xmlns:a16="http://schemas.microsoft.com/office/drawing/2014/main" id="{51B4E478-0A98-449C-B6D1-28E9C6B89C87}"/>
               </a:ext>
             </a:extLst>
           </p:cNvPr>
@@ -45274,7 +46167,7 @@
           <p:cNvPr id="13" name="">
             <a:extLst xmlns:a="http://schemas.openxmlformats.org/drawingml/2006/main">
               <a:ext uri="{FF2B5EF4-FFF2-40B4-BE49-F238E27FC236}">
-                <a16:creationId xmlns:a16="http://schemas.microsoft.com/office/drawing/2014/main" id="{3241FD08-2262-4CF4-8AC5-AE347387AE37}"/>
+                <a16:creationId xmlns:a16="http://schemas.microsoft.com/office/drawing/2014/main" id="{3448A1A2-BA71-42AC-9B7E-0464CB0CFDA8}"/>
               </a:ext>
             </a:extLst>
           </p:cNvPr>
@@ -45307,7 +46200,7 @@
           <p:cNvPr id="14" name="">
             <a:extLst xmlns:a="http://schemas.openxmlformats.org/drawingml/2006/main">
               <a:ext uri="{FF2B5EF4-FFF2-40B4-BE49-F238E27FC236}">
-                <a16:creationId xmlns:a16="http://schemas.microsoft.com/office/drawing/2014/main" id="{0451B282-54E1-40DE-B2F1-686D59124B75}"/>
+                <a16:creationId xmlns:a16="http://schemas.microsoft.com/office/drawing/2014/main" id="{44D9B8C8-2A1A-46C0-93E1-EA093577F3B2}"/>
               </a:ext>
             </a:extLst>
           </p:cNvPr>
@@ -45340,7 +46233,7 @@
           <p:cNvPr id="15" name="">
             <a:extLst xmlns:a="http://schemas.openxmlformats.org/drawingml/2006/main">
               <a:ext uri="{FF2B5EF4-FFF2-40B4-BE49-F238E27FC236}">
-                <a16:creationId xmlns:a16="http://schemas.microsoft.com/office/drawing/2014/main" id="{70A67FC4-AB6E-4510-A3A0-6AA8E4D51493}"/>
+                <a16:creationId xmlns:a16="http://schemas.microsoft.com/office/drawing/2014/main" id="{EEBF54A6-A0EC-4F29-B493-0AD0AEA3CD80}"/>
               </a:ext>
             </a:extLst>
           </p:cNvPr>
@@ -45373,7 +46266,7 @@
           <p:cNvPr id="16" name="">
             <a:extLst xmlns:a="http://schemas.openxmlformats.org/drawingml/2006/main">
               <a:ext uri="{FF2B5EF4-FFF2-40B4-BE49-F238E27FC236}">
-                <a16:creationId xmlns:a16="http://schemas.microsoft.com/office/drawing/2014/main" id="{1D4FB2D3-BD2B-47DF-AAB6-8ABF56DCBF38}"/>
+                <a16:creationId xmlns:a16="http://schemas.microsoft.com/office/drawing/2014/main" id="{B349E468-9ED9-47CA-BDD9-B27B6E34C643}"/>
               </a:ext>
             </a:extLst>
           </p:cNvPr>
@@ -45406,7 +46299,7 @@
           <p:cNvPr id="17" name="">
             <a:extLst xmlns:a="http://schemas.openxmlformats.org/drawingml/2006/main">
               <a:ext uri="{FF2B5EF4-FFF2-40B4-BE49-F238E27FC236}">
-                <a16:creationId xmlns:a16="http://schemas.microsoft.com/office/drawing/2014/main" id="{10BCB6D7-632E-436B-83F0-A6E14C2CB91C}"/>
+                <a16:creationId xmlns:a16="http://schemas.microsoft.com/office/drawing/2014/main" id="{AC7A5B8B-9D47-4938-AF11-CEDAFC63C038}"/>
               </a:ext>
             </a:extLst>
           </p:cNvPr>
@@ -45439,7 +46332,7 @@
           <p:cNvPr id="18" name="">
             <a:extLst xmlns:a="http://schemas.openxmlformats.org/drawingml/2006/main">
               <a:ext uri="{FF2B5EF4-FFF2-40B4-BE49-F238E27FC236}">
-                <a16:creationId xmlns:a16="http://schemas.microsoft.com/office/drawing/2014/main" id="{5D514FDD-B78B-4960-903B-0A3A5F961C72}"/>
+                <a16:creationId xmlns:a16="http://schemas.microsoft.com/office/drawing/2014/main" id="{A9AF540F-8BEF-4073-A1E3-566D84C590B7}"/>
               </a:ext>
             </a:extLst>
           </p:cNvPr>
@@ -45472,7 +46365,7 @@
           <p:cNvPr id="19" name="">
             <a:extLst xmlns:a="http://schemas.openxmlformats.org/drawingml/2006/main">
               <a:ext uri="{FF2B5EF4-FFF2-40B4-BE49-F238E27FC236}">
-                <a16:creationId xmlns:a16="http://schemas.microsoft.com/office/drawing/2014/main" id="{B421C779-23E2-4974-889F-F6F21CA5A0C1}"/>
+                <a16:creationId xmlns:a16="http://schemas.microsoft.com/office/drawing/2014/main" id="{4659BBCE-8365-4BAF-8C0F-08E37BC67106}"/>
               </a:ext>
             </a:extLst>
           </p:cNvPr>
@@ -45505,7 +46398,7 @@
           <p:cNvPr id="20" name="">
             <a:extLst xmlns:a="http://schemas.openxmlformats.org/drawingml/2006/main">
               <a:ext uri="{FF2B5EF4-FFF2-40B4-BE49-F238E27FC236}">
-                <a16:creationId xmlns:a16="http://schemas.microsoft.com/office/drawing/2014/main" id="{2B0E2A48-84A5-451B-B61B-25040A184D98}"/>
+                <a16:creationId xmlns:a16="http://schemas.microsoft.com/office/drawing/2014/main" id="{E35A8FAD-E2CB-4B82-B4FC-C31903A6ED79}"/>
               </a:ext>
             </a:extLst>
           </p:cNvPr>
@@ -45538,7 +46431,7 @@
           <p:cNvPr id="21" name="">
             <a:extLst xmlns:a="http://schemas.openxmlformats.org/drawingml/2006/main">
               <a:ext uri="{FF2B5EF4-FFF2-40B4-BE49-F238E27FC236}">
-                <a16:creationId xmlns:a16="http://schemas.microsoft.com/office/drawing/2014/main" id="{8ECD6C1E-037C-4F1B-A898-9F8F35086F1C}"/>
+                <a16:creationId xmlns:a16="http://schemas.microsoft.com/office/drawing/2014/main" id="{E2717171-55C5-4731-9C1F-D1CD86C03E8E}"/>
               </a:ext>
             </a:extLst>
           </p:cNvPr>
@@ -45571,7 +46464,7 @@
           <p:cNvPr id="22" name="">
             <a:extLst xmlns:a="http://schemas.openxmlformats.org/drawingml/2006/main">
               <a:ext uri="{FF2B5EF4-FFF2-40B4-BE49-F238E27FC236}">
-                <a16:creationId xmlns:a16="http://schemas.microsoft.com/office/drawing/2014/main" id="{D0115620-A373-403E-B7FA-52E32B5E8609}"/>
+                <a16:creationId xmlns:a16="http://schemas.microsoft.com/office/drawing/2014/main" id="{82176FB4-BC34-4593-A869-98ECAEC58C8B}"/>
               </a:ext>
             </a:extLst>
           </p:cNvPr>
@@ -45604,7 +46497,7 @@
           <p:cNvPr id="23" name="">
             <a:extLst xmlns:a="http://schemas.openxmlformats.org/drawingml/2006/main">
               <a:ext uri="{FF2B5EF4-FFF2-40B4-BE49-F238E27FC236}">
-                <a16:creationId xmlns:a16="http://schemas.microsoft.com/office/drawing/2014/main" id="{5C3D7B77-9D2C-4322-BBE8-C232DB4CAB06}"/>
+                <a16:creationId xmlns:a16="http://schemas.microsoft.com/office/drawing/2014/main" id="{7D67EDE2-83DA-4284-A9AC-B848BDBA00F6}"/>
               </a:ext>
             </a:extLst>
           </p:cNvPr>
@@ -45637,7 +46530,7 @@
           <p:cNvPr id="24" name="">
             <a:extLst xmlns:a="http://schemas.openxmlformats.org/drawingml/2006/main">
               <a:ext uri="{FF2B5EF4-FFF2-40B4-BE49-F238E27FC236}">
-                <a16:creationId xmlns:a16="http://schemas.microsoft.com/office/drawing/2014/main" id="{CD3AC52F-38C6-4914-95F6-D4678FD4CD79}"/>
+                <a16:creationId xmlns:a16="http://schemas.microsoft.com/office/drawing/2014/main" id="{86FB271C-AEA7-4FF9-B465-0D485C106727}"/>
               </a:ext>
             </a:extLst>
           </p:cNvPr>
@@ -45670,7 +46563,7 @@
           <p:cNvPr id="25" name="">
             <a:extLst xmlns:a="http://schemas.openxmlformats.org/drawingml/2006/main">
               <a:ext uri="{FF2B5EF4-FFF2-40B4-BE49-F238E27FC236}">
-                <a16:creationId xmlns:a16="http://schemas.microsoft.com/office/drawing/2014/main" id="{8F1FACF3-1A9C-45DF-AB4F-6AD68609E94E}"/>
+                <a16:creationId xmlns:a16="http://schemas.microsoft.com/office/drawing/2014/main" id="{5EC5D1D3-02A8-4D53-BC90-85DAC3924E1F}"/>
               </a:ext>
             </a:extLst>
           </p:cNvPr>
@@ -45703,7 +46596,7 @@
           <p:cNvPr id="26" name="">
             <a:extLst xmlns:a="http://schemas.openxmlformats.org/drawingml/2006/main">
               <a:ext uri="{FF2B5EF4-FFF2-40B4-BE49-F238E27FC236}">
-                <a16:creationId xmlns:a16="http://schemas.microsoft.com/office/drawing/2014/main" id="{8B4EEFEB-6C5A-443D-AD3A-2EB031CEDBDE}"/>
+                <a16:creationId xmlns:a16="http://schemas.microsoft.com/office/drawing/2014/main" id="{5E4C2F6D-58AD-4E3E-86A3-744D42588612}"/>
               </a:ext>
             </a:extLst>
           </p:cNvPr>
@@ -45736,7 +46629,7 @@
           <p:cNvPr id="27" name="">
             <a:extLst xmlns:a="http://schemas.openxmlformats.org/drawingml/2006/main">
               <a:ext uri="{FF2B5EF4-FFF2-40B4-BE49-F238E27FC236}">
-                <a16:creationId xmlns:a16="http://schemas.microsoft.com/office/drawing/2014/main" id="{CD357FE5-5974-47BE-A33A-FE75A4E8B20C}"/>
+                <a16:creationId xmlns:a16="http://schemas.microsoft.com/office/drawing/2014/main" id="{69F469A6-7217-4CBA-A959-E14511687083}"/>
               </a:ext>
             </a:extLst>
           </p:cNvPr>
@@ -45769,7 +46662,7 @@
           <p:cNvPr id="28" name="질문">
             <a:extLst xmlns:a="http://schemas.openxmlformats.org/drawingml/2006/main">
               <a:ext uri="{FF2B5EF4-FFF2-40B4-BE49-F238E27FC236}">
-                <a16:creationId xmlns:a16="http://schemas.microsoft.com/office/drawing/2014/main" id="{303E3EC0-E84D-405A-9EE5-AD25D39B428C}"/>
+                <a16:creationId xmlns:a16="http://schemas.microsoft.com/office/drawing/2014/main" id="{ABBF50DB-FB72-458D-AF6D-6CA05CE1380E}"/>
               </a:ext>
             </a:extLst>
           </p:cNvPr>
@@ -45927,7 +46820,7 @@
           <p:cNvPr id="29" name="">
             <a:extLst xmlns:a="http://schemas.openxmlformats.org/drawingml/2006/main">
               <a:ext uri="{FF2B5EF4-FFF2-40B4-BE49-F238E27FC236}">
-                <a16:creationId xmlns:a16="http://schemas.microsoft.com/office/drawing/2014/main" id="{A96DBBA2-93BC-40FD-8C9A-D818F3B225E8}"/>
+                <a16:creationId xmlns:a16="http://schemas.microsoft.com/office/drawing/2014/main" id="{9689C334-283F-465B-84F2-211F319910E1}"/>
               </a:ext>
             </a:extLst>
           </p:cNvPr>
@@ -45957,7 +46850,7 @@
           <p:cNvPr id="30" name="">
             <a:extLst xmlns:a="http://schemas.openxmlformats.org/drawingml/2006/main">
               <a:ext uri="{FF2B5EF4-FFF2-40B4-BE49-F238E27FC236}">
-                <a16:creationId xmlns:a16="http://schemas.microsoft.com/office/drawing/2014/main" id="{0764A1F9-3846-4D5F-817B-46194AF1112E}"/>
+                <a16:creationId xmlns:a16="http://schemas.microsoft.com/office/drawing/2014/main" id="{9347BC2D-1581-462B-832A-967FE931537E}"/>
               </a:ext>
             </a:extLst>
           </p:cNvPr>
@@ -45990,7 +46883,7 @@
           <p:cNvPr id="31" name="Repository의 코드">
             <a:extLst xmlns:a="http://schemas.openxmlformats.org/drawingml/2006/main">
               <a:ext uri="{FF2B5EF4-FFF2-40B4-BE49-F238E27FC236}">
-                <a16:creationId xmlns:a16="http://schemas.microsoft.com/office/drawing/2014/main" id="{6DC06317-9402-4BE9-9383-FA2E4C1FF447}"/>
+                <a16:creationId xmlns:a16="http://schemas.microsoft.com/office/drawing/2014/main" id="{81974341-CBC0-4194-9868-A9FD4A3915F5}"/>
               </a:ext>
             </a:extLst>
           </p:cNvPr>
@@ -46148,7 +47041,7 @@
           <p:cNvPr id="32" name="관련 코드 찾기">
             <a:extLst xmlns:a="http://schemas.openxmlformats.org/drawingml/2006/main">
               <a:ext uri="{FF2B5EF4-FFF2-40B4-BE49-F238E27FC236}">
-                <a16:creationId xmlns:a16="http://schemas.microsoft.com/office/drawing/2014/main" id="{49CAFEAA-00AA-46E1-8274-A53886A6B7CA}"/>
+                <a16:creationId xmlns:a16="http://schemas.microsoft.com/office/drawing/2014/main" id="{7733AD7B-567A-4590-BD2B-21641FF69850}"/>
               </a:ext>
             </a:extLst>
           </p:cNvPr>
@@ -46306,7 +47199,7 @@
           <p:cNvPr id="33" name="관련 정보의 위치가&#10;일부 조건에서 중요할 수 있다">
             <a:extLst xmlns:a="http://schemas.openxmlformats.org/drawingml/2006/main">
               <a:ext uri="{FF2B5EF4-FFF2-40B4-BE49-F238E27FC236}">
-                <a16:creationId xmlns:a16="http://schemas.microsoft.com/office/drawing/2014/main" id="{803FB023-1DA1-4331-8F62-441A6A39C700}"/>
+                <a16:creationId xmlns:a16="http://schemas.microsoft.com/office/drawing/2014/main" id="{E404DF84-3533-4B4A-B7A2-6B4D57DFF7FE}"/>
               </a:ext>
             </a:extLst>
           </p:cNvPr>
@@ -46487,7 +47380,7 @@
           <p:cNvPr id="34" name="관련 코드 정보를&#10;선택하고 찾는 능력을 평가">
             <a:extLst xmlns:a="http://schemas.openxmlformats.org/drawingml/2006/main">
               <a:ext uri="{FF2B5EF4-FFF2-40B4-BE49-F238E27FC236}">
-                <a16:creationId xmlns:a16="http://schemas.microsoft.com/office/drawing/2014/main" id="{572C394E-5C1F-4274-88A9-642C498D4E41}"/>
+                <a16:creationId xmlns:a16="http://schemas.microsoft.com/office/drawing/2014/main" id="{97EB99B2-D0E6-4C19-B517-60284FC2A437}"/>
               </a:ext>
             </a:extLst>
           </p:cNvPr>
@@ -46668,7 +47561,7 @@
           <p:cNvPr id="35" name="aclanthology.org/2024.tacl-1.9/">
             <a:extLst xmlns:a="http://schemas.openxmlformats.org/drawingml/2006/main">
               <a:ext uri="{FF2B5EF4-FFF2-40B4-BE49-F238E27FC236}">
-                <a16:creationId xmlns:a16="http://schemas.microsoft.com/office/drawing/2014/main" id="{720122DF-67BC-44EB-89A0-B3453F23BDDF}"/>
+                <a16:creationId xmlns:a16="http://schemas.microsoft.com/office/drawing/2014/main" id="{3D6CEBD1-72DE-4014-A31B-F30FBE7A2096}"/>
               </a:ext>
             </a:extLst>
           </p:cNvPr>
@@ -46826,7 +47719,7 @@
           <p:cNvPr id="36" name="arxiv.org/abs/2406.06025">
             <a:extLst xmlns:a="http://schemas.openxmlformats.org/drawingml/2006/main">
               <a:ext uri="{FF2B5EF4-FFF2-40B4-BE49-F238E27FC236}">
-                <a16:creationId xmlns:a16="http://schemas.microsoft.com/office/drawing/2014/main" id="{85D4E282-6F05-47DC-904B-F0CDD86F05BE}"/>
+                <a16:creationId xmlns:a16="http://schemas.microsoft.com/office/drawing/2014/main" id="{92C3BC30-F0C2-420D-905C-EDF67C654E7A}"/>
               </a:ext>
             </a:extLst>
           </p:cNvPr>
@@ -46984,7 +47877,7 @@
           <p:cNvPr id="37" name="Legacy module connection">
             <a:extLst xmlns:a="http://schemas.openxmlformats.org/drawingml/2006/main">
               <a:ext uri="{FF2B5EF4-FFF2-40B4-BE49-F238E27FC236}">
-                <a16:creationId xmlns:a16="http://schemas.microsoft.com/office/drawing/2014/main" id="{632852C7-C7B4-4858-A2F0-9A6CB2E4CD7A}"/>
+                <a16:creationId xmlns:a16="http://schemas.microsoft.com/office/drawing/2014/main" id="{50E1D43C-3BAF-4A6A-B918-084D2EFCE691}"/>
               </a:ext>
             </a:extLst>
           </p:cNvPr>
@@ -47140,7 +48033,7 @@
     </p:spTree>
     <p:extLst>
       <p:ext uri="{BB962C8B-B14F-4D97-AF65-F5344CB8AC3E}">
-        <p14:creationId xmlns:p14="http://schemas.microsoft.com/office/powerpoint/2010/main" val="377690732"/>
+        <p14:creationId xmlns:p14="http://schemas.microsoft.com/office/powerpoint/2010/main" val="520381140"/>
       </p:ext>
     </p:extLst>
   </p:cSld>
@@ -47171,7 +48064,7 @@
           <p:cNvPr id="21" name="ACT 2 · 필요한 상세 정보의 탐색 경로">
             <a:extLst xmlns:a="http://schemas.openxmlformats.org/drawingml/2006/main">
               <a:ext uri="{FF2B5EF4-FFF2-40B4-BE49-F238E27FC236}">
-                <a16:creationId xmlns:a16="http://schemas.microsoft.com/office/drawing/2014/main" id="{74BABB10-91D4-4009-AA17-210B4936D26F}"/>
+                <a16:creationId xmlns:a16="http://schemas.microsoft.com/office/drawing/2014/main" id="{97CB9AB1-109B-4C0B-97A3-86F86F17CA8B}"/>
               </a:ext>
             </a:extLst>
           </p:cNvPr>
@@ -47329,7 +48222,7 @@
           <p:cNvPr id="2" name="S40">
             <a:extLst xmlns:a="http://schemas.openxmlformats.org/drawingml/2006/main">
               <a:ext uri="{FF2B5EF4-FFF2-40B4-BE49-F238E27FC236}">
-                <a16:creationId xmlns:a16="http://schemas.microsoft.com/office/drawing/2014/main" id="{4D8106C2-3C20-418F-ACD8-BD5AFEA7D416}"/>
+                <a16:creationId xmlns:a16="http://schemas.microsoft.com/office/drawing/2014/main" id="{A2030149-D407-49D2-BF26-45A23E921ADF}"/>
               </a:ext>
             </a:extLst>
           </p:cNvPr>
@@ -47487,7 +48380,7 @@
           <p:cNvPr id="3" name="필요한 상세 정보로 가는 길">
             <a:extLst xmlns:a="http://schemas.openxmlformats.org/drawingml/2006/main">
               <a:ext uri="{FF2B5EF4-FFF2-40B4-BE49-F238E27FC236}">
-                <a16:creationId xmlns:a16="http://schemas.microsoft.com/office/drawing/2014/main" id="{2A511D63-C4FF-45DA-8943-69ED6512BD11}"/>
+                <a16:creationId xmlns:a16="http://schemas.microsoft.com/office/drawing/2014/main" id="{7300DDF3-F303-4D6C-9A98-FCC6EAEE42FE}"/>
               </a:ext>
             </a:extLst>
           </p:cNvPr>
@@ -47645,7 +48538,7 @@
           <p:cNvPr id="4" name="">
             <a:extLst xmlns:a="http://schemas.openxmlformats.org/drawingml/2006/main">
               <a:ext uri="{FF2B5EF4-FFF2-40B4-BE49-F238E27FC236}">
-                <a16:creationId xmlns:a16="http://schemas.microsoft.com/office/drawing/2014/main" id="{1C000521-FBEB-4947-9C86-B751A5F993F3}"/>
+                <a16:creationId xmlns:a16="http://schemas.microsoft.com/office/drawing/2014/main" id="{06866518-2524-4D8B-BD5B-42291C67259B}"/>
               </a:ext>
             </a:extLst>
           </p:cNvPr>
@@ -47676,7 +48569,7 @@
           <p:cNvPr id="5" name="교육용 Routing 모델 · 실제 문서 접근 결과는 다음 구간에서 확인">
             <a:extLst xmlns:a="http://schemas.openxmlformats.org/drawingml/2006/main">
               <a:ext uri="{FF2B5EF4-FFF2-40B4-BE49-F238E27FC236}">
-                <a16:creationId xmlns:a16="http://schemas.microsoft.com/office/drawing/2014/main" id="{8B1BB493-FF6E-4632-9494-4B5553557E2F}"/>
+                <a16:creationId xmlns:a16="http://schemas.microsoft.com/office/drawing/2014/main" id="{0B970C39-B99E-4BDE-AE5E-FC802F025241}"/>
               </a:ext>
             </a:extLst>
           </p:cNvPr>
@@ -47834,7 +48727,7 @@
           <p:cNvPr id="6" name="검색 성능 향상이나 토큰 절약을 입증한 그림이 아님">
             <a:extLst xmlns:a="http://schemas.openxmlformats.org/drawingml/2006/main">
               <a:ext uri="{FF2B5EF4-FFF2-40B4-BE49-F238E27FC236}">
-                <a16:creationId xmlns:a16="http://schemas.microsoft.com/office/drawing/2014/main" id="{0797909E-AFA6-47AA-A506-4CCB68A755BE}"/>
+                <a16:creationId xmlns:a16="http://schemas.microsoft.com/office/drawing/2014/main" id="{9D5C9031-6111-48BD-B559-5350789AF7AC}"/>
               </a:ext>
             </a:extLst>
           </p:cNvPr>
@@ -47992,7 +48885,7 @@
           <p:cNvPr id="7" name="어떤 질문에서 어떤 상세 정보가 필요할까?">
             <a:extLst xmlns:a="http://schemas.openxmlformats.org/drawingml/2006/main">
               <a:ext uri="{FF2B5EF4-FFF2-40B4-BE49-F238E27FC236}">
-                <a16:creationId xmlns:a16="http://schemas.microsoft.com/office/drawing/2014/main" id="{54D8AF2E-EAE5-4023-B34E-ECB1B4F76704}"/>
+                <a16:creationId xmlns:a16="http://schemas.microsoft.com/office/drawing/2014/main" id="{44A61BC5-CD74-4FB5-8458-837DDAA9049D}"/>
               </a:ext>
             </a:extLst>
           </p:cNvPr>
@@ -48150,7 +49043,7 @@
           <p:cNvPr id="8" name="">
             <a:extLst xmlns:a="http://schemas.openxmlformats.org/drawingml/2006/main">
               <a:ext uri="{FF2B5EF4-FFF2-40B4-BE49-F238E27FC236}">
-                <a16:creationId xmlns:a16="http://schemas.microsoft.com/office/drawing/2014/main" id="{1FA60849-3FDC-44A4-B902-F31FF139F301}"/>
+                <a16:creationId xmlns:a16="http://schemas.microsoft.com/office/drawing/2014/main" id="{36FABDD2-A256-4B82-ACC5-B68E91864953}"/>
               </a:ext>
             </a:extLst>
           </p:cNvPr>
@@ -48181,7 +49074,7 @@
           <p:cNvPr id="9" name="Task">
             <a:extLst xmlns:a="http://schemas.openxmlformats.org/drawingml/2006/main">
               <a:ext uri="{FF2B5EF4-FFF2-40B4-BE49-F238E27FC236}">
-                <a16:creationId xmlns:a16="http://schemas.microsoft.com/office/drawing/2014/main" id="{0F7C6C0A-B02A-417F-8342-A4239E4F4CF9}"/>
+                <a16:creationId xmlns:a16="http://schemas.microsoft.com/office/drawing/2014/main" id="{1E12E64E-D92D-4BF8-9009-9DE8182DAE8C}"/>
               </a:ext>
             </a:extLst>
           </p:cNvPr>
@@ -48339,7 +49232,7 @@
           <p:cNvPr id="10" name="지금 해결할 질문">
             <a:extLst xmlns:a="http://schemas.openxmlformats.org/drawingml/2006/main">
               <a:ext uri="{FF2B5EF4-FFF2-40B4-BE49-F238E27FC236}">
-                <a16:creationId xmlns:a16="http://schemas.microsoft.com/office/drawing/2014/main" id="{D2B623E9-CCC2-4087-A278-AEBAA96D355E}"/>
+                <a16:creationId xmlns:a16="http://schemas.microsoft.com/office/drawing/2014/main" id="{87980899-1570-460D-8B20-F0EBC1F33DE8}"/>
               </a:ext>
             </a:extLst>
           </p:cNvPr>
@@ -48497,7 +49390,7 @@
           <p:cNvPr id="11" name="">
             <a:extLst xmlns:a="http://schemas.openxmlformats.org/drawingml/2006/main">
               <a:ext uri="{FF2B5EF4-FFF2-40B4-BE49-F238E27FC236}">
-                <a16:creationId xmlns:a16="http://schemas.microsoft.com/office/drawing/2014/main" id="{CE958E34-D219-405C-A419-811B93279ABA}"/>
+                <a16:creationId xmlns:a16="http://schemas.microsoft.com/office/drawing/2014/main" id="{B1E13A2A-1C74-4A0A-9893-AA410AF3EB04}"/>
               </a:ext>
             </a:extLst>
           </p:cNvPr>
@@ -48527,7 +49420,7 @@
           <p:cNvPr id="12" name="">
             <a:extLst xmlns:a="http://schemas.openxmlformats.org/drawingml/2006/main">
               <a:ext uri="{FF2B5EF4-FFF2-40B4-BE49-F238E27FC236}">
-                <a16:creationId xmlns:a16="http://schemas.microsoft.com/office/drawing/2014/main" id="{47A284D2-A06A-4DE7-A4EA-9C068AAB80E8}"/>
+                <a16:creationId xmlns:a16="http://schemas.microsoft.com/office/drawing/2014/main" id="{BBE2CDAA-9AE1-49D8-9392-B7793F83D230}"/>
               </a:ext>
             </a:extLst>
           </p:cNvPr>
@@ -48558,7 +49451,7 @@
           <p:cNvPr id="13" name="Core Context">
             <a:extLst xmlns:a="http://schemas.openxmlformats.org/drawingml/2006/main">
               <a:ext uri="{FF2B5EF4-FFF2-40B4-BE49-F238E27FC236}">
-                <a16:creationId xmlns:a16="http://schemas.microsoft.com/office/drawing/2014/main" id="{A78A26AF-266C-4DC4-B08F-3B98AB9BFC98}"/>
+                <a16:creationId xmlns:a16="http://schemas.microsoft.com/office/drawing/2014/main" id="{9D185EE9-9BA6-4208-8EF0-899C407F6F77}"/>
               </a:ext>
             </a:extLst>
           </p:cNvPr>
@@ -48716,7 +49609,7 @@
           <p:cNvPr id="14" name="프로젝트 안내와&#10;찾아갈 위치">
             <a:extLst xmlns:a="http://schemas.openxmlformats.org/drawingml/2006/main">
               <a:ext uri="{FF2B5EF4-FFF2-40B4-BE49-F238E27FC236}">
-                <a16:creationId xmlns:a16="http://schemas.microsoft.com/office/drawing/2014/main" id="{7B7B7D7C-6C6A-46E3-A0ED-39F8A129C544}"/>
+                <a16:creationId xmlns:a16="http://schemas.microsoft.com/office/drawing/2014/main" id="{4D82A83B-DE00-4867-B6FD-005D2BA04780}"/>
               </a:ext>
             </a:extLst>
           </p:cNvPr>
@@ -48897,7 +49790,7 @@
           <p:cNvPr id="15" name="">
             <a:extLst xmlns:a="http://schemas.openxmlformats.org/drawingml/2006/main">
               <a:ext uri="{FF2B5EF4-FFF2-40B4-BE49-F238E27FC236}">
-                <a16:creationId xmlns:a16="http://schemas.microsoft.com/office/drawing/2014/main" id="{B3C63980-5F1B-4084-A496-743F6DDBDE8F}"/>
+                <a16:creationId xmlns:a16="http://schemas.microsoft.com/office/drawing/2014/main" id="{E9422A39-BF3A-4A4C-A72A-77A37799F139}"/>
               </a:ext>
             </a:extLst>
           </p:cNvPr>
@@ -48927,7 +49820,7 @@
           <p:cNvPr id="16" name="">
             <a:extLst xmlns:a="http://schemas.openxmlformats.org/drawingml/2006/main">
               <a:ext uri="{FF2B5EF4-FFF2-40B4-BE49-F238E27FC236}">
-                <a16:creationId xmlns:a16="http://schemas.microsoft.com/office/drawing/2014/main" id="{2CCFE5D2-2B0F-414B-9A6A-415B0C62DCE5}"/>
+                <a16:creationId xmlns:a16="http://schemas.microsoft.com/office/drawing/2014/main" id="{88917FB9-7CC4-49F3-9AD2-E25D48FCD84B}"/>
               </a:ext>
             </a:extLst>
           </p:cNvPr>
@@ -48958,7 +49851,7 @@
           <p:cNvPr id="17" name="관련 상세 정보">
             <a:extLst xmlns:a="http://schemas.openxmlformats.org/drawingml/2006/main">
               <a:ext uri="{FF2B5EF4-FFF2-40B4-BE49-F238E27FC236}">
-                <a16:creationId xmlns:a16="http://schemas.microsoft.com/office/drawing/2014/main" id="{21573FAC-F474-45A1-8890-C6767356771E}"/>
+                <a16:creationId xmlns:a16="http://schemas.microsoft.com/office/drawing/2014/main" id="{07A7E5FA-E4A5-49A9-8705-0C6785DFDA30}"/>
               </a:ext>
             </a:extLst>
           </p:cNvPr>
@@ -49116,7 +50009,7 @@
           <p:cNvPr id="18" name="질문에 필요한&#10;계약 · 구조 · 테스트">
             <a:extLst xmlns:a="http://schemas.openxmlformats.org/drawingml/2006/main">
               <a:ext uri="{FF2B5EF4-FFF2-40B4-BE49-F238E27FC236}">
-                <a16:creationId xmlns:a16="http://schemas.microsoft.com/office/drawing/2014/main" id="{A95AD691-9BC8-4233-B426-0421D9688EF1}"/>
+                <a16:creationId xmlns:a16="http://schemas.microsoft.com/office/drawing/2014/main" id="{DAB3E15A-7C19-4B9F-937E-36770A60185F}"/>
               </a:ext>
             </a:extLst>
           </p:cNvPr>
@@ -49297,7 +50190,7 @@
           <p:cNvPr id="19" name="C++ 예: 공통 제약을 확인한 뒤, 해당 알고리즘의 계약으로">
             <a:extLst xmlns:a="http://schemas.openxmlformats.org/drawingml/2006/main">
               <a:ext uri="{FF2B5EF4-FFF2-40B4-BE49-F238E27FC236}">
-                <a16:creationId xmlns:a16="http://schemas.microsoft.com/office/drawing/2014/main" id="{48641AA7-A114-4D8B-94C7-C7606AE8B01A}"/>
+                <a16:creationId xmlns:a16="http://schemas.microsoft.com/office/drawing/2014/main" id="{121FD79C-1CAC-4FB4-89F1-E7C9DED32A91}"/>
               </a:ext>
             </a:extLst>
           </p:cNvPr>
@@ -49455,7 +50348,7 @@
           <p:cNvPr id="20" name="Legacy module connection">
             <a:extLst xmlns:a="http://schemas.openxmlformats.org/drawingml/2006/main">
               <a:ext uri="{FF2B5EF4-FFF2-40B4-BE49-F238E27FC236}">
-                <a16:creationId xmlns:a16="http://schemas.microsoft.com/office/drawing/2014/main" id="{FAA8BCE5-F661-4F9B-A9E6-F8C811069C71}"/>
+                <a16:creationId xmlns:a16="http://schemas.microsoft.com/office/drawing/2014/main" id="{0B08213C-F2C3-4988-9127-3843F1A58045}"/>
               </a:ext>
             </a:extLst>
           </p:cNvPr>
@@ -49611,7 +50504,7 @@
     </p:spTree>
     <p:extLst>
       <p:ext uri="{BB962C8B-B14F-4D97-AF65-F5344CB8AC3E}">
-        <p14:creationId xmlns:p14="http://schemas.microsoft.com/office/powerpoint/2010/main" val="881488602"/>
+        <p14:creationId xmlns:p14="http://schemas.microsoft.com/office/powerpoint/2010/main" val="1443316582"/>
       </p:ext>
     </p:extLst>
   </p:cSld>
